--- a/reports/SpatialScope_Agent_Presentation.pptx
+++ b/reports/SpatialScope_Agent_Presentation.pptx
@@ -2,28 +2,28 @@
 <file path=ppt/presentation.xml><?xml version="1.0" encoding="utf-8"?>
 <p:presentation xmlns:p="http://schemas.openxmlformats.org/presentationml/2006/main">
   <p:sldMasterIdLst>
-    <p:sldMasterId xmlns:r="http://schemas.openxmlformats.org/officeDocument/2006/relationships" id="2147483648" r:id="Re75103b1a6004870"/>
+    <p:sldMasterId xmlns:r="http://schemas.openxmlformats.org/officeDocument/2006/relationships" id="2147483648" r:id="R8d5f0b3269ae45a9"/>
   </p:sldMasterIdLst>
   <p:notesMasterIdLst>
-    <p:notesMasterId xmlns:r="http://schemas.openxmlformats.org/officeDocument/2006/relationships" r:id="R4159dd3c98014327"/>
+    <p:notesMasterId xmlns:r="http://schemas.openxmlformats.org/officeDocument/2006/relationships" r:id="R92c2ea070e8a44ec"/>
   </p:notesMasterIdLst>
   <p:sldIdLst>
-    <p:sldId xmlns:r="http://schemas.openxmlformats.org/officeDocument/2006/relationships" id="256" r:id="Rab5b7e02982346c9"/>
-    <p:sldId xmlns:r="http://schemas.openxmlformats.org/officeDocument/2006/relationships" id="257" r:id="R8b280aaba7534320"/>
-    <p:sldId xmlns:r="http://schemas.openxmlformats.org/officeDocument/2006/relationships" id="258" r:id="R704ccec62b4d4f86"/>
-    <p:sldId xmlns:r="http://schemas.openxmlformats.org/officeDocument/2006/relationships" id="259" r:id="Rf9b53d6489d547ee"/>
-    <p:sldId xmlns:r="http://schemas.openxmlformats.org/officeDocument/2006/relationships" id="260" r:id="R2e1a8bec129a49da"/>
-    <p:sldId xmlns:r="http://schemas.openxmlformats.org/officeDocument/2006/relationships" id="261" r:id="R0915b249c3534d6d"/>
-    <p:sldId xmlns:r="http://schemas.openxmlformats.org/officeDocument/2006/relationships" id="262" r:id="Rbcb75c586d37472f"/>
-    <p:sldId xmlns:r="http://schemas.openxmlformats.org/officeDocument/2006/relationships" id="263" r:id="R8db0a0d6e1794c7e"/>
-    <p:sldId xmlns:r="http://schemas.openxmlformats.org/officeDocument/2006/relationships" id="264" r:id="R008dc966e18a44bc"/>
-    <p:sldId xmlns:r="http://schemas.openxmlformats.org/officeDocument/2006/relationships" id="265" r:id="R451752c9c0604b70"/>
-    <p:sldId xmlns:r="http://schemas.openxmlformats.org/officeDocument/2006/relationships" id="266" r:id="R4fbf6a1c39ff41f4"/>
-    <p:sldId xmlns:r="http://schemas.openxmlformats.org/officeDocument/2006/relationships" id="267" r:id="R65891afe3b624c4d"/>
-    <p:sldId xmlns:r="http://schemas.openxmlformats.org/officeDocument/2006/relationships" id="268" r:id="R252e7fe3df134de2"/>
-    <p:sldId xmlns:r="http://schemas.openxmlformats.org/officeDocument/2006/relationships" id="269" r:id="R6ec147d37f184ef3"/>
-    <p:sldId xmlns:r="http://schemas.openxmlformats.org/officeDocument/2006/relationships" id="270" r:id="Rd4adc73082d840f5"/>
-    <p:sldId xmlns:r="http://schemas.openxmlformats.org/officeDocument/2006/relationships" id="271" r:id="R10ab3d04e9814788"/>
+    <p:sldId xmlns:r="http://schemas.openxmlformats.org/officeDocument/2006/relationships" id="256" r:id="Rd3f296bac9074188"/>
+    <p:sldId xmlns:r="http://schemas.openxmlformats.org/officeDocument/2006/relationships" id="257" r:id="R9320aaef8d1540ca"/>
+    <p:sldId xmlns:r="http://schemas.openxmlformats.org/officeDocument/2006/relationships" id="258" r:id="R8e10a1e1fc8340bc"/>
+    <p:sldId xmlns:r="http://schemas.openxmlformats.org/officeDocument/2006/relationships" id="259" r:id="Rd08cd9c2bcf6409a"/>
+    <p:sldId xmlns:r="http://schemas.openxmlformats.org/officeDocument/2006/relationships" id="260" r:id="R3964e170d55c463d"/>
+    <p:sldId xmlns:r="http://schemas.openxmlformats.org/officeDocument/2006/relationships" id="261" r:id="R61c32dd8538d43c9"/>
+    <p:sldId xmlns:r="http://schemas.openxmlformats.org/officeDocument/2006/relationships" id="262" r:id="Re4371ec4ee774393"/>
+    <p:sldId xmlns:r="http://schemas.openxmlformats.org/officeDocument/2006/relationships" id="263" r:id="R05e3a48ecb084327"/>
+    <p:sldId xmlns:r="http://schemas.openxmlformats.org/officeDocument/2006/relationships" id="264" r:id="R8b64fb99335145e4"/>
+    <p:sldId xmlns:r="http://schemas.openxmlformats.org/officeDocument/2006/relationships" id="265" r:id="R43232c53d30448ff"/>
+    <p:sldId xmlns:r="http://schemas.openxmlformats.org/officeDocument/2006/relationships" id="266" r:id="Rcac66d81454f4021"/>
+    <p:sldId xmlns:r="http://schemas.openxmlformats.org/officeDocument/2006/relationships" id="267" r:id="R7cc85744212248e8"/>
+    <p:sldId xmlns:r="http://schemas.openxmlformats.org/officeDocument/2006/relationships" id="268" r:id="Re8b87d3fa9a04a3a"/>
+    <p:sldId xmlns:r="http://schemas.openxmlformats.org/officeDocument/2006/relationships" id="269" r:id="R3cb723e3f47248c8"/>
+    <p:sldId xmlns:r="http://schemas.openxmlformats.org/officeDocument/2006/relationships" id="270" r:id="R1e3245f1e5ad4176"/>
+    <p:sldId xmlns:r="http://schemas.openxmlformats.org/officeDocument/2006/relationships" id="271" r:id="R41f76896b9764c66"/>
   </p:sldIdLst>
   <p:sldSz cx="12192000" cy="6858000"/>
   <p:notesSz cx="6858000" cy="9144000"/>
@@ -832,7 +832,7 @@
           <a:lstStyle xmlns:a="http://schemas.openxmlformats.org/drawingml/2006/main"/>
           <a:p xmlns:a="http://schemas.openxmlformats.org/drawingml/2006/main">
             <a:r>
-              <a:t>demo 时不要只说按钮怎么点。每一步都回到标准流程：检查数据、生成计划、执行工具、看 Spatial 和 UMAP、用 evidence IDs 解释。</a:t>
+              <a:t>Demo 展示按照标准流程展开：检查数据、生成计划、执行工具、查看 Spatial 与 UMAP，并用 evidence IDs 支撑解释。</a:t>
             </a:r>
           </a:p>
         </p:txBody>
@@ -1670,7 +1670,7 @@
   </p:cSld>
   <p:clrMap bg1="lt1" tx1="dk1" bg2="lt2" tx2="dk2" accent1="accent1" accent2="accent2" accent3="accent3" accent4="accent4" accent5="accent5" accent6="accent6" hlink="hlink" folHlink="folHlink"/>
   <p:sldLayoutIdLst>
-    <p:sldLayoutId xmlns:r="http://schemas.openxmlformats.org/officeDocument/2006/relationships" id="2147483649" r:id="R2876fc09d17543d1"/>
+    <p:sldLayoutId xmlns:r="http://schemas.openxmlformats.org/officeDocument/2006/relationships" id="2147483649" r:id="Rf2d8adcd92d84cc2"/>
   </p:sldLayoutIdLst>
   <p:txStyles>
     <p:titleStyle>
@@ -2221,7 +2221,7 @@
           <p:cNvPr id="1" name="">
             <a:extLst xmlns:a="http://schemas.openxmlformats.org/drawingml/2006/main">
               <a:ext uri="{FF2B5EF4-FFF2-40B4-BE49-F238E27FC236}">
-                <a16:creationId xmlns:a16="http://schemas.microsoft.com/office/drawing/2014/main" id="{F497378D-7079-4EC1-BA75-F7D81F37CB6B}"/>
+                <a16:creationId xmlns:a16="http://schemas.microsoft.com/office/drawing/2014/main" id="{4056573E-C47F-4AB4-9C53-8D852A23C4A5}"/>
               </a:ext>
             </a:extLst>
           </p:cNvPr>
@@ -2254,7 +2254,7 @@
           <p:cNvPr id="2" name="">
             <a:extLst xmlns:a="http://schemas.openxmlformats.org/drawingml/2006/main">
               <a:ext uri="{FF2B5EF4-FFF2-40B4-BE49-F238E27FC236}">
-                <a16:creationId xmlns:a16="http://schemas.microsoft.com/office/drawing/2014/main" id="{FE3D6F95-046A-4364-94B3-88911104424F}"/>
+                <a16:creationId xmlns:a16="http://schemas.microsoft.com/office/drawing/2014/main" id="{4D19539A-9A34-4738-A1AA-7E279F039B64}"/>
               </a:ext>
             </a:extLst>
           </p:cNvPr>
@@ -2291,7 +2291,7 @@
           <p:nvPr/>
         </p:nvPicPr>
         <p:blipFill>
-          <a:blip xmlns:r="http://schemas.openxmlformats.org/officeDocument/2006/relationships" xmlns:a="http://schemas.openxmlformats.org/drawingml/2006/main" r:embed="Re10c65c48b674cc8"/>
+          <a:blip xmlns:r="http://schemas.openxmlformats.org/officeDocument/2006/relationships" xmlns:a="http://schemas.openxmlformats.org/drawingml/2006/main" r:embed="R58122b71e5ff486d"/>
           <a:stretch xmlns:a="http://schemas.openxmlformats.org/drawingml/2006/main"/>
         </p:blipFill>
         <p:spPr>
@@ -2311,7 +2311,7 @@
           <p:cNvPr id="4" name="">
             <a:extLst xmlns:a="http://schemas.openxmlformats.org/drawingml/2006/main">
               <a:ext uri="{FF2B5EF4-FFF2-40B4-BE49-F238E27FC236}">
-                <a16:creationId xmlns:a16="http://schemas.microsoft.com/office/drawing/2014/main" id="{6EDE2F09-F5CB-4219-B051-1CEC07032C8A}"/>
+                <a16:creationId xmlns:a16="http://schemas.microsoft.com/office/drawing/2014/main" id="{ACF0ECFB-B9C9-4972-B548-7A645683FABF}"/>
               </a:ext>
             </a:extLst>
           </p:cNvPr>
@@ -2373,7 +2373,7 @@
           <p:cNvPr id="5" name="">
             <a:extLst xmlns:a="http://schemas.openxmlformats.org/drawingml/2006/main">
               <a:ext uri="{FF2B5EF4-FFF2-40B4-BE49-F238E27FC236}">
-                <a16:creationId xmlns:a16="http://schemas.microsoft.com/office/drawing/2014/main" id="{7D386B7A-3C6B-4B66-90F6-AD815FF98657}"/>
+                <a16:creationId xmlns:a16="http://schemas.microsoft.com/office/drawing/2014/main" id="{77E07AD2-55D2-48B5-A33C-F89005C880EA}"/>
               </a:ext>
             </a:extLst>
           </p:cNvPr>
@@ -2435,7 +2435,7 @@
           <p:cNvPr id="6" name="">
             <a:extLst xmlns:a="http://schemas.openxmlformats.org/drawingml/2006/main">
               <a:ext uri="{FF2B5EF4-FFF2-40B4-BE49-F238E27FC236}">
-                <a16:creationId xmlns:a16="http://schemas.microsoft.com/office/drawing/2014/main" id="{3222000A-6B5C-43F6-A777-C51728C144DE}"/>
+                <a16:creationId xmlns:a16="http://schemas.microsoft.com/office/drawing/2014/main" id="{682ECDC2-85E1-48C2-B0A8-475EF250DB36}"/>
               </a:ext>
             </a:extLst>
           </p:cNvPr>
@@ -2447,7 +2447,7 @@
         <p:spPr>
           <a:xfrm xmlns:a="http://schemas.openxmlformats.org/drawingml/2006/main">
             <a:off x="742950" y="1885950"/>
-            <a:ext cx="6477000" cy="247650"/>
+            <a:ext cx="7239000" cy="247650"/>
           </a:xfrm>
           <a:prstGeom xmlns:a="http://schemas.openxmlformats.org/drawingml/2006/main" prst="rect">
             <a:avLst/>
@@ -2487,7 +2487,7 @@
                 <a:ea typeface="PingFang SC"/>
                 <a:cs typeface="PingFang SC"/>
               </a:rPr>
-              <a:t>顾兴均  ·  11323112  ·  计算生物学期末大作业</a:t>
+              <a:t>顾兴均  ·  11323112  ·  Spatial Transcriptomics Agent Project</a:t>
             </a:r>
           </a:p>
         </p:txBody>
@@ -2501,7 +2501,7 @@
           <p:nvPr/>
         </p:nvPicPr>
         <p:blipFill>
-          <a:blip xmlns:r="http://schemas.openxmlformats.org/officeDocument/2006/relationships" xmlns:a="http://schemas.openxmlformats.org/drawingml/2006/main" r:embed="R9c64368c978a4336"/>
+          <a:blip xmlns:r="http://schemas.openxmlformats.org/officeDocument/2006/relationships" xmlns:a="http://schemas.openxmlformats.org/drawingml/2006/main" r:embed="R293c79c31b214ff9"/>
           <a:srcRect xmlns:a="http://schemas.openxmlformats.org/drawingml/2006/main" l="0" t="10358" r="0" b="10358"/>
           <a:stretch xmlns:a="http://schemas.openxmlformats.org/drawingml/2006/main">
             <a:fillRect l="0" t="0" r="0" b="0"/>
@@ -2524,7 +2524,7 @@
           <p:cNvPr id="8" name="">
             <a:extLst xmlns:a="http://schemas.openxmlformats.org/drawingml/2006/main">
               <a:ext uri="{FF2B5EF4-FFF2-40B4-BE49-F238E27FC236}">
-                <a16:creationId xmlns:a16="http://schemas.microsoft.com/office/drawing/2014/main" id="{655A2CF9-FD4E-4DB2-AA00-FCE1049038E9}"/>
+                <a16:creationId xmlns:a16="http://schemas.microsoft.com/office/drawing/2014/main" id="{9088EA5A-332E-4BB8-838E-06548BC3A40A}"/>
               </a:ext>
             </a:extLst>
           </p:cNvPr>
@@ -2565,7 +2565,7 @@
           <p:cNvPr id="9" name="">
             <a:extLst xmlns:a="http://schemas.openxmlformats.org/drawingml/2006/main">
               <a:ext uri="{FF2B5EF4-FFF2-40B4-BE49-F238E27FC236}">
-                <a16:creationId xmlns:a16="http://schemas.microsoft.com/office/drawing/2014/main" id="{59918FB3-EF9B-4E6C-B622-246D1C246EF6}"/>
+                <a16:creationId xmlns:a16="http://schemas.microsoft.com/office/drawing/2014/main" id="{ADC20E8F-09CF-41C5-B34A-641651BDEAF0}"/>
               </a:ext>
             </a:extLst>
           </p:cNvPr>
@@ -2617,7 +2617,7 @@
                 <a:ea typeface="PingFang SC"/>
                 <a:cs typeface="PingFang SC"/>
               </a:rPr>
-              <a:t>汇报逻辑</a:t>
+              <a:t>主线</a:t>
             </a:r>
           </a:p>
         </p:txBody>
@@ -2627,7 +2627,7 @@
           <p:cNvPr id="10" name="">
             <a:extLst xmlns:a="http://schemas.openxmlformats.org/drawingml/2006/main">
               <a:ext uri="{FF2B5EF4-FFF2-40B4-BE49-F238E27FC236}">
-                <a16:creationId xmlns:a16="http://schemas.microsoft.com/office/drawing/2014/main" id="{68230EB0-1655-484B-BCB9-E882D306A7E7}"/>
+                <a16:creationId xmlns:a16="http://schemas.microsoft.com/office/drawing/2014/main" id="{0527AC6F-1042-49FF-B516-A83ADAB1EA3C}"/>
               </a:ext>
             </a:extLst>
           </p:cNvPr>
@@ -2679,7 +2679,7 @@
                 <a:ea typeface="PingFang SC"/>
                 <a:cs typeface="PingFang SC"/>
               </a:rPr>
-              <a:t>先讲空间转录组数据与标准流程，再说明如何做成可审阅、可追踪、证据约束的科研 Agent。</a:t>
+              <a:t>从空间转录组数据与标准流程出发，展示如何构建可审阅、可追踪、证据约束的科研 Agent。</a:t>
             </a:r>
           </a:p>
         </p:txBody>
@@ -2689,7 +2689,7 @@
           <p:cNvPr id="11" name="">
             <a:extLst xmlns:a="http://schemas.openxmlformats.org/drawingml/2006/main">
               <a:ext uri="{FF2B5EF4-FFF2-40B4-BE49-F238E27FC236}">
-                <a16:creationId xmlns:a16="http://schemas.microsoft.com/office/drawing/2014/main" id="{3D8929E9-1D98-457E-BFC3-C75DA509B6E8}"/>
+                <a16:creationId xmlns:a16="http://schemas.microsoft.com/office/drawing/2014/main" id="{5482916B-C869-487D-9488-590ABD7BA8E2}"/>
               </a:ext>
             </a:extLst>
           </p:cNvPr>
@@ -2753,7 +2753,7 @@
           <p:cNvPr id="12" name="">
             <a:extLst xmlns:a="http://schemas.openxmlformats.org/drawingml/2006/main">
               <a:ext uri="{FF2B5EF4-FFF2-40B4-BE49-F238E27FC236}">
-                <a16:creationId xmlns:a16="http://schemas.microsoft.com/office/drawing/2014/main" id="{7BE6AD81-F3D5-4735-A265-F5540E18802D}"/>
+                <a16:creationId xmlns:a16="http://schemas.microsoft.com/office/drawing/2014/main" id="{1AE0588B-EE64-4254-AA19-9C708A4DD2C6}"/>
               </a:ext>
             </a:extLst>
           </p:cNvPr>
@@ -2817,7 +2817,7 @@
           <p:cNvPr id="13" name="">
             <a:extLst xmlns:a="http://schemas.openxmlformats.org/drawingml/2006/main">
               <a:ext uri="{FF2B5EF4-FFF2-40B4-BE49-F238E27FC236}">
-                <a16:creationId xmlns:a16="http://schemas.microsoft.com/office/drawing/2014/main" id="{417B350F-E054-4077-A478-DB29B96A6C8A}"/>
+                <a16:creationId xmlns:a16="http://schemas.microsoft.com/office/drawing/2014/main" id="{234F0D15-B0FE-4CE2-A61E-3F61A63418F4}"/>
               </a:ext>
             </a:extLst>
           </p:cNvPr>
@@ -2881,7 +2881,7 @@
           <p:cNvPr id="14" name="">
             <a:extLst xmlns:a="http://schemas.openxmlformats.org/drawingml/2006/main">
               <a:ext uri="{FF2B5EF4-FFF2-40B4-BE49-F238E27FC236}">
-                <a16:creationId xmlns:a16="http://schemas.microsoft.com/office/drawing/2014/main" id="{4FD2E441-D61C-484E-9B12-8F9479670C29}"/>
+                <a16:creationId xmlns:a16="http://schemas.microsoft.com/office/drawing/2014/main" id="{4ED67B37-ACE7-42D9-A4B6-2662444EC121}"/>
               </a:ext>
             </a:extLst>
           </p:cNvPr>
@@ -2997,7 +2997,7 @@
           <p:cNvPr id="15" name="">
             <a:extLst xmlns:a="http://schemas.openxmlformats.org/drawingml/2006/main">
               <a:ext uri="{FF2B5EF4-FFF2-40B4-BE49-F238E27FC236}">
-                <a16:creationId xmlns:a16="http://schemas.microsoft.com/office/drawing/2014/main" id="{BEFCFC6E-C517-484A-A667-B3230EA83F3B}"/>
+                <a16:creationId xmlns:a16="http://schemas.microsoft.com/office/drawing/2014/main" id="{D142AD7B-24C5-4998-A36E-5EC22C5CFE2C}"/>
               </a:ext>
             </a:extLst>
           </p:cNvPr>
@@ -3028,7 +3028,7 @@
           <p:cNvPr id="16" name="">
             <a:extLst xmlns:a="http://schemas.openxmlformats.org/drawingml/2006/main">
               <a:ext uri="{FF2B5EF4-FFF2-40B4-BE49-F238E27FC236}">
-                <a16:creationId xmlns:a16="http://schemas.microsoft.com/office/drawing/2014/main" id="{F7D4A876-A084-49E6-BE82-E87A72984D9C}"/>
+                <a16:creationId xmlns:a16="http://schemas.microsoft.com/office/drawing/2014/main" id="{412CB46E-3A50-469D-8371-B5D200201571}"/>
               </a:ext>
             </a:extLst>
           </p:cNvPr>
@@ -3068,7 +3068,7 @@
           <p:cNvPr id="17" name="">
             <a:extLst xmlns:a="http://schemas.openxmlformats.org/drawingml/2006/main">
               <a:ext uri="{FF2B5EF4-FFF2-40B4-BE49-F238E27FC236}">
-                <a16:creationId xmlns:a16="http://schemas.microsoft.com/office/drawing/2014/main" id="{410C08BD-7C30-411B-937D-9589049911ED}"/>
+                <a16:creationId xmlns:a16="http://schemas.microsoft.com/office/drawing/2014/main" id="{9D5E62DE-A0BD-4776-B9FA-5A474F086465}"/>
               </a:ext>
             </a:extLst>
           </p:cNvPr>
@@ -3128,7 +3128,7 @@
     </p:spTree>
     <p:extLst>
       <p:ext uri="{BB962C8B-B14F-4D97-AF65-F5344CB8AC3E}">
-        <p14:creationId xmlns:p14="http://schemas.microsoft.com/office/powerpoint/2010/main" val="754141039"/>
+        <p14:creationId xmlns:p14="http://schemas.microsoft.com/office/powerpoint/2010/main" val="1922037726"/>
       </p:ext>
     </p:extLst>
   </p:cSld>
@@ -3159,7 +3159,7 @@
           <p:cNvPr id="1" name="">
             <a:extLst xmlns:a="http://schemas.openxmlformats.org/drawingml/2006/main">
               <a:ext uri="{FF2B5EF4-FFF2-40B4-BE49-F238E27FC236}">
-                <a16:creationId xmlns:a16="http://schemas.microsoft.com/office/drawing/2014/main" id="{F0B2258A-F50B-4DC9-A787-A37EDF866647}"/>
+                <a16:creationId xmlns:a16="http://schemas.microsoft.com/office/drawing/2014/main" id="{DD2C1F5D-7751-4BF5-8DC8-03F125415941}"/>
               </a:ext>
             </a:extLst>
           </p:cNvPr>
@@ -3221,7 +3221,7 @@
           <p:cNvPr id="2" name="">
             <a:extLst xmlns:a="http://schemas.openxmlformats.org/drawingml/2006/main">
               <a:ext uri="{FF2B5EF4-FFF2-40B4-BE49-F238E27FC236}">
-                <a16:creationId xmlns:a16="http://schemas.microsoft.com/office/drawing/2014/main" id="{F484003E-F266-4EF6-9716-5659023527AB}"/>
+                <a16:creationId xmlns:a16="http://schemas.microsoft.com/office/drawing/2014/main" id="{FDA17722-B98A-41D0-BD2D-2898338C2B05}"/>
               </a:ext>
             </a:extLst>
           </p:cNvPr>
@@ -3283,7 +3283,7 @@
           <p:cNvPr id="3" name="">
             <a:extLst xmlns:a="http://schemas.openxmlformats.org/drawingml/2006/main">
               <a:ext uri="{FF2B5EF4-FFF2-40B4-BE49-F238E27FC236}">
-                <a16:creationId xmlns:a16="http://schemas.microsoft.com/office/drawing/2014/main" id="{90D181D0-A4D3-41C7-9F3D-D94D4AAB521B}"/>
+                <a16:creationId xmlns:a16="http://schemas.microsoft.com/office/drawing/2014/main" id="{0535FAAB-A286-4CE4-BA4C-046E256B78D6}"/>
               </a:ext>
             </a:extLst>
           </p:cNvPr>
@@ -3324,7 +3324,7 @@
           <p:cNvPr id="4" name="">
             <a:extLst xmlns:a="http://schemas.openxmlformats.org/drawingml/2006/main">
               <a:ext uri="{FF2B5EF4-FFF2-40B4-BE49-F238E27FC236}">
-                <a16:creationId xmlns:a16="http://schemas.microsoft.com/office/drawing/2014/main" id="{535E3A8C-A5A0-4A38-8EA9-0DA9666BCC75}"/>
+                <a16:creationId xmlns:a16="http://schemas.microsoft.com/office/drawing/2014/main" id="{0781DBAE-0F85-496F-8A8E-7850737DBF67}"/>
               </a:ext>
             </a:extLst>
           </p:cNvPr>
@@ -3386,7 +3386,7 @@
           <p:cNvPr id="5" name="">
             <a:extLst xmlns:a="http://schemas.openxmlformats.org/drawingml/2006/main">
               <a:ext uri="{FF2B5EF4-FFF2-40B4-BE49-F238E27FC236}">
-                <a16:creationId xmlns:a16="http://schemas.microsoft.com/office/drawing/2014/main" id="{4E950DCB-B79A-4EFD-BCCF-549A2BD225C3}"/>
+                <a16:creationId xmlns:a16="http://schemas.microsoft.com/office/drawing/2014/main" id="{C939CF9A-C9BF-4C9D-B348-4E227D2940AB}"/>
               </a:ext>
             </a:extLst>
           </p:cNvPr>
@@ -3448,7 +3448,7 @@
           <p:cNvPr id="6" name="">
             <a:extLst xmlns:a="http://schemas.openxmlformats.org/drawingml/2006/main">
               <a:ext uri="{FF2B5EF4-FFF2-40B4-BE49-F238E27FC236}">
-                <a16:creationId xmlns:a16="http://schemas.microsoft.com/office/drawing/2014/main" id="{554E3ABE-417A-4ABD-A315-7711979457CE}"/>
+                <a16:creationId xmlns:a16="http://schemas.microsoft.com/office/drawing/2014/main" id="{F29DFC66-49FF-4953-9CD1-940C40AAB421}"/>
               </a:ext>
             </a:extLst>
           </p:cNvPr>
@@ -3489,7 +3489,7 @@
           <p:cNvPr id="7" name="">
             <a:extLst xmlns:a="http://schemas.openxmlformats.org/drawingml/2006/main">
               <a:ext uri="{FF2B5EF4-FFF2-40B4-BE49-F238E27FC236}">
-                <a16:creationId xmlns:a16="http://schemas.microsoft.com/office/drawing/2014/main" id="{B3E42544-9D5F-4F4A-82DE-E27955AD17A9}"/>
+                <a16:creationId xmlns:a16="http://schemas.microsoft.com/office/drawing/2014/main" id="{6046D1FB-CF19-4ECF-B76F-A2C10BEFE757}"/>
               </a:ext>
             </a:extLst>
           </p:cNvPr>
@@ -3551,7 +3551,7 @@
           <p:cNvPr id="8" name="">
             <a:extLst xmlns:a="http://schemas.openxmlformats.org/drawingml/2006/main">
               <a:ext uri="{FF2B5EF4-FFF2-40B4-BE49-F238E27FC236}">
-                <a16:creationId xmlns:a16="http://schemas.microsoft.com/office/drawing/2014/main" id="{236F7C76-C217-4F73-AC5C-A5766A317E27}"/>
+                <a16:creationId xmlns:a16="http://schemas.microsoft.com/office/drawing/2014/main" id="{DB396606-FAEE-43C0-808A-5DB865347E74}"/>
               </a:ext>
             </a:extLst>
           </p:cNvPr>
@@ -3613,7 +3613,7 @@
           <p:cNvPr id="9" name="">
             <a:extLst xmlns:a="http://schemas.openxmlformats.org/drawingml/2006/main">
               <a:ext uri="{FF2B5EF4-FFF2-40B4-BE49-F238E27FC236}">
-                <a16:creationId xmlns:a16="http://schemas.microsoft.com/office/drawing/2014/main" id="{2205FE6A-24C6-4E77-AE46-E505E420D372}"/>
+                <a16:creationId xmlns:a16="http://schemas.microsoft.com/office/drawing/2014/main" id="{AF49797F-8767-4EB4-9E33-FCB80F219109}"/>
               </a:ext>
             </a:extLst>
           </p:cNvPr>
@@ -3646,7 +3646,7 @@
           <p:cNvPr id="10" name="">
             <a:extLst xmlns:a="http://schemas.openxmlformats.org/drawingml/2006/main">
               <a:ext uri="{FF2B5EF4-FFF2-40B4-BE49-F238E27FC236}">
-                <a16:creationId xmlns:a16="http://schemas.microsoft.com/office/drawing/2014/main" id="{9644C053-C70F-4E0C-B715-52304A6A9D37}"/>
+                <a16:creationId xmlns:a16="http://schemas.microsoft.com/office/drawing/2014/main" id="{D1290951-FE8E-40D4-B015-AB7161D52739}"/>
               </a:ext>
             </a:extLst>
           </p:cNvPr>
@@ -3679,7 +3679,7 @@
           <p:cNvPr id="11" name="">
             <a:extLst xmlns:a="http://schemas.openxmlformats.org/drawingml/2006/main">
               <a:ext uri="{FF2B5EF4-FFF2-40B4-BE49-F238E27FC236}">
-                <a16:creationId xmlns:a16="http://schemas.microsoft.com/office/drawing/2014/main" id="{5B088101-144D-451C-AA75-D55487C274BD}"/>
+                <a16:creationId xmlns:a16="http://schemas.microsoft.com/office/drawing/2014/main" id="{7B92FED6-D918-4BA2-905B-87729DAC4E86}"/>
               </a:ext>
             </a:extLst>
           </p:cNvPr>
@@ -3741,7 +3741,7 @@
           <p:cNvPr id="12" name="">
             <a:extLst xmlns:a="http://schemas.openxmlformats.org/drawingml/2006/main">
               <a:ext uri="{FF2B5EF4-FFF2-40B4-BE49-F238E27FC236}">
-                <a16:creationId xmlns:a16="http://schemas.microsoft.com/office/drawing/2014/main" id="{31057C87-25D4-42FB-AC5B-0C26AD9995C9}"/>
+                <a16:creationId xmlns:a16="http://schemas.microsoft.com/office/drawing/2014/main" id="{03F609F6-D568-40DA-A5E9-7410BDDEDE63}"/>
               </a:ext>
             </a:extLst>
           </p:cNvPr>
@@ -3782,7 +3782,7 @@
           <p:cNvPr id="13" name="">
             <a:extLst xmlns:a="http://schemas.openxmlformats.org/drawingml/2006/main">
               <a:ext uri="{FF2B5EF4-FFF2-40B4-BE49-F238E27FC236}">
-                <a16:creationId xmlns:a16="http://schemas.microsoft.com/office/drawing/2014/main" id="{D8AED34A-4EA6-40A9-AC14-05F635850AE4}"/>
+                <a16:creationId xmlns:a16="http://schemas.microsoft.com/office/drawing/2014/main" id="{9CAFEDE6-822E-40DE-8CE1-B321414CDADD}"/>
               </a:ext>
             </a:extLst>
           </p:cNvPr>
@@ -3813,7 +3813,7 @@
           <p:cNvPr id="14" name="">
             <a:extLst xmlns:a="http://schemas.openxmlformats.org/drawingml/2006/main">
               <a:ext uri="{FF2B5EF4-FFF2-40B4-BE49-F238E27FC236}">
-                <a16:creationId xmlns:a16="http://schemas.microsoft.com/office/drawing/2014/main" id="{5B58733D-3DDF-48C5-87D5-8908FD7D7B54}"/>
+                <a16:creationId xmlns:a16="http://schemas.microsoft.com/office/drawing/2014/main" id="{015973A1-70C5-498A-B302-7539BD077E4B}"/>
               </a:ext>
             </a:extLst>
           </p:cNvPr>
@@ -3846,7 +3846,7 @@
           <p:cNvPr id="15" name="">
             <a:extLst xmlns:a="http://schemas.openxmlformats.org/drawingml/2006/main">
               <a:ext uri="{FF2B5EF4-FFF2-40B4-BE49-F238E27FC236}">
-                <a16:creationId xmlns:a16="http://schemas.microsoft.com/office/drawing/2014/main" id="{7F86FC5B-2343-42D7-87D0-40F58CDD99A0}"/>
+                <a16:creationId xmlns:a16="http://schemas.microsoft.com/office/drawing/2014/main" id="{107161DE-974D-4186-969F-4181BE939564}"/>
               </a:ext>
             </a:extLst>
           </p:cNvPr>
@@ -3879,7 +3879,7 @@
           <p:cNvPr id="16" name="">
             <a:extLst xmlns:a="http://schemas.openxmlformats.org/drawingml/2006/main">
               <a:ext uri="{FF2B5EF4-FFF2-40B4-BE49-F238E27FC236}">
-                <a16:creationId xmlns:a16="http://schemas.microsoft.com/office/drawing/2014/main" id="{88669304-FDE0-4395-91A5-B8EA676221B2}"/>
+                <a16:creationId xmlns:a16="http://schemas.microsoft.com/office/drawing/2014/main" id="{62848450-53E4-426D-BB17-7E3A20A977D6}"/>
               </a:ext>
             </a:extLst>
           </p:cNvPr>
@@ -3912,7 +3912,7 @@
           <p:cNvPr id="17" name="">
             <a:extLst xmlns:a="http://schemas.openxmlformats.org/drawingml/2006/main">
               <a:ext uri="{FF2B5EF4-FFF2-40B4-BE49-F238E27FC236}">
-                <a16:creationId xmlns:a16="http://schemas.microsoft.com/office/drawing/2014/main" id="{0848FC80-8EB6-4F9D-BCAD-89C07550782F}"/>
+                <a16:creationId xmlns:a16="http://schemas.microsoft.com/office/drawing/2014/main" id="{9114BEF7-C12B-462C-BB91-E35746690F7E}"/>
               </a:ext>
             </a:extLst>
           </p:cNvPr>
@@ -3945,7 +3945,7 @@
           <p:cNvPr id="18" name="">
             <a:extLst xmlns:a="http://schemas.openxmlformats.org/drawingml/2006/main">
               <a:ext uri="{FF2B5EF4-FFF2-40B4-BE49-F238E27FC236}">
-                <a16:creationId xmlns:a16="http://schemas.microsoft.com/office/drawing/2014/main" id="{A812B0C9-AD48-4842-B605-8D29515BEDDF}"/>
+                <a16:creationId xmlns:a16="http://schemas.microsoft.com/office/drawing/2014/main" id="{675D441D-969C-415F-A3DD-71B54E57C429}"/>
               </a:ext>
             </a:extLst>
           </p:cNvPr>
@@ -3978,7 +3978,7 @@
           <p:cNvPr id="19" name="">
             <a:extLst xmlns:a="http://schemas.openxmlformats.org/drawingml/2006/main">
               <a:ext uri="{FF2B5EF4-FFF2-40B4-BE49-F238E27FC236}">
-                <a16:creationId xmlns:a16="http://schemas.microsoft.com/office/drawing/2014/main" id="{7E718929-0440-4127-A498-202C49E1C867}"/>
+                <a16:creationId xmlns:a16="http://schemas.microsoft.com/office/drawing/2014/main" id="{6AC702C6-D826-4D28-9C72-C201882C515E}"/>
               </a:ext>
             </a:extLst>
           </p:cNvPr>
@@ -4019,7 +4019,7 @@
           <p:cNvPr id="20" name="">
             <a:extLst xmlns:a="http://schemas.openxmlformats.org/drawingml/2006/main">
               <a:ext uri="{FF2B5EF4-FFF2-40B4-BE49-F238E27FC236}">
-                <a16:creationId xmlns:a16="http://schemas.microsoft.com/office/drawing/2014/main" id="{E3B5F0F7-629F-4CEB-B518-E5284E44C822}"/>
+                <a16:creationId xmlns:a16="http://schemas.microsoft.com/office/drawing/2014/main" id="{5CEB46AF-8A75-4329-892E-92A1AD39ACB6}"/>
               </a:ext>
             </a:extLst>
           </p:cNvPr>
@@ -4081,7 +4081,7 @@
           <p:cNvPr id="21" name="">
             <a:extLst xmlns:a="http://schemas.openxmlformats.org/drawingml/2006/main">
               <a:ext uri="{FF2B5EF4-FFF2-40B4-BE49-F238E27FC236}">
-                <a16:creationId xmlns:a16="http://schemas.microsoft.com/office/drawing/2014/main" id="{E1DC98CD-9586-4FB6-AF78-25F06369EA75}"/>
+                <a16:creationId xmlns:a16="http://schemas.microsoft.com/office/drawing/2014/main" id="{DE400F92-353C-4E4B-8948-FC11743F2D05}"/>
               </a:ext>
             </a:extLst>
           </p:cNvPr>
@@ -4122,7 +4122,7 @@
           <p:cNvPr id="22" name="">
             <a:extLst xmlns:a="http://schemas.openxmlformats.org/drawingml/2006/main">
               <a:ext uri="{FF2B5EF4-FFF2-40B4-BE49-F238E27FC236}">
-                <a16:creationId xmlns:a16="http://schemas.microsoft.com/office/drawing/2014/main" id="{EB7DC3B4-09C7-43B9-BF21-AAE70C73A0CF}"/>
+                <a16:creationId xmlns:a16="http://schemas.microsoft.com/office/drawing/2014/main" id="{02138942-BFB3-43D9-8240-56E21F8691C1}"/>
               </a:ext>
             </a:extLst>
           </p:cNvPr>
@@ -4184,7 +4184,7 @@
           <p:cNvPr id="23" name="">
             <a:extLst xmlns:a="http://schemas.openxmlformats.org/drawingml/2006/main">
               <a:ext uri="{FF2B5EF4-FFF2-40B4-BE49-F238E27FC236}">
-                <a16:creationId xmlns:a16="http://schemas.microsoft.com/office/drawing/2014/main" id="{38AE4C63-295F-4481-9D62-DC4636B2907B}"/>
+                <a16:creationId xmlns:a16="http://schemas.microsoft.com/office/drawing/2014/main" id="{4E6410D0-F6A5-4986-B3B9-DDEF26CEB160}"/>
               </a:ext>
             </a:extLst>
           </p:cNvPr>
@@ -4225,7 +4225,7 @@
           <p:cNvPr id="24" name="">
             <a:extLst xmlns:a="http://schemas.openxmlformats.org/drawingml/2006/main">
               <a:ext uri="{FF2B5EF4-FFF2-40B4-BE49-F238E27FC236}">
-                <a16:creationId xmlns:a16="http://schemas.microsoft.com/office/drawing/2014/main" id="{34CD9E3E-22F4-49D1-9363-B89BEEE05083}"/>
+                <a16:creationId xmlns:a16="http://schemas.microsoft.com/office/drawing/2014/main" id="{9F04F6C8-7603-4A15-BD21-E824F4B5003D}"/>
               </a:ext>
             </a:extLst>
           </p:cNvPr>
@@ -4287,7 +4287,7 @@
           <p:cNvPr id="25" name="">
             <a:extLst xmlns:a="http://schemas.openxmlformats.org/drawingml/2006/main">
               <a:ext uri="{FF2B5EF4-FFF2-40B4-BE49-F238E27FC236}">
-                <a16:creationId xmlns:a16="http://schemas.microsoft.com/office/drawing/2014/main" id="{CF8AF080-6EBB-4391-BE11-53DBF0061878}"/>
+                <a16:creationId xmlns:a16="http://schemas.microsoft.com/office/drawing/2014/main" id="{EF23D7AE-3F41-462D-9BDD-B88E7E5335FC}"/>
               </a:ext>
             </a:extLst>
           </p:cNvPr>
@@ -4328,7 +4328,7 @@
           <p:cNvPr id="26" name="">
             <a:extLst xmlns:a="http://schemas.openxmlformats.org/drawingml/2006/main">
               <a:ext uri="{FF2B5EF4-FFF2-40B4-BE49-F238E27FC236}">
-                <a16:creationId xmlns:a16="http://schemas.microsoft.com/office/drawing/2014/main" id="{55D5522D-1AC3-435F-9C9F-70BEEB172D3A}"/>
+                <a16:creationId xmlns:a16="http://schemas.microsoft.com/office/drawing/2014/main" id="{22D73DCD-7348-4D89-8890-349301221935}"/>
               </a:ext>
             </a:extLst>
           </p:cNvPr>
@@ -4390,7 +4390,7 @@
           <p:cNvPr id="27" name="">
             <a:extLst xmlns:a="http://schemas.openxmlformats.org/drawingml/2006/main">
               <a:ext uri="{FF2B5EF4-FFF2-40B4-BE49-F238E27FC236}">
-                <a16:creationId xmlns:a16="http://schemas.microsoft.com/office/drawing/2014/main" id="{94851757-DF57-4103-B85C-34BC0EBF446A}"/>
+                <a16:creationId xmlns:a16="http://schemas.microsoft.com/office/drawing/2014/main" id="{0646A000-AB72-480D-ACAD-C188F6AE8E2E}"/>
               </a:ext>
             </a:extLst>
           </p:cNvPr>
@@ -4431,7 +4431,7 @@
           <p:cNvPr id="28" name="">
             <a:extLst xmlns:a="http://schemas.openxmlformats.org/drawingml/2006/main">
               <a:ext uri="{FF2B5EF4-FFF2-40B4-BE49-F238E27FC236}">
-                <a16:creationId xmlns:a16="http://schemas.microsoft.com/office/drawing/2014/main" id="{7A7035F8-7110-4B17-97A8-5387C3785173}"/>
+                <a16:creationId xmlns:a16="http://schemas.microsoft.com/office/drawing/2014/main" id="{EE6122EB-B63F-4A09-B9B9-7F57B9263E62}"/>
               </a:ext>
             </a:extLst>
           </p:cNvPr>
@@ -4493,7 +4493,7 @@
           <p:cNvPr id="29" name="">
             <a:extLst xmlns:a="http://schemas.openxmlformats.org/drawingml/2006/main">
               <a:ext uri="{FF2B5EF4-FFF2-40B4-BE49-F238E27FC236}">
-                <a16:creationId xmlns:a16="http://schemas.microsoft.com/office/drawing/2014/main" id="{3F77FBFE-3895-4ABD-8EB4-F1B3680EA1C3}"/>
+                <a16:creationId xmlns:a16="http://schemas.microsoft.com/office/drawing/2014/main" id="{6FA3649C-CFAE-405D-9823-D79FA2D54DC1}"/>
               </a:ext>
             </a:extLst>
           </p:cNvPr>
@@ -4534,7 +4534,7 @@
           <p:cNvPr id="30" name="">
             <a:extLst xmlns:a="http://schemas.openxmlformats.org/drawingml/2006/main">
               <a:ext uri="{FF2B5EF4-FFF2-40B4-BE49-F238E27FC236}">
-                <a16:creationId xmlns:a16="http://schemas.microsoft.com/office/drawing/2014/main" id="{C802AE72-B0A7-4941-8AAB-6CA1FA1581C3}"/>
+                <a16:creationId xmlns:a16="http://schemas.microsoft.com/office/drawing/2014/main" id="{89AB85D7-C497-4A2E-8D4D-139E93ABD435}"/>
               </a:ext>
             </a:extLst>
           </p:cNvPr>
@@ -4596,7 +4596,7 @@
           <p:cNvPr id="31" name="">
             <a:extLst xmlns:a="http://schemas.openxmlformats.org/drawingml/2006/main">
               <a:ext uri="{FF2B5EF4-FFF2-40B4-BE49-F238E27FC236}">
-                <a16:creationId xmlns:a16="http://schemas.microsoft.com/office/drawing/2014/main" id="{9208E3DD-0F2F-46F6-B80F-47019AD5A9BF}"/>
+                <a16:creationId xmlns:a16="http://schemas.microsoft.com/office/drawing/2014/main" id="{4DFD1236-7638-48F0-A95D-8EE38D05D848}"/>
               </a:ext>
             </a:extLst>
           </p:cNvPr>
@@ -4637,7 +4637,7 @@
           <p:cNvPr id="32" name="">
             <a:extLst xmlns:a="http://schemas.openxmlformats.org/drawingml/2006/main">
               <a:ext uri="{FF2B5EF4-FFF2-40B4-BE49-F238E27FC236}">
-                <a16:creationId xmlns:a16="http://schemas.microsoft.com/office/drawing/2014/main" id="{31AE579F-6E98-41FE-8BF7-49580D1EBAEE}"/>
+                <a16:creationId xmlns:a16="http://schemas.microsoft.com/office/drawing/2014/main" id="{34B20FF2-A1EF-4A17-A0E6-CA14A940FCEA}"/>
               </a:ext>
             </a:extLst>
           </p:cNvPr>
@@ -4699,7 +4699,7 @@
           <p:cNvPr id="33" name="">
             <a:extLst xmlns:a="http://schemas.openxmlformats.org/drawingml/2006/main">
               <a:ext uri="{FF2B5EF4-FFF2-40B4-BE49-F238E27FC236}">
-                <a16:creationId xmlns:a16="http://schemas.microsoft.com/office/drawing/2014/main" id="{B8A38838-FAA6-45EF-83E8-04748D7B91BA}"/>
+                <a16:creationId xmlns:a16="http://schemas.microsoft.com/office/drawing/2014/main" id="{E3431A42-AE3C-4821-A34D-066720B6ECFA}"/>
               </a:ext>
             </a:extLst>
           </p:cNvPr>
@@ -4761,7 +4761,7 @@
           <p:cNvPr id="34" name="">
             <a:extLst xmlns:a="http://schemas.openxmlformats.org/drawingml/2006/main">
               <a:ext uri="{FF2B5EF4-FFF2-40B4-BE49-F238E27FC236}">
-                <a16:creationId xmlns:a16="http://schemas.microsoft.com/office/drawing/2014/main" id="{E5EF00E4-708D-4A62-8A4E-5FD6DA6EE334}"/>
+                <a16:creationId xmlns:a16="http://schemas.microsoft.com/office/drawing/2014/main" id="{4856C909-4652-4C6C-8540-98C2BE5B4C91}"/>
               </a:ext>
             </a:extLst>
           </p:cNvPr>
@@ -4802,7 +4802,7 @@
           <p:cNvPr id="35" name="">
             <a:extLst xmlns:a="http://schemas.openxmlformats.org/drawingml/2006/main">
               <a:ext uri="{FF2B5EF4-FFF2-40B4-BE49-F238E27FC236}">
-                <a16:creationId xmlns:a16="http://schemas.microsoft.com/office/drawing/2014/main" id="{3C677809-5087-406C-BF64-ECFDDC473AD2}"/>
+                <a16:creationId xmlns:a16="http://schemas.microsoft.com/office/drawing/2014/main" id="{E6AF122E-496C-44F2-A12C-F1CC5812A51A}"/>
               </a:ext>
             </a:extLst>
           </p:cNvPr>
@@ -4864,7 +4864,7 @@
           <p:cNvPr id="36" name="">
             <a:extLst xmlns:a="http://schemas.openxmlformats.org/drawingml/2006/main">
               <a:ext uri="{FF2B5EF4-FFF2-40B4-BE49-F238E27FC236}">
-                <a16:creationId xmlns:a16="http://schemas.microsoft.com/office/drawing/2014/main" id="{B7ECF809-5B4F-471B-879B-A92CBC334BF5}"/>
+                <a16:creationId xmlns:a16="http://schemas.microsoft.com/office/drawing/2014/main" id="{4091BB9F-D857-4C1F-BCAC-6C31F1098D4E}"/>
               </a:ext>
             </a:extLst>
           </p:cNvPr>
@@ -4926,7 +4926,7 @@
           <p:cNvPr id="37" name="">
             <a:extLst xmlns:a="http://schemas.openxmlformats.org/drawingml/2006/main">
               <a:ext uri="{FF2B5EF4-FFF2-40B4-BE49-F238E27FC236}">
-                <a16:creationId xmlns:a16="http://schemas.microsoft.com/office/drawing/2014/main" id="{B2D22F0C-E8EA-4088-85DC-CB1C68902CD2}"/>
+                <a16:creationId xmlns:a16="http://schemas.microsoft.com/office/drawing/2014/main" id="{73D21AFE-23CC-4FDE-B9FC-F7D0FFC2EFA2}"/>
               </a:ext>
             </a:extLst>
           </p:cNvPr>
@@ -4988,7 +4988,7 @@
           <p:cNvPr id="38" name="">
             <a:extLst xmlns:a="http://schemas.openxmlformats.org/drawingml/2006/main">
               <a:ext uri="{FF2B5EF4-FFF2-40B4-BE49-F238E27FC236}">
-                <a16:creationId xmlns:a16="http://schemas.microsoft.com/office/drawing/2014/main" id="{C49D3F2A-5233-455E-A220-DF5D1BC32399}"/>
+                <a16:creationId xmlns:a16="http://schemas.microsoft.com/office/drawing/2014/main" id="{74424A25-710C-4168-8FB6-EB87F2208C7C}"/>
               </a:ext>
             </a:extLst>
           </p:cNvPr>
@@ -5019,7 +5019,7 @@
           <p:cNvPr id="39" name="">
             <a:extLst xmlns:a="http://schemas.openxmlformats.org/drawingml/2006/main">
               <a:ext uri="{FF2B5EF4-FFF2-40B4-BE49-F238E27FC236}">
-                <a16:creationId xmlns:a16="http://schemas.microsoft.com/office/drawing/2014/main" id="{E3FD4653-0776-4E99-BD01-00CA568F2737}"/>
+                <a16:creationId xmlns:a16="http://schemas.microsoft.com/office/drawing/2014/main" id="{CB0DCB5C-ECF9-413A-9612-592B99BB68B9}"/>
               </a:ext>
             </a:extLst>
           </p:cNvPr>
@@ -5081,7 +5081,7 @@
           <p:cNvPr id="40" name="">
             <a:extLst xmlns:a="http://schemas.openxmlformats.org/drawingml/2006/main">
               <a:ext uri="{FF2B5EF4-FFF2-40B4-BE49-F238E27FC236}">
-                <a16:creationId xmlns:a16="http://schemas.microsoft.com/office/drawing/2014/main" id="{102FB363-AF18-497E-A1FE-24D0CE226019}"/>
+                <a16:creationId xmlns:a16="http://schemas.microsoft.com/office/drawing/2014/main" id="{0DB4262B-2AFD-4ED6-A119-51C957E68709}"/>
               </a:ext>
             </a:extLst>
           </p:cNvPr>
@@ -5141,7 +5141,7 @@
     </p:spTree>
     <p:extLst>
       <p:ext uri="{BB962C8B-B14F-4D97-AF65-F5344CB8AC3E}">
-        <p14:creationId xmlns:p14="http://schemas.microsoft.com/office/powerpoint/2010/main" val="618048255"/>
+        <p14:creationId xmlns:p14="http://schemas.microsoft.com/office/powerpoint/2010/main" val="309792811"/>
       </p:ext>
     </p:extLst>
   </p:cSld>
@@ -5172,7 +5172,7 @@
           <p:cNvPr id="1" name="">
             <a:extLst xmlns:a="http://schemas.openxmlformats.org/drawingml/2006/main">
               <a:ext uri="{FF2B5EF4-FFF2-40B4-BE49-F238E27FC236}">
-                <a16:creationId xmlns:a16="http://schemas.microsoft.com/office/drawing/2014/main" id="{E4BFCB97-74A6-4D07-BE68-826DEA0F4A33}"/>
+                <a16:creationId xmlns:a16="http://schemas.microsoft.com/office/drawing/2014/main" id="{148CFC09-2C15-4FAA-B204-EED91C6C7CD5}"/>
               </a:ext>
             </a:extLst>
           </p:cNvPr>
@@ -5234,7 +5234,7 @@
           <p:cNvPr id="2" name="">
             <a:extLst xmlns:a="http://schemas.openxmlformats.org/drawingml/2006/main">
               <a:ext uri="{FF2B5EF4-FFF2-40B4-BE49-F238E27FC236}">
-                <a16:creationId xmlns:a16="http://schemas.microsoft.com/office/drawing/2014/main" id="{B8EEDBD8-2477-44AE-BC24-9698ED89D39B}"/>
+                <a16:creationId xmlns:a16="http://schemas.microsoft.com/office/drawing/2014/main" id="{34FA8308-2F36-4FB7-A0FB-47B0A78D765E}"/>
               </a:ext>
             </a:extLst>
           </p:cNvPr>
@@ -5296,7 +5296,7 @@
           <p:cNvPr id="3" name="">
             <a:extLst xmlns:a="http://schemas.openxmlformats.org/drawingml/2006/main">
               <a:ext uri="{FF2B5EF4-FFF2-40B4-BE49-F238E27FC236}">
-                <a16:creationId xmlns:a16="http://schemas.microsoft.com/office/drawing/2014/main" id="{78F4E8CD-D92B-45EA-BCE2-DB9860355AE0}"/>
+                <a16:creationId xmlns:a16="http://schemas.microsoft.com/office/drawing/2014/main" id="{D88A7667-5282-46E7-9E13-972BB2608383}"/>
               </a:ext>
             </a:extLst>
           </p:cNvPr>
@@ -5358,7 +5358,7 @@
           <p:cNvPr id="4" name="">
             <a:extLst xmlns:a="http://schemas.openxmlformats.org/drawingml/2006/main">
               <a:ext uri="{FF2B5EF4-FFF2-40B4-BE49-F238E27FC236}">
-                <a16:creationId xmlns:a16="http://schemas.microsoft.com/office/drawing/2014/main" id="{65855FA6-B76B-4C92-A317-9D5BB2A08BFB}"/>
+                <a16:creationId xmlns:a16="http://schemas.microsoft.com/office/drawing/2014/main" id="{53DD0516-ABE6-4A55-95E9-24D2EDBF5307}"/>
               </a:ext>
             </a:extLst>
           </p:cNvPr>
@@ -5420,7 +5420,7 @@
           <p:cNvPr id="5" name="">
             <a:extLst xmlns:a="http://schemas.openxmlformats.org/drawingml/2006/main">
               <a:ext uri="{FF2B5EF4-FFF2-40B4-BE49-F238E27FC236}">
-                <a16:creationId xmlns:a16="http://schemas.microsoft.com/office/drawing/2014/main" id="{A5485279-F75D-4EAB-B0BA-CCE72383789A}"/>
+                <a16:creationId xmlns:a16="http://schemas.microsoft.com/office/drawing/2014/main" id="{710F746D-B561-4933-9FC3-E2CD2F36B107}"/>
               </a:ext>
             </a:extLst>
           </p:cNvPr>
@@ -5484,7 +5484,7 @@
           <p:cNvPr id="6" name="">
             <a:extLst xmlns:a="http://schemas.openxmlformats.org/drawingml/2006/main">
               <a:ext uri="{FF2B5EF4-FFF2-40B4-BE49-F238E27FC236}">
-                <a16:creationId xmlns:a16="http://schemas.microsoft.com/office/drawing/2014/main" id="{0CA865A4-6CCB-408F-A111-B46B181EA84F}"/>
+                <a16:creationId xmlns:a16="http://schemas.microsoft.com/office/drawing/2014/main" id="{DA4661A1-DE1C-49CB-9B46-3C9F1181DFE2}"/>
               </a:ext>
             </a:extLst>
           </p:cNvPr>
@@ -5574,7 +5574,7 @@
           <p:cNvPr id="8" name="">
             <a:extLst xmlns:a="http://schemas.openxmlformats.org/drawingml/2006/main">
               <a:ext uri="{FF2B5EF4-FFF2-40B4-BE49-F238E27FC236}">
-                <a16:creationId xmlns:a16="http://schemas.microsoft.com/office/drawing/2014/main" id="{8DB71EFF-AF17-4F14-9FAF-4761AC4FADB5}"/>
+                <a16:creationId xmlns:a16="http://schemas.microsoft.com/office/drawing/2014/main" id="{BAFDAA4E-DF28-4BD1-8292-D5CE3632F4D9}"/>
               </a:ext>
             </a:extLst>
           </p:cNvPr>
@@ -5638,7 +5638,7 @@
           <p:cNvPr id="9" name="">
             <a:extLst xmlns:a="http://schemas.openxmlformats.org/drawingml/2006/main">
               <a:ext uri="{FF2B5EF4-FFF2-40B4-BE49-F238E27FC236}">
-                <a16:creationId xmlns:a16="http://schemas.microsoft.com/office/drawing/2014/main" id="{CE66A02C-36B1-4581-95CC-3260A676DDAE}"/>
+                <a16:creationId xmlns:a16="http://schemas.microsoft.com/office/drawing/2014/main" id="{3650039D-3A98-45FA-BA33-9A37285AF976}"/>
               </a:ext>
             </a:extLst>
           </p:cNvPr>
@@ -5728,7 +5728,7 @@
           <p:cNvPr id="11" name="">
             <a:extLst xmlns:a="http://schemas.openxmlformats.org/drawingml/2006/main">
               <a:ext uri="{FF2B5EF4-FFF2-40B4-BE49-F238E27FC236}">
-                <a16:creationId xmlns:a16="http://schemas.microsoft.com/office/drawing/2014/main" id="{E7898ED6-3A15-4BA0-B497-370AFE465959}"/>
+                <a16:creationId xmlns:a16="http://schemas.microsoft.com/office/drawing/2014/main" id="{3742B47B-85F4-4E0F-8FF3-09C40F61E16A}"/>
               </a:ext>
             </a:extLst>
           </p:cNvPr>
@@ -5792,7 +5792,7 @@
           <p:cNvPr id="12" name="">
             <a:extLst xmlns:a="http://schemas.openxmlformats.org/drawingml/2006/main">
               <a:ext uri="{FF2B5EF4-FFF2-40B4-BE49-F238E27FC236}">
-                <a16:creationId xmlns:a16="http://schemas.microsoft.com/office/drawing/2014/main" id="{26BF4E3F-1660-442A-A6AA-FF74BD3D502C}"/>
+                <a16:creationId xmlns:a16="http://schemas.microsoft.com/office/drawing/2014/main" id="{9D18450F-49F2-450E-AB6F-A7D980AF9885}"/>
               </a:ext>
             </a:extLst>
           </p:cNvPr>
@@ -5882,7 +5882,7 @@
           <p:cNvPr id="14" name="">
             <a:extLst xmlns:a="http://schemas.openxmlformats.org/drawingml/2006/main">
               <a:ext uri="{FF2B5EF4-FFF2-40B4-BE49-F238E27FC236}">
-                <a16:creationId xmlns:a16="http://schemas.microsoft.com/office/drawing/2014/main" id="{CB0CF0A4-6EF4-4BCD-B7A1-27C7DD7B7BE7}"/>
+                <a16:creationId xmlns:a16="http://schemas.microsoft.com/office/drawing/2014/main" id="{3B80027E-9243-4DAD-B1EE-FD9488B8F197}"/>
               </a:ext>
             </a:extLst>
           </p:cNvPr>
@@ -5946,7 +5946,7 @@
           <p:cNvPr id="15" name="">
             <a:extLst xmlns:a="http://schemas.openxmlformats.org/drawingml/2006/main">
               <a:ext uri="{FF2B5EF4-FFF2-40B4-BE49-F238E27FC236}">
-                <a16:creationId xmlns:a16="http://schemas.microsoft.com/office/drawing/2014/main" id="{7CBFCC9D-C320-47E9-86C3-B2D08751DD5F}"/>
+                <a16:creationId xmlns:a16="http://schemas.microsoft.com/office/drawing/2014/main" id="{810F55C9-7CCE-4C34-A950-CA5152705CA4}"/>
               </a:ext>
             </a:extLst>
           </p:cNvPr>
@@ -6036,7 +6036,7 @@
           <p:cNvPr id="17" name="">
             <a:extLst xmlns:a="http://schemas.openxmlformats.org/drawingml/2006/main">
               <a:ext uri="{FF2B5EF4-FFF2-40B4-BE49-F238E27FC236}">
-                <a16:creationId xmlns:a16="http://schemas.microsoft.com/office/drawing/2014/main" id="{705E7F40-A97B-43EB-A24A-7617BC424BB3}"/>
+                <a16:creationId xmlns:a16="http://schemas.microsoft.com/office/drawing/2014/main" id="{F811E890-0FBE-45D7-9B9F-697FF7CC5751}"/>
               </a:ext>
             </a:extLst>
           </p:cNvPr>
@@ -6100,7 +6100,7 @@
           <p:cNvPr id="18" name="">
             <a:extLst xmlns:a="http://schemas.openxmlformats.org/drawingml/2006/main">
               <a:ext uri="{FF2B5EF4-FFF2-40B4-BE49-F238E27FC236}">
-                <a16:creationId xmlns:a16="http://schemas.microsoft.com/office/drawing/2014/main" id="{B6683FBB-DBB0-4225-8DCD-AFF9B6954701}"/>
+                <a16:creationId xmlns:a16="http://schemas.microsoft.com/office/drawing/2014/main" id="{1654CE90-BACB-439F-BCF1-4B43140F53FC}"/>
               </a:ext>
             </a:extLst>
           </p:cNvPr>
@@ -6190,7 +6190,7 @@
           <p:cNvPr id="20" name="">
             <a:extLst xmlns:a="http://schemas.openxmlformats.org/drawingml/2006/main">
               <a:ext uri="{FF2B5EF4-FFF2-40B4-BE49-F238E27FC236}">
-                <a16:creationId xmlns:a16="http://schemas.microsoft.com/office/drawing/2014/main" id="{6AA12A25-537C-4FD8-964C-13C004C8F05D}"/>
+                <a16:creationId xmlns:a16="http://schemas.microsoft.com/office/drawing/2014/main" id="{9DC7D81E-FE67-4D8E-9938-9E325D9BCA56}"/>
               </a:ext>
             </a:extLst>
           </p:cNvPr>
@@ -6254,7 +6254,7 @@
           <p:cNvPr id="21" name="">
             <a:extLst xmlns:a="http://schemas.openxmlformats.org/drawingml/2006/main">
               <a:ext uri="{FF2B5EF4-FFF2-40B4-BE49-F238E27FC236}">
-                <a16:creationId xmlns:a16="http://schemas.microsoft.com/office/drawing/2014/main" id="{5C2155E1-EB16-4403-91A9-C5AB60FA66A7}"/>
+                <a16:creationId xmlns:a16="http://schemas.microsoft.com/office/drawing/2014/main" id="{2C256EC1-DDBE-45C9-8961-DD35CFEF434A}"/>
               </a:ext>
             </a:extLst>
           </p:cNvPr>
@@ -6344,7 +6344,7 @@
           <p:cNvPr id="23" name="">
             <a:extLst xmlns:a="http://schemas.openxmlformats.org/drawingml/2006/main">
               <a:ext uri="{FF2B5EF4-FFF2-40B4-BE49-F238E27FC236}">
-                <a16:creationId xmlns:a16="http://schemas.microsoft.com/office/drawing/2014/main" id="{18CC3615-0E28-416F-9DCF-A8E0C03B9F2C}"/>
+                <a16:creationId xmlns:a16="http://schemas.microsoft.com/office/drawing/2014/main" id="{D6A51436-8F54-4A77-B957-2DEDBA916460}"/>
               </a:ext>
             </a:extLst>
           </p:cNvPr>
@@ -6408,7 +6408,7 @@
           <p:cNvPr id="24" name="">
             <a:extLst xmlns:a="http://schemas.openxmlformats.org/drawingml/2006/main">
               <a:ext uri="{FF2B5EF4-FFF2-40B4-BE49-F238E27FC236}">
-                <a16:creationId xmlns:a16="http://schemas.microsoft.com/office/drawing/2014/main" id="{C4AE93AC-8226-4001-AE5B-2098A984BF73}"/>
+                <a16:creationId xmlns:a16="http://schemas.microsoft.com/office/drawing/2014/main" id="{91266F69-0F22-4A18-A974-10ECF92BD8FA}"/>
               </a:ext>
             </a:extLst>
           </p:cNvPr>
@@ -6498,7 +6498,7 @@
           <p:cNvPr id="26" name="">
             <a:extLst xmlns:a="http://schemas.openxmlformats.org/drawingml/2006/main">
               <a:ext uri="{FF2B5EF4-FFF2-40B4-BE49-F238E27FC236}">
-                <a16:creationId xmlns:a16="http://schemas.microsoft.com/office/drawing/2014/main" id="{FE57F695-CFFC-4B10-AC73-009DB4DAFE7E}"/>
+                <a16:creationId xmlns:a16="http://schemas.microsoft.com/office/drawing/2014/main" id="{D59517FE-049C-4F78-B670-331A4F99B05F}"/>
               </a:ext>
             </a:extLst>
           </p:cNvPr>
@@ -6562,7 +6562,7 @@
           <p:cNvPr id="27" name="">
             <a:extLst xmlns:a="http://schemas.openxmlformats.org/drawingml/2006/main">
               <a:ext uri="{FF2B5EF4-FFF2-40B4-BE49-F238E27FC236}">
-                <a16:creationId xmlns:a16="http://schemas.microsoft.com/office/drawing/2014/main" id="{685351F0-39A0-4AD4-B5E3-2E97666316D6}"/>
+                <a16:creationId xmlns:a16="http://schemas.microsoft.com/office/drawing/2014/main" id="{C75B8D8F-51AA-44AF-B43E-AF38A8E10289}"/>
               </a:ext>
             </a:extLst>
           </p:cNvPr>
@@ -6652,7 +6652,7 @@
           <p:cNvPr id="29" name="">
             <a:extLst xmlns:a="http://schemas.openxmlformats.org/drawingml/2006/main">
               <a:ext uri="{FF2B5EF4-FFF2-40B4-BE49-F238E27FC236}">
-                <a16:creationId xmlns:a16="http://schemas.microsoft.com/office/drawing/2014/main" id="{F6B7C93F-F7EA-462E-A9EB-C42459195F5E}"/>
+                <a16:creationId xmlns:a16="http://schemas.microsoft.com/office/drawing/2014/main" id="{3546FB83-C0C1-4E52-98B5-545F5E9FAAAF}"/>
               </a:ext>
             </a:extLst>
           </p:cNvPr>
@@ -6683,7 +6683,7 @@
           <p:cNvPr id="30" name="">
             <a:extLst xmlns:a="http://schemas.openxmlformats.org/drawingml/2006/main">
               <a:ext uri="{FF2B5EF4-FFF2-40B4-BE49-F238E27FC236}">
-                <a16:creationId xmlns:a16="http://schemas.microsoft.com/office/drawing/2014/main" id="{5EA4820A-796F-4FAE-B63D-69C8CF4AAAED}"/>
+                <a16:creationId xmlns:a16="http://schemas.microsoft.com/office/drawing/2014/main" id="{A7CBBD15-395F-48A2-92CD-6478237F4FFB}"/>
               </a:ext>
             </a:extLst>
           </p:cNvPr>
@@ -6745,7 +6745,7 @@
           <p:cNvPr id="31" name="">
             <a:extLst xmlns:a="http://schemas.openxmlformats.org/drawingml/2006/main">
               <a:ext uri="{FF2B5EF4-FFF2-40B4-BE49-F238E27FC236}">
-                <a16:creationId xmlns:a16="http://schemas.microsoft.com/office/drawing/2014/main" id="{AF95751A-5603-4777-A9B5-2C59E14CF9F2}"/>
+                <a16:creationId xmlns:a16="http://schemas.microsoft.com/office/drawing/2014/main" id="{50298F50-9473-4BCA-9B2A-3DF58E2DFED4}"/>
               </a:ext>
             </a:extLst>
           </p:cNvPr>
@@ -6805,7 +6805,7 @@
     </p:spTree>
     <p:extLst>
       <p:ext uri="{BB962C8B-B14F-4D97-AF65-F5344CB8AC3E}">
-        <p14:creationId xmlns:p14="http://schemas.microsoft.com/office/powerpoint/2010/main" val="351846770"/>
+        <p14:creationId xmlns:p14="http://schemas.microsoft.com/office/powerpoint/2010/main" val="1433381249"/>
       </p:ext>
     </p:extLst>
   </p:cSld>
@@ -6836,7 +6836,7 @@
           <p:cNvPr id="1" name="">
             <a:extLst xmlns:a="http://schemas.openxmlformats.org/drawingml/2006/main">
               <a:ext uri="{FF2B5EF4-FFF2-40B4-BE49-F238E27FC236}">
-                <a16:creationId xmlns:a16="http://schemas.microsoft.com/office/drawing/2014/main" id="{EBF41B9F-29B1-4078-9C02-AB591379E553}"/>
+                <a16:creationId xmlns:a16="http://schemas.microsoft.com/office/drawing/2014/main" id="{26F6AB97-05A1-49E6-8025-79B16D1A63EE}"/>
               </a:ext>
             </a:extLst>
           </p:cNvPr>
@@ -6898,7 +6898,7 @@
           <p:cNvPr id="2" name="">
             <a:extLst xmlns:a="http://schemas.openxmlformats.org/drawingml/2006/main">
               <a:ext uri="{FF2B5EF4-FFF2-40B4-BE49-F238E27FC236}">
-                <a16:creationId xmlns:a16="http://schemas.microsoft.com/office/drawing/2014/main" id="{78B4B779-FDA8-44C1-B8DE-381074C3DDB2}"/>
+                <a16:creationId xmlns:a16="http://schemas.microsoft.com/office/drawing/2014/main" id="{1E1C2F39-C34F-48C7-8918-E809ED41265F}"/>
               </a:ext>
             </a:extLst>
           </p:cNvPr>
@@ -6964,7 +6964,7 @@
           <p:nvPr/>
         </p:nvPicPr>
         <p:blipFill>
-          <a:blip xmlns:r="http://schemas.openxmlformats.org/officeDocument/2006/relationships" xmlns:a="http://schemas.openxmlformats.org/drawingml/2006/main" r:embed="Ree3cd186d649461e"/>
+          <a:blip xmlns:r="http://schemas.openxmlformats.org/officeDocument/2006/relationships" xmlns:a="http://schemas.openxmlformats.org/drawingml/2006/main" r:embed="R2f99c285a80e4cab"/>
           <a:srcRect xmlns:a="http://schemas.openxmlformats.org/drawingml/2006/main" l="0" t="17059" r="0" b="17059"/>
           <a:stretch xmlns:a="http://schemas.openxmlformats.org/drawingml/2006/main">
             <a:fillRect l="0" t="0" r="0" b="0"/>
@@ -6991,7 +6991,7 @@
           <p:nvPr/>
         </p:nvPicPr>
         <p:blipFill>
-          <a:blip xmlns:r="http://schemas.openxmlformats.org/officeDocument/2006/relationships" xmlns:a="http://schemas.openxmlformats.org/drawingml/2006/main" r:embed="Rcec4d5e8dce64552"/>
+          <a:blip xmlns:r="http://schemas.openxmlformats.org/officeDocument/2006/relationships" xmlns:a="http://schemas.openxmlformats.org/drawingml/2006/main" r:embed="R90fef1d85f884e98"/>
           <a:srcRect xmlns:a="http://schemas.openxmlformats.org/drawingml/2006/main" l="0" t="17059" r="0" b="17059"/>
           <a:stretch xmlns:a="http://schemas.openxmlformats.org/drawingml/2006/main">
             <a:fillRect l="0" t="0" r="0" b="0"/>
@@ -7018,7 +7018,7 @@
           <p:nvPr/>
         </p:nvPicPr>
         <p:blipFill>
-          <a:blip xmlns:r="http://schemas.openxmlformats.org/officeDocument/2006/relationships" xmlns:a="http://schemas.openxmlformats.org/drawingml/2006/main" r:embed="R79164946e7de4bd4"/>
+          <a:blip xmlns:r="http://schemas.openxmlformats.org/officeDocument/2006/relationships" xmlns:a="http://schemas.openxmlformats.org/drawingml/2006/main" r:embed="R7002076a92424365"/>
           <a:srcRect xmlns:a="http://schemas.openxmlformats.org/drawingml/2006/main" l="0" t="17059" r="0" b="17059"/>
           <a:stretch xmlns:a="http://schemas.openxmlformats.org/drawingml/2006/main">
             <a:fillRect l="0" t="0" r="0" b="0"/>
@@ -7045,7 +7045,7 @@
           <p:nvPr/>
         </p:nvPicPr>
         <p:blipFill>
-          <a:blip xmlns:r="http://schemas.openxmlformats.org/officeDocument/2006/relationships" xmlns:a="http://schemas.openxmlformats.org/drawingml/2006/main" r:embed="Rd14b14be634b46f0"/>
+          <a:blip xmlns:r="http://schemas.openxmlformats.org/officeDocument/2006/relationships" xmlns:a="http://schemas.openxmlformats.org/drawingml/2006/main" r:embed="R158f51e2a7b9470b"/>
           <a:srcRect xmlns:a="http://schemas.openxmlformats.org/drawingml/2006/main" l="0" t="17059" r="0" b="17059"/>
           <a:stretch xmlns:a="http://schemas.openxmlformats.org/drawingml/2006/main">
             <a:fillRect l="0" t="0" r="0" b="0"/>
@@ -7068,7 +7068,7 @@
           <p:cNvPr id="7" name="">
             <a:extLst xmlns:a="http://schemas.openxmlformats.org/drawingml/2006/main">
               <a:ext uri="{FF2B5EF4-FFF2-40B4-BE49-F238E27FC236}">
-                <a16:creationId xmlns:a16="http://schemas.microsoft.com/office/drawing/2014/main" id="{256E3D3D-F7AE-4461-996E-8FB29DF18EC9}"/>
+                <a16:creationId xmlns:a16="http://schemas.microsoft.com/office/drawing/2014/main" id="{367F44D5-C45A-4FAC-B016-1B4B2FEF7467}"/>
               </a:ext>
             </a:extLst>
           </p:cNvPr>
@@ -7132,7 +7132,7 @@
           <p:cNvPr id="8" name="">
             <a:extLst xmlns:a="http://schemas.openxmlformats.org/drawingml/2006/main">
               <a:ext uri="{FF2B5EF4-FFF2-40B4-BE49-F238E27FC236}">
-                <a16:creationId xmlns:a16="http://schemas.microsoft.com/office/drawing/2014/main" id="{A29E3171-081A-48A1-BC39-4BB9FF8B60A4}"/>
+                <a16:creationId xmlns:a16="http://schemas.microsoft.com/office/drawing/2014/main" id="{F47EC99D-C44B-48E3-95AA-766256363B82}"/>
               </a:ext>
             </a:extLst>
           </p:cNvPr>
@@ -7196,7 +7196,7 @@
           <p:cNvPr id="9" name="">
             <a:extLst xmlns:a="http://schemas.openxmlformats.org/drawingml/2006/main">
               <a:ext uri="{FF2B5EF4-FFF2-40B4-BE49-F238E27FC236}">
-                <a16:creationId xmlns:a16="http://schemas.microsoft.com/office/drawing/2014/main" id="{1A8505A3-F0B1-4305-9929-A37AAF25C344}"/>
+                <a16:creationId xmlns:a16="http://schemas.microsoft.com/office/drawing/2014/main" id="{EDD8BA67-061B-4349-B787-EFD9A7F824E5}"/>
               </a:ext>
             </a:extLst>
           </p:cNvPr>
@@ -7260,7 +7260,7 @@
           <p:cNvPr id="10" name="">
             <a:extLst xmlns:a="http://schemas.openxmlformats.org/drawingml/2006/main">
               <a:ext uri="{FF2B5EF4-FFF2-40B4-BE49-F238E27FC236}">
-                <a16:creationId xmlns:a16="http://schemas.microsoft.com/office/drawing/2014/main" id="{22AD50E6-F755-481F-9A01-595AE407153C}"/>
+                <a16:creationId xmlns:a16="http://schemas.microsoft.com/office/drawing/2014/main" id="{FDDC8A2E-E533-44F3-8C76-0B4598AEB90C}"/>
               </a:ext>
             </a:extLst>
           </p:cNvPr>
@@ -7324,7 +7324,7 @@
           <p:cNvPr id="11" name="">
             <a:extLst xmlns:a="http://schemas.openxmlformats.org/drawingml/2006/main">
               <a:ext uri="{FF2B5EF4-FFF2-40B4-BE49-F238E27FC236}">
-                <a16:creationId xmlns:a16="http://schemas.microsoft.com/office/drawing/2014/main" id="{31F0D4CA-69BA-40EC-A963-C63C15FFED7D}"/>
+                <a16:creationId xmlns:a16="http://schemas.microsoft.com/office/drawing/2014/main" id="{6F9A3B4A-CBE8-49EF-818B-FA1C278D1818}"/>
               </a:ext>
             </a:extLst>
           </p:cNvPr>
@@ -7355,7 +7355,7 @@
           <p:cNvPr id="12" name="">
             <a:extLst xmlns:a="http://schemas.openxmlformats.org/drawingml/2006/main">
               <a:ext uri="{FF2B5EF4-FFF2-40B4-BE49-F238E27FC236}">
-                <a16:creationId xmlns:a16="http://schemas.microsoft.com/office/drawing/2014/main" id="{058B2A46-65EA-4FF5-9CFA-0E63A51F098E}"/>
+                <a16:creationId xmlns:a16="http://schemas.microsoft.com/office/drawing/2014/main" id="{4E887187-AB22-41FB-ACB1-1B122ED0FB1F}"/>
               </a:ext>
             </a:extLst>
           </p:cNvPr>
@@ -7417,7 +7417,7 @@
           <p:cNvPr id="13" name="">
             <a:extLst xmlns:a="http://schemas.openxmlformats.org/drawingml/2006/main">
               <a:ext uri="{FF2B5EF4-FFF2-40B4-BE49-F238E27FC236}">
-                <a16:creationId xmlns:a16="http://schemas.microsoft.com/office/drawing/2014/main" id="{37FFE7C6-B346-40C7-92E2-A8586CF08E4E}"/>
+                <a16:creationId xmlns:a16="http://schemas.microsoft.com/office/drawing/2014/main" id="{E34B4F46-02FA-4A79-90B5-1CB5652AD69A}"/>
               </a:ext>
             </a:extLst>
           </p:cNvPr>
@@ -7477,7 +7477,7 @@
     </p:spTree>
     <p:extLst>
       <p:ext uri="{BB962C8B-B14F-4D97-AF65-F5344CB8AC3E}">
-        <p14:creationId xmlns:p14="http://schemas.microsoft.com/office/powerpoint/2010/main" val="1376499907"/>
+        <p14:creationId xmlns:p14="http://schemas.microsoft.com/office/powerpoint/2010/main" val="1378390825"/>
       </p:ext>
     </p:extLst>
   </p:cSld>
@@ -7508,7 +7508,7 @@
           <p:cNvPr id="1" name="">
             <a:extLst xmlns:a="http://schemas.openxmlformats.org/drawingml/2006/main">
               <a:ext uri="{FF2B5EF4-FFF2-40B4-BE49-F238E27FC236}">
-                <a16:creationId xmlns:a16="http://schemas.microsoft.com/office/drawing/2014/main" id="{4EBE3C68-6901-4BA7-970B-0A8A1B150FCF}"/>
+                <a16:creationId xmlns:a16="http://schemas.microsoft.com/office/drawing/2014/main" id="{53C2E611-D4AB-4745-8C67-65DCA890F58D}"/>
               </a:ext>
             </a:extLst>
           </p:cNvPr>
@@ -7570,7 +7570,7 @@
           <p:cNvPr id="2" name="">
             <a:extLst xmlns:a="http://schemas.openxmlformats.org/drawingml/2006/main">
               <a:ext uri="{FF2B5EF4-FFF2-40B4-BE49-F238E27FC236}">
-                <a16:creationId xmlns:a16="http://schemas.microsoft.com/office/drawing/2014/main" id="{2BCD5D80-B22C-4BC6-84E0-2488C995CA4B}"/>
+                <a16:creationId xmlns:a16="http://schemas.microsoft.com/office/drawing/2014/main" id="{6AC3798E-B393-488B-989F-82B801A48C4D}"/>
               </a:ext>
             </a:extLst>
           </p:cNvPr>
@@ -7622,7 +7622,7 @@
                 <a:ea typeface="PingFang SC"/>
                 <a:cs typeface="PingFang SC"/>
               </a:rPr>
-              <a:t>课堂 demo 怎么讲</a:t>
+              <a:t>Demo 展示路径</a:t>
             </a:r>
           </a:p>
         </p:txBody>
@@ -7632,7 +7632,7 @@
           <p:cNvPr id="3" name="">
             <a:extLst xmlns:a="http://schemas.openxmlformats.org/drawingml/2006/main">
               <a:ext uri="{FF2B5EF4-FFF2-40B4-BE49-F238E27FC236}">
-                <a16:creationId xmlns:a16="http://schemas.microsoft.com/office/drawing/2014/main" id="{2D1114A7-D3F7-4391-8C76-AEFF84A45ED3}"/>
+                <a16:creationId xmlns:a16="http://schemas.microsoft.com/office/drawing/2014/main" id="{38596B78-7E4A-4982-A14F-86E709AE09C8}"/>
               </a:ext>
             </a:extLst>
           </p:cNvPr>
@@ -7673,7 +7673,7 @@
           <p:cNvPr id="4" name="">
             <a:extLst xmlns:a="http://schemas.openxmlformats.org/drawingml/2006/main">
               <a:ext uri="{FF2B5EF4-FFF2-40B4-BE49-F238E27FC236}">
-                <a16:creationId xmlns:a16="http://schemas.microsoft.com/office/drawing/2014/main" id="{C46DFCCF-0CE0-48AA-8821-FE69E0AC8A89}"/>
+                <a16:creationId xmlns:a16="http://schemas.microsoft.com/office/drawing/2014/main" id="{1B764BCD-4066-4B49-8AA9-E27453FB7AF7}"/>
               </a:ext>
             </a:extLst>
           </p:cNvPr>
@@ -7704,7 +7704,7 @@
           <p:cNvPr id="5" name="">
             <a:extLst xmlns:a="http://schemas.openxmlformats.org/drawingml/2006/main">
               <a:ext uri="{FF2B5EF4-FFF2-40B4-BE49-F238E27FC236}">
-                <a16:creationId xmlns:a16="http://schemas.microsoft.com/office/drawing/2014/main" id="{F8E89705-70DF-4B59-AF56-C1B20726D27A}"/>
+                <a16:creationId xmlns:a16="http://schemas.microsoft.com/office/drawing/2014/main" id="{41B79194-BCE7-42DF-B0AF-7B9128694357}"/>
               </a:ext>
             </a:extLst>
           </p:cNvPr>
@@ -7737,7 +7737,7 @@
           <p:cNvPr id="6" name="">
             <a:extLst xmlns:a="http://schemas.openxmlformats.org/drawingml/2006/main">
               <a:ext uri="{FF2B5EF4-FFF2-40B4-BE49-F238E27FC236}">
-                <a16:creationId xmlns:a16="http://schemas.microsoft.com/office/drawing/2014/main" id="{971BB18C-BEF5-4A94-B5AB-08B7408F35A6}"/>
+                <a16:creationId xmlns:a16="http://schemas.microsoft.com/office/drawing/2014/main" id="{0C42B71F-D8CC-452B-82B9-A4D6998489EB}"/>
               </a:ext>
             </a:extLst>
           </p:cNvPr>
@@ -7770,7 +7770,7 @@
           <p:cNvPr id="7" name="">
             <a:extLst xmlns:a="http://schemas.openxmlformats.org/drawingml/2006/main">
               <a:ext uri="{FF2B5EF4-FFF2-40B4-BE49-F238E27FC236}">
-                <a16:creationId xmlns:a16="http://schemas.microsoft.com/office/drawing/2014/main" id="{0FA76BAB-4D9F-458B-8BF8-2CA85CCA44B8}"/>
+                <a16:creationId xmlns:a16="http://schemas.microsoft.com/office/drawing/2014/main" id="{35088AC6-AA44-4CFA-9507-E059652ACC01}"/>
               </a:ext>
             </a:extLst>
           </p:cNvPr>
@@ -7803,7 +7803,7 @@
           <p:cNvPr id="8" name="">
             <a:extLst xmlns:a="http://schemas.openxmlformats.org/drawingml/2006/main">
               <a:ext uri="{FF2B5EF4-FFF2-40B4-BE49-F238E27FC236}">
-                <a16:creationId xmlns:a16="http://schemas.microsoft.com/office/drawing/2014/main" id="{DEBC8BF0-6266-4215-BDA0-0F729113D492}"/>
+                <a16:creationId xmlns:a16="http://schemas.microsoft.com/office/drawing/2014/main" id="{1D5E5D8B-F0E2-4B7C-B9BA-E4D2E3D03B24}"/>
               </a:ext>
             </a:extLst>
           </p:cNvPr>
@@ -7836,7 +7836,7 @@
           <p:cNvPr id="9" name="">
             <a:extLst xmlns:a="http://schemas.openxmlformats.org/drawingml/2006/main">
               <a:ext uri="{FF2B5EF4-FFF2-40B4-BE49-F238E27FC236}">
-                <a16:creationId xmlns:a16="http://schemas.microsoft.com/office/drawing/2014/main" id="{D2CECCF3-870B-4D6D-B9C6-019868B5D020}"/>
+                <a16:creationId xmlns:a16="http://schemas.microsoft.com/office/drawing/2014/main" id="{F7EA8203-8F12-4898-88A0-CD78BEA58ECD}"/>
               </a:ext>
             </a:extLst>
           </p:cNvPr>
@@ -7869,7 +7869,7 @@
           <p:cNvPr id="10" name="">
             <a:extLst xmlns:a="http://schemas.openxmlformats.org/drawingml/2006/main">
               <a:ext uri="{FF2B5EF4-FFF2-40B4-BE49-F238E27FC236}">
-                <a16:creationId xmlns:a16="http://schemas.microsoft.com/office/drawing/2014/main" id="{2099122F-03E5-4A9B-AA92-1096564F3C45}"/>
+                <a16:creationId xmlns:a16="http://schemas.microsoft.com/office/drawing/2014/main" id="{EB0246D8-7DEE-4733-AD0C-20A2D36C92CD}"/>
               </a:ext>
             </a:extLst>
           </p:cNvPr>
@@ -7910,7 +7910,7 @@
           <p:cNvPr id="11" name="">
             <a:extLst xmlns:a="http://schemas.openxmlformats.org/drawingml/2006/main">
               <a:ext uri="{FF2B5EF4-FFF2-40B4-BE49-F238E27FC236}">
-                <a16:creationId xmlns:a16="http://schemas.microsoft.com/office/drawing/2014/main" id="{D91C5743-D380-44AA-B516-2CBDD08E5106}"/>
+                <a16:creationId xmlns:a16="http://schemas.microsoft.com/office/drawing/2014/main" id="{7714651A-03E3-4D86-B83E-C43F7BD50296}"/>
               </a:ext>
             </a:extLst>
           </p:cNvPr>
@@ -7972,7 +7972,7 @@
           <p:cNvPr id="12" name="">
             <a:extLst xmlns:a="http://schemas.openxmlformats.org/drawingml/2006/main">
               <a:ext uri="{FF2B5EF4-FFF2-40B4-BE49-F238E27FC236}">
-                <a16:creationId xmlns:a16="http://schemas.microsoft.com/office/drawing/2014/main" id="{10CA2D98-0C0D-44BB-9447-CEA355D48661}"/>
+                <a16:creationId xmlns:a16="http://schemas.microsoft.com/office/drawing/2014/main" id="{3B3EF32C-4326-4BAF-AFE3-2D50F41E3F08}"/>
               </a:ext>
             </a:extLst>
           </p:cNvPr>
@@ -8013,7 +8013,7 @@
           <p:cNvPr id="13" name="">
             <a:extLst xmlns:a="http://schemas.openxmlformats.org/drawingml/2006/main">
               <a:ext uri="{FF2B5EF4-FFF2-40B4-BE49-F238E27FC236}">
-                <a16:creationId xmlns:a16="http://schemas.microsoft.com/office/drawing/2014/main" id="{047E6721-9C6B-4E91-87D9-0B2DFDDEE81A}"/>
+                <a16:creationId xmlns:a16="http://schemas.microsoft.com/office/drawing/2014/main" id="{DD92CBB0-CFF4-428E-9E8B-DB4691AA6ADC}"/>
               </a:ext>
             </a:extLst>
           </p:cNvPr>
@@ -8075,7 +8075,7 @@
           <p:cNvPr id="14" name="">
             <a:extLst xmlns:a="http://schemas.openxmlformats.org/drawingml/2006/main">
               <a:ext uri="{FF2B5EF4-FFF2-40B4-BE49-F238E27FC236}">
-                <a16:creationId xmlns:a16="http://schemas.microsoft.com/office/drawing/2014/main" id="{19001333-62E5-42A4-8B4D-D3C5690196ED}"/>
+                <a16:creationId xmlns:a16="http://schemas.microsoft.com/office/drawing/2014/main" id="{AE65FC50-3938-4BD0-A12F-451C9219A944}"/>
               </a:ext>
             </a:extLst>
           </p:cNvPr>
@@ -8116,7 +8116,7 @@
           <p:cNvPr id="15" name="">
             <a:extLst xmlns:a="http://schemas.openxmlformats.org/drawingml/2006/main">
               <a:ext uri="{FF2B5EF4-FFF2-40B4-BE49-F238E27FC236}">
-                <a16:creationId xmlns:a16="http://schemas.microsoft.com/office/drawing/2014/main" id="{3020DBAE-B8F3-4A8A-8C93-80839F3E1266}"/>
+                <a16:creationId xmlns:a16="http://schemas.microsoft.com/office/drawing/2014/main" id="{80FF5CBE-85E0-49D5-88E1-4CC0967EA9AF}"/>
               </a:ext>
             </a:extLst>
           </p:cNvPr>
@@ -8178,7 +8178,7 @@
           <p:cNvPr id="16" name="">
             <a:extLst xmlns:a="http://schemas.openxmlformats.org/drawingml/2006/main">
               <a:ext uri="{FF2B5EF4-FFF2-40B4-BE49-F238E27FC236}">
-                <a16:creationId xmlns:a16="http://schemas.microsoft.com/office/drawing/2014/main" id="{63681749-EA05-4E73-90A6-E6CE9F1DC716}"/>
+                <a16:creationId xmlns:a16="http://schemas.microsoft.com/office/drawing/2014/main" id="{10F8267B-CCDB-4DB0-8AA7-B3789C37E15D}"/>
               </a:ext>
             </a:extLst>
           </p:cNvPr>
@@ -8219,7 +8219,7 @@
           <p:cNvPr id="17" name="">
             <a:extLst xmlns:a="http://schemas.openxmlformats.org/drawingml/2006/main">
               <a:ext uri="{FF2B5EF4-FFF2-40B4-BE49-F238E27FC236}">
-                <a16:creationId xmlns:a16="http://schemas.microsoft.com/office/drawing/2014/main" id="{3BEFFC66-E6AD-416A-9EDF-46669EE61DB7}"/>
+                <a16:creationId xmlns:a16="http://schemas.microsoft.com/office/drawing/2014/main" id="{A47F9CA4-5BE3-418B-B125-A6FA3DA088F8}"/>
               </a:ext>
             </a:extLst>
           </p:cNvPr>
@@ -8281,7 +8281,7 @@
           <p:cNvPr id="18" name="">
             <a:extLst xmlns:a="http://schemas.openxmlformats.org/drawingml/2006/main">
               <a:ext uri="{FF2B5EF4-FFF2-40B4-BE49-F238E27FC236}">
-                <a16:creationId xmlns:a16="http://schemas.microsoft.com/office/drawing/2014/main" id="{8E2D7D8E-354D-42B7-811B-93A2EBB27DBF}"/>
+                <a16:creationId xmlns:a16="http://schemas.microsoft.com/office/drawing/2014/main" id="{A6B5CBB6-1E4D-4914-A1DC-F5BACEBB6E55}"/>
               </a:ext>
             </a:extLst>
           </p:cNvPr>
@@ -8322,7 +8322,7 @@
           <p:cNvPr id="19" name="">
             <a:extLst xmlns:a="http://schemas.openxmlformats.org/drawingml/2006/main">
               <a:ext uri="{FF2B5EF4-FFF2-40B4-BE49-F238E27FC236}">
-                <a16:creationId xmlns:a16="http://schemas.microsoft.com/office/drawing/2014/main" id="{376FD294-EB2E-437C-8D1B-88C2C4680820}"/>
+                <a16:creationId xmlns:a16="http://schemas.microsoft.com/office/drawing/2014/main" id="{7A2D40FC-0345-4AE4-A343-38E5AF549798}"/>
               </a:ext>
             </a:extLst>
           </p:cNvPr>
@@ -8384,7 +8384,7 @@
           <p:cNvPr id="20" name="">
             <a:extLst xmlns:a="http://schemas.openxmlformats.org/drawingml/2006/main">
               <a:ext uri="{FF2B5EF4-FFF2-40B4-BE49-F238E27FC236}">
-                <a16:creationId xmlns:a16="http://schemas.microsoft.com/office/drawing/2014/main" id="{C2C5853D-B867-4314-ACDD-96EA8F0E8B3B}"/>
+                <a16:creationId xmlns:a16="http://schemas.microsoft.com/office/drawing/2014/main" id="{182FE780-9F29-4C9A-87D0-C2E3D3780946}"/>
               </a:ext>
             </a:extLst>
           </p:cNvPr>
@@ -8425,7 +8425,7 @@
           <p:cNvPr id="21" name="">
             <a:extLst xmlns:a="http://schemas.openxmlformats.org/drawingml/2006/main">
               <a:ext uri="{FF2B5EF4-FFF2-40B4-BE49-F238E27FC236}">
-                <a16:creationId xmlns:a16="http://schemas.microsoft.com/office/drawing/2014/main" id="{8D239EDE-E74C-42EA-BB9E-5636A0FC2FC0}"/>
+                <a16:creationId xmlns:a16="http://schemas.microsoft.com/office/drawing/2014/main" id="{FBA606DD-9C23-4C1E-BD30-E3186D57E1C9}"/>
               </a:ext>
             </a:extLst>
           </p:cNvPr>
@@ -8487,7 +8487,7 @@
           <p:cNvPr id="22" name="">
             <a:extLst xmlns:a="http://schemas.openxmlformats.org/drawingml/2006/main">
               <a:ext uri="{FF2B5EF4-FFF2-40B4-BE49-F238E27FC236}">
-                <a16:creationId xmlns:a16="http://schemas.microsoft.com/office/drawing/2014/main" id="{F43F7797-E4A1-48A2-9281-5DAAD0FA5249}"/>
+                <a16:creationId xmlns:a16="http://schemas.microsoft.com/office/drawing/2014/main" id="{A457F76F-AFFF-49CD-9950-00E12386496B}"/>
               </a:ext>
             </a:extLst>
           </p:cNvPr>
@@ -8528,7 +8528,7 @@
           <p:cNvPr id="23" name="">
             <a:extLst xmlns:a="http://schemas.openxmlformats.org/drawingml/2006/main">
               <a:ext uri="{FF2B5EF4-FFF2-40B4-BE49-F238E27FC236}">
-                <a16:creationId xmlns:a16="http://schemas.microsoft.com/office/drawing/2014/main" id="{526FF576-C5FC-40D4-A29E-FE265043E87B}"/>
+                <a16:creationId xmlns:a16="http://schemas.microsoft.com/office/drawing/2014/main" id="{9FC0F392-41A1-4888-AC72-14F7A9CBCF84}"/>
               </a:ext>
             </a:extLst>
           </p:cNvPr>
@@ -8580,7 +8580,7 @@
                 <a:ea typeface="PingFang SC"/>
                 <a:cs typeface="PingFang SC"/>
               </a:rPr>
-              <a:t>讲数据卡</a:t>
+              <a:t>Dataset card</a:t>
             </a:r>
           </a:p>
         </p:txBody>
@@ -8590,7 +8590,7 @@
           <p:cNvPr id="24" name="">
             <a:extLst xmlns:a="http://schemas.openxmlformats.org/drawingml/2006/main">
               <a:ext uri="{FF2B5EF4-FFF2-40B4-BE49-F238E27FC236}">
-                <a16:creationId xmlns:a16="http://schemas.microsoft.com/office/drawing/2014/main" id="{7E30441F-AB2B-45F6-9D44-634773E691F9}"/>
+                <a16:creationId xmlns:a16="http://schemas.microsoft.com/office/drawing/2014/main" id="{FE97B63B-9D30-4E08-8BD5-EB38F8FB57A9}"/>
               </a:ext>
             </a:extLst>
           </p:cNvPr>
@@ -8652,7 +8652,7 @@
           <p:cNvPr id="25" name="">
             <a:extLst xmlns:a="http://schemas.openxmlformats.org/drawingml/2006/main">
               <a:ext uri="{FF2B5EF4-FFF2-40B4-BE49-F238E27FC236}">
-                <a16:creationId xmlns:a16="http://schemas.microsoft.com/office/drawing/2014/main" id="{0C50BB0B-DC08-4E66-83CF-2B723325187F}"/>
+                <a16:creationId xmlns:a16="http://schemas.microsoft.com/office/drawing/2014/main" id="{90313215-5010-40B0-8DD7-52000ADACF2D}"/>
               </a:ext>
             </a:extLst>
           </p:cNvPr>
@@ -8693,7 +8693,7 @@
           <p:cNvPr id="26" name="">
             <a:extLst xmlns:a="http://schemas.openxmlformats.org/drawingml/2006/main">
               <a:ext uri="{FF2B5EF4-FFF2-40B4-BE49-F238E27FC236}">
-                <a16:creationId xmlns:a16="http://schemas.microsoft.com/office/drawing/2014/main" id="{8CBB7156-3971-4F27-8431-AA5A45B4A3A4}"/>
+                <a16:creationId xmlns:a16="http://schemas.microsoft.com/office/drawing/2014/main" id="{F0548ECD-E30F-4883-B082-C52847E3BC4F}"/>
               </a:ext>
             </a:extLst>
           </p:cNvPr>
@@ -8745,7 +8745,7 @@
                 <a:ea typeface="PingFang SC"/>
                 <a:cs typeface="PingFang SC"/>
               </a:rPr>
-              <a:t>讲计划</a:t>
+              <a:t>Analysis plan</a:t>
             </a:r>
           </a:p>
         </p:txBody>
@@ -8755,7 +8755,7 @@
           <p:cNvPr id="27" name="">
             <a:extLst xmlns:a="http://schemas.openxmlformats.org/drawingml/2006/main">
               <a:ext uri="{FF2B5EF4-FFF2-40B4-BE49-F238E27FC236}">
-                <a16:creationId xmlns:a16="http://schemas.microsoft.com/office/drawing/2014/main" id="{DE101CEE-EEE7-44AF-83E9-65F5CB1D89B6}"/>
+                <a16:creationId xmlns:a16="http://schemas.microsoft.com/office/drawing/2014/main" id="{B418970D-9879-4393-9033-3F5C03B4D4C5}"/>
               </a:ext>
             </a:extLst>
           </p:cNvPr>
@@ -8817,7 +8817,7 @@
           <p:cNvPr id="28" name="">
             <a:extLst xmlns:a="http://schemas.openxmlformats.org/drawingml/2006/main">
               <a:ext uri="{FF2B5EF4-FFF2-40B4-BE49-F238E27FC236}">
-                <a16:creationId xmlns:a16="http://schemas.microsoft.com/office/drawing/2014/main" id="{02A313C8-3864-46BC-AD4A-8DC4D62E0F41}"/>
+                <a16:creationId xmlns:a16="http://schemas.microsoft.com/office/drawing/2014/main" id="{23FE0339-9FCA-4699-8657-3AA5DF6006AF}"/>
               </a:ext>
             </a:extLst>
           </p:cNvPr>
@@ -8858,7 +8858,7 @@
           <p:cNvPr id="29" name="">
             <a:extLst xmlns:a="http://schemas.openxmlformats.org/drawingml/2006/main">
               <a:ext uri="{FF2B5EF4-FFF2-40B4-BE49-F238E27FC236}">
-                <a16:creationId xmlns:a16="http://schemas.microsoft.com/office/drawing/2014/main" id="{16FD8258-0852-45BA-A16E-A0F577C7047F}"/>
+                <a16:creationId xmlns:a16="http://schemas.microsoft.com/office/drawing/2014/main" id="{4CDDCB7B-2588-43C9-9D5F-C42E3EF3B243}"/>
               </a:ext>
             </a:extLst>
           </p:cNvPr>
@@ -8920,7 +8920,7 @@
           <p:cNvPr id="30" name="">
             <a:extLst xmlns:a="http://schemas.openxmlformats.org/drawingml/2006/main">
               <a:ext uri="{FF2B5EF4-FFF2-40B4-BE49-F238E27FC236}">
-                <a16:creationId xmlns:a16="http://schemas.microsoft.com/office/drawing/2014/main" id="{812CCA80-D2AD-41FE-950C-1843CF6F7513}"/>
+                <a16:creationId xmlns:a16="http://schemas.microsoft.com/office/drawing/2014/main" id="{7D8C32AC-9116-471E-8CEC-0AA3CC3DF9C3}"/>
               </a:ext>
             </a:extLst>
           </p:cNvPr>
@@ -8982,7 +8982,7 @@
           <p:cNvPr id="31" name="">
             <a:extLst xmlns:a="http://schemas.openxmlformats.org/drawingml/2006/main">
               <a:ext uri="{FF2B5EF4-FFF2-40B4-BE49-F238E27FC236}">
-                <a16:creationId xmlns:a16="http://schemas.microsoft.com/office/drawing/2014/main" id="{CF72FFB2-4ABA-4A75-82D1-9669C2F1A544}"/>
+                <a16:creationId xmlns:a16="http://schemas.microsoft.com/office/drawing/2014/main" id="{94216A1F-407E-4BB3-A922-51D2E5BAB730}"/>
               </a:ext>
             </a:extLst>
           </p:cNvPr>
@@ -9023,7 +9023,7 @@
           <p:cNvPr id="32" name="">
             <a:extLst xmlns:a="http://schemas.openxmlformats.org/drawingml/2006/main">
               <a:ext uri="{FF2B5EF4-FFF2-40B4-BE49-F238E27FC236}">
-                <a16:creationId xmlns:a16="http://schemas.microsoft.com/office/drawing/2014/main" id="{0A853944-9310-442D-802B-29E0DFA30D22}"/>
+                <a16:creationId xmlns:a16="http://schemas.microsoft.com/office/drawing/2014/main" id="{1EB8AF08-AFD7-45A9-B24A-AB355ADB74BB}"/>
               </a:ext>
             </a:extLst>
           </p:cNvPr>
@@ -9085,7 +9085,7 @@
           <p:cNvPr id="33" name="">
             <a:extLst xmlns:a="http://schemas.openxmlformats.org/drawingml/2006/main">
               <a:ext uri="{FF2B5EF4-FFF2-40B4-BE49-F238E27FC236}">
-                <a16:creationId xmlns:a16="http://schemas.microsoft.com/office/drawing/2014/main" id="{C7A6ED27-19DF-491C-83E5-6DD0038F83DF}"/>
+                <a16:creationId xmlns:a16="http://schemas.microsoft.com/office/drawing/2014/main" id="{CF0D3916-03C4-44FC-A78C-9A3E5F54E95C}"/>
               </a:ext>
             </a:extLst>
           </p:cNvPr>
@@ -9174,7 +9174,7 @@
           <p:cNvPr id="34" name="">
             <a:extLst xmlns:a="http://schemas.openxmlformats.org/drawingml/2006/main">
               <a:ext uri="{FF2B5EF4-FFF2-40B4-BE49-F238E27FC236}">
-                <a16:creationId xmlns:a16="http://schemas.microsoft.com/office/drawing/2014/main" id="{4B7D13F0-B6F7-4990-B692-835C8E824670}"/>
+                <a16:creationId xmlns:a16="http://schemas.microsoft.com/office/drawing/2014/main" id="{B4B0628A-60FD-4FE9-802C-9C0C6E5C559C}"/>
               </a:ext>
             </a:extLst>
           </p:cNvPr>
@@ -9226,7 +9226,7 @@
                 <a:ea typeface="PingFang SC"/>
                 <a:cs typeface="PingFang SC"/>
               </a:rPr>
-              <a:t>每一步都对应前面讲过的标准分析流程，而不是只演示按钮。</a:t>
+              <a:t>每一步都对应标准分析流程：理解数据、执行分析、回到证据复核。</a:t>
             </a:r>
           </a:p>
         </p:txBody>
@@ -9236,7 +9236,7 @@
           <p:cNvPr id="35" name="">
             <a:extLst xmlns:a="http://schemas.openxmlformats.org/drawingml/2006/main">
               <a:ext uri="{FF2B5EF4-FFF2-40B4-BE49-F238E27FC236}">
-                <a16:creationId xmlns:a16="http://schemas.microsoft.com/office/drawing/2014/main" id="{99097CAF-1244-48A1-8066-BB547E9A5560}"/>
+                <a16:creationId xmlns:a16="http://schemas.microsoft.com/office/drawing/2014/main" id="{738BC0F1-12DF-47E0-A48A-7A92CA450B40}"/>
               </a:ext>
             </a:extLst>
           </p:cNvPr>
@@ -9267,7 +9267,7 @@
           <p:cNvPr id="36" name="">
             <a:extLst xmlns:a="http://schemas.openxmlformats.org/drawingml/2006/main">
               <a:ext uri="{FF2B5EF4-FFF2-40B4-BE49-F238E27FC236}">
-                <a16:creationId xmlns:a16="http://schemas.microsoft.com/office/drawing/2014/main" id="{45607EDC-2A39-438C-9697-F41195641E95}"/>
+                <a16:creationId xmlns:a16="http://schemas.microsoft.com/office/drawing/2014/main" id="{74A1991B-9B70-4819-B021-7910F4DF7820}"/>
               </a:ext>
             </a:extLst>
           </p:cNvPr>
@@ -9329,7 +9329,7 @@
           <p:cNvPr id="37" name="">
             <a:extLst xmlns:a="http://schemas.openxmlformats.org/drawingml/2006/main">
               <a:ext uri="{FF2B5EF4-FFF2-40B4-BE49-F238E27FC236}">
-                <a16:creationId xmlns:a16="http://schemas.microsoft.com/office/drawing/2014/main" id="{E595F461-F572-4718-990C-99A93858010A}"/>
+                <a16:creationId xmlns:a16="http://schemas.microsoft.com/office/drawing/2014/main" id="{6755B8DF-CB1F-49D2-9728-64A3E85B23AE}"/>
               </a:ext>
             </a:extLst>
           </p:cNvPr>
@@ -9389,7 +9389,7 @@
     </p:spTree>
     <p:extLst>
       <p:ext uri="{BB962C8B-B14F-4D97-AF65-F5344CB8AC3E}">
-        <p14:creationId xmlns:p14="http://schemas.microsoft.com/office/powerpoint/2010/main" val="1214885916"/>
+        <p14:creationId xmlns:p14="http://schemas.microsoft.com/office/powerpoint/2010/main" val="464821305"/>
       </p:ext>
     </p:extLst>
   </p:cSld>
@@ -9420,7 +9420,7 @@
           <p:cNvPr id="1" name="">
             <a:extLst xmlns:a="http://schemas.openxmlformats.org/drawingml/2006/main">
               <a:ext uri="{FF2B5EF4-FFF2-40B4-BE49-F238E27FC236}">
-                <a16:creationId xmlns:a16="http://schemas.microsoft.com/office/drawing/2014/main" id="{30E44B88-5948-4999-AAC2-3C6CC61339BB}"/>
+                <a16:creationId xmlns:a16="http://schemas.microsoft.com/office/drawing/2014/main" id="{02A49B88-9DFD-49E9-BE46-61734D3E5DE5}"/>
               </a:ext>
             </a:extLst>
           </p:cNvPr>
@@ -9482,7 +9482,7 @@
           <p:cNvPr id="2" name="">
             <a:extLst xmlns:a="http://schemas.openxmlformats.org/drawingml/2006/main">
               <a:ext uri="{FF2B5EF4-FFF2-40B4-BE49-F238E27FC236}">
-                <a16:creationId xmlns:a16="http://schemas.microsoft.com/office/drawing/2014/main" id="{3F9B7FC5-DBF2-4C71-B9BD-BDFAC1D46714}"/>
+                <a16:creationId xmlns:a16="http://schemas.microsoft.com/office/drawing/2014/main" id="{532388BD-F64D-46AD-9262-3AF7B9E33602}"/>
               </a:ext>
             </a:extLst>
           </p:cNvPr>
@@ -9544,7 +9544,7 @@
           <p:cNvPr id="3" name="">
             <a:extLst xmlns:a="http://schemas.openxmlformats.org/drawingml/2006/main">
               <a:ext uri="{FF2B5EF4-FFF2-40B4-BE49-F238E27FC236}">
-                <a16:creationId xmlns:a16="http://schemas.microsoft.com/office/drawing/2014/main" id="{48CDF56D-A473-485C-A3FE-234F6BE83E87}"/>
+                <a16:creationId xmlns:a16="http://schemas.microsoft.com/office/drawing/2014/main" id="{B8786ABE-5DCB-459E-ADAA-9E3EFB6F57F2}"/>
               </a:ext>
             </a:extLst>
           </p:cNvPr>
@@ -9585,7 +9585,7 @@
           <p:cNvPr id="4" name="">
             <a:extLst xmlns:a="http://schemas.openxmlformats.org/drawingml/2006/main">
               <a:ext uri="{FF2B5EF4-FFF2-40B4-BE49-F238E27FC236}">
-                <a16:creationId xmlns:a16="http://schemas.microsoft.com/office/drawing/2014/main" id="{EFB922E5-DC6F-4A0C-AC71-01277AF5752A}"/>
+                <a16:creationId xmlns:a16="http://schemas.microsoft.com/office/drawing/2014/main" id="{1D6301DE-10D0-4EE0-B426-B27E43FC514F}"/>
               </a:ext>
             </a:extLst>
           </p:cNvPr>
@@ -9647,7 +9647,7 @@
           <p:cNvPr id="5" name="">
             <a:extLst xmlns:a="http://schemas.openxmlformats.org/drawingml/2006/main">
               <a:ext uri="{FF2B5EF4-FFF2-40B4-BE49-F238E27FC236}">
-                <a16:creationId xmlns:a16="http://schemas.microsoft.com/office/drawing/2014/main" id="{29EE1068-5A77-4795-BE82-87E9A7FBF7BF}"/>
+                <a16:creationId xmlns:a16="http://schemas.microsoft.com/office/drawing/2014/main" id="{FB6F4E37-1EAD-4A61-8A2F-7DAB745E0E7F}"/>
               </a:ext>
             </a:extLst>
           </p:cNvPr>
@@ -9794,7 +9794,7 @@
           <p:nvPr/>
         </p:nvPicPr>
         <p:blipFill>
-          <a:blip xmlns:r="http://schemas.openxmlformats.org/officeDocument/2006/relationships" xmlns:a="http://schemas.openxmlformats.org/drawingml/2006/main" r:embed="R5e73dab6bb1f4ee1"/>
+          <a:blip xmlns:r="http://schemas.openxmlformats.org/officeDocument/2006/relationships" xmlns:a="http://schemas.openxmlformats.org/drawingml/2006/main" r:embed="R822a7cea8b7c472f"/>
           <a:stretch xmlns:a="http://schemas.openxmlformats.org/drawingml/2006/main"/>
         </p:blipFill>
         <p:spPr>
@@ -9818,7 +9818,7 @@
           <p:nvPr/>
         </p:nvPicPr>
         <p:blipFill>
-          <a:blip xmlns:r="http://schemas.openxmlformats.org/officeDocument/2006/relationships" xmlns:a="http://schemas.openxmlformats.org/drawingml/2006/main" r:embed="R0088f42699cc452d"/>
+          <a:blip xmlns:r="http://schemas.openxmlformats.org/officeDocument/2006/relationships" xmlns:a="http://schemas.openxmlformats.org/drawingml/2006/main" r:embed="R51fcb1ec5201493d"/>
           <a:stretch xmlns:a="http://schemas.openxmlformats.org/drawingml/2006/main"/>
         </p:blipFill>
         <p:spPr>
@@ -9842,7 +9842,7 @@
           <p:nvPr/>
         </p:nvPicPr>
         <p:blipFill>
-          <a:blip xmlns:r="http://schemas.openxmlformats.org/officeDocument/2006/relationships" xmlns:a="http://schemas.openxmlformats.org/drawingml/2006/main" r:embed="R26293b51290a4735"/>
+          <a:blip xmlns:r="http://schemas.openxmlformats.org/officeDocument/2006/relationships" xmlns:a="http://schemas.openxmlformats.org/drawingml/2006/main" r:embed="R9648cd193a4d4fbd"/>
           <a:stretch xmlns:a="http://schemas.openxmlformats.org/drawingml/2006/main"/>
         </p:blipFill>
         <p:spPr>
@@ -9862,7 +9862,7 @@
           <p:cNvPr id="9" name="">
             <a:extLst xmlns:a="http://schemas.openxmlformats.org/drawingml/2006/main">
               <a:ext uri="{FF2B5EF4-FFF2-40B4-BE49-F238E27FC236}">
-                <a16:creationId xmlns:a16="http://schemas.microsoft.com/office/drawing/2014/main" id="{8965F0BC-32CA-458A-BFF5-75B6F8164A56}"/>
+                <a16:creationId xmlns:a16="http://schemas.microsoft.com/office/drawing/2014/main" id="{1B028C31-638F-4CF5-9494-F92AFE9D2F1D}"/>
               </a:ext>
             </a:extLst>
           </p:cNvPr>
@@ -9924,7 +9924,7 @@
           <p:cNvPr id="10" name="">
             <a:extLst xmlns:a="http://schemas.openxmlformats.org/drawingml/2006/main">
               <a:ext uri="{FF2B5EF4-FFF2-40B4-BE49-F238E27FC236}">
-                <a16:creationId xmlns:a16="http://schemas.microsoft.com/office/drawing/2014/main" id="{5680B982-5887-4B3C-A383-B9D96397871A}"/>
+                <a16:creationId xmlns:a16="http://schemas.microsoft.com/office/drawing/2014/main" id="{699D1036-0B0A-491C-B34E-0BEBED688EA7}"/>
               </a:ext>
             </a:extLst>
           </p:cNvPr>
@@ -9955,7 +9955,7 @@
           <p:cNvPr id="11" name="">
             <a:extLst xmlns:a="http://schemas.openxmlformats.org/drawingml/2006/main">
               <a:ext uri="{FF2B5EF4-FFF2-40B4-BE49-F238E27FC236}">
-                <a16:creationId xmlns:a16="http://schemas.microsoft.com/office/drawing/2014/main" id="{90C5CBB6-A58D-42E8-8FC1-41B164EB9A23}"/>
+                <a16:creationId xmlns:a16="http://schemas.microsoft.com/office/drawing/2014/main" id="{A211FAFD-65B0-4CE9-8EC9-039026D60560}"/>
               </a:ext>
             </a:extLst>
           </p:cNvPr>
@@ -10017,7 +10017,7 @@
           <p:cNvPr id="12" name="">
             <a:extLst xmlns:a="http://schemas.openxmlformats.org/drawingml/2006/main">
               <a:ext uri="{FF2B5EF4-FFF2-40B4-BE49-F238E27FC236}">
-                <a16:creationId xmlns:a16="http://schemas.microsoft.com/office/drawing/2014/main" id="{2A5AC71F-2B3C-460D-9548-2FD052E1101C}"/>
+                <a16:creationId xmlns:a16="http://schemas.microsoft.com/office/drawing/2014/main" id="{C701F595-3751-405C-8092-D0A1EE040583}"/>
               </a:ext>
             </a:extLst>
           </p:cNvPr>
@@ -10077,7 +10077,7 @@
     </p:spTree>
     <p:extLst>
       <p:ext uri="{BB962C8B-B14F-4D97-AF65-F5344CB8AC3E}">
-        <p14:creationId xmlns:p14="http://schemas.microsoft.com/office/powerpoint/2010/main" val="1688440060"/>
+        <p14:creationId xmlns:p14="http://schemas.microsoft.com/office/powerpoint/2010/main" val="376464063"/>
       </p:ext>
     </p:extLst>
   </p:cSld>
@@ -10108,7 +10108,7 @@
           <p:cNvPr id="1" name="">
             <a:extLst xmlns:a="http://schemas.openxmlformats.org/drawingml/2006/main">
               <a:ext uri="{FF2B5EF4-FFF2-40B4-BE49-F238E27FC236}">
-                <a16:creationId xmlns:a16="http://schemas.microsoft.com/office/drawing/2014/main" id="{D2B4491A-116B-431E-9EDB-21CA194C5EE5}"/>
+                <a16:creationId xmlns:a16="http://schemas.microsoft.com/office/drawing/2014/main" id="{8B7440F9-5DC9-4CAD-A2C8-C876DAB460A1}"/>
               </a:ext>
             </a:extLst>
           </p:cNvPr>
@@ -10170,7 +10170,7 @@
           <p:cNvPr id="2" name="">
             <a:extLst xmlns:a="http://schemas.openxmlformats.org/drawingml/2006/main">
               <a:ext uri="{FF2B5EF4-FFF2-40B4-BE49-F238E27FC236}">
-                <a16:creationId xmlns:a16="http://schemas.microsoft.com/office/drawing/2014/main" id="{EFBC499A-CCC8-497B-8A74-C44C58DF2CB2}"/>
+                <a16:creationId xmlns:a16="http://schemas.microsoft.com/office/drawing/2014/main" id="{1D631463-F49D-4866-BF2A-7AB829359347}"/>
               </a:ext>
             </a:extLst>
           </p:cNvPr>
@@ -10232,7 +10232,7 @@
           <p:cNvPr id="3" name="">
             <a:extLst xmlns:a="http://schemas.openxmlformats.org/drawingml/2006/main">
               <a:ext uri="{FF2B5EF4-FFF2-40B4-BE49-F238E27FC236}">
-                <a16:creationId xmlns:a16="http://schemas.microsoft.com/office/drawing/2014/main" id="{83188022-81DC-4A82-9EE6-538F4BBEC638}"/>
+                <a16:creationId xmlns:a16="http://schemas.microsoft.com/office/drawing/2014/main" id="{19A1443D-2A34-4B9B-8DFD-B6964D4A7B84}"/>
               </a:ext>
             </a:extLst>
           </p:cNvPr>
@@ -10273,7 +10273,7 @@
           <p:cNvPr id="4" name="">
             <a:extLst xmlns:a="http://schemas.openxmlformats.org/drawingml/2006/main">
               <a:ext uri="{FF2B5EF4-FFF2-40B4-BE49-F238E27FC236}">
-                <a16:creationId xmlns:a16="http://schemas.microsoft.com/office/drawing/2014/main" id="{DD1F3971-24B3-4F75-A925-9AB6B8025564}"/>
+                <a16:creationId xmlns:a16="http://schemas.microsoft.com/office/drawing/2014/main" id="{18423EA6-B9B8-43DC-9B78-C43A57665DD6}"/>
               </a:ext>
             </a:extLst>
           </p:cNvPr>
@@ -10335,7 +10335,7 @@
           <p:cNvPr id="5" name="">
             <a:extLst xmlns:a="http://schemas.openxmlformats.org/drawingml/2006/main">
               <a:ext uri="{FF2B5EF4-FFF2-40B4-BE49-F238E27FC236}">
-                <a16:creationId xmlns:a16="http://schemas.microsoft.com/office/drawing/2014/main" id="{DE020BFA-F6A6-41BB-B06C-D64B6CFE677B}"/>
+                <a16:creationId xmlns:a16="http://schemas.microsoft.com/office/drawing/2014/main" id="{ECD3598C-CB59-4B83-B802-043B55BCDDF2}"/>
               </a:ext>
             </a:extLst>
           </p:cNvPr>
@@ -10424,7 +10424,7 @@
           <p:cNvPr id="6" name="">
             <a:extLst xmlns:a="http://schemas.openxmlformats.org/drawingml/2006/main">
               <a:ext uri="{FF2B5EF4-FFF2-40B4-BE49-F238E27FC236}">
-                <a16:creationId xmlns:a16="http://schemas.microsoft.com/office/drawing/2014/main" id="{A4F5FB47-9D1E-441A-A2C3-D70E19FC3A46}"/>
+                <a16:creationId xmlns:a16="http://schemas.microsoft.com/office/drawing/2014/main" id="{5064D848-EF6E-45E3-830C-E32CA321B292}"/>
               </a:ext>
             </a:extLst>
           </p:cNvPr>
@@ -10465,7 +10465,7 @@
           <p:cNvPr id="7" name="">
             <a:extLst xmlns:a="http://schemas.openxmlformats.org/drawingml/2006/main">
               <a:ext uri="{FF2B5EF4-FFF2-40B4-BE49-F238E27FC236}">
-                <a16:creationId xmlns:a16="http://schemas.microsoft.com/office/drawing/2014/main" id="{563803D5-CED5-4FC0-A379-C5C0DE084E0D}"/>
+                <a16:creationId xmlns:a16="http://schemas.microsoft.com/office/drawing/2014/main" id="{856D5FD1-A813-44B9-9A41-BB012BAAAF87}"/>
               </a:ext>
             </a:extLst>
           </p:cNvPr>
@@ -10527,7 +10527,7 @@
           <p:cNvPr id="8" name="">
             <a:extLst xmlns:a="http://schemas.openxmlformats.org/drawingml/2006/main">
               <a:ext uri="{FF2B5EF4-FFF2-40B4-BE49-F238E27FC236}">
-                <a16:creationId xmlns:a16="http://schemas.microsoft.com/office/drawing/2014/main" id="{FA085C79-E652-4442-AEFC-FE9544C5497C}"/>
+                <a16:creationId xmlns:a16="http://schemas.microsoft.com/office/drawing/2014/main" id="{A0E54070-3B00-4703-AFE5-78E81D6325BF}"/>
               </a:ext>
             </a:extLst>
           </p:cNvPr>
@@ -10616,7 +10616,7 @@
           <p:cNvPr id="9" name="">
             <a:extLst xmlns:a="http://schemas.openxmlformats.org/drawingml/2006/main">
               <a:ext uri="{FF2B5EF4-FFF2-40B4-BE49-F238E27FC236}">
-                <a16:creationId xmlns:a16="http://schemas.microsoft.com/office/drawing/2014/main" id="{3FD6CC63-42EF-4155-ADE8-76D78ECDCA93}"/>
+                <a16:creationId xmlns:a16="http://schemas.microsoft.com/office/drawing/2014/main" id="{445760C3-E5A4-4384-9F03-FEE6F8B3897A}"/>
               </a:ext>
             </a:extLst>
           </p:cNvPr>
@@ -10657,7 +10657,7 @@
           <p:cNvPr id="10" name="">
             <a:extLst xmlns:a="http://schemas.openxmlformats.org/drawingml/2006/main">
               <a:ext uri="{FF2B5EF4-FFF2-40B4-BE49-F238E27FC236}">
-                <a16:creationId xmlns:a16="http://schemas.microsoft.com/office/drawing/2014/main" id="{5055614D-4137-4036-A32E-3D3CB5169260}"/>
+                <a16:creationId xmlns:a16="http://schemas.microsoft.com/office/drawing/2014/main" id="{7D516C0A-D4C3-4B2B-A9EB-C5EFD39D154E}"/>
               </a:ext>
             </a:extLst>
           </p:cNvPr>
@@ -10719,7 +10719,7 @@
           <p:cNvPr id="11" name="">
             <a:extLst xmlns:a="http://schemas.openxmlformats.org/drawingml/2006/main">
               <a:ext uri="{FF2B5EF4-FFF2-40B4-BE49-F238E27FC236}">
-                <a16:creationId xmlns:a16="http://schemas.microsoft.com/office/drawing/2014/main" id="{B24E08F6-35F6-4031-A082-3EC79AA591F6}"/>
+                <a16:creationId xmlns:a16="http://schemas.microsoft.com/office/drawing/2014/main" id="{574FFC9F-1EF4-4294-BECB-A551417A9940}"/>
               </a:ext>
             </a:extLst>
           </p:cNvPr>
@@ -10808,7 +10808,7 @@
           <p:cNvPr id="12" name="">
             <a:extLst xmlns:a="http://schemas.openxmlformats.org/drawingml/2006/main">
               <a:ext uri="{FF2B5EF4-FFF2-40B4-BE49-F238E27FC236}">
-                <a16:creationId xmlns:a16="http://schemas.microsoft.com/office/drawing/2014/main" id="{B5EED4CF-E183-409F-BF64-429942EF572D}"/>
+                <a16:creationId xmlns:a16="http://schemas.microsoft.com/office/drawing/2014/main" id="{01BD8FD4-9EBD-4C46-B41D-8561606767F8}"/>
               </a:ext>
             </a:extLst>
           </p:cNvPr>
@@ -10849,7 +10849,7 @@
           <p:cNvPr id="13" name="">
             <a:extLst xmlns:a="http://schemas.openxmlformats.org/drawingml/2006/main">
               <a:ext uri="{FF2B5EF4-FFF2-40B4-BE49-F238E27FC236}">
-                <a16:creationId xmlns:a16="http://schemas.microsoft.com/office/drawing/2014/main" id="{364CAD05-30A8-46CF-993C-3D4D935EDDCE}"/>
+                <a16:creationId xmlns:a16="http://schemas.microsoft.com/office/drawing/2014/main" id="{B8A7C5DE-3007-4B30-AC3F-7F189848E695}"/>
               </a:ext>
             </a:extLst>
           </p:cNvPr>
@@ -10911,7 +10911,7 @@
           <p:cNvPr id="14" name="">
             <a:extLst xmlns:a="http://schemas.openxmlformats.org/drawingml/2006/main">
               <a:ext uri="{FF2B5EF4-FFF2-40B4-BE49-F238E27FC236}">
-                <a16:creationId xmlns:a16="http://schemas.microsoft.com/office/drawing/2014/main" id="{887064BF-62FD-48AE-B7B1-8090499A42A7}"/>
+                <a16:creationId xmlns:a16="http://schemas.microsoft.com/office/drawing/2014/main" id="{EEC9E85A-C961-4C8A-8B60-4A95B4A925BC}"/>
               </a:ext>
             </a:extLst>
           </p:cNvPr>
@@ -11000,7 +11000,7 @@
           <p:cNvPr id="15" name="">
             <a:extLst xmlns:a="http://schemas.openxmlformats.org/drawingml/2006/main">
               <a:ext uri="{FF2B5EF4-FFF2-40B4-BE49-F238E27FC236}">
-                <a16:creationId xmlns:a16="http://schemas.microsoft.com/office/drawing/2014/main" id="{A86FBAC9-64F8-4BE2-8F36-CCFB85578B75}"/>
+                <a16:creationId xmlns:a16="http://schemas.microsoft.com/office/drawing/2014/main" id="{BCE577AC-B98B-4974-AFE7-4C82DDFF0ADD}"/>
               </a:ext>
             </a:extLst>
           </p:cNvPr>
@@ -11041,7 +11041,7 @@
           <p:cNvPr id="16" name="">
             <a:extLst xmlns:a="http://schemas.openxmlformats.org/drawingml/2006/main">
               <a:ext uri="{FF2B5EF4-FFF2-40B4-BE49-F238E27FC236}">
-                <a16:creationId xmlns:a16="http://schemas.microsoft.com/office/drawing/2014/main" id="{6E883D1F-55F4-400F-8B9F-831CF2B5F936}"/>
+                <a16:creationId xmlns:a16="http://schemas.microsoft.com/office/drawing/2014/main" id="{859413C7-4D41-4D8C-B3F8-74B81466AC49}"/>
               </a:ext>
             </a:extLst>
           </p:cNvPr>
@@ -11103,7 +11103,7 @@
           <p:cNvPr id="17" name="">
             <a:extLst xmlns:a="http://schemas.openxmlformats.org/drawingml/2006/main">
               <a:ext uri="{FF2B5EF4-FFF2-40B4-BE49-F238E27FC236}">
-                <a16:creationId xmlns:a16="http://schemas.microsoft.com/office/drawing/2014/main" id="{87B29C2F-F191-4BAB-8C9A-FE27827C64C1}"/>
+                <a16:creationId xmlns:a16="http://schemas.microsoft.com/office/drawing/2014/main" id="{2FD71ACE-BF21-4993-A1DC-2E7BF250D87D}"/>
               </a:ext>
             </a:extLst>
           </p:cNvPr>
@@ -11165,7 +11165,7 @@
           <p:cNvPr id="18" name="">
             <a:extLst xmlns:a="http://schemas.openxmlformats.org/drawingml/2006/main">
               <a:ext uri="{FF2B5EF4-FFF2-40B4-BE49-F238E27FC236}">
-                <a16:creationId xmlns:a16="http://schemas.microsoft.com/office/drawing/2014/main" id="{B9004038-9701-4B9F-8CAE-A91CF03E90E1}"/>
+                <a16:creationId xmlns:a16="http://schemas.microsoft.com/office/drawing/2014/main" id="{EC2A79E9-8974-4F8F-9209-D3657ADEE4C4}"/>
               </a:ext>
             </a:extLst>
           </p:cNvPr>
@@ -11227,7 +11227,7 @@
           <p:cNvPr id="19" name="">
             <a:extLst xmlns:a="http://schemas.openxmlformats.org/drawingml/2006/main">
               <a:ext uri="{FF2B5EF4-FFF2-40B4-BE49-F238E27FC236}">
-                <a16:creationId xmlns:a16="http://schemas.microsoft.com/office/drawing/2014/main" id="{D1C2A4CE-C46A-45F7-8D9D-C506DBB1F88E}"/>
+                <a16:creationId xmlns:a16="http://schemas.microsoft.com/office/drawing/2014/main" id="{DA2CA786-E987-4D08-8166-A37321B20F91}"/>
               </a:ext>
             </a:extLst>
           </p:cNvPr>
@@ -11258,7 +11258,7 @@
           <p:cNvPr id="20" name="">
             <a:extLst xmlns:a="http://schemas.openxmlformats.org/drawingml/2006/main">
               <a:ext uri="{FF2B5EF4-FFF2-40B4-BE49-F238E27FC236}">
-                <a16:creationId xmlns:a16="http://schemas.microsoft.com/office/drawing/2014/main" id="{81476A7E-717B-4B22-BA15-6DCB46A554BC}"/>
+                <a16:creationId xmlns:a16="http://schemas.microsoft.com/office/drawing/2014/main" id="{E71636E4-6669-4697-87AD-FBDFA66AA956}"/>
               </a:ext>
             </a:extLst>
           </p:cNvPr>
@@ -11320,7 +11320,7 @@
           <p:cNvPr id="21" name="">
             <a:extLst xmlns:a="http://schemas.openxmlformats.org/drawingml/2006/main">
               <a:ext uri="{FF2B5EF4-FFF2-40B4-BE49-F238E27FC236}">
-                <a16:creationId xmlns:a16="http://schemas.microsoft.com/office/drawing/2014/main" id="{BF7902A2-20A0-446C-9693-66C0621A6F81}"/>
+                <a16:creationId xmlns:a16="http://schemas.microsoft.com/office/drawing/2014/main" id="{4064F570-1BE0-4F2B-88E7-68B887414962}"/>
               </a:ext>
             </a:extLst>
           </p:cNvPr>
@@ -11380,7 +11380,7 @@
     </p:spTree>
     <p:extLst>
       <p:ext uri="{BB962C8B-B14F-4D97-AF65-F5344CB8AC3E}">
-        <p14:creationId xmlns:p14="http://schemas.microsoft.com/office/powerpoint/2010/main" val="1551933407"/>
+        <p14:creationId xmlns:p14="http://schemas.microsoft.com/office/powerpoint/2010/main" val="233144320"/>
       </p:ext>
     </p:extLst>
   </p:cSld>
@@ -11415,7 +11415,7 @@
           <p:nvPr/>
         </p:nvPicPr>
         <p:blipFill>
-          <a:blip xmlns:r="http://schemas.openxmlformats.org/officeDocument/2006/relationships" xmlns:a="http://schemas.openxmlformats.org/drawingml/2006/main" r:embed="R3ffebcf5ed3b49e0"/>
+          <a:blip xmlns:r="http://schemas.openxmlformats.org/officeDocument/2006/relationships" xmlns:a="http://schemas.openxmlformats.org/drawingml/2006/main" r:embed="R2916f5b945fa47a2"/>
           <a:stretch xmlns:a="http://schemas.openxmlformats.org/drawingml/2006/main"/>
         </p:blipFill>
         <p:spPr>
@@ -11435,7 +11435,7 @@
           <p:cNvPr id="2" name="">
             <a:extLst xmlns:a="http://schemas.openxmlformats.org/drawingml/2006/main">
               <a:ext uri="{FF2B5EF4-FFF2-40B4-BE49-F238E27FC236}">
-                <a16:creationId xmlns:a16="http://schemas.microsoft.com/office/drawing/2014/main" id="{1ADBE043-2009-4AF8-8DB8-A59621F56F09}"/>
+                <a16:creationId xmlns:a16="http://schemas.microsoft.com/office/drawing/2014/main" id="{1FC76AF8-22FA-4893-A548-190E5AB48C42}"/>
               </a:ext>
             </a:extLst>
           </p:cNvPr>
@@ -11497,7 +11497,7 @@
           <p:cNvPr id="3" name="">
             <a:extLst xmlns:a="http://schemas.openxmlformats.org/drawingml/2006/main">
               <a:ext uri="{FF2B5EF4-FFF2-40B4-BE49-F238E27FC236}">
-                <a16:creationId xmlns:a16="http://schemas.microsoft.com/office/drawing/2014/main" id="{41EC67B9-96EF-4B4D-AA1B-C65459783393}"/>
+                <a16:creationId xmlns:a16="http://schemas.microsoft.com/office/drawing/2014/main" id="{C6082EC1-F3A3-48C0-8FE7-258A3A65858D}"/>
               </a:ext>
             </a:extLst>
           </p:cNvPr>
@@ -11530,7 +11530,7 @@
           <p:cNvPr id="4" name="">
             <a:extLst xmlns:a="http://schemas.openxmlformats.org/drawingml/2006/main">
               <a:ext uri="{FF2B5EF4-FFF2-40B4-BE49-F238E27FC236}">
-                <a16:creationId xmlns:a16="http://schemas.microsoft.com/office/drawing/2014/main" id="{CA588C12-4AFB-4E9E-B855-87A63935E174}"/>
+                <a16:creationId xmlns:a16="http://schemas.microsoft.com/office/drawing/2014/main" id="{E414361A-294B-4327-933A-7D7780C11156}"/>
               </a:ext>
             </a:extLst>
           </p:cNvPr>
@@ -11592,7 +11592,7 @@
           <p:cNvPr id="5" name="">
             <a:extLst xmlns:a="http://schemas.openxmlformats.org/drawingml/2006/main">
               <a:ext uri="{FF2B5EF4-FFF2-40B4-BE49-F238E27FC236}">
-                <a16:creationId xmlns:a16="http://schemas.microsoft.com/office/drawing/2014/main" id="{D7C51AE4-CA80-48CE-98C7-B9F78BF26490}"/>
+                <a16:creationId xmlns:a16="http://schemas.microsoft.com/office/drawing/2014/main" id="{6632DC5A-3D3C-4965-8324-59E920FC87AC}"/>
               </a:ext>
             </a:extLst>
           </p:cNvPr>
@@ -11625,7 +11625,7 @@
           <p:cNvPr id="6" name="">
             <a:extLst xmlns:a="http://schemas.openxmlformats.org/drawingml/2006/main">
               <a:ext uri="{FF2B5EF4-FFF2-40B4-BE49-F238E27FC236}">
-                <a16:creationId xmlns:a16="http://schemas.microsoft.com/office/drawing/2014/main" id="{A51D8A31-6B29-4751-A447-0623FE1B29C3}"/>
+                <a16:creationId xmlns:a16="http://schemas.microsoft.com/office/drawing/2014/main" id="{1C903A91-F59D-408E-858D-F025B3189C48}"/>
               </a:ext>
             </a:extLst>
           </p:cNvPr>
@@ -11687,7 +11687,7 @@
           <p:cNvPr id="7" name="">
             <a:extLst xmlns:a="http://schemas.openxmlformats.org/drawingml/2006/main">
               <a:ext uri="{FF2B5EF4-FFF2-40B4-BE49-F238E27FC236}">
-                <a16:creationId xmlns:a16="http://schemas.microsoft.com/office/drawing/2014/main" id="{8B8378B3-790A-46E3-937A-C20AD50A31CF}"/>
+                <a16:creationId xmlns:a16="http://schemas.microsoft.com/office/drawing/2014/main" id="{CEDE250F-F9ED-4D83-B4A6-33C6FB23DFF0}"/>
               </a:ext>
             </a:extLst>
           </p:cNvPr>
@@ -11720,7 +11720,7 @@
           <p:cNvPr id="8" name="">
             <a:extLst xmlns:a="http://schemas.openxmlformats.org/drawingml/2006/main">
               <a:ext uri="{FF2B5EF4-FFF2-40B4-BE49-F238E27FC236}">
-                <a16:creationId xmlns:a16="http://schemas.microsoft.com/office/drawing/2014/main" id="{629ED096-CED5-4D94-8FD5-202397471E73}"/>
+                <a16:creationId xmlns:a16="http://schemas.microsoft.com/office/drawing/2014/main" id="{5DEA4CAD-265E-425B-AB31-A3E8DD8B3B83}"/>
               </a:ext>
             </a:extLst>
           </p:cNvPr>
@@ -11782,7 +11782,7 @@
           <p:cNvPr id="9" name="">
             <a:extLst xmlns:a="http://schemas.openxmlformats.org/drawingml/2006/main">
               <a:ext uri="{FF2B5EF4-FFF2-40B4-BE49-F238E27FC236}">
-                <a16:creationId xmlns:a16="http://schemas.microsoft.com/office/drawing/2014/main" id="{BE13A313-FDC3-4A24-BE80-4947A82BB1E6}"/>
+                <a16:creationId xmlns:a16="http://schemas.microsoft.com/office/drawing/2014/main" id="{DE5974FE-400C-4A8F-B89B-2B43F7E34372}"/>
               </a:ext>
             </a:extLst>
           </p:cNvPr>
@@ -11823,7 +11823,7 @@
           <p:cNvPr id="10" name="">
             <a:extLst xmlns:a="http://schemas.openxmlformats.org/drawingml/2006/main">
               <a:ext uri="{FF2B5EF4-FFF2-40B4-BE49-F238E27FC236}">
-                <a16:creationId xmlns:a16="http://schemas.microsoft.com/office/drawing/2014/main" id="{BAC0F343-41D6-402E-BCBA-6666196DB54A}"/>
+                <a16:creationId xmlns:a16="http://schemas.microsoft.com/office/drawing/2014/main" id="{4A9F3B36-A171-4744-A075-AAD2AF7F68BA}"/>
               </a:ext>
             </a:extLst>
           </p:cNvPr>
@@ -11885,7 +11885,7 @@
           <p:cNvPr id="11" name="">
             <a:extLst xmlns:a="http://schemas.openxmlformats.org/drawingml/2006/main">
               <a:ext uri="{FF2B5EF4-FFF2-40B4-BE49-F238E27FC236}">
-                <a16:creationId xmlns:a16="http://schemas.microsoft.com/office/drawing/2014/main" id="{9B94EFCF-1944-4053-891D-999528AB6363}"/>
+                <a16:creationId xmlns:a16="http://schemas.microsoft.com/office/drawing/2014/main" id="{38F80117-7EB5-4363-8ECE-1B316CDF3F7E}"/>
               </a:ext>
             </a:extLst>
           </p:cNvPr>
@@ -11947,7 +11947,7 @@
           <p:cNvPr id="12" name="">
             <a:extLst xmlns:a="http://schemas.openxmlformats.org/drawingml/2006/main">
               <a:ext uri="{FF2B5EF4-FFF2-40B4-BE49-F238E27FC236}">
-                <a16:creationId xmlns:a16="http://schemas.microsoft.com/office/drawing/2014/main" id="{9CFA7773-6D82-4392-83CE-B7E5EBC4E39C}"/>
+                <a16:creationId xmlns:a16="http://schemas.microsoft.com/office/drawing/2014/main" id="{B1E33BF8-1B6B-41D4-B186-C9EED704C52F}"/>
               </a:ext>
             </a:extLst>
           </p:cNvPr>
@@ -12036,7 +12036,7 @@
           <p:cNvPr id="13" name="">
             <a:extLst xmlns:a="http://schemas.openxmlformats.org/drawingml/2006/main">
               <a:ext uri="{FF2B5EF4-FFF2-40B4-BE49-F238E27FC236}">
-                <a16:creationId xmlns:a16="http://schemas.microsoft.com/office/drawing/2014/main" id="{28E62046-E046-4D87-802F-498F3B30AEB5}"/>
+                <a16:creationId xmlns:a16="http://schemas.microsoft.com/office/drawing/2014/main" id="{12276B6E-071C-45A1-8667-0E90F6285208}"/>
               </a:ext>
             </a:extLst>
           </p:cNvPr>
@@ -12067,7 +12067,7 @@
           <p:cNvPr id="14" name="">
             <a:extLst xmlns:a="http://schemas.openxmlformats.org/drawingml/2006/main">
               <a:ext uri="{FF2B5EF4-FFF2-40B4-BE49-F238E27FC236}">
-                <a16:creationId xmlns:a16="http://schemas.microsoft.com/office/drawing/2014/main" id="{EC7026FB-1F7A-43AA-AC4E-99C272DCFBD5}"/>
+                <a16:creationId xmlns:a16="http://schemas.microsoft.com/office/drawing/2014/main" id="{87E86EE6-FD19-4518-B131-5B7C5089C163}"/>
               </a:ext>
             </a:extLst>
           </p:cNvPr>
@@ -12107,7 +12107,7 @@
           <p:cNvPr id="15" name="">
             <a:extLst xmlns:a="http://schemas.openxmlformats.org/drawingml/2006/main">
               <a:ext uri="{FF2B5EF4-FFF2-40B4-BE49-F238E27FC236}">
-                <a16:creationId xmlns:a16="http://schemas.microsoft.com/office/drawing/2014/main" id="{83A69ED1-8A36-4DDD-8844-98111AC00DE4}"/>
+                <a16:creationId xmlns:a16="http://schemas.microsoft.com/office/drawing/2014/main" id="{9C6E3C01-9FB7-4E4D-A158-761E4808A697}"/>
               </a:ext>
             </a:extLst>
           </p:cNvPr>
@@ -12167,7 +12167,7 @@
     </p:spTree>
     <p:extLst>
       <p:ext uri="{BB962C8B-B14F-4D97-AF65-F5344CB8AC3E}">
-        <p14:creationId xmlns:p14="http://schemas.microsoft.com/office/powerpoint/2010/main" val="1131499322"/>
+        <p14:creationId xmlns:p14="http://schemas.microsoft.com/office/powerpoint/2010/main" val="709123589"/>
       </p:ext>
     </p:extLst>
   </p:cSld>
@@ -12198,7 +12198,7 @@
           <p:cNvPr id="1" name="">
             <a:extLst xmlns:a="http://schemas.openxmlformats.org/drawingml/2006/main">
               <a:ext uri="{FF2B5EF4-FFF2-40B4-BE49-F238E27FC236}">
-                <a16:creationId xmlns:a16="http://schemas.microsoft.com/office/drawing/2014/main" id="{B87D0A92-4FCE-493E-9807-04590BE6C3EF}"/>
+                <a16:creationId xmlns:a16="http://schemas.microsoft.com/office/drawing/2014/main" id="{13231DA7-3649-4070-8192-6443266B74CD}"/>
               </a:ext>
             </a:extLst>
           </p:cNvPr>
@@ -12260,7 +12260,7 @@
           <p:cNvPr id="2" name="">
             <a:extLst xmlns:a="http://schemas.openxmlformats.org/drawingml/2006/main">
               <a:ext uri="{FF2B5EF4-FFF2-40B4-BE49-F238E27FC236}">
-                <a16:creationId xmlns:a16="http://schemas.microsoft.com/office/drawing/2014/main" id="{921E3ED8-C742-40AA-B647-09C995182719}"/>
+                <a16:creationId xmlns:a16="http://schemas.microsoft.com/office/drawing/2014/main" id="{D0EA4ECE-AA13-497C-820E-D1848473A5D5}"/>
               </a:ext>
             </a:extLst>
           </p:cNvPr>
@@ -12322,7 +12322,7 @@
           <p:cNvPr id="3" name="">
             <a:extLst xmlns:a="http://schemas.openxmlformats.org/drawingml/2006/main">
               <a:ext uri="{FF2B5EF4-FFF2-40B4-BE49-F238E27FC236}">
-                <a16:creationId xmlns:a16="http://schemas.microsoft.com/office/drawing/2014/main" id="{A5D25F6A-DD68-4B6F-8844-191298386893}"/>
+                <a16:creationId xmlns:a16="http://schemas.microsoft.com/office/drawing/2014/main" id="{A16636E7-D74F-4213-9B30-FB20EB7D67BB}"/>
               </a:ext>
             </a:extLst>
           </p:cNvPr>
@@ -12384,7 +12384,7 @@
           <p:cNvPr id="4" name="">
             <a:extLst xmlns:a="http://schemas.openxmlformats.org/drawingml/2006/main">
               <a:ext uri="{FF2B5EF4-FFF2-40B4-BE49-F238E27FC236}">
-                <a16:creationId xmlns:a16="http://schemas.microsoft.com/office/drawing/2014/main" id="{010133EB-EF2C-4343-A3E7-8E3B3F6F6952}"/>
+                <a16:creationId xmlns:a16="http://schemas.microsoft.com/office/drawing/2014/main" id="{F270B43D-6097-4552-8AB5-293D20560040}"/>
               </a:ext>
             </a:extLst>
           </p:cNvPr>
@@ -12425,7 +12425,7 @@
           <p:cNvPr id="5" name="">
             <a:extLst xmlns:a="http://schemas.openxmlformats.org/drawingml/2006/main">
               <a:ext uri="{FF2B5EF4-FFF2-40B4-BE49-F238E27FC236}">
-                <a16:creationId xmlns:a16="http://schemas.microsoft.com/office/drawing/2014/main" id="{CE038247-600A-4915-951D-BFF7701B8A5C}"/>
+                <a16:creationId xmlns:a16="http://schemas.microsoft.com/office/drawing/2014/main" id="{CE112E36-9A78-4B24-BE30-01BDB20A0F82}"/>
               </a:ext>
             </a:extLst>
           </p:cNvPr>
@@ -12487,7 +12487,7 @@
           <p:cNvPr id="6" name="">
             <a:extLst xmlns:a="http://schemas.openxmlformats.org/drawingml/2006/main">
               <a:ext uri="{FF2B5EF4-FFF2-40B4-BE49-F238E27FC236}">
-                <a16:creationId xmlns:a16="http://schemas.microsoft.com/office/drawing/2014/main" id="{BB674646-E93C-4BDC-B315-7407C5699EE4}"/>
+                <a16:creationId xmlns:a16="http://schemas.microsoft.com/office/drawing/2014/main" id="{19AEE925-AC2A-4ECD-BA8A-FA72C876D05C}"/>
               </a:ext>
             </a:extLst>
           </p:cNvPr>
@@ -12576,7 +12576,7 @@
           <p:cNvPr id="7" name="">
             <a:extLst xmlns:a="http://schemas.openxmlformats.org/drawingml/2006/main">
               <a:ext uri="{FF2B5EF4-FFF2-40B4-BE49-F238E27FC236}">
-                <a16:creationId xmlns:a16="http://schemas.microsoft.com/office/drawing/2014/main" id="{48191368-B30A-4C31-9C02-3858E4785FEF}"/>
+                <a16:creationId xmlns:a16="http://schemas.microsoft.com/office/drawing/2014/main" id="{2D0749E7-06E6-48BB-87E3-EE4A9AD16F74}"/>
               </a:ext>
             </a:extLst>
           </p:cNvPr>
@@ -12617,7 +12617,7 @@
           <p:cNvPr id="8" name="">
             <a:extLst xmlns:a="http://schemas.openxmlformats.org/drawingml/2006/main">
               <a:ext uri="{FF2B5EF4-FFF2-40B4-BE49-F238E27FC236}">
-                <a16:creationId xmlns:a16="http://schemas.microsoft.com/office/drawing/2014/main" id="{01E56015-3CCC-426A-B19C-D8F791F00CFC}"/>
+                <a16:creationId xmlns:a16="http://schemas.microsoft.com/office/drawing/2014/main" id="{C22ADAD2-B973-41B8-8D1C-43C7708479C2}"/>
               </a:ext>
             </a:extLst>
           </p:cNvPr>
@@ -12679,7 +12679,7 @@
           <p:cNvPr id="9" name="">
             <a:extLst xmlns:a="http://schemas.openxmlformats.org/drawingml/2006/main">
               <a:ext uri="{FF2B5EF4-FFF2-40B4-BE49-F238E27FC236}">
-                <a16:creationId xmlns:a16="http://schemas.microsoft.com/office/drawing/2014/main" id="{B7A5E6EA-C75E-4721-B3D3-01D45869A362}"/>
+                <a16:creationId xmlns:a16="http://schemas.microsoft.com/office/drawing/2014/main" id="{02E219F4-C98E-4E11-9B70-A544E9F60631}"/>
               </a:ext>
             </a:extLst>
           </p:cNvPr>
@@ -12768,7 +12768,7 @@
           <p:cNvPr id="10" name="">
             <a:extLst xmlns:a="http://schemas.openxmlformats.org/drawingml/2006/main">
               <a:ext uri="{FF2B5EF4-FFF2-40B4-BE49-F238E27FC236}">
-                <a16:creationId xmlns:a16="http://schemas.microsoft.com/office/drawing/2014/main" id="{DF34A63C-67EF-43CC-BF05-D1FB05EBDDE7}"/>
+                <a16:creationId xmlns:a16="http://schemas.microsoft.com/office/drawing/2014/main" id="{8F0E27DF-9B68-4FFB-94ED-DC01E82B2B71}"/>
               </a:ext>
             </a:extLst>
           </p:cNvPr>
@@ -12809,7 +12809,7 @@
           <p:cNvPr id="11" name="">
             <a:extLst xmlns:a="http://schemas.openxmlformats.org/drawingml/2006/main">
               <a:ext uri="{FF2B5EF4-FFF2-40B4-BE49-F238E27FC236}">
-                <a16:creationId xmlns:a16="http://schemas.microsoft.com/office/drawing/2014/main" id="{12762CC9-34D3-4C08-AAB2-26EF2932D1B8}"/>
+                <a16:creationId xmlns:a16="http://schemas.microsoft.com/office/drawing/2014/main" id="{F48D9FEB-E97E-4389-8621-27EBE537DEA7}"/>
               </a:ext>
             </a:extLst>
           </p:cNvPr>
@@ -12871,7 +12871,7 @@
           <p:cNvPr id="12" name="">
             <a:extLst xmlns:a="http://schemas.openxmlformats.org/drawingml/2006/main">
               <a:ext uri="{FF2B5EF4-FFF2-40B4-BE49-F238E27FC236}">
-                <a16:creationId xmlns:a16="http://schemas.microsoft.com/office/drawing/2014/main" id="{3290C867-2B90-43FD-BF1A-19143D5672B3}"/>
+                <a16:creationId xmlns:a16="http://schemas.microsoft.com/office/drawing/2014/main" id="{5FC8AF5D-8045-4FB0-9183-4929DDFF91C0}"/>
               </a:ext>
             </a:extLst>
           </p:cNvPr>
@@ -12960,7 +12960,7 @@
           <p:cNvPr id="13" name="">
             <a:extLst xmlns:a="http://schemas.openxmlformats.org/drawingml/2006/main">
               <a:ext uri="{FF2B5EF4-FFF2-40B4-BE49-F238E27FC236}">
-                <a16:creationId xmlns:a16="http://schemas.microsoft.com/office/drawing/2014/main" id="{399A6BC6-D568-494E-9153-061E2DFCA414}"/>
+                <a16:creationId xmlns:a16="http://schemas.microsoft.com/office/drawing/2014/main" id="{574539FB-F090-4894-8CBE-CF4502166D3D}"/>
               </a:ext>
             </a:extLst>
           </p:cNvPr>
@@ -12993,7 +12993,7 @@
           <p:cNvPr id="14" name="">
             <a:extLst xmlns:a="http://schemas.openxmlformats.org/drawingml/2006/main">
               <a:ext uri="{FF2B5EF4-FFF2-40B4-BE49-F238E27FC236}">
-                <a16:creationId xmlns:a16="http://schemas.microsoft.com/office/drawing/2014/main" id="{621E42E8-2690-4F89-B32F-129ED638BE67}"/>
+                <a16:creationId xmlns:a16="http://schemas.microsoft.com/office/drawing/2014/main" id="{8CBEA8B1-5412-4191-8E01-E7606728E7EE}"/>
               </a:ext>
             </a:extLst>
           </p:cNvPr>
@@ -13026,7 +13026,7 @@
           <p:cNvPr id="15" name="">
             <a:extLst xmlns:a="http://schemas.openxmlformats.org/drawingml/2006/main">
               <a:ext uri="{FF2B5EF4-FFF2-40B4-BE49-F238E27FC236}">
-                <a16:creationId xmlns:a16="http://schemas.microsoft.com/office/drawing/2014/main" id="{F0882E3C-5093-4E14-B53B-3074CAF34277}"/>
+                <a16:creationId xmlns:a16="http://schemas.microsoft.com/office/drawing/2014/main" id="{C0CCFCF2-E8C5-47A6-B6C9-1BB36690130F}"/>
               </a:ext>
             </a:extLst>
           </p:cNvPr>
@@ -13061,7 +13061,7 @@
           <p:cNvPr id="16" name="">
             <a:extLst xmlns:a="http://schemas.openxmlformats.org/drawingml/2006/main">
               <a:ext uri="{FF2B5EF4-FFF2-40B4-BE49-F238E27FC236}">
-                <a16:creationId xmlns:a16="http://schemas.microsoft.com/office/drawing/2014/main" id="{E0C08653-B5E2-4CFF-8F84-3353326C867F}"/>
+                <a16:creationId xmlns:a16="http://schemas.microsoft.com/office/drawing/2014/main" id="{40BDDB86-4AE0-4811-924F-6D8A58DBDF22}"/>
               </a:ext>
             </a:extLst>
           </p:cNvPr>
@@ -13094,7 +13094,7 @@
           <p:cNvPr id="17" name="">
             <a:extLst xmlns:a="http://schemas.openxmlformats.org/drawingml/2006/main">
               <a:ext uri="{FF2B5EF4-FFF2-40B4-BE49-F238E27FC236}">
-                <a16:creationId xmlns:a16="http://schemas.microsoft.com/office/drawing/2014/main" id="{AFF6586A-7C4E-4428-925A-39C60AE448CF}"/>
+                <a16:creationId xmlns:a16="http://schemas.microsoft.com/office/drawing/2014/main" id="{09D78D35-C09F-4ABD-A9DA-F3B1C1FC22FE}"/>
               </a:ext>
             </a:extLst>
           </p:cNvPr>
@@ -13127,7 +13127,7 @@
           <p:cNvPr id="18" name="">
             <a:extLst xmlns:a="http://schemas.openxmlformats.org/drawingml/2006/main">
               <a:ext uri="{FF2B5EF4-FFF2-40B4-BE49-F238E27FC236}">
-                <a16:creationId xmlns:a16="http://schemas.microsoft.com/office/drawing/2014/main" id="{053671FD-BBEF-4A4F-933C-6337861D92EA}"/>
+                <a16:creationId xmlns:a16="http://schemas.microsoft.com/office/drawing/2014/main" id="{53C3CF40-276C-4301-9823-80F715B54F2D}"/>
               </a:ext>
             </a:extLst>
           </p:cNvPr>
@@ -13160,7 +13160,7 @@
           <p:cNvPr id="19" name="">
             <a:extLst xmlns:a="http://schemas.openxmlformats.org/drawingml/2006/main">
               <a:ext uri="{FF2B5EF4-FFF2-40B4-BE49-F238E27FC236}">
-                <a16:creationId xmlns:a16="http://schemas.microsoft.com/office/drawing/2014/main" id="{E9AB3106-EF5A-4377-82D6-9BE776AF912C}"/>
+                <a16:creationId xmlns:a16="http://schemas.microsoft.com/office/drawing/2014/main" id="{2D213F23-907D-4F3C-A973-9876C0290480}"/>
               </a:ext>
             </a:extLst>
           </p:cNvPr>
@@ -13193,7 +13193,7 @@
           <p:cNvPr id="20" name="">
             <a:extLst xmlns:a="http://schemas.openxmlformats.org/drawingml/2006/main">
               <a:ext uri="{FF2B5EF4-FFF2-40B4-BE49-F238E27FC236}">
-                <a16:creationId xmlns:a16="http://schemas.microsoft.com/office/drawing/2014/main" id="{8DC11E47-4BA0-476F-B771-F9C04530473E}"/>
+                <a16:creationId xmlns:a16="http://schemas.microsoft.com/office/drawing/2014/main" id="{2FF2C702-4755-4833-A730-9898BC114642}"/>
               </a:ext>
             </a:extLst>
           </p:cNvPr>
@@ -13226,7 +13226,7 @@
           <p:cNvPr id="21" name="">
             <a:extLst xmlns:a="http://schemas.openxmlformats.org/drawingml/2006/main">
               <a:ext uri="{FF2B5EF4-FFF2-40B4-BE49-F238E27FC236}">
-                <a16:creationId xmlns:a16="http://schemas.microsoft.com/office/drawing/2014/main" id="{DB0EC4AE-E7BD-4B58-8673-13A7075918DC}"/>
+                <a16:creationId xmlns:a16="http://schemas.microsoft.com/office/drawing/2014/main" id="{5731548D-B5DF-4FD1-B9A6-9CF83ECC3E8E}"/>
               </a:ext>
             </a:extLst>
           </p:cNvPr>
@@ -13259,7 +13259,7 @@
           <p:cNvPr id="22" name="">
             <a:extLst xmlns:a="http://schemas.openxmlformats.org/drawingml/2006/main">
               <a:ext uri="{FF2B5EF4-FFF2-40B4-BE49-F238E27FC236}">
-                <a16:creationId xmlns:a16="http://schemas.microsoft.com/office/drawing/2014/main" id="{7BD509E8-CB75-4FEE-BAFF-7DCE6496D7DA}"/>
+                <a16:creationId xmlns:a16="http://schemas.microsoft.com/office/drawing/2014/main" id="{2D409ABB-E2C3-48CE-A924-AD1507C93923}"/>
               </a:ext>
             </a:extLst>
           </p:cNvPr>
@@ -13292,7 +13292,7 @@
           <p:cNvPr id="23" name="">
             <a:extLst xmlns:a="http://schemas.openxmlformats.org/drawingml/2006/main">
               <a:ext uri="{FF2B5EF4-FFF2-40B4-BE49-F238E27FC236}">
-                <a16:creationId xmlns:a16="http://schemas.microsoft.com/office/drawing/2014/main" id="{547A1E5C-0BD9-4778-A2E7-B60E3DFE3857}"/>
+                <a16:creationId xmlns:a16="http://schemas.microsoft.com/office/drawing/2014/main" id="{B1909B6B-3E29-4EAD-9716-55C50D163B66}"/>
               </a:ext>
             </a:extLst>
           </p:cNvPr>
@@ -13325,7 +13325,7 @@
           <p:cNvPr id="24" name="">
             <a:extLst xmlns:a="http://schemas.openxmlformats.org/drawingml/2006/main">
               <a:ext uri="{FF2B5EF4-FFF2-40B4-BE49-F238E27FC236}">
-                <a16:creationId xmlns:a16="http://schemas.microsoft.com/office/drawing/2014/main" id="{3E25920A-2CEF-4E66-ADD0-C69020476138}"/>
+                <a16:creationId xmlns:a16="http://schemas.microsoft.com/office/drawing/2014/main" id="{3BF1864B-6DDD-4539-BFD0-1357C08AE06A}"/>
               </a:ext>
             </a:extLst>
           </p:cNvPr>
@@ -13358,7 +13358,7 @@
           <p:cNvPr id="25" name="">
             <a:extLst xmlns:a="http://schemas.openxmlformats.org/drawingml/2006/main">
               <a:ext uri="{FF2B5EF4-FFF2-40B4-BE49-F238E27FC236}">
-                <a16:creationId xmlns:a16="http://schemas.microsoft.com/office/drawing/2014/main" id="{737742FB-C6D9-4317-9124-C9A9261304F3}"/>
+                <a16:creationId xmlns:a16="http://schemas.microsoft.com/office/drawing/2014/main" id="{B8CDFAB3-D857-4435-8A10-3F1E34ED44E3}"/>
               </a:ext>
             </a:extLst>
           </p:cNvPr>
@@ -13391,7 +13391,7 @@
           <p:cNvPr id="26" name="">
             <a:extLst xmlns:a="http://schemas.openxmlformats.org/drawingml/2006/main">
               <a:ext uri="{FF2B5EF4-FFF2-40B4-BE49-F238E27FC236}">
-                <a16:creationId xmlns:a16="http://schemas.microsoft.com/office/drawing/2014/main" id="{E4F2C8CB-717F-4664-8124-55238A552C7C}"/>
+                <a16:creationId xmlns:a16="http://schemas.microsoft.com/office/drawing/2014/main" id="{84DDF886-242F-4175-9071-7808A40AEC0E}"/>
               </a:ext>
             </a:extLst>
           </p:cNvPr>
@@ -13424,7 +13424,7 @@
           <p:cNvPr id="27" name="">
             <a:extLst xmlns:a="http://schemas.openxmlformats.org/drawingml/2006/main">
               <a:ext uri="{FF2B5EF4-FFF2-40B4-BE49-F238E27FC236}">
-                <a16:creationId xmlns:a16="http://schemas.microsoft.com/office/drawing/2014/main" id="{0C16C69B-44B1-458E-840E-5B71F4C8F4A7}"/>
+                <a16:creationId xmlns:a16="http://schemas.microsoft.com/office/drawing/2014/main" id="{4F9F5D85-919F-4B3F-B50A-17E3FE1C7A00}"/>
               </a:ext>
             </a:extLst>
           </p:cNvPr>
@@ -13457,7 +13457,7 @@
           <p:cNvPr id="28" name="">
             <a:extLst xmlns:a="http://schemas.openxmlformats.org/drawingml/2006/main">
               <a:ext uri="{FF2B5EF4-FFF2-40B4-BE49-F238E27FC236}">
-                <a16:creationId xmlns:a16="http://schemas.microsoft.com/office/drawing/2014/main" id="{EBE7682D-4119-4CE7-99B4-DD03D58CE6EB}"/>
+                <a16:creationId xmlns:a16="http://schemas.microsoft.com/office/drawing/2014/main" id="{DB01D7DC-3EF5-4470-833E-F322AF72D2EA}"/>
               </a:ext>
             </a:extLst>
           </p:cNvPr>
@@ -13490,7 +13490,7 @@
           <p:cNvPr id="29" name="">
             <a:extLst xmlns:a="http://schemas.openxmlformats.org/drawingml/2006/main">
               <a:ext uri="{FF2B5EF4-FFF2-40B4-BE49-F238E27FC236}">
-                <a16:creationId xmlns:a16="http://schemas.microsoft.com/office/drawing/2014/main" id="{9EB7C2B0-3CB3-47A9-BADC-A78FDDEF292D}"/>
+                <a16:creationId xmlns:a16="http://schemas.microsoft.com/office/drawing/2014/main" id="{8C47EAF1-3CF4-49A1-B9DB-EBB109ECFF91}"/>
               </a:ext>
             </a:extLst>
           </p:cNvPr>
@@ -13523,7 +13523,7 @@
           <p:cNvPr id="30" name="">
             <a:extLst xmlns:a="http://schemas.openxmlformats.org/drawingml/2006/main">
               <a:ext uri="{FF2B5EF4-FFF2-40B4-BE49-F238E27FC236}">
-                <a16:creationId xmlns:a16="http://schemas.microsoft.com/office/drawing/2014/main" id="{1C845247-25C1-4B31-88B5-98D09FE9EB4D}"/>
+                <a16:creationId xmlns:a16="http://schemas.microsoft.com/office/drawing/2014/main" id="{EE8554EC-CAE8-40EF-9884-3789315C2C01}"/>
               </a:ext>
             </a:extLst>
           </p:cNvPr>
@@ -13556,7 +13556,7 @@
           <p:cNvPr id="31" name="">
             <a:extLst xmlns:a="http://schemas.openxmlformats.org/drawingml/2006/main">
               <a:ext uri="{FF2B5EF4-FFF2-40B4-BE49-F238E27FC236}">
-                <a16:creationId xmlns:a16="http://schemas.microsoft.com/office/drawing/2014/main" id="{71ED86A4-1E8A-42B5-99E9-DF3FF16CF073}"/>
+                <a16:creationId xmlns:a16="http://schemas.microsoft.com/office/drawing/2014/main" id="{FA4B78A3-CA8C-43CB-A24F-0A85469825E7}"/>
               </a:ext>
             </a:extLst>
           </p:cNvPr>
@@ -13589,7 +13589,7 @@
           <p:cNvPr id="32" name="">
             <a:extLst xmlns:a="http://schemas.openxmlformats.org/drawingml/2006/main">
               <a:ext uri="{FF2B5EF4-FFF2-40B4-BE49-F238E27FC236}">
-                <a16:creationId xmlns:a16="http://schemas.microsoft.com/office/drawing/2014/main" id="{A7F5FC00-CC39-495A-BFAA-F92FE1F4656D}"/>
+                <a16:creationId xmlns:a16="http://schemas.microsoft.com/office/drawing/2014/main" id="{856370CC-F1E9-45FC-8B0E-14D8ADB05AAD}"/>
               </a:ext>
             </a:extLst>
           </p:cNvPr>
@@ -13622,7 +13622,7 @@
           <p:cNvPr id="33" name="">
             <a:extLst xmlns:a="http://schemas.openxmlformats.org/drawingml/2006/main">
               <a:ext uri="{FF2B5EF4-FFF2-40B4-BE49-F238E27FC236}">
-                <a16:creationId xmlns:a16="http://schemas.microsoft.com/office/drawing/2014/main" id="{E6C27C60-298F-49D1-9C0F-72814C8A18DB}"/>
+                <a16:creationId xmlns:a16="http://schemas.microsoft.com/office/drawing/2014/main" id="{4CA18E58-08A1-4125-9AB9-46F3F7939366}"/>
               </a:ext>
             </a:extLst>
           </p:cNvPr>
@@ -13655,7 +13655,7 @@
           <p:cNvPr id="34" name="">
             <a:extLst xmlns:a="http://schemas.openxmlformats.org/drawingml/2006/main">
               <a:ext uri="{FF2B5EF4-FFF2-40B4-BE49-F238E27FC236}">
-                <a16:creationId xmlns:a16="http://schemas.microsoft.com/office/drawing/2014/main" id="{D4CE61EE-84D5-4F50-B067-176F70C67009}"/>
+                <a16:creationId xmlns:a16="http://schemas.microsoft.com/office/drawing/2014/main" id="{67469AA5-CC33-479C-B124-9F1070D73721}"/>
               </a:ext>
             </a:extLst>
           </p:cNvPr>
@@ -13688,7 +13688,7 @@
           <p:cNvPr id="35" name="">
             <a:extLst xmlns:a="http://schemas.openxmlformats.org/drawingml/2006/main">
               <a:ext uri="{FF2B5EF4-FFF2-40B4-BE49-F238E27FC236}">
-                <a16:creationId xmlns:a16="http://schemas.microsoft.com/office/drawing/2014/main" id="{BC316FD9-2EA5-4198-A6D7-EFEBFE9AA8A4}"/>
+                <a16:creationId xmlns:a16="http://schemas.microsoft.com/office/drawing/2014/main" id="{D15FFB80-2405-4EB0-971E-2FEBFDA50B29}"/>
               </a:ext>
             </a:extLst>
           </p:cNvPr>
@@ -13721,7 +13721,7 @@
           <p:cNvPr id="36" name="">
             <a:extLst xmlns:a="http://schemas.openxmlformats.org/drawingml/2006/main">
               <a:ext uri="{FF2B5EF4-FFF2-40B4-BE49-F238E27FC236}">
-                <a16:creationId xmlns:a16="http://schemas.microsoft.com/office/drawing/2014/main" id="{0FB2B68A-E17E-4439-8649-2E51C9D4C1C4}"/>
+                <a16:creationId xmlns:a16="http://schemas.microsoft.com/office/drawing/2014/main" id="{4CF866D6-9F80-4D9F-B40B-D6EE1F152D4A}"/>
               </a:ext>
             </a:extLst>
           </p:cNvPr>
@@ -13754,7 +13754,7 @@
           <p:cNvPr id="37" name="">
             <a:extLst xmlns:a="http://schemas.openxmlformats.org/drawingml/2006/main">
               <a:ext uri="{FF2B5EF4-FFF2-40B4-BE49-F238E27FC236}">
-                <a16:creationId xmlns:a16="http://schemas.microsoft.com/office/drawing/2014/main" id="{A396B0DA-9C86-4AF5-9E9E-DFC303FA60F7}"/>
+                <a16:creationId xmlns:a16="http://schemas.microsoft.com/office/drawing/2014/main" id="{CA63E0ED-880E-4B24-A150-E9772D85F06D}"/>
               </a:ext>
             </a:extLst>
           </p:cNvPr>
@@ -13787,7 +13787,7 @@
           <p:cNvPr id="38" name="">
             <a:extLst xmlns:a="http://schemas.openxmlformats.org/drawingml/2006/main">
               <a:ext uri="{FF2B5EF4-FFF2-40B4-BE49-F238E27FC236}">
-                <a16:creationId xmlns:a16="http://schemas.microsoft.com/office/drawing/2014/main" id="{29173CBF-9AC3-4706-A291-243A0CB1F5AB}"/>
+                <a16:creationId xmlns:a16="http://schemas.microsoft.com/office/drawing/2014/main" id="{B45B16DC-9768-4918-BCEC-2321882982DC}"/>
               </a:ext>
             </a:extLst>
           </p:cNvPr>
@@ -13820,7 +13820,7 @@
           <p:cNvPr id="39" name="">
             <a:extLst xmlns:a="http://schemas.openxmlformats.org/drawingml/2006/main">
               <a:ext uri="{FF2B5EF4-FFF2-40B4-BE49-F238E27FC236}">
-                <a16:creationId xmlns:a16="http://schemas.microsoft.com/office/drawing/2014/main" id="{D96DBA8B-5DA3-4ACA-9723-AC53A42B7F80}"/>
+                <a16:creationId xmlns:a16="http://schemas.microsoft.com/office/drawing/2014/main" id="{4C2ABFA1-9EA3-4E6C-A2AF-261C6C885F5D}"/>
               </a:ext>
             </a:extLst>
           </p:cNvPr>
@@ -13853,7 +13853,7 @@
           <p:cNvPr id="40" name="">
             <a:extLst xmlns:a="http://schemas.openxmlformats.org/drawingml/2006/main">
               <a:ext uri="{FF2B5EF4-FFF2-40B4-BE49-F238E27FC236}">
-                <a16:creationId xmlns:a16="http://schemas.microsoft.com/office/drawing/2014/main" id="{B3C995E9-9A7F-4DAF-B51C-C47A01B5E39F}"/>
+                <a16:creationId xmlns:a16="http://schemas.microsoft.com/office/drawing/2014/main" id="{2341ED23-B6C9-48F4-B3B0-DEF3B4001DEB}"/>
               </a:ext>
             </a:extLst>
           </p:cNvPr>
@@ -13886,7 +13886,7 @@
           <p:cNvPr id="41" name="">
             <a:extLst xmlns:a="http://schemas.openxmlformats.org/drawingml/2006/main">
               <a:ext uri="{FF2B5EF4-FFF2-40B4-BE49-F238E27FC236}">
-                <a16:creationId xmlns:a16="http://schemas.microsoft.com/office/drawing/2014/main" id="{895D9A03-DB6E-493B-A14B-1567EB3CEA11}"/>
+                <a16:creationId xmlns:a16="http://schemas.microsoft.com/office/drawing/2014/main" id="{ABCADCCE-9172-439A-BD13-C488EF872093}"/>
               </a:ext>
             </a:extLst>
           </p:cNvPr>
@@ -13919,7 +13919,7 @@
           <p:cNvPr id="42" name="">
             <a:extLst xmlns:a="http://schemas.openxmlformats.org/drawingml/2006/main">
               <a:ext uri="{FF2B5EF4-FFF2-40B4-BE49-F238E27FC236}">
-                <a16:creationId xmlns:a16="http://schemas.microsoft.com/office/drawing/2014/main" id="{8B2D4F4A-B2CC-4FEE-AE88-CFCE8BDC8BA3}"/>
+                <a16:creationId xmlns:a16="http://schemas.microsoft.com/office/drawing/2014/main" id="{C2E50767-1BCA-4F11-AC67-5960AA1D1DA9}"/>
               </a:ext>
             </a:extLst>
           </p:cNvPr>
@@ -13952,7 +13952,7 @@
           <p:cNvPr id="43" name="">
             <a:extLst xmlns:a="http://schemas.openxmlformats.org/drawingml/2006/main">
               <a:ext uri="{FF2B5EF4-FFF2-40B4-BE49-F238E27FC236}">
-                <a16:creationId xmlns:a16="http://schemas.microsoft.com/office/drawing/2014/main" id="{02BD3AB3-73B6-433C-8743-0ACF6FB4524C}"/>
+                <a16:creationId xmlns:a16="http://schemas.microsoft.com/office/drawing/2014/main" id="{9B45DB84-5341-43A0-A14B-ACD7983E5243}"/>
               </a:ext>
             </a:extLst>
           </p:cNvPr>
@@ -13985,7 +13985,7 @@
           <p:cNvPr id="44" name="">
             <a:extLst xmlns:a="http://schemas.openxmlformats.org/drawingml/2006/main">
               <a:ext uri="{FF2B5EF4-FFF2-40B4-BE49-F238E27FC236}">
-                <a16:creationId xmlns:a16="http://schemas.microsoft.com/office/drawing/2014/main" id="{48932516-E542-4E79-A255-C011A7EAEA3A}"/>
+                <a16:creationId xmlns:a16="http://schemas.microsoft.com/office/drawing/2014/main" id="{98B22337-2646-4AD0-8969-561DEE31C5AA}"/>
               </a:ext>
             </a:extLst>
           </p:cNvPr>
@@ -14018,7 +14018,7 @@
           <p:cNvPr id="45" name="">
             <a:extLst xmlns:a="http://schemas.openxmlformats.org/drawingml/2006/main">
               <a:ext uri="{FF2B5EF4-FFF2-40B4-BE49-F238E27FC236}">
-                <a16:creationId xmlns:a16="http://schemas.microsoft.com/office/drawing/2014/main" id="{4CA105C1-13C6-47EC-A438-8745CE79914B}"/>
+                <a16:creationId xmlns:a16="http://schemas.microsoft.com/office/drawing/2014/main" id="{0710BBCD-C082-4674-A378-753D9BD44AD6}"/>
               </a:ext>
             </a:extLst>
           </p:cNvPr>
@@ -14051,7 +14051,7 @@
           <p:cNvPr id="46" name="">
             <a:extLst xmlns:a="http://schemas.openxmlformats.org/drawingml/2006/main">
               <a:ext uri="{FF2B5EF4-FFF2-40B4-BE49-F238E27FC236}">
-                <a16:creationId xmlns:a16="http://schemas.microsoft.com/office/drawing/2014/main" id="{E92E1FAE-B4C8-4FE3-B20E-A9BEAE66EB08}"/>
+                <a16:creationId xmlns:a16="http://schemas.microsoft.com/office/drawing/2014/main" id="{F0924952-834A-4493-9FBE-6DC90663E1D8}"/>
               </a:ext>
             </a:extLst>
           </p:cNvPr>
@@ -14084,7 +14084,7 @@
           <p:cNvPr id="47" name="">
             <a:extLst xmlns:a="http://schemas.openxmlformats.org/drawingml/2006/main">
               <a:ext uri="{FF2B5EF4-FFF2-40B4-BE49-F238E27FC236}">
-                <a16:creationId xmlns:a16="http://schemas.microsoft.com/office/drawing/2014/main" id="{D27B9DA2-3832-454C-8BB4-EF37F0DA9713}"/>
+                <a16:creationId xmlns:a16="http://schemas.microsoft.com/office/drawing/2014/main" id="{43919A5A-FEF8-461D-A7F7-51F83F5A425A}"/>
               </a:ext>
             </a:extLst>
           </p:cNvPr>
@@ -14117,7 +14117,7 @@
           <p:cNvPr id="48" name="">
             <a:extLst xmlns:a="http://schemas.openxmlformats.org/drawingml/2006/main">
               <a:ext uri="{FF2B5EF4-FFF2-40B4-BE49-F238E27FC236}">
-                <a16:creationId xmlns:a16="http://schemas.microsoft.com/office/drawing/2014/main" id="{21C51494-1A42-4B3A-8E36-5F6D66464D5A}"/>
+                <a16:creationId xmlns:a16="http://schemas.microsoft.com/office/drawing/2014/main" id="{EE43A628-A802-4302-AA77-C0E04C498C53}"/>
               </a:ext>
             </a:extLst>
           </p:cNvPr>
@@ -14150,7 +14150,7 @@
           <p:cNvPr id="49" name="">
             <a:extLst xmlns:a="http://schemas.openxmlformats.org/drawingml/2006/main">
               <a:ext uri="{FF2B5EF4-FFF2-40B4-BE49-F238E27FC236}">
-                <a16:creationId xmlns:a16="http://schemas.microsoft.com/office/drawing/2014/main" id="{BA935FC3-F44D-41A3-A902-6C04A939C34A}"/>
+                <a16:creationId xmlns:a16="http://schemas.microsoft.com/office/drawing/2014/main" id="{D1986B55-4761-4AC0-9D9E-51FE10B8FC08}"/>
               </a:ext>
             </a:extLst>
           </p:cNvPr>
@@ -14183,7 +14183,7 @@
           <p:cNvPr id="50" name="">
             <a:extLst xmlns:a="http://schemas.openxmlformats.org/drawingml/2006/main">
               <a:ext uri="{FF2B5EF4-FFF2-40B4-BE49-F238E27FC236}">
-                <a16:creationId xmlns:a16="http://schemas.microsoft.com/office/drawing/2014/main" id="{0CA9D08E-402B-421C-8695-D4DA3DBB82CB}"/>
+                <a16:creationId xmlns:a16="http://schemas.microsoft.com/office/drawing/2014/main" id="{B9CD03E7-14F1-4F24-A378-48D13F362BB8}"/>
               </a:ext>
             </a:extLst>
           </p:cNvPr>
@@ -14216,7 +14216,7 @@
           <p:cNvPr id="51" name="">
             <a:extLst xmlns:a="http://schemas.openxmlformats.org/drawingml/2006/main">
               <a:ext uri="{FF2B5EF4-FFF2-40B4-BE49-F238E27FC236}">
-                <a16:creationId xmlns:a16="http://schemas.microsoft.com/office/drawing/2014/main" id="{18ECFE64-6619-4439-9A75-55A5F7DB8F39}"/>
+                <a16:creationId xmlns:a16="http://schemas.microsoft.com/office/drawing/2014/main" id="{91C0DD33-C460-492C-B7A8-94C48A3F4419}"/>
               </a:ext>
             </a:extLst>
           </p:cNvPr>
@@ -14249,7 +14249,7 @@
           <p:cNvPr id="52" name="">
             <a:extLst xmlns:a="http://schemas.openxmlformats.org/drawingml/2006/main">
               <a:ext uri="{FF2B5EF4-FFF2-40B4-BE49-F238E27FC236}">
-                <a16:creationId xmlns:a16="http://schemas.microsoft.com/office/drawing/2014/main" id="{FE5CAC04-BF25-4B7C-83AD-B813FEDFD592}"/>
+                <a16:creationId xmlns:a16="http://schemas.microsoft.com/office/drawing/2014/main" id="{96C78018-1B1F-4438-B397-73885D75006E}"/>
               </a:ext>
             </a:extLst>
           </p:cNvPr>
@@ -14282,7 +14282,7 @@
           <p:cNvPr id="53" name="">
             <a:extLst xmlns:a="http://schemas.openxmlformats.org/drawingml/2006/main">
               <a:ext uri="{FF2B5EF4-FFF2-40B4-BE49-F238E27FC236}">
-                <a16:creationId xmlns:a16="http://schemas.microsoft.com/office/drawing/2014/main" id="{3C0222C0-5529-4D53-AE92-C9E5FA5B64E4}"/>
+                <a16:creationId xmlns:a16="http://schemas.microsoft.com/office/drawing/2014/main" id="{9C8162CF-0DB6-4994-9B26-834D5C27FEDF}"/>
               </a:ext>
             </a:extLst>
           </p:cNvPr>
@@ -14315,7 +14315,7 @@
           <p:cNvPr id="54" name="">
             <a:extLst xmlns:a="http://schemas.openxmlformats.org/drawingml/2006/main">
               <a:ext uri="{FF2B5EF4-FFF2-40B4-BE49-F238E27FC236}">
-                <a16:creationId xmlns:a16="http://schemas.microsoft.com/office/drawing/2014/main" id="{6A5EBE12-7095-4D60-9D9B-E5FCF0327F49}"/>
+                <a16:creationId xmlns:a16="http://schemas.microsoft.com/office/drawing/2014/main" id="{0EBAFDC2-F61C-4AC9-9675-B9AEC97F48A8}"/>
               </a:ext>
             </a:extLst>
           </p:cNvPr>
@@ -14348,7 +14348,7 @@
           <p:cNvPr id="55" name="">
             <a:extLst xmlns:a="http://schemas.openxmlformats.org/drawingml/2006/main">
               <a:ext uri="{FF2B5EF4-FFF2-40B4-BE49-F238E27FC236}">
-                <a16:creationId xmlns:a16="http://schemas.microsoft.com/office/drawing/2014/main" id="{E9952FCA-1F0C-4028-B6C5-3DACC741F4EE}"/>
+                <a16:creationId xmlns:a16="http://schemas.microsoft.com/office/drawing/2014/main" id="{9DD8D8E7-43FC-47A3-9BB8-945271038939}"/>
               </a:ext>
             </a:extLst>
           </p:cNvPr>
@@ -14381,7 +14381,7 @@
           <p:cNvPr id="56" name="">
             <a:extLst xmlns:a="http://schemas.openxmlformats.org/drawingml/2006/main">
               <a:ext uri="{FF2B5EF4-FFF2-40B4-BE49-F238E27FC236}">
-                <a16:creationId xmlns:a16="http://schemas.microsoft.com/office/drawing/2014/main" id="{A7CB2446-BB7A-4F06-A3E7-218C524D4F0A}"/>
+                <a16:creationId xmlns:a16="http://schemas.microsoft.com/office/drawing/2014/main" id="{84BCD6BF-E6FA-49F6-A2EA-83B5DEDFF4CF}"/>
               </a:ext>
             </a:extLst>
           </p:cNvPr>
@@ -14414,7 +14414,7 @@
           <p:cNvPr id="57" name="">
             <a:extLst xmlns:a="http://schemas.openxmlformats.org/drawingml/2006/main">
               <a:ext uri="{FF2B5EF4-FFF2-40B4-BE49-F238E27FC236}">
-                <a16:creationId xmlns:a16="http://schemas.microsoft.com/office/drawing/2014/main" id="{ADE312E4-D73B-444F-8C04-B89A9B678E07}"/>
+                <a16:creationId xmlns:a16="http://schemas.microsoft.com/office/drawing/2014/main" id="{84FEDC27-B20B-40EC-B890-00CF357DE99B}"/>
               </a:ext>
             </a:extLst>
           </p:cNvPr>
@@ -14447,7 +14447,7 @@
           <p:cNvPr id="58" name="">
             <a:extLst xmlns:a="http://schemas.openxmlformats.org/drawingml/2006/main">
               <a:ext uri="{FF2B5EF4-FFF2-40B4-BE49-F238E27FC236}">
-                <a16:creationId xmlns:a16="http://schemas.microsoft.com/office/drawing/2014/main" id="{B0641F60-4936-4A4A-A193-CD761BBB5610}"/>
+                <a16:creationId xmlns:a16="http://schemas.microsoft.com/office/drawing/2014/main" id="{81634BD2-348F-4526-9E6C-746ABB705D27}"/>
               </a:ext>
             </a:extLst>
           </p:cNvPr>
@@ -14480,7 +14480,7 @@
           <p:cNvPr id="59" name="">
             <a:extLst xmlns:a="http://schemas.openxmlformats.org/drawingml/2006/main">
               <a:ext uri="{FF2B5EF4-FFF2-40B4-BE49-F238E27FC236}">
-                <a16:creationId xmlns:a16="http://schemas.microsoft.com/office/drawing/2014/main" id="{6B413DE6-BEDB-46AD-B110-FF8E7E7B3A43}"/>
+                <a16:creationId xmlns:a16="http://schemas.microsoft.com/office/drawing/2014/main" id="{61778980-8FC3-45F5-B429-1CC8D63375EE}"/>
               </a:ext>
             </a:extLst>
           </p:cNvPr>
@@ -14513,7 +14513,7 @@
           <p:cNvPr id="60" name="">
             <a:extLst xmlns:a="http://schemas.openxmlformats.org/drawingml/2006/main">
               <a:ext uri="{FF2B5EF4-FFF2-40B4-BE49-F238E27FC236}">
-                <a16:creationId xmlns:a16="http://schemas.microsoft.com/office/drawing/2014/main" id="{F08F617A-6C65-4900-AA47-F94AAE8D83D2}"/>
+                <a16:creationId xmlns:a16="http://schemas.microsoft.com/office/drawing/2014/main" id="{6D4AC6B5-46A9-4973-9A64-564174465AB7}"/>
               </a:ext>
             </a:extLst>
           </p:cNvPr>
@@ -14546,7 +14546,7 @@
           <p:cNvPr id="61" name="">
             <a:extLst xmlns:a="http://schemas.openxmlformats.org/drawingml/2006/main">
               <a:ext uri="{FF2B5EF4-FFF2-40B4-BE49-F238E27FC236}">
-                <a16:creationId xmlns:a16="http://schemas.microsoft.com/office/drawing/2014/main" id="{4A0495A0-02F3-4022-BE18-C4E5F464CE99}"/>
+                <a16:creationId xmlns:a16="http://schemas.microsoft.com/office/drawing/2014/main" id="{2CCAAA52-FD0B-4E83-B6F1-1E317355C347}"/>
               </a:ext>
             </a:extLst>
           </p:cNvPr>
@@ -14579,7 +14579,7 @@
           <p:cNvPr id="62" name="">
             <a:extLst xmlns:a="http://schemas.openxmlformats.org/drawingml/2006/main">
               <a:ext uri="{FF2B5EF4-FFF2-40B4-BE49-F238E27FC236}">
-                <a16:creationId xmlns:a16="http://schemas.microsoft.com/office/drawing/2014/main" id="{3E32E2F4-FFBC-4064-9BF7-0E41E5C77E73}"/>
+                <a16:creationId xmlns:a16="http://schemas.microsoft.com/office/drawing/2014/main" id="{F8780E7B-9334-4997-BEB5-5FD04342F764}"/>
               </a:ext>
             </a:extLst>
           </p:cNvPr>
@@ -14612,7 +14612,7 @@
           <p:cNvPr id="63" name="">
             <a:extLst xmlns:a="http://schemas.openxmlformats.org/drawingml/2006/main">
               <a:ext uri="{FF2B5EF4-FFF2-40B4-BE49-F238E27FC236}">
-                <a16:creationId xmlns:a16="http://schemas.microsoft.com/office/drawing/2014/main" id="{FA47FF70-8E31-4E4A-9D89-7A0EE75A877D}"/>
+                <a16:creationId xmlns:a16="http://schemas.microsoft.com/office/drawing/2014/main" id="{4DA70961-D7B8-4FA3-A728-B3F279DD50D5}"/>
               </a:ext>
             </a:extLst>
           </p:cNvPr>
@@ -14645,7 +14645,7 @@
           <p:cNvPr id="64" name="">
             <a:extLst xmlns:a="http://schemas.openxmlformats.org/drawingml/2006/main">
               <a:ext uri="{FF2B5EF4-FFF2-40B4-BE49-F238E27FC236}">
-                <a16:creationId xmlns:a16="http://schemas.microsoft.com/office/drawing/2014/main" id="{261A7391-E130-4A2E-B0C7-E050C09705F8}"/>
+                <a16:creationId xmlns:a16="http://schemas.microsoft.com/office/drawing/2014/main" id="{2742BE38-3F7C-40D9-BD13-15DD9034BF0A}"/>
               </a:ext>
             </a:extLst>
           </p:cNvPr>
@@ -14678,7 +14678,7 @@
           <p:cNvPr id="65" name="">
             <a:extLst xmlns:a="http://schemas.openxmlformats.org/drawingml/2006/main">
               <a:ext uri="{FF2B5EF4-FFF2-40B4-BE49-F238E27FC236}">
-                <a16:creationId xmlns:a16="http://schemas.microsoft.com/office/drawing/2014/main" id="{376DB27E-B723-437C-9F68-EA5F51ACEF3E}"/>
+                <a16:creationId xmlns:a16="http://schemas.microsoft.com/office/drawing/2014/main" id="{1DB00B34-9EBD-4A77-89D8-1D12A0D69455}"/>
               </a:ext>
             </a:extLst>
           </p:cNvPr>
@@ -14711,7 +14711,7 @@
           <p:cNvPr id="66" name="">
             <a:extLst xmlns:a="http://schemas.openxmlformats.org/drawingml/2006/main">
               <a:ext uri="{FF2B5EF4-FFF2-40B4-BE49-F238E27FC236}">
-                <a16:creationId xmlns:a16="http://schemas.microsoft.com/office/drawing/2014/main" id="{52945BFF-E69B-4BEC-A3F3-76CC497B5C11}"/>
+                <a16:creationId xmlns:a16="http://schemas.microsoft.com/office/drawing/2014/main" id="{80D4EEF9-41FC-462F-AABF-C273BD43CAA8}"/>
               </a:ext>
             </a:extLst>
           </p:cNvPr>
@@ -14744,7 +14744,7 @@
           <p:cNvPr id="67" name="">
             <a:extLst xmlns:a="http://schemas.openxmlformats.org/drawingml/2006/main">
               <a:ext uri="{FF2B5EF4-FFF2-40B4-BE49-F238E27FC236}">
-                <a16:creationId xmlns:a16="http://schemas.microsoft.com/office/drawing/2014/main" id="{206B9F71-A37C-4341-984E-06AD007D2D0B}"/>
+                <a16:creationId xmlns:a16="http://schemas.microsoft.com/office/drawing/2014/main" id="{899DC995-EA0C-4B5A-824B-FAE7AFFE3B35}"/>
               </a:ext>
             </a:extLst>
           </p:cNvPr>
@@ -14777,7 +14777,7 @@
           <p:cNvPr id="68" name="">
             <a:extLst xmlns:a="http://schemas.openxmlformats.org/drawingml/2006/main">
               <a:ext uri="{FF2B5EF4-FFF2-40B4-BE49-F238E27FC236}">
-                <a16:creationId xmlns:a16="http://schemas.microsoft.com/office/drawing/2014/main" id="{E4FDD0DB-847D-41D2-A976-11B298744B25}"/>
+                <a16:creationId xmlns:a16="http://schemas.microsoft.com/office/drawing/2014/main" id="{BD75F310-06D3-42AA-8984-E767108B8E40}"/>
               </a:ext>
             </a:extLst>
           </p:cNvPr>
@@ -14810,7 +14810,7 @@
           <p:cNvPr id="69" name="">
             <a:extLst xmlns:a="http://schemas.openxmlformats.org/drawingml/2006/main">
               <a:ext uri="{FF2B5EF4-FFF2-40B4-BE49-F238E27FC236}">
-                <a16:creationId xmlns:a16="http://schemas.microsoft.com/office/drawing/2014/main" id="{C5F548EF-EA84-414B-A0F8-66F4CB1A2AC9}"/>
+                <a16:creationId xmlns:a16="http://schemas.microsoft.com/office/drawing/2014/main" id="{BFE9000F-ABA5-46FC-B06E-098EFF954E23}"/>
               </a:ext>
             </a:extLst>
           </p:cNvPr>
@@ -14843,7 +14843,7 @@
           <p:cNvPr id="70" name="">
             <a:extLst xmlns:a="http://schemas.openxmlformats.org/drawingml/2006/main">
               <a:ext uri="{FF2B5EF4-FFF2-40B4-BE49-F238E27FC236}">
-                <a16:creationId xmlns:a16="http://schemas.microsoft.com/office/drawing/2014/main" id="{D35B8D63-5B16-43FE-8CB1-83E1A159E557}"/>
+                <a16:creationId xmlns:a16="http://schemas.microsoft.com/office/drawing/2014/main" id="{53D19D03-72B8-462F-B083-46AFFC4E3527}"/>
               </a:ext>
             </a:extLst>
           </p:cNvPr>
@@ -14876,7 +14876,7 @@
           <p:cNvPr id="71" name="">
             <a:extLst xmlns:a="http://schemas.openxmlformats.org/drawingml/2006/main">
               <a:ext uri="{FF2B5EF4-FFF2-40B4-BE49-F238E27FC236}">
-                <a16:creationId xmlns:a16="http://schemas.microsoft.com/office/drawing/2014/main" id="{4ECB2D7D-7730-443A-B09A-B90A125AA085}"/>
+                <a16:creationId xmlns:a16="http://schemas.microsoft.com/office/drawing/2014/main" id="{F8B299B3-A5D5-43E7-90F0-831C4F2BE048}"/>
               </a:ext>
             </a:extLst>
           </p:cNvPr>
@@ -14909,7 +14909,7 @@
           <p:cNvPr id="72" name="">
             <a:extLst xmlns:a="http://schemas.openxmlformats.org/drawingml/2006/main">
               <a:ext uri="{FF2B5EF4-FFF2-40B4-BE49-F238E27FC236}">
-                <a16:creationId xmlns:a16="http://schemas.microsoft.com/office/drawing/2014/main" id="{06570ABB-60BC-4A88-A218-6F43F18E823D}"/>
+                <a16:creationId xmlns:a16="http://schemas.microsoft.com/office/drawing/2014/main" id="{8EEF866A-4C9C-4B10-9467-9458B8A76C84}"/>
               </a:ext>
             </a:extLst>
           </p:cNvPr>
@@ -14942,7 +14942,7 @@
           <p:cNvPr id="73" name="">
             <a:extLst xmlns:a="http://schemas.openxmlformats.org/drawingml/2006/main">
               <a:ext uri="{FF2B5EF4-FFF2-40B4-BE49-F238E27FC236}">
-                <a16:creationId xmlns:a16="http://schemas.microsoft.com/office/drawing/2014/main" id="{7492D555-5952-42C5-A10C-1F792A7B7C97}"/>
+                <a16:creationId xmlns:a16="http://schemas.microsoft.com/office/drawing/2014/main" id="{10072F16-324C-4957-8932-FF1D692962A7}"/>
               </a:ext>
             </a:extLst>
           </p:cNvPr>
@@ -14975,7 +14975,7 @@
           <p:cNvPr id="74" name="">
             <a:extLst xmlns:a="http://schemas.openxmlformats.org/drawingml/2006/main">
               <a:ext uri="{FF2B5EF4-FFF2-40B4-BE49-F238E27FC236}">
-                <a16:creationId xmlns:a16="http://schemas.microsoft.com/office/drawing/2014/main" id="{41FD2A6E-7E84-45C9-8E16-33469D853410}"/>
+                <a16:creationId xmlns:a16="http://schemas.microsoft.com/office/drawing/2014/main" id="{D08A4C3A-39F1-4CBA-8674-A5D8C3C93135}"/>
               </a:ext>
             </a:extLst>
           </p:cNvPr>
@@ -15008,7 +15008,7 @@
           <p:cNvPr id="75" name="">
             <a:extLst xmlns:a="http://schemas.openxmlformats.org/drawingml/2006/main">
               <a:ext uri="{FF2B5EF4-FFF2-40B4-BE49-F238E27FC236}">
-                <a16:creationId xmlns:a16="http://schemas.microsoft.com/office/drawing/2014/main" id="{6DDC49B6-2E6F-4CCE-BC28-27A603571A00}"/>
+                <a16:creationId xmlns:a16="http://schemas.microsoft.com/office/drawing/2014/main" id="{4908D299-0BB6-4C34-8495-784BA6107EF4}"/>
               </a:ext>
             </a:extLst>
           </p:cNvPr>
@@ -15041,7 +15041,7 @@
           <p:cNvPr id="76" name="">
             <a:extLst xmlns:a="http://schemas.openxmlformats.org/drawingml/2006/main">
               <a:ext uri="{FF2B5EF4-FFF2-40B4-BE49-F238E27FC236}">
-                <a16:creationId xmlns:a16="http://schemas.microsoft.com/office/drawing/2014/main" id="{70A6623C-0D2A-4890-8B92-C2B7501D6A66}"/>
+                <a16:creationId xmlns:a16="http://schemas.microsoft.com/office/drawing/2014/main" id="{75CA37E0-2601-469C-9976-7128D84CBBC6}"/>
               </a:ext>
             </a:extLst>
           </p:cNvPr>
@@ -15074,7 +15074,7 @@
           <p:cNvPr id="77" name="">
             <a:extLst xmlns:a="http://schemas.openxmlformats.org/drawingml/2006/main">
               <a:ext uri="{FF2B5EF4-FFF2-40B4-BE49-F238E27FC236}">
-                <a16:creationId xmlns:a16="http://schemas.microsoft.com/office/drawing/2014/main" id="{9100A799-DC9E-4FCA-A15F-09C5DC1D5E6A}"/>
+                <a16:creationId xmlns:a16="http://schemas.microsoft.com/office/drawing/2014/main" id="{120608DC-92E4-4F8F-AE9C-83A6C7E72C8F}"/>
               </a:ext>
             </a:extLst>
           </p:cNvPr>
@@ -15107,7 +15107,7 @@
           <p:cNvPr id="78" name="">
             <a:extLst xmlns:a="http://schemas.openxmlformats.org/drawingml/2006/main">
               <a:ext uri="{FF2B5EF4-FFF2-40B4-BE49-F238E27FC236}">
-                <a16:creationId xmlns:a16="http://schemas.microsoft.com/office/drawing/2014/main" id="{55F5A77C-2C37-466D-A71D-7626359E504E}"/>
+                <a16:creationId xmlns:a16="http://schemas.microsoft.com/office/drawing/2014/main" id="{8FC8AFF4-A1A7-450F-B38A-2EC9F05628E1}"/>
               </a:ext>
             </a:extLst>
           </p:cNvPr>
@@ -15140,7 +15140,7 @@
           <p:cNvPr id="79" name="">
             <a:extLst xmlns:a="http://schemas.openxmlformats.org/drawingml/2006/main">
               <a:ext uri="{FF2B5EF4-FFF2-40B4-BE49-F238E27FC236}">
-                <a16:creationId xmlns:a16="http://schemas.microsoft.com/office/drawing/2014/main" id="{EF35BE85-0C41-4679-B14B-60B15C0E15F7}"/>
+                <a16:creationId xmlns:a16="http://schemas.microsoft.com/office/drawing/2014/main" id="{0B9862DA-0848-42C9-B00F-134650F8E07B}"/>
               </a:ext>
             </a:extLst>
           </p:cNvPr>
@@ -15173,7 +15173,7 @@
           <p:cNvPr id="80" name="">
             <a:extLst xmlns:a="http://schemas.openxmlformats.org/drawingml/2006/main">
               <a:ext uri="{FF2B5EF4-FFF2-40B4-BE49-F238E27FC236}">
-                <a16:creationId xmlns:a16="http://schemas.microsoft.com/office/drawing/2014/main" id="{FDA7CA44-3BF7-4D66-B374-9257FB299CB1}"/>
+                <a16:creationId xmlns:a16="http://schemas.microsoft.com/office/drawing/2014/main" id="{050EFB10-9C4E-4E0A-A657-5B61E4D6A037}"/>
               </a:ext>
             </a:extLst>
           </p:cNvPr>
@@ -15206,7 +15206,7 @@
           <p:cNvPr id="81" name="">
             <a:extLst xmlns:a="http://schemas.openxmlformats.org/drawingml/2006/main">
               <a:ext uri="{FF2B5EF4-FFF2-40B4-BE49-F238E27FC236}">
-                <a16:creationId xmlns:a16="http://schemas.microsoft.com/office/drawing/2014/main" id="{AC670663-9E6A-4481-8FD9-DCD95E23233A}"/>
+                <a16:creationId xmlns:a16="http://schemas.microsoft.com/office/drawing/2014/main" id="{F0443CFA-32C2-4011-A33C-D463743EEF5A}"/>
               </a:ext>
             </a:extLst>
           </p:cNvPr>
@@ -15239,7 +15239,7 @@
           <p:cNvPr id="82" name="">
             <a:extLst xmlns:a="http://schemas.openxmlformats.org/drawingml/2006/main">
               <a:ext uri="{FF2B5EF4-FFF2-40B4-BE49-F238E27FC236}">
-                <a16:creationId xmlns:a16="http://schemas.microsoft.com/office/drawing/2014/main" id="{EB2E74E5-27F1-45B5-B434-372F52A66539}"/>
+                <a16:creationId xmlns:a16="http://schemas.microsoft.com/office/drawing/2014/main" id="{EF5B160E-FC5C-48BD-AB33-833ABA47F682}"/>
               </a:ext>
             </a:extLst>
           </p:cNvPr>
@@ -15272,7 +15272,7 @@
           <p:cNvPr id="83" name="">
             <a:extLst xmlns:a="http://schemas.openxmlformats.org/drawingml/2006/main">
               <a:ext uri="{FF2B5EF4-FFF2-40B4-BE49-F238E27FC236}">
-                <a16:creationId xmlns:a16="http://schemas.microsoft.com/office/drawing/2014/main" id="{8F3594DA-4D21-4350-B6BB-B1BDDB67C486}"/>
+                <a16:creationId xmlns:a16="http://schemas.microsoft.com/office/drawing/2014/main" id="{B6B0EA5D-9A44-4ABE-B33A-4AD25458FE45}"/>
               </a:ext>
             </a:extLst>
           </p:cNvPr>
@@ -15305,7 +15305,7 @@
           <p:cNvPr id="84" name="">
             <a:extLst xmlns:a="http://schemas.openxmlformats.org/drawingml/2006/main">
               <a:ext uri="{FF2B5EF4-FFF2-40B4-BE49-F238E27FC236}">
-                <a16:creationId xmlns:a16="http://schemas.microsoft.com/office/drawing/2014/main" id="{B0113E1D-A6B9-4EB4-9AD2-5C7583D7AB3B}"/>
+                <a16:creationId xmlns:a16="http://schemas.microsoft.com/office/drawing/2014/main" id="{8C0DF091-0CAD-4775-959C-5EC361BD97C6}"/>
               </a:ext>
             </a:extLst>
           </p:cNvPr>
@@ -15338,7 +15338,7 @@
           <p:cNvPr id="85" name="">
             <a:extLst xmlns:a="http://schemas.openxmlformats.org/drawingml/2006/main">
               <a:ext uri="{FF2B5EF4-FFF2-40B4-BE49-F238E27FC236}">
-                <a16:creationId xmlns:a16="http://schemas.microsoft.com/office/drawing/2014/main" id="{A51DEB6B-A981-404A-BAB3-8F0C94FF9A74}"/>
+                <a16:creationId xmlns:a16="http://schemas.microsoft.com/office/drawing/2014/main" id="{C771BB6A-C9D8-403D-97A9-91DBFF612894}"/>
               </a:ext>
             </a:extLst>
           </p:cNvPr>
@@ -15371,7 +15371,7 @@
           <p:cNvPr id="86" name="">
             <a:extLst xmlns:a="http://schemas.openxmlformats.org/drawingml/2006/main">
               <a:ext uri="{FF2B5EF4-FFF2-40B4-BE49-F238E27FC236}">
-                <a16:creationId xmlns:a16="http://schemas.microsoft.com/office/drawing/2014/main" id="{38D279B7-04EC-4448-ADFF-A5A548174827}"/>
+                <a16:creationId xmlns:a16="http://schemas.microsoft.com/office/drawing/2014/main" id="{81D323DB-51AD-43B1-B7CC-1264ED1E8B17}"/>
               </a:ext>
             </a:extLst>
           </p:cNvPr>
@@ -15404,7 +15404,7 @@
           <p:cNvPr id="87" name="">
             <a:extLst xmlns:a="http://schemas.openxmlformats.org/drawingml/2006/main">
               <a:ext uri="{FF2B5EF4-FFF2-40B4-BE49-F238E27FC236}">
-                <a16:creationId xmlns:a16="http://schemas.microsoft.com/office/drawing/2014/main" id="{D33BBEBD-F5B8-4315-B374-0CFF320D58BE}"/>
+                <a16:creationId xmlns:a16="http://schemas.microsoft.com/office/drawing/2014/main" id="{C06087E7-DC9D-4B50-AF9E-3A5F5867090B}"/>
               </a:ext>
             </a:extLst>
           </p:cNvPr>
@@ -15437,7 +15437,7 @@
           <p:cNvPr id="88" name="">
             <a:extLst xmlns:a="http://schemas.openxmlformats.org/drawingml/2006/main">
               <a:ext uri="{FF2B5EF4-FFF2-40B4-BE49-F238E27FC236}">
-                <a16:creationId xmlns:a16="http://schemas.microsoft.com/office/drawing/2014/main" id="{955F4916-CB5E-4581-965C-245A403873DA}"/>
+                <a16:creationId xmlns:a16="http://schemas.microsoft.com/office/drawing/2014/main" id="{E1D6C32F-EC86-4678-A57E-80DACC669E14}"/>
               </a:ext>
             </a:extLst>
           </p:cNvPr>
@@ -15470,7 +15470,7 @@
           <p:cNvPr id="89" name="">
             <a:extLst xmlns:a="http://schemas.openxmlformats.org/drawingml/2006/main">
               <a:ext uri="{FF2B5EF4-FFF2-40B4-BE49-F238E27FC236}">
-                <a16:creationId xmlns:a16="http://schemas.microsoft.com/office/drawing/2014/main" id="{F9CFAC08-F347-4A8A-B8CC-6A9A1CF154B1}"/>
+                <a16:creationId xmlns:a16="http://schemas.microsoft.com/office/drawing/2014/main" id="{DE6B14B5-DF71-4FB1-AE65-6833441A341E}"/>
               </a:ext>
             </a:extLst>
           </p:cNvPr>
@@ -15503,7 +15503,7 @@
           <p:cNvPr id="90" name="">
             <a:extLst xmlns:a="http://schemas.openxmlformats.org/drawingml/2006/main">
               <a:ext uri="{FF2B5EF4-FFF2-40B4-BE49-F238E27FC236}">
-                <a16:creationId xmlns:a16="http://schemas.microsoft.com/office/drawing/2014/main" id="{70EF8F7F-0A4E-4E70-9AC8-3FCE22D71E5B}"/>
+                <a16:creationId xmlns:a16="http://schemas.microsoft.com/office/drawing/2014/main" id="{AAC5FEDC-5A45-487D-BDC0-598DE2B408C9}"/>
               </a:ext>
             </a:extLst>
           </p:cNvPr>
@@ -15536,7 +15536,7 @@
           <p:cNvPr id="91" name="">
             <a:extLst xmlns:a="http://schemas.openxmlformats.org/drawingml/2006/main">
               <a:ext uri="{FF2B5EF4-FFF2-40B4-BE49-F238E27FC236}">
-                <a16:creationId xmlns:a16="http://schemas.microsoft.com/office/drawing/2014/main" id="{623B9A54-9DFE-4580-A04D-16FAC511D5B9}"/>
+                <a16:creationId xmlns:a16="http://schemas.microsoft.com/office/drawing/2014/main" id="{F2E4586C-92F1-48CB-A361-A98F5550B052}"/>
               </a:ext>
             </a:extLst>
           </p:cNvPr>
@@ -15569,7 +15569,7 @@
           <p:cNvPr id="92" name="">
             <a:extLst xmlns:a="http://schemas.openxmlformats.org/drawingml/2006/main">
               <a:ext uri="{FF2B5EF4-FFF2-40B4-BE49-F238E27FC236}">
-                <a16:creationId xmlns:a16="http://schemas.microsoft.com/office/drawing/2014/main" id="{480F24BB-93DA-48AE-80AD-FC5F067462D8}"/>
+                <a16:creationId xmlns:a16="http://schemas.microsoft.com/office/drawing/2014/main" id="{3766AAC1-6505-4C2D-BF8B-C1600D90E131}"/>
               </a:ext>
             </a:extLst>
           </p:cNvPr>
@@ -15602,7 +15602,7 @@
           <p:cNvPr id="93" name="">
             <a:extLst xmlns:a="http://schemas.openxmlformats.org/drawingml/2006/main">
               <a:ext uri="{FF2B5EF4-FFF2-40B4-BE49-F238E27FC236}">
-                <a16:creationId xmlns:a16="http://schemas.microsoft.com/office/drawing/2014/main" id="{96FFCCB5-B1B3-4D56-B5FC-6A75CC193189}"/>
+                <a16:creationId xmlns:a16="http://schemas.microsoft.com/office/drawing/2014/main" id="{102ECC4E-1A2A-40BE-A203-96FE09853577}"/>
               </a:ext>
             </a:extLst>
           </p:cNvPr>
@@ -15635,7 +15635,7 @@
           <p:cNvPr id="94" name="">
             <a:extLst xmlns:a="http://schemas.openxmlformats.org/drawingml/2006/main">
               <a:ext uri="{FF2B5EF4-FFF2-40B4-BE49-F238E27FC236}">
-                <a16:creationId xmlns:a16="http://schemas.microsoft.com/office/drawing/2014/main" id="{242FAA49-0A0B-4FAB-A9CC-543567609687}"/>
+                <a16:creationId xmlns:a16="http://schemas.microsoft.com/office/drawing/2014/main" id="{62B357BE-7864-4F08-89AA-C4C638FFD729}"/>
               </a:ext>
             </a:extLst>
           </p:cNvPr>
@@ -15668,7 +15668,7 @@
           <p:cNvPr id="95" name="">
             <a:extLst xmlns:a="http://schemas.openxmlformats.org/drawingml/2006/main">
               <a:ext uri="{FF2B5EF4-FFF2-40B4-BE49-F238E27FC236}">
-                <a16:creationId xmlns:a16="http://schemas.microsoft.com/office/drawing/2014/main" id="{DF8970B3-A47E-498C-9A62-920CEBF0DF22}"/>
+                <a16:creationId xmlns:a16="http://schemas.microsoft.com/office/drawing/2014/main" id="{BD5491BF-098E-4637-98DB-96E7EA693B4C}"/>
               </a:ext>
             </a:extLst>
           </p:cNvPr>
@@ -15701,7 +15701,7 @@
           <p:cNvPr id="96" name="">
             <a:extLst xmlns:a="http://schemas.openxmlformats.org/drawingml/2006/main">
               <a:ext uri="{FF2B5EF4-FFF2-40B4-BE49-F238E27FC236}">
-                <a16:creationId xmlns:a16="http://schemas.microsoft.com/office/drawing/2014/main" id="{C3958278-6F5A-4274-A0C7-7CE8B32223F9}"/>
+                <a16:creationId xmlns:a16="http://schemas.microsoft.com/office/drawing/2014/main" id="{B0CC723C-FF18-4AD1-9EC9-17AC2E55F0E9}"/>
               </a:ext>
             </a:extLst>
           </p:cNvPr>
@@ -15734,7 +15734,7 @@
           <p:cNvPr id="97" name="">
             <a:extLst xmlns:a="http://schemas.openxmlformats.org/drawingml/2006/main">
               <a:ext uri="{FF2B5EF4-FFF2-40B4-BE49-F238E27FC236}">
-                <a16:creationId xmlns:a16="http://schemas.microsoft.com/office/drawing/2014/main" id="{866C7703-ECC9-4478-A222-40931B66EE19}"/>
+                <a16:creationId xmlns:a16="http://schemas.microsoft.com/office/drawing/2014/main" id="{A0F4163E-1627-4835-A4FF-E180334D6BE2}"/>
               </a:ext>
             </a:extLst>
           </p:cNvPr>
@@ -15767,7 +15767,7 @@
           <p:cNvPr id="98" name="">
             <a:extLst xmlns:a="http://schemas.openxmlformats.org/drawingml/2006/main">
               <a:ext uri="{FF2B5EF4-FFF2-40B4-BE49-F238E27FC236}">
-                <a16:creationId xmlns:a16="http://schemas.microsoft.com/office/drawing/2014/main" id="{DAFAA629-FF26-482B-B3AB-CA41202519D1}"/>
+                <a16:creationId xmlns:a16="http://schemas.microsoft.com/office/drawing/2014/main" id="{6545A2B8-52BD-4F38-9647-8DFAE6326A63}"/>
               </a:ext>
             </a:extLst>
           </p:cNvPr>
@@ -15800,7 +15800,7 @@
           <p:cNvPr id="99" name="">
             <a:extLst xmlns:a="http://schemas.openxmlformats.org/drawingml/2006/main">
               <a:ext uri="{FF2B5EF4-FFF2-40B4-BE49-F238E27FC236}">
-                <a16:creationId xmlns:a16="http://schemas.microsoft.com/office/drawing/2014/main" id="{D45A7C55-F830-43DB-B72C-777E878DB9D8}"/>
+                <a16:creationId xmlns:a16="http://schemas.microsoft.com/office/drawing/2014/main" id="{4AA52C91-B3A2-4D14-8B1C-FE8947ABDDC3}"/>
               </a:ext>
             </a:extLst>
           </p:cNvPr>
@@ -15833,7 +15833,7 @@
           <p:cNvPr id="100" name="">
             <a:extLst xmlns:a="http://schemas.openxmlformats.org/drawingml/2006/main">
               <a:ext uri="{FF2B5EF4-FFF2-40B4-BE49-F238E27FC236}">
-                <a16:creationId xmlns:a16="http://schemas.microsoft.com/office/drawing/2014/main" id="{5DC10D6C-C37B-45A2-9371-E4F5E7627B8F}"/>
+                <a16:creationId xmlns:a16="http://schemas.microsoft.com/office/drawing/2014/main" id="{24674F4A-BA68-44E3-96C5-CB51D007E909}"/>
               </a:ext>
             </a:extLst>
           </p:cNvPr>
@@ -15866,7 +15866,7 @@
           <p:cNvPr id="101" name="">
             <a:extLst xmlns:a="http://schemas.openxmlformats.org/drawingml/2006/main">
               <a:ext uri="{FF2B5EF4-FFF2-40B4-BE49-F238E27FC236}">
-                <a16:creationId xmlns:a16="http://schemas.microsoft.com/office/drawing/2014/main" id="{125E9221-5716-4F69-A1AE-24ED9193FD49}"/>
+                <a16:creationId xmlns:a16="http://schemas.microsoft.com/office/drawing/2014/main" id="{F48B82BC-C801-4B2E-812E-ACC997F6E6F6}"/>
               </a:ext>
             </a:extLst>
           </p:cNvPr>
@@ -15899,7 +15899,7 @@
           <p:cNvPr id="102" name="">
             <a:extLst xmlns:a="http://schemas.openxmlformats.org/drawingml/2006/main">
               <a:ext uri="{FF2B5EF4-FFF2-40B4-BE49-F238E27FC236}">
-                <a16:creationId xmlns:a16="http://schemas.microsoft.com/office/drawing/2014/main" id="{7EC23AAE-2C87-4E58-9A12-DB4927623310}"/>
+                <a16:creationId xmlns:a16="http://schemas.microsoft.com/office/drawing/2014/main" id="{16AB7F30-D478-4EA3-AA38-11A475F88959}"/>
               </a:ext>
             </a:extLst>
           </p:cNvPr>
@@ -15932,7 +15932,7 @@
           <p:cNvPr id="103" name="">
             <a:extLst xmlns:a="http://schemas.openxmlformats.org/drawingml/2006/main">
               <a:ext uri="{FF2B5EF4-FFF2-40B4-BE49-F238E27FC236}">
-                <a16:creationId xmlns:a16="http://schemas.microsoft.com/office/drawing/2014/main" id="{DD4B7F12-8E37-40A2-A80E-8D1B5BF51812}"/>
+                <a16:creationId xmlns:a16="http://schemas.microsoft.com/office/drawing/2014/main" id="{24156EF9-A5CC-401C-A1B5-1EC12A19A817}"/>
               </a:ext>
             </a:extLst>
           </p:cNvPr>
@@ -15965,7 +15965,7 @@
           <p:cNvPr id="104" name="">
             <a:extLst xmlns:a="http://schemas.openxmlformats.org/drawingml/2006/main">
               <a:ext uri="{FF2B5EF4-FFF2-40B4-BE49-F238E27FC236}">
-                <a16:creationId xmlns:a16="http://schemas.microsoft.com/office/drawing/2014/main" id="{2838436B-0C47-4D10-84B2-2EDB926DF27E}"/>
+                <a16:creationId xmlns:a16="http://schemas.microsoft.com/office/drawing/2014/main" id="{B7B2C83B-AC49-41E0-8038-90F25E1ACF08}"/>
               </a:ext>
             </a:extLst>
           </p:cNvPr>
@@ -15998,7 +15998,7 @@
           <p:cNvPr id="105" name="">
             <a:extLst xmlns:a="http://schemas.openxmlformats.org/drawingml/2006/main">
               <a:ext uri="{FF2B5EF4-FFF2-40B4-BE49-F238E27FC236}">
-                <a16:creationId xmlns:a16="http://schemas.microsoft.com/office/drawing/2014/main" id="{99D11B32-9994-4A16-BF7A-B43F60013B65}"/>
+                <a16:creationId xmlns:a16="http://schemas.microsoft.com/office/drawing/2014/main" id="{A3026C3E-6C92-4E3E-998D-F9B20C524F49}"/>
               </a:ext>
             </a:extLst>
           </p:cNvPr>
@@ -16031,7 +16031,7 @@
           <p:cNvPr id="106" name="">
             <a:extLst xmlns:a="http://schemas.openxmlformats.org/drawingml/2006/main">
               <a:ext uri="{FF2B5EF4-FFF2-40B4-BE49-F238E27FC236}">
-                <a16:creationId xmlns:a16="http://schemas.microsoft.com/office/drawing/2014/main" id="{70AD0DCD-9DF9-426E-A2AC-643C54CCA067}"/>
+                <a16:creationId xmlns:a16="http://schemas.microsoft.com/office/drawing/2014/main" id="{2C2229E8-87B3-4742-AF7C-7672AA600FEF}"/>
               </a:ext>
             </a:extLst>
           </p:cNvPr>
@@ -16066,7 +16066,7 @@
           <p:cNvPr id="107" name="">
             <a:extLst xmlns:a="http://schemas.openxmlformats.org/drawingml/2006/main">
               <a:ext uri="{FF2B5EF4-FFF2-40B4-BE49-F238E27FC236}">
-                <a16:creationId xmlns:a16="http://schemas.microsoft.com/office/drawing/2014/main" id="{48220C6A-934C-4469-B619-64E1F67C9139}"/>
+                <a16:creationId xmlns:a16="http://schemas.microsoft.com/office/drawing/2014/main" id="{D370828E-C212-4173-8777-1DCDA0236A9E}"/>
               </a:ext>
             </a:extLst>
           </p:cNvPr>
@@ -16099,7 +16099,7 @@
           <p:cNvPr id="108" name="">
             <a:extLst xmlns:a="http://schemas.openxmlformats.org/drawingml/2006/main">
               <a:ext uri="{FF2B5EF4-FFF2-40B4-BE49-F238E27FC236}">
-                <a16:creationId xmlns:a16="http://schemas.microsoft.com/office/drawing/2014/main" id="{C30F9B2C-B916-4380-AB55-73531A258364}"/>
+                <a16:creationId xmlns:a16="http://schemas.microsoft.com/office/drawing/2014/main" id="{BD7214DB-BE18-46D1-A39D-B02EEEE58951}"/>
               </a:ext>
             </a:extLst>
           </p:cNvPr>
@@ -16132,7 +16132,7 @@
           <p:cNvPr id="109" name="">
             <a:extLst xmlns:a="http://schemas.openxmlformats.org/drawingml/2006/main">
               <a:ext uri="{FF2B5EF4-FFF2-40B4-BE49-F238E27FC236}">
-                <a16:creationId xmlns:a16="http://schemas.microsoft.com/office/drawing/2014/main" id="{299C2DDC-2765-4B50-9B06-F4B8B5FB4205}"/>
+                <a16:creationId xmlns:a16="http://schemas.microsoft.com/office/drawing/2014/main" id="{A7F5A50D-FE59-4E26-A4DB-9DC09C402D13}"/>
               </a:ext>
             </a:extLst>
           </p:cNvPr>
@@ -16165,7 +16165,7 @@
           <p:cNvPr id="110" name="">
             <a:extLst xmlns:a="http://schemas.openxmlformats.org/drawingml/2006/main">
               <a:ext uri="{FF2B5EF4-FFF2-40B4-BE49-F238E27FC236}">
-                <a16:creationId xmlns:a16="http://schemas.microsoft.com/office/drawing/2014/main" id="{9465CC6A-5EA5-4D87-BC87-5C616C112CF0}"/>
+                <a16:creationId xmlns:a16="http://schemas.microsoft.com/office/drawing/2014/main" id="{9D631EE0-BE9D-4369-AAAF-172FD82DE2BC}"/>
               </a:ext>
             </a:extLst>
           </p:cNvPr>
@@ -16198,7 +16198,7 @@
           <p:cNvPr id="111" name="">
             <a:extLst xmlns:a="http://schemas.openxmlformats.org/drawingml/2006/main">
               <a:ext uri="{FF2B5EF4-FFF2-40B4-BE49-F238E27FC236}">
-                <a16:creationId xmlns:a16="http://schemas.microsoft.com/office/drawing/2014/main" id="{EE213CA4-8103-4E7B-83D3-8866F7615CE3}"/>
+                <a16:creationId xmlns:a16="http://schemas.microsoft.com/office/drawing/2014/main" id="{F07BB298-1DCD-4702-B171-4B22E63D6C6F}"/>
               </a:ext>
             </a:extLst>
           </p:cNvPr>
@@ -16231,7 +16231,7 @@
           <p:cNvPr id="112" name="">
             <a:extLst xmlns:a="http://schemas.openxmlformats.org/drawingml/2006/main">
               <a:ext uri="{FF2B5EF4-FFF2-40B4-BE49-F238E27FC236}">
-                <a16:creationId xmlns:a16="http://schemas.microsoft.com/office/drawing/2014/main" id="{BD54EF27-18D7-40B4-8928-52BA778B4E3C}"/>
+                <a16:creationId xmlns:a16="http://schemas.microsoft.com/office/drawing/2014/main" id="{D38F9B0D-CFBF-406B-BFF7-10690D837A82}"/>
               </a:ext>
             </a:extLst>
           </p:cNvPr>
@@ -16264,7 +16264,7 @@
           <p:cNvPr id="113" name="">
             <a:extLst xmlns:a="http://schemas.openxmlformats.org/drawingml/2006/main">
               <a:ext uri="{FF2B5EF4-FFF2-40B4-BE49-F238E27FC236}">
-                <a16:creationId xmlns:a16="http://schemas.microsoft.com/office/drawing/2014/main" id="{93357955-F741-4580-B798-6FEBF8B90297}"/>
+                <a16:creationId xmlns:a16="http://schemas.microsoft.com/office/drawing/2014/main" id="{03A63012-54B8-4C29-81D2-71283E191D6A}"/>
               </a:ext>
             </a:extLst>
           </p:cNvPr>
@@ -16297,7 +16297,7 @@
           <p:cNvPr id="114" name="">
             <a:extLst xmlns:a="http://schemas.openxmlformats.org/drawingml/2006/main">
               <a:ext uri="{FF2B5EF4-FFF2-40B4-BE49-F238E27FC236}">
-                <a16:creationId xmlns:a16="http://schemas.microsoft.com/office/drawing/2014/main" id="{BA6AB3FB-6E79-4A45-AB6D-1B2D283F409D}"/>
+                <a16:creationId xmlns:a16="http://schemas.microsoft.com/office/drawing/2014/main" id="{ABADD0F8-5FC5-4576-B04B-D0B7CE202D44}"/>
               </a:ext>
             </a:extLst>
           </p:cNvPr>
@@ -16330,7 +16330,7 @@
           <p:cNvPr id="115" name="">
             <a:extLst xmlns:a="http://schemas.openxmlformats.org/drawingml/2006/main">
               <a:ext uri="{FF2B5EF4-FFF2-40B4-BE49-F238E27FC236}">
-                <a16:creationId xmlns:a16="http://schemas.microsoft.com/office/drawing/2014/main" id="{81BC3D83-B144-4451-BF36-6FCC9A6934E9}"/>
+                <a16:creationId xmlns:a16="http://schemas.microsoft.com/office/drawing/2014/main" id="{B1054D61-5A9F-4FED-8C33-337506403A15}"/>
               </a:ext>
             </a:extLst>
           </p:cNvPr>
@@ -16363,7 +16363,7 @@
           <p:cNvPr id="116" name="">
             <a:extLst xmlns:a="http://schemas.openxmlformats.org/drawingml/2006/main">
               <a:ext uri="{FF2B5EF4-FFF2-40B4-BE49-F238E27FC236}">
-                <a16:creationId xmlns:a16="http://schemas.microsoft.com/office/drawing/2014/main" id="{315F9790-3794-40B1-AC90-2E4283077594}"/>
+                <a16:creationId xmlns:a16="http://schemas.microsoft.com/office/drawing/2014/main" id="{443AE941-CDFB-429F-9656-1BE70DA81D6D}"/>
               </a:ext>
             </a:extLst>
           </p:cNvPr>
@@ -16396,7 +16396,7 @@
           <p:cNvPr id="117" name="">
             <a:extLst xmlns:a="http://schemas.openxmlformats.org/drawingml/2006/main">
               <a:ext uri="{FF2B5EF4-FFF2-40B4-BE49-F238E27FC236}">
-                <a16:creationId xmlns:a16="http://schemas.microsoft.com/office/drawing/2014/main" id="{5BA5B618-B82B-4BEB-B71D-DB7D38F1880A}"/>
+                <a16:creationId xmlns:a16="http://schemas.microsoft.com/office/drawing/2014/main" id="{0EB88F85-0C78-4558-A587-82CDCD7666BC}"/>
               </a:ext>
             </a:extLst>
           </p:cNvPr>
@@ -16429,7 +16429,7 @@
           <p:cNvPr id="118" name="">
             <a:extLst xmlns:a="http://schemas.openxmlformats.org/drawingml/2006/main">
               <a:ext uri="{FF2B5EF4-FFF2-40B4-BE49-F238E27FC236}">
-                <a16:creationId xmlns:a16="http://schemas.microsoft.com/office/drawing/2014/main" id="{AD268183-CB73-41B9-8B49-1FDB8AA5AD97}"/>
+                <a16:creationId xmlns:a16="http://schemas.microsoft.com/office/drawing/2014/main" id="{B17A5A58-2FF0-4C8F-A816-EEEBBBEA7078}"/>
               </a:ext>
             </a:extLst>
           </p:cNvPr>
@@ -16462,7 +16462,7 @@
           <p:cNvPr id="119" name="">
             <a:extLst xmlns:a="http://schemas.openxmlformats.org/drawingml/2006/main">
               <a:ext uri="{FF2B5EF4-FFF2-40B4-BE49-F238E27FC236}">
-                <a16:creationId xmlns:a16="http://schemas.microsoft.com/office/drawing/2014/main" id="{BBEFBCFC-6262-4C8C-801F-BADEA1C71D3A}"/>
+                <a16:creationId xmlns:a16="http://schemas.microsoft.com/office/drawing/2014/main" id="{30F007ED-FB99-4B4A-A4B2-0406BEE0255C}"/>
               </a:ext>
             </a:extLst>
           </p:cNvPr>
@@ -16495,7 +16495,7 @@
           <p:cNvPr id="120" name="">
             <a:extLst xmlns:a="http://schemas.openxmlformats.org/drawingml/2006/main">
               <a:ext uri="{FF2B5EF4-FFF2-40B4-BE49-F238E27FC236}">
-                <a16:creationId xmlns:a16="http://schemas.microsoft.com/office/drawing/2014/main" id="{7A7FB82C-36D3-4D37-9649-348899C3AAD6}"/>
+                <a16:creationId xmlns:a16="http://schemas.microsoft.com/office/drawing/2014/main" id="{A4EC82B8-7ED8-4005-911D-AED7D00A0EB4}"/>
               </a:ext>
             </a:extLst>
           </p:cNvPr>
@@ -16528,7 +16528,7 @@
           <p:cNvPr id="121" name="">
             <a:extLst xmlns:a="http://schemas.openxmlformats.org/drawingml/2006/main">
               <a:ext uri="{FF2B5EF4-FFF2-40B4-BE49-F238E27FC236}">
-                <a16:creationId xmlns:a16="http://schemas.microsoft.com/office/drawing/2014/main" id="{74F6101C-3167-431D-B68A-092EC3129479}"/>
+                <a16:creationId xmlns:a16="http://schemas.microsoft.com/office/drawing/2014/main" id="{0C1E8951-AE18-44CA-90DC-655041F2AA97}"/>
               </a:ext>
             </a:extLst>
           </p:cNvPr>
@@ -16561,7 +16561,7 @@
           <p:cNvPr id="122" name="">
             <a:extLst xmlns:a="http://schemas.openxmlformats.org/drawingml/2006/main">
               <a:ext uri="{FF2B5EF4-FFF2-40B4-BE49-F238E27FC236}">
-                <a16:creationId xmlns:a16="http://schemas.microsoft.com/office/drawing/2014/main" id="{71329414-7EEE-41CD-B73E-0631B3DCB24A}"/>
+                <a16:creationId xmlns:a16="http://schemas.microsoft.com/office/drawing/2014/main" id="{36AA27DF-539C-44C6-9E8B-2F6E33126CA0}"/>
               </a:ext>
             </a:extLst>
           </p:cNvPr>
@@ -16594,7 +16594,7 @@
           <p:cNvPr id="123" name="">
             <a:extLst xmlns:a="http://schemas.openxmlformats.org/drawingml/2006/main">
               <a:ext uri="{FF2B5EF4-FFF2-40B4-BE49-F238E27FC236}">
-                <a16:creationId xmlns:a16="http://schemas.microsoft.com/office/drawing/2014/main" id="{2D1EB987-7557-44BD-8B22-CBDF50B007BD}"/>
+                <a16:creationId xmlns:a16="http://schemas.microsoft.com/office/drawing/2014/main" id="{52F05274-F4FE-4823-B0AD-B3F4BF8D613C}"/>
               </a:ext>
             </a:extLst>
           </p:cNvPr>
@@ -16627,7 +16627,7 @@
           <p:cNvPr id="124" name="">
             <a:extLst xmlns:a="http://schemas.openxmlformats.org/drawingml/2006/main">
               <a:ext uri="{FF2B5EF4-FFF2-40B4-BE49-F238E27FC236}">
-                <a16:creationId xmlns:a16="http://schemas.microsoft.com/office/drawing/2014/main" id="{3075070C-4AC3-460A-ACF6-24CA219852F0}"/>
+                <a16:creationId xmlns:a16="http://schemas.microsoft.com/office/drawing/2014/main" id="{D8291862-CA2B-4FAA-B320-004E6E4EE2E3}"/>
               </a:ext>
             </a:extLst>
           </p:cNvPr>
@@ -16660,7 +16660,7 @@
           <p:cNvPr id="125" name="">
             <a:extLst xmlns:a="http://schemas.openxmlformats.org/drawingml/2006/main">
               <a:ext uri="{FF2B5EF4-FFF2-40B4-BE49-F238E27FC236}">
-                <a16:creationId xmlns:a16="http://schemas.microsoft.com/office/drawing/2014/main" id="{B85940E0-B15B-4889-96AF-7361368AD2AC}"/>
+                <a16:creationId xmlns:a16="http://schemas.microsoft.com/office/drawing/2014/main" id="{42131528-ABE0-4D91-98E9-570FE915DE4B}"/>
               </a:ext>
             </a:extLst>
           </p:cNvPr>
@@ -16693,7 +16693,7 @@
           <p:cNvPr id="126" name="">
             <a:extLst xmlns:a="http://schemas.openxmlformats.org/drawingml/2006/main">
               <a:ext uri="{FF2B5EF4-FFF2-40B4-BE49-F238E27FC236}">
-                <a16:creationId xmlns:a16="http://schemas.microsoft.com/office/drawing/2014/main" id="{0D2C1E5E-D4C0-430B-85BD-6F68AB129E9B}"/>
+                <a16:creationId xmlns:a16="http://schemas.microsoft.com/office/drawing/2014/main" id="{72706FA6-9F7F-4D0E-9361-8A4801D2D4F1}"/>
               </a:ext>
             </a:extLst>
           </p:cNvPr>
@@ -16726,7 +16726,7 @@
           <p:cNvPr id="127" name="">
             <a:extLst xmlns:a="http://schemas.openxmlformats.org/drawingml/2006/main">
               <a:ext uri="{FF2B5EF4-FFF2-40B4-BE49-F238E27FC236}">
-                <a16:creationId xmlns:a16="http://schemas.microsoft.com/office/drawing/2014/main" id="{AB7175BD-F8D4-4A49-9E98-F3BE910750E5}"/>
+                <a16:creationId xmlns:a16="http://schemas.microsoft.com/office/drawing/2014/main" id="{8C006997-D226-4F89-AFC5-CF197653685B}"/>
               </a:ext>
             </a:extLst>
           </p:cNvPr>
@@ -16759,7 +16759,7 @@
           <p:cNvPr id="128" name="">
             <a:extLst xmlns:a="http://schemas.openxmlformats.org/drawingml/2006/main">
               <a:ext uri="{FF2B5EF4-FFF2-40B4-BE49-F238E27FC236}">
-                <a16:creationId xmlns:a16="http://schemas.microsoft.com/office/drawing/2014/main" id="{EB43642C-C9E2-4346-B441-FB5DFF7ED887}"/>
+                <a16:creationId xmlns:a16="http://schemas.microsoft.com/office/drawing/2014/main" id="{25B445E1-22A2-481E-BA6C-92795CDC4BEA}"/>
               </a:ext>
             </a:extLst>
           </p:cNvPr>
@@ -16792,7 +16792,7 @@
           <p:cNvPr id="129" name="">
             <a:extLst xmlns:a="http://schemas.openxmlformats.org/drawingml/2006/main">
               <a:ext uri="{FF2B5EF4-FFF2-40B4-BE49-F238E27FC236}">
-                <a16:creationId xmlns:a16="http://schemas.microsoft.com/office/drawing/2014/main" id="{CD601FCE-3781-48E2-AB1B-3CAAFD5EC93A}"/>
+                <a16:creationId xmlns:a16="http://schemas.microsoft.com/office/drawing/2014/main" id="{62CC9FC1-E03A-44BB-821D-4AE32869C605}"/>
               </a:ext>
             </a:extLst>
           </p:cNvPr>
@@ -16825,7 +16825,7 @@
           <p:cNvPr id="130" name="">
             <a:extLst xmlns:a="http://schemas.openxmlformats.org/drawingml/2006/main">
               <a:ext uri="{FF2B5EF4-FFF2-40B4-BE49-F238E27FC236}">
-                <a16:creationId xmlns:a16="http://schemas.microsoft.com/office/drawing/2014/main" id="{D8D0044D-FF6D-41F1-A1F7-A5DCF3527A43}"/>
+                <a16:creationId xmlns:a16="http://schemas.microsoft.com/office/drawing/2014/main" id="{DBA62DDA-C91D-40C8-8A19-45B7CF7E3F49}"/>
               </a:ext>
             </a:extLst>
           </p:cNvPr>
@@ -16858,7 +16858,7 @@
           <p:cNvPr id="131" name="">
             <a:extLst xmlns:a="http://schemas.openxmlformats.org/drawingml/2006/main">
               <a:ext uri="{FF2B5EF4-FFF2-40B4-BE49-F238E27FC236}">
-                <a16:creationId xmlns:a16="http://schemas.microsoft.com/office/drawing/2014/main" id="{572A753E-2668-476D-955A-D81C21E87425}"/>
+                <a16:creationId xmlns:a16="http://schemas.microsoft.com/office/drawing/2014/main" id="{396F2202-CE12-49B9-8812-A921C164FF6C}"/>
               </a:ext>
             </a:extLst>
           </p:cNvPr>
@@ -16891,7 +16891,7 @@
           <p:cNvPr id="132" name="">
             <a:extLst xmlns:a="http://schemas.openxmlformats.org/drawingml/2006/main">
               <a:ext uri="{FF2B5EF4-FFF2-40B4-BE49-F238E27FC236}">
-                <a16:creationId xmlns:a16="http://schemas.microsoft.com/office/drawing/2014/main" id="{0E7D63FC-46DA-4880-805A-3E7C828DA5FD}"/>
+                <a16:creationId xmlns:a16="http://schemas.microsoft.com/office/drawing/2014/main" id="{AC1A4983-CE19-4F06-83C1-E0DF7621EB69}"/>
               </a:ext>
             </a:extLst>
           </p:cNvPr>
@@ -16924,7 +16924,7 @@
           <p:cNvPr id="133" name="">
             <a:extLst xmlns:a="http://schemas.openxmlformats.org/drawingml/2006/main">
               <a:ext uri="{FF2B5EF4-FFF2-40B4-BE49-F238E27FC236}">
-                <a16:creationId xmlns:a16="http://schemas.microsoft.com/office/drawing/2014/main" id="{BFE48875-CBA8-439D-8644-67EF27AFFCD7}"/>
+                <a16:creationId xmlns:a16="http://schemas.microsoft.com/office/drawing/2014/main" id="{656DA071-6E86-43DC-A602-BAD332832127}"/>
               </a:ext>
             </a:extLst>
           </p:cNvPr>
@@ -16957,7 +16957,7 @@
           <p:cNvPr id="134" name="">
             <a:extLst xmlns:a="http://schemas.openxmlformats.org/drawingml/2006/main">
               <a:ext uri="{FF2B5EF4-FFF2-40B4-BE49-F238E27FC236}">
-                <a16:creationId xmlns:a16="http://schemas.microsoft.com/office/drawing/2014/main" id="{9EEB9BFA-7505-4708-8583-51D74EE9D965}"/>
+                <a16:creationId xmlns:a16="http://schemas.microsoft.com/office/drawing/2014/main" id="{46DCC9FA-77D7-40DF-92A4-34B4342CD077}"/>
               </a:ext>
             </a:extLst>
           </p:cNvPr>
@@ -16990,7 +16990,7 @@
           <p:cNvPr id="135" name="">
             <a:extLst xmlns:a="http://schemas.openxmlformats.org/drawingml/2006/main">
               <a:ext uri="{FF2B5EF4-FFF2-40B4-BE49-F238E27FC236}">
-                <a16:creationId xmlns:a16="http://schemas.microsoft.com/office/drawing/2014/main" id="{0178B66D-F4AA-46EC-BE2F-7BF105AA0C28}"/>
+                <a16:creationId xmlns:a16="http://schemas.microsoft.com/office/drawing/2014/main" id="{C4DBFFCF-BDA6-4BD8-B94C-0BADF40E9E10}"/>
               </a:ext>
             </a:extLst>
           </p:cNvPr>
@@ -17023,7 +17023,7 @@
           <p:cNvPr id="136" name="">
             <a:extLst xmlns:a="http://schemas.openxmlformats.org/drawingml/2006/main">
               <a:ext uri="{FF2B5EF4-FFF2-40B4-BE49-F238E27FC236}">
-                <a16:creationId xmlns:a16="http://schemas.microsoft.com/office/drawing/2014/main" id="{67AB8B71-B1B6-4DCB-91C9-36A9DD50D6C8}"/>
+                <a16:creationId xmlns:a16="http://schemas.microsoft.com/office/drawing/2014/main" id="{C2548193-CD83-4320-AC3A-B8C4BD344476}"/>
               </a:ext>
             </a:extLst>
           </p:cNvPr>
@@ -17056,7 +17056,7 @@
           <p:cNvPr id="137" name="">
             <a:extLst xmlns:a="http://schemas.openxmlformats.org/drawingml/2006/main">
               <a:ext uri="{FF2B5EF4-FFF2-40B4-BE49-F238E27FC236}">
-                <a16:creationId xmlns:a16="http://schemas.microsoft.com/office/drawing/2014/main" id="{71AFF118-13BC-4A09-AFA7-190992B80FF7}"/>
+                <a16:creationId xmlns:a16="http://schemas.microsoft.com/office/drawing/2014/main" id="{3139F7D6-975C-4167-9AB7-135FE1F51CC0}"/>
               </a:ext>
             </a:extLst>
           </p:cNvPr>
@@ -17089,7 +17089,7 @@
           <p:cNvPr id="138" name="">
             <a:extLst xmlns:a="http://schemas.openxmlformats.org/drawingml/2006/main">
               <a:ext uri="{FF2B5EF4-FFF2-40B4-BE49-F238E27FC236}">
-                <a16:creationId xmlns:a16="http://schemas.microsoft.com/office/drawing/2014/main" id="{6E699ECE-E8FB-4B57-A6A4-A937AE762C08}"/>
+                <a16:creationId xmlns:a16="http://schemas.microsoft.com/office/drawing/2014/main" id="{B1B3F653-B7D6-4F70-A932-8BCE8F77552E}"/>
               </a:ext>
             </a:extLst>
           </p:cNvPr>
@@ -17122,7 +17122,7 @@
           <p:cNvPr id="139" name="">
             <a:extLst xmlns:a="http://schemas.openxmlformats.org/drawingml/2006/main">
               <a:ext uri="{FF2B5EF4-FFF2-40B4-BE49-F238E27FC236}">
-                <a16:creationId xmlns:a16="http://schemas.microsoft.com/office/drawing/2014/main" id="{6D938278-A82A-4F7F-92C0-78A64AF6C457}"/>
+                <a16:creationId xmlns:a16="http://schemas.microsoft.com/office/drawing/2014/main" id="{D9CB2FCB-D728-43B7-8903-8761813EA1C8}"/>
               </a:ext>
             </a:extLst>
           </p:cNvPr>
@@ -17155,7 +17155,7 @@
           <p:cNvPr id="140" name="">
             <a:extLst xmlns:a="http://schemas.openxmlformats.org/drawingml/2006/main">
               <a:ext uri="{FF2B5EF4-FFF2-40B4-BE49-F238E27FC236}">
-                <a16:creationId xmlns:a16="http://schemas.microsoft.com/office/drawing/2014/main" id="{BB37AE31-67BD-4660-B03B-BE48DA1CA434}"/>
+                <a16:creationId xmlns:a16="http://schemas.microsoft.com/office/drawing/2014/main" id="{73D34361-51C7-46C2-BAC4-12A848B70305}"/>
               </a:ext>
             </a:extLst>
           </p:cNvPr>
@@ -17188,7 +17188,7 @@
           <p:cNvPr id="141" name="">
             <a:extLst xmlns:a="http://schemas.openxmlformats.org/drawingml/2006/main">
               <a:ext uri="{FF2B5EF4-FFF2-40B4-BE49-F238E27FC236}">
-                <a16:creationId xmlns:a16="http://schemas.microsoft.com/office/drawing/2014/main" id="{7F322B8D-22B6-4F4D-BE72-062A69976BD9}"/>
+                <a16:creationId xmlns:a16="http://schemas.microsoft.com/office/drawing/2014/main" id="{BA848FC9-B2BE-46E8-A63B-5C2B9373A5AB}"/>
               </a:ext>
             </a:extLst>
           </p:cNvPr>
@@ -17221,7 +17221,7 @@
           <p:cNvPr id="142" name="">
             <a:extLst xmlns:a="http://schemas.openxmlformats.org/drawingml/2006/main">
               <a:ext uri="{FF2B5EF4-FFF2-40B4-BE49-F238E27FC236}">
-                <a16:creationId xmlns:a16="http://schemas.microsoft.com/office/drawing/2014/main" id="{96B4D972-BA74-47D8-879E-9954F46F07ED}"/>
+                <a16:creationId xmlns:a16="http://schemas.microsoft.com/office/drawing/2014/main" id="{31D60B72-1130-49F0-A8CE-3415638242B0}"/>
               </a:ext>
             </a:extLst>
           </p:cNvPr>
@@ -17254,7 +17254,7 @@
           <p:cNvPr id="143" name="">
             <a:extLst xmlns:a="http://schemas.openxmlformats.org/drawingml/2006/main">
               <a:ext uri="{FF2B5EF4-FFF2-40B4-BE49-F238E27FC236}">
-                <a16:creationId xmlns:a16="http://schemas.microsoft.com/office/drawing/2014/main" id="{5CB3AD0A-CCF7-4033-A6A6-3C9A578CF6B2}"/>
+                <a16:creationId xmlns:a16="http://schemas.microsoft.com/office/drawing/2014/main" id="{9A8730FA-5EE9-446A-9088-0BDBB359344F}"/>
               </a:ext>
             </a:extLst>
           </p:cNvPr>
@@ -17287,7 +17287,7 @@
           <p:cNvPr id="144" name="">
             <a:extLst xmlns:a="http://schemas.openxmlformats.org/drawingml/2006/main">
               <a:ext uri="{FF2B5EF4-FFF2-40B4-BE49-F238E27FC236}">
-                <a16:creationId xmlns:a16="http://schemas.microsoft.com/office/drawing/2014/main" id="{0B75434D-D4D4-40E9-8C52-37E9FAED3EB3}"/>
+                <a16:creationId xmlns:a16="http://schemas.microsoft.com/office/drawing/2014/main" id="{F73F5DAB-94CC-4C3B-8F7E-308153932A06}"/>
               </a:ext>
             </a:extLst>
           </p:cNvPr>
@@ -17320,7 +17320,7 @@
           <p:cNvPr id="145" name="">
             <a:extLst xmlns:a="http://schemas.openxmlformats.org/drawingml/2006/main">
               <a:ext uri="{FF2B5EF4-FFF2-40B4-BE49-F238E27FC236}">
-                <a16:creationId xmlns:a16="http://schemas.microsoft.com/office/drawing/2014/main" id="{015D7559-0A4F-4711-A4E7-6A1191060118}"/>
+                <a16:creationId xmlns:a16="http://schemas.microsoft.com/office/drawing/2014/main" id="{AF7E38C0-8625-4CA4-9088-25F7F2605146}"/>
               </a:ext>
             </a:extLst>
           </p:cNvPr>
@@ -17353,7 +17353,7 @@
           <p:cNvPr id="146" name="">
             <a:extLst xmlns:a="http://schemas.openxmlformats.org/drawingml/2006/main">
               <a:ext uri="{FF2B5EF4-FFF2-40B4-BE49-F238E27FC236}">
-                <a16:creationId xmlns:a16="http://schemas.microsoft.com/office/drawing/2014/main" id="{26CE046E-ADE1-411D-BD08-02E7F9283597}"/>
+                <a16:creationId xmlns:a16="http://schemas.microsoft.com/office/drawing/2014/main" id="{4360D492-92A9-45F4-89EA-C99FAB176168}"/>
               </a:ext>
             </a:extLst>
           </p:cNvPr>
@@ -17386,7 +17386,7 @@
           <p:cNvPr id="147" name="">
             <a:extLst xmlns:a="http://schemas.openxmlformats.org/drawingml/2006/main">
               <a:ext uri="{FF2B5EF4-FFF2-40B4-BE49-F238E27FC236}">
-                <a16:creationId xmlns:a16="http://schemas.microsoft.com/office/drawing/2014/main" id="{A70B7A88-4754-4314-AB1F-8B7AC1AB3FB4}"/>
+                <a16:creationId xmlns:a16="http://schemas.microsoft.com/office/drawing/2014/main" id="{9C330F2F-AC47-4C10-839B-6FF7B655CE11}"/>
               </a:ext>
             </a:extLst>
           </p:cNvPr>
@@ -17419,7 +17419,7 @@
           <p:cNvPr id="148" name="">
             <a:extLst xmlns:a="http://schemas.openxmlformats.org/drawingml/2006/main">
               <a:ext uri="{FF2B5EF4-FFF2-40B4-BE49-F238E27FC236}">
-                <a16:creationId xmlns:a16="http://schemas.microsoft.com/office/drawing/2014/main" id="{1A22B4D2-8579-4549-8E83-EE8952E928B7}"/>
+                <a16:creationId xmlns:a16="http://schemas.microsoft.com/office/drawing/2014/main" id="{C7A8D7A5-EB4E-4B60-B513-BB5997A5F5C6}"/>
               </a:ext>
             </a:extLst>
           </p:cNvPr>
@@ -17452,7 +17452,7 @@
           <p:cNvPr id="149" name="">
             <a:extLst xmlns:a="http://schemas.openxmlformats.org/drawingml/2006/main">
               <a:ext uri="{FF2B5EF4-FFF2-40B4-BE49-F238E27FC236}">
-                <a16:creationId xmlns:a16="http://schemas.microsoft.com/office/drawing/2014/main" id="{A885CCB3-9456-4CB6-9A91-0F12717CF710}"/>
+                <a16:creationId xmlns:a16="http://schemas.microsoft.com/office/drawing/2014/main" id="{BD99653D-7C7D-45E1-9A0D-71A658C95A42}"/>
               </a:ext>
             </a:extLst>
           </p:cNvPr>
@@ -17485,7 +17485,7 @@
           <p:cNvPr id="150" name="">
             <a:extLst xmlns:a="http://schemas.openxmlformats.org/drawingml/2006/main">
               <a:ext uri="{FF2B5EF4-FFF2-40B4-BE49-F238E27FC236}">
-                <a16:creationId xmlns:a16="http://schemas.microsoft.com/office/drawing/2014/main" id="{95A8B4FB-6161-40D9-AFEA-A36CE660761A}"/>
+                <a16:creationId xmlns:a16="http://schemas.microsoft.com/office/drawing/2014/main" id="{83FA9099-4D0C-4D6A-B286-C4EC7D66EAD6}"/>
               </a:ext>
             </a:extLst>
           </p:cNvPr>
@@ -17518,7 +17518,7 @@
           <p:cNvPr id="151" name="">
             <a:extLst xmlns:a="http://schemas.openxmlformats.org/drawingml/2006/main">
               <a:ext uri="{FF2B5EF4-FFF2-40B4-BE49-F238E27FC236}">
-                <a16:creationId xmlns:a16="http://schemas.microsoft.com/office/drawing/2014/main" id="{42DB4326-2D88-4206-9FEF-886129F34673}"/>
+                <a16:creationId xmlns:a16="http://schemas.microsoft.com/office/drawing/2014/main" id="{F0B1E54B-940C-4DA4-A646-1A79DDC2FBB2}"/>
               </a:ext>
             </a:extLst>
           </p:cNvPr>
@@ -17551,7 +17551,7 @@
           <p:cNvPr id="152" name="">
             <a:extLst xmlns:a="http://schemas.openxmlformats.org/drawingml/2006/main">
               <a:ext uri="{FF2B5EF4-FFF2-40B4-BE49-F238E27FC236}">
-                <a16:creationId xmlns:a16="http://schemas.microsoft.com/office/drawing/2014/main" id="{73788327-A341-432F-9F55-7A6ECFEC941C}"/>
+                <a16:creationId xmlns:a16="http://schemas.microsoft.com/office/drawing/2014/main" id="{8D922F3D-434E-46A0-9680-8165D2C2130A}"/>
               </a:ext>
             </a:extLst>
           </p:cNvPr>
@@ -17584,7 +17584,7 @@
           <p:cNvPr id="153" name="">
             <a:extLst xmlns:a="http://schemas.openxmlformats.org/drawingml/2006/main">
               <a:ext uri="{FF2B5EF4-FFF2-40B4-BE49-F238E27FC236}">
-                <a16:creationId xmlns:a16="http://schemas.microsoft.com/office/drawing/2014/main" id="{1BE3D7B6-7F24-4F85-A6B6-E1283C098E13}"/>
+                <a16:creationId xmlns:a16="http://schemas.microsoft.com/office/drawing/2014/main" id="{4C70EB68-B9F8-495E-8B48-C0EBF8AA01D9}"/>
               </a:ext>
             </a:extLst>
           </p:cNvPr>
@@ -17617,7 +17617,7 @@
           <p:cNvPr id="154" name="">
             <a:extLst xmlns:a="http://schemas.openxmlformats.org/drawingml/2006/main">
               <a:ext uri="{FF2B5EF4-FFF2-40B4-BE49-F238E27FC236}">
-                <a16:creationId xmlns:a16="http://schemas.microsoft.com/office/drawing/2014/main" id="{70601600-B0EF-4187-95B9-AD597EFEC369}"/>
+                <a16:creationId xmlns:a16="http://schemas.microsoft.com/office/drawing/2014/main" id="{1DFA507D-D35A-43FD-AEDE-5CB8E542DC45}"/>
               </a:ext>
             </a:extLst>
           </p:cNvPr>
@@ -17650,7 +17650,7 @@
           <p:cNvPr id="155" name="">
             <a:extLst xmlns:a="http://schemas.openxmlformats.org/drawingml/2006/main">
               <a:ext uri="{FF2B5EF4-FFF2-40B4-BE49-F238E27FC236}">
-                <a16:creationId xmlns:a16="http://schemas.microsoft.com/office/drawing/2014/main" id="{3EBF1897-919A-45C1-AEA8-FE022CC3A4E6}"/>
+                <a16:creationId xmlns:a16="http://schemas.microsoft.com/office/drawing/2014/main" id="{B21AE337-319B-4826-B95C-7B25A8678BAA}"/>
               </a:ext>
             </a:extLst>
           </p:cNvPr>
@@ -17683,7 +17683,7 @@
           <p:cNvPr id="156" name="">
             <a:extLst xmlns:a="http://schemas.openxmlformats.org/drawingml/2006/main">
               <a:ext uri="{FF2B5EF4-FFF2-40B4-BE49-F238E27FC236}">
-                <a16:creationId xmlns:a16="http://schemas.microsoft.com/office/drawing/2014/main" id="{0F4A1E5C-5F93-460D-BD21-B491471AE896}"/>
+                <a16:creationId xmlns:a16="http://schemas.microsoft.com/office/drawing/2014/main" id="{0854CC5E-5928-470D-91E7-B46CFAE53269}"/>
               </a:ext>
             </a:extLst>
           </p:cNvPr>
@@ -17716,7 +17716,7 @@
           <p:cNvPr id="157" name="">
             <a:extLst xmlns:a="http://schemas.openxmlformats.org/drawingml/2006/main">
               <a:ext uri="{FF2B5EF4-FFF2-40B4-BE49-F238E27FC236}">
-                <a16:creationId xmlns:a16="http://schemas.microsoft.com/office/drawing/2014/main" id="{77C3C715-ACFE-453B-865E-DEE837CE5235}"/>
+                <a16:creationId xmlns:a16="http://schemas.microsoft.com/office/drawing/2014/main" id="{057DF081-930A-4E54-92CC-495054B90EE5}"/>
               </a:ext>
             </a:extLst>
           </p:cNvPr>
@@ -17749,7 +17749,7 @@
           <p:cNvPr id="158" name="">
             <a:extLst xmlns:a="http://schemas.openxmlformats.org/drawingml/2006/main">
               <a:ext uri="{FF2B5EF4-FFF2-40B4-BE49-F238E27FC236}">
-                <a16:creationId xmlns:a16="http://schemas.microsoft.com/office/drawing/2014/main" id="{C8FDBA04-4F72-4FD7-8BBC-A44E25CA4B2A}"/>
+                <a16:creationId xmlns:a16="http://schemas.microsoft.com/office/drawing/2014/main" id="{61CA33AA-B0FF-4254-AE9C-4384F819EDB8}"/>
               </a:ext>
             </a:extLst>
           </p:cNvPr>
@@ -17782,7 +17782,7 @@
           <p:cNvPr id="159" name="">
             <a:extLst xmlns:a="http://schemas.openxmlformats.org/drawingml/2006/main">
               <a:ext uri="{FF2B5EF4-FFF2-40B4-BE49-F238E27FC236}">
-                <a16:creationId xmlns:a16="http://schemas.microsoft.com/office/drawing/2014/main" id="{D95E25B7-0334-4AAB-AC2E-9A0931401B00}"/>
+                <a16:creationId xmlns:a16="http://schemas.microsoft.com/office/drawing/2014/main" id="{991E0630-3D40-413D-819C-0B5D7A9A2DDB}"/>
               </a:ext>
             </a:extLst>
           </p:cNvPr>
@@ -17815,7 +17815,7 @@
           <p:cNvPr id="160" name="">
             <a:extLst xmlns:a="http://schemas.openxmlformats.org/drawingml/2006/main">
               <a:ext uri="{FF2B5EF4-FFF2-40B4-BE49-F238E27FC236}">
-                <a16:creationId xmlns:a16="http://schemas.microsoft.com/office/drawing/2014/main" id="{5E162BB0-4C77-43A0-8E57-C8DDADA780EC}"/>
+                <a16:creationId xmlns:a16="http://schemas.microsoft.com/office/drawing/2014/main" id="{1C2AEA2F-B318-4E98-A07F-26AABB525249}"/>
               </a:ext>
             </a:extLst>
           </p:cNvPr>
@@ -17848,7 +17848,7 @@
           <p:cNvPr id="161" name="">
             <a:extLst xmlns:a="http://schemas.openxmlformats.org/drawingml/2006/main">
               <a:ext uri="{FF2B5EF4-FFF2-40B4-BE49-F238E27FC236}">
-                <a16:creationId xmlns:a16="http://schemas.microsoft.com/office/drawing/2014/main" id="{93820A79-6099-41CC-B713-679A66DBE066}"/>
+                <a16:creationId xmlns:a16="http://schemas.microsoft.com/office/drawing/2014/main" id="{354E316B-FD67-4962-8ADF-59783D72A942}"/>
               </a:ext>
             </a:extLst>
           </p:cNvPr>
@@ -17881,7 +17881,7 @@
           <p:cNvPr id="162" name="">
             <a:extLst xmlns:a="http://schemas.openxmlformats.org/drawingml/2006/main">
               <a:ext uri="{FF2B5EF4-FFF2-40B4-BE49-F238E27FC236}">
-                <a16:creationId xmlns:a16="http://schemas.microsoft.com/office/drawing/2014/main" id="{78C51A67-E4C2-4999-B689-0BBD0815DD78}"/>
+                <a16:creationId xmlns:a16="http://schemas.microsoft.com/office/drawing/2014/main" id="{810463F7-D4BE-4554-9DCC-96F5D808A42C}"/>
               </a:ext>
             </a:extLst>
           </p:cNvPr>
@@ -17914,7 +17914,7 @@
           <p:cNvPr id="163" name="">
             <a:extLst xmlns:a="http://schemas.openxmlformats.org/drawingml/2006/main">
               <a:ext uri="{FF2B5EF4-FFF2-40B4-BE49-F238E27FC236}">
-                <a16:creationId xmlns:a16="http://schemas.microsoft.com/office/drawing/2014/main" id="{0A4570D0-7B33-42DE-AE80-134CE4A3B567}"/>
+                <a16:creationId xmlns:a16="http://schemas.microsoft.com/office/drawing/2014/main" id="{C1D2A707-1213-4DBD-8F26-30ED40724C42}"/>
               </a:ext>
             </a:extLst>
           </p:cNvPr>
@@ -17947,7 +17947,7 @@
           <p:cNvPr id="164" name="">
             <a:extLst xmlns:a="http://schemas.openxmlformats.org/drawingml/2006/main">
               <a:ext uri="{FF2B5EF4-FFF2-40B4-BE49-F238E27FC236}">
-                <a16:creationId xmlns:a16="http://schemas.microsoft.com/office/drawing/2014/main" id="{10D545C1-B9AC-4294-9A02-147CB5B1A737}"/>
+                <a16:creationId xmlns:a16="http://schemas.microsoft.com/office/drawing/2014/main" id="{3246BA40-E095-4346-9F32-30BCFF921053}"/>
               </a:ext>
             </a:extLst>
           </p:cNvPr>
@@ -17980,7 +17980,7 @@
           <p:cNvPr id="165" name="">
             <a:extLst xmlns:a="http://schemas.openxmlformats.org/drawingml/2006/main">
               <a:ext uri="{FF2B5EF4-FFF2-40B4-BE49-F238E27FC236}">
-                <a16:creationId xmlns:a16="http://schemas.microsoft.com/office/drawing/2014/main" id="{0C8C6C43-1D05-4B3E-8C63-64D92F76AA0B}"/>
+                <a16:creationId xmlns:a16="http://schemas.microsoft.com/office/drawing/2014/main" id="{DE1C85E4-D843-40B2-8E67-7A2DF30C6ED3}"/>
               </a:ext>
             </a:extLst>
           </p:cNvPr>
@@ -18013,7 +18013,7 @@
           <p:cNvPr id="166" name="">
             <a:extLst xmlns:a="http://schemas.openxmlformats.org/drawingml/2006/main">
               <a:ext uri="{FF2B5EF4-FFF2-40B4-BE49-F238E27FC236}">
-                <a16:creationId xmlns:a16="http://schemas.microsoft.com/office/drawing/2014/main" id="{B3AEA0EF-A77D-4E08-9BE1-7C8AA854A1A5}"/>
+                <a16:creationId xmlns:a16="http://schemas.microsoft.com/office/drawing/2014/main" id="{2A88ADB3-0E67-4904-87CB-8C47C2C877DA}"/>
               </a:ext>
             </a:extLst>
           </p:cNvPr>
@@ -18046,7 +18046,7 @@
           <p:cNvPr id="167" name="">
             <a:extLst xmlns:a="http://schemas.openxmlformats.org/drawingml/2006/main">
               <a:ext uri="{FF2B5EF4-FFF2-40B4-BE49-F238E27FC236}">
-                <a16:creationId xmlns:a16="http://schemas.microsoft.com/office/drawing/2014/main" id="{0D02D57B-7894-4822-8359-DA6B680E9FE3}"/>
+                <a16:creationId xmlns:a16="http://schemas.microsoft.com/office/drawing/2014/main" id="{C9812BF1-CF10-47B8-8843-B78EEECAB4D1}"/>
               </a:ext>
             </a:extLst>
           </p:cNvPr>
@@ -18079,7 +18079,7 @@
           <p:cNvPr id="168" name="">
             <a:extLst xmlns:a="http://schemas.openxmlformats.org/drawingml/2006/main">
               <a:ext uri="{FF2B5EF4-FFF2-40B4-BE49-F238E27FC236}">
-                <a16:creationId xmlns:a16="http://schemas.microsoft.com/office/drawing/2014/main" id="{30A8627D-EBF5-433B-A410-7F93F00B7B95}"/>
+                <a16:creationId xmlns:a16="http://schemas.microsoft.com/office/drawing/2014/main" id="{D407E94D-B70A-47CF-9B2E-D895067157EC}"/>
               </a:ext>
             </a:extLst>
           </p:cNvPr>
@@ -18112,7 +18112,7 @@
           <p:cNvPr id="169" name="">
             <a:extLst xmlns:a="http://schemas.openxmlformats.org/drawingml/2006/main">
               <a:ext uri="{FF2B5EF4-FFF2-40B4-BE49-F238E27FC236}">
-                <a16:creationId xmlns:a16="http://schemas.microsoft.com/office/drawing/2014/main" id="{AB5EB753-7C3A-4E0A-978A-6A92E5E32AB0}"/>
+                <a16:creationId xmlns:a16="http://schemas.microsoft.com/office/drawing/2014/main" id="{457ACF39-069D-404A-90DC-44A28BD6F950}"/>
               </a:ext>
             </a:extLst>
           </p:cNvPr>
@@ -18145,7 +18145,7 @@
           <p:cNvPr id="170" name="">
             <a:extLst xmlns:a="http://schemas.openxmlformats.org/drawingml/2006/main">
               <a:ext uri="{FF2B5EF4-FFF2-40B4-BE49-F238E27FC236}">
-                <a16:creationId xmlns:a16="http://schemas.microsoft.com/office/drawing/2014/main" id="{0621F5CD-E718-4EE2-9918-25228B62F859}"/>
+                <a16:creationId xmlns:a16="http://schemas.microsoft.com/office/drawing/2014/main" id="{82EE31BD-D1DE-40A9-8F06-0882657EC082}"/>
               </a:ext>
             </a:extLst>
           </p:cNvPr>
@@ -18178,7 +18178,7 @@
           <p:cNvPr id="171" name="">
             <a:extLst xmlns:a="http://schemas.openxmlformats.org/drawingml/2006/main">
               <a:ext uri="{FF2B5EF4-FFF2-40B4-BE49-F238E27FC236}">
-                <a16:creationId xmlns:a16="http://schemas.microsoft.com/office/drawing/2014/main" id="{912CEC14-D49B-4CBD-BCFC-7989176FF511}"/>
+                <a16:creationId xmlns:a16="http://schemas.microsoft.com/office/drawing/2014/main" id="{A545869A-1009-4947-9B6F-D9B60E2D6404}"/>
               </a:ext>
             </a:extLst>
           </p:cNvPr>
@@ -18211,7 +18211,7 @@
           <p:cNvPr id="172" name="">
             <a:extLst xmlns:a="http://schemas.openxmlformats.org/drawingml/2006/main">
               <a:ext uri="{FF2B5EF4-FFF2-40B4-BE49-F238E27FC236}">
-                <a16:creationId xmlns:a16="http://schemas.microsoft.com/office/drawing/2014/main" id="{7259B52B-D65A-4BFC-8F86-663273EC0D6B}"/>
+                <a16:creationId xmlns:a16="http://schemas.microsoft.com/office/drawing/2014/main" id="{AA51699A-2D96-4E20-A87F-82E357BF9FDB}"/>
               </a:ext>
             </a:extLst>
           </p:cNvPr>
@@ -18244,7 +18244,7 @@
           <p:cNvPr id="173" name="">
             <a:extLst xmlns:a="http://schemas.openxmlformats.org/drawingml/2006/main">
               <a:ext uri="{FF2B5EF4-FFF2-40B4-BE49-F238E27FC236}">
-                <a16:creationId xmlns:a16="http://schemas.microsoft.com/office/drawing/2014/main" id="{D5D5A342-DDE7-4556-B536-407EE5D268E5}"/>
+                <a16:creationId xmlns:a16="http://schemas.microsoft.com/office/drawing/2014/main" id="{F9F4B20C-5996-4BC0-8522-DDD182ACB217}"/>
               </a:ext>
             </a:extLst>
           </p:cNvPr>
@@ -18277,7 +18277,7 @@
           <p:cNvPr id="174" name="">
             <a:extLst xmlns:a="http://schemas.openxmlformats.org/drawingml/2006/main">
               <a:ext uri="{FF2B5EF4-FFF2-40B4-BE49-F238E27FC236}">
-                <a16:creationId xmlns:a16="http://schemas.microsoft.com/office/drawing/2014/main" id="{62F8C88F-6A75-4606-958A-0969E7DB01AC}"/>
+                <a16:creationId xmlns:a16="http://schemas.microsoft.com/office/drawing/2014/main" id="{9A751C84-07B9-4AD1-A5D6-EE55A04BA884}"/>
               </a:ext>
             </a:extLst>
           </p:cNvPr>
@@ -18310,7 +18310,7 @@
           <p:cNvPr id="175" name="">
             <a:extLst xmlns:a="http://schemas.openxmlformats.org/drawingml/2006/main">
               <a:ext uri="{FF2B5EF4-FFF2-40B4-BE49-F238E27FC236}">
-                <a16:creationId xmlns:a16="http://schemas.microsoft.com/office/drawing/2014/main" id="{885B1EA2-FD14-415B-A640-D98212731AC6}"/>
+                <a16:creationId xmlns:a16="http://schemas.microsoft.com/office/drawing/2014/main" id="{BBC51D2B-FCD2-44CC-A6D2-1615DF84BA42}"/>
               </a:ext>
             </a:extLst>
           </p:cNvPr>
@@ -18343,7 +18343,7 @@
           <p:cNvPr id="176" name="">
             <a:extLst xmlns:a="http://schemas.openxmlformats.org/drawingml/2006/main">
               <a:ext uri="{FF2B5EF4-FFF2-40B4-BE49-F238E27FC236}">
-                <a16:creationId xmlns:a16="http://schemas.microsoft.com/office/drawing/2014/main" id="{74C6B56F-7E81-4EF7-A8C0-62C57BA653FA}"/>
+                <a16:creationId xmlns:a16="http://schemas.microsoft.com/office/drawing/2014/main" id="{F48AFE28-D652-4BBE-A2FB-4465B4999683}"/>
               </a:ext>
             </a:extLst>
           </p:cNvPr>
@@ -18376,7 +18376,7 @@
           <p:cNvPr id="177" name="">
             <a:extLst xmlns:a="http://schemas.openxmlformats.org/drawingml/2006/main">
               <a:ext uri="{FF2B5EF4-FFF2-40B4-BE49-F238E27FC236}">
-                <a16:creationId xmlns:a16="http://schemas.microsoft.com/office/drawing/2014/main" id="{131A4416-FD2D-4C82-A0C8-7C86F502C8F7}"/>
+                <a16:creationId xmlns:a16="http://schemas.microsoft.com/office/drawing/2014/main" id="{6DAC6099-3021-452C-8DB2-161B364C5CC2}"/>
               </a:ext>
             </a:extLst>
           </p:cNvPr>
@@ -18409,7 +18409,7 @@
           <p:cNvPr id="178" name="">
             <a:extLst xmlns:a="http://schemas.openxmlformats.org/drawingml/2006/main">
               <a:ext uri="{FF2B5EF4-FFF2-40B4-BE49-F238E27FC236}">
-                <a16:creationId xmlns:a16="http://schemas.microsoft.com/office/drawing/2014/main" id="{6331003E-BA31-4538-B074-43914011A443}"/>
+                <a16:creationId xmlns:a16="http://schemas.microsoft.com/office/drawing/2014/main" id="{5F808848-9ED6-4CE1-BD70-478DE631D901}"/>
               </a:ext>
             </a:extLst>
           </p:cNvPr>
@@ -18442,7 +18442,7 @@
           <p:cNvPr id="179" name="">
             <a:extLst xmlns:a="http://schemas.openxmlformats.org/drawingml/2006/main">
               <a:ext uri="{FF2B5EF4-FFF2-40B4-BE49-F238E27FC236}">
-                <a16:creationId xmlns:a16="http://schemas.microsoft.com/office/drawing/2014/main" id="{DDD40106-DBD0-4771-9FF3-F419863DED5B}"/>
+                <a16:creationId xmlns:a16="http://schemas.microsoft.com/office/drawing/2014/main" id="{FB724BC9-0539-45DC-995D-F7135E7FF292}"/>
               </a:ext>
             </a:extLst>
           </p:cNvPr>
@@ -18475,7 +18475,7 @@
           <p:cNvPr id="180" name="">
             <a:extLst xmlns:a="http://schemas.openxmlformats.org/drawingml/2006/main">
               <a:ext uri="{FF2B5EF4-FFF2-40B4-BE49-F238E27FC236}">
-                <a16:creationId xmlns:a16="http://schemas.microsoft.com/office/drawing/2014/main" id="{AD18EB2A-97E3-4EEC-AF4D-E1566F2D5091}"/>
+                <a16:creationId xmlns:a16="http://schemas.microsoft.com/office/drawing/2014/main" id="{DBD29CA9-73F6-4C3B-8926-428065629071}"/>
               </a:ext>
             </a:extLst>
           </p:cNvPr>
@@ -18508,7 +18508,7 @@
           <p:cNvPr id="181" name="">
             <a:extLst xmlns:a="http://schemas.openxmlformats.org/drawingml/2006/main">
               <a:ext uri="{FF2B5EF4-FFF2-40B4-BE49-F238E27FC236}">
-                <a16:creationId xmlns:a16="http://schemas.microsoft.com/office/drawing/2014/main" id="{12DA133A-8C52-4187-85B3-AE1F16B4AAAB}"/>
+                <a16:creationId xmlns:a16="http://schemas.microsoft.com/office/drawing/2014/main" id="{58B8C7E9-126E-4E3E-9BF6-22E039F9E0E4}"/>
               </a:ext>
             </a:extLst>
           </p:cNvPr>
@@ -18541,7 +18541,7 @@
           <p:cNvPr id="182" name="">
             <a:extLst xmlns:a="http://schemas.openxmlformats.org/drawingml/2006/main">
               <a:ext uri="{FF2B5EF4-FFF2-40B4-BE49-F238E27FC236}">
-                <a16:creationId xmlns:a16="http://schemas.microsoft.com/office/drawing/2014/main" id="{D1144614-1259-4A3D-B811-12B3CFA02DFC}"/>
+                <a16:creationId xmlns:a16="http://schemas.microsoft.com/office/drawing/2014/main" id="{EF181CA8-2661-4179-9A68-D3AC7CA46E21}"/>
               </a:ext>
             </a:extLst>
           </p:cNvPr>
@@ -18574,7 +18574,7 @@
           <p:cNvPr id="183" name="">
             <a:extLst xmlns:a="http://schemas.openxmlformats.org/drawingml/2006/main">
               <a:ext uri="{FF2B5EF4-FFF2-40B4-BE49-F238E27FC236}">
-                <a16:creationId xmlns:a16="http://schemas.microsoft.com/office/drawing/2014/main" id="{764BD2D0-9132-45DA-871F-9B811BB14B7E}"/>
+                <a16:creationId xmlns:a16="http://schemas.microsoft.com/office/drawing/2014/main" id="{C8B2DCAE-F487-4923-A436-BF7536C44125}"/>
               </a:ext>
             </a:extLst>
           </p:cNvPr>
@@ -18607,7 +18607,7 @@
           <p:cNvPr id="184" name="">
             <a:extLst xmlns:a="http://schemas.openxmlformats.org/drawingml/2006/main">
               <a:ext uri="{FF2B5EF4-FFF2-40B4-BE49-F238E27FC236}">
-                <a16:creationId xmlns:a16="http://schemas.microsoft.com/office/drawing/2014/main" id="{44985A59-45F7-450D-8877-84311803457E}"/>
+                <a16:creationId xmlns:a16="http://schemas.microsoft.com/office/drawing/2014/main" id="{035772CE-4FD2-4B48-90D4-BDCCF6A1A27B}"/>
               </a:ext>
             </a:extLst>
           </p:cNvPr>
@@ -18640,7 +18640,7 @@
           <p:cNvPr id="185" name="">
             <a:extLst xmlns:a="http://schemas.openxmlformats.org/drawingml/2006/main">
               <a:ext uri="{FF2B5EF4-FFF2-40B4-BE49-F238E27FC236}">
-                <a16:creationId xmlns:a16="http://schemas.microsoft.com/office/drawing/2014/main" id="{EB2BF51C-D32A-4FCD-8EC2-5D145174F827}"/>
+                <a16:creationId xmlns:a16="http://schemas.microsoft.com/office/drawing/2014/main" id="{F0ABF6E8-7975-45A9-9410-041F53308AD9}"/>
               </a:ext>
             </a:extLst>
           </p:cNvPr>
@@ -18673,7 +18673,7 @@
           <p:cNvPr id="186" name="">
             <a:extLst xmlns:a="http://schemas.openxmlformats.org/drawingml/2006/main">
               <a:ext uri="{FF2B5EF4-FFF2-40B4-BE49-F238E27FC236}">
-                <a16:creationId xmlns:a16="http://schemas.microsoft.com/office/drawing/2014/main" id="{81B418D1-BD20-4266-AA5C-0BCB22FB58E9}"/>
+                <a16:creationId xmlns:a16="http://schemas.microsoft.com/office/drawing/2014/main" id="{C5050674-6089-427D-A8E8-E34D141BE09A}"/>
               </a:ext>
             </a:extLst>
           </p:cNvPr>
@@ -18706,7 +18706,7 @@
           <p:cNvPr id="187" name="">
             <a:extLst xmlns:a="http://schemas.openxmlformats.org/drawingml/2006/main">
               <a:ext uri="{FF2B5EF4-FFF2-40B4-BE49-F238E27FC236}">
-                <a16:creationId xmlns:a16="http://schemas.microsoft.com/office/drawing/2014/main" id="{5A25A9F5-1B86-4B05-A35F-025F13088A36}"/>
+                <a16:creationId xmlns:a16="http://schemas.microsoft.com/office/drawing/2014/main" id="{C0C8F3E3-D752-462A-A6CA-DE2B885AB4A5}"/>
               </a:ext>
             </a:extLst>
           </p:cNvPr>
@@ -18739,7 +18739,7 @@
           <p:cNvPr id="188" name="">
             <a:extLst xmlns:a="http://schemas.openxmlformats.org/drawingml/2006/main">
               <a:ext uri="{FF2B5EF4-FFF2-40B4-BE49-F238E27FC236}">
-                <a16:creationId xmlns:a16="http://schemas.microsoft.com/office/drawing/2014/main" id="{DD434B67-11F6-4C44-831D-BD5E1D2A3568}"/>
+                <a16:creationId xmlns:a16="http://schemas.microsoft.com/office/drawing/2014/main" id="{E5C75112-A825-4210-9D9D-DB29F6BEE888}"/>
               </a:ext>
             </a:extLst>
           </p:cNvPr>
@@ -18772,7 +18772,7 @@
           <p:cNvPr id="189" name="">
             <a:extLst xmlns:a="http://schemas.openxmlformats.org/drawingml/2006/main">
               <a:ext uri="{FF2B5EF4-FFF2-40B4-BE49-F238E27FC236}">
-                <a16:creationId xmlns:a16="http://schemas.microsoft.com/office/drawing/2014/main" id="{8E1F74AA-1F84-4AD9-8AA8-5421E9009461}"/>
+                <a16:creationId xmlns:a16="http://schemas.microsoft.com/office/drawing/2014/main" id="{AF36F2AE-59B0-49EE-AD1D-D06B685A3238}"/>
               </a:ext>
             </a:extLst>
           </p:cNvPr>
@@ -18805,7 +18805,7 @@
           <p:cNvPr id="190" name="">
             <a:extLst xmlns:a="http://schemas.openxmlformats.org/drawingml/2006/main">
               <a:ext uri="{FF2B5EF4-FFF2-40B4-BE49-F238E27FC236}">
-                <a16:creationId xmlns:a16="http://schemas.microsoft.com/office/drawing/2014/main" id="{2F76906E-BFFC-4970-81D8-F010193D620D}"/>
+                <a16:creationId xmlns:a16="http://schemas.microsoft.com/office/drawing/2014/main" id="{BB6798D8-9CDF-4172-9E43-73641D0ADBC4}"/>
               </a:ext>
             </a:extLst>
           </p:cNvPr>
@@ -18838,7 +18838,7 @@
           <p:cNvPr id="191" name="">
             <a:extLst xmlns:a="http://schemas.openxmlformats.org/drawingml/2006/main">
               <a:ext uri="{FF2B5EF4-FFF2-40B4-BE49-F238E27FC236}">
-                <a16:creationId xmlns:a16="http://schemas.microsoft.com/office/drawing/2014/main" id="{98915D78-103C-40C6-AC85-8B6F10E1EC27}"/>
+                <a16:creationId xmlns:a16="http://schemas.microsoft.com/office/drawing/2014/main" id="{EF7F4349-F79D-4FAF-ACB4-6A850255C9C5}"/>
               </a:ext>
             </a:extLst>
           </p:cNvPr>
@@ -18871,7 +18871,7 @@
           <p:cNvPr id="192" name="">
             <a:extLst xmlns:a="http://schemas.openxmlformats.org/drawingml/2006/main">
               <a:ext uri="{FF2B5EF4-FFF2-40B4-BE49-F238E27FC236}">
-                <a16:creationId xmlns:a16="http://schemas.microsoft.com/office/drawing/2014/main" id="{47534F55-C850-4807-9B9A-4322AD88912A}"/>
+                <a16:creationId xmlns:a16="http://schemas.microsoft.com/office/drawing/2014/main" id="{3725514B-5BB1-4D9F-9D58-4863F9615805}"/>
               </a:ext>
             </a:extLst>
           </p:cNvPr>
@@ -18904,7 +18904,7 @@
           <p:cNvPr id="193" name="">
             <a:extLst xmlns:a="http://schemas.openxmlformats.org/drawingml/2006/main">
               <a:ext uri="{FF2B5EF4-FFF2-40B4-BE49-F238E27FC236}">
-                <a16:creationId xmlns:a16="http://schemas.microsoft.com/office/drawing/2014/main" id="{E48E8D68-DBC0-4992-9679-BAD73D98F6D6}"/>
+                <a16:creationId xmlns:a16="http://schemas.microsoft.com/office/drawing/2014/main" id="{37698069-0C18-4E50-B0F1-1D0F6994FD87}"/>
               </a:ext>
             </a:extLst>
           </p:cNvPr>
@@ -18937,7 +18937,7 @@
           <p:cNvPr id="194" name="">
             <a:extLst xmlns:a="http://schemas.openxmlformats.org/drawingml/2006/main">
               <a:ext uri="{FF2B5EF4-FFF2-40B4-BE49-F238E27FC236}">
-                <a16:creationId xmlns:a16="http://schemas.microsoft.com/office/drawing/2014/main" id="{64A6A662-5250-489A-AC31-907AA3B1BC9C}"/>
+                <a16:creationId xmlns:a16="http://schemas.microsoft.com/office/drawing/2014/main" id="{E3786D7E-D19A-4FAD-8360-17922DE6243E}"/>
               </a:ext>
             </a:extLst>
           </p:cNvPr>
@@ -18970,7 +18970,7 @@
           <p:cNvPr id="195" name="">
             <a:extLst xmlns:a="http://schemas.openxmlformats.org/drawingml/2006/main">
               <a:ext uri="{FF2B5EF4-FFF2-40B4-BE49-F238E27FC236}">
-                <a16:creationId xmlns:a16="http://schemas.microsoft.com/office/drawing/2014/main" id="{C5936FA9-5F8A-48EE-B522-E6EEA053C329}"/>
+                <a16:creationId xmlns:a16="http://schemas.microsoft.com/office/drawing/2014/main" id="{9309959B-C4C7-40F0-8629-8F60726C87B3}"/>
               </a:ext>
             </a:extLst>
           </p:cNvPr>
@@ -19003,7 +19003,7 @@
           <p:cNvPr id="196" name="">
             <a:extLst xmlns:a="http://schemas.openxmlformats.org/drawingml/2006/main">
               <a:ext uri="{FF2B5EF4-FFF2-40B4-BE49-F238E27FC236}">
-                <a16:creationId xmlns:a16="http://schemas.microsoft.com/office/drawing/2014/main" id="{95A81826-3108-4D5B-B941-B9AB87368189}"/>
+                <a16:creationId xmlns:a16="http://schemas.microsoft.com/office/drawing/2014/main" id="{ADDA4DAB-5410-4939-944E-1B6EE40EC69D}"/>
               </a:ext>
             </a:extLst>
           </p:cNvPr>
@@ -19036,7 +19036,7 @@
           <p:cNvPr id="197" name="">
             <a:extLst xmlns:a="http://schemas.openxmlformats.org/drawingml/2006/main">
               <a:ext uri="{FF2B5EF4-FFF2-40B4-BE49-F238E27FC236}">
-                <a16:creationId xmlns:a16="http://schemas.microsoft.com/office/drawing/2014/main" id="{530B9E0D-86AA-4DAE-B756-8B8BE3B2586D}"/>
+                <a16:creationId xmlns:a16="http://schemas.microsoft.com/office/drawing/2014/main" id="{78A2EDCA-24F6-420B-92EA-80E209619C99}"/>
               </a:ext>
             </a:extLst>
           </p:cNvPr>
@@ -19071,7 +19071,7 @@
           <p:cNvPr id="198" name="">
             <a:extLst xmlns:a="http://schemas.openxmlformats.org/drawingml/2006/main">
               <a:ext uri="{FF2B5EF4-FFF2-40B4-BE49-F238E27FC236}">
-                <a16:creationId xmlns:a16="http://schemas.microsoft.com/office/drawing/2014/main" id="{F5CC2E78-C6F9-454A-83E4-234B4B73257A}"/>
+                <a16:creationId xmlns:a16="http://schemas.microsoft.com/office/drawing/2014/main" id="{3582FA59-D726-4AED-AEC2-8480389E7D56}"/>
               </a:ext>
             </a:extLst>
           </p:cNvPr>
@@ -19104,7 +19104,7 @@
           <p:cNvPr id="199" name="">
             <a:extLst xmlns:a="http://schemas.openxmlformats.org/drawingml/2006/main">
               <a:ext uri="{FF2B5EF4-FFF2-40B4-BE49-F238E27FC236}">
-                <a16:creationId xmlns:a16="http://schemas.microsoft.com/office/drawing/2014/main" id="{EF065DB0-3D6F-494A-A896-C353C77D107F}"/>
+                <a16:creationId xmlns:a16="http://schemas.microsoft.com/office/drawing/2014/main" id="{266AF2AD-44C8-4B66-A9D7-4A8C3F67E23D}"/>
               </a:ext>
             </a:extLst>
           </p:cNvPr>
@@ -19137,7 +19137,7 @@
           <p:cNvPr id="200" name="">
             <a:extLst xmlns:a="http://schemas.openxmlformats.org/drawingml/2006/main">
               <a:ext uri="{FF2B5EF4-FFF2-40B4-BE49-F238E27FC236}">
-                <a16:creationId xmlns:a16="http://schemas.microsoft.com/office/drawing/2014/main" id="{D5C0A7C5-6B0E-45A2-AE4F-104D47FE4255}"/>
+                <a16:creationId xmlns:a16="http://schemas.microsoft.com/office/drawing/2014/main" id="{F5A2100A-B756-44C4-A66B-91342C031637}"/>
               </a:ext>
             </a:extLst>
           </p:cNvPr>
@@ -19170,7 +19170,7 @@
           <p:cNvPr id="201" name="">
             <a:extLst xmlns:a="http://schemas.openxmlformats.org/drawingml/2006/main">
               <a:ext uri="{FF2B5EF4-FFF2-40B4-BE49-F238E27FC236}">
-                <a16:creationId xmlns:a16="http://schemas.microsoft.com/office/drawing/2014/main" id="{EE53AB6F-0F71-498E-842B-BB9D2C418EE9}"/>
+                <a16:creationId xmlns:a16="http://schemas.microsoft.com/office/drawing/2014/main" id="{3B99C9DC-223F-494A-AD43-AF50C0F82336}"/>
               </a:ext>
             </a:extLst>
           </p:cNvPr>
@@ -19203,7 +19203,7 @@
           <p:cNvPr id="202" name="">
             <a:extLst xmlns:a="http://schemas.openxmlformats.org/drawingml/2006/main">
               <a:ext uri="{FF2B5EF4-FFF2-40B4-BE49-F238E27FC236}">
-                <a16:creationId xmlns:a16="http://schemas.microsoft.com/office/drawing/2014/main" id="{D83999BE-679A-40B4-AD65-EFFC4E24C2E1}"/>
+                <a16:creationId xmlns:a16="http://schemas.microsoft.com/office/drawing/2014/main" id="{F463E280-015F-44E0-9A39-7D645602D5EC}"/>
               </a:ext>
             </a:extLst>
           </p:cNvPr>
@@ -19236,7 +19236,7 @@
           <p:cNvPr id="203" name="">
             <a:extLst xmlns:a="http://schemas.openxmlformats.org/drawingml/2006/main">
               <a:ext uri="{FF2B5EF4-FFF2-40B4-BE49-F238E27FC236}">
-                <a16:creationId xmlns:a16="http://schemas.microsoft.com/office/drawing/2014/main" id="{FF12D541-18E8-4702-852F-898E042E2DB0}"/>
+                <a16:creationId xmlns:a16="http://schemas.microsoft.com/office/drawing/2014/main" id="{89AB666C-5415-4878-B61A-91A54CC47A2B}"/>
               </a:ext>
             </a:extLst>
           </p:cNvPr>
@@ -19269,7 +19269,7 @@
           <p:cNvPr id="204" name="">
             <a:extLst xmlns:a="http://schemas.openxmlformats.org/drawingml/2006/main">
               <a:ext uri="{FF2B5EF4-FFF2-40B4-BE49-F238E27FC236}">
-                <a16:creationId xmlns:a16="http://schemas.microsoft.com/office/drawing/2014/main" id="{D953B04B-B7FC-4581-8027-01381D260F5D}"/>
+                <a16:creationId xmlns:a16="http://schemas.microsoft.com/office/drawing/2014/main" id="{01B91038-1CC1-4888-B2F1-05B9FE25A117}"/>
               </a:ext>
             </a:extLst>
           </p:cNvPr>
@@ -19302,7 +19302,7 @@
           <p:cNvPr id="205" name="">
             <a:extLst xmlns:a="http://schemas.openxmlformats.org/drawingml/2006/main">
               <a:ext uri="{FF2B5EF4-FFF2-40B4-BE49-F238E27FC236}">
-                <a16:creationId xmlns:a16="http://schemas.microsoft.com/office/drawing/2014/main" id="{41B0A86E-483E-48E4-935D-8503C1BE8658}"/>
+                <a16:creationId xmlns:a16="http://schemas.microsoft.com/office/drawing/2014/main" id="{8634B310-C0C9-4F91-9103-10DBF426B5F7}"/>
               </a:ext>
             </a:extLst>
           </p:cNvPr>
@@ -19335,7 +19335,7 @@
           <p:cNvPr id="206" name="">
             <a:extLst xmlns:a="http://schemas.openxmlformats.org/drawingml/2006/main">
               <a:ext uri="{FF2B5EF4-FFF2-40B4-BE49-F238E27FC236}">
-                <a16:creationId xmlns:a16="http://schemas.microsoft.com/office/drawing/2014/main" id="{6308CFA3-3AB5-462D-8AF7-2EE60E887CEA}"/>
+                <a16:creationId xmlns:a16="http://schemas.microsoft.com/office/drawing/2014/main" id="{B7094262-808B-4F8A-A931-4489712FA26F}"/>
               </a:ext>
             </a:extLst>
           </p:cNvPr>
@@ -19368,7 +19368,7 @@
           <p:cNvPr id="207" name="">
             <a:extLst xmlns:a="http://schemas.openxmlformats.org/drawingml/2006/main">
               <a:ext uri="{FF2B5EF4-FFF2-40B4-BE49-F238E27FC236}">
-                <a16:creationId xmlns:a16="http://schemas.microsoft.com/office/drawing/2014/main" id="{5F1A51D7-D4E6-4E3D-BACC-97C642A6E093}"/>
+                <a16:creationId xmlns:a16="http://schemas.microsoft.com/office/drawing/2014/main" id="{814DF432-4B8B-4674-A669-64909660006F}"/>
               </a:ext>
             </a:extLst>
           </p:cNvPr>
@@ -19401,7 +19401,7 @@
           <p:cNvPr id="208" name="">
             <a:extLst xmlns:a="http://schemas.openxmlformats.org/drawingml/2006/main">
               <a:ext uri="{FF2B5EF4-FFF2-40B4-BE49-F238E27FC236}">
-                <a16:creationId xmlns:a16="http://schemas.microsoft.com/office/drawing/2014/main" id="{90DB3A8E-AFD6-402E-938D-6FAD8ED00961}"/>
+                <a16:creationId xmlns:a16="http://schemas.microsoft.com/office/drawing/2014/main" id="{DED6878B-DFE7-4608-AD58-E171244CCE4F}"/>
               </a:ext>
             </a:extLst>
           </p:cNvPr>
@@ -19434,7 +19434,7 @@
           <p:cNvPr id="209" name="">
             <a:extLst xmlns:a="http://schemas.openxmlformats.org/drawingml/2006/main">
               <a:ext uri="{FF2B5EF4-FFF2-40B4-BE49-F238E27FC236}">
-                <a16:creationId xmlns:a16="http://schemas.microsoft.com/office/drawing/2014/main" id="{8D416F46-2113-41BD-92EE-D12EB6041037}"/>
+                <a16:creationId xmlns:a16="http://schemas.microsoft.com/office/drawing/2014/main" id="{17C1DE8E-A07D-4094-93F3-E62723179223}"/>
               </a:ext>
             </a:extLst>
           </p:cNvPr>
@@ -19467,7 +19467,7 @@
           <p:cNvPr id="210" name="">
             <a:extLst xmlns:a="http://schemas.openxmlformats.org/drawingml/2006/main">
               <a:ext uri="{FF2B5EF4-FFF2-40B4-BE49-F238E27FC236}">
-                <a16:creationId xmlns:a16="http://schemas.microsoft.com/office/drawing/2014/main" id="{C0BC87F0-7F12-4779-8F7C-4A8EAD7CFF75}"/>
+                <a16:creationId xmlns:a16="http://schemas.microsoft.com/office/drawing/2014/main" id="{D57BACDD-E5AA-453F-A968-F982DD0208DE}"/>
               </a:ext>
             </a:extLst>
           </p:cNvPr>
@@ -19500,7 +19500,7 @@
           <p:cNvPr id="211" name="">
             <a:extLst xmlns:a="http://schemas.openxmlformats.org/drawingml/2006/main">
               <a:ext uri="{FF2B5EF4-FFF2-40B4-BE49-F238E27FC236}">
-                <a16:creationId xmlns:a16="http://schemas.microsoft.com/office/drawing/2014/main" id="{66B69133-07BE-4A3E-B75D-70FCE64899B6}"/>
+                <a16:creationId xmlns:a16="http://schemas.microsoft.com/office/drawing/2014/main" id="{3420D342-3AB6-458C-ACD6-5E75E375E6EF}"/>
               </a:ext>
             </a:extLst>
           </p:cNvPr>
@@ -19533,7 +19533,7 @@
           <p:cNvPr id="212" name="">
             <a:extLst xmlns:a="http://schemas.openxmlformats.org/drawingml/2006/main">
               <a:ext uri="{FF2B5EF4-FFF2-40B4-BE49-F238E27FC236}">
-                <a16:creationId xmlns:a16="http://schemas.microsoft.com/office/drawing/2014/main" id="{972D36B8-FE35-448C-BE9A-55E7FFEF0ADB}"/>
+                <a16:creationId xmlns:a16="http://schemas.microsoft.com/office/drawing/2014/main" id="{F983951A-1FC1-44FD-B9D0-5A79BC95DF70}"/>
               </a:ext>
             </a:extLst>
           </p:cNvPr>
@@ -19566,7 +19566,7 @@
           <p:cNvPr id="213" name="">
             <a:extLst xmlns:a="http://schemas.openxmlformats.org/drawingml/2006/main">
               <a:ext uri="{FF2B5EF4-FFF2-40B4-BE49-F238E27FC236}">
-                <a16:creationId xmlns:a16="http://schemas.microsoft.com/office/drawing/2014/main" id="{05AEF79E-15DD-46A1-8C58-AEC0D4D58F5A}"/>
+                <a16:creationId xmlns:a16="http://schemas.microsoft.com/office/drawing/2014/main" id="{2DA55C86-61F2-4BDD-A00E-09CD10C149F1}"/>
               </a:ext>
             </a:extLst>
           </p:cNvPr>
@@ -19599,7 +19599,7 @@
           <p:cNvPr id="214" name="">
             <a:extLst xmlns:a="http://schemas.openxmlformats.org/drawingml/2006/main">
               <a:ext uri="{FF2B5EF4-FFF2-40B4-BE49-F238E27FC236}">
-                <a16:creationId xmlns:a16="http://schemas.microsoft.com/office/drawing/2014/main" id="{99B4D63F-D76F-4B4D-8E3A-D9E2A153BFC0}"/>
+                <a16:creationId xmlns:a16="http://schemas.microsoft.com/office/drawing/2014/main" id="{1D528EC3-7F4D-422C-88BD-17B9058F8A76}"/>
               </a:ext>
             </a:extLst>
           </p:cNvPr>
@@ -19632,7 +19632,7 @@
           <p:cNvPr id="215" name="">
             <a:extLst xmlns:a="http://schemas.openxmlformats.org/drawingml/2006/main">
               <a:ext uri="{FF2B5EF4-FFF2-40B4-BE49-F238E27FC236}">
-                <a16:creationId xmlns:a16="http://schemas.microsoft.com/office/drawing/2014/main" id="{937A7F0A-3B45-4D91-8269-BACAD45DC3D1}"/>
+                <a16:creationId xmlns:a16="http://schemas.microsoft.com/office/drawing/2014/main" id="{AEABAFD8-782E-4630-828B-CDDF8C71253F}"/>
               </a:ext>
             </a:extLst>
           </p:cNvPr>
@@ -19665,7 +19665,7 @@
           <p:cNvPr id="216" name="">
             <a:extLst xmlns:a="http://schemas.openxmlformats.org/drawingml/2006/main">
               <a:ext uri="{FF2B5EF4-FFF2-40B4-BE49-F238E27FC236}">
-                <a16:creationId xmlns:a16="http://schemas.microsoft.com/office/drawing/2014/main" id="{2FC42614-9D53-4933-BA46-9C617C4C4626}"/>
+                <a16:creationId xmlns:a16="http://schemas.microsoft.com/office/drawing/2014/main" id="{02F9EB3E-3BDA-4160-85B9-A26486D038F5}"/>
               </a:ext>
             </a:extLst>
           </p:cNvPr>
@@ -19698,7 +19698,7 @@
           <p:cNvPr id="217" name="">
             <a:extLst xmlns:a="http://schemas.openxmlformats.org/drawingml/2006/main">
               <a:ext uri="{FF2B5EF4-FFF2-40B4-BE49-F238E27FC236}">
-                <a16:creationId xmlns:a16="http://schemas.microsoft.com/office/drawing/2014/main" id="{E6E2BF8F-8858-433E-9E6F-073B9DF1F63C}"/>
+                <a16:creationId xmlns:a16="http://schemas.microsoft.com/office/drawing/2014/main" id="{11C2E807-42AD-4D5A-8A3A-AE8A65234FA1}"/>
               </a:ext>
             </a:extLst>
           </p:cNvPr>
@@ -19731,7 +19731,7 @@
           <p:cNvPr id="218" name="">
             <a:extLst xmlns:a="http://schemas.openxmlformats.org/drawingml/2006/main">
               <a:ext uri="{FF2B5EF4-FFF2-40B4-BE49-F238E27FC236}">
-                <a16:creationId xmlns:a16="http://schemas.microsoft.com/office/drawing/2014/main" id="{9E59880C-50C6-453A-9888-5C049AA5E1BD}"/>
+                <a16:creationId xmlns:a16="http://schemas.microsoft.com/office/drawing/2014/main" id="{9CC78E3F-F8EA-4147-9373-08CB202B2ECD}"/>
               </a:ext>
             </a:extLst>
           </p:cNvPr>
@@ -19764,7 +19764,7 @@
           <p:cNvPr id="219" name="">
             <a:extLst xmlns:a="http://schemas.openxmlformats.org/drawingml/2006/main">
               <a:ext uri="{FF2B5EF4-FFF2-40B4-BE49-F238E27FC236}">
-                <a16:creationId xmlns:a16="http://schemas.microsoft.com/office/drawing/2014/main" id="{ADA82562-2049-4181-AC3F-6BA1A4D29DF6}"/>
+                <a16:creationId xmlns:a16="http://schemas.microsoft.com/office/drawing/2014/main" id="{916D5A46-D559-4CAE-BD87-E8548F408F74}"/>
               </a:ext>
             </a:extLst>
           </p:cNvPr>
@@ -19797,7 +19797,7 @@
           <p:cNvPr id="220" name="">
             <a:extLst xmlns:a="http://schemas.openxmlformats.org/drawingml/2006/main">
               <a:ext uri="{FF2B5EF4-FFF2-40B4-BE49-F238E27FC236}">
-                <a16:creationId xmlns:a16="http://schemas.microsoft.com/office/drawing/2014/main" id="{E61E53B7-FB19-49EA-ADD1-0379A9216548}"/>
+                <a16:creationId xmlns:a16="http://schemas.microsoft.com/office/drawing/2014/main" id="{3812F33F-3F0F-4EF8-BFA5-06EC382E3F6E}"/>
               </a:ext>
             </a:extLst>
           </p:cNvPr>
@@ -19830,7 +19830,7 @@
           <p:cNvPr id="221" name="">
             <a:extLst xmlns:a="http://schemas.openxmlformats.org/drawingml/2006/main">
               <a:ext uri="{FF2B5EF4-FFF2-40B4-BE49-F238E27FC236}">
-                <a16:creationId xmlns:a16="http://schemas.microsoft.com/office/drawing/2014/main" id="{BD90841E-9F6C-4021-A442-1118DDE34B07}"/>
+                <a16:creationId xmlns:a16="http://schemas.microsoft.com/office/drawing/2014/main" id="{B98D298E-F046-4774-9731-BF00BEFB37A9}"/>
               </a:ext>
             </a:extLst>
           </p:cNvPr>
@@ -19863,7 +19863,7 @@
           <p:cNvPr id="222" name="">
             <a:extLst xmlns:a="http://schemas.openxmlformats.org/drawingml/2006/main">
               <a:ext uri="{FF2B5EF4-FFF2-40B4-BE49-F238E27FC236}">
-                <a16:creationId xmlns:a16="http://schemas.microsoft.com/office/drawing/2014/main" id="{47962AA9-4E93-4DC6-AC65-5F8B8567F54F}"/>
+                <a16:creationId xmlns:a16="http://schemas.microsoft.com/office/drawing/2014/main" id="{2E468184-A6D1-4708-997A-684634DCFC02}"/>
               </a:ext>
             </a:extLst>
           </p:cNvPr>
@@ -19896,7 +19896,7 @@
           <p:cNvPr id="223" name="">
             <a:extLst xmlns:a="http://schemas.openxmlformats.org/drawingml/2006/main">
               <a:ext uri="{FF2B5EF4-FFF2-40B4-BE49-F238E27FC236}">
-                <a16:creationId xmlns:a16="http://schemas.microsoft.com/office/drawing/2014/main" id="{54E043DA-B59E-4101-A5AC-8517D6F37803}"/>
+                <a16:creationId xmlns:a16="http://schemas.microsoft.com/office/drawing/2014/main" id="{AE909B10-1176-4050-BD5E-03CCE95CEB9A}"/>
               </a:ext>
             </a:extLst>
           </p:cNvPr>
@@ -19929,7 +19929,7 @@
           <p:cNvPr id="224" name="">
             <a:extLst xmlns:a="http://schemas.openxmlformats.org/drawingml/2006/main">
               <a:ext uri="{FF2B5EF4-FFF2-40B4-BE49-F238E27FC236}">
-                <a16:creationId xmlns:a16="http://schemas.microsoft.com/office/drawing/2014/main" id="{31493548-F9AB-4317-9075-CBCAC3C2E58F}"/>
+                <a16:creationId xmlns:a16="http://schemas.microsoft.com/office/drawing/2014/main" id="{499D4958-B4C9-4F21-B474-5EBEB7B08D30}"/>
               </a:ext>
             </a:extLst>
           </p:cNvPr>
@@ -19962,7 +19962,7 @@
           <p:cNvPr id="225" name="">
             <a:extLst xmlns:a="http://schemas.openxmlformats.org/drawingml/2006/main">
               <a:ext uri="{FF2B5EF4-FFF2-40B4-BE49-F238E27FC236}">
-                <a16:creationId xmlns:a16="http://schemas.microsoft.com/office/drawing/2014/main" id="{5DBA83FC-42F7-4DFF-B75F-45B55CBDB362}"/>
+                <a16:creationId xmlns:a16="http://schemas.microsoft.com/office/drawing/2014/main" id="{CFC3D965-4D91-402C-96A3-45BCF7E85ACC}"/>
               </a:ext>
             </a:extLst>
           </p:cNvPr>
@@ -19995,7 +19995,7 @@
           <p:cNvPr id="226" name="">
             <a:extLst xmlns:a="http://schemas.openxmlformats.org/drawingml/2006/main">
               <a:ext uri="{FF2B5EF4-FFF2-40B4-BE49-F238E27FC236}">
-                <a16:creationId xmlns:a16="http://schemas.microsoft.com/office/drawing/2014/main" id="{C7E12CA7-7093-4814-A6A1-097825379D9B}"/>
+                <a16:creationId xmlns:a16="http://schemas.microsoft.com/office/drawing/2014/main" id="{42428F72-2952-476F-9601-0168F9B9ECE5}"/>
               </a:ext>
             </a:extLst>
           </p:cNvPr>
@@ -20028,7 +20028,7 @@
           <p:cNvPr id="227" name="">
             <a:extLst xmlns:a="http://schemas.openxmlformats.org/drawingml/2006/main">
               <a:ext uri="{FF2B5EF4-FFF2-40B4-BE49-F238E27FC236}">
-                <a16:creationId xmlns:a16="http://schemas.microsoft.com/office/drawing/2014/main" id="{D8C42FCE-7F38-4077-89B7-E1942913D81F}"/>
+                <a16:creationId xmlns:a16="http://schemas.microsoft.com/office/drawing/2014/main" id="{3E539192-D82D-4A5E-B264-BBB0E32BE0F6}"/>
               </a:ext>
             </a:extLst>
           </p:cNvPr>
@@ -20061,7 +20061,7 @@
           <p:cNvPr id="228" name="">
             <a:extLst xmlns:a="http://schemas.openxmlformats.org/drawingml/2006/main">
               <a:ext uri="{FF2B5EF4-FFF2-40B4-BE49-F238E27FC236}">
-                <a16:creationId xmlns:a16="http://schemas.microsoft.com/office/drawing/2014/main" id="{1E355ABE-3498-4F44-9D9D-570C17E50DD0}"/>
+                <a16:creationId xmlns:a16="http://schemas.microsoft.com/office/drawing/2014/main" id="{48921AA7-DAB7-48CC-870B-F1D5E273713A}"/>
               </a:ext>
             </a:extLst>
           </p:cNvPr>
@@ -20094,7 +20094,7 @@
           <p:cNvPr id="229" name="">
             <a:extLst xmlns:a="http://schemas.openxmlformats.org/drawingml/2006/main">
               <a:ext uri="{FF2B5EF4-FFF2-40B4-BE49-F238E27FC236}">
-                <a16:creationId xmlns:a16="http://schemas.microsoft.com/office/drawing/2014/main" id="{068B95A2-59AF-48F9-9A07-EF19FC472B91}"/>
+                <a16:creationId xmlns:a16="http://schemas.microsoft.com/office/drawing/2014/main" id="{66729545-6186-49BE-BF61-93861D6C259F}"/>
               </a:ext>
             </a:extLst>
           </p:cNvPr>
@@ -20127,7 +20127,7 @@
           <p:cNvPr id="230" name="">
             <a:extLst xmlns:a="http://schemas.openxmlformats.org/drawingml/2006/main">
               <a:ext uri="{FF2B5EF4-FFF2-40B4-BE49-F238E27FC236}">
-                <a16:creationId xmlns:a16="http://schemas.microsoft.com/office/drawing/2014/main" id="{24B7588B-4B16-481D-88B4-335BD2655EA8}"/>
+                <a16:creationId xmlns:a16="http://schemas.microsoft.com/office/drawing/2014/main" id="{C6B759CB-4508-47D2-8C9F-3CEB78B1DDAD}"/>
               </a:ext>
             </a:extLst>
           </p:cNvPr>
@@ -20160,7 +20160,7 @@
           <p:cNvPr id="231" name="">
             <a:extLst xmlns:a="http://schemas.openxmlformats.org/drawingml/2006/main">
               <a:ext uri="{FF2B5EF4-FFF2-40B4-BE49-F238E27FC236}">
-                <a16:creationId xmlns:a16="http://schemas.microsoft.com/office/drawing/2014/main" id="{73F33039-1B3E-43F6-B274-82C896990D5F}"/>
+                <a16:creationId xmlns:a16="http://schemas.microsoft.com/office/drawing/2014/main" id="{2D199A2A-5375-4B2E-A93E-D3C71FCFFEA7}"/>
               </a:ext>
             </a:extLst>
           </p:cNvPr>
@@ -20193,7 +20193,7 @@
           <p:cNvPr id="232" name="">
             <a:extLst xmlns:a="http://schemas.openxmlformats.org/drawingml/2006/main">
               <a:ext uri="{FF2B5EF4-FFF2-40B4-BE49-F238E27FC236}">
-                <a16:creationId xmlns:a16="http://schemas.microsoft.com/office/drawing/2014/main" id="{D4F92E78-2A7D-422E-AF2A-E5395E8BDD27}"/>
+                <a16:creationId xmlns:a16="http://schemas.microsoft.com/office/drawing/2014/main" id="{26B3F6A5-0087-4A29-BBD5-98135A58E390}"/>
               </a:ext>
             </a:extLst>
           </p:cNvPr>
@@ -20226,7 +20226,7 @@
           <p:cNvPr id="233" name="">
             <a:extLst xmlns:a="http://schemas.openxmlformats.org/drawingml/2006/main">
               <a:ext uri="{FF2B5EF4-FFF2-40B4-BE49-F238E27FC236}">
-                <a16:creationId xmlns:a16="http://schemas.microsoft.com/office/drawing/2014/main" id="{4F8013C7-D04D-4993-BA54-E70150F2C7A1}"/>
+                <a16:creationId xmlns:a16="http://schemas.microsoft.com/office/drawing/2014/main" id="{52163C08-4B36-4C67-8C36-77F40C85EF70}"/>
               </a:ext>
             </a:extLst>
           </p:cNvPr>
@@ -20259,7 +20259,7 @@
           <p:cNvPr id="234" name="">
             <a:extLst xmlns:a="http://schemas.openxmlformats.org/drawingml/2006/main">
               <a:ext uri="{FF2B5EF4-FFF2-40B4-BE49-F238E27FC236}">
-                <a16:creationId xmlns:a16="http://schemas.microsoft.com/office/drawing/2014/main" id="{A147A82B-D7A1-4F86-A1A8-F93FC1DB7226}"/>
+                <a16:creationId xmlns:a16="http://schemas.microsoft.com/office/drawing/2014/main" id="{419C5D47-E986-4A0E-83CC-2582C6F1DBF4}"/>
               </a:ext>
             </a:extLst>
           </p:cNvPr>
@@ -20292,7 +20292,7 @@
           <p:cNvPr id="235" name="">
             <a:extLst xmlns:a="http://schemas.openxmlformats.org/drawingml/2006/main">
               <a:ext uri="{FF2B5EF4-FFF2-40B4-BE49-F238E27FC236}">
-                <a16:creationId xmlns:a16="http://schemas.microsoft.com/office/drawing/2014/main" id="{9900E3EA-5103-4E88-A2DB-FC3FF2C0C5AD}"/>
+                <a16:creationId xmlns:a16="http://schemas.microsoft.com/office/drawing/2014/main" id="{FF59A3B4-AE5F-41DE-A71E-8763F82BAF52}"/>
               </a:ext>
             </a:extLst>
           </p:cNvPr>
@@ -20325,7 +20325,7 @@
           <p:cNvPr id="236" name="">
             <a:extLst xmlns:a="http://schemas.openxmlformats.org/drawingml/2006/main">
               <a:ext uri="{FF2B5EF4-FFF2-40B4-BE49-F238E27FC236}">
-                <a16:creationId xmlns:a16="http://schemas.microsoft.com/office/drawing/2014/main" id="{96A2DAB0-D58B-4862-A8FA-61104E1A35B5}"/>
+                <a16:creationId xmlns:a16="http://schemas.microsoft.com/office/drawing/2014/main" id="{54735A40-DA73-4017-A5E9-0DFE08F35365}"/>
               </a:ext>
             </a:extLst>
           </p:cNvPr>
@@ -20358,7 +20358,7 @@
           <p:cNvPr id="237" name="">
             <a:extLst xmlns:a="http://schemas.openxmlformats.org/drawingml/2006/main">
               <a:ext uri="{FF2B5EF4-FFF2-40B4-BE49-F238E27FC236}">
-                <a16:creationId xmlns:a16="http://schemas.microsoft.com/office/drawing/2014/main" id="{A85B2EF3-3835-4B5D-8B35-C0A83E2C0C5B}"/>
+                <a16:creationId xmlns:a16="http://schemas.microsoft.com/office/drawing/2014/main" id="{97909BEB-E378-47C4-ACC1-2775AA6CDB34}"/>
               </a:ext>
             </a:extLst>
           </p:cNvPr>
@@ -20391,7 +20391,7 @@
           <p:cNvPr id="238" name="">
             <a:extLst xmlns:a="http://schemas.openxmlformats.org/drawingml/2006/main">
               <a:ext uri="{FF2B5EF4-FFF2-40B4-BE49-F238E27FC236}">
-                <a16:creationId xmlns:a16="http://schemas.microsoft.com/office/drawing/2014/main" id="{32896E4F-D6EB-4F8B-BEC6-77719DBEC9FC}"/>
+                <a16:creationId xmlns:a16="http://schemas.microsoft.com/office/drawing/2014/main" id="{639D1A9A-0A56-4108-A1F8-FC75BBCC78A9}"/>
               </a:ext>
             </a:extLst>
           </p:cNvPr>
@@ -20424,7 +20424,7 @@
           <p:cNvPr id="239" name="">
             <a:extLst xmlns:a="http://schemas.openxmlformats.org/drawingml/2006/main">
               <a:ext uri="{FF2B5EF4-FFF2-40B4-BE49-F238E27FC236}">
-                <a16:creationId xmlns:a16="http://schemas.microsoft.com/office/drawing/2014/main" id="{0F0089E0-2D05-419C-8768-95E3C3EEDEA1}"/>
+                <a16:creationId xmlns:a16="http://schemas.microsoft.com/office/drawing/2014/main" id="{7AF01AA9-B626-45B6-8184-B24B61FDBD96}"/>
               </a:ext>
             </a:extLst>
           </p:cNvPr>
@@ -20457,7 +20457,7 @@
           <p:cNvPr id="240" name="">
             <a:extLst xmlns:a="http://schemas.openxmlformats.org/drawingml/2006/main">
               <a:ext uri="{FF2B5EF4-FFF2-40B4-BE49-F238E27FC236}">
-                <a16:creationId xmlns:a16="http://schemas.microsoft.com/office/drawing/2014/main" id="{94FA967A-183E-4BD7-BD14-D6F772BC16E7}"/>
+                <a16:creationId xmlns:a16="http://schemas.microsoft.com/office/drawing/2014/main" id="{7C4E73A1-4E73-4372-B58D-809AA38589C6}"/>
               </a:ext>
             </a:extLst>
           </p:cNvPr>
@@ -20490,7 +20490,7 @@
           <p:cNvPr id="241" name="">
             <a:extLst xmlns:a="http://schemas.openxmlformats.org/drawingml/2006/main">
               <a:ext uri="{FF2B5EF4-FFF2-40B4-BE49-F238E27FC236}">
-                <a16:creationId xmlns:a16="http://schemas.microsoft.com/office/drawing/2014/main" id="{3FE5A802-4E0C-40A7-BEA0-15CBE8814615}"/>
+                <a16:creationId xmlns:a16="http://schemas.microsoft.com/office/drawing/2014/main" id="{036C5703-02C9-4567-BBF9-3C1AA8FE9188}"/>
               </a:ext>
             </a:extLst>
           </p:cNvPr>
@@ -20523,7 +20523,7 @@
           <p:cNvPr id="242" name="">
             <a:extLst xmlns:a="http://schemas.openxmlformats.org/drawingml/2006/main">
               <a:ext uri="{FF2B5EF4-FFF2-40B4-BE49-F238E27FC236}">
-                <a16:creationId xmlns:a16="http://schemas.microsoft.com/office/drawing/2014/main" id="{1E443359-21E0-40D1-B0C8-DB47497C36F6}"/>
+                <a16:creationId xmlns:a16="http://schemas.microsoft.com/office/drawing/2014/main" id="{B1B28019-7145-4DE5-A669-D7A2C2156532}"/>
               </a:ext>
             </a:extLst>
           </p:cNvPr>
@@ -20556,7 +20556,7 @@
           <p:cNvPr id="243" name="">
             <a:extLst xmlns:a="http://schemas.openxmlformats.org/drawingml/2006/main">
               <a:ext uri="{FF2B5EF4-FFF2-40B4-BE49-F238E27FC236}">
-                <a16:creationId xmlns:a16="http://schemas.microsoft.com/office/drawing/2014/main" id="{2E837BAD-0088-4B26-BB0C-05A998455D94}"/>
+                <a16:creationId xmlns:a16="http://schemas.microsoft.com/office/drawing/2014/main" id="{233FEC31-0A66-4794-932B-79BC05A421BF}"/>
               </a:ext>
             </a:extLst>
           </p:cNvPr>
@@ -20589,7 +20589,7 @@
           <p:cNvPr id="244" name="">
             <a:extLst xmlns:a="http://schemas.openxmlformats.org/drawingml/2006/main">
               <a:ext uri="{FF2B5EF4-FFF2-40B4-BE49-F238E27FC236}">
-                <a16:creationId xmlns:a16="http://schemas.microsoft.com/office/drawing/2014/main" id="{D60DA8A8-7A59-4B4B-A587-CD3BBC26F173}"/>
+                <a16:creationId xmlns:a16="http://schemas.microsoft.com/office/drawing/2014/main" id="{B87B8AEB-3F77-410A-9DFE-50F6A6FF0E54}"/>
               </a:ext>
             </a:extLst>
           </p:cNvPr>
@@ -20622,7 +20622,7 @@
           <p:cNvPr id="245" name="">
             <a:extLst xmlns:a="http://schemas.openxmlformats.org/drawingml/2006/main">
               <a:ext uri="{FF2B5EF4-FFF2-40B4-BE49-F238E27FC236}">
-                <a16:creationId xmlns:a16="http://schemas.microsoft.com/office/drawing/2014/main" id="{2CB8E7C2-A37E-472C-AE02-B556F002D9AF}"/>
+                <a16:creationId xmlns:a16="http://schemas.microsoft.com/office/drawing/2014/main" id="{FF4C3BB0-67E5-4ECD-9B96-2EF2FAC3B158}"/>
               </a:ext>
             </a:extLst>
           </p:cNvPr>
@@ -20655,7 +20655,7 @@
           <p:cNvPr id="246" name="">
             <a:extLst xmlns:a="http://schemas.openxmlformats.org/drawingml/2006/main">
               <a:ext uri="{FF2B5EF4-FFF2-40B4-BE49-F238E27FC236}">
-                <a16:creationId xmlns:a16="http://schemas.microsoft.com/office/drawing/2014/main" id="{686DB9E0-280A-430A-A8B1-B515C86428D0}"/>
+                <a16:creationId xmlns:a16="http://schemas.microsoft.com/office/drawing/2014/main" id="{2C95AE18-8363-4E64-8E8A-0BC6E129B656}"/>
               </a:ext>
             </a:extLst>
           </p:cNvPr>
@@ -20688,7 +20688,7 @@
           <p:cNvPr id="247" name="">
             <a:extLst xmlns:a="http://schemas.openxmlformats.org/drawingml/2006/main">
               <a:ext uri="{FF2B5EF4-FFF2-40B4-BE49-F238E27FC236}">
-                <a16:creationId xmlns:a16="http://schemas.microsoft.com/office/drawing/2014/main" id="{94CEE1F6-F741-45E1-97A5-FF78DC6B3241}"/>
+                <a16:creationId xmlns:a16="http://schemas.microsoft.com/office/drawing/2014/main" id="{9E6BE5B4-0E63-42F5-9C05-E330BD9209C8}"/>
               </a:ext>
             </a:extLst>
           </p:cNvPr>
@@ -20721,7 +20721,7 @@
           <p:cNvPr id="248" name="">
             <a:extLst xmlns:a="http://schemas.openxmlformats.org/drawingml/2006/main">
               <a:ext uri="{FF2B5EF4-FFF2-40B4-BE49-F238E27FC236}">
-                <a16:creationId xmlns:a16="http://schemas.microsoft.com/office/drawing/2014/main" id="{285BFAFB-C883-40C9-87DF-3775B1DD8581}"/>
+                <a16:creationId xmlns:a16="http://schemas.microsoft.com/office/drawing/2014/main" id="{15862A96-CE22-45EE-A256-A1B289E385F2}"/>
               </a:ext>
             </a:extLst>
           </p:cNvPr>
@@ -20754,7 +20754,7 @@
           <p:cNvPr id="249" name="">
             <a:extLst xmlns:a="http://schemas.openxmlformats.org/drawingml/2006/main">
               <a:ext uri="{FF2B5EF4-FFF2-40B4-BE49-F238E27FC236}">
-                <a16:creationId xmlns:a16="http://schemas.microsoft.com/office/drawing/2014/main" id="{CE33D63B-844E-46FE-8691-A2954A77DB86}"/>
+                <a16:creationId xmlns:a16="http://schemas.microsoft.com/office/drawing/2014/main" id="{B4215503-5ED6-494D-9482-7390E31AF77C}"/>
               </a:ext>
             </a:extLst>
           </p:cNvPr>
@@ -20787,7 +20787,7 @@
           <p:cNvPr id="250" name="">
             <a:extLst xmlns:a="http://schemas.openxmlformats.org/drawingml/2006/main">
               <a:ext uri="{FF2B5EF4-FFF2-40B4-BE49-F238E27FC236}">
-                <a16:creationId xmlns:a16="http://schemas.microsoft.com/office/drawing/2014/main" id="{29CA06C5-C99D-4E50-A923-1BFFA4C3469E}"/>
+                <a16:creationId xmlns:a16="http://schemas.microsoft.com/office/drawing/2014/main" id="{255727A8-91BA-43A9-998F-222A62482D5E}"/>
               </a:ext>
             </a:extLst>
           </p:cNvPr>
@@ -20820,7 +20820,7 @@
           <p:cNvPr id="251" name="">
             <a:extLst xmlns:a="http://schemas.openxmlformats.org/drawingml/2006/main">
               <a:ext uri="{FF2B5EF4-FFF2-40B4-BE49-F238E27FC236}">
-                <a16:creationId xmlns:a16="http://schemas.microsoft.com/office/drawing/2014/main" id="{035D124A-7E9B-4F7C-AC2D-1B751E2BAFC4}"/>
+                <a16:creationId xmlns:a16="http://schemas.microsoft.com/office/drawing/2014/main" id="{2F1F5CA1-DF94-49E0-9C31-D87AC09FFDC7}"/>
               </a:ext>
             </a:extLst>
           </p:cNvPr>
@@ -20853,7 +20853,7 @@
           <p:cNvPr id="252" name="">
             <a:extLst xmlns:a="http://schemas.openxmlformats.org/drawingml/2006/main">
               <a:ext uri="{FF2B5EF4-FFF2-40B4-BE49-F238E27FC236}">
-                <a16:creationId xmlns:a16="http://schemas.microsoft.com/office/drawing/2014/main" id="{34BC3CAA-6B2D-4B0C-AB4D-215CA74F5E15}"/>
+                <a16:creationId xmlns:a16="http://schemas.microsoft.com/office/drawing/2014/main" id="{B6BA7752-2C1C-4344-A8DA-C1F318423078}"/>
               </a:ext>
             </a:extLst>
           </p:cNvPr>
@@ -20886,7 +20886,7 @@
           <p:cNvPr id="253" name="">
             <a:extLst xmlns:a="http://schemas.openxmlformats.org/drawingml/2006/main">
               <a:ext uri="{FF2B5EF4-FFF2-40B4-BE49-F238E27FC236}">
-                <a16:creationId xmlns:a16="http://schemas.microsoft.com/office/drawing/2014/main" id="{FD0A3D52-F8B1-474D-99C8-C5DD30909145}"/>
+                <a16:creationId xmlns:a16="http://schemas.microsoft.com/office/drawing/2014/main" id="{5C468DD6-F765-4A68-AF86-6545B970EED4}"/>
               </a:ext>
             </a:extLst>
           </p:cNvPr>
@@ -20919,7 +20919,7 @@
           <p:cNvPr id="254" name="">
             <a:extLst xmlns:a="http://schemas.openxmlformats.org/drawingml/2006/main">
               <a:ext uri="{FF2B5EF4-FFF2-40B4-BE49-F238E27FC236}">
-                <a16:creationId xmlns:a16="http://schemas.microsoft.com/office/drawing/2014/main" id="{59FE462B-EFD1-4195-ACE7-C178D13EC904}"/>
+                <a16:creationId xmlns:a16="http://schemas.microsoft.com/office/drawing/2014/main" id="{AA6876A0-3A5E-45A2-B926-156343E8F913}"/>
               </a:ext>
             </a:extLst>
           </p:cNvPr>
@@ -20952,7 +20952,7 @@
           <p:cNvPr id="255" name="">
             <a:extLst xmlns:a="http://schemas.openxmlformats.org/drawingml/2006/main">
               <a:ext uri="{FF2B5EF4-FFF2-40B4-BE49-F238E27FC236}">
-                <a16:creationId xmlns:a16="http://schemas.microsoft.com/office/drawing/2014/main" id="{E7CFA437-00C0-438F-907E-9215C39CB5C3}"/>
+                <a16:creationId xmlns:a16="http://schemas.microsoft.com/office/drawing/2014/main" id="{61A14C1B-71DE-43B9-B8E7-78B3F3487D6C}"/>
               </a:ext>
             </a:extLst>
           </p:cNvPr>
@@ -20985,7 +20985,7 @@
           <p:cNvPr id="256" name="">
             <a:extLst xmlns:a="http://schemas.openxmlformats.org/drawingml/2006/main">
               <a:ext uri="{FF2B5EF4-FFF2-40B4-BE49-F238E27FC236}">
-                <a16:creationId xmlns:a16="http://schemas.microsoft.com/office/drawing/2014/main" id="{57534CC8-CFCB-46BB-BB6C-3C192E07515E}"/>
+                <a16:creationId xmlns:a16="http://schemas.microsoft.com/office/drawing/2014/main" id="{BC01A6CF-DEFB-4053-AE38-62015B262FFC}"/>
               </a:ext>
             </a:extLst>
           </p:cNvPr>
@@ -21018,7 +21018,7 @@
           <p:cNvPr id="257" name="">
             <a:extLst xmlns:a="http://schemas.openxmlformats.org/drawingml/2006/main">
               <a:ext uri="{FF2B5EF4-FFF2-40B4-BE49-F238E27FC236}">
-                <a16:creationId xmlns:a16="http://schemas.microsoft.com/office/drawing/2014/main" id="{0F77290B-FB56-4930-8BE0-351358C7401D}"/>
+                <a16:creationId xmlns:a16="http://schemas.microsoft.com/office/drawing/2014/main" id="{80CC8E59-DB16-418A-B021-439C6F8DC75D}"/>
               </a:ext>
             </a:extLst>
           </p:cNvPr>
@@ -21051,7 +21051,7 @@
           <p:cNvPr id="258" name="">
             <a:extLst xmlns:a="http://schemas.openxmlformats.org/drawingml/2006/main">
               <a:ext uri="{FF2B5EF4-FFF2-40B4-BE49-F238E27FC236}">
-                <a16:creationId xmlns:a16="http://schemas.microsoft.com/office/drawing/2014/main" id="{039B629F-BB4B-4CEF-BEDD-ABE80838A2CB}"/>
+                <a16:creationId xmlns:a16="http://schemas.microsoft.com/office/drawing/2014/main" id="{4679F93F-7C1C-4A33-83CB-3EFB96B1101C}"/>
               </a:ext>
             </a:extLst>
           </p:cNvPr>
@@ -21084,7 +21084,7 @@
           <p:cNvPr id="259" name="">
             <a:extLst xmlns:a="http://schemas.openxmlformats.org/drawingml/2006/main">
               <a:ext uri="{FF2B5EF4-FFF2-40B4-BE49-F238E27FC236}">
-                <a16:creationId xmlns:a16="http://schemas.microsoft.com/office/drawing/2014/main" id="{A1D0CEF8-9332-4D29-B1D1-55F195397FE6}"/>
+                <a16:creationId xmlns:a16="http://schemas.microsoft.com/office/drawing/2014/main" id="{B4BC965E-6893-48EE-9F94-FBCBBE850684}"/>
               </a:ext>
             </a:extLst>
           </p:cNvPr>
@@ -21117,7 +21117,7 @@
           <p:cNvPr id="260" name="">
             <a:extLst xmlns:a="http://schemas.openxmlformats.org/drawingml/2006/main">
               <a:ext uri="{FF2B5EF4-FFF2-40B4-BE49-F238E27FC236}">
-                <a16:creationId xmlns:a16="http://schemas.microsoft.com/office/drawing/2014/main" id="{5F9B74CF-9EC5-47F6-BB1E-4A180C9462F5}"/>
+                <a16:creationId xmlns:a16="http://schemas.microsoft.com/office/drawing/2014/main" id="{753DF5F9-62F5-490B-AD73-EDF1E639D4D7}"/>
               </a:ext>
             </a:extLst>
           </p:cNvPr>
@@ -21150,7 +21150,7 @@
           <p:cNvPr id="261" name="">
             <a:extLst xmlns:a="http://schemas.openxmlformats.org/drawingml/2006/main">
               <a:ext uri="{FF2B5EF4-FFF2-40B4-BE49-F238E27FC236}">
-                <a16:creationId xmlns:a16="http://schemas.microsoft.com/office/drawing/2014/main" id="{6D405209-22D7-405F-B2A4-B79BEF81DC3B}"/>
+                <a16:creationId xmlns:a16="http://schemas.microsoft.com/office/drawing/2014/main" id="{8C56A895-01EE-4047-BC5A-6D246364A8EB}"/>
               </a:ext>
             </a:extLst>
           </p:cNvPr>
@@ -21183,7 +21183,7 @@
           <p:cNvPr id="262" name="">
             <a:extLst xmlns:a="http://schemas.openxmlformats.org/drawingml/2006/main">
               <a:ext uri="{FF2B5EF4-FFF2-40B4-BE49-F238E27FC236}">
-                <a16:creationId xmlns:a16="http://schemas.microsoft.com/office/drawing/2014/main" id="{09F69D0C-F649-48F3-B8E2-7F3248F04606}"/>
+                <a16:creationId xmlns:a16="http://schemas.microsoft.com/office/drawing/2014/main" id="{95202678-EFD5-46D1-B910-A408E5A5C998}"/>
               </a:ext>
             </a:extLst>
           </p:cNvPr>
@@ -21216,7 +21216,7 @@
           <p:cNvPr id="263" name="">
             <a:extLst xmlns:a="http://schemas.openxmlformats.org/drawingml/2006/main">
               <a:ext uri="{FF2B5EF4-FFF2-40B4-BE49-F238E27FC236}">
-                <a16:creationId xmlns:a16="http://schemas.microsoft.com/office/drawing/2014/main" id="{B7FF8812-A1F2-4571-A984-AF43BDAE020A}"/>
+                <a16:creationId xmlns:a16="http://schemas.microsoft.com/office/drawing/2014/main" id="{FB4368C1-2D0D-4FD1-B2EA-10D3427CE2BB}"/>
               </a:ext>
             </a:extLst>
           </p:cNvPr>
@@ -21249,7 +21249,7 @@
           <p:cNvPr id="264" name="">
             <a:extLst xmlns:a="http://schemas.openxmlformats.org/drawingml/2006/main">
               <a:ext uri="{FF2B5EF4-FFF2-40B4-BE49-F238E27FC236}">
-                <a16:creationId xmlns:a16="http://schemas.microsoft.com/office/drawing/2014/main" id="{991718E1-6BB6-4E4B-B379-1E5BAF5E0256}"/>
+                <a16:creationId xmlns:a16="http://schemas.microsoft.com/office/drawing/2014/main" id="{1FC3FB40-3AD7-4DE7-AE5C-2FBE5F69D672}"/>
               </a:ext>
             </a:extLst>
           </p:cNvPr>
@@ -21282,7 +21282,7 @@
           <p:cNvPr id="265" name="">
             <a:extLst xmlns:a="http://schemas.openxmlformats.org/drawingml/2006/main">
               <a:ext uri="{FF2B5EF4-FFF2-40B4-BE49-F238E27FC236}">
-                <a16:creationId xmlns:a16="http://schemas.microsoft.com/office/drawing/2014/main" id="{B93AA722-FCA6-47B6-8A8E-022322F82D7F}"/>
+                <a16:creationId xmlns:a16="http://schemas.microsoft.com/office/drawing/2014/main" id="{FA7EDCFF-08E4-4CEF-8C24-108D22AFB195}"/>
               </a:ext>
             </a:extLst>
           </p:cNvPr>
@@ -21315,7 +21315,7 @@
           <p:cNvPr id="266" name="">
             <a:extLst xmlns:a="http://schemas.openxmlformats.org/drawingml/2006/main">
               <a:ext uri="{FF2B5EF4-FFF2-40B4-BE49-F238E27FC236}">
-                <a16:creationId xmlns:a16="http://schemas.microsoft.com/office/drawing/2014/main" id="{13C4D68A-0B35-4694-BAF3-AD4817CFDC02}"/>
+                <a16:creationId xmlns:a16="http://schemas.microsoft.com/office/drawing/2014/main" id="{A14FE15C-1F07-4CF0-A8A9-D147FD5082E4}"/>
               </a:ext>
             </a:extLst>
           </p:cNvPr>
@@ -21348,7 +21348,7 @@
           <p:cNvPr id="267" name="">
             <a:extLst xmlns:a="http://schemas.openxmlformats.org/drawingml/2006/main">
               <a:ext uri="{FF2B5EF4-FFF2-40B4-BE49-F238E27FC236}">
-                <a16:creationId xmlns:a16="http://schemas.microsoft.com/office/drawing/2014/main" id="{74D3E841-7EFE-4C36-B19F-69877A3BF4DD}"/>
+                <a16:creationId xmlns:a16="http://schemas.microsoft.com/office/drawing/2014/main" id="{FFA5E0A1-B22A-41DC-B14E-5CC4F4A4D3C8}"/>
               </a:ext>
             </a:extLst>
           </p:cNvPr>
@@ -21381,7 +21381,7 @@
           <p:cNvPr id="268" name="">
             <a:extLst xmlns:a="http://schemas.openxmlformats.org/drawingml/2006/main">
               <a:ext uri="{FF2B5EF4-FFF2-40B4-BE49-F238E27FC236}">
-                <a16:creationId xmlns:a16="http://schemas.microsoft.com/office/drawing/2014/main" id="{066EA86E-C9E8-4A33-A129-D38CD1318785}"/>
+                <a16:creationId xmlns:a16="http://schemas.microsoft.com/office/drawing/2014/main" id="{13F93D06-3D5C-4235-848F-D5EEE4954948}"/>
               </a:ext>
             </a:extLst>
           </p:cNvPr>
@@ -21414,7 +21414,7 @@
           <p:cNvPr id="269" name="">
             <a:extLst xmlns:a="http://schemas.openxmlformats.org/drawingml/2006/main">
               <a:ext uri="{FF2B5EF4-FFF2-40B4-BE49-F238E27FC236}">
-                <a16:creationId xmlns:a16="http://schemas.microsoft.com/office/drawing/2014/main" id="{F8DAF60E-AAE3-48B0-B528-6F40AD109DD2}"/>
+                <a16:creationId xmlns:a16="http://schemas.microsoft.com/office/drawing/2014/main" id="{DEB42CD4-6BA3-4DDA-9E65-5A237A77E269}"/>
               </a:ext>
             </a:extLst>
           </p:cNvPr>
@@ -21447,7 +21447,7 @@
           <p:cNvPr id="270" name="">
             <a:extLst xmlns:a="http://schemas.openxmlformats.org/drawingml/2006/main">
               <a:ext uri="{FF2B5EF4-FFF2-40B4-BE49-F238E27FC236}">
-                <a16:creationId xmlns:a16="http://schemas.microsoft.com/office/drawing/2014/main" id="{5A9CC0DB-AF32-4348-9995-574F8B0CBA46}"/>
+                <a16:creationId xmlns:a16="http://schemas.microsoft.com/office/drawing/2014/main" id="{C13ADDD6-7C37-422E-842C-785F10872466}"/>
               </a:ext>
             </a:extLst>
           </p:cNvPr>
@@ -21480,7 +21480,7 @@
           <p:cNvPr id="271" name="">
             <a:extLst xmlns:a="http://schemas.openxmlformats.org/drawingml/2006/main">
               <a:ext uri="{FF2B5EF4-FFF2-40B4-BE49-F238E27FC236}">
-                <a16:creationId xmlns:a16="http://schemas.microsoft.com/office/drawing/2014/main" id="{3C955940-5AB0-4991-AD2B-0782F219A5C1}"/>
+                <a16:creationId xmlns:a16="http://schemas.microsoft.com/office/drawing/2014/main" id="{43D20A76-F600-414C-8F15-360E43D84D27}"/>
               </a:ext>
             </a:extLst>
           </p:cNvPr>
@@ -21513,7 +21513,7 @@
           <p:cNvPr id="272" name="">
             <a:extLst xmlns:a="http://schemas.openxmlformats.org/drawingml/2006/main">
               <a:ext uri="{FF2B5EF4-FFF2-40B4-BE49-F238E27FC236}">
-                <a16:creationId xmlns:a16="http://schemas.microsoft.com/office/drawing/2014/main" id="{B49A96FE-D6B4-455F-92A2-93B10984B634}"/>
+                <a16:creationId xmlns:a16="http://schemas.microsoft.com/office/drawing/2014/main" id="{1E814023-9904-43A7-A0C5-60DFB4F5672D}"/>
               </a:ext>
             </a:extLst>
           </p:cNvPr>
@@ -21546,7 +21546,7 @@
           <p:cNvPr id="273" name="">
             <a:extLst xmlns:a="http://schemas.openxmlformats.org/drawingml/2006/main">
               <a:ext uri="{FF2B5EF4-FFF2-40B4-BE49-F238E27FC236}">
-                <a16:creationId xmlns:a16="http://schemas.microsoft.com/office/drawing/2014/main" id="{0D686EF1-E689-4428-8DF5-D8EC915347A0}"/>
+                <a16:creationId xmlns:a16="http://schemas.microsoft.com/office/drawing/2014/main" id="{DA77B428-74A5-4E8E-AE0C-8224AF7EE4C8}"/>
               </a:ext>
             </a:extLst>
           </p:cNvPr>
@@ -21579,7 +21579,7 @@
           <p:cNvPr id="274" name="">
             <a:extLst xmlns:a="http://schemas.openxmlformats.org/drawingml/2006/main">
               <a:ext uri="{FF2B5EF4-FFF2-40B4-BE49-F238E27FC236}">
-                <a16:creationId xmlns:a16="http://schemas.microsoft.com/office/drawing/2014/main" id="{8282539E-AF05-4F5D-A6BC-4A52E91A8841}"/>
+                <a16:creationId xmlns:a16="http://schemas.microsoft.com/office/drawing/2014/main" id="{D283C71F-038D-4A90-9F8C-E3B10E0BAEB2}"/>
               </a:ext>
             </a:extLst>
           </p:cNvPr>
@@ -21612,7 +21612,7 @@
           <p:cNvPr id="275" name="">
             <a:extLst xmlns:a="http://schemas.openxmlformats.org/drawingml/2006/main">
               <a:ext uri="{FF2B5EF4-FFF2-40B4-BE49-F238E27FC236}">
-                <a16:creationId xmlns:a16="http://schemas.microsoft.com/office/drawing/2014/main" id="{AD6D348E-A2E3-4FD1-8031-8FBD1657D095}"/>
+                <a16:creationId xmlns:a16="http://schemas.microsoft.com/office/drawing/2014/main" id="{6A97008A-C3C8-42E0-A5F2-048CFE8DCB8C}"/>
               </a:ext>
             </a:extLst>
           </p:cNvPr>
@@ -21645,7 +21645,7 @@
           <p:cNvPr id="276" name="">
             <a:extLst xmlns:a="http://schemas.openxmlformats.org/drawingml/2006/main">
               <a:ext uri="{FF2B5EF4-FFF2-40B4-BE49-F238E27FC236}">
-                <a16:creationId xmlns:a16="http://schemas.microsoft.com/office/drawing/2014/main" id="{EB41C863-C2F9-4D43-B638-F3BF03AFCF2E}"/>
+                <a16:creationId xmlns:a16="http://schemas.microsoft.com/office/drawing/2014/main" id="{ECC05E03-89F0-4FF7-8DF7-F51E580F70F6}"/>
               </a:ext>
             </a:extLst>
           </p:cNvPr>
@@ -21678,7 +21678,7 @@
           <p:cNvPr id="277" name="">
             <a:extLst xmlns:a="http://schemas.openxmlformats.org/drawingml/2006/main">
               <a:ext uri="{FF2B5EF4-FFF2-40B4-BE49-F238E27FC236}">
-                <a16:creationId xmlns:a16="http://schemas.microsoft.com/office/drawing/2014/main" id="{3ABE61A9-B90F-4111-AAF3-C9BA0646FA48}"/>
+                <a16:creationId xmlns:a16="http://schemas.microsoft.com/office/drawing/2014/main" id="{2E098698-7F12-495E-8542-D3DF2BD55C25}"/>
               </a:ext>
             </a:extLst>
           </p:cNvPr>
@@ -21711,7 +21711,7 @@
           <p:cNvPr id="278" name="">
             <a:extLst xmlns:a="http://schemas.openxmlformats.org/drawingml/2006/main">
               <a:ext uri="{FF2B5EF4-FFF2-40B4-BE49-F238E27FC236}">
-                <a16:creationId xmlns:a16="http://schemas.microsoft.com/office/drawing/2014/main" id="{2EB330F0-C313-468B-858C-4FA598DE8941}"/>
+                <a16:creationId xmlns:a16="http://schemas.microsoft.com/office/drawing/2014/main" id="{BC460C51-966E-4A84-A33A-50EA5D5FECE3}"/>
               </a:ext>
             </a:extLst>
           </p:cNvPr>
@@ -21744,7 +21744,7 @@
           <p:cNvPr id="279" name="">
             <a:extLst xmlns:a="http://schemas.openxmlformats.org/drawingml/2006/main">
               <a:ext uri="{FF2B5EF4-FFF2-40B4-BE49-F238E27FC236}">
-                <a16:creationId xmlns:a16="http://schemas.microsoft.com/office/drawing/2014/main" id="{4FE997D4-6278-4E69-9780-E26CB5E41049}"/>
+                <a16:creationId xmlns:a16="http://schemas.microsoft.com/office/drawing/2014/main" id="{D020D6A2-2C55-4224-89BF-EDD5F1E170CE}"/>
               </a:ext>
             </a:extLst>
           </p:cNvPr>
@@ -21777,7 +21777,7 @@
           <p:cNvPr id="280" name="">
             <a:extLst xmlns:a="http://schemas.openxmlformats.org/drawingml/2006/main">
               <a:ext uri="{FF2B5EF4-FFF2-40B4-BE49-F238E27FC236}">
-                <a16:creationId xmlns:a16="http://schemas.microsoft.com/office/drawing/2014/main" id="{2598897B-B07D-4431-9B85-5B8D40D84220}"/>
+                <a16:creationId xmlns:a16="http://schemas.microsoft.com/office/drawing/2014/main" id="{2C010763-3E2F-4BB9-AC07-D3BE9134EE6B}"/>
               </a:ext>
             </a:extLst>
           </p:cNvPr>
@@ -21810,7 +21810,7 @@
           <p:cNvPr id="281" name="">
             <a:extLst xmlns:a="http://schemas.openxmlformats.org/drawingml/2006/main">
               <a:ext uri="{FF2B5EF4-FFF2-40B4-BE49-F238E27FC236}">
-                <a16:creationId xmlns:a16="http://schemas.microsoft.com/office/drawing/2014/main" id="{85B553AA-DBC8-452C-9E0D-3B64595B82CA}"/>
+                <a16:creationId xmlns:a16="http://schemas.microsoft.com/office/drawing/2014/main" id="{EEF7F61F-224F-446B-AFD3-1BA7DCAEE5C7}"/>
               </a:ext>
             </a:extLst>
           </p:cNvPr>
@@ -21843,7 +21843,7 @@
           <p:cNvPr id="282" name="">
             <a:extLst xmlns:a="http://schemas.openxmlformats.org/drawingml/2006/main">
               <a:ext uri="{FF2B5EF4-FFF2-40B4-BE49-F238E27FC236}">
-                <a16:creationId xmlns:a16="http://schemas.microsoft.com/office/drawing/2014/main" id="{5965D022-C824-4D74-880C-10AFA6903998}"/>
+                <a16:creationId xmlns:a16="http://schemas.microsoft.com/office/drawing/2014/main" id="{D5222ABD-6454-434B-AB46-C7B12A2E3746}"/>
               </a:ext>
             </a:extLst>
           </p:cNvPr>
@@ -21876,7 +21876,7 @@
           <p:cNvPr id="283" name="">
             <a:extLst xmlns:a="http://schemas.openxmlformats.org/drawingml/2006/main">
               <a:ext uri="{FF2B5EF4-FFF2-40B4-BE49-F238E27FC236}">
-                <a16:creationId xmlns:a16="http://schemas.microsoft.com/office/drawing/2014/main" id="{FB8CFC0A-8769-453A-A375-40CFF042475A}"/>
+                <a16:creationId xmlns:a16="http://schemas.microsoft.com/office/drawing/2014/main" id="{BA80D6A5-AB76-439B-9ABA-C17980A26D18}"/>
               </a:ext>
             </a:extLst>
           </p:cNvPr>
@@ -21909,7 +21909,7 @@
           <p:cNvPr id="284" name="">
             <a:extLst xmlns:a="http://schemas.openxmlformats.org/drawingml/2006/main">
               <a:ext uri="{FF2B5EF4-FFF2-40B4-BE49-F238E27FC236}">
-                <a16:creationId xmlns:a16="http://schemas.microsoft.com/office/drawing/2014/main" id="{C32DD722-A4F7-4095-9F1C-A9CD799B3F30}"/>
+                <a16:creationId xmlns:a16="http://schemas.microsoft.com/office/drawing/2014/main" id="{6F0AD7FC-98D2-49DB-BC44-BA47CFF13DD9}"/>
               </a:ext>
             </a:extLst>
           </p:cNvPr>
@@ -21942,7 +21942,7 @@
           <p:cNvPr id="285" name="">
             <a:extLst xmlns:a="http://schemas.openxmlformats.org/drawingml/2006/main">
               <a:ext uri="{FF2B5EF4-FFF2-40B4-BE49-F238E27FC236}">
-                <a16:creationId xmlns:a16="http://schemas.microsoft.com/office/drawing/2014/main" id="{31A82FD0-C002-4C6E-80AA-D18A9E076DDE}"/>
+                <a16:creationId xmlns:a16="http://schemas.microsoft.com/office/drawing/2014/main" id="{4347BD58-B62C-46F0-92F0-F84AD6885057}"/>
               </a:ext>
             </a:extLst>
           </p:cNvPr>
@@ -21975,7 +21975,7 @@
           <p:cNvPr id="286" name="">
             <a:extLst xmlns:a="http://schemas.openxmlformats.org/drawingml/2006/main">
               <a:ext uri="{FF2B5EF4-FFF2-40B4-BE49-F238E27FC236}">
-                <a16:creationId xmlns:a16="http://schemas.microsoft.com/office/drawing/2014/main" id="{4A596241-2A06-46C5-821E-98EC32DC1B2A}"/>
+                <a16:creationId xmlns:a16="http://schemas.microsoft.com/office/drawing/2014/main" id="{6EA3AE6C-D371-4954-AC20-4D977B78D962}"/>
               </a:ext>
             </a:extLst>
           </p:cNvPr>
@@ -22008,7 +22008,7 @@
           <p:cNvPr id="287" name="">
             <a:extLst xmlns:a="http://schemas.openxmlformats.org/drawingml/2006/main">
               <a:ext uri="{FF2B5EF4-FFF2-40B4-BE49-F238E27FC236}">
-                <a16:creationId xmlns:a16="http://schemas.microsoft.com/office/drawing/2014/main" id="{FF7569E7-D69A-4247-81E4-AD5962D0DFF8}"/>
+                <a16:creationId xmlns:a16="http://schemas.microsoft.com/office/drawing/2014/main" id="{28131878-2FA1-4095-B8D8-B646F29CB509}"/>
               </a:ext>
             </a:extLst>
           </p:cNvPr>
@@ -22041,7 +22041,7 @@
           <p:cNvPr id="288" name="">
             <a:extLst xmlns:a="http://schemas.openxmlformats.org/drawingml/2006/main">
               <a:ext uri="{FF2B5EF4-FFF2-40B4-BE49-F238E27FC236}">
-                <a16:creationId xmlns:a16="http://schemas.microsoft.com/office/drawing/2014/main" id="{3D36F475-1DDA-4B7F-A899-F3FD2D3F09DD}"/>
+                <a16:creationId xmlns:a16="http://schemas.microsoft.com/office/drawing/2014/main" id="{B071F5D9-6FB0-4DF4-BD0C-286D207D8F69}"/>
               </a:ext>
             </a:extLst>
           </p:cNvPr>
@@ -22072,7 +22072,7 @@
           <p:cNvPr id="289" name="">
             <a:extLst xmlns:a="http://schemas.openxmlformats.org/drawingml/2006/main">
               <a:ext uri="{FF2B5EF4-FFF2-40B4-BE49-F238E27FC236}">
-                <a16:creationId xmlns:a16="http://schemas.microsoft.com/office/drawing/2014/main" id="{049AB101-8468-444C-8A5A-282238793E47}"/>
+                <a16:creationId xmlns:a16="http://schemas.microsoft.com/office/drawing/2014/main" id="{1A0B1428-39CE-4760-8817-2265DB534801}"/>
               </a:ext>
             </a:extLst>
           </p:cNvPr>
@@ -22134,7 +22134,7 @@
           <p:cNvPr id="290" name="">
             <a:extLst xmlns:a="http://schemas.openxmlformats.org/drawingml/2006/main">
               <a:ext uri="{FF2B5EF4-FFF2-40B4-BE49-F238E27FC236}">
-                <a16:creationId xmlns:a16="http://schemas.microsoft.com/office/drawing/2014/main" id="{FF8907C3-5763-45B2-883F-12E02F78174D}"/>
+                <a16:creationId xmlns:a16="http://schemas.microsoft.com/office/drawing/2014/main" id="{7ECAA2A7-0198-415E-A847-BECAA6479AA2}"/>
               </a:ext>
             </a:extLst>
           </p:cNvPr>
@@ -22165,7 +22165,7 @@
           <p:cNvPr id="291" name="">
             <a:extLst xmlns:a="http://schemas.openxmlformats.org/drawingml/2006/main">
               <a:ext uri="{FF2B5EF4-FFF2-40B4-BE49-F238E27FC236}">
-                <a16:creationId xmlns:a16="http://schemas.microsoft.com/office/drawing/2014/main" id="{B6021C63-6185-408A-8EC9-D24181D6763E}"/>
+                <a16:creationId xmlns:a16="http://schemas.microsoft.com/office/drawing/2014/main" id="{F4F61801-312B-451A-AF8A-0276A4BC65A5}"/>
               </a:ext>
             </a:extLst>
           </p:cNvPr>
@@ -22227,7 +22227,7 @@
           <p:cNvPr id="292" name="">
             <a:extLst xmlns:a="http://schemas.openxmlformats.org/drawingml/2006/main">
               <a:ext uri="{FF2B5EF4-FFF2-40B4-BE49-F238E27FC236}">
-                <a16:creationId xmlns:a16="http://schemas.microsoft.com/office/drawing/2014/main" id="{3DB28828-FD19-407E-9DCC-C6B60EC61CF0}"/>
+                <a16:creationId xmlns:a16="http://schemas.microsoft.com/office/drawing/2014/main" id="{82E6099F-8D23-4980-ABAA-FCD54F9A00C3}"/>
               </a:ext>
             </a:extLst>
           </p:cNvPr>
@@ -22287,7 +22287,7 @@
     </p:spTree>
     <p:extLst>
       <p:ext uri="{BB962C8B-B14F-4D97-AF65-F5344CB8AC3E}">
-        <p14:creationId xmlns:p14="http://schemas.microsoft.com/office/powerpoint/2010/main" val="1672498590"/>
+        <p14:creationId xmlns:p14="http://schemas.microsoft.com/office/powerpoint/2010/main" val="591495576"/>
       </p:ext>
     </p:extLst>
   </p:cSld>
@@ -22318,7 +22318,7 @@
           <p:cNvPr id="1" name="">
             <a:extLst xmlns:a="http://schemas.openxmlformats.org/drawingml/2006/main">
               <a:ext uri="{FF2B5EF4-FFF2-40B4-BE49-F238E27FC236}">
-                <a16:creationId xmlns:a16="http://schemas.microsoft.com/office/drawing/2014/main" id="{95E43759-5D1E-4AAC-BDB3-EA6AB81357D8}"/>
+                <a16:creationId xmlns:a16="http://schemas.microsoft.com/office/drawing/2014/main" id="{D4B7CFBE-DD83-484A-9519-0CBA993803D4}"/>
               </a:ext>
             </a:extLst>
           </p:cNvPr>
@@ -22380,7 +22380,7 @@
           <p:cNvPr id="2" name="">
             <a:extLst xmlns:a="http://schemas.openxmlformats.org/drawingml/2006/main">
               <a:ext uri="{FF2B5EF4-FFF2-40B4-BE49-F238E27FC236}">
-                <a16:creationId xmlns:a16="http://schemas.microsoft.com/office/drawing/2014/main" id="{AFD933B0-E59F-417C-8F3B-2714CEB5F48A}"/>
+                <a16:creationId xmlns:a16="http://schemas.microsoft.com/office/drawing/2014/main" id="{1BEF2712-EE8B-4F6B-8CBF-709F7EE91490}"/>
               </a:ext>
             </a:extLst>
           </p:cNvPr>
@@ -22442,7 +22442,7 @@
           <p:cNvPr id="3" name="">
             <a:extLst xmlns:a="http://schemas.openxmlformats.org/drawingml/2006/main">
               <a:ext uri="{FF2B5EF4-FFF2-40B4-BE49-F238E27FC236}">
-                <a16:creationId xmlns:a16="http://schemas.microsoft.com/office/drawing/2014/main" id="{4DCDAD95-C8FB-40B6-BD0E-BA3E3472036D}"/>
+                <a16:creationId xmlns:a16="http://schemas.microsoft.com/office/drawing/2014/main" id="{5307D168-520A-40E3-ABE8-B7D16887D2B3}"/>
               </a:ext>
             </a:extLst>
           </p:cNvPr>
@@ -22504,7 +22504,7 @@
           <p:cNvPr id="4" name="">
             <a:extLst xmlns:a="http://schemas.openxmlformats.org/drawingml/2006/main">
               <a:ext uri="{FF2B5EF4-FFF2-40B4-BE49-F238E27FC236}">
-                <a16:creationId xmlns:a16="http://schemas.microsoft.com/office/drawing/2014/main" id="{8D3FFF50-A12B-46B5-A8A2-92A8A3C7820C}"/>
+                <a16:creationId xmlns:a16="http://schemas.microsoft.com/office/drawing/2014/main" id="{8BA93E88-8A6E-45B5-A967-46641AA1AE9D}"/>
               </a:ext>
             </a:extLst>
           </p:cNvPr>
@@ -22539,7 +22539,7 @@
           <p:cNvPr id="5" name="">
             <a:extLst xmlns:a="http://schemas.openxmlformats.org/drawingml/2006/main">
               <a:ext uri="{FF2B5EF4-FFF2-40B4-BE49-F238E27FC236}">
-                <a16:creationId xmlns:a16="http://schemas.microsoft.com/office/drawing/2014/main" id="{B8C64542-2C93-404F-AF2F-C876A7488682}"/>
+                <a16:creationId xmlns:a16="http://schemas.microsoft.com/office/drawing/2014/main" id="{B119F2E7-C529-4110-8541-232D88B1CB83}"/>
               </a:ext>
             </a:extLst>
           </p:cNvPr>
@@ -22572,7 +22572,7 @@
           <p:cNvPr id="6" name="">
             <a:extLst xmlns:a="http://schemas.openxmlformats.org/drawingml/2006/main">
               <a:ext uri="{FF2B5EF4-FFF2-40B4-BE49-F238E27FC236}">
-                <a16:creationId xmlns:a16="http://schemas.microsoft.com/office/drawing/2014/main" id="{8DA3BB26-E1B6-49C8-8600-1E31559BCA9D}"/>
+                <a16:creationId xmlns:a16="http://schemas.microsoft.com/office/drawing/2014/main" id="{17D6E0A6-E617-4C45-B9FF-77A30D5C360F}"/>
               </a:ext>
             </a:extLst>
           </p:cNvPr>
@@ -22605,7 +22605,7 @@
           <p:cNvPr id="7" name="">
             <a:extLst xmlns:a="http://schemas.openxmlformats.org/drawingml/2006/main">
               <a:ext uri="{FF2B5EF4-FFF2-40B4-BE49-F238E27FC236}">
-                <a16:creationId xmlns:a16="http://schemas.microsoft.com/office/drawing/2014/main" id="{08DE29AD-3E64-4D5D-BF4E-0B761BE0638C}"/>
+                <a16:creationId xmlns:a16="http://schemas.microsoft.com/office/drawing/2014/main" id="{3BA4743E-6D1F-4147-9170-3B0583A6A98F}"/>
               </a:ext>
             </a:extLst>
           </p:cNvPr>
@@ -22638,7 +22638,7 @@
           <p:cNvPr id="8" name="">
             <a:extLst xmlns:a="http://schemas.openxmlformats.org/drawingml/2006/main">
               <a:ext uri="{FF2B5EF4-FFF2-40B4-BE49-F238E27FC236}">
-                <a16:creationId xmlns:a16="http://schemas.microsoft.com/office/drawing/2014/main" id="{2856D610-36D5-4676-9153-3C86B9F5AF11}"/>
+                <a16:creationId xmlns:a16="http://schemas.microsoft.com/office/drawing/2014/main" id="{18C47200-0262-4812-86A5-1E38AF788BB5}"/>
               </a:ext>
             </a:extLst>
           </p:cNvPr>
@@ -22671,7 +22671,7 @@
           <p:cNvPr id="9" name="">
             <a:extLst xmlns:a="http://schemas.openxmlformats.org/drawingml/2006/main">
               <a:ext uri="{FF2B5EF4-FFF2-40B4-BE49-F238E27FC236}">
-                <a16:creationId xmlns:a16="http://schemas.microsoft.com/office/drawing/2014/main" id="{F786D59E-D969-4FB8-8CB7-7AABB2884955}"/>
+                <a16:creationId xmlns:a16="http://schemas.microsoft.com/office/drawing/2014/main" id="{C28D8278-41DC-4CAE-87CF-2C5B5A8FDC6D}"/>
               </a:ext>
             </a:extLst>
           </p:cNvPr>
@@ -22704,7 +22704,7 @@
           <p:cNvPr id="10" name="">
             <a:extLst xmlns:a="http://schemas.openxmlformats.org/drawingml/2006/main">
               <a:ext uri="{FF2B5EF4-FFF2-40B4-BE49-F238E27FC236}">
-                <a16:creationId xmlns:a16="http://schemas.microsoft.com/office/drawing/2014/main" id="{7FA386EA-B419-4495-B420-BBA2EFE41496}"/>
+                <a16:creationId xmlns:a16="http://schemas.microsoft.com/office/drawing/2014/main" id="{9263A1FD-069B-4EDC-B523-139CC4A05E87}"/>
               </a:ext>
             </a:extLst>
           </p:cNvPr>
@@ -22737,7 +22737,7 @@
           <p:cNvPr id="11" name="">
             <a:extLst xmlns:a="http://schemas.openxmlformats.org/drawingml/2006/main">
               <a:ext uri="{FF2B5EF4-FFF2-40B4-BE49-F238E27FC236}">
-                <a16:creationId xmlns:a16="http://schemas.microsoft.com/office/drawing/2014/main" id="{D846BC0B-BC69-402D-9858-D313F1416570}"/>
+                <a16:creationId xmlns:a16="http://schemas.microsoft.com/office/drawing/2014/main" id="{C52EB8AE-C23F-4DAE-A05C-8A2EE3D4C58F}"/>
               </a:ext>
             </a:extLst>
           </p:cNvPr>
@@ -22770,7 +22770,7 @@
           <p:cNvPr id="12" name="">
             <a:extLst xmlns:a="http://schemas.openxmlformats.org/drawingml/2006/main">
               <a:ext uri="{FF2B5EF4-FFF2-40B4-BE49-F238E27FC236}">
-                <a16:creationId xmlns:a16="http://schemas.microsoft.com/office/drawing/2014/main" id="{8A1055C6-6A7F-4964-99E0-B0B6134F1725}"/>
+                <a16:creationId xmlns:a16="http://schemas.microsoft.com/office/drawing/2014/main" id="{B5823D1B-01A0-49B0-87CA-EA4DCF463ACA}"/>
               </a:ext>
             </a:extLst>
           </p:cNvPr>
@@ -22803,7 +22803,7 @@
           <p:cNvPr id="13" name="">
             <a:extLst xmlns:a="http://schemas.openxmlformats.org/drawingml/2006/main">
               <a:ext uri="{FF2B5EF4-FFF2-40B4-BE49-F238E27FC236}">
-                <a16:creationId xmlns:a16="http://schemas.microsoft.com/office/drawing/2014/main" id="{76515B39-1AD9-4062-BB2E-9F9ABA5F4521}"/>
+                <a16:creationId xmlns:a16="http://schemas.microsoft.com/office/drawing/2014/main" id="{DC522FB0-60EE-4479-A7B8-4B36E50B8178}"/>
               </a:ext>
             </a:extLst>
           </p:cNvPr>
@@ -22836,7 +22836,7 @@
           <p:cNvPr id="14" name="">
             <a:extLst xmlns:a="http://schemas.openxmlformats.org/drawingml/2006/main">
               <a:ext uri="{FF2B5EF4-FFF2-40B4-BE49-F238E27FC236}">
-                <a16:creationId xmlns:a16="http://schemas.microsoft.com/office/drawing/2014/main" id="{F7ACA231-0B69-4515-8069-4BC380DEF655}"/>
+                <a16:creationId xmlns:a16="http://schemas.microsoft.com/office/drawing/2014/main" id="{6BFACE99-0863-4A31-A24C-7C1FDC8B4EE0}"/>
               </a:ext>
             </a:extLst>
           </p:cNvPr>
@@ -22869,7 +22869,7 @@
           <p:cNvPr id="15" name="">
             <a:extLst xmlns:a="http://schemas.openxmlformats.org/drawingml/2006/main">
               <a:ext uri="{FF2B5EF4-FFF2-40B4-BE49-F238E27FC236}">
-                <a16:creationId xmlns:a16="http://schemas.microsoft.com/office/drawing/2014/main" id="{5C56BA86-27E7-4EC6-BC36-01C670DEDF79}"/>
+                <a16:creationId xmlns:a16="http://schemas.microsoft.com/office/drawing/2014/main" id="{A2C38EBE-583B-4290-99BF-0D2D3A1A0C86}"/>
               </a:ext>
             </a:extLst>
           </p:cNvPr>
@@ -22902,7 +22902,7 @@
           <p:cNvPr id="16" name="">
             <a:extLst xmlns:a="http://schemas.openxmlformats.org/drawingml/2006/main">
               <a:ext uri="{FF2B5EF4-FFF2-40B4-BE49-F238E27FC236}">
-                <a16:creationId xmlns:a16="http://schemas.microsoft.com/office/drawing/2014/main" id="{9A6C47D8-6469-4D36-86E3-E3F246C4D68F}"/>
+                <a16:creationId xmlns:a16="http://schemas.microsoft.com/office/drawing/2014/main" id="{35CB96E2-4D0B-47BF-9E6E-0940BAEA37C3}"/>
               </a:ext>
             </a:extLst>
           </p:cNvPr>
@@ -22935,7 +22935,7 @@
           <p:cNvPr id="17" name="">
             <a:extLst xmlns:a="http://schemas.openxmlformats.org/drawingml/2006/main">
               <a:ext uri="{FF2B5EF4-FFF2-40B4-BE49-F238E27FC236}">
-                <a16:creationId xmlns:a16="http://schemas.microsoft.com/office/drawing/2014/main" id="{96A20822-1BD9-4E21-8129-5737D1D9860C}"/>
+                <a16:creationId xmlns:a16="http://schemas.microsoft.com/office/drawing/2014/main" id="{06C1471C-4D8F-49DF-BD60-1CC6EFD29A79}"/>
               </a:ext>
             </a:extLst>
           </p:cNvPr>
@@ -22968,7 +22968,7 @@
           <p:cNvPr id="18" name="">
             <a:extLst xmlns:a="http://schemas.openxmlformats.org/drawingml/2006/main">
               <a:ext uri="{FF2B5EF4-FFF2-40B4-BE49-F238E27FC236}">
-                <a16:creationId xmlns:a16="http://schemas.microsoft.com/office/drawing/2014/main" id="{F9287240-4B2D-473B-8941-F4A8AC524B2D}"/>
+                <a16:creationId xmlns:a16="http://schemas.microsoft.com/office/drawing/2014/main" id="{B5799A0D-7856-4705-B735-21B29EDD85A5}"/>
               </a:ext>
             </a:extLst>
           </p:cNvPr>
@@ -23001,7 +23001,7 @@
           <p:cNvPr id="19" name="">
             <a:extLst xmlns:a="http://schemas.openxmlformats.org/drawingml/2006/main">
               <a:ext uri="{FF2B5EF4-FFF2-40B4-BE49-F238E27FC236}">
-                <a16:creationId xmlns:a16="http://schemas.microsoft.com/office/drawing/2014/main" id="{9243268E-1C6A-4776-AC81-71448A3B0D25}"/>
+                <a16:creationId xmlns:a16="http://schemas.microsoft.com/office/drawing/2014/main" id="{95B590E2-A73E-4173-97EF-7CF00F93988E}"/>
               </a:ext>
             </a:extLst>
           </p:cNvPr>
@@ -23034,7 +23034,7 @@
           <p:cNvPr id="20" name="">
             <a:extLst xmlns:a="http://schemas.openxmlformats.org/drawingml/2006/main">
               <a:ext uri="{FF2B5EF4-FFF2-40B4-BE49-F238E27FC236}">
-                <a16:creationId xmlns:a16="http://schemas.microsoft.com/office/drawing/2014/main" id="{81261368-DB2E-48D2-A213-7F6458DF4524}"/>
+                <a16:creationId xmlns:a16="http://schemas.microsoft.com/office/drawing/2014/main" id="{BE4667FA-0E75-494E-BE4C-75C06D7F2B28}"/>
               </a:ext>
             </a:extLst>
           </p:cNvPr>
@@ -23067,7 +23067,7 @@
           <p:cNvPr id="21" name="">
             <a:extLst xmlns:a="http://schemas.openxmlformats.org/drawingml/2006/main">
               <a:ext uri="{FF2B5EF4-FFF2-40B4-BE49-F238E27FC236}">
-                <a16:creationId xmlns:a16="http://schemas.microsoft.com/office/drawing/2014/main" id="{A5493451-F2A1-4388-A621-4BC5C1746A1C}"/>
+                <a16:creationId xmlns:a16="http://schemas.microsoft.com/office/drawing/2014/main" id="{90C8ECA1-B104-4985-A503-067DD9A4DE22}"/>
               </a:ext>
             </a:extLst>
           </p:cNvPr>
@@ -23100,7 +23100,7 @@
           <p:cNvPr id="22" name="">
             <a:extLst xmlns:a="http://schemas.openxmlformats.org/drawingml/2006/main">
               <a:ext uri="{FF2B5EF4-FFF2-40B4-BE49-F238E27FC236}">
-                <a16:creationId xmlns:a16="http://schemas.microsoft.com/office/drawing/2014/main" id="{A1B82A41-8490-4F3F-953C-EFCC4DD672AE}"/>
+                <a16:creationId xmlns:a16="http://schemas.microsoft.com/office/drawing/2014/main" id="{2F4754EB-D95E-4EA1-BB7F-5A07F6519C0C}"/>
               </a:ext>
             </a:extLst>
           </p:cNvPr>
@@ -23133,7 +23133,7 @@
           <p:cNvPr id="23" name="">
             <a:extLst xmlns:a="http://schemas.openxmlformats.org/drawingml/2006/main">
               <a:ext uri="{FF2B5EF4-FFF2-40B4-BE49-F238E27FC236}">
-                <a16:creationId xmlns:a16="http://schemas.microsoft.com/office/drawing/2014/main" id="{260C2DC5-5855-4B1C-A647-FA3485DC5B6F}"/>
+                <a16:creationId xmlns:a16="http://schemas.microsoft.com/office/drawing/2014/main" id="{F8A4B7FE-342D-4C97-B5FD-90333D3D0C8F}"/>
               </a:ext>
             </a:extLst>
           </p:cNvPr>
@@ -23166,7 +23166,7 @@
           <p:cNvPr id="24" name="">
             <a:extLst xmlns:a="http://schemas.openxmlformats.org/drawingml/2006/main">
               <a:ext uri="{FF2B5EF4-FFF2-40B4-BE49-F238E27FC236}">
-                <a16:creationId xmlns:a16="http://schemas.microsoft.com/office/drawing/2014/main" id="{87FADD83-0434-47DE-8FC0-D484919F10D9}"/>
+                <a16:creationId xmlns:a16="http://schemas.microsoft.com/office/drawing/2014/main" id="{B0259AF0-A9E8-4D43-AFE4-B723CE1CF7FA}"/>
               </a:ext>
             </a:extLst>
           </p:cNvPr>
@@ -23199,7 +23199,7 @@
           <p:cNvPr id="25" name="">
             <a:extLst xmlns:a="http://schemas.openxmlformats.org/drawingml/2006/main">
               <a:ext uri="{FF2B5EF4-FFF2-40B4-BE49-F238E27FC236}">
-                <a16:creationId xmlns:a16="http://schemas.microsoft.com/office/drawing/2014/main" id="{CEB4A1B5-534D-47D6-94FC-9DB211BA19D5}"/>
+                <a16:creationId xmlns:a16="http://schemas.microsoft.com/office/drawing/2014/main" id="{499069CE-CD7F-43F2-A5E1-00719800DAF7}"/>
               </a:ext>
             </a:extLst>
           </p:cNvPr>
@@ -23232,7 +23232,7 @@
           <p:cNvPr id="26" name="">
             <a:extLst xmlns:a="http://schemas.openxmlformats.org/drawingml/2006/main">
               <a:ext uri="{FF2B5EF4-FFF2-40B4-BE49-F238E27FC236}">
-                <a16:creationId xmlns:a16="http://schemas.microsoft.com/office/drawing/2014/main" id="{99B5DC41-CB95-4432-B201-FCECDDB10D4A}"/>
+                <a16:creationId xmlns:a16="http://schemas.microsoft.com/office/drawing/2014/main" id="{B3BBD156-05E9-42D5-9C56-B397CD249EA4}"/>
               </a:ext>
             </a:extLst>
           </p:cNvPr>
@@ -23265,7 +23265,7 @@
           <p:cNvPr id="27" name="">
             <a:extLst xmlns:a="http://schemas.openxmlformats.org/drawingml/2006/main">
               <a:ext uri="{FF2B5EF4-FFF2-40B4-BE49-F238E27FC236}">
-                <a16:creationId xmlns:a16="http://schemas.microsoft.com/office/drawing/2014/main" id="{4FDE29E7-B002-4ED0-8894-6BD8267C6A65}"/>
+                <a16:creationId xmlns:a16="http://schemas.microsoft.com/office/drawing/2014/main" id="{B77BCB7B-DF24-4B7A-B092-D5C0B6AEF924}"/>
               </a:ext>
             </a:extLst>
           </p:cNvPr>
@@ -23298,7 +23298,7 @@
           <p:cNvPr id="28" name="">
             <a:extLst xmlns:a="http://schemas.openxmlformats.org/drawingml/2006/main">
               <a:ext uri="{FF2B5EF4-FFF2-40B4-BE49-F238E27FC236}">
-                <a16:creationId xmlns:a16="http://schemas.microsoft.com/office/drawing/2014/main" id="{3C1B964C-8C27-4B8C-8964-D08CBEE47F9D}"/>
+                <a16:creationId xmlns:a16="http://schemas.microsoft.com/office/drawing/2014/main" id="{43CF6F38-E443-45D1-9A06-182F3BFD92E7}"/>
               </a:ext>
             </a:extLst>
           </p:cNvPr>
@@ -23331,7 +23331,7 @@
           <p:cNvPr id="29" name="">
             <a:extLst xmlns:a="http://schemas.openxmlformats.org/drawingml/2006/main">
               <a:ext uri="{FF2B5EF4-FFF2-40B4-BE49-F238E27FC236}">
-                <a16:creationId xmlns:a16="http://schemas.microsoft.com/office/drawing/2014/main" id="{16DC2505-07C5-4EBF-AAD4-6F949DD2E5DA}"/>
+                <a16:creationId xmlns:a16="http://schemas.microsoft.com/office/drawing/2014/main" id="{81EC60AF-3C0E-4C24-B5BF-FAE4495FF87C}"/>
               </a:ext>
             </a:extLst>
           </p:cNvPr>
@@ -23364,7 +23364,7 @@
           <p:cNvPr id="30" name="">
             <a:extLst xmlns:a="http://schemas.openxmlformats.org/drawingml/2006/main">
               <a:ext uri="{FF2B5EF4-FFF2-40B4-BE49-F238E27FC236}">
-                <a16:creationId xmlns:a16="http://schemas.microsoft.com/office/drawing/2014/main" id="{82017C85-9367-4DE4-A51C-CD8C911A448B}"/>
+                <a16:creationId xmlns:a16="http://schemas.microsoft.com/office/drawing/2014/main" id="{79FB6B04-D89F-4E5B-9482-F9C19DF2D64D}"/>
               </a:ext>
             </a:extLst>
           </p:cNvPr>
@@ -23397,7 +23397,7 @@
           <p:cNvPr id="31" name="">
             <a:extLst xmlns:a="http://schemas.openxmlformats.org/drawingml/2006/main">
               <a:ext uri="{FF2B5EF4-FFF2-40B4-BE49-F238E27FC236}">
-                <a16:creationId xmlns:a16="http://schemas.microsoft.com/office/drawing/2014/main" id="{FBDCE649-9158-4F9C-91F0-388577B048FA}"/>
+                <a16:creationId xmlns:a16="http://schemas.microsoft.com/office/drawing/2014/main" id="{A59DBFFC-5A8E-4533-A1F9-0C3EA7D06A5B}"/>
               </a:ext>
             </a:extLst>
           </p:cNvPr>
@@ -23430,7 +23430,7 @@
           <p:cNvPr id="32" name="">
             <a:extLst xmlns:a="http://schemas.openxmlformats.org/drawingml/2006/main">
               <a:ext uri="{FF2B5EF4-FFF2-40B4-BE49-F238E27FC236}">
-                <a16:creationId xmlns:a16="http://schemas.microsoft.com/office/drawing/2014/main" id="{56392555-B0B6-445C-AB7E-C84567B023A5}"/>
+                <a16:creationId xmlns:a16="http://schemas.microsoft.com/office/drawing/2014/main" id="{5D0F1852-D1EA-4AB8-9832-BA6190DD5B3A}"/>
               </a:ext>
             </a:extLst>
           </p:cNvPr>
@@ -23463,7 +23463,7 @@
           <p:cNvPr id="33" name="">
             <a:extLst xmlns:a="http://schemas.openxmlformats.org/drawingml/2006/main">
               <a:ext uri="{FF2B5EF4-FFF2-40B4-BE49-F238E27FC236}">
-                <a16:creationId xmlns:a16="http://schemas.microsoft.com/office/drawing/2014/main" id="{C7A9F471-9CCA-42B4-B483-6EDF5FA89D25}"/>
+                <a16:creationId xmlns:a16="http://schemas.microsoft.com/office/drawing/2014/main" id="{8273801E-8DA7-40AD-B2EB-99DEC8A0FB9D}"/>
               </a:ext>
             </a:extLst>
           </p:cNvPr>
@@ -23496,7 +23496,7 @@
           <p:cNvPr id="34" name="">
             <a:extLst xmlns:a="http://schemas.openxmlformats.org/drawingml/2006/main">
               <a:ext uri="{FF2B5EF4-FFF2-40B4-BE49-F238E27FC236}">
-                <a16:creationId xmlns:a16="http://schemas.microsoft.com/office/drawing/2014/main" id="{5F56E919-0963-4D6D-82EC-B2A904E70446}"/>
+                <a16:creationId xmlns:a16="http://schemas.microsoft.com/office/drawing/2014/main" id="{B8A1E2FE-A684-4AF3-89AF-1372292F6EF6}"/>
               </a:ext>
             </a:extLst>
           </p:cNvPr>
@@ -23529,7 +23529,7 @@
           <p:cNvPr id="35" name="">
             <a:extLst xmlns:a="http://schemas.openxmlformats.org/drawingml/2006/main">
               <a:ext uri="{FF2B5EF4-FFF2-40B4-BE49-F238E27FC236}">
-                <a16:creationId xmlns:a16="http://schemas.microsoft.com/office/drawing/2014/main" id="{13ECC85B-761A-4079-B83D-5A4A0992D833}"/>
+                <a16:creationId xmlns:a16="http://schemas.microsoft.com/office/drawing/2014/main" id="{9083F404-8EFE-4E84-8FF7-06294E7ABB71}"/>
               </a:ext>
             </a:extLst>
           </p:cNvPr>
@@ -23562,7 +23562,7 @@
           <p:cNvPr id="36" name="">
             <a:extLst xmlns:a="http://schemas.openxmlformats.org/drawingml/2006/main">
               <a:ext uri="{FF2B5EF4-FFF2-40B4-BE49-F238E27FC236}">
-                <a16:creationId xmlns:a16="http://schemas.microsoft.com/office/drawing/2014/main" id="{5D99FB61-1CBA-4F87-A04E-57FE4F6F32B1}"/>
+                <a16:creationId xmlns:a16="http://schemas.microsoft.com/office/drawing/2014/main" id="{4DD2B11C-C62F-4636-8466-5DFD176F368C}"/>
               </a:ext>
             </a:extLst>
           </p:cNvPr>
@@ -23595,7 +23595,7 @@
           <p:cNvPr id="37" name="">
             <a:extLst xmlns:a="http://schemas.openxmlformats.org/drawingml/2006/main">
               <a:ext uri="{FF2B5EF4-FFF2-40B4-BE49-F238E27FC236}">
-                <a16:creationId xmlns:a16="http://schemas.microsoft.com/office/drawing/2014/main" id="{69680CE5-4555-4F8D-930A-3528D44C9E52}"/>
+                <a16:creationId xmlns:a16="http://schemas.microsoft.com/office/drawing/2014/main" id="{67A8032F-21E5-491C-821B-546521A2D90F}"/>
               </a:ext>
             </a:extLst>
           </p:cNvPr>
@@ -23628,7 +23628,7 @@
           <p:cNvPr id="38" name="">
             <a:extLst xmlns:a="http://schemas.openxmlformats.org/drawingml/2006/main">
               <a:ext uri="{FF2B5EF4-FFF2-40B4-BE49-F238E27FC236}">
-                <a16:creationId xmlns:a16="http://schemas.microsoft.com/office/drawing/2014/main" id="{5ADF9AE7-71EB-4590-9FE7-C3C168A13480}"/>
+                <a16:creationId xmlns:a16="http://schemas.microsoft.com/office/drawing/2014/main" id="{70886DC5-C9AB-45F9-A992-40AFFE3D9C9E}"/>
               </a:ext>
             </a:extLst>
           </p:cNvPr>
@@ -23661,7 +23661,7 @@
           <p:cNvPr id="39" name="">
             <a:extLst xmlns:a="http://schemas.openxmlformats.org/drawingml/2006/main">
               <a:ext uri="{FF2B5EF4-FFF2-40B4-BE49-F238E27FC236}">
-                <a16:creationId xmlns:a16="http://schemas.microsoft.com/office/drawing/2014/main" id="{AD2BECB5-D662-4DC6-9B24-84FE992F2DCB}"/>
+                <a16:creationId xmlns:a16="http://schemas.microsoft.com/office/drawing/2014/main" id="{31E19CA1-A907-4762-A11F-D0F86C285873}"/>
               </a:ext>
             </a:extLst>
           </p:cNvPr>
@@ -23694,7 +23694,7 @@
           <p:cNvPr id="40" name="">
             <a:extLst xmlns:a="http://schemas.openxmlformats.org/drawingml/2006/main">
               <a:ext uri="{FF2B5EF4-FFF2-40B4-BE49-F238E27FC236}">
-                <a16:creationId xmlns:a16="http://schemas.microsoft.com/office/drawing/2014/main" id="{6C883468-B077-4E46-ACEC-34BBD9F7890B}"/>
+                <a16:creationId xmlns:a16="http://schemas.microsoft.com/office/drawing/2014/main" id="{5AF0D8B2-199A-4E96-9638-9029F005EC24}"/>
               </a:ext>
             </a:extLst>
           </p:cNvPr>
@@ -23727,7 +23727,7 @@
           <p:cNvPr id="41" name="">
             <a:extLst xmlns:a="http://schemas.openxmlformats.org/drawingml/2006/main">
               <a:ext uri="{FF2B5EF4-FFF2-40B4-BE49-F238E27FC236}">
-                <a16:creationId xmlns:a16="http://schemas.microsoft.com/office/drawing/2014/main" id="{2510CC24-C7CB-461B-A0FC-B784919B84E2}"/>
+                <a16:creationId xmlns:a16="http://schemas.microsoft.com/office/drawing/2014/main" id="{30CD66BC-50B0-40F9-B677-9AB7CBEA4DBF}"/>
               </a:ext>
             </a:extLst>
           </p:cNvPr>
@@ -23760,7 +23760,7 @@
           <p:cNvPr id="42" name="">
             <a:extLst xmlns:a="http://schemas.openxmlformats.org/drawingml/2006/main">
               <a:ext uri="{FF2B5EF4-FFF2-40B4-BE49-F238E27FC236}">
-                <a16:creationId xmlns:a16="http://schemas.microsoft.com/office/drawing/2014/main" id="{C42A80A1-2541-49AE-927E-E581EDF43478}"/>
+                <a16:creationId xmlns:a16="http://schemas.microsoft.com/office/drawing/2014/main" id="{8C0DFD37-66EA-49BA-8CD0-E94F74D7FAA4}"/>
               </a:ext>
             </a:extLst>
           </p:cNvPr>
@@ -23793,7 +23793,7 @@
           <p:cNvPr id="43" name="">
             <a:extLst xmlns:a="http://schemas.openxmlformats.org/drawingml/2006/main">
               <a:ext uri="{FF2B5EF4-FFF2-40B4-BE49-F238E27FC236}">
-                <a16:creationId xmlns:a16="http://schemas.microsoft.com/office/drawing/2014/main" id="{9D9D60A2-4633-4507-9F17-D7A8A2922987}"/>
+                <a16:creationId xmlns:a16="http://schemas.microsoft.com/office/drawing/2014/main" id="{ED968EF2-67C0-4270-AD93-8293481A0B0C}"/>
               </a:ext>
             </a:extLst>
           </p:cNvPr>
@@ -23826,7 +23826,7 @@
           <p:cNvPr id="44" name="">
             <a:extLst xmlns:a="http://schemas.openxmlformats.org/drawingml/2006/main">
               <a:ext uri="{FF2B5EF4-FFF2-40B4-BE49-F238E27FC236}">
-                <a16:creationId xmlns:a16="http://schemas.microsoft.com/office/drawing/2014/main" id="{9EE7F53C-E4B5-4958-BC9B-3CD1B6BB626C}"/>
+                <a16:creationId xmlns:a16="http://schemas.microsoft.com/office/drawing/2014/main" id="{A9DE0876-0A02-44EF-BBBC-1870D2A83FF5}"/>
               </a:ext>
             </a:extLst>
           </p:cNvPr>
@@ -23859,7 +23859,7 @@
           <p:cNvPr id="45" name="">
             <a:extLst xmlns:a="http://schemas.openxmlformats.org/drawingml/2006/main">
               <a:ext uri="{FF2B5EF4-FFF2-40B4-BE49-F238E27FC236}">
-                <a16:creationId xmlns:a16="http://schemas.microsoft.com/office/drawing/2014/main" id="{6B800F2A-E9D7-43AF-A5A5-4645FCCC9CE7}"/>
+                <a16:creationId xmlns:a16="http://schemas.microsoft.com/office/drawing/2014/main" id="{055F82C3-C0CE-4E01-AEE1-B75A75D2D6B6}"/>
               </a:ext>
             </a:extLst>
           </p:cNvPr>
@@ -23892,7 +23892,7 @@
           <p:cNvPr id="46" name="">
             <a:extLst xmlns:a="http://schemas.openxmlformats.org/drawingml/2006/main">
               <a:ext uri="{FF2B5EF4-FFF2-40B4-BE49-F238E27FC236}">
-                <a16:creationId xmlns:a16="http://schemas.microsoft.com/office/drawing/2014/main" id="{94FADE52-94AF-411D-AE96-CFA19E80C226}"/>
+                <a16:creationId xmlns:a16="http://schemas.microsoft.com/office/drawing/2014/main" id="{660E6BFA-5A27-44BA-99CC-7A6006C16276}"/>
               </a:ext>
             </a:extLst>
           </p:cNvPr>
@@ -23925,7 +23925,7 @@
           <p:cNvPr id="47" name="">
             <a:extLst xmlns:a="http://schemas.openxmlformats.org/drawingml/2006/main">
               <a:ext uri="{FF2B5EF4-FFF2-40B4-BE49-F238E27FC236}">
-                <a16:creationId xmlns:a16="http://schemas.microsoft.com/office/drawing/2014/main" id="{C0959FFC-CC82-447A-A275-E5D2D1281CE0}"/>
+                <a16:creationId xmlns:a16="http://schemas.microsoft.com/office/drawing/2014/main" id="{CFA46191-00AC-42E9-A5D1-7A25BEF5FA3F}"/>
               </a:ext>
             </a:extLst>
           </p:cNvPr>
@@ -23958,7 +23958,7 @@
           <p:cNvPr id="48" name="">
             <a:extLst xmlns:a="http://schemas.openxmlformats.org/drawingml/2006/main">
               <a:ext uri="{FF2B5EF4-FFF2-40B4-BE49-F238E27FC236}">
-                <a16:creationId xmlns:a16="http://schemas.microsoft.com/office/drawing/2014/main" id="{C32D09CA-B8DE-432B-AA5C-2470BD7A5CA9}"/>
+                <a16:creationId xmlns:a16="http://schemas.microsoft.com/office/drawing/2014/main" id="{C1F72852-1D73-4BF1-BD4D-3264E9B25F35}"/>
               </a:ext>
             </a:extLst>
           </p:cNvPr>
@@ -23991,7 +23991,7 @@
           <p:cNvPr id="49" name="">
             <a:extLst xmlns:a="http://schemas.openxmlformats.org/drawingml/2006/main">
               <a:ext uri="{FF2B5EF4-FFF2-40B4-BE49-F238E27FC236}">
-                <a16:creationId xmlns:a16="http://schemas.microsoft.com/office/drawing/2014/main" id="{B5F89D43-1E92-4BA7-86E6-AA4E1A1FE6FC}"/>
+                <a16:creationId xmlns:a16="http://schemas.microsoft.com/office/drawing/2014/main" id="{5341B959-9D7C-412F-B01B-4DF46351C20E}"/>
               </a:ext>
             </a:extLst>
           </p:cNvPr>
@@ -24024,7 +24024,7 @@
           <p:cNvPr id="50" name="">
             <a:extLst xmlns:a="http://schemas.openxmlformats.org/drawingml/2006/main">
               <a:ext uri="{FF2B5EF4-FFF2-40B4-BE49-F238E27FC236}">
-                <a16:creationId xmlns:a16="http://schemas.microsoft.com/office/drawing/2014/main" id="{A5A26CBD-BCD8-4E4D-A793-C3F9B2033769}"/>
+                <a16:creationId xmlns:a16="http://schemas.microsoft.com/office/drawing/2014/main" id="{E5242FE5-97BB-4DF0-BA52-5E808D850977}"/>
               </a:ext>
             </a:extLst>
           </p:cNvPr>
@@ -24057,7 +24057,7 @@
           <p:cNvPr id="51" name="">
             <a:extLst xmlns:a="http://schemas.openxmlformats.org/drawingml/2006/main">
               <a:ext uri="{FF2B5EF4-FFF2-40B4-BE49-F238E27FC236}">
-                <a16:creationId xmlns:a16="http://schemas.microsoft.com/office/drawing/2014/main" id="{08578076-8D94-462D-A178-ADDD93AF53E6}"/>
+                <a16:creationId xmlns:a16="http://schemas.microsoft.com/office/drawing/2014/main" id="{2170B2F3-9824-4707-AC16-267B6ED35B2A}"/>
               </a:ext>
             </a:extLst>
           </p:cNvPr>
@@ -24090,7 +24090,7 @@
           <p:cNvPr id="52" name="">
             <a:extLst xmlns:a="http://schemas.openxmlformats.org/drawingml/2006/main">
               <a:ext uri="{FF2B5EF4-FFF2-40B4-BE49-F238E27FC236}">
-                <a16:creationId xmlns:a16="http://schemas.microsoft.com/office/drawing/2014/main" id="{E67668C4-ED87-49CF-B338-EAA68BCE0B6D}"/>
+                <a16:creationId xmlns:a16="http://schemas.microsoft.com/office/drawing/2014/main" id="{CE4864ED-3D72-4CEA-9135-A29687931988}"/>
               </a:ext>
             </a:extLst>
           </p:cNvPr>
@@ -24123,7 +24123,7 @@
           <p:cNvPr id="53" name="">
             <a:extLst xmlns:a="http://schemas.openxmlformats.org/drawingml/2006/main">
               <a:ext uri="{FF2B5EF4-FFF2-40B4-BE49-F238E27FC236}">
-                <a16:creationId xmlns:a16="http://schemas.microsoft.com/office/drawing/2014/main" id="{7C7D70C6-81D1-489B-ABF7-85A04F895225}"/>
+                <a16:creationId xmlns:a16="http://schemas.microsoft.com/office/drawing/2014/main" id="{106DB54A-77BB-4CB1-8A75-A2F02420CA61}"/>
               </a:ext>
             </a:extLst>
           </p:cNvPr>
@@ -24156,7 +24156,7 @@
           <p:cNvPr id="54" name="">
             <a:extLst xmlns:a="http://schemas.openxmlformats.org/drawingml/2006/main">
               <a:ext uri="{FF2B5EF4-FFF2-40B4-BE49-F238E27FC236}">
-                <a16:creationId xmlns:a16="http://schemas.microsoft.com/office/drawing/2014/main" id="{AB76EA20-8EEF-434D-BD48-943C74399B1F}"/>
+                <a16:creationId xmlns:a16="http://schemas.microsoft.com/office/drawing/2014/main" id="{241B6FD3-252C-41C7-8B11-8D84A413920F}"/>
               </a:ext>
             </a:extLst>
           </p:cNvPr>
@@ -24189,7 +24189,7 @@
           <p:cNvPr id="55" name="">
             <a:extLst xmlns:a="http://schemas.openxmlformats.org/drawingml/2006/main">
               <a:ext uri="{FF2B5EF4-FFF2-40B4-BE49-F238E27FC236}">
-                <a16:creationId xmlns:a16="http://schemas.microsoft.com/office/drawing/2014/main" id="{F6E92F53-E72F-49DA-9109-83FC8D2C2CD9}"/>
+                <a16:creationId xmlns:a16="http://schemas.microsoft.com/office/drawing/2014/main" id="{FDFFD258-80AE-42EF-A480-12F80C64477C}"/>
               </a:ext>
             </a:extLst>
           </p:cNvPr>
@@ -24222,7 +24222,7 @@
           <p:cNvPr id="56" name="">
             <a:extLst xmlns:a="http://schemas.openxmlformats.org/drawingml/2006/main">
               <a:ext uri="{FF2B5EF4-FFF2-40B4-BE49-F238E27FC236}">
-                <a16:creationId xmlns:a16="http://schemas.microsoft.com/office/drawing/2014/main" id="{FF4FDCBD-8C7A-4BFD-9489-9A8326268AE3}"/>
+                <a16:creationId xmlns:a16="http://schemas.microsoft.com/office/drawing/2014/main" id="{31B99BBC-5543-40EE-A0C7-387E1A49904A}"/>
               </a:ext>
             </a:extLst>
           </p:cNvPr>
@@ -24255,7 +24255,7 @@
           <p:cNvPr id="57" name="">
             <a:extLst xmlns:a="http://schemas.openxmlformats.org/drawingml/2006/main">
               <a:ext uri="{FF2B5EF4-FFF2-40B4-BE49-F238E27FC236}">
-                <a16:creationId xmlns:a16="http://schemas.microsoft.com/office/drawing/2014/main" id="{B36468BE-A4C6-41A2-B5D8-D56B5C4B3D61}"/>
+                <a16:creationId xmlns:a16="http://schemas.microsoft.com/office/drawing/2014/main" id="{016CFC00-51E2-4C1A-BCDB-A4FBE3986A3B}"/>
               </a:ext>
             </a:extLst>
           </p:cNvPr>
@@ -24288,7 +24288,7 @@
           <p:cNvPr id="58" name="">
             <a:extLst xmlns:a="http://schemas.openxmlformats.org/drawingml/2006/main">
               <a:ext uri="{FF2B5EF4-FFF2-40B4-BE49-F238E27FC236}">
-                <a16:creationId xmlns:a16="http://schemas.microsoft.com/office/drawing/2014/main" id="{0373E97F-518C-4023-88E7-30BF2038132A}"/>
+                <a16:creationId xmlns:a16="http://schemas.microsoft.com/office/drawing/2014/main" id="{2AB46032-822C-4AA6-8BA4-B73E6C291614}"/>
               </a:ext>
             </a:extLst>
           </p:cNvPr>
@@ -24321,7 +24321,7 @@
           <p:cNvPr id="59" name="">
             <a:extLst xmlns:a="http://schemas.openxmlformats.org/drawingml/2006/main">
               <a:ext uri="{FF2B5EF4-FFF2-40B4-BE49-F238E27FC236}">
-                <a16:creationId xmlns:a16="http://schemas.microsoft.com/office/drawing/2014/main" id="{78183C9F-2EB7-47DB-B4A4-8E5BD5147A41}"/>
+                <a16:creationId xmlns:a16="http://schemas.microsoft.com/office/drawing/2014/main" id="{C3D408FF-EA94-4D0C-9360-0DFBF45885E4}"/>
               </a:ext>
             </a:extLst>
           </p:cNvPr>
@@ -24354,7 +24354,7 @@
           <p:cNvPr id="60" name="">
             <a:extLst xmlns:a="http://schemas.openxmlformats.org/drawingml/2006/main">
               <a:ext uri="{FF2B5EF4-FFF2-40B4-BE49-F238E27FC236}">
-                <a16:creationId xmlns:a16="http://schemas.microsoft.com/office/drawing/2014/main" id="{E07ADAB2-1996-4306-8ECA-11319677A889}"/>
+                <a16:creationId xmlns:a16="http://schemas.microsoft.com/office/drawing/2014/main" id="{993DB949-21A2-4CD5-A4AC-D7281C57DCBA}"/>
               </a:ext>
             </a:extLst>
           </p:cNvPr>
@@ -24387,7 +24387,7 @@
           <p:cNvPr id="61" name="">
             <a:extLst xmlns:a="http://schemas.openxmlformats.org/drawingml/2006/main">
               <a:ext uri="{FF2B5EF4-FFF2-40B4-BE49-F238E27FC236}">
-                <a16:creationId xmlns:a16="http://schemas.microsoft.com/office/drawing/2014/main" id="{EE8D2965-0464-4EC5-8EE2-E794CB288849}"/>
+                <a16:creationId xmlns:a16="http://schemas.microsoft.com/office/drawing/2014/main" id="{DF0F503F-3F06-43FF-AEBD-D4B7B4FCB081}"/>
               </a:ext>
             </a:extLst>
           </p:cNvPr>
@@ -24420,7 +24420,7 @@
           <p:cNvPr id="62" name="">
             <a:extLst xmlns:a="http://schemas.openxmlformats.org/drawingml/2006/main">
               <a:ext uri="{FF2B5EF4-FFF2-40B4-BE49-F238E27FC236}">
-                <a16:creationId xmlns:a16="http://schemas.microsoft.com/office/drawing/2014/main" id="{6498D991-C9E4-44D2-8040-9AD1C6C36BD4}"/>
+                <a16:creationId xmlns:a16="http://schemas.microsoft.com/office/drawing/2014/main" id="{66420776-F5C3-4ECB-B895-CC58D189F200}"/>
               </a:ext>
             </a:extLst>
           </p:cNvPr>
@@ -24453,7 +24453,7 @@
           <p:cNvPr id="63" name="">
             <a:extLst xmlns:a="http://schemas.openxmlformats.org/drawingml/2006/main">
               <a:ext uri="{FF2B5EF4-FFF2-40B4-BE49-F238E27FC236}">
-                <a16:creationId xmlns:a16="http://schemas.microsoft.com/office/drawing/2014/main" id="{A9FEAE77-FADC-43B3-B7F3-B39879805AA8}"/>
+                <a16:creationId xmlns:a16="http://schemas.microsoft.com/office/drawing/2014/main" id="{5CA20287-B5CB-4133-AE27-02C3C142D82B}"/>
               </a:ext>
             </a:extLst>
           </p:cNvPr>
@@ -24486,7 +24486,7 @@
           <p:cNvPr id="64" name="">
             <a:extLst xmlns:a="http://schemas.openxmlformats.org/drawingml/2006/main">
               <a:ext uri="{FF2B5EF4-FFF2-40B4-BE49-F238E27FC236}">
-                <a16:creationId xmlns:a16="http://schemas.microsoft.com/office/drawing/2014/main" id="{54701EEE-CC0E-46FE-B832-3BBA4CDA8CA9}"/>
+                <a16:creationId xmlns:a16="http://schemas.microsoft.com/office/drawing/2014/main" id="{05CCAB88-0197-42CD-B2E4-ADD5A0457642}"/>
               </a:ext>
             </a:extLst>
           </p:cNvPr>
@@ -24519,7 +24519,7 @@
           <p:cNvPr id="65" name="">
             <a:extLst xmlns:a="http://schemas.openxmlformats.org/drawingml/2006/main">
               <a:ext uri="{FF2B5EF4-FFF2-40B4-BE49-F238E27FC236}">
-                <a16:creationId xmlns:a16="http://schemas.microsoft.com/office/drawing/2014/main" id="{6F73011C-F4C6-473A-B6E0-4C5FFF8E5A98}"/>
+                <a16:creationId xmlns:a16="http://schemas.microsoft.com/office/drawing/2014/main" id="{F65C3A42-6270-4EF1-A094-FA1AD476C7AB}"/>
               </a:ext>
             </a:extLst>
           </p:cNvPr>
@@ -24552,7 +24552,7 @@
           <p:cNvPr id="66" name="">
             <a:extLst xmlns:a="http://schemas.openxmlformats.org/drawingml/2006/main">
               <a:ext uri="{FF2B5EF4-FFF2-40B4-BE49-F238E27FC236}">
-                <a16:creationId xmlns:a16="http://schemas.microsoft.com/office/drawing/2014/main" id="{F9196E89-0E73-47CB-AD17-41ACC622BF3C}"/>
+                <a16:creationId xmlns:a16="http://schemas.microsoft.com/office/drawing/2014/main" id="{C7E607ED-15FB-4832-9E05-9DA94921EC00}"/>
               </a:ext>
             </a:extLst>
           </p:cNvPr>
@@ -24585,7 +24585,7 @@
           <p:cNvPr id="67" name="">
             <a:extLst xmlns:a="http://schemas.openxmlformats.org/drawingml/2006/main">
               <a:ext uri="{FF2B5EF4-FFF2-40B4-BE49-F238E27FC236}">
-                <a16:creationId xmlns:a16="http://schemas.microsoft.com/office/drawing/2014/main" id="{5DBCBE0A-D1CA-4990-9EFB-F8D1CDE90B21}"/>
+                <a16:creationId xmlns:a16="http://schemas.microsoft.com/office/drawing/2014/main" id="{D89D7FFC-6FD4-42C4-BDF5-DC652F822C51}"/>
               </a:ext>
             </a:extLst>
           </p:cNvPr>
@@ -24618,7 +24618,7 @@
           <p:cNvPr id="68" name="">
             <a:extLst xmlns:a="http://schemas.openxmlformats.org/drawingml/2006/main">
               <a:ext uri="{FF2B5EF4-FFF2-40B4-BE49-F238E27FC236}">
-                <a16:creationId xmlns:a16="http://schemas.microsoft.com/office/drawing/2014/main" id="{377CCD60-A931-4DEA-B8F8-50312C79E08D}"/>
+                <a16:creationId xmlns:a16="http://schemas.microsoft.com/office/drawing/2014/main" id="{5FE1AE39-B936-4A2F-A114-FFACA33D1E3B}"/>
               </a:ext>
             </a:extLst>
           </p:cNvPr>
@@ -24680,7 +24680,7 @@
           <p:cNvPr id="69" name="">
             <a:extLst xmlns:a="http://schemas.openxmlformats.org/drawingml/2006/main">
               <a:ext uri="{FF2B5EF4-FFF2-40B4-BE49-F238E27FC236}">
-                <a16:creationId xmlns:a16="http://schemas.microsoft.com/office/drawing/2014/main" id="{AEF7250D-77DE-47CE-8E75-A994E99FADFC}"/>
+                <a16:creationId xmlns:a16="http://schemas.microsoft.com/office/drawing/2014/main" id="{071F38A4-2CE1-4FB1-A9F6-2002FE9CE032}"/>
               </a:ext>
             </a:extLst>
           </p:cNvPr>
@@ -24742,7 +24742,7 @@
           <p:cNvPr id="70" name="">
             <a:extLst xmlns:a="http://schemas.openxmlformats.org/drawingml/2006/main">
               <a:ext uri="{FF2B5EF4-FFF2-40B4-BE49-F238E27FC236}">
-                <a16:creationId xmlns:a16="http://schemas.microsoft.com/office/drawing/2014/main" id="{8E039FD4-B278-4B79-B2CA-0027E360ED0F}"/>
+                <a16:creationId xmlns:a16="http://schemas.microsoft.com/office/drawing/2014/main" id="{31E57503-35F0-4E54-BE27-8EB956CE1B7E}"/>
               </a:ext>
             </a:extLst>
           </p:cNvPr>
@@ -24804,7 +24804,7 @@
           <p:cNvPr id="71" name="">
             <a:extLst xmlns:a="http://schemas.openxmlformats.org/drawingml/2006/main">
               <a:ext uri="{FF2B5EF4-FFF2-40B4-BE49-F238E27FC236}">
-                <a16:creationId xmlns:a16="http://schemas.microsoft.com/office/drawing/2014/main" id="{BD04D7D2-7610-41FB-BDC0-907F4057F90C}"/>
+                <a16:creationId xmlns:a16="http://schemas.microsoft.com/office/drawing/2014/main" id="{0E110109-F548-485D-B60E-B15FD7207BD4}"/>
               </a:ext>
             </a:extLst>
           </p:cNvPr>
@@ -24845,7 +24845,7 @@
           <p:cNvPr id="72" name="">
             <a:extLst xmlns:a="http://schemas.openxmlformats.org/drawingml/2006/main">
               <a:ext uri="{FF2B5EF4-FFF2-40B4-BE49-F238E27FC236}">
-                <a16:creationId xmlns:a16="http://schemas.microsoft.com/office/drawing/2014/main" id="{0B32E2A9-B471-44AF-A7CE-997B2F9A3055}"/>
+                <a16:creationId xmlns:a16="http://schemas.microsoft.com/office/drawing/2014/main" id="{411A7D59-DE29-47C2-A427-ADDAD158B6EA}"/>
               </a:ext>
             </a:extLst>
           </p:cNvPr>
@@ -24907,7 +24907,7 @@
           <p:cNvPr id="73" name="">
             <a:extLst xmlns:a="http://schemas.openxmlformats.org/drawingml/2006/main">
               <a:ext uri="{FF2B5EF4-FFF2-40B4-BE49-F238E27FC236}">
-                <a16:creationId xmlns:a16="http://schemas.microsoft.com/office/drawing/2014/main" id="{666429EF-0AAB-4B0D-A231-FD1F80B24E83}"/>
+                <a16:creationId xmlns:a16="http://schemas.microsoft.com/office/drawing/2014/main" id="{DAA689EE-98CB-48BF-B251-621601895B38}"/>
               </a:ext>
             </a:extLst>
           </p:cNvPr>
@@ -24996,7 +24996,7 @@
           <p:cNvPr id="74" name="">
             <a:extLst xmlns:a="http://schemas.openxmlformats.org/drawingml/2006/main">
               <a:ext uri="{FF2B5EF4-FFF2-40B4-BE49-F238E27FC236}">
-                <a16:creationId xmlns:a16="http://schemas.microsoft.com/office/drawing/2014/main" id="{3B27EC92-20CD-46C1-BD17-F9623545AA0F}"/>
+                <a16:creationId xmlns:a16="http://schemas.microsoft.com/office/drawing/2014/main" id="{A88E73B0-6EBC-480E-956B-1FB7B6A5F82C}"/>
               </a:ext>
             </a:extLst>
           </p:cNvPr>
@@ -25037,7 +25037,7 @@
           <p:cNvPr id="75" name="">
             <a:extLst xmlns:a="http://schemas.openxmlformats.org/drawingml/2006/main">
               <a:ext uri="{FF2B5EF4-FFF2-40B4-BE49-F238E27FC236}">
-                <a16:creationId xmlns:a16="http://schemas.microsoft.com/office/drawing/2014/main" id="{979F1263-5FFD-4E4D-BA18-07B24000B99D}"/>
+                <a16:creationId xmlns:a16="http://schemas.microsoft.com/office/drawing/2014/main" id="{404373C6-EE09-430A-AD3C-6C5B304D7317}"/>
               </a:ext>
             </a:extLst>
           </p:cNvPr>
@@ -25099,7 +25099,7 @@
           <p:cNvPr id="76" name="">
             <a:extLst xmlns:a="http://schemas.openxmlformats.org/drawingml/2006/main">
               <a:ext uri="{FF2B5EF4-FFF2-40B4-BE49-F238E27FC236}">
-                <a16:creationId xmlns:a16="http://schemas.microsoft.com/office/drawing/2014/main" id="{2CD21C18-AFBB-4559-9250-B614D84E004E}"/>
+                <a16:creationId xmlns:a16="http://schemas.microsoft.com/office/drawing/2014/main" id="{F6CA220E-0E23-499E-8A49-81E522E87ED6}"/>
               </a:ext>
             </a:extLst>
           </p:cNvPr>
@@ -25188,7 +25188,7 @@
           <p:cNvPr id="77" name="">
             <a:extLst xmlns:a="http://schemas.openxmlformats.org/drawingml/2006/main">
               <a:ext uri="{FF2B5EF4-FFF2-40B4-BE49-F238E27FC236}">
-                <a16:creationId xmlns:a16="http://schemas.microsoft.com/office/drawing/2014/main" id="{BAEA9C8D-DE70-4648-8011-DECCEFBDEDCF}"/>
+                <a16:creationId xmlns:a16="http://schemas.microsoft.com/office/drawing/2014/main" id="{B8AB6F2B-5F2F-4CC8-8AC1-FBB9B47CBF0F}"/>
               </a:ext>
             </a:extLst>
           </p:cNvPr>
@@ -25229,7 +25229,7 @@
           <p:cNvPr id="78" name="">
             <a:extLst xmlns:a="http://schemas.openxmlformats.org/drawingml/2006/main">
               <a:ext uri="{FF2B5EF4-FFF2-40B4-BE49-F238E27FC236}">
-                <a16:creationId xmlns:a16="http://schemas.microsoft.com/office/drawing/2014/main" id="{6B2A04D7-0CA6-4A0E-B523-67330B493272}"/>
+                <a16:creationId xmlns:a16="http://schemas.microsoft.com/office/drawing/2014/main" id="{994F428F-5EF4-4AFD-8370-1262E7289C62}"/>
               </a:ext>
             </a:extLst>
           </p:cNvPr>
@@ -25291,7 +25291,7 @@
           <p:cNvPr id="79" name="">
             <a:extLst xmlns:a="http://schemas.openxmlformats.org/drawingml/2006/main">
               <a:ext uri="{FF2B5EF4-FFF2-40B4-BE49-F238E27FC236}">
-                <a16:creationId xmlns:a16="http://schemas.microsoft.com/office/drawing/2014/main" id="{52BFDD11-1F93-4E74-8141-E418F47EEC1F}"/>
+                <a16:creationId xmlns:a16="http://schemas.microsoft.com/office/drawing/2014/main" id="{F1B73E40-91F0-46F2-A337-16B98B4C734B}"/>
               </a:ext>
             </a:extLst>
           </p:cNvPr>
@@ -25380,7 +25380,7 @@
           <p:cNvPr id="80" name="">
             <a:extLst xmlns:a="http://schemas.openxmlformats.org/drawingml/2006/main">
               <a:ext uri="{FF2B5EF4-FFF2-40B4-BE49-F238E27FC236}">
-                <a16:creationId xmlns:a16="http://schemas.microsoft.com/office/drawing/2014/main" id="{3BAAC8DF-951B-4D22-8B03-55F589A68683}"/>
+                <a16:creationId xmlns:a16="http://schemas.microsoft.com/office/drawing/2014/main" id="{C7A7D05C-04ED-4F94-9BBB-8551E40CFD11}"/>
               </a:ext>
             </a:extLst>
           </p:cNvPr>
@@ -25421,7 +25421,7 @@
           <p:cNvPr id="81" name="">
             <a:extLst xmlns:a="http://schemas.openxmlformats.org/drawingml/2006/main">
               <a:ext uri="{FF2B5EF4-FFF2-40B4-BE49-F238E27FC236}">
-                <a16:creationId xmlns:a16="http://schemas.microsoft.com/office/drawing/2014/main" id="{16893DE9-B470-4529-A3E4-8C17C109F21A}"/>
+                <a16:creationId xmlns:a16="http://schemas.microsoft.com/office/drawing/2014/main" id="{D933B001-2BFB-4767-BE1D-B0D94E06AC6C}"/>
               </a:ext>
             </a:extLst>
           </p:cNvPr>
@@ -25483,7 +25483,7 @@
           <p:cNvPr id="82" name="">
             <a:extLst xmlns:a="http://schemas.openxmlformats.org/drawingml/2006/main">
               <a:ext uri="{FF2B5EF4-FFF2-40B4-BE49-F238E27FC236}">
-                <a16:creationId xmlns:a16="http://schemas.microsoft.com/office/drawing/2014/main" id="{C5BDD9A1-8BBF-4BEB-855C-CFD3E260FBD1}"/>
+                <a16:creationId xmlns:a16="http://schemas.microsoft.com/office/drawing/2014/main" id="{ED842526-87E4-4260-BF77-06B6AC500762}"/>
               </a:ext>
             </a:extLst>
           </p:cNvPr>
@@ -25572,7 +25572,7 @@
           <p:cNvPr id="83" name="">
             <a:extLst xmlns:a="http://schemas.openxmlformats.org/drawingml/2006/main">
               <a:ext uri="{FF2B5EF4-FFF2-40B4-BE49-F238E27FC236}">
-                <a16:creationId xmlns:a16="http://schemas.microsoft.com/office/drawing/2014/main" id="{E45096D8-14D9-4BAF-982C-812F29E5F095}"/>
+                <a16:creationId xmlns:a16="http://schemas.microsoft.com/office/drawing/2014/main" id="{409E8F74-0AB8-485D-B7CC-9E18AEACBAC2}"/>
               </a:ext>
             </a:extLst>
           </p:cNvPr>
@@ -25705,7 +25705,7 @@
           <p:cNvPr id="88" name="">
             <a:extLst xmlns:a="http://schemas.openxmlformats.org/drawingml/2006/main">
               <a:ext uri="{FF2B5EF4-FFF2-40B4-BE49-F238E27FC236}">
-                <a16:creationId xmlns:a16="http://schemas.microsoft.com/office/drawing/2014/main" id="{DCFED410-5040-4E49-9DCD-95BCAA283A9D}"/>
+                <a16:creationId xmlns:a16="http://schemas.microsoft.com/office/drawing/2014/main" id="{0373447F-8924-49B6-8ED9-7B72C239A814}"/>
               </a:ext>
             </a:extLst>
           </p:cNvPr>
@@ -25767,7 +25767,7 @@
           <p:cNvPr id="89" name="">
             <a:extLst xmlns:a="http://schemas.openxmlformats.org/drawingml/2006/main">
               <a:ext uri="{FF2B5EF4-FFF2-40B4-BE49-F238E27FC236}">
-                <a16:creationId xmlns:a16="http://schemas.microsoft.com/office/drawing/2014/main" id="{92FFA2CA-4255-4A92-A8C4-64B0CABD9784}"/>
+                <a16:creationId xmlns:a16="http://schemas.microsoft.com/office/drawing/2014/main" id="{660A9707-BF08-420F-8A6F-EB0D1FCF4DF2}"/>
               </a:ext>
             </a:extLst>
           </p:cNvPr>
@@ -25798,7 +25798,7 @@
           <p:cNvPr id="90" name="">
             <a:extLst xmlns:a="http://schemas.openxmlformats.org/drawingml/2006/main">
               <a:ext uri="{FF2B5EF4-FFF2-40B4-BE49-F238E27FC236}">
-                <a16:creationId xmlns:a16="http://schemas.microsoft.com/office/drawing/2014/main" id="{703DEFDC-BF18-4538-98B0-788848271B5C}"/>
+                <a16:creationId xmlns:a16="http://schemas.microsoft.com/office/drawing/2014/main" id="{32207F0C-6FB5-4F06-9E7F-A37C23E8D0A9}"/>
               </a:ext>
             </a:extLst>
           </p:cNvPr>
@@ -25860,7 +25860,7 @@
           <p:cNvPr id="91" name="">
             <a:extLst xmlns:a="http://schemas.openxmlformats.org/drawingml/2006/main">
               <a:ext uri="{FF2B5EF4-FFF2-40B4-BE49-F238E27FC236}">
-                <a16:creationId xmlns:a16="http://schemas.microsoft.com/office/drawing/2014/main" id="{1563B3C9-5545-4319-AE76-1C45B962946D}"/>
+                <a16:creationId xmlns:a16="http://schemas.microsoft.com/office/drawing/2014/main" id="{3D59F2D3-E4B7-4733-875C-9E5D05767DA4}"/>
               </a:ext>
             </a:extLst>
           </p:cNvPr>
@@ -25920,7 +25920,7 @@
     </p:spTree>
     <p:extLst>
       <p:ext uri="{BB962C8B-B14F-4D97-AF65-F5344CB8AC3E}">
-        <p14:creationId xmlns:p14="http://schemas.microsoft.com/office/powerpoint/2010/main" val="1111062810"/>
+        <p14:creationId xmlns:p14="http://schemas.microsoft.com/office/powerpoint/2010/main" val="384166542"/>
       </p:ext>
     </p:extLst>
   </p:cSld>
@@ -25951,7 +25951,7 @@
           <p:cNvPr id="1" name="">
             <a:extLst xmlns:a="http://schemas.openxmlformats.org/drawingml/2006/main">
               <a:ext uri="{FF2B5EF4-FFF2-40B4-BE49-F238E27FC236}">
-                <a16:creationId xmlns:a16="http://schemas.microsoft.com/office/drawing/2014/main" id="{85A8A5C2-57D4-44C2-8919-EA250F8E3EDD}"/>
+                <a16:creationId xmlns:a16="http://schemas.microsoft.com/office/drawing/2014/main" id="{52D75466-9AE6-4951-948D-D8B8BF5009C6}"/>
               </a:ext>
             </a:extLst>
           </p:cNvPr>
@@ -26013,7 +26013,7 @@
           <p:cNvPr id="2" name="">
             <a:extLst xmlns:a="http://schemas.openxmlformats.org/drawingml/2006/main">
               <a:ext uri="{FF2B5EF4-FFF2-40B4-BE49-F238E27FC236}">
-                <a16:creationId xmlns:a16="http://schemas.microsoft.com/office/drawing/2014/main" id="{45D9A0DC-4F7B-4FCF-9F75-094E8D2A7066}"/>
+                <a16:creationId xmlns:a16="http://schemas.microsoft.com/office/drawing/2014/main" id="{D2E632F2-56E9-4DC5-BD7A-581C47ECE42A}"/>
               </a:ext>
             </a:extLst>
           </p:cNvPr>
@@ -26075,7 +26075,7 @@
           <p:cNvPr id="3" name="">
             <a:extLst xmlns:a="http://schemas.openxmlformats.org/drawingml/2006/main">
               <a:ext uri="{FF2B5EF4-FFF2-40B4-BE49-F238E27FC236}">
-                <a16:creationId xmlns:a16="http://schemas.microsoft.com/office/drawing/2014/main" id="{A52FFDEA-5939-4B45-B3E4-77044B931BD3}"/>
+                <a16:creationId xmlns:a16="http://schemas.microsoft.com/office/drawing/2014/main" id="{4B4E7CE7-0EB8-4E54-8888-CFD7200AA6BF}"/>
               </a:ext>
             </a:extLst>
           </p:cNvPr>
@@ -26137,7 +26137,7 @@
           <p:cNvPr id="4" name="">
             <a:extLst xmlns:a="http://schemas.openxmlformats.org/drawingml/2006/main">
               <a:ext uri="{FF2B5EF4-FFF2-40B4-BE49-F238E27FC236}">
-                <a16:creationId xmlns:a16="http://schemas.microsoft.com/office/drawing/2014/main" id="{7963E370-E56F-46C8-859D-CA2F9089DD6A}"/>
+                <a16:creationId xmlns:a16="http://schemas.microsoft.com/office/drawing/2014/main" id="{C5C6E0C7-CD7C-4AB4-B397-D97467ABE563}"/>
               </a:ext>
             </a:extLst>
           </p:cNvPr>
@@ -26199,7 +26199,7 @@
           <p:cNvPr id="5" name="">
             <a:extLst xmlns:a="http://schemas.openxmlformats.org/drawingml/2006/main">
               <a:ext uri="{FF2B5EF4-FFF2-40B4-BE49-F238E27FC236}">
-                <a16:creationId xmlns:a16="http://schemas.microsoft.com/office/drawing/2014/main" id="{87294EF0-BB66-48F0-AB95-ADD34B6A07CE}"/>
+                <a16:creationId xmlns:a16="http://schemas.microsoft.com/office/drawing/2014/main" id="{B3E05A6D-E68C-48B7-B313-21B67FDBD687}"/>
               </a:ext>
             </a:extLst>
           </p:cNvPr>
@@ -26261,7 +26261,7 @@
           <p:cNvPr id="6" name="">
             <a:extLst xmlns:a="http://schemas.openxmlformats.org/drawingml/2006/main">
               <a:ext uri="{FF2B5EF4-FFF2-40B4-BE49-F238E27FC236}">
-                <a16:creationId xmlns:a16="http://schemas.microsoft.com/office/drawing/2014/main" id="{EB3F16B2-D128-4A83-B08A-6048AE64BF7F}"/>
+                <a16:creationId xmlns:a16="http://schemas.microsoft.com/office/drawing/2014/main" id="{99B64A82-4FC4-49B2-9B2F-6E002EB2EF5B}"/>
               </a:ext>
             </a:extLst>
           </p:cNvPr>
@@ -26323,7 +26323,7 @@
           <p:cNvPr id="7" name="">
             <a:extLst xmlns:a="http://schemas.openxmlformats.org/drawingml/2006/main">
               <a:ext uri="{FF2B5EF4-FFF2-40B4-BE49-F238E27FC236}">
-                <a16:creationId xmlns:a16="http://schemas.microsoft.com/office/drawing/2014/main" id="{53CAAB2F-A397-4486-A724-755203186B2F}"/>
+                <a16:creationId xmlns:a16="http://schemas.microsoft.com/office/drawing/2014/main" id="{26F6BAE3-E1AF-4F92-9D7D-B94E81F1D452}"/>
               </a:ext>
             </a:extLst>
           </p:cNvPr>
@@ -26385,7 +26385,7 @@
           <p:cNvPr id="8" name="">
             <a:extLst xmlns:a="http://schemas.openxmlformats.org/drawingml/2006/main">
               <a:ext uri="{FF2B5EF4-FFF2-40B4-BE49-F238E27FC236}">
-                <a16:creationId xmlns:a16="http://schemas.microsoft.com/office/drawing/2014/main" id="{37CB29E8-5FBD-4695-AC2F-88C849135297}"/>
+                <a16:creationId xmlns:a16="http://schemas.microsoft.com/office/drawing/2014/main" id="{48BCB8C5-FA14-4079-8264-6B74274F38A0}"/>
               </a:ext>
             </a:extLst>
           </p:cNvPr>
@@ -26447,7 +26447,7 @@
           <p:cNvPr id="9" name="">
             <a:extLst xmlns:a="http://schemas.openxmlformats.org/drawingml/2006/main">
               <a:ext uri="{FF2B5EF4-FFF2-40B4-BE49-F238E27FC236}">
-                <a16:creationId xmlns:a16="http://schemas.microsoft.com/office/drawing/2014/main" id="{68FAF4CF-F844-4C29-A51D-B8712A03D592}"/>
+                <a16:creationId xmlns:a16="http://schemas.microsoft.com/office/drawing/2014/main" id="{AC4923F1-30EC-476E-BCCC-1B1FB096297D}"/>
               </a:ext>
             </a:extLst>
           </p:cNvPr>
@@ -26509,7 +26509,7 @@
           <p:cNvPr id="10" name="">
             <a:extLst xmlns:a="http://schemas.openxmlformats.org/drawingml/2006/main">
               <a:ext uri="{FF2B5EF4-FFF2-40B4-BE49-F238E27FC236}">
-                <a16:creationId xmlns:a16="http://schemas.microsoft.com/office/drawing/2014/main" id="{F5C47A13-F5A9-4079-8D86-DDC864110BA5}"/>
+                <a16:creationId xmlns:a16="http://schemas.microsoft.com/office/drawing/2014/main" id="{59EF3873-F8CE-44DF-B09F-362207A39C7E}"/>
               </a:ext>
             </a:extLst>
           </p:cNvPr>
@@ -26571,7 +26571,7 @@
           <p:cNvPr id="11" name="">
             <a:extLst xmlns:a="http://schemas.openxmlformats.org/drawingml/2006/main">
               <a:ext uri="{FF2B5EF4-FFF2-40B4-BE49-F238E27FC236}">
-                <a16:creationId xmlns:a16="http://schemas.microsoft.com/office/drawing/2014/main" id="{4ACA5A69-AC38-412B-A791-FA9401CB00C3}"/>
+                <a16:creationId xmlns:a16="http://schemas.microsoft.com/office/drawing/2014/main" id="{E25145F7-DC7F-47FC-8161-472FEC1F4186}"/>
               </a:ext>
             </a:extLst>
           </p:cNvPr>
@@ -26633,7 +26633,7 @@
           <p:cNvPr id="12" name="">
             <a:extLst xmlns:a="http://schemas.openxmlformats.org/drawingml/2006/main">
               <a:ext uri="{FF2B5EF4-FFF2-40B4-BE49-F238E27FC236}">
-                <a16:creationId xmlns:a16="http://schemas.microsoft.com/office/drawing/2014/main" id="{739E3100-65AE-471D-8864-0D0474CD56CF}"/>
+                <a16:creationId xmlns:a16="http://schemas.microsoft.com/office/drawing/2014/main" id="{01B32172-865E-4C5F-95EE-E58433050ADF}"/>
               </a:ext>
             </a:extLst>
           </p:cNvPr>
@@ -26695,7 +26695,7 @@
           <p:cNvPr id="13" name="">
             <a:extLst xmlns:a="http://schemas.openxmlformats.org/drawingml/2006/main">
               <a:ext uri="{FF2B5EF4-FFF2-40B4-BE49-F238E27FC236}">
-                <a16:creationId xmlns:a16="http://schemas.microsoft.com/office/drawing/2014/main" id="{89F80237-35CE-4F54-8582-3D1584F02340}"/>
+                <a16:creationId xmlns:a16="http://schemas.microsoft.com/office/drawing/2014/main" id="{B0A4615F-0E63-4166-A039-FEEDD89206EB}"/>
               </a:ext>
             </a:extLst>
           </p:cNvPr>
@@ -26757,7 +26757,7 @@
           <p:cNvPr id="14" name="">
             <a:extLst xmlns:a="http://schemas.openxmlformats.org/drawingml/2006/main">
               <a:ext uri="{FF2B5EF4-FFF2-40B4-BE49-F238E27FC236}">
-                <a16:creationId xmlns:a16="http://schemas.microsoft.com/office/drawing/2014/main" id="{C248446C-375F-4AB3-BC54-9080B12BAE08}"/>
+                <a16:creationId xmlns:a16="http://schemas.microsoft.com/office/drawing/2014/main" id="{9A8C1527-6EBC-460F-845C-617A2D6B70DB}"/>
               </a:ext>
             </a:extLst>
           </p:cNvPr>
@@ -26819,7 +26819,7 @@
           <p:cNvPr id="15" name="">
             <a:extLst xmlns:a="http://schemas.openxmlformats.org/drawingml/2006/main">
               <a:ext uri="{FF2B5EF4-FFF2-40B4-BE49-F238E27FC236}">
-                <a16:creationId xmlns:a16="http://schemas.microsoft.com/office/drawing/2014/main" id="{6121C657-1452-495F-832E-3B0005CD8A90}"/>
+                <a16:creationId xmlns:a16="http://schemas.microsoft.com/office/drawing/2014/main" id="{79364C0E-0B1E-4F40-8B93-F1369D2CA2E0}"/>
               </a:ext>
             </a:extLst>
           </p:cNvPr>
@@ -26881,7 +26881,7 @@
           <p:cNvPr id="16" name="">
             <a:extLst xmlns:a="http://schemas.openxmlformats.org/drawingml/2006/main">
               <a:ext uri="{FF2B5EF4-FFF2-40B4-BE49-F238E27FC236}">
-                <a16:creationId xmlns:a16="http://schemas.microsoft.com/office/drawing/2014/main" id="{2E694E7C-D7BB-407C-A334-2D30E74023C5}"/>
+                <a16:creationId xmlns:a16="http://schemas.microsoft.com/office/drawing/2014/main" id="{B69772F8-9591-4621-8617-E0D6C93CEA6B}"/>
               </a:ext>
             </a:extLst>
           </p:cNvPr>
@@ -26943,7 +26943,7 @@
           <p:cNvPr id="17" name="">
             <a:extLst xmlns:a="http://schemas.openxmlformats.org/drawingml/2006/main">
               <a:ext uri="{FF2B5EF4-FFF2-40B4-BE49-F238E27FC236}">
-                <a16:creationId xmlns:a16="http://schemas.microsoft.com/office/drawing/2014/main" id="{6CC47263-F4EB-4CDE-AD25-4182C3A5F7FF}"/>
+                <a16:creationId xmlns:a16="http://schemas.microsoft.com/office/drawing/2014/main" id="{A2AC787D-6DE6-49A7-9A59-0D056075CECB}"/>
               </a:ext>
             </a:extLst>
           </p:cNvPr>
@@ -27005,7 +27005,7 @@
           <p:cNvPr id="18" name="">
             <a:extLst xmlns:a="http://schemas.openxmlformats.org/drawingml/2006/main">
               <a:ext uri="{FF2B5EF4-FFF2-40B4-BE49-F238E27FC236}">
-                <a16:creationId xmlns:a16="http://schemas.microsoft.com/office/drawing/2014/main" id="{00E69F8D-A5EF-4A24-9E3F-A09711465844}"/>
+                <a16:creationId xmlns:a16="http://schemas.microsoft.com/office/drawing/2014/main" id="{ACCDB801-5033-48A7-B4F6-24B9BFB86CDC}"/>
               </a:ext>
             </a:extLst>
           </p:cNvPr>
@@ -27067,7 +27067,7 @@
           <p:cNvPr id="19" name="">
             <a:extLst xmlns:a="http://schemas.openxmlformats.org/drawingml/2006/main">
               <a:ext uri="{FF2B5EF4-FFF2-40B4-BE49-F238E27FC236}">
-                <a16:creationId xmlns:a16="http://schemas.microsoft.com/office/drawing/2014/main" id="{7457CA48-2EB2-40BD-AE9F-224B6AC7943D}"/>
+                <a16:creationId xmlns:a16="http://schemas.microsoft.com/office/drawing/2014/main" id="{E3979A69-988F-48E0-9972-6D2E041C312D}"/>
               </a:ext>
             </a:extLst>
           </p:cNvPr>
@@ -27108,7 +27108,7 @@
           <p:cNvPr id="20" name="">
             <a:extLst xmlns:a="http://schemas.openxmlformats.org/drawingml/2006/main">
               <a:ext uri="{FF2B5EF4-FFF2-40B4-BE49-F238E27FC236}">
-                <a16:creationId xmlns:a16="http://schemas.microsoft.com/office/drawing/2014/main" id="{83B8D53B-13A1-4853-B4FD-C69FD7CFA399}"/>
+                <a16:creationId xmlns:a16="http://schemas.microsoft.com/office/drawing/2014/main" id="{7943DA9D-38A0-4E73-A83B-3D145C7F69FC}"/>
               </a:ext>
             </a:extLst>
           </p:cNvPr>
@@ -27170,7 +27170,7 @@
           <p:cNvPr id="21" name="">
             <a:extLst xmlns:a="http://schemas.openxmlformats.org/drawingml/2006/main">
               <a:ext uri="{FF2B5EF4-FFF2-40B4-BE49-F238E27FC236}">
-                <a16:creationId xmlns:a16="http://schemas.microsoft.com/office/drawing/2014/main" id="{1BBDC9B5-82F6-4168-A36B-C09041625DE4}"/>
+                <a16:creationId xmlns:a16="http://schemas.microsoft.com/office/drawing/2014/main" id="{446FE2A6-A107-4E6B-AE72-7C8E0B3A5DFC}"/>
               </a:ext>
             </a:extLst>
           </p:cNvPr>
@@ -27232,7 +27232,7 @@
           <p:cNvPr id="22" name="">
             <a:extLst xmlns:a="http://schemas.openxmlformats.org/drawingml/2006/main">
               <a:ext uri="{FF2B5EF4-FFF2-40B4-BE49-F238E27FC236}">
-                <a16:creationId xmlns:a16="http://schemas.microsoft.com/office/drawing/2014/main" id="{9504AC4A-60A8-4EEC-BDB9-C47F9FB0CABC}"/>
+                <a16:creationId xmlns:a16="http://schemas.microsoft.com/office/drawing/2014/main" id="{B60E044C-EA7F-44B6-9C7B-05244FF3DDF2}"/>
               </a:ext>
             </a:extLst>
           </p:cNvPr>
@@ -27273,7 +27273,7 @@
           <p:cNvPr id="23" name="">
             <a:extLst xmlns:a="http://schemas.openxmlformats.org/drawingml/2006/main">
               <a:ext uri="{FF2B5EF4-FFF2-40B4-BE49-F238E27FC236}">
-                <a16:creationId xmlns:a16="http://schemas.microsoft.com/office/drawing/2014/main" id="{E4B91D05-52B0-4E51-8B1C-9A5470747977}"/>
+                <a16:creationId xmlns:a16="http://schemas.microsoft.com/office/drawing/2014/main" id="{73033BE9-C89F-4F87-A2F8-9473FE2DFF94}"/>
               </a:ext>
             </a:extLst>
           </p:cNvPr>
@@ -27335,7 +27335,7 @@
           <p:cNvPr id="24" name="">
             <a:extLst xmlns:a="http://schemas.openxmlformats.org/drawingml/2006/main">
               <a:ext uri="{FF2B5EF4-FFF2-40B4-BE49-F238E27FC236}">
-                <a16:creationId xmlns:a16="http://schemas.microsoft.com/office/drawing/2014/main" id="{453B9EBC-B537-4EB5-8569-7B5881FF040E}"/>
+                <a16:creationId xmlns:a16="http://schemas.microsoft.com/office/drawing/2014/main" id="{A2C08C80-52F7-46C2-AD16-00C175328AEB}"/>
               </a:ext>
             </a:extLst>
           </p:cNvPr>
@@ -27397,7 +27397,7 @@
           <p:cNvPr id="25" name="">
             <a:extLst xmlns:a="http://schemas.openxmlformats.org/drawingml/2006/main">
               <a:ext uri="{FF2B5EF4-FFF2-40B4-BE49-F238E27FC236}">
-                <a16:creationId xmlns:a16="http://schemas.microsoft.com/office/drawing/2014/main" id="{706CE132-8B34-413F-859E-45045FDF9A39}"/>
+                <a16:creationId xmlns:a16="http://schemas.microsoft.com/office/drawing/2014/main" id="{2E59D906-B87C-4318-B8C6-74FB17EA2046}"/>
               </a:ext>
             </a:extLst>
           </p:cNvPr>
@@ -27428,7 +27428,7 @@
           <p:cNvPr id="26" name="">
             <a:extLst xmlns:a="http://schemas.openxmlformats.org/drawingml/2006/main">
               <a:ext uri="{FF2B5EF4-FFF2-40B4-BE49-F238E27FC236}">
-                <a16:creationId xmlns:a16="http://schemas.microsoft.com/office/drawing/2014/main" id="{37CC2A9D-66C6-41CD-8BC8-44E080FD7F66}"/>
+                <a16:creationId xmlns:a16="http://schemas.microsoft.com/office/drawing/2014/main" id="{A211A314-E555-4A05-84E2-739544713100}"/>
               </a:ext>
             </a:extLst>
           </p:cNvPr>
@@ -27490,7 +27490,7 @@
           <p:cNvPr id="27" name="">
             <a:extLst xmlns:a="http://schemas.openxmlformats.org/drawingml/2006/main">
               <a:ext uri="{FF2B5EF4-FFF2-40B4-BE49-F238E27FC236}">
-                <a16:creationId xmlns:a16="http://schemas.microsoft.com/office/drawing/2014/main" id="{F95A2FD8-56E7-4192-B488-9AB50732D815}"/>
+                <a16:creationId xmlns:a16="http://schemas.microsoft.com/office/drawing/2014/main" id="{E969FFE6-B2AA-42C2-B270-5965224A5D7D}"/>
               </a:ext>
             </a:extLst>
           </p:cNvPr>
@@ -27550,7 +27550,7 @@
     </p:spTree>
     <p:extLst>
       <p:ext uri="{BB962C8B-B14F-4D97-AF65-F5344CB8AC3E}">
-        <p14:creationId xmlns:p14="http://schemas.microsoft.com/office/powerpoint/2010/main" val="2141696699"/>
+        <p14:creationId xmlns:p14="http://schemas.microsoft.com/office/powerpoint/2010/main" val="1137958892"/>
       </p:ext>
     </p:extLst>
   </p:cSld>
@@ -27581,7 +27581,7 @@
           <p:cNvPr id="1" name="">
             <a:extLst xmlns:a="http://schemas.openxmlformats.org/drawingml/2006/main">
               <a:ext uri="{FF2B5EF4-FFF2-40B4-BE49-F238E27FC236}">
-                <a16:creationId xmlns:a16="http://schemas.microsoft.com/office/drawing/2014/main" id="{E7C2CFC1-7E60-4731-83C5-BD0C86221B5F}"/>
+                <a16:creationId xmlns:a16="http://schemas.microsoft.com/office/drawing/2014/main" id="{A1267486-5F83-4D0C-AFD6-23AB40D96231}"/>
               </a:ext>
             </a:extLst>
           </p:cNvPr>
@@ -27643,7 +27643,7 @@
           <p:cNvPr id="2" name="">
             <a:extLst xmlns:a="http://schemas.openxmlformats.org/drawingml/2006/main">
               <a:ext uri="{FF2B5EF4-FFF2-40B4-BE49-F238E27FC236}">
-                <a16:creationId xmlns:a16="http://schemas.microsoft.com/office/drawing/2014/main" id="{9205281C-E683-445C-89A6-4DC332E7DD33}"/>
+                <a16:creationId xmlns:a16="http://schemas.microsoft.com/office/drawing/2014/main" id="{E0643F94-FF50-4B23-AB6D-AA2139C12F60}"/>
               </a:ext>
             </a:extLst>
           </p:cNvPr>
@@ -27705,7 +27705,7 @@
           <p:cNvPr id="3" name="">
             <a:extLst xmlns:a="http://schemas.openxmlformats.org/drawingml/2006/main">
               <a:ext uri="{FF2B5EF4-FFF2-40B4-BE49-F238E27FC236}">
-                <a16:creationId xmlns:a16="http://schemas.microsoft.com/office/drawing/2014/main" id="{C14D9F39-B06B-4FDA-933E-D1911E65B2CA}"/>
+                <a16:creationId xmlns:a16="http://schemas.microsoft.com/office/drawing/2014/main" id="{214BA050-BC08-437C-A8CE-DF1883D6EB3E}"/>
               </a:ext>
             </a:extLst>
           </p:cNvPr>
@@ -27746,7 +27746,7 @@
           <p:cNvPr id="4" name="">
             <a:extLst xmlns:a="http://schemas.openxmlformats.org/drawingml/2006/main">
               <a:ext uri="{FF2B5EF4-FFF2-40B4-BE49-F238E27FC236}">
-                <a16:creationId xmlns:a16="http://schemas.microsoft.com/office/drawing/2014/main" id="{C161931D-1D28-4E24-8A8D-AF6F6D4BFD81}"/>
+                <a16:creationId xmlns:a16="http://schemas.microsoft.com/office/drawing/2014/main" id="{76076140-A22A-46DD-896C-9687EB94C958}"/>
               </a:ext>
             </a:extLst>
           </p:cNvPr>
@@ -27777,7 +27777,7 @@
           <p:cNvPr id="5" name="">
             <a:extLst xmlns:a="http://schemas.openxmlformats.org/drawingml/2006/main">
               <a:ext uri="{FF2B5EF4-FFF2-40B4-BE49-F238E27FC236}">
-                <a16:creationId xmlns:a16="http://schemas.microsoft.com/office/drawing/2014/main" id="{D08864B6-42E0-4AD6-9EBB-EC88222E10DC}"/>
+                <a16:creationId xmlns:a16="http://schemas.microsoft.com/office/drawing/2014/main" id="{1ECD4CF7-5135-4F53-BFCC-4077D50CDCB0}"/>
               </a:ext>
             </a:extLst>
           </p:cNvPr>
@@ -27810,7 +27810,7 @@
           <p:cNvPr id="6" name="">
             <a:extLst xmlns:a="http://schemas.openxmlformats.org/drawingml/2006/main">
               <a:ext uri="{FF2B5EF4-FFF2-40B4-BE49-F238E27FC236}">
-                <a16:creationId xmlns:a16="http://schemas.microsoft.com/office/drawing/2014/main" id="{94179007-869E-4BA5-9796-7077E5EB8D3A}"/>
+                <a16:creationId xmlns:a16="http://schemas.microsoft.com/office/drawing/2014/main" id="{5F4BC07B-61FB-43EC-9130-12B58B80F84D}"/>
               </a:ext>
             </a:extLst>
           </p:cNvPr>
@@ -27843,7 +27843,7 @@
           <p:cNvPr id="7" name="">
             <a:extLst xmlns:a="http://schemas.openxmlformats.org/drawingml/2006/main">
               <a:ext uri="{FF2B5EF4-FFF2-40B4-BE49-F238E27FC236}">
-                <a16:creationId xmlns:a16="http://schemas.microsoft.com/office/drawing/2014/main" id="{45D50584-24E2-40B6-988B-FD087D9F9BCE}"/>
+                <a16:creationId xmlns:a16="http://schemas.microsoft.com/office/drawing/2014/main" id="{4B594975-39BD-4C7D-84DB-CC2E347B6640}"/>
               </a:ext>
             </a:extLst>
           </p:cNvPr>
@@ -27876,7 +27876,7 @@
           <p:cNvPr id="8" name="">
             <a:extLst xmlns:a="http://schemas.openxmlformats.org/drawingml/2006/main">
               <a:ext uri="{FF2B5EF4-FFF2-40B4-BE49-F238E27FC236}">
-                <a16:creationId xmlns:a16="http://schemas.microsoft.com/office/drawing/2014/main" id="{FF29C802-9494-43B2-9897-43BA5F7B4220}"/>
+                <a16:creationId xmlns:a16="http://schemas.microsoft.com/office/drawing/2014/main" id="{A1F5E235-1390-45AF-9C87-FB6DD5D8B512}"/>
               </a:ext>
             </a:extLst>
           </p:cNvPr>
@@ -27909,7 +27909,7 @@
           <p:cNvPr id="9" name="">
             <a:extLst xmlns:a="http://schemas.openxmlformats.org/drawingml/2006/main">
               <a:ext uri="{FF2B5EF4-FFF2-40B4-BE49-F238E27FC236}">
-                <a16:creationId xmlns:a16="http://schemas.microsoft.com/office/drawing/2014/main" id="{D808C0B3-844E-4CAE-9BA0-6AD0C725686A}"/>
+                <a16:creationId xmlns:a16="http://schemas.microsoft.com/office/drawing/2014/main" id="{0AB4D380-7F6F-4655-BC75-0079BBB4504A}"/>
               </a:ext>
             </a:extLst>
           </p:cNvPr>
@@ -27942,7 +27942,7 @@
           <p:cNvPr id="10" name="">
             <a:extLst xmlns:a="http://schemas.openxmlformats.org/drawingml/2006/main">
               <a:ext uri="{FF2B5EF4-FFF2-40B4-BE49-F238E27FC236}">
-                <a16:creationId xmlns:a16="http://schemas.microsoft.com/office/drawing/2014/main" id="{6F891D06-5CEC-4FB0-9B6C-1A6DA6FC409F}"/>
+                <a16:creationId xmlns:a16="http://schemas.microsoft.com/office/drawing/2014/main" id="{3A6237F1-4756-4C6C-B8D8-88FAD62C18D8}"/>
               </a:ext>
             </a:extLst>
           </p:cNvPr>
@@ -27975,7 +27975,7 @@
           <p:cNvPr id="11" name="">
             <a:extLst xmlns:a="http://schemas.openxmlformats.org/drawingml/2006/main">
               <a:ext uri="{FF2B5EF4-FFF2-40B4-BE49-F238E27FC236}">
-                <a16:creationId xmlns:a16="http://schemas.microsoft.com/office/drawing/2014/main" id="{AF211884-5879-4CF2-B6FF-70C30222A2E8}"/>
+                <a16:creationId xmlns:a16="http://schemas.microsoft.com/office/drawing/2014/main" id="{F797ACBB-4B31-4466-B265-7CC11D9A575A}"/>
               </a:ext>
             </a:extLst>
           </p:cNvPr>
@@ -28008,7 +28008,7 @@
           <p:cNvPr id="12" name="">
             <a:extLst xmlns:a="http://schemas.openxmlformats.org/drawingml/2006/main">
               <a:ext uri="{FF2B5EF4-FFF2-40B4-BE49-F238E27FC236}">
-                <a16:creationId xmlns:a16="http://schemas.microsoft.com/office/drawing/2014/main" id="{2385E51F-5366-47A8-AE83-2D7AFD621FA8}"/>
+                <a16:creationId xmlns:a16="http://schemas.microsoft.com/office/drawing/2014/main" id="{4FEAF892-5FBD-49C1-898B-CC9E1B0B1867}"/>
               </a:ext>
             </a:extLst>
           </p:cNvPr>
@@ -28049,7 +28049,7 @@
           <p:cNvPr id="13" name="">
             <a:extLst xmlns:a="http://schemas.openxmlformats.org/drawingml/2006/main">
               <a:ext uri="{FF2B5EF4-FFF2-40B4-BE49-F238E27FC236}">
-                <a16:creationId xmlns:a16="http://schemas.microsoft.com/office/drawing/2014/main" id="{A39EA69B-EF31-4C8E-9C42-4F2B21C9810D}"/>
+                <a16:creationId xmlns:a16="http://schemas.microsoft.com/office/drawing/2014/main" id="{2EE3CAD0-A204-4C59-9FE6-96A9E86D12B6}"/>
               </a:ext>
             </a:extLst>
           </p:cNvPr>
@@ -28138,7 +28138,7 @@
           <p:cNvPr id="14" name="">
             <a:extLst xmlns:a="http://schemas.openxmlformats.org/drawingml/2006/main">
               <a:ext uri="{FF2B5EF4-FFF2-40B4-BE49-F238E27FC236}">
-                <a16:creationId xmlns:a16="http://schemas.microsoft.com/office/drawing/2014/main" id="{BA1EFD65-9927-47C3-9295-B263369D35A9}"/>
+                <a16:creationId xmlns:a16="http://schemas.microsoft.com/office/drawing/2014/main" id="{27FB0699-7CD8-4381-8790-F37987BEA717}"/>
               </a:ext>
             </a:extLst>
           </p:cNvPr>
@@ -28179,7 +28179,7 @@
           <p:cNvPr id="15" name="">
             <a:extLst xmlns:a="http://schemas.openxmlformats.org/drawingml/2006/main">
               <a:ext uri="{FF2B5EF4-FFF2-40B4-BE49-F238E27FC236}">
-                <a16:creationId xmlns:a16="http://schemas.microsoft.com/office/drawing/2014/main" id="{A0413A75-49F8-43F5-BBCB-FCD2400B74A7}"/>
+                <a16:creationId xmlns:a16="http://schemas.microsoft.com/office/drawing/2014/main" id="{FAC40827-AE62-41BC-BEDF-66C3C0781F50}"/>
               </a:ext>
             </a:extLst>
           </p:cNvPr>
@@ -28268,7 +28268,7 @@
           <p:cNvPr id="16" name="">
             <a:extLst xmlns:a="http://schemas.openxmlformats.org/drawingml/2006/main">
               <a:ext uri="{FF2B5EF4-FFF2-40B4-BE49-F238E27FC236}">
-                <a16:creationId xmlns:a16="http://schemas.microsoft.com/office/drawing/2014/main" id="{050A9AF5-0A6F-4974-AF70-B304DA924444}"/>
+                <a16:creationId xmlns:a16="http://schemas.microsoft.com/office/drawing/2014/main" id="{74253904-AB93-4B3E-8BE9-F6DB1BE03946}"/>
               </a:ext>
             </a:extLst>
           </p:cNvPr>
@@ -28309,7 +28309,7 @@
           <p:cNvPr id="17" name="">
             <a:extLst xmlns:a="http://schemas.openxmlformats.org/drawingml/2006/main">
               <a:ext uri="{FF2B5EF4-FFF2-40B4-BE49-F238E27FC236}">
-                <a16:creationId xmlns:a16="http://schemas.microsoft.com/office/drawing/2014/main" id="{BAA8605B-19EA-4BA7-8383-79C21D245CBE}"/>
+                <a16:creationId xmlns:a16="http://schemas.microsoft.com/office/drawing/2014/main" id="{05A12023-EB8B-4F09-A174-49F95368E1FF}"/>
               </a:ext>
             </a:extLst>
           </p:cNvPr>
@@ -28398,7 +28398,7 @@
           <p:cNvPr id="18" name="">
             <a:extLst xmlns:a="http://schemas.openxmlformats.org/drawingml/2006/main">
               <a:ext uri="{FF2B5EF4-FFF2-40B4-BE49-F238E27FC236}">
-                <a16:creationId xmlns:a16="http://schemas.microsoft.com/office/drawing/2014/main" id="{ACB18DCB-7DF5-4F0F-8174-FAC3F5E8A30D}"/>
+                <a16:creationId xmlns:a16="http://schemas.microsoft.com/office/drawing/2014/main" id="{BCCAC063-026A-4B84-884E-41082770E1D7}"/>
               </a:ext>
             </a:extLst>
           </p:cNvPr>
@@ -28439,7 +28439,7 @@
           <p:cNvPr id="19" name="">
             <a:extLst xmlns:a="http://schemas.openxmlformats.org/drawingml/2006/main">
               <a:ext uri="{FF2B5EF4-FFF2-40B4-BE49-F238E27FC236}">
-                <a16:creationId xmlns:a16="http://schemas.microsoft.com/office/drawing/2014/main" id="{0201F4F6-295F-4094-A169-CC5FE1411DC7}"/>
+                <a16:creationId xmlns:a16="http://schemas.microsoft.com/office/drawing/2014/main" id="{3B3DF74E-5CC0-4EE6-B92C-3E6B5DD03196}"/>
               </a:ext>
             </a:extLst>
           </p:cNvPr>
@@ -28528,7 +28528,7 @@
           <p:cNvPr id="20" name="">
             <a:extLst xmlns:a="http://schemas.openxmlformats.org/drawingml/2006/main">
               <a:ext uri="{FF2B5EF4-FFF2-40B4-BE49-F238E27FC236}">
-                <a16:creationId xmlns:a16="http://schemas.microsoft.com/office/drawing/2014/main" id="{C4348957-E866-4379-A5D9-EFECA8AD0A11}"/>
+                <a16:creationId xmlns:a16="http://schemas.microsoft.com/office/drawing/2014/main" id="{65FAD7E4-E820-4F85-9A90-653E4F8F94E5}"/>
               </a:ext>
             </a:extLst>
           </p:cNvPr>
@@ -28569,7 +28569,7 @@
           <p:cNvPr id="21" name="">
             <a:extLst xmlns:a="http://schemas.openxmlformats.org/drawingml/2006/main">
               <a:ext uri="{FF2B5EF4-FFF2-40B4-BE49-F238E27FC236}">
-                <a16:creationId xmlns:a16="http://schemas.microsoft.com/office/drawing/2014/main" id="{FEE53588-DCD6-4AB4-B033-0C9C85ACF5F2}"/>
+                <a16:creationId xmlns:a16="http://schemas.microsoft.com/office/drawing/2014/main" id="{2C9A34EC-2393-4175-BE66-D47BB67829ED}"/>
               </a:ext>
             </a:extLst>
           </p:cNvPr>
@@ -28631,7 +28631,7 @@
           <p:cNvPr id="22" name="">
             <a:extLst xmlns:a="http://schemas.openxmlformats.org/drawingml/2006/main">
               <a:ext uri="{FF2B5EF4-FFF2-40B4-BE49-F238E27FC236}">
-                <a16:creationId xmlns:a16="http://schemas.microsoft.com/office/drawing/2014/main" id="{45833908-1F76-427C-B2EC-D9C792A9A9FA}"/>
+                <a16:creationId xmlns:a16="http://schemas.microsoft.com/office/drawing/2014/main" id="{E26BDBAB-EF96-448E-91E9-0A57C8E52FBE}"/>
               </a:ext>
             </a:extLst>
           </p:cNvPr>
@@ -28672,7 +28672,7 @@
           <p:cNvPr id="23" name="">
             <a:extLst xmlns:a="http://schemas.openxmlformats.org/drawingml/2006/main">
               <a:ext uri="{FF2B5EF4-FFF2-40B4-BE49-F238E27FC236}">
-                <a16:creationId xmlns:a16="http://schemas.microsoft.com/office/drawing/2014/main" id="{123F5F38-7613-4435-9C67-05928776C7E2}"/>
+                <a16:creationId xmlns:a16="http://schemas.microsoft.com/office/drawing/2014/main" id="{83761C80-F05A-4E35-BD3B-C6D87214B9D1}"/>
               </a:ext>
             </a:extLst>
           </p:cNvPr>
@@ -28734,7 +28734,7 @@
           <p:cNvPr id="24" name="">
             <a:extLst xmlns:a="http://schemas.openxmlformats.org/drawingml/2006/main">
               <a:ext uri="{FF2B5EF4-FFF2-40B4-BE49-F238E27FC236}">
-                <a16:creationId xmlns:a16="http://schemas.microsoft.com/office/drawing/2014/main" id="{5362ABE7-3D92-4E3F-9807-E287CFF84CF3}"/>
+                <a16:creationId xmlns:a16="http://schemas.microsoft.com/office/drawing/2014/main" id="{C8B47138-A3A2-40AF-9584-9B86CC8470F5}"/>
               </a:ext>
             </a:extLst>
           </p:cNvPr>
@@ -28775,7 +28775,7 @@
           <p:cNvPr id="25" name="">
             <a:extLst xmlns:a="http://schemas.openxmlformats.org/drawingml/2006/main">
               <a:ext uri="{FF2B5EF4-FFF2-40B4-BE49-F238E27FC236}">
-                <a16:creationId xmlns:a16="http://schemas.microsoft.com/office/drawing/2014/main" id="{1265C744-A0CF-4423-98B3-EEC63904EF49}"/>
+                <a16:creationId xmlns:a16="http://schemas.microsoft.com/office/drawing/2014/main" id="{BB15103C-19C5-4B8A-83C1-AFF5F8015C80}"/>
               </a:ext>
             </a:extLst>
           </p:cNvPr>
@@ -28864,7 +28864,7 @@
           <p:cNvPr id="26" name="">
             <a:extLst xmlns:a="http://schemas.openxmlformats.org/drawingml/2006/main">
               <a:ext uri="{FF2B5EF4-FFF2-40B4-BE49-F238E27FC236}">
-                <a16:creationId xmlns:a16="http://schemas.microsoft.com/office/drawing/2014/main" id="{E954326E-D793-4CA3-8C3F-3F8F4F3F1D12}"/>
+                <a16:creationId xmlns:a16="http://schemas.microsoft.com/office/drawing/2014/main" id="{5273F82F-0AF0-4F08-B376-BF8E35FD28FD}"/>
               </a:ext>
             </a:extLst>
           </p:cNvPr>
@@ -28905,7 +28905,7 @@
           <p:cNvPr id="27" name="">
             <a:extLst xmlns:a="http://schemas.openxmlformats.org/drawingml/2006/main">
               <a:ext uri="{FF2B5EF4-FFF2-40B4-BE49-F238E27FC236}">
-                <a16:creationId xmlns:a16="http://schemas.microsoft.com/office/drawing/2014/main" id="{42EEF332-8270-4588-AACE-B7576C65BD1F}"/>
+                <a16:creationId xmlns:a16="http://schemas.microsoft.com/office/drawing/2014/main" id="{F72789D5-0405-462D-BB04-E0E17A1AAF34}"/>
               </a:ext>
             </a:extLst>
           </p:cNvPr>
@@ -28994,7 +28994,7 @@
           <p:cNvPr id="28" name="">
             <a:extLst xmlns:a="http://schemas.openxmlformats.org/drawingml/2006/main">
               <a:ext uri="{FF2B5EF4-FFF2-40B4-BE49-F238E27FC236}">
-                <a16:creationId xmlns:a16="http://schemas.microsoft.com/office/drawing/2014/main" id="{109E7B2E-A7D5-40D1-9945-57F8C39E5991}"/>
+                <a16:creationId xmlns:a16="http://schemas.microsoft.com/office/drawing/2014/main" id="{CDC9F724-C9C7-4B10-AE28-9610CB9ABABD}"/>
               </a:ext>
             </a:extLst>
           </p:cNvPr>
@@ -29027,7 +29027,7 @@
           <p:cNvPr id="29" name="">
             <a:extLst xmlns:a="http://schemas.openxmlformats.org/drawingml/2006/main">
               <a:ext uri="{FF2B5EF4-FFF2-40B4-BE49-F238E27FC236}">
-                <a16:creationId xmlns:a16="http://schemas.microsoft.com/office/drawing/2014/main" id="{63205EB4-98C5-4373-AA6D-3F818E5A05F0}"/>
+                <a16:creationId xmlns:a16="http://schemas.microsoft.com/office/drawing/2014/main" id="{A1EC3D97-FCBD-4538-85CF-D2314A199B84}"/>
               </a:ext>
             </a:extLst>
           </p:cNvPr>
@@ -29089,7 +29089,7 @@
           <p:cNvPr id="30" name="">
             <a:extLst xmlns:a="http://schemas.openxmlformats.org/drawingml/2006/main">
               <a:ext uri="{FF2B5EF4-FFF2-40B4-BE49-F238E27FC236}">
-                <a16:creationId xmlns:a16="http://schemas.microsoft.com/office/drawing/2014/main" id="{4983FB51-9725-4139-9493-9B6CD3CC953D}"/>
+                <a16:creationId xmlns:a16="http://schemas.microsoft.com/office/drawing/2014/main" id="{D2C2BB87-8222-4907-A24B-D616756F602D}"/>
               </a:ext>
             </a:extLst>
           </p:cNvPr>
@@ -29122,7 +29122,7 @@
           <p:cNvPr id="31" name="">
             <a:extLst xmlns:a="http://schemas.openxmlformats.org/drawingml/2006/main">
               <a:ext uri="{FF2B5EF4-FFF2-40B4-BE49-F238E27FC236}">
-                <a16:creationId xmlns:a16="http://schemas.microsoft.com/office/drawing/2014/main" id="{875C8169-DC8F-45FE-B2D2-FD52F55C5154}"/>
+                <a16:creationId xmlns:a16="http://schemas.microsoft.com/office/drawing/2014/main" id="{0FC12F51-5B9C-492C-B1B6-18DB62656A7D}"/>
               </a:ext>
             </a:extLst>
           </p:cNvPr>
@@ -29184,7 +29184,7 @@
           <p:cNvPr id="32" name="">
             <a:extLst xmlns:a="http://schemas.openxmlformats.org/drawingml/2006/main">
               <a:ext uri="{FF2B5EF4-FFF2-40B4-BE49-F238E27FC236}">
-                <a16:creationId xmlns:a16="http://schemas.microsoft.com/office/drawing/2014/main" id="{851FDE71-E868-496C-BE30-ABD35C3CD1AC}"/>
+                <a16:creationId xmlns:a16="http://schemas.microsoft.com/office/drawing/2014/main" id="{8C8592C1-68D4-4405-A41F-2941FFA9FDD7}"/>
               </a:ext>
             </a:extLst>
           </p:cNvPr>
@@ -29217,7 +29217,7 @@
           <p:cNvPr id="33" name="">
             <a:extLst xmlns:a="http://schemas.openxmlformats.org/drawingml/2006/main">
               <a:ext uri="{FF2B5EF4-FFF2-40B4-BE49-F238E27FC236}">
-                <a16:creationId xmlns:a16="http://schemas.microsoft.com/office/drawing/2014/main" id="{80055942-7343-48BB-AB7E-C0EDCF7ADC49}"/>
+                <a16:creationId xmlns:a16="http://schemas.microsoft.com/office/drawing/2014/main" id="{A8D4CB32-FBE8-4E6D-BF27-C308A42633FF}"/>
               </a:ext>
             </a:extLst>
           </p:cNvPr>
@@ -29279,7 +29279,7 @@
           <p:cNvPr id="34" name="">
             <a:extLst xmlns:a="http://schemas.openxmlformats.org/drawingml/2006/main">
               <a:ext uri="{FF2B5EF4-FFF2-40B4-BE49-F238E27FC236}">
-                <a16:creationId xmlns:a16="http://schemas.microsoft.com/office/drawing/2014/main" id="{5A669BB4-0C93-40D3-BC7F-DFAFDE5C5CB8}"/>
+                <a16:creationId xmlns:a16="http://schemas.microsoft.com/office/drawing/2014/main" id="{F0982314-A0DE-4655-A576-9FE5D27AD779}"/>
               </a:ext>
             </a:extLst>
           </p:cNvPr>
@@ -29341,7 +29341,7 @@
           <p:cNvPr id="35" name="">
             <a:extLst xmlns:a="http://schemas.openxmlformats.org/drawingml/2006/main">
               <a:ext uri="{FF2B5EF4-FFF2-40B4-BE49-F238E27FC236}">
-                <a16:creationId xmlns:a16="http://schemas.microsoft.com/office/drawing/2014/main" id="{8B9333B2-6E6B-41EC-A229-6C3B3CE56B1E}"/>
+                <a16:creationId xmlns:a16="http://schemas.microsoft.com/office/drawing/2014/main" id="{91A220A1-1B27-4223-9F97-DD545E8438DC}"/>
               </a:ext>
             </a:extLst>
           </p:cNvPr>
@@ -29372,7 +29372,7 @@
           <p:cNvPr id="36" name="">
             <a:extLst xmlns:a="http://schemas.openxmlformats.org/drawingml/2006/main">
               <a:ext uri="{FF2B5EF4-FFF2-40B4-BE49-F238E27FC236}">
-                <a16:creationId xmlns:a16="http://schemas.microsoft.com/office/drawing/2014/main" id="{BF40270C-4F0F-47E9-B2B2-A8E5F91AF771}"/>
+                <a16:creationId xmlns:a16="http://schemas.microsoft.com/office/drawing/2014/main" id="{374A71C1-6B33-45C2-B762-2FFEBAAC2DD6}"/>
               </a:ext>
             </a:extLst>
           </p:cNvPr>
@@ -29434,7 +29434,7 @@
           <p:cNvPr id="37" name="">
             <a:extLst xmlns:a="http://schemas.openxmlformats.org/drawingml/2006/main">
               <a:ext uri="{FF2B5EF4-FFF2-40B4-BE49-F238E27FC236}">
-                <a16:creationId xmlns:a16="http://schemas.microsoft.com/office/drawing/2014/main" id="{CBB34DC5-3FE6-453D-B246-F19032683D10}"/>
+                <a16:creationId xmlns:a16="http://schemas.microsoft.com/office/drawing/2014/main" id="{85DE64CE-74CF-426D-AA1E-605FE558F173}"/>
               </a:ext>
             </a:extLst>
           </p:cNvPr>
@@ -29494,7 +29494,7 @@
     </p:spTree>
     <p:extLst>
       <p:ext uri="{BB962C8B-B14F-4D97-AF65-F5344CB8AC3E}">
-        <p14:creationId xmlns:p14="http://schemas.microsoft.com/office/powerpoint/2010/main" val="948427785"/>
+        <p14:creationId xmlns:p14="http://schemas.microsoft.com/office/powerpoint/2010/main" val="1926079567"/>
       </p:ext>
     </p:extLst>
   </p:cSld>
@@ -29525,7 +29525,7 @@
           <p:cNvPr id="1" name="">
             <a:extLst xmlns:a="http://schemas.openxmlformats.org/drawingml/2006/main">
               <a:ext uri="{FF2B5EF4-FFF2-40B4-BE49-F238E27FC236}">
-                <a16:creationId xmlns:a16="http://schemas.microsoft.com/office/drawing/2014/main" id="{A9D8EBF0-DA4E-42F3-8B0D-BE25048674FA}"/>
+                <a16:creationId xmlns:a16="http://schemas.microsoft.com/office/drawing/2014/main" id="{3863A9D1-30DD-4E13-BC03-8135D71DE09D}"/>
               </a:ext>
             </a:extLst>
           </p:cNvPr>
@@ -29587,7 +29587,7 @@
           <p:cNvPr id="2" name="">
             <a:extLst xmlns:a="http://schemas.openxmlformats.org/drawingml/2006/main">
               <a:ext uri="{FF2B5EF4-FFF2-40B4-BE49-F238E27FC236}">
-                <a16:creationId xmlns:a16="http://schemas.microsoft.com/office/drawing/2014/main" id="{97601757-0D4B-4141-8A61-98D8AF5E82BF}"/>
+                <a16:creationId xmlns:a16="http://schemas.microsoft.com/office/drawing/2014/main" id="{31CFF4CE-4A12-4FDB-9EE6-7059C2C1652E}"/>
               </a:ext>
             </a:extLst>
           </p:cNvPr>
@@ -29653,7 +29653,7 @@
           <p:nvPr/>
         </p:nvPicPr>
         <p:blipFill>
-          <a:blip xmlns:r="http://schemas.openxmlformats.org/officeDocument/2006/relationships" xmlns:a="http://schemas.openxmlformats.org/drawingml/2006/main" r:embed="Rb94ab0c3c20844a1"/>
+          <a:blip xmlns:r="http://schemas.openxmlformats.org/officeDocument/2006/relationships" xmlns:a="http://schemas.openxmlformats.org/drawingml/2006/main" r:embed="R24f86fc4b014424f"/>
           <a:stretch xmlns:a="http://schemas.openxmlformats.org/drawingml/2006/main"/>
         </p:blipFill>
         <p:spPr>
@@ -29673,7 +29673,7 @@
           <p:cNvPr id="4" name="">
             <a:extLst xmlns:a="http://schemas.openxmlformats.org/drawingml/2006/main">
               <a:ext uri="{FF2B5EF4-FFF2-40B4-BE49-F238E27FC236}">
-                <a16:creationId xmlns:a16="http://schemas.microsoft.com/office/drawing/2014/main" id="{99190019-4F58-4F31-B1FC-18DA9C7D0024}"/>
+                <a16:creationId xmlns:a16="http://schemas.microsoft.com/office/drawing/2014/main" id="{F131424E-D973-4F2F-ABD1-D34316AB6A83}"/>
               </a:ext>
             </a:extLst>
           </p:cNvPr>
@@ -29714,7 +29714,7 @@
           <p:cNvPr id="5" name="">
             <a:extLst xmlns:a="http://schemas.openxmlformats.org/drawingml/2006/main">
               <a:ext uri="{FF2B5EF4-FFF2-40B4-BE49-F238E27FC236}">
-                <a16:creationId xmlns:a16="http://schemas.microsoft.com/office/drawing/2014/main" id="{E31BD93E-E052-4142-AD00-9CD340B72A29}"/>
+                <a16:creationId xmlns:a16="http://schemas.microsoft.com/office/drawing/2014/main" id="{00E2CF90-F409-45EC-A901-BDF143FBF68C}"/>
               </a:ext>
             </a:extLst>
           </p:cNvPr>
@@ -29776,7 +29776,7 @@
           <p:cNvPr id="6" name="">
             <a:extLst xmlns:a="http://schemas.openxmlformats.org/drawingml/2006/main">
               <a:ext uri="{FF2B5EF4-FFF2-40B4-BE49-F238E27FC236}">
-                <a16:creationId xmlns:a16="http://schemas.microsoft.com/office/drawing/2014/main" id="{93E3669C-2570-4894-8F68-F655EA3035F1}"/>
+                <a16:creationId xmlns:a16="http://schemas.microsoft.com/office/drawing/2014/main" id="{D96CDDA4-B189-4C12-8D64-4EF09E253DDD}"/>
               </a:ext>
             </a:extLst>
           </p:cNvPr>
@@ -29946,7 +29946,7 @@
           <p:cNvPr id="7" name="">
             <a:extLst xmlns:a="http://schemas.openxmlformats.org/drawingml/2006/main">
               <a:ext uri="{FF2B5EF4-FFF2-40B4-BE49-F238E27FC236}">
-                <a16:creationId xmlns:a16="http://schemas.microsoft.com/office/drawing/2014/main" id="{2EFB843B-D62B-41F8-A49F-04E03A34A527}"/>
+                <a16:creationId xmlns:a16="http://schemas.microsoft.com/office/drawing/2014/main" id="{04549D6F-DD89-490D-81E0-4285D5991562}"/>
               </a:ext>
             </a:extLst>
           </p:cNvPr>
@@ -29987,7 +29987,7 @@
           <p:cNvPr id="8" name="">
             <a:extLst xmlns:a="http://schemas.openxmlformats.org/drawingml/2006/main">
               <a:ext uri="{FF2B5EF4-FFF2-40B4-BE49-F238E27FC236}">
-                <a16:creationId xmlns:a16="http://schemas.microsoft.com/office/drawing/2014/main" id="{9DF72BA0-5ABC-4C1B-BEC7-70955A016CE3}"/>
+                <a16:creationId xmlns:a16="http://schemas.microsoft.com/office/drawing/2014/main" id="{8F8CB977-EEFE-4603-A9A8-9E400455833E}"/>
               </a:ext>
             </a:extLst>
           </p:cNvPr>
@@ -30049,7 +30049,7 @@
           <p:cNvPr id="9" name="">
             <a:extLst xmlns:a="http://schemas.openxmlformats.org/drawingml/2006/main">
               <a:ext uri="{FF2B5EF4-FFF2-40B4-BE49-F238E27FC236}">
-                <a16:creationId xmlns:a16="http://schemas.microsoft.com/office/drawing/2014/main" id="{5D9DEA60-70D9-4BC5-9743-FCE03B4BBD4D}"/>
+                <a16:creationId xmlns:a16="http://schemas.microsoft.com/office/drawing/2014/main" id="{D3D912F0-4B2A-41BA-B3AC-0DED65E3937A}"/>
               </a:ext>
             </a:extLst>
           </p:cNvPr>
@@ -30138,7 +30138,7 @@
           <p:cNvPr id="10" name="">
             <a:extLst xmlns:a="http://schemas.openxmlformats.org/drawingml/2006/main">
               <a:ext uri="{FF2B5EF4-FFF2-40B4-BE49-F238E27FC236}">
-                <a16:creationId xmlns:a16="http://schemas.microsoft.com/office/drawing/2014/main" id="{5FB9E7D9-64CA-4F67-B07E-64607881CC4E}"/>
+                <a16:creationId xmlns:a16="http://schemas.microsoft.com/office/drawing/2014/main" id="{175FE231-4EBA-4287-8226-8A9EA00851AB}"/>
               </a:ext>
             </a:extLst>
           </p:cNvPr>
@@ -30200,7 +30200,7 @@
           <p:cNvPr id="11" name="">
             <a:extLst xmlns:a="http://schemas.openxmlformats.org/drawingml/2006/main">
               <a:ext uri="{FF2B5EF4-FFF2-40B4-BE49-F238E27FC236}">
-                <a16:creationId xmlns:a16="http://schemas.microsoft.com/office/drawing/2014/main" id="{4EA9FA8B-C396-42EA-8F32-4ACD9DB48B2F}"/>
+                <a16:creationId xmlns:a16="http://schemas.microsoft.com/office/drawing/2014/main" id="{A77AB24F-131B-49BB-B1BB-20CEBE75B9CD}"/>
               </a:ext>
             </a:extLst>
           </p:cNvPr>
@@ -30231,7 +30231,7 @@
           <p:cNvPr id="12" name="">
             <a:extLst xmlns:a="http://schemas.openxmlformats.org/drawingml/2006/main">
               <a:ext uri="{FF2B5EF4-FFF2-40B4-BE49-F238E27FC236}">
-                <a16:creationId xmlns:a16="http://schemas.microsoft.com/office/drawing/2014/main" id="{534CB908-2157-4B06-93EB-6E377BB7A628}"/>
+                <a16:creationId xmlns:a16="http://schemas.microsoft.com/office/drawing/2014/main" id="{946959DF-CF6A-49CF-8E3B-367E4473E3F1}"/>
               </a:ext>
             </a:extLst>
           </p:cNvPr>
@@ -30293,7 +30293,7 @@
           <p:cNvPr id="13" name="">
             <a:extLst xmlns:a="http://schemas.openxmlformats.org/drawingml/2006/main">
               <a:ext uri="{FF2B5EF4-FFF2-40B4-BE49-F238E27FC236}">
-                <a16:creationId xmlns:a16="http://schemas.microsoft.com/office/drawing/2014/main" id="{0DF6A029-8922-425A-A19A-C2FB27DE242A}"/>
+                <a16:creationId xmlns:a16="http://schemas.microsoft.com/office/drawing/2014/main" id="{FD8C62C0-E953-4C92-ABFD-32CF93A39CFB}"/>
               </a:ext>
             </a:extLst>
           </p:cNvPr>
@@ -30353,7 +30353,7 @@
     </p:spTree>
     <p:extLst>
       <p:ext uri="{BB962C8B-B14F-4D97-AF65-F5344CB8AC3E}">
-        <p14:creationId xmlns:p14="http://schemas.microsoft.com/office/powerpoint/2010/main" val="1449468705"/>
+        <p14:creationId xmlns:p14="http://schemas.microsoft.com/office/powerpoint/2010/main" val="991170067"/>
       </p:ext>
     </p:extLst>
   </p:cSld>
@@ -30384,7 +30384,7 @@
           <p:cNvPr id="1" name="">
             <a:extLst xmlns:a="http://schemas.openxmlformats.org/drawingml/2006/main">
               <a:ext uri="{FF2B5EF4-FFF2-40B4-BE49-F238E27FC236}">
-                <a16:creationId xmlns:a16="http://schemas.microsoft.com/office/drawing/2014/main" id="{15A3FBF8-A711-4119-B66B-13D1196D82F5}"/>
+                <a16:creationId xmlns:a16="http://schemas.microsoft.com/office/drawing/2014/main" id="{310FC7ED-4B40-4ADF-A66F-FAF8168C6AED}"/>
               </a:ext>
             </a:extLst>
           </p:cNvPr>
@@ -30446,7 +30446,7 @@
           <p:cNvPr id="2" name="">
             <a:extLst xmlns:a="http://schemas.openxmlformats.org/drawingml/2006/main">
               <a:ext uri="{FF2B5EF4-FFF2-40B4-BE49-F238E27FC236}">
-                <a16:creationId xmlns:a16="http://schemas.microsoft.com/office/drawing/2014/main" id="{0934C818-8BC8-447D-8F18-BF9A2DBD7C07}"/>
+                <a16:creationId xmlns:a16="http://schemas.microsoft.com/office/drawing/2014/main" id="{D8D7D5FB-6566-4FAD-A61F-FF3625152236}"/>
               </a:ext>
             </a:extLst>
           </p:cNvPr>
@@ -30512,7 +30512,7 @@
           <p:nvPr/>
         </p:nvPicPr>
         <p:blipFill>
-          <a:blip xmlns:r="http://schemas.openxmlformats.org/officeDocument/2006/relationships" xmlns:a="http://schemas.openxmlformats.org/drawingml/2006/main" r:embed="Rb470b52d87384469"/>
+          <a:blip xmlns:r="http://schemas.openxmlformats.org/officeDocument/2006/relationships" xmlns:a="http://schemas.openxmlformats.org/drawingml/2006/main" r:embed="Ra2414fbfd1c6480f"/>
           <a:stretch xmlns:a="http://schemas.openxmlformats.org/drawingml/2006/main"/>
         </p:blipFill>
         <p:spPr>
@@ -30536,7 +30536,7 @@
           <p:nvPr/>
         </p:nvPicPr>
         <p:blipFill>
-          <a:blip xmlns:r="http://schemas.openxmlformats.org/officeDocument/2006/relationships" xmlns:a="http://schemas.openxmlformats.org/drawingml/2006/main" r:embed="R228fcf9ccd7d491d"/>
+          <a:blip xmlns:r="http://schemas.openxmlformats.org/officeDocument/2006/relationships" xmlns:a="http://schemas.openxmlformats.org/drawingml/2006/main" r:embed="Reba2844fd95749f2"/>
           <a:stretch xmlns:a="http://schemas.openxmlformats.org/drawingml/2006/main"/>
         </p:blipFill>
         <p:spPr>
@@ -30560,7 +30560,7 @@
           <p:nvPr/>
         </p:nvPicPr>
         <p:blipFill>
-          <a:blip xmlns:r="http://schemas.openxmlformats.org/officeDocument/2006/relationships" xmlns:a="http://schemas.openxmlformats.org/drawingml/2006/main" r:embed="R690b2b961bcc4051"/>
+          <a:blip xmlns:r="http://schemas.openxmlformats.org/officeDocument/2006/relationships" xmlns:a="http://schemas.openxmlformats.org/drawingml/2006/main" r:embed="R61e9b37df4b04225"/>
           <a:stretch xmlns:a="http://schemas.openxmlformats.org/drawingml/2006/main"/>
         </p:blipFill>
         <p:spPr>
@@ -30580,7 +30580,7 @@
           <p:cNvPr id="6" name="">
             <a:extLst xmlns:a="http://schemas.openxmlformats.org/drawingml/2006/main">
               <a:ext uri="{FF2B5EF4-FFF2-40B4-BE49-F238E27FC236}">
-                <a16:creationId xmlns:a16="http://schemas.microsoft.com/office/drawing/2014/main" id="{FD92A3D7-8E26-418C-80CB-76BDD9BBF127}"/>
+                <a16:creationId xmlns:a16="http://schemas.microsoft.com/office/drawing/2014/main" id="{BB76FF57-27FC-42F3-B2D8-000833896FCF}"/>
               </a:ext>
             </a:extLst>
           </p:cNvPr>
@@ -30621,7 +30621,7 @@
           <p:cNvPr id="7" name="">
             <a:extLst xmlns:a="http://schemas.openxmlformats.org/drawingml/2006/main">
               <a:ext uri="{FF2B5EF4-FFF2-40B4-BE49-F238E27FC236}">
-                <a16:creationId xmlns:a16="http://schemas.microsoft.com/office/drawing/2014/main" id="{77EBF5FB-FF5B-426A-922D-3560ABD33359}"/>
+                <a16:creationId xmlns:a16="http://schemas.microsoft.com/office/drawing/2014/main" id="{87BE5D7F-6A73-4693-AA2B-E936AED7E3C6}"/>
               </a:ext>
             </a:extLst>
           </p:cNvPr>
@@ -30683,7 +30683,7 @@
           <p:cNvPr id="8" name="">
             <a:extLst xmlns:a="http://schemas.openxmlformats.org/drawingml/2006/main">
               <a:ext uri="{FF2B5EF4-FFF2-40B4-BE49-F238E27FC236}">
-                <a16:creationId xmlns:a16="http://schemas.microsoft.com/office/drawing/2014/main" id="{B714371A-B66F-4F86-995C-20A142CA7D2C}"/>
+                <a16:creationId xmlns:a16="http://schemas.microsoft.com/office/drawing/2014/main" id="{82DCD939-44EB-48A8-B059-A055BF4AF887}"/>
               </a:ext>
             </a:extLst>
           </p:cNvPr>
@@ -30745,7 +30745,7 @@
           <p:cNvPr id="9" name="">
             <a:extLst xmlns:a="http://schemas.openxmlformats.org/drawingml/2006/main">
               <a:ext uri="{FF2B5EF4-FFF2-40B4-BE49-F238E27FC236}">
-                <a16:creationId xmlns:a16="http://schemas.microsoft.com/office/drawing/2014/main" id="{1838A5C2-1231-4E09-A288-82C2A9F05B09}"/>
+                <a16:creationId xmlns:a16="http://schemas.microsoft.com/office/drawing/2014/main" id="{85A35D32-8C66-4782-8041-877ABBB7C5F3}"/>
               </a:ext>
             </a:extLst>
           </p:cNvPr>
@@ -30786,7 +30786,7 @@
           <p:cNvPr id="10" name="">
             <a:extLst xmlns:a="http://schemas.openxmlformats.org/drawingml/2006/main">
               <a:ext uri="{FF2B5EF4-FFF2-40B4-BE49-F238E27FC236}">
-                <a16:creationId xmlns:a16="http://schemas.microsoft.com/office/drawing/2014/main" id="{688B7E15-9F42-4C34-A5F5-5DD43F0B621C}"/>
+                <a16:creationId xmlns:a16="http://schemas.microsoft.com/office/drawing/2014/main" id="{D0501C64-8C0A-4D4B-AF79-A9BD3A3DD71F}"/>
               </a:ext>
             </a:extLst>
           </p:cNvPr>
@@ -30848,7 +30848,7 @@
           <p:cNvPr id="11" name="">
             <a:extLst xmlns:a="http://schemas.openxmlformats.org/drawingml/2006/main">
               <a:ext uri="{FF2B5EF4-FFF2-40B4-BE49-F238E27FC236}">
-                <a16:creationId xmlns:a16="http://schemas.microsoft.com/office/drawing/2014/main" id="{68E53325-555F-4926-ABD4-E7BB6A78AFC6}"/>
+                <a16:creationId xmlns:a16="http://schemas.microsoft.com/office/drawing/2014/main" id="{87C7E000-E4AF-4B19-8A43-D931BBC50E23}"/>
               </a:ext>
             </a:extLst>
           </p:cNvPr>
@@ -30910,7 +30910,7 @@
           <p:cNvPr id="12" name="">
             <a:extLst xmlns:a="http://schemas.openxmlformats.org/drawingml/2006/main">
               <a:ext uri="{FF2B5EF4-FFF2-40B4-BE49-F238E27FC236}">
-                <a16:creationId xmlns:a16="http://schemas.microsoft.com/office/drawing/2014/main" id="{6A7B5E00-EE1B-4564-A011-03A493959219}"/>
+                <a16:creationId xmlns:a16="http://schemas.microsoft.com/office/drawing/2014/main" id="{1EF59A42-8775-48FA-8F98-ADC5C95F2D61}"/>
               </a:ext>
             </a:extLst>
           </p:cNvPr>
@@ -30951,7 +30951,7 @@
           <p:cNvPr id="13" name="">
             <a:extLst xmlns:a="http://schemas.openxmlformats.org/drawingml/2006/main">
               <a:ext uri="{FF2B5EF4-FFF2-40B4-BE49-F238E27FC236}">
-                <a16:creationId xmlns:a16="http://schemas.microsoft.com/office/drawing/2014/main" id="{FE94E4D7-D28D-48FC-8662-C3AF2B96BED7}"/>
+                <a16:creationId xmlns:a16="http://schemas.microsoft.com/office/drawing/2014/main" id="{EE89020A-5FB0-4561-97F8-BB2771E41599}"/>
               </a:ext>
             </a:extLst>
           </p:cNvPr>
@@ -31013,7 +31013,7 @@
           <p:cNvPr id="14" name="">
             <a:extLst xmlns:a="http://schemas.openxmlformats.org/drawingml/2006/main">
               <a:ext uri="{FF2B5EF4-FFF2-40B4-BE49-F238E27FC236}">
-                <a16:creationId xmlns:a16="http://schemas.microsoft.com/office/drawing/2014/main" id="{A51EE558-907F-4602-A4CE-205001C5FD1C}"/>
+                <a16:creationId xmlns:a16="http://schemas.microsoft.com/office/drawing/2014/main" id="{18F88951-0E22-46FE-B4F5-9437B921D652}"/>
               </a:ext>
             </a:extLst>
           </p:cNvPr>
@@ -31075,7 +31075,7 @@
           <p:cNvPr id="15" name="">
             <a:extLst xmlns:a="http://schemas.openxmlformats.org/drawingml/2006/main">
               <a:ext uri="{FF2B5EF4-FFF2-40B4-BE49-F238E27FC236}">
-                <a16:creationId xmlns:a16="http://schemas.microsoft.com/office/drawing/2014/main" id="{44155FDC-3FD5-46B3-8C07-B4B2CDE04CE6}"/>
+                <a16:creationId xmlns:a16="http://schemas.microsoft.com/office/drawing/2014/main" id="{5B07DEC7-1642-45F2-B313-4BB1F865D028}"/>
               </a:ext>
             </a:extLst>
           </p:cNvPr>
@@ -31137,7 +31137,7 @@
           <p:cNvPr id="16" name="">
             <a:extLst xmlns:a="http://schemas.openxmlformats.org/drawingml/2006/main">
               <a:ext uri="{FF2B5EF4-FFF2-40B4-BE49-F238E27FC236}">
-                <a16:creationId xmlns:a16="http://schemas.microsoft.com/office/drawing/2014/main" id="{43DB0D18-9500-45F1-8C43-71D9ED5737D1}"/>
+                <a16:creationId xmlns:a16="http://schemas.microsoft.com/office/drawing/2014/main" id="{D0F6D8FC-BB01-4A15-9C91-8137678734D6}"/>
               </a:ext>
             </a:extLst>
           </p:cNvPr>
@@ -31168,7 +31168,7 @@
           <p:cNvPr id="17" name="">
             <a:extLst xmlns:a="http://schemas.openxmlformats.org/drawingml/2006/main">
               <a:ext uri="{FF2B5EF4-FFF2-40B4-BE49-F238E27FC236}">
-                <a16:creationId xmlns:a16="http://schemas.microsoft.com/office/drawing/2014/main" id="{D340DD5D-DBB5-4DAC-B943-8FAAE57DB18D}"/>
+                <a16:creationId xmlns:a16="http://schemas.microsoft.com/office/drawing/2014/main" id="{91689421-7F47-44E6-89C4-CA6FFA24A0C0}"/>
               </a:ext>
             </a:extLst>
           </p:cNvPr>
@@ -31230,7 +31230,7 @@
           <p:cNvPr id="18" name="">
             <a:extLst xmlns:a="http://schemas.openxmlformats.org/drawingml/2006/main">
               <a:ext uri="{FF2B5EF4-FFF2-40B4-BE49-F238E27FC236}">
-                <a16:creationId xmlns:a16="http://schemas.microsoft.com/office/drawing/2014/main" id="{3EE1A7C7-C335-4BFA-ABC7-16E18CB3C3DB}"/>
+                <a16:creationId xmlns:a16="http://schemas.microsoft.com/office/drawing/2014/main" id="{49B9BC44-2247-42C9-B40E-FF6826A85666}"/>
               </a:ext>
             </a:extLst>
           </p:cNvPr>
@@ -31290,7 +31290,7 @@
     </p:spTree>
     <p:extLst>
       <p:ext uri="{BB962C8B-B14F-4D97-AF65-F5344CB8AC3E}">
-        <p14:creationId xmlns:p14="http://schemas.microsoft.com/office/powerpoint/2010/main" val="1226938446"/>
+        <p14:creationId xmlns:p14="http://schemas.microsoft.com/office/powerpoint/2010/main" val="155932545"/>
       </p:ext>
     </p:extLst>
   </p:cSld>
@@ -31321,7 +31321,7 @@
           <p:cNvPr id="1" name="">
             <a:extLst xmlns:a="http://schemas.openxmlformats.org/drawingml/2006/main">
               <a:ext uri="{FF2B5EF4-FFF2-40B4-BE49-F238E27FC236}">
-                <a16:creationId xmlns:a16="http://schemas.microsoft.com/office/drawing/2014/main" id="{AB8935C1-A1FA-4E7C-AA58-2EACE5BD45A3}"/>
+                <a16:creationId xmlns:a16="http://schemas.microsoft.com/office/drawing/2014/main" id="{E5939A77-F84A-4BA8-A8D0-F4462E8F3FD9}"/>
               </a:ext>
             </a:extLst>
           </p:cNvPr>
@@ -31383,7 +31383,7 @@
           <p:cNvPr id="2" name="">
             <a:extLst xmlns:a="http://schemas.openxmlformats.org/drawingml/2006/main">
               <a:ext uri="{FF2B5EF4-FFF2-40B4-BE49-F238E27FC236}">
-                <a16:creationId xmlns:a16="http://schemas.microsoft.com/office/drawing/2014/main" id="{347667E7-8E73-44DF-8BF6-5384FA9D9F1E}"/>
+                <a16:creationId xmlns:a16="http://schemas.microsoft.com/office/drawing/2014/main" id="{C4C49574-BC38-4B5B-B157-ECF0579171EA}"/>
               </a:ext>
             </a:extLst>
           </p:cNvPr>
@@ -31445,7 +31445,7 @@
           <p:cNvPr id="3" name="">
             <a:extLst xmlns:a="http://schemas.openxmlformats.org/drawingml/2006/main">
               <a:ext uri="{FF2B5EF4-FFF2-40B4-BE49-F238E27FC236}">
-                <a16:creationId xmlns:a16="http://schemas.microsoft.com/office/drawing/2014/main" id="{0A03890E-FF9C-458E-9C25-F9624B960907}"/>
+                <a16:creationId xmlns:a16="http://schemas.microsoft.com/office/drawing/2014/main" id="{FE622E06-FBF2-42CF-A07E-42C4EE4964CF}"/>
               </a:ext>
             </a:extLst>
           </p:cNvPr>
@@ -31486,7 +31486,7 @@
           <p:cNvPr id="4" name="">
             <a:extLst xmlns:a="http://schemas.openxmlformats.org/drawingml/2006/main">
               <a:ext uri="{FF2B5EF4-FFF2-40B4-BE49-F238E27FC236}">
-                <a16:creationId xmlns:a16="http://schemas.microsoft.com/office/drawing/2014/main" id="{838ABD89-3612-4020-8BB7-2BC0C4E60F57}"/>
+                <a16:creationId xmlns:a16="http://schemas.microsoft.com/office/drawing/2014/main" id="{14B2F641-F6B7-41C9-9B05-92A84A296E65}"/>
               </a:ext>
             </a:extLst>
           </p:cNvPr>
@@ -31517,7 +31517,7 @@
           <p:cNvPr id="5" name="">
             <a:extLst xmlns:a="http://schemas.openxmlformats.org/drawingml/2006/main">
               <a:ext uri="{FF2B5EF4-FFF2-40B4-BE49-F238E27FC236}">
-                <a16:creationId xmlns:a16="http://schemas.microsoft.com/office/drawing/2014/main" id="{0AB49103-5387-45C9-9C33-2667B62734CF}"/>
+                <a16:creationId xmlns:a16="http://schemas.microsoft.com/office/drawing/2014/main" id="{EF762862-844D-4807-A4B4-13B50E74145B}"/>
               </a:ext>
             </a:extLst>
           </p:cNvPr>
@@ -31550,7 +31550,7 @@
           <p:cNvPr id="6" name="">
             <a:extLst xmlns:a="http://schemas.openxmlformats.org/drawingml/2006/main">
               <a:ext uri="{FF2B5EF4-FFF2-40B4-BE49-F238E27FC236}">
-                <a16:creationId xmlns:a16="http://schemas.microsoft.com/office/drawing/2014/main" id="{5120024B-CA68-4BA7-B812-F2BC3A2E7F3B}"/>
+                <a16:creationId xmlns:a16="http://schemas.microsoft.com/office/drawing/2014/main" id="{26A77553-95B7-4BAF-9D13-69494054E24F}"/>
               </a:ext>
             </a:extLst>
           </p:cNvPr>
@@ -31583,7 +31583,7 @@
           <p:cNvPr id="7" name="">
             <a:extLst xmlns:a="http://schemas.openxmlformats.org/drawingml/2006/main">
               <a:ext uri="{FF2B5EF4-FFF2-40B4-BE49-F238E27FC236}">
-                <a16:creationId xmlns:a16="http://schemas.microsoft.com/office/drawing/2014/main" id="{E206A804-D662-49B2-B28C-A3B8C2BA22ED}"/>
+                <a16:creationId xmlns:a16="http://schemas.microsoft.com/office/drawing/2014/main" id="{C1E932A6-81DE-4B12-A850-4A35B7545BBF}"/>
               </a:ext>
             </a:extLst>
           </p:cNvPr>
@@ -31616,7 +31616,7 @@
           <p:cNvPr id="8" name="">
             <a:extLst xmlns:a="http://schemas.openxmlformats.org/drawingml/2006/main">
               <a:ext uri="{FF2B5EF4-FFF2-40B4-BE49-F238E27FC236}">
-                <a16:creationId xmlns:a16="http://schemas.microsoft.com/office/drawing/2014/main" id="{5D1E30FD-5429-4076-8788-68C781959336}"/>
+                <a16:creationId xmlns:a16="http://schemas.microsoft.com/office/drawing/2014/main" id="{3899F2C2-A5ED-43A3-BAF2-397A3FE3868C}"/>
               </a:ext>
             </a:extLst>
           </p:cNvPr>
@@ -31649,7 +31649,7 @@
           <p:cNvPr id="9" name="">
             <a:extLst xmlns:a="http://schemas.openxmlformats.org/drawingml/2006/main">
               <a:ext uri="{FF2B5EF4-FFF2-40B4-BE49-F238E27FC236}">
-                <a16:creationId xmlns:a16="http://schemas.microsoft.com/office/drawing/2014/main" id="{0572D76D-DF8C-4E7C-8EBF-A8AB5BB406C8}"/>
+                <a16:creationId xmlns:a16="http://schemas.microsoft.com/office/drawing/2014/main" id="{A142CC02-BB09-424A-BA4F-D2E94CC11426}"/>
               </a:ext>
             </a:extLst>
           </p:cNvPr>
@@ -31690,7 +31690,7 @@
           <p:cNvPr id="10" name="">
             <a:extLst xmlns:a="http://schemas.openxmlformats.org/drawingml/2006/main">
               <a:ext uri="{FF2B5EF4-FFF2-40B4-BE49-F238E27FC236}">
-                <a16:creationId xmlns:a16="http://schemas.microsoft.com/office/drawing/2014/main" id="{E1C8F126-2CF0-4501-B14E-1E00B8C6D180}"/>
+                <a16:creationId xmlns:a16="http://schemas.microsoft.com/office/drawing/2014/main" id="{A5403235-C18B-41F2-85A9-E8FBAF1A44FC}"/>
               </a:ext>
             </a:extLst>
           </p:cNvPr>
@@ -31752,7 +31752,7 @@
           <p:cNvPr id="11" name="">
             <a:extLst xmlns:a="http://schemas.openxmlformats.org/drawingml/2006/main">
               <a:ext uri="{FF2B5EF4-FFF2-40B4-BE49-F238E27FC236}">
-                <a16:creationId xmlns:a16="http://schemas.microsoft.com/office/drawing/2014/main" id="{73794E22-5365-43D2-907D-20EF0DE7A718}"/>
+                <a16:creationId xmlns:a16="http://schemas.microsoft.com/office/drawing/2014/main" id="{FF45D489-7E49-470D-85CC-53F7B07ABD0A}"/>
               </a:ext>
             </a:extLst>
           </p:cNvPr>
@@ -31814,7 +31814,7 @@
           <p:cNvPr id="12" name="">
             <a:extLst xmlns:a="http://schemas.openxmlformats.org/drawingml/2006/main">
               <a:ext uri="{FF2B5EF4-FFF2-40B4-BE49-F238E27FC236}">
-                <a16:creationId xmlns:a16="http://schemas.microsoft.com/office/drawing/2014/main" id="{645FAD1D-11EC-4681-A062-20C44C14D6F9}"/>
+                <a16:creationId xmlns:a16="http://schemas.microsoft.com/office/drawing/2014/main" id="{05DEC0C5-6552-412F-87BA-6A5C7BAFF015}"/>
               </a:ext>
             </a:extLst>
           </p:cNvPr>
@@ -31855,7 +31855,7 @@
           <p:cNvPr id="13" name="">
             <a:extLst xmlns:a="http://schemas.openxmlformats.org/drawingml/2006/main">
               <a:ext uri="{FF2B5EF4-FFF2-40B4-BE49-F238E27FC236}">
-                <a16:creationId xmlns:a16="http://schemas.microsoft.com/office/drawing/2014/main" id="{A19885D5-9915-498D-94BF-4BDF52338FF8}"/>
+                <a16:creationId xmlns:a16="http://schemas.microsoft.com/office/drawing/2014/main" id="{32FFAC78-C18D-4048-9B30-FA43597685B1}"/>
               </a:ext>
             </a:extLst>
           </p:cNvPr>
@@ -31917,7 +31917,7 @@
           <p:cNvPr id="14" name="">
             <a:extLst xmlns:a="http://schemas.openxmlformats.org/drawingml/2006/main">
               <a:ext uri="{FF2B5EF4-FFF2-40B4-BE49-F238E27FC236}">
-                <a16:creationId xmlns:a16="http://schemas.microsoft.com/office/drawing/2014/main" id="{D7C351C9-888A-4793-8F6D-C0493753B53C}"/>
+                <a16:creationId xmlns:a16="http://schemas.microsoft.com/office/drawing/2014/main" id="{6DFBC895-05A8-48C8-91BF-6C7C2DC7E577}"/>
               </a:ext>
             </a:extLst>
           </p:cNvPr>
@@ -31979,7 +31979,7 @@
           <p:cNvPr id="15" name="">
             <a:extLst xmlns:a="http://schemas.openxmlformats.org/drawingml/2006/main">
               <a:ext uri="{FF2B5EF4-FFF2-40B4-BE49-F238E27FC236}">
-                <a16:creationId xmlns:a16="http://schemas.microsoft.com/office/drawing/2014/main" id="{2166D072-AACF-4C63-AD25-3189CDA465DD}"/>
+                <a16:creationId xmlns:a16="http://schemas.microsoft.com/office/drawing/2014/main" id="{7F5FD6B9-2B97-4071-AB85-9F372E0E5430}"/>
               </a:ext>
             </a:extLst>
           </p:cNvPr>
@@ -32020,7 +32020,7 @@
           <p:cNvPr id="16" name="">
             <a:extLst xmlns:a="http://schemas.openxmlformats.org/drawingml/2006/main">
               <a:ext uri="{FF2B5EF4-FFF2-40B4-BE49-F238E27FC236}">
-                <a16:creationId xmlns:a16="http://schemas.microsoft.com/office/drawing/2014/main" id="{26B2204D-AB64-4C81-B0C8-AE24C4DB4ACE}"/>
+                <a16:creationId xmlns:a16="http://schemas.microsoft.com/office/drawing/2014/main" id="{4B910A44-96ED-425E-ACC4-EF19BF5DF833}"/>
               </a:ext>
             </a:extLst>
           </p:cNvPr>
@@ -32082,7 +32082,7 @@
           <p:cNvPr id="17" name="">
             <a:extLst xmlns:a="http://schemas.openxmlformats.org/drawingml/2006/main">
               <a:ext uri="{FF2B5EF4-FFF2-40B4-BE49-F238E27FC236}">
-                <a16:creationId xmlns:a16="http://schemas.microsoft.com/office/drawing/2014/main" id="{E298C1FF-0350-4D73-A2CF-F4DCB1171F1B}"/>
+                <a16:creationId xmlns:a16="http://schemas.microsoft.com/office/drawing/2014/main" id="{5C27E3A7-1170-49D9-A489-33FF97ADB2DA}"/>
               </a:ext>
             </a:extLst>
           </p:cNvPr>
@@ -32144,7 +32144,7 @@
           <p:cNvPr id="18" name="">
             <a:extLst xmlns:a="http://schemas.openxmlformats.org/drawingml/2006/main">
               <a:ext uri="{FF2B5EF4-FFF2-40B4-BE49-F238E27FC236}">
-                <a16:creationId xmlns:a16="http://schemas.microsoft.com/office/drawing/2014/main" id="{C1009416-A435-4403-8588-AFB1AE5B793E}"/>
+                <a16:creationId xmlns:a16="http://schemas.microsoft.com/office/drawing/2014/main" id="{97C5E1DD-3A9C-41BC-B6D5-F7A73DDCC86F}"/>
               </a:ext>
             </a:extLst>
           </p:cNvPr>
@@ -32185,7 +32185,7 @@
           <p:cNvPr id="19" name="">
             <a:extLst xmlns:a="http://schemas.openxmlformats.org/drawingml/2006/main">
               <a:ext uri="{FF2B5EF4-FFF2-40B4-BE49-F238E27FC236}">
-                <a16:creationId xmlns:a16="http://schemas.microsoft.com/office/drawing/2014/main" id="{977246AD-7721-4155-8B98-0B8D189D9B58}"/>
+                <a16:creationId xmlns:a16="http://schemas.microsoft.com/office/drawing/2014/main" id="{18D58EB3-8E3F-41B4-BCD5-AF7BB02915E9}"/>
               </a:ext>
             </a:extLst>
           </p:cNvPr>
@@ -32247,7 +32247,7 @@
           <p:cNvPr id="20" name="">
             <a:extLst xmlns:a="http://schemas.openxmlformats.org/drawingml/2006/main">
               <a:ext uri="{FF2B5EF4-FFF2-40B4-BE49-F238E27FC236}">
-                <a16:creationId xmlns:a16="http://schemas.microsoft.com/office/drawing/2014/main" id="{9CC00CA5-BBE8-4266-8E18-404D543F4DD5}"/>
+                <a16:creationId xmlns:a16="http://schemas.microsoft.com/office/drawing/2014/main" id="{1D35CFE2-B708-431E-9EAD-0767FEDAB78A}"/>
               </a:ext>
             </a:extLst>
           </p:cNvPr>
@@ -32309,7 +32309,7 @@
           <p:cNvPr id="21" name="">
             <a:extLst xmlns:a="http://schemas.openxmlformats.org/drawingml/2006/main">
               <a:ext uri="{FF2B5EF4-FFF2-40B4-BE49-F238E27FC236}">
-                <a16:creationId xmlns:a16="http://schemas.microsoft.com/office/drawing/2014/main" id="{E13DFB9E-2F1B-4EF5-8F7A-CBF357E132EA}"/>
+                <a16:creationId xmlns:a16="http://schemas.microsoft.com/office/drawing/2014/main" id="{07EF4FB6-1068-4B33-AC2E-709A235EA533}"/>
               </a:ext>
             </a:extLst>
           </p:cNvPr>
@@ -32350,7 +32350,7 @@
           <p:cNvPr id="22" name="">
             <a:extLst xmlns:a="http://schemas.openxmlformats.org/drawingml/2006/main">
               <a:ext uri="{FF2B5EF4-FFF2-40B4-BE49-F238E27FC236}">
-                <a16:creationId xmlns:a16="http://schemas.microsoft.com/office/drawing/2014/main" id="{F29D4A6A-8C1D-484E-822B-5BF276C35A29}"/>
+                <a16:creationId xmlns:a16="http://schemas.microsoft.com/office/drawing/2014/main" id="{C70BC9CD-C20F-4FE1-8277-EC498ADB4CC2}"/>
               </a:ext>
             </a:extLst>
           </p:cNvPr>
@@ -32412,7 +32412,7 @@
           <p:cNvPr id="23" name="">
             <a:extLst xmlns:a="http://schemas.openxmlformats.org/drawingml/2006/main">
               <a:ext uri="{FF2B5EF4-FFF2-40B4-BE49-F238E27FC236}">
-                <a16:creationId xmlns:a16="http://schemas.microsoft.com/office/drawing/2014/main" id="{9D6F0F02-4F2B-4747-AF37-DF221FB9F0D9}"/>
+                <a16:creationId xmlns:a16="http://schemas.microsoft.com/office/drawing/2014/main" id="{453A9FC1-B749-481D-9228-D1289CB1C6D1}"/>
               </a:ext>
             </a:extLst>
           </p:cNvPr>
@@ -32474,7 +32474,7 @@
           <p:cNvPr id="24" name="">
             <a:extLst xmlns:a="http://schemas.openxmlformats.org/drawingml/2006/main">
               <a:ext uri="{FF2B5EF4-FFF2-40B4-BE49-F238E27FC236}">
-                <a16:creationId xmlns:a16="http://schemas.microsoft.com/office/drawing/2014/main" id="{CCDE3A73-DBBD-4091-BF55-D245A2367536}"/>
+                <a16:creationId xmlns:a16="http://schemas.microsoft.com/office/drawing/2014/main" id="{55641CCC-C8EC-41C9-A74A-5AE4795EAB58}"/>
               </a:ext>
             </a:extLst>
           </p:cNvPr>
@@ -32507,7 +32507,7 @@
           <p:cNvPr id="25" name="">
             <a:extLst xmlns:a="http://schemas.openxmlformats.org/drawingml/2006/main">
               <a:ext uri="{FF2B5EF4-FFF2-40B4-BE49-F238E27FC236}">
-                <a16:creationId xmlns:a16="http://schemas.microsoft.com/office/drawing/2014/main" id="{40ED31A0-A2D2-4206-95C1-A75DF44818E9}"/>
+                <a16:creationId xmlns:a16="http://schemas.microsoft.com/office/drawing/2014/main" id="{805C72EA-AAE1-46ED-B3E9-4D0C82961812}"/>
               </a:ext>
             </a:extLst>
           </p:cNvPr>
@@ -32569,7 +32569,7 @@
           <p:cNvPr id="26" name="">
             <a:extLst xmlns:a="http://schemas.openxmlformats.org/drawingml/2006/main">
               <a:ext uri="{FF2B5EF4-FFF2-40B4-BE49-F238E27FC236}">
-                <a16:creationId xmlns:a16="http://schemas.microsoft.com/office/drawing/2014/main" id="{0D9C000D-E88B-42BF-BCD3-61C418D22FCE}"/>
+                <a16:creationId xmlns:a16="http://schemas.microsoft.com/office/drawing/2014/main" id="{D891A515-41B8-47A8-91D2-C51DA8507F1D}"/>
               </a:ext>
             </a:extLst>
           </p:cNvPr>
@@ -32602,7 +32602,7 @@
           <p:cNvPr id="27" name="">
             <a:extLst xmlns:a="http://schemas.openxmlformats.org/drawingml/2006/main">
               <a:ext uri="{FF2B5EF4-FFF2-40B4-BE49-F238E27FC236}">
-                <a16:creationId xmlns:a16="http://schemas.microsoft.com/office/drawing/2014/main" id="{B41B9B09-ED95-4FBB-9371-CD1CEA93DFDE}"/>
+                <a16:creationId xmlns:a16="http://schemas.microsoft.com/office/drawing/2014/main" id="{21CBC163-9A3C-4BF7-8F51-FA137C127FA6}"/>
               </a:ext>
             </a:extLst>
           </p:cNvPr>
@@ -32664,7 +32664,7 @@
           <p:cNvPr id="28" name="">
             <a:extLst xmlns:a="http://schemas.openxmlformats.org/drawingml/2006/main">
               <a:ext uri="{FF2B5EF4-FFF2-40B4-BE49-F238E27FC236}">
-                <a16:creationId xmlns:a16="http://schemas.microsoft.com/office/drawing/2014/main" id="{395297D8-93F0-4542-B2B0-CFECF7FCEE6F}"/>
+                <a16:creationId xmlns:a16="http://schemas.microsoft.com/office/drawing/2014/main" id="{C16FE3F2-49C9-41B9-90F2-F5B48DD3E90E}"/>
               </a:ext>
             </a:extLst>
           </p:cNvPr>
@@ -32697,7 +32697,7 @@
           <p:cNvPr id="29" name="">
             <a:extLst xmlns:a="http://schemas.openxmlformats.org/drawingml/2006/main">
               <a:ext uri="{FF2B5EF4-FFF2-40B4-BE49-F238E27FC236}">
-                <a16:creationId xmlns:a16="http://schemas.microsoft.com/office/drawing/2014/main" id="{06C57BDD-089D-4D7C-9A2F-86E1940935CB}"/>
+                <a16:creationId xmlns:a16="http://schemas.microsoft.com/office/drawing/2014/main" id="{36EE81D9-17AC-4E0C-BEDD-842DFDCDB87C}"/>
               </a:ext>
             </a:extLst>
           </p:cNvPr>
@@ -32759,7 +32759,7 @@
           <p:cNvPr id="30" name="">
             <a:extLst xmlns:a="http://schemas.openxmlformats.org/drawingml/2006/main">
               <a:ext uri="{FF2B5EF4-FFF2-40B4-BE49-F238E27FC236}">
-                <a16:creationId xmlns:a16="http://schemas.microsoft.com/office/drawing/2014/main" id="{86B0D439-9EB8-4B3E-B912-69B038A02355}"/>
+                <a16:creationId xmlns:a16="http://schemas.microsoft.com/office/drawing/2014/main" id="{3559C584-35BC-4DFE-969F-416517E2DFED}"/>
               </a:ext>
             </a:extLst>
           </p:cNvPr>
@@ -32792,7 +32792,7 @@
           <p:cNvPr id="31" name="">
             <a:extLst xmlns:a="http://schemas.openxmlformats.org/drawingml/2006/main">
               <a:ext uri="{FF2B5EF4-FFF2-40B4-BE49-F238E27FC236}">
-                <a16:creationId xmlns:a16="http://schemas.microsoft.com/office/drawing/2014/main" id="{779729AD-BA89-4530-B91C-5E3A86E8D6AE}"/>
+                <a16:creationId xmlns:a16="http://schemas.microsoft.com/office/drawing/2014/main" id="{64E52B33-31AA-4ABF-AA87-99D07D03A90D}"/>
               </a:ext>
             </a:extLst>
           </p:cNvPr>
@@ -32854,7 +32854,7 @@
           <p:cNvPr id="32" name="">
             <a:extLst xmlns:a="http://schemas.openxmlformats.org/drawingml/2006/main">
               <a:ext uri="{FF2B5EF4-FFF2-40B4-BE49-F238E27FC236}">
-                <a16:creationId xmlns:a16="http://schemas.microsoft.com/office/drawing/2014/main" id="{BCF01500-846B-4C01-B7CD-79D1BA73A8DC}"/>
+                <a16:creationId xmlns:a16="http://schemas.microsoft.com/office/drawing/2014/main" id="{A3805D89-8928-426F-AB39-0876BD54B157}"/>
               </a:ext>
             </a:extLst>
           </p:cNvPr>
@@ -32895,7 +32895,7 @@
           <p:cNvPr id="33" name="">
             <a:extLst xmlns:a="http://schemas.openxmlformats.org/drawingml/2006/main">
               <a:ext uri="{FF2B5EF4-FFF2-40B4-BE49-F238E27FC236}">
-                <a16:creationId xmlns:a16="http://schemas.microsoft.com/office/drawing/2014/main" id="{81AEE7D5-1D55-410C-B587-F047EC408401}"/>
+                <a16:creationId xmlns:a16="http://schemas.microsoft.com/office/drawing/2014/main" id="{C02F729E-6BDE-4824-AAB0-D9A888139964}"/>
               </a:ext>
             </a:extLst>
           </p:cNvPr>
@@ -32957,7 +32957,7 @@
           <p:cNvPr id="34" name="">
             <a:extLst xmlns:a="http://schemas.openxmlformats.org/drawingml/2006/main">
               <a:ext uri="{FF2B5EF4-FFF2-40B4-BE49-F238E27FC236}">
-                <a16:creationId xmlns:a16="http://schemas.microsoft.com/office/drawing/2014/main" id="{8A45122C-1D56-4A94-A48C-F67EB938486B}"/>
+                <a16:creationId xmlns:a16="http://schemas.microsoft.com/office/drawing/2014/main" id="{1D505D2F-D25D-4790-A991-9BD5F9E9EED4}"/>
               </a:ext>
             </a:extLst>
           </p:cNvPr>
@@ -33019,7 +33019,7 @@
           <p:cNvPr id="35" name="">
             <a:extLst xmlns:a="http://schemas.openxmlformats.org/drawingml/2006/main">
               <a:ext uri="{FF2B5EF4-FFF2-40B4-BE49-F238E27FC236}">
-                <a16:creationId xmlns:a16="http://schemas.microsoft.com/office/drawing/2014/main" id="{9A862CA6-B7CC-42D6-A693-B1563FA7C40A}"/>
+                <a16:creationId xmlns:a16="http://schemas.microsoft.com/office/drawing/2014/main" id="{334F5781-C588-4D41-A072-3B3C857F7A90}"/>
               </a:ext>
             </a:extLst>
           </p:cNvPr>
@@ -33050,7 +33050,7 @@
           <p:cNvPr id="36" name="">
             <a:extLst xmlns:a="http://schemas.openxmlformats.org/drawingml/2006/main">
               <a:ext uri="{FF2B5EF4-FFF2-40B4-BE49-F238E27FC236}">
-                <a16:creationId xmlns:a16="http://schemas.microsoft.com/office/drawing/2014/main" id="{6208130C-3576-42BE-B419-7AB44E130A61}"/>
+                <a16:creationId xmlns:a16="http://schemas.microsoft.com/office/drawing/2014/main" id="{FF68698D-724A-4A38-8E89-7D36542DCB2C}"/>
               </a:ext>
             </a:extLst>
           </p:cNvPr>
@@ -33112,7 +33112,7 @@
           <p:cNvPr id="37" name="">
             <a:extLst xmlns:a="http://schemas.openxmlformats.org/drawingml/2006/main">
               <a:ext uri="{FF2B5EF4-FFF2-40B4-BE49-F238E27FC236}">
-                <a16:creationId xmlns:a16="http://schemas.microsoft.com/office/drawing/2014/main" id="{E0A224FF-BA9E-4273-9CE7-EBD5CE77EBCE}"/>
+                <a16:creationId xmlns:a16="http://schemas.microsoft.com/office/drawing/2014/main" id="{90D5FB9C-F718-4862-B252-8B1D493DD9AF}"/>
               </a:ext>
             </a:extLst>
           </p:cNvPr>
@@ -33172,7 +33172,7 @@
     </p:spTree>
     <p:extLst>
       <p:ext uri="{BB962C8B-B14F-4D97-AF65-F5344CB8AC3E}">
-        <p14:creationId xmlns:p14="http://schemas.microsoft.com/office/powerpoint/2010/main" val="1382919833"/>
+        <p14:creationId xmlns:p14="http://schemas.microsoft.com/office/powerpoint/2010/main" val="7729252"/>
       </p:ext>
     </p:extLst>
   </p:cSld>
@@ -33203,7 +33203,7 @@
           <p:cNvPr id="1" name="">
             <a:extLst xmlns:a="http://schemas.openxmlformats.org/drawingml/2006/main">
               <a:ext uri="{FF2B5EF4-FFF2-40B4-BE49-F238E27FC236}">
-                <a16:creationId xmlns:a16="http://schemas.microsoft.com/office/drawing/2014/main" id="{F750243C-E3A9-4951-8011-404894128428}"/>
+                <a16:creationId xmlns:a16="http://schemas.microsoft.com/office/drawing/2014/main" id="{39BA594D-3F84-411A-AC9F-BEE610A71D20}"/>
               </a:ext>
             </a:extLst>
           </p:cNvPr>
@@ -33265,7 +33265,7 @@
           <p:cNvPr id="2" name="">
             <a:extLst xmlns:a="http://schemas.openxmlformats.org/drawingml/2006/main">
               <a:ext uri="{FF2B5EF4-FFF2-40B4-BE49-F238E27FC236}">
-                <a16:creationId xmlns:a16="http://schemas.microsoft.com/office/drawing/2014/main" id="{C3BC929F-F37E-4064-8913-ABA0D9976116}"/>
+                <a16:creationId xmlns:a16="http://schemas.microsoft.com/office/drawing/2014/main" id="{2022F1ED-0079-42D4-8ABF-CC09471FBEE5}"/>
               </a:ext>
             </a:extLst>
           </p:cNvPr>
@@ -33327,7 +33327,7 @@
           <p:cNvPr id="3" name="">
             <a:extLst xmlns:a="http://schemas.openxmlformats.org/drawingml/2006/main">
               <a:ext uri="{FF2B5EF4-FFF2-40B4-BE49-F238E27FC236}">
-                <a16:creationId xmlns:a16="http://schemas.microsoft.com/office/drawing/2014/main" id="{B6D47AF3-0E12-4E61-A940-8A400F5C5A91}"/>
+                <a16:creationId xmlns:a16="http://schemas.microsoft.com/office/drawing/2014/main" id="{364C220A-188F-4BC5-94FB-EEBF2C572349}"/>
               </a:ext>
             </a:extLst>
           </p:cNvPr>
@@ -33368,7 +33368,7 @@
           <p:cNvPr id="4" name="">
             <a:extLst xmlns:a="http://schemas.openxmlformats.org/drawingml/2006/main">
               <a:ext uri="{FF2B5EF4-FFF2-40B4-BE49-F238E27FC236}">
-                <a16:creationId xmlns:a16="http://schemas.microsoft.com/office/drawing/2014/main" id="{986F7B0C-9F8E-4321-9FAA-7818F3E5D36C}"/>
+                <a16:creationId xmlns:a16="http://schemas.microsoft.com/office/drawing/2014/main" id="{F4FE5EA0-85CB-40BC-953F-89F484A2270F}"/>
               </a:ext>
             </a:extLst>
           </p:cNvPr>
@@ -33430,7 +33430,7 @@
           <p:cNvPr id="5" name="">
             <a:extLst xmlns:a="http://schemas.openxmlformats.org/drawingml/2006/main">
               <a:ext uri="{FF2B5EF4-FFF2-40B4-BE49-F238E27FC236}">
-                <a16:creationId xmlns:a16="http://schemas.microsoft.com/office/drawing/2014/main" id="{E19D98CF-53DD-4655-A783-76026AAD0C9E}"/>
+                <a16:creationId xmlns:a16="http://schemas.microsoft.com/office/drawing/2014/main" id="{F91182BD-220A-4139-A7FC-B91440AE6FC7}"/>
               </a:ext>
             </a:extLst>
           </p:cNvPr>
@@ -33573,7 +33573,7 @@
           <p:cNvPr id="6" name="">
             <a:extLst xmlns:a="http://schemas.openxmlformats.org/drawingml/2006/main">
               <a:ext uri="{FF2B5EF4-FFF2-40B4-BE49-F238E27FC236}">
-                <a16:creationId xmlns:a16="http://schemas.microsoft.com/office/drawing/2014/main" id="{5B2D4C08-1FF1-4602-942D-CF206A323F3B}"/>
+                <a16:creationId xmlns:a16="http://schemas.microsoft.com/office/drawing/2014/main" id="{4BCCCEED-DF8A-4568-9E4A-4A98F0FA6B33}"/>
               </a:ext>
             </a:extLst>
           </p:cNvPr>
@@ -33614,7 +33614,7 @@
           <p:cNvPr id="7" name="">
             <a:extLst xmlns:a="http://schemas.openxmlformats.org/drawingml/2006/main">
               <a:ext uri="{FF2B5EF4-FFF2-40B4-BE49-F238E27FC236}">
-                <a16:creationId xmlns:a16="http://schemas.microsoft.com/office/drawing/2014/main" id="{2AEDA0F1-8878-4BFE-8F5E-A6907285CA1E}"/>
+                <a16:creationId xmlns:a16="http://schemas.microsoft.com/office/drawing/2014/main" id="{1FE09EE5-FF5F-4E14-B7DF-79B150977192}"/>
               </a:ext>
             </a:extLst>
           </p:cNvPr>
@@ -33676,7 +33676,7 @@
           <p:cNvPr id="8" name="">
             <a:extLst xmlns:a="http://schemas.openxmlformats.org/drawingml/2006/main">
               <a:ext uri="{FF2B5EF4-FFF2-40B4-BE49-F238E27FC236}">
-                <a16:creationId xmlns:a16="http://schemas.microsoft.com/office/drawing/2014/main" id="{06732D10-5530-4F0C-BEAB-A534FBD26413}"/>
+                <a16:creationId xmlns:a16="http://schemas.microsoft.com/office/drawing/2014/main" id="{4614409D-F289-46DA-B87C-257276A8E29C}"/>
               </a:ext>
             </a:extLst>
           </p:cNvPr>
@@ -33846,7 +33846,7 @@
           <p:cNvPr id="9" name="">
             <a:extLst xmlns:a="http://schemas.openxmlformats.org/drawingml/2006/main">
               <a:ext uri="{FF2B5EF4-FFF2-40B4-BE49-F238E27FC236}">
-                <a16:creationId xmlns:a16="http://schemas.microsoft.com/office/drawing/2014/main" id="{3D8D0D71-252C-4730-ABA5-9F626C865D10}"/>
+                <a16:creationId xmlns:a16="http://schemas.microsoft.com/office/drawing/2014/main" id="{F59C4A62-E524-425C-87A6-0D8E40B641BA}"/>
               </a:ext>
             </a:extLst>
           </p:cNvPr>
@@ -33879,7 +33879,7 @@
           <p:cNvPr id="10" name="">
             <a:extLst xmlns:a="http://schemas.openxmlformats.org/drawingml/2006/main">
               <a:ext uri="{FF2B5EF4-FFF2-40B4-BE49-F238E27FC236}">
-                <a16:creationId xmlns:a16="http://schemas.microsoft.com/office/drawing/2014/main" id="{061D9A1C-9E43-4307-8DC6-2A7C41FA52BC}"/>
+                <a16:creationId xmlns:a16="http://schemas.microsoft.com/office/drawing/2014/main" id="{52F11575-853C-46CF-9308-0EC5D12DCA16}"/>
               </a:ext>
             </a:extLst>
           </p:cNvPr>
@@ -33941,7 +33941,7 @@
           <p:cNvPr id="11" name="">
             <a:extLst xmlns:a="http://schemas.openxmlformats.org/drawingml/2006/main">
               <a:ext uri="{FF2B5EF4-FFF2-40B4-BE49-F238E27FC236}">
-                <a16:creationId xmlns:a16="http://schemas.microsoft.com/office/drawing/2014/main" id="{DBB4B0E9-DBCC-4C15-A736-B7B173B7DDF6}"/>
+                <a16:creationId xmlns:a16="http://schemas.microsoft.com/office/drawing/2014/main" id="{1260CA34-0DAA-4097-910D-E458A5E7A12C}"/>
               </a:ext>
             </a:extLst>
           </p:cNvPr>
@@ -33972,7 +33972,7 @@
           <p:cNvPr id="12" name="">
             <a:extLst xmlns:a="http://schemas.openxmlformats.org/drawingml/2006/main">
               <a:ext uri="{FF2B5EF4-FFF2-40B4-BE49-F238E27FC236}">
-                <a16:creationId xmlns:a16="http://schemas.microsoft.com/office/drawing/2014/main" id="{136A4330-909C-4684-93DF-A41B78661D63}"/>
+                <a16:creationId xmlns:a16="http://schemas.microsoft.com/office/drawing/2014/main" id="{A7039118-4A00-46B4-B026-AF624AFB5A42}"/>
               </a:ext>
             </a:extLst>
           </p:cNvPr>
@@ -34034,7 +34034,7 @@
           <p:cNvPr id="13" name="">
             <a:extLst xmlns:a="http://schemas.openxmlformats.org/drawingml/2006/main">
               <a:ext uri="{FF2B5EF4-FFF2-40B4-BE49-F238E27FC236}">
-                <a16:creationId xmlns:a16="http://schemas.microsoft.com/office/drawing/2014/main" id="{FDDC10AD-66A3-4506-9330-4FF78D540B96}"/>
+                <a16:creationId xmlns:a16="http://schemas.microsoft.com/office/drawing/2014/main" id="{A0CF341F-934A-4716-9FD1-68C0A078A574}"/>
               </a:ext>
             </a:extLst>
           </p:cNvPr>
@@ -34094,7 +34094,7 @@
     </p:spTree>
     <p:extLst>
       <p:ext uri="{BB962C8B-B14F-4D97-AF65-F5344CB8AC3E}">
-        <p14:creationId xmlns:p14="http://schemas.microsoft.com/office/powerpoint/2010/main" val="156114211"/>
+        <p14:creationId xmlns:p14="http://schemas.microsoft.com/office/powerpoint/2010/main" val="130992669"/>
       </p:ext>
     </p:extLst>
   </p:cSld>

--- a/reports/SpatialScope_Agent_Presentation.pptx
+++ b/reports/SpatialScope_Agent_Presentation.pptx
@@ -2,28 +2,28 @@
 <file path=ppt/presentation.xml><?xml version="1.0" encoding="utf-8"?>
 <p:presentation xmlns:p="http://schemas.openxmlformats.org/presentationml/2006/main">
   <p:sldMasterIdLst>
-    <p:sldMasterId xmlns:r="http://schemas.openxmlformats.org/officeDocument/2006/relationships" id="2147483648" r:id="R8d5f0b3269ae45a9"/>
+    <p:sldMasterId xmlns:r="http://schemas.openxmlformats.org/officeDocument/2006/relationships" id="2147483648" r:id="Rd6db5bd9caa84a68"/>
   </p:sldMasterIdLst>
   <p:notesMasterIdLst>
-    <p:notesMasterId xmlns:r="http://schemas.openxmlformats.org/officeDocument/2006/relationships" r:id="R92c2ea070e8a44ec"/>
+    <p:notesMasterId xmlns:r="http://schemas.openxmlformats.org/officeDocument/2006/relationships" r:id="Ra407b728c9cb484a"/>
   </p:notesMasterIdLst>
   <p:sldIdLst>
-    <p:sldId xmlns:r="http://schemas.openxmlformats.org/officeDocument/2006/relationships" id="256" r:id="Rd3f296bac9074188"/>
-    <p:sldId xmlns:r="http://schemas.openxmlformats.org/officeDocument/2006/relationships" id="257" r:id="R9320aaef8d1540ca"/>
-    <p:sldId xmlns:r="http://schemas.openxmlformats.org/officeDocument/2006/relationships" id="258" r:id="R8e10a1e1fc8340bc"/>
-    <p:sldId xmlns:r="http://schemas.openxmlformats.org/officeDocument/2006/relationships" id="259" r:id="Rd08cd9c2bcf6409a"/>
-    <p:sldId xmlns:r="http://schemas.openxmlformats.org/officeDocument/2006/relationships" id="260" r:id="R3964e170d55c463d"/>
-    <p:sldId xmlns:r="http://schemas.openxmlformats.org/officeDocument/2006/relationships" id="261" r:id="R61c32dd8538d43c9"/>
-    <p:sldId xmlns:r="http://schemas.openxmlformats.org/officeDocument/2006/relationships" id="262" r:id="Re4371ec4ee774393"/>
-    <p:sldId xmlns:r="http://schemas.openxmlformats.org/officeDocument/2006/relationships" id="263" r:id="R05e3a48ecb084327"/>
-    <p:sldId xmlns:r="http://schemas.openxmlformats.org/officeDocument/2006/relationships" id="264" r:id="R8b64fb99335145e4"/>
-    <p:sldId xmlns:r="http://schemas.openxmlformats.org/officeDocument/2006/relationships" id="265" r:id="R43232c53d30448ff"/>
-    <p:sldId xmlns:r="http://schemas.openxmlformats.org/officeDocument/2006/relationships" id="266" r:id="Rcac66d81454f4021"/>
-    <p:sldId xmlns:r="http://schemas.openxmlformats.org/officeDocument/2006/relationships" id="267" r:id="R7cc85744212248e8"/>
-    <p:sldId xmlns:r="http://schemas.openxmlformats.org/officeDocument/2006/relationships" id="268" r:id="Re8b87d3fa9a04a3a"/>
-    <p:sldId xmlns:r="http://schemas.openxmlformats.org/officeDocument/2006/relationships" id="269" r:id="R3cb723e3f47248c8"/>
-    <p:sldId xmlns:r="http://schemas.openxmlformats.org/officeDocument/2006/relationships" id="270" r:id="R1e3245f1e5ad4176"/>
-    <p:sldId xmlns:r="http://schemas.openxmlformats.org/officeDocument/2006/relationships" id="271" r:id="R41f76896b9764c66"/>
+    <p:sldId xmlns:r="http://schemas.openxmlformats.org/officeDocument/2006/relationships" id="256" r:id="R2b4eb75d9b234377"/>
+    <p:sldId xmlns:r="http://schemas.openxmlformats.org/officeDocument/2006/relationships" id="257" r:id="R14d99f7a6e544a45"/>
+    <p:sldId xmlns:r="http://schemas.openxmlformats.org/officeDocument/2006/relationships" id="258" r:id="Rf62a3c5bda424325"/>
+    <p:sldId xmlns:r="http://schemas.openxmlformats.org/officeDocument/2006/relationships" id="259" r:id="R36aac186fecc4373"/>
+    <p:sldId xmlns:r="http://schemas.openxmlformats.org/officeDocument/2006/relationships" id="260" r:id="R9654fa54b9ed4291"/>
+    <p:sldId xmlns:r="http://schemas.openxmlformats.org/officeDocument/2006/relationships" id="261" r:id="R4c4011b1b25a4997"/>
+    <p:sldId xmlns:r="http://schemas.openxmlformats.org/officeDocument/2006/relationships" id="262" r:id="Rada5497ea2084848"/>
+    <p:sldId xmlns:r="http://schemas.openxmlformats.org/officeDocument/2006/relationships" id="263" r:id="R8c72517aa9454a5e"/>
+    <p:sldId xmlns:r="http://schemas.openxmlformats.org/officeDocument/2006/relationships" id="264" r:id="R9d4687a37d9b412e"/>
+    <p:sldId xmlns:r="http://schemas.openxmlformats.org/officeDocument/2006/relationships" id="265" r:id="R0c3cb25777d54f61"/>
+    <p:sldId xmlns:r="http://schemas.openxmlformats.org/officeDocument/2006/relationships" id="266" r:id="Rd777d1a27c82486d"/>
+    <p:sldId xmlns:r="http://schemas.openxmlformats.org/officeDocument/2006/relationships" id="267" r:id="R8e359f9f09b94698"/>
+    <p:sldId xmlns:r="http://schemas.openxmlformats.org/officeDocument/2006/relationships" id="268" r:id="Rb043a6a8b3c741de"/>
+    <p:sldId xmlns:r="http://schemas.openxmlformats.org/officeDocument/2006/relationships" id="269" r:id="R1297023e0b0c4c3e"/>
+    <p:sldId xmlns:r="http://schemas.openxmlformats.org/officeDocument/2006/relationships" id="270" r:id="R16380d032dc144c9"/>
+    <p:sldId xmlns:r="http://schemas.openxmlformats.org/officeDocument/2006/relationships" id="271" r:id="Rf89fd32f8518495a"/>
   </p:sldIdLst>
   <p:sldSz cx="12192000" cy="6858000"/>
   <p:notesSz cx="6858000" cy="9144000"/>
@@ -762,7 +762,7 @@
           <a:lstStyle xmlns:a="http://schemas.openxmlformats.org/drawingml/2006/main"/>
           <a:p xmlns:a="http://schemas.openxmlformats.org/drawingml/2006/main">
             <a:r>
-              <a:t>四个页面对应用户真实分析顺序。Project 先理解数据，Run 看执行过程，Explore 看图和问 Copilot，Report 看 findings 和 caveats。</a:t>
+              <a:t>这一页是从 PPT 切到网站的桥。先说明：前面讲的是空间转录组分析应该怎么做；接下来打开 Streamlit，看 SpatialScope 是否能把同一套流程转化成可交互、可追踪、可复核的分析体验。</a:t>
             </a:r>
           </a:p>
         </p:txBody>
@@ -832,7 +832,7 @@
           <a:lstStyle xmlns:a="http://schemas.openxmlformats.org/drawingml/2006/main"/>
           <a:p xmlns:a="http://schemas.openxmlformats.org/drawingml/2006/main">
             <a:r>
-              <a:t>Demo 展示按照标准流程展开：检查数据、生成计划、执行工具、查看 Spatial 与 UMAP，并用 evidence IDs 支撑解释。</a:t>
+              <a:t>正式演示时可以先停在这一页说路线，然后切到浏览器。演示重点不是逐个按钮介绍，而是对应前面讲过的标准流程：Project 证明数据被理解，Run 证明 LangGraph 过程可追踪，Explore 证明 Spatial 与 UMAP 能联动查看，Copilot 证明 LLM 回答受 evidence IDs 约束，Report 证明结论有 caveats。</a:t>
             </a:r>
           </a:p>
         </p:txBody>
@@ -1670,7 +1670,7 @@
   </p:cSld>
   <p:clrMap bg1="lt1" tx1="dk1" bg2="lt2" tx2="dk2" accent1="accent1" accent2="accent2" accent3="accent3" accent4="accent4" accent5="accent5" accent6="accent6" hlink="hlink" folHlink="folHlink"/>
   <p:sldLayoutIdLst>
-    <p:sldLayoutId xmlns:r="http://schemas.openxmlformats.org/officeDocument/2006/relationships" id="2147483649" r:id="Rf2d8adcd92d84cc2"/>
+    <p:sldLayoutId xmlns:r="http://schemas.openxmlformats.org/officeDocument/2006/relationships" id="2147483649" r:id="R50bf118d40ab4601"/>
   </p:sldLayoutIdLst>
   <p:txStyles>
     <p:titleStyle>
@@ -2221,7 +2221,7 @@
           <p:cNvPr id="1" name="">
             <a:extLst xmlns:a="http://schemas.openxmlformats.org/drawingml/2006/main">
               <a:ext uri="{FF2B5EF4-FFF2-40B4-BE49-F238E27FC236}">
-                <a16:creationId xmlns:a16="http://schemas.microsoft.com/office/drawing/2014/main" id="{4056573E-C47F-4AB4-9C53-8D852A23C4A5}"/>
+                <a16:creationId xmlns:a16="http://schemas.microsoft.com/office/drawing/2014/main" id="{DFD96728-B972-4E4E-940F-96ABD06188DE}"/>
               </a:ext>
             </a:extLst>
           </p:cNvPr>
@@ -2254,7 +2254,7 @@
           <p:cNvPr id="2" name="">
             <a:extLst xmlns:a="http://schemas.openxmlformats.org/drawingml/2006/main">
               <a:ext uri="{FF2B5EF4-FFF2-40B4-BE49-F238E27FC236}">
-                <a16:creationId xmlns:a16="http://schemas.microsoft.com/office/drawing/2014/main" id="{4D19539A-9A34-4738-A1AA-7E279F039B64}"/>
+                <a16:creationId xmlns:a16="http://schemas.microsoft.com/office/drawing/2014/main" id="{09A555B3-057D-4DA8-BEFF-7B680A9D6032}"/>
               </a:ext>
             </a:extLst>
           </p:cNvPr>
@@ -2291,7 +2291,7 @@
           <p:nvPr/>
         </p:nvPicPr>
         <p:blipFill>
-          <a:blip xmlns:r="http://schemas.openxmlformats.org/officeDocument/2006/relationships" xmlns:a="http://schemas.openxmlformats.org/drawingml/2006/main" r:embed="R58122b71e5ff486d"/>
+          <a:blip xmlns:r="http://schemas.openxmlformats.org/officeDocument/2006/relationships" xmlns:a="http://schemas.openxmlformats.org/drawingml/2006/main" r:embed="Rbe68896f66a749e3"/>
           <a:stretch xmlns:a="http://schemas.openxmlformats.org/drawingml/2006/main"/>
         </p:blipFill>
         <p:spPr>
@@ -2311,7 +2311,7 @@
           <p:cNvPr id="4" name="">
             <a:extLst xmlns:a="http://schemas.openxmlformats.org/drawingml/2006/main">
               <a:ext uri="{FF2B5EF4-FFF2-40B4-BE49-F238E27FC236}">
-                <a16:creationId xmlns:a16="http://schemas.microsoft.com/office/drawing/2014/main" id="{ACF0ECFB-B9C9-4972-B548-7A645683FABF}"/>
+                <a16:creationId xmlns:a16="http://schemas.microsoft.com/office/drawing/2014/main" id="{0A2D6100-491B-4BF5-A330-8F920B5364A6}"/>
               </a:ext>
             </a:extLst>
           </p:cNvPr>
@@ -2373,7 +2373,7 @@
           <p:cNvPr id="5" name="">
             <a:extLst xmlns:a="http://schemas.openxmlformats.org/drawingml/2006/main">
               <a:ext uri="{FF2B5EF4-FFF2-40B4-BE49-F238E27FC236}">
-                <a16:creationId xmlns:a16="http://schemas.microsoft.com/office/drawing/2014/main" id="{77E07AD2-55D2-48B5-A33C-F89005C880EA}"/>
+                <a16:creationId xmlns:a16="http://schemas.microsoft.com/office/drawing/2014/main" id="{160B72D6-C41A-4A0E-8006-C6E1520CACDE}"/>
               </a:ext>
             </a:extLst>
           </p:cNvPr>
@@ -2435,7 +2435,7 @@
           <p:cNvPr id="6" name="">
             <a:extLst xmlns:a="http://schemas.openxmlformats.org/drawingml/2006/main">
               <a:ext uri="{FF2B5EF4-FFF2-40B4-BE49-F238E27FC236}">
-                <a16:creationId xmlns:a16="http://schemas.microsoft.com/office/drawing/2014/main" id="{682ECDC2-85E1-48C2-B0A8-475EF250DB36}"/>
+                <a16:creationId xmlns:a16="http://schemas.microsoft.com/office/drawing/2014/main" id="{D7F1BF33-CCE6-4444-AF7F-31A6E1691626}"/>
               </a:ext>
             </a:extLst>
           </p:cNvPr>
@@ -2501,7 +2501,7 @@
           <p:nvPr/>
         </p:nvPicPr>
         <p:blipFill>
-          <a:blip xmlns:r="http://schemas.openxmlformats.org/officeDocument/2006/relationships" xmlns:a="http://schemas.openxmlformats.org/drawingml/2006/main" r:embed="R293c79c31b214ff9"/>
+          <a:blip xmlns:r="http://schemas.openxmlformats.org/officeDocument/2006/relationships" xmlns:a="http://schemas.openxmlformats.org/drawingml/2006/main" r:embed="R6bda0119fc00487a"/>
           <a:srcRect xmlns:a="http://schemas.openxmlformats.org/drawingml/2006/main" l="0" t="10358" r="0" b="10358"/>
           <a:stretch xmlns:a="http://schemas.openxmlformats.org/drawingml/2006/main">
             <a:fillRect l="0" t="0" r="0" b="0"/>
@@ -2524,7 +2524,7 @@
           <p:cNvPr id="8" name="">
             <a:extLst xmlns:a="http://schemas.openxmlformats.org/drawingml/2006/main">
               <a:ext uri="{FF2B5EF4-FFF2-40B4-BE49-F238E27FC236}">
-                <a16:creationId xmlns:a16="http://schemas.microsoft.com/office/drawing/2014/main" id="{9088EA5A-332E-4BB8-838E-06548BC3A40A}"/>
+                <a16:creationId xmlns:a16="http://schemas.microsoft.com/office/drawing/2014/main" id="{968B90C8-47BD-4337-9286-A0FA2A2B0C56}"/>
               </a:ext>
             </a:extLst>
           </p:cNvPr>
@@ -2565,7 +2565,7 @@
           <p:cNvPr id="9" name="">
             <a:extLst xmlns:a="http://schemas.openxmlformats.org/drawingml/2006/main">
               <a:ext uri="{FF2B5EF4-FFF2-40B4-BE49-F238E27FC236}">
-                <a16:creationId xmlns:a16="http://schemas.microsoft.com/office/drawing/2014/main" id="{ADC20E8F-09CF-41C5-B34A-641651BDEAF0}"/>
+                <a16:creationId xmlns:a16="http://schemas.microsoft.com/office/drawing/2014/main" id="{4989E9D8-FB31-435F-B001-A4BF450BDAB5}"/>
               </a:ext>
             </a:extLst>
           </p:cNvPr>
@@ -2627,7 +2627,7 @@
           <p:cNvPr id="10" name="">
             <a:extLst xmlns:a="http://schemas.openxmlformats.org/drawingml/2006/main">
               <a:ext uri="{FF2B5EF4-FFF2-40B4-BE49-F238E27FC236}">
-                <a16:creationId xmlns:a16="http://schemas.microsoft.com/office/drawing/2014/main" id="{0527AC6F-1042-49FF-B516-A83ADAB1EA3C}"/>
+                <a16:creationId xmlns:a16="http://schemas.microsoft.com/office/drawing/2014/main" id="{8B80E364-25CE-4DC4-BF73-54B62EFD0ECC}"/>
               </a:ext>
             </a:extLst>
           </p:cNvPr>
@@ -2689,7 +2689,7 @@
           <p:cNvPr id="11" name="">
             <a:extLst xmlns:a="http://schemas.openxmlformats.org/drawingml/2006/main">
               <a:ext uri="{FF2B5EF4-FFF2-40B4-BE49-F238E27FC236}">
-                <a16:creationId xmlns:a16="http://schemas.microsoft.com/office/drawing/2014/main" id="{5482916B-C869-487D-9488-590ABD7BA8E2}"/>
+                <a16:creationId xmlns:a16="http://schemas.microsoft.com/office/drawing/2014/main" id="{7DC943D9-E269-424F-B830-642F3F70C774}"/>
               </a:ext>
             </a:extLst>
           </p:cNvPr>
@@ -2753,7 +2753,7 @@
           <p:cNvPr id="12" name="">
             <a:extLst xmlns:a="http://schemas.openxmlformats.org/drawingml/2006/main">
               <a:ext uri="{FF2B5EF4-FFF2-40B4-BE49-F238E27FC236}">
-                <a16:creationId xmlns:a16="http://schemas.microsoft.com/office/drawing/2014/main" id="{1AE0588B-EE64-4254-AA19-9C708A4DD2C6}"/>
+                <a16:creationId xmlns:a16="http://schemas.microsoft.com/office/drawing/2014/main" id="{5B48B633-E296-4895-A493-82421A461167}"/>
               </a:ext>
             </a:extLst>
           </p:cNvPr>
@@ -2817,7 +2817,7 @@
           <p:cNvPr id="13" name="">
             <a:extLst xmlns:a="http://schemas.openxmlformats.org/drawingml/2006/main">
               <a:ext uri="{FF2B5EF4-FFF2-40B4-BE49-F238E27FC236}">
-                <a16:creationId xmlns:a16="http://schemas.microsoft.com/office/drawing/2014/main" id="{234F0D15-B0FE-4CE2-A61E-3F61A63418F4}"/>
+                <a16:creationId xmlns:a16="http://schemas.microsoft.com/office/drawing/2014/main" id="{A09BC650-527F-4283-A744-C250822ED6A2}"/>
               </a:ext>
             </a:extLst>
           </p:cNvPr>
@@ -2881,7 +2881,7 @@
           <p:cNvPr id="14" name="">
             <a:extLst xmlns:a="http://schemas.openxmlformats.org/drawingml/2006/main">
               <a:ext uri="{FF2B5EF4-FFF2-40B4-BE49-F238E27FC236}">
-                <a16:creationId xmlns:a16="http://schemas.microsoft.com/office/drawing/2014/main" id="{4ED67B37-ACE7-42D9-A4B6-2662444EC121}"/>
+                <a16:creationId xmlns:a16="http://schemas.microsoft.com/office/drawing/2014/main" id="{D386905B-4F9D-4175-BD40-B6F89813B336}"/>
               </a:ext>
             </a:extLst>
           </p:cNvPr>
@@ -2997,7 +2997,7 @@
           <p:cNvPr id="15" name="">
             <a:extLst xmlns:a="http://schemas.openxmlformats.org/drawingml/2006/main">
               <a:ext uri="{FF2B5EF4-FFF2-40B4-BE49-F238E27FC236}">
-                <a16:creationId xmlns:a16="http://schemas.microsoft.com/office/drawing/2014/main" id="{D142AD7B-24C5-4998-A36E-5EC22C5CFE2C}"/>
+                <a16:creationId xmlns:a16="http://schemas.microsoft.com/office/drawing/2014/main" id="{77881217-8AC3-442E-AD75-8ABB59939617}"/>
               </a:ext>
             </a:extLst>
           </p:cNvPr>
@@ -3028,7 +3028,7 @@
           <p:cNvPr id="16" name="">
             <a:extLst xmlns:a="http://schemas.openxmlformats.org/drawingml/2006/main">
               <a:ext uri="{FF2B5EF4-FFF2-40B4-BE49-F238E27FC236}">
-                <a16:creationId xmlns:a16="http://schemas.microsoft.com/office/drawing/2014/main" id="{412CB46E-3A50-469D-8371-B5D200201571}"/>
+                <a16:creationId xmlns:a16="http://schemas.microsoft.com/office/drawing/2014/main" id="{37AE6176-0844-49B7-A153-47E911EDE7FC}"/>
               </a:ext>
             </a:extLst>
           </p:cNvPr>
@@ -3068,7 +3068,7 @@
           <p:cNvPr id="17" name="">
             <a:extLst xmlns:a="http://schemas.openxmlformats.org/drawingml/2006/main">
               <a:ext uri="{FF2B5EF4-FFF2-40B4-BE49-F238E27FC236}">
-                <a16:creationId xmlns:a16="http://schemas.microsoft.com/office/drawing/2014/main" id="{9D5E62DE-A0BD-4776-B9FA-5A474F086465}"/>
+                <a16:creationId xmlns:a16="http://schemas.microsoft.com/office/drawing/2014/main" id="{D2111A22-D116-442B-96FB-28196C8F4928}"/>
               </a:ext>
             </a:extLst>
           </p:cNvPr>
@@ -3128,7 +3128,7 @@
     </p:spTree>
     <p:extLst>
       <p:ext uri="{BB962C8B-B14F-4D97-AF65-F5344CB8AC3E}">
-        <p14:creationId xmlns:p14="http://schemas.microsoft.com/office/powerpoint/2010/main" val="1922037726"/>
+        <p14:creationId xmlns:p14="http://schemas.microsoft.com/office/powerpoint/2010/main" val="540866931"/>
       </p:ext>
     </p:extLst>
   </p:cSld>
@@ -3159,7 +3159,7 @@
           <p:cNvPr id="1" name="">
             <a:extLst xmlns:a="http://schemas.openxmlformats.org/drawingml/2006/main">
               <a:ext uri="{FF2B5EF4-FFF2-40B4-BE49-F238E27FC236}">
-                <a16:creationId xmlns:a16="http://schemas.microsoft.com/office/drawing/2014/main" id="{DD2C1F5D-7751-4BF5-8DC8-03F125415941}"/>
+                <a16:creationId xmlns:a16="http://schemas.microsoft.com/office/drawing/2014/main" id="{83D6D2DA-73EB-4674-8466-933BBAEF2B05}"/>
               </a:ext>
             </a:extLst>
           </p:cNvPr>
@@ -3221,7 +3221,7 @@
           <p:cNvPr id="2" name="">
             <a:extLst xmlns:a="http://schemas.openxmlformats.org/drawingml/2006/main">
               <a:ext uri="{FF2B5EF4-FFF2-40B4-BE49-F238E27FC236}">
-                <a16:creationId xmlns:a16="http://schemas.microsoft.com/office/drawing/2014/main" id="{FDA17722-B98A-41D0-BD2D-2898338C2B05}"/>
+                <a16:creationId xmlns:a16="http://schemas.microsoft.com/office/drawing/2014/main" id="{9A77BDA6-4EC8-4EBE-ACAF-D5C6542453E3}"/>
               </a:ext>
             </a:extLst>
           </p:cNvPr>
@@ -3283,7 +3283,7 @@
           <p:cNvPr id="3" name="">
             <a:extLst xmlns:a="http://schemas.openxmlformats.org/drawingml/2006/main">
               <a:ext uri="{FF2B5EF4-FFF2-40B4-BE49-F238E27FC236}">
-                <a16:creationId xmlns:a16="http://schemas.microsoft.com/office/drawing/2014/main" id="{0535FAAB-A286-4CE4-BA4C-046E256B78D6}"/>
+                <a16:creationId xmlns:a16="http://schemas.microsoft.com/office/drawing/2014/main" id="{8050F7F4-FBF5-4A6B-A670-E5A49E68CAC9}"/>
               </a:ext>
             </a:extLst>
           </p:cNvPr>
@@ -3324,7 +3324,7 @@
           <p:cNvPr id="4" name="">
             <a:extLst xmlns:a="http://schemas.openxmlformats.org/drawingml/2006/main">
               <a:ext uri="{FF2B5EF4-FFF2-40B4-BE49-F238E27FC236}">
-                <a16:creationId xmlns:a16="http://schemas.microsoft.com/office/drawing/2014/main" id="{0781DBAE-0F85-496F-8A8E-7850737DBF67}"/>
+                <a16:creationId xmlns:a16="http://schemas.microsoft.com/office/drawing/2014/main" id="{13FC7C3D-DD99-4CE5-8E70-22AC72B5CEFE}"/>
               </a:ext>
             </a:extLst>
           </p:cNvPr>
@@ -3386,7 +3386,7 @@
           <p:cNvPr id="5" name="">
             <a:extLst xmlns:a="http://schemas.openxmlformats.org/drawingml/2006/main">
               <a:ext uri="{FF2B5EF4-FFF2-40B4-BE49-F238E27FC236}">
-                <a16:creationId xmlns:a16="http://schemas.microsoft.com/office/drawing/2014/main" id="{C939CF9A-C9BF-4C9D-B348-4E227D2940AB}"/>
+                <a16:creationId xmlns:a16="http://schemas.microsoft.com/office/drawing/2014/main" id="{A8416B96-71FB-4833-B02F-96ABC9B02F0D}"/>
               </a:ext>
             </a:extLst>
           </p:cNvPr>
@@ -3448,7 +3448,7 @@
           <p:cNvPr id="6" name="">
             <a:extLst xmlns:a="http://schemas.openxmlformats.org/drawingml/2006/main">
               <a:ext uri="{FF2B5EF4-FFF2-40B4-BE49-F238E27FC236}">
-                <a16:creationId xmlns:a16="http://schemas.microsoft.com/office/drawing/2014/main" id="{F29DFC66-49FF-4953-9CD1-940C40AAB421}"/>
+                <a16:creationId xmlns:a16="http://schemas.microsoft.com/office/drawing/2014/main" id="{CD28E488-856C-4AE1-ABAD-10C855D4DF70}"/>
               </a:ext>
             </a:extLst>
           </p:cNvPr>
@@ -3489,7 +3489,7 @@
           <p:cNvPr id="7" name="">
             <a:extLst xmlns:a="http://schemas.openxmlformats.org/drawingml/2006/main">
               <a:ext uri="{FF2B5EF4-FFF2-40B4-BE49-F238E27FC236}">
-                <a16:creationId xmlns:a16="http://schemas.microsoft.com/office/drawing/2014/main" id="{6046D1FB-CF19-4ECF-B76F-A2C10BEFE757}"/>
+                <a16:creationId xmlns:a16="http://schemas.microsoft.com/office/drawing/2014/main" id="{7EC68E02-7168-44FB-AC73-1AFF588AE139}"/>
               </a:ext>
             </a:extLst>
           </p:cNvPr>
@@ -3551,7 +3551,7 @@
           <p:cNvPr id="8" name="">
             <a:extLst xmlns:a="http://schemas.openxmlformats.org/drawingml/2006/main">
               <a:ext uri="{FF2B5EF4-FFF2-40B4-BE49-F238E27FC236}">
-                <a16:creationId xmlns:a16="http://schemas.microsoft.com/office/drawing/2014/main" id="{DB396606-FAEE-43C0-808A-5DB865347E74}"/>
+                <a16:creationId xmlns:a16="http://schemas.microsoft.com/office/drawing/2014/main" id="{1815256E-AFA1-4FB0-A0C6-3A27B5CDFE56}"/>
               </a:ext>
             </a:extLst>
           </p:cNvPr>
@@ -3613,7 +3613,7 @@
           <p:cNvPr id="9" name="">
             <a:extLst xmlns:a="http://schemas.openxmlformats.org/drawingml/2006/main">
               <a:ext uri="{FF2B5EF4-FFF2-40B4-BE49-F238E27FC236}">
-                <a16:creationId xmlns:a16="http://schemas.microsoft.com/office/drawing/2014/main" id="{AF49797F-8767-4EB4-9E33-FCB80F219109}"/>
+                <a16:creationId xmlns:a16="http://schemas.microsoft.com/office/drawing/2014/main" id="{80279F27-190D-4C74-914A-BD639A872623}"/>
               </a:ext>
             </a:extLst>
           </p:cNvPr>
@@ -3646,7 +3646,7 @@
           <p:cNvPr id="10" name="">
             <a:extLst xmlns:a="http://schemas.openxmlformats.org/drawingml/2006/main">
               <a:ext uri="{FF2B5EF4-FFF2-40B4-BE49-F238E27FC236}">
-                <a16:creationId xmlns:a16="http://schemas.microsoft.com/office/drawing/2014/main" id="{D1290951-FE8E-40D4-B015-AB7161D52739}"/>
+                <a16:creationId xmlns:a16="http://schemas.microsoft.com/office/drawing/2014/main" id="{BDD20F36-4021-4428-ABE6-14129C787C3F}"/>
               </a:ext>
             </a:extLst>
           </p:cNvPr>
@@ -3679,7 +3679,7 @@
           <p:cNvPr id="11" name="">
             <a:extLst xmlns:a="http://schemas.openxmlformats.org/drawingml/2006/main">
               <a:ext uri="{FF2B5EF4-FFF2-40B4-BE49-F238E27FC236}">
-                <a16:creationId xmlns:a16="http://schemas.microsoft.com/office/drawing/2014/main" id="{7B92FED6-D918-4BA2-905B-87729DAC4E86}"/>
+                <a16:creationId xmlns:a16="http://schemas.microsoft.com/office/drawing/2014/main" id="{B40B2065-719A-4DA7-883A-6BD443B9E9AA}"/>
               </a:ext>
             </a:extLst>
           </p:cNvPr>
@@ -3741,7 +3741,7 @@
           <p:cNvPr id="12" name="">
             <a:extLst xmlns:a="http://schemas.openxmlformats.org/drawingml/2006/main">
               <a:ext uri="{FF2B5EF4-FFF2-40B4-BE49-F238E27FC236}">
-                <a16:creationId xmlns:a16="http://schemas.microsoft.com/office/drawing/2014/main" id="{03F609F6-D568-40DA-A5E9-7410BDDEDE63}"/>
+                <a16:creationId xmlns:a16="http://schemas.microsoft.com/office/drawing/2014/main" id="{19CD49B7-E03D-4C90-B22E-BBC1477612E9}"/>
               </a:ext>
             </a:extLst>
           </p:cNvPr>
@@ -3782,7 +3782,7 @@
           <p:cNvPr id="13" name="">
             <a:extLst xmlns:a="http://schemas.openxmlformats.org/drawingml/2006/main">
               <a:ext uri="{FF2B5EF4-FFF2-40B4-BE49-F238E27FC236}">
-                <a16:creationId xmlns:a16="http://schemas.microsoft.com/office/drawing/2014/main" id="{9CAFEDE6-822E-40DE-8CE1-B321414CDADD}"/>
+                <a16:creationId xmlns:a16="http://schemas.microsoft.com/office/drawing/2014/main" id="{33AFC176-BEE4-4A5F-941F-C36C2D97DFC0}"/>
               </a:ext>
             </a:extLst>
           </p:cNvPr>
@@ -3813,7 +3813,7 @@
           <p:cNvPr id="14" name="">
             <a:extLst xmlns:a="http://schemas.openxmlformats.org/drawingml/2006/main">
               <a:ext uri="{FF2B5EF4-FFF2-40B4-BE49-F238E27FC236}">
-                <a16:creationId xmlns:a16="http://schemas.microsoft.com/office/drawing/2014/main" id="{015973A1-70C5-498A-B302-7539BD077E4B}"/>
+                <a16:creationId xmlns:a16="http://schemas.microsoft.com/office/drawing/2014/main" id="{69B859F6-E763-40D4-B2EC-F552498BC6A8}"/>
               </a:ext>
             </a:extLst>
           </p:cNvPr>
@@ -3846,7 +3846,7 @@
           <p:cNvPr id="15" name="">
             <a:extLst xmlns:a="http://schemas.openxmlformats.org/drawingml/2006/main">
               <a:ext uri="{FF2B5EF4-FFF2-40B4-BE49-F238E27FC236}">
-                <a16:creationId xmlns:a16="http://schemas.microsoft.com/office/drawing/2014/main" id="{107161DE-974D-4186-969F-4181BE939564}"/>
+                <a16:creationId xmlns:a16="http://schemas.microsoft.com/office/drawing/2014/main" id="{C94F742A-AFCC-4D8E-AF8C-01E24AE13F42}"/>
               </a:ext>
             </a:extLst>
           </p:cNvPr>
@@ -3879,7 +3879,7 @@
           <p:cNvPr id="16" name="">
             <a:extLst xmlns:a="http://schemas.openxmlformats.org/drawingml/2006/main">
               <a:ext uri="{FF2B5EF4-FFF2-40B4-BE49-F238E27FC236}">
-                <a16:creationId xmlns:a16="http://schemas.microsoft.com/office/drawing/2014/main" id="{62848450-53E4-426D-BB17-7E3A20A977D6}"/>
+                <a16:creationId xmlns:a16="http://schemas.microsoft.com/office/drawing/2014/main" id="{64FFB71A-F0D1-44CF-A136-DD3338D31F0F}"/>
               </a:ext>
             </a:extLst>
           </p:cNvPr>
@@ -3912,7 +3912,7 @@
           <p:cNvPr id="17" name="">
             <a:extLst xmlns:a="http://schemas.openxmlformats.org/drawingml/2006/main">
               <a:ext uri="{FF2B5EF4-FFF2-40B4-BE49-F238E27FC236}">
-                <a16:creationId xmlns:a16="http://schemas.microsoft.com/office/drawing/2014/main" id="{9114BEF7-C12B-462C-BB91-E35746690F7E}"/>
+                <a16:creationId xmlns:a16="http://schemas.microsoft.com/office/drawing/2014/main" id="{21B2F38F-9963-467D-A8DA-970EC14C5F21}"/>
               </a:ext>
             </a:extLst>
           </p:cNvPr>
@@ -3945,7 +3945,7 @@
           <p:cNvPr id="18" name="">
             <a:extLst xmlns:a="http://schemas.openxmlformats.org/drawingml/2006/main">
               <a:ext uri="{FF2B5EF4-FFF2-40B4-BE49-F238E27FC236}">
-                <a16:creationId xmlns:a16="http://schemas.microsoft.com/office/drawing/2014/main" id="{675D441D-969C-415F-A3DD-71B54E57C429}"/>
+                <a16:creationId xmlns:a16="http://schemas.microsoft.com/office/drawing/2014/main" id="{5830FD09-61E8-42A7-9840-34E832B2D37A}"/>
               </a:ext>
             </a:extLst>
           </p:cNvPr>
@@ -3978,7 +3978,7 @@
           <p:cNvPr id="19" name="">
             <a:extLst xmlns:a="http://schemas.openxmlformats.org/drawingml/2006/main">
               <a:ext uri="{FF2B5EF4-FFF2-40B4-BE49-F238E27FC236}">
-                <a16:creationId xmlns:a16="http://schemas.microsoft.com/office/drawing/2014/main" id="{6AC702C6-D826-4D28-9C72-C201882C515E}"/>
+                <a16:creationId xmlns:a16="http://schemas.microsoft.com/office/drawing/2014/main" id="{97A04DC7-50B2-4292-B5AE-574FC94B79CB}"/>
               </a:ext>
             </a:extLst>
           </p:cNvPr>
@@ -4019,7 +4019,7 @@
           <p:cNvPr id="20" name="">
             <a:extLst xmlns:a="http://schemas.openxmlformats.org/drawingml/2006/main">
               <a:ext uri="{FF2B5EF4-FFF2-40B4-BE49-F238E27FC236}">
-                <a16:creationId xmlns:a16="http://schemas.microsoft.com/office/drawing/2014/main" id="{5CEB46AF-8A75-4329-892E-92A1AD39ACB6}"/>
+                <a16:creationId xmlns:a16="http://schemas.microsoft.com/office/drawing/2014/main" id="{121D0477-EE00-412D-9D27-11B81E9D2FA5}"/>
               </a:ext>
             </a:extLst>
           </p:cNvPr>
@@ -4081,7 +4081,7 @@
           <p:cNvPr id="21" name="">
             <a:extLst xmlns:a="http://schemas.openxmlformats.org/drawingml/2006/main">
               <a:ext uri="{FF2B5EF4-FFF2-40B4-BE49-F238E27FC236}">
-                <a16:creationId xmlns:a16="http://schemas.microsoft.com/office/drawing/2014/main" id="{DE400F92-353C-4E4B-8948-FC11743F2D05}"/>
+                <a16:creationId xmlns:a16="http://schemas.microsoft.com/office/drawing/2014/main" id="{31251741-6F73-401D-9A5B-A1B9D652D273}"/>
               </a:ext>
             </a:extLst>
           </p:cNvPr>
@@ -4122,7 +4122,7 @@
           <p:cNvPr id="22" name="">
             <a:extLst xmlns:a="http://schemas.openxmlformats.org/drawingml/2006/main">
               <a:ext uri="{FF2B5EF4-FFF2-40B4-BE49-F238E27FC236}">
-                <a16:creationId xmlns:a16="http://schemas.microsoft.com/office/drawing/2014/main" id="{02138942-BFB3-43D9-8240-56E21F8691C1}"/>
+                <a16:creationId xmlns:a16="http://schemas.microsoft.com/office/drawing/2014/main" id="{2CD1D49B-76FB-4ABB-B501-848AFEAFB44C}"/>
               </a:ext>
             </a:extLst>
           </p:cNvPr>
@@ -4184,7 +4184,7 @@
           <p:cNvPr id="23" name="">
             <a:extLst xmlns:a="http://schemas.openxmlformats.org/drawingml/2006/main">
               <a:ext uri="{FF2B5EF4-FFF2-40B4-BE49-F238E27FC236}">
-                <a16:creationId xmlns:a16="http://schemas.microsoft.com/office/drawing/2014/main" id="{4E6410D0-F6A5-4986-B3B9-DDEF26CEB160}"/>
+                <a16:creationId xmlns:a16="http://schemas.microsoft.com/office/drawing/2014/main" id="{E0C31876-0DCA-4DCD-B626-9BE5167CA25A}"/>
               </a:ext>
             </a:extLst>
           </p:cNvPr>
@@ -4225,7 +4225,7 @@
           <p:cNvPr id="24" name="">
             <a:extLst xmlns:a="http://schemas.openxmlformats.org/drawingml/2006/main">
               <a:ext uri="{FF2B5EF4-FFF2-40B4-BE49-F238E27FC236}">
-                <a16:creationId xmlns:a16="http://schemas.microsoft.com/office/drawing/2014/main" id="{9F04F6C8-7603-4A15-BD21-E824F4B5003D}"/>
+                <a16:creationId xmlns:a16="http://schemas.microsoft.com/office/drawing/2014/main" id="{77642646-89E5-4061-AA36-859262D6A15C}"/>
               </a:ext>
             </a:extLst>
           </p:cNvPr>
@@ -4287,7 +4287,7 @@
           <p:cNvPr id="25" name="">
             <a:extLst xmlns:a="http://schemas.openxmlformats.org/drawingml/2006/main">
               <a:ext uri="{FF2B5EF4-FFF2-40B4-BE49-F238E27FC236}">
-                <a16:creationId xmlns:a16="http://schemas.microsoft.com/office/drawing/2014/main" id="{EF23D7AE-3F41-462D-9BDD-B88E7E5335FC}"/>
+                <a16:creationId xmlns:a16="http://schemas.microsoft.com/office/drawing/2014/main" id="{E2017412-B797-4428-BBE5-100E52492FA2}"/>
               </a:ext>
             </a:extLst>
           </p:cNvPr>
@@ -4328,7 +4328,7 @@
           <p:cNvPr id="26" name="">
             <a:extLst xmlns:a="http://schemas.openxmlformats.org/drawingml/2006/main">
               <a:ext uri="{FF2B5EF4-FFF2-40B4-BE49-F238E27FC236}">
-                <a16:creationId xmlns:a16="http://schemas.microsoft.com/office/drawing/2014/main" id="{22D73DCD-7348-4D89-8890-349301221935}"/>
+                <a16:creationId xmlns:a16="http://schemas.microsoft.com/office/drawing/2014/main" id="{DE2C771C-03C4-47CA-8AB9-7779D1C37945}"/>
               </a:ext>
             </a:extLst>
           </p:cNvPr>
@@ -4390,7 +4390,7 @@
           <p:cNvPr id="27" name="">
             <a:extLst xmlns:a="http://schemas.openxmlformats.org/drawingml/2006/main">
               <a:ext uri="{FF2B5EF4-FFF2-40B4-BE49-F238E27FC236}">
-                <a16:creationId xmlns:a16="http://schemas.microsoft.com/office/drawing/2014/main" id="{0646A000-AB72-480D-ACAD-C188F6AE8E2E}"/>
+                <a16:creationId xmlns:a16="http://schemas.microsoft.com/office/drawing/2014/main" id="{D19AE5FF-D0FF-4624-86B2-7AF18C3E15B1}"/>
               </a:ext>
             </a:extLst>
           </p:cNvPr>
@@ -4431,7 +4431,7 @@
           <p:cNvPr id="28" name="">
             <a:extLst xmlns:a="http://schemas.openxmlformats.org/drawingml/2006/main">
               <a:ext uri="{FF2B5EF4-FFF2-40B4-BE49-F238E27FC236}">
-                <a16:creationId xmlns:a16="http://schemas.microsoft.com/office/drawing/2014/main" id="{EE6122EB-B63F-4A09-B9B9-7F57B9263E62}"/>
+                <a16:creationId xmlns:a16="http://schemas.microsoft.com/office/drawing/2014/main" id="{46171A10-2705-47CA-908F-66C0F9624E12}"/>
               </a:ext>
             </a:extLst>
           </p:cNvPr>
@@ -4493,7 +4493,7 @@
           <p:cNvPr id="29" name="">
             <a:extLst xmlns:a="http://schemas.openxmlformats.org/drawingml/2006/main">
               <a:ext uri="{FF2B5EF4-FFF2-40B4-BE49-F238E27FC236}">
-                <a16:creationId xmlns:a16="http://schemas.microsoft.com/office/drawing/2014/main" id="{6FA3649C-CFAE-405D-9823-D79FA2D54DC1}"/>
+                <a16:creationId xmlns:a16="http://schemas.microsoft.com/office/drawing/2014/main" id="{CECC5DD3-7726-4FDE-A1FE-6B89BCB78A32}"/>
               </a:ext>
             </a:extLst>
           </p:cNvPr>
@@ -4534,7 +4534,7 @@
           <p:cNvPr id="30" name="">
             <a:extLst xmlns:a="http://schemas.openxmlformats.org/drawingml/2006/main">
               <a:ext uri="{FF2B5EF4-FFF2-40B4-BE49-F238E27FC236}">
-                <a16:creationId xmlns:a16="http://schemas.microsoft.com/office/drawing/2014/main" id="{89AB85D7-C497-4A2E-8D4D-139E93ABD435}"/>
+                <a16:creationId xmlns:a16="http://schemas.microsoft.com/office/drawing/2014/main" id="{56F4925B-05FC-4078-814A-EB9A66663AE3}"/>
               </a:ext>
             </a:extLst>
           </p:cNvPr>
@@ -4596,7 +4596,7 @@
           <p:cNvPr id="31" name="">
             <a:extLst xmlns:a="http://schemas.openxmlformats.org/drawingml/2006/main">
               <a:ext uri="{FF2B5EF4-FFF2-40B4-BE49-F238E27FC236}">
-                <a16:creationId xmlns:a16="http://schemas.microsoft.com/office/drawing/2014/main" id="{4DFD1236-7638-48F0-A95D-8EE38D05D848}"/>
+                <a16:creationId xmlns:a16="http://schemas.microsoft.com/office/drawing/2014/main" id="{A1DD7555-7114-4FA6-957B-9D982F791ECC}"/>
               </a:ext>
             </a:extLst>
           </p:cNvPr>
@@ -4637,7 +4637,7 @@
           <p:cNvPr id="32" name="">
             <a:extLst xmlns:a="http://schemas.openxmlformats.org/drawingml/2006/main">
               <a:ext uri="{FF2B5EF4-FFF2-40B4-BE49-F238E27FC236}">
-                <a16:creationId xmlns:a16="http://schemas.microsoft.com/office/drawing/2014/main" id="{34B20FF2-A1EF-4A17-A0E6-CA14A940FCEA}"/>
+                <a16:creationId xmlns:a16="http://schemas.microsoft.com/office/drawing/2014/main" id="{1EE1A711-FBE8-447B-AA48-4142EAF2BF78}"/>
               </a:ext>
             </a:extLst>
           </p:cNvPr>
@@ -4699,7 +4699,7 @@
           <p:cNvPr id="33" name="">
             <a:extLst xmlns:a="http://schemas.openxmlformats.org/drawingml/2006/main">
               <a:ext uri="{FF2B5EF4-FFF2-40B4-BE49-F238E27FC236}">
-                <a16:creationId xmlns:a16="http://schemas.microsoft.com/office/drawing/2014/main" id="{E3431A42-AE3C-4821-A34D-066720B6ECFA}"/>
+                <a16:creationId xmlns:a16="http://schemas.microsoft.com/office/drawing/2014/main" id="{B8BBD44A-AC60-41F3-BE18-722065109364}"/>
               </a:ext>
             </a:extLst>
           </p:cNvPr>
@@ -4761,7 +4761,7 @@
           <p:cNvPr id="34" name="">
             <a:extLst xmlns:a="http://schemas.openxmlformats.org/drawingml/2006/main">
               <a:ext uri="{FF2B5EF4-FFF2-40B4-BE49-F238E27FC236}">
-                <a16:creationId xmlns:a16="http://schemas.microsoft.com/office/drawing/2014/main" id="{4856C909-4652-4C6C-8540-98C2BE5B4C91}"/>
+                <a16:creationId xmlns:a16="http://schemas.microsoft.com/office/drawing/2014/main" id="{ECC43DDC-42DC-462C-AA3A-BBEFB1FA5506}"/>
               </a:ext>
             </a:extLst>
           </p:cNvPr>
@@ -4802,7 +4802,7 @@
           <p:cNvPr id="35" name="">
             <a:extLst xmlns:a="http://schemas.openxmlformats.org/drawingml/2006/main">
               <a:ext uri="{FF2B5EF4-FFF2-40B4-BE49-F238E27FC236}">
-                <a16:creationId xmlns:a16="http://schemas.microsoft.com/office/drawing/2014/main" id="{E6AF122E-496C-44F2-A12C-F1CC5812A51A}"/>
+                <a16:creationId xmlns:a16="http://schemas.microsoft.com/office/drawing/2014/main" id="{3CC377C1-EFC1-4E1F-B70C-52C393BAA2CD}"/>
               </a:ext>
             </a:extLst>
           </p:cNvPr>
@@ -4864,7 +4864,7 @@
           <p:cNvPr id="36" name="">
             <a:extLst xmlns:a="http://schemas.openxmlformats.org/drawingml/2006/main">
               <a:ext uri="{FF2B5EF4-FFF2-40B4-BE49-F238E27FC236}">
-                <a16:creationId xmlns:a16="http://schemas.microsoft.com/office/drawing/2014/main" id="{4091BB9F-D857-4C1F-BCAC-6C31F1098D4E}"/>
+                <a16:creationId xmlns:a16="http://schemas.microsoft.com/office/drawing/2014/main" id="{E5C13C64-E284-4436-A264-72410864940E}"/>
               </a:ext>
             </a:extLst>
           </p:cNvPr>
@@ -4926,7 +4926,7 @@
           <p:cNvPr id="37" name="">
             <a:extLst xmlns:a="http://schemas.openxmlformats.org/drawingml/2006/main">
               <a:ext uri="{FF2B5EF4-FFF2-40B4-BE49-F238E27FC236}">
-                <a16:creationId xmlns:a16="http://schemas.microsoft.com/office/drawing/2014/main" id="{73D21AFE-23CC-4FDE-B9FC-F7D0FFC2EFA2}"/>
+                <a16:creationId xmlns:a16="http://schemas.microsoft.com/office/drawing/2014/main" id="{F44580A3-BE71-4FB7-A535-8D7FDA1F6E12}"/>
               </a:ext>
             </a:extLst>
           </p:cNvPr>
@@ -4988,7 +4988,7 @@
           <p:cNvPr id="38" name="">
             <a:extLst xmlns:a="http://schemas.openxmlformats.org/drawingml/2006/main">
               <a:ext uri="{FF2B5EF4-FFF2-40B4-BE49-F238E27FC236}">
-                <a16:creationId xmlns:a16="http://schemas.microsoft.com/office/drawing/2014/main" id="{74424A25-710C-4168-8FB6-EB87F2208C7C}"/>
+                <a16:creationId xmlns:a16="http://schemas.microsoft.com/office/drawing/2014/main" id="{3380665F-83CF-4673-894C-916CA7206D55}"/>
               </a:ext>
             </a:extLst>
           </p:cNvPr>
@@ -5019,7 +5019,7 @@
           <p:cNvPr id="39" name="">
             <a:extLst xmlns:a="http://schemas.openxmlformats.org/drawingml/2006/main">
               <a:ext uri="{FF2B5EF4-FFF2-40B4-BE49-F238E27FC236}">
-                <a16:creationId xmlns:a16="http://schemas.microsoft.com/office/drawing/2014/main" id="{CB0DCB5C-ECF9-413A-9612-592B99BB68B9}"/>
+                <a16:creationId xmlns:a16="http://schemas.microsoft.com/office/drawing/2014/main" id="{8660FB77-C5E6-422A-9682-5F94A74BE33F}"/>
               </a:ext>
             </a:extLst>
           </p:cNvPr>
@@ -5081,7 +5081,7 @@
           <p:cNvPr id="40" name="">
             <a:extLst xmlns:a="http://schemas.openxmlformats.org/drawingml/2006/main">
               <a:ext uri="{FF2B5EF4-FFF2-40B4-BE49-F238E27FC236}">
-                <a16:creationId xmlns:a16="http://schemas.microsoft.com/office/drawing/2014/main" id="{0DB4262B-2AFD-4ED6-A119-51C957E68709}"/>
+                <a16:creationId xmlns:a16="http://schemas.microsoft.com/office/drawing/2014/main" id="{A144BF49-C5AF-4CBD-AF5E-BA34E576E95F}"/>
               </a:ext>
             </a:extLst>
           </p:cNvPr>
@@ -5141,7 +5141,7 @@
     </p:spTree>
     <p:extLst>
       <p:ext uri="{BB962C8B-B14F-4D97-AF65-F5344CB8AC3E}">
-        <p14:creationId xmlns:p14="http://schemas.microsoft.com/office/powerpoint/2010/main" val="309792811"/>
+        <p14:creationId xmlns:p14="http://schemas.microsoft.com/office/powerpoint/2010/main" val="1089555614"/>
       </p:ext>
     </p:extLst>
   </p:cSld>
@@ -5172,7 +5172,7 @@
           <p:cNvPr id="1" name="">
             <a:extLst xmlns:a="http://schemas.openxmlformats.org/drawingml/2006/main">
               <a:ext uri="{FF2B5EF4-FFF2-40B4-BE49-F238E27FC236}">
-                <a16:creationId xmlns:a16="http://schemas.microsoft.com/office/drawing/2014/main" id="{148CFC09-2C15-4FAA-B204-EED91C6C7CD5}"/>
+                <a16:creationId xmlns:a16="http://schemas.microsoft.com/office/drawing/2014/main" id="{070AECDF-465D-4B48-8862-2CFA2B8F5574}"/>
               </a:ext>
             </a:extLst>
           </p:cNvPr>
@@ -5234,7 +5234,7 @@
           <p:cNvPr id="2" name="">
             <a:extLst xmlns:a="http://schemas.openxmlformats.org/drawingml/2006/main">
               <a:ext uri="{FF2B5EF4-FFF2-40B4-BE49-F238E27FC236}">
-                <a16:creationId xmlns:a16="http://schemas.microsoft.com/office/drawing/2014/main" id="{34FA8308-2F36-4FB7-A0FB-47B0A78D765E}"/>
+                <a16:creationId xmlns:a16="http://schemas.microsoft.com/office/drawing/2014/main" id="{6BF0992B-3DBC-4ECA-B0F6-8F46CBD100DF}"/>
               </a:ext>
             </a:extLst>
           </p:cNvPr>
@@ -5296,7 +5296,7 @@
           <p:cNvPr id="3" name="">
             <a:extLst xmlns:a="http://schemas.openxmlformats.org/drawingml/2006/main">
               <a:ext uri="{FF2B5EF4-FFF2-40B4-BE49-F238E27FC236}">
-                <a16:creationId xmlns:a16="http://schemas.microsoft.com/office/drawing/2014/main" id="{D88A7667-5282-46E7-9E13-972BB2608383}"/>
+                <a16:creationId xmlns:a16="http://schemas.microsoft.com/office/drawing/2014/main" id="{26475A91-D53E-4735-A6D0-686F75F56345}"/>
               </a:ext>
             </a:extLst>
           </p:cNvPr>
@@ -5358,7 +5358,7 @@
           <p:cNvPr id="4" name="">
             <a:extLst xmlns:a="http://schemas.openxmlformats.org/drawingml/2006/main">
               <a:ext uri="{FF2B5EF4-FFF2-40B4-BE49-F238E27FC236}">
-                <a16:creationId xmlns:a16="http://schemas.microsoft.com/office/drawing/2014/main" id="{53DD0516-ABE6-4A55-95E9-24D2EDBF5307}"/>
+                <a16:creationId xmlns:a16="http://schemas.microsoft.com/office/drawing/2014/main" id="{DF0C9322-5591-45BE-8C46-681461BBCF7D}"/>
               </a:ext>
             </a:extLst>
           </p:cNvPr>
@@ -5420,7 +5420,7 @@
           <p:cNvPr id="5" name="">
             <a:extLst xmlns:a="http://schemas.openxmlformats.org/drawingml/2006/main">
               <a:ext uri="{FF2B5EF4-FFF2-40B4-BE49-F238E27FC236}">
-                <a16:creationId xmlns:a16="http://schemas.microsoft.com/office/drawing/2014/main" id="{710F746D-B561-4933-9FC3-E2CD2F36B107}"/>
+                <a16:creationId xmlns:a16="http://schemas.microsoft.com/office/drawing/2014/main" id="{04067CDC-A73F-41D5-ADFA-F47F735F00F2}"/>
               </a:ext>
             </a:extLst>
           </p:cNvPr>
@@ -5484,7 +5484,7 @@
           <p:cNvPr id="6" name="">
             <a:extLst xmlns:a="http://schemas.openxmlformats.org/drawingml/2006/main">
               <a:ext uri="{FF2B5EF4-FFF2-40B4-BE49-F238E27FC236}">
-                <a16:creationId xmlns:a16="http://schemas.microsoft.com/office/drawing/2014/main" id="{DA4661A1-DE1C-49CB-9B46-3C9F1181DFE2}"/>
+                <a16:creationId xmlns:a16="http://schemas.microsoft.com/office/drawing/2014/main" id="{DC74BF02-58BE-4FEF-A9AE-FC2C19224B26}"/>
               </a:ext>
             </a:extLst>
           </p:cNvPr>
@@ -5574,7 +5574,7 @@
           <p:cNvPr id="8" name="">
             <a:extLst xmlns:a="http://schemas.openxmlformats.org/drawingml/2006/main">
               <a:ext uri="{FF2B5EF4-FFF2-40B4-BE49-F238E27FC236}">
-                <a16:creationId xmlns:a16="http://schemas.microsoft.com/office/drawing/2014/main" id="{BAFDAA4E-DF28-4BD1-8292-D5CE3632F4D9}"/>
+                <a16:creationId xmlns:a16="http://schemas.microsoft.com/office/drawing/2014/main" id="{47E753B4-34ED-40AD-88B1-A25BFA0BE972}"/>
               </a:ext>
             </a:extLst>
           </p:cNvPr>
@@ -5638,7 +5638,7 @@
           <p:cNvPr id="9" name="">
             <a:extLst xmlns:a="http://schemas.openxmlformats.org/drawingml/2006/main">
               <a:ext uri="{FF2B5EF4-FFF2-40B4-BE49-F238E27FC236}">
-                <a16:creationId xmlns:a16="http://schemas.microsoft.com/office/drawing/2014/main" id="{3650039D-3A98-45FA-BA33-9A37285AF976}"/>
+                <a16:creationId xmlns:a16="http://schemas.microsoft.com/office/drawing/2014/main" id="{3C0F236C-4684-4DC5-B924-F4EE32A0C058}"/>
               </a:ext>
             </a:extLst>
           </p:cNvPr>
@@ -5728,7 +5728,7 @@
           <p:cNvPr id="11" name="">
             <a:extLst xmlns:a="http://schemas.openxmlformats.org/drawingml/2006/main">
               <a:ext uri="{FF2B5EF4-FFF2-40B4-BE49-F238E27FC236}">
-                <a16:creationId xmlns:a16="http://schemas.microsoft.com/office/drawing/2014/main" id="{3742B47B-85F4-4E0F-8FF3-09C40F61E16A}"/>
+                <a16:creationId xmlns:a16="http://schemas.microsoft.com/office/drawing/2014/main" id="{D08E63A9-D17C-4E57-B342-047A129B5CC2}"/>
               </a:ext>
             </a:extLst>
           </p:cNvPr>
@@ -5792,7 +5792,7 @@
           <p:cNvPr id="12" name="">
             <a:extLst xmlns:a="http://schemas.openxmlformats.org/drawingml/2006/main">
               <a:ext uri="{FF2B5EF4-FFF2-40B4-BE49-F238E27FC236}">
-                <a16:creationId xmlns:a16="http://schemas.microsoft.com/office/drawing/2014/main" id="{9D18450F-49F2-450E-AB6F-A7D980AF9885}"/>
+                <a16:creationId xmlns:a16="http://schemas.microsoft.com/office/drawing/2014/main" id="{7D187A77-28A4-4EC6-8FCB-375A47476309}"/>
               </a:ext>
             </a:extLst>
           </p:cNvPr>
@@ -5882,7 +5882,7 @@
           <p:cNvPr id="14" name="">
             <a:extLst xmlns:a="http://schemas.openxmlformats.org/drawingml/2006/main">
               <a:ext uri="{FF2B5EF4-FFF2-40B4-BE49-F238E27FC236}">
-                <a16:creationId xmlns:a16="http://schemas.microsoft.com/office/drawing/2014/main" id="{3B80027E-9243-4DAD-B1EE-FD9488B8F197}"/>
+                <a16:creationId xmlns:a16="http://schemas.microsoft.com/office/drawing/2014/main" id="{3726C523-8C6D-41AD-943E-1E559B2E1B3E}"/>
               </a:ext>
             </a:extLst>
           </p:cNvPr>
@@ -5946,7 +5946,7 @@
           <p:cNvPr id="15" name="">
             <a:extLst xmlns:a="http://schemas.openxmlformats.org/drawingml/2006/main">
               <a:ext uri="{FF2B5EF4-FFF2-40B4-BE49-F238E27FC236}">
-                <a16:creationId xmlns:a16="http://schemas.microsoft.com/office/drawing/2014/main" id="{810F55C9-7CCE-4C34-A950-CA5152705CA4}"/>
+                <a16:creationId xmlns:a16="http://schemas.microsoft.com/office/drawing/2014/main" id="{48C49B3E-DAF7-41DA-B796-D1C35ADD1C76}"/>
               </a:ext>
             </a:extLst>
           </p:cNvPr>
@@ -6036,7 +6036,7 @@
           <p:cNvPr id="17" name="">
             <a:extLst xmlns:a="http://schemas.openxmlformats.org/drawingml/2006/main">
               <a:ext uri="{FF2B5EF4-FFF2-40B4-BE49-F238E27FC236}">
-                <a16:creationId xmlns:a16="http://schemas.microsoft.com/office/drawing/2014/main" id="{F811E890-0FBE-45D7-9B9F-697FF7CC5751}"/>
+                <a16:creationId xmlns:a16="http://schemas.microsoft.com/office/drawing/2014/main" id="{E87AEF32-9AC4-4DC6-97B1-8C2E90AABB7C}"/>
               </a:ext>
             </a:extLst>
           </p:cNvPr>
@@ -6100,7 +6100,7 @@
           <p:cNvPr id="18" name="">
             <a:extLst xmlns:a="http://schemas.openxmlformats.org/drawingml/2006/main">
               <a:ext uri="{FF2B5EF4-FFF2-40B4-BE49-F238E27FC236}">
-                <a16:creationId xmlns:a16="http://schemas.microsoft.com/office/drawing/2014/main" id="{1654CE90-BACB-439F-BCF1-4B43140F53FC}"/>
+                <a16:creationId xmlns:a16="http://schemas.microsoft.com/office/drawing/2014/main" id="{FC20C31D-511D-445B-943B-4BB607D1E2CD}"/>
               </a:ext>
             </a:extLst>
           </p:cNvPr>
@@ -6190,7 +6190,7 @@
           <p:cNvPr id="20" name="">
             <a:extLst xmlns:a="http://schemas.openxmlformats.org/drawingml/2006/main">
               <a:ext uri="{FF2B5EF4-FFF2-40B4-BE49-F238E27FC236}">
-                <a16:creationId xmlns:a16="http://schemas.microsoft.com/office/drawing/2014/main" id="{9DC7D81E-FE67-4D8E-9938-9E325D9BCA56}"/>
+                <a16:creationId xmlns:a16="http://schemas.microsoft.com/office/drawing/2014/main" id="{57BC84CF-1788-42C7-B2BF-2BDB543CA387}"/>
               </a:ext>
             </a:extLst>
           </p:cNvPr>
@@ -6254,7 +6254,7 @@
           <p:cNvPr id="21" name="">
             <a:extLst xmlns:a="http://schemas.openxmlformats.org/drawingml/2006/main">
               <a:ext uri="{FF2B5EF4-FFF2-40B4-BE49-F238E27FC236}">
-                <a16:creationId xmlns:a16="http://schemas.microsoft.com/office/drawing/2014/main" id="{2C256EC1-DDBE-45C9-8961-DD35CFEF434A}"/>
+                <a16:creationId xmlns:a16="http://schemas.microsoft.com/office/drawing/2014/main" id="{91692B09-8874-4569-9C40-6EC96E722134}"/>
               </a:ext>
             </a:extLst>
           </p:cNvPr>
@@ -6344,7 +6344,7 @@
           <p:cNvPr id="23" name="">
             <a:extLst xmlns:a="http://schemas.openxmlformats.org/drawingml/2006/main">
               <a:ext uri="{FF2B5EF4-FFF2-40B4-BE49-F238E27FC236}">
-                <a16:creationId xmlns:a16="http://schemas.microsoft.com/office/drawing/2014/main" id="{D6A51436-8F54-4A77-B957-2DEDBA916460}"/>
+                <a16:creationId xmlns:a16="http://schemas.microsoft.com/office/drawing/2014/main" id="{F79EA57B-33F8-46E0-A2FA-B67BB43C47E9}"/>
               </a:ext>
             </a:extLst>
           </p:cNvPr>
@@ -6408,7 +6408,7 @@
           <p:cNvPr id="24" name="">
             <a:extLst xmlns:a="http://schemas.openxmlformats.org/drawingml/2006/main">
               <a:ext uri="{FF2B5EF4-FFF2-40B4-BE49-F238E27FC236}">
-                <a16:creationId xmlns:a16="http://schemas.microsoft.com/office/drawing/2014/main" id="{91266F69-0F22-4A18-A974-10ECF92BD8FA}"/>
+                <a16:creationId xmlns:a16="http://schemas.microsoft.com/office/drawing/2014/main" id="{A339FC23-85A8-405E-8BBE-1B1C4CE49BEA}"/>
               </a:ext>
             </a:extLst>
           </p:cNvPr>
@@ -6498,7 +6498,7 @@
           <p:cNvPr id="26" name="">
             <a:extLst xmlns:a="http://schemas.openxmlformats.org/drawingml/2006/main">
               <a:ext uri="{FF2B5EF4-FFF2-40B4-BE49-F238E27FC236}">
-                <a16:creationId xmlns:a16="http://schemas.microsoft.com/office/drawing/2014/main" id="{D59517FE-049C-4F78-B670-331A4F99B05F}"/>
+                <a16:creationId xmlns:a16="http://schemas.microsoft.com/office/drawing/2014/main" id="{FD1A31AD-C1AE-4A2B-A9A1-D36F84FE3B28}"/>
               </a:ext>
             </a:extLst>
           </p:cNvPr>
@@ -6562,7 +6562,7 @@
           <p:cNvPr id="27" name="">
             <a:extLst xmlns:a="http://schemas.openxmlformats.org/drawingml/2006/main">
               <a:ext uri="{FF2B5EF4-FFF2-40B4-BE49-F238E27FC236}">
-                <a16:creationId xmlns:a16="http://schemas.microsoft.com/office/drawing/2014/main" id="{C75B8D8F-51AA-44AF-B43E-AF38A8E10289}"/>
+                <a16:creationId xmlns:a16="http://schemas.microsoft.com/office/drawing/2014/main" id="{15DA89F7-92F6-4863-9D19-6FBE74B5AABD}"/>
               </a:ext>
             </a:extLst>
           </p:cNvPr>
@@ -6652,7 +6652,7 @@
           <p:cNvPr id="29" name="">
             <a:extLst xmlns:a="http://schemas.openxmlformats.org/drawingml/2006/main">
               <a:ext uri="{FF2B5EF4-FFF2-40B4-BE49-F238E27FC236}">
-                <a16:creationId xmlns:a16="http://schemas.microsoft.com/office/drawing/2014/main" id="{3546FB83-C0C1-4E52-98B5-545F5E9FAAAF}"/>
+                <a16:creationId xmlns:a16="http://schemas.microsoft.com/office/drawing/2014/main" id="{8B8103CB-2C5A-418C-B7C0-04B4C71DBAC4}"/>
               </a:ext>
             </a:extLst>
           </p:cNvPr>
@@ -6683,7 +6683,7 @@
           <p:cNvPr id="30" name="">
             <a:extLst xmlns:a="http://schemas.openxmlformats.org/drawingml/2006/main">
               <a:ext uri="{FF2B5EF4-FFF2-40B4-BE49-F238E27FC236}">
-                <a16:creationId xmlns:a16="http://schemas.microsoft.com/office/drawing/2014/main" id="{A7CBBD15-395F-48A2-92CD-6478237F4FFB}"/>
+                <a16:creationId xmlns:a16="http://schemas.microsoft.com/office/drawing/2014/main" id="{BBDB9A04-E3B4-4E7F-845D-73C5083F6D6D}"/>
               </a:ext>
             </a:extLst>
           </p:cNvPr>
@@ -6745,7 +6745,7 @@
           <p:cNvPr id="31" name="">
             <a:extLst xmlns:a="http://schemas.openxmlformats.org/drawingml/2006/main">
               <a:ext uri="{FF2B5EF4-FFF2-40B4-BE49-F238E27FC236}">
-                <a16:creationId xmlns:a16="http://schemas.microsoft.com/office/drawing/2014/main" id="{50298F50-9473-4BCA-9B2A-3DF58E2DFED4}"/>
+                <a16:creationId xmlns:a16="http://schemas.microsoft.com/office/drawing/2014/main" id="{DAFE1A80-39FF-4596-9CD2-20D4B72E2145}"/>
               </a:ext>
             </a:extLst>
           </p:cNvPr>
@@ -6805,7 +6805,7 @@
     </p:spTree>
     <p:extLst>
       <p:ext uri="{BB962C8B-B14F-4D97-AF65-F5344CB8AC3E}">
-        <p14:creationId xmlns:p14="http://schemas.microsoft.com/office/powerpoint/2010/main" val="1433381249"/>
+        <p14:creationId xmlns:p14="http://schemas.microsoft.com/office/powerpoint/2010/main" val="87334988"/>
       </p:ext>
     </p:extLst>
   </p:cSld>
@@ -6836,7 +6836,7 @@
           <p:cNvPr id="1" name="">
             <a:extLst xmlns:a="http://schemas.openxmlformats.org/drawingml/2006/main">
               <a:ext uri="{FF2B5EF4-FFF2-40B4-BE49-F238E27FC236}">
-                <a16:creationId xmlns:a16="http://schemas.microsoft.com/office/drawing/2014/main" id="{26F6AB97-05A1-49E6-8025-79B16D1A63EE}"/>
+                <a16:creationId xmlns:a16="http://schemas.microsoft.com/office/drawing/2014/main" id="{CFD9C135-ACEA-4D78-B702-EAA41932B399}"/>
               </a:ext>
             </a:extLst>
           </p:cNvPr>
@@ -6898,7 +6898,7 @@
           <p:cNvPr id="2" name="">
             <a:extLst xmlns:a="http://schemas.openxmlformats.org/drawingml/2006/main">
               <a:ext uri="{FF2B5EF4-FFF2-40B4-BE49-F238E27FC236}">
-                <a16:creationId xmlns:a16="http://schemas.microsoft.com/office/drawing/2014/main" id="{1E1C2F39-C34F-48C7-8918-E809ED41265F}"/>
+                <a16:creationId xmlns:a16="http://schemas.microsoft.com/office/drawing/2014/main" id="{6A396477-A53A-4D53-BE65-E132528D2692}"/>
               </a:ext>
             </a:extLst>
           </p:cNvPr>
@@ -6950,149 +6950,305 @@
                 <a:ea typeface="PingFang SC"/>
                 <a:cs typeface="PingFang SC"/>
               </a:rPr>
-              <a:t>浏览器产品流程</a:t>
+              <a:t>从标准流程切到网站</a:t>
             </a:r>
           </a:p>
         </p:txBody>
       </p:sp>
       <p:pic>
         <p:nvPicPr>
-          <p:cNvPr id="16" name=""/>
+          <p:cNvPr id="33" name=""/>
           <p:cNvPicPr>
             <a:picLocks xmlns:a="http://schemas.openxmlformats.org/drawingml/2006/main" noChangeAspect="1"/>
           </p:cNvPicPr>
           <p:nvPr/>
         </p:nvPicPr>
         <p:blipFill>
-          <a:blip xmlns:r="http://schemas.openxmlformats.org/officeDocument/2006/relationships" xmlns:a="http://schemas.openxmlformats.org/drawingml/2006/main" r:embed="R2f99c285a80e4cab"/>
-          <a:srcRect xmlns:a="http://schemas.openxmlformats.org/drawingml/2006/main" l="0" t="17059" r="0" b="17059"/>
+          <a:blip xmlns:r="http://schemas.openxmlformats.org/officeDocument/2006/relationships" xmlns:a="http://schemas.openxmlformats.org/drawingml/2006/main" r:embed="R1706cd8507524f15"/>
+          <a:srcRect xmlns:a="http://schemas.openxmlformats.org/drawingml/2006/main" l="0" t="17360" r="0" b="17360"/>
           <a:stretch xmlns:a="http://schemas.openxmlformats.org/drawingml/2006/main">
             <a:fillRect l="0" t="0" r="0" b="0"/>
           </a:stretch>
         </p:blipFill>
         <p:spPr>
           <a:xfrm xmlns:a="http://schemas.openxmlformats.org/drawingml/2006/main">
-            <a:off x="800100" y="1447800"/>
-            <a:ext cx="4857750" cy="2000250"/>
+            <a:off x="742950" y="1619250"/>
+            <a:ext cx="4762500" cy="1943100"/>
           </a:xfrm>
           <a:prstGeom xmlns:a="http://schemas.openxmlformats.org/drawingml/2006/main" prst="roundRect">
             <a:avLst>
-              <a:gd name="adj" fmla="val 5714"/>
+              <a:gd name="adj" fmla="val 5882"/>
             </a:avLst>
           </a:prstGeom>
         </p:spPr>
       </p:pic>
       <p:pic>
         <p:nvPicPr>
-          <p:cNvPr id="17" name=""/>
+          <p:cNvPr id="34" name=""/>
           <p:cNvPicPr>
             <a:picLocks xmlns:a="http://schemas.openxmlformats.org/drawingml/2006/main" noChangeAspect="1"/>
           </p:cNvPicPr>
           <p:nvPr/>
         </p:nvPicPr>
         <p:blipFill>
-          <a:blip xmlns:r="http://schemas.openxmlformats.org/officeDocument/2006/relationships" xmlns:a="http://schemas.openxmlformats.org/drawingml/2006/main" r:embed="R90fef1d85f884e98"/>
-          <a:srcRect xmlns:a="http://schemas.openxmlformats.org/drawingml/2006/main" l="0" t="17059" r="0" b="17059"/>
+          <a:blip xmlns:r="http://schemas.openxmlformats.org/officeDocument/2006/relationships" xmlns:a="http://schemas.openxmlformats.org/drawingml/2006/main" r:embed="R8fa20748cd2b4182"/>
+          <a:srcRect xmlns:a="http://schemas.openxmlformats.org/drawingml/2006/main" l="0" t="17360" r="0" b="17360"/>
           <a:stretch xmlns:a="http://schemas.openxmlformats.org/drawingml/2006/main">
             <a:fillRect l="0" t="0" r="0" b="0"/>
           </a:stretch>
         </p:blipFill>
         <p:spPr>
           <a:xfrm xmlns:a="http://schemas.openxmlformats.org/drawingml/2006/main">
-            <a:off x="6534150" y="1447800"/>
-            <a:ext cx="4857750" cy="2000250"/>
+            <a:off x="6705600" y="1619250"/>
+            <a:ext cx="4762500" cy="1943100"/>
           </a:xfrm>
           <a:prstGeom xmlns:a="http://schemas.openxmlformats.org/drawingml/2006/main" prst="roundRect">
             <a:avLst>
-              <a:gd name="adj" fmla="val 5714"/>
+              <a:gd name="adj" fmla="val 5882"/>
             </a:avLst>
           </a:prstGeom>
         </p:spPr>
       </p:pic>
-      <p:pic>
-        <p:nvPicPr>
-          <p:cNvPr id="18" name=""/>
-          <p:cNvPicPr>
-            <a:picLocks xmlns:a="http://schemas.openxmlformats.org/drawingml/2006/main" noChangeAspect="1"/>
-          </p:cNvPicPr>
-          <p:nvPr/>
-        </p:nvPicPr>
-        <p:blipFill>
-          <a:blip xmlns:r="http://schemas.openxmlformats.org/officeDocument/2006/relationships" xmlns:a="http://schemas.openxmlformats.org/drawingml/2006/main" r:embed="R7002076a92424365"/>
-          <a:srcRect xmlns:a="http://schemas.openxmlformats.org/drawingml/2006/main" l="0" t="17059" r="0" b="17059"/>
-          <a:stretch xmlns:a="http://schemas.openxmlformats.org/drawingml/2006/main">
-            <a:fillRect l="0" t="0" r="0" b="0"/>
-          </a:stretch>
-        </p:blipFill>
-        <p:spPr>
-          <a:xfrm xmlns:a="http://schemas.openxmlformats.org/drawingml/2006/main">
-            <a:off x="800100" y="3905250"/>
-            <a:ext cx="4857750" cy="2000250"/>
+      <p:sp>
+        <p:nvSpPr>
+          <p:cNvPr id="5" name="">
+            <a:extLst xmlns:a="http://schemas.openxmlformats.org/drawingml/2006/main">
+              <a:ext uri="{FF2B5EF4-FFF2-40B4-BE49-F238E27FC236}">
+                <a16:creationId xmlns:a16="http://schemas.microsoft.com/office/drawing/2014/main" id="{45CC0EFC-77F6-4EA8-BA34-3BD4F28306CC}"/>
+              </a:ext>
+            </a:extLst>
+          </p:cNvPr>
+          <p:cNvSpPr>
+            <a:spLocks xmlns:a="http://schemas.openxmlformats.org/drawingml/2006/main" noGrp="1"/>
+          </p:cNvSpPr>
+          <p:nvPr/>
+        </p:nvSpPr>
+        <p:spPr>
+          <a:xfrm xmlns:a="http://schemas.openxmlformats.org/drawingml/2006/main">
+            <a:off x="1219200" y="3867150"/>
+            <a:ext cx="9753600" cy="1257300"/>
           </a:xfrm>
           <a:prstGeom xmlns:a="http://schemas.openxmlformats.org/drawingml/2006/main" prst="roundRect">
             <a:avLst>
-              <a:gd name="adj" fmla="val 5714"/>
+              <a:gd name="adj" fmla="val 12121"/>
             </a:avLst>
           </a:prstGeom>
-        </p:spPr>
-      </p:pic>
-      <p:pic>
-        <p:nvPicPr>
-          <p:cNvPr id="19" name=""/>
-          <p:cNvPicPr>
-            <a:picLocks xmlns:a="http://schemas.openxmlformats.org/drawingml/2006/main" noChangeAspect="1"/>
-          </p:cNvPicPr>
-          <p:nvPr/>
-        </p:nvPicPr>
-        <p:blipFill>
-          <a:blip xmlns:r="http://schemas.openxmlformats.org/officeDocument/2006/relationships" xmlns:a="http://schemas.openxmlformats.org/drawingml/2006/main" r:embed="R158f51e2a7b9470b"/>
-          <a:srcRect xmlns:a="http://schemas.openxmlformats.org/drawingml/2006/main" l="0" t="17059" r="0" b="17059"/>
-          <a:stretch xmlns:a="http://schemas.openxmlformats.org/drawingml/2006/main">
-            <a:fillRect l="0" t="0" r="0" b="0"/>
-          </a:stretch>
-        </p:blipFill>
-        <p:spPr>
-          <a:xfrm xmlns:a="http://schemas.openxmlformats.org/drawingml/2006/main">
-            <a:off x="6534150" y="3905250"/>
-            <a:ext cx="4857750" cy="2000250"/>
+          <a:solidFill xmlns:a="http://schemas.openxmlformats.org/drawingml/2006/main">
+            <a:srgbClr val="F8FCFB"/>
+          </a:solidFill>
+          <a:ln xmlns:a="http://schemas.openxmlformats.org/drawingml/2006/main" w="9525">
+            <a:solidFill>
+              <a:srgbClr val="E4EFEC"/>
+            </a:solidFill>
+            <a:prstDash val="solid"/>
+          </a:ln>
+        </p:spPr>
+        <p:style>
+          <a:lnRef xmlns:a="http://schemas.openxmlformats.org/drawingml/2006/main" idx="0"/>
+          <a:fillRef xmlns:a="http://schemas.openxmlformats.org/drawingml/2006/main" idx="0"/>
+          <a:effectRef xmlns:a="http://schemas.openxmlformats.org/drawingml/2006/main" idx="4"/>
+          <a:fontRef xmlns:a="http://schemas.openxmlformats.org/drawingml/2006/main" idx="major"/>
+        </p:style>
+      </p:sp>
+      <p:sp>
+        <p:nvSpPr>
+          <p:cNvPr id="6" name="">
+            <a:extLst xmlns:a="http://schemas.openxmlformats.org/drawingml/2006/main">
+              <a:ext uri="{FF2B5EF4-FFF2-40B4-BE49-F238E27FC236}">
+                <a16:creationId xmlns:a16="http://schemas.microsoft.com/office/drawing/2014/main" id="{DA1B9FDD-2779-4835-AE9A-A58646CB757A}"/>
+              </a:ext>
+            </a:extLst>
+          </p:cNvPr>
+          <p:cNvSpPr>
+            <a:spLocks xmlns:a="http://schemas.openxmlformats.org/drawingml/2006/main" noGrp="1"/>
+          </p:cNvSpPr>
+          <p:nvPr/>
+        </p:nvSpPr>
+        <p:spPr>
+          <a:xfrm xmlns:a="http://schemas.openxmlformats.org/drawingml/2006/main">
+            <a:off x="1504950" y="4495800"/>
+            <a:ext cx="9182100" cy="0"/>
+          </a:xfrm>
+          <a:prstGeom xmlns:a="http://schemas.openxmlformats.org/drawingml/2006/main" prst="line">
+            <a:avLst/>
+          </a:prstGeom>
+          <a:noFill xmlns:a="http://schemas.openxmlformats.org/drawingml/2006/main"/>
+          <a:ln xmlns:a="http://schemas.openxmlformats.org/drawingml/2006/main" w="19050">
+            <a:solidFill>
+              <a:srgbClr val="C7DED8"/>
+            </a:solidFill>
+            <a:prstDash val="solid"/>
+          </a:ln>
+        </p:spPr>
+      </p:sp>
+      <p:sp>
+        <p:nvSpPr>
+          <p:cNvPr id="7" name="">
+            <a:extLst xmlns:a="http://schemas.openxmlformats.org/drawingml/2006/main">
+              <a:ext uri="{FF2B5EF4-FFF2-40B4-BE49-F238E27FC236}">
+                <a16:creationId xmlns:a16="http://schemas.microsoft.com/office/drawing/2014/main" id="{22F339C6-5EE0-418F-82B3-3FA721E54FB2}"/>
+              </a:ext>
+            </a:extLst>
+          </p:cNvPr>
+          <p:cNvSpPr>
+            <a:spLocks xmlns:a="http://schemas.openxmlformats.org/drawingml/2006/main" noGrp="1"/>
+          </p:cNvSpPr>
+          <p:nvPr/>
+        </p:nvSpPr>
+        <p:spPr>
+          <a:xfrm xmlns:a="http://schemas.openxmlformats.org/drawingml/2006/main">
+            <a:off x="3633788" y="4400550"/>
+            <a:ext cx="133350" cy="190500"/>
+          </a:xfrm>
+          <a:prstGeom xmlns:a="http://schemas.openxmlformats.org/drawingml/2006/main" prst="rightArrow">
+            <a:avLst/>
+          </a:prstGeom>
+          <a:solidFill xmlns:a="http://schemas.openxmlformats.org/drawingml/2006/main">
+            <a:srgbClr val="B7791F"/>
+          </a:solidFill>
+          <a:ln xmlns:a="http://schemas.openxmlformats.org/drawingml/2006/main" w="0">
+            <a:solidFill>
+              <a:srgbClr val="B7791F"/>
+            </a:solidFill>
+            <a:prstDash val="solid"/>
+          </a:ln>
+        </p:spPr>
+      </p:sp>
+      <p:sp>
+        <p:nvSpPr>
+          <p:cNvPr id="8" name="">
+            <a:extLst xmlns:a="http://schemas.openxmlformats.org/drawingml/2006/main">
+              <a:ext uri="{FF2B5EF4-FFF2-40B4-BE49-F238E27FC236}">
+                <a16:creationId xmlns:a16="http://schemas.microsoft.com/office/drawing/2014/main" id="{D99E1B6D-3112-4BAE-B8D7-14E0A3D9AFBD}"/>
+              </a:ext>
+            </a:extLst>
+          </p:cNvPr>
+          <p:cNvSpPr>
+            <a:spLocks xmlns:a="http://schemas.openxmlformats.org/drawingml/2006/main" noGrp="1"/>
+          </p:cNvSpPr>
+          <p:nvPr/>
+        </p:nvSpPr>
+        <p:spPr>
+          <a:xfrm xmlns:a="http://schemas.openxmlformats.org/drawingml/2006/main">
+            <a:off x="6029325" y="4400550"/>
+            <a:ext cx="133350" cy="190500"/>
+          </a:xfrm>
+          <a:prstGeom xmlns:a="http://schemas.openxmlformats.org/drawingml/2006/main" prst="rightArrow">
+            <a:avLst/>
+          </a:prstGeom>
+          <a:solidFill xmlns:a="http://schemas.openxmlformats.org/drawingml/2006/main">
+            <a:srgbClr val="B7791F"/>
+          </a:solidFill>
+          <a:ln xmlns:a="http://schemas.openxmlformats.org/drawingml/2006/main" w="0">
+            <a:solidFill>
+              <a:srgbClr val="B7791F"/>
+            </a:solidFill>
+            <a:prstDash val="solid"/>
+          </a:ln>
+        </p:spPr>
+      </p:sp>
+      <p:sp>
+        <p:nvSpPr>
+          <p:cNvPr id="9" name="">
+            <a:extLst xmlns:a="http://schemas.openxmlformats.org/drawingml/2006/main">
+              <a:ext uri="{FF2B5EF4-FFF2-40B4-BE49-F238E27FC236}">
+                <a16:creationId xmlns:a16="http://schemas.microsoft.com/office/drawing/2014/main" id="{37C801A8-789B-45E3-9AAE-86F36AB5C06E}"/>
+              </a:ext>
+            </a:extLst>
+          </p:cNvPr>
+          <p:cNvSpPr>
+            <a:spLocks xmlns:a="http://schemas.openxmlformats.org/drawingml/2006/main" noGrp="1"/>
+          </p:cNvSpPr>
+          <p:nvPr/>
+        </p:nvSpPr>
+        <p:spPr>
+          <a:xfrm xmlns:a="http://schemas.openxmlformats.org/drawingml/2006/main">
+            <a:off x="8424863" y="4400550"/>
+            <a:ext cx="133350" cy="190500"/>
+          </a:xfrm>
+          <a:prstGeom xmlns:a="http://schemas.openxmlformats.org/drawingml/2006/main" prst="rightArrow">
+            <a:avLst/>
+          </a:prstGeom>
+          <a:solidFill xmlns:a="http://schemas.openxmlformats.org/drawingml/2006/main">
+            <a:srgbClr val="B7791F"/>
+          </a:solidFill>
+          <a:ln xmlns:a="http://schemas.openxmlformats.org/drawingml/2006/main" w="0">
+            <a:solidFill>
+              <a:srgbClr val="B7791F"/>
+            </a:solidFill>
+            <a:prstDash val="solid"/>
+          </a:ln>
+        </p:spPr>
+      </p:sp>
+      <p:sp>
+        <p:nvSpPr>
+          <p:cNvPr id="10" name="">
+            <a:extLst xmlns:a="http://schemas.openxmlformats.org/drawingml/2006/main">
+              <a:ext uri="{FF2B5EF4-FFF2-40B4-BE49-F238E27FC236}">
+                <a16:creationId xmlns:a16="http://schemas.microsoft.com/office/drawing/2014/main" id="{1302EA85-3D78-425B-9F6A-7B0DD581C7F2}"/>
+              </a:ext>
+            </a:extLst>
+          </p:cNvPr>
+          <p:cNvSpPr>
+            <a:spLocks xmlns:a="http://schemas.openxmlformats.org/drawingml/2006/main" noGrp="1"/>
+          </p:cNvSpPr>
+          <p:nvPr/>
+        </p:nvSpPr>
+        <p:spPr>
+          <a:xfrm xmlns:a="http://schemas.openxmlformats.org/drawingml/2006/main">
+            <a:off x="1390650" y="4057650"/>
+            <a:ext cx="2224088" cy="876300"/>
           </a:xfrm>
           <a:prstGeom xmlns:a="http://schemas.openxmlformats.org/drawingml/2006/main" prst="roundRect">
             <a:avLst>
-              <a:gd name="adj" fmla="val 5714"/>
+              <a:gd name="adj" fmla="val 13043"/>
             </a:avLst>
           </a:prstGeom>
-        </p:spPr>
-      </p:pic>
-      <p:sp>
-        <p:nvSpPr>
-          <p:cNvPr id="7" name="">
-            <a:extLst xmlns:a="http://schemas.openxmlformats.org/drawingml/2006/main">
-              <a:ext uri="{FF2B5EF4-FFF2-40B4-BE49-F238E27FC236}">
-                <a16:creationId xmlns:a16="http://schemas.microsoft.com/office/drawing/2014/main" id="{367F44D5-C45A-4FAC-B016-1B4B2FEF7467}"/>
-              </a:ext>
-            </a:extLst>
-          </p:cNvPr>
-          <p:cNvSpPr>
-            <a:spLocks xmlns:a="http://schemas.openxmlformats.org/drawingml/2006/main" noGrp="1"/>
-          </p:cNvSpPr>
-          <p:nvPr/>
-        </p:nvSpPr>
-        <p:spPr>
-          <a:xfrm xmlns:a="http://schemas.openxmlformats.org/drawingml/2006/main">
-            <a:off x="1028700" y="1200150"/>
-            <a:ext cx="1619250" cy="304800"/>
-          </a:xfrm>
-          <a:prstGeom xmlns:a="http://schemas.openxmlformats.org/drawingml/2006/main" prst="roundRect">
-            <a:avLst>
-              <a:gd name="adj" fmla="val 50000"/>
-            </a:avLst>
-          </a:prstGeom>
-          <a:solidFill xmlns:a="http://schemas.openxmlformats.org/drawingml/2006/main">
-            <a:srgbClr val="E9F5F2"/>
-          </a:solidFill>
-          <a:ln xmlns:a="http://schemas.openxmlformats.org/drawingml/2006/main" w="9525">
-            <a:solidFill>
-              <a:srgbClr val="E9F5F2"/>
+          <a:solidFill xmlns:a="http://schemas.openxmlformats.org/drawingml/2006/main">
+            <a:srgbClr val="FFFFFF"/>
+          </a:solidFill>
+          <a:ln xmlns:a="http://schemas.openxmlformats.org/drawingml/2006/main" w="14288">
+            <a:solidFill>
+              <a:srgbClr val="0F766E"/>
+            </a:solidFill>
+            <a:prstDash val="solid"/>
+          </a:ln>
+        </p:spPr>
+        <p:style>
+          <a:lnRef xmlns:a="http://schemas.openxmlformats.org/drawingml/2006/main" idx="0"/>
+          <a:fillRef xmlns:a="http://schemas.openxmlformats.org/drawingml/2006/main" idx="0"/>
+          <a:effectRef xmlns:a="http://schemas.openxmlformats.org/drawingml/2006/main" idx="4"/>
+          <a:fontRef xmlns:a="http://schemas.openxmlformats.org/drawingml/2006/main" idx="major"/>
+        </p:style>
+      </p:sp>
+      <p:sp>
+        <p:nvSpPr>
+          <p:cNvPr id="11" name="">
+            <a:extLst xmlns:a="http://schemas.openxmlformats.org/drawingml/2006/main">
+              <a:ext uri="{FF2B5EF4-FFF2-40B4-BE49-F238E27FC236}">
+                <a16:creationId xmlns:a16="http://schemas.microsoft.com/office/drawing/2014/main" id="{0A23F1E0-693A-4820-9114-3C62A7D869AE}"/>
+              </a:ext>
+            </a:extLst>
+          </p:cNvPr>
+          <p:cNvSpPr>
+            <a:spLocks xmlns:a="http://schemas.openxmlformats.org/drawingml/2006/main" noGrp="1"/>
+          </p:cNvSpPr>
+          <p:nvPr/>
+        </p:nvSpPr>
+        <p:spPr>
+          <a:xfrm xmlns:a="http://schemas.openxmlformats.org/drawingml/2006/main">
+            <a:off x="1485900" y="4152900"/>
+            <a:ext cx="228600" cy="228600"/>
+          </a:xfrm>
+          <a:prstGeom xmlns:a="http://schemas.openxmlformats.org/drawingml/2006/main" prst="ellipse">
+            <a:avLst/>
+          </a:prstGeom>
+          <a:solidFill xmlns:a="http://schemas.openxmlformats.org/drawingml/2006/main">
+            <a:srgbClr val="0F766E"/>
+          </a:solidFill>
+          <a:ln xmlns:a="http://schemas.openxmlformats.org/drawingml/2006/main" w="0">
+            <a:solidFill>
+              <a:srgbClr val="0F766E"/>
             </a:solidFill>
             <a:prstDash val="solid"/>
           </a:ln>
@@ -7104,9 +7260,9 @@
           <a:lstStyle xmlns:a="http://schemas.openxmlformats.org/drawingml/2006/main"/>
           <a:p xmlns:a="http://schemas.openxmlformats.org/drawingml/2006/main">
             <a:pPr algn="ctr">
-              <a:defRPr sz="1013" b="1">
-                <a:solidFill>
-                  <a:srgbClr val="0F766E"/>
+              <a:defRPr sz="938" b="1">
+                <a:solidFill>
+                  <a:srgbClr val="FFFFFF"/>
                 </a:solidFill>
                 <a:latin typeface="PingFang SC"/>
                 <a:ea typeface="PingFang SC"/>
@@ -7114,50 +7270,44 @@
               </a:defRPr>
             </a:pPr>
             <a:r>
-              <a:rPr sz="1013" b="1">
-                <a:solidFill>
-                  <a:srgbClr val="0F766E"/>
+              <a:rPr sz="938" b="1">
+                <a:solidFill>
+                  <a:srgbClr val="FFFFFF"/>
                 </a:solidFill>
                 <a:latin typeface="PingFang SC"/>
                 <a:ea typeface="PingFang SC"/>
                 <a:cs typeface="PingFang SC"/>
               </a:rPr>
-              <a:t>Project: 数据 + 问题</a:t>
+              <a:t>1</a:t>
             </a:r>
           </a:p>
         </p:txBody>
       </p:sp>
       <p:sp>
         <p:nvSpPr>
-          <p:cNvPr id="8" name="">
-            <a:extLst xmlns:a="http://schemas.openxmlformats.org/drawingml/2006/main">
-              <a:ext uri="{FF2B5EF4-FFF2-40B4-BE49-F238E27FC236}">
-                <a16:creationId xmlns:a16="http://schemas.microsoft.com/office/drawing/2014/main" id="{F47EC99D-C44B-48E3-95AA-766256363B82}"/>
-              </a:ext>
-            </a:extLst>
-          </p:cNvPr>
-          <p:cNvSpPr>
-            <a:spLocks xmlns:a="http://schemas.openxmlformats.org/drawingml/2006/main" noGrp="1"/>
-          </p:cNvSpPr>
-          <p:nvPr/>
-        </p:nvSpPr>
-        <p:spPr>
-          <a:xfrm xmlns:a="http://schemas.openxmlformats.org/drawingml/2006/main">
-            <a:off x="6762750" y="1200150"/>
-            <a:ext cx="1428750" cy="304800"/>
-          </a:xfrm>
-          <a:prstGeom xmlns:a="http://schemas.openxmlformats.org/drawingml/2006/main" prst="roundRect">
-            <a:avLst>
-              <a:gd name="adj" fmla="val 50000"/>
-            </a:avLst>
-          </a:prstGeom>
-          <a:solidFill xmlns:a="http://schemas.openxmlformats.org/drawingml/2006/main">
-            <a:srgbClr val="E9F5F2"/>
-          </a:solidFill>
-          <a:ln xmlns:a="http://schemas.openxmlformats.org/drawingml/2006/main" w="9525">
-            <a:solidFill>
-              <a:srgbClr val="E9F5F2"/>
-            </a:solidFill>
+          <p:cNvPr id="12" name="">
+            <a:extLst xmlns:a="http://schemas.openxmlformats.org/drawingml/2006/main">
+              <a:ext uri="{FF2B5EF4-FFF2-40B4-BE49-F238E27FC236}">
+                <a16:creationId xmlns:a16="http://schemas.microsoft.com/office/drawing/2014/main" id="{3805FC07-94D2-4291-AAF7-1FF56F76D1D4}"/>
+              </a:ext>
+            </a:extLst>
+          </p:cNvPr>
+          <p:cNvSpPr>
+            <a:spLocks xmlns:a="http://schemas.openxmlformats.org/drawingml/2006/main" noGrp="1"/>
+          </p:cNvSpPr>
+          <p:nvPr/>
+        </p:nvSpPr>
+        <p:spPr>
+          <a:xfrm xmlns:a="http://schemas.openxmlformats.org/drawingml/2006/main">
+            <a:off x="1752600" y="4191000"/>
+            <a:ext cx="1785938" cy="628650"/>
+          </a:xfrm>
+          <a:prstGeom xmlns:a="http://schemas.openxmlformats.org/drawingml/2006/main" prst="rect">
+            <a:avLst/>
+          </a:prstGeom>
+          <a:noFill xmlns:a="http://schemas.openxmlformats.org/drawingml/2006/main"/>
+          <a:ln xmlns:a="http://schemas.openxmlformats.org/drawingml/2006/main" w="0">
+            <a:noFill/>
             <a:prstDash val="solid"/>
           </a:ln>
         </p:spPr>
@@ -7168,9 +7318,13 @@
           <a:lstStyle xmlns:a="http://schemas.openxmlformats.org/drawingml/2006/main"/>
           <a:p xmlns:a="http://schemas.openxmlformats.org/drawingml/2006/main">
             <a:pPr algn="ctr">
-              <a:defRPr sz="1013" b="1">
-                <a:solidFill>
-                  <a:srgbClr val="0F766E"/>
+              <a:lnSpc>
+                <a:spcPct val="102000"/>
+              </a:lnSpc>
+              <a:buNone/>
+              <a:defRPr sz="1238" b="1" i="0">
+                <a:solidFill>
+                  <a:srgbClr val="17212B"/>
                 </a:solidFill>
                 <a:latin typeface="PingFang SC"/>
                 <a:ea typeface="PingFang SC"/>
@@ -7178,49 +7332,115 @@
               </a:defRPr>
             </a:pPr>
             <a:r>
-              <a:rPr sz="1013" b="1">
-                <a:solidFill>
-                  <a:srgbClr val="0F766E"/>
+              <a:rPr sz="1238" b="1" i="0">
+                <a:solidFill>
+                  <a:srgbClr val="17212B"/>
                 </a:solidFill>
                 <a:latin typeface="PingFang SC"/>
                 <a:ea typeface="PingFang SC"/>
                 <a:cs typeface="PingFang SC"/>
               </a:rPr>
-              <a:t>Run: live events</a:t>
+              <a:t>Project</a:t>
+            </a:r>
+          </a:p>
+          <a:p xmlns:a="http://schemas.openxmlformats.org/drawingml/2006/main">
+            <a:pPr algn="ctr">
+              <a:lnSpc>
+                <a:spcPct val="102000"/>
+              </a:lnSpc>
+              <a:buNone/>
+              <a:defRPr sz="1238" b="1" i="0">
+                <a:solidFill>
+                  <a:srgbClr val="17212B"/>
+                </a:solidFill>
+                <a:latin typeface="PingFang SC"/>
+                <a:ea typeface="PingFang SC"/>
+                <a:cs typeface="PingFang SC"/>
+              </a:defRPr>
+            </a:pPr>
+            <a:r>
+              <a:rPr sz="1238" b="1" i="0">
+                <a:solidFill>
+                  <a:srgbClr val="17212B"/>
+                </a:solidFill>
+                <a:latin typeface="PingFang SC"/>
+                <a:ea typeface="PingFang SC"/>
+                <a:cs typeface="PingFang SC"/>
+              </a:rPr>
+              <a:t>理解数据</a:t>
             </a:r>
           </a:p>
         </p:txBody>
       </p:sp>
       <p:sp>
         <p:nvSpPr>
-          <p:cNvPr id="9" name="">
-            <a:extLst xmlns:a="http://schemas.openxmlformats.org/drawingml/2006/main">
-              <a:ext uri="{FF2B5EF4-FFF2-40B4-BE49-F238E27FC236}">
-                <a16:creationId xmlns:a16="http://schemas.microsoft.com/office/drawing/2014/main" id="{EDD8BA67-061B-4349-B787-EFD9A7F824E5}"/>
-              </a:ext>
-            </a:extLst>
-          </p:cNvPr>
-          <p:cNvSpPr>
-            <a:spLocks xmlns:a="http://schemas.openxmlformats.org/drawingml/2006/main" noGrp="1"/>
-          </p:cNvSpPr>
-          <p:nvPr/>
-        </p:nvSpPr>
-        <p:spPr>
-          <a:xfrm xmlns:a="http://schemas.openxmlformats.org/drawingml/2006/main">
-            <a:off x="1028700" y="3657600"/>
-            <a:ext cx="1809750" cy="304800"/>
+          <p:cNvPr id="13" name="">
+            <a:extLst xmlns:a="http://schemas.openxmlformats.org/drawingml/2006/main">
+              <a:ext uri="{FF2B5EF4-FFF2-40B4-BE49-F238E27FC236}">
+                <a16:creationId xmlns:a16="http://schemas.microsoft.com/office/drawing/2014/main" id="{94C9EB6B-A4D7-4EEC-92DB-4104B7F9C4CB}"/>
+              </a:ext>
+            </a:extLst>
+          </p:cNvPr>
+          <p:cNvSpPr>
+            <a:spLocks xmlns:a="http://schemas.openxmlformats.org/drawingml/2006/main" noGrp="1"/>
+          </p:cNvSpPr>
+          <p:nvPr/>
+        </p:nvSpPr>
+        <p:spPr>
+          <a:xfrm xmlns:a="http://schemas.openxmlformats.org/drawingml/2006/main">
+            <a:off x="3786188" y="4057650"/>
+            <a:ext cx="2224088" cy="876300"/>
           </a:xfrm>
           <a:prstGeom xmlns:a="http://schemas.openxmlformats.org/drawingml/2006/main" prst="roundRect">
             <a:avLst>
-              <a:gd name="adj" fmla="val 50000"/>
+              <a:gd name="adj" fmla="val 13043"/>
             </a:avLst>
           </a:prstGeom>
           <a:solidFill xmlns:a="http://schemas.openxmlformats.org/drawingml/2006/main">
             <a:srgbClr val="E9F5F2"/>
           </a:solidFill>
-          <a:ln xmlns:a="http://schemas.openxmlformats.org/drawingml/2006/main" w="9525">
-            <a:solidFill>
-              <a:srgbClr val="E9F5F2"/>
+          <a:ln xmlns:a="http://schemas.openxmlformats.org/drawingml/2006/main" w="14288">
+            <a:solidFill>
+              <a:srgbClr val="0F766E"/>
+            </a:solidFill>
+            <a:prstDash val="solid"/>
+          </a:ln>
+        </p:spPr>
+        <p:style>
+          <a:lnRef xmlns:a="http://schemas.openxmlformats.org/drawingml/2006/main" idx="0"/>
+          <a:fillRef xmlns:a="http://schemas.openxmlformats.org/drawingml/2006/main" idx="0"/>
+          <a:effectRef xmlns:a="http://schemas.openxmlformats.org/drawingml/2006/main" idx="4"/>
+          <a:fontRef xmlns:a="http://schemas.openxmlformats.org/drawingml/2006/main" idx="major"/>
+        </p:style>
+      </p:sp>
+      <p:sp>
+        <p:nvSpPr>
+          <p:cNvPr id="14" name="">
+            <a:extLst xmlns:a="http://schemas.openxmlformats.org/drawingml/2006/main">
+              <a:ext uri="{FF2B5EF4-FFF2-40B4-BE49-F238E27FC236}">
+                <a16:creationId xmlns:a16="http://schemas.microsoft.com/office/drawing/2014/main" id="{4A6B36AF-5A43-4013-BD14-6F07124BC9B4}"/>
+              </a:ext>
+            </a:extLst>
+          </p:cNvPr>
+          <p:cNvSpPr>
+            <a:spLocks xmlns:a="http://schemas.openxmlformats.org/drawingml/2006/main" noGrp="1"/>
+          </p:cNvSpPr>
+          <p:nvPr/>
+        </p:nvSpPr>
+        <p:spPr>
+          <a:xfrm xmlns:a="http://schemas.openxmlformats.org/drawingml/2006/main">
+            <a:off x="3881438" y="4152900"/>
+            <a:ext cx="228600" cy="228600"/>
+          </a:xfrm>
+          <a:prstGeom xmlns:a="http://schemas.openxmlformats.org/drawingml/2006/main" prst="ellipse">
+            <a:avLst/>
+          </a:prstGeom>
+          <a:solidFill xmlns:a="http://schemas.openxmlformats.org/drawingml/2006/main">
+            <a:srgbClr val="0F766E"/>
+          </a:solidFill>
+          <a:ln xmlns:a="http://schemas.openxmlformats.org/drawingml/2006/main" w="0">
+            <a:solidFill>
+              <a:srgbClr val="0F766E"/>
             </a:solidFill>
             <a:prstDash val="solid"/>
           </a:ln>
@@ -7232,9 +7452,9 @@
           <a:lstStyle xmlns:a="http://schemas.openxmlformats.org/drawingml/2006/main"/>
           <a:p xmlns:a="http://schemas.openxmlformats.org/drawingml/2006/main">
             <a:pPr algn="ctr">
-              <a:defRPr sz="1013" b="1">
-                <a:solidFill>
-                  <a:srgbClr val="0F766E"/>
+              <a:defRPr sz="938" b="1">
+                <a:solidFill>
+                  <a:srgbClr val="FFFFFF"/>
                 </a:solidFill>
                 <a:latin typeface="PingFang SC"/>
                 <a:ea typeface="PingFang SC"/>
@@ -7242,50 +7462,44 @@
               </a:defRPr>
             </a:pPr>
             <a:r>
-              <a:rPr sz="1013" b="1">
-                <a:solidFill>
-                  <a:srgbClr val="0F766E"/>
+              <a:rPr sz="938" b="1">
+                <a:solidFill>
+                  <a:srgbClr val="FFFFFF"/>
                 </a:solidFill>
                 <a:latin typeface="PingFang SC"/>
                 <a:ea typeface="PingFang SC"/>
                 <a:cs typeface="PingFang SC"/>
               </a:rPr>
-              <a:t>Explore: Spatial + UMAP</a:t>
+              <a:t>2</a:t>
             </a:r>
           </a:p>
         </p:txBody>
       </p:sp>
       <p:sp>
         <p:nvSpPr>
-          <p:cNvPr id="10" name="">
-            <a:extLst xmlns:a="http://schemas.openxmlformats.org/drawingml/2006/main">
-              <a:ext uri="{FF2B5EF4-FFF2-40B4-BE49-F238E27FC236}">
-                <a16:creationId xmlns:a16="http://schemas.microsoft.com/office/drawing/2014/main" id="{FDDC8A2E-E533-44F3-8C76-0B4598AEB90C}"/>
-              </a:ext>
-            </a:extLst>
-          </p:cNvPr>
-          <p:cNvSpPr>
-            <a:spLocks xmlns:a="http://schemas.openxmlformats.org/drawingml/2006/main" noGrp="1"/>
-          </p:cNvSpPr>
-          <p:nvPr/>
-        </p:nvSpPr>
-        <p:spPr>
-          <a:xfrm xmlns:a="http://schemas.openxmlformats.org/drawingml/2006/main">
-            <a:off x="6762750" y="3657600"/>
-            <a:ext cx="2000250" cy="304800"/>
-          </a:xfrm>
-          <a:prstGeom xmlns:a="http://schemas.openxmlformats.org/drawingml/2006/main" prst="roundRect">
-            <a:avLst>
-              <a:gd name="adj" fmla="val 50000"/>
-            </a:avLst>
-          </a:prstGeom>
-          <a:solidFill xmlns:a="http://schemas.openxmlformats.org/drawingml/2006/main">
-            <a:srgbClr val="E9F5F2"/>
-          </a:solidFill>
-          <a:ln xmlns:a="http://schemas.openxmlformats.org/drawingml/2006/main" w="9525">
-            <a:solidFill>
-              <a:srgbClr val="E9F5F2"/>
-            </a:solidFill>
+          <p:cNvPr id="15" name="">
+            <a:extLst xmlns:a="http://schemas.openxmlformats.org/drawingml/2006/main">
+              <a:ext uri="{FF2B5EF4-FFF2-40B4-BE49-F238E27FC236}">
+                <a16:creationId xmlns:a16="http://schemas.microsoft.com/office/drawing/2014/main" id="{C7E07DD3-DD51-4850-8200-60B02FA2E2D1}"/>
+              </a:ext>
+            </a:extLst>
+          </p:cNvPr>
+          <p:cNvSpPr>
+            <a:spLocks xmlns:a="http://schemas.openxmlformats.org/drawingml/2006/main" noGrp="1"/>
+          </p:cNvSpPr>
+          <p:nvPr/>
+        </p:nvSpPr>
+        <p:spPr>
+          <a:xfrm xmlns:a="http://schemas.openxmlformats.org/drawingml/2006/main">
+            <a:off x="4148138" y="4191000"/>
+            <a:ext cx="1785938" cy="628650"/>
+          </a:xfrm>
+          <a:prstGeom xmlns:a="http://schemas.openxmlformats.org/drawingml/2006/main" prst="rect">
+            <a:avLst/>
+          </a:prstGeom>
+          <a:noFill xmlns:a="http://schemas.openxmlformats.org/drawingml/2006/main"/>
+          <a:ln xmlns:a="http://schemas.openxmlformats.org/drawingml/2006/main" w="0">
+            <a:noFill/>
             <a:prstDash val="solid"/>
           </a:ln>
         </p:spPr>
@@ -7296,9 +7510,13 @@
           <a:lstStyle xmlns:a="http://schemas.openxmlformats.org/drawingml/2006/main"/>
           <a:p xmlns:a="http://schemas.openxmlformats.org/drawingml/2006/main">
             <a:pPr algn="ctr">
-              <a:defRPr sz="1013" b="1">
-                <a:solidFill>
-                  <a:srgbClr val="0F766E"/>
+              <a:lnSpc>
+                <a:spcPct val="102000"/>
+              </a:lnSpc>
+              <a:buNone/>
+              <a:defRPr sz="1238" b="1" i="0">
+                <a:solidFill>
+                  <a:srgbClr val="17212B"/>
                 </a:solidFill>
                 <a:latin typeface="PingFang SC"/>
                 <a:ea typeface="PingFang SC"/>
@@ -7306,25 +7524,766 @@
               </a:defRPr>
             </a:pPr>
             <a:r>
-              <a:rPr sz="1013" b="1">
-                <a:solidFill>
-                  <a:srgbClr val="0F766E"/>
+              <a:rPr sz="1238" b="1" i="0">
+                <a:solidFill>
+                  <a:srgbClr val="17212B"/>
                 </a:solidFill>
                 <a:latin typeface="PingFang SC"/>
                 <a:ea typeface="PingFang SC"/>
                 <a:cs typeface="PingFang SC"/>
               </a:rPr>
-              <a:t>Report: evidence + caveats</a:t>
+              <a:t>Run</a:t>
+            </a:r>
+          </a:p>
+          <a:p xmlns:a="http://schemas.openxmlformats.org/drawingml/2006/main">
+            <a:pPr algn="ctr">
+              <a:lnSpc>
+                <a:spcPct val="102000"/>
+              </a:lnSpc>
+              <a:buNone/>
+              <a:defRPr sz="1238" b="1" i="0">
+                <a:solidFill>
+                  <a:srgbClr val="17212B"/>
+                </a:solidFill>
+                <a:latin typeface="PingFang SC"/>
+                <a:ea typeface="PingFang SC"/>
+                <a:cs typeface="PingFang SC"/>
+              </a:defRPr>
+            </a:pPr>
+            <a:r>
+              <a:rPr sz="1238" b="1" i="0">
+                <a:solidFill>
+                  <a:srgbClr val="17212B"/>
+                </a:solidFill>
+                <a:latin typeface="PingFang SC"/>
+                <a:ea typeface="PingFang SC"/>
+                <a:cs typeface="PingFang SC"/>
+              </a:rPr>
+              <a:t>执行计划</a:t>
             </a:r>
           </a:p>
         </p:txBody>
       </p:sp>
       <p:sp>
         <p:nvSpPr>
-          <p:cNvPr id="11" name="">
-            <a:extLst xmlns:a="http://schemas.openxmlformats.org/drawingml/2006/main">
-              <a:ext uri="{FF2B5EF4-FFF2-40B4-BE49-F238E27FC236}">
-                <a16:creationId xmlns:a16="http://schemas.microsoft.com/office/drawing/2014/main" id="{6F9A3B4A-CBE8-49EF-818B-FA1C278D1818}"/>
+          <p:cNvPr id="16" name="">
+            <a:extLst xmlns:a="http://schemas.openxmlformats.org/drawingml/2006/main">
+              <a:ext uri="{FF2B5EF4-FFF2-40B4-BE49-F238E27FC236}">
+                <a16:creationId xmlns:a16="http://schemas.microsoft.com/office/drawing/2014/main" id="{420E9E80-B061-417C-AC87-9C781CB6E147}"/>
+              </a:ext>
+            </a:extLst>
+          </p:cNvPr>
+          <p:cNvSpPr>
+            <a:spLocks xmlns:a="http://schemas.openxmlformats.org/drawingml/2006/main" noGrp="1"/>
+          </p:cNvSpPr>
+          <p:nvPr/>
+        </p:nvSpPr>
+        <p:spPr>
+          <a:xfrm xmlns:a="http://schemas.openxmlformats.org/drawingml/2006/main">
+            <a:off x="6181725" y="4057650"/>
+            <a:ext cx="2224088" cy="876300"/>
+          </a:xfrm>
+          <a:prstGeom xmlns:a="http://schemas.openxmlformats.org/drawingml/2006/main" prst="roundRect">
+            <a:avLst>
+              <a:gd name="adj" fmla="val 13043"/>
+            </a:avLst>
+          </a:prstGeom>
+          <a:solidFill xmlns:a="http://schemas.openxmlformats.org/drawingml/2006/main">
+            <a:srgbClr val="FFFFFF"/>
+          </a:solidFill>
+          <a:ln xmlns:a="http://schemas.openxmlformats.org/drawingml/2006/main" w="14288">
+            <a:solidFill>
+              <a:srgbClr val="0F766E"/>
+            </a:solidFill>
+            <a:prstDash val="solid"/>
+          </a:ln>
+        </p:spPr>
+        <p:style>
+          <a:lnRef xmlns:a="http://schemas.openxmlformats.org/drawingml/2006/main" idx="0"/>
+          <a:fillRef xmlns:a="http://schemas.openxmlformats.org/drawingml/2006/main" idx="0"/>
+          <a:effectRef xmlns:a="http://schemas.openxmlformats.org/drawingml/2006/main" idx="4"/>
+          <a:fontRef xmlns:a="http://schemas.openxmlformats.org/drawingml/2006/main" idx="major"/>
+        </p:style>
+      </p:sp>
+      <p:sp>
+        <p:nvSpPr>
+          <p:cNvPr id="17" name="">
+            <a:extLst xmlns:a="http://schemas.openxmlformats.org/drawingml/2006/main">
+              <a:ext uri="{FF2B5EF4-FFF2-40B4-BE49-F238E27FC236}">
+                <a16:creationId xmlns:a16="http://schemas.microsoft.com/office/drawing/2014/main" id="{B7660C1C-443F-4493-8D79-5B466105B9AD}"/>
+              </a:ext>
+            </a:extLst>
+          </p:cNvPr>
+          <p:cNvSpPr>
+            <a:spLocks xmlns:a="http://schemas.openxmlformats.org/drawingml/2006/main" noGrp="1"/>
+          </p:cNvSpPr>
+          <p:nvPr/>
+        </p:nvSpPr>
+        <p:spPr>
+          <a:xfrm xmlns:a="http://schemas.openxmlformats.org/drawingml/2006/main">
+            <a:off x="6276975" y="4152900"/>
+            <a:ext cx="228600" cy="228600"/>
+          </a:xfrm>
+          <a:prstGeom xmlns:a="http://schemas.openxmlformats.org/drawingml/2006/main" prst="ellipse">
+            <a:avLst/>
+          </a:prstGeom>
+          <a:solidFill xmlns:a="http://schemas.openxmlformats.org/drawingml/2006/main">
+            <a:srgbClr val="0F766E"/>
+          </a:solidFill>
+          <a:ln xmlns:a="http://schemas.openxmlformats.org/drawingml/2006/main" w="0">
+            <a:solidFill>
+              <a:srgbClr val="0F766E"/>
+            </a:solidFill>
+            <a:prstDash val="solid"/>
+          </a:ln>
+        </p:spPr>
+        <p:txBody>
+          <a:bodyPr xmlns:a="http://schemas.openxmlformats.org/drawingml/2006/main" lIns="0" tIns="0" rIns="0" bIns="0" anchor="ctr">
+            <a:normAutofit fontScale="100000"/>
+          </a:bodyPr>
+          <a:lstStyle xmlns:a="http://schemas.openxmlformats.org/drawingml/2006/main"/>
+          <a:p xmlns:a="http://schemas.openxmlformats.org/drawingml/2006/main">
+            <a:pPr algn="ctr">
+              <a:defRPr sz="938" b="1">
+                <a:solidFill>
+                  <a:srgbClr val="FFFFFF"/>
+                </a:solidFill>
+                <a:latin typeface="PingFang SC"/>
+                <a:ea typeface="PingFang SC"/>
+                <a:cs typeface="PingFang SC"/>
+              </a:defRPr>
+            </a:pPr>
+            <a:r>
+              <a:rPr sz="938" b="1">
+                <a:solidFill>
+                  <a:srgbClr val="FFFFFF"/>
+                </a:solidFill>
+                <a:latin typeface="PingFang SC"/>
+                <a:ea typeface="PingFang SC"/>
+                <a:cs typeface="PingFang SC"/>
+              </a:rPr>
+              <a:t>3</a:t>
+            </a:r>
+          </a:p>
+        </p:txBody>
+      </p:sp>
+      <p:sp>
+        <p:nvSpPr>
+          <p:cNvPr id="18" name="">
+            <a:extLst xmlns:a="http://schemas.openxmlformats.org/drawingml/2006/main">
+              <a:ext uri="{FF2B5EF4-FFF2-40B4-BE49-F238E27FC236}">
+                <a16:creationId xmlns:a16="http://schemas.microsoft.com/office/drawing/2014/main" id="{E00E4C79-0D0E-4679-B81B-EF9A3CA3AF66}"/>
+              </a:ext>
+            </a:extLst>
+          </p:cNvPr>
+          <p:cNvSpPr>
+            <a:spLocks xmlns:a="http://schemas.openxmlformats.org/drawingml/2006/main" noGrp="1"/>
+          </p:cNvSpPr>
+          <p:nvPr/>
+        </p:nvSpPr>
+        <p:spPr>
+          <a:xfrm xmlns:a="http://schemas.openxmlformats.org/drawingml/2006/main">
+            <a:off x="6543675" y="4191000"/>
+            <a:ext cx="1785938" cy="628650"/>
+          </a:xfrm>
+          <a:prstGeom xmlns:a="http://schemas.openxmlformats.org/drawingml/2006/main" prst="rect">
+            <a:avLst/>
+          </a:prstGeom>
+          <a:noFill xmlns:a="http://schemas.openxmlformats.org/drawingml/2006/main"/>
+          <a:ln xmlns:a="http://schemas.openxmlformats.org/drawingml/2006/main" w="0">
+            <a:noFill/>
+            <a:prstDash val="solid"/>
+          </a:ln>
+        </p:spPr>
+        <p:txBody>
+          <a:bodyPr xmlns:a="http://schemas.openxmlformats.org/drawingml/2006/main" lIns="0" tIns="0" rIns="0" bIns="0" anchor="ctr">
+            <a:normAutofit fontScale="100000"/>
+          </a:bodyPr>
+          <a:lstStyle xmlns:a="http://schemas.openxmlformats.org/drawingml/2006/main"/>
+          <a:p xmlns:a="http://schemas.openxmlformats.org/drawingml/2006/main">
+            <a:pPr algn="ctr">
+              <a:lnSpc>
+                <a:spcPct val="102000"/>
+              </a:lnSpc>
+              <a:buNone/>
+              <a:defRPr sz="1238" b="1" i="0">
+                <a:solidFill>
+                  <a:srgbClr val="17212B"/>
+                </a:solidFill>
+                <a:latin typeface="PingFang SC"/>
+                <a:ea typeface="PingFang SC"/>
+                <a:cs typeface="PingFang SC"/>
+              </a:defRPr>
+            </a:pPr>
+            <a:r>
+              <a:rPr sz="1238" b="1" i="0">
+                <a:solidFill>
+                  <a:srgbClr val="17212B"/>
+                </a:solidFill>
+                <a:latin typeface="PingFang SC"/>
+                <a:ea typeface="PingFang SC"/>
+                <a:cs typeface="PingFang SC"/>
+              </a:rPr>
+              <a:t>Explore</a:t>
+            </a:r>
+          </a:p>
+          <a:p xmlns:a="http://schemas.openxmlformats.org/drawingml/2006/main">
+            <a:pPr algn="ctr">
+              <a:lnSpc>
+                <a:spcPct val="102000"/>
+              </a:lnSpc>
+              <a:buNone/>
+              <a:defRPr sz="1238" b="1" i="0">
+                <a:solidFill>
+                  <a:srgbClr val="17212B"/>
+                </a:solidFill>
+                <a:latin typeface="PingFang SC"/>
+                <a:ea typeface="PingFang SC"/>
+                <a:cs typeface="PingFang SC"/>
+              </a:defRPr>
+            </a:pPr>
+            <a:r>
+              <a:rPr sz="1238" b="1" i="0">
+                <a:solidFill>
+                  <a:srgbClr val="17212B"/>
+                </a:solidFill>
+                <a:latin typeface="PingFang SC"/>
+                <a:ea typeface="PingFang SC"/>
+                <a:cs typeface="PingFang SC"/>
+              </a:rPr>
+              <a:t>联动图表</a:t>
+            </a:r>
+          </a:p>
+        </p:txBody>
+      </p:sp>
+      <p:sp>
+        <p:nvSpPr>
+          <p:cNvPr id="19" name="">
+            <a:extLst xmlns:a="http://schemas.openxmlformats.org/drawingml/2006/main">
+              <a:ext uri="{FF2B5EF4-FFF2-40B4-BE49-F238E27FC236}">
+                <a16:creationId xmlns:a16="http://schemas.microsoft.com/office/drawing/2014/main" id="{A8614FF6-0050-4E51-A13B-6D5E66D1862C}"/>
+              </a:ext>
+            </a:extLst>
+          </p:cNvPr>
+          <p:cNvSpPr>
+            <a:spLocks xmlns:a="http://schemas.openxmlformats.org/drawingml/2006/main" noGrp="1"/>
+          </p:cNvSpPr>
+          <p:nvPr/>
+        </p:nvSpPr>
+        <p:spPr>
+          <a:xfrm xmlns:a="http://schemas.openxmlformats.org/drawingml/2006/main">
+            <a:off x="8577263" y="4057650"/>
+            <a:ext cx="2224088" cy="876300"/>
+          </a:xfrm>
+          <a:prstGeom xmlns:a="http://schemas.openxmlformats.org/drawingml/2006/main" prst="roundRect">
+            <a:avLst>
+              <a:gd name="adj" fmla="val 13043"/>
+            </a:avLst>
+          </a:prstGeom>
+          <a:solidFill xmlns:a="http://schemas.openxmlformats.org/drawingml/2006/main">
+            <a:srgbClr val="E9F5F2"/>
+          </a:solidFill>
+          <a:ln xmlns:a="http://schemas.openxmlformats.org/drawingml/2006/main" w="14288">
+            <a:solidFill>
+              <a:srgbClr val="0F766E"/>
+            </a:solidFill>
+            <a:prstDash val="solid"/>
+          </a:ln>
+        </p:spPr>
+        <p:style>
+          <a:lnRef xmlns:a="http://schemas.openxmlformats.org/drawingml/2006/main" idx="0"/>
+          <a:fillRef xmlns:a="http://schemas.openxmlformats.org/drawingml/2006/main" idx="0"/>
+          <a:effectRef xmlns:a="http://schemas.openxmlformats.org/drawingml/2006/main" idx="4"/>
+          <a:fontRef xmlns:a="http://schemas.openxmlformats.org/drawingml/2006/main" idx="major"/>
+        </p:style>
+      </p:sp>
+      <p:sp>
+        <p:nvSpPr>
+          <p:cNvPr id="20" name="">
+            <a:extLst xmlns:a="http://schemas.openxmlformats.org/drawingml/2006/main">
+              <a:ext uri="{FF2B5EF4-FFF2-40B4-BE49-F238E27FC236}">
+                <a16:creationId xmlns:a16="http://schemas.microsoft.com/office/drawing/2014/main" id="{8912A7B4-C520-4025-8672-2D0D239F4478}"/>
+              </a:ext>
+            </a:extLst>
+          </p:cNvPr>
+          <p:cNvSpPr>
+            <a:spLocks xmlns:a="http://schemas.openxmlformats.org/drawingml/2006/main" noGrp="1"/>
+          </p:cNvSpPr>
+          <p:nvPr/>
+        </p:nvSpPr>
+        <p:spPr>
+          <a:xfrm xmlns:a="http://schemas.openxmlformats.org/drawingml/2006/main">
+            <a:off x="8672513" y="4152900"/>
+            <a:ext cx="228600" cy="228600"/>
+          </a:xfrm>
+          <a:prstGeom xmlns:a="http://schemas.openxmlformats.org/drawingml/2006/main" prst="ellipse">
+            <a:avLst/>
+          </a:prstGeom>
+          <a:solidFill xmlns:a="http://schemas.openxmlformats.org/drawingml/2006/main">
+            <a:srgbClr val="0F766E"/>
+          </a:solidFill>
+          <a:ln xmlns:a="http://schemas.openxmlformats.org/drawingml/2006/main" w="0">
+            <a:solidFill>
+              <a:srgbClr val="0F766E"/>
+            </a:solidFill>
+            <a:prstDash val="solid"/>
+          </a:ln>
+        </p:spPr>
+        <p:txBody>
+          <a:bodyPr xmlns:a="http://schemas.openxmlformats.org/drawingml/2006/main" lIns="0" tIns="0" rIns="0" bIns="0" anchor="ctr">
+            <a:normAutofit fontScale="100000"/>
+          </a:bodyPr>
+          <a:lstStyle xmlns:a="http://schemas.openxmlformats.org/drawingml/2006/main"/>
+          <a:p xmlns:a="http://schemas.openxmlformats.org/drawingml/2006/main">
+            <a:pPr algn="ctr">
+              <a:defRPr sz="938" b="1">
+                <a:solidFill>
+                  <a:srgbClr val="FFFFFF"/>
+                </a:solidFill>
+                <a:latin typeface="PingFang SC"/>
+                <a:ea typeface="PingFang SC"/>
+                <a:cs typeface="PingFang SC"/>
+              </a:defRPr>
+            </a:pPr>
+            <a:r>
+              <a:rPr sz="938" b="1">
+                <a:solidFill>
+                  <a:srgbClr val="FFFFFF"/>
+                </a:solidFill>
+                <a:latin typeface="PingFang SC"/>
+                <a:ea typeface="PingFang SC"/>
+                <a:cs typeface="PingFang SC"/>
+              </a:rPr>
+              <a:t>4</a:t>
+            </a:r>
+          </a:p>
+        </p:txBody>
+      </p:sp>
+      <p:sp>
+        <p:nvSpPr>
+          <p:cNvPr id="21" name="">
+            <a:extLst xmlns:a="http://schemas.openxmlformats.org/drawingml/2006/main">
+              <a:ext uri="{FF2B5EF4-FFF2-40B4-BE49-F238E27FC236}">
+                <a16:creationId xmlns:a16="http://schemas.microsoft.com/office/drawing/2014/main" id="{C2ED3B77-CF42-4DA2-8F40-691FD6FA9E92}"/>
+              </a:ext>
+            </a:extLst>
+          </p:cNvPr>
+          <p:cNvSpPr>
+            <a:spLocks xmlns:a="http://schemas.openxmlformats.org/drawingml/2006/main" noGrp="1"/>
+          </p:cNvSpPr>
+          <p:nvPr/>
+        </p:nvSpPr>
+        <p:spPr>
+          <a:xfrm xmlns:a="http://schemas.openxmlformats.org/drawingml/2006/main">
+            <a:off x="8939213" y="4191000"/>
+            <a:ext cx="1785938" cy="628650"/>
+          </a:xfrm>
+          <a:prstGeom xmlns:a="http://schemas.openxmlformats.org/drawingml/2006/main" prst="rect">
+            <a:avLst/>
+          </a:prstGeom>
+          <a:noFill xmlns:a="http://schemas.openxmlformats.org/drawingml/2006/main"/>
+          <a:ln xmlns:a="http://schemas.openxmlformats.org/drawingml/2006/main" w="0">
+            <a:noFill/>
+            <a:prstDash val="solid"/>
+          </a:ln>
+        </p:spPr>
+        <p:txBody>
+          <a:bodyPr xmlns:a="http://schemas.openxmlformats.org/drawingml/2006/main" lIns="0" tIns="0" rIns="0" bIns="0" anchor="ctr">
+            <a:normAutofit fontScale="100000"/>
+          </a:bodyPr>
+          <a:lstStyle xmlns:a="http://schemas.openxmlformats.org/drawingml/2006/main"/>
+          <a:p xmlns:a="http://schemas.openxmlformats.org/drawingml/2006/main">
+            <a:pPr algn="ctr">
+              <a:lnSpc>
+                <a:spcPct val="102000"/>
+              </a:lnSpc>
+              <a:buNone/>
+              <a:defRPr sz="1238" b="1" i="0">
+                <a:solidFill>
+                  <a:srgbClr val="17212B"/>
+                </a:solidFill>
+                <a:latin typeface="PingFang SC"/>
+                <a:ea typeface="PingFang SC"/>
+                <a:cs typeface="PingFang SC"/>
+              </a:defRPr>
+            </a:pPr>
+            <a:r>
+              <a:rPr sz="1238" b="1" i="0">
+                <a:solidFill>
+                  <a:srgbClr val="17212B"/>
+                </a:solidFill>
+                <a:latin typeface="PingFang SC"/>
+                <a:ea typeface="PingFang SC"/>
+                <a:cs typeface="PingFang SC"/>
+              </a:rPr>
+              <a:t>Report</a:t>
+            </a:r>
+          </a:p>
+          <a:p xmlns:a="http://schemas.openxmlformats.org/drawingml/2006/main">
+            <a:pPr algn="ctr">
+              <a:lnSpc>
+                <a:spcPct val="102000"/>
+              </a:lnSpc>
+              <a:buNone/>
+              <a:defRPr sz="1238" b="1" i="0">
+                <a:solidFill>
+                  <a:srgbClr val="17212B"/>
+                </a:solidFill>
+                <a:latin typeface="PingFang SC"/>
+                <a:ea typeface="PingFang SC"/>
+                <a:cs typeface="PingFang SC"/>
+              </a:defRPr>
+            </a:pPr>
+            <a:r>
+              <a:rPr sz="1238" b="1" i="0">
+                <a:solidFill>
+                  <a:srgbClr val="17212B"/>
+                </a:solidFill>
+                <a:latin typeface="PingFang SC"/>
+                <a:ea typeface="PingFang SC"/>
+                <a:cs typeface="PingFang SC"/>
+              </a:rPr>
+              <a:t>证据复核</a:t>
+            </a:r>
+          </a:p>
+        </p:txBody>
+      </p:sp>
+      <p:sp>
+        <p:nvSpPr>
+          <p:cNvPr id="22" name="">
+            <a:extLst xmlns:a="http://schemas.openxmlformats.org/drawingml/2006/main">
+              <a:ext uri="{FF2B5EF4-FFF2-40B4-BE49-F238E27FC236}">
+                <a16:creationId xmlns:a16="http://schemas.microsoft.com/office/drawing/2014/main" id="{D811E309-F62F-42A9-A128-D44BE8B2F511}"/>
+              </a:ext>
+            </a:extLst>
+          </p:cNvPr>
+          <p:cNvSpPr>
+            <a:spLocks xmlns:a="http://schemas.openxmlformats.org/drawingml/2006/main" noGrp="1"/>
+          </p:cNvSpPr>
+          <p:nvPr/>
+        </p:nvSpPr>
+        <p:spPr>
+          <a:xfrm xmlns:a="http://schemas.openxmlformats.org/drawingml/2006/main">
+            <a:off x="895350" y="5219700"/>
+            <a:ext cx="4667250" cy="704850"/>
+          </a:xfrm>
+          <a:prstGeom xmlns:a="http://schemas.openxmlformats.org/drawingml/2006/main" prst="roundRect">
+            <a:avLst>
+              <a:gd name="adj" fmla="val 16216"/>
+            </a:avLst>
+          </a:prstGeom>
+          <a:solidFill xmlns:a="http://schemas.openxmlformats.org/drawingml/2006/main">
+            <a:srgbClr val="F6FAF8"/>
+          </a:solidFill>
+          <a:ln xmlns:a="http://schemas.openxmlformats.org/drawingml/2006/main" w="9525">
+            <a:solidFill>
+              <a:srgbClr val="D7E4E0"/>
+            </a:solidFill>
+            <a:prstDash val="solid"/>
+          </a:ln>
+        </p:spPr>
+        <p:style>
+          <a:lnRef xmlns:a="http://schemas.openxmlformats.org/drawingml/2006/main" idx="0"/>
+          <a:fillRef xmlns:a="http://schemas.openxmlformats.org/drawingml/2006/main" idx="0"/>
+          <a:effectRef xmlns:a="http://schemas.openxmlformats.org/drawingml/2006/main" idx="4"/>
+          <a:fontRef xmlns:a="http://schemas.openxmlformats.org/drawingml/2006/main" idx="major"/>
+        </p:style>
+      </p:sp>
+      <p:sp>
+        <p:nvSpPr>
+          <p:cNvPr id="23" name="">
+            <a:extLst xmlns:a="http://schemas.openxmlformats.org/drawingml/2006/main">
+              <a:ext uri="{FF2B5EF4-FFF2-40B4-BE49-F238E27FC236}">
+                <a16:creationId xmlns:a16="http://schemas.microsoft.com/office/drawing/2014/main" id="{669BFBD4-4E3E-467C-8BAB-FFC22BDE3F6B}"/>
+              </a:ext>
+            </a:extLst>
+          </p:cNvPr>
+          <p:cNvSpPr>
+            <a:spLocks xmlns:a="http://schemas.openxmlformats.org/drawingml/2006/main" noGrp="1"/>
+          </p:cNvSpPr>
+          <p:nvPr/>
+        </p:nvSpPr>
+        <p:spPr>
+          <a:xfrm xmlns:a="http://schemas.openxmlformats.org/drawingml/2006/main">
+            <a:off x="1047750" y="5314950"/>
+            <a:ext cx="4362450" cy="247650"/>
+          </a:xfrm>
+          <a:prstGeom xmlns:a="http://schemas.openxmlformats.org/drawingml/2006/main" prst="rect">
+            <a:avLst/>
+          </a:prstGeom>
+          <a:noFill xmlns:a="http://schemas.openxmlformats.org/drawingml/2006/main"/>
+          <a:ln xmlns:a="http://schemas.openxmlformats.org/drawingml/2006/main" w="0">
+            <a:noFill/>
+            <a:prstDash val="solid"/>
+          </a:ln>
+        </p:spPr>
+        <p:txBody>
+          <a:bodyPr xmlns:a="http://schemas.openxmlformats.org/drawingml/2006/main" lIns="0" tIns="0" rIns="0" bIns="0" anchor="t">
+            <a:normAutofit fontScale="100000"/>
+          </a:bodyPr>
+          <a:lstStyle xmlns:a="http://schemas.openxmlformats.org/drawingml/2006/main"/>
+          <a:p xmlns:a="http://schemas.openxmlformats.org/drawingml/2006/main">
+            <a:pPr algn="l">
+              <a:lnSpc>
+                <a:spcPct val="108000"/>
+              </a:lnSpc>
+              <a:buNone/>
+              <a:defRPr sz="1425" b="1" i="0">
+                <a:solidFill>
+                  <a:srgbClr val="0F766E"/>
+                </a:solidFill>
+                <a:latin typeface="PingFang SC"/>
+                <a:ea typeface="PingFang SC"/>
+                <a:cs typeface="PingFang SC"/>
+              </a:defRPr>
+            </a:pPr>
+            <a:r>
+              <a:rPr sz="1425" b="1" i="0">
+                <a:solidFill>
+                  <a:srgbClr val="0F766E"/>
+                </a:solidFill>
+                <a:latin typeface="PingFang SC"/>
+                <a:ea typeface="PingFang SC"/>
+                <a:cs typeface="PingFang SC"/>
+              </a:rPr>
+              <a:t>PPT 已经讲过</a:t>
+            </a:r>
+          </a:p>
+        </p:txBody>
+      </p:sp>
+      <p:sp>
+        <p:nvSpPr>
+          <p:cNvPr id="24" name="">
+            <a:extLst xmlns:a="http://schemas.openxmlformats.org/drawingml/2006/main">
+              <a:ext uri="{FF2B5EF4-FFF2-40B4-BE49-F238E27FC236}">
+                <a16:creationId xmlns:a16="http://schemas.microsoft.com/office/drawing/2014/main" id="{2FB31C0B-E57E-4101-814A-1A821C27B575}"/>
+              </a:ext>
+            </a:extLst>
+          </p:cNvPr>
+          <p:cNvSpPr>
+            <a:spLocks xmlns:a="http://schemas.openxmlformats.org/drawingml/2006/main" noGrp="1"/>
+          </p:cNvSpPr>
+          <p:nvPr/>
+        </p:nvSpPr>
+        <p:spPr>
+          <a:xfrm xmlns:a="http://schemas.openxmlformats.org/drawingml/2006/main">
+            <a:off x="1047750" y="5600700"/>
+            <a:ext cx="4362450" cy="209550"/>
+          </a:xfrm>
+          <a:prstGeom xmlns:a="http://schemas.openxmlformats.org/drawingml/2006/main" prst="rect">
+            <a:avLst/>
+          </a:prstGeom>
+          <a:noFill xmlns:a="http://schemas.openxmlformats.org/drawingml/2006/main"/>
+          <a:ln xmlns:a="http://schemas.openxmlformats.org/drawingml/2006/main" w="0">
+            <a:noFill/>
+            <a:prstDash val="solid"/>
+          </a:ln>
+        </p:spPr>
+        <p:txBody>
+          <a:bodyPr xmlns:a="http://schemas.openxmlformats.org/drawingml/2006/main" lIns="0" tIns="0" rIns="0" bIns="0" anchor="t">
+            <a:normAutofit fontScale="96965"/>
+          </a:bodyPr>
+          <a:lstStyle xmlns:a="http://schemas.openxmlformats.org/drawingml/2006/main"/>
+          <a:p xmlns:a="http://schemas.openxmlformats.org/drawingml/2006/main">
+            <a:pPr algn="l">
+              <a:lnSpc>
+                <a:spcPct val="108000"/>
+              </a:lnSpc>
+              <a:buNone/>
+              <a:defRPr sz="1313" b="0" i="0">
+                <a:solidFill>
+                  <a:srgbClr val="475569"/>
+                </a:solidFill>
+                <a:latin typeface="PingFang SC"/>
+                <a:ea typeface="PingFang SC"/>
+                <a:cs typeface="PingFang SC"/>
+              </a:defRPr>
+            </a:pPr>
+            <a:r>
+              <a:rPr sz="1313" b="0" i="0">
+                <a:solidFill>
+                  <a:srgbClr val="475569"/>
+                </a:solidFill>
+                <a:latin typeface="PingFang SC"/>
+                <a:ea typeface="PingFang SC"/>
+                <a:cs typeface="PingFang SC"/>
+              </a:rPr>
+              <a:t>数据结构、QC、降维聚类、空间图和解释边界</a:t>
+            </a:r>
+          </a:p>
+        </p:txBody>
+      </p:sp>
+      <p:sp>
+        <p:nvSpPr>
+          <p:cNvPr id="25" name="">
+            <a:extLst xmlns:a="http://schemas.openxmlformats.org/drawingml/2006/main">
+              <a:ext uri="{FF2B5EF4-FFF2-40B4-BE49-F238E27FC236}">
+                <a16:creationId xmlns:a16="http://schemas.microsoft.com/office/drawing/2014/main" id="{77E612A6-A3FE-4493-8C00-82E2BEECA6B1}"/>
+              </a:ext>
+            </a:extLst>
+          </p:cNvPr>
+          <p:cNvSpPr>
+            <a:spLocks xmlns:a="http://schemas.openxmlformats.org/drawingml/2006/main" noGrp="1"/>
+          </p:cNvSpPr>
+          <p:nvPr/>
+        </p:nvSpPr>
+        <p:spPr>
+          <a:xfrm xmlns:a="http://schemas.openxmlformats.org/drawingml/2006/main">
+            <a:off x="6629400" y="5219700"/>
+            <a:ext cx="4667250" cy="704850"/>
+          </a:xfrm>
+          <a:prstGeom xmlns:a="http://schemas.openxmlformats.org/drawingml/2006/main" prst="roundRect">
+            <a:avLst>
+              <a:gd name="adj" fmla="val 16216"/>
+            </a:avLst>
+          </a:prstGeom>
+          <a:solidFill xmlns:a="http://schemas.openxmlformats.org/drawingml/2006/main">
+            <a:srgbClr val="FFF4DC"/>
+          </a:solidFill>
+          <a:ln xmlns:a="http://schemas.openxmlformats.org/drawingml/2006/main" w="9525">
+            <a:solidFill>
+              <a:srgbClr val="D7E4E0"/>
+            </a:solidFill>
+            <a:prstDash val="solid"/>
+          </a:ln>
+        </p:spPr>
+        <p:style>
+          <a:lnRef xmlns:a="http://schemas.openxmlformats.org/drawingml/2006/main" idx="0"/>
+          <a:fillRef xmlns:a="http://schemas.openxmlformats.org/drawingml/2006/main" idx="0"/>
+          <a:effectRef xmlns:a="http://schemas.openxmlformats.org/drawingml/2006/main" idx="4"/>
+          <a:fontRef xmlns:a="http://schemas.openxmlformats.org/drawingml/2006/main" idx="major"/>
+        </p:style>
+      </p:sp>
+      <p:sp>
+        <p:nvSpPr>
+          <p:cNvPr id="26" name="">
+            <a:extLst xmlns:a="http://schemas.openxmlformats.org/drawingml/2006/main">
+              <a:ext uri="{FF2B5EF4-FFF2-40B4-BE49-F238E27FC236}">
+                <a16:creationId xmlns:a16="http://schemas.microsoft.com/office/drawing/2014/main" id="{30A9CD59-C246-4900-8F53-155E1F2BF14F}"/>
+              </a:ext>
+            </a:extLst>
+          </p:cNvPr>
+          <p:cNvSpPr>
+            <a:spLocks xmlns:a="http://schemas.openxmlformats.org/drawingml/2006/main" noGrp="1"/>
+          </p:cNvSpPr>
+          <p:nvPr/>
+        </p:nvSpPr>
+        <p:spPr>
+          <a:xfrm xmlns:a="http://schemas.openxmlformats.org/drawingml/2006/main">
+            <a:off x="6781800" y="5314950"/>
+            <a:ext cx="4362450" cy="247650"/>
+          </a:xfrm>
+          <a:prstGeom xmlns:a="http://schemas.openxmlformats.org/drawingml/2006/main" prst="rect">
+            <a:avLst/>
+          </a:prstGeom>
+          <a:noFill xmlns:a="http://schemas.openxmlformats.org/drawingml/2006/main"/>
+          <a:ln xmlns:a="http://schemas.openxmlformats.org/drawingml/2006/main" w="0">
+            <a:noFill/>
+            <a:prstDash val="solid"/>
+          </a:ln>
+        </p:spPr>
+        <p:txBody>
+          <a:bodyPr xmlns:a="http://schemas.openxmlformats.org/drawingml/2006/main" lIns="0" tIns="0" rIns="0" bIns="0" anchor="t">
+            <a:normAutofit fontScale="100000"/>
+          </a:bodyPr>
+          <a:lstStyle xmlns:a="http://schemas.openxmlformats.org/drawingml/2006/main"/>
+          <a:p xmlns:a="http://schemas.openxmlformats.org/drawingml/2006/main">
+            <a:pPr algn="l">
+              <a:lnSpc>
+                <a:spcPct val="108000"/>
+              </a:lnSpc>
+              <a:buNone/>
+              <a:defRPr sz="1425" b="1" i="0">
+                <a:solidFill>
+                  <a:srgbClr val="8A5A12"/>
+                </a:solidFill>
+                <a:latin typeface="PingFang SC"/>
+                <a:ea typeface="PingFang SC"/>
+                <a:cs typeface="PingFang SC"/>
+              </a:defRPr>
+            </a:pPr>
+            <a:r>
+              <a:rPr sz="1425" b="1" i="0">
+                <a:solidFill>
+                  <a:srgbClr val="8A5A12"/>
+                </a:solidFill>
+                <a:latin typeface="PingFang SC"/>
+                <a:ea typeface="PingFang SC"/>
+                <a:cs typeface="PingFang SC"/>
+              </a:rPr>
+              <a:t>接下来在网站验证</a:t>
+            </a:r>
+          </a:p>
+        </p:txBody>
+      </p:sp>
+      <p:sp>
+        <p:nvSpPr>
+          <p:cNvPr id="27" name="">
+            <a:extLst xmlns:a="http://schemas.openxmlformats.org/drawingml/2006/main">
+              <a:ext uri="{FF2B5EF4-FFF2-40B4-BE49-F238E27FC236}">
+                <a16:creationId xmlns:a16="http://schemas.microsoft.com/office/drawing/2014/main" id="{C1A943AA-6C5E-4AF6-9156-1806A2417BE5}"/>
+              </a:ext>
+            </a:extLst>
+          </p:cNvPr>
+          <p:cNvSpPr>
+            <a:spLocks xmlns:a="http://schemas.openxmlformats.org/drawingml/2006/main" noGrp="1"/>
+          </p:cNvSpPr>
+          <p:nvPr/>
+        </p:nvSpPr>
+        <p:spPr>
+          <a:xfrm xmlns:a="http://schemas.openxmlformats.org/drawingml/2006/main">
+            <a:off x="6781800" y="5600700"/>
+            <a:ext cx="4362450" cy="209550"/>
+          </a:xfrm>
+          <a:prstGeom xmlns:a="http://schemas.openxmlformats.org/drawingml/2006/main" prst="rect">
+            <a:avLst/>
+          </a:prstGeom>
+          <a:noFill xmlns:a="http://schemas.openxmlformats.org/drawingml/2006/main"/>
+          <a:ln xmlns:a="http://schemas.openxmlformats.org/drawingml/2006/main" w="0">
+            <a:noFill/>
+            <a:prstDash val="solid"/>
+          </a:ln>
+        </p:spPr>
+        <p:txBody>
+          <a:bodyPr xmlns:a="http://schemas.openxmlformats.org/drawingml/2006/main" lIns="0" tIns="0" rIns="0" bIns="0" anchor="t">
+            <a:normAutofit fontScale="96965"/>
+          </a:bodyPr>
+          <a:lstStyle xmlns:a="http://schemas.openxmlformats.org/drawingml/2006/main"/>
+          <a:p xmlns:a="http://schemas.openxmlformats.org/drawingml/2006/main">
+            <a:pPr algn="l">
+              <a:lnSpc>
+                <a:spcPct val="108000"/>
+              </a:lnSpc>
+              <a:buNone/>
+              <a:defRPr sz="1313" b="0" i="0">
+                <a:solidFill>
+                  <a:srgbClr val="475569"/>
+                </a:solidFill>
+                <a:latin typeface="PingFang SC"/>
+                <a:ea typeface="PingFang SC"/>
+                <a:cs typeface="PingFang SC"/>
+              </a:defRPr>
+            </a:pPr>
+            <a:r>
+              <a:rPr sz="1313" b="0" i="0">
+                <a:solidFill>
+                  <a:srgbClr val="475569"/>
+                </a:solidFill>
+                <a:latin typeface="PingFang SC"/>
+                <a:ea typeface="PingFang SC"/>
+                <a:cs typeface="PingFang SC"/>
+              </a:rPr>
+              <a:t>同一套流程是否能被 Agent 计划、执行、追踪和解释</a:t>
+            </a:r>
+          </a:p>
+        </p:txBody>
+      </p:sp>
+      <p:sp>
+        <p:nvSpPr>
+          <p:cNvPr id="28" name="">
+            <a:extLst xmlns:a="http://schemas.openxmlformats.org/drawingml/2006/main">
+              <a:ext uri="{FF2B5EF4-FFF2-40B4-BE49-F238E27FC236}">
+                <a16:creationId xmlns:a16="http://schemas.microsoft.com/office/drawing/2014/main" id="{A1192C3A-A869-43F5-A867-D6B0E72534C5}"/>
               </a:ext>
             </a:extLst>
           </p:cNvPr>
@@ -7352,10 +8311,10 @@
       </p:sp>
       <p:sp>
         <p:nvSpPr>
-          <p:cNvPr id="12" name="">
-            <a:extLst xmlns:a="http://schemas.openxmlformats.org/drawingml/2006/main">
-              <a:ext uri="{FF2B5EF4-FFF2-40B4-BE49-F238E27FC236}">
-                <a16:creationId xmlns:a16="http://schemas.microsoft.com/office/drawing/2014/main" id="{4E887187-AB22-41FB-ACB1-1B122ED0FB1F}"/>
+          <p:cNvPr id="29" name="">
+            <a:extLst xmlns:a="http://schemas.openxmlformats.org/drawingml/2006/main">
+              <a:ext uri="{FF2B5EF4-FFF2-40B4-BE49-F238E27FC236}">
+                <a16:creationId xmlns:a16="http://schemas.microsoft.com/office/drawing/2014/main" id="{2D0AEF4F-433E-4DC1-AAB4-D4BDEF245882}"/>
               </a:ext>
             </a:extLst>
           </p:cNvPr>
@@ -7407,17 +8366,17 @@
                 <a:ea typeface="PingFang SC"/>
                 <a:cs typeface="PingFang SC"/>
               </a:rPr>
-              <a:t>Browser-visible workflow in Streamlit.</a:t>
+              <a:t>Switch point: open https://spatialscope-seu.streamlit.app/ after this slide.</a:t>
             </a:r>
           </a:p>
         </p:txBody>
       </p:sp>
       <p:sp>
         <p:nvSpPr>
-          <p:cNvPr id="13" name="">
-            <a:extLst xmlns:a="http://schemas.openxmlformats.org/drawingml/2006/main">
-              <a:ext uri="{FF2B5EF4-FFF2-40B4-BE49-F238E27FC236}">
-                <a16:creationId xmlns:a16="http://schemas.microsoft.com/office/drawing/2014/main" id="{E34B4F46-02FA-4A79-90B5-1CB5652AD69A}"/>
+          <p:cNvPr id="30" name="">
+            <a:extLst xmlns:a="http://schemas.openxmlformats.org/drawingml/2006/main">
+              <a:ext uri="{FF2B5EF4-FFF2-40B4-BE49-F238E27FC236}">
+                <a16:creationId xmlns:a16="http://schemas.microsoft.com/office/drawing/2014/main" id="{1F09A0B3-D5E7-4322-B669-190773D5D784}"/>
               </a:ext>
             </a:extLst>
           </p:cNvPr>
@@ -7477,7 +8436,7 @@
     </p:spTree>
     <p:extLst>
       <p:ext uri="{BB962C8B-B14F-4D97-AF65-F5344CB8AC3E}">
-        <p14:creationId xmlns:p14="http://schemas.microsoft.com/office/powerpoint/2010/main" val="1378390825"/>
+        <p14:creationId xmlns:p14="http://schemas.microsoft.com/office/powerpoint/2010/main" val="1341162003"/>
       </p:ext>
     </p:extLst>
   </p:cSld>
@@ -7508,7 +8467,7 @@
           <p:cNvPr id="1" name="">
             <a:extLst xmlns:a="http://schemas.openxmlformats.org/drawingml/2006/main">
               <a:ext uri="{FF2B5EF4-FFF2-40B4-BE49-F238E27FC236}">
-                <a16:creationId xmlns:a16="http://schemas.microsoft.com/office/drawing/2014/main" id="{53C2E611-D4AB-4745-8C67-65DCA890F58D}"/>
+                <a16:creationId xmlns:a16="http://schemas.microsoft.com/office/drawing/2014/main" id="{E2FAB3AC-B5B5-4838-8663-8DB7A9AC7285}"/>
               </a:ext>
             </a:extLst>
           </p:cNvPr>
@@ -7570,7 +8529,7 @@
           <p:cNvPr id="2" name="">
             <a:extLst xmlns:a="http://schemas.openxmlformats.org/drawingml/2006/main">
               <a:ext uri="{FF2B5EF4-FFF2-40B4-BE49-F238E27FC236}">
-                <a16:creationId xmlns:a16="http://schemas.microsoft.com/office/drawing/2014/main" id="{6AC3798E-B393-488B-989F-82B801A48C4D}"/>
+                <a16:creationId xmlns:a16="http://schemas.microsoft.com/office/drawing/2014/main" id="{B6CBA241-2C49-4A0B-A004-3B6C9BDB3BC4}"/>
               </a:ext>
             </a:extLst>
           </p:cNvPr>
@@ -7622,7 +8581,7 @@
                 <a:ea typeface="PingFang SC"/>
                 <a:cs typeface="PingFang SC"/>
               </a:rPr>
-              <a:t>Demo 展示路径</a:t>
+              <a:t>现场演示路线</a:t>
             </a:r>
           </a:p>
         </p:txBody>
@@ -7632,7 +8591,7 @@
           <p:cNvPr id="3" name="">
             <a:extLst xmlns:a="http://schemas.openxmlformats.org/drawingml/2006/main">
               <a:ext uri="{FF2B5EF4-FFF2-40B4-BE49-F238E27FC236}">
-                <a16:creationId xmlns:a16="http://schemas.microsoft.com/office/drawing/2014/main" id="{38596B78-7E4A-4982-A14F-86E709AE09C8}"/>
+                <a16:creationId xmlns:a16="http://schemas.microsoft.com/office/drawing/2014/main" id="{D23FFF58-FB9F-4566-945C-335F42AB63FC}"/>
               </a:ext>
             </a:extLst>
           </p:cNvPr>
@@ -7673,7 +8632,7 @@
           <p:cNvPr id="4" name="">
             <a:extLst xmlns:a="http://schemas.openxmlformats.org/drawingml/2006/main">
               <a:ext uri="{FF2B5EF4-FFF2-40B4-BE49-F238E27FC236}">
-                <a16:creationId xmlns:a16="http://schemas.microsoft.com/office/drawing/2014/main" id="{1B764BCD-4066-4B49-8AA9-E27453FB7AF7}"/>
+                <a16:creationId xmlns:a16="http://schemas.microsoft.com/office/drawing/2014/main" id="{06F54A36-7C57-4D9C-A8D8-50087F049232}"/>
               </a:ext>
             </a:extLst>
           </p:cNvPr>
@@ -7704,7 +8663,7 @@
           <p:cNvPr id="5" name="">
             <a:extLst xmlns:a="http://schemas.openxmlformats.org/drawingml/2006/main">
               <a:ext uri="{FF2B5EF4-FFF2-40B4-BE49-F238E27FC236}">
-                <a16:creationId xmlns:a16="http://schemas.microsoft.com/office/drawing/2014/main" id="{41B79194-BCE7-42DF-B0AF-7B9128694357}"/>
+                <a16:creationId xmlns:a16="http://schemas.microsoft.com/office/drawing/2014/main" id="{91E6B11C-D679-4189-B114-F77215EB51DB}"/>
               </a:ext>
             </a:extLst>
           </p:cNvPr>
@@ -7737,7 +8696,7 @@
           <p:cNvPr id="6" name="">
             <a:extLst xmlns:a="http://schemas.openxmlformats.org/drawingml/2006/main">
               <a:ext uri="{FF2B5EF4-FFF2-40B4-BE49-F238E27FC236}">
-                <a16:creationId xmlns:a16="http://schemas.microsoft.com/office/drawing/2014/main" id="{0C42B71F-D8CC-452B-82B9-A4D6998489EB}"/>
+                <a16:creationId xmlns:a16="http://schemas.microsoft.com/office/drawing/2014/main" id="{4B4E0497-5912-4C88-AC08-5D63D2D90281}"/>
               </a:ext>
             </a:extLst>
           </p:cNvPr>
@@ -7770,7 +8729,7 @@
           <p:cNvPr id="7" name="">
             <a:extLst xmlns:a="http://schemas.openxmlformats.org/drawingml/2006/main">
               <a:ext uri="{FF2B5EF4-FFF2-40B4-BE49-F238E27FC236}">
-                <a16:creationId xmlns:a16="http://schemas.microsoft.com/office/drawing/2014/main" id="{35088AC6-AA44-4CFA-9507-E059652ACC01}"/>
+                <a16:creationId xmlns:a16="http://schemas.microsoft.com/office/drawing/2014/main" id="{BF83C549-85DA-42B0-90B4-5C3E9C67A4B4}"/>
               </a:ext>
             </a:extLst>
           </p:cNvPr>
@@ -7803,7 +8762,7 @@
           <p:cNvPr id="8" name="">
             <a:extLst xmlns:a="http://schemas.openxmlformats.org/drawingml/2006/main">
               <a:ext uri="{FF2B5EF4-FFF2-40B4-BE49-F238E27FC236}">
-                <a16:creationId xmlns:a16="http://schemas.microsoft.com/office/drawing/2014/main" id="{1D5E5D8B-F0E2-4B7C-B9BA-E4D2E3D03B24}"/>
+                <a16:creationId xmlns:a16="http://schemas.microsoft.com/office/drawing/2014/main" id="{DA65CA51-C669-42CD-882F-EB257FF0957E}"/>
               </a:ext>
             </a:extLst>
           </p:cNvPr>
@@ -7836,7 +8795,7 @@
           <p:cNvPr id="9" name="">
             <a:extLst xmlns:a="http://schemas.openxmlformats.org/drawingml/2006/main">
               <a:ext uri="{FF2B5EF4-FFF2-40B4-BE49-F238E27FC236}">
-                <a16:creationId xmlns:a16="http://schemas.microsoft.com/office/drawing/2014/main" id="{F7EA8203-8F12-4898-88A0-CD78BEA58ECD}"/>
+                <a16:creationId xmlns:a16="http://schemas.microsoft.com/office/drawing/2014/main" id="{A5E481AE-9E0C-4453-9F27-C352E6C33398}"/>
               </a:ext>
             </a:extLst>
           </p:cNvPr>
@@ -7869,7 +8828,7 @@
           <p:cNvPr id="10" name="">
             <a:extLst xmlns:a="http://schemas.openxmlformats.org/drawingml/2006/main">
               <a:ext uri="{FF2B5EF4-FFF2-40B4-BE49-F238E27FC236}">
-                <a16:creationId xmlns:a16="http://schemas.microsoft.com/office/drawing/2014/main" id="{EB0246D8-7DEE-4733-AD0C-20A2D36C92CD}"/>
+                <a16:creationId xmlns:a16="http://schemas.microsoft.com/office/drawing/2014/main" id="{D8FB0756-AFD4-437D-B027-5070B22F78CE}"/>
               </a:ext>
             </a:extLst>
           </p:cNvPr>
@@ -7910,7 +8869,7 @@
           <p:cNvPr id="11" name="">
             <a:extLst xmlns:a="http://schemas.openxmlformats.org/drawingml/2006/main">
               <a:ext uri="{FF2B5EF4-FFF2-40B4-BE49-F238E27FC236}">
-                <a16:creationId xmlns:a16="http://schemas.microsoft.com/office/drawing/2014/main" id="{7714651A-03E3-4D86-B83E-C43F7BD50296}"/>
+                <a16:creationId xmlns:a16="http://schemas.microsoft.com/office/drawing/2014/main" id="{9ACEA2A5-731A-4D89-99C2-722541CB7F33}"/>
               </a:ext>
             </a:extLst>
           </p:cNvPr>
@@ -7972,7 +8931,7 @@
           <p:cNvPr id="12" name="">
             <a:extLst xmlns:a="http://schemas.openxmlformats.org/drawingml/2006/main">
               <a:ext uri="{FF2B5EF4-FFF2-40B4-BE49-F238E27FC236}">
-                <a16:creationId xmlns:a16="http://schemas.microsoft.com/office/drawing/2014/main" id="{3B3EF32C-4326-4BAF-AFE3-2D50F41E3F08}"/>
+                <a16:creationId xmlns:a16="http://schemas.microsoft.com/office/drawing/2014/main" id="{1036485E-66FD-4346-B0E9-151CEB724E0E}"/>
               </a:ext>
             </a:extLst>
           </p:cNvPr>
@@ -8013,7 +8972,7 @@
           <p:cNvPr id="13" name="">
             <a:extLst xmlns:a="http://schemas.openxmlformats.org/drawingml/2006/main">
               <a:ext uri="{FF2B5EF4-FFF2-40B4-BE49-F238E27FC236}">
-                <a16:creationId xmlns:a16="http://schemas.microsoft.com/office/drawing/2014/main" id="{DD92CBB0-CFF4-428E-9E8B-DB4691AA6ADC}"/>
+                <a16:creationId xmlns:a16="http://schemas.microsoft.com/office/drawing/2014/main" id="{6D521708-ABCC-41F4-8C8B-FA721DEA6A92}"/>
               </a:ext>
             </a:extLst>
           </p:cNvPr>
@@ -8075,7 +9034,7 @@
           <p:cNvPr id="14" name="">
             <a:extLst xmlns:a="http://schemas.openxmlformats.org/drawingml/2006/main">
               <a:ext uri="{FF2B5EF4-FFF2-40B4-BE49-F238E27FC236}">
-                <a16:creationId xmlns:a16="http://schemas.microsoft.com/office/drawing/2014/main" id="{AE65FC50-3938-4BD0-A12F-451C9219A944}"/>
+                <a16:creationId xmlns:a16="http://schemas.microsoft.com/office/drawing/2014/main" id="{3F2D083C-9271-4E72-A43C-26E8681B22BD}"/>
               </a:ext>
             </a:extLst>
           </p:cNvPr>
@@ -8116,7 +9075,7 @@
           <p:cNvPr id="15" name="">
             <a:extLst xmlns:a="http://schemas.openxmlformats.org/drawingml/2006/main">
               <a:ext uri="{FF2B5EF4-FFF2-40B4-BE49-F238E27FC236}">
-                <a16:creationId xmlns:a16="http://schemas.microsoft.com/office/drawing/2014/main" id="{80FF5CBE-85E0-49D5-88E1-4CC0967EA9AF}"/>
+                <a16:creationId xmlns:a16="http://schemas.microsoft.com/office/drawing/2014/main" id="{EA1AFFDE-2224-46D6-9ED7-D7BA0F0557A9}"/>
               </a:ext>
             </a:extLst>
           </p:cNvPr>
@@ -8178,7 +9137,7 @@
           <p:cNvPr id="16" name="">
             <a:extLst xmlns:a="http://schemas.openxmlformats.org/drawingml/2006/main">
               <a:ext uri="{FF2B5EF4-FFF2-40B4-BE49-F238E27FC236}">
-                <a16:creationId xmlns:a16="http://schemas.microsoft.com/office/drawing/2014/main" id="{10F8267B-CCDB-4DB0-8AA7-B3789C37E15D}"/>
+                <a16:creationId xmlns:a16="http://schemas.microsoft.com/office/drawing/2014/main" id="{DCA70B82-1742-4B2E-9293-6C889917D1E7}"/>
               </a:ext>
             </a:extLst>
           </p:cNvPr>
@@ -8219,7 +9178,7 @@
           <p:cNvPr id="17" name="">
             <a:extLst xmlns:a="http://schemas.openxmlformats.org/drawingml/2006/main">
               <a:ext uri="{FF2B5EF4-FFF2-40B4-BE49-F238E27FC236}">
-                <a16:creationId xmlns:a16="http://schemas.microsoft.com/office/drawing/2014/main" id="{A47F9CA4-5BE3-418B-B125-A6FA3DA088F8}"/>
+                <a16:creationId xmlns:a16="http://schemas.microsoft.com/office/drawing/2014/main" id="{319C819D-1072-4856-AEB9-C8431E04E372}"/>
               </a:ext>
             </a:extLst>
           </p:cNvPr>
@@ -8281,7 +9240,7 @@
           <p:cNvPr id="18" name="">
             <a:extLst xmlns:a="http://schemas.openxmlformats.org/drawingml/2006/main">
               <a:ext uri="{FF2B5EF4-FFF2-40B4-BE49-F238E27FC236}">
-                <a16:creationId xmlns:a16="http://schemas.microsoft.com/office/drawing/2014/main" id="{A6B5CBB6-1E4D-4914-A1DC-F5BACEBB6E55}"/>
+                <a16:creationId xmlns:a16="http://schemas.microsoft.com/office/drawing/2014/main" id="{FC8668B2-BBC6-4E6D-B7E4-0E29781E6F34}"/>
               </a:ext>
             </a:extLst>
           </p:cNvPr>
@@ -8322,7 +9281,7 @@
           <p:cNvPr id="19" name="">
             <a:extLst xmlns:a="http://schemas.openxmlformats.org/drawingml/2006/main">
               <a:ext uri="{FF2B5EF4-FFF2-40B4-BE49-F238E27FC236}">
-                <a16:creationId xmlns:a16="http://schemas.microsoft.com/office/drawing/2014/main" id="{7A2D40FC-0345-4AE4-A343-38E5AF549798}"/>
+                <a16:creationId xmlns:a16="http://schemas.microsoft.com/office/drawing/2014/main" id="{E429EEFD-A096-4CAF-B6DD-1B686A3714A0}"/>
               </a:ext>
             </a:extLst>
           </p:cNvPr>
@@ -8384,7 +9343,7 @@
           <p:cNvPr id="20" name="">
             <a:extLst xmlns:a="http://schemas.openxmlformats.org/drawingml/2006/main">
               <a:ext uri="{FF2B5EF4-FFF2-40B4-BE49-F238E27FC236}">
-                <a16:creationId xmlns:a16="http://schemas.microsoft.com/office/drawing/2014/main" id="{182FE780-9F29-4C9A-87D0-C2E3D3780946}"/>
+                <a16:creationId xmlns:a16="http://schemas.microsoft.com/office/drawing/2014/main" id="{DAF0A1F1-CC89-4E6B-BEB9-696EEFEC32EE}"/>
               </a:ext>
             </a:extLst>
           </p:cNvPr>
@@ -8425,7 +9384,7 @@
           <p:cNvPr id="21" name="">
             <a:extLst xmlns:a="http://schemas.openxmlformats.org/drawingml/2006/main">
               <a:ext uri="{FF2B5EF4-FFF2-40B4-BE49-F238E27FC236}">
-                <a16:creationId xmlns:a16="http://schemas.microsoft.com/office/drawing/2014/main" id="{FBA606DD-9C23-4C1E-BD30-E3186D57E1C9}"/>
+                <a16:creationId xmlns:a16="http://schemas.microsoft.com/office/drawing/2014/main" id="{2477CDF0-52D7-47A9-9A05-DEACD4B5292E}"/>
               </a:ext>
             </a:extLst>
           </p:cNvPr>
@@ -8487,7 +9446,7 @@
           <p:cNvPr id="22" name="">
             <a:extLst xmlns:a="http://schemas.openxmlformats.org/drawingml/2006/main">
               <a:ext uri="{FF2B5EF4-FFF2-40B4-BE49-F238E27FC236}">
-                <a16:creationId xmlns:a16="http://schemas.microsoft.com/office/drawing/2014/main" id="{A457F76F-AFFF-49CD-9950-00E12386496B}"/>
+                <a16:creationId xmlns:a16="http://schemas.microsoft.com/office/drawing/2014/main" id="{3A870616-060B-420D-BCFE-2DA2C1C034D2}"/>
               </a:ext>
             </a:extLst>
           </p:cNvPr>
@@ -8528,7 +9487,7 @@
           <p:cNvPr id="23" name="">
             <a:extLst xmlns:a="http://schemas.openxmlformats.org/drawingml/2006/main">
               <a:ext uri="{FF2B5EF4-FFF2-40B4-BE49-F238E27FC236}">
-                <a16:creationId xmlns:a16="http://schemas.microsoft.com/office/drawing/2014/main" id="{9FC0F392-41A1-4888-AC72-14F7A9CBCF84}"/>
+                <a16:creationId xmlns:a16="http://schemas.microsoft.com/office/drawing/2014/main" id="{D6005E81-CF9A-4B93-BFAA-C095E60FE243}"/>
               </a:ext>
             </a:extLst>
           </p:cNvPr>
@@ -8580,7 +9539,7 @@
                 <a:ea typeface="PingFang SC"/>
                 <a:cs typeface="PingFang SC"/>
               </a:rPr>
-              <a:t>Dataset card</a:t>
+              <a:t>Project</a:t>
             </a:r>
           </a:p>
         </p:txBody>
@@ -8590,7 +9549,7 @@
           <p:cNvPr id="24" name="">
             <a:extLst xmlns:a="http://schemas.openxmlformats.org/drawingml/2006/main">
               <a:ext uri="{FF2B5EF4-FFF2-40B4-BE49-F238E27FC236}">
-                <a16:creationId xmlns:a16="http://schemas.microsoft.com/office/drawing/2014/main" id="{FE97B63B-9D30-4E08-8BD5-EB38F8FB57A9}"/>
+                <a16:creationId xmlns:a16="http://schemas.microsoft.com/office/drawing/2014/main" id="{9C2515CF-2264-4835-82E2-0675A1709FA2}"/>
               </a:ext>
             </a:extLst>
           </p:cNvPr>
@@ -8642,7 +9601,7 @@
                 <a:ea typeface="PingFang SC"/>
                 <a:cs typeface="PingFang SC"/>
               </a:rPr>
-              <a:t>240 spots · 80 genes · spatial coordinates · count-like expression</a:t>
+              <a:t>先看 dataset card：spots、genes、spatial coordinates、expression layer</a:t>
             </a:r>
           </a:p>
         </p:txBody>
@@ -8652,7 +9611,7 @@
           <p:cNvPr id="25" name="">
             <a:extLst xmlns:a="http://schemas.openxmlformats.org/drawingml/2006/main">
               <a:ext uri="{FF2B5EF4-FFF2-40B4-BE49-F238E27FC236}">
-                <a16:creationId xmlns:a16="http://schemas.microsoft.com/office/drawing/2014/main" id="{90313215-5010-40B0-8DD7-52000ADACF2D}"/>
+                <a16:creationId xmlns:a16="http://schemas.microsoft.com/office/drawing/2014/main" id="{A84D3ED4-49C4-4216-AEA1-831ED66F24E8}"/>
               </a:ext>
             </a:extLst>
           </p:cNvPr>
@@ -8693,7 +9652,7 @@
           <p:cNvPr id="26" name="">
             <a:extLst xmlns:a="http://schemas.openxmlformats.org/drawingml/2006/main">
               <a:ext uri="{FF2B5EF4-FFF2-40B4-BE49-F238E27FC236}">
-                <a16:creationId xmlns:a16="http://schemas.microsoft.com/office/drawing/2014/main" id="{F0548ECD-E30F-4883-B082-C52847E3BC4F}"/>
+                <a16:creationId xmlns:a16="http://schemas.microsoft.com/office/drawing/2014/main" id="{C1B3197F-2296-460C-8571-A6D2AD0A3984}"/>
               </a:ext>
             </a:extLst>
           </p:cNvPr>
@@ -8745,7 +9704,7 @@
                 <a:ea typeface="PingFang SC"/>
                 <a:cs typeface="PingFang SC"/>
               </a:rPr>
-              <a:t>Analysis plan</a:t>
+              <a:t>Run</a:t>
             </a:r>
           </a:p>
         </p:txBody>
@@ -8755,7 +9714,7 @@
           <p:cNvPr id="27" name="">
             <a:extLst xmlns:a="http://schemas.openxmlformats.org/drawingml/2006/main">
               <a:ext uri="{FF2B5EF4-FFF2-40B4-BE49-F238E27FC236}">
-                <a16:creationId xmlns:a16="http://schemas.microsoft.com/office/drawing/2014/main" id="{B418970D-9879-4393-9033-3F5C03B4D4C5}"/>
+                <a16:creationId xmlns:a16="http://schemas.microsoft.com/office/drawing/2014/main" id="{91BA68E8-4378-4A4A-898D-569D62891627}"/>
               </a:ext>
             </a:extLst>
           </p:cNvPr>
@@ -8807,7 +9766,7 @@
                 <a:ea typeface="PingFang SC"/>
                 <a:cs typeface="PingFang SC"/>
               </a:rPr>
-              <a:t>QC -&gt; preprocess -&gt; PCA/UMAP/Leiden -&gt; spatial plot -&gt; gene panel -&gt; marker ranking</a:t>
+              <a:t>生成并批准计划：QC -&gt; preprocess -&gt; UMAP/Leiden -&gt; plots -&gt; report</a:t>
             </a:r>
           </a:p>
         </p:txBody>
@@ -8817,7 +9776,7 @@
           <p:cNvPr id="28" name="">
             <a:extLst xmlns:a="http://schemas.openxmlformats.org/drawingml/2006/main">
               <a:ext uri="{FF2B5EF4-FFF2-40B4-BE49-F238E27FC236}">
-                <a16:creationId xmlns:a16="http://schemas.microsoft.com/office/drawing/2014/main" id="{23FE0339-9FCA-4699-8657-3AA5DF6006AF}"/>
+                <a16:creationId xmlns:a16="http://schemas.microsoft.com/office/drawing/2014/main" id="{38E20DA5-1762-4416-8D9B-09A6BC246532}"/>
               </a:ext>
             </a:extLst>
           </p:cNvPr>
@@ -8858,7 +9817,7 @@
           <p:cNvPr id="29" name="">
             <a:extLst xmlns:a="http://schemas.openxmlformats.org/drawingml/2006/main">
               <a:ext uri="{FF2B5EF4-FFF2-40B4-BE49-F238E27FC236}">
-                <a16:creationId xmlns:a16="http://schemas.microsoft.com/office/drawing/2014/main" id="{4CDDCB7B-2588-43C9-9D5F-C42E3EF3B243}"/>
+                <a16:creationId xmlns:a16="http://schemas.microsoft.com/office/drawing/2014/main" id="{CD335001-1E33-4DA7-A1F7-5D10F152EFEE}"/>
               </a:ext>
             </a:extLst>
           </p:cNvPr>
@@ -8910,7 +9869,7 @@
                 <a:ea typeface="PingFang SC"/>
                 <a:cs typeface="PingFang SC"/>
               </a:rPr>
-              <a:t>Copilot question 1</a:t>
+              <a:t>Explore</a:t>
             </a:r>
           </a:p>
         </p:txBody>
@@ -8920,7 +9879,7 @@
           <p:cNvPr id="30" name="">
             <a:extLst xmlns:a="http://schemas.openxmlformats.org/drawingml/2006/main">
               <a:ext uri="{FF2B5EF4-FFF2-40B4-BE49-F238E27FC236}">
-                <a16:creationId xmlns:a16="http://schemas.microsoft.com/office/drawing/2014/main" id="{7D8C32AC-9116-471E-8CEC-0AA3CC3DF9C3}"/>
+                <a16:creationId xmlns:a16="http://schemas.microsoft.com/office/drawing/2014/main" id="{8E4D3478-75DA-4E77-9CC2-2D75884B436B}"/>
               </a:ext>
             </a:extLst>
           </p:cNvPr>
@@ -8945,7 +9904,7 @@
         </p:spPr>
         <p:txBody>
           <a:bodyPr xmlns:a="http://schemas.openxmlformats.org/drawingml/2006/main" lIns="0" tIns="0" rIns="0" bIns="0" anchor="t">
-            <a:normAutofit fontScale="100000"/>
+            <a:normAutofit fontScale="90021"/>
           </a:bodyPr>
           <a:lstStyle xmlns:a="http://schemas.openxmlformats.org/drawingml/2006/main"/>
           <a:p xmlns:a="http://schemas.openxmlformats.org/drawingml/2006/main">
@@ -8954,7 +9913,7 @@
                 <a:spcPct val="108000"/>
               </a:lnSpc>
               <a:buNone/>
-              <a:defRPr sz="1425" b="0" i="0">
+              <a:defRPr sz="1350" b="0" i="0">
                 <a:solidFill>
                   <a:srgbClr val="475569"/>
                 </a:solidFill>
@@ -8964,7 +9923,7 @@
               </a:defRPr>
             </a:pPr>
             <a:r>
-              <a:rPr sz="1425" b="0" i="0">
+              <a:rPr sz="1350" b="0" i="0">
                 <a:solidFill>
                   <a:srgbClr val="475569"/>
                 </a:solidFill>
@@ -8972,7 +9931,7 @@
                 <a:ea typeface="PingFang SC"/>
                 <a:cs typeface="PingFang SC"/>
               </a:rPr>
-              <a:t>哪个 cluster 的 Sox17 平均表达最高？</a:t>
+              <a:t>Spatial 看组织位置；UMAP 看表达结构；Copilot 必须引用 evidence IDs</a:t>
             </a:r>
           </a:p>
         </p:txBody>
@@ -8982,7 +9941,7 @@
           <p:cNvPr id="31" name="">
             <a:extLst xmlns:a="http://schemas.openxmlformats.org/drawingml/2006/main">
               <a:ext uri="{FF2B5EF4-FFF2-40B4-BE49-F238E27FC236}">
-                <a16:creationId xmlns:a16="http://schemas.microsoft.com/office/drawing/2014/main" id="{94216A1F-407E-4BB3-A922-51D2E5BAB730}"/>
+                <a16:creationId xmlns:a16="http://schemas.microsoft.com/office/drawing/2014/main" id="{A80D91A8-59EE-4F76-A966-C7826193F44C}"/>
               </a:ext>
             </a:extLst>
           </p:cNvPr>
@@ -9023,7 +9982,7 @@
           <p:cNvPr id="32" name="">
             <a:extLst xmlns:a="http://schemas.openxmlformats.org/drawingml/2006/main">
               <a:ext uri="{FF2B5EF4-FFF2-40B4-BE49-F238E27FC236}">
-                <a16:creationId xmlns:a16="http://schemas.microsoft.com/office/drawing/2014/main" id="{1EB8AF08-AFD7-45A9-B24A-AB355ADB74BB}"/>
+                <a16:creationId xmlns:a16="http://schemas.microsoft.com/office/drawing/2014/main" id="{4EBDF698-1DE7-45B4-AD14-EF80D4EDDF31}"/>
               </a:ext>
             </a:extLst>
           </p:cNvPr>
@@ -9075,7 +10034,7 @@
                 <a:ea typeface="PingFang SC"/>
                 <a:cs typeface="PingFang SC"/>
               </a:rPr>
-              <a:t>Copilot question 2</a:t>
+              <a:t>Report</a:t>
             </a:r>
           </a:p>
         </p:txBody>
@@ -9085,7 +10044,7 @@
           <p:cNvPr id="33" name="">
             <a:extLst xmlns:a="http://schemas.openxmlformats.org/drawingml/2006/main">
               <a:ext uri="{FF2B5EF4-FFF2-40B4-BE49-F238E27FC236}">
-                <a16:creationId xmlns:a16="http://schemas.microsoft.com/office/drawing/2014/main" id="{CF0D3916-03C4-44FC-A78C-9A3E5F54E95C}"/>
+                <a16:creationId xmlns:a16="http://schemas.microsoft.com/office/drawing/2014/main" id="{68911A76-61BF-41E9-A442-A8CA3D183455}"/>
               </a:ext>
             </a:extLst>
           </p:cNvPr>
@@ -9110,7 +10069,7 @@
         </p:spPr>
         <p:txBody>
           <a:bodyPr xmlns:a="http://schemas.openxmlformats.org/drawingml/2006/main" lIns="0" tIns="0" rIns="0" bIns="0" anchor="t">
-            <a:normAutofit fontScale="90021"/>
+            <a:normAutofit fontScale="100000"/>
           </a:bodyPr>
           <a:lstStyle xmlns:a="http://schemas.openxmlformats.org/drawingml/2006/main"/>
           <a:p xmlns:a="http://schemas.openxmlformats.org/drawingml/2006/main">
@@ -9137,34 +10096,7 @@
                 <a:ea typeface="PingFang SC"/>
                 <a:cs typeface="PingFang SC"/>
               </a:rPr>
-              <a:t>Pou5f1 是否集中在某些 cluster？</a:t>
-            </a:r>
-          </a:p>
-          <a:p xmlns:a="http://schemas.openxmlformats.org/drawingml/2006/main">
-            <a:pPr algn="l">
-              <a:lnSpc>
-                <a:spcPct val="108000"/>
-              </a:lnSpc>
-              <a:buNone/>
-              <a:defRPr sz="1350" b="0" i="0">
-                <a:solidFill>
-                  <a:srgbClr val="475569"/>
-                </a:solidFill>
-                <a:latin typeface="PingFang SC"/>
-                <a:ea typeface="PingFang SC"/>
-                <a:cs typeface="PingFang SC"/>
-              </a:defRPr>
-            </a:pPr>
-            <a:r>
-              <a:rPr sz="1350" b="0" i="0">
-                <a:solidFill>
-                  <a:srgbClr val="475569"/>
-                </a:solidFill>
-                <a:latin typeface="PingFang SC"/>
-                <a:ea typeface="PingFang SC"/>
-                <a:cs typeface="PingFang SC"/>
-              </a:rPr>
-              <a:t>请给出证据和局限。</a:t>
+              <a:t>读 3-5 条 findings：每条都要有 evidence 和 caveat</a:t>
             </a:r>
           </a:p>
         </p:txBody>
@@ -9174,7 +10106,7 @@
           <p:cNvPr id="34" name="">
             <a:extLst xmlns:a="http://schemas.openxmlformats.org/drawingml/2006/main">
               <a:ext uri="{FF2B5EF4-FFF2-40B4-BE49-F238E27FC236}">
-                <a16:creationId xmlns:a16="http://schemas.microsoft.com/office/drawing/2014/main" id="{B4B0628A-60FD-4FE9-802C-9C0C6E5C559C}"/>
+                <a16:creationId xmlns:a16="http://schemas.microsoft.com/office/drawing/2014/main" id="{616517F8-A319-401E-8834-11CAA1F2078F}"/>
               </a:ext>
             </a:extLst>
           </p:cNvPr>
@@ -9226,7 +10158,7 @@
                 <a:ea typeface="PingFang SC"/>
                 <a:cs typeface="PingFang SC"/>
               </a:rPr>
-              <a:t>每一步都对应标准分析流程：理解数据、执行分析、回到证据复核。</a:t>
+              <a:t>网站演示只抓主线：数据是否被理解，流程是否可追踪，解释是否回到证据。</a:t>
             </a:r>
           </a:p>
         </p:txBody>
@@ -9236,7 +10168,7 @@
           <p:cNvPr id="35" name="">
             <a:extLst xmlns:a="http://schemas.openxmlformats.org/drawingml/2006/main">
               <a:ext uri="{FF2B5EF4-FFF2-40B4-BE49-F238E27FC236}">
-                <a16:creationId xmlns:a16="http://schemas.microsoft.com/office/drawing/2014/main" id="{738BC0F1-12DF-47E0-A48A-7A92CA450B40}"/>
+                <a16:creationId xmlns:a16="http://schemas.microsoft.com/office/drawing/2014/main" id="{6213335D-6814-4B53-8C24-8238C1482DB3}"/>
               </a:ext>
             </a:extLst>
           </p:cNvPr>
@@ -9267,7 +10199,7 @@
           <p:cNvPr id="36" name="">
             <a:extLst xmlns:a="http://schemas.openxmlformats.org/drawingml/2006/main">
               <a:ext uri="{FF2B5EF4-FFF2-40B4-BE49-F238E27FC236}">
-                <a16:creationId xmlns:a16="http://schemas.microsoft.com/office/drawing/2014/main" id="{74A1991B-9B70-4819-B021-7910F4DF7820}"/>
+                <a16:creationId xmlns:a16="http://schemas.microsoft.com/office/drawing/2014/main" id="{9961DA6A-9BBF-4DB7-89A1-8035BA099C75}"/>
               </a:ext>
             </a:extLst>
           </p:cNvPr>
@@ -9329,7 +10261,7 @@
           <p:cNvPr id="37" name="">
             <a:extLst xmlns:a="http://schemas.openxmlformats.org/drawingml/2006/main">
               <a:ext uri="{FF2B5EF4-FFF2-40B4-BE49-F238E27FC236}">
-                <a16:creationId xmlns:a16="http://schemas.microsoft.com/office/drawing/2014/main" id="{6755B8DF-CB1F-49D2-9728-64A3E85B23AE}"/>
+                <a16:creationId xmlns:a16="http://schemas.microsoft.com/office/drawing/2014/main" id="{4764D428-FB69-487D-9AD8-0FB64DA3C5C5}"/>
               </a:ext>
             </a:extLst>
           </p:cNvPr>
@@ -9389,7 +10321,7 @@
     </p:spTree>
     <p:extLst>
       <p:ext uri="{BB962C8B-B14F-4D97-AF65-F5344CB8AC3E}">
-        <p14:creationId xmlns:p14="http://schemas.microsoft.com/office/powerpoint/2010/main" val="464821305"/>
+        <p14:creationId xmlns:p14="http://schemas.microsoft.com/office/powerpoint/2010/main" val="761370062"/>
       </p:ext>
     </p:extLst>
   </p:cSld>
@@ -9420,7 +10352,7 @@
           <p:cNvPr id="1" name="">
             <a:extLst xmlns:a="http://schemas.openxmlformats.org/drawingml/2006/main">
               <a:ext uri="{FF2B5EF4-FFF2-40B4-BE49-F238E27FC236}">
-                <a16:creationId xmlns:a16="http://schemas.microsoft.com/office/drawing/2014/main" id="{02A49B88-9DFD-49E9-BE46-61734D3E5DE5}"/>
+                <a16:creationId xmlns:a16="http://schemas.microsoft.com/office/drawing/2014/main" id="{BAE35184-43D5-473A-A31A-E2C0966550A8}"/>
               </a:ext>
             </a:extLst>
           </p:cNvPr>
@@ -9482,7 +10414,7 @@
           <p:cNvPr id="2" name="">
             <a:extLst xmlns:a="http://schemas.openxmlformats.org/drawingml/2006/main">
               <a:ext uri="{FF2B5EF4-FFF2-40B4-BE49-F238E27FC236}">
-                <a16:creationId xmlns:a16="http://schemas.microsoft.com/office/drawing/2014/main" id="{532388BD-F64D-46AD-9262-3AF7B9E33602}"/>
+                <a16:creationId xmlns:a16="http://schemas.microsoft.com/office/drawing/2014/main" id="{7B332E23-43BD-4553-B54D-EE327ED2A808}"/>
               </a:ext>
             </a:extLst>
           </p:cNvPr>
@@ -9544,7 +10476,7 @@
           <p:cNvPr id="3" name="">
             <a:extLst xmlns:a="http://schemas.openxmlformats.org/drawingml/2006/main">
               <a:ext uri="{FF2B5EF4-FFF2-40B4-BE49-F238E27FC236}">
-                <a16:creationId xmlns:a16="http://schemas.microsoft.com/office/drawing/2014/main" id="{B8786ABE-5DCB-459E-ADAA-9E3EFB6F57F2}"/>
+                <a16:creationId xmlns:a16="http://schemas.microsoft.com/office/drawing/2014/main" id="{0262A5EA-1448-403A-835D-F09095758681}"/>
               </a:ext>
             </a:extLst>
           </p:cNvPr>
@@ -9585,7 +10517,7 @@
           <p:cNvPr id="4" name="">
             <a:extLst xmlns:a="http://schemas.openxmlformats.org/drawingml/2006/main">
               <a:ext uri="{FF2B5EF4-FFF2-40B4-BE49-F238E27FC236}">
-                <a16:creationId xmlns:a16="http://schemas.microsoft.com/office/drawing/2014/main" id="{1D6301DE-10D0-4EE0-B426-B27E43FC514F}"/>
+                <a16:creationId xmlns:a16="http://schemas.microsoft.com/office/drawing/2014/main" id="{E893042B-ED6D-4EC2-AA72-26D81608C768}"/>
               </a:ext>
             </a:extLst>
           </p:cNvPr>
@@ -9647,7 +10579,7 @@
           <p:cNvPr id="5" name="">
             <a:extLst xmlns:a="http://schemas.openxmlformats.org/drawingml/2006/main">
               <a:ext uri="{FF2B5EF4-FFF2-40B4-BE49-F238E27FC236}">
-                <a16:creationId xmlns:a16="http://schemas.microsoft.com/office/drawing/2014/main" id="{FB6F4E37-1EAD-4A61-8A2F-7DAB745E0E7F}"/>
+                <a16:creationId xmlns:a16="http://schemas.microsoft.com/office/drawing/2014/main" id="{ADF0413D-A1C2-4280-8FDD-C59757BC4F49}"/>
               </a:ext>
             </a:extLst>
           </p:cNvPr>
@@ -9794,7 +10726,7 @@
           <p:nvPr/>
         </p:nvPicPr>
         <p:blipFill>
-          <a:blip xmlns:r="http://schemas.openxmlformats.org/officeDocument/2006/relationships" xmlns:a="http://schemas.openxmlformats.org/drawingml/2006/main" r:embed="R822a7cea8b7c472f"/>
+          <a:blip xmlns:r="http://schemas.openxmlformats.org/officeDocument/2006/relationships" xmlns:a="http://schemas.openxmlformats.org/drawingml/2006/main" r:embed="R68f56184acf14ace"/>
           <a:stretch xmlns:a="http://schemas.openxmlformats.org/drawingml/2006/main"/>
         </p:blipFill>
         <p:spPr>
@@ -9818,7 +10750,7 @@
           <p:nvPr/>
         </p:nvPicPr>
         <p:blipFill>
-          <a:blip xmlns:r="http://schemas.openxmlformats.org/officeDocument/2006/relationships" xmlns:a="http://schemas.openxmlformats.org/drawingml/2006/main" r:embed="R51fcb1ec5201493d"/>
+          <a:blip xmlns:r="http://schemas.openxmlformats.org/officeDocument/2006/relationships" xmlns:a="http://schemas.openxmlformats.org/drawingml/2006/main" r:embed="Rb824ae5233734358"/>
           <a:stretch xmlns:a="http://schemas.openxmlformats.org/drawingml/2006/main"/>
         </p:blipFill>
         <p:spPr>
@@ -9842,7 +10774,7 @@
           <p:nvPr/>
         </p:nvPicPr>
         <p:blipFill>
-          <a:blip xmlns:r="http://schemas.openxmlformats.org/officeDocument/2006/relationships" xmlns:a="http://schemas.openxmlformats.org/drawingml/2006/main" r:embed="R9648cd193a4d4fbd"/>
+          <a:blip xmlns:r="http://schemas.openxmlformats.org/officeDocument/2006/relationships" xmlns:a="http://schemas.openxmlformats.org/drawingml/2006/main" r:embed="Rc7df66ba016f43f6"/>
           <a:stretch xmlns:a="http://schemas.openxmlformats.org/drawingml/2006/main"/>
         </p:blipFill>
         <p:spPr>
@@ -9862,7 +10794,7 @@
           <p:cNvPr id="9" name="">
             <a:extLst xmlns:a="http://schemas.openxmlformats.org/drawingml/2006/main">
               <a:ext uri="{FF2B5EF4-FFF2-40B4-BE49-F238E27FC236}">
-                <a16:creationId xmlns:a16="http://schemas.microsoft.com/office/drawing/2014/main" id="{1B028C31-638F-4CF5-9494-F92AFE9D2F1D}"/>
+                <a16:creationId xmlns:a16="http://schemas.microsoft.com/office/drawing/2014/main" id="{F2C25DBD-85C8-4BD9-B372-62D8D7234429}"/>
               </a:ext>
             </a:extLst>
           </p:cNvPr>
@@ -9924,7 +10856,7 @@
           <p:cNvPr id="10" name="">
             <a:extLst xmlns:a="http://schemas.openxmlformats.org/drawingml/2006/main">
               <a:ext uri="{FF2B5EF4-FFF2-40B4-BE49-F238E27FC236}">
-                <a16:creationId xmlns:a16="http://schemas.microsoft.com/office/drawing/2014/main" id="{699D1036-0B0A-491C-B34E-0BEBED688EA7}"/>
+                <a16:creationId xmlns:a16="http://schemas.microsoft.com/office/drawing/2014/main" id="{4AC0A96A-51D9-47B3-B9C8-68196E84F3B1}"/>
               </a:ext>
             </a:extLst>
           </p:cNvPr>
@@ -9955,7 +10887,7 @@
           <p:cNvPr id="11" name="">
             <a:extLst xmlns:a="http://schemas.openxmlformats.org/drawingml/2006/main">
               <a:ext uri="{FF2B5EF4-FFF2-40B4-BE49-F238E27FC236}">
-                <a16:creationId xmlns:a16="http://schemas.microsoft.com/office/drawing/2014/main" id="{A211FAFD-65B0-4CE9-8EC9-039026D60560}"/>
+                <a16:creationId xmlns:a16="http://schemas.microsoft.com/office/drawing/2014/main" id="{7EA5F05C-1C1B-45A0-B99E-343E337038FF}"/>
               </a:ext>
             </a:extLst>
           </p:cNvPr>
@@ -10017,7 +10949,7 @@
           <p:cNvPr id="12" name="">
             <a:extLst xmlns:a="http://schemas.openxmlformats.org/drawingml/2006/main">
               <a:ext uri="{FF2B5EF4-FFF2-40B4-BE49-F238E27FC236}">
-                <a16:creationId xmlns:a16="http://schemas.microsoft.com/office/drawing/2014/main" id="{C701F595-3751-405C-8092-D0A1EE040583}"/>
+                <a16:creationId xmlns:a16="http://schemas.microsoft.com/office/drawing/2014/main" id="{8AE2A76B-490A-4484-9E99-647D10F9AD6A}"/>
               </a:ext>
             </a:extLst>
           </p:cNvPr>
@@ -10077,7 +11009,7 @@
     </p:spTree>
     <p:extLst>
       <p:ext uri="{BB962C8B-B14F-4D97-AF65-F5344CB8AC3E}">
-        <p14:creationId xmlns:p14="http://schemas.microsoft.com/office/powerpoint/2010/main" val="376464063"/>
+        <p14:creationId xmlns:p14="http://schemas.microsoft.com/office/powerpoint/2010/main" val="242691289"/>
       </p:ext>
     </p:extLst>
   </p:cSld>
@@ -10108,7 +11040,7 @@
           <p:cNvPr id="1" name="">
             <a:extLst xmlns:a="http://schemas.openxmlformats.org/drawingml/2006/main">
               <a:ext uri="{FF2B5EF4-FFF2-40B4-BE49-F238E27FC236}">
-                <a16:creationId xmlns:a16="http://schemas.microsoft.com/office/drawing/2014/main" id="{8B7440F9-5DC9-4CAD-A2C8-C876DAB460A1}"/>
+                <a16:creationId xmlns:a16="http://schemas.microsoft.com/office/drawing/2014/main" id="{F0F2B147-011F-4FAC-A652-386381C3417E}"/>
               </a:ext>
             </a:extLst>
           </p:cNvPr>
@@ -10170,7 +11102,7 @@
           <p:cNvPr id="2" name="">
             <a:extLst xmlns:a="http://schemas.openxmlformats.org/drawingml/2006/main">
               <a:ext uri="{FF2B5EF4-FFF2-40B4-BE49-F238E27FC236}">
-                <a16:creationId xmlns:a16="http://schemas.microsoft.com/office/drawing/2014/main" id="{1D631463-F49D-4866-BF2A-7AB829359347}"/>
+                <a16:creationId xmlns:a16="http://schemas.microsoft.com/office/drawing/2014/main" id="{5702995F-832F-4FB0-B650-8DF8300DD5CB}"/>
               </a:ext>
             </a:extLst>
           </p:cNvPr>
@@ -10232,7 +11164,7 @@
           <p:cNvPr id="3" name="">
             <a:extLst xmlns:a="http://schemas.openxmlformats.org/drawingml/2006/main">
               <a:ext uri="{FF2B5EF4-FFF2-40B4-BE49-F238E27FC236}">
-                <a16:creationId xmlns:a16="http://schemas.microsoft.com/office/drawing/2014/main" id="{19A1443D-2A34-4B9B-8DFD-B6964D4A7B84}"/>
+                <a16:creationId xmlns:a16="http://schemas.microsoft.com/office/drawing/2014/main" id="{D761C3F2-9C1C-411D-B3D7-7C2C4DBBCFEF}"/>
               </a:ext>
             </a:extLst>
           </p:cNvPr>
@@ -10273,7 +11205,7 @@
           <p:cNvPr id="4" name="">
             <a:extLst xmlns:a="http://schemas.openxmlformats.org/drawingml/2006/main">
               <a:ext uri="{FF2B5EF4-FFF2-40B4-BE49-F238E27FC236}">
-                <a16:creationId xmlns:a16="http://schemas.microsoft.com/office/drawing/2014/main" id="{18423EA6-B9B8-43DC-9B78-C43A57665DD6}"/>
+                <a16:creationId xmlns:a16="http://schemas.microsoft.com/office/drawing/2014/main" id="{F6A12E20-734F-439F-A7CA-95DF6E9BC811}"/>
               </a:ext>
             </a:extLst>
           </p:cNvPr>
@@ -10335,7 +11267,7 @@
           <p:cNvPr id="5" name="">
             <a:extLst xmlns:a="http://schemas.openxmlformats.org/drawingml/2006/main">
               <a:ext uri="{FF2B5EF4-FFF2-40B4-BE49-F238E27FC236}">
-                <a16:creationId xmlns:a16="http://schemas.microsoft.com/office/drawing/2014/main" id="{ECD3598C-CB59-4B83-B802-043B55BCDDF2}"/>
+                <a16:creationId xmlns:a16="http://schemas.microsoft.com/office/drawing/2014/main" id="{EE3BE32E-E26C-4081-AA68-F1A675B4FD6B}"/>
               </a:ext>
             </a:extLst>
           </p:cNvPr>
@@ -10424,7 +11356,7 @@
           <p:cNvPr id="6" name="">
             <a:extLst xmlns:a="http://schemas.openxmlformats.org/drawingml/2006/main">
               <a:ext uri="{FF2B5EF4-FFF2-40B4-BE49-F238E27FC236}">
-                <a16:creationId xmlns:a16="http://schemas.microsoft.com/office/drawing/2014/main" id="{5064D848-EF6E-45E3-830C-E32CA321B292}"/>
+                <a16:creationId xmlns:a16="http://schemas.microsoft.com/office/drawing/2014/main" id="{57A609E9-11C8-4F41-A081-7B439C25D008}"/>
               </a:ext>
             </a:extLst>
           </p:cNvPr>
@@ -10465,7 +11397,7 @@
           <p:cNvPr id="7" name="">
             <a:extLst xmlns:a="http://schemas.openxmlformats.org/drawingml/2006/main">
               <a:ext uri="{FF2B5EF4-FFF2-40B4-BE49-F238E27FC236}">
-                <a16:creationId xmlns:a16="http://schemas.microsoft.com/office/drawing/2014/main" id="{856D5FD1-A813-44B9-9A41-BB012BAAAF87}"/>
+                <a16:creationId xmlns:a16="http://schemas.microsoft.com/office/drawing/2014/main" id="{D189C558-023F-4532-88CB-538D39404927}"/>
               </a:ext>
             </a:extLst>
           </p:cNvPr>
@@ -10527,7 +11459,7 @@
           <p:cNvPr id="8" name="">
             <a:extLst xmlns:a="http://schemas.openxmlformats.org/drawingml/2006/main">
               <a:ext uri="{FF2B5EF4-FFF2-40B4-BE49-F238E27FC236}">
-                <a16:creationId xmlns:a16="http://schemas.microsoft.com/office/drawing/2014/main" id="{A0E54070-3B00-4703-AFE5-78E81D6325BF}"/>
+                <a16:creationId xmlns:a16="http://schemas.microsoft.com/office/drawing/2014/main" id="{245BD8D3-5685-4131-BA16-72241DDE8D4E}"/>
               </a:ext>
             </a:extLst>
           </p:cNvPr>
@@ -10616,7 +11548,7 @@
           <p:cNvPr id="9" name="">
             <a:extLst xmlns:a="http://schemas.openxmlformats.org/drawingml/2006/main">
               <a:ext uri="{FF2B5EF4-FFF2-40B4-BE49-F238E27FC236}">
-                <a16:creationId xmlns:a16="http://schemas.microsoft.com/office/drawing/2014/main" id="{445760C3-E5A4-4384-9F03-FEE6F8B3897A}"/>
+                <a16:creationId xmlns:a16="http://schemas.microsoft.com/office/drawing/2014/main" id="{F03F1267-EAFF-42B5-A4A7-DEF116EBDF3E}"/>
               </a:ext>
             </a:extLst>
           </p:cNvPr>
@@ -10657,7 +11589,7 @@
           <p:cNvPr id="10" name="">
             <a:extLst xmlns:a="http://schemas.openxmlformats.org/drawingml/2006/main">
               <a:ext uri="{FF2B5EF4-FFF2-40B4-BE49-F238E27FC236}">
-                <a16:creationId xmlns:a16="http://schemas.microsoft.com/office/drawing/2014/main" id="{7D516C0A-D4C3-4B2B-A9EB-C5EFD39D154E}"/>
+                <a16:creationId xmlns:a16="http://schemas.microsoft.com/office/drawing/2014/main" id="{657E6E57-B097-4BDC-B29E-8D520C1CC80A}"/>
               </a:ext>
             </a:extLst>
           </p:cNvPr>
@@ -10719,7 +11651,7 @@
           <p:cNvPr id="11" name="">
             <a:extLst xmlns:a="http://schemas.openxmlformats.org/drawingml/2006/main">
               <a:ext uri="{FF2B5EF4-FFF2-40B4-BE49-F238E27FC236}">
-                <a16:creationId xmlns:a16="http://schemas.microsoft.com/office/drawing/2014/main" id="{574FFC9F-1EF4-4294-BECB-A551417A9940}"/>
+                <a16:creationId xmlns:a16="http://schemas.microsoft.com/office/drawing/2014/main" id="{9CD5451F-235D-4338-8727-495BC1839CBC}"/>
               </a:ext>
             </a:extLst>
           </p:cNvPr>
@@ -10808,7 +11740,7 @@
           <p:cNvPr id="12" name="">
             <a:extLst xmlns:a="http://schemas.openxmlformats.org/drawingml/2006/main">
               <a:ext uri="{FF2B5EF4-FFF2-40B4-BE49-F238E27FC236}">
-                <a16:creationId xmlns:a16="http://schemas.microsoft.com/office/drawing/2014/main" id="{01BD8FD4-9EBD-4C46-B41D-8561606767F8}"/>
+                <a16:creationId xmlns:a16="http://schemas.microsoft.com/office/drawing/2014/main" id="{98E98822-BD65-4CEC-8935-FCC05CF4BB9C}"/>
               </a:ext>
             </a:extLst>
           </p:cNvPr>
@@ -10849,7 +11781,7 @@
           <p:cNvPr id="13" name="">
             <a:extLst xmlns:a="http://schemas.openxmlformats.org/drawingml/2006/main">
               <a:ext uri="{FF2B5EF4-FFF2-40B4-BE49-F238E27FC236}">
-                <a16:creationId xmlns:a16="http://schemas.microsoft.com/office/drawing/2014/main" id="{B8A7C5DE-3007-4B30-AC3F-7F189848E695}"/>
+                <a16:creationId xmlns:a16="http://schemas.microsoft.com/office/drawing/2014/main" id="{33A683FD-0A45-415D-BB83-4A7D2708346E}"/>
               </a:ext>
             </a:extLst>
           </p:cNvPr>
@@ -10911,7 +11843,7 @@
           <p:cNvPr id="14" name="">
             <a:extLst xmlns:a="http://schemas.openxmlformats.org/drawingml/2006/main">
               <a:ext uri="{FF2B5EF4-FFF2-40B4-BE49-F238E27FC236}">
-                <a16:creationId xmlns:a16="http://schemas.microsoft.com/office/drawing/2014/main" id="{EEC9E85A-C961-4C8A-8B60-4A95B4A925BC}"/>
+                <a16:creationId xmlns:a16="http://schemas.microsoft.com/office/drawing/2014/main" id="{4A5441AA-E318-43D7-8C7E-CB4470A4A2CC}"/>
               </a:ext>
             </a:extLst>
           </p:cNvPr>
@@ -11000,7 +11932,7 @@
           <p:cNvPr id="15" name="">
             <a:extLst xmlns:a="http://schemas.openxmlformats.org/drawingml/2006/main">
               <a:ext uri="{FF2B5EF4-FFF2-40B4-BE49-F238E27FC236}">
-                <a16:creationId xmlns:a16="http://schemas.microsoft.com/office/drawing/2014/main" id="{BCE577AC-B98B-4974-AFE7-4C82DDFF0ADD}"/>
+                <a16:creationId xmlns:a16="http://schemas.microsoft.com/office/drawing/2014/main" id="{BBCB5226-A807-4B34-8A73-6B5DBD2AD3A4}"/>
               </a:ext>
             </a:extLst>
           </p:cNvPr>
@@ -11041,7 +11973,7 @@
           <p:cNvPr id="16" name="">
             <a:extLst xmlns:a="http://schemas.openxmlformats.org/drawingml/2006/main">
               <a:ext uri="{FF2B5EF4-FFF2-40B4-BE49-F238E27FC236}">
-                <a16:creationId xmlns:a16="http://schemas.microsoft.com/office/drawing/2014/main" id="{859413C7-4D41-4D8C-B3F8-74B81466AC49}"/>
+                <a16:creationId xmlns:a16="http://schemas.microsoft.com/office/drawing/2014/main" id="{5B0DEE84-32A5-48F9-9BB4-2D64CFA149CC}"/>
               </a:ext>
             </a:extLst>
           </p:cNvPr>
@@ -11103,7 +12035,7 @@
           <p:cNvPr id="17" name="">
             <a:extLst xmlns:a="http://schemas.openxmlformats.org/drawingml/2006/main">
               <a:ext uri="{FF2B5EF4-FFF2-40B4-BE49-F238E27FC236}">
-                <a16:creationId xmlns:a16="http://schemas.microsoft.com/office/drawing/2014/main" id="{2FD71ACE-BF21-4993-A1DC-2E7BF250D87D}"/>
+                <a16:creationId xmlns:a16="http://schemas.microsoft.com/office/drawing/2014/main" id="{4836C473-53EE-4D37-9CE1-BEE99A3779CE}"/>
               </a:ext>
             </a:extLst>
           </p:cNvPr>
@@ -11165,7 +12097,7 @@
           <p:cNvPr id="18" name="">
             <a:extLst xmlns:a="http://schemas.openxmlformats.org/drawingml/2006/main">
               <a:ext uri="{FF2B5EF4-FFF2-40B4-BE49-F238E27FC236}">
-                <a16:creationId xmlns:a16="http://schemas.microsoft.com/office/drawing/2014/main" id="{EC2A79E9-8974-4F8F-9209-D3657ADEE4C4}"/>
+                <a16:creationId xmlns:a16="http://schemas.microsoft.com/office/drawing/2014/main" id="{44779C49-9765-4DB6-9B73-7A24E2530CAB}"/>
               </a:ext>
             </a:extLst>
           </p:cNvPr>
@@ -11227,7 +12159,7 @@
           <p:cNvPr id="19" name="">
             <a:extLst xmlns:a="http://schemas.openxmlformats.org/drawingml/2006/main">
               <a:ext uri="{FF2B5EF4-FFF2-40B4-BE49-F238E27FC236}">
-                <a16:creationId xmlns:a16="http://schemas.microsoft.com/office/drawing/2014/main" id="{DA2CA786-E987-4D08-8166-A37321B20F91}"/>
+                <a16:creationId xmlns:a16="http://schemas.microsoft.com/office/drawing/2014/main" id="{46C3FE8A-E3F3-4298-8C85-238FE4CC8B8C}"/>
               </a:ext>
             </a:extLst>
           </p:cNvPr>
@@ -11258,7 +12190,7 @@
           <p:cNvPr id="20" name="">
             <a:extLst xmlns:a="http://schemas.openxmlformats.org/drawingml/2006/main">
               <a:ext uri="{FF2B5EF4-FFF2-40B4-BE49-F238E27FC236}">
-                <a16:creationId xmlns:a16="http://schemas.microsoft.com/office/drawing/2014/main" id="{E71636E4-6669-4697-87AD-FBDFA66AA956}"/>
+                <a16:creationId xmlns:a16="http://schemas.microsoft.com/office/drawing/2014/main" id="{2F001E33-8B25-4D16-8822-9BCD0EC9DB3C}"/>
               </a:ext>
             </a:extLst>
           </p:cNvPr>
@@ -11320,7 +12252,7 @@
           <p:cNvPr id="21" name="">
             <a:extLst xmlns:a="http://schemas.openxmlformats.org/drawingml/2006/main">
               <a:ext uri="{FF2B5EF4-FFF2-40B4-BE49-F238E27FC236}">
-                <a16:creationId xmlns:a16="http://schemas.microsoft.com/office/drawing/2014/main" id="{4064F570-1BE0-4F2B-88E7-68B887414962}"/>
+                <a16:creationId xmlns:a16="http://schemas.microsoft.com/office/drawing/2014/main" id="{4EF924A6-AD04-4459-8BFC-3E3921A615DF}"/>
               </a:ext>
             </a:extLst>
           </p:cNvPr>
@@ -11380,7 +12312,7 @@
     </p:spTree>
     <p:extLst>
       <p:ext uri="{BB962C8B-B14F-4D97-AF65-F5344CB8AC3E}">
-        <p14:creationId xmlns:p14="http://schemas.microsoft.com/office/powerpoint/2010/main" val="233144320"/>
+        <p14:creationId xmlns:p14="http://schemas.microsoft.com/office/powerpoint/2010/main" val="1001886256"/>
       </p:ext>
     </p:extLst>
   </p:cSld>
@@ -11415,7 +12347,7 @@
           <p:nvPr/>
         </p:nvPicPr>
         <p:blipFill>
-          <a:blip xmlns:r="http://schemas.openxmlformats.org/officeDocument/2006/relationships" xmlns:a="http://schemas.openxmlformats.org/drawingml/2006/main" r:embed="R2916f5b945fa47a2"/>
+          <a:blip xmlns:r="http://schemas.openxmlformats.org/officeDocument/2006/relationships" xmlns:a="http://schemas.openxmlformats.org/drawingml/2006/main" r:embed="Reb507f4dced3415f"/>
           <a:stretch xmlns:a="http://schemas.openxmlformats.org/drawingml/2006/main"/>
         </p:blipFill>
         <p:spPr>
@@ -11435,7 +12367,7 @@
           <p:cNvPr id="2" name="">
             <a:extLst xmlns:a="http://schemas.openxmlformats.org/drawingml/2006/main">
               <a:ext uri="{FF2B5EF4-FFF2-40B4-BE49-F238E27FC236}">
-                <a16:creationId xmlns:a16="http://schemas.microsoft.com/office/drawing/2014/main" id="{1FC76AF8-22FA-4893-A548-190E5AB48C42}"/>
+                <a16:creationId xmlns:a16="http://schemas.microsoft.com/office/drawing/2014/main" id="{579F63E5-594F-4AC8-BE92-9829FD8B210A}"/>
               </a:ext>
             </a:extLst>
           </p:cNvPr>
@@ -11497,7 +12429,7 @@
           <p:cNvPr id="3" name="">
             <a:extLst xmlns:a="http://schemas.openxmlformats.org/drawingml/2006/main">
               <a:ext uri="{FF2B5EF4-FFF2-40B4-BE49-F238E27FC236}">
-                <a16:creationId xmlns:a16="http://schemas.microsoft.com/office/drawing/2014/main" id="{C6082EC1-F3A3-48C0-8FE7-258A3A65858D}"/>
+                <a16:creationId xmlns:a16="http://schemas.microsoft.com/office/drawing/2014/main" id="{48BEE57B-199A-4E6B-ABEC-6B341DC4CCAE}"/>
               </a:ext>
             </a:extLst>
           </p:cNvPr>
@@ -11530,7 +12462,7 @@
           <p:cNvPr id="4" name="">
             <a:extLst xmlns:a="http://schemas.openxmlformats.org/drawingml/2006/main">
               <a:ext uri="{FF2B5EF4-FFF2-40B4-BE49-F238E27FC236}">
-                <a16:creationId xmlns:a16="http://schemas.microsoft.com/office/drawing/2014/main" id="{E414361A-294B-4327-933A-7D7780C11156}"/>
+                <a16:creationId xmlns:a16="http://schemas.microsoft.com/office/drawing/2014/main" id="{DC0576EC-2F1D-4235-B29E-A98327F6D4ED}"/>
               </a:ext>
             </a:extLst>
           </p:cNvPr>
@@ -11592,7 +12524,7 @@
           <p:cNvPr id="5" name="">
             <a:extLst xmlns:a="http://schemas.openxmlformats.org/drawingml/2006/main">
               <a:ext uri="{FF2B5EF4-FFF2-40B4-BE49-F238E27FC236}">
-                <a16:creationId xmlns:a16="http://schemas.microsoft.com/office/drawing/2014/main" id="{6632DC5A-3D3C-4965-8324-59E920FC87AC}"/>
+                <a16:creationId xmlns:a16="http://schemas.microsoft.com/office/drawing/2014/main" id="{6D86A03E-C440-4BDC-9C9F-83CEB78A0EA0}"/>
               </a:ext>
             </a:extLst>
           </p:cNvPr>
@@ -11625,7 +12557,7 @@
           <p:cNvPr id="6" name="">
             <a:extLst xmlns:a="http://schemas.openxmlformats.org/drawingml/2006/main">
               <a:ext uri="{FF2B5EF4-FFF2-40B4-BE49-F238E27FC236}">
-                <a16:creationId xmlns:a16="http://schemas.microsoft.com/office/drawing/2014/main" id="{1C903A91-F59D-408E-858D-F025B3189C48}"/>
+                <a16:creationId xmlns:a16="http://schemas.microsoft.com/office/drawing/2014/main" id="{8DB64742-BFEE-418E-AD1A-8B8FAFAB9223}"/>
               </a:ext>
             </a:extLst>
           </p:cNvPr>
@@ -11687,7 +12619,7 @@
           <p:cNvPr id="7" name="">
             <a:extLst xmlns:a="http://schemas.openxmlformats.org/drawingml/2006/main">
               <a:ext uri="{FF2B5EF4-FFF2-40B4-BE49-F238E27FC236}">
-                <a16:creationId xmlns:a16="http://schemas.microsoft.com/office/drawing/2014/main" id="{CEDE250F-F9ED-4D83-B4A6-33C6FB23DFF0}"/>
+                <a16:creationId xmlns:a16="http://schemas.microsoft.com/office/drawing/2014/main" id="{B525BB86-796B-4D06-AA26-4A3FE11F71A3}"/>
               </a:ext>
             </a:extLst>
           </p:cNvPr>
@@ -11720,7 +12652,7 @@
           <p:cNvPr id="8" name="">
             <a:extLst xmlns:a="http://schemas.openxmlformats.org/drawingml/2006/main">
               <a:ext uri="{FF2B5EF4-FFF2-40B4-BE49-F238E27FC236}">
-                <a16:creationId xmlns:a16="http://schemas.microsoft.com/office/drawing/2014/main" id="{5DEA4CAD-265E-425B-AB31-A3E8DD8B3B83}"/>
+                <a16:creationId xmlns:a16="http://schemas.microsoft.com/office/drawing/2014/main" id="{AA0140FF-BE41-4899-B8B0-5D8A58B6538B}"/>
               </a:ext>
             </a:extLst>
           </p:cNvPr>
@@ -11782,7 +12714,7 @@
           <p:cNvPr id="9" name="">
             <a:extLst xmlns:a="http://schemas.openxmlformats.org/drawingml/2006/main">
               <a:ext uri="{FF2B5EF4-FFF2-40B4-BE49-F238E27FC236}">
-                <a16:creationId xmlns:a16="http://schemas.microsoft.com/office/drawing/2014/main" id="{DE5974FE-400C-4A8F-B89B-2B43F7E34372}"/>
+                <a16:creationId xmlns:a16="http://schemas.microsoft.com/office/drawing/2014/main" id="{C05AC955-ECAF-4565-AF0F-841EBFAB81E1}"/>
               </a:ext>
             </a:extLst>
           </p:cNvPr>
@@ -11823,7 +12755,7 @@
           <p:cNvPr id="10" name="">
             <a:extLst xmlns:a="http://schemas.openxmlformats.org/drawingml/2006/main">
               <a:ext uri="{FF2B5EF4-FFF2-40B4-BE49-F238E27FC236}">
-                <a16:creationId xmlns:a16="http://schemas.microsoft.com/office/drawing/2014/main" id="{4A9F3B36-A171-4744-A075-AAD2AF7F68BA}"/>
+                <a16:creationId xmlns:a16="http://schemas.microsoft.com/office/drawing/2014/main" id="{2F118616-F0F6-4132-B6BA-38A0C63B6105}"/>
               </a:ext>
             </a:extLst>
           </p:cNvPr>
@@ -11885,7 +12817,7 @@
           <p:cNvPr id="11" name="">
             <a:extLst xmlns:a="http://schemas.openxmlformats.org/drawingml/2006/main">
               <a:ext uri="{FF2B5EF4-FFF2-40B4-BE49-F238E27FC236}">
-                <a16:creationId xmlns:a16="http://schemas.microsoft.com/office/drawing/2014/main" id="{38F80117-7EB5-4363-8ECE-1B316CDF3F7E}"/>
+                <a16:creationId xmlns:a16="http://schemas.microsoft.com/office/drawing/2014/main" id="{6B82A7B7-AF7C-4DE4-82E2-E381FD85371C}"/>
               </a:ext>
             </a:extLst>
           </p:cNvPr>
@@ -11947,7 +12879,7 @@
           <p:cNvPr id="12" name="">
             <a:extLst xmlns:a="http://schemas.openxmlformats.org/drawingml/2006/main">
               <a:ext uri="{FF2B5EF4-FFF2-40B4-BE49-F238E27FC236}">
-                <a16:creationId xmlns:a16="http://schemas.microsoft.com/office/drawing/2014/main" id="{B1E33BF8-1B6B-41D4-B186-C9EED704C52F}"/>
+                <a16:creationId xmlns:a16="http://schemas.microsoft.com/office/drawing/2014/main" id="{8221FB98-85C4-4D62-87EA-2910233DADE5}"/>
               </a:ext>
             </a:extLst>
           </p:cNvPr>
@@ -12036,7 +12968,7 @@
           <p:cNvPr id="13" name="">
             <a:extLst xmlns:a="http://schemas.openxmlformats.org/drawingml/2006/main">
               <a:ext uri="{FF2B5EF4-FFF2-40B4-BE49-F238E27FC236}">
-                <a16:creationId xmlns:a16="http://schemas.microsoft.com/office/drawing/2014/main" id="{12276B6E-071C-45A1-8667-0E90F6285208}"/>
+                <a16:creationId xmlns:a16="http://schemas.microsoft.com/office/drawing/2014/main" id="{FBD117CA-909B-46AC-B85D-1EE2ED5A2569}"/>
               </a:ext>
             </a:extLst>
           </p:cNvPr>
@@ -12067,7 +12999,7 @@
           <p:cNvPr id="14" name="">
             <a:extLst xmlns:a="http://schemas.openxmlformats.org/drawingml/2006/main">
               <a:ext uri="{FF2B5EF4-FFF2-40B4-BE49-F238E27FC236}">
-                <a16:creationId xmlns:a16="http://schemas.microsoft.com/office/drawing/2014/main" id="{87E86EE6-FD19-4518-B131-5B7C5089C163}"/>
+                <a16:creationId xmlns:a16="http://schemas.microsoft.com/office/drawing/2014/main" id="{6DD19ACB-C79E-4CB1-9F71-DD44A178B6AC}"/>
               </a:ext>
             </a:extLst>
           </p:cNvPr>
@@ -12107,7 +13039,7 @@
           <p:cNvPr id="15" name="">
             <a:extLst xmlns:a="http://schemas.openxmlformats.org/drawingml/2006/main">
               <a:ext uri="{FF2B5EF4-FFF2-40B4-BE49-F238E27FC236}">
-                <a16:creationId xmlns:a16="http://schemas.microsoft.com/office/drawing/2014/main" id="{9C6E3C01-9FB7-4E4D-A158-761E4808A697}"/>
+                <a16:creationId xmlns:a16="http://schemas.microsoft.com/office/drawing/2014/main" id="{D6A04BAA-B45F-4BFD-9F9C-FA855BCCCEC2}"/>
               </a:ext>
             </a:extLst>
           </p:cNvPr>
@@ -12167,7 +13099,7 @@
     </p:spTree>
     <p:extLst>
       <p:ext uri="{BB962C8B-B14F-4D97-AF65-F5344CB8AC3E}">
-        <p14:creationId xmlns:p14="http://schemas.microsoft.com/office/powerpoint/2010/main" val="709123589"/>
+        <p14:creationId xmlns:p14="http://schemas.microsoft.com/office/powerpoint/2010/main" val="711322695"/>
       </p:ext>
     </p:extLst>
   </p:cSld>
@@ -12198,7 +13130,7 @@
           <p:cNvPr id="1" name="">
             <a:extLst xmlns:a="http://schemas.openxmlformats.org/drawingml/2006/main">
               <a:ext uri="{FF2B5EF4-FFF2-40B4-BE49-F238E27FC236}">
-                <a16:creationId xmlns:a16="http://schemas.microsoft.com/office/drawing/2014/main" id="{13231DA7-3649-4070-8192-6443266B74CD}"/>
+                <a16:creationId xmlns:a16="http://schemas.microsoft.com/office/drawing/2014/main" id="{4A1F6C01-68A2-4CB2-B469-A61866BCACCD}"/>
               </a:ext>
             </a:extLst>
           </p:cNvPr>
@@ -12260,7 +13192,7 @@
           <p:cNvPr id="2" name="">
             <a:extLst xmlns:a="http://schemas.openxmlformats.org/drawingml/2006/main">
               <a:ext uri="{FF2B5EF4-FFF2-40B4-BE49-F238E27FC236}">
-                <a16:creationId xmlns:a16="http://schemas.microsoft.com/office/drawing/2014/main" id="{D0EA4ECE-AA13-497C-820E-D1848473A5D5}"/>
+                <a16:creationId xmlns:a16="http://schemas.microsoft.com/office/drawing/2014/main" id="{3A7EB267-59CE-4B4F-A89A-5302119E4439}"/>
               </a:ext>
             </a:extLst>
           </p:cNvPr>
@@ -12322,7 +13254,7 @@
           <p:cNvPr id="3" name="">
             <a:extLst xmlns:a="http://schemas.openxmlformats.org/drawingml/2006/main">
               <a:ext uri="{FF2B5EF4-FFF2-40B4-BE49-F238E27FC236}">
-                <a16:creationId xmlns:a16="http://schemas.microsoft.com/office/drawing/2014/main" id="{A16636E7-D74F-4213-9B30-FB20EB7D67BB}"/>
+                <a16:creationId xmlns:a16="http://schemas.microsoft.com/office/drawing/2014/main" id="{BDFD134A-F9D3-4C9F-8085-31CDF3925A5E}"/>
               </a:ext>
             </a:extLst>
           </p:cNvPr>
@@ -12384,7 +13316,7 @@
           <p:cNvPr id="4" name="">
             <a:extLst xmlns:a="http://schemas.openxmlformats.org/drawingml/2006/main">
               <a:ext uri="{FF2B5EF4-FFF2-40B4-BE49-F238E27FC236}">
-                <a16:creationId xmlns:a16="http://schemas.microsoft.com/office/drawing/2014/main" id="{F270B43D-6097-4552-8AB5-293D20560040}"/>
+                <a16:creationId xmlns:a16="http://schemas.microsoft.com/office/drawing/2014/main" id="{BAFE3F75-4F63-4B8A-AD67-1D22D4A98FC8}"/>
               </a:ext>
             </a:extLst>
           </p:cNvPr>
@@ -12425,7 +13357,7 @@
           <p:cNvPr id="5" name="">
             <a:extLst xmlns:a="http://schemas.openxmlformats.org/drawingml/2006/main">
               <a:ext uri="{FF2B5EF4-FFF2-40B4-BE49-F238E27FC236}">
-                <a16:creationId xmlns:a16="http://schemas.microsoft.com/office/drawing/2014/main" id="{CE112E36-9A78-4B24-BE30-01BDB20A0F82}"/>
+                <a16:creationId xmlns:a16="http://schemas.microsoft.com/office/drawing/2014/main" id="{5017FCFF-81F0-4692-B4B1-FB8FDC38718E}"/>
               </a:ext>
             </a:extLst>
           </p:cNvPr>
@@ -12487,7 +13419,7 @@
           <p:cNvPr id="6" name="">
             <a:extLst xmlns:a="http://schemas.openxmlformats.org/drawingml/2006/main">
               <a:ext uri="{FF2B5EF4-FFF2-40B4-BE49-F238E27FC236}">
-                <a16:creationId xmlns:a16="http://schemas.microsoft.com/office/drawing/2014/main" id="{19AEE925-AC2A-4ECD-BA8A-FA72C876D05C}"/>
+                <a16:creationId xmlns:a16="http://schemas.microsoft.com/office/drawing/2014/main" id="{A759DC16-8134-4E0D-9EE9-6E765EB59FE0}"/>
               </a:ext>
             </a:extLst>
           </p:cNvPr>
@@ -12576,7 +13508,7 @@
           <p:cNvPr id="7" name="">
             <a:extLst xmlns:a="http://schemas.openxmlformats.org/drawingml/2006/main">
               <a:ext uri="{FF2B5EF4-FFF2-40B4-BE49-F238E27FC236}">
-                <a16:creationId xmlns:a16="http://schemas.microsoft.com/office/drawing/2014/main" id="{2D0749E7-06E6-48BB-87E3-EE4A9AD16F74}"/>
+                <a16:creationId xmlns:a16="http://schemas.microsoft.com/office/drawing/2014/main" id="{583D756D-EEB2-4733-A2C7-9A83B6FE07F0}"/>
               </a:ext>
             </a:extLst>
           </p:cNvPr>
@@ -12617,7 +13549,7 @@
           <p:cNvPr id="8" name="">
             <a:extLst xmlns:a="http://schemas.openxmlformats.org/drawingml/2006/main">
               <a:ext uri="{FF2B5EF4-FFF2-40B4-BE49-F238E27FC236}">
-                <a16:creationId xmlns:a16="http://schemas.microsoft.com/office/drawing/2014/main" id="{C22ADAD2-B973-41B8-8D1C-43C7708479C2}"/>
+                <a16:creationId xmlns:a16="http://schemas.microsoft.com/office/drawing/2014/main" id="{EE1653C4-7CC1-455C-9240-07AE3161D025}"/>
               </a:ext>
             </a:extLst>
           </p:cNvPr>
@@ -12679,7 +13611,7 @@
           <p:cNvPr id="9" name="">
             <a:extLst xmlns:a="http://schemas.openxmlformats.org/drawingml/2006/main">
               <a:ext uri="{FF2B5EF4-FFF2-40B4-BE49-F238E27FC236}">
-                <a16:creationId xmlns:a16="http://schemas.microsoft.com/office/drawing/2014/main" id="{02E219F4-C98E-4E11-9B70-A544E9F60631}"/>
+                <a16:creationId xmlns:a16="http://schemas.microsoft.com/office/drawing/2014/main" id="{4CBFB984-C740-4E27-A2B7-85D56B77A581}"/>
               </a:ext>
             </a:extLst>
           </p:cNvPr>
@@ -12768,7 +13700,7 @@
           <p:cNvPr id="10" name="">
             <a:extLst xmlns:a="http://schemas.openxmlformats.org/drawingml/2006/main">
               <a:ext uri="{FF2B5EF4-FFF2-40B4-BE49-F238E27FC236}">
-                <a16:creationId xmlns:a16="http://schemas.microsoft.com/office/drawing/2014/main" id="{8F0E27DF-9B68-4FFB-94ED-DC01E82B2B71}"/>
+                <a16:creationId xmlns:a16="http://schemas.microsoft.com/office/drawing/2014/main" id="{95A98A53-05C9-4D50-A3AF-7B0ACD81D451}"/>
               </a:ext>
             </a:extLst>
           </p:cNvPr>
@@ -12809,7 +13741,7 @@
           <p:cNvPr id="11" name="">
             <a:extLst xmlns:a="http://schemas.openxmlformats.org/drawingml/2006/main">
               <a:ext uri="{FF2B5EF4-FFF2-40B4-BE49-F238E27FC236}">
-                <a16:creationId xmlns:a16="http://schemas.microsoft.com/office/drawing/2014/main" id="{F48D9FEB-E97E-4389-8621-27EBE537DEA7}"/>
+                <a16:creationId xmlns:a16="http://schemas.microsoft.com/office/drawing/2014/main" id="{D69395C2-DFEC-47FD-8F68-4EEB52A65F3A}"/>
               </a:ext>
             </a:extLst>
           </p:cNvPr>
@@ -12871,7 +13803,7 @@
           <p:cNvPr id="12" name="">
             <a:extLst xmlns:a="http://schemas.openxmlformats.org/drawingml/2006/main">
               <a:ext uri="{FF2B5EF4-FFF2-40B4-BE49-F238E27FC236}">
-                <a16:creationId xmlns:a16="http://schemas.microsoft.com/office/drawing/2014/main" id="{5FC8AF5D-8045-4FB0-9183-4929DDFF91C0}"/>
+                <a16:creationId xmlns:a16="http://schemas.microsoft.com/office/drawing/2014/main" id="{50369A63-4A39-4E47-9AA4-864A319752D2}"/>
               </a:ext>
             </a:extLst>
           </p:cNvPr>
@@ -12960,7 +13892,7 @@
           <p:cNvPr id="13" name="">
             <a:extLst xmlns:a="http://schemas.openxmlformats.org/drawingml/2006/main">
               <a:ext uri="{FF2B5EF4-FFF2-40B4-BE49-F238E27FC236}">
-                <a16:creationId xmlns:a16="http://schemas.microsoft.com/office/drawing/2014/main" id="{574539FB-F090-4894-8CBE-CF4502166D3D}"/>
+                <a16:creationId xmlns:a16="http://schemas.microsoft.com/office/drawing/2014/main" id="{30EC67E9-96DE-4FDD-8245-220BA76303C6}"/>
               </a:ext>
             </a:extLst>
           </p:cNvPr>
@@ -12993,7 +13925,7 @@
           <p:cNvPr id="14" name="">
             <a:extLst xmlns:a="http://schemas.openxmlformats.org/drawingml/2006/main">
               <a:ext uri="{FF2B5EF4-FFF2-40B4-BE49-F238E27FC236}">
-                <a16:creationId xmlns:a16="http://schemas.microsoft.com/office/drawing/2014/main" id="{8CBEA8B1-5412-4191-8E01-E7606728E7EE}"/>
+                <a16:creationId xmlns:a16="http://schemas.microsoft.com/office/drawing/2014/main" id="{3414701E-F492-4164-AA62-9A7DE5C5B5CB}"/>
               </a:ext>
             </a:extLst>
           </p:cNvPr>
@@ -13026,7 +13958,7 @@
           <p:cNvPr id="15" name="">
             <a:extLst xmlns:a="http://schemas.openxmlformats.org/drawingml/2006/main">
               <a:ext uri="{FF2B5EF4-FFF2-40B4-BE49-F238E27FC236}">
-                <a16:creationId xmlns:a16="http://schemas.microsoft.com/office/drawing/2014/main" id="{C0CCFCF2-E8C5-47A6-B6C9-1BB36690130F}"/>
+                <a16:creationId xmlns:a16="http://schemas.microsoft.com/office/drawing/2014/main" id="{62917F3D-430A-4CC7-9C40-9D60D55DD73A}"/>
               </a:ext>
             </a:extLst>
           </p:cNvPr>
@@ -13061,7 +13993,7 @@
           <p:cNvPr id="16" name="">
             <a:extLst xmlns:a="http://schemas.openxmlformats.org/drawingml/2006/main">
               <a:ext uri="{FF2B5EF4-FFF2-40B4-BE49-F238E27FC236}">
-                <a16:creationId xmlns:a16="http://schemas.microsoft.com/office/drawing/2014/main" id="{40BDDB86-4AE0-4811-924F-6D8A58DBDF22}"/>
+                <a16:creationId xmlns:a16="http://schemas.microsoft.com/office/drawing/2014/main" id="{0CCE9D81-A252-4CB1-B171-4353D88BC01A}"/>
               </a:ext>
             </a:extLst>
           </p:cNvPr>
@@ -13094,7 +14026,7 @@
           <p:cNvPr id="17" name="">
             <a:extLst xmlns:a="http://schemas.openxmlformats.org/drawingml/2006/main">
               <a:ext uri="{FF2B5EF4-FFF2-40B4-BE49-F238E27FC236}">
-                <a16:creationId xmlns:a16="http://schemas.microsoft.com/office/drawing/2014/main" id="{09D78D35-C09F-4ABD-A9DA-F3B1C1FC22FE}"/>
+                <a16:creationId xmlns:a16="http://schemas.microsoft.com/office/drawing/2014/main" id="{80E8D8CD-4AFD-4768-BDFB-42259CD31A49}"/>
               </a:ext>
             </a:extLst>
           </p:cNvPr>
@@ -13127,7 +14059,7 @@
           <p:cNvPr id="18" name="">
             <a:extLst xmlns:a="http://schemas.openxmlformats.org/drawingml/2006/main">
               <a:ext uri="{FF2B5EF4-FFF2-40B4-BE49-F238E27FC236}">
-                <a16:creationId xmlns:a16="http://schemas.microsoft.com/office/drawing/2014/main" id="{53C3CF40-276C-4301-9823-80F715B54F2D}"/>
+                <a16:creationId xmlns:a16="http://schemas.microsoft.com/office/drawing/2014/main" id="{68BD11C6-D865-4C9D-AD39-D914FBE876B7}"/>
               </a:ext>
             </a:extLst>
           </p:cNvPr>
@@ -13160,7 +14092,7 @@
           <p:cNvPr id="19" name="">
             <a:extLst xmlns:a="http://schemas.openxmlformats.org/drawingml/2006/main">
               <a:ext uri="{FF2B5EF4-FFF2-40B4-BE49-F238E27FC236}">
-                <a16:creationId xmlns:a16="http://schemas.microsoft.com/office/drawing/2014/main" id="{2D213F23-907D-4F3C-A973-9876C0290480}"/>
+                <a16:creationId xmlns:a16="http://schemas.microsoft.com/office/drawing/2014/main" id="{3C933321-DAB4-49C1-A500-F48A232FC669}"/>
               </a:ext>
             </a:extLst>
           </p:cNvPr>
@@ -13193,7 +14125,7 @@
           <p:cNvPr id="20" name="">
             <a:extLst xmlns:a="http://schemas.openxmlformats.org/drawingml/2006/main">
               <a:ext uri="{FF2B5EF4-FFF2-40B4-BE49-F238E27FC236}">
-                <a16:creationId xmlns:a16="http://schemas.microsoft.com/office/drawing/2014/main" id="{2FF2C702-4755-4833-A730-9898BC114642}"/>
+                <a16:creationId xmlns:a16="http://schemas.microsoft.com/office/drawing/2014/main" id="{2D4FB59A-17A7-4477-B12F-A02ABC6ED089}"/>
               </a:ext>
             </a:extLst>
           </p:cNvPr>
@@ -13226,7 +14158,7 @@
           <p:cNvPr id="21" name="">
             <a:extLst xmlns:a="http://schemas.openxmlformats.org/drawingml/2006/main">
               <a:ext uri="{FF2B5EF4-FFF2-40B4-BE49-F238E27FC236}">
-                <a16:creationId xmlns:a16="http://schemas.microsoft.com/office/drawing/2014/main" id="{5731548D-B5DF-4FD1-B9A6-9CF83ECC3E8E}"/>
+                <a16:creationId xmlns:a16="http://schemas.microsoft.com/office/drawing/2014/main" id="{BDA21A1D-4841-4D48-9CBF-0D068EEFB44F}"/>
               </a:ext>
             </a:extLst>
           </p:cNvPr>
@@ -13259,7 +14191,7 @@
           <p:cNvPr id="22" name="">
             <a:extLst xmlns:a="http://schemas.openxmlformats.org/drawingml/2006/main">
               <a:ext uri="{FF2B5EF4-FFF2-40B4-BE49-F238E27FC236}">
-                <a16:creationId xmlns:a16="http://schemas.microsoft.com/office/drawing/2014/main" id="{2D409ABB-E2C3-48CE-A924-AD1507C93923}"/>
+                <a16:creationId xmlns:a16="http://schemas.microsoft.com/office/drawing/2014/main" id="{63257F17-4D2B-4834-BC04-28948543EB32}"/>
               </a:ext>
             </a:extLst>
           </p:cNvPr>
@@ -13292,7 +14224,7 @@
           <p:cNvPr id="23" name="">
             <a:extLst xmlns:a="http://schemas.openxmlformats.org/drawingml/2006/main">
               <a:ext uri="{FF2B5EF4-FFF2-40B4-BE49-F238E27FC236}">
-                <a16:creationId xmlns:a16="http://schemas.microsoft.com/office/drawing/2014/main" id="{B1909B6B-3E29-4EAD-9716-55C50D163B66}"/>
+                <a16:creationId xmlns:a16="http://schemas.microsoft.com/office/drawing/2014/main" id="{CB64AEE4-09B3-4461-9ADA-A51B33C91E35}"/>
               </a:ext>
             </a:extLst>
           </p:cNvPr>
@@ -13325,7 +14257,7 @@
           <p:cNvPr id="24" name="">
             <a:extLst xmlns:a="http://schemas.openxmlformats.org/drawingml/2006/main">
               <a:ext uri="{FF2B5EF4-FFF2-40B4-BE49-F238E27FC236}">
-                <a16:creationId xmlns:a16="http://schemas.microsoft.com/office/drawing/2014/main" id="{3BF1864B-6DDD-4539-BFD0-1357C08AE06A}"/>
+                <a16:creationId xmlns:a16="http://schemas.microsoft.com/office/drawing/2014/main" id="{A12DC1F1-AC52-4842-92FF-E9C18F19BEC4}"/>
               </a:ext>
             </a:extLst>
           </p:cNvPr>
@@ -13358,7 +14290,7 @@
           <p:cNvPr id="25" name="">
             <a:extLst xmlns:a="http://schemas.openxmlformats.org/drawingml/2006/main">
               <a:ext uri="{FF2B5EF4-FFF2-40B4-BE49-F238E27FC236}">
-                <a16:creationId xmlns:a16="http://schemas.microsoft.com/office/drawing/2014/main" id="{B8CDFAB3-D857-4435-8A10-3F1E34ED44E3}"/>
+                <a16:creationId xmlns:a16="http://schemas.microsoft.com/office/drawing/2014/main" id="{099A572B-AF84-4D53-B97B-F4954D048A9A}"/>
               </a:ext>
             </a:extLst>
           </p:cNvPr>
@@ -13391,7 +14323,7 @@
           <p:cNvPr id="26" name="">
             <a:extLst xmlns:a="http://schemas.openxmlformats.org/drawingml/2006/main">
               <a:ext uri="{FF2B5EF4-FFF2-40B4-BE49-F238E27FC236}">
-                <a16:creationId xmlns:a16="http://schemas.microsoft.com/office/drawing/2014/main" id="{84DDF886-242F-4175-9071-7808A40AEC0E}"/>
+                <a16:creationId xmlns:a16="http://schemas.microsoft.com/office/drawing/2014/main" id="{B9E68029-6600-4E83-92AA-F63D0B8BFF53}"/>
               </a:ext>
             </a:extLst>
           </p:cNvPr>
@@ -13424,7 +14356,7 @@
           <p:cNvPr id="27" name="">
             <a:extLst xmlns:a="http://schemas.openxmlformats.org/drawingml/2006/main">
               <a:ext uri="{FF2B5EF4-FFF2-40B4-BE49-F238E27FC236}">
-                <a16:creationId xmlns:a16="http://schemas.microsoft.com/office/drawing/2014/main" id="{4F9F5D85-919F-4B3F-B50A-17E3FE1C7A00}"/>
+                <a16:creationId xmlns:a16="http://schemas.microsoft.com/office/drawing/2014/main" id="{FE229989-5407-4BA5-BC04-58B944416447}"/>
               </a:ext>
             </a:extLst>
           </p:cNvPr>
@@ -13457,7 +14389,7 @@
           <p:cNvPr id="28" name="">
             <a:extLst xmlns:a="http://schemas.openxmlformats.org/drawingml/2006/main">
               <a:ext uri="{FF2B5EF4-FFF2-40B4-BE49-F238E27FC236}">
-                <a16:creationId xmlns:a16="http://schemas.microsoft.com/office/drawing/2014/main" id="{DB01D7DC-3EF5-4470-833E-F322AF72D2EA}"/>
+                <a16:creationId xmlns:a16="http://schemas.microsoft.com/office/drawing/2014/main" id="{E35726ED-1ACB-4D36-8169-F91CF88740D9}"/>
               </a:ext>
             </a:extLst>
           </p:cNvPr>
@@ -13490,7 +14422,7 @@
           <p:cNvPr id="29" name="">
             <a:extLst xmlns:a="http://schemas.openxmlformats.org/drawingml/2006/main">
               <a:ext uri="{FF2B5EF4-FFF2-40B4-BE49-F238E27FC236}">
-                <a16:creationId xmlns:a16="http://schemas.microsoft.com/office/drawing/2014/main" id="{8C47EAF1-3CF4-49A1-B9DB-EBB109ECFF91}"/>
+                <a16:creationId xmlns:a16="http://schemas.microsoft.com/office/drawing/2014/main" id="{4225AF51-AFE0-4453-8E9A-8EE5D9885C03}"/>
               </a:ext>
             </a:extLst>
           </p:cNvPr>
@@ -13523,7 +14455,7 @@
           <p:cNvPr id="30" name="">
             <a:extLst xmlns:a="http://schemas.openxmlformats.org/drawingml/2006/main">
               <a:ext uri="{FF2B5EF4-FFF2-40B4-BE49-F238E27FC236}">
-                <a16:creationId xmlns:a16="http://schemas.microsoft.com/office/drawing/2014/main" id="{EE8554EC-CAE8-40EF-9884-3789315C2C01}"/>
+                <a16:creationId xmlns:a16="http://schemas.microsoft.com/office/drawing/2014/main" id="{5C169A04-AD3B-411A-B884-DBA9F33EA70F}"/>
               </a:ext>
             </a:extLst>
           </p:cNvPr>
@@ -13556,7 +14488,7 @@
           <p:cNvPr id="31" name="">
             <a:extLst xmlns:a="http://schemas.openxmlformats.org/drawingml/2006/main">
               <a:ext uri="{FF2B5EF4-FFF2-40B4-BE49-F238E27FC236}">
-                <a16:creationId xmlns:a16="http://schemas.microsoft.com/office/drawing/2014/main" id="{FA4B78A3-CA8C-43CB-A24F-0A85469825E7}"/>
+                <a16:creationId xmlns:a16="http://schemas.microsoft.com/office/drawing/2014/main" id="{8C4759A3-AF07-48EA-9C5B-110B02AC246A}"/>
               </a:ext>
             </a:extLst>
           </p:cNvPr>
@@ -13589,7 +14521,7 @@
           <p:cNvPr id="32" name="">
             <a:extLst xmlns:a="http://schemas.openxmlformats.org/drawingml/2006/main">
               <a:ext uri="{FF2B5EF4-FFF2-40B4-BE49-F238E27FC236}">
-                <a16:creationId xmlns:a16="http://schemas.microsoft.com/office/drawing/2014/main" id="{856370CC-F1E9-45FC-8B0E-14D8ADB05AAD}"/>
+                <a16:creationId xmlns:a16="http://schemas.microsoft.com/office/drawing/2014/main" id="{D0BCEAE0-19CF-4657-A8F5-9DBE15E96C9F}"/>
               </a:ext>
             </a:extLst>
           </p:cNvPr>
@@ -13622,7 +14554,7 @@
           <p:cNvPr id="33" name="">
             <a:extLst xmlns:a="http://schemas.openxmlformats.org/drawingml/2006/main">
               <a:ext uri="{FF2B5EF4-FFF2-40B4-BE49-F238E27FC236}">
-                <a16:creationId xmlns:a16="http://schemas.microsoft.com/office/drawing/2014/main" id="{4CA18E58-08A1-4125-9AB9-46F3F7939366}"/>
+                <a16:creationId xmlns:a16="http://schemas.microsoft.com/office/drawing/2014/main" id="{F40E1C43-708E-4D35-9BA9-7268A19A3A2E}"/>
               </a:ext>
             </a:extLst>
           </p:cNvPr>
@@ -13655,7 +14587,7 @@
           <p:cNvPr id="34" name="">
             <a:extLst xmlns:a="http://schemas.openxmlformats.org/drawingml/2006/main">
               <a:ext uri="{FF2B5EF4-FFF2-40B4-BE49-F238E27FC236}">
-                <a16:creationId xmlns:a16="http://schemas.microsoft.com/office/drawing/2014/main" id="{67469AA5-CC33-479C-B124-9F1070D73721}"/>
+                <a16:creationId xmlns:a16="http://schemas.microsoft.com/office/drawing/2014/main" id="{80BEC16E-1C90-45A8-AEAC-990642BC8580}"/>
               </a:ext>
             </a:extLst>
           </p:cNvPr>
@@ -13688,7 +14620,7 @@
           <p:cNvPr id="35" name="">
             <a:extLst xmlns:a="http://schemas.openxmlformats.org/drawingml/2006/main">
               <a:ext uri="{FF2B5EF4-FFF2-40B4-BE49-F238E27FC236}">
-                <a16:creationId xmlns:a16="http://schemas.microsoft.com/office/drawing/2014/main" id="{D15FFB80-2405-4EB0-971E-2FEBFDA50B29}"/>
+                <a16:creationId xmlns:a16="http://schemas.microsoft.com/office/drawing/2014/main" id="{F0950BC7-E7C1-4185-AC88-83E50F973FF5}"/>
               </a:ext>
             </a:extLst>
           </p:cNvPr>
@@ -13721,7 +14653,7 @@
           <p:cNvPr id="36" name="">
             <a:extLst xmlns:a="http://schemas.openxmlformats.org/drawingml/2006/main">
               <a:ext uri="{FF2B5EF4-FFF2-40B4-BE49-F238E27FC236}">
-                <a16:creationId xmlns:a16="http://schemas.microsoft.com/office/drawing/2014/main" id="{4CF866D6-9F80-4D9F-B40B-D6EE1F152D4A}"/>
+                <a16:creationId xmlns:a16="http://schemas.microsoft.com/office/drawing/2014/main" id="{F4F49293-FC3A-4E29-A05C-DBF908A0581C}"/>
               </a:ext>
             </a:extLst>
           </p:cNvPr>
@@ -13754,7 +14686,7 @@
           <p:cNvPr id="37" name="">
             <a:extLst xmlns:a="http://schemas.openxmlformats.org/drawingml/2006/main">
               <a:ext uri="{FF2B5EF4-FFF2-40B4-BE49-F238E27FC236}">
-                <a16:creationId xmlns:a16="http://schemas.microsoft.com/office/drawing/2014/main" id="{CA63E0ED-880E-4B24-A150-E9772D85F06D}"/>
+                <a16:creationId xmlns:a16="http://schemas.microsoft.com/office/drawing/2014/main" id="{29577338-E004-4BD6-B086-CD699B7896D6}"/>
               </a:ext>
             </a:extLst>
           </p:cNvPr>
@@ -13787,7 +14719,7 @@
           <p:cNvPr id="38" name="">
             <a:extLst xmlns:a="http://schemas.openxmlformats.org/drawingml/2006/main">
               <a:ext uri="{FF2B5EF4-FFF2-40B4-BE49-F238E27FC236}">
-                <a16:creationId xmlns:a16="http://schemas.microsoft.com/office/drawing/2014/main" id="{B45B16DC-9768-4918-BCEC-2321882982DC}"/>
+                <a16:creationId xmlns:a16="http://schemas.microsoft.com/office/drawing/2014/main" id="{2A499490-2ADE-4574-8451-37C4C6D6EA2D}"/>
               </a:ext>
             </a:extLst>
           </p:cNvPr>
@@ -13820,7 +14752,7 @@
           <p:cNvPr id="39" name="">
             <a:extLst xmlns:a="http://schemas.openxmlformats.org/drawingml/2006/main">
               <a:ext uri="{FF2B5EF4-FFF2-40B4-BE49-F238E27FC236}">
-                <a16:creationId xmlns:a16="http://schemas.microsoft.com/office/drawing/2014/main" id="{4C2ABFA1-9EA3-4E6C-A2AF-261C6C885F5D}"/>
+                <a16:creationId xmlns:a16="http://schemas.microsoft.com/office/drawing/2014/main" id="{4661B027-2BB6-4A59-A699-DFD7198E05A2}"/>
               </a:ext>
             </a:extLst>
           </p:cNvPr>
@@ -13853,7 +14785,7 @@
           <p:cNvPr id="40" name="">
             <a:extLst xmlns:a="http://schemas.openxmlformats.org/drawingml/2006/main">
               <a:ext uri="{FF2B5EF4-FFF2-40B4-BE49-F238E27FC236}">
-                <a16:creationId xmlns:a16="http://schemas.microsoft.com/office/drawing/2014/main" id="{2341ED23-B6C9-48F4-B3B0-DEF3B4001DEB}"/>
+                <a16:creationId xmlns:a16="http://schemas.microsoft.com/office/drawing/2014/main" id="{E367D13B-B336-4472-AA88-C54998865EC9}"/>
               </a:ext>
             </a:extLst>
           </p:cNvPr>
@@ -13886,7 +14818,7 @@
           <p:cNvPr id="41" name="">
             <a:extLst xmlns:a="http://schemas.openxmlformats.org/drawingml/2006/main">
               <a:ext uri="{FF2B5EF4-FFF2-40B4-BE49-F238E27FC236}">
-                <a16:creationId xmlns:a16="http://schemas.microsoft.com/office/drawing/2014/main" id="{ABCADCCE-9172-439A-BD13-C488EF872093}"/>
+                <a16:creationId xmlns:a16="http://schemas.microsoft.com/office/drawing/2014/main" id="{7A7C5277-A8EC-448D-B716-6C59A137F73D}"/>
               </a:ext>
             </a:extLst>
           </p:cNvPr>
@@ -13919,7 +14851,7 @@
           <p:cNvPr id="42" name="">
             <a:extLst xmlns:a="http://schemas.openxmlformats.org/drawingml/2006/main">
               <a:ext uri="{FF2B5EF4-FFF2-40B4-BE49-F238E27FC236}">
-                <a16:creationId xmlns:a16="http://schemas.microsoft.com/office/drawing/2014/main" id="{C2E50767-1BCA-4F11-AC67-5960AA1D1DA9}"/>
+                <a16:creationId xmlns:a16="http://schemas.microsoft.com/office/drawing/2014/main" id="{1128C46A-7BC6-41EB-82AE-F845BA12673B}"/>
               </a:ext>
             </a:extLst>
           </p:cNvPr>
@@ -13952,7 +14884,7 @@
           <p:cNvPr id="43" name="">
             <a:extLst xmlns:a="http://schemas.openxmlformats.org/drawingml/2006/main">
               <a:ext uri="{FF2B5EF4-FFF2-40B4-BE49-F238E27FC236}">
-                <a16:creationId xmlns:a16="http://schemas.microsoft.com/office/drawing/2014/main" id="{9B45DB84-5341-43A0-A14B-ACD7983E5243}"/>
+                <a16:creationId xmlns:a16="http://schemas.microsoft.com/office/drawing/2014/main" id="{FDE56E27-F495-4F5E-B51A-F26C2F2DCBDE}"/>
               </a:ext>
             </a:extLst>
           </p:cNvPr>
@@ -13985,7 +14917,7 @@
           <p:cNvPr id="44" name="">
             <a:extLst xmlns:a="http://schemas.openxmlformats.org/drawingml/2006/main">
               <a:ext uri="{FF2B5EF4-FFF2-40B4-BE49-F238E27FC236}">
-                <a16:creationId xmlns:a16="http://schemas.microsoft.com/office/drawing/2014/main" id="{98B22337-2646-4AD0-8969-561DEE31C5AA}"/>
+                <a16:creationId xmlns:a16="http://schemas.microsoft.com/office/drawing/2014/main" id="{0F82599E-6D14-436C-A9B5-1B979ABB1D3D}"/>
               </a:ext>
             </a:extLst>
           </p:cNvPr>
@@ -14018,7 +14950,7 @@
           <p:cNvPr id="45" name="">
             <a:extLst xmlns:a="http://schemas.openxmlformats.org/drawingml/2006/main">
               <a:ext uri="{FF2B5EF4-FFF2-40B4-BE49-F238E27FC236}">
-                <a16:creationId xmlns:a16="http://schemas.microsoft.com/office/drawing/2014/main" id="{0710BBCD-C082-4674-A378-753D9BD44AD6}"/>
+                <a16:creationId xmlns:a16="http://schemas.microsoft.com/office/drawing/2014/main" id="{24803303-907B-40CB-8732-69E9DEEF26A0}"/>
               </a:ext>
             </a:extLst>
           </p:cNvPr>
@@ -14051,7 +14983,7 @@
           <p:cNvPr id="46" name="">
             <a:extLst xmlns:a="http://schemas.openxmlformats.org/drawingml/2006/main">
               <a:ext uri="{FF2B5EF4-FFF2-40B4-BE49-F238E27FC236}">
-                <a16:creationId xmlns:a16="http://schemas.microsoft.com/office/drawing/2014/main" id="{F0924952-834A-4493-9FBE-6DC90663E1D8}"/>
+                <a16:creationId xmlns:a16="http://schemas.microsoft.com/office/drawing/2014/main" id="{55D6D15F-355F-4A16-8DE9-DD8524BD5EE6}"/>
               </a:ext>
             </a:extLst>
           </p:cNvPr>
@@ -14084,7 +15016,7 @@
           <p:cNvPr id="47" name="">
             <a:extLst xmlns:a="http://schemas.openxmlformats.org/drawingml/2006/main">
               <a:ext uri="{FF2B5EF4-FFF2-40B4-BE49-F238E27FC236}">
-                <a16:creationId xmlns:a16="http://schemas.microsoft.com/office/drawing/2014/main" id="{43919A5A-FEF8-461D-A7F7-51F83F5A425A}"/>
+                <a16:creationId xmlns:a16="http://schemas.microsoft.com/office/drawing/2014/main" id="{06B5F676-DE5E-4CF8-BB53-CD6B4FBE4E9B}"/>
               </a:ext>
             </a:extLst>
           </p:cNvPr>
@@ -14117,7 +15049,7 @@
           <p:cNvPr id="48" name="">
             <a:extLst xmlns:a="http://schemas.openxmlformats.org/drawingml/2006/main">
               <a:ext uri="{FF2B5EF4-FFF2-40B4-BE49-F238E27FC236}">
-                <a16:creationId xmlns:a16="http://schemas.microsoft.com/office/drawing/2014/main" id="{EE43A628-A802-4302-AA77-C0E04C498C53}"/>
+                <a16:creationId xmlns:a16="http://schemas.microsoft.com/office/drawing/2014/main" id="{2593154D-A7F7-4DDC-9DBA-F41313C6D248}"/>
               </a:ext>
             </a:extLst>
           </p:cNvPr>
@@ -14150,7 +15082,7 @@
           <p:cNvPr id="49" name="">
             <a:extLst xmlns:a="http://schemas.openxmlformats.org/drawingml/2006/main">
               <a:ext uri="{FF2B5EF4-FFF2-40B4-BE49-F238E27FC236}">
-                <a16:creationId xmlns:a16="http://schemas.microsoft.com/office/drawing/2014/main" id="{D1986B55-4761-4AC0-9D9E-51FE10B8FC08}"/>
+                <a16:creationId xmlns:a16="http://schemas.microsoft.com/office/drawing/2014/main" id="{5729320B-C28B-4798-9443-19826D710317}"/>
               </a:ext>
             </a:extLst>
           </p:cNvPr>
@@ -14183,7 +15115,7 @@
           <p:cNvPr id="50" name="">
             <a:extLst xmlns:a="http://schemas.openxmlformats.org/drawingml/2006/main">
               <a:ext uri="{FF2B5EF4-FFF2-40B4-BE49-F238E27FC236}">
-                <a16:creationId xmlns:a16="http://schemas.microsoft.com/office/drawing/2014/main" id="{B9CD03E7-14F1-4F24-A378-48D13F362BB8}"/>
+                <a16:creationId xmlns:a16="http://schemas.microsoft.com/office/drawing/2014/main" id="{04CD4D90-E366-42B4-80A8-EAB4B2BB1B51}"/>
               </a:ext>
             </a:extLst>
           </p:cNvPr>
@@ -14216,7 +15148,7 @@
           <p:cNvPr id="51" name="">
             <a:extLst xmlns:a="http://schemas.openxmlformats.org/drawingml/2006/main">
               <a:ext uri="{FF2B5EF4-FFF2-40B4-BE49-F238E27FC236}">
-                <a16:creationId xmlns:a16="http://schemas.microsoft.com/office/drawing/2014/main" id="{91C0DD33-C460-492C-B7A8-94C48A3F4419}"/>
+                <a16:creationId xmlns:a16="http://schemas.microsoft.com/office/drawing/2014/main" id="{9B32260E-2C73-402F-A038-712993ED7766}"/>
               </a:ext>
             </a:extLst>
           </p:cNvPr>
@@ -14249,7 +15181,7 @@
           <p:cNvPr id="52" name="">
             <a:extLst xmlns:a="http://schemas.openxmlformats.org/drawingml/2006/main">
               <a:ext uri="{FF2B5EF4-FFF2-40B4-BE49-F238E27FC236}">
-                <a16:creationId xmlns:a16="http://schemas.microsoft.com/office/drawing/2014/main" id="{96C78018-1B1F-4438-B397-73885D75006E}"/>
+                <a16:creationId xmlns:a16="http://schemas.microsoft.com/office/drawing/2014/main" id="{E02B37DB-A9D6-4447-AB12-83F50B8D84A4}"/>
               </a:ext>
             </a:extLst>
           </p:cNvPr>
@@ -14282,7 +15214,7 @@
           <p:cNvPr id="53" name="">
             <a:extLst xmlns:a="http://schemas.openxmlformats.org/drawingml/2006/main">
               <a:ext uri="{FF2B5EF4-FFF2-40B4-BE49-F238E27FC236}">
-                <a16:creationId xmlns:a16="http://schemas.microsoft.com/office/drawing/2014/main" id="{9C8162CF-0DB6-4994-9B26-834D5C27FEDF}"/>
+                <a16:creationId xmlns:a16="http://schemas.microsoft.com/office/drawing/2014/main" id="{B1626DDB-BEE6-4E1D-9424-DE188D88941C}"/>
               </a:ext>
             </a:extLst>
           </p:cNvPr>
@@ -14315,7 +15247,7 @@
           <p:cNvPr id="54" name="">
             <a:extLst xmlns:a="http://schemas.openxmlformats.org/drawingml/2006/main">
               <a:ext uri="{FF2B5EF4-FFF2-40B4-BE49-F238E27FC236}">
-                <a16:creationId xmlns:a16="http://schemas.microsoft.com/office/drawing/2014/main" id="{0EBAFDC2-F61C-4AC9-9675-B9AEC97F48A8}"/>
+                <a16:creationId xmlns:a16="http://schemas.microsoft.com/office/drawing/2014/main" id="{955DF4DB-44CD-4191-8602-B7D2231867B9}"/>
               </a:ext>
             </a:extLst>
           </p:cNvPr>
@@ -14348,7 +15280,7 @@
           <p:cNvPr id="55" name="">
             <a:extLst xmlns:a="http://schemas.openxmlformats.org/drawingml/2006/main">
               <a:ext uri="{FF2B5EF4-FFF2-40B4-BE49-F238E27FC236}">
-                <a16:creationId xmlns:a16="http://schemas.microsoft.com/office/drawing/2014/main" id="{9DD8D8E7-43FC-47A3-9BB8-945271038939}"/>
+                <a16:creationId xmlns:a16="http://schemas.microsoft.com/office/drawing/2014/main" id="{F4B718E8-403E-4DC5-AF73-ED45CB1EE80D}"/>
               </a:ext>
             </a:extLst>
           </p:cNvPr>
@@ -14381,7 +15313,7 @@
           <p:cNvPr id="56" name="">
             <a:extLst xmlns:a="http://schemas.openxmlformats.org/drawingml/2006/main">
               <a:ext uri="{FF2B5EF4-FFF2-40B4-BE49-F238E27FC236}">
-                <a16:creationId xmlns:a16="http://schemas.microsoft.com/office/drawing/2014/main" id="{84BCD6BF-E6FA-49F6-A2EA-83B5DEDFF4CF}"/>
+                <a16:creationId xmlns:a16="http://schemas.microsoft.com/office/drawing/2014/main" id="{65777A47-5095-4FB1-84A1-41EBBFDAA74E}"/>
               </a:ext>
             </a:extLst>
           </p:cNvPr>
@@ -14414,7 +15346,7 @@
           <p:cNvPr id="57" name="">
             <a:extLst xmlns:a="http://schemas.openxmlformats.org/drawingml/2006/main">
               <a:ext uri="{FF2B5EF4-FFF2-40B4-BE49-F238E27FC236}">
-                <a16:creationId xmlns:a16="http://schemas.microsoft.com/office/drawing/2014/main" id="{84FEDC27-B20B-40EC-B890-00CF357DE99B}"/>
+                <a16:creationId xmlns:a16="http://schemas.microsoft.com/office/drawing/2014/main" id="{8E209512-F55C-4546-BAEB-9C5FBBFBF5BE}"/>
               </a:ext>
             </a:extLst>
           </p:cNvPr>
@@ -14447,7 +15379,7 @@
           <p:cNvPr id="58" name="">
             <a:extLst xmlns:a="http://schemas.openxmlformats.org/drawingml/2006/main">
               <a:ext uri="{FF2B5EF4-FFF2-40B4-BE49-F238E27FC236}">
-                <a16:creationId xmlns:a16="http://schemas.microsoft.com/office/drawing/2014/main" id="{81634BD2-348F-4526-9E6C-746ABB705D27}"/>
+                <a16:creationId xmlns:a16="http://schemas.microsoft.com/office/drawing/2014/main" id="{2D82DF4F-45DB-4632-8D20-823395ED07EC}"/>
               </a:ext>
             </a:extLst>
           </p:cNvPr>
@@ -14480,7 +15412,7 @@
           <p:cNvPr id="59" name="">
             <a:extLst xmlns:a="http://schemas.openxmlformats.org/drawingml/2006/main">
               <a:ext uri="{FF2B5EF4-FFF2-40B4-BE49-F238E27FC236}">
-                <a16:creationId xmlns:a16="http://schemas.microsoft.com/office/drawing/2014/main" id="{61778980-8FC3-45F5-B429-1CC8D63375EE}"/>
+                <a16:creationId xmlns:a16="http://schemas.microsoft.com/office/drawing/2014/main" id="{3490B0EA-4EEC-4D74-86B4-CFB59BEDEBA7}"/>
               </a:ext>
             </a:extLst>
           </p:cNvPr>
@@ -14513,7 +15445,7 @@
           <p:cNvPr id="60" name="">
             <a:extLst xmlns:a="http://schemas.openxmlformats.org/drawingml/2006/main">
               <a:ext uri="{FF2B5EF4-FFF2-40B4-BE49-F238E27FC236}">
-                <a16:creationId xmlns:a16="http://schemas.microsoft.com/office/drawing/2014/main" id="{6D4AC6B5-46A9-4973-9A64-564174465AB7}"/>
+                <a16:creationId xmlns:a16="http://schemas.microsoft.com/office/drawing/2014/main" id="{26ADC1F4-600F-4C0F-B86E-B42AE357D76C}"/>
               </a:ext>
             </a:extLst>
           </p:cNvPr>
@@ -14546,7 +15478,7 @@
           <p:cNvPr id="61" name="">
             <a:extLst xmlns:a="http://schemas.openxmlformats.org/drawingml/2006/main">
               <a:ext uri="{FF2B5EF4-FFF2-40B4-BE49-F238E27FC236}">
-                <a16:creationId xmlns:a16="http://schemas.microsoft.com/office/drawing/2014/main" id="{2CCAAA52-FD0B-4E83-B6F1-1E317355C347}"/>
+                <a16:creationId xmlns:a16="http://schemas.microsoft.com/office/drawing/2014/main" id="{531A0491-E95F-45A9-A799-FCBCAFED2FAD}"/>
               </a:ext>
             </a:extLst>
           </p:cNvPr>
@@ -14579,7 +15511,7 @@
           <p:cNvPr id="62" name="">
             <a:extLst xmlns:a="http://schemas.openxmlformats.org/drawingml/2006/main">
               <a:ext uri="{FF2B5EF4-FFF2-40B4-BE49-F238E27FC236}">
-                <a16:creationId xmlns:a16="http://schemas.microsoft.com/office/drawing/2014/main" id="{F8780E7B-9334-4997-BEB5-5FD04342F764}"/>
+                <a16:creationId xmlns:a16="http://schemas.microsoft.com/office/drawing/2014/main" id="{00DCD2AF-9C5C-4486-8834-FF9324068679}"/>
               </a:ext>
             </a:extLst>
           </p:cNvPr>
@@ -14612,7 +15544,7 @@
           <p:cNvPr id="63" name="">
             <a:extLst xmlns:a="http://schemas.openxmlformats.org/drawingml/2006/main">
               <a:ext uri="{FF2B5EF4-FFF2-40B4-BE49-F238E27FC236}">
-                <a16:creationId xmlns:a16="http://schemas.microsoft.com/office/drawing/2014/main" id="{4DA70961-D7B8-4FA3-A728-B3F279DD50D5}"/>
+                <a16:creationId xmlns:a16="http://schemas.microsoft.com/office/drawing/2014/main" id="{0A32A706-C276-4CC1-97DC-755344E9827A}"/>
               </a:ext>
             </a:extLst>
           </p:cNvPr>
@@ -14645,7 +15577,7 @@
           <p:cNvPr id="64" name="">
             <a:extLst xmlns:a="http://schemas.openxmlformats.org/drawingml/2006/main">
               <a:ext uri="{FF2B5EF4-FFF2-40B4-BE49-F238E27FC236}">
-                <a16:creationId xmlns:a16="http://schemas.microsoft.com/office/drawing/2014/main" id="{2742BE38-3F7C-40D9-BD13-15DD9034BF0A}"/>
+                <a16:creationId xmlns:a16="http://schemas.microsoft.com/office/drawing/2014/main" id="{74E33EB2-A2A4-4AA7-95A1-920DEE29CCC2}"/>
               </a:ext>
             </a:extLst>
           </p:cNvPr>
@@ -14678,7 +15610,7 @@
           <p:cNvPr id="65" name="">
             <a:extLst xmlns:a="http://schemas.openxmlformats.org/drawingml/2006/main">
               <a:ext uri="{FF2B5EF4-FFF2-40B4-BE49-F238E27FC236}">
-                <a16:creationId xmlns:a16="http://schemas.microsoft.com/office/drawing/2014/main" id="{1DB00B34-9EBD-4A77-89D8-1D12A0D69455}"/>
+                <a16:creationId xmlns:a16="http://schemas.microsoft.com/office/drawing/2014/main" id="{DC9CF618-AEA6-4DFC-A270-13D6D4A76E0F}"/>
               </a:ext>
             </a:extLst>
           </p:cNvPr>
@@ -14711,7 +15643,7 @@
           <p:cNvPr id="66" name="">
             <a:extLst xmlns:a="http://schemas.openxmlformats.org/drawingml/2006/main">
               <a:ext uri="{FF2B5EF4-FFF2-40B4-BE49-F238E27FC236}">
-                <a16:creationId xmlns:a16="http://schemas.microsoft.com/office/drawing/2014/main" id="{80D4EEF9-41FC-462F-AABF-C273BD43CAA8}"/>
+                <a16:creationId xmlns:a16="http://schemas.microsoft.com/office/drawing/2014/main" id="{FCE8D57B-6B16-43D4-B95F-B115C47EDF63}"/>
               </a:ext>
             </a:extLst>
           </p:cNvPr>
@@ -14744,7 +15676,7 @@
           <p:cNvPr id="67" name="">
             <a:extLst xmlns:a="http://schemas.openxmlformats.org/drawingml/2006/main">
               <a:ext uri="{FF2B5EF4-FFF2-40B4-BE49-F238E27FC236}">
-                <a16:creationId xmlns:a16="http://schemas.microsoft.com/office/drawing/2014/main" id="{899DC995-EA0C-4B5A-824B-FAE7AFFE3B35}"/>
+                <a16:creationId xmlns:a16="http://schemas.microsoft.com/office/drawing/2014/main" id="{AA8D1BA1-C08B-4A65-94D6-8FD7719C4CBA}"/>
               </a:ext>
             </a:extLst>
           </p:cNvPr>
@@ -14777,7 +15709,7 @@
           <p:cNvPr id="68" name="">
             <a:extLst xmlns:a="http://schemas.openxmlformats.org/drawingml/2006/main">
               <a:ext uri="{FF2B5EF4-FFF2-40B4-BE49-F238E27FC236}">
-                <a16:creationId xmlns:a16="http://schemas.microsoft.com/office/drawing/2014/main" id="{BD75F310-06D3-42AA-8984-E767108B8E40}"/>
+                <a16:creationId xmlns:a16="http://schemas.microsoft.com/office/drawing/2014/main" id="{D0C92761-A365-4E36-B0D7-DF1F4CD15826}"/>
               </a:ext>
             </a:extLst>
           </p:cNvPr>
@@ -14810,7 +15742,7 @@
           <p:cNvPr id="69" name="">
             <a:extLst xmlns:a="http://schemas.openxmlformats.org/drawingml/2006/main">
               <a:ext uri="{FF2B5EF4-FFF2-40B4-BE49-F238E27FC236}">
-                <a16:creationId xmlns:a16="http://schemas.microsoft.com/office/drawing/2014/main" id="{BFE9000F-ABA5-46FC-B06E-098EFF954E23}"/>
+                <a16:creationId xmlns:a16="http://schemas.microsoft.com/office/drawing/2014/main" id="{CF4DD4BE-2C79-4215-93E2-73EBBCEFBDDB}"/>
               </a:ext>
             </a:extLst>
           </p:cNvPr>
@@ -14843,7 +15775,7 @@
           <p:cNvPr id="70" name="">
             <a:extLst xmlns:a="http://schemas.openxmlformats.org/drawingml/2006/main">
               <a:ext uri="{FF2B5EF4-FFF2-40B4-BE49-F238E27FC236}">
-                <a16:creationId xmlns:a16="http://schemas.microsoft.com/office/drawing/2014/main" id="{53D19D03-72B8-462F-B083-46AFFC4E3527}"/>
+                <a16:creationId xmlns:a16="http://schemas.microsoft.com/office/drawing/2014/main" id="{C6106830-84D8-4140-9E02-D4DBD14CB8A6}"/>
               </a:ext>
             </a:extLst>
           </p:cNvPr>
@@ -14876,7 +15808,7 @@
           <p:cNvPr id="71" name="">
             <a:extLst xmlns:a="http://schemas.openxmlformats.org/drawingml/2006/main">
               <a:ext uri="{FF2B5EF4-FFF2-40B4-BE49-F238E27FC236}">
-                <a16:creationId xmlns:a16="http://schemas.microsoft.com/office/drawing/2014/main" id="{F8B299B3-A5D5-43E7-90F0-831C4F2BE048}"/>
+                <a16:creationId xmlns:a16="http://schemas.microsoft.com/office/drawing/2014/main" id="{78DFAE24-F22C-4F6F-BBF0-E64DFD234AC4}"/>
               </a:ext>
             </a:extLst>
           </p:cNvPr>
@@ -14909,7 +15841,7 @@
           <p:cNvPr id="72" name="">
             <a:extLst xmlns:a="http://schemas.openxmlformats.org/drawingml/2006/main">
               <a:ext uri="{FF2B5EF4-FFF2-40B4-BE49-F238E27FC236}">
-                <a16:creationId xmlns:a16="http://schemas.microsoft.com/office/drawing/2014/main" id="{8EEF866A-4C9C-4B10-9467-9458B8A76C84}"/>
+                <a16:creationId xmlns:a16="http://schemas.microsoft.com/office/drawing/2014/main" id="{770CEE1A-C049-4D08-88F4-FBFFF02C128E}"/>
               </a:ext>
             </a:extLst>
           </p:cNvPr>
@@ -14942,7 +15874,7 @@
           <p:cNvPr id="73" name="">
             <a:extLst xmlns:a="http://schemas.openxmlformats.org/drawingml/2006/main">
               <a:ext uri="{FF2B5EF4-FFF2-40B4-BE49-F238E27FC236}">
-                <a16:creationId xmlns:a16="http://schemas.microsoft.com/office/drawing/2014/main" id="{10072F16-324C-4957-8932-FF1D692962A7}"/>
+                <a16:creationId xmlns:a16="http://schemas.microsoft.com/office/drawing/2014/main" id="{B8C28071-0212-458C-8F04-8CA367A6D1C2}"/>
               </a:ext>
             </a:extLst>
           </p:cNvPr>
@@ -14975,7 +15907,7 @@
           <p:cNvPr id="74" name="">
             <a:extLst xmlns:a="http://schemas.openxmlformats.org/drawingml/2006/main">
               <a:ext uri="{FF2B5EF4-FFF2-40B4-BE49-F238E27FC236}">
-                <a16:creationId xmlns:a16="http://schemas.microsoft.com/office/drawing/2014/main" id="{D08A4C3A-39F1-4CBA-8674-A5D8C3C93135}"/>
+                <a16:creationId xmlns:a16="http://schemas.microsoft.com/office/drawing/2014/main" id="{EBF82483-6D28-4E74-B785-8FD8D849EF45}"/>
               </a:ext>
             </a:extLst>
           </p:cNvPr>
@@ -15008,7 +15940,7 @@
           <p:cNvPr id="75" name="">
             <a:extLst xmlns:a="http://schemas.openxmlformats.org/drawingml/2006/main">
               <a:ext uri="{FF2B5EF4-FFF2-40B4-BE49-F238E27FC236}">
-                <a16:creationId xmlns:a16="http://schemas.microsoft.com/office/drawing/2014/main" id="{4908D299-0BB6-4C34-8495-784BA6107EF4}"/>
+                <a16:creationId xmlns:a16="http://schemas.microsoft.com/office/drawing/2014/main" id="{683F14C3-4FFE-419D-A7F0-4A0DD84DC198}"/>
               </a:ext>
             </a:extLst>
           </p:cNvPr>
@@ -15041,7 +15973,7 @@
           <p:cNvPr id="76" name="">
             <a:extLst xmlns:a="http://schemas.openxmlformats.org/drawingml/2006/main">
               <a:ext uri="{FF2B5EF4-FFF2-40B4-BE49-F238E27FC236}">
-                <a16:creationId xmlns:a16="http://schemas.microsoft.com/office/drawing/2014/main" id="{75CA37E0-2601-469C-9976-7128D84CBBC6}"/>
+                <a16:creationId xmlns:a16="http://schemas.microsoft.com/office/drawing/2014/main" id="{79E0E107-D978-448C-BC02-D4A2B08C5127}"/>
               </a:ext>
             </a:extLst>
           </p:cNvPr>
@@ -15074,7 +16006,7 @@
           <p:cNvPr id="77" name="">
             <a:extLst xmlns:a="http://schemas.openxmlformats.org/drawingml/2006/main">
               <a:ext uri="{FF2B5EF4-FFF2-40B4-BE49-F238E27FC236}">
-                <a16:creationId xmlns:a16="http://schemas.microsoft.com/office/drawing/2014/main" id="{120608DC-92E4-4F8F-AE9C-83A6C7E72C8F}"/>
+                <a16:creationId xmlns:a16="http://schemas.microsoft.com/office/drawing/2014/main" id="{926E932C-67EB-4F0A-85F6-32BDB01064C1}"/>
               </a:ext>
             </a:extLst>
           </p:cNvPr>
@@ -15107,7 +16039,7 @@
           <p:cNvPr id="78" name="">
             <a:extLst xmlns:a="http://schemas.openxmlformats.org/drawingml/2006/main">
               <a:ext uri="{FF2B5EF4-FFF2-40B4-BE49-F238E27FC236}">
-                <a16:creationId xmlns:a16="http://schemas.microsoft.com/office/drawing/2014/main" id="{8FC8AFF4-A1A7-450F-B38A-2EC9F05628E1}"/>
+                <a16:creationId xmlns:a16="http://schemas.microsoft.com/office/drawing/2014/main" id="{80EF55C1-2EF2-4A18-88A6-DECBCA184E52}"/>
               </a:ext>
             </a:extLst>
           </p:cNvPr>
@@ -15140,7 +16072,7 @@
           <p:cNvPr id="79" name="">
             <a:extLst xmlns:a="http://schemas.openxmlformats.org/drawingml/2006/main">
               <a:ext uri="{FF2B5EF4-FFF2-40B4-BE49-F238E27FC236}">
-                <a16:creationId xmlns:a16="http://schemas.microsoft.com/office/drawing/2014/main" id="{0B9862DA-0848-42C9-B00F-134650F8E07B}"/>
+                <a16:creationId xmlns:a16="http://schemas.microsoft.com/office/drawing/2014/main" id="{6C5CFA9D-6181-49FE-9EDC-435E47024626}"/>
               </a:ext>
             </a:extLst>
           </p:cNvPr>
@@ -15173,7 +16105,7 @@
           <p:cNvPr id="80" name="">
             <a:extLst xmlns:a="http://schemas.openxmlformats.org/drawingml/2006/main">
               <a:ext uri="{FF2B5EF4-FFF2-40B4-BE49-F238E27FC236}">
-                <a16:creationId xmlns:a16="http://schemas.microsoft.com/office/drawing/2014/main" id="{050EFB10-9C4E-4E0A-A657-5B61E4D6A037}"/>
+                <a16:creationId xmlns:a16="http://schemas.microsoft.com/office/drawing/2014/main" id="{DCF8B54C-E497-4179-A07B-BB1D6D41775A}"/>
               </a:ext>
             </a:extLst>
           </p:cNvPr>
@@ -15206,7 +16138,7 @@
           <p:cNvPr id="81" name="">
             <a:extLst xmlns:a="http://schemas.openxmlformats.org/drawingml/2006/main">
               <a:ext uri="{FF2B5EF4-FFF2-40B4-BE49-F238E27FC236}">
-                <a16:creationId xmlns:a16="http://schemas.microsoft.com/office/drawing/2014/main" id="{F0443CFA-32C2-4011-A33C-D463743EEF5A}"/>
+                <a16:creationId xmlns:a16="http://schemas.microsoft.com/office/drawing/2014/main" id="{8DF5FBBE-032B-41E3-8B4F-2479FBEABC34}"/>
               </a:ext>
             </a:extLst>
           </p:cNvPr>
@@ -15239,7 +16171,7 @@
           <p:cNvPr id="82" name="">
             <a:extLst xmlns:a="http://schemas.openxmlformats.org/drawingml/2006/main">
               <a:ext uri="{FF2B5EF4-FFF2-40B4-BE49-F238E27FC236}">
-                <a16:creationId xmlns:a16="http://schemas.microsoft.com/office/drawing/2014/main" id="{EF5B160E-FC5C-48BD-AB33-833ABA47F682}"/>
+                <a16:creationId xmlns:a16="http://schemas.microsoft.com/office/drawing/2014/main" id="{30F634E8-9A1D-4766-83F9-D4186E29582A}"/>
               </a:ext>
             </a:extLst>
           </p:cNvPr>
@@ -15272,7 +16204,7 @@
           <p:cNvPr id="83" name="">
             <a:extLst xmlns:a="http://schemas.openxmlformats.org/drawingml/2006/main">
               <a:ext uri="{FF2B5EF4-FFF2-40B4-BE49-F238E27FC236}">
-                <a16:creationId xmlns:a16="http://schemas.microsoft.com/office/drawing/2014/main" id="{B6B0EA5D-9A44-4ABE-B33A-4AD25458FE45}"/>
+                <a16:creationId xmlns:a16="http://schemas.microsoft.com/office/drawing/2014/main" id="{5EBCAC72-BA61-4F28-BA02-C9C1893593B6}"/>
               </a:ext>
             </a:extLst>
           </p:cNvPr>
@@ -15305,7 +16237,7 @@
           <p:cNvPr id="84" name="">
             <a:extLst xmlns:a="http://schemas.openxmlformats.org/drawingml/2006/main">
               <a:ext uri="{FF2B5EF4-FFF2-40B4-BE49-F238E27FC236}">
-                <a16:creationId xmlns:a16="http://schemas.microsoft.com/office/drawing/2014/main" id="{8C0DF091-0CAD-4775-959C-5EC361BD97C6}"/>
+                <a16:creationId xmlns:a16="http://schemas.microsoft.com/office/drawing/2014/main" id="{0E3976B0-A71E-4DEE-86DB-633ACAF98638}"/>
               </a:ext>
             </a:extLst>
           </p:cNvPr>
@@ -15338,7 +16270,7 @@
           <p:cNvPr id="85" name="">
             <a:extLst xmlns:a="http://schemas.openxmlformats.org/drawingml/2006/main">
               <a:ext uri="{FF2B5EF4-FFF2-40B4-BE49-F238E27FC236}">
-                <a16:creationId xmlns:a16="http://schemas.microsoft.com/office/drawing/2014/main" id="{C771BB6A-C9D8-403D-97A9-91DBFF612894}"/>
+                <a16:creationId xmlns:a16="http://schemas.microsoft.com/office/drawing/2014/main" id="{C6771EEC-AAA6-46AD-897E-61F378C6ECDF}"/>
               </a:ext>
             </a:extLst>
           </p:cNvPr>
@@ -15371,7 +16303,7 @@
           <p:cNvPr id="86" name="">
             <a:extLst xmlns:a="http://schemas.openxmlformats.org/drawingml/2006/main">
               <a:ext uri="{FF2B5EF4-FFF2-40B4-BE49-F238E27FC236}">
-                <a16:creationId xmlns:a16="http://schemas.microsoft.com/office/drawing/2014/main" id="{81D323DB-51AD-43B1-B7CC-1264ED1E8B17}"/>
+                <a16:creationId xmlns:a16="http://schemas.microsoft.com/office/drawing/2014/main" id="{8CA068F9-B1FD-48EA-8ECC-B27689B5B7D0}"/>
               </a:ext>
             </a:extLst>
           </p:cNvPr>
@@ -15404,7 +16336,7 @@
           <p:cNvPr id="87" name="">
             <a:extLst xmlns:a="http://schemas.openxmlformats.org/drawingml/2006/main">
               <a:ext uri="{FF2B5EF4-FFF2-40B4-BE49-F238E27FC236}">
-                <a16:creationId xmlns:a16="http://schemas.microsoft.com/office/drawing/2014/main" id="{C06087E7-DC9D-4B50-AF9E-3A5F5867090B}"/>
+                <a16:creationId xmlns:a16="http://schemas.microsoft.com/office/drawing/2014/main" id="{9738F4BA-9F3B-4673-9D14-8AF91E3254F2}"/>
               </a:ext>
             </a:extLst>
           </p:cNvPr>
@@ -15437,7 +16369,7 @@
           <p:cNvPr id="88" name="">
             <a:extLst xmlns:a="http://schemas.openxmlformats.org/drawingml/2006/main">
               <a:ext uri="{FF2B5EF4-FFF2-40B4-BE49-F238E27FC236}">
-                <a16:creationId xmlns:a16="http://schemas.microsoft.com/office/drawing/2014/main" id="{E1D6C32F-EC86-4678-A57E-80DACC669E14}"/>
+                <a16:creationId xmlns:a16="http://schemas.microsoft.com/office/drawing/2014/main" id="{FBB8A765-CE18-4D20-9799-0D248168E98A}"/>
               </a:ext>
             </a:extLst>
           </p:cNvPr>
@@ -15470,7 +16402,7 @@
           <p:cNvPr id="89" name="">
             <a:extLst xmlns:a="http://schemas.openxmlformats.org/drawingml/2006/main">
               <a:ext uri="{FF2B5EF4-FFF2-40B4-BE49-F238E27FC236}">
-                <a16:creationId xmlns:a16="http://schemas.microsoft.com/office/drawing/2014/main" id="{DE6B14B5-DF71-4FB1-AE65-6833441A341E}"/>
+                <a16:creationId xmlns:a16="http://schemas.microsoft.com/office/drawing/2014/main" id="{18AD9990-FFE5-4CD7-B72F-D1B769D6E419}"/>
               </a:ext>
             </a:extLst>
           </p:cNvPr>
@@ -15503,7 +16435,7 @@
           <p:cNvPr id="90" name="">
             <a:extLst xmlns:a="http://schemas.openxmlformats.org/drawingml/2006/main">
               <a:ext uri="{FF2B5EF4-FFF2-40B4-BE49-F238E27FC236}">
-                <a16:creationId xmlns:a16="http://schemas.microsoft.com/office/drawing/2014/main" id="{AAC5FEDC-5A45-487D-BDC0-598DE2B408C9}"/>
+                <a16:creationId xmlns:a16="http://schemas.microsoft.com/office/drawing/2014/main" id="{355F0843-E307-4053-A2E8-84B8530804DE}"/>
               </a:ext>
             </a:extLst>
           </p:cNvPr>
@@ -15536,7 +16468,7 @@
           <p:cNvPr id="91" name="">
             <a:extLst xmlns:a="http://schemas.openxmlformats.org/drawingml/2006/main">
               <a:ext uri="{FF2B5EF4-FFF2-40B4-BE49-F238E27FC236}">
-                <a16:creationId xmlns:a16="http://schemas.microsoft.com/office/drawing/2014/main" id="{F2E4586C-92F1-48CB-A361-A98F5550B052}"/>
+                <a16:creationId xmlns:a16="http://schemas.microsoft.com/office/drawing/2014/main" id="{65594F95-33BD-43EB-8708-EC75EDF2FA5B}"/>
               </a:ext>
             </a:extLst>
           </p:cNvPr>
@@ -15569,7 +16501,7 @@
           <p:cNvPr id="92" name="">
             <a:extLst xmlns:a="http://schemas.openxmlformats.org/drawingml/2006/main">
               <a:ext uri="{FF2B5EF4-FFF2-40B4-BE49-F238E27FC236}">
-                <a16:creationId xmlns:a16="http://schemas.microsoft.com/office/drawing/2014/main" id="{3766AAC1-6505-4C2D-BF8B-C1600D90E131}"/>
+                <a16:creationId xmlns:a16="http://schemas.microsoft.com/office/drawing/2014/main" id="{A9589ED4-BDAA-4092-9072-AF21BB16EC60}"/>
               </a:ext>
             </a:extLst>
           </p:cNvPr>
@@ -15602,7 +16534,7 @@
           <p:cNvPr id="93" name="">
             <a:extLst xmlns:a="http://schemas.openxmlformats.org/drawingml/2006/main">
               <a:ext uri="{FF2B5EF4-FFF2-40B4-BE49-F238E27FC236}">
-                <a16:creationId xmlns:a16="http://schemas.microsoft.com/office/drawing/2014/main" id="{102ECC4E-1A2A-40BE-A203-96FE09853577}"/>
+                <a16:creationId xmlns:a16="http://schemas.microsoft.com/office/drawing/2014/main" id="{1EAEE65D-FC18-4773-821F-08FB05E5B4E0}"/>
               </a:ext>
             </a:extLst>
           </p:cNvPr>
@@ -15635,7 +16567,7 @@
           <p:cNvPr id="94" name="">
             <a:extLst xmlns:a="http://schemas.openxmlformats.org/drawingml/2006/main">
               <a:ext uri="{FF2B5EF4-FFF2-40B4-BE49-F238E27FC236}">
-                <a16:creationId xmlns:a16="http://schemas.microsoft.com/office/drawing/2014/main" id="{62B357BE-7864-4F08-89AA-C4C638FFD729}"/>
+                <a16:creationId xmlns:a16="http://schemas.microsoft.com/office/drawing/2014/main" id="{D5885E38-D9E8-4103-8F17-3A0C47AE408F}"/>
               </a:ext>
             </a:extLst>
           </p:cNvPr>
@@ -15668,7 +16600,7 @@
           <p:cNvPr id="95" name="">
             <a:extLst xmlns:a="http://schemas.openxmlformats.org/drawingml/2006/main">
               <a:ext uri="{FF2B5EF4-FFF2-40B4-BE49-F238E27FC236}">
-                <a16:creationId xmlns:a16="http://schemas.microsoft.com/office/drawing/2014/main" id="{BD5491BF-098E-4637-98DB-96E7EA693B4C}"/>
+                <a16:creationId xmlns:a16="http://schemas.microsoft.com/office/drawing/2014/main" id="{9915A51C-6718-4EC8-A7E8-041945135BB9}"/>
               </a:ext>
             </a:extLst>
           </p:cNvPr>
@@ -15701,7 +16633,7 @@
           <p:cNvPr id="96" name="">
             <a:extLst xmlns:a="http://schemas.openxmlformats.org/drawingml/2006/main">
               <a:ext uri="{FF2B5EF4-FFF2-40B4-BE49-F238E27FC236}">
-                <a16:creationId xmlns:a16="http://schemas.microsoft.com/office/drawing/2014/main" id="{B0CC723C-FF18-4AD1-9EC9-17AC2E55F0E9}"/>
+                <a16:creationId xmlns:a16="http://schemas.microsoft.com/office/drawing/2014/main" id="{5F02D5FD-CAA8-488D-8464-989F7BD672AB}"/>
               </a:ext>
             </a:extLst>
           </p:cNvPr>
@@ -15734,7 +16666,7 @@
           <p:cNvPr id="97" name="">
             <a:extLst xmlns:a="http://schemas.openxmlformats.org/drawingml/2006/main">
               <a:ext uri="{FF2B5EF4-FFF2-40B4-BE49-F238E27FC236}">
-                <a16:creationId xmlns:a16="http://schemas.microsoft.com/office/drawing/2014/main" id="{A0F4163E-1627-4835-A4FF-E180334D6BE2}"/>
+                <a16:creationId xmlns:a16="http://schemas.microsoft.com/office/drawing/2014/main" id="{DB668728-A191-4659-8BE5-92773FF811AF}"/>
               </a:ext>
             </a:extLst>
           </p:cNvPr>
@@ -15767,7 +16699,7 @@
           <p:cNvPr id="98" name="">
             <a:extLst xmlns:a="http://schemas.openxmlformats.org/drawingml/2006/main">
               <a:ext uri="{FF2B5EF4-FFF2-40B4-BE49-F238E27FC236}">
-                <a16:creationId xmlns:a16="http://schemas.microsoft.com/office/drawing/2014/main" id="{6545A2B8-52BD-4F38-9647-8DFAE6326A63}"/>
+                <a16:creationId xmlns:a16="http://schemas.microsoft.com/office/drawing/2014/main" id="{279B884F-21BA-4A86-9D78-6379BA365019}"/>
               </a:ext>
             </a:extLst>
           </p:cNvPr>
@@ -15800,7 +16732,7 @@
           <p:cNvPr id="99" name="">
             <a:extLst xmlns:a="http://schemas.openxmlformats.org/drawingml/2006/main">
               <a:ext uri="{FF2B5EF4-FFF2-40B4-BE49-F238E27FC236}">
-                <a16:creationId xmlns:a16="http://schemas.microsoft.com/office/drawing/2014/main" id="{4AA52C91-B3A2-4D14-8B1C-FE8947ABDDC3}"/>
+                <a16:creationId xmlns:a16="http://schemas.microsoft.com/office/drawing/2014/main" id="{757500F9-841C-4C26-9197-C985C8754DD6}"/>
               </a:ext>
             </a:extLst>
           </p:cNvPr>
@@ -15833,7 +16765,7 @@
           <p:cNvPr id="100" name="">
             <a:extLst xmlns:a="http://schemas.openxmlformats.org/drawingml/2006/main">
               <a:ext uri="{FF2B5EF4-FFF2-40B4-BE49-F238E27FC236}">
-                <a16:creationId xmlns:a16="http://schemas.microsoft.com/office/drawing/2014/main" id="{24674F4A-BA68-44E3-96C5-CB51D007E909}"/>
+                <a16:creationId xmlns:a16="http://schemas.microsoft.com/office/drawing/2014/main" id="{B6767955-C7CA-41BA-B8CC-CE10A07AAF25}"/>
               </a:ext>
             </a:extLst>
           </p:cNvPr>
@@ -15866,7 +16798,7 @@
           <p:cNvPr id="101" name="">
             <a:extLst xmlns:a="http://schemas.openxmlformats.org/drawingml/2006/main">
               <a:ext uri="{FF2B5EF4-FFF2-40B4-BE49-F238E27FC236}">
-                <a16:creationId xmlns:a16="http://schemas.microsoft.com/office/drawing/2014/main" id="{F48B82BC-C801-4B2E-812E-ACC997F6E6F6}"/>
+                <a16:creationId xmlns:a16="http://schemas.microsoft.com/office/drawing/2014/main" id="{765AC4DB-E0FA-416D-8B4E-29B1F04F9B85}"/>
               </a:ext>
             </a:extLst>
           </p:cNvPr>
@@ -15899,7 +16831,7 @@
           <p:cNvPr id="102" name="">
             <a:extLst xmlns:a="http://schemas.openxmlformats.org/drawingml/2006/main">
               <a:ext uri="{FF2B5EF4-FFF2-40B4-BE49-F238E27FC236}">
-                <a16:creationId xmlns:a16="http://schemas.microsoft.com/office/drawing/2014/main" id="{16AB7F30-D478-4EA3-AA38-11A475F88959}"/>
+                <a16:creationId xmlns:a16="http://schemas.microsoft.com/office/drawing/2014/main" id="{F08815F8-88E9-4E96-89F9-EEDEF84E9B88}"/>
               </a:ext>
             </a:extLst>
           </p:cNvPr>
@@ -15932,7 +16864,7 @@
           <p:cNvPr id="103" name="">
             <a:extLst xmlns:a="http://schemas.openxmlformats.org/drawingml/2006/main">
               <a:ext uri="{FF2B5EF4-FFF2-40B4-BE49-F238E27FC236}">
-                <a16:creationId xmlns:a16="http://schemas.microsoft.com/office/drawing/2014/main" id="{24156EF9-A5CC-401C-A1B5-1EC12A19A817}"/>
+                <a16:creationId xmlns:a16="http://schemas.microsoft.com/office/drawing/2014/main" id="{3BCC94F2-4EA8-41CB-888E-1EF845392DC7}"/>
               </a:ext>
             </a:extLst>
           </p:cNvPr>
@@ -15965,7 +16897,7 @@
           <p:cNvPr id="104" name="">
             <a:extLst xmlns:a="http://schemas.openxmlformats.org/drawingml/2006/main">
               <a:ext uri="{FF2B5EF4-FFF2-40B4-BE49-F238E27FC236}">
-                <a16:creationId xmlns:a16="http://schemas.microsoft.com/office/drawing/2014/main" id="{B7B2C83B-AC49-41E0-8038-90F25E1ACF08}"/>
+                <a16:creationId xmlns:a16="http://schemas.microsoft.com/office/drawing/2014/main" id="{D5D4DBD8-1FE3-44B3-BEA6-2C105C3F4D96}"/>
               </a:ext>
             </a:extLst>
           </p:cNvPr>
@@ -15998,7 +16930,7 @@
           <p:cNvPr id="105" name="">
             <a:extLst xmlns:a="http://schemas.openxmlformats.org/drawingml/2006/main">
               <a:ext uri="{FF2B5EF4-FFF2-40B4-BE49-F238E27FC236}">
-                <a16:creationId xmlns:a16="http://schemas.microsoft.com/office/drawing/2014/main" id="{A3026C3E-6C92-4E3E-998D-F9B20C524F49}"/>
+                <a16:creationId xmlns:a16="http://schemas.microsoft.com/office/drawing/2014/main" id="{934B5DD5-0538-4F0E-83C0-6F4CC83918FF}"/>
               </a:ext>
             </a:extLst>
           </p:cNvPr>
@@ -16031,7 +16963,7 @@
           <p:cNvPr id="106" name="">
             <a:extLst xmlns:a="http://schemas.openxmlformats.org/drawingml/2006/main">
               <a:ext uri="{FF2B5EF4-FFF2-40B4-BE49-F238E27FC236}">
-                <a16:creationId xmlns:a16="http://schemas.microsoft.com/office/drawing/2014/main" id="{2C2229E8-87B3-4742-AF7C-7672AA600FEF}"/>
+                <a16:creationId xmlns:a16="http://schemas.microsoft.com/office/drawing/2014/main" id="{5A72CFBF-5A33-4999-8F3B-ACDE2C53682D}"/>
               </a:ext>
             </a:extLst>
           </p:cNvPr>
@@ -16066,7 +16998,7 @@
           <p:cNvPr id="107" name="">
             <a:extLst xmlns:a="http://schemas.openxmlformats.org/drawingml/2006/main">
               <a:ext uri="{FF2B5EF4-FFF2-40B4-BE49-F238E27FC236}">
-                <a16:creationId xmlns:a16="http://schemas.microsoft.com/office/drawing/2014/main" id="{D370828E-C212-4173-8777-1DCDA0236A9E}"/>
+                <a16:creationId xmlns:a16="http://schemas.microsoft.com/office/drawing/2014/main" id="{D9E8A752-8860-4D3B-892B-48DFCDFF7C77}"/>
               </a:ext>
             </a:extLst>
           </p:cNvPr>
@@ -16099,7 +17031,7 @@
           <p:cNvPr id="108" name="">
             <a:extLst xmlns:a="http://schemas.openxmlformats.org/drawingml/2006/main">
               <a:ext uri="{FF2B5EF4-FFF2-40B4-BE49-F238E27FC236}">
-                <a16:creationId xmlns:a16="http://schemas.microsoft.com/office/drawing/2014/main" id="{BD7214DB-BE18-46D1-A39D-B02EEEE58951}"/>
+                <a16:creationId xmlns:a16="http://schemas.microsoft.com/office/drawing/2014/main" id="{7FF123D9-C3EF-4FB7-B323-9FD47D91F5AD}"/>
               </a:ext>
             </a:extLst>
           </p:cNvPr>
@@ -16132,7 +17064,7 @@
           <p:cNvPr id="109" name="">
             <a:extLst xmlns:a="http://schemas.openxmlformats.org/drawingml/2006/main">
               <a:ext uri="{FF2B5EF4-FFF2-40B4-BE49-F238E27FC236}">
-                <a16:creationId xmlns:a16="http://schemas.microsoft.com/office/drawing/2014/main" id="{A7F5A50D-FE59-4E26-A4DB-9DC09C402D13}"/>
+                <a16:creationId xmlns:a16="http://schemas.microsoft.com/office/drawing/2014/main" id="{B9EEB42B-308F-41F4-B405-E06C3405EE4F}"/>
               </a:ext>
             </a:extLst>
           </p:cNvPr>
@@ -16165,7 +17097,7 @@
           <p:cNvPr id="110" name="">
             <a:extLst xmlns:a="http://schemas.openxmlformats.org/drawingml/2006/main">
               <a:ext uri="{FF2B5EF4-FFF2-40B4-BE49-F238E27FC236}">
-                <a16:creationId xmlns:a16="http://schemas.microsoft.com/office/drawing/2014/main" id="{9D631EE0-BE9D-4369-AAAF-172FD82DE2BC}"/>
+                <a16:creationId xmlns:a16="http://schemas.microsoft.com/office/drawing/2014/main" id="{B1FCD92E-A73A-49F1-8889-9FA7316943A2}"/>
               </a:ext>
             </a:extLst>
           </p:cNvPr>
@@ -16198,7 +17130,7 @@
           <p:cNvPr id="111" name="">
             <a:extLst xmlns:a="http://schemas.openxmlformats.org/drawingml/2006/main">
               <a:ext uri="{FF2B5EF4-FFF2-40B4-BE49-F238E27FC236}">
-                <a16:creationId xmlns:a16="http://schemas.microsoft.com/office/drawing/2014/main" id="{F07BB298-1DCD-4702-B171-4B22E63D6C6F}"/>
+                <a16:creationId xmlns:a16="http://schemas.microsoft.com/office/drawing/2014/main" id="{DAD71E44-E63A-4030-A6D4-9CC9C83B981D}"/>
               </a:ext>
             </a:extLst>
           </p:cNvPr>
@@ -16231,7 +17163,7 @@
           <p:cNvPr id="112" name="">
             <a:extLst xmlns:a="http://schemas.openxmlformats.org/drawingml/2006/main">
               <a:ext uri="{FF2B5EF4-FFF2-40B4-BE49-F238E27FC236}">
-                <a16:creationId xmlns:a16="http://schemas.microsoft.com/office/drawing/2014/main" id="{D38F9B0D-CFBF-406B-BFF7-10690D837A82}"/>
+                <a16:creationId xmlns:a16="http://schemas.microsoft.com/office/drawing/2014/main" id="{03996820-847B-4FE1-9535-81339BB09FFC}"/>
               </a:ext>
             </a:extLst>
           </p:cNvPr>
@@ -16264,7 +17196,7 @@
           <p:cNvPr id="113" name="">
             <a:extLst xmlns:a="http://schemas.openxmlformats.org/drawingml/2006/main">
               <a:ext uri="{FF2B5EF4-FFF2-40B4-BE49-F238E27FC236}">
-                <a16:creationId xmlns:a16="http://schemas.microsoft.com/office/drawing/2014/main" id="{03A63012-54B8-4C29-81D2-71283E191D6A}"/>
+                <a16:creationId xmlns:a16="http://schemas.microsoft.com/office/drawing/2014/main" id="{6022D395-BE17-4BB7-9FAE-2AF435D1B8DF}"/>
               </a:ext>
             </a:extLst>
           </p:cNvPr>
@@ -16297,7 +17229,7 @@
           <p:cNvPr id="114" name="">
             <a:extLst xmlns:a="http://schemas.openxmlformats.org/drawingml/2006/main">
               <a:ext uri="{FF2B5EF4-FFF2-40B4-BE49-F238E27FC236}">
-                <a16:creationId xmlns:a16="http://schemas.microsoft.com/office/drawing/2014/main" id="{ABADD0F8-5FC5-4576-B04B-D0B7CE202D44}"/>
+                <a16:creationId xmlns:a16="http://schemas.microsoft.com/office/drawing/2014/main" id="{D4F3D46D-BB59-4CD8-A0A7-E492416C108B}"/>
               </a:ext>
             </a:extLst>
           </p:cNvPr>
@@ -16330,7 +17262,7 @@
           <p:cNvPr id="115" name="">
             <a:extLst xmlns:a="http://schemas.openxmlformats.org/drawingml/2006/main">
               <a:ext uri="{FF2B5EF4-FFF2-40B4-BE49-F238E27FC236}">
-                <a16:creationId xmlns:a16="http://schemas.microsoft.com/office/drawing/2014/main" id="{B1054D61-5A9F-4FED-8C33-337506403A15}"/>
+                <a16:creationId xmlns:a16="http://schemas.microsoft.com/office/drawing/2014/main" id="{335C5469-57EE-40A0-8A16-659A2C822DC4}"/>
               </a:ext>
             </a:extLst>
           </p:cNvPr>
@@ -16363,7 +17295,7 @@
           <p:cNvPr id="116" name="">
             <a:extLst xmlns:a="http://schemas.openxmlformats.org/drawingml/2006/main">
               <a:ext uri="{FF2B5EF4-FFF2-40B4-BE49-F238E27FC236}">
-                <a16:creationId xmlns:a16="http://schemas.microsoft.com/office/drawing/2014/main" id="{443AE941-CDFB-429F-9656-1BE70DA81D6D}"/>
+                <a16:creationId xmlns:a16="http://schemas.microsoft.com/office/drawing/2014/main" id="{6ED1BCD9-8553-4FAE-A2C9-30D951F85CDF}"/>
               </a:ext>
             </a:extLst>
           </p:cNvPr>
@@ -16396,7 +17328,7 @@
           <p:cNvPr id="117" name="">
             <a:extLst xmlns:a="http://schemas.openxmlformats.org/drawingml/2006/main">
               <a:ext uri="{FF2B5EF4-FFF2-40B4-BE49-F238E27FC236}">
-                <a16:creationId xmlns:a16="http://schemas.microsoft.com/office/drawing/2014/main" id="{0EB88F85-0C78-4558-A587-82CDCD7666BC}"/>
+                <a16:creationId xmlns:a16="http://schemas.microsoft.com/office/drawing/2014/main" id="{43D75BBD-57D8-4B8D-9BE8-C16C82386010}"/>
               </a:ext>
             </a:extLst>
           </p:cNvPr>
@@ -16429,7 +17361,7 @@
           <p:cNvPr id="118" name="">
             <a:extLst xmlns:a="http://schemas.openxmlformats.org/drawingml/2006/main">
               <a:ext uri="{FF2B5EF4-FFF2-40B4-BE49-F238E27FC236}">
-                <a16:creationId xmlns:a16="http://schemas.microsoft.com/office/drawing/2014/main" id="{B17A5A58-2FF0-4C8F-A816-EEEBBBEA7078}"/>
+                <a16:creationId xmlns:a16="http://schemas.microsoft.com/office/drawing/2014/main" id="{E83CB858-7265-4DCF-A886-602079A1E1FA}"/>
               </a:ext>
             </a:extLst>
           </p:cNvPr>
@@ -16462,7 +17394,7 @@
           <p:cNvPr id="119" name="">
             <a:extLst xmlns:a="http://schemas.openxmlformats.org/drawingml/2006/main">
               <a:ext uri="{FF2B5EF4-FFF2-40B4-BE49-F238E27FC236}">
-                <a16:creationId xmlns:a16="http://schemas.microsoft.com/office/drawing/2014/main" id="{30F007ED-FB99-4B4A-A4B2-0406BEE0255C}"/>
+                <a16:creationId xmlns:a16="http://schemas.microsoft.com/office/drawing/2014/main" id="{994D7393-AC02-48FA-9CE4-E74BB1BFC917}"/>
               </a:ext>
             </a:extLst>
           </p:cNvPr>
@@ -16495,7 +17427,7 @@
           <p:cNvPr id="120" name="">
             <a:extLst xmlns:a="http://schemas.openxmlformats.org/drawingml/2006/main">
               <a:ext uri="{FF2B5EF4-FFF2-40B4-BE49-F238E27FC236}">
-                <a16:creationId xmlns:a16="http://schemas.microsoft.com/office/drawing/2014/main" id="{A4EC82B8-7ED8-4005-911D-AED7D00A0EB4}"/>
+                <a16:creationId xmlns:a16="http://schemas.microsoft.com/office/drawing/2014/main" id="{E5A4A5D6-FF0A-4C26-B5A6-B242D2C5FC78}"/>
               </a:ext>
             </a:extLst>
           </p:cNvPr>
@@ -16528,7 +17460,7 @@
           <p:cNvPr id="121" name="">
             <a:extLst xmlns:a="http://schemas.openxmlformats.org/drawingml/2006/main">
               <a:ext uri="{FF2B5EF4-FFF2-40B4-BE49-F238E27FC236}">
-                <a16:creationId xmlns:a16="http://schemas.microsoft.com/office/drawing/2014/main" id="{0C1E8951-AE18-44CA-90DC-655041F2AA97}"/>
+                <a16:creationId xmlns:a16="http://schemas.microsoft.com/office/drawing/2014/main" id="{D6E90D15-1B7B-4702-B060-B2C337E53404}"/>
               </a:ext>
             </a:extLst>
           </p:cNvPr>
@@ -16561,7 +17493,7 @@
           <p:cNvPr id="122" name="">
             <a:extLst xmlns:a="http://schemas.openxmlformats.org/drawingml/2006/main">
               <a:ext uri="{FF2B5EF4-FFF2-40B4-BE49-F238E27FC236}">
-                <a16:creationId xmlns:a16="http://schemas.microsoft.com/office/drawing/2014/main" id="{36AA27DF-539C-44C6-9E8B-2F6E33126CA0}"/>
+                <a16:creationId xmlns:a16="http://schemas.microsoft.com/office/drawing/2014/main" id="{19B7B827-A820-4AF6-B106-B3569842A7DD}"/>
               </a:ext>
             </a:extLst>
           </p:cNvPr>
@@ -16594,7 +17526,7 @@
           <p:cNvPr id="123" name="">
             <a:extLst xmlns:a="http://schemas.openxmlformats.org/drawingml/2006/main">
               <a:ext uri="{FF2B5EF4-FFF2-40B4-BE49-F238E27FC236}">
-                <a16:creationId xmlns:a16="http://schemas.microsoft.com/office/drawing/2014/main" id="{52F05274-F4FE-4823-B0AD-B3F4BF8D613C}"/>
+                <a16:creationId xmlns:a16="http://schemas.microsoft.com/office/drawing/2014/main" id="{1138B243-7988-4E87-8872-B17BBDD072AE}"/>
               </a:ext>
             </a:extLst>
           </p:cNvPr>
@@ -16627,7 +17559,7 @@
           <p:cNvPr id="124" name="">
             <a:extLst xmlns:a="http://schemas.openxmlformats.org/drawingml/2006/main">
               <a:ext uri="{FF2B5EF4-FFF2-40B4-BE49-F238E27FC236}">
-                <a16:creationId xmlns:a16="http://schemas.microsoft.com/office/drawing/2014/main" id="{D8291862-CA2B-4FAA-B320-004E6E4EE2E3}"/>
+                <a16:creationId xmlns:a16="http://schemas.microsoft.com/office/drawing/2014/main" id="{B4192CF0-06E2-44D6-8CC5-01EB70A6935A}"/>
               </a:ext>
             </a:extLst>
           </p:cNvPr>
@@ -16660,7 +17592,7 @@
           <p:cNvPr id="125" name="">
             <a:extLst xmlns:a="http://schemas.openxmlformats.org/drawingml/2006/main">
               <a:ext uri="{FF2B5EF4-FFF2-40B4-BE49-F238E27FC236}">
-                <a16:creationId xmlns:a16="http://schemas.microsoft.com/office/drawing/2014/main" id="{42131528-ABE0-4D91-98E9-570FE915DE4B}"/>
+                <a16:creationId xmlns:a16="http://schemas.microsoft.com/office/drawing/2014/main" id="{F2B6E78C-07AE-4C60-9783-67BEADB6240D}"/>
               </a:ext>
             </a:extLst>
           </p:cNvPr>
@@ -16693,7 +17625,7 @@
           <p:cNvPr id="126" name="">
             <a:extLst xmlns:a="http://schemas.openxmlformats.org/drawingml/2006/main">
               <a:ext uri="{FF2B5EF4-FFF2-40B4-BE49-F238E27FC236}">
-                <a16:creationId xmlns:a16="http://schemas.microsoft.com/office/drawing/2014/main" id="{72706FA6-9F7F-4D0E-9361-8A4801D2D4F1}"/>
+                <a16:creationId xmlns:a16="http://schemas.microsoft.com/office/drawing/2014/main" id="{44FDD4D8-D19B-4E67-A7D2-16A993BCFA2B}"/>
               </a:ext>
             </a:extLst>
           </p:cNvPr>
@@ -16726,7 +17658,7 @@
           <p:cNvPr id="127" name="">
             <a:extLst xmlns:a="http://schemas.openxmlformats.org/drawingml/2006/main">
               <a:ext uri="{FF2B5EF4-FFF2-40B4-BE49-F238E27FC236}">
-                <a16:creationId xmlns:a16="http://schemas.microsoft.com/office/drawing/2014/main" id="{8C006997-D226-4F89-AFC5-CF197653685B}"/>
+                <a16:creationId xmlns:a16="http://schemas.microsoft.com/office/drawing/2014/main" id="{756CED44-1940-4546-A9B8-063AFF2E7101}"/>
               </a:ext>
             </a:extLst>
           </p:cNvPr>
@@ -16759,7 +17691,7 @@
           <p:cNvPr id="128" name="">
             <a:extLst xmlns:a="http://schemas.openxmlformats.org/drawingml/2006/main">
               <a:ext uri="{FF2B5EF4-FFF2-40B4-BE49-F238E27FC236}">
-                <a16:creationId xmlns:a16="http://schemas.microsoft.com/office/drawing/2014/main" id="{25B445E1-22A2-481E-BA6C-92795CDC4BEA}"/>
+                <a16:creationId xmlns:a16="http://schemas.microsoft.com/office/drawing/2014/main" id="{794E3029-78A2-43B3-85EE-7DD99E7064D9}"/>
               </a:ext>
             </a:extLst>
           </p:cNvPr>
@@ -16792,7 +17724,7 @@
           <p:cNvPr id="129" name="">
             <a:extLst xmlns:a="http://schemas.openxmlformats.org/drawingml/2006/main">
               <a:ext uri="{FF2B5EF4-FFF2-40B4-BE49-F238E27FC236}">
-                <a16:creationId xmlns:a16="http://schemas.microsoft.com/office/drawing/2014/main" id="{62CC9FC1-E03A-44BB-821D-4AE32869C605}"/>
+                <a16:creationId xmlns:a16="http://schemas.microsoft.com/office/drawing/2014/main" id="{1816CFB6-74BE-45F2-8015-F735897D920A}"/>
               </a:ext>
             </a:extLst>
           </p:cNvPr>
@@ -16825,7 +17757,7 @@
           <p:cNvPr id="130" name="">
             <a:extLst xmlns:a="http://schemas.openxmlformats.org/drawingml/2006/main">
               <a:ext uri="{FF2B5EF4-FFF2-40B4-BE49-F238E27FC236}">
-                <a16:creationId xmlns:a16="http://schemas.microsoft.com/office/drawing/2014/main" id="{DBA62DDA-C91D-40C8-8A19-45B7CF7E3F49}"/>
+                <a16:creationId xmlns:a16="http://schemas.microsoft.com/office/drawing/2014/main" id="{1FD291A9-5C7C-4CE4-96B4-60E60955C1D1}"/>
               </a:ext>
             </a:extLst>
           </p:cNvPr>
@@ -16858,7 +17790,7 @@
           <p:cNvPr id="131" name="">
             <a:extLst xmlns:a="http://schemas.openxmlformats.org/drawingml/2006/main">
               <a:ext uri="{FF2B5EF4-FFF2-40B4-BE49-F238E27FC236}">
-                <a16:creationId xmlns:a16="http://schemas.microsoft.com/office/drawing/2014/main" id="{396F2202-CE12-49B9-8812-A921C164FF6C}"/>
+                <a16:creationId xmlns:a16="http://schemas.microsoft.com/office/drawing/2014/main" id="{000E72EF-CC76-451E-A0D5-19E038BC572E}"/>
               </a:ext>
             </a:extLst>
           </p:cNvPr>
@@ -16891,7 +17823,7 @@
           <p:cNvPr id="132" name="">
             <a:extLst xmlns:a="http://schemas.openxmlformats.org/drawingml/2006/main">
               <a:ext uri="{FF2B5EF4-FFF2-40B4-BE49-F238E27FC236}">
-                <a16:creationId xmlns:a16="http://schemas.microsoft.com/office/drawing/2014/main" id="{AC1A4983-CE19-4F06-83C1-E0DF7621EB69}"/>
+                <a16:creationId xmlns:a16="http://schemas.microsoft.com/office/drawing/2014/main" id="{FA0436D0-F4EE-429A-AC3F-AA3E91EAB0D1}"/>
               </a:ext>
             </a:extLst>
           </p:cNvPr>
@@ -16924,7 +17856,7 @@
           <p:cNvPr id="133" name="">
             <a:extLst xmlns:a="http://schemas.openxmlformats.org/drawingml/2006/main">
               <a:ext uri="{FF2B5EF4-FFF2-40B4-BE49-F238E27FC236}">
-                <a16:creationId xmlns:a16="http://schemas.microsoft.com/office/drawing/2014/main" id="{656DA071-6E86-43DC-A602-BAD332832127}"/>
+                <a16:creationId xmlns:a16="http://schemas.microsoft.com/office/drawing/2014/main" id="{B7B75C12-6DF4-4FA9-898F-4905A6015ABE}"/>
               </a:ext>
             </a:extLst>
           </p:cNvPr>
@@ -16957,7 +17889,7 @@
           <p:cNvPr id="134" name="">
             <a:extLst xmlns:a="http://schemas.openxmlformats.org/drawingml/2006/main">
               <a:ext uri="{FF2B5EF4-FFF2-40B4-BE49-F238E27FC236}">
-                <a16:creationId xmlns:a16="http://schemas.microsoft.com/office/drawing/2014/main" id="{46DCC9FA-77D7-40DF-92A4-34B4342CD077}"/>
+                <a16:creationId xmlns:a16="http://schemas.microsoft.com/office/drawing/2014/main" id="{FA02AA77-123C-45CC-8F71-AC5E08F3077D}"/>
               </a:ext>
             </a:extLst>
           </p:cNvPr>
@@ -16990,7 +17922,7 @@
           <p:cNvPr id="135" name="">
             <a:extLst xmlns:a="http://schemas.openxmlformats.org/drawingml/2006/main">
               <a:ext uri="{FF2B5EF4-FFF2-40B4-BE49-F238E27FC236}">
-                <a16:creationId xmlns:a16="http://schemas.microsoft.com/office/drawing/2014/main" id="{C4DBFFCF-BDA6-4BD8-B94C-0BADF40E9E10}"/>
+                <a16:creationId xmlns:a16="http://schemas.microsoft.com/office/drawing/2014/main" id="{F0B0F728-D5C7-40C6-B86D-1E617F00FAAE}"/>
               </a:ext>
             </a:extLst>
           </p:cNvPr>
@@ -17023,7 +17955,7 @@
           <p:cNvPr id="136" name="">
             <a:extLst xmlns:a="http://schemas.openxmlformats.org/drawingml/2006/main">
               <a:ext uri="{FF2B5EF4-FFF2-40B4-BE49-F238E27FC236}">
-                <a16:creationId xmlns:a16="http://schemas.microsoft.com/office/drawing/2014/main" id="{C2548193-CD83-4320-AC3A-B8C4BD344476}"/>
+                <a16:creationId xmlns:a16="http://schemas.microsoft.com/office/drawing/2014/main" id="{BFB9EC70-FF8E-43F8-9797-7F0BD40F956E}"/>
               </a:ext>
             </a:extLst>
           </p:cNvPr>
@@ -17056,7 +17988,7 @@
           <p:cNvPr id="137" name="">
             <a:extLst xmlns:a="http://schemas.openxmlformats.org/drawingml/2006/main">
               <a:ext uri="{FF2B5EF4-FFF2-40B4-BE49-F238E27FC236}">
-                <a16:creationId xmlns:a16="http://schemas.microsoft.com/office/drawing/2014/main" id="{3139F7D6-975C-4167-9AB7-135FE1F51CC0}"/>
+                <a16:creationId xmlns:a16="http://schemas.microsoft.com/office/drawing/2014/main" id="{E0C6931B-20F4-4F43-A498-12E18C805391}"/>
               </a:ext>
             </a:extLst>
           </p:cNvPr>
@@ -17089,7 +18021,7 @@
           <p:cNvPr id="138" name="">
             <a:extLst xmlns:a="http://schemas.openxmlformats.org/drawingml/2006/main">
               <a:ext uri="{FF2B5EF4-FFF2-40B4-BE49-F238E27FC236}">
-                <a16:creationId xmlns:a16="http://schemas.microsoft.com/office/drawing/2014/main" id="{B1B3F653-B7D6-4F70-A932-8BCE8F77552E}"/>
+                <a16:creationId xmlns:a16="http://schemas.microsoft.com/office/drawing/2014/main" id="{17E060E7-953B-4203-8F80-A29EA46D0B68}"/>
               </a:ext>
             </a:extLst>
           </p:cNvPr>
@@ -17122,7 +18054,7 @@
           <p:cNvPr id="139" name="">
             <a:extLst xmlns:a="http://schemas.openxmlformats.org/drawingml/2006/main">
               <a:ext uri="{FF2B5EF4-FFF2-40B4-BE49-F238E27FC236}">
-                <a16:creationId xmlns:a16="http://schemas.microsoft.com/office/drawing/2014/main" id="{D9CB2FCB-D728-43B7-8903-8761813EA1C8}"/>
+                <a16:creationId xmlns:a16="http://schemas.microsoft.com/office/drawing/2014/main" id="{9C402754-2343-4D1F-92A4-9A447407B61A}"/>
               </a:ext>
             </a:extLst>
           </p:cNvPr>
@@ -17155,7 +18087,7 @@
           <p:cNvPr id="140" name="">
             <a:extLst xmlns:a="http://schemas.openxmlformats.org/drawingml/2006/main">
               <a:ext uri="{FF2B5EF4-FFF2-40B4-BE49-F238E27FC236}">
-                <a16:creationId xmlns:a16="http://schemas.microsoft.com/office/drawing/2014/main" id="{73D34361-51C7-46C2-BAC4-12A848B70305}"/>
+                <a16:creationId xmlns:a16="http://schemas.microsoft.com/office/drawing/2014/main" id="{1034E3CC-BD83-4B3F-9C46-9CA11855EF39}"/>
               </a:ext>
             </a:extLst>
           </p:cNvPr>
@@ -17188,7 +18120,7 @@
           <p:cNvPr id="141" name="">
             <a:extLst xmlns:a="http://schemas.openxmlformats.org/drawingml/2006/main">
               <a:ext uri="{FF2B5EF4-FFF2-40B4-BE49-F238E27FC236}">
-                <a16:creationId xmlns:a16="http://schemas.microsoft.com/office/drawing/2014/main" id="{BA848FC9-B2BE-46E8-A63B-5C2B9373A5AB}"/>
+                <a16:creationId xmlns:a16="http://schemas.microsoft.com/office/drawing/2014/main" id="{A88BA22D-5906-4D7E-9102-703564DADEB7}"/>
               </a:ext>
             </a:extLst>
           </p:cNvPr>
@@ -17221,7 +18153,7 @@
           <p:cNvPr id="142" name="">
             <a:extLst xmlns:a="http://schemas.openxmlformats.org/drawingml/2006/main">
               <a:ext uri="{FF2B5EF4-FFF2-40B4-BE49-F238E27FC236}">
-                <a16:creationId xmlns:a16="http://schemas.microsoft.com/office/drawing/2014/main" id="{31D60B72-1130-49F0-A8CE-3415638242B0}"/>
+                <a16:creationId xmlns:a16="http://schemas.microsoft.com/office/drawing/2014/main" id="{8FC82422-279C-4E32-9C27-1E3EEA2D7063}"/>
               </a:ext>
             </a:extLst>
           </p:cNvPr>
@@ -17254,7 +18186,7 @@
           <p:cNvPr id="143" name="">
             <a:extLst xmlns:a="http://schemas.openxmlformats.org/drawingml/2006/main">
               <a:ext uri="{FF2B5EF4-FFF2-40B4-BE49-F238E27FC236}">
-                <a16:creationId xmlns:a16="http://schemas.microsoft.com/office/drawing/2014/main" id="{9A8730FA-5EE9-446A-9088-0BDBB359344F}"/>
+                <a16:creationId xmlns:a16="http://schemas.microsoft.com/office/drawing/2014/main" id="{F3AA94CA-FDA7-4109-B915-E275A18521DE}"/>
               </a:ext>
             </a:extLst>
           </p:cNvPr>
@@ -17287,7 +18219,7 @@
           <p:cNvPr id="144" name="">
             <a:extLst xmlns:a="http://schemas.openxmlformats.org/drawingml/2006/main">
               <a:ext uri="{FF2B5EF4-FFF2-40B4-BE49-F238E27FC236}">
-                <a16:creationId xmlns:a16="http://schemas.microsoft.com/office/drawing/2014/main" id="{F73F5DAB-94CC-4C3B-8F7E-308153932A06}"/>
+                <a16:creationId xmlns:a16="http://schemas.microsoft.com/office/drawing/2014/main" id="{EA2CDA02-7973-4310-B215-D040980FE5CF}"/>
               </a:ext>
             </a:extLst>
           </p:cNvPr>
@@ -17320,7 +18252,7 @@
           <p:cNvPr id="145" name="">
             <a:extLst xmlns:a="http://schemas.openxmlformats.org/drawingml/2006/main">
               <a:ext uri="{FF2B5EF4-FFF2-40B4-BE49-F238E27FC236}">
-                <a16:creationId xmlns:a16="http://schemas.microsoft.com/office/drawing/2014/main" id="{AF7E38C0-8625-4CA4-9088-25F7F2605146}"/>
+                <a16:creationId xmlns:a16="http://schemas.microsoft.com/office/drawing/2014/main" id="{CB7FE9D7-CEAB-4896-8C2F-2BE86CC62CEF}"/>
               </a:ext>
             </a:extLst>
           </p:cNvPr>
@@ -17353,7 +18285,7 @@
           <p:cNvPr id="146" name="">
             <a:extLst xmlns:a="http://schemas.openxmlformats.org/drawingml/2006/main">
               <a:ext uri="{FF2B5EF4-FFF2-40B4-BE49-F238E27FC236}">
-                <a16:creationId xmlns:a16="http://schemas.microsoft.com/office/drawing/2014/main" id="{4360D492-92A9-45F4-89EA-C99FAB176168}"/>
+                <a16:creationId xmlns:a16="http://schemas.microsoft.com/office/drawing/2014/main" id="{C0786F91-4F4F-4E15-9573-C25BD1D75B20}"/>
               </a:ext>
             </a:extLst>
           </p:cNvPr>
@@ -17386,7 +18318,7 @@
           <p:cNvPr id="147" name="">
             <a:extLst xmlns:a="http://schemas.openxmlformats.org/drawingml/2006/main">
               <a:ext uri="{FF2B5EF4-FFF2-40B4-BE49-F238E27FC236}">
-                <a16:creationId xmlns:a16="http://schemas.microsoft.com/office/drawing/2014/main" id="{9C330F2F-AC47-4C10-839B-6FF7B655CE11}"/>
+                <a16:creationId xmlns:a16="http://schemas.microsoft.com/office/drawing/2014/main" id="{9175A5C3-55DF-4811-A4BE-70B027CBC372}"/>
               </a:ext>
             </a:extLst>
           </p:cNvPr>
@@ -17419,7 +18351,7 @@
           <p:cNvPr id="148" name="">
             <a:extLst xmlns:a="http://schemas.openxmlformats.org/drawingml/2006/main">
               <a:ext uri="{FF2B5EF4-FFF2-40B4-BE49-F238E27FC236}">
-                <a16:creationId xmlns:a16="http://schemas.microsoft.com/office/drawing/2014/main" id="{C7A8D7A5-EB4E-4B60-B513-BB5997A5F5C6}"/>
+                <a16:creationId xmlns:a16="http://schemas.microsoft.com/office/drawing/2014/main" id="{07D29E6A-4510-4018-9904-7ACF5805AF04}"/>
               </a:ext>
             </a:extLst>
           </p:cNvPr>
@@ -17452,7 +18384,7 @@
           <p:cNvPr id="149" name="">
             <a:extLst xmlns:a="http://schemas.openxmlformats.org/drawingml/2006/main">
               <a:ext uri="{FF2B5EF4-FFF2-40B4-BE49-F238E27FC236}">
-                <a16:creationId xmlns:a16="http://schemas.microsoft.com/office/drawing/2014/main" id="{BD99653D-7C7D-45E1-9A0D-71A658C95A42}"/>
+                <a16:creationId xmlns:a16="http://schemas.microsoft.com/office/drawing/2014/main" id="{95548BB4-AA4F-44F8-BBF4-A5F11D133BFB}"/>
               </a:ext>
             </a:extLst>
           </p:cNvPr>
@@ -17485,7 +18417,7 @@
           <p:cNvPr id="150" name="">
             <a:extLst xmlns:a="http://schemas.openxmlformats.org/drawingml/2006/main">
               <a:ext uri="{FF2B5EF4-FFF2-40B4-BE49-F238E27FC236}">
-                <a16:creationId xmlns:a16="http://schemas.microsoft.com/office/drawing/2014/main" id="{83FA9099-4D0C-4D6A-B286-C4EC7D66EAD6}"/>
+                <a16:creationId xmlns:a16="http://schemas.microsoft.com/office/drawing/2014/main" id="{E1812236-29EA-4E09-8BC7-F4B6F01E4AC9}"/>
               </a:ext>
             </a:extLst>
           </p:cNvPr>
@@ -17518,7 +18450,7 @@
           <p:cNvPr id="151" name="">
             <a:extLst xmlns:a="http://schemas.openxmlformats.org/drawingml/2006/main">
               <a:ext uri="{FF2B5EF4-FFF2-40B4-BE49-F238E27FC236}">
-                <a16:creationId xmlns:a16="http://schemas.microsoft.com/office/drawing/2014/main" id="{F0B1E54B-940C-4DA4-A646-1A79DDC2FBB2}"/>
+                <a16:creationId xmlns:a16="http://schemas.microsoft.com/office/drawing/2014/main" id="{301C65DD-538B-4ECB-92C4-B30EED61B591}"/>
               </a:ext>
             </a:extLst>
           </p:cNvPr>
@@ -17551,7 +18483,7 @@
           <p:cNvPr id="152" name="">
             <a:extLst xmlns:a="http://schemas.openxmlformats.org/drawingml/2006/main">
               <a:ext uri="{FF2B5EF4-FFF2-40B4-BE49-F238E27FC236}">
-                <a16:creationId xmlns:a16="http://schemas.microsoft.com/office/drawing/2014/main" id="{8D922F3D-434E-46A0-9680-8165D2C2130A}"/>
+                <a16:creationId xmlns:a16="http://schemas.microsoft.com/office/drawing/2014/main" id="{7683D970-0025-4C18-8845-45655170E0D7}"/>
               </a:ext>
             </a:extLst>
           </p:cNvPr>
@@ -17584,7 +18516,7 @@
           <p:cNvPr id="153" name="">
             <a:extLst xmlns:a="http://schemas.openxmlformats.org/drawingml/2006/main">
               <a:ext uri="{FF2B5EF4-FFF2-40B4-BE49-F238E27FC236}">
-                <a16:creationId xmlns:a16="http://schemas.microsoft.com/office/drawing/2014/main" id="{4C70EB68-B9F8-495E-8B48-C0EBF8AA01D9}"/>
+                <a16:creationId xmlns:a16="http://schemas.microsoft.com/office/drawing/2014/main" id="{8E0E739F-1671-47AC-8EE3-3FB2721B94AD}"/>
               </a:ext>
             </a:extLst>
           </p:cNvPr>
@@ -17617,7 +18549,7 @@
           <p:cNvPr id="154" name="">
             <a:extLst xmlns:a="http://schemas.openxmlformats.org/drawingml/2006/main">
               <a:ext uri="{FF2B5EF4-FFF2-40B4-BE49-F238E27FC236}">
-                <a16:creationId xmlns:a16="http://schemas.microsoft.com/office/drawing/2014/main" id="{1DFA507D-D35A-43FD-AEDE-5CB8E542DC45}"/>
+                <a16:creationId xmlns:a16="http://schemas.microsoft.com/office/drawing/2014/main" id="{3C08A3C2-67E6-45E1-A6C4-0DEEEAE9B150}"/>
               </a:ext>
             </a:extLst>
           </p:cNvPr>
@@ -17650,7 +18582,7 @@
           <p:cNvPr id="155" name="">
             <a:extLst xmlns:a="http://schemas.openxmlformats.org/drawingml/2006/main">
               <a:ext uri="{FF2B5EF4-FFF2-40B4-BE49-F238E27FC236}">
-                <a16:creationId xmlns:a16="http://schemas.microsoft.com/office/drawing/2014/main" id="{B21AE337-319B-4826-B95C-7B25A8678BAA}"/>
+                <a16:creationId xmlns:a16="http://schemas.microsoft.com/office/drawing/2014/main" id="{6BBDE409-B49C-41CA-AB60-F9E69C93086D}"/>
               </a:ext>
             </a:extLst>
           </p:cNvPr>
@@ -17683,7 +18615,7 @@
           <p:cNvPr id="156" name="">
             <a:extLst xmlns:a="http://schemas.openxmlformats.org/drawingml/2006/main">
               <a:ext uri="{FF2B5EF4-FFF2-40B4-BE49-F238E27FC236}">
-                <a16:creationId xmlns:a16="http://schemas.microsoft.com/office/drawing/2014/main" id="{0854CC5E-5928-470D-91E7-B46CFAE53269}"/>
+                <a16:creationId xmlns:a16="http://schemas.microsoft.com/office/drawing/2014/main" id="{6BFB7D4E-CE4A-41BD-8572-800A26FAAD97}"/>
               </a:ext>
             </a:extLst>
           </p:cNvPr>
@@ -17716,7 +18648,7 @@
           <p:cNvPr id="157" name="">
             <a:extLst xmlns:a="http://schemas.openxmlformats.org/drawingml/2006/main">
               <a:ext uri="{FF2B5EF4-FFF2-40B4-BE49-F238E27FC236}">
-                <a16:creationId xmlns:a16="http://schemas.microsoft.com/office/drawing/2014/main" id="{057DF081-930A-4E54-92CC-495054B90EE5}"/>
+                <a16:creationId xmlns:a16="http://schemas.microsoft.com/office/drawing/2014/main" id="{DAE2DF93-BF6E-4C05-A0E1-0550BA90EAD5}"/>
               </a:ext>
             </a:extLst>
           </p:cNvPr>
@@ -17749,7 +18681,7 @@
           <p:cNvPr id="158" name="">
             <a:extLst xmlns:a="http://schemas.openxmlformats.org/drawingml/2006/main">
               <a:ext uri="{FF2B5EF4-FFF2-40B4-BE49-F238E27FC236}">
-                <a16:creationId xmlns:a16="http://schemas.microsoft.com/office/drawing/2014/main" id="{61CA33AA-B0FF-4254-AE9C-4384F819EDB8}"/>
+                <a16:creationId xmlns:a16="http://schemas.microsoft.com/office/drawing/2014/main" id="{73FB5086-C3AC-43DF-85EA-7FAF7FB85732}"/>
               </a:ext>
             </a:extLst>
           </p:cNvPr>
@@ -17782,7 +18714,7 @@
           <p:cNvPr id="159" name="">
             <a:extLst xmlns:a="http://schemas.openxmlformats.org/drawingml/2006/main">
               <a:ext uri="{FF2B5EF4-FFF2-40B4-BE49-F238E27FC236}">
-                <a16:creationId xmlns:a16="http://schemas.microsoft.com/office/drawing/2014/main" id="{991E0630-3D40-413D-819C-0B5D7A9A2DDB}"/>
+                <a16:creationId xmlns:a16="http://schemas.microsoft.com/office/drawing/2014/main" id="{80B3DBBB-29A9-4BCD-AEFB-E33B4A2FCEA6}"/>
               </a:ext>
             </a:extLst>
           </p:cNvPr>
@@ -17815,7 +18747,7 @@
           <p:cNvPr id="160" name="">
             <a:extLst xmlns:a="http://schemas.openxmlformats.org/drawingml/2006/main">
               <a:ext uri="{FF2B5EF4-FFF2-40B4-BE49-F238E27FC236}">
-                <a16:creationId xmlns:a16="http://schemas.microsoft.com/office/drawing/2014/main" id="{1C2AEA2F-B318-4E98-A07F-26AABB525249}"/>
+                <a16:creationId xmlns:a16="http://schemas.microsoft.com/office/drawing/2014/main" id="{0C8AA718-4F02-48A6-8B15-EDDAAE68CA47}"/>
               </a:ext>
             </a:extLst>
           </p:cNvPr>
@@ -17848,7 +18780,7 @@
           <p:cNvPr id="161" name="">
             <a:extLst xmlns:a="http://schemas.openxmlformats.org/drawingml/2006/main">
               <a:ext uri="{FF2B5EF4-FFF2-40B4-BE49-F238E27FC236}">
-                <a16:creationId xmlns:a16="http://schemas.microsoft.com/office/drawing/2014/main" id="{354E316B-FD67-4962-8ADF-59783D72A942}"/>
+                <a16:creationId xmlns:a16="http://schemas.microsoft.com/office/drawing/2014/main" id="{298F7676-5D88-4C8B-815F-1AEE7910AA71}"/>
               </a:ext>
             </a:extLst>
           </p:cNvPr>
@@ -17881,7 +18813,7 @@
           <p:cNvPr id="162" name="">
             <a:extLst xmlns:a="http://schemas.openxmlformats.org/drawingml/2006/main">
               <a:ext uri="{FF2B5EF4-FFF2-40B4-BE49-F238E27FC236}">
-                <a16:creationId xmlns:a16="http://schemas.microsoft.com/office/drawing/2014/main" id="{810463F7-D4BE-4554-9DCC-96F5D808A42C}"/>
+                <a16:creationId xmlns:a16="http://schemas.microsoft.com/office/drawing/2014/main" id="{14B6C983-07F6-45F7-AC53-F07FC6BD85D3}"/>
               </a:ext>
             </a:extLst>
           </p:cNvPr>
@@ -17914,7 +18846,7 @@
           <p:cNvPr id="163" name="">
             <a:extLst xmlns:a="http://schemas.openxmlformats.org/drawingml/2006/main">
               <a:ext uri="{FF2B5EF4-FFF2-40B4-BE49-F238E27FC236}">
-                <a16:creationId xmlns:a16="http://schemas.microsoft.com/office/drawing/2014/main" id="{C1D2A707-1213-4DBD-8F26-30ED40724C42}"/>
+                <a16:creationId xmlns:a16="http://schemas.microsoft.com/office/drawing/2014/main" id="{77A583C7-4D73-4174-BCFF-A63872B75AEF}"/>
               </a:ext>
             </a:extLst>
           </p:cNvPr>
@@ -17947,7 +18879,7 @@
           <p:cNvPr id="164" name="">
             <a:extLst xmlns:a="http://schemas.openxmlformats.org/drawingml/2006/main">
               <a:ext uri="{FF2B5EF4-FFF2-40B4-BE49-F238E27FC236}">
-                <a16:creationId xmlns:a16="http://schemas.microsoft.com/office/drawing/2014/main" id="{3246BA40-E095-4346-9F32-30BCFF921053}"/>
+                <a16:creationId xmlns:a16="http://schemas.microsoft.com/office/drawing/2014/main" id="{209543E8-2CF9-4FFD-8BE5-583359FDA491}"/>
               </a:ext>
             </a:extLst>
           </p:cNvPr>
@@ -17980,7 +18912,7 @@
           <p:cNvPr id="165" name="">
             <a:extLst xmlns:a="http://schemas.openxmlformats.org/drawingml/2006/main">
               <a:ext uri="{FF2B5EF4-FFF2-40B4-BE49-F238E27FC236}">
-                <a16:creationId xmlns:a16="http://schemas.microsoft.com/office/drawing/2014/main" id="{DE1C85E4-D843-40B2-8E67-7A2DF30C6ED3}"/>
+                <a16:creationId xmlns:a16="http://schemas.microsoft.com/office/drawing/2014/main" id="{FC38DF1B-EF5F-4B47-9B97-C633AF6821F5}"/>
               </a:ext>
             </a:extLst>
           </p:cNvPr>
@@ -18013,7 +18945,7 @@
           <p:cNvPr id="166" name="">
             <a:extLst xmlns:a="http://schemas.openxmlformats.org/drawingml/2006/main">
               <a:ext uri="{FF2B5EF4-FFF2-40B4-BE49-F238E27FC236}">
-                <a16:creationId xmlns:a16="http://schemas.microsoft.com/office/drawing/2014/main" id="{2A88ADB3-0E67-4904-87CB-8C47C2C877DA}"/>
+                <a16:creationId xmlns:a16="http://schemas.microsoft.com/office/drawing/2014/main" id="{24390A56-7369-4915-A14E-4F307C6C9CB9}"/>
               </a:ext>
             </a:extLst>
           </p:cNvPr>
@@ -18046,7 +18978,7 @@
           <p:cNvPr id="167" name="">
             <a:extLst xmlns:a="http://schemas.openxmlformats.org/drawingml/2006/main">
               <a:ext uri="{FF2B5EF4-FFF2-40B4-BE49-F238E27FC236}">
-                <a16:creationId xmlns:a16="http://schemas.microsoft.com/office/drawing/2014/main" id="{C9812BF1-CF10-47B8-8843-B78EEECAB4D1}"/>
+                <a16:creationId xmlns:a16="http://schemas.microsoft.com/office/drawing/2014/main" id="{CC17AAEC-3C28-4871-80F1-19EC7CF03D14}"/>
               </a:ext>
             </a:extLst>
           </p:cNvPr>
@@ -18079,7 +19011,7 @@
           <p:cNvPr id="168" name="">
             <a:extLst xmlns:a="http://schemas.openxmlformats.org/drawingml/2006/main">
               <a:ext uri="{FF2B5EF4-FFF2-40B4-BE49-F238E27FC236}">
-                <a16:creationId xmlns:a16="http://schemas.microsoft.com/office/drawing/2014/main" id="{D407E94D-B70A-47CF-9B2E-D895067157EC}"/>
+                <a16:creationId xmlns:a16="http://schemas.microsoft.com/office/drawing/2014/main" id="{FD393C52-E55B-4B05-9306-B07EC069836D}"/>
               </a:ext>
             </a:extLst>
           </p:cNvPr>
@@ -18112,7 +19044,7 @@
           <p:cNvPr id="169" name="">
             <a:extLst xmlns:a="http://schemas.openxmlformats.org/drawingml/2006/main">
               <a:ext uri="{FF2B5EF4-FFF2-40B4-BE49-F238E27FC236}">
-                <a16:creationId xmlns:a16="http://schemas.microsoft.com/office/drawing/2014/main" id="{457ACF39-069D-404A-90DC-44A28BD6F950}"/>
+                <a16:creationId xmlns:a16="http://schemas.microsoft.com/office/drawing/2014/main" id="{A9879721-BFF8-402D-8356-A6F76294CC01}"/>
               </a:ext>
             </a:extLst>
           </p:cNvPr>
@@ -18145,7 +19077,7 @@
           <p:cNvPr id="170" name="">
             <a:extLst xmlns:a="http://schemas.openxmlformats.org/drawingml/2006/main">
               <a:ext uri="{FF2B5EF4-FFF2-40B4-BE49-F238E27FC236}">
-                <a16:creationId xmlns:a16="http://schemas.microsoft.com/office/drawing/2014/main" id="{82EE31BD-D1DE-40A9-8F06-0882657EC082}"/>
+                <a16:creationId xmlns:a16="http://schemas.microsoft.com/office/drawing/2014/main" id="{DBCA65AE-08A2-4607-B8D8-7A6018CB8A19}"/>
               </a:ext>
             </a:extLst>
           </p:cNvPr>
@@ -18178,7 +19110,7 @@
           <p:cNvPr id="171" name="">
             <a:extLst xmlns:a="http://schemas.openxmlformats.org/drawingml/2006/main">
               <a:ext uri="{FF2B5EF4-FFF2-40B4-BE49-F238E27FC236}">
-                <a16:creationId xmlns:a16="http://schemas.microsoft.com/office/drawing/2014/main" id="{A545869A-1009-4947-9B6F-D9B60E2D6404}"/>
+                <a16:creationId xmlns:a16="http://schemas.microsoft.com/office/drawing/2014/main" id="{2269143A-B160-423F-9B65-A94E2878FB4C}"/>
               </a:ext>
             </a:extLst>
           </p:cNvPr>
@@ -18211,7 +19143,7 @@
           <p:cNvPr id="172" name="">
             <a:extLst xmlns:a="http://schemas.openxmlformats.org/drawingml/2006/main">
               <a:ext uri="{FF2B5EF4-FFF2-40B4-BE49-F238E27FC236}">
-                <a16:creationId xmlns:a16="http://schemas.microsoft.com/office/drawing/2014/main" id="{AA51699A-2D96-4E20-A87F-82E357BF9FDB}"/>
+                <a16:creationId xmlns:a16="http://schemas.microsoft.com/office/drawing/2014/main" id="{EB278C77-9ECF-4E4D-9BD1-76C8D1D5446F}"/>
               </a:ext>
             </a:extLst>
           </p:cNvPr>
@@ -18244,7 +19176,7 @@
           <p:cNvPr id="173" name="">
             <a:extLst xmlns:a="http://schemas.openxmlformats.org/drawingml/2006/main">
               <a:ext uri="{FF2B5EF4-FFF2-40B4-BE49-F238E27FC236}">
-                <a16:creationId xmlns:a16="http://schemas.microsoft.com/office/drawing/2014/main" id="{F9F4B20C-5996-4BC0-8522-DDD182ACB217}"/>
+                <a16:creationId xmlns:a16="http://schemas.microsoft.com/office/drawing/2014/main" id="{5B7E81A3-66C6-4855-AA6E-90814B3458FF}"/>
               </a:ext>
             </a:extLst>
           </p:cNvPr>
@@ -18277,7 +19209,7 @@
           <p:cNvPr id="174" name="">
             <a:extLst xmlns:a="http://schemas.openxmlformats.org/drawingml/2006/main">
               <a:ext uri="{FF2B5EF4-FFF2-40B4-BE49-F238E27FC236}">
-                <a16:creationId xmlns:a16="http://schemas.microsoft.com/office/drawing/2014/main" id="{9A751C84-07B9-4AD1-A5D6-EE55A04BA884}"/>
+                <a16:creationId xmlns:a16="http://schemas.microsoft.com/office/drawing/2014/main" id="{A8971365-E302-421C-8A8D-0152B94503B0}"/>
               </a:ext>
             </a:extLst>
           </p:cNvPr>
@@ -18310,7 +19242,7 @@
           <p:cNvPr id="175" name="">
             <a:extLst xmlns:a="http://schemas.openxmlformats.org/drawingml/2006/main">
               <a:ext uri="{FF2B5EF4-FFF2-40B4-BE49-F238E27FC236}">
-                <a16:creationId xmlns:a16="http://schemas.microsoft.com/office/drawing/2014/main" id="{BBC51D2B-FCD2-44CC-A6D2-1615DF84BA42}"/>
+                <a16:creationId xmlns:a16="http://schemas.microsoft.com/office/drawing/2014/main" id="{DCF9E018-F364-46A3-98E9-CE40B878A794}"/>
               </a:ext>
             </a:extLst>
           </p:cNvPr>
@@ -18343,7 +19275,7 @@
           <p:cNvPr id="176" name="">
             <a:extLst xmlns:a="http://schemas.openxmlformats.org/drawingml/2006/main">
               <a:ext uri="{FF2B5EF4-FFF2-40B4-BE49-F238E27FC236}">
-                <a16:creationId xmlns:a16="http://schemas.microsoft.com/office/drawing/2014/main" id="{F48AFE28-D652-4BBE-A2FB-4465B4999683}"/>
+                <a16:creationId xmlns:a16="http://schemas.microsoft.com/office/drawing/2014/main" id="{E301E789-23C8-436B-B677-1BEA59737945}"/>
               </a:ext>
             </a:extLst>
           </p:cNvPr>
@@ -18376,7 +19308,7 @@
           <p:cNvPr id="177" name="">
             <a:extLst xmlns:a="http://schemas.openxmlformats.org/drawingml/2006/main">
               <a:ext uri="{FF2B5EF4-FFF2-40B4-BE49-F238E27FC236}">
-                <a16:creationId xmlns:a16="http://schemas.microsoft.com/office/drawing/2014/main" id="{6DAC6099-3021-452C-8DB2-161B364C5CC2}"/>
+                <a16:creationId xmlns:a16="http://schemas.microsoft.com/office/drawing/2014/main" id="{7124ED2C-FDF4-4519-9DA2-7A999F54870F}"/>
               </a:ext>
             </a:extLst>
           </p:cNvPr>
@@ -18409,7 +19341,7 @@
           <p:cNvPr id="178" name="">
             <a:extLst xmlns:a="http://schemas.openxmlformats.org/drawingml/2006/main">
               <a:ext uri="{FF2B5EF4-FFF2-40B4-BE49-F238E27FC236}">
-                <a16:creationId xmlns:a16="http://schemas.microsoft.com/office/drawing/2014/main" id="{5F808848-9ED6-4CE1-BD70-478DE631D901}"/>
+                <a16:creationId xmlns:a16="http://schemas.microsoft.com/office/drawing/2014/main" id="{6C158257-55B7-4CDC-88C2-B96B831FA0D1}"/>
               </a:ext>
             </a:extLst>
           </p:cNvPr>
@@ -18442,7 +19374,7 @@
           <p:cNvPr id="179" name="">
             <a:extLst xmlns:a="http://schemas.openxmlformats.org/drawingml/2006/main">
               <a:ext uri="{FF2B5EF4-FFF2-40B4-BE49-F238E27FC236}">
-                <a16:creationId xmlns:a16="http://schemas.microsoft.com/office/drawing/2014/main" id="{FB724BC9-0539-45DC-995D-F7135E7FF292}"/>
+                <a16:creationId xmlns:a16="http://schemas.microsoft.com/office/drawing/2014/main" id="{45372DCE-5D4E-4750-B007-B1AA807735D8}"/>
               </a:ext>
             </a:extLst>
           </p:cNvPr>
@@ -18475,7 +19407,7 @@
           <p:cNvPr id="180" name="">
             <a:extLst xmlns:a="http://schemas.openxmlformats.org/drawingml/2006/main">
               <a:ext uri="{FF2B5EF4-FFF2-40B4-BE49-F238E27FC236}">
-                <a16:creationId xmlns:a16="http://schemas.microsoft.com/office/drawing/2014/main" id="{DBD29CA9-73F6-4C3B-8926-428065629071}"/>
+                <a16:creationId xmlns:a16="http://schemas.microsoft.com/office/drawing/2014/main" id="{DB41863C-38C2-4BA8-B30B-FB56E35D9123}"/>
               </a:ext>
             </a:extLst>
           </p:cNvPr>
@@ -18508,7 +19440,7 @@
           <p:cNvPr id="181" name="">
             <a:extLst xmlns:a="http://schemas.openxmlformats.org/drawingml/2006/main">
               <a:ext uri="{FF2B5EF4-FFF2-40B4-BE49-F238E27FC236}">
-                <a16:creationId xmlns:a16="http://schemas.microsoft.com/office/drawing/2014/main" id="{58B8C7E9-126E-4E3E-9BF6-22E039F9E0E4}"/>
+                <a16:creationId xmlns:a16="http://schemas.microsoft.com/office/drawing/2014/main" id="{4980F92F-2932-46F0-A7E0-00BCE74BFA65}"/>
               </a:ext>
             </a:extLst>
           </p:cNvPr>
@@ -18541,7 +19473,7 @@
           <p:cNvPr id="182" name="">
             <a:extLst xmlns:a="http://schemas.openxmlformats.org/drawingml/2006/main">
               <a:ext uri="{FF2B5EF4-FFF2-40B4-BE49-F238E27FC236}">
-                <a16:creationId xmlns:a16="http://schemas.microsoft.com/office/drawing/2014/main" id="{EF181CA8-2661-4179-9A68-D3AC7CA46E21}"/>
+                <a16:creationId xmlns:a16="http://schemas.microsoft.com/office/drawing/2014/main" id="{5BDFD94D-83DE-4B56-8E74-3C7A99C001AA}"/>
               </a:ext>
             </a:extLst>
           </p:cNvPr>
@@ -18574,7 +19506,7 @@
           <p:cNvPr id="183" name="">
             <a:extLst xmlns:a="http://schemas.openxmlformats.org/drawingml/2006/main">
               <a:ext uri="{FF2B5EF4-FFF2-40B4-BE49-F238E27FC236}">
-                <a16:creationId xmlns:a16="http://schemas.microsoft.com/office/drawing/2014/main" id="{C8B2DCAE-F487-4923-A436-BF7536C44125}"/>
+                <a16:creationId xmlns:a16="http://schemas.microsoft.com/office/drawing/2014/main" id="{01EFFA20-A47D-4959-84D3-0FF5B7EF7C36}"/>
               </a:ext>
             </a:extLst>
           </p:cNvPr>
@@ -18607,7 +19539,7 @@
           <p:cNvPr id="184" name="">
             <a:extLst xmlns:a="http://schemas.openxmlformats.org/drawingml/2006/main">
               <a:ext uri="{FF2B5EF4-FFF2-40B4-BE49-F238E27FC236}">
-                <a16:creationId xmlns:a16="http://schemas.microsoft.com/office/drawing/2014/main" id="{035772CE-4FD2-4B48-90D4-BDCCF6A1A27B}"/>
+                <a16:creationId xmlns:a16="http://schemas.microsoft.com/office/drawing/2014/main" id="{EE16895A-C160-4717-A571-00DEF872F24C}"/>
               </a:ext>
             </a:extLst>
           </p:cNvPr>
@@ -18640,7 +19572,7 @@
           <p:cNvPr id="185" name="">
             <a:extLst xmlns:a="http://schemas.openxmlformats.org/drawingml/2006/main">
               <a:ext uri="{FF2B5EF4-FFF2-40B4-BE49-F238E27FC236}">
-                <a16:creationId xmlns:a16="http://schemas.microsoft.com/office/drawing/2014/main" id="{F0ABF6E8-7975-45A9-9410-041F53308AD9}"/>
+                <a16:creationId xmlns:a16="http://schemas.microsoft.com/office/drawing/2014/main" id="{B7783B22-3FEC-43D8-9ACD-8C2F05281A66}"/>
               </a:ext>
             </a:extLst>
           </p:cNvPr>
@@ -18673,7 +19605,7 @@
           <p:cNvPr id="186" name="">
             <a:extLst xmlns:a="http://schemas.openxmlformats.org/drawingml/2006/main">
               <a:ext uri="{FF2B5EF4-FFF2-40B4-BE49-F238E27FC236}">
-                <a16:creationId xmlns:a16="http://schemas.microsoft.com/office/drawing/2014/main" id="{C5050674-6089-427D-A8E8-E34D141BE09A}"/>
+                <a16:creationId xmlns:a16="http://schemas.microsoft.com/office/drawing/2014/main" id="{330A0ADB-0134-4CF2-85BA-9E33C5E6F675}"/>
               </a:ext>
             </a:extLst>
           </p:cNvPr>
@@ -18706,7 +19638,7 @@
           <p:cNvPr id="187" name="">
             <a:extLst xmlns:a="http://schemas.openxmlformats.org/drawingml/2006/main">
               <a:ext uri="{FF2B5EF4-FFF2-40B4-BE49-F238E27FC236}">
-                <a16:creationId xmlns:a16="http://schemas.microsoft.com/office/drawing/2014/main" id="{C0C8F3E3-D752-462A-A6CA-DE2B885AB4A5}"/>
+                <a16:creationId xmlns:a16="http://schemas.microsoft.com/office/drawing/2014/main" id="{9D8DDF15-E31A-472B-98F8-F31DA4D747C8}"/>
               </a:ext>
             </a:extLst>
           </p:cNvPr>
@@ -18739,7 +19671,7 @@
           <p:cNvPr id="188" name="">
             <a:extLst xmlns:a="http://schemas.openxmlformats.org/drawingml/2006/main">
               <a:ext uri="{FF2B5EF4-FFF2-40B4-BE49-F238E27FC236}">
-                <a16:creationId xmlns:a16="http://schemas.microsoft.com/office/drawing/2014/main" id="{E5C75112-A825-4210-9D9D-DB29F6BEE888}"/>
+                <a16:creationId xmlns:a16="http://schemas.microsoft.com/office/drawing/2014/main" id="{66DB8D1A-E9EE-42FD-88A4-2B1388CDBF93}"/>
               </a:ext>
             </a:extLst>
           </p:cNvPr>
@@ -18772,7 +19704,7 @@
           <p:cNvPr id="189" name="">
             <a:extLst xmlns:a="http://schemas.openxmlformats.org/drawingml/2006/main">
               <a:ext uri="{FF2B5EF4-FFF2-40B4-BE49-F238E27FC236}">
-                <a16:creationId xmlns:a16="http://schemas.microsoft.com/office/drawing/2014/main" id="{AF36F2AE-59B0-49EE-AD1D-D06B685A3238}"/>
+                <a16:creationId xmlns:a16="http://schemas.microsoft.com/office/drawing/2014/main" id="{D6E1F375-2CD6-4777-9919-F739185897FA}"/>
               </a:ext>
             </a:extLst>
           </p:cNvPr>
@@ -18805,7 +19737,7 @@
           <p:cNvPr id="190" name="">
             <a:extLst xmlns:a="http://schemas.openxmlformats.org/drawingml/2006/main">
               <a:ext uri="{FF2B5EF4-FFF2-40B4-BE49-F238E27FC236}">
-                <a16:creationId xmlns:a16="http://schemas.microsoft.com/office/drawing/2014/main" id="{BB6798D8-9CDF-4172-9E43-73641D0ADBC4}"/>
+                <a16:creationId xmlns:a16="http://schemas.microsoft.com/office/drawing/2014/main" id="{29688C39-FFF3-4431-8C44-221E64CB26A1}"/>
               </a:ext>
             </a:extLst>
           </p:cNvPr>
@@ -18838,7 +19770,7 @@
           <p:cNvPr id="191" name="">
             <a:extLst xmlns:a="http://schemas.openxmlformats.org/drawingml/2006/main">
               <a:ext uri="{FF2B5EF4-FFF2-40B4-BE49-F238E27FC236}">
-                <a16:creationId xmlns:a16="http://schemas.microsoft.com/office/drawing/2014/main" id="{EF7F4349-F79D-4FAF-ACB4-6A850255C9C5}"/>
+                <a16:creationId xmlns:a16="http://schemas.microsoft.com/office/drawing/2014/main" id="{88EAB81F-C86D-4293-A13F-3A127FC3FE1D}"/>
               </a:ext>
             </a:extLst>
           </p:cNvPr>
@@ -18871,7 +19803,7 @@
           <p:cNvPr id="192" name="">
             <a:extLst xmlns:a="http://schemas.openxmlformats.org/drawingml/2006/main">
               <a:ext uri="{FF2B5EF4-FFF2-40B4-BE49-F238E27FC236}">
-                <a16:creationId xmlns:a16="http://schemas.microsoft.com/office/drawing/2014/main" id="{3725514B-5BB1-4D9F-9D58-4863F9615805}"/>
+                <a16:creationId xmlns:a16="http://schemas.microsoft.com/office/drawing/2014/main" id="{DDB01121-68E2-46DD-BCC8-60C2CC54EF5E}"/>
               </a:ext>
             </a:extLst>
           </p:cNvPr>
@@ -18904,7 +19836,7 @@
           <p:cNvPr id="193" name="">
             <a:extLst xmlns:a="http://schemas.openxmlformats.org/drawingml/2006/main">
               <a:ext uri="{FF2B5EF4-FFF2-40B4-BE49-F238E27FC236}">
-                <a16:creationId xmlns:a16="http://schemas.microsoft.com/office/drawing/2014/main" id="{37698069-0C18-4E50-B0F1-1D0F6994FD87}"/>
+                <a16:creationId xmlns:a16="http://schemas.microsoft.com/office/drawing/2014/main" id="{AEBB429B-ED37-47F2-9CA0-ADCB1558455A}"/>
               </a:ext>
             </a:extLst>
           </p:cNvPr>
@@ -18937,7 +19869,7 @@
           <p:cNvPr id="194" name="">
             <a:extLst xmlns:a="http://schemas.openxmlformats.org/drawingml/2006/main">
               <a:ext uri="{FF2B5EF4-FFF2-40B4-BE49-F238E27FC236}">
-                <a16:creationId xmlns:a16="http://schemas.microsoft.com/office/drawing/2014/main" id="{E3786D7E-D19A-4FAD-8360-17922DE6243E}"/>
+                <a16:creationId xmlns:a16="http://schemas.microsoft.com/office/drawing/2014/main" id="{AEBFCE9F-EFDA-4516-ADCA-66E6EE9D19EB}"/>
               </a:ext>
             </a:extLst>
           </p:cNvPr>
@@ -18970,7 +19902,7 @@
           <p:cNvPr id="195" name="">
             <a:extLst xmlns:a="http://schemas.openxmlformats.org/drawingml/2006/main">
               <a:ext uri="{FF2B5EF4-FFF2-40B4-BE49-F238E27FC236}">
-                <a16:creationId xmlns:a16="http://schemas.microsoft.com/office/drawing/2014/main" id="{9309959B-C4C7-40F0-8629-8F60726C87B3}"/>
+                <a16:creationId xmlns:a16="http://schemas.microsoft.com/office/drawing/2014/main" id="{47D4E953-B5F4-41F8-A52C-214A3EEDDF6A}"/>
               </a:ext>
             </a:extLst>
           </p:cNvPr>
@@ -19003,7 +19935,7 @@
           <p:cNvPr id="196" name="">
             <a:extLst xmlns:a="http://schemas.openxmlformats.org/drawingml/2006/main">
               <a:ext uri="{FF2B5EF4-FFF2-40B4-BE49-F238E27FC236}">
-                <a16:creationId xmlns:a16="http://schemas.microsoft.com/office/drawing/2014/main" id="{ADDA4DAB-5410-4939-944E-1B6EE40EC69D}"/>
+                <a16:creationId xmlns:a16="http://schemas.microsoft.com/office/drawing/2014/main" id="{57113E07-142F-4A12-B935-2435A44A0898}"/>
               </a:ext>
             </a:extLst>
           </p:cNvPr>
@@ -19036,7 +19968,7 @@
           <p:cNvPr id="197" name="">
             <a:extLst xmlns:a="http://schemas.openxmlformats.org/drawingml/2006/main">
               <a:ext uri="{FF2B5EF4-FFF2-40B4-BE49-F238E27FC236}">
-                <a16:creationId xmlns:a16="http://schemas.microsoft.com/office/drawing/2014/main" id="{78A2EDCA-24F6-420B-92EA-80E209619C99}"/>
+                <a16:creationId xmlns:a16="http://schemas.microsoft.com/office/drawing/2014/main" id="{B43450AC-A54A-4358-8E60-7F5133E8AD49}"/>
               </a:ext>
             </a:extLst>
           </p:cNvPr>
@@ -19071,7 +20003,7 @@
           <p:cNvPr id="198" name="">
             <a:extLst xmlns:a="http://schemas.openxmlformats.org/drawingml/2006/main">
               <a:ext uri="{FF2B5EF4-FFF2-40B4-BE49-F238E27FC236}">
-                <a16:creationId xmlns:a16="http://schemas.microsoft.com/office/drawing/2014/main" id="{3582FA59-D726-4AED-AEC2-8480389E7D56}"/>
+                <a16:creationId xmlns:a16="http://schemas.microsoft.com/office/drawing/2014/main" id="{51077075-35A3-4194-BF09-A66F16B5D0B8}"/>
               </a:ext>
             </a:extLst>
           </p:cNvPr>
@@ -19104,7 +20036,7 @@
           <p:cNvPr id="199" name="">
             <a:extLst xmlns:a="http://schemas.openxmlformats.org/drawingml/2006/main">
               <a:ext uri="{FF2B5EF4-FFF2-40B4-BE49-F238E27FC236}">
-                <a16:creationId xmlns:a16="http://schemas.microsoft.com/office/drawing/2014/main" id="{266AF2AD-44C8-4B66-A9D7-4A8C3F67E23D}"/>
+                <a16:creationId xmlns:a16="http://schemas.microsoft.com/office/drawing/2014/main" id="{7AF74809-DAA8-426A-B1BC-DD76439DCD34}"/>
               </a:ext>
             </a:extLst>
           </p:cNvPr>
@@ -19137,7 +20069,7 @@
           <p:cNvPr id="200" name="">
             <a:extLst xmlns:a="http://schemas.openxmlformats.org/drawingml/2006/main">
               <a:ext uri="{FF2B5EF4-FFF2-40B4-BE49-F238E27FC236}">
-                <a16:creationId xmlns:a16="http://schemas.microsoft.com/office/drawing/2014/main" id="{F5A2100A-B756-44C4-A66B-91342C031637}"/>
+                <a16:creationId xmlns:a16="http://schemas.microsoft.com/office/drawing/2014/main" id="{5C176674-F328-4F3D-9CBD-E89BE77F03E8}"/>
               </a:ext>
             </a:extLst>
           </p:cNvPr>
@@ -19170,7 +20102,7 @@
           <p:cNvPr id="201" name="">
             <a:extLst xmlns:a="http://schemas.openxmlformats.org/drawingml/2006/main">
               <a:ext uri="{FF2B5EF4-FFF2-40B4-BE49-F238E27FC236}">
-                <a16:creationId xmlns:a16="http://schemas.microsoft.com/office/drawing/2014/main" id="{3B99C9DC-223F-494A-AD43-AF50C0F82336}"/>
+                <a16:creationId xmlns:a16="http://schemas.microsoft.com/office/drawing/2014/main" id="{0C616B69-4E25-4687-A5CA-94CA171DB189}"/>
               </a:ext>
             </a:extLst>
           </p:cNvPr>
@@ -19203,7 +20135,7 @@
           <p:cNvPr id="202" name="">
             <a:extLst xmlns:a="http://schemas.openxmlformats.org/drawingml/2006/main">
               <a:ext uri="{FF2B5EF4-FFF2-40B4-BE49-F238E27FC236}">
-                <a16:creationId xmlns:a16="http://schemas.microsoft.com/office/drawing/2014/main" id="{F463E280-015F-44E0-9A39-7D645602D5EC}"/>
+                <a16:creationId xmlns:a16="http://schemas.microsoft.com/office/drawing/2014/main" id="{3C778410-A04D-457C-B0A9-3A6C5E960692}"/>
               </a:ext>
             </a:extLst>
           </p:cNvPr>
@@ -19236,7 +20168,7 @@
           <p:cNvPr id="203" name="">
             <a:extLst xmlns:a="http://schemas.openxmlformats.org/drawingml/2006/main">
               <a:ext uri="{FF2B5EF4-FFF2-40B4-BE49-F238E27FC236}">
-                <a16:creationId xmlns:a16="http://schemas.microsoft.com/office/drawing/2014/main" id="{89AB666C-5415-4878-B61A-91A54CC47A2B}"/>
+                <a16:creationId xmlns:a16="http://schemas.microsoft.com/office/drawing/2014/main" id="{CE36ECB0-6B0B-488F-9897-7B527EAC5B84}"/>
               </a:ext>
             </a:extLst>
           </p:cNvPr>
@@ -19269,7 +20201,7 @@
           <p:cNvPr id="204" name="">
             <a:extLst xmlns:a="http://schemas.openxmlformats.org/drawingml/2006/main">
               <a:ext uri="{FF2B5EF4-FFF2-40B4-BE49-F238E27FC236}">
-                <a16:creationId xmlns:a16="http://schemas.microsoft.com/office/drawing/2014/main" id="{01B91038-1CC1-4888-B2F1-05B9FE25A117}"/>
+                <a16:creationId xmlns:a16="http://schemas.microsoft.com/office/drawing/2014/main" id="{CB71B175-9598-4C6C-A975-916362238B84}"/>
               </a:ext>
             </a:extLst>
           </p:cNvPr>
@@ -19302,7 +20234,7 @@
           <p:cNvPr id="205" name="">
             <a:extLst xmlns:a="http://schemas.openxmlformats.org/drawingml/2006/main">
               <a:ext uri="{FF2B5EF4-FFF2-40B4-BE49-F238E27FC236}">
-                <a16:creationId xmlns:a16="http://schemas.microsoft.com/office/drawing/2014/main" id="{8634B310-C0C9-4F91-9103-10DBF426B5F7}"/>
+                <a16:creationId xmlns:a16="http://schemas.microsoft.com/office/drawing/2014/main" id="{4C3B7B34-3D16-444E-B2E3-661D255862DE}"/>
               </a:ext>
             </a:extLst>
           </p:cNvPr>
@@ -19335,7 +20267,7 @@
           <p:cNvPr id="206" name="">
             <a:extLst xmlns:a="http://schemas.openxmlformats.org/drawingml/2006/main">
               <a:ext uri="{FF2B5EF4-FFF2-40B4-BE49-F238E27FC236}">
-                <a16:creationId xmlns:a16="http://schemas.microsoft.com/office/drawing/2014/main" id="{B7094262-808B-4F8A-A931-4489712FA26F}"/>
+                <a16:creationId xmlns:a16="http://schemas.microsoft.com/office/drawing/2014/main" id="{1A3F1E8A-1FFF-40D2-A5C0-8CB824777DFC}"/>
               </a:ext>
             </a:extLst>
           </p:cNvPr>
@@ -19368,7 +20300,7 @@
           <p:cNvPr id="207" name="">
             <a:extLst xmlns:a="http://schemas.openxmlformats.org/drawingml/2006/main">
               <a:ext uri="{FF2B5EF4-FFF2-40B4-BE49-F238E27FC236}">
-                <a16:creationId xmlns:a16="http://schemas.microsoft.com/office/drawing/2014/main" id="{814DF432-4B8B-4674-A669-64909660006F}"/>
+                <a16:creationId xmlns:a16="http://schemas.microsoft.com/office/drawing/2014/main" id="{65149B3A-8BAC-42A9-A415-41CDE775134A}"/>
               </a:ext>
             </a:extLst>
           </p:cNvPr>
@@ -19401,7 +20333,7 @@
           <p:cNvPr id="208" name="">
             <a:extLst xmlns:a="http://schemas.openxmlformats.org/drawingml/2006/main">
               <a:ext uri="{FF2B5EF4-FFF2-40B4-BE49-F238E27FC236}">
-                <a16:creationId xmlns:a16="http://schemas.microsoft.com/office/drawing/2014/main" id="{DED6878B-DFE7-4608-AD58-E171244CCE4F}"/>
+                <a16:creationId xmlns:a16="http://schemas.microsoft.com/office/drawing/2014/main" id="{0A0587DD-A15F-4DFC-9F2A-5C8FC3963CEB}"/>
               </a:ext>
             </a:extLst>
           </p:cNvPr>
@@ -19434,7 +20366,7 @@
           <p:cNvPr id="209" name="">
             <a:extLst xmlns:a="http://schemas.openxmlformats.org/drawingml/2006/main">
               <a:ext uri="{FF2B5EF4-FFF2-40B4-BE49-F238E27FC236}">
-                <a16:creationId xmlns:a16="http://schemas.microsoft.com/office/drawing/2014/main" id="{17C1DE8E-A07D-4094-93F3-E62723179223}"/>
+                <a16:creationId xmlns:a16="http://schemas.microsoft.com/office/drawing/2014/main" id="{AF5851CF-D594-4248-B9D4-B7E9F746747F}"/>
               </a:ext>
             </a:extLst>
           </p:cNvPr>
@@ -19467,7 +20399,7 @@
           <p:cNvPr id="210" name="">
             <a:extLst xmlns:a="http://schemas.openxmlformats.org/drawingml/2006/main">
               <a:ext uri="{FF2B5EF4-FFF2-40B4-BE49-F238E27FC236}">
-                <a16:creationId xmlns:a16="http://schemas.microsoft.com/office/drawing/2014/main" id="{D57BACDD-E5AA-453F-A968-F982DD0208DE}"/>
+                <a16:creationId xmlns:a16="http://schemas.microsoft.com/office/drawing/2014/main" id="{E0424A22-FAAF-4AC0-88B7-2E1D81881B03}"/>
               </a:ext>
             </a:extLst>
           </p:cNvPr>
@@ -19500,7 +20432,7 @@
           <p:cNvPr id="211" name="">
             <a:extLst xmlns:a="http://schemas.openxmlformats.org/drawingml/2006/main">
               <a:ext uri="{FF2B5EF4-FFF2-40B4-BE49-F238E27FC236}">
-                <a16:creationId xmlns:a16="http://schemas.microsoft.com/office/drawing/2014/main" id="{3420D342-3AB6-458C-ACD6-5E75E375E6EF}"/>
+                <a16:creationId xmlns:a16="http://schemas.microsoft.com/office/drawing/2014/main" id="{DE3B0BF4-1E59-4C71-B477-E6E88086C1F9}"/>
               </a:ext>
             </a:extLst>
           </p:cNvPr>
@@ -19533,7 +20465,7 @@
           <p:cNvPr id="212" name="">
             <a:extLst xmlns:a="http://schemas.openxmlformats.org/drawingml/2006/main">
               <a:ext uri="{FF2B5EF4-FFF2-40B4-BE49-F238E27FC236}">
-                <a16:creationId xmlns:a16="http://schemas.microsoft.com/office/drawing/2014/main" id="{F983951A-1FC1-44FD-B9D0-5A79BC95DF70}"/>
+                <a16:creationId xmlns:a16="http://schemas.microsoft.com/office/drawing/2014/main" id="{1D936BC0-223C-4096-AD06-8D7B899B9173}"/>
               </a:ext>
             </a:extLst>
           </p:cNvPr>
@@ -19566,7 +20498,7 @@
           <p:cNvPr id="213" name="">
             <a:extLst xmlns:a="http://schemas.openxmlformats.org/drawingml/2006/main">
               <a:ext uri="{FF2B5EF4-FFF2-40B4-BE49-F238E27FC236}">
-                <a16:creationId xmlns:a16="http://schemas.microsoft.com/office/drawing/2014/main" id="{2DA55C86-61F2-4BDD-A00E-09CD10C149F1}"/>
+                <a16:creationId xmlns:a16="http://schemas.microsoft.com/office/drawing/2014/main" id="{2F9CCB9F-133A-4D18-BAE6-98BB57DB0FEA}"/>
               </a:ext>
             </a:extLst>
           </p:cNvPr>
@@ -19599,7 +20531,7 @@
           <p:cNvPr id="214" name="">
             <a:extLst xmlns:a="http://schemas.openxmlformats.org/drawingml/2006/main">
               <a:ext uri="{FF2B5EF4-FFF2-40B4-BE49-F238E27FC236}">
-                <a16:creationId xmlns:a16="http://schemas.microsoft.com/office/drawing/2014/main" id="{1D528EC3-7F4D-422C-88BD-17B9058F8A76}"/>
+                <a16:creationId xmlns:a16="http://schemas.microsoft.com/office/drawing/2014/main" id="{486653F7-84EE-44E9-B081-737E6B223DB0}"/>
               </a:ext>
             </a:extLst>
           </p:cNvPr>
@@ -19632,7 +20564,7 @@
           <p:cNvPr id="215" name="">
             <a:extLst xmlns:a="http://schemas.openxmlformats.org/drawingml/2006/main">
               <a:ext uri="{FF2B5EF4-FFF2-40B4-BE49-F238E27FC236}">
-                <a16:creationId xmlns:a16="http://schemas.microsoft.com/office/drawing/2014/main" id="{AEABAFD8-782E-4630-828B-CDDF8C71253F}"/>
+                <a16:creationId xmlns:a16="http://schemas.microsoft.com/office/drawing/2014/main" id="{851A238A-0700-4CC3-8C50-103686EE56F4}"/>
               </a:ext>
             </a:extLst>
           </p:cNvPr>
@@ -19665,7 +20597,7 @@
           <p:cNvPr id="216" name="">
             <a:extLst xmlns:a="http://schemas.openxmlformats.org/drawingml/2006/main">
               <a:ext uri="{FF2B5EF4-FFF2-40B4-BE49-F238E27FC236}">
-                <a16:creationId xmlns:a16="http://schemas.microsoft.com/office/drawing/2014/main" id="{02F9EB3E-3BDA-4160-85B9-A26486D038F5}"/>
+                <a16:creationId xmlns:a16="http://schemas.microsoft.com/office/drawing/2014/main" id="{5F3EC92D-F4AF-465F-9705-F81D9249892F}"/>
               </a:ext>
             </a:extLst>
           </p:cNvPr>
@@ -19698,7 +20630,7 @@
           <p:cNvPr id="217" name="">
             <a:extLst xmlns:a="http://schemas.openxmlformats.org/drawingml/2006/main">
               <a:ext uri="{FF2B5EF4-FFF2-40B4-BE49-F238E27FC236}">
-                <a16:creationId xmlns:a16="http://schemas.microsoft.com/office/drawing/2014/main" id="{11C2E807-42AD-4D5A-8A3A-AE8A65234FA1}"/>
+                <a16:creationId xmlns:a16="http://schemas.microsoft.com/office/drawing/2014/main" id="{A68FE41A-938B-4329-B5E0-33857B640E1E}"/>
               </a:ext>
             </a:extLst>
           </p:cNvPr>
@@ -19731,7 +20663,7 @@
           <p:cNvPr id="218" name="">
             <a:extLst xmlns:a="http://schemas.openxmlformats.org/drawingml/2006/main">
               <a:ext uri="{FF2B5EF4-FFF2-40B4-BE49-F238E27FC236}">
-                <a16:creationId xmlns:a16="http://schemas.microsoft.com/office/drawing/2014/main" id="{9CC78E3F-F8EA-4147-9373-08CB202B2ECD}"/>
+                <a16:creationId xmlns:a16="http://schemas.microsoft.com/office/drawing/2014/main" id="{2CC63A73-E76D-4FDE-9AC3-6729BC46F915}"/>
               </a:ext>
             </a:extLst>
           </p:cNvPr>
@@ -19764,7 +20696,7 @@
           <p:cNvPr id="219" name="">
             <a:extLst xmlns:a="http://schemas.openxmlformats.org/drawingml/2006/main">
               <a:ext uri="{FF2B5EF4-FFF2-40B4-BE49-F238E27FC236}">
-                <a16:creationId xmlns:a16="http://schemas.microsoft.com/office/drawing/2014/main" id="{916D5A46-D559-4CAE-BD87-E8548F408F74}"/>
+                <a16:creationId xmlns:a16="http://schemas.microsoft.com/office/drawing/2014/main" id="{FC9F474D-E7EA-4B76-AA63-0936D0AE63F5}"/>
               </a:ext>
             </a:extLst>
           </p:cNvPr>
@@ -19797,7 +20729,7 @@
           <p:cNvPr id="220" name="">
             <a:extLst xmlns:a="http://schemas.openxmlformats.org/drawingml/2006/main">
               <a:ext uri="{FF2B5EF4-FFF2-40B4-BE49-F238E27FC236}">
-                <a16:creationId xmlns:a16="http://schemas.microsoft.com/office/drawing/2014/main" id="{3812F33F-3F0F-4EF8-BFA5-06EC382E3F6E}"/>
+                <a16:creationId xmlns:a16="http://schemas.microsoft.com/office/drawing/2014/main" id="{64551486-2520-443B-A5D3-05B96F0C0016}"/>
               </a:ext>
             </a:extLst>
           </p:cNvPr>
@@ -19830,7 +20762,7 @@
           <p:cNvPr id="221" name="">
             <a:extLst xmlns:a="http://schemas.openxmlformats.org/drawingml/2006/main">
               <a:ext uri="{FF2B5EF4-FFF2-40B4-BE49-F238E27FC236}">
-                <a16:creationId xmlns:a16="http://schemas.microsoft.com/office/drawing/2014/main" id="{B98D298E-F046-4774-9731-BF00BEFB37A9}"/>
+                <a16:creationId xmlns:a16="http://schemas.microsoft.com/office/drawing/2014/main" id="{74C5AAC9-2231-4BEE-AFCA-DC1C2DCC144E}"/>
               </a:ext>
             </a:extLst>
           </p:cNvPr>
@@ -19863,7 +20795,7 @@
           <p:cNvPr id="222" name="">
             <a:extLst xmlns:a="http://schemas.openxmlformats.org/drawingml/2006/main">
               <a:ext uri="{FF2B5EF4-FFF2-40B4-BE49-F238E27FC236}">
-                <a16:creationId xmlns:a16="http://schemas.microsoft.com/office/drawing/2014/main" id="{2E468184-A6D1-4708-997A-684634DCFC02}"/>
+                <a16:creationId xmlns:a16="http://schemas.microsoft.com/office/drawing/2014/main" id="{2DA1A670-9699-4803-9B37-78189C9EC0C4}"/>
               </a:ext>
             </a:extLst>
           </p:cNvPr>
@@ -19896,7 +20828,7 @@
           <p:cNvPr id="223" name="">
             <a:extLst xmlns:a="http://schemas.openxmlformats.org/drawingml/2006/main">
               <a:ext uri="{FF2B5EF4-FFF2-40B4-BE49-F238E27FC236}">
-                <a16:creationId xmlns:a16="http://schemas.microsoft.com/office/drawing/2014/main" id="{AE909B10-1176-4050-BD5E-03CCE95CEB9A}"/>
+                <a16:creationId xmlns:a16="http://schemas.microsoft.com/office/drawing/2014/main" id="{53FA3654-F61B-43CE-9F13-513C29817CBC}"/>
               </a:ext>
             </a:extLst>
           </p:cNvPr>
@@ -19929,7 +20861,7 @@
           <p:cNvPr id="224" name="">
             <a:extLst xmlns:a="http://schemas.openxmlformats.org/drawingml/2006/main">
               <a:ext uri="{FF2B5EF4-FFF2-40B4-BE49-F238E27FC236}">
-                <a16:creationId xmlns:a16="http://schemas.microsoft.com/office/drawing/2014/main" id="{499D4958-B4C9-4F21-B474-5EBEB7B08D30}"/>
+                <a16:creationId xmlns:a16="http://schemas.microsoft.com/office/drawing/2014/main" id="{4FA802F2-7596-4AB8-9014-A1E901D9EAB6}"/>
               </a:ext>
             </a:extLst>
           </p:cNvPr>
@@ -19962,7 +20894,7 @@
           <p:cNvPr id="225" name="">
             <a:extLst xmlns:a="http://schemas.openxmlformats.org/drawingml/2006/main">
               <a:ext uri="{FF2B5EF4-FFF2-40B4-BE49-F238E27FC236}">
-                <a16:creationId xmlns:a16="http://schemas.microsoft.com/office/drawing/2014/main" id="{CFC3D965-4D91-402C-96A3-45BCF7E85ACC}"/>
+                <a16:creationId xmlns:a16="http://schemas.microsoft.com/office/drawing/2014/main" id="{A561E870-F393-4C19-A349-019EDAB0A8FC}"/>
               </a:ext>
             </a:extLst>
           </p:cNvPr>
@@ -19995,7 +20927,7 @@
           <p:cNvPr id="226" name="">
             <a:extLst xmlns:a="http://schemas.openxmlformats.org/drawingml/2006/main">
               <a:ext uri="{FF2B5EF4-FFF2-40B4-BE49-F238E27FC236}">
-                <a16:creationId xmlns:a16="http://schemas.microsoft.com/office/drawing/2014/main" id="{42428F72-2952-476F-9601-0168F9B9ECE5}"/>
+                <a16:creationId xmlns:a16="http://schemas.microsoft.com/office/drawing/2014/main" id="{D38C867B-81F1-4B9F-9BE0-D1FB9DF23CE4}"/>
               </a:ext>
             </a:extLst>
           </p:cNvPr>
@@ -20028,7 +20960,7 @@
           <p:cNvPr id="227" name="">
             <a:extLst xmlns:a="http://schemas.openxmlformats.org/drawingml/2006/main">
               <a:ext uri="{FF2B5EF4-FFF2-40B4-BE49-F238E27FC236}">
-                <a16:creationId xmlns:a16="http://schemas.microsoft.com/office/drawing/2014/main" id="{3E539192-D82D-4A5E-B264-BBB0E32BE0F6}"/>
+                <a16:creationId xmlns:a16="http://schemas.microsoft.com/office/drawing/2014/main" id="{EB53FB2C-3FF2-45D1-BC42-929552405F24}"/>
               </a:ext>
             </a:extLst>
           </p:cNvPr>
@@ -20061,7 +20993,7 @@
           <p:cNvPr id="228" name="">
             <a:extLst xmlns:a="http://schemas.openxmlformats.org/drawingml/2006/main">
               <a:ext uri="{FF2B5EF4-FFF2-40B4-BE49-F238E27FC236}">
-                <a16:creationId xmlns:a16="http://schemas.microsoft.com/office/drawing/2014/main" id="{48921AA7-DAB7-48CC-870B-F1D5E273713A}"/>
+                <a16:creationId xmlns:a16="http://schemas.microsoft.com/office/drawing/2014/main" id="{C2F1A16E-16DD-4650-B5D3-215095564C75}"/>
               </a:ext>
             </a:extLst>
           </p:cNvPr>
@@ -20094,7 +21026,7 @@
           <p:cNvPr id="229" name="">
             <a:extLst xmlns:a="http://schemas.openxmlformats.org/drawingml/2006/main">
               <a:ext uri="{FF2B5EF4-FFF2-40B4-BE49-F238E27FC236}">
-                <a16:creationId xmlns:a16="http://schemas.microsoft.com/office/drawing/2014/main" id="{66729545-6186-49BE-BF61-93861D6C259F}"/>
+                <a16:creationId xmlns:a16="http://schemas.microsoft.com/office/drawing/2014/main" id="{0DB00CCB-A9B2-4089-B49C-410FC2FA0BEF}"/>
               </a:ext>
             </a:extLst>
           </p:cNvPr>
@@ -20127,7 +21059,7 @@
           <p:cNvPr id="230" name="">
             <a:extLst xmlns:a="http://schemas.openxmlformats.org/drawingml/2006/main">
               <a:ext uri="{FF2B5EF4-FFF2-40B4-BE49-F238E27FC236}">
-                <a16:creationId xmlns:a16="http://schemas.microsoft.com/office/drawing/2014/main" id="{C6B759CB-4508-47D2-8C9F-3CEB78B1DDAD}"/>
+                <a16:creationId xmlns:a16="http://schemas.microsoft.com/office/drawing/2014/main" id="{F8B89A79-BF23-4014-9B5A-B6AB82F74DE8}"/>
               </a:ext>
             </a:extLst>
           </p:cNvPr>
@@ -20160,7 +21092,7 @@
           <p:cNvPr id="231" name="">
             <a:extLst xmlns:a="http://schemas.openxmlformats.org/drawingml/2006/main">
               <a:ext uri="{FF2B5EF4-FFF2-40B4-BE49-F238E27FC236}">
-                <a16:creationId xmlns:a16="http://schemas.microsoft.com/office/drawing/2014/main" id="{2D199A2A-5375-4B2E-A93E-D3C71FCFFEA7}"/>
+                <a16:creationId xmlns:a16="http://schemas.microsoft.com/office/drawing/2014/main" id="{0E448543-664A-4ECA-ACFD-7410F8C72E16}"/>
               </a:ext>
             </a:extLst>
           </p:cNvPr>
@@ -20193,7 +21125,7 @@
           <p:cNvPr id="232" name="">
             <a:extLst xmlns:a="http://schemas.openxmlformats.org/drawingml/2006/main">
               <a:ext uri="{FF2B5EF4-FFF2-40B4-BE49-F238E27FC236}">
-                <a16:creationId xmlns:a16="http://schemas.microsoft.com/office/drawing/2014/main" id="{26B3F6A5-0087-4A29-BBD5-98135A58E390}"/>
+                <a16:creationId xmlns:a16="http://schemas.microsoft.com/office/drawing/2014/main" id="{D29136B2-65B5-4FDA-B28C-482E5796BD86}"/>
               </a:ext>
             </a:extLst>
           </p:cNvPr>
@@ -20226,7 +21158,7 @@
           <p:cNvPr id="233" name="">
             <a:extLst xmlns:a="http://schemas.openxmlformats.org/drawingml/2006/main">
               <a:ext uri="{FF2B5EF4-FFF2-40B4-BE49-F238E27FC236}">
-                <a16:creationId xmlns:a16="http://schemas.microsoft.com/office/drawing/2014/main" id="{52163C08-4B36-4C67-8C36-77F40C85EF70}"/>
+                <a16:creationId xmlns:a16="http://schemas.microsoft.com/office/drawing/2014/main" id="{1D0C1B7B-4599-483C-A677-496FF4669981}"/>
               </a:ext>
             </a:extLst>
           </p:cNvPr>
@@ -20259,7 +21191,7 @@
           <p:cNvPr id="234" name="">
             <a:extLst xmlns:a="http://schemas.openxmlformats.org/drawingml/2006/main">
               <a:ext uri="{FF2B5EF4-FFF2-40B4-BE49-F238E27FC236}">
-                <a16:creationId xmlns:a16="http://schemas.microsoft.com/office/drawing/2014/main" id="{419C5D47-E986-4A0E-83CC-2582C6F1DBF4}"/>
+                <a16:creationId xmlns:a16="http://schemas.microsoft.com/office/drawing/2014/main" id="{8ADD04B0-C01E-4780-878B-6F7E10683C49}"/>
               </a:ext>
             </a:extLst>
           </p:cNvPr>
@@ -20292,7 +21224,7 @@
           <p:cNvPr id="235" name="">
             <a:extLst xmlns:a="http://schemas.openxmlformats.org/drawingml/2006/main">
               <a:ext uri="{FF2B5EF4-FFF2-40B4-BE49-F238E27FC236}">
-                <a16:creationId xmlns:a16="http://schemas.microsoft.com/office/drawing/2014/main" id="{FF59A3B4-AE5F-41DE-A71E-8763F82BAF52}"/>
+                <a16:creationId xmlns:a16="http://schemas.microsoft.com/office/drawing/2014/main" id="{3601637D-8209-42E8-9D93-952760F7F7FD}"/>
               </a:ext>
             </a:extLst>
           </p:cNvPr>
@@ -20325,7 +21257,7 @@
           <p:cNvPr id="236" name="">
             <a:extLst xmlns:a="http://schemas.openxmlformats.org/drawingml/2006/main">
               <a:ext uri="{FF2B5EF4-FFF2-40B4-BE49-F238E27FC236}">
-                <a16:creationId xmlns:a16="http://schemas.microsoft.com/office/drawing/2014/main" id="{54735A40-DA73-4017-A5E9-0DFE08F35365}"/>
+                <a16:creationId xmlns:a16="http://schemas.microsoft.com/office/drawing/2014/main" id="{750D2FDC-B906-4533-A809-1680773F88AF}"/>
               </a:ext>
             </a:extLst>
           </p:cNvPr>
@@ -20358,7 +21290,7 @@
           <p:cNvPr id="237" name="">
             <a:extLst xmlns:a="http://schemas.openxmlformats.org/drawingml/2006/main">
               <a:ext uri="{FF2B5EF4-FFF2-40B4-BE49-F238E27FC236}">
-                <a16:creationId xmlns:a16="http://schemas.microsoft.com/office/drawing/2014/main" id="{97909BEB-E378-47C4-ACC1-2775AA6CDB34}"/>
+                <a16:creationId xmlns:a16="http://schemas.microsoft.com/office/drawing/2014/main" id="{0E23597C-F310-4779-9919-D1AD0A2551E7}"/>
               </a:ext>
             </a:extLst>
           </p:cNvPr>
@@ -20391,7 +21323,7 @@
           <p:cNvPr id="238" name="">
             <a:extLst xmlns:a="http://schemas.openxmlformats.org/drawingml/2006/main">
               <a:ext uri="{FF2B5EF4-FFF2-40B4-BE49-F238E27FC236}">
-                <a16:creationId xmlns:a16="http://schemas.microsoft.com/office/drawing/2014/main" id="{639D1A9A-0A56-4108-A1F8-FC75BBCC78A9}"/>
+                <a16:creationId xmlns:a16="http://schemas.microsoft.com/office/drawing/2014/main" id="{09D63776-EA1F-456E-9FDB-8CCEF4C2A9AC}"/>
               </a:ext>
             </a:extLst>
           </p:cNvPr>
@@ -20424,7 +21356,7 @@
           <p:cNvPr id="239" name="">
             <a:extLst xmlns:a="http://schemas.openxmlformats.org/drawingml/2006/main">
               <a:ext uri="{FF2B5EF4-FFF2-40B4-BE49-F238E27FC236}">
-                <a16:creationId xmlns:a16="http://schemas.microsoft.com/office/drawing/2014/main" id="{7AF01AA9-B626-45B6-8184-B24B61FDBD96}"/>
+                <a16:creationId xmlns:a16="http://schemas.microsoft.com/office/drawing/2014/main" id="{166CCBC7-497B-4FC8-BC47-481D049BB41C}"/>
               </a:ext>
             </a:extLst>
           </p:cNvPr>
@@ -20457,7 +21389,7 @@
           <p:cNvPr id="240" name="">
             <a:extLst xmlns:a="http://schemas.openxmlformats.org/drawingml/2006/main">
               <a:ext uri="{FF2B5EF4-FFF2-40B4-BE49-F238E27FC236}">
-                <a16:creationId xmlns:a16="http://schemas.microsoft.com/office/drawing/2014/main" id="{7C4E73A1-4E73-4372-B58D-809AA38589C6}"/>
+                <a16:creationId xmlns:a16="http://schemas.microsoft.com/office/drawing/2014/main" id="{A64E7B0B-B526-441E-B830-CA95A40E5D1E}"/>
               </a:ext>
             </a:extLst>
           </p:cNvPr>
@@ -20490,7 +21422,7 @@
           <p:cNvPr id="241" name="">
             <a:extLst xmlns:a="http://schemas.openxmlformats.org/drawingml/2006/main">
               <a:ext uri="{FF2B5EF4-FFF2-40B4-BE49-F238E27FC236}">
-                <a16:creationId xmlns:a16="http://schemas.microsoft.com/office/drawing/2014/main" id="{036C5703-02C9-4567-BBF9-3C1AA8FE9188}"/>
+                <a16:creationId xmlns:a16="http://schemas.microsoft.com/office/drawing/2014/main" id="{089C69A9-482F-44B7-B63B-73B3B5DD7063}"/>
               </a:ext>
             </a:extLst>
           </p:cNvPr>
@@ -20523,7 +21455,7 @@
           <p:cNvPr id="242" name="">
             <a:extLst xmlns:a="http://schemas.openxmlformats.org/drawingml/2006/main">
               <a:ext uri="{FF2B5EF4-FFF2-40B4-BE49-F238E27FC236}">
-                <a16:creationId xmlns:a16="http://schemas.microsoft.com/office/drawing/2014/main" id="{B1B28019-7145-4DE5-A669-D7A2C2156532}"/>
+                <a16:creationId xmlns:a16="http://schemas.microsoft.com/office/drawing/2014/main" id="{33437616-FD33-4DDF-B5DD-D89218C39FA7}"/>
               </a:ext>
             </a:extLst>
           </p:cNvPr>
@@ -20556,7 +21488,7 @@
           <p:cNvPr id="243" name="">
             <a:extLst xmlns:a="http://schemas.openxmlformats.org/drawingml/2006/main">
               <a:ext uri="{FF2B5EF4-FFF2-40B4-BE49-F238E27FC236}">
-                <a16:creationId xmlns:a16="http://schemas.microsoft.com/office/drawing/2014/main" id="{233FEC31-0A66-4794-932B-79BC05A421BF}"/>
+                <a16:creationId xmlns:a16="http://schemas.microsoft.com/office/drawing/2014/main" id="{16C746AD-9F3A-4116-B9CF-529B706C1917}"/>
               </a:ext>
             </a:extLst>
           </p:cNvPr>
@@ -20589,7 +21521,7 @@
           <p:cNvPr id="244" name="">
             <a:extLst xmlns:a="http://schemas.openxmlformats.org/drawingml/2006/main">
               <a:ext uri="{FF2B5EF4-FFF2-40B4-BE49-F238E27FC236}">
-                <a16:creationId xmlns:a16="http://schemas.microsoft.com/office/drawing/2014/main" id="{B87B8AEB-3F77-410A-9DFE-50F6A6FF0E54}"/>
+                <a16:creationId xmlns:a16="http://schemas.microsoft.com/office/drawing/2014/main" id="{174DEDD2-448A-4D5F-8B5B-635FBCD71680}"/>
               </a:ext>
             </a:extLst>
           </p:cNvPr>
@@ -20622,7 +21554,7 @@
           <p:cNvPr id="245" name="">
             <a:extLst xmlns:a="http://schemas.openxmlformats.org/drawingml/2006/main">
               <a:ext uri="{FF2B5EF4-FFF2-40B4-BE49-F238E27FC236}">
-                <a16:creationId xmlns:a16="http://schemas.microsoft.com/office/drawing/2014/main" id="{FF4C3BB0-67E5-4ECD-9B96-2EF2FAC3B158}"/>
+                <a16:creationId xmlns:a16="http://schemas.microsoft.com/office/drawing/2014/main" id="{6C778099-C263-4A30-906D-D15B61FE7F28}"/>
               </a:ext>
             </a:extLst>
           </p:cNvPr>
@@ -20655,7 +21587,7 @@
           <p:cNvPr id="246" name="">
             <a:extLst xmlns:a="http://schemas.openxmlformats.org/drawingml/2006/main">
               <a:ext uri="{FF2B5EF4-FFF2-40B4-BE49-F238E27FC236}">
-                <a16:creationId xmlns:a16="http://schemas.microsoft.com/office/drawing/2014/main" id="{2C95AE18-8363-4E64-8E8A-0BC6E129B656}"/>
+                <a16:creationId xmlns:a16="http://schemas.microsoft.com/office/drawing/2014/main" id="{5EE86D8A-D50E-4DEE-A3B8-E1C498B236DE}"/>
               </a:ext>
             </a:extLst>
           </p:cNvPr>
@@ -20688,7 +21620,7 @@
           <p:cNvPr id="247" name="">
             <a:extLst xmlns:a="http://schemas.openxmlformats.org/drawingml/2006/main">
               <a:ext uri="{FF2B5EF4-FFF2-40B4-BE49-F238E27FC236}">
-                <a16:creationId xmlns:a16="http://schemas.microsoft.com/office/drawing/2014/main" id="{9E6BE5B4-0E63-42F5-9C05-E330BD9209C8}"/>
+                <a16:creationId xmlns:a16="http://schemas.microsoft.com/office/drawing/2014/main" id="{A8F272F9-EBDF-4BAC-8F07-7F23D01FE38F}"/>
               </a:ext>
             </a:extLst>
           </p:cNvPr>
@@ -20721,7 +21653,7 @@
           <p:cNvPr id="248" name="">
             <a:extLst xmlns:a="http://schemas.openxmlformats.org/drawingml/2006/main">
               <a:ext uri="{FF2B5EF4-FFF2-40B4-BE49-F238E27FC236}">
-                <a16:creationId xmlns:a16="http://schemas.microsoft.com/office/drawing/2014/main" id="{15862A96-CE22-45EE-A256-A1B289E385F2}"/>
+                <a16:creationId xmlns:a16="http://schemas.microsoft.com/office/drawing/2014/main" id="{B07755A1-3657-4A55-B91B-777193FB896A}"/>
               </a:ext>
             </a:extLst>
           </p:cNvPr>
@@ -20754,7 +21686,7 @@
           <p:cNvPr id="249" name="">
             <a:extLst xmlns:a="http://schemas.openxmlformats.org/drawingml/2006/main">
               <a:ext uri="{FF2B5EF4-FFF2-40B4-BE49-F238E27FC236}">
-                <a16:creationId xmlns:a16="http://schemas.microsoft.com/office/drawing/2014/main" id="{B4215503-5ED6-494D-9482-7390E31AF77C}"/>
+                <a16:creationId xmlns:a16="http://schemas.microsoft.com/office/drawing/2014/main" id="{4E84E880-4A5A-4772-892D-53B185F53766}"/>
               </a:ext>
             </a:extLst>
           </p:cNvPr>
@@ -20787,7 +21719,7 @@
           <p:cNvPr id="250" name="">
             <a:extLst xmlns:a="http://schemas.openxmlformats.org/drawingml/2006/main">
               <a:ext uri="{FF2B5EF4-FFF2-40B4-BE49-F238E27FC236}">
-                <a16:creationId xmlns:a16="http://schemas.microsoft.com/office/drawing/2014/main" id="{255727A8-91BA-43A9-998F-222A62482D5E}"/>
+                <a16:creationId xmlns:a16="http://schemas.microsoft.com/office/drawing/2014/main" id="{81A00170-C2DA-4C0D-AD7F-6BFFECCF05C2}"/>
               </a:ext>
             </a:extLst>
           </p:cNvPr>
@@ -20820,7 +21752,7 @@
           <p:cNvPr id="251" name="">
             <a:extLst xmlns:a="http://schemas.openxmlformats.org/drawingml/2006/main">
               <a:ext uri="{FF2B5EF4-FFF2-40B4-BE49-F238E27FC236}">
-                <a16:creationId xmlns:a16="http://schemas.microsoft.com/office/drawing/2014/main" id="{2F1F5CA1-DF94-49E0-9C31-D87AC09FFDC7}"/>
+                <a16:creationId xmlns:a16="http://schemas.microsoft.com/office/drawing/2014/main" id="{E6789912-6D36-43B6-BB3F-A6425FAE3719}"/>
               </a:ext>
             </a:extLst>
           </p:cNvPr>
@@ -20853,7 +21785,7 @@
           <p:cNvPr id="252" name="">
             <a:extLst xmlns:a="http://schemas.openxmlformats.org/drawingml/2006/main">
               <a:ext uri="{FF2B5EF4-FFF2-40B4-BE49-F238E27FC236}">
-                <a16:creationId xmlns:a16="http://schemas.microsoft.com/office/drawing/2014/main" id="{B6BA7752-2C1C-4344-A8DA-C1F318423078}"/>
+                <a16:creationId xmlns:a16="http://schemas.microsoft.com/office/drawing/2014/main" id="{D0C56E20-75AF-4E1E-941D-3FC2F7511EE4}"/>
               </a:ext>
             </a:extLst>
           </p:cNvPr>
@@ -20886,7 +21818,7 @@
           <p:cNvPr id="253" name="">
             <a:extLst xmlns:a="http://schemas.openxmlformats.org/drawingml/2006/main">
               <a:ext uri="{FF2B5EF4-FFF2-40B4-BE49-F238E27FC236}">
-                <a16:creationId xmlns:a16="http://schemas.microsoft.com/office/drawing/2014/main" id="{5C468DD6-F765-4A68-AF86-6545B970EED4}"/>
+                <a16:creationId xmlns:a16="http://schemas.microsoft.com/office/drawing/2014/main" id="{BC2C4AD8-3178-4D83-905D-4A4E4D4A20BF}"/>
               </a:ext>
             </a:extLst>
           </p:cNvPr>
@@ -20919,7 +21851,7 @@
           <p:cNvPr id="254" name="">
             <a:extLst xmlns:a="http://schemas.openxmlformats.org/drawingml/2006/main">
               <a:ext uri="{FF2B5EF4-FFF2-40B4-BE49-F238E27FC236}">
-                <a16:creationId xmlns:a16="http://schemas.microsoft.com/office/drawing/2014/main" id="{AA6876A0-3A5E-45A2-B926-156343E8F913}"/>
+                <a16:creationId xmlns:a16="http://schemas.microsoft.com/office/drawing/2014/main" id="{D4FC998E-78CE-4909-B93E-F7244F98B88C}"/>
               </a:ext>
             </a:extLst>
           </p:cNvPr>
@@ -20952,7 +21884,7 @@
           <p:cNvPr id="255" name="">
             <a:extLst xmlns:a="http://schemas.openxmlformats.org/drawingml/2006/main">
               <a:ext uri="{FF2B5EF4-FFF2-40B4-BE49-F238E27FC236}">
-                <a16:creationId xmlns:a16="http://schemas.microsoft.com/office/drawing/2014/main" id="{61A14C1B-71DE-43B9-B8E7-78B3F3487D6C}"/>
+                <a16:creationId xmlns:a16="http://schemas.microsoft.com/office/drawing/2014/main" id="{A1A8DA74-4ACE-4C80-8BF1-931C378E5B76}"/>
               </a:ext>
             </a:extLst>
           </p:cNvPr>
@@ -20985,7 +21917,7 @@
           <p:cNvPr id="256" name="">
             <a:extLst xmlns:a="http://schemas.openxmlformats.org/drawingml/2006/main">
               <a:ext uri="{FF2B5EF4-FFF2-40B4-BE49-F238E27FC236}">
-                <a16:creationId xmlns:a16="http://schemas.microsoft.com/office/drawing/2014/main" id="{BC01A6CF-DEFB-4053-AE38-62015B262FFC}"/>
+                <a16:creationId xmlns:a16="http://schemas.microsoft.com/office/drawing/2014/main" id="{5B147FD5-0A67-45D7-A5A4-B4C3441D59E2}"/>
               </a:ext>
             </a:extLst>
           </p:cNvPr>
@@ -21018,7 +21950,7 @@
           <p:cNvPr id="257" name="">
             <a:extLst xmlns:a="http://schemas.openxmlformats.org/drawingml/2006/main">
               <a:ext uri="{FF2B5EF4-FFF2-40B4-BE49-F238E27FC236}">
-                <a16:creationId xmlns:a16="http://schemas.microsoft.com/office/drawing/2014/main" id="{80CC8E59-DB16-418A-B021-439C6F8DC75D}"/>
+                <a16:creationId xmlns:a16="http://schemas.microsoft.com/office/drawing/2014/main" id="{C7E5275C-439E-4471-8D79-3F8FB32C5B3F}"/>
               </a:ext>
             </a:extLst>
           </p:cNvPr>
@@ -21051,7 +21983,7 @@
           <p:cNvPr id="258" name="">
             <a:extLst xmlns:a="http://schemas.openxmlformats.org/drawingml/2006/main">
               <a:ext uri="{FF2B5EF4-FFF2-40B4-BE49-F238E27FC236}">
-                <a16:creationId xmlns:a16="http://schemas.microsoft.com/office/drawing/2014/main" id="{4679F93F-7C1C-4A33-83CB-3EFB96B1101C}"/>
+                <a16:creationId xmlns:a16="http://schemas.microsoft.com/office/drawing/2014/main" id="{4789EEA2-E435-4016-99E0-4C2CA46185B5}"/>
               </a:ext>
             </a:extLst>
           </p:cNvPr>
@@ -21084,7 +22016,7 @@
           <p:cNvPr id="259" name="">
             <a:extLst xmlns:a="http://schemas.openxmlformats.org/drawingml/2006/main">
               <a:ext uri="{FF2B5EF4-FFF2-40B4-BE49-F238E27FC236}">
-                <a16:creationId xmlns:a16="http://schemas.microsoft.com/office/drawing/2014/main" id="{B4BC965E-6893-48EE-9F94-FBCBBE850684}"/>
+                <a16:creationId xmlns:a16="http://schemas.microsoft.com/office/drawing/2014/main" id="{7A092013-043A-47E4-AAAB-8EA0C9C78637}"/>
               </a:ext>
             </a:extLst>
           </p:cNvPr>
@@ -21117,7 +22049,7 @@
           <p:cNvPr id="260" name="">
             <a:extLst xmlns:a="http://schemas.openxmlformats.org/drawingml/2006/main">
               <a:ext uri="{FF2B5EF4-FFF2-40B4-BE49-F238E27FC236}">
-                <a16:creationId xmlns:a16="http://schemas.microsoft.com/office/drawing/2014/main" id="{753DF5F9-62F5-490B-AD73-EDF1E639D4D7}"/>
+                <a16:creationId xmlns:a16="http://schemas.microsoft.com/office/drawing/2014/main" id="{D1C437C3-858A-453A-8977-DA388EE9D482}"/>
               </a:ext>
             </a:extLst>
           </p:cNvPr>
@@ -21150,7 +22082,7 @@
           <p:cNvPr id="261" name="">
             <a:extLst xmlns:a="http://schemas.openxmlformats.org/drawingml/2006/main">
               <a:ext uri="{FF2B5EF4-FFF2-40B4-BE49-F238E27FC236}">
-                <a16:creationId xmlns:a16="http://schemas.microsoft.com/office/drawing/2014/main" id="{8C56A895-01EE-4047-BC5A-6D246364A8EB}"/>
+                <a16:creationId xmlns:a16="http://schemas.microsoft.com/office/drawing/2014/main" id="{493C49FA-FA36-4731-AE48-3D214DE446FE}"/>
               </a:ext>
             </a:extLst>
           </p:cNvPr>
@@ -21183,7 +22115,7 @@
           <p:cNvPr id="262" name="">
             <a:extLst xmlns:a="http://schemas.openxmlformats.org/drawingml/2006/main">
               <a:ext uri="{FF2B5EF4-FFF2-40B4-BE49-F238E27FC236}">
-                <a16:creationId xmlns:a16="http://schemas.microsoft.com/office/drawing/2014/main" id="{95202678-EFD5-46D1-B910-A408E5A5C998}"/>
+                <a16:creationId xmlns:a16="http://schemas.microsoft.com/office/drawing/2014/main" id="{D80C07B7-2404-47B5-95C1-42B270F44420}"/>
               </a:ext>
             </a:extLst>
           </p:cNvPr>
@@ -21216,7 +22148,7 @@
           <p:cNvPr id="263" name="">
             <a:extLst xmlns:a="http://schemas.openxmlformats.org/drawingml/2006/main">
               <a:ext uri="{FF2B5EF4-FFF2-40B4-BE49-F238E27FC236}">
-                <a16:creationId xmlns:a16="http://schemas.microsoft.com/office/drawing/2014/main" id="{FB4368C1-2D0D-4FD1-B2EA-10D3427CE2BB}"/>
+                <a16:creationId xmlns:a16="http://schemas.microsoft.com/office/drawing/2014/main" id="{D58578D4-B433-411F-B60D-5F3F15D1AE58}"/>
               </a:ext>
             </a:extLst>
           </p:cNvPr>
@@ -21249,7 +22181,7 @@
           <p:cNvPr id="264" name="">
             <a:extLst xmlns:a="http://schemas.openxmlformats.org/drawingml/2006/main">
               <a:ext uri="{FF2B5EF4-FFF2-40B4-BE49-F238E27FC236}">
-                <a16:creationId xmlns:a16="http://schemas.microsoft.com/office/drawing/2014/main" id="{1FC3FB40-3AD7-4DE7-AE5C-2FBE5F69D672}"/>
+                <a16:creationId xmlns:a16="http://schemas.microsoft.com/office/drawing/2014/main" id="{2C02DBCD-1FA2-473E-85AF-07DA551E241A}"/>
               </a:ext>
             </a:extLst>
           </p:cNvPr>
@@ -21282,7 +22214,7 @@
           <p:cNvPr id="265" name="">
             <a:extLst xmlns:a="http://schemas.openxmlformats.org/drawingml/2006/main">
               <a:ext uri="{FF2B5EF4-FFF2-40B4-BE49-F238E27FC236}">
-                <a16:creationId xmlns:a16="http://schemas.microsoft.com/office/drawing/2014/main" id="{FA7EDCFF-08E4-4CEF-8C24-108D22AFB195}"/>
+                <a16:creationId xmlns:a16="http://schemas.microsoft.com/office/drawing/2014/main" id="{39D46B4B-95A6-45C6-A863-654EE946004C}"/>
               </a:ext>
             </a:extLst>
           </p:cNvPr>
@@ -21315,7 +22247,7 @@
           <p:cNvPr id="266" name="">
             <a:extLst xmlns:a="http://schemas.openxmlformats.org/drawingml/2006/main">
               <a:ext uri="{FF2B5EF4-FFF2-40B4-BE49-F238E27FC236}">
-                <a16:creationId xmlns:a16="http://schemas.microsoft.com/office/drawing/2014/main" id="{A14FE15C-1F07-4CF0-A8A9-D147FD5082E4}"/>
+                <a16:creationId xmlns:a16="http://schemas.microsoft.com/office/drawing/2014/main" id="{97111E63-0EAA-43D9-8209-787A49DB2B0A}"/>
               </a:ext>
             </a:extLst>
           </p:cNvPr>
@@ -21348,7 +22280,7 @@
           <p:cNvPr id="267" name="">
             <a:extLst xmlns:a="http://schemas.openxmlformats.org/drawingml/2006/main">
               <a:ext uri="{FF2B5EF4-FFF2-40B4-BE49-F238E27FC236}">
-                <a16:creationId xmlns:a16="http://schemas.microsoft.com/office/drawing/2014/main" id="{FFA5E0A1-B22A-41DC-B14E-5CC4F4A4D3C8}"/>
+                <a16:creationId xmlns:a16="http://schemas.microsoft.com/office/drawing/2014/main" id="{2E125BA4-43D9-44DA-BC46-563A3359EDEE}"/>
               </a:ext>
             </a:extLst>
           </p:cNvPr>
@@ -21381,7 +22313,7 @@
           <p:cNvPr id="268" name="">
             <a:extLst xmlns:a="http://schemas.openxmlformats.org/drawingml/2006/main">
               <a:ext uri="{FF2B5EF4-FFF2-40B4-BE49-F238E27FC236}">
-                <a16:creationId xmlns:a16="http://schemas.microsoft.com/office/drawing/2014/main" id="{13F93D06-3D5C-4235-848F-D5EEE4954948}"/>
+                <a16:creationId xmlns:a16="http://schemas.microsoft.com/office/drawing/2014/main" id="{4499F1E2-F3A6-4445-9FD1-5C201402B6DE}"/>
               </a:ext>
             </a:extLst>
           </p:cNvPr>
@@ -21414,7 +22346,7 @@
           <p:cNvPr id="269" name="">
             <a:extLst xmlns:a="http://schemas.openxmlformats.org/drawingml/2006/main">
               <a:ext uri="{FF2B5EF4-FFF2-40B4-BE49-F238E27FC236}">
-                <a16:creationId xmlns:a16="http://schemas.microsoft.com/office/drawing/2014/main" id="{DEB42CD4-6BA3-4DDA-9E65-5A237A77E269}"/>
+                <a16:creationId xmlns:a16="http://schemas.microsoft.com/office/drawing/2014/main" id="{0D84B9CB-E717-4880-AD7D-7A4C4D8CD858}"/>
               </a:ext>
             </a:extLst>
           </p:cNvPr>
@@ -21447,7 +22379,7 @@
           <p:cNvPr id="270" name="">
             <a:extLst xmlns:a="http://schemas.openxmlformats.org/drawingml/2006/main">
               <a:ext uri="{FF2B5EF4-FFF2-40B4-BE49-F238E27FC236}">
-                <a16:creationId xmlns:a16="http://schemas.microsoft.com/office/drawing/2014/main" id="{C13ADDD6-7C37-422E-842C-785F10872466}"/>
+                <a16:creationId xmlns:a16="http://schemas.microsoft.com/office/drawing/2014/main" id="{71498661-8D5D-46E3-B5BB-74103E6F0BBA}"/>
               </a:ext>
             </a:extLst>
           </p:cNvPr>
@@ -21480,7 +22412,7 @@
           <p:cNvPr id="271" name="">
             <a:extLst xmlns:a="http://schemas.openxmlformats.org/drawingml/2006/main">
               <a:ext uri="{FF2B5EF4-FFF2-40B4-BE49-F238E27FC236}">
-                <a16:creationId xmlns:a16="http://schemas.microsoft.com/office/drawing/2014/main" id="{43D20A76-F600-414C-8F15-360E43D84D27}"/>
+                <a16:creationId xmlns:a16="http://schemas.microsoft.com/office/drawing/2014/main" id="{7B94DED7-7A0C-4E04-88BC-1D83F0FE27C8}"/>
               </a:ext>
             </a:extLst>
           </p:cNvPr>
@@ -21513,7 +22445,7 @@
           <p:cNvPr id="272" name="">
             <a:extLst xmlns:a="http://schemas.openxmlformats.org/drawingml/2006/main">
               <a:ext uri="{FF2B5EF4-FFF2-40B4-BE49-F238E27FC236}">
-                <a16:creationId xmlns:a16="http://schemas.microsoft.com/office/drawing/2014/main" id="{1E814023-9904-43A7-A0C5-60DFB4F5672D}"/>
+                <a16:creationId xmlns:a16="http://schemas.microsoft.com/office/drawing/2014/main" id="{3835466D-4452-4580-8FD4-1D5EC9650661}"/>
               </a:ext>
             </a:extLst>
           </p:cNvPr>
@@ -21546,7 +22478,7 @@
           <p:cNvPr id="273" name="">
             <a:extLst xmlns:a="http://schemas.openxmlformats.org/drawingml/2006/main">
               <a:ext uri="{FF2B5EF4-FFF2-40B4-BE49-F238E27FC236}">
-                <a16:creationId xmlns:a16="http://schemas.microsoft.com/office/drawing/2014/main" id="{DA77B428-74A5-4E8E-AE0C-8224AF7EE4C8}"/>
+                <a16:creationId xmlns:a16="http://schemas.microsoft.com/office/drawing/2014/main" id="{4A425CD1-1DC6-4AF0-96E5-F15BE052334C}"/>
               </a:ext>
             </a:extLst>
           </p:cNvPr>
@@ -21579,7 +22511,7 @@
           <p:cNvPr id="274" name="">
             <a:extLst xmlns:a="http://schemas.openxmlformats.org/drawingml/2006/main">
               <a:ext uri="{FF2B5EF4-FFF2-40B4-BE49-F238E27FC236}">
-                <a16:creationId xmlns:a16="http://schemas.microsoft.com/office/drawing/2014/main" id="{D283C71F-038D-4A90-9F8C-E3B10E0BAEB2}"/>
+                <a16:creationId xmlns:a16="http://schemas.microsoft.com/office/drawing/2014/main" id="{18E3B68C-5839-49E2-B5F4-189261B0D964}"/>
               </a:ext>
             </a:extLst>
           </p:cNvPr>
@@ -21612,7 +22544,7 @@
           <p:cNvPr id="275" name="">
             <a:extLst xmlns:a="http://schemas.openxmlformats.org/drawingml/2006/main">
               <a:ext uri="{FF2B5EF4-FFF2-40B4-BE49-F238E27FC236}">
-                <a16:creationId xmlns:a16="http://schemas.microsoft.com/office/drawing/2014/main" id="{6A97008A-C3C8-42E0-A5F2-048CFE8DCB8C}"/>
+                <a16:creationId xmlns:a16="http://schemas.microsoft.com/office/drawing/2014/main" id="{257828AF-C18F-4B2F-87AE-4FA1B50CBFD1}"/>
               </a:ext>
             </a:extLst>
           </p:cNvPr>
@@ -21645,7 +22577,7 @@
           <p:cNvPr id="276" name="">
             <a:extLst xmlns:a="http://schemas.openxmlformats.org/drawingml/2006/main">
               <a:ext uri="{FF2B5EF4-FFF2-40B4-BE49-F238E27FC236}">
-                <a16:creationId xmlns:a16="http://schemas.microsoft.com/office/drawing/2014/main" id="{ECC05E03-89F0-4FF7-8DF7-F51E580F70F6}"/>
+                <a16:creationId xmlns:a16="http://schemas.microsoft.com/office/drawing/2014/main" id="{FE7350F8-53B5-4471-B577-44EE566BD026}"/>
               </a:ext>
             </a:extLst>
           </p:cNvPr>
@@ -21678,7 +22610,7 @@
           <p:cNvPr id="277" name="">
             <a:extLst xmlns:a="http://schemas.openxmlformats.org/drawingml/2006/main">
               <a:ext uri="{FF2B5EF4-FFF2-40B4-BE49-F238E27FC236}">
-                <a16:creationId xmlns:a16="http://schemas.microsoft.com/office/drawing/2014/main" id="{2E098698-7F12-495E-8542-D3DF2BD55C25}"/>
+                <a16:creationId xmlns:a16="http://schemas.microsoft.com/office/drawing/2014/main" id="{9B751E1B-DC1E-487C-B49F-5AE79AD98E68}"/>
               </a:ext>
             </a:extLst>
           </p:cNvPr>
@@ -21711,7 +22643,7 @@
           <p:cNvPr id="278" name="">
             <a:extLst xmlns:a="http://schemas.openxmlformats.org/drawingml/2006/main">
               <a:ext uri="{FF2B5EF4-FFF2-40B4-BE49-F238E27FC236}">
-                <a16:creationId xmlns:a16="http://schemas.microsoft.com/office/drawing/2014/main" id="{BC460C51-966E-4A84-A33A-50EA5D5FECE3}"/>
+                <a16:creationId xmlns:a16="http://schemas.microsoft.com/office/drawing/2014/main" id="{74AC2D83-523F-4FBC-A988-AC9358F840DD}"/>
               </a:ext>
             </a:extLst>
           </p:cNvPr>
@@ -21744,7 +22676,7 @@
           <p:cNvPr id="279" name="">
             <a:extLst xmlns:a="http://schemas.openxmlformats.org/drawingml/2006/main">
               <a:ext uri="{FF2B5EF4-FFF2-40B4-BE49-F238E27FC236}">
-                <a16:creationId xmlns:a16="http://schemas.microsoft.com/office/drawing/2014/main" id="{D020D6A2-2C55-4224-89BF-EDD5F1E170CE}"/>
+                <a16:creationId xmlns:a16="http://schemas.microsoft.com/office/drawing/2014/main" id="{36C543F5-A6D2-4F13-9E73-23BC593EA54A}"/>
               </a:ext>
             </a:extLst>
           </p:cNvPr>
@@ -21777,7 +22709,7 @@
           <p:cNvPr id="280" name="">
             <a:extLst xmlns:a="http://schemas.openxmlformats.org/drawingml/2006/main">
               <a:ext uri="{FF2B5EF4-FFF2-40B4-BE49-F238E27FC236}">
-                <a16:creationId xmlns:a16="http://schemas.microsoft.com/office/drawing/2014/main" id="{2C010763-3E2F-4BB9-AC07-D3BE9134EE6B}"/>
+                <a16:creationId xmlns:a16="http://schemas.microsoft.com/office/drawing/2014/main" id="{8B3758AD-5F21-43CF-B70E-1E5894897D7C}"/>
               </a:ext>
             </a:extLst>
           </p:cNvPr>
@@ -21810,7 +22742,7 @@
           <p:cNvPr id="281" name="">
             <a:extLst xmlns:a="http://schemas.openxmlformats.org/drawingml/2006/main">
               <a:ext uri="{FF2B5EF4-FFF2-40B4-BE49-F238E27FC236}">
-                <a16:creationId xmlns:a16="http://schemas.microsoft.com/office/drawing/2014/main" id="{EEF7F61F-224F-446B-AFD3-1BA7DCAEE5C7}"/>
+                <a16:creationId xmlns:a16="http://schemas.microsoft.com/office/drawing/2014/main" id="{88481DD1-E3F8-4841-B9E2-1B1276433478}"/>
               </a:ext>
             </a:extLst>
           </p:cNvPr>
@@ -21843,7 +22775,7 @@
           <p:cNvPr id="282" name="">
             <a:extLst xmlns:a="http://schemas.openxmlformats.org/drawingml/2006/main">
               <a:ext uri="{FF2B5EF4-FFF2-40B4-BE49-F238E27FC236}">
-                <a16:creationId xmlns:a16="http://schemas.microsoft.com/office/drawing/2014/main" id="{D5222ABD-6454-434B-AB46-C7B12A2E3746}"/>
+                <a16:creationId xmlns:a16="http://schemas.microsoft.com/office/drawing/2014/main" id="{ED8FFE91-1D06-4997-83CF-30C83E9D6EF8}"/>
               </a:ext>
             </a:extLst>
           </p:cNvPr>
@@ -21876,7 +22808,7 @@
           <p:cNvPr id="283" name="">
             <a:extLst xmlns:a="http://schemas.openxmlformats.org/drawingml/2006/main">
               <a:ext uri="{FF2B5EF4-FFF2-40B4-BE49-F238E27FC236}">
-                <a16:creationId xmlns:a16="http://schemas.microsoft.com/office/drawing/2014/main" id="{BA80D6A5-AB76-439B-9ABA-C17980A26D18}"/>
+                <a16:creationId xmlns:a16="http://schemas.microsoft.com/office/drawing/2014/main" id="{56A4A624-FA58-4187-86C6-86C9186F9898}"/>
               </a:ext>
             </a:extLst>
           </p:cNvPr>
@@ -21909,7 +22841,7 @@
           <p:cNvPr id="284" name="">
             <a:extLst xmlns:a="http://schemas.openxmlformats.org/drawingml/2006/main">
               <a:ext uri="{FF2B5EF4-FFF2-40B4-BE49-F238E27FC236}">
-                <a16:creationId xmlns:a16="http://schemas.microsoft.com/office/drawing/2014/main" id="{6F0AD7FC-98D2-49DB-BC44-BA47CFF13DD9}"/>
+                <a16:creationId xmlns:a16="http://schemas.microsoft.com/office/drawing/2014/main" id="{C78BF0F1-EBA7-4844-B38D-BB366FB61CE0}"/>
               </a:ext>
             </a:extLst>
           </p:cNvPr>
@@ -21942,7 +22874,7 @@
           <p:cNvPr id="285" name="">
             <a:extLst xmlns:a="http://schemas.openxmlformats.org/drawingml/2006/main">
               <a:ext uri="{FF2B5EF4-FFF2-40B4-BE49-F238E27FC236}">
-                <a16:creationId xmlns:a16="http://schemas.microsoft.com/office/drawing/2014/main" id="{4347BD58-B62C-46F0-92F0-F84AD6885057}"/>
+                <a16:creationId xmlns:a16="http://schemas.microsoft.com/office/drawing/2014/main" id="{305C7B04-01F4-45B9-BD9E-2AB64E7F32CA}"/>
               </a:ext>
             </a:extLst>
           </p:cNvPr>
@@ -21975,7 +22907,7 @@
           <p:cNvPr id="286" name="">
             <a:extLst xmlns:a="http://schemas.openxmlformats.org/drawingml/2006/main">
               <a:ext uri="{FF2B5EF4-FFF2-40B4-BE49-F238E27FC236}">
-                <a16:creationId xmlns:a16="http://schemas.microsoft.com/office/drawing/2014/main" id="{6EA3AE6C-D371-4954-AC20-4D977B78D962}"/>
+                <a16:creationId xmlns:a16="http://schemas.microsoft.com/office/drawing/2014/main" id="{4AD49358-C91D-45F2-8E7B-E7816352A16D}"/>
               </a:ext>
             </a:extLst>
           </p:cNvPr>
@@ -22008,7 +22940,7 @@
           <p:cNvPr id="287" name="">
             <a:extLst xmlns:a="http://schemas.openxmlformats.org/drawingml/2006/main">
               <a:ext uri="{FF2B5EF4-FFF2-40B4-BE49-F238E27FC236}">
-                <a16:creationId xmlns:a16="http://schemas.microsoft.com/office/drawing/2014/main" id="{28131878-2FA1-4095-B8D8-B646F29CB509}"/>
+                <a16:creationId xmlns:a16="http://schemas.microsoft.com/office/drawing/2014/main" id="{7D2B1435-B8AA-4E60-ACAC-50DF4F8C788F}"/>
               </a:ext>
             </a:extLst>
           </p:cNvPr>
@@ -22041,7 +22973,7 @@
           <p:cNvPr id="288" name="">
             <a:extLst xmlns:a="http://schemas.openxmlformats.org/drawingml/2006/main">
               <a:ext uri="{FF2B5EF4-FFF2-40B4-BE49-F238E27FC236}">
-                <a16:creationId xmlns:a16="http://schemas.microsoft.com/office/drawing/2014/main" id="{B071F5D9-6FB0-4DF4-BD0C-286D207D8F69}"/>
+                <a16:creationId xmlns:a16="http://schemas.microsoft.com/office/drawing/2014/main" id="{B9E3F9BC-482B-4A96-A2D1-65271486F969}"/>
               </a:ext>
             </a:extLst>
           </p:cNvPr>
@@ -22072,7 +23004,7 @@
           <p:cNvPr id="289" name="">
             <a:extLst xmlns:a="http://schemas.openxmlformats.org/drawingml/2006/main">
               <a:ext uri="{FF2B5EF4-FFF2-40B4-BE49-F238E27FC236}">
-                <a16:creationId xmlns:a16="http://schemas.microsoft.com/office/drawing/2014/main" id="{1A0B1428-39CE-4760-8817-2265DB534801}"/>
+                <a16:creationId xmlns:a16="http://schemas.microsoft.com/office/drawing/2014/main" id="{A8963EE3-4BCC-4378-9F43-F680734B83A7}"/>
               </a:ext>
             </a:extLst>
           </p:cNvPr>
@@ -22134,7 +23066,7 @@
           <p:cNvPr id="290" name="">
             <a:extLst xmlns:a="http://schemas.openxmlformats.org/drawingml/2006/main">
               <a:ext uri="{FF2B5EF4-FFF2-40B4-BE49-F238E27FC236}">
-                <a16:creationId xmlns:a16="http://schemas.microsoft.com/office/drawing/2014/main" id="{7ECAA2A7-0198-415E-A847-BECAA6479AA2}"/>
+                <a16:creationId xmlns:a16="http://schemas.microsoft.com/office/drawing/2014/main" id="{A1DE65DC-9459-498A-8DF7-600098BA1B10}"/>
               </a:ext>
             </a:extLst>
           </p:cNvPr>
@@ -22165,7 +23097,7 @@
           <p:cNvPr id="291" name="">
             <a:extLst xmlns:a="http://schemas.openxmlformats.org/drawingml/2006/main">
               <a:ext uri="{FF2B5EF4-FFF2-40B4-BE49-F238E27FC236}">
-                <a16:creationId xmlns:a16="http://schemas.microsoft.com/office/drawing/2014/main" id="{F4F61801-312B-451A-AF8A-0276A4BC65A5}"/>
+                <a16:creationId xmlns:a16="http://schemas.microsoft.com/office/drawing/2014/main" id="{61D7EEC9-A741-495B-A80E-3D86C2111A26}"/>
               </a:ext>
             </a:extLst>
           </p:cNvPr>
@@ -22227,7 +23159,7 @@
           <p:cNvPr id="292" name="">
             <a:extLst xmlns:a="http://schemas.openxmlformats.org/drawingml/2006/main">
               <a:ext uri="{FF2B5EF4-FFF2-40B4-BE49-F238E27FC236}">
-                <a16:creationId xmlns:a16="http://schemas.microsoft.com/office/drawing/2014/main" id="{82E6099F-8D23-4980-ABAA-FCD54F9A00C3}"/>
+                <a16:creationId xmlns:a16="http://schemas.microsoft.com/office/drawing/2014/main" id="{5D5B545D-1BEC-48CF-BE1A-080FC59A319E}"/>
               </a:ext>
             </a:extLst>
           </p:cNvPr>
@@ -22287,7 +23219,7 @@
     </p:spTree>
     <p:extLst>
       <p:ext uri="{BB962C8B-B14F-4D97-AF65-F5344CB8AC3E}">
-        <p14:creationId xmlns:p14="http://schemas.microsoft.com/office/powerpoint/2010/main" val="591495576"/>
+        <p14:creationId xmlns:p14="http://schemas.microsoft.com/office/powerpoint/2010/main" val="1937088829"/>
       </p:ext>
     </p:extLst>
   </p:cSld>
@@ -22318,7 +23250,7 @@
           <p:cNvPr id="1" name="">
             <a:extLst xmlns:a="http://schemas.openxmlformats.org/drawingml/2006/main">
               <a:ext uri="{FF2B5EF4-FFF2-40B4-BE49-F238E27FC236}">
-                <a16:creationId xmlns:a16="http://schemas.microsoft.com/office/drawing/2014/main" id="{D4B7CFBE-DD83-484A-9519-0CBA993803D4}"/>
+                <a16:creationId xmlns:a16="http://schemas.microsoft.com/office/drawing/2014/main" id="{64EF4B45-042A-4628-BF27-B97286623EE1}"/>
               </a:ext>
             </a:extLst>
           </p:cNvPr>
@@ -22380,7 +23312,7 @@
           <p:cNvPr id="2" name="">
             <a:extLst xmlns:a="http://schemas.openxmlformats.org/drawingml/2006/main">
               <a:ext uri="{FF2B5EF4-FFF2-40B4-BE49-F238E27FC236}">
-                <a16:creationId xmlns:a16="http://schemas.microsoft.com/office/drawing/2014/main" id="{1BEF2712-EE8B-4F6B-8CBF-709F7EE91490}"/>
+                <a16:creationId xmlns:a16="http://schemas.microsoft.com/office/drawing/2014/main" id="{9C98F30D-8184-4674-BEEF-46DC5BCABD5F}"/>
               </a:ext>
             </a:extLst>
           </p:cNvPr>
@@ -22442,7 +23374,7 @@
           <p:cNvPr id="3" name="">
             <a:extLst xmlns:a="http://schemas.openxmlformats.org/drawingml/2006/main">
               <a:ext uri="{FF2B5EF4-FFF2-40B4-BE49-F238E27FC236}">
-                <a16:creationId xmlns:a16="http://schemas.microsoft.com/office/drawing/2014/main" id="{5307D168-520A-40E3-ABE8-B7D16887D2B3}"/>
+                <a16:creationId xmlns:a16="http://schemas.microsoft.com/office/drawing/2014/main" id="{80D76DF5-BA88-42DB-A811-83352FCFCA67}"/>
               </a:ext>
             </a:extLst>
           </p:cNvPr>
@@ -22504,7 +23436,7 @@
           <p:cNvPr id="4" name="">
             <a:extLst xmlns:a="http://schemas.openxmlformats.org/drawingml/2006/main">
               <a:ext uri="{FF2B5EF4-FFF2-40B4-BE49-F238E27FC236}">
-                <a16:creationId xmlns:a16="http://schemas.microsoft.com/office/drawing/2014/main" id="{8BA93E88-8A6E-45B5-A967-46641AA1AE9D}"/>
+                <a16:creationId xmlns:a16="http://schemas.microsoft.com/office/drawing/2014/main" id="{70952441-70D9-4C20-97BE-D03ED20433D9}"/>
               </a:ext>
             </a:extLst>
           </p:cNvPr>
@@ -22539,7 +23471,7 @@
           <p:cNvPr id="5" name="">
             <a:extLst xmlns:a="http://schemas.openxmlformats.org/drawingml/2006/main">
               <a:ext uri="{FF2B5EF4-FFF2-40B4-BE49-F238E27FC236}">
-                <a16:creationId xmlns:a16="http://schemas.microsoft.com/office/drawing/2014/main" id="{B119F2E7-C529-4110-8541-232D88B1CB83}"/>
+                <a16:creationId xmlns:a16="http://schemas.microsoft.com/office/drawing/2014/main" id="{50D323B9-8D98-417E-98CB-7BDA68E5196C}"/>
               </a:ext>
             </a:extLst>
           </p:cNvPr>
@@ -22572,7 +23504,7 @@
           <p:cNvPr id="6" name="">
             <a:extLst xmlns:a="http://schemas.openxmlformats.org/drawingml/2006/main">
               <a:ext uri="{FF2B5EF4-FFF2-40B4-BE49-F238E27FC236}">
-                <a16:creationId xmlns:a16="http://schemas.microsoft.com/office/drawing/2014/main" id="{17D6E0A6-E617-4C45-B9FF-77A30D5C360F}"/>
+                <a16:creationId xmlns:a16="http://schemas.microsoft.com/office/drawing/2014/main" id="{E29E16F4-480D-4436-8081-521012636A9C}"/>
               </a:ext>
             </a:extLst>
           </p:cNvPr>
@@ -22605,7 +23537,7 @@
           <p:cNvPr id="7" name="">
             <a:extLst xmlns:a="http://schemas.openxmlformats.org/drawingml/2006/main">
               <a:ext uri="{FF2B5EF4-FFF2-40B4-BE49-F238E27FC236}">
-                <a16:creationId xmlns:a16="http://schemas.microsoft.com/office/drawing/2014/main" id="{3BA4743E-6D1F-4147-9170-3B0583A6A98F}"/>
+                <a16:creationId xmlns:a16="http://schemas.microsoft.com/office/drawing/2014/main" id="{277C520A-220F-4A75-960D-F97F091D4C68}"/>
               </a:ext>
             </a:extLst>
           </p:cNvPr>
@@ -22638,7 +23570,7 @@
           <p:cNvPr id="8" name="">
             <a:extLst xmlns:a="http://schemas.openxmlformats.org/drawingml/2006/main">
               <a:ext uri="{FF2B5EF4-FFF2-40B4-BE49-F238E27FC236}">
-                <a16:creationId xmlns:a16="http://schemas.microsoft.com/office/drawing/2014/main" id="{18C47200-0262-4812-86A5-1E38AF788BB5}"/>
+                <a16:creationId xmlns:a16="http://schemas.microsoft.com/office/drawing/2014/main" id="{9BCE3F67-3F0E-4A4D-93F3-214F16960252}"/>
               </a:ext>
             </a:extLst>
           </p:cNvPr>
@@ -22671,7 +23603,7 @@
           <p:cNvPr id="9" name="">
             <a:extLst xmlns:a="http://schemas.openxmlformats.org/drawingml/2006/main">
               <a:ext uri="{FF2B5EF4-FFF2-40B4-BE49-F238E27FC236}">
-                <a16:creationId xmlns:a16="http://schemas.microsoft.com/office/drawing/2014/main" id="{C28D8278-41DC-4CAE-87CF-2C5B5A8FDC6D}"/>
+                <a16:creationId xmlns:a16="http://schemas.microsoft.com/office/drawing/2014/main" id="{6AEAA939-257B-4054-964A-4E22D52A5BA9}"/>
               </a:ext>
             </a:extLst>
           </p:cNvPr>
@@ -22704,7 +23636,7 @@
           <p:cNvPr id="10" name="">
             <a:extLst xmlns:a="http://schemas.openxmlformats.org/drawingml/2006/main">
               <a:ext uri="{FF2B5EF4-FFF2-40B4-BE49-F238E27FC236}">
-                <a16:creationId xmlns:a16="http://schemas.microsoft.com/office/drawing/2014/main" id="{9263A1FD-069B-4EDC-B523-139CC4A05E87}"/>
+                <a16:creationId xmlns:a16="http://schemas.microsoft.com/office/drawing/2014/main" id="{5B86EFAB-F604-49E8-AAEC-4479BCD2501F}"/>
               </a:ext>
             </a:extLst>
           </p:cNvPr>
@@ -22737,7 +23669,7 @@
           <p:cNvPr id="11" name="">
             <a:extLst xmlns:a="http://schemas.openxmlformats.org/drawingml/2006/main">
               <a:ext uri="{FF2B5EF4-FFF2-40B4-BE49-F238E27FC236}">
-                <a16:creationId xmlns:a16="http://schemas.microsoft.com/office/drawing/2014/main" id="{C52EB8AE-C23F-4DAE-A05C-8A2EE3D4C58F}"/>
+                <a16:creationId xmlns:a16="http://schemas.microsoft.com/office/drawing/2014/main" id="{02D05FA5-485D-40DC-A9FC-F33F048FEC54}"/>
               </a:ext>
             </a:extLst>
           </p:cNvPr>
@@ -22770,7 +23702,7 @@
           <p:cNvPr id="12" name="">
             <a:extLst xmlns:a="http://schemas.openxmlformats.org/drawingml/2006/main">
               <a:ext uri="{FF2B5EF4-FFF2-40B4-BE49-F238E27FC236}">
-                <a16:creationId xmlns:a16="http://schemas.microsoft.com/office/drawing/2014/main" id="{B5823D1B-01A0-49B0-87CA-EA4DCF463ACA}"/>
+                <a16:creationId xmlns:a16="http://schemas.microsoft.com/office/drawing/2014/main" id="{2D1C38E3-20D6-4C51-9FD0-45E88885774E}"/>
               </a:ext>
             </a:extLst>
           </p:cNvPr>
@@ -22803,7 +23735,7 @@
           <p:cNvPr id="13" name="">
             <a:extLst xmlns:a="http://schemas.openxmlformats.org/drawingml/2006/main">
               <a:ext uri="{FF2B5EF4-FFF2-40B4-BE49-F238E27FC236}">
-                <a16:creationId xmlns:a16="http://schemas.microsoft.com/office/drawing/2014/main" id="{DC522FB0-60EE-4479-A7B8-4B36E50B8178}"/>
+                <a16:creationId xmlns:a16="http://schemas.microsoft.com/office/drawing/2014/main" id="{5FC54ED5-8901-4993-AB1D-E48FC93A0F1B}"/>
               </a:ext>
             </a:extLst>
           </p:cNvPr>
@@ -22836,7 +23768,7 @@
           <p:cNvPr id="14" name="">
             <a:extLst xmlns:a="http://schemas.openxmlformats.org/drawingml/2006/main">
               <a:ext uri="{FF2B5EF4-FFF2-40B4-BE49-F238E27FC236}">
-                <a16:creationId xmlns:a16="http://schemas.microsoft.com/office/drawing/2014/main" id="{6BFACE99-0863-4A31-A24C-7C1FDC8B4EE0}"/>
+                <a16:creationId xmlns:a16="http://schemas.microsoft.com/office/drawing/2014/main" id="{F64DF750-C265-41EB-B6BE-1C02F23F5373}"/>
               </a:ext>
             </a:extLst>
           </p:cNvPr>
@@ -22869,7 +23801,7 @@
           <p:cNvPr id="15" name="">
             <a:extLst xmlns:a="http://schemas.openxmlformats.org/drawingml/2006/main">
               <a:ext uri="{FF2B5EF4-FFF2-40B4-BE49-F238E27FC236}">
-                <a16:creationId xmlns:a16="http://schemas.microsoft.com/office/drawing/2014/main" id="{A2C38EBE-583B-4290-99BF-0D2D3A1A0C86}"/>
+                <a16:creationId xmlns:a16="http://schemas.microsoft.com/office/drawing/2014/main" id="{14F6FCDD-9561-4E06-A7E4-220A79299610}"/>
               </a:ext>
             </a:extLst>
           </p:cNvPr>
@@ -22902,7 +23834,7 @@
           <p:cNvPr id="16" name="">
             <a:extLst xmlns:a="http://schemas.openxmlformats.org/drawingml/2006/main">
               <a:ext uri="{FF2B5EF4-FFF2-40B4-BE49-F238E27FC236}">
-                <a16:creationId xmlns:a16="http://schemas.microsoft.com/office/drawing/2014/main" id="{35CB96E2-4D0B-47BF-9E6E-0940BAEA37C3}"/>
+                <a16:creationId xmlns:a16="http://schemas.microsoft.com/office/drawing/2014/main" id="{830AFBAD-9CE8-4865-8911-4EC07FDA85FF}"/>
               </a:ext>
             </a:extLst>
           </p:cNvPr>
@@ -22935,7 +23867,7 @@
           <p:cNvPr id="17" name="">
             <a:extLst xmlns:a="http://schemas.openxmlformats.org/drawingml/2006/main">
               <a:ext uri="{FF2B5EF4-FFF2-40B4-BE49-F238E27FC236}">
-                <a16:creationId xmlns:a16="http://schemas.microsoft.com/office/drawing/2014/main" id="{06C1471C-4D8F-49DF-BD60-1CC6EFD29A79}"/>
+                <a16:creationId xmlns:a16="http://schemas.microsoft.com/office/drawing/2014/main" id="{EB492996-5CC1-4290-8709-8CFB493B1C35}"/>
               </a:ext>
             </a:extLst>
           </p:cNvPr>
@@ -22968,7 +23900,7 @@
           <p:cNvPr id="18" name="">
             <a:extLst xmlns:a="http://schemas.openxmlformats.org/drawingml/2006/main">
               <a:ext uri="{FF2B5EF4-FFF2-40B4-BE49-F238E27FC236}">
-                <a16:creationId xmlns:a16="http://schemas.microsoft.com/office/drawing/2014/main" id="{B5799A0D-7856-4705-B735-21B29EDD85A5}"/>
+                <a16:creationId xmlns:a16="http://schemas.microsoft.com/office/drawing/2014/main" id="{0A3FD0D6-F538-4EC9-A7DD-91E66086C458}"/>
               </a:ext>
             </a:extLst>
           </p:cNvPr>
@@ -23001,7 +23933,7 @@
           <p:cNvPr id="19" name="">
             <a:extLst xmlns:a="http://schemas.openxmlformats.org/drawingml/2006/main">
               <a:ext uri="{FF2B5EF4-FFF2-40B4-BE49-F238E27FC236}">
-                <a16:creationId xmlns:a16="http://schemas.microsoft.com/office/drawing/2014/main" id="{95B590E2-A73E-4173-97EF-7CF00F93988E}"/>
+                <a16:creationId xmlns:a16="http://schemas.microsoft.com/office/drawing/2014/main" id="{8712BCF2-A4A2-4F2D-9672-F0FA47C1876F}"/>
               </a:ext>
             </a:extLst>
           </p:cNvPr>
@@ -23034,7 +23966,7 @@
           <p:cNvPr id="20" name="">
             <a:extLst xmlns:a="http://schemas.openxmlformats.org/drawingml/2006/main">
               <a:ext uri="{FF2B5EF4-FFF2-40B4-BE49-F238E27FC236}">
-                <a16:creationId xmlns:a16="http://schemas.microsoft.com/office/drawing/2014/main" id="{BE4667FA-0E75-494E-BE4C-75C06D7F2B28}"/>
+                <a16:creationId xmlns:a16="http://schemas.microsoft.com/office/drawing/2014/main" id="{164710ED-34FD-4464-9D73-0354E82BE56B}"/>
               </a:ext>
             </a:extLst>
           </p:cNvPr>
@@ -23067,7 +23999,7 @@
           <p:cNvPr id="21" name="">
             <a:extLst xmlns:a="http://schemas.openxmlformats.org/drawingml/2006/main">
               <a:ext uri="{FF2B5EF4-FFF2-40B4-BE49-F238E27FC236}">
-                <a16:creationId xmlns:a16="http://schemas.microsoft.com/office/drawing/2014/main" id="{90C8ECA1-B104-4985-A503-067DD9A4DE22}"/>
+                <a16:creationId xmlns:a16="http://schemas.microsoft.com/office/drawing/2014/main" id="{E45A0484-A456-401F-8E79-A0B8C72DAE08}"/>
               </a:ext>
             </a:extLst>
           </p:cNvPr>
@@ -23100,7 +24032,7 @@
           <p:cNvPr id="22" name="">
             <a:extLst xmlns:a="http://schemas.openxmlformats.org/drawingml/2006/main">
               <a:ext uri="{FF2B5EF4-FFF2-40B4-BE49-F238E27FC236}">
-                <a16:creationId xmlns:a16="http://schemas.microsoft.com/office/drawing/2014/main" id="{2F4754EB-D95E-4EA1-BB7F-5A07F6519C0C}"/>
+                <a16:creationId xmlns:a16="http://schemas.microsoft.com/office/drawing/2014/main" id="{D92C3F87-BDF7-4068-9228-07B3B50BF9DB}"/>
               </a:ext>
             </a:extLst>
           </p:cNvPr>
@@ -23133,7 +24065,7 @@
           <p:cNvPr id="23" name="">
             <a:extLst xmlns:a="http://schemas.openxmlformats.org/drawingml/2006/main">
               <a:ext uri="{FF2B5EF4-FFF2-40B4-BE49-F238E27FC236}">
-                <a16:creationId xmlns:a16="http://schemas.microsoft.com/office/drawing/2014/main" id="{F8A4B7FE-342D-4C97-B5FD-90333D3D0C8F}"/>
+                <a16:creationId xmlns:a16="http://schemas.microsoft.com/office/drawing/2014/main" id="{24C37A52-4840-453E-AA0C-997287963BD0}"/>
               </a:ext>
             </a:extLst>
           </p:cNvPr>
@@ -23166,7 +24098,7 @@
           <p:cNvPr id="24" name="">
             <a:extLst xmlns:a="http://schemas.openxmlformats.org/drawingml/2006/main">
               <a:ext uri="{FF2B5EF4-FFF2-40B4-BE49-F238E27FC236}">
-                <a16:creationId xmlns:a16="http://schemas.microsoft.com/office/drawing/2014/main" id="{B0259AF0-A9E8-4D43-AFE4-B723CE1CF7FA}"/>
+                <a16:creationId xmlns:a16="http://schemas.microsoft.com/office/drawing/2014/main" id="{F9DE9335-60A3-4A1F-BB78-23964155D7D4}"/>
               </a:ext>
             </a:extLst>
           </p:cNvPr>
@@ -23199,7 +24131,7 @@
           <p:cNvPr id="25" name="">
             <a:extLst xmlns:a="http://schemas.openxmlformats.org/drawingml/2006/main">
               <a:ext uri="{FF2B5EF4-FFF2-40B4-BE49-F238E27FC236}">
-                <a16:creationId xmlns:a16="http://schemas.microsoft.com/office/drawing/2014/main" id="{499069CE-CD7F-43F2-A5E1-00719800DAF7}"/>
+                <a16:creationId xmlns:a16="http://schemas.microsoft.com/office/drawing/2014/main" id="{09134226-2429-4746-BB65-0740A4E6A665}"/>
               </a:ext>
             </a:extLst>
           </p:cNvPr>
@@ -23232,7 +24164,7 @@
           <p:cNvPr id="26" name="">
             <a:extLst xmlns:a="http://schemas.openxmlformats.org/drawingml/2006/main">
               <a:ext uri="{FF2B5EF4-FFF2-40B4-BE49-F238E27FC236}">
-                <a16:creationId xmlns:a16="http://schemas.microsoft.com/office/drawing/2014/main" id="{B3BBD156-05E9-42D5-9C56-B397CD249EA4}"/>
+                <a16:creationId xmlns:a16="http://schemas.microsoft.com/office/drawing/2014/main" id="{2D2E939D-8534-4917-BE1A-9FDF43E9D64B}"/>
               </a:ext>
             </a:extLst>
           </p:cNvPr>
@@ -23265,7 +24197,7 @@
           <p:cNvPr id="27" name="">
             <a:extLst xmlns:a="http://schemas.openxmlformats.org/drawingml/2006/main">
               <a:ext uri="{FF2B5EF4-FFF2-40B4-BE49-F238E27FC236}">
-                <a16:creationId xmlns:a16="http://schemas.microsoft.com/office/drawing/2014/main" id="{B77BCB7B-DF24-4B7A-B092-D5C0B6AEF924}"/>
+                <a16:creationId xmlns:a16="http://schemas.microsoft.com/office/drawing/2014/main" id="{F3DFAAA0-1EAB-46E6-ACD2-C5BE78DDB797}"/>
               </a:ext>
             </a:extLst>
           </p:cNvPr>
@@ -23298,7 +24230,7 @@
           <p:cNvPr id="28" name="">
             <a:extLst xmlns:a="http://schemas.openxmlformats.org/drawingml/2006/main">
               <a:ext uri="{FF2B5EF4-FFF2-40B4-BE49-F238E27FC236}">
-                <a16:creationId xmlns:a16="http://schemas.microsoft.com/office/drawing/2014/main" id="{43CF6F38-E443-45D1-9A06-182F3BFD92E7}"/>
+                <a16:creationId xmlns:a16="http://schemas.microsoft.com/office/drawing/2014/main" id="{DB4A10B6-548C-454A-9165-CB5A5C36A7F0}"/>
               </a:ext>
             </a:extLst>
           </p:cNvPr>
@@ -23331,7 +24263,7 @@
           <p:cNvPr id="29" name="">
             <a:extLst xmlns:a="http://schemas.openxmlformats.org/drawingml/2006/main">
               <a:ext uri="{FF2B5EF4-FFF2-40B4-BE49-F238E27FC236}">
-                <a16:creationId xmlns:a16="http://schemas.microsoft.com/office/drawing/2014/main" id="{81EC60AF-3C0E-4C24-B5BF-FAE4495FF87C}"/>
+                <a16:creationId xmlns:a16="http://schemas.microsoft.com/office/drawing/2014/main" id="{5424F211-2226-4B21-99F9-926477C066AD}"/>
               </a:ext>
             </a:extLst>
           </p:cNvPr>
@@ -23364,7 +24296,7 @@
           <p:cNvPr id="30" name="">
             <a:extLst xmlns:a="http://schemas.openxmlformats.org/drawingml/2006/main">
               <a:ext uri="{FF2B5EF4-FFF2-40B4-BE49-F238E27FC236}">
-                <a16:creationId xmlns:a16="http://schemas.microsoft.com/office/drawing/2014/main" id="{79FB6B04-D89F-4E5B-9482-F9C19DF2D64D}"/>
+                <a16:creationId xmlns:a16="http://schemas.microsoft.com/office/drawing/2014/main" id="{E40D051C-C0AF-4C24-AEA3-45EC396B9DB1}"/>
               </a:ext>
             </a:extLst>
           </p:cNvPr>
@@ -23397,7 +24329,7 @@
           <p:cNvPr id="31" name="">
             <a:extLst xmlns:a="http://schemas.openxmlformats.org/drawingml/2006/main">
               <a:ext uri="{FF2B5EF4-FFF2-40B4-BE49-F238E27FC236}">
-                <a16:creationId xmlns:a16="http://schemas.microsoft.com/office/drawing/2014/main" id="{A59DBFFC-5A8E-4533-A1F9-0C3EA7D06A5B}"/>
+                <a16:creationId xmlns:a16="http://schemas.microsoft.com/office/drawing/2014/main" id="{2052877C-E23D-42F5-B641-E23C977B23FF}"/>
               </a:ext>
             </a:extLst>
           </p:cNvPr>
@@ -23430,7 +24362,7 @@
           <p:cNvPr id="32" name="">
             <a:extLst xmlns:a="http://schemas.openxmlformats.org/drawingml/2006/main">
               <a:ext uri="{FF2B5EF4-FFF2-40B4-BE49-F238E27FC236}">
-                <a16:creationId xmlns:a16="http://schemas.microsoft.com/office/drawing/2014/main" id="{5D0F1852-D1EA-4AB8-9832-BA6190DD5B3A}"/>
+                <a16:creationId xmlns:a16="http://schemas.microsoft.com/office/drawing/2014/main" id="{A7C7CB7E-3191-4099-9141-A83BC938E350}"/>
               </a:ext>
             </a:extLst>
           </p:cNvPr>
@@ -23463,7 +24395,7 @@
           <p:cNvPr id="33" name="">
             <a:extLst xmlns:a="http://schemas.openxmlformats.org/drawingml/2006/main">
               <a:ext uri="{FF2B5EF4-FFF2-40B4-BE49-F238E27FC236}">
-                <a16:creationId xmlns:a16="http://schemas.microsoft.com/office/drawing/2014/main" id="{8273801E-8DA7-40AD-B2EB-99DEC8A0FB9D}"/>
+                <a16:creationId xmlns:a16="http://schemas.microsoft.com/office/drawing/2014/main" id="{E7692B59-13F8-4C6B-B103-FF40217993A7}"/>
               </a:ext>
             </a:extLst>
           </p:cNvPr>
@@ -23496,7 +24428,7 @@
           <p:cNvPr id="34" name="">
             <a:extLst xmlns:a="http://schemas.openxmlformats.org/drawingml/2006/main">
               <a:ext uri="{FF2B5EF4-FFF2-40B4-BE49-F238E27FC236}">
-                <a16:creationId xmlns:a16="http://schemas.microsoft.com/office/drawing/2014/main" id="{B8A1E2FE-A684-4AF3-89AF-1372292F6EF6}"/>
+                <a16:creationId xmlns:a16="http://schemas.microsoft.com/office/drawing/2014/main" id="{F96B4CD0-C481-4F8F-A4E2-4025E27A3937}"/>
               </a:ext>
             </a:extLst>
           </p:cNvPr>
@@ -23529,7 +24461,7 @@
           <p:cNvPr id="35" name="">
             <a:extLst xmlns:a="http://schemas.openxmlformats.org/drawingml/2006/main">
               <a:ext uri="{FF2B5EF4-FFF2-40B4-BE49-F238E27FC236}">
-                <a16:creationId xmlns:a16="http://schemas.microsoft.com/office/drawing/2014/main" id="{9083F404-8EFE-4E84-8FF7-06294E7ABB71}"/>
+                <a16:creationId xmlns:a16="http://schemas.microsoft.com/office/drawing/2014/main" id="{B45E025A-16BD-47FA-BE96-DE4CC2C54438}"/>
               </a:ext>
             </a:extLst>
           </p:cNvPr>
@@ -23562,7 +24494,7 @@
           <p:cNvPr id="36" name="">
             <a:extLst xmlns:a="http://schemas.openxmlformats.org/drawingml/2006/main">
               <a:ext uri="{FF2B5EF4-FFF2-40B4-BE49-F238E27FC236}">
-                <a16:creationId xmlns:a16="http://schemas.microsoft.com/office/drawing/2014/main" id="{4DD2B11C-C62F-4636-8466-5DFD176F368C}"/>
+                <a16:creationId xmlns:a16="http://schemas.microsoft.com/office/drawing/2014/main" id="{01562955-23DD-48F7-9B0C-6B805C15C35E}"/>
               </a:ext>
             </a:extLst>
           </p:cNvPr>
@@ -23595,7 +24527,7 @@
           <p:cNvPr id="37" name="">
             <a:extLst xmlns:a="http://schemas.openxmlformats.org/drawingml/2006/main">
               <a:ext uri="{FF2B5EF4-FFF2-40B4-BE49-F238E27FC236}">
-                <a16:creationId xmlns:a16="http://schemas.microsoft.com/office/drawing/2014/main" id="{67A8032F-21E5-491C-821B-546521A2D90F}"/>
+                <a16:creationId xmlns:a16="http://schemas.microsoft.com/office/drawing/2014/main" id="{A23130B3-BC49-4C93-B053-79068E40DEB3}"/>
               </a:ext>
             </a:extLst>
           </p:cNvPr>
@@ -23628,7 +24560,7 @@
           <p:cNvPr id="38" name="">
             <a:extLst xmlns:a="http://schemas.openxmlformats.org/drawingml/2006/main">
               <a:ext uri="{FF2B5EF4-FFF2-40B4-BE49-F238E27FC236}">
-                <a16:creationId xmlns:a16="http://schemas.microsoft.com/office/drawing/2014/main" id="{70886DC5-C9AB-45F9-A992-40AFFE3D9C9E}"/>
+                <a16:creationId xmlns:a16="http://schemas.microsoft.com/office/drawing/2014/main" id="{7A914041-713F-4409-9798-9F1D16213DF3}"/>
               </a:ext>
             </a:extLst>
           </p:cNvPr>
@@ -23661,7 +24593,7 @@
           <p:cNvPr id="39" name="">
             <a:extLst xmlns:a="http://schemas.openxmlformats.org/drawingml/2006/main">
               <a:ext uri="{FF2B5EF4-FFF2-40B4-BE49-F238E27FC236}">
-                <a16:creationId xmlns:a16="http://schemas.microsoft.com/office/drawing/2014/main" id="{31E19CA1-A907-4762-A11F-D0F86C285873}"/>
+                <a16:creationId xmlns:a16="http://schemas.microsoft.com/office/drawing/2014/main" id="{410224A5-6538-460F-B217-48207AEC8046}"/>
               </a:ext>
             </a:extLst>
           </p:cNvPr>
@@ -23694,7 +24626,7 @@
           <p:cNvPr id="40" name="">
             <a:extLst xmlns:a="http://schemas.openxmlformats.org/drawingml/2006/main">
               <a:ext uri="{FF2B5EF4-FFF2-40B4-BE49-F238E27FC236}">
-                <a16:creationId xmlns:a16="http://schemas.microsoft.com/office/drawing/2014/main" id="{5AF0D8B2-199A-4E96-9638-9029F005EC24}"/>
+                <a16:creationId xmlns:a16="http://schemas.microsoft.com/office/drawing/2014/main" id="{35293093-B6F0-488B-886B-163101D84E61}"/>
               </a:ext>
             </a:extLst>
           </p:cNvPr>
@@ -23727,7 +24659,7 @@
           <p:cNvPr id="41" name="">
             <a:extLst xmlns:a="http://schemas.openxmlformats.org/drawingml/2006/main">
               <a:ext uri="{FF2B5EF4-FFF2-40B4-BE49-F238E27FC236}">
-                <a16:creationId xmlns:a16="http://schemas.microsoft.com/office/drawing/2014/main" id="{30CD66BC-50B0-40F9-B677-9AB7CBEA4DBF}"/>
+                <a16:creationId xmlns:a16="http://schemas.microsoft.com/office/drawing/2014/main" id="{5FC11DD6-1E89-431E-A54A-D29BAA606CCE}"/>
               </a:ext>
             </a:extLst>
           </p:cNvPr>
@@ -23760,7 +24692,7 @@
           <p:cNvPr id="42" name="">
             <a:extLst xmlns:a="http://schemas.openxmlformats.org/drawingml/2006/main">
               <a:ext uri="{FF2B5EF4-FFF2-40B4-BE49-F238E27FC236}">
-                <a16:creationId xmlns:a16="http://schemas.microsoft.com/office/drawing/2014/main" id="{8C0DFD37-66EA-49BA-8CD0-E94F74D7FAA4}"/>
+                <a16:creationId xmlns:a16="http://schemas.microsoft.com/office/drawing/2014/main" id="{5E4224E0-50F8-4781-97FA-528F02289CD8}"/>
               </a:ext>
             </a:extLst>
           </p:cNvPr>
@@ -23793,7 +24725,7 @@
           <p:cNvPr id="43" name="">
             <a:extLst xmlns:a="http://schemas.openxmlformats.org/drawingml/2006/main">
               <a:ext uri="{FF2B5EF4-FFF2-40B4-BE49-F238E27FC236}">
-                <a16:creationId xmlns:a16="http://schemas.microsoft.com/office/drawing/2014/main" id="{ED968EF2-67C0-4270-AD93-8293481A0B0C}"/>
+                <a16:creationId xmlns:a16="http://schemas.microsoft.com/office/drawing/2014/main" id="{AE3F8787-B4C4-4A2D-B838-7D0065DDD1BC}"/>
               </a:ext>
             </a:extLst>
           </p:cNvPr>
@@ -23826,7 +24758,7 @@
           <p:cNvPr id="44" name="">
             <a:extLst xmlns:a="http://schemas.openxmlformats.org/drawingml/2006/main">
               <a:ext uri="{FF2B5EF4-FFF2-40B4-BE49-F238E27FC236}">
-                <a16:creationId xmlns:a16="http://schemas.microsoft.com/office/drawing/2014/main" id="{A9DE0876-0A02-44EF-BBBC-1870D2A83FF5}"/>
+                <a16:creationId xmlns:a16="http://schemas.microsoft.com/office/drawing/2014/main" id="{6E6C2CE2-B0C8-4911-B773-F515B087D26F}"/>
               </a:ext>
             </a:extLst>
           </p:cNvPr>
@@ -23859,7 +24791,7 @@
           <p:cNvPr id="45" name="">
             <a:extLst xmlns:a="http://schemas.openxmlformats.org/drawingml/2006/main">
               <a:ext uri="{FF2B5EF4-FFF2-40B4-BE49-F238E27FC236}">
-                <a16:creationId xmlns:a16="http://schemas.microsoft.com/office/drawing/2014/main" id="{055F82C3-C0CE-4E01-AEE1-B75A75D2D6B6}"/>
+                <a16:creationId xmlns:a16="http://schemas.microsoft.com/office/drawing/2014/main" id="{89C555CD-406E-49F4-8258-DBA4D5646B4F}"/>
               </a:ext>
             </a:extLst>
           </p:cNvPr>
@@ -23892,7 +24824,7 @@
           <p:cNvPr id="46" name="">
             <a:extLst xmlns:a="http://schemas.openxmlformats.org/drawingml/2006/main">
               <a:ext uri="{FF2B5EF4-FFF2-40B4-BE49-F238E27FC236}">
-                <a16:creationId xmlns:a16="http://schemas.microsoft.com/office/drawing/2014/main" id="{660E6BFA-5A27-44BA-99CC-7A6006C16276}"/>
+                <a16:creationId xmlns:a16="http://schemas.microsoft.com/office/drawing/2014/main" id="{DBDBA7DB-6454-4E04-A6CA-9A7766AE9F7D}"/>
               </a:ext>
             </a:extLst>
           </p:cNvPr>
@@ -23925,7 +24857,7 @@
           <p:cNvPr id="47" name="">
             <a:extLst xmlns:a="http://schemas.openxmlformats.org/drawingml/2006/main">
               <a:ext uri="{FF2B5EF4-FFF2-40B4-BE49-F238E27FC236}">
-                <a16:creationId xmlns:a16="http://schemas.microsoft.com/office/drawing/2014/main" id="{CFA46191-00AC-42E9-A5D1-7A25BEF5FA3F}"/>
+                <a16:creationId xmlns:a16="http://schemas.microsoft.com/office/drawing/2014/main" id="{3E51D86E-EBD3-489B-80DF-AC7032A28F01}"/>
               </a:ext>
             </a:extLst>
           </p:cNvPr>
@@ -23958,7 +24890,7 @@
           <p:cNvPr id="48" name="">
             <a:extLst xmlns:a="http://schemas.openxmlformats.org/drawingml/2006/main">
               <a:ext uri="{FF2B5EF4-FFF2-40B4-BE49-F238E27FC236}">
-                <a16:creationId xmlns:a16="http://schemas.microsoft.com/office/drawing/2014/main" id="{C1F72852-1D73-4BF1-BD4D-3264E9B25F35}"/>
+                <a16:creationId xmlns:a16="http://schemas.microsoft.com/office/drawing/2014/main" id="{86A6EE6A-C123-47A0-9D70-3B23DE049551}"/>
               </a:ext>
             </a:extLst>
           </p:cNvPr>
@@ -23991,7 +24923,7 @@
           <p:cNvPr id="49" name="">
             <a:extLst xmlns:a="http://schemas.openxmlformats.org/drawingml/2006/main">
               <a:ext uri="{FF2B5EF4-FFF2-40B4-BE49-F238E27FC236}">
-                <a16:creationId xmlns:a16="http://schemas.microsoft.com/office/drawing/2014/main" id="{5341B959-9D7C-412F-B01B-4DF46351C20E}"/>
+                <a16:creationId xmlns:a16="http://schemas.microsoft.com/office/drawing/2014/main" id="{16D2F902-397A-451A-BBA2-A5E72EA19C7A}"/>
               </a:ext>
             </a:extLst>
           </p:cNvPr>
@@ -24024,7 +24956,7 @@
           <p:cNvPr id="50" name="">
             <a:extLst xmlns:a="http://schemas.openxmlformats.org/drawingml/2006/main">
               <a:ext uri="{FF2B5EF4-FFF2-40B4-BE49-F238E27FC236}">
-                <a16:creationId xmlns:a16="http://schemas.microsoft.com/office/drawing/2014/main" id="{E5242FE5-97BB-4DF0-BA52-5E808D850977}"/>
+                <a16:creationId xmlns:a16="http://schemas.microsoft.com/office/drawing/2014/main" id="{2B8905B6-D809-4690-A938-B1F354254754}"/>
               </a:ext>
             </a:extLst>
           </p:cNvPr>
@@ -24057,7 +24989,7 @@
           <p:cNvPr id="51" name="">
             <a:extLst xmlns:a="http://schemas.openxmlformats.org/drawingml/2006/main">
               <a:ext uri="{FF2B5EF4-FFF2-40B4-BE49-F238E27FC236}">
-                <a16:creationId xmlns:a16="http://schemas.microsoft.com/office/drawing/2014/main" id="{2170B2F3-9824-4707-AC16-267B6ED35B2A}"/>
+                <a16:creationId xmlns:a16="http://schemas.microsoft.com/office/drawing/2014/main" id="{C5611A77-E0FB-485B-A0CC-D59C2EE07D6F}"/>
               </a:ext>
             </a:extLst>
           </p:cNvPr>
@@ -24090,7 +25022,7 @@
           <p:cNvPr id="52" name="">
             <a:extLst xmlns:a="http://schemas.openxmlformats.org/drawingml/2006/main">
               <a:ext uri="{FF2B5EF4-FFF2-40B4-BE49-F238E27FC236}">
-                <a16:creationId xmlns:a16="http://schemas.microsoft.com/office/drawing/2014/main" id="{CE4864ED-3D72-4CEA-9135-A29687931988}"/>
+                <a16:creationId xmlns:a16="http://schemas.microsoft.com/office/drawing/2014/main" id="{EB0E0D59-FA98-4D85-8AE0-C9ABE9A62085}"/>
               </a:ext>
             </a:extLst>
           </p:cNvPr>
@@ -24123,7 +25055,7 @@
           <p:cNvPr id="53" name="">
             <a:extLst xmlns:a="http://schemas.openxmlformats.org/drawingml/2006/main">
               <a:ext uri="{FF2B5EF4-FFF2-40B4-BE49-F238E27FC236}">
-                <a16:creationId xmlns:a16="http://schemas.microsoft.com/office/drawing/2014/main" id="{106DB54A-77BB-4CB1-8A75-A2F02420CA61}"/>
+                <a16:creationId xmlns:a16="http://schemas.microsoft.com/office/drawing/2014/main" id="{7E0422AC-C834-4ECC-8EA8-F4EE7A6DACC2}"/>
               </a:ext>
             </a:extLst>
           </p:cNvPr>
@@ -24156,7 +25088,7 @@
           <p:cNvPr id="54" name="">
             <a:extLst xmlns:a="http://schemas.openxmlformats.org/drawingml/2006/main">
               <a:ext uri="{FF2B5EF4-FFF2-40B4-BE49-F238E27FC236}">
-                <a16:creationId xmlns:a16="http://schemas.microsoft.com/office/drawing/2014/main" id="{241B6FD3-252C-41C7-8B11-8D84A413920F}"/>
+                <a16:creationId xmlns:a16="http://schemas.microsoft.com/office/drawing/2014/main" id="{9B9648F2-AD16-4142-A775-7B99103763E0}"/>
               </a:ext>
             </a:extLst>
           </p:cNvPr>
@@ -24189,7 +25121,7 @@
           <p:cNvPr id="55" name="">
             <a:extLst xmlns:a="http://schemas.openxmlformats.org/drawingml/2006/main">
               <a:ext uri="{FF2B5EF4-FFF2-40B4-BE49-F238E27FC236}">
-                <a16:creationId xmlns:a16="http://schemas.microsoft.com/office/drawing/2014/main" id="{FDFFD258-80AE-42EF-A480-12F80C64477C}"/>
+                <a16:creationId xmlns:a16="http://schemas.microsoft.com/office/drawing/2014/main" id="{1DD3F624-7F02-426B-9D16-D48278E74562}"/>
               </a:ext>
             </a:extLst>
           </p:cNvPr>
@@ -24222,7 +25154,7 @@
           <p:cNvPr id="56" name="">
             <a:extLst xmlns:a="http://schemas.openxmlformats.org/drawingml/2006/main">
               <a:ext uri="{FF2B5EF4-FFF2-40B4-BE49-F238E27FC236}">
-                <a16:creationId xmlns:a16="http://schemas.microsoft.com/office/drawing/2014/main" id="{31B99BBC-5543-40EE-A0C7-387E1A49904A}"/>
+                <a16:creationId xmlns:a16="http://schemas.microsoft.com/office/drawing/2014/main" id="{6F70CA91-7B58-4D23-BEFC-A37DCD0974CE}"/>
               </a:ext>
             </a:extLst>
           </p:cNvPr>
@@ -24255,7 +25187,7 @@
           <p:cNvPr id="57" name="">
             <a:extLst xmlns:a="http://schemas.openxmlformats.org/drawingml/2006/main">
               <a:ext uri="{FF2B5EF4-FFF2-40B4-BE49-F238E27FC236}">
-                <a16:creationId xmlns:a16="http://schemas.microsoft.com/office/drawing/2014/main" id="{016CFC00-51E2-4C1A-BCDB-A4FBE3986A3B}"/>
+                <a16:creationId xmlns:a16="http://schemas.microsoft.com/office/drawing/2014/main" id="{A189EE4B-E1DC-4C2B-93C9-61F7BE30130F}"/>
               </a:ext>
             </a:extLst>
           </p:cNvPr>
@@ -24288,7 +25220,7 @@
           <p:cNvPr id="58" name="">
             <a:extLst xmlns:a="http://schemas.openxmlformats.org/drawingml/2006/main">
               <a:ext uri="{FF2B5EF4-FFF2-40B4-BE49-F238E27FC236}">
-                <a16:creationId xmlns:a16="http://schemas.microsoft.com/office/drawing/2014/main" id="{2AB46032-822C-4AA6-8BA4-B73E6C291614}"/>
+                <a16:creationId xmlns:a16="http://schemas.microsoft.com/office/drawing/2014/main" id="{3189ED74-943D-4838-8F38-E8F7B16B42E4}"/>
               </a:ext>
             </a:extLst>
           </p:cNvPr>
@@ -24321,7 +25253,7 @@
           <p:cNvPr id="59" name="">
             <a:extLst xmlns:a="http://schemas.openxmlformats.org/drawingml/2006/main">
               <a:ext uri="{FF2B5EF4-FFF2-40B4-BE49-F238E27FC236}">
-                <a16:creationId xmlns:a16="http://schemas.microsoft.com/office/drawing/2014/main" id="{C3D408FF-EA94-4D0C-9360-0DFBF45885E4}"/>
+                <a16:creationId xmlns:a16="http://schemas.microsoft.com/office/drawing/2014/main" id="{8F426040-4648-43EC-89FD-24CAE0685675}"/>
               </a:ext>
             </a:extLst>
           </p:cNvPr>
@@ -24354,7 +25286,7 @@
           <p:cNvPr id="60" name="">
             <a:extLst xmlns:a="http://schemas.openxmlformats.org/drawingml/2006/main">
               <a:ext uri="{FF2B5EF4-FFF2-40B4-BE49-F238E27FC236}">
-                <a16:creationId xmlns:a16="http://schemas.microsoft.com/office/drawing/2014/main" id="{993DB949-21A2-4CD5-A4AC-D7281C57DCBA}"/>
+                <a16:creationId xmlns:a16="http://schemas.microsoft.com/office/drawing/2014/main" id="{5B303968-118C-4D7E-B69F-E13AD25E5244}"/>
               </a:ext>
             </a:extLst>
           </p:cNvPr>
@@ -24387,7 +25319,7 @@
           <p:cNvPr id="61" name="">
             <a:extLst xmlns:a="http://schemas.openxmlformats.org/drawingml/2006/main">
               <a:ext uri="{FF2B5EF4-FFF2-40B4-BE49-F238E27FC236}">
-                <a16:creationId xmlns:a16="http://schemas.microsoft.com/office/drawing/2014/main" id="{DF0F503F-3F06-43FF-AEBD-D4B7B4FCB081}"/>
+                <a16:creationId xmlns:a16="http://schemas.microsoft.com/office/drawing/2014/main" id="{053D53EE-3EDF-4488-92B0-D53460E9A218}"/>
               </a:ext>
             </a:extLst>
           </p:cNvPr>
@@ -24420,7 +25352,7 @@
           <p:cNvPr id="62" name="">
             <a:extLst xmlns:a="http://schemas.openxmlformats.org/drawingml/2006/main">
               <a:ext uri="{FF2B5EF4-FFF2-40B4-BE49-F238E27FC236}">
-                <a16:creationId xmlns:a16="http://schemas.microsoft.com/office/drawing/2014/main" id="{66420776-F5C3-4ECB-B895-CC58D189F200}"/>
+                <a16:creationId xmlns:a16="http://schemas.microsoft.com/office/drawing/2014/main" id="{19D50C11-6107-44A3-8326-E58A3CBFDC27}"/>
               </a:ext>
             </a:extLst>
           </p:cNvPr>
@@ -24453,7 +25385,7 @@
           <p:cNvPr id="63" name="">
             <a:extLst xmlns:a="http://schemas.openxmlformats.org/drawingml/2006/main">
               <a:ext uri="{FF2B5EF4-FFF2-40B4-BE49-F238E27FC236}">
-                <a16:creationId xmlns:a16="http://schemas.microsoft.com/office/drawing/2014/main" id="{5CA20287-B5CB-4133-AE27-02C3C142D82B}"/>
+                <a16:creationId xmlns:a16="http://schemas.microsoft.com/office/drawing/2014/main" id="{9D14165A-9F28-488B-8FB6-20F925FCE3A9}"/>
               </a:ext>
             </a:extLst>
           </p:cNvPr>
@@ -24486,7 +25418,7 @@
           <p:cNvPr id="64" name="">
             <a:extLst xmlns:a="http://schemas.openxmlformats.org/drawingml/2006/main">
               <a:ext uri="{FF2B5EF4-FFF2-40B4-BE49-F238E27FC236}">
-                <a16:creationId xmlns:a16="http://schemas.microsoft.com/office/drawing/2014/main" id="{05CCAB88-0197-42CD-B2E4-ADD5A0457642}"/>
+                <a16:creationId xmlns:a16="http://schemas.microsoft.com/office/drawing/2014/main" id="{E5E3D57B-A1E0-47C7-8D72-5C4D659CCDD8}"/>
               </a:ext>
             </a:extLst>
           </p:cNvPr>
@@ -24519,7 +25451,7 @@
           <p:cNvPr id="65" name="">
             <a:extLst xmlns:a="http://schemas.openxmlformats.org/drawingml/2006/main">
               <a:ext uri="{FF2B5EF4-FFF2-40B4-BE49-F238E27FC236}">
-                <a16:creationId xmlns:a16="http://schemas.microsoft.com/office/drawing/2014/main" id="{F65C3A42-6270-4EF1-A094-FA1AD476C7AB}"/>
+                <a16:creationId xmlns:a16="http://schemas.microsoft.com/office/drawing/2014/main" id="{BAB4BA0E-887C-4BAA-813B-25FDE8645643}"/>
               </a:ext>
             </a:extLst>
           </p:cNvPr>
@@ -24552,7 +25484,7 @@
           <p:cNvPr id="66" name="">
             <a:extLst xmlns:a="http://schemas.openxmlformats.org/drawingml/2006/main">
               <a:ext uri="{FF2B5EF4-FFF2-40B4-BE49-F238E27FC236}">
-                <a16:creationId xmlns:a16="http://schemas.microsoft.com/office/drawing/2014/main" id="{C7E607ED-15FB-4832-9E05-9DA94921EC00}"/>
+                <a16:creationId xmlns:a16="http://schemas.microsoft.com/office/drawing/2014/main" id="{6E6EDC2F-2156-476F-AFEB-EE8D9108186D}"/>
               </a:ext>
             </a:extLst>
           </p:cNvPr>
@@ -24585,7 +25517,7 @@
           <p:cNvPr id="67" name="">
             <a:extLst xmlns:a="http://schemas.openxmlformats.org/drawingml/2006/main">
               <a:ext uri="{FF2B5EF4-FFF2-40B4-BE49-F238E27FC236}">
-                <a16:creationId xmlns:a16="http://schemas.microsoft.com/office/drawing/2014/main" id="{D89D7FFC-6FD4-42C4-BDF5-DC652F822C51}"/>
+                <a16:creationId xmlns:a16="http://schemas.microsoft.com/office/drawing/2014/main" id="{52CC3C75-E041-454B-9F12-A90A39D61FF5}"/>
               </a:ext>
             </a:extLst>
           </p:cNvPr>
@@ -24618,7 +25550,7 @@
           <p:cNvPr id="68" name="">
             <a:extLst xmlns:a="http://schemas.openxmlformats.org/drawingml/2006/main">
               <a:ext uri="{FF2B5EF4-FFF2-40B4-BE49-F238E27FC236}">
-                <a16:creationId xmlns:a16="http://schemas.microsoft.com/office/drawing/2014/main" id="{5FE1AE39-B936-4A2F-A114-FFACA33D1E3B}"/>
+                <a16:creationId xmlns:a16="http://schemas.microsoft.com/office/drawing/2014/main" id="{2B4A26F8-A2ED-460F-8F1A-92D243FB5783}"/>
               </a:ext>
             </a:extLst>
           </p:cNvPr>
@@ -24680,7 +25612,7 @@
           <p:cNvPr id="69" name="">
             <a:extLst xmlns:a="http://schemas.openxmlformats.org/drawingml/2006/main">
               <a:ext uri="{FF2B5EF4-FFF2-40B4-BE49-F238E27FC236}">
-                <a16:creationId xmlns:a16="http://schemas.microsoft.com/office/drawing/2014/main" id="{071F38A4-2CE1-4FB1-A9F6-2002FE9CE032}"/>
+                <a16:creationId xmlns:a16="http://schemas.microsoft.com/office/drawing/2014/main" id="{4BA5F0D6-44D4-4409-B200-430691F2DC65}"/>
               </a:ext>
             </a:extLst>
           </p:cNvPr>
@@ -24742,7 +25674,7 @@
           <p:cNvPr id="70" name="">
             <a:extLst xmlns:a="http://schemas.openxmlformats.org/drawingml/2006/main">
               <a:ext uri="{FF2B5EF4-FFF2-40B4-BE49-F238E27FC236}">
-                <a16:creationId xmlns:a16="http://schemas.microsoft.com/office/drawing/2014/main" id="{31E57503-35F0-4E54-BE27-8EB956CE1B7E}"/>
+                <a16:creationId xmlns:a16="http://schemas.microsoft.com/office/drawing/2014/main" id="{D470DAF4-9474-4D5D-BFA2-5ECA5F4E16BC}"/>
               </a:ext>
             </a:extLst>
           </p:cNvPr>
@@ -24804,7 +25736,7 @@
           <p:cNvPr id="71" name="">
             <a:extLst xmlns:a="http://schemas.openxmlformats.org/drawingml/2006/main">
               <a:ext uri="{FF2B5EF4-FFF2-40B4-BE49-F238E27FC236}">
-                <a16:creationId xmlns:a16="http://schemas.microsoft.com/office/drawing/2014/main" id="{0E110109-F548-485D-B60E-B15FD7207BD4}"/>
+                <a16:creationId xmlns:a16="http://schemas.microsoft.com/office/drawing/2014/main" id="{C21AD03A-6020-404F-A578-EFE2F44621D6}"/>
               </a:ext>
             </a:extLst>
           </p:cNvPr>
@@ -24845,7 +25777,7 @@
           <p:cNvPr id="72" name="">
             <a:extLst xmlns:a="http://schemas.openxmlformats.org/drawingml/2006/main">
               <a:ext uri="{FF2B5EF4-FFF2-40B4-BE49-F238E27FC236}">
-                <a16:creationId xmlns:a16="http://schemas.microsoft.com/office/drawing/2014/main" id="{411A7D59-DE29-47C2-A427-ADDAD158B6EA}"/>
+                <a16:creationId xmlns:a16="http://schemas.microsoft.com/office/drawing/2014/main" id="{A65A9D23-B38E-4E37-BB81-B6D4E91634F8}"/>
               </a:ext>
             </a:extLst>
           </p:cNvPr>
@@ -24907,7 +25839,7 @@
           <p:cNvPr id="73" name="">
             <a:extLst xmlns:a="http://schemas.openxmlformats.org/drawingml/2006/main">
               <a:ext uri="{FF2B5EF4-FFF2-40B4-BE49-F238E27FC236}">
-                <a16:creationId xmlns:a16="http://schemas.microsoft.com/office/drawing/2014/main" id="{DAA689EE-98CB-48BF-B251-621601895B38}"/>
+                <a16:creationId xmlns:a16="http://schemas.microsoft.com/office/drawing/2014/main" id="{4A3AEFFA-9C76-4FEA-B750-75C443178F25}"/>
               </a:ext>
             </a:extLst>
           </p:cNvPr>
@@ -24996,7 +25928,7 @@
           <p:cNvPr id="74" name="">
             <a:extLst xmlns:a="http://schemas.openxmlformats.org/drawingml/2006/main">
               <a:ext uri="{FF2B5EF4-FFF2-40B4-BE49-F238E27FC236}">
-                <a16:creationId xmlns:a16="http://schemas.microsoft.com/office/drawing/2014/main" id="{A88E73B0-6EBC-480E-956B-1FB7B6A5F82C}"/>
+                <a16:creationId xmlns:a16="http://schemas.microsoft.com/office/drawing/2014/main" id="{56C0FDC3-21CD-4265-B7DE-6F98441F198A}"/>
               </a:ext>
             </a:extLst>
           </p:cNvPr>
@@ -25037,7 +25969,7 @@
           <p:cNvPr id="75" name="">
             <a:extLst xmlns:a="http://schemas.openxmlformats.org/drawingml/2006/main">
               <a:ext uri="{FF2B5EF4-FFF2-40B4-BE49-F238E27FC236}">
-                <a16:creationId xmlns:a16="http://schemas.microsoft.com/office/drawing/2014/main" id="{404373C6-EE09-430A-AD3C-6C5B304D7317}"/>
+                <a16:creationId xmlns:a16="http://schemas.microsoft.com/office/drawing/2014/main" id="{FC9BD9F4-8915-492A-9231-F2FF7FC0A537}"/>
               </a:ext>
             </a:extLst>
           </p:cNvPr>
@@ -25099,7 +26031,7 @@
           <p:cNvPr id="76" name="">
             <a:extLst xmlns:a="http://schemas.openxmlformats.org/drawingml/2006/main">
               <a:ext uri="{FF2B5EF4-FFF2-40B4-BE49-F238E27FC236}">
-                <a16:creationId xmlns:a16="http://schemas.microsoft.com/office/drawing/2014/main" id="{F6CA220E-0E23-499E-8A49-81E522E87ED6}"/>
+                <a16:creationId xmlns:a16="http://schemas.microsoft.com/office/drawing/2014/main" id="{CA61C740-9337-4E68-879E-BD8592D43B93}"/>
               </a:ext>
             </a:extLst>
           </p:cNvPr>
@@ -25188,7 +26120,7 @@
           <p:cNvPr id="77" name="">
             <a:extLst xmlns:a="http://schemas.openxmlformats.org/drawingml/2006/main">
               <a:ext uri="{FF2B5EF4-FFF2-40B4-BE49-F238E27FC236}">
-                <a16:creationId xmlns:a16="http://schemas.microsoft.com/office/drawing/2014/main" id="{B8AB6F2B-5F2F-4CC8-8AC1-FBB9B47CBF0F}"/>
+                <a16:creationId xmlns:a16="http://schemas.microsoft.com/office/drawing/2014/main" id="{670CD677-976F-4EEF-A84D-9C29BFCFFDB6}"/>
               </a:ext>
             </a:extLst>
           </p:cNvPr>
@@ -25229,7 +26161,7 @@
           <p:cNvPr id="78" name="">
             <a:extLst xmlns:a="http://schemas.openxmlformats.org/drawingml/2006/main">
               <a:ext uri="{FF2B5EF4-FFF2-40B4-BE49-F238E27FC236}">
-                <a16:creationId xmlns:a16="http://schemas.microsoft.com/office/drawing/2014/main" id="{994F428F-5EF4-4AFD-8370-1262E7289C62}"/>
+                <a16:creationId xmlns:a16="http://schemas.microsoft.com/office/drawing/2014/main" id="{A412B2AB-C8BF-4FA8-9C22-A55C2F4F07E6}"/>
               </a:ext>
             </a:extLst>
           </p:cNvPr>
@@ -25291,7 +26223,7 @@
           <p:cNvPr id="79" name="">
             <a:extLst xmlns:a="http://schemas.openxmlformats.org/drawingml/2006/main">
               <a:ext uri="{FF2B5EF4-FFF2-40B4-BE49-F238E27FC236}">
-                <a16:creationId xmlns:a16="http://schemas.microsoft.com/office/drawing/2014/main" id="{F1B73E40-91F0-46F2-A337-16B98B4C734B}"/>
+                <a16:creationId xmlns:a16="http://schemas.microsoft.com/office/drawing/2014/main" id="{6812B504-C594-434A-A0B3-B1B286BC3655}"/>
               </a:ext>
             </a:extLst>
           </p:cNvPr>
@@ -25380,7 +26312,7 @@
           <p:cNvPr id="80" name="">
             <a:extLst xmlns:a="http://schemas.openxmlformats.org/drawingml/2006/main">
               <a:ext uri="{FF2B5EF4-FFF2-40B4-BE49-F238E27FC236}">
-                <a16:creationId xmlns:a16="http://schemas.microsoft.com/office/drawing/2014/main" id="{C7A7D05C-04ED-4F94-9BBB-8551E40CFD11}"/>
+                <a16:creationId xmlns:a16="http://schemas.microsoft.com/office/drawing/2014/main" id="{C044CA8D-33EC-44EE-9A23-89D01D94334F}"/>
               </a:ext>
             </a:extLst>
           </p:cNvPr>
@@ -25421,7 +26353,7 @@
           <p:cNvPr id="81" name="">
             <a:extLst xmlns:a="http://schemas.openxmlformats.org/drawingml/2006/main">
               <a:ext uri="{FF2B5EF4-FFF2-40B4-BE49-F238E27FC236}">
-                <a16:creationId xmlns:a16="http://schemas.microsoft.com/office/drawing/2014/main" id="{D933B001-2BFB-4767-BE1D-B0D94E06AC6C}"/>
+                <a16:creationId xmlns:a16="http://schemas.microsoft.com/office/drawing/2014/main" id="{D5755011-682B-4A41-8DDC-5A9E0AED2076}"/>
               </a:ext>
             </a:extLst>
           </p:cNvPr>
@@ -25483,7 +26415,7 @@
           <p:cNvPr id="82" name="">
             <a:extLst xmlns:a="http://schemas.openxmlformats.org/drawingml/2006/main">
               <a:ext uri="{FF2B5EF4-FFF2-40B4-BE49-F238E27FC236}">
-                <a16:creationId xmlns:a16="http://schemas.microsoft.com/office/drawing/2014/main" id="{ED842526-87E4-4260-BF77-06B6AC500762}"/>
+                <a16:creationId xmlns:a16="http://schemas.microsoft.com/office/drawing/2014/main" id="{8B64A78C-1AFA-489B-B5C2-FE7564562D6F}"/>
               </a:ext>
             </a:extLst>
           </p:cNvPr>
@@ -25572,7 +26504,7 @@
           <p:cNvPr id="83" name="">
             <a:extLst xmlns:a="http://schemas.openxmlformats.org/drawingml/2006/main">
               <a:ext uri="{FF2B5EF4-FFF2-40B4-BE49-F238E27FC236}">
-                <a16:creationId xmlns:a16="http://schemas.microsoft.com/office/drawing/2014/main" id="{409E8F74-0AB8-485D-B7CC-9E18AEACBAC2}"/>
+                <a16:creationId xmlns:a16="http://schemas.microsoft.com/office/drawing/2014/main" id="{8B088990-F126-4CC5-A77E-E047437DE626}"/>
               </a:ext>
             </a:extLst>
           </p:cNvPr>
@@ -25705,7 +26637,7 @@
           <p:cNvPr id="88" name="">
             <a:extLst xmlns:a="http://schemas.openxmlformats.org/drawingml/2006/main">
               <a:ext uri="{FF2B5EF4-FFF2-40B4-BE49-F238E27FC236}">
-                <a16:creationId xmlns:a16="http://schemas.microsoft.com/office/drawing/2014/main" id="{0373447F-8924-49B6-8ED9-7B72C239A814}"/>
+                <a16:creationId xmlns:a16="http://schemas.microsoft.com/office/drawing/2014/main" id="{25B3382C-95F5-4A4B-891C-B4B98C038504}"/>
               </a:ext>
             </a:extLst>
           </p:cNvPr>
@@ -25767,7 +26699,7 @@
           <p:cNvPr id="89" name="">
             <a:extLst xmlns:a="http://schemas.openxmlformats.org/drawingml/2006/main">
               <a:ext uri="{FF2B5EF4-FFF2-40B4-BE49-F238E27FC236}">
-                <a16:creationId xmlns:a16="http://schemas.microsoft.com/office/drawing/2014/main" id="{660A9707-BF08-420F-8A6F-EB0D1FCF4DF2}"/>
+                <a16:creationId xmlns:a16="http://schemas.microsoft.com/office/drawing/2014/main" id="{2D0DF3F7-D328-4CB0-A595-CE0F6EAB3F66}"/>
               </a:ext>
             </a:extLst>
           </p:cNvPr>
@@ -25798,7 +26730,7 @@
           <p:cNvPr id="90" name="">
             <a:extLst xmlns:a="http://schemas.openxmlformats.org/drawingml/2006/main">
               <a:ext uri="{FF2B5EF4-FFF2-40B4-BE49-F238E27FC236}">
-                <a16:creationId xmlns:a16="http://schemas.microsoft.com/office/drawing/2014/main" id="{32207F0C-6FB5-4F06-9E7F-A37C23E8D0A9}"/>
+                <a16:creationId xmlns:a16="http://schemas.microsoft.com/office/drawing/2014/main" id="{DC883525-A169-4AEF-877E-ADCAD70ABE2D}"/>
               </a:ext>
             </a:extLst>
           </p:cNvPr>
@@ -25860,7 +26792,7 @@
           <p:cNvPr id="91" name="">
             <a:extLst xmlns:a="http://schemas.openxmlformats.org/drawingml/2006/main">
               <a:ext uri="{FF2B5EF4-FFF2-40B4-BE49-F238E27FC236}">
-                <a16:creationId xmlns:a16="http://schemas.microsoft.com/office/drawing/2014/main" id="{3D59F2D3-E4B7-4733-875C-9E5D05767DA4}"/>
+                <a16:creationId xmlns:a16="http://schemas.microsoft.com/office/drawing/2014/main" id="{FA176565-6F76-4BA1-9B39-1F7D506D094D}"/>
               </a:ext>
             </a:extLst>
           </p:cNvPr>
@@ -25920,7 +26852,7 @@
     </p:spTree>
     <p:extLst>
       <p:ext uri="{BB962C8B-B14F-4D97-AF65-F5344CB8AC3E}">
-        <p14:creationId xmlns:p14="http://schemas.microsoft.com/office/powerpoint/2010/main" val="384166542"/>
+        <p14:creationId xmlns:p14="http://schemas.microsoft.com/office/powerpoint/2010/main" val="1523460370"/>
       </p:ext>
     </p:extLst>
   </p:cSld>
@@ -25951,7 +26883,7 @@
           <p:cNvPr id="1" name="">
             <a:extLst xmlns:a="http://schemas.openxmlformats.org/drawingml/2006/main">
               <a:ext uri="{FF2B5EF4-FFF2-40B4-BE49-F238E27FC236}">
-                <a16:creationId xmlns:a16="http://schemas.microsoft.com/office/drawing/2014/main" id="{52D75466-9AE6-4951-948D-D8B8BF5009C6}"/>
+                <a16:creationId xmlns:a16="http://schemas.microsoft.com/office/drawing/2014/main" id="{E0BA79D8-C0C8-414D-9B46-2C1AC483FC6D}"/>
               </a:ext>
             </a:extLst>
           </p:cNvPr>
@@ -26013,7 +26945,7 @@
           <p:cNvPr id="2" name="">
             <a:extLst xmlns:a="http://schemas.openxmlformats.org/drawingml/2006/main">
               <a:ext uri="{FF2B5EF4-FFF2-40B4-BE49-F238E27FC236}">
-                <a16:creationId xmlns:a16="http://schemas.microsoft.com/office/drawing/2014/main" id="{D2E632F2-56E9-4DC5-BD7A-581C47ECE42A}"/>
+                <a16:creationId xmlns:a16="http://schemas.microsoft.com/office/drawing/2014/main" id="{2CF23FB8-15B0-4E22-965D-5737CC5D38D0}"/>
               </a:ext>
             </a:extLst>
           </p:cNvPr>
@@ -26075,7 +27007,7 @@
           <p:cNvPr id="3" name="">
             <a:extLst xmlns:a="http://schemas.openxmlformats.org/drawingml/2006/main">
               <a:ext uri="{FF2B5EF4-FFF2-40B4-BE49-F238E27FC236}">
-                <a16:creationId xmlns:a16="http://schemas.microsoft.com/office/drawing/2014/main" id="{4B4E7CE7-0EB8-4E54-8888-CFD7200AA6BF}"/>
+                <a16:creationId xmlns:a16="http://schemas.microsoft.com/office/drawing/2014/main" id="{BE21D276-9924-48CB-8D09-0468AA3F28A8}"/>
               </a:ext>
             </a:extLst>
           </p:cNvPr>
@@ -26137,7 +27069,7 @@
           <p:cNvPr id="4" name="">
             <a:extLst xmlns:a="http://schemas.openxmlformats.org/drawingml/2006/main">
               <a:ext uri="{FF2B5EF4-FFF2-40B4-BE49-F238E27FC236}">
-                <a16:creationId xmlns:a16="http://schemas.microsoft.com/office/drawing/2014/main" id="{C5C6E0C7-CD7C-4AB4-B397-D97467ABE563}"/>
+                <a16:creationId xmlns:a16="http://schemas.microsoft.com/office/drawing/2014/main" id="{D36A28FA-40DE-45AA-A4B9-304957356720}"/>
               </a:ext>
             </a:extLst>
           </p:cNvPr>
@@ -26199,7 +27131,7 @@
           <p:cNvPr id="5" name="">
             <a:extLst xmlns:a="http://schemas.openxmlformats.org/drawingml/2006/main">
               <a:ext uri="{FF2B5EF4-FFF2-40B4-BE49-F238E27FC236}">
-                <a16:creationId xmlns:a16="http://schemas.microsoft.com/office/drawing/2014/main" id="{B3E05A6D-E68C-48B7-B313-21B67FDBD687}"/>
+                <a16:creationId xmlns:a16="http://schemas.microsoft.com/office/drawing/2014/main" id="{13E541C1-74F9-4A88-97EF-A59F67E36B59}"/>
               </a:ext>
             </a:extLst>
           </p:cNvPr>
@@ -26261,7 +27193,7 @@
           <p:cNvPr id="6" name="">
             <a:extLst xmlns:a="http://schemas.openxmlformats.org/drawingml/2006/main">
               <a:ext uri="{FF2B5EF4-FFF2-40B4-BE49-F238E27FC236}">
-                <a16:creationId xmlns:a16="http://schemas.microsoft.com/office/drawing/2014/main" id="{99B64A82-4FC4-49B2-9B2F-6E002EB2EF5B}"/>
+                <a16:creationId xmlns:a16="http://schemas.microsoft.com/office/drawing/2014/main" id="{E38979EA-5C0A-4B1A-BE09-D68B9F2DABCD}"/>
               </a:ext>
             </a:extLst>
           </p:cNvPr>
@@ -26323,7 +27255,7 @@
           <p:cNvPr id="7" name="">
             <a:extLst xmlns:a="http://schemas.openxmlformats.org/drawingml/2006/main">
               <a:ext uri="{FF2B5EF4-FFF2-40B4-BE49-F238E27FC236}">
-                <a16:creationId xmlns:a16="http://schemas.microsoft.com/office/drawing/2014/main" id="{26F6BAE3-E1AF-4F92-9D7D-B94E81F1D452}"/>
+                <a16:creationId xmlns:a16="http://schemas.microsoft.com/office/drawing/2014/main" id="{8ABBBF47-04A5-43BB-95A5-2517EDD2AD0A}"/>
               </a:ext>
             </a:extLst>
           </p:cNvPr>
@@ -26385,7 +27317,7 @@
           <p:cNvPr id="8" name="">
             <a:extLst xmlns:a="http://schemas.openxmlformats.org/drawingml/2006/main">
               <a:ext uri="{FF2B5EF4-FFF2-40B4-BE49-F238E27FC236}">
-                <a16:creationId xmlns:a16="http://schemas.microsoft.com/office/drawing/2014/main" id="{48BCB8C5-FA14-4079-8264-6B74274F38A0}"/>
+                <a16:creationId xmlns:a16="http://schemas.microsoft.com/office/drawing/2014/main" id="{FE804268-1065-40F9-A159-2F899E40ADC4}"/>
               </a:ext>
             </a:extLst>
           </p:cNvPr>
@@ -26447,7 +27379,7 @@
           <p:cNvPr id="9" name="">
             <a:extLst xmlns:a="http://schemas.openxmlformats.org/drawingml/2006/main">
               <a:ext uri="{FF2B5EF4-FFF2-40B4-BE49-F238E27FC236}">
-                <a16:creationId xmlns:a16="http://schemas.microsoft.com/office/drawing/2014/main" id="{AC4923F1-30EC-476E-BCCC-1B1FB096297D}"/>
+                <a16:creationId xmlns:a16="http://schemas.microsoft.com/office/drawing/2014/main" id="{A2733D47-71C3-40E2-B76B-26D1D2666E19}"/>
               </a:ext>
             </a:extLst>
           </p:cNvPr>
@@ -26509,7 +27441,7 @@
           <p:cNvPr id="10" name="">
             <a:extLst xmlns:a="http://schemas.openxmlformats.org/drawingml/2006/main">
               <a:ext uri="{FF2B5EF4-FFF2-40B4-BE49-F238E27FC236}">
-                <a16:creationId xmlns:a16="http://schemas.microsoft.com/office/drawing/2014/main" id="{59EF3873-F8CE-44DF-B09F-362207A39C7E}"/>
+                <a16:creationId xmlns:a16="http://schemas.microsoft.com/office/drawing/2014/main" id="{310401DB-07EA-4CBD-BD2E-2597A157FAF8}"/>
               </a:ext>
             </a:extLst>
           </p:cNvPr>
@@ -26571,7 +27503,7 @@
           <p:cNvPr id="11" name="">
             <a:extLst xmlns:a="http://schemas.openxmlformats.org/drawingml/2006/main">
               <a:ext uri="{FF2B5EF4-FFF2-40B4-BE49-F238E27FC236}">
-                <a16:creationId xmlns:a16="http://schemas.microsoft.com/office/drawing/2014/main" id="{E25145F7-DC7F-47FC-8161-472FEC1F4186}"/>
+                <a16:creationId xmlns:a16="http://schemas.microsoft.com/office/drawing/2014/main" id="{1AE844D7-80D2-421A-8911-6D8C92E747D8}"/>
               </a:ext>
             </a:extLst>
           </p:cNvPr>
@@ -26633,7 +27565,7 @@
           <p:cNvPr id="12" name="">
             <a:extLst xmlns:a="http://schemas.openxmlformats.org/drawingml/2006/main">
               <a:ext uri="{FF2B5EF4-FFF2-40B4-BE49-F238E27FC236}">
-                <a16:creationId xmlns:a16="http://schemas.microsoft.com/office/drawing/2014/main" id="{01B32172-865E-4C5F-95EE-E58433050ADF}"/>
+                <a16:creationId xmlns:a16="http://schemas.microsoft.com/office/drawing/2014/main" id="{460219BA-99FF-4DC4-8290-CA39CB3C1B71}"/>
               </a:ext>
             </a:extLst>
           </p:cNvPr>
@@ -26695,7 +27627,7 @@
           <p:cNvPr id="13" name="">
             <a:extLst xmlns:a="http://schemas.openxmlformats.org/drawingml/2006/main">
               <a:ext uri="{FF2B5EF4-FFF2-40B4-BE49-F238E27FC236}">
-                <a16:creationId xmlns:a16="http://schemas.microsoft.com/office/drawing/2014/main" id="{B0A4615F-0E63-4166-A039-FEEDD89206EB}"/>
+                <a16:creationId xmlns:a16="http://schemas.microsoft.com/office/drawing/2014/main" id="{2EA85D64-D772-4212-AB8E-B25F9ADB7947}"/>
               </a:ext>
             </a:extLst>
           </p:cNvPr>
@@ -26757,7 +27689,7 @@
           <p:cNvPr id="14" name="">
             <a:extLst xmlns:a="http://schemas.openxmlformats.org/drawingml/2006/main">
               <a:ext uri="{FF2B5EF4-FFF2-40B4-BE49-F238E27FC236}">
-                <a16:creationId xmlns:a16="http://schemas.microsoft.com/office/drawing/2014/main" id="{9A8C1527-6EBC-460F-845C-617A2D6B70DB}"/>
+                <a16:creationId xmlns:a16="http://schemas.microsoft.com/office/drawing/2014/main" id="{B241766B-9334-4BAE-AB48-44F04D6DADF3}"/>
               </a:ext>
             </a:extLst>
           </p:cNvPr>
@@ -26819,7 +27751,7 @@
           <p:cNvPr id="15" name="">
             <a:extLst xmlns:a="http://schemas.openxmlformats.org/drawingml/2006/main">
               <a:ext uri="{FF2B5EF4-FFF2-40B4-BE49-F238E27FC236}">
-                <a16:creationId xmlns:a16="http://schemas.microsoft.com/office/drawing/2014/main" id="{79364C0E-0B1E-4F40-8B93-F1369D2CA2E0}"/>
+                <a16:creationId xmlns:a16="http://schemas.microsoft.com/office/drawing/2014/main" id="{D68E6D3A-8AC2-4F00-8B0F-103EA31788CA}"/>
               </a:ext>
             </a:extLst>
           </p:cNvPr>
@@ -26881,7 +27813,7 @@
           <p:cNvPr id="16" name="">
             <a:extLst xmlns:a="http://schemas.openxmlformats.org/drawingml/2006/main">
               <a:ext uri="{FF2B5EF4-FFF2-40B4-BE49-F238E27FC236}">
-                <a16:creationId xmlns:a16="http://schemas.microsoft.com/office/drawing/2014/main" id="{B69772F8-9591-4621-8617-E0D6C93CEA6B}"/>
+                <a16:creationId xmlns:a16="http://schemas.microsoft.com/office/drawing/2014/main" id="{D3B422AC-11AF-4ECC-8E60-2D715C8967A2}"/>
               </a:ext>
             </a:extLst>
           </p:cNvPr>
@@ -26943,7 +27875,7 @@
           <p:cNvPr id="17" name="">
             <a:extLst xmlns:a="http://schemas.openxmlformats.org/drawingml/2006/main">
               <a:ext uri="{FF2B5EF4-FFF2-40B4-BE49-F238E27FC236}">
-                <a16:creationId xmlns:a16="http://schemas.microsoft.com/office/drawing/2014/main" id="{A2AC787D-6DE6-49A7-9A59-0D056075CECB}"/>
+                <a16:creationId xmlns:a16="http://schemas.microsoft.com/office/drawing/2014/main" id="{6C454ABF-2EE5-4352-8888-71818CCAF62F}"/>
               </a:ext>
             </a:extLst>
           </p:cNvPr>
@@ -27005,7 +27937,7 @@
           <p:cNvPr id="18" name="">
             <a:extLst xmlns:a="http://schemas.openxmlformats.org/drawingml/2006/main">
               <a:ext uri="{FF2B5EF4-FFF2-40B4-BE49-F238E27FC236}">
-                <a16:creationId xmlns:a16="http://schemas.microsoft.com/office/drawing/2014/main" id="{ACCDB801-5033-48A7-B4F6-24B9BFB86CDC}"/>
+                <a16:creationId xmlns:a16="http://schemas.microsoft.com/office/drawing/2014/main" id="{899BDDA5-1E84-43E8-8A03-C947A05C7163}"/>
               </a:ext>
             </a:extLst>
           </p:cNvPr>
@@ -27067,7 +27999,7 @@
           <p:cNvPr id="19" name="">
             <a:extLst xmlns:a="http://schemas.openxmlformats.org/drawingml/2006/main">
               <a:ext uri="{FF2B5EF4-FFF2-40B4-BE49-F238E27FC236}">
-                <a16:creationId xmlns:a16="http://schemas.microsoft.com/office/drawing/2014/main" id="{E3979A69-988F-48E0-9972-6D2E041C312D}"/>
+                <a16:creationId xmlns:a16="http://schemas.microsoft.com/office/drawing/2014/main" id="{0AD41B34-28B0-4DB8-BF0A-E97A5C4DB8F9}"/>
               </a:ext>
             </a:extLst>
           </p:cNvPr>
@@ -27108,7 +28040,7 @@
           <p:cNvPr id="20" name="">
             <a:extLst xmlns:a="http://schemas.openxmlformats.org/drawingml/2006/main">
               <a:ext uri="{FF2B5EF4-FFF2-40B4-BE49-F238E27FC236}">
-                <a16:creationId xmlns:a16="http://schemas.microsoft.com/office/drawing/2014/main" id="{7943DA9D-38A0-4E73-A83B-3D145C7F69FC}"/>
+                <a16:creationId xmlns:a16="http://schemas.microsoft.com/office/drawing/2014/main" id="{6523FED4-5641-4938-B966-1CBE9F2B5C03}"/>
               </a:ext>
             </a:extLst>
           </p:cNvPr>
@@ -27170,7 +28102,7 @@
           <p:cNvPr id="21" name="">
             <a:extLst xmlns:a="http://schemas.openxmlformats.org/drawingml/2006/main">
               <a:ext uri="{FF2B5EF4-FFF2-40B4-BE49-F238E27FC236}">
-                <a16:creationId xmlns:a16="http://schemas.microsoft.com/office/drawing/2014/main" id="{446FE2A6-A107-4E6B-AE72-7C8E0B3A5DFC}"/>
+                <a16:creationId xmlns:a16="http://schemas.microsoft.com/office/drawing/2014/main" id="{B4500DA0-28BC-4A99-95D7-0F85A0C98082}"/>
               </a:ext>
             </a:extLst>
           </p:cNvPr>
@@ -27232,7 +28164,7 @@
           <p:cNvPr id="22" name="">
             <a:extLst xmlns:a="http://schemas.openxmlformats.org/drawingml/2006/main">
               <a:ext uri="{FF2B5EF4-FFF2-40B4-BE49-F238E27FC236}">
-                <a16:creationId xmlns:a16="http://schemas.microsoft.com/office/drawing/2014/main" id="{B60E044C-EA7F-44B6-9C7B-05244FF3DDF2}"/>
+                <a16:creationId xmlns:a16="http://schemas.microsoft.com/office/drawing/2014/main" id="{54145C43-6EB4-403A-84A6-5CE0D7CCD129}"/>
               </a:ext>
             </a:extLst>
           </p:cNvPr>
@@ -27273,7 +28205,7 @@
           <p:cNvPr id="23" name="">
             <a:extLst xmlns:a="http://schemas.openxmlformats.org/drawingml/2006/main">
               <a:ext uri="{FF2B5EF4-FFF2-40B4-BE49-F238E27FC236}">
-                <a16:creationId xmlns:a16="http://schemas.microsoft.com/office/drawing/2014/main" id="{73033BE9-C89F-4F87-A2F8-9473FE2DFF94}"/>
+                <a16:creationId xmlns:a16="http://schemas.microsoft.com/office/drawing/2014/main" id="{19825077-BE16-4D4B-836F-8AE59BC145B1}"/>
               </a:ext>
             </a:extLst>
           </p:cNvPr>
@@ -27335,7 +28267,7 @@
           <p:cNvPr id="24" name="">
             <a:extLst xmlns:a="http://schemas.openxmlformats.org/drawingml/2006/main">
               <a:ext uri="{FF2B5EF4-FFF2-40B4-BE49-F238E27FC236}">
-                <a16:creationId xmlns:a16="http://schemas.microsoft.com/office/drawing/2014/main" id="{A2C08C80-52F7-46C2-AD16-00C175328AEB}"/>
+                <a16:creationId xmlns:a16="http://schemas.microsoft.com/office/drawing/2014/main" id="{CF30035C-FC23-4AAA-8571-201932747005}"/>
               </a:ext>
             </a:extLst>
           </p:cNvPr>
@@ -27397,7 +28329,7 @@
           <p:cNvPr id="25" name="">
             <a:extLst xmlns:a="http://schemas.openxmlformats.org/drawingml/2006/main">
               <a:ext uri="{FF2B5EF4-FFF2-40B4-BE49-F238E27FC236}">
-                <a16:creationId xmlns:a16="http://schemas.microsoft.com/office/drawing/2014/main" id="{2E59D906-B87C-4318-B8C6-74FB17EA2046}"/>
+                <a16:creationId xmlns:a16="http://schemas.microsoft.com/office/drawing/2014/main" id="{F36C13E5-7FE5-45C9-B397-1B3B31A11579}"/>
               </a:ext>
             </a:extLst>
           </p:cNvPr>
@@ -27428,7 +28360,7 @@
           <p:cNvPr id="26" name="">
             <a:extLst xmlns:a="http://schemas.openxmlformats.org/drawingml/2006/main">
               <a:ext uri="{FF2B5EF4-FFF2-40B4-BE49-F238E27FC236}">
-                <a16:creationId xmlns:a16="http://schemas.microsoft.com/office/drawing/2014/main" id="{A211A314-E555-4A05-84E2-739544713100}"/>
+                <a16:creationId xmlns:a16="http://schemas.microsoft.com/office/drawing/2014/main" id="{6C6EFCF2-D17C-48A0-AE6F-EB1CCCD2C852}"/>
               </a:ext>
             </a:extLst>
           </p:cNvPr>
@@ -27490,7 +28422,7 @@
           <p:cNvPr id="27" name="">
             <a:extLst xmlns:a="http://schemas.openxmlformats.org/drawingml/2006/main">
               <a:ext uri="{FF2B5EF4-FFF2-40B4-BE49-F238E27FC236}">
-                <a16:creationId xmlns:a16="http://schemas.microsoft.com/office/drawing/2014/main" id="{E969FFE6-B2AA-42C2-B270-5965224A5D7D}"/>
+                <a16:creationId xmlns:a16="http://schemas.microsoft.com/office/drawing/2014/main" id="{A8379C40-DD35-470F-B4A8-33D3A54BCA16}"/>
               </a:ext>
             </a:extLst>
           </p:cNvPr>
@@ -27550,7 +28482,7 @@
     </p:spTree>
     <p:extLst>
       <p:ext uri="{BB962C8B-B14F-4D97-AF65-F5344CB8AC3E}">
-        <p14:creationId xmlns:p14="http://schemas.microsoft.com/office/powerpoint/2010/main" val="1137958892"/>
+        <p14:creationId xmlns:p14="http://schemas.microsoft.com/office/powerpoint/2010/main" val="1739575451"/>
       </p:ext>
     </p:extLst>
   </p:cSld>
@@ -27581,7 +28513,7 @@
           <p:cNvPr id="1" name="">
             <a:extLst xmlns:a="http://schemas.openxmlformats.org/drawingml/2006/main">
               <a:ext uri="{FF2B5EF4-FFF2-40B4-BE49-F238E27FC236}">
-                <a16:creationId xmlns:a16="http://schemas.microsoft.com/office/drawing/2014/main" id="{A1267486-5F83-4D0C-AFD6-23AB40D96231}"/>
+                <a16:creationId xmlns:a16="http://schemas.microsoft.com/office/drawing/2014/main" id="{25CE2DB1-DD1C-4887-A53C-55E4EFBD355B}"/>
               </a:ext>
             </a:extLst>
           </p:cNvPr>
@@ -27643,7 +28575,7 @@
           <p:cNvPr id="2" name="">
             <a:extLst xmlns:a="http://schemas.openxmlformats.org/drawingml/2006/main">
               <a:ext uri="{FF2B5EF4-FFF2-40B4-BE49-F238E27FC236}">
-                <a16:creationId xmlns:a16="http://schemas.microsoft.com/office/drawing/2014/main" id="{E0643F94-FF50-4B23-AB6D-AA2139C12F60}"/>
+                <a16:creationId xmlns:a16="http://schemas.microsoft.com/office/drawing/2014/main" id="{41776907-9A96-4484-A013-FFD4188F0212}"/>
               </a:ext>
             </a:extLst>
           </p:cNvPr>
@@ -27705,7 +28637,7 @@
           <p:cNvPr id="3" name="">
             <a:extLst xmlns:a="http://schemas.openxmlformats.org/drawingml/2006/main">
               <a:ext uri="{FF2B5EF4-FFF2-40B4-BE49-F238E27FC236}">
-                <a16:creationId xmlns:a16="http://schemas.microsoft.com/office/drawing/2014/main" id="{214BA050-BC08-437C-A8CE-DF1883D6EB3E}"/>
+                <a16:creationId xmlns:a16="http://schemas.microsoft.com/office/drawing/2014/main" id="{9560D876-A8D1-4559-B2C4-8F367924D401}"/>
               </a:ext>
             </a:extLst>
           </p:cNvPr>
@@ -27746,7 +28678,7 @@
           <p:cNvPr id="4" name="">
             <a:extLst xmlns:a="http://schemas.openxmlformats.org/drawingml/2006/main">
               <a:ext uri="{FF2B5EF4-FFF2-40B4-BE49-F238E27FC236}">
-                <a16:creationId xmlns:a16="http://schemas.microsoft.com/office/drawing/2014/main" id="{76076140-A22A-46DD-896C-9687EB94C958}"/>
+                <a16:creationId xmlns:a16="http://schemas.microsoft.com/office/drawing/2014/main" id="{58ED081F-B6BC-486B-BCFB-C7F1DD41D0B1}"/>
               </a:ext>
             </a:extLst>
           </p:cNvPr>
@@ -27777,7 +28709,7 @@
           <p:cNvPr id="5" name="">
             <a:extLst xmlns:a="http://schemas.openxmlformats.org/drawingml/2006/main">
               <a:ext uri="{FF2B5EF4-FFF2-40B4-BE49-F238E27FC236}">
-                <a16:creationId xmlns:a16="http://schemas.microsoft.com/office/drawing/2014/main" id="{1ECD4CF7-5135-4F53-BFCC-4077D50CDCB0}"/>
+                <a16:creationId xmlns:a16="http://schemas.microsoft.com/office/drawing/2014/main" id="{39939D3B-3081-4036-8748-E576213E003B}"/>
               </a:ext>
             </a:extLst>
           </p:cNvPr>
@@ -27810,7 +28742,7 @@
           <p:cNvPr id="6" name="">
             <a:extLst xmlns:a="http://schemas.openxmlformats.org/drawingml/2006/main">
               <a:ext uri="{FF2B5EF4-FFF2-40B4-BE49-F238E27FC236}">
-                <a16:creationId xmlns:a16="http://schemas.microsoft.com/office/drawing/2014/main" id="{5F4BC07B-61FB-43EC-9130-12B58B80F84D}"/>
+                <a16:creationId xmlns:a16="http://schemas.microsoft.com/office/drawing/2014/main" id="{F8212144-B83F-4A44-87AF-5FAC4CF58B1D}"/>
               </a:ext>
             </a:extLst>
           </p:cNvPr>
@@ -27843,7 +28775,7 @@
           <p:cNvPr id="7" name="">
             <a:extLst xmlns:a="http://schemas.openxmlformats.org/drawingml/2006/main">
               <a:ext uri="{FF2B5EF4-FFF2-40B4-BE49-F238E27FC236}">
-                <a16:creationId xmlns:a16="http://schemas.microsoft.com/office/drawing/2014/main" id="{4B594975-39BD-4C7D-84DB-CC2E347B6640}"/>
+                <a16:creationId xmlns:a16="http://schemas.microsoft.com/office/drawing/2014/main" id="{0AFBDBA0-EAC5-4FEE-8356-C8119F347CB3}"/>
               </a:ext>
             </a:extLst>
           </p:cNvPr>
@@ -27876,7 +28808,7 @@
           <p:cNvPr id="8" name="">
             <a:extLst xmlns:a="http://schemas.openxmlformats.org/drawingml/2006/main">
               <a:ext uri="{FF2B5EF4-FFF2-40B4-BE49-F238E27FC236}">
-                <a16:creationId xmlns:a16="http://schemas.microsoft.com/office/drawing/2014/main" id="{A1F5E235-1390-45AF-9C87-FB6DD5D8B512}"/>
+                <a16:creationId xmlns:a16="http://schemas.microsoft.com/office/drawing/2014/main" id="{7AABEB04-996D-4F09-BC27-A4D0D0E1CD5D}"/>
               </a:ext>
             </a:extLst>
           </p:cNvPr>
@@ -27909,7 +28841,7 @@
           <p:cNvPr id="9" name="">
             <a:extLst xmlns:a="http://schemas.openxmlformats.org/drawingml/2006/main">
               <a:ext uri="{FF2B5EF4-FFF2-40B4-BE49-F238E27FC236}">
-                <a16:creationId xmlns:a16="http://schemas.microsoft.com/office/drawing/2014/main" id="{0AB4D380-7F6F-4655-BC75-0079BBB4504A}"/>
+                <a16:creationId xmlns:a16="http://schemas.microsoft.com/office/drawing/2014/main" id="{F7F2970F-7E37-4D76-82A5-2099FC6FEE5B}"/>
               </a:ext>
             </a:extLst>
           </p:cNvPr>
@@ -27942,7 +28874,7 @@
           <p:cNvPr id="10" name="">
             <a:extLst xmlns:a="http://schemas.openxmlformats.org/drawingml/2006/main">
               <a:ext uri="{FF2B5EF4-FFF2-40B4-BE49-F238E27FC236}">
-                <a16:creationId xmlns:a16="http://schemas.microsoft.com/office/drawing/2014/main" id="{3A6237F1-4756-4C6C-B8D8-88FAD62C18D8}"/>
+                <a16:creationId xmlns:a16="http://schemas.microsoft.com/office/drawing/2014/main" id="{3BB00E28-4B84-480B-98B3-C5089DC47888}"/>
               </a:ext>
             </a:extLst>
           </p:cNvPr>
@@ -27975,7 +28907,7 @@
           <p:cNvPr id="11" name="">
             <a:extLst xmlns:a="http://schemas.openxmlformats.org/drawingml/2006/main">
               <a:ext uri="{FF2B5EF4-FFF2-40B4-BE49-F238E27FC236}">
-                <a16:creationId xmlns:a16="http://schemas.microsoft.com/office/drawing/2014/main" id="{F797ACBB-4B31-4466-B265-7CC11D9A575A}"/>
+                <a16:creationId xmlns:a16="http://schemas.microsoft.com/office/drawing/2014/main" id="{5642E17D-DCE7-4287-A3A5-172D95821B90}"/>
               </a:ext>
             </a:extLst>
           </p:cNvPr>
@@ -28008,7 +28940,7 @@
           <p:cNvPr id="12" name="">
             <a:extLst xmlns:a="http://schemas.openxmlformats.org/drawingml/2006/main">
               <a:ext uri="{FF2B5EF4-FFF2-40B4-BE49-F238E27FC236}">
-                <a16:creationId xmlns:a16="http://schemas.microsoft.com/office/drawing/2014/main" id="{4FEAF892-5FBD-49C1-898B-CC9E1B0B1867}"/>
+                <a16:creationId xmlns:a16="http://schemas.microsoft.com/office/drawing/2014/main" id="{1E0D3C6D-C4EC-4215-8ED9-E2E537318B44}"/>
               </a:ext>
             </a:extLst>
           </p:cNvPr>
@@ -28049,7 +28981,7 @@
           <p:cNvPr id="13" name="">
             <a:extLst xmlns:a="http://schemas.openxmlformats.org/drawingml/2006/main">
               <a:ext uri="{FF2B5EF4-FFF2-40B4-BE49-F238E27FC236}">
-                <a16:creationId xmlns:a16="http://schemas.microsoft.com/office/drawing/2014/main" id="{2EE3CAD0-A204-4C59-9FE6-96A9E86D12B6}"/>
+                <a16:creationId xmlns:a16="http://schemas.microsoft.com/office/drawing/2014/main" id="{4FBFB534-8202-441B-AC9B-0BE194379640}"/>
               </a:ext>
             </a:extLst>
           </p:cNvPr>
@@ -28138,7 +29070,7 @@
           <p:cNvPr id="14" name="">
             <a:extLst xmlns:a="http://schemas.openxmlformats.org/drawingml/2006/main">
               <a:ext uri="{FF2B5EF4-FFF2-40B4-BE49-F238E27FC236}">
-                <a16:creationId xmlns:a16="http://schemas.microsoft.com/office/drawing/2014/main" id="{27FB0699-7CD8-4381-8790-F37987BEA717}"/>
+                <a16:creationId xmlns:a16="http://schemas.microsoft.com/office/drawing/2014/main" id="{B74F9380-66C7-4106-BBCF-4F7AE9521BF9}"/>
               </a:ext>
             </a:extLst>
           </p:cNvPr>
@@ -28179,7 +29111,7 @@
           <p:cNvPr id="15" name="">
             <a:extLst xmlns:a="http://schemas.openxmlformats.org/drawingml/2006/main">
               <a:ext uri="{FF2B5EF4-FFF2-40B4-BE49-F238E27FC236}">
-                <a16:creationId xmlns:a16="http://schemas.microsoft.com/office/drawing/2014/main" id="{FAC40827-AE62-41BC-BEDF-66C3C0781F50}"/>
+                <a16:creationId xmlns:a16="http://schemas.microsoft.com/office/drawing/2014/main" id="{322907B9-6E21-4027-9B34-930462384B54}"/>
               </a:ext>
             </a:extLst>
           </p:cNvPr>
@@ -28268,7 +29200,7 @@
           <p:cNvPr id="16" name="">
             <a:extLst xmlns:a="http://schemas.openxmlformats.org/drawingml/2006/main">
               <a:ext uri="{FF2B5EF4-FFF2-40B4-BE49-F238E27FC236}">
-                <a16:creationId xmlns:a16="http://schemas.microsoft.com/office/drawing/2014/main" id="{74253904-AB93-4B3E-8BE9-F6DB1BE03946}"/>
+                <a16:creationId xmlns:a16="http://schemas.microsoft.com/office/drawing/2014/main" id="{C4469A69-3413-4547-BDA1-5E60B3BEF946}"/>
               </a:ext>
             </a:extLst>
           </p:cNvPr>
@@ -28309,7 +29241,7 @@
           <p:cNvPr id="17" name="">
             <a:extLst xmlns:a="http://schemas.openxmlformats.org/drawingml/2006/main">
               <a:ext uri="{FF2B5EF4-FFF2-40B4-BE49-F238E27FC236}">
-                <a16:creationId xmlns:a16="http://schemas.microsoft.com/office/drawing/2014/main" id="{05A12023-EB8B-4F09-A174-49F95368E1FF}"/>
+                <a16:creationId xmlns:a16="http://schemas.microsoft.com/office/drawing/2014/main" id="{E35C5C39-0CF7-423C-A55A-43CECD2B8C82}"/>
               </a:ext>
             </a:extLst>
           </p:cNvPr>
@@ -28398,7 +29330,7 @@
           <p:cNvPr id="18" name="">
             <a:extLst xmlns:a="http://schemas.openxmlformats.org/drawingml/2006/main">
               <a:ext uri="{FF2B5EF4-FFF2-40B4-BE49-F238E27FC236}">
-                <a16:creationId xmlns:a16="http://schemas.microsoft.com/office/drawing/2014/main" id="{BCCAC063-026A-4B84-884E-41082770E1D7}"/>
+                <a16:creationId xmlns:a16="http://schemas.microsoft.com/office/drawing/2014/main" id="{479FC204-7D8B-4E95-B88F-F29D8843FB84}"/>
               </a:ext>
             </a:extLst>
           </p:cNvPr>
@@ -28439,7 +29371,7 @@
           <p:cNvPr id="19" name="">
             <a:extLst xmlns:a="http://schemas.openxmlformats.org/drawingml/2006/main">
               <a:ext uri="{FF2B5EF4-FFF2-40B4-BE49-F238E27FC236}">
-                <a16:creationId xmlns:a16="http://schemas.microsoft.com/office/drawing/2014/main" id="{3B3DF74E-5CC0-4EE6-B92C-3E6B5DD03196}"/>
+                <a16:creationId xmlns:a16="http://schemas.microsoft.com/office/drawing/2014/main" id="{267A4C81-B6E6-408D-AAAB-2A59DBD58601}"/>
               </a:ext>
             </a:extLst>
           </p:cNvPr>
@@ -28528,7 +29460,7 @@
           <p:cNvPr id="20" name="">
             <a:extLst xmlns:a="http://schemas.openxmlformats.org/drawingml/2006/main">
               <a:ext uri="{FF2B5EF4-FFF2-40B4-BE49-F238E27FC236}">
-                <a16:creationId xmlns:a16="http://schemas.microsoft.com/office/drawing/2014/main" id="{65FAD7E4-E820-4F85-9A90-653E4F8F94E5}"/>
+                <a16:creationId xmlns:a16="http://schemas.microsoft.com/office/drawing/2014/main" id="{578581A9-B47E-400C-B6C4-6441EEF58596}"/>
               </a:ext>
             </a:extLst>
           </p:cNvPr>
@@ -28569,7 +29501,7 @@
           <p:cNvPr id="21" name="">
             <a:extLst xmlns:a="http://schemas.openxmlformats.org/drawingml/2006/main">
               <a:ext uri="{FF2B5EF4-FFF2-40B4-BE49-F238E27FC236}">
-                <a16:creationId xmlns:a16="http://schemas.microsoft.com/office/drawing/2014/main" id="{2C9A34EC-2393-4175-BE66-D47BB67829ED}"/>
+                <a16:creationId xmlns:a16="http://schemas.microsoft.com/office/drawing/2014/main" id="{04E03F2B-DEE8-47FB-9F8E-DA2D2C861A4E}"/>
               </a:ext>
             </a:extLst>
           </p:cNvPr>
@@ -28631,7 +29563,7 @@
           <p:cNvPr id="22" name="">
             <a:extLst xmlns:a="http://schemas.openxmlformats.org/drawingml/2006/main">
               <a:ext uri="{FF2B5EF4-FFF2-40B4-BE49-F238E27FC236}">
-                <a16:creationId xmlns:a16="http://schemas.microsoft.com/office/drawing/2014/main" id="{E26BDBAB-EF96-448E-91E9-0A57C8E52FBE}"/>
+                <a16:creationId xmlns:a16="http://schemas.microsoft.com/office/drawing/2014/main" id="{E0711A76-8EFC-4164-9822-4B6F534E48AC}"/>
               </a:ext>
             </a:extLst>
           </p:cNvPr>
@@ -28672,7 +29604,7 @@
           <p:cNvPr id="23" name="">
             <a:extLst xmlns:a="http://schemas.openxmlformats.org/drawingml/2006/main">
               <a:ext uri="{FF2B5EF4-FFF2-40B4-BE49-F238E27FC236}">
-                <a16:creationId xmlns:a16="http://schemas.microsoft.com/office/drawing/2014/main" id="{83761C80-F05A-4E35-BD3B-C6D87214B9D1}"/>
+                <a16:creationId xmlns:a16="http://schemas.microsoft.com/office/drawing/2014/main" id="{027A65C6-0B3C-42EC-84B5-1B1F5F0A6733}"/>
               </a:ext>
             </a:extLst>
           </p:cNvPr>
@@ -28734,7 +29666,7 @@
           <p:cNvPr id="24" name="">
             <a:extLst xmlns:a="http://schemas.openxmlformats.org/drawingml/2006/main">
               <a:ext uri="{FF2B5EF4-FFF2-40B4-BE49-F238E27FC236}">
-                <a16:creationId xmlns:a16="http://schemas.microsoft.com/office/drawing/2014/main" id="{C8B47138-A3A2-40AF-9584-9B86CC8470F5}"/>
+                <a16:creationId xmlns:a16="http://schemas.microsoft.com/office/drawing/2014/main" id="{B5C24761-FC66-42CC-BDCB-4CF98F7B80C9}"/>
               </a:ext>
             </a:extLst>
           </p:cNvPr>
@@ -28775,7 +29707,7 @@
           <p:cNvPr id="25" name="">
             <a:extLst xmlns:a="http://schemas.openxmlformats.org/drawingml/2006/main">
               <a:ext uri="{FF2B5EF4-FFF2-40B4-BE49-F238E27FC236}">
-                <a16:creationId xmlns:a16="http://schemas.microsoft.com/office/drawing/2014/main" id="{BB15103C-19C5-4B8A-83C1-AFF5F8015C80}"/>
+                <a16:creationId xmlns:a16="http://schemas.microsoft.com/office/drawing/2014/main" id="{8767E870-CC4B-443F-B097-979E4D7BE96C}"/>
               </a:ext>
             </a:extLst>
           </p:cNvPr>
@@ -28864,7 +29796,7 @@
           <p:cNvPr id="26" name="">
             <a:extLst xmlns:a="http://schemas.openxmlformats.org/drawingml/2006/main">
               <a:ext uri="{FF2B5EF4-FFF2-40B4-BE49-F238E27FC236}">
-                <a16:creationId xmlns:a16="http://schemas.microsoft.com/office/drawing/2014/main" id="{5273F82F-0AF0-4F08-B376-BF8E35FD28FD}"/>
+                <a16:creationId xmlns:a16="http://schemas.microsoft.com/office/drawing/2014/main" id="{53A74203-B703-49EE-8583-D5F05C604CDD}"/>
               </a:ext>
             </a:extLst>
           </p:cNvPr>
@@ -28905,7 +29837,7 @@
           <p:cNvPr id="27" name="">
             <a:extLst xmlns:a="http://schemas.openxmlformats.org/drawingml/2006/main">
               <a:ext uri="{FF2B5EF4-FFF2-40B4-BE49-F238E27FC236}">
-                <a16:creationId xmlns:a16="http://schemas.microsoft.com/office/drawing/2014/main" id="{F72789D5-0405-462D-BB04-E0E17A1AAF34}"/>
+                <a16:creationId xmlns:a16="http://schemas.microsoft.com/office/drawing/2014/main" id="{6D97DFCA-E10B-4EBD-BFCD-D4C4362805E9}"/>
               </a:ext>
             </a:extLst>
           </p:cNvPr>
@@ -28994,7 +29926,7 @@
           <p:cNvPr id="28" name="">
             <a:extLst xmlns:a="http://schemas.openxmlformats.org/drawingml/2006/main">
               <a:ext uri="{FF2B5EF4-FFF2-40B4-BE49-F238E27FC236}">
-                <a16:creationId xmlns:a16="http://schemas.microsoft.com/office/drawing/2014/main" id="{CDC9F724-C9C7-4B10-AE28-9610CB9ABABD}"/>
+                <a16:creationId xmlns:a16="http://schemas.microsoft.com/office/drawing/2014/main" id="{7CA442C7-27AF-4019-8565-895BB8BE2641}"/>
               </a:ext>
             </a:extLst>
           </p:cNvPr>
@@ -29027,7 +29959,7 @@
           <p:cNvPr id="29" name="">
             <a:extLst xmlns:a="http://schemas.openxmlformats.org/drawingml/2006/main">
               <a:ext uri="{FF2B5EF4-FFF2-40B4-BE49-F238E27FC236}">
-                <a16:creationId xmlns:a16="http://schemas.microsoft.com/office/drawing/2014/main" id="{A1EC3D97-FCBD-4538-85CF-D2314A199B84}"/>
+                <a16:creationId xmlns:a16="http://schemas.microsoft.com/office/drawing/2014/main" id="{71E78E9E-FE62-4835-951C-E2914EF5BFE2}"/>
               </a:ext>
             </a:extLst>
           </p:cNvPr>
@@ -29089,7 +30021,7 @@
           <p:cNvPr id="30" name="">
             <a:extLst xmlns:a="http://schemas.openxmlformats.org/drawingml/2006/main">
               <a:ext uri="{FF2B5EF4-FFF2-40B4-BE49-F238E27FC236}">
-                <a16:creationId xmlns:a16="http://schemas.microsoft.com/office/drawing/2014/main" id="{D2C2BB87-8222-4907-A24B-D616756F602D}"/>
+                <a16:creationId xmlns:a16="http://schemas.microsoft.com/office/drawing/2014/main" id="{91048171-EBBF-42FD-9380-1BFC298E3246}"/>
               </a:ext>
             </a:extLst>
           </p:cNvPr>
@@ -29122,7 +30054,7 @@
           <p:cNvPr id="31" name="">
             <a:extLst xmlns:a="http://schemas.openxmlformats.org/drawingml/2006/main">
               <a:ext uri="{FF2B5EF4-FFF2-40B4-BE49-F238E27FC236}">
-                <a16:creationId xmlns:a16="http://schemas.microsoft.com/office/drawing/2014/main" id="{0FC12F51-5B9C-492C-B1B6-18DB62656A7D}"/>
+                <a16:creationId xmlns:a16="http://schemas.microsoft.com/office/drawing/2014/main" id="{3D144B1B-B169-40C1-8551-E69F9DB68A3E}"/>
               </a:ext>
             </a:extLst>
           </p:cNvPr>
@@ -29184,7 +30116,7 @@
           <p:cNvPr id="32" name="">
             <a:extLst xmlns:a="http://schemas.openxmlformats.org/drawingml/2006/main">
               <a:ext uri="{FF2B5EF4-FFF2-40B4-BE49-F238E27FC236}">
-                <a16:creationId xmlns:a16="http://schemas.microsoft.com/office/drawing/2014/main" id="{8C8592C1-68D4-4405-A41F-2941FFA9FDD7}"/>
+                <a16:creationId xmlns:a16="http://schemas.microsoft.com/office/drawing/2014/main" id="{15DB8845-8DFD-47A3-A542-B6FBEDCB08A6}"/>
               </a:ext>
             </a:extLst>
           </p:cNvPr>
@@ -29217,7 +30149,7 @@
           <p:cNvPr id="33" name="">
             <a:extLst xmlns:a="http://schemas.openxmlformats.org/drawingml/2006/main">
               <a:ext uri="{FF2B5EF4-FFF2-40B4-BE49-F238E27FC236}">
-                <a16:creationId xmlns:a16="http://schemas.microsoft.com/office/drawing/2014/main" id="{A8D4CB32-FBE8-4E6D-BF27-C308A42633FF}"/>
+                <a16:creationId xmlns:a16="http://schemas.microsoft.com/office/drawing/2014/main" id="{C49835BF-0EC2-4D9B-969F-B6BB70A3829B}"/>
               </a:ext>
             </a:extLst>
           </p:cNvPr>
@@ -29279,7 +30211,7 @@
           <p:cNvPr id="34" name="">
             <a:extLst xmlns:a="http://schemas.openxmlformats.org/drawingml/2006/main">
               <a:ext uri="{FF2B5EF4-FFF2-40B4-BE49-F238E27FC236}">
-                <a16:creationId xmlns:a16="http://schemas.microsoft.com/office/drawing/2014/main" id="{F0982314-A0DE-4655-A576-9FE5D27AD779}"/>
+                <a16:creationId xmlns:a16="http://schemas.microsoft.com/office/drawing/2014/main" id="{F0992114-3756-4015-B432-2A7C6CC3A856}"/>
               </a:ext>
             </a:extLst>
           </p:cNvPr>
@@ -29341,7 +30273,7 @@
           <p:cNvPr id="35" name="">
             <a:extLst xmlns:a="http://schemas.openxmlformats.org/drawingml/2006/main">
               <a:ext uri="{FF2B5EF4-FFF2-40B4-BE49-F238E27FC236}">
-                <a16:creationId xmlns:a16="http://schemas.microsoft.com/office/drawing/2014/main" id="{91A220A1-1B27-4223-9F97-DD545E8438DC}"/>
+                <a16:creationId xmlns:a16="http://schemas.microsoft.com/office/drawing/2014/main" id="{246B2A58-27E1-433A-9829-53F1353C968A}"/>
               </a:ext>
             </a:extLst>
           </p:cNvPr>
@@ -29372,7 +30304,7 @@
           <p:cNvPr id="36" name="">
             <a:extLst xmlns:a="http://schemas.openxmlformats.org/drawingml/2006/main">
               <a:ext uri="{FF2B5EF4-FFF2-40B4-BE49-F238E27FC236}">
-                <a16:creationId xmlns:a16="http://schemas.microsoft.com/office/drawing/2014/main" id="{374A71C1-6B33-45C2-B762-2FFEBAAC2DD6}"/>
+                <a16:creationId xmlns:a16="http://schemas.microsoft.com/office/drawing/2014/main" id="{551E30BF-2CCB-414A-AE63-B1681B2ADD7F}"/>
               </a:ext>
             </a:extLst>
           </p:cNvPr>
@@ -29434,7 +30366,7 @@
           <p:cNvPr id="37" name="">
             <a:extLst xmlns:a="http://schemas.openxmlformats.org/drawingml/2006/main">
               <a:ext uri="{FF2B5EF4-FFF2-40B4-BE49-F238E27FC236}">
-                <a16:creationId xmlns:a16="http://schemas.microsoft.com/office/drawing/2014/main" id="{85DE64CE-74CF-426D-AA1E-605FE558F173}"/>
+                <a16:creationId xmlns:a16="http://schemas.microsoft.com/office/drawing/2014/main" id="{176C3EEC-43A4-4162-9CE9-F749CF7ECEEE}"/>
               </a:ext>
             </a:extLst>
           </p:cNvPr>
@@ -29494,7 +30426,7 @@
     </p:spTree>
     <p:extLst>
       <p:ext uri="{BB962C8B-B14F-4D97-AF65-F5344CB8AC3E}">
-        <p14:creationId xmlns:p14="http://schemas.microsoft.com/office/powerpoint/2010/main" val="1926079567"/>
+        <p14:creationId xmlns:p14="http://schemas.microsoft.com/office/powerpoint/2010/main" val="769679392"/>
       </p:ext>
     </p:extLst>
   </p:cSld>
@@ -29525,7 +30457,7 @@
           <p:cNvPr id="1" name="">
             <a:extLst xmlns:a="http://schemas.openxmlformats.org/drawingml/2006/main">
               <a:ext uri="{FF2B5EF4-FFF2-40B4-BE49-F238E27FC236}">
-                <a16:creationId xmlns:a16="http://schemas.microsoft.com/office/drawing/2014/main" id="{3863A9D1-30DD-4E13-BC03-8135D71DE09D}"/>
+                <a16:creationId xmlns:a16="http://schemas.microsoft.com/office/drawing/2014/main" id="{C518276B-A772-44F4-922D-1C23C66C53E4}"/>
               </a:ext>
             </a:extLst>
           </p:cNvPr>
@@ -29587,7 +30519,7 @@
           <p:cNvPr id="2" name="">
             <a:extLst xmlns:a="http://schemas.openxmlformats.org/drawingml/2006/main">
               <a:ext uri="{FF2B5EF4-FFF2-40B4-BE49-F238E27FC236}">
-                <a16:creationId xmlns:a16="http://schemas.microsoft.com/office/drawing/2014/main" id="{31CFF4CE-4A12-4FDB-9EE6-7059C2C1652E}"/>
+                <a16:creationId xmlns:a16="http://schemas.microsoft.com/office/drawing/2014/main" id="{3C99F368-8363-4020-8041-F6548A32E20B}"/>
               </a:ext>
             </a:extLst>
           </p:cNvPr>
@@ -29653,7 +30585,7 @@
           <p:nvPr/>
         </p:nvPicPr>
         <p:blipFill>
-          <a:blip xmlns:r="http://schemas.openxmlformats.org/officeDocument/2006/relationships" xmlns:a="http://schemas.openxmlformats.org/drawingml/2006/main" r:embed="R24f86fc4b014424f"/>
+          <a:blip xmlns:r="http://schemas.openxmlformats.org/officeDocument/2006/relationships" xmlns:a="http://schemas.openxmlformats.org/drawingml/2006/main" r:embed="Rcd4620daae174afa"/>
           <a:stretch xmlns:a="http://schemas.openxmlformats.org/drawingml/2006/main"/>
         </p:blipFill>
         <p:spPr>
@@ -29673,7 +30605,7 @@
           <p:cNvPr id="4" name="">
             <a:extLst xmlns:a="http://schemas.openxmlformats.org/drawingml/2006/main">
               <a:ext uri="{FF2B5EF4-FFF2-40B4-BE49-F238E27FC236}">
-                <a16:creationId xmlns:a16="http://schemas.microsoft.com/office/drawing/2014/main" id="{F131424E-D973-4F2F-ABD1-D34316AB6A83}"/>
+                <a16:creationId xmlns:a16="http://schemas.microsoft.com/office/drawing/2014/main" id="{CC79D06F-15C6-4097-97E5-2B7B51C0B97C}"/>
               </a:ext>
             </a:extLst>
           </p:cNvPr>
@@ -29714,7 +30646,7 @@
           <p:cNvPr id="5" name="">
             <a:extLst xmlns:a="http://schemas.openxmlformats.org/drawingml/2006/main">
               <a:ext uri="{FF2B5EF4-FFF2-40B4-BE49-F238E27FC236}">
-                <a16:creationId xmlns:a16="http://schemas.microsoft.com/office/drawing/2014/main" id="{00E2CF90-F409-45EC-A901-BDF143FBF68C}"/>
+                <a16:creationId xmlns:a16="http://schemas.microsoft.com/office/drawing/2014/main" id="{F2D12979-92E3-4C2E-B217-0A12A71A29C8}"/>
               </a:ext>
             </a:extLst>
           </p:cNvPr>
@@ -29776,7 +30708,7 @@
           <p:cNvPr id="6" name="">
             <a:extLst xmlns:a="http://schemas.openxmlformats.org/drawingml/2006/main">
               <a:ext uri="{FF2B5EF4-FFF2-40B4-BE49-F238E27FC236}">
-                <a16:creationId xmlns:a16="http://schemas.microsoft.com/office/drawing/2014/main" id="{D96CDDA4-B189-4C12-8D64-4EF09E253DDD}"/>
+                <a16:creationId xmlns:a16="http://schemas.microsoft.com/office/drawing/2014/main" id="{CFA62C90-8740-4FE0-8EC1-42BBC98D0D22}"/>
               </a:ext>
             </a:extLst>
           </p:cNvPr>
@@ -29946,7 +30878,7 @@
           <p:cNvPr id="7" name="">
             <a:extLst xmlns:a="http://schemas.openxmlformats.org/drawingml/2006/main">
               <a:ext uri="{FF2B5EF4-FFF2-40B4-BE49-F238E27FC236}">
-                <a16:creationId xmlns:a16="http://schemas.microsoft.com/office/drawing/2014/main" id="{04549D6F-DD89-490D-81E0-4285D5991562}"/>
+                <a16:creationId xmlns:a16="http://schemas.microsoft.com/office/drawing/2014/main" id="{0817C482-1E06-4D2F-9174-3BA2D141A891}"/>
               </a:ext>
             </a:extLst>
           </p:cNvPr>
@@ -29987,7 +30919,7 @@
           <p:cNvPr id="8" name="">
             <a:extLst xmlns:a="http://schemas.openxmlformats.org/drawingml/2006/main">
               <a:ext uri="{FF2B5EF4-FFF2-40B4-BE49-F238E27FC236}">
-                <a16:creationId xmlns:a16="http://schemas.microsoft.com/office/drawing/2014/main" id="{8F8CB977-EEFE-4603-A9A8-9E400455833E}"/>
+                <a16:creationId xmlns:a16="http://schemas.microsoft.com/office/drawing/2014/main" id="{ECDF5F35-E878-4775-A8BF-22E9E2AF2A3A}"/>
               </a:ext>
             </a:extLst>
           </p:cNvPr>
@@ -30049,7 +30981,7 @@
           <p:cNvPr id="9" name="">
             <a:extLst xmlns:a="http://schemas.openxmlformats.org/drawingml/2006/main">
               <a:ext uri="{FF2B5EF4-FFF2-40B4-BE49-F238E27FC236}">
-                <a16:creationId xmlns:a16="http://schemas.microsoft.com/office/drawing/2014/main" id="{D3D912F0-4B2A-41BA-B3AC-0DED65E3937A}"/>
+                <a16:creationId xmlns:a16="http://schemas.microsoft.com/office/drawing/2014/main" id="{B41FC300-B350-4A21-85A1-716BAADA4569}"/>
               </a:ext>
             </a:extLst>
           </p:cNvPr>
@@ -30138,7 +31070,7 @@
           <p:cNvPr id="10" name="">
             <a:extLst xmlns:a="http://schemas.openxmlformats.org/drawingml/2006/main">
               <a:ext uri="{FF2B5EF4-FFF2-40B4-BE49-F238E27FC236}">
-                <a16:creationId xmlns:a16="http://schemas.microsoft.com/office/drawing/2014/main" id="{175FE231-4EBA-4287-8226-8A9EA00851AB}"/>
+                <a16:creationId xmlns:a16="http://schemas.microsoft.com/office/drawing/2014/main" id="{34D3B9DD-9E15-4391-BDF9-143022952B83}"/>
               </a:ext>
             </a:extLst>
           </p:cNvPr>
@@ -30200,7 +31132,7 @@
           <p:cNvPr id="11" name="">
             <a:extLst xmlns:a="http://schemas.openxmlformats.org/drawingml/2006/main">
               <a:ext uri="{FF2B5EF4-FFF2-40B4-BE49-F238E27FC236}">
-                <a16:creationId xmlns:a16="http://schemas.microsoft.com/office/drawing/2014/main" id="{A77AB24F-131B-49BB-B1BB-20CEBE75B9CD}"/>
+                <a16:creationId xmlns:a16="http://schemas.microsoft.com/office/drawing/2014/main" id="{A8695180-F33D-4B4E-95AC-26A1624FA8CD}"/>
               </a:ext>
             </a:extLst>
           </p:cNvPr>
@@ -30231,7 +31163,7 @@
           <p:cNvPr id="12" name="">
             <a:extLst xmlns:a="http://schemas.openxmlformats.org/drawingml/2006/main">
               <a:ext uri="{FF2B5EF4-FFF2-40B4-BE49-F238E27FC236}">
-                <a16:creationId xmlns:a16="http://schemas.microsoft.com/office/drawing/2014/main" id="{946959DF-CF6A-49CF-8E3B-367E4473E3F1}"/>
+                <a16:creationId xmlns:a16="http://schemas.microsoft.com/office/drawing/2014/main" id="{B9304ABA-2496-4FDE-B864-2431E4827B71}"/>
               </a:ext>
             </a:extLst>
           </p:cNvPr>
@@ -30293,7 +31225,7 @@
           <p:cNvPr id="13" name="">
             <a:extLst xmlns:a="http://schemas.openxmlformats.org/drawingml/2006/main">
               <a:ext uri="{FF2B5EF4-FFF2-40B4-BE49-F238E27FC236}">
-                <a16:creationId xmlns:a16="http://schemas.microsoft.com/office/drawing/2014/main" id="{FD8C62C0-E953-4C92-ABFD-32CF93A39CFB}"/>
+                <a16:creationId xmlns:a16="http://schemas.microsoft.com/office/drawing/2014/main" id="{0A49F719-FAD3-426A-8B99-35683ECD4497}"/>
               </a:ext>
             </a:extLst>
           </p:cNvPr>
@@ -30353,7 +31285,7 @@
     </p:spTree>
     <p:extLst>
       <p:ext uri="{BB962C8B-B14F-4D97-AF65-F5344CB8AC3E}">
-        <p14:creationId xmlns:p14="http://schemas.microsoft.com/office/powerpoint/2010/main" val="991170067"/>
+        <p14:creationId xmlns:p14="http://schemas.microsoft.com/office/powerpoint/2010/main" val="224286350"/>
       </p:ext>
     </p:extLst>
   </p:cSld>
@@ -30384,7 +31316,7 @@
           <p:cNvPr id="1" name="">
             <a:extLst xmlns:a="http://schemas.openxmlformats.org/drawingml/2006/main">
               <a:ext uri="{FF2B5EF4-FFF2-40B4-BE49-F238E27FC236}">
-                <a16:creationId xmlns:a16="http://schemas.microsoft.com/office/drawing/2014/main" id="{310FC7ED-4B40-4ADF-A66F-FAF8168C6AED}"/>
+                <a16:creationId xmlns:a16="http://schemas.microsoft.com/office/drawing/2014/main" id="{A2823EC8-7A28-4C8C-BA5C-11131FDD1FB3}"/>
               </a:ext>
             </a:extLst>
           </p:cNvPr>
@@ -30446,7 +31378,7 @@
           <p:cNvPr id="2" name="">
             <a:extLst xmlns:a="http://schemas.openxmlformats.org/drawingml/2006/main">
               <a:ext uri="{FF2B5EF4-FFF2-40B4-BE49-F238E27FC236}">
-                <a16:creationId xmlns:a16="http://schemas.microsoft.com/office/drawing/2014/main" id="{D8D7D5FB-6566-4FAD-A61F-FF3625152236}"/>
+                <a16:creationId xmlns:a16="http://schemas.microsoft.com/office/drawing/2014/main" id="{B6075172-070A-4F4C-95C3-6FB384617190}"/>
               </a:ext>
             </a:extLst>
           </p:cNvPr>
@@ -30512,7 +31444,7 @@
           <p:nvPr/>
         </p:nvPicPr>
         <p:blipFill>
-          <a:blip xmlns:r="http://schemas.openxmlformats.org/officeDocument/2006/relationships" xmlns:a="http://schemas.openxmlformats.org/drawingml/2006/main" r:embed="Ra2414fbfd1c6480f"/>
+          <a:blip xmlns:r="http://schemas.openxmlformats.org/officeDocument/2006/relationships" xmlns:a="http://schemas.openxmlformats.org/drawingml/2006/main" r:embed="R06d3d573b3bf4a26"/>
           <a:stretch xmlns:a="http://schemas.openxmlformats.org/drawingml/2006/main"/>
         </p:blipFill>
         <p:spPr>
@@ -30536,7 +31468,7 @@
           <p:nvPr/>
         </p:nvPicPr>
         <p:blipFill>
-          <a:blip xmlns:r="http://schemas.openxmlformats.org/officeDocument/2006/relationships" xmlns:a="http://schemas.openxmlformats.org/drawingml/2006/main" r:embed="Reba2844fd95749f2"/>
+          <a:blip xmlns:r="http://schemas.openxmlformats.org/officeDocument/2006/relationships" xmlns:a="http://schemas.openxmlformats.org/drawingml/2006/main" r:embed="R5870e9b2bfe848d8"/>
           <a:stretch xmlns:a="http://schemas.openxmlformats.org/drawingml/2006/main"/>
         </p:blipFill>
         <p:spPr>
@@ -30560,7 +31492,7 @@
           <p:nvPr/>
         </p:nvPicPr>
         <p:blipFill>
-          <a:blip xmlns:r="http://schemas.openxmlformats.org/officeDocument/2006/relationships" xmlns:a="http://schemas.openxmlformats.org/drawingml/2006/main" r:embed="R61e9b37df4b04225"/>
+          <a:blip xmlns:r="http://schemas.openxmlformats.org/officeDocument/2006/relationships" xmlns:a="http://schemas.openxmlformats.org/drawingml/2006/main" r:embed="R2453b9ba36994115"/>
           <a:stretch xmlns:a="http://schemas.openxmlformats.org/drawingml/2006/main"/>
         </p:blipFill>
         <p:spPr>
@@ -30580,7 +31512,7 @@
           <p:cNvPr id="6" name="">
             <a:extLst xmlns:a="http://schemas.openxmlformats.org/drawingml/2006/main">
               <a:ext uri="{FF2B5EF4-FFF2-40B4-BE49-F238E27FC236}">
-                <a16:creationId xmlns:a16="http://schemas.microsoft.com/office/drawing/2014/main" id="{BB76FF57-27FC-42F3-B2D8-000833896FCF}"/>
+                <a16:creationId xmlns:a16="http://schemas.microsoft.com/office/drawing/2014/main" id="{EA7F2B42-BFFE-4697-B56B-825C19FC1429}"/>
               </a:ext>
             </a:extLst>
           </p:cNvPr>
@@ -30621,7 +31553,7 @@
           <p:cNvPr id="7" name="">
             <a:extLst xmlns:a="http://schemas.openxmlformats.org/drawingml/2006/main">
               <a:ext uri="{FF2B5EF4-FFF2-40B4-BE49-F238E27FC236}">
-                <a16:creationId xmlns:a16="http://schemas.microsoft.com/office/drawing/2014/main" id="{87BE5D7F-6A73-4693-AA2B-E936AED7E3C6}"/>
+                <a16:creationId xmlns:a16="http://schemas.microsoft.com/office/drawing/2014/main" id="{4B9A8FC5-DEA2-4E62-B368-815742089E91}"/>
               </a:ext>
             </a:extLst>
           </p:cNvPr>
@@ -30683,7 +31615,7 @@
           <p:cNvPr id="8" name="">
             <a:extLst xmlns:a="http://schemas.openxmlformats.org/drawingml/2006/main">
               <a:ext uri="{FF2B5EF4-FFF2-40B4-BE49-F238E27FC236}">
-                <a16:creationId xmlns:a16="http://schemas.microsoft.com/office/drawing/2014/main" id="{82DCD939-44EB-48A8-B059-A055BF4AF887}"/>
+                <a16:creationId xmlns:a16="http://schemas.microsoft.com/office/drawing/2014/main" id="{A748BCC7-2A83-4BCC-9713-4081DA7F25EE}"/>
               </a:ext>
             </a:extLst>
           </p:cNvPr>
@@ -30745,7 +31677,7 @@
           <p:cNvPr id="9" name="">
             <a:extLst xmlns:a="http://schemas.openxmlformats.org/drawingml/2006/main">
               <a:ext uri="{FF2B5EF4-FFF2-40B4-BE49-F238E27FC236}">
-                <a16:creationId xmlns:a16="http://schemas.microsoft.com/office/drawing/2014/main" id="{85A35D32-8C66-4782-8041-877ABBB7C5F3}"/>
+                <a16:creationId xmlns:a16="http://schemas.microsoft.com/office/drawing/2014/main" id="{5A4DF5C9-66BE-49D0-B38E-CBF571BCAD1A}"/>
               </a:ext>
             </a:extLst>
           </p:cNvPr>
@@ -30786,7 +31718,7 @@
           <p:cNvPr id="10" name="">
             <a:extLst xmlns:a="http://schemas.openxmlformats.org/drawingml/2006/main">
               <a:ext uri="{FF2B5EF4-FFF2-40B4-BE49-F238E27FC236}">
-                <a16:creationId xmlns:a16="http://schemas.microsoft.com/office/drawing/2014/main" id="{D0501C64-8C0A-4D4B-AF79-A9BD3A3DD71F}"/>
+                <a16:creationId xmlns:a16="http://schemas.microsoft.com/office/drawing/2014/main" id="{01310DD4-5918-4395-8E4B-E7AF67A2664A}"/>
               </a:ext>
             </a:extLst>
           </p:cNvPr>
@@ -30848,7 +31780,7 @@
           <p:cNvPr id="11" name="">
             <a:extLst xmlns:a="http://schemas.openxmlformats.org/drawingml/2006/main">
               <a:ext uri="{FF2B5EF4-FFF2-40B4-BE49-F238E27FC236}">
-                <a16:creationId xmlns:a16="http://schemas.microsoft.com/office/drawing/2014/main" id="{87C7E000-E4AF-4B19-8A43-D931BBC50E23}"/>
+                <a16:creationId xmlns:a16="http://schemas.microsoft.com/office/drawing/2014/main" id="{9728D438-2C4B-4617-8798-F60AB4673FB1}"/>
               </a:ext>
             </a:extLst>
           </p:cNvPr>
@@ -30910,7 +31842,7 @@
           <p:cNvPr id="12" name="">
             <a:extLst xmlns:a="http://schemas.openxmlformats.org/drawingml/2006/main">
               <a:ext uri="{FF2B5EF4-FFF2-40B4-BE49-F238E27FC236}">
-                <a16:creationId xmlns:a16="http://schemas.microsoft.com/office/drawing/2014/main" id="{1EF59A42-8775-48FA-8F98-ADC5C95F2D61}"/>
+                <a16:creationId xmlns:a16="http://schemas.microsoft.com/office/drawing/2014/main" id="{921FA0AB-67F0-488A-B623-CA4DAA66D53D}"/>
               </a:ext>
             </a:extLst>
           </p:cNvPr>
@@ -30951,7 +31883,7 @@
           <p:cNvPr id="13" name="">
             <a:extLst xmlns:a="http://schemas.openxmlformats.org/drawingml/2006/main">
               <a:ext uri="{FF2B5EF4-FFF2-40B4-BE49-F238E27FC236}">
-                <a16:creationId xmlns:a16="http://schemas.microsoft.com/office/drawing/2014/main" id="{EE89020A-5FB0-4561-97F8-BB2771E41599}"/>
+                <a16:creationId xmlns:a16="http://schemas.microsoft.com/office/drawing/2014/main" id="{2F9F2F9E-3D83-4BBD-822E-FB92329CBFBA}"/>
               </a:ext>
             </a:extLst>
           </p:cNvPr>
@@ -31013,7 +31945,7 @@
           <p:cNvPr id="14" name="">
             <a:extLst xmlns:a="http://schemas.openxmlformats.org/drawingml/2006/main">
               <a:ext uri="{FF2B5EF4-FFF2-40B4-BE49-F238E27FC236}">
-                <a16:creationId xmlns:a16="http://schemas.microsoft.com/office/drawing/2014/main" id="{18F88951-0E22-46FE-B4F5-9437B921D652}"/>
+                <a16:creationId xmlns:a16="http://schemas.microsoft.com/office/drawing/2014/main" id="{9C9B62C5-AD8A-4FDF-A7AF-57F66D9E1205}"/>
               </a:ext>
             </a:extLst>
           </p:cNvPr>
@@ -31075,7 +32007,7 @@
           <p:cNvPr id="15" name="">
             <a:extLst xmlns:a="http://schemas.openxmlformats.org/drawingml/2006/main">
               <a:ext uri="{FF2B5EF4-FFF2-40B4-BE49-F238E27FC236}">
-                <a16:creationId xmlns:a16="http://schemas.microsoft.com/office/drawing/2014/main" id="{5B07DEC7-1642-45F2-B313-4BB1F865D028}"/>
+                <a16:creationId xmlns:a16="http://schemas.microsoft.com/office/drawing/2014/main" id="{EC0C892E-99DD-408D-97F9-02C4D1FFEF10}"/>
               </a:ext>
             </a:extLst>
           </p:cNvPr>
@@ -31137,7 +32069,7 @@
           <p:cNvPr id="16" name="">
             <a:extLst xmlns:a="http://schemas.openxmlformats.org/drawingml/2006/main">
               <a:ext uri="{FF2B5EF4-FFF2-40B4-BE49-F238E27FC236}">
-                <a16:creationId xmlns:a16="http://schemas.microsoft.com/office/drawing/2014/main" id="{D0F6D8FC-BB01-4A15-9C91-8137678734D6}"/>
+                <a16:creationId xmlns:a16="http://schemas.microsoft.com/office/drawing/2014/main" id="{763EDABB-5E51-4B53-9046-9177B1DC4E68}"/>
               </a:ext>
             </a:extLst>
           </p:cNvPr>
@@ -31168,7 +32100,7 @@
           <p:cNvPr id="17" name="">
             <a:extLst xmlns:a="http://schemas.openxmlformats.org/drawingml/2006/main">
               <a:ext uri="{FF2B5EF4-FFF2-40B4-BE49-F238E27FC236}">
-                <a16:creationId xmlns:a16="http://schemas.microsoft.com/office/drawing/2014/main" id="{91689421-7F47-44E6-89C4-CA6FFA24A0C0}"/>
+                <a16:creationId xmlns:a16="http://schemas.microsoft.com/office/drawing/2014/main" id="{52228069-81EC-404A-82ED-7A63A421C633}"/>
               </a:ext>
             </a:extLst>
           </p:cNvPr>
@@ -31230,7 +32162,7 @@
           <p:cNvPr id="18" name="">
             <a:extLst xmlns:a="http://schemas.openxmlformats.org/drawingml/2006/main">
               <a:ext uri="{FF2B5EF4-FFF2-40B4-BE49-F238E27FC236}">
-                <a16:creationId xmlns:a16="http://schemas.microsoft.com/office/drawing/2014/main" id="{49B9BC44-2247-42C9-B40E-FF6826A85666}"/>
+                <a16:creationId xmlns:a16="http://schemas.microsoft.com/office/drawing/2014/main" id="{6AD494E9-CC72-41C3-B4BC-EC34F3C73DF3}"/>
               </a:ext>
             </a:extLst>
           </p:cNvPr>
@@ -31290,7 +32222,7 @@
     </p:spTree>
     <p:extLst>
       <p:ext uri="{BB962C8B-B14F-4D97-AF65-F5344CB8AC3E}">
-        <p14:creationId xmlns:p14="http://schemas.microsoft.com/office/powerpoint/2010/main" val="155932545"/>
+        <p14:creationId xmlns:p14="http://schemas.microsoft.com/office/powerpoint/2010/main" val="1361147106"/>
       </p:ext>
     </p:extLst>
   </p:cSld>
@@ -31321,7 +32253,7 @@
           <p:cNvPr id="1" name="">
             <a:extLst xmlns:a="http://schemas.openxmlformats.org/drawingml/2006/main">
               <a:ext uri="{FF2B5EF4-FFF2-40B4-BE49-F238E27FC236}">
-                <a16:creationId xmlns:a16="http://schemas.microsoft.com/office/drawing/2014/main" id="{E5939A77-F84A-4BA8-A8D0-F4462E8F3FD9}"/>
+                <a16:creationId xmlns:a16="http://schemas.microsoft.com/office/drawing/2014/main" id="{1F5829D5-1230-4B19-906C-346B813909A2}"/>
               </a:ext>
             </a:extLst>
           </p:cNvPr>
@@ -31383,7 +32315,7 @@
           <p:cNvPr id="2" name="">
             <a:extLst xmlns:a="http://schemas.openxmlformats.org/drawingml/2006/main">
               <a:ext uri="{FF2B5EF4-FFF2-40B4-BE49-F238E27FC236}">
-                <a16:creationId xmlns:a16="http://schemas.microsoft.com/office/drawing/2014/main" id="{C4C49574-BC38-4B5B-B157-ECF0579171EA}"/>
+                <a16:creationId xmlns:a16="http://schemas.microsoft.com/office/drawing/2014/main" id="{38F71F45-594F-47CF-AB72-05989E944D19}"/>
               </a:ext>
             </a:extLst>
           </p:cNvPr>
@@ -31445,7 +32377,7 @@
           <p:cNvPr id="3" name="">
             <a:extLst xmlns:a="http://schemas.openxmlformats.org/drawingml/2006/main">
               <a:ext uri="{FF2B5EF4-FFF2-40B4-BE49-F238E27FC236}">
-                <a16:creationId xmlns:a16="http://schemas.microsoft.com/office/drawing/2014/main" id="{FE622E06-FBF2-42CF-A07E-42C4EE4964CF}"/>
+                <a16:creationId xmlns:a16="http://schemas.microsoft.com/office/drawing/2014/main" id="{514CEE19-7D4D-42DC-8876-7901C96224B4}"/>
               </a:ext>
             </a:extLst>
           </p:cNvPr>
@@ -31486,7 +32418,7 @@
           <p:cNvPr id="4" name="">
             <a:extLst xmlns:a="http://schemas.openxmlformats.org/drawingml/2006/main">
               <a:ext uri="{FF2B5EF4-FFF2-40B4-BE49-F238E27FC236}">
-                <a16:creationId xmlns:a16="http://schemas.microsoft.com/office/drawing/2014/main" id="{14B2F641-F6B7-41C9-9B05-92A84A296E65}"/>
+                <a16:creationId xmlns:a16="http://schemas.microsoft.com/office/drawing/2014/main" id="{0E6A6D34-2ECF-488E-AB8B-2D29A54C7F83}"/>
               </a:ext>
             </a:extLst>
           </p:cNvPr>
@@ -31517,7 +32449,7 @@
           <p:cNvPr id="5" name="">
             <a:extLst xmlns:a="http://schemas.openxmlformats.org/drawingml/2006/main">
               <a:ext uri="{FF2B5EF4-FFF2-40B4-BE49-F238E27FC236}">
-                <a16:creationId xmlns:a16="http://schemas.microsoft.com/office/drawing/2014/main" id="{EF762862-844D-4807-A4B4-13B50E74145B}"/>
+                <a16:creationId xmlns:a16="http://schemas.microsoft.com/office/drawing/2014/main" id="{3642067F-8F23-4A96-B993-430B8E7574F3}"/>
               </a:ext>
             </a:extLst>
           </p:cNvPr>
@@ -31550,7 +32482,7 @@
           <p:cNvPr id="6" name="">
             <a:extLst xmlns:a="http://schemas.openxmlformats.org/drawingml/2006/main">
               <a:ext uri="{FF2B5EF4-FFF2-40B4-BE49-F238E27FC236}">
-                <a16:creationId xmlns:a16="http://schemas.microsoft.com/office/drawing/2014/main" id="{26A77553-95B7-4BAF-9D13-69494054E24F}"/>
+                <a16:creationId xmlns:a16="http://schemas.microsoft.com/office/drawing/2014/main" id="{7E1B02E6-2A28-46C4-82E8-D0E9B8B8B2B3}"/>
               </a:ext>
             </a:extLst>
           </p:cNvPr>
@@ -31583,7 +32515,7 @@
           <p:cNvPr id="7" name="">
             <a:extLst xmlns:a="http://schemas.openxmlformats.org/drawingml/2006/main">
               <a:ext uri="{FF2B5EF4-FFF2-40B4-BE49-F238E27FC236}">
-                <a16:creationId xmlns:a16="http://schemas.microsoft.com/office/drawing/2014/main" id="{C1E932A6-81DE-4B12-A850-4A35B7545BBF}"/>
+                <a16:creationId xmlns:a16="http://schemas.microsoft.com/office/drawing/2014/main" id="{AA18517C-A207-4D12-A748-DD5423C5AC5A}"/>
               </a:ext>
             </a:extLst>
           </p:cNvPr>
@@ -31616,7 +32548,7 @@
           <p:cNvPr id="8" name="">
             <a:extLst xmlns:a="http://schemas.openxmlformats.org/drawingml/2006/main">
               <a:ext uri="{FF2B5EF4-FFF2-40B4-BE49-F238E27FC236}">
-                <a16:creationId xmlns:a16="http://schemas.microsoft.com/office/drawing/2014/main" id="{3899F2C2-A5ED-43A3-BAF2-397A3FE3868C}"/>
+                <a16:creationId xmlns:a16="http://schemas.microsoft.com/office/drawing/2014/main" id="{5A26BF47-8479-4E3B-AB75-6D6FD13730B3}"/>
               </a:ext>
             </a:extLst>
           </p:cNvPr>
@@ -31649,7 +32581,7 @@
           <p:cNvPr id="9" name="">
             <a:extLst xmlns:a="http://schemas.openxmlformats.org/drawingml/2006/main">
               <a:ext uri="{FF2B5EF4-FFF2-40B4-BE49-F238E27FC236}">
-                <a16:creationId xmlns:a16="http://schemas.microsoft.com/office/drawing/2014/main" id="{A142CC02-BB09-424A-BA4F-D2E94CC11426}"/>
+                <a16:creationId xmlns:a16="http://schemas.microsoft.com/office/drawing/2014/main" id="{7DE6371C-3837-46CE-B5CD-3DFA0CBE0902}"/>
               </a:ext>
             </a:extLst>
           </p:cNvPr>
@@ -31690,7 +32622,7 @@
           <p:cNvPr id="10" name="">
             <a:extLst xmlns:a="http://schemas.openxmlformats.org/drawingml/2006/main">
               <a:ext uri="{FF2B5EF4-FFF2-40B4-BE49-F238E27FC236}">
-                <a16:creationId xmlns:a16="http://schemas.microsoft.com/office/drawing/2014/main" id="{A5403235-C18B-41F2-85A9-E8FBAF1A44FC}"/>
+                <a16:creationId xmlns:a16="http://schemas.microsoft.com/office/drawing/2014/main" id="{B000B7A1-B74C-45FD-99CD-6EF3AB8FF336}"/>
               </a:ext>
             </a:extLst>
           </p:cNvPr>
@@ -31752,7 +32684,7 @@
           <p:cNvPr id="11" name="">
             <a:extLst xmlns:a="http://schemas.openxmlformats.org/drawingml/2006/main">
               <a:ext uri="{FF2B5EF4-FFF2-40B4-BE49-F238E27FC236}">
-                <a16:creationId xmlns:a16="http://schemas.microsoft.com/office/drawing/2014/main" id="{FF45D489-7E49-470D-85CC-53F7B07ABD0A}"/>
+                <a16:creationId xmlns:a16="http://schemas.microsoft.com/office/drawing/2014/main" id="{EA201560-64FD-4EE1-B0FC-CE53FEBD4471}"/>
               </a:ext>
             </a:extLst>
           </p:cNvPr>
@@ -31814,7 +32746,7 @@
           <p:cNvPr id="12" name="">
             <a:extLst xmlns:a="http://schemas.openxmlformats.org/drawingml/2006/main">
               <a:ext uri="{FF2B5EF4-FFF2-40B4-BE49-F238E27FC236}">
-                <a16:creationId xmlns:a16="http://schemas.microsoft.com/office/drawing/2014/main" id="{05DEC0C5-6552-412F-87BA-6A5C7BAFF015}"/>
+                <a16:creationId xmlns:a16="http://schemas.microsoft.com/office/drawing/2014/main" id="{8F9BDEF0-11E9-4A0B-9AE5-62B03C463518}"/>
               </a:ext>
             </a:extLst>
           </p:cNvPr>
@@ -31855,7 +32787,7 @@
           <p:cNvPr id="13" name="">
             <a:extLst xmlns:a="http://schemas.openxmlformats.org/drawingml/2006/main">
               <a:ext uri="{FF2B5EF4-FFF2-40B4-BE49-F238E27FC236}">
-                <a16:creationId xmlns:a16="http://schemas.microsoft.com/office/drawing/2014/main" id="{32FFAC78-C18D-4048-9B30-FA43597685B1}"/>
+                <a16:creationId xmlns:a16="http://schemas.microsoft.com/office/drawing/2014/main" id="{E750E8AD-5FF5-49F4-A060-26175F27B9AF}"/>
               </a:ext>
             </a:extLst>
           </p:cNvPr>
@@ -31917,7 +32849,7 @@
           <p:cNvPr id="14" name="">
             <a:extLst xmlns:a="http://schemas.openxmlformats.org/drawingml/2006/main">
               <a:ext uri="{FF2B5EF4-FFF2-40B4-BE49-F238E27FC236}">
-                <a16:creationId xmlns:a16="http://schemas.microsoft.com/office/drawing/2014/main" id="{6DFBC895-05A8-48C8-91BF-6C7C2DC7E577}"/>
+                <a16:creationId xmlns:a16="http://schemas.microsoft.com/office/drawing/2014/main" id="{27D16F3F-B58A-454F-AABD-3752E687C4BA}"/>
               </a:ext>
             </a:extLst>
           </p:cNvPr>
@@ -31979,7 +32911,7 @@
           <p:cNvPr id="15" name="">
             <a:extLst xmlns:a="http://schemas.openxmlformats.org/drawingml/2006/main">
               <a:ext uri="{FF2B5EF4-FFF2-40B4-BE49-F238E27FC236}">
-                <a16:creationId xmlns:a16="http://schemas.microsoft.com/office/drawing/2014/main" id="{7F5FD6B9-2B97-4071-AB85-9F372E0E5430}"/>
+                <a16:creationId xmlns:a16="http://schemas.microsoft.com/office/drawing/2014/main" id="{BF23641A-12D7-47B4-B0E8-40E78398D362}"/>
               </a:ext>
             </a:extLst>
           </p:cNvPr>
@@ -32020,7 +32952,7 @@
           <p:cNvPr id="16" name="">
             <a:extLst xmlns:a="http://schemas.openxmlformats.org/drawingml/2006/main">
               <a:ext uri="{FF2B5EF4-FFF2-40B4-BE49-F238E27FC236}">
-                <a16:creationId xmlns:a16="http://schemas.microsoft.com/office/drawing/2014/main" id="{4B910A44-96ED-425E-ACC4-EF19BF5DF833}"/>
+                <a16:creationId xmlns:a16="http://schemas.microsoft.com/office/drawing/2014/main" id="{C877AEB4-23F1-40CE-97B5-F4AA25C2F5EB}"/>
               </a:ext>
             </a:extLst>
           </p:cNvPr>
@@ -32082,7 +33014,7 @@
           <p:cNvPr id="17" name="">
             <a:extLst xmlns:a="http://schemas.openxmlformats.org/drawingml/2006/main">
               <a:ext uri="{FF2B5EF4-FFF2-40B4-BE49-F238E27FC236}">
-                <a16:creationId xmlns:a16="http://schemas.microsoft.com/office/drawing/2014/main" id="{5C27E3A7-1170-49D9-A489-33FF97ADB2DA}"/>
+                <a16:creationId xmlns:a16="http://schemas.microsoft.com/office/drawing/2014/main" id="{ECCBD8B0-FADD-4C4A-9F27-CAF2129394ED}"/>
               </a:ext>
             </a:extLst>
           </p:cNvPr>
@@ -32144,7 +33076,7 @@
           <p:cNvPr id="18" name="">
             <a:extLst xmlns:a="http://schemas.openxmlformats.org/drawingml/2006/main">
               <a:ext uri="{FF2B5EF4-FFF2-40B4-BE49-F238E27FC236}">
-                <a16:creationId xmlns:a16="http://schemas.microsoft.com/office/drawing/2014/main" id="{97C5E1DD-3A9C-41BC-B6D5-F7A73DDCC86F}"/>
+                <a16:creationId xmlns:a16="http://schemas.microsoft.com/office/drawing/2014/main" id="{E2AB1027-159B-4E5B-9C40-AB5D1D1B0B96}"/>
               </a:ext>
             </a:extLst>
           </p:cNvPr>
@@ -32185,7 +33117,7 @@
           <p:cNvPr id="19" name="">
             <a:extLst xmlns:a="http://schemas.openxmlformats.org/drawingml/2006/main">
               <a:ext uri="{FF2B5EF4-FFF2-40B4-BE49-F238E27FC236}">
-                <a16:creationId xmlns:a16="http://schemas.microsoft.com/office/drawing/2014/main" id="{18D58EB3-8E3F-41B4-BCD5-AF7BB02915E9}"/>
+                <a16:creationId xmlns:a16="http://schemas.microsoft.com/office/drawing/2014/main" id="{78D11731-C3D3-4ECB-B323-140A06B6C36C}"/>
               </a:ext>
             </a:extLst>
           </p:cNvPr>
@@ -32247,7 +33179,7 @@
           <p:cNvPr id="20" name="">
             <a:extLst xmlns:a="http://schemas.openxmlformats.org/drawingml/2006/main">
               <a:ext uri="{FF2B5EF4-FFF2-40B4-BE49-F238E27FC236}">
-                <a16:creationId xmlns:a16="http://schemas.microsoft.com/office/drawing/2014/main" id="{1D35CFE2-B708-431E-9EAD-0767FEDAB78A}"/>
+                <a16:creationId xmlns:a16="http://schemas.microsoft.com/office/drawing/2014/main" id="{3DF52163-95D9-4ABB-AA13-0C8DE6E42962}"/>
               </a:ext>
             </a:extLst>
           </p:cNvPr>
@@ -32309,7 +33241,7 @@
           <p:cNvPr id="21" name="">
             <a:extLst xmlns:a="http://schemas.openxmlformats.org/drawingml/2006/main">
               <a:ext uri="{FF2B5EF4-FFF2-40B4-BE49-F238E27FC236}">
-                <a16:creationId xmlns:a16="http://schemas.microsoft.com/office/drawing/2014/main" id="{07EF4FB6-1068-4B33-AC2E-709A235EA533}"/>
+                <a16:creationId xmlns:a16="http://schemas.microsoft.com/office/drawing/2014/main" id="{34A17ABC-571D-4A55-A199-CBD8F1CDBBA6}"/>
               </a:ext>
             </a:extLst>
           </p:cNvPr>
@@ -32350,7 +33282,7 @@
           <p:cNvPr id="22" name="">
             <a:extLst xmlns:a="http://schemas.openxmlformats.org/drawingml/2006/main">
               <a:ext uri="{FF2B5EF4-FFF2-40B4-BE49-F238E27FC236}">
-                <a16:creationId xmlns:a16="http://schemas.microsoft.com/office/drawing/2014/main" id="{C70BC9CD-C20F-4FE1-8277-EC498ADB4CC2}"/>
+                <a16:creationId xmlns:a16="http://schemas.microsoft.com/office/drawing/2014/main" id="{A361D9A0-9FE1-4744-9967-0D012C34F99A}"/>
               </a:ext>
             </a:extLst>
           </p:cNvPr>
@@ -32412,7 +33344,7 @@
           <p:cNvPr id="23" name="">
             <a:extLst xmlns:a="http://schemas.openxmlformats.org/drawingml/2006/main">
               <a:ext uri="{FF2B5EF4-FFF2-40B4-BE49-F238E27FC236}">
-                <a16:creationId xmlns:a16="http://schemas.microsoft.com/office/drawing/2014/main" id="{453A9FC1-B749-481D-9228-D1289CB1C6D1}"/>
+                <a16:creationId xmlns:a16="http://schemas.microsoft.com/office/drawing/2014/main" id="{BD9DBD76-DC04-4625-A489-67989EBE1C8A}"/>
               </a:ext>
             </a:extLst>
           </p:cNvPr>
@@ -32474,7 +33406,7 @@
           <p:cNvPr id="24" name="">
             <a:extLst xmlns:a="http://schemas.openxmlformats.org/drawingml/2006/main">
               <a:ext uri="{FF2B5EF4-FFF2-40B4-BE49-F238E27FC236}">
-                <a16:creationId xmlns:a16="http://schemas.microsoft.com/office/drawing/2014/main" id="{55641CCC-C8EC-41C9-A74A-5AE4795EAB58}"/>
+                <a16:creationId xmlns:a16="http://schemas.microsoft.com/office/drawing/2014/main" id="{F60DD086-0DA1-45DB-B90F-EF60434C185C}"/>
               </a:ext>
             </a:extLst>
           </p:cNvPr>
@@ -32507,7 +33439,7 @@
           <p:cNvPr id="25" name="">
             <a:extLst xmlns:a="http://schemas.openxmlformats.org/drawingml/2006/main">
               <a:ext uri="{FF2B5EF4-FFF2-40B4-BE49-F238E27FC236}">
-                <a16:creationId xmlns:a16="http://schemas.microsoft.com/office/drawing/2014/main" id="{805C72EA-AAE1-46ED-B3E9-4D0C82961812}"/>
+                <a16:creationId xmlns:a16="http://schemas.microsoft.com/office/drawing/2014/main" id="{4CC88F73-6DD3-4274-9A5E-7E632163964E}"/>
               </a:ext>
             </a:extLst>
           </p:cNvPr>
@@ -32569,7 +33501,7 @@
           <p:cNvPr id="26" name="">
             <a:extLst xmlns:a="http://schemas.openxmlformats.org/drawingml/2006/main">
               <a:ext uri="{FF2B5EF4-FFF2-40B4-BE49-F238E27FC236}">
-                <a16:creationId xmlns:a16="http://schemas.microsoft.com/office/drawing/2014/main" id="{D891A515-41B8-47A8-91D2-C51DA8507F1D}"/>
+                <a16:creationId xmlns:a16="http://schemas.microsoft.com/office/drawing/2014/main" id="{C3F975E5-14BA-4927-972E-DFB4F8D1B4C8}"/>
               </a:ext>
             </a:extLst>
           </p:cNvPr>
@@ -32602,7 +33534,7 @@
           <p:cNvPr id="27" name="">
             <a:extLst xmlns:a="http://schemas.openxmlformats.org/drawingml/2006/main">
               <a:ext uri="{FF2B5EF4-FFF2-40B4-BE49-F238E27FC236}">
-                <a16:creationId xmlns:a16="http://schemas.microsoft.com/office/drawing/2014/main" id="{21CBC163-9A3C-4BF7-8F51-FA137C127FA6}"/>
+                <a16:creationId xmlns:a16="http://schemas.microsoft.com/office/drawing/2014/main" id="{C7D93227-49F5-497A-A62B-960B0E132AD2}"/>
               </a:ext>
             </a:extLst>
           </p:cNvPr>
@@ -32664,7 +33596,7 @@
           <p:cNvPr id="28" name="">
             <a:extLst xmlns:a="http://schemas.openxmlformats.org/drawingml/2006/main">
               <a:ext uri="{FF2B5EF4-FFF2-40B4-BE49-F238E27FC236}">
-                <a16:creationId xmlns:a16="http://schemas.microsoft.com/office/drawing/2014/main" id="{C16FE3F2-49C9-41B9-90F2-F5B48DD3E90E}"/>
+                <a16:creationId xmlns:a16="http://schemas.microsoft.com/office/drawing/2014/main" id="{0CC31249-451B-4F79-8621-6F5928CC41D7}"/>
               </a:ext>
             </a:extLst>
           </p:cNvPr>
@@ -32697,7 +33629,7 @@
           <p:cNvPr id="29" name="">
             <a:extLst xmlns:a="http://schemas.openxmlformats.org/drawingml/2006/main">
               <a:ext uri="{FF2B5EF4-FFF2-40B4-BE49-F238E27FC236}">
-                <a16:creationId xmlns:a16="http://schemas.microsoft.com/office/drawing/2014/main" id="{36EE81D9-17AC-4E0C-BEDD-842DFDCDB87C}"/>
+                <a16:creationId xmlns:a16="http://schemas.microsoft.com/office/drawing/2014/main" id="{ADF0A29A-D941-40C6-9760-C8A299A0F8DF}"/>
               </a:ext>
             </a:extLst>
           </p:cNvPr>
@@ -32759,7 +33691,7 @@
           <p:cNvPr id="30" name="">
             <a:extLst xmlns:a="http://schemas.openxmlformats.org/drawingml/2006/main">
               <a:ext uri="{FF2B5EF4-FFF2-40B4-BE49-F238E27FC236}">
-                <a16:creationId xmlns:a16="http://schemas.microsoft.com/office/drawing/2014/main" id="{3559C584-35BC-4DFE-969F-416517E2DFED}"/>
+                <a16:creationId xmlns:a16="http://schemas.microsoft.com/office/drawing/2014/main" id="{5A72B50E-8769-4843-83D0-9A2462AA7706}"/>
               </a:ext>
             </a:extLst>
           </p:cNvPr>
@@ -32792,7 +33724,7 @@
           <p:cNvPr id="31" name="">
             <a:extLst xmlns:a="http://schemas.openxmlformats.org/drawingml/2006/main">
               <a:ext uri="{FF2B5EF4-FFF2-40B4-BE49-F238E27FC236}">
-                <a16:creationId xmlns:a16="http://schemas.microsoft.com/office/drawing/2014/main" id="{64E52B33-31AA-4ABF-AA87-99D07D03A90D}"/>
+                <a16:creationId xmlns:a16="http://schemas.microsoft.com/office/drawing/2014/main" id="{663964B8-2C10-4661-8CA4-16AF1280A96C}"/>
               </a:ext>
             </a:extLst>
           </p:cNvPr>
@@ -32854,7 +33786,7 @@
           <p:cNvPr id="32" name="">
             <a:extLst xmlns:a="http://schemas.openxmlformats.org/drawingml/2006/main">
               <a:ext uri="{FF2B5EF4-FFF2-40B4-BE49-F238E27FC236}">
-                <a16:creationId xmlns:a16="http://schemas.microsoft.com/office/drawing/2014/main" id="{A3805D89-8928-426F-AB39-0876BD54B157}"/>
+                <a16:creationId xmlns:a16="http://schemas.microsoft.com/office/drawing/2014/main" id="{F4F26132-C360-46F7-83A1-E7EF5E21D834}"/>
               </a:ext>
             </a:extLst>
           </p:cNvPr>
@@ -32895,7 +33827,7 @@
           <p:cNvPr id="33" name="">
             <a:extLst xmlns:a="http://schemas.openxmlformats.org/drawingml/2006/main">
               <a:ext uri="{FF2B5EF4-FFF2-40B4-BE49-F238E27FC236}">
-                <a16:creationId xmlns:a16="http://schemas.microsoft.com/office/drawing/2014/main" id="{C02F729E-6BDE-4824-AAB0-D9A888139964}"/>
+                <a16:creationId xmlns:a16="http://schemas.microsoft.com/office/drawing/2014/main" id="{8BF6DA11-6C57-472C-84E8-75549F3FE80C}"/>
               </a:ext>
             </a:extLst>
           </p:cNvPr>
@@ -32957,7 +33889,7 @@
           <p:cNvPr id="34" name="">
             <a:extLst xmlns:a="http://schemas.openxmlformats.org/drawingml/2006/main">
               <a:ext uri="{FF2B5EF4-FFF2-40B4-BE49-F238E27FC236}">
-                <a16:creationId xmlns:a16="http://schemas.microsoft.com/office/drawing/2014/main" id="{1D505D2F-D25D-4790-A991-9BD5F9E9EED4}"/>
+                <a16:creationId xmlns:a16="http://schemas.microsoft.com/office/drawing/2014/main" id="{A5232D0E-A386-4842-8930-4E61ADCC165A}"/>
               </a:ext>
             </a:extLst>
           </p:cNvPr>
@@ -33019,7 +33951,7 @@
           <p:cNvPr id="35" name="">
             <a:extLst xmlns:a="http://schemas.openxmlformats.org/drawingml/2006/main">
               <a:ext uri="{FF2B5EF4-FFF2-40B4-BE49-F238E27FC236}">
-                <a16:creationId xmlns:a16="http://schemas.microsoft.com/office/drawing/2014/main" id="{334F5781-C588-4D41-A072-3B3C857F7A90}"/>
+                <a16:creationId xmlns:a16="http://schemas.microsoft.com/office/drawing/2014/main" id="{08639CA3-404F-48E6-B371-F6F8B62C0B91}"/>
               </a:ext>
             </a:extLst>
           </p:cNvPr>
@@ -33050,7 +33982,7 @@
           <p:cNvPr id="36" name="">
             <a:extLst xmlns:a="http://schemas.openxmlformats.org/drawingml/2006/main">
               <a:ext uri="{FF2B5EF4-FFF2-40B4-BE49-F238E27FC236}">
-                <a16:creationId xmlns:a16="http://schemas.microsoft.com/office/drawing/2014/main" id="{FF68698D-724A-4A38-8E89-7D36542DCB2C}"/>
+                <a16:creationId xmlns:a16="http://schemas.microsoft.com/office/drawing/2014/main" id="{15CB2F48-22EA-4794-9B2A-2DAE1D601501}"/>
               </a:ext>
             </a:extLst>
           </p:cNvPr>
@@ -33112,7 +34044,7 @@
           <p:cNvPr id="37" name="">
             <a:extLst xmlns:a="http://schemas.openxmlformats.org/drawingml/2006/main">
               <a:ext uri="{FF2B5EF4-FFF2-40B4-BE49-F238E27FC236}">
-                <a16:creationId xmlns:a16="http://schemas.microsoft.com/office/drawing/2014/main" id="{90D5FB9C-F718-4862-B252-8B1D493DD9AF}"/>
+                <a16:creationId xmlns:a16="http://schemas.microsoft.com/office/drawing/2014/main" id="{C9455034-60E0-4290-B092-2F392BA25D18}"/>
               </a:ext>
             </a:extLst>
           </p:cNvPr>
@@ -33172,7 +34104,7 @@
     </p:spTree>
     <p:extLst>
       <p:ext uri="{BB962C8B-B14F-4D97-AF65-F5344CB8AC3E}">
-        <p14:creationId xmlns:p14="http://schemas.microsoft.com/office/powerpoint/2010/main" val="7729252"/>
+        <p14:creationId xmlns:p14="http://schemas.microsoft.com/office/powerpoint/2010/main" val="1824440928"/>
       </p:ext>
     </p:extLst>
   </p:cSld>
@@ -33203,7 +34135,7 @@
           <p:cNvPr id="1" name="">
             <a:extLst xmlns:a="http://schemas.openxmlformats.org/drawingml/2006/main">
               <a:ext uri="{FF2B5EF4-FFF2-40B4-BE49-F238E27FC236}">
-                <a16:creationId xmlns:a16="http://schemas.microsoft.com/office/drawing/2014/main" id="{39BA594D-3F84-411A-AC9F-BEE610A71D20}"/>
+                <a16:creationId xmlns:a16="http://schemas.microsoft.com/office/drawing/2014/main" id="{86E4BA97-4B50-4FB0-93B7-07EEA38EBD51}"/>
               </a:ext>
             </a:extLst>
           </p:cNvPr>
@@ -33265,7 +34197,7 @@
           <p:cNvPr id="2" name="">
             <a:extLst xmlns:a="http://schemas.openxmlformats.org/drawingml/2006/main">
               <a:ext uri="{FF2B5EF4-FFF2-40B4-BE49-F238E27FC236}">
-                <a16:creationId xmlns:a16="http://schemas.microsoft.com/office/drawing/2014/main" id="{2022F1ED-0079-42D4-8ABF-CC09471FBEE5}"/>
+                <a16:creationId xmlns:a16="http://schemas.microsoft.com/office/drawing/2014/main" id="{A442B0A9-E4B6-4BB5-8475-BE0146A80FB6}"/>
               </a:ext>
             </a:extLst>
           </p:cNvPr>
@@ -33327,7 +34259,7 @@
           <p:cNvPr id="3" name="">
             <a:extLst xmlns:a="http://schemas.openxmlformats.org/drawingml/2006/main">
               <a:ext uri="{FF2B5EF4-FFF2-40B4-BE49-F238E27FC236}">
-                <a16:creationId xmlns:a16="http://schemas.microsoft.com/office/drawing/2014/main" id="{364C220A-188F-4BC5-94FB-EEBF2C572349}"/>
+                <a16:creationId xmlns:a16="http://schemas.microsoft.com/office/drawing/2014/main" id="{D445A261-EA4F-45A7-A3D2-B944DA7576D6}"/>
               </a:ext>
             </a:extLst>
           </p:cNvPr>
@@ -33368,7 +34300,7 @@
           <p:cNvPr id="4" name="">
             <a:extLst xmlns:a="http://schemas.openxmlformats.org/drawingml/2006/main">
               <a:ext uri="{FF2B5EF4-FFF2-40B4-BE49-F238E27FC236}">
-                <a16:creationId xmlns:a16="http://schemas.microsoft.com/office/drawing/2014/main" id="{F4FE5EA0-85CB-40BC-953F-89F484A2270F}"/>
+                <a16:creationId xmlns:a16="http://schemas.microsoft.com/office/drawing/2014/main" id="{84C0191B-C7CB-44C5-BAD2-B673E2A48C36}"/>
               </a:ext>
             </a:extLst>
           </p:cNvPr>
@@ -33430,7 +34362,7 @@
           <p:cNvPr id="5" name="">
             <a:extLst xmlns:a="http://schemas.openxmlformats.org/drawingml/2006/main">
               <a:ext uri="{FF2B5EF4-FFF2-40B4-BE49-F238E27FC236}">
-                <a16:creationId xmlns:a16="http://schemas.microsoft.com/office/drawing/2014/main" id="{F91182BD-220A-4139-A7FC-B91440AE6FC7}"/>
+                <a16:creationId xmlns:a16="http://schemas.microsoft.com/office/drawing/2014/main" id="{554C4F3B-1B7C-487E-97B3-EBC17801624E}"/>
               </a:ext>
             </a:extLst>
           </p:cNvPr>
@@ -33573,7 +34505,7 @@
           <p:cNvPr id="6" name="">
             <a:extLst xmlns:a="http://schemas.openxmlformats.org/drawingml/2006/main">
               <a:ext uri="{FF2B5EF4-FFF2-40B4-BE49-F238E27FC236}">
-                <a16:creationId xmlns:a16="http://schemas.microsoft.com/office/drawing/2014/main" id="{4BCCCEED-DF8A-4568-9E4A-4A98F0FA6B33}"/>
+                <a16:creationId xmlns:a16="http://schemas.microsoft.com/office/drawing/2014/main" id="{4D48BD42-E13E-4026-B2CC-8A800A8A2E86}"/>
               </a:ext>
             </a:extLst>
           </p:cNvPr>
@@ -33614,7 +34546,7 @@
           <p:cNvPr id="7" name="">
             <a:extLst xmlns:a="http://schemas.openxmlformats.org/drawingml/2006/main">
               <a:ext uri="{FF2B5EF4-FFF2-40B4-BE49-F238E27FC236}">
-                <a16:creationId xmlns:a16="http://schemas.microsoft.com/office/drawing/2014/main" id="{1FE09EE5-FF5F-4E14-B7DF-79B150977192}"/>
+                <a16:creationId xmlns:a16="http://schemas.microsoft.com/office/drawing/2014/main" id="{BC76BE0B-1653-4AB6-B464-2ECD5B855C2A}"/>
               </a:ext>
             </a:extLst>
           </p:cNvPr>
@@ -33676,7 +34608,7 @@
           <p:cNvPr id="8" name="">
             <a:extLst xmlns:a="http://schemas.openxmlformats.org/drawingml/2006/main">
               <a:ext uri="{FF2B5EF4-FFF2-40B4-BE49-F238E27FC236}">
-                <a16:creationId xmlns:a16="http://schemas.microsoft.com/office/drawing/2014/main" id="{4614409D-F289-46DA-B87C-257276A8E29C}"/>
+                <a16:creationId xmlns:a16="http://schemas.microsoft.com/office/drawing/2014/main" id="{7FE49F16-A174-43B6-8BC6-A83A98DE8DB4}"/>
               </a:ext>
             </a:extLst>
           </p:cNvPr>
@@ -33846,7 +34778,7 @@
           <p:cNvPr id="9" name="">
             <a:extLst xmlns:a="http://schemas.openxmlformats.org/drawingml/2006/main">
               <a:ext uri="{FF2B5EF4-FFF2-40B4-BE49-F238E27FC236}">
-                <a16:creationId xmlns:a16="http://schemas.microsoft.com/office/drawing/2014/main" id="{F59C4A62-E524-425C-87A6-0D8E40B641BA}"/>
+                <a16:creationId xmlns:a16="http://schemas.microsoft.com/office/drawing/2014/main" id="{4BC74C0E-2870-4B2F-8A0B-53F65E52E418}"/>
               </a:ext>
             </a:extLst>
           </p:cNvPr>
@@ -33879,7 +34811,7 @@
           <p:cNvPr id="10" name="">
             <a:extLst xmlns:a="http://schemas.openxmlformats.org/drawingml/2006/main">
               <a:ext uri="{FF2B5EF4-FFF2-40B4-BE49-F238E27FC236}">
-                <a16:creationId xmlns:a16="http://schemas.microsoft.com/office/drawing/2014/main" id="{52F11575-853C-46CF-9308-0EC5D12DCA16}"/>
+                <a16:creationId xmlns:a16="http://schemas.microsoft.com/office/drawing/2014/main" id="{28B8F8A8-0646-43F6-97C7-D929026A65DA}"/>
               </a:ext>
             </a:extLst>
           </p:cNvPr>
@@ -33941,7 +34873,7 @@
           <p:cNvPr id="11" name="">
             <a:extLst xmlns:a="http://schemas.openxmlformats.org/drawingml/2006/main">
               <a:ext uri="{FF2B5EF4-FFF2-40B4-BE49-F238E27FC236}">
-                <a16:creationId xmlns:a16="http://schemas.microsoft.com/office/drawing/2014/main" id="{1260CA34-0DAA-4097-910D-E458A5E7A12C}"/>
+                <a16:creationId xmlns:a16="http://schemas.microsoft.com/office/drawing/2014/main" id="{CDC4701E-1DA7-495D-A5DB-BBD90270D3E1}"/>
               </a:ext>
             </a:extLst>
           </p:cNvPr>
@@ -33972,7 +34904,7 @@
           <p:cNvPr id="12" name="">
             <a:extLst xmlns:a="http://schemas.openxmlformats.org/drawingml/2006/main">
               <a:ext uri="{FF2B5EF4-FFF2-40B4-BE49-F238E27FC236}">
-                <a16:creationId xmlns:a16="http://schemas.microsoft.com/office/drawing/2014/main" id="{A7039118-4A00-46B4-B026-AF624AFB5A42}"/>
+                <a16:creationId xmlns:a16="http://schemas.microsoft.com/office/drawing/2014/main" id="{5634EDA6-369E-4FE3-A284-462F372E241A}"/>
               </a:ext>
             </a:extLst>
           </p:cNvPr>
@@ -34034,7 +34966,7 @@
           <p:cNvPr id="13" name="">
             <a:extLst xmlns:a="http://schemas.openxmlformats.org/drawingml/2006/main">
               <a:ext uri="{FF2B5EF4-FFF2-40B4-BE49-F238E27FC236}">
-                <a16:creationId xmlns:a16="http://schemas.microsoft.com/office/drawing/2014/main" id="{A0CF341F-934A-4716-9FD1-68C0A078A574}"/>
+                <a16:creationId xmlns:a16="http://schemas.microsoft.com/office/drawing/2014/main" id="{F415BB2A-687A-4874-90FD-BC79108DACB8}"/>
               </a:ext>
             </a:extLst>
           </p:cNvPr>
@@ -34094,7 +35026,7 @@
     </p:spTree>
     <p:extLst>
       <p:ext uri="{BB962C8B-B14F-4D97-AF65-F5344CB8AC3E}">
-        <p14:creationId xmlns:p14="http://schemas.microsoft.com/office/powerpoint/2010/main" val="130992669"/>
+        <p14:creationId xmlns:p14="http://schemas.microsoft.com/office/powerpoint/2010/main" val="1677048252"/>
       </p:ext>
     </p:extLst>
   </p:cSld>

--- a/reports/SpatialScope_Agent_Presentation.pptx
+++ b/reports/SpatialScope_Agent_Presentation.pptx
@@ -2,28 +2,28 @@
 <file path=ppt/presentation.xml><?xml version="1.0" encoding="utf-8"?>
 <p:presentation xmlns:p="http://schemas.openxmlformats.org/presentationml/2006/main">
   <p:sldMasterIdLst>
-    <p:sldMasterId xmlns:r="http://schemas.openxmlformats.org/officeDocument/2006/relationships" id="2147483648" r:id="Rd6db5bd9caa84a68"/>
+    <p:sldMasterId xmlns:r="http://schemas.openxmlformats.org/officeDocument/2006/relationships" id="2147483648" r:id="R1efe5f0347db4c32"/>
   </p:sldMasterIdLst>
   <p:notesMasterIdLst>
-    <p:notesMasterId xmlns:r="http://schemas.openxmlformats.org/officeDocument/2006/relationships" r:id="Ra407b728c9cb484a"/>
+    <p:notesMasterId xmlns:r="http://schemas.openxmlformats.org/officeDocument/2006/relationships" r:id="R0e49b5fd4ad04e3d"/>
   </p:notesMasterIdLst>
   <p:sldIdLst>
-    <p:sldId xmlns:r="http://schemas.openxmlformats.org/officeDocument/2006/relationships" id="256" r:id="R2b4eb75d9b234377"/>
-    <p:sldId xmlns:r="http://schemas.openxmlformats.org/officeDocument/2006/relationships" id="257" r:id="R14d99f7a6e544a45"/>
-    <p:sldId xmlns:r="http://schemas.openxmlformats.org/officeDocument/2006/relationships" id="258" r:id="Rf62a3c5bda424325"/>
-    <p:sldId xmlns:r="http://schemas.openxmlformats.org/officeDocument/2006/relationships" id="259" r:id="R36aac186fecc4373"/>
-    <p:sldId xmlns:r="http://schemas.openxmlformats.org/officeDocument/2006/relationships" id="260" r:id="R9654fa54b9ed4291"/>
-    <p:sldId xmlns:r="http://schemas.openxmlformats.org/officeDocument/2006/relationships" id="261" r:id="R4c4011b1b25a4997"/>
-    <p:sldId xmlns:r="http://schemas.openxmlformats.org/officeDocument/2006/relationships" id="262" r:id="Rada5497ea2084848"/>
-    <p:sldId xmlns:r="http://schemas.openxmlformats.org/officeDocument/2006/relationships" id="263" r:id="R8c72517aa9454a5e"/>
-    <p:sldId xmlns:r="http://schemas.openxmlformats.org/officeDocument/2006/relationships" id="264" r:id="R9d4687a37d9b412e"/>
-    <p:sldId xmlns:r="http://schemas.openxmlformats.org/officeDocument/2006/relationships" id="265" r:id="R0c3cb25777d54f61"/>
-    <p:sldId xmlns:r="http://schemas.openxmlformats.org/officeDocument/2006/relationships" id="266" r:id="Rd777d1a27c82486d"/>
-    <p:sldId xmlns:r="http://schemas.openxmlformats.org/officeDocument/2006/relationships" id="267" r:id="R8e359f9f09b94698"/>
-    <p:sldId xmlns:r="http://schemas.openxmlformats.org/officeDocument/2006/relationships" id="268" r:id="Rb043a6a8b3c741de"/>
-    <p:sldId xmlns:r="http://schemas.openxmlformats.org/officeDocument/2006/relationships" id="269" r:id="R1297023e0b0c4c3e"/>
-    <p:sldId xmlns:r="http://schemas.openxmlformats.org/officeDocument/2006/relationships" id="270" r:id="R16380d032dc144c9"/>
-    <p:sldId xmlns:r="http://schemas.openxmlformats.org/officeDocument/2006/relationships" id="271" r:id="Rf89fd32f8518495a"/>
+    <p:sldId xmlns:r="http://schemas.openxmlformats.org/officeDocument/2006/relationships" id="256" r:id="Rfa6982ecc0ca43a1"/>
+    <p:sldId xmlns:r="http://schemas.openxmlformats.org/officeDocument/2006/relationships" id="257" r:id="R92e7d544b09c4a29"/>
+    <p:sldId xmlns:r="http://schemas.openxmlformats.org/officeDocument/2006/relationships" id="258" r:id="R966ff8f4cc3f406e"/>
+    <p:sldId xmlns:r="http://schemas.openxmlformats.org/officeDocument/2006/relationships" id="259" r:id="Rd03c43674a564951"/>
+    <p:sldId xmlns:r="http://schemas.openxmlformats.org/officeDocument/2006/relationships" id="260" r:id="R4312a5ce54c64c54"/>
+    <p:sldId xmlns:r="http://schemas.openxmlformats.org/officeDocument/2006/relationships" id="261" r:id="Rd8f00cad614d4efc"/>
+    <p:sldId xmlns:r="http://schemas.openxmlformats.org/officeDocument/2006/relationships" id="262" r:id="Rb9553d5e0d8d4775"/>
+    <p:sldId xmlns:r="http://schemas.openxmlformats.org/officeDocument/2006/relationships" id="263" r:id="Ra404a04f72bf414d"/>
+    <p:sldId xmlns:r="http://schemas.openxmlformats.org/officeDocument/2006/relationships" id="264" r:id="R231d2789576e41a9"/>
+    <p:sldId xmlns:r="http://schemas.openxmlformats.org/officeDocument/2006/relationships" id="265" r:id="R4690c523e7e44803"/>
+    <p:sldId xmlns:r="http://schemas.openxmlformats.org/officeDocument/2006/relationships" id="266" r:id="R8c8db3b7e24d4184"/>
+    <p:sldId xmlns:r="http://schemas.openxmlformats.org/officeDocument/2006/relationships" id="267" r:id="R5af44bc564e24b78"/>
+    <p:sldId xmlns:r="http://schemas.openxmlformats.org/officeDocument/2006/relationships" id="268" r:id="R37d11e632ca74f3f"/>
+    <p:sldId xmlns:r="http://schemas.openxmlformats.org/officeDocument/2006/relationships" id="269" r:id="Rb715e0134bef465b"/>
+    <p:sldId xmlns:r="http://schemas.openxmlformats.org/officeDocument/2006/relationships" id="270" r:id="R3b39c55c65344b8d"/>
+    <p:sldId xmlns:r="http://schemas.openxmlformats.org/officeDocument/2006/relationships" id="271" r:id="R8017a2ce3351497c"/>
   </p:sldIdLst>
   <p:sldSz cx="12192000" cy="6858000"/>
   <p:notesSz cx="6858000" cy="9144000"/>
@@ -552,7 +552,17 @@
           <a:lstStyle xmlns:a="http://schemas.openxmlformats.org/drawingml/2006/main"/>
           <a:p xmlns:a="http://schemas.openxmlformats.org/drawingml/2006/main">
             <a:r>
-              <a:t>今天我会先讲空间转录组数据和常规分析流程，再介绍我如何把这个流程做成一个可交互、可追踪、可解释的 Agent。重点不是单个算法，而是把标准分析流程组织成一个可靠系统。</a:t>
+              <a:t>讲稿：SpatialScope Agent 是一个面向空间转录组的交互式分析 Agent。我的讲解会先从空间转录组数据本身出发，说明标准分析流程是什么；然后介绍如何把这套流程做成一个可计划、可执行、可追踪、可解释的科研 Agent。中间会切到网站，展示这个流程在真实交互界面里如何运行。</a:t>
+            </a:r>
+          </a:p>
+          <a:p xmlns:a="http://schemas.openxmlformats.org/drawingml/2006/main">
+            <a:r>
+              <a:t>操作：此页停留在 PPT，不切网站。用右侧主线卡片告诉听众：先方法背景，再 Agent，再 live demo。</a:t>
+            </a:r>
+          </a:p>
+          <a:p xmlns:a="http://schemas.openxmlformats.org/drawingml/2006/main">
+            <a:r>
+              <a:t>过渡：先从最基础的问题开始：空间转录组到底比普通转录组和单细胞转录组多回答了什么？</a:t>
             </a:r>
           </a:p>
         </p:txBody>
@@ -622,7 +632,17 @@
           <a:lstStyle xmlns:a="http://schemas.openxmlformats.org/drawingml/2006/main"/>
           <a:p xmlns:a="http://schemas.openxmlformats.org/drawingml/2006/main">
             <a:r>
-              <a:t>这里 LLM 不是直接拿矩阵做计算，而是负责理解问题、补全计划、解释 evidence pack。数值计算交给工具层。</a:t>
+              <a:t>讲稿：SpatialScope 使用 LangGraph 组织 state machine。LLM sidecar 负责理解问题、补全计划和解释 evidence pack；State/Evidence 层记录 trace、metadata、parameters 和 evidence IDs；确定性工具层负责 Scanpy、AnnData、figures 和 tables。LLM 不直接读取完整表达矩阵，数值计算由工具完成。</a:t>
+            </a:r>
+          </a:p>
+          <a:p xmlns:a="http://schemas.openxmlformats.org/drawingml/2006/main">
+            <a:r>
+              <a:t>操作：此页不切网站。按上方 LLM sidecar、State/Evidence，中间 LangGraph，底部工具层和解释边界的顺序讲。</a:t>
+            </a:r>
+          </a:p>
+          <a:p xmlns:a="http://schemas.openxmlformats.org/drawingml/2006/main">
+            <a:r>
+              <a:t>过渡：这个架构不是抽象图，它会具体映射到标准空间转录组 workflow 的每一步工具。</a:t>
             </a:r>
           </a:p>
         </p:txBody>
@@ -692,7 +712,17 @@
           <a:lstStyle xmlns:a="http://schemas.openxmlformats.org/drawingml/2006/main"/>
           <a:p xmlns:a="http://schemas.openxmlformats.org/drawingml/2006/main">
             <a:r>
-              <a:t>这页说明 Agent 不是空泛概念，而是把标准空间转录组流程拆成明确工具契约。每一步都有对应工具和可追踪输出。</a:t>
+              <a:t>讲稿：这一页说明 SpatialScope 不是空泛概念，而是把标准空间转录组流程拆成明确工具契约。inspect_dataset 对应数据结构检查，quality_control 对应 QC，preprocess 对应 normalization/log1p，cluster 对应 PCA/UMAP/Leiden，后面还有 spatial_plot、gene_panel、rank_markers 和 interpret/report。</a:t>
+            </a:r>
+          </a:p>
+          <a:p xmlns:a="http://schemas.openxmlformats.org/drawingml/2006/main">
+            <a:r>
+              <a:t>操作：此页不切网站。讲两列表格时可以说：左边是刚才介绍的方法流程，右边是 Agent 里的工具节点。</a:t>
+            </a:r>
+          </a:p>
+          <a:p xmlns:a="http://schemas.openxmlformats.org/drawingml/2006/main">
+            <a:r>
+              <a:t>过渡：到这里为止，PPT 展示的是设计逻辑。下一页开始把这套逻辑切到真实网站体验。</a:t>
             </a:r>
           </a:p>
         </p:txBody>
@@ -762,7 +792,22 @@
           <a:lstStyle xmlns:a="http://schemas.openxmlformats.org/drawingml/2006/main"/>
           <a:p xmlns:a="http://schemas.openxmlformats.org/drawingml/2006/main">
             <a:r>
-              <a:t>这一页是从 PPT 切到网站的桥。先说明：前面讲的是空间转录组分析应该怎么做；接下来打开 Streamlit，看 SpatialScope 是否能把同一套流程转化成可交互、可追踪、可复核的分析体验。</a:t>
+              <a:t>讲稿：前面讲的是空间转录组分析应该怎么做，以及 Agent 如何组织这套流程。现在切到网站，看同一套流程如何变成实际交互体验。Project 理解数据和问题，Run 执行计划，Explore 联动 Spatial 与 UMAP，Report 做证据复核。</a:t>
+            </a:r>
+          </a:p>
+          <a:p xmlns:a="http://schemas.openxmlformats.org/drawingml/2006/main">
+            <a:r>
+              <a:t>操作：先留在 PPT 讲完这页。讲完后切到浏览器，打开 https://spatialscope-seu.streamlit.app/。如果网站已经打开，直接切到浏览器标签页。</a:t>
+            </a:r>
+          </a:p>
+          <a:p xmlns:a="http://schemas.openxmlformats.org/drawingml/2006/main">
+            <a:r>
+              <a:t>网站展示目标：不是逐个按钮介绍，而是证明三件事：数据是否被理解，流程是否可追踪，解释是否回到证据。</a:t>
+            </a:r>
+          </a:p>
+          <a:p xmlns:a="http://schemas.openxmlformats.org/drawingml/2006/main">
+            <a:r>
+              <a:t>过渡：下一页是网站演示路线图。先看路线，再切到浏览器实际操作。</a:t>
             </a:r>
           </a:p>
         </p:txBody>
@@ -832,7 +877,42 @@
           <a:lstStyle xmlns:a="http://schemas.openxmlformats.org/drawingml/2006/main"/>
           <a:p xmlns:a="http://schemas.openxmlformats.org/drawingml/2006/main">
             <a:r>
-              <a:t>正式演示时可以先停在这一页说路线，然后切到浏览器。演示重点不是逐个按钮介绍，而是对应前面讲过的标准流程：Project 证明数据被理解，Run 证明 LangGraph 过程可追踪，Explore 证明 Spatial 与 UMAP 能联动查看，Copilot 证明 LLM 回答受 evidence IDs 约束，Report 证明结论有 caveats。</a:t>
+              <a:t>讲稿：这一页是现场演示路线。网站演示只抓主线：Project 看数据是否被理解，Run 看流程是否可追踪，Explore 看空间图、UMAP 和 Copilot 是否能围绕证据工作，Report 看最后结论是否有 evidence 和 caveat。</a:t>
+            </a:r>
+          </a:p>
+          <a:p xmlns:a="http://schemas.openxmlformats.org/drawingml/2006/main">
+            <a:r>
+              <a:t>操作 1 - Project：切到网站后点击早期胚胎 Demo。保留默认问题，或输入：检查这个早期小鼠胚胎空间数据的质量，比较空间结构与 UMAP 聚类，并查看 Pou5f1、Sox17、T 和 Mesp1 的空间表达。总结主要观察和局限。</a:t>
+            </a:r>
+          </a:p>
+          <a:p xmlns:a="http://schemas.openxmlformats.org/drawingml/2006/main">
+            <a:r>
+              <a:t>操作 2 - 生成方案：点击检查数据并生成方案。展示 dataset card：240 spots、80 genes、spatial coordinates、count-like expression。说：Agent 先 inspect dataset，而不是直接运行分析。</a:t>
+            </a:r>
+          </a:p>
+          <a:p xmlns:a="http://schemas.openxmlformats.org/drawingml/2006/main">
+            <a:r>
+              <a:t>操作 3 - Run：继续查看方案，指出 QC、preprocess、UMAP/Leiden、spatial plot、gene panel、marker ranking、report。点击批准并运行。展示 live LangGraph events，强调不是黑箱 spinner。</a:t>
+            </a:r>
+          </a:p>
+          <a:p xmlns:a="http://schemas.openxmlformats.org/drawingml/2006/main">
+            <a:r>
+              <a:t>操作 4 - Explore：运行完成后打开探索工作区。展示 Spatial 和 UMAP side by side，指出 cluster 颜色一致。展示 gene panel。</a:t>
+            </a:r>
+          </a:p>
+          <a:p xmlns:a="http://schemas.openxmlformats.org/drawingml/2006/main">
+            <a:r>
+              <a:t>操作 5 - Copilot：提问：哪个 cluster 的 Sox17 平均表达最高？再问：Pou5f1 是否集中在某些 cluster？请给出证据和局限。强调回答要显示 evidence IDs。</a:t>
+            </a:r>
+          </a:p>
+          <a:p xmlns:a="http://schemas.openxmlformats.org/drawingml/2006/main">
+            <a:r>
+              <a:t>操作 6 - Report：打开 Report，展示 3-5 条 findings。每条都指出 evidence 和 caveat。说：Report 的意义是可复核，不是自由发挥。</a:t>
+            </a:r>
+          </a:p>
+          <a:p xmlns:a="http://schemas.openxmlformats.org/drawingml/2006/main">
+            <a:r>
+              <a:t>回到 PPT：网站演示结束后回到 Slide 14，讲真实数据验证。</a:t>
             </a:r>
           </a:p>
         </p:txBody>
@@ -902,7 +982,17 @@
           <a:lstStyle xmlns:a="http://schemas.openxmlformats.org/drawingml/2006/main"/>
           <a:p xmlns:a="http://schemas.openxmlformats.org/drawingml/2006/main">
             <a:r>
-              <a:t>真实数据验证不是为了给出完整生物学结论，而是证明系统能处理真实 AnnData、真实坐标字段和真实表达层状态。</a:t>
+              <a:t>讲稿：刚才演示的是一个稳定的小型胚胎 demo。为了说明系统不只是 toy example，我也用公开真实数据 GSE278603 E7.5 mouse embryo 做了验证。这个样本包含 8190 spots 和 16364 genes，源文件中的 X_spatial 被标准化为 spatial，quick run 得到 7 个 Leiden clusters，0 warnings，0 errors。</a:t>
+            </a:r>
+          </a:p>
+          <a:p xmlns:a="http://schemas.openxmlformats.org/drawingml/2006/main">
+            <a:r>
+              <a:t>操作：此页回到 PPT，不再操作网站。指左侧数据卡，再看右侧真实 spatial Leiden、UMAP Leiden 和 gene panel。</a:t>
+            </a:r>
+          </a:p>
+          <a:p xmlns:a="http://schemas.openxmlformats.org/drawingml/2006/main">
+            <a:r>
+              <a:t>过渡：真实数据验证说明系统有一定泛化能力。接下来说明它在科研场景中可以如何使用，以及边界在哪里。</a:t>
             </a:r>
           </a:p>
         </p:txBody>
@@ -972,7 +1062,17 @@
           <a:lstStyle xmlns:a="http://schemas.openxmlformats.org/drawingml/2006/main"/>
           <a:p xmlns:a="http://schemas.openxmlformats.org/drawingml/2006/main">
             <a:r>
-              <a:t>这一页很重要：把项目拓展到真实科研。它可以用于发育、肿瘤微环境、病理切片探索和教学复现，但不能替代专家注释，也不能把 marker 当作机制证明。</a:t>
+              <a:t>讲稿：SpatialScope 可以作为 exploratory analysis workspace。发育生物学里可以比较不同胚胎阶段的空间区域；肿瘤微环境里可以探索 tumor、immune、stromal regions；病理切片探索中可以整合组织结构、空间表达和 cluster；教学中可以帮助学生从自然语言问题进入可复现分析。</a:t>
+            </a:r>
+          </a:p>
+          <a:p xmlns:a="http://schemas.openxmlformats.org/drawingml/2006/main">
+            <a:r>
+              <a:t>操作：此页留在 PPT。讲四个场景时不要承诺过度，最后一定强调黄色边界：不能替代专家注释，不能把 marker ranking 当作机制证明，大数据需要更强计算后端。</a:t>
+            </a:r>
+          </a:p>
+          <a:p xmlns:a="http://schemas.openxmlformats.org/drawingml/2006/main">
+            <a:r>
+              <a:t>过渡：最后总结项目的核心贡献和交付。</a:t>
             </a:r>
           </a:p>
         </p:txBody>
@@ -1042,7 +1142,17 @@
           <a:lstStyle xmlns:a="http://schemas.openxmlformats.org/drawingml/2006/main"/>
           <a:p xmlns:a="http://schemas.openxmlformats.org/drawingml/2006/main">
             <a:r>
-              <a:t>最后总结三点：空间转录组数据和流程是基础；SpatialScope 把流程转成 LangGraph Agent；LLM 用于 evidence-grounded interpretation，不替代数值分析。</a:t>
+              <a:t>讲稿：最后总结三点。第一，理解空间转录组数据结构和标准分析流程是项目基础。第二，SpatialScope 用 LangGraph 把流程组织成计划、执行、校验、修复和报告。第三，LLM 被限制在 evidence pack 内，用于解释和问答，而不是替代数值分析。</a:t>
+            </a:r>
+          </a:p>
+          <a:p xmlns:a="http://schemas.openxmlformats.org/drawingml/2006/main">
+            <a:r>
+              <a:t>操作：此页留在 PPT。指向交付与验证卡片：GitHub repo、Streamlit app、GitHub Pages、final PDF report、99 passed。</a:t>
+            </a:r>
+          </a:p>
+          <a:p xmlns:a="http://schemas.openxmlformats.org/drawingml/2006/main">
+            <a:r>
+              <a:t>收尾：这个项目的目标是让研究者更顺畅地探索空间转录组数据，同时保留可追踪性、可复现性和科学解释的谨慎性。然后准备回答问题。</a:t>
             </a:r>
           </a:p>
         </p:txBody>
@@ -1112,7 +1222,17 @@
           <a:lstStyle xmlns:a="http://schemas.openxmlformats.org/drawingml/2006/main"/>
           <a:p xmlns:a="http://schemas.openxmlformats.org/drawingml/2006/main">
             <a:r>
-              <a:t>空间转录组的关键不是多一个坐标，而是让表达矩阵重新回到组织结构中。普通转录组回答表达了什么，单细胞回答有哪些状态，空间转录组进一步回答这些状态在哪里。</a:t>
+              <a:t>讲稿：空间转录组的关键不是简单多一个坐标，而是让表达矩阵重新回到组织结构中。普通转录组回答哪些基因表达了，单细胞转录组回答有哪些细胞状态，空间转录组进一步回答这些表达和状态在组织中位于哪里。</a:t>
+            </a:r>
+          </a:p>
+          <a:p xmlns:a="http://schemas.openxmlformats.org/drawingml/2006/main">
+            <a:r>
+              <a:t>操作：此页不切网站。按左到右三张卡讲，最后强调右侧空间转录组：位置和邻域是它的核心增量。</a:t>
+            </a:r>
+          </a:p>
+          <a:p xmlns:a="http://schemas.openxmlformats.org/drawingml/2006/main">
+            <a:r>
+              <a:t>过渡：既然空间转录组把表达和位置结合起来，那么它的数据对象通常长什么样？</a:t>
             </a:r>
           </a:p>
         </p:txBody>
@@ -1182,7 +1302,17 @@
           <a:lstStyle xmlns:a="http://schemas.openxmlformats.org/drawingml/2006/main"/>
           <a:p xmlns:a="http://schemas.openxmlformats.org/drawingml/2006/main">
             <a:r>
-              <a:t>这里强调数据结构。X 是表达矩阵，obs 和 var 是 metadata，obsm spatial 存坐标，raw 和 layers 存不同表达层。这也是为什么 Agent 必须先检查数据。</a:t>
+              <a:t>讲稿：一个典型空间转录组对象包含表达矩阵 X、样本或 spot 的 metadata、基因 metadata、空间坐标 obsm['spatial']，以及 raw/layers 里的不同表达层。raw counts、normalized、log-transformed、scaled 的含义不同，不能混着解释。</a:t>
+            </a:r>
+          </a:p>
+          <a:p xmlns:a="http://schemas.openxmlformats.org/drawingml/2006/main">
+            <a:r>
+              <a:t>操作：此页不切网站。用中间矩阵作为视觉中心，依次指向 obs、var、spatial、raw/layers。最后点出底部句子：Agent 必须先 inspect dataset。</a:t>
+            </a:r>
+          </a:p>
+          <a:p xmlns:a="http://schemas.openxmlformats.org/drawingml/2006/main">
+            <a:r>
+              <a:t>过渡：不同平台虽然都可以抽象成表达矩阵加空间坐标，但实际分辨率和 metadata 差异很大。</a:t>
             </a:r>
           </a:p>
         </p:txBody>
@@ -1252,7 +1382,17 @@
           <a:lstStyle xmlns:a="http://schemas.openxmlformats.org/drawingml/2006/main"/>
           <a:p xmlns:a="http://schemas.openxmlformats.org/drawingml/2006/main">
             <a:r>
-              <a:t>不同平台的数据对象不完全一样。一个好的 Agent 不能只适配一种 toy data，要围绕表达矩阵加空间坐标这个共同结构设计，同时对平台差异保持谨慎。</a:t>
+              <a:t>讲稿：10x Visium 是 spot-based，通常有组织图像但分辨率较粗；Stereo-seq 和 Slide-seq 分辨率更高，数据规模也更大；MERFISH、Xenium、CosMx 更接近成像式 cell-level panel。共同点是表达矩阵和空间坐标，差异在分辨率、坐标字段、图像信息、gene coverage 和 QC 指标。</a:t>
+            </a:r>
+          </a:p>
+          <a:p xmlns:a="http://schemas.openxmlformats.org/drawingml/2006/main">
+            <a:r>
+              <a:t>操作：此页不切网站。讲表格时只抓共同抽象和谨慎边界，不需要展开所有平台技术细节。</a:t>
+            </a:r>
+          </a:p>
+          <a:p xmlns:a="http://schemas.openxmlformats.org/drawingml/2006/main">
+            <a:r>
+              <a:t>过渡：有了这些数据结构之后，常规空间转录组分析通常按什么流程走？</a:t>
             </a:r>
           </a:p>
         </p:txBody>
@@ -1322,7 +1462,17 @@
           <a:lstStyle xmlns:a="http://schemas.openxmlformats.org/drawingml/2006/main"/>
           <a:p xmlns:a="http://schemas.openxmlformats.org/drawingml/2006/main">
             <a:r>
-              <a:t>这套流程继承了单细胞分析的一部分方法，同时加入空间坐标和组织结构信息。后面我的 Agent 就是把这些步骤拆成工具并组织成流程。</a:t>
+              <a:t>讲稿：常规流程从读取和结构检查开始，然后做 QC、过滤、归一化和 log1p，再进行特征选择、PCA/UMAP、Leiden 聚类，最后看空间图、基因图、marker/SVG/邻域分析，并在解释阶段加入 caveats。</a:t>
+            </a:r>
+          </a:p>
+          <a:p xmlns:a="http://schemas.openxmlformats.org/drawingml/2006/main">
+            <a:r>
+              <a:t>操作：此页不切网站。沿着流程图从左到右讲，强调这套流程不是 SpatialScope 自己发明的，而是来自 Scanpy、Squidpy 和 OSTA 等常规分析思路。</a:t>
+            </a:r>
+          </a:p>
+          <a:p xmlns:a="http://schemas.openxmlformats.org/drawingml/2006/main">
+            <a:r>
+              <a:t>过渡：在这套流程里，QC 是第一道关口，因为后面所有结论都依赖输入是否可靠。</a:t>
             </a:r>
           </a:p>
         </p:txBody>
@@ -1392,7 +1542,17 @@
           <a:lstStyle xmlns:a="http://schemas.openxmlformats.org/drawingml/2006/main"/>
           <a:p xmlns:a="http://schemas.openxmlformats.org/drawingml/2006/main">
             <a:r>
-              <a:t>QC 不是形式步骤。后面所有聚类、marker、空间解释都依赖它。尤其是表达层判断，如果把 scaled matrix 当 counts 解释，就会产生伪结论。</a:t>
+              <a:t>讲稿：QC 不是形式步骤。我们需要看 total counts、detected genes、mitochondrial fraction、空间坐标是否存在，以及表达矩阵到底是 count-like、normalized、scaled 还是 unknown。尤其是表达层安全，如果把 scaled matrix 当 raw counts 来解释，marker gene 和空间表达结论都可能出现偏差。</a:t>
+            </a:r>
+          </a:p>
+          <a:p xmlns:a="http://schemas.openxmlformats.org/drawingml/2006/main">
+            <a:r>
+              <a:t>操作：此页不切网站。先指左侧 QC 图，再讲右侧两张卡片。重点落在黄色卡片：先判定表达来源，再解释 marker 或 gene。</a:t>
+            </a:r>
+          </a:p>
+          <a:p xmlns:a="http://schemas.openxmlformats.org/drawingml/2006/main">
+            <a:r>
+              <a:t>过渡：QC 之后，最常看的就是 UMAP、cluster 和空间图。它们回答的问题不同。</a:t>
             </a:r>
           </a:p>
         </p:txBody>
@@ -1462,7 +1622,17 @@
           <a:lstStyle xmlns:a="http://schemas.openxmlformats.org/drawingml/2006/main"/>
           <a:p xmlns:a="http://schemas.openxmlformats.org/drawingml/2006/main">
             <a:r>
-              <a:t>UMAP 回答表达状态是否相似，Spatial 图回答这些状态在组织中在哪里。gene panel 再看目标基因是否具有空间区域性。</a:t>
+              <a:t>讲稿：UMAP 回答的是表达状态是否相似，Spatial 图回答这些状态在组织中处于什么位置，gene panel 则看目标基因是否具有空间区域性。空间转录组不能只看 UMAP，也不能只看组织坐标，两者必须一起读。</a:t>
+            </a:r>
+          </a:p>
+          <a:p xmlns:a="http://schemas.openxmlformats.org/drawingml/2006/main">
+            <a:r>
+              <a:t>操作：此页不切网站。先讲左图 UMAP，再讲中间 Spatial，最后讲右侧 gene panel。为后面网站 Explore 页面做铺垫：那里会把 Spatial 和 UMAP 放在一起看。</a:t>
+            </a:r>
+          </a:p>
+          <a:p xmlns:a="http://schemas.openxmlformats.org/drawingml/2006/main">
+            <a:r>
+              <a:t>过渡：但是看到图之后还不能直接下生物学结论，因为图只是证据的一部分。</a:t>
             </a:r>
           </a:p>
         </p:txBody>
@@ -1532,7 +1702,17 @@
           <a:lstStyle xmlns:a="http://schemas.openxmlformats.org/drawingml/2006/main"/>
           <a:p xmlns:a="http://schemas.openxmlformats.org/drawingml/2006/main">
             <a:r>
-              <a:t>空间转录组的解释很容易讲过头。cluster 不是细胞类型，空间表达集中也不是因果机制。所以项目里每条解释都要有 evidence ID 和 caveat。</a:t>
+              <a:t>讲稿：空间转录组解释很容易讲过头。cluster 不等于细胞类型，marker ranking 是候选证据，不是最终注释；空间表达集中也不等于因果机制。所以从图到解释之间需要统计摘要、evidence ID、谨慎解释和 caveat。</a:t>
+            </a:r>
+          </a:p>
+          <a:p xmlns:a="http://schemas.openxmlformats.org/drawingml/2006/main">
+            <a:r>
+              <a:t>操作：此页不切网站。沿着上方证据链从左到右讲。强调 SpatialScope 的处理方式：每条 finding 都绑定 evidence IDs，并显示 quantitative support 和 caveats。</a:t>
+            </a:r>
+          </a:p>
+          <a:p xmlns:a="http://schemas.openxmlformats.org/drawingml/2006/main">
+            <a:r>
+              <a:t>过渡：因此，Agent 的价值不是替代分析方法，而是把这些方法组织成更可审阅的流程。</a:t>
             </a:r>
           </a:p>
         </p:txBody>
@@ -1602,7 +1782,17 @@
           <a:lstStyle xmlns:a="http://schemas.openxmlformats.org/drawingml/2006/main"/>
           <a:p xmlns:a="http://schemas.openxmlformats.org/drawingml/2006/main">
             <a:r>
-              <a:t>Agent 的价值不是替代 Scanpy 或 Squidpy，而是把分析流程组织起来。先检查数据，再生成计划，再执行工具，再根据证据解释。</a:t>
+              <a:t>讲稿：传统 notebook 要求用户自己把研究问题翻译成代码，也容易在字段、表达层、失败修复上出问题。SpatialScope Agent 的目标是先检查数据，生成可审阅计划，用确定性工具执行，再基于 evidence pack 做解释。</a:t>
+            </a:r>
+          </a:p>
+          <a:p xmlns:a="http://schemas.openxmlformats.org/drawingml/2006/main">
+            <a:r>
+              <a:t>操作：此页不切网站。先讲左侧 notebook 的痛点，再讲右侧 SpatialScope Agent 的对应方案。不要说 Agent 替代专家，而是说它组织流程、降低误用风险。</a:t>
+            </a:r>
+          </a:p>
+          <a:p xmlns:a="http://schemas.openxmlformats.org/drawingml/2006/main">
+            <a:r>
+              <a:t>过渡：接下来进入架构：这个 Agent 里面 LLM、LangGraph 和工具层分别做什么？</a:t>
             </a:r>
           </a:p>
         </p:txBody>
@@ -1670,7 +1860,7 @@
   </p:cSld>
   <p:clrMap bg1="lt1" tx1="dk1" bg2="lt2" tx2="dk2" accent1="accent1" accent2="accent2" accent3="accent3" accent4="accent4" accent5="accent5" accent6="accent6" hlink="hlink" folHlink="folHlink"/>
   <p:sldLayoutIdLst>
-    <p:sldLayoutId xmlns:r="http://schemas.openxmlformats.org/officeDocument/2006/relationships" id="2147483649" r:id="R50bf118d40ab4601"/>
+    <p:sldLayoutId xmlns:r="http://schemas.openxmlformats.org/officeDocument/2006/relationships" id="2147483649" r:id="R60365f60931447b0"/>
   </p:sldLayoutIdLst>
   <p:txStyles>
     <p:titleStyle>
@@ -2221,7 +2411,7 @@
           <p:cNvPr id="1" name="">
             <a:extLst xmlns:a="http://schemas.openxmlformats.org/drawingml/2006/main">
               <a:ext uri="{FF2B5EF4-FFF2-40B4-BE49-F238E27FC236}">
-                <a16:creationId xmlns:a16="http://schemas.microsoft.com/office/drawing/2014/main" id="{DFD96728-B972-4E4E-940F-96ABD06188DE}"/>
+                <a16:creationId xmlns:a16="http://schemas.microsoft.com/office/drawing/2014/main" id="{8F371086-F746-4677-B230-CD0569F59A4B}"/>
               </a:ext>
             </a:extLst>
           </p:cNvPr>
@@ -2254,7 +2444,7 @@
           <p:cNvPr id="2" name="">
             <a:extLst xmlns:a="http://schemas.openxmlformats.org/drawingml/2006/main">
               <a:ext uri="{FF2B5EF4-FFF2-40B4-BE49-F238E27FC236}">
-                <a16:creationId xmlns:a16="http://schemas.microsoft.com/office/drawing/2014/main" id="{09A555B3-057D-4DA8-BEFF-7B680A9D6032}"/>
+                <a16:creationId xmlns:a16="http://schemas.microsoft.com/office/drawing/2014/main" id="{D6642C2F-E2A8-43D8-928E-E7180980394B}"/>
               </a:ext>
             </a:extLst>
           </p:cNvPr>
@@ -2291,7 +2481,7 @@
           <p:nvPr/>
         </p:nvPicPr>
         <p:blipFill>
-          <a:blip xmlns:r="http://schemas.openxmlformats.org/officeDocument/2006/relationships" xmlns:a="http://schemas.openxmlformats.org/drawingml/2006/main" r:embed="Rbe68896f66a749e3"/>
+          <a:blip xmlns:r="http://schemas.openxmlformats.org/officeDocument/2006/relationships" xmlns:a="http://schemas.openxmlformats.org/drawingml/2006/main" r:embed="R94fd91fe1295495b"/>
           <a:stretch xmlns:a="http://schemas.openxmlformats.org/drawingml/2006/main"/>
         </p:blipFill>
         <p:spPr>
@@ -2311,7 +2501,7 @@
           <p:cNvPr id="4" name="">
             <a:extLst xmlns:a="http://schemas.openxmlformats.org/drawingml/2006/main">
               <a:ext uri="{FF2B5EF4-FFF2-40B4-BE49-F238E27FC236}">
-                <a16:creationId xmlns:a16="http://schemas.microsoft.com/office/drawing/2014/main" id="{0A2D6100-491B-4BF5-A330-8F920B5364A6}"/>
+                <a16:creationId xmlns:a16="http://schemas.microsoft.com/office/drawing/2014/main" id="{6A8B39C3-F7EB-49AB-9FF7-AB476ED257BC}"/>
               </a:ext>
             </a:extLst>
           </p:cNvPr>
@@ -2373,7 +2563,7 @@
           <p:cNvPr id="5" name="">
             <a:extLst xmlns:a="http://schemas.openxmlformats.org/drawingml/2006/main">
               <a:ext uri="{FF2B5EF4-FFF2-40B4-BE49-F238E27FC236}">
-                <a16:creationId xmlns:a16="http://schemas.microsoft.com/office/drawing/2014/main" id="{160B72D6-C41A-4A0E-8006-C6E1520CACDE}"/>
+                <a16:creationId xmlns:a16="http://schemas.microsoft.com/office/drawing/2014/main" id="{F0A6FE38-2F05-4AD2-AA1E-4A5477550988}"/>
               </a:ext>
             </a:extLst>
           </p:cNvPr>
@@ -2435,7 +2625,7 @@
           <p:cNvPr id="6" name="">
             <a:extLst xmlns:a="http://schemas.openxmlformats.org/drawingml/2006/main">
               <a:ext uri="{FF2B5EF4-FFF2-40B4-BE49-F238E27FC236}">
-                <a16:creationId xmlns:a16="http://schemas.microsoft.com/office/drawing/2014/main" id="{D7F1BF33-CCE6-4444-AF7F-31A6E1691626}"/>
+                <a16:creationId xmlns:a16="http://schemas.microsoft.com/office/drawing/2014/main" id="{E140EB5A-6353-4FFC-B3F2-788630E30927}"/>
               </a:ext>
             </a:extLst>
           </p:cNvPr>
@@ -2501,7 +2691,7 @@
           <p:nvPr/>
         </p:nvPicPr>
         <p:blipFill>
-          <a:blip xmlns:r="http://schemas.openxmlformats.org/officeDocument/2006/relationships" xmlns:a="http://schemas.openxmlformats.org/drawingml/2006/main" r:embed="R6bda0119fc00487a"/>
+          <a:blip xmlns:r="http://schemas.openxmlformats.org/officeDocument/2006/relationships" xmlns:a="http://schemas.openxmlformats.org/drawingml/2006/main" r:embed="Ree57d82d3bcd41d8"/>
           <a:srcRect xmlns:a="http://schemas.openxmlformats.org/drawingml/2006/main" l="0" t="10358" r="0" b="10358"/>
           <a:stretch xmlns:a="http://schemas.openxmlformats.org/drawingml/2006/main">
             <a:fillRect l="0" t="0" r="0" b="0"/>
@@ -2524,7 +2714,7 @@
           <p:cNvPr id="8" name="">
             <a:extLst xmlns:a="http://schemas.openxmlformats.org/drawingml/2006/main">
               <a:ext uri="{FF2B5EF4-FFF2-40B4-BE49-F238E27FC236}">
-                <a16:creationId xmlns:a16="http://schemas.microsoft.com/office/drawing/2014/main" id="{968B90C8-47BD-4337-9286-A0FA2A2B0C56}"/>
+                <a16:creationId xmlns:a16="http://schemas.microsoft.com/office/drawing/2014/main" id="{F88CCC36-CB78-4536-999E-3AC9623FE6E9}"/>
               </a:ext>
             </a:extLst>
           </p:cNvPr>
@@ -2565,7 +2755,7 @@
           <p:cNvPr id="9" name="">
             <a:extLst xmlns:a="http://schemas.openxmlformats.org/drawingml/2006/main">
               <a:ext uri="{FF2B5EF4-FFF2-40B4-BE49-F238E27FC236}">
-                <a16:creationId xmlns:a16="http://schemas.microsoft.com/office/drawing/2014/main" id="{4989E9D8-FB31-435F-B001-A4BF450BDAB5}"/>
+                <a16:creationId xmlns:a16="http://schemas.microsoft.com/office/drawing/2014/main" id="{1E5ABDB5-B93F-4B29-A162-6D6EE690C3FF}"/>
               </a:ext>
             </a:extLst>
           </p:cNvPr>
@@ -2627,7 +2817,7 @@
           <p:cNvPr id="10" name="">
             <a:extLst xmlns:a="http://schemas.openxmlformats.org/drawingml/2006/main">
               <a:ext uri="{FF2B5EF4-FFF2-40B4-BE49-F238E27FC236}">
-                <a16:creationId xmlns:a16="http://schemas.microsoft.com/office/drawing/2014/main" id="{8B80E364-25CE-4DC4-BF73-54B62EFD0ECC}"/>
+                <a16:creationId xmlns:a16="http://schemas.microsoft.com/office/drawing/2014/main" id="{B960B6F1-08B2-4C50-BFFD-58964C0F2D02}"/>
               </a:ext>
             </a:extLst>
           </p:cNvPr>
@@ -2689,7 +2879,7 @@
           <p:cNvPr id="11" name="">
             <a:extLst xmlns:a="http://schemas.openxmlformats.org/drawingml/2006/main">
               <a:ext uri="{FF2B5EF4-FFF2-40B4-BE49-F238E27FC236}">
-                <a16:creationId xmlns:a16="http://schemas.microsoft.com/office/drawing/2014/main" id="{7DC943D9-E269-424F-B830-642F3F70C774}"/>
+                <a16:creationId xmlns:a16="http://schemas.microsoft.com/office/drawing/2014/main" id="{B6FB1C23-D3FC-47A2-9549-241D87A08AE4}"/>
               </a:ext>
             </a:extLst>
           </p:cNvPr>
@@ -2753,7 +2943,7 @@
           <p:cNvPr id="12" name="">
             <a:extLst xmlns:a="http://schemas.openxmlformats.org/drawingml/2006/main">
               <a:ext uri="{FF2B5EF4-FFF2-40B4-BE49-F238E27FC236}">
-                <a16:creationId xmlns:a16="http://schemas.microsoft.com/office/drawing/2014/main" id="{5B48B633-E296-4895-A493-82421A461167}"/>
+                <a16:creationId xmlns:a16="http://schemas.microsoft.com/office/drawing/2014/main" id="{18FC6E77-1031-41DE-8B76-958C937742A1}"/>
               </a:ext>
             </a:extLst>
           </p:cNvPr>
@@ -2817,7 +3007,7 @@
           <p:cNvPr id="13" name="">
             <a:extLst xmlns:a="http://schemas.openxmlformats.org/drawingml/2006/main">
               <a:ext uri="{FF2B5EF4-FFF2-40B4-BE49-F238E27FC236}">
-                <a16:creationId xmlns:a16="http://schemas.microsoft.com/office/drawing/2014/main" id="{A09BC650-527F-4283-A744-C250822ED6A2}"/>
+                <a16:creationId xmlns:a16="http://schemas.microsoft.com/office/drawing/2014/main" id="{27894755-E80F-418A-AAED-52F4B9114ABF}"/>
               </a:ext>
             </a:extLst>
           </p:cNvPr>
@@ -2881,7 +3071,7 @@
           <p:cNvPr id="14" name="">
             <a:extLst xmlns:a="http://schemas.openxmlformats.org/drawingml/2006/main">
               <a:ext uri="{FF2B5EF4-FFF2-40B4-BE49-F238E27FC236}">
-                <a16:creationId xmlns:a16="http://schemas.microsoft.com/office/drawing/2014/main" id="{D386905B-4F9D-4175-BD40-B6F89813B336}"/>
+                <a16:creationId xmlns:a16="http://schemas.microsoft.com/office/drawing/2014/main" id="{5F430A9A-1C71-43AA-9AD9-40270E596188}"/>
               </a:ext>
             </a:extLst>
           </p:cNvPr>
@@ -2997,7 +3187,7 @@
           <p:cNvPr id="15" name="">
             <a:extLst xmlns:a="http://schemas.openxmlformats.org/drawingml/2006/main">
               <a:ext uri="{FF2B5EF4-FFF2-40B4-BE49-F238E27FC236}">
-                <a16:creationId xmlns:a16="http://schemas.microsoft.com/office/drawing/2014/main" id="{77881217-8AC3-442E-AD75-8ABB59939617}"/>
+                <a16:creationId xmlns:a16="http://schemas.microsoft.com/office/drawing/2014/main" id="{E7D28DB4-400C-46FC-8C14-2307AF03791B}"/>
               </a:ext>
             </a:extLst>
           </p:cNvPr>
@@ -3028,7 +3218,7 @@
           <p:cNvPr id="16" name="">
             <a:extLst xmlns:a="http://schemas.openxmlformats.org/drawingml/2006/main">
               <a:ext uri="{FF2B5EF4-FFF2-40B4-BE49-F238E27FC236}">
-                <a16:creationId xmlns:a16="http://schemas.microsoft.com/office/drawing/2014/main" id="{37AE6176-0844-49B7-A153-47E911EDE7FC}"/>
+                <a16:creationId xmlns:a16="http://schemas.microsoft.com/office/drawing/2014/main" id="{98A3AC5F-E633-496B-A12C-8C6A5C0B358E}"/>
               </a:ext>
             </a:extLst>
           </p:cNvPr>
@@ -3068,7 +3258,7 @@
           <p:cNvPr id="17" name="">
             <a:extLst xmlns:a="http://schemas.openxmlformats.org/drawingml/2006/main">
               <a:ext uri="{FF2B5EF4-FFF2-40B4-BE49-F238E27FC236}">
-                <a16:creationId xmlns:a16="http://schemas.microsoft.com/office/drawing/2014/main" id="{D2111A22-D116-442B-96FB-28196C8F4928}"/>
+                <a16:creationId xmlns:a16="http://schemas.microsoft.com/office/drawing/2014/main" id="{ADB06AEB-7410-4B43-BB4C-DC3DBB14C14B}"/>
               </a:ext>
             </a:extLst>
           </p:cNvPr>
@@ -3128,7 +3318,7 @@
     </p:spTree>
     <p:extLst>
       <p:ext uri="{BB962C8B-B14F-4D97-AF65-F5344CB8AC3E}">
-        <p14:creationId xmlns:p14="http://schemas.microsoft.com/office/powerpoint/2010/main" val="540866931"/>
+        <p14:creationId xmlns:p14="http://schemas.microsoft.com/office/powerpoint/2010/main" val="632555270"/>
       </p:ext>
     </p:extLst>
   </p:cSld>
@@ -3159,7 +3349,7 @@
           <p:cNvPr id="1" name="">
             <a:extLst xmlns:a="http://schemas.openxmlformats.org/drawingml/2006/main">
               <a:ext uri="{FF2B5EF4-FFF2-40B4-BE49-F238E27FC236}">
-                <a16:creationId xmlns:a16="http://schemas.microsoft.com/office/drawing/2014/main" id="{83D6D2DA-73EB-4674-8466-933BBAEF2B05}"/>
+                <a16:creationId xmlns:a16="http://schemas.microsoft.com/office/drawing/2014/main" id="{0BB73943-DC0A-4EBA-9A21-BF3006A4070F}"/>
               </a:ext>
             </a:extLst>
           </p:cNvPr>
@@ -3221,7 +3411,7 @@
           <p:cNvPr id="2" name="">
             <a:extLst xmlns:a="http://schemas.openxmlformats.org/drawingml/2006/main">
               <a:ext uri="{FF2B5EF4-FFF2-40B4-BE49-F238E27FC236}">
-                <a16:creationId xmlns:a16="http://schemas.microsoft.com/office/drawing/2014/main" id="{9A77BDA6-4EC8-4EBE-ACAF-D5C6542453E3}"/>
+                <a16:creationId xmlns:a16="http://schemas.microsoft.com/office/drawing/2014/main" id="{011DEA5D-CA60-4DF4-8870-E01E658DDD4D}"/>
               </a:ext>
             </a:extLst>
           </p:cNvPr>
@@ -3283,7 +3473,7 @@
           <p:cNvPr id="3" name="">
             <a:extLst xmlns:a="http://schemas.openxmlformats.org/drawingml/2006/main">
               <a:ext uri="{FF2B5EF4-FFF2-40B4-BE49-F238E27FC236}">
-                <a16:creationId xmlns:a16="http://schemas.microsoft.com/office/drawing/2014/main" id="{8050F7F4-FBF5-4A6B-A670-E5A49E68CAC9}"/>
+                <a16:creationId xmlns:a16="http://schemas.microsoft.com/office/drawing/2014/main" id="{8219CD94-6CDC-41CE-A492-2BA9CDEF5717}"/>
               </a:ext>
             </a:extLst>
           </p:cNvPr>
@@ -3324,7 +3514,7 @@
           <p:cNvPr id="4" name="">
             <a:extLst xmlns:a="http://schemas.openxmlformats.org/drawingml/2006/main">
               <a:ext uri="{FF2B5EF4-FFF2-40B4-BE49-F238E27FC236}">
-                <a16:creationId xmlns:a16="http://schemas.microsoft.com/office/drawing/2014/main" id="{13FC7C3D-DD99-4CE5-8E70-22AC72B5CEFE}"/>
+                <a16:creationId xmlns:a16="http://schemas.microsoft.com/office/drawing/2014/main" id="{E492D50D-AAE2-4314-A234-6E07E45B18AC}"/>
               </a:ext>
             </a:extLst>
           </p:cNvPr>
@@ -3386,7 +3576,7 @@
           <p:cNvPr id="5" name="">
             <a:extLst xmlns:a="http://schemas.openxmlformats.org/drawingml/2006/main">
               <a:ext uri="{FF2B5EF4-FFF2-40B4-BE49-F238E27FC236}">
-                <a16:creationId xmlns:a16="http://schemas.microsoft.com/office/drawing/2014/main" id="{A8416B96-71FB-4833-B02F-96ABC9B02F0D}"/>
+                <a16:creationId xmlns:a16="http://schemas.microsoft.com/office/drawing/2014/main" id="{E5132AF9-A111-4FBA-A0AE-0CD44E4F630F}"/>
               </a:ext>
             </a:extLst>
           </p:cNvPr>
@@ -3448,7 +3638,7 @@
           <p:cNvPr id="6" name="">
             <a:extLst xmlns:a="http://schemas.openxmlformats.org/drawingml/2006/main">
               <a:ext uri="{FF2B5EF4-FFF2-40B4-BE49-F238E27FC236}">
-                <a16:creationId xmlns:a16="http://schemas.microsoft.com/office/drawing/2014/main" id="{CD28E488-856C-4AE1-ABAD-10C855D4DF70}"/>
+                <a16:creationId xmlns:a16="http://schemas.microsoft.com/office/drawing/2014/main" id="{8E53D7A7-EDB5-45B3-A69F-EE7DA03AA095}"/>
               </a:ext>
             </a:extLst>
           </p:cNvPr>
@@ -3489,7 +3679,7 @@
           <p:cNvPr id="7" name="">
             <a:extLst xmlns:a="http://schemas.openxmlformats.org/drawingml/2006/main">
               <a:ext uri="{FF2B5EF4-FFF2-40B4-BE49-F238E27FC236}">
-                <a16:creationId xmlns:a16="http://schemas.microsoft.com/office/drawing/2014/main" id="{7EC68E02-7168-44FB-AC73-1AFF588AE139}"/>
+                <a16:creationId xmlns:a16="http://schemas.microsoft.com/office/drawing/2014/main" id="{59896352-F745-4DD7-A8F5-3F6C3CBF566D}"/>
               </a:ext>
             </a:extLst>
           </p:cNvPr>
@@ -3551,7 +3741,7 @@
           <p:cNvPr id="8" name="">
             <a:extLst xmlns:a="http://schemas.openxmlformats.org/drawingml/2006/main">
               <a:ext uri="{FF2B5EF4-FFF2-40B4-BE49-F238E27FC236}">
-                <a16:creationId xmlns:a16="http://schemas.microsoft.com/office/drawing/2014/main" id="{1815256E-AFA1-4FB0-A0C6-3A27B5CDFE56}"/>
+                <a16:creationId xmlns:a16="http://schemas.microsoft.com/office/drawing/2014/main" id="{9B5DFAEB-4B8B-48E2-B4F3-51722D3EC0BA}"/>
               </a:ext>
             </a:extLst>
           </p:cNvPr>
@@ -3613,7 +3803,7 @@
           <p:cNvPr id="9" name="">
             <a:extLst xmlns:a="http://schemas.openxmlformats.org/drawingml/2006/main">
               <a:ext uri="{FF2B5EF4-FFF2-40B4-BE49-F238E27FC236}">
-                <a16:creationId xmlns:a16="http://schemas.microsoft.com/office/drawing/2014/main" id="{80279F27-190D-4C74-914A-BD639A872623}"/>
+                <a16:creationId xmlns:a16="http://schemas.microsoft.com/office/drawing/2014/main" id="{3A15A578-B8DE-4319-ACE8-F21C7DC1006D}"/>
               </a:ext>
             </a:extLst>
           </p:cNvPr>
@@ -3646,7 +3836,7 @@
           <p:cNvPr id="10" name="">
             <a:extLst xmlns:a="http://schemas.openxmlformats.org/drawingml/2006/main">
               <a:ext uri="{FF2B5EF4-FFF2-40B4-BE49-F238E27FC236}">
-                <a16:creationId xmlns:a16="http://schemas.microsoft.com/office/drawing/2014/main" id="{BDD20F36-4021-4428-ABE6-14129C787C3F}"/>
+                <a16:creationId xmlns:a16="http://schemas.microsoft.com/office/drawing/2014/main" id="{71C55578-FED8-4CD3-8EB7-F67746EFB198}"/>
               </a:ext>
             </a:extLst>
           </p:cNvPr>
@@ -3679,7 +3869,7 @@
           <p:cNvPr id="11" name="">
             <a:extLst xmlns:a="http://schemas.openxmlformats.org/drawingml/2006/main">
               <a:ext uri="{FF2B5EF4-FFF2-40B4-BE49-F238E27FC236}">
-                <a16:creationId xmlns:a16="http://schemas.microsoft.com/office/drawing/2014/main" id="{B40B2065-719A-4DA7-883A-6BD443B9E9AA}"/>
+                <a16:creationId xmlns:a16="http://schemas.microsoft.com/office/drawing/2014/main" id="{809BD50E-0DEA-47AB-846A-835C0B8CD66A}"/>
               </a:ext>
             </a:extLst>
           </p:cNvPr>
@@ -3741,7 +3931,7 @@
           <p:cNvPr id="12" name="">
             <a:extLst xmlns:a="http://schemas.openxmlformats.org/drawingml/2006/main">
               <a:ext uri="{FF2B5EF4-FFF2-40B4-BE49-F238E27FC236}">
-                <a16:creationId xmlns:a16="http://schemas.microsoft.com/office/drawing/2014/main" id="{19CD49B7-E03D-4C90-B22E-BBC1477612E9}"/>
+                <a16:creationId xmlns:a16="http://schemas.microsoft.com/office/drawing/2014/main" id="{3494CB4D-9688-44A3-91D3-3F6EEE39C15E}"/>
               </a:ext>
             </a:extLst>
           </p:cNvPr>
@@ -3782,7 +3972,7 @@
           <p:cNvPr id="13" name="">
             <a:extLst xmlns:a="http://schemas.openxmlformats.org/drawingml/2006/main">
               <a:ext uri="{FF2B5EF4-FFF2-40B4-BE49-F238E27FC236}">
-                <a16:creationId xmlns:a16="http://schemas.microsoft.com/office/drawing/2014/main" id="{33AFC176-BEE4-4A5F-941F-C36C2D97DFC0}"/>
+                <a16:creationId xmlns:a16="http://schemas.microsoft.com/office/drawing/2014/main" id="{8422FCBC-9949-468A-9140-DDF3F1C01609}"/>
               </a:ext>
             </a:extLst>
           </p:cNvPr>
@@ -3813,7 +4003,7 @@
           <p:cNvPr id="14" name="">
             <a:extLst xmlns:a="http://schemas.openxmlformats.org/drawingml/2006/main">
               <a:ext uri="{FF2B5EF4-FFF2-40B4-BE49-F238E27FC236}">
-                <a16:creationId xmlns:a16="http://schemas.microsoft.com/office/drawing/2014/main" id="{69B859F6-E763-40D4-B2EC-F552498BC6A8}"/>
+                <a16:creationId xmlns:a16="http://schemas.microsoft.com/office/drawing/2014/main" id="{A526BDAE-72CE-4B1F-955B-15AC74F37632}"/>
               </a:ext>
             </a:extLst>
           </p:cNvPr>
@@ -3846,7 +4036,7 @@
           <p:cNvPr id="15" name="">
             <a:extLst xmlns:a="http://schemas.openxmlformats.org/drawingml/2006/main">
               <a:ext uri="{FF2B5EF4-FFF2-40B4-BE49-F238E27FC236}">
-                <a16:creationId xmlns:a16="http://schemas.microsoft.com/office/drawing/2014/main" id="{C94F742A-AFCC-4D8E-AF8C-01E24AE13F42}"/>
+                <a16:creationId xmlns:a16="http://schemas.microsoft.com/office/drawing/2014/main" id="{98B2BC29-43E1-4AC6-902C-AB6C2FB3A031}"/>
               </a:ext>
             </a:extLst>
           </p:cNvPr>
@@ -3879,7 +4069,7 @@
           <p:cNvPr id="16" name="">
             <a:extLst xmlns:a="http://schemas.openxmlformats.org/drawingml/2006/main">
               <a:ext uri="{FF2B5EF4-FFF2-40B4-BE49-F238E27FC236}">
-                <a16:creationId xmlns:a16="http://schemas.microsoft.com/office/drawing/2014/main" id="{64FFB71A-F0D1-44CF-A136-DD3338D31F0F}"/>
+                <a16:creationId xmlns:a16="http://schemas.microsoft.com/office/drawing/2014/main" id="{C5620ABC-1DF9-4240-B779-96B82D187E9E}"/>
               </a:ext>
             </a:extLst>
           </p:cNvPr>
@@ -3912,7 +4102,7 @@
           <p:cNvPr id="17" name="">
             <a:extLst xmlns:a="http://schemas.openxmlformats.org/drawingml/2006/main">
               <a:ext uri="{FF2B5EF4-FFF2-40B4-BE49-F238E27FC236}">
-                <a16:creationId xmlns:a16="http://schemas.microsoft.com/office/drawing/2014/main" id="{21B2F38F-9963-467D-A8DA-970EC14C5F21}"/>
+                <a16:creationId xmlns:a16="http://schemas.microsoft.com/office/drawing/2014/main" id="{152B6F33-2EB4-4DD5-BE7B-6260D7B599DA}"/>
               </a:ext>
             </a:extLst>
           </p:cNvPr>
@@ -3945,7 +4135,7 @@
           <p:cNvPr id="18" name="">
             <a:extLst xmlns:a="http://schemas.openxmlformats.org/drawingml/2006/main">
               <a:ext uri="{FF2B5EF4-FFF2-40B4-BE49-F238E27FC236}">
-                <a16:creationId xmlns:a16="http://schemas.microsoft.com/office/drawing/2014/main" id="{5830FD09-61E8-42A7-9840-34E832B2D37A}"/>
+                <a16:creationId xmlns:a16="http://schemas.microsoft.com/office/drawing/2014/main" id="{7AD9F27D-F08C-45D7-AD62-14ECDD3E4A10}"/>
               </a:ext>
             </a:extLst>
           </p:cNvPr>
@@ -3978,7 +4168,7 @@
           <p:cNvPr id="19" name="">
             <a:extLst xmlns:a="http://schemas.openxmlformats.org/drawingml/2006/main">
               <a:ext uri="{FF2B5EF4-FFF2-40B4-BE49-F238E27FC236}">
-                <a16:creationId xmlns:a16="http://schemas.microsoft.com/office/drawing/2014/main" id="{97A04DC7-50B2-4292-B5AE-574FC94B79CB}"/>
+                <a16:creationId xmlns:a16="http://schemas.microsoft.com/office/drawing/2014/main" id="{4A18C7E9-4084-4DE7-B7F5-B58EDBEC58BA}"/>
               </a:ext>
             </a:extLst>
           </p:cNvPr>
@@ -4019,7 +4209,7 @@
           <p:cNvPr id="20" name="">
             <a:extLst xmlns:a="http://schemas.openxmlformats.org/drawingml/2006/main">
               <a:ext uri="{FF2B5EF4-FFF2-40B4-BE49-F238E27FC236}">
-                <a16:creationId xmlns:a16="http://schemas.microsoft.com/office/drawing/2014/main" id="{121D0477-EE00-412D-9D27-11B81E9D2FA5}"/>
+                <a16:creationId xmlns:a16="http://schemas.microsoft.com/office/drawing/2014/main" id="{E41546D5-BDF5-4297-B237-47DC08E7CF6B}"/>
               </a:ext>
             </a:extLst>
           </p:cNvPr>
@@ -4081,7 +4271,7 @@
           <p:cNvPr id="21" name="">
             <a:extLst xmlns:a="http://schemas.openxmlformats.org/drawingml/2006/main">
               <a:ext uri="{FF2B5EF4-FFF2-40B4-BE49-F238E27FC236}">
-                <a16:creationId xmlns:a16="http://schemas.microsoft.com/office/drawing/2014/main" id="{31251741-6F73-401D-9A5B-A1B9D652D273}"/>
+                <a16:creationId xmlns:a16="http://schemas.microsoft.com/office/drawing/2014/main" id="{A5BC8C36-8E78-490B-804E-917279831C93}"/>
               </a:ext>
             </a:extLst>
           </p:cNvPr>
@@ -4122,7 +4312,7 @@
           <p:cNvPr id="22" name="">
             <a:extLst xmlns:a="http://schemas.openxmlformats.org/drawingml/2006/main">
               <a:ext uri="{FF2B5EF4-FFF2-40B4-BE49-F238E27FC236}">
-                <a16:creationId xmlns:a16="http://schemas.microsoft.com/office/drawing/2014/main" id="{2CD1D49B-76FB-4ABB-B501-848AFEAFB44C}"/>
+                <a16:creationId xmlns:a16="http://schemas.microsoft.com/office/drawing/2014/main" id="{46CC50AF-0C8F-4A00-823E-37BE69F7B55E}"/>
               </a:ext>
             </a:extLst>
           </p:cNvPr>
@@ -4184,7 +4374,7 @@
           <p:cNvPr id="23" name="">
             <a:extLst xmlns:a="http://schemas.openxmlformats.org/drawingml/2006/main">
               <a:ext uri="{FF2B5EF4-FFF2-40B4-BE49-F238E27FC236}">
-                <a16:creationId xmlns:a16="http://schemas.microsoft.com/office/drawing/2014/main" id="{E0C31876-0DCA-4DCD-B626-9BE5167CA25A}"/>
+                <a16:creationId xmlns:a16="http://schemas.microsoft.com/office/drawing/2014/main" id="{2A4562FB-E06B-4847-9BAD-F5E9B7AF5123}"/>
               </a:ext>
             </a:extLst>
           </p:cNvPr>
@@ -4225,7 +4415,7 @@
           <p:cNvPr id="24" name="">
             <a:extLst xmlns:a="http://schemas.openxmlformats.org/drawingml/2006/main">
               <a:ext uri="{FF2B5EF4-FFF2-40B4-BE49-F238E27FC236}">
-                <a16:creationId xmlns:a16="http://schemas.microsoft.com/office/drawing/2014/main" id="{77642646-89E5-4061-AA36-859262D6A15C}"/>
+                <a16:creationId xmlns:a16="http://schemas.microsoft.com/office/drawing/2014/main" id="{D2E738EE-516C-4CC8-89BA-8472D40118EE}"/>
               </a:ext>
             </a:extLst>
           </p:cNvPr>
@@ -4287,7 +4477,7 @@
           <p:cNvPr id="25" name="">
             <a:extLst xmlns:a="http://schemas.openxmlformats.org/drawingml/2006/main">
               <a:ext uri="{FF2B5EF4-FFF2-40B4-BE49-F238E27FC236}">
-                <a16:creationId xmlns:a16="http://schemas.microsoft.com/office/drawing/2014/main" id="{E2017412-B797-4428-BBE5-100E52492FA2}"/>
+                <a16:creationId xmlns:a16="http://schemas.microsoft.com/office/drawing/2014/main" id="{9D5813D5-9BBB-4BDC-A62F-7592F750EA8B}"/>
               </a:ext>
             </a:extLst>
           </p:cNvPr>
@@ -4328,7 +4518,7 @@
           <p:cNvPr id="26" name="">
             <a:extLst xmlns:a="http://schemas.openxmlformats.org/drawingml/2006/main">
               <a:ext uri="{FF2B5EF4-FFF2-40B4-BE49-F238E27FC236}">
-                <a16:creationId xmlns:a16="http://schemas.microsoft.com/office/drawing/2014/main" id="{DE2C771C-03C4-47CA-8AB9-7779D1C37945}"/>
+                <a16:creationId xmlns:a16="http://schemas.microsoft.com/office/drawing/2014/main" id="{B5710F6C-9D7F-4AFE-8CBF-8711837E1492}"/>
               </a:ext>
             </a:extLst>
           </p:cNvPr>
@@ -4390,7 +4580,7 @@
           <p:cNvPr id="27" name="">
             <a:extLst xmlns:a="http://schemas.openxmlformats.org/drawingml/2006/main">
               <a:ext uri="{FF2B5EF4-FFF2-40B4-BE49-F238E27FC236}">
-                <a16:creationId xmlns:a16="http://schemas.microsoft.com/office/drawing/2014/main" id="{D19AE5FF-D0FF-4624-86B2-7AF18C3E15B1}"/>
+                <a16:creationId xmlns:a16="http://schemas.microsoft.com/office/drawing/2014/main" id="{05BC9642-A2F9-456C-866B-DF56C9A49AE1}"/>
               </a:ext>
             </a:extLst>
           </p:cNvPr>
@@ -4431,7 +4621,7 @@
           <p:cNvPr id="28" name="">
             <a:extLst xmlns:a="http://schemas.openxmlformats.org/drawingml/2006/main">
               <a:ext uri="{FF2B5EF4-FFF2-40B4-BE49-F238E27FC236}">
-                <a16:creationId xmlns:a16="http://schemas.microsoft.com/office/drawing/2014/main" id="{46171A10-2705-47CA-908F-66C0F9624E12}"/>
+                <a16:creationId xmlns:a16="http://schemas.microsoft.com/office/drawing/2014/main" id="{3D156E01-D489-41D1-B397-0020D258592D}"/>
               </a:ext>
             </a:extLst>
           </p:cNvPr>
@@ -4493,7 +4683,7 @@
           <p:cNvPr id="29" name="">
             <a:extLst xmlns:a="http://schemas.openxmlformats.org/drawingml/2006/main">
               <a:ext uri="{FF2B5EF4-FFF2-40B4-BE49-F238E27FC236}">
-                <a16:creationId xmlns:a16="http://schemas.microsoft.com/office/drawing/2014/main" id="{CECC5DD3-7726-4FDE-A1FE-6B89BCB78A32}"/>
+                <a16:creationId xmlns:a16="http://schemas.microsoft.com/office/drawing/2014/main" id="{3867131A-8E47-42F0-B24F-269B6E94C0FE}"/>
               </a:ext>
             </a:extLst>
           </p:cNvPr>
@@ -4534,7 +4724,7 @@
           <p:cNvPr id="30" name="">
             <a:extLst xmlns:a="http://schemas.openxmlformats.org/drawingml/2006/main">
               <a:ext uri="{FF2B5EF4-FFF2-40B4-BE49-F238E27FC236}">
-                <a16:creationId xmlns:a16="http://schemas.microsoft.com/office/drawing/2014/main" id="{56F4925B-05FC-4078-814A-EB9A66663AE3}"/>
+                <a16:creationId xmlns:a16="http://schemas.microsoft.com/office/drawing/2014/main" id="{7328A851-689C-44DF-9839-B8497C41B9F1}"/>
               </a:ext>
             </a:extLst>
           </p:cNvPr>
@@ -4596,7 +4786,7 @@
           <p:cNvPr id="31" name="">
             <a:extLst xmlns:a="http://schemas.openxmlformats.org/drawingml/2006/main">
               <a:ext uri="{FF2B5EF4-FFF2-40B4-BE49-F238E27FC236}">
-                <a16:creationId xmlns:a16="http://schemas.microsoft.com/office/drawing/2014/main" id="{A1DD7555-7114-4FA6-957B-9D982F791ECC}"/>
+                <a16:creationId xmlns:a16="http://schemas.microsoft.com/office/drawing/2014/main" id="{A4157825-9BA9-4EA4-B715-F9D94A7F9C23}"/>
               </a:ext>
             </a:extLst>
           </p:cNvPr>
@@ -4637,7 +4827,7 @@
           <p:cNvPr id="32" name="">
             <a:extLst xmlns:a="http://schemas.openxmlformats.org/drawingml/2006/main">
               <a:ext uri="{FF2B5EF4-FFF2-40B4-BE49-F238E27FC236}">
-                <a16:creationId xmlns:a16="http://schemas.microsoft.com/office/drawing/2014/main" id="{1EE1A711-FBE8-447B-AA48-4142EAF2BF78}"/>
+                <a16:creationId xmlns:a16="http://schemas.microsoft.com/office/drawing/2014/main" id="{1CC5F722-914D-40C0-AB55-7C531FA32085}"/>
               </a:ext>
             </a:extLst>
           </p:cNvPr>
@@ -4699,7 +4889,7 @@
           <p:cNvPr id="33" name="">
             <a:extLst xmlns:a="http://schemas.openxmlformats.org/drawingml/2006/main">
               <a:ext uri="{FF2B5EF4-FFF2-40B4-BE49-F238E27FC236}">
-                <a16:creationId xmlns:a16="http://schemas.microsoft.com/office/drawing/2014/main" id="{B8BBD44A-AC60-41F3-BE18-722065109364}"/>
+                <a16:creationId xmlns:a16="http://schemas.microsoft.com/office/drawing/2014/main" id="{52E7F699-67E9-447B-8758-ECCE14C24B4B}"/>
               </a:ext>
             </a:extLst>
           </p:cNvPr>
@@ -4761,7 +4951,7 @@
           <p:cNvPr id="34" name="">
             <a:extLst xmlns:a="http://schemas.openxmlformats.org/drawingml/2006/main">
               <a:ext uri="{FF2B5EF4-FFF2-40B4-BE49-F238E27FC236}">
-                <a16:creationId xmlns:a16="http://schemas.microsoft.com/office/drawing/2014/main" id="{ECC43DDC-42DC-462C-AA3A-BBEFB1FA5506}"/>
+                <a16:creationId xmlns:a16="http://schemas.microsoft.com/office/drawing/2014/main" id="{02FFCF78-5AE6-463E-A77C-B22A20D72FC8}"/>
               </a:ext>
             </a:extLst>
           </p:cNvPr>
@@ -4802,7 +4992,7 @@
           <p:cNvPr id="35" name="">
             <a:extLst xmlns:a="http://schemas.openxmlformats.org/drawingml/2006/main">
               <a:ext uri="{FF2B5EF4-FFF2-40B4-BE49-F238E27FC236}">
-                <a16:creationId xmlns:a16="http://schemas.microsoft.com/office/drawing/2014/main" id="{3CC377C1-EFC1-4E1F-B70C-52C393BAA2CD}"/>
+                <a16:creationId xmlns:a16="http://schemas.microsoft.com/office/drawing/2014/main" id="{E2B8DEC6-601A-4094-9B9B-8D06C6A22D11}"/>
               </a:ext>
             </a:extLst>
           </p:cNvPr>
@@ -4864,7 +5054,7 @@
           <p:cNvPr id="36" name="">
             <a:extLst xmlns:a="http://schemas.openxmlformats.org/drawingml/2006/main">
               <a:ext uri="{FF2B5EF4-FFF2-40B4-BE49-F238E27FC236}">
-                <a16:creationId xmlns:a16="http://schemas.microsoft.com/office/drawing/2014/main" id="{E5C13C64-E284-4436-A264-72410864940E}"/>
+                <a16:creationId xmlns:a16="http://schemas.microsoft.com/office/drawing/2014/main" id="{97F00469-D1D4-4C9C-8894-B15DFD9A5AFB}"/>
               </a:ext>
             </a:extLst>
           </p:cNvPr>
@@ -4926,7 +5116,7 @@
           <p:cNvPr id="37" name="">
             <a:extLst xmlns:a="http://schemas.openxmlformats.org/drawingml/2006/main">
               <a:ext uri="{FF2B5EF4-FFF2-40B4-BE49-F238E27FC236}">
-                <a16:creationId xmlns:a16="http://schemas.microsoft.com/office/drawing/2014/main" id="{F44580A3-BE71-4FB7-A535-8D7FDA1F6E12}"/>
+                <a16:creationId xmlns:a16="http://schemas.microsoft.com/office/drawing/2014/main" id="{37C4EFD5-9A77-4145-9DCB-DE84BFAB4F10}"/>
               </a:ext>
             </a:extLst>
           </p:cNvPr>
@@ -4988,7 +5178,7 @@
           <p:cNvPr id="38" name="">
             <a:extLst xmlns:a="http://schemas.openxmlformats.org/drawingml/2006/main">
               <a:ext uri="{FF2B5EF4-FFF2-40B4-BE49-F238E27FC236}">
-                <a16:creationId xmlns:a16="http://schemas.microsoft.com/office/drawing/2014/main" id="{3380665F-83CF-4673-894C-916CA7206D55}"/>
+                <a16:creationId xmlns:a16="http://schemas.microsoft.com/office/drawing/2014/main" id="{93DB1F37-7490-4C12-8F65-72A2ED6B5423}"/>
               </a:ext>
             </a:extLst>
           </p:cNvPr>
@@ -5019,7 +5209,7 @@
           <p:cNvPr id="39" name="">
             <a:extLst xmlns:a="http://schemas.openxmlformats.org/drawingml/2006/main">
               <a:ext uri="{FF2B5EF4-FFF2-40B4-BE49-F238E27FC236}">
-                <a16:creationId xmlns:a16="http://schemas.microsoft.com/office/drawing/2014/main" id="{8660FB77-C5E6-422A-9682-5F94A74BE33F}"/>
+                <a16:creationId xmlns:a16="http://schemas.microsoft.com/office/drawing/2014/main" id="{F57A7301-BA8D-44B0-A1A5-B136A87EDD3B}"/>
               </a:ext>
             </a:extLst>
           </p:cNvPr>
@@ -5081,7 +5271,7 @@
           <p:cNvPr id="40" name="">
             <a:extLst xmlns:a="http://schemas.openxmlformats.org/drawingml/2006/main">
               <a:ext uri="{FF2B5EF4-FFF2-40B4-BE49-F238E27FC236}">
-                <a16:creationId xmlns:a16="http://schemas.microsoft.com/office/drawing/2014/main" id="{A144BF49-C5AF-4CBD-AF5E-BA34E576E95F}"/>
+                <a16:creationId xmlns:a16="http://schemas.microsoft.com/office/drawing/2014/main" id="{F2A3BAA4-6CCF-4F79-A346-8ACC4F1C174B}"/>
               </a:ext>
             </a:extLst>
           </p:cNvPr>
@@ -5141,7 +5331,7 @@
     </p:spTree>
     <p:extLst>
       <p:ext uri="{BB962C8B-B14F-4D97-AF65-F5344CB8AC3E}">
-        <p14:creationId xmlns:p14="http://schemas.microsoft.com/office/powerpoint/2010/main" val="1089555614"/>
+        <p14:creationId xmlns:p14="http://schemas.microsoft.com/office/powerpoint/2010/main" val="1873926239"/>
       </p:ext>
     </p:extLst>
   </p:cSld>
@@ -5172,7 +5362,7 @@
           <p:cNvPr id="1" name="">
             <a:extLst xmlns:a="http://schemas.openxmlformats.org/drawingml/2006/main">
               <a:ext uri="{FF2B5EF4-FFF2-40B4-BE49-F238E27FC236}">
-                <a16:creationId xmlns:a16="http://schemas.microsoft.com/office/drawing/2014/main" id="{070AECDF-465D-4B48-8862-2CFA2B8F5574}"/>
+                <a16:creationId xmlns:a16="http://schemas.microsoft.com/office/drawing/2014/main" id="{9E0F6FDB-1697-4B65-B7E2-D920E70B2A24}"/>
               </a:ext>
             </a:extLst>
           </p:cNvPr>
@@ -5234,7 +5424,7 @@
           <p:cNvPr id="2" name="">
             <a:extLst xmlns:a="http://schemas.openxmlformats.org/drawingml/2006/main">
               <a:ext uri="{FF2B5EF4-FFF2-40B4-BE49-F238E27FC236}">
-                <a16:creationId xmlns:a16="http://schemas.microsoft.com/office/drawing/2014/main" id="{6BF0992B-3DBC-4ECA-B0F6-8F46CBD100DF}"/>
+                <a16:creationId xmlns:a16="http://schemas.microsoft.com/office/drawing/2014/main" id="{4B661297-4EED-43A7-B4ED-3CD3371DB95D}"/>
               </a:ext>
             </a:extLst>
           </p:cNvPr>
@@ -5296,7 +5486,7 @@
           <p:cNvPr id="3" name="">
             <a:extLst xmlns:a="http://schemas.openxmlformats.org/drawingml/2006/main">
               <a:ext uri="{FF2B5EF4-FFF2-40B4-BE49-F238E27FC236}">
-                <a16:creationId xmlns:a16="http://schemas.microsoft.com/office/drawing/2014/main" id="{26475A91-D53E-4735-A6D0-686F75F56345}"/>
+                <a16:creationId xmlns:a16="http://schemas.microsoft.com/office/drawing/2014/main" id="{A5AEBE53-6A5A-4432-A223-B4B8BDBF6DA1}"/>
               </a:ext>
             </a:extLst>
           </p:cNvPr>
@@ -5358,7 +5548,7 @@
           <p:cNvPr id="4" name="">
             <a:extLst xmlns:a="http://schemas.openxmlformats.org/drawingml/2006/main">
               <a:ext uri="{FF2B5EF4-FFF2-40B4-BE49-F238E27FC236}">
-                <a16:creationId xmlns:a16="http://schemas.microsoft.com/office/drawing/2014/main" id="{DF0C9322-5591-45BE-8C46-681461BBCF7D}"/>
+                <a16:creationId xmlns:a16="http://schemas.microsoft.com/office/drawing/2014/main" id="{4D03A86E-89C9-41FC-B480-F76133454B44}"/>
               </a:ext>
             </a:extLst>
           </p:cNvPr>
@@ -5420,7 +5610,7 @@
           <p:cNvPr id="5" name="">
             <a:extLst xmlns:a="http://schemas.openxmlformats.org/drawingml/2006/main">
               <a:ext uri="{FF2B5EF4-FFF2-40B4-BE49-F238E27FC236}">
-                <a16:creationId xmlns:a16="http://schemas.microsoft.com/office/drawing/2014/main" id="{04067CDC-A73F-41D5-ADFA-F47F735F00F2}"/>
+                <a16:creationId xmlns:a16="http://schemas.microsoft.com/office/drawing/2014/main" id="{75377235-7F6C-47EB-8F62-BA354E3E2819}"/>
               </a:ext>
             </a:extLst>
           </p:cNvPr>
@@ -5484,7 +5674,7 @@
           <p:cNvPr id="6" name="">
             <a:extLst xmlns:a="http://schemas.openxmlformats.org/drawingml/2006/main">
               <a:ext uri="{FF2B5EF4-FFF2-40B4-BE49-F238E27FC236}">
-                <a16:creationId xmlns:a16="http://schemas.microsoft.com/office/drawing/2014/main" id="{DC74BF02-58BE-4FEF-A9AE-FC2C19224B26}"/>
+                <a16:creationId xmlns:a16="http://schemas.microsoft.com/office/drawing/2014/main" id="{0301FCD8-DF94-4D61-B13D-D1EA7F6491D0}"/>
               </a:ext>
             </a:extLst>
           </p:cNvPr>
@@ -5574,7 +5764,7 @@
           <p:cNvPr id="8" name="">
             <a:extLst xmlns:a="http://schemas.openxmlformats.org/drawingml/2006/main">
               <a:ext uri="{FF2B5EF4-FFF2-40B4-BE49-F238E27FC236}">
-                <a16:creationId xmlns:a16="http://schemas.microsoft.com/office/drawing/2014/main" id="{47E753B4-34ED-40AD-88B1-A25BFA0BE972}"/>
+                <a16:creationId xmlns:a16="http://schemas.microsoft.com/office/drawing/2014/main" id="{ED8833CD-2ECC-4A2C-A367-95724DE2CA43}"/>
               </a:ext>
             </a:extLst>
           </p:cNvPr>
@@ -5638,7 +5828,7 @@
           <p:cNvPr id="9" name="">
             <a:extLst xmlns:a="http://schemas.openxmlformats.org/drawingml/2006/main">
               <a:ext uri="{FF2B5EF4-FFF2-40B4-BE49-F238E27FC236}">
-                <a16:creationId xmlns:a16="http://schemas.microsoft.com/office/drawing/2014/main" id="{3C0F236C-4684-4DC5-B924-F4EE32A0C058}"/>
+                <a16:creationId xmlns:a16="http://schemas.microsoft.com/office/drawing/2014/main" id="{70595384-BEC9-4F93-B0BB-CAF18DFCF43D}"/>
               </a:ext>
             </a:extLst>
           </p:cNvPr>
@@ -5728,7 +5918,7 @@
           <p:cNvPr id="11" name="">
             <a:extLst xmlns:a="http://schemas.openxmlformats.org/drawingml/2006/main">
               <a:ext uri="{FF2B5EF4-FFF2-40B4-BE49-F238E27FC236}">
-                <a16:creationId xmlns:a16="http://schemas.microsoft.com/office/drawing/2014/main" id="{D08E63A9-D17C-4E57-B342-047A129B5CC2}"/>
+                <a16:creationId xmlns:a16="http://schemas.microsoft.com/office/drawing/2014/main" id="{2A8F1C4D-9429-4B98-A5EC-9619DE574CC5}"/>
               </a:ext>
             </a:extLst>
           </p:cNvPr>
@@ -5792,7 +5982,7 @@
           <p:cNvPr id="12" name="">
             <a:extLst xmlns:a="http://schemas.openxmlformats.org/drawingml/2006/main">
               <a:ext uri="{FF2B5EF4-FFF2-40B4-BE49-F238E27FC236}">
-                <a16:creationId xmlns:a16="http://schemas.microsoft.com/office/drawing/2014/main" id="{7D187A77-28A4-4EC6-8FCB-375A47476309}"/>
+                <a16:creationId xmlns:a16="http://schemas.microsoft.com/office/drawing/2014/main" id="{17CEBB33-8361-4EB9-A457-3730A0154919}"/>
               </a:ext>
             </a:extLst>
           </p:cNvPr>
@@ -5882,7 +6072,7 @@
           <p:cNvPr id="14" name="">
             <a:extLst xmlns:a="http://schemas.openxmlformats.org/drawingml/2006/main">
               <a:ext uri="{FF2B5EF4-FFF2-40B4-BE49-F238E27FC236}">
-                <a16:creationId xmlns:a16="http://schemas.microsoft.com/office/drawing/2014/main" id="{3726C523-8C6D-41AD-943E-1E559B2E1B3E}"/>
+                <a16:creationId xmlns:a16="http://schemas.microsoft.com/office/drawing/2014/main" id="{939103AE-AB6F-4967-80F4-22EE396FCEC9}"/>
               </a:ext>
             </a:extLst>
           </p:cNvPr>
@@ -5946,7 +6136,7 @@
           <p:cNvPr id="15" name="">
             <a:extLst xmlns:a="http://schemas.openxmlformats.org/drawingml/2006/main">
               <a:ext uri="{FF2B5EF4-FFF2-40B4-BE49-F238E27FC236}">
-                <a16:creationId xmlns:a16="http://schemas.microsoft.com/office/drawing/2014/main" id="{48C49B3E-DAF7-41DA-B796-D1C35ADD1C76}"/>
+                <a16:creationId xmlns:a16="http://schemas.microsoft.com/office/drawing/2014/main" id="{CB4F82B8-DFF0-4AA9-8399-D2602DA33AE3}"/>
               </a:ext>
             </a:extLst>
           </p:cNvPr>
@@ -6036,7 +6226,7 @@
           <p:cNvPr id="17" name="">
             <a:extLst xmlns:a="http://schemas.openxmlformats.org/drawingml/2006/main">
               <a:ext uri="{FF2B5EF4-FFF2-40B4-BE49-F238E27FC236}">
-                <a16:creationId xmlns:a16="http://schemas.microsoft.com/office/drawing/2014/main" id="{E87AEF32-9AC4-4DC6-97B1-8C2E90AABB7C}"/>
+                <a16:creationId xmlns:a16="http://schemas.microsoft.com/office/drawing/2014/main" id="{FFB4FB0A-062D-49D7-AE80-B09F23170715}"/>
               </a:ext>
             </a:extLst>
           </p:cNvPr>
@@ -6100,7 +6290,7 @@
           <p:cNvPr id="18" name="">
             <a:extLst xmlns:a="http://schemas.openxmlformats.org/drawingml/2006/main">
               <a:ext uri="{FF2B5EF4-FFF2-40B4-BE49-F238E27FC236}">
-                <a16:creationId xmlns:a16="http://schemas.microsoft.com/office/drawing/2014/main" id="{FC20C31D-511D-445B-943B-4BB607D1E2CD}"/>
+                <a16:creationId xmlns:a16="http://schemas.microsoft.com/office/drawing/2014/main" id="{FE00575C-5D74-4064-B5C8-4C9C2CDC6259}"/>
               </a:ext>
             </a:extLst>
           </p:cNvPr>
@@ -6190,7 +6380,7 @@
           <p:cNvPr id="20" name="">
             <a:extLst xmlns:a="http://schemas.openxmlformats.org/drawingml/2006/main">
               <a:ext uri="{FF2B5EF4-FFF2-40B4-BE49-F238E27FC236}">
-                <a16:creationId xmlns:a16="http://schemas.microsoft.com/office/drawing/2014/main" id="{57BC84CF-1788-42C7-B2BF-2BDB543CA387}"/>
+                <a16:creationId xmlns:a16="http://schemas.microsoft.com/office/drawing/2014/main" id="{5D8AFC55-5AB3-45BB-B7F4-5B6230C51B30}"/>
               </a:ext>
             </a:extLst>
           </p:cNvPr>
@@ -6254,7 +6444,7 @@
           <p:cNvPr id="21" name="">
             <a:extLst xmlns:a="http://schemas.openxmlformats.org/drawingml/2006/main">
               <a:ext uri="{FF2B5EF4-FFF2-40B4-BE49-F238E27FC236}">
-                <a16:creationId xmlns:a16="http://schemas.microsoft.com/office/drawing/2014/main" id="{91692B09-8874-4569-9C40-6EC96E722134}"/>
+                <a16:creationId xmlns:a16="http://schemas.microsoft.com/office/drawing/2014/main" id="{4C0AA6D7-FA93-48BE-9BE6-EB8B77F9B45A}"/>
               </a:ext>
             </a:extLst>
           </p:cNvPr>
@@ -6344,7 +6534,7 @@
           <p:cNvPr id="23" name="">
             <a:extLst xmlns:a="http://schemas.openxmlformats.org/drawingml/2006/main">
               <a:ext uri="{FF2B5EF4-FFF2-40B4-BE49-F238E27FC236}">
-                <a16:creationId xmlns:a16="http://schemas.microsoft.com/office/drawing/2014/main" id="{F79EA57B-33F8-46E0-A2FA-B67BB43C47E9}"/>
+                <a16:creationId xmlns:a16="http://schemas.microsoft.com/office/drawing/2014/main" id="{312BC214-217F-4DF2-953C-3D416FF8EF3D}"/>
               </a:ext>
             </a:extLst>
           </p:cNvPr>
@@ -6408,7 +6598,7 @@
           <p:cNvPr id="24" name="">
             <a:extLst xmlns:a="http://schemas.openxmlformats.org/drawingml/2006/main">
               <a:ext uri="{FF2B5EF4-FFF2-40B4-BE49-F238E27FC236}">
-                <a16:creationId xmlns:a16="http://schemas.microsoft.com/office/drawing/2014/main" id="{A339FC23-85A8-405E-8BBE-1B1C4CE49BEA}"/>
+                <a16:creationId xmlns:a16="http://schemas.microsoft.com/office/drawing/2014/main" id="{440FB90D-B92C-46EC-BFAE-40F6AB616F5C}"/>
               </a:ext>
             </a:extLst>
           </p:cNvPr>
@@ -6498,7 +6688,7 @@
           <p:cNvPr id="26" name="">
             <a:extLst xmlns:a="http://schemas.openxmlformats.org/drawingml/2006/main">
               <a:ext uri="{FF2B5EF4-FFF2-40B4-BE49-F238E27FC236}">
-                <a16:creationId xmlns:a16="http://schemas.microsoft.com/office/drawing/2014/main" id="{FD1A31AD-C1AE-4A2B-A9A1-D36F84FE3B28}"/>
+                <a16:creationId xmlns:a16="http://schemas.microsoft.com/office/drawing/2014/main" id="{2A38D68E-0F07-42BA-A3DB-CF284F43EBA1}"/>
               </a:ext>
             </a:extLst>
           </p:cNvPr>
@@ -6562,7 +6752,7 @@
           <p:cNvPr id="27" name="">
             <a:extLst xmlns:a="http://schemas.openxmlformats.org/drawingml/2006/main">
               <a:ext uri="{FF2B5EF4-FFF2-40B4-BE49-F238E27FC236}">
-                <a16:creationId xmlns:a16="http://schemas.microsoft.com/office/drawing/2014/main" id="{15DA89F7-92F6-4863-9D19-6FBE74B5AABD}"/>
+                <a16:creationId xmlns:a16="http://schemas.microsoft.com/office/drawing/2014/main" id="{19519764-B142-474B-BCE3-0CCE1F95B122}"/>
               </a:ext>
             </a:extLst>
           </p:cNvPr>
@@ -6652,7 +6842,7 @@
           <p:cNvPr id="29" name="">
             <a:extLst xmlns:a="http://schemas.openxmlformats.org/drawingml/2006/main">
               <a:ext uri="{FF2B5EF4-FFF2-40B4-BE49-F238E27FC236}">
-                <a16:creationId xmlns:a16="http://schemas.microsoft.com/office/drawing/2014/main" id="{8B8103CB-2C5A-418C-B7C0-04B4C71DBAC4}"/>
+                <a16:creationId xmlns:a16="http://schemas.microsoft.com/office/drawing/2014/main" id="{4C7EA511-8386-4A73-A76A-65AA6B62EFB8}"/>
               </a:ext>
             </a:extLst>
           </p:cNvPr>
@@ -6683,7 +6873,7 @@
           <p:cNvPr id="30" name="">
             <a:extLst xmlns:a="http://schemas.openxmlformats.org/drawingml/2006/main">
               <a:ext uri="{FF2B5EF4-FFF2-40B4-BE49-F238E27FC236}">
-                <a16:creationId xmlns:a16="http://schemas.microsoft.com/office/drawing/2014/main" id="{BBDB9A04-E3B4-4E7F-845D-73C5083F6D6D}"/>
+                <a16:creationId xmlns:a16="http://schemas.microsoft.com/office/drawing/2014/main" id="{E4C83CAB-EE78-46E7-BEEA-20317B082C86}"/>
               </a:ext>
             </a:extLst>
           </p:cNvPr>
@@ -6745,7 +6935,7 @@
           <p:cNvPr id="31" name="">
             <a:extLst xmlns:a="http://schemas.openxmlformats.org/drawingml/2006/main">
               <a:ext uri="{FF2B5EF4-FFF2-40B4-BE49-F238E27FC236}">
-                <a16:creationId xmlns:a16="http://schemas.microsoft.com/office/drawing/2014/main" id="{DAFE1A80-39FF-4596-9CD2-20D4B72E2145}"/>
+                <a16:creationId xmlns:a16="http://schemas.microsoft.com/office/drawing/2014/main" id="{1139F854-1132-4244-ACD6-2EE38B85CA17}"/>
               </a:ext>
             </a:extLst>
           </p:cNvPr>
@@ -6805,7 +6995,7 @@
     </p:spTree>
     <p:extLst>
       <p:ext uri="{BB962C8B-B14F-4D97-AF65-F5344CB8AC3E}">
-        <p14:creationId xmlns:p14="http://schemas.microsoft.com/office/powerpoint/2010/main" val="87334988"/>
+        <p14:creationId xmlns:p14="http://schemas.microsoft.com/office/powerpoint/2010/main" val="1007335749"/>
       </p:ext>
     </p:extLst>
   </p:cSld>
@@ -6836,7 +7026,7 @@
           <p:cNvPr id="1" name="">
             <a:extLst xmlns:a="http://schemas.openxmlformats.org/drawingml/2006/main">
               <a:ext uri="{FF2B5EF4-FFF2-40B4-BE49-F238E27FC236}">
-                <a16:creationId xmlns:a16="http://schemas.microsoft.com/office/drawing/2014/main" id="{CFD9C135-ACEA-4D78-B702-EAA41932B399}"/>
+                <a16:creationId xmlns:a16="http://schemas.microsoft.com/office/drawing/2014/main" id="{2EB1F713-1CD6-4CB8-A979-0A938F1C48F1}"/>
               </a:ext>
             </a:extLst>
           </p:cNvPr>
@@ -6898,7 +7088,7 @@
           <p:cNvPr id="2" name="">
             <a:extLst xmlns:a="http://schemas.openxmlformats.org/drawingml/2006/main">
               <a:ext uri="{FF2B5EF4-FFF2-40B4-BE49-F238E27FC236}">
-                <a16:creationId xmlns:a16="http://schemas.microsoft.com/office/drawing/2014/main" id="{6A396477-A53A-4D53-BE65-E132528D2692}"/>
+                <a16:creationId xmlns:a16="http://schemas.microsoft.com/office/drawing/2014/main" id="{C3205469-748A-41DB-8D25-7C92EA78D817}"/>
               </a:ext>
             </a:extLst>
           </p:cNvPr>
@@ -6964,7 +7154,7 @@
           <p:nvPr/>
         </p:nvPicPr>
         <p:blipFill>
-          <a:blip xmlns:r="http://schemas.openxmlformats.org/officeDocument/2006/relationships" xmlns:a="http://schemas.openxmlformats.org/drawingml/2006/main" r:embed="R1706cd8507524f15"/>
+          <a:blip xmlns:r="http://schemas.openxmlformats.org/officeDocument/2006/relationships" xmlns:a="http://schemas.openxmlformats.org/drawingml/2006/main" r:embed="R0027d5379f3a43af"/>
           <a:srcRect xmlns:a="http://schemas.openxmlformats.org/drawingml/2006/main" l="0" t="17360" r="0" b="17360"/>
           <a:stretch xmlns:a="http://schemas.openxmlformats.org/drawingml/2006/main">
             <a:fillRect l="0" t="0" r="0" b="0"/>
@@ -6991,7 +7181,7 @@
           <p:nvPr/>
         </p:nvPicPr>
         <p:blipFill>
-          <a:blip xmlns:r="http://schemas.openxmlformats.org/officeDocument/2006/relationships" xmlns:a="http://schemas.openxmlformats.org/drawingml/2006/main" r:embed="R8fa20748cd2b4182"/>
+          <a:blip xmlns:r="http://schemas.openxmlformats.org/officeDocument/2006/relationships" xmlns:a="http://schemas.openxmlformats.org/drawingml/2006/main" r:embed="Rc67bd51c41c6433b"/>
           <a:srcRect xmlns:a="http://schemas.openxmlformats.org/drawingml/2006/main" l="0" t="17360" r="0" b="17360"/>
           <a:stretch xmlns:a="http://schemas.openxmlformats.org/drawingml/2006/main">
             <a:fillRect l="0" t="0" r="0" b="0"/>
@@ -7014,7 +7204,7 @@
           <p:cNvPr id="5" name="">
             <a:extLst xmlns:a="http://schemas.openxmlformats.org/drawingml/2006/main">
               <a:ext uri="{FF2B5EF4-FFF2-40B4-BE49-F238E27FC236}">
-                <a16:creationId xmlns:a16="http://schemas.microsoft.com/office/drawing/2014/main" id="{45CC0EFC-77F6-4EA8-BA34-3BD4F28306CC}"/>
+                <a16:creationId xmlns:a16="http://schemas.microsoft.com/office/drawing/2014/main" id="{83AA686D-A858-40A9-B42B-CC0D036DAFEF}"/>
               </a:ext>
             </a:extLst>
           </p:cNvPr>
@@ -7055,7 +7245,7 @@
           <p:cNvPr id="6" name="">
             <a:extLst xmlns:a="http://schemas.openxmlformats.org/drawingml/2006/main">
               <a:ext uri="{FF2B5EF4-FFF2-40B4-BE49-F238E27FC236}">
-                <a16:creationId xmlns:a16="http://schemas.microsoft.com/office/drawing/2014/main" id="{DA1B9FDD-2779-4835-AE9A-A58646CB757A}"/>
+                <a16:creationId xmlns:a16="http://schemas.microsoft.com/office/drawing/2014/main" id="{0C7ECD8C-8DD7-46D0-8860-896585111DB3}"/>
               </a:ext>
             </a:extLst>
           </p:cNvPr>
@@ -7086,7 +7276,7 @@
           <p:cNvPr id="7" name="">
             <a:extLst xmlns:a="http://schemas.openxmlformats.org/drawingml/2006/main">
               <a:ext uri="{FF2B5EF4-FFF2-40B4-BE49-F238E27FC236}">
-                <a16:creationId xmlns:a16="http://schemas.microsoft.com/office/drawing/2014/main" id="{22F339C6-5EE0-418F-82B3-3FA721E54FB2}"/>
+                <a16:creationId xmlns:a16="http://schemas.microsoft.com/office/drawing/2014/main" id="{06D3E6DD-D738-4461-BE5D-42428A527711}"/>
               </a:ext>
             </a:extLst>
           </p:cNvPr>
@@ -7119,7 +7309,7 @@
           <p:cNvPr id="8" name="">
             <a:extLst xmlns:a="http://schemas.openxmlformats.org/drawingml/2006/main">
               <a:ext uri="{FF2B5EF4-FFF2-40B4-BE49-F238E27FC236}">
-                <a16:creationId xmlns:a16="http://schemas.microsoft.com/office/drawing/2014/main" id="{D99E1B6D-3112-4BAE-B8D7-14E0A3D9AFBD}"/>
+                <a16:creationId xmlns:a16="http://schemas.microsoft.com/office/drawing/2014/main" id="{9A9CA13E-B070-40AA-8122-0011E0EEDC96}"/>
               </a:ext>
             </a:extLst>
           </p:cNvPr>
@@ -7152,7 +7342,7 @@
           <p:cNvPr id="9" name="">
             <a:extLst xmlns:a="http://schemas.openxmlformats.org/drawingml/2006/main">
               <a:ext uri="{FF2B5EF4-FFF2-40B4-BE49-F238E27FC236}">
-                <a16:creationId xmlns:a16="http://schemas.microsoft.com/office/drawing/2014/main" id="{37C801A8-789B-45E3-9AAE-86F36AB5C06E}"/>
+                <a16:creationId xmlns:a16="http://schemas.microsoft.com/office/drawing/2014/main" id="{2F03886F-0CCA-4CEE-A0A4-73B3F8C7B321}"/>
               </a:ext>
             </a:extLst>
           </p:cNvPr>
@@ -7185,7 +7375,7 @@
           <p:cNvPr id="10" name="">
             <a:extLst xmlns:a="http://schemas.openxmlformats.org/drawingml/2006/main">
               <a:ext uri="{FF2B5EF4-FFF2-40B4-BE49-F238E27FC236}">
-                <a16:creationId xmlns:a16="http://schemas.microsoft.com/office/drawing/2014/main" id="{1302EA85-3D78-425B-9F6A-7B0DD581C7F2}"/>
+                <a16:creationId xmlns:a16="http://schemas.microsoft.com/office/drawing/2014/main" id="{8F700BA6-420B-4089-9835-1F0B2BC5F347}"/>
               </a:ext>
             </a:extLst>
           </p:cNvPr>
@@ -7226,7 +7416,7 @@
           <p:cNvPr id="11" name="">
             <a:extLst xmlns:a="http://schemas.openxmlformats.org/drawingml/2006/main">
               <a:ext uri="{FF2B5EF4-FFF2-40B4-BE49-F238E27FC236}">
-                <a16:creationId xmlns:a16="http://schemas.microsoft.com/office/drawing/2014/main" id="{0A23F1E0-693A-4820-9114-3C62A7D869AE}"/>
+                <a16:creationId xmlns:a16="http://schemas.microsoft.com/office/drawing/2014/main" id="{3807BE94-8618-4C21-9D60-5FEDC4FEF40E}"/>
               </a:ext>
             </a:extLst>
           </p:cNvPr>
@@ -7288,7 +7478,7 @@
           <p:cNvPr id="12" name="">
             <a:extLst xmlns:a="http://schemas.openxmlformats.org/drawingml/2006/main">
               <a:ext uri="{FF2B5EF4-FFF2-40B4-BE49-F238E27FC236}">
-                <a16:creationId xmlns:a16="http://schemas.microsoft.com/office/drawing/2014/main" id="{3805FC07-94D2-4291-AAF7-1FF56F76D1D4}"/>
+                <a16:creationId xmlns:a16="http://schemas.microsoft.com/office/drawing/2014/main" id="{E0A53639-EB68-4659-98B1-85772A258EF6}"/>
               </a:ext>
             </a:extLst>
           </p:cNvPr>
@@ -7377,7 +7567,7 @@
           <p:cNvPr id="13" name="">
             <a:extLst xmlns:a="http://schemas.openxmlformats.org/drawingml/2006/main">
               <a:ext uri="{FF2B5EF4-FFF2-40B4-BE49-F238E27FC236}">
-                <a16:creationId xmlns:a16="http://schemas.microsoft.com/office/drawing/2014/main" id="{94C9EB6B-A4D7-4EEC-92DB-4104B7F9C4CB}"/>
+                <a16:creationId xmlns:a16="http://schemas.microsoft.com/office/drawing/2014/main" id="{EC4532D2-EDC3-4B30-AA39-D7962CE53F8E}"/>
               </a:ext>
             </a:extLst>
           </p:cNvPr>
@@ -7418,7 +7608,7 @@
           <p:cNvPr id="14" name="">
             <a:extLst xmlns:a="http://schemas.openxmlformats.org/drawingml/2006/main">
               <a:ext uri="{FF2B5EF4-FFF2-40B4-BE49-F238E27FC236}">
-                <a16:creationId xmlns:a16="http://schemas.microsoft.com/office/drawing/2014/main" id="{4A6B36AF-5A43-4013-BD14-6F07124BC9B4}"/>
+                <a16:creationId xmlns:a16="http://schemas.microsoft.com/office/drawing/2014/main" id="{8F76A38D-93FE-4D86-9E35-794B4D64413B}"/>
               </a:ext>
             </a:extLst>
           </p:cNvPr>
@@ -7480,7 +7670,7 @@
           <p:cNvPr id="15" name="">
             <a:extLst xmlns:a="http://schemas.openxmlformats.org/drawingml/2006/main">
               <a:ext uri="{FF2B5EF4-FFF2-40B4-BE49-F238E27FC236}">
-                <a16:creationId xmlns:a16="http://schemas.microsoft.com/office/drawing/2014/main" id="{C7E07DD3-DD51-4850-8200-60B02FA2E2D1}"/>
+                <a16:creationId xmlns:a16="http://schemas.microsoft.com/office/drawing/2014/main" id="{5797437E-617A-4BEA-A81F-C52C1A7F0E3F}"/>
               </a:ext>
             </a:extLst>
           </p:cNvPr>
@@ -7569,7 +7759,7 @@
           <p:cNvPr id="16" name="">
             <a:extLst xmlns:a="http://schemas.openxmlformats.org/drawingml/2006/main">
               <a:ext uri="{FF2B5EF4-FFF2-40B4-BE49-F238E27FC236}">
-                <a16:creationId xmlns:a16="http://schemas.microsoft.com/office/drawing/2014/main" id="{420E9E80-B061-417C-AC87-9C781CB6E147}"/>
+                <a16:creationId xmlns:a16="http://schemas.microsoft.com/office/drawing/2014/main" id="{21483251-0887-42E0-9451-BABAC4AC7A85}"/>
               </a:ext>
             </a:extLst>
           </p:cNvPr>
@@ -7610,7 +7800,7 @@
           <p:cNvPr id="17" name="">
             <a:extLst xmlns:a="http://schemas.openxmlformats.org/drawingml/2006/main">
               <a:ext uri="{FF2B5EF4-FFF2-40B4-BE49-F238E27FC236}">
-                <a16:creationId xmlns:a16="http://schemas.microsoft.com/office/drawing/2014/main" id="{B7660C1C-443F-4493-8D79-5B466105B9AD}"/>
+                <a16:creationId xmlns:a16="http://schemas.microsoft.com/office/drawing/2014/main" id="{46689209-B321-4199-B9C9-883F3796D4CD}"/>
               </a:ext>
             </a:extLst>
           </p:cNvPr>
@@ -7672,7 +7862,7 @@
           <p:cNvPr id="18" name="">
             <a:extLst xmlns:a="http://schemas.openxmlformats.org/drawingml/2006/main">
               <a:ext uri="{FF2B5EF4-FFF2-40B4-BE49-F238E27FC236}">
-                <a16:creationId xmlns:a16="http://schemas.microsoft.com/office/drawing/2014/main" id="{E00E4C79-0D0E-4679-B81B-EF9A3CA3AF66}"/>
+                <a16:creationId xmlns:a16="http://schemas.microsoft.com/office/drawing/2014/main" id="{0F119D0E-5C09-4104-88E1-1FB613665123}"/>
               </a:ext>
             </a:extLst>
           </p:cNvPr>
@@ -7761,7 +7951,7 @@
           <p:cNvPr id="19" name="">
             <a:extLst xmlns:a="http://schemas.openxmlformats.org/drawingml/2006/main">
               <a:ext uri="{FF2B5EF4-FFF2-40B4-BE49-F238E27FC236}">
-                <a16:creationId xmlns:a16="http://schemas.microsoft.com/office/drawing/2014/main" id="{A8614FF6-0050-4E51-A13B-6D5E66D1862C}"/>
+                <a16:creationId xmlns:a16="http://schemas.microsoft.com/office/drawing/2014/main" id="{60D4C72F-942A-48CC-AFAE-CAEA2F49FD89}"/>
               </a:ext>
             </a:extLst>
           </p:cNvPr>
@@ -7802,7 +7992,7 @@
           <p:cNvPr id="20" name="">
             <a:extLst xmlns:a="http://schemas.openxmlformats.org/drawingml/2006/main">
               <a:ext uri="{FF2B5EF4-FFF2-40B4-BE49-F238E27FC236}">
-                <a16:creationId xmlns:a16="http://schemas.microsoft.com/office/drawing/2014/main" id="{8912A7B4-C520-4025-8672-2D0D239F4478}"/>
+                <a16:creationId xmlns:a16="http://schemas.microsoft.com/office/drawing/2014/main" id="{F75256E7-29DD-4D05-8D75-261DF4CD2F8B}"/>
               </a:ext>
             </a:extLst>
           </p:cNvPr>
@@ -7864,7 +8054,7 @@
           <p:cNvPr id="21" name="">
             <a:extLst xmlns:a="http://schemas.openxmlformats.org/drawingml/2006/main">
               <a:ext uri="{FF2B5EF4-FFF2-40B4-BE49-F238E27FC236}">
-                <a16:creationId xmlns:a16="http://schemas.microsoft.com/office/drawing/2014/main" id="{C2ED3B77-CF42-4DA2-8F40-691FD6FA9E92}"/>
+                <a16:creationId xmlns:a16="http://schemas.microsoft.com/office/drawing/2014/main" id="{8DEAC70C-5FC9-4ABC-84C5-FFA5F2AA8C1A}"/>
               </a:ext>
             </a:extLst>
           </p:cNvPr>
@@ -7953,7 +8143,7 @@
           <p:cNvPr id="22" name="">
             <a:extLst xmlns:a="http://schemas.openxmlformats.org/drawingml/2006/main">
               <a:ext uri="{FF2B5EF4-FFF2-40B4-BE49-F238E27FC236}">
-                <a16:creationId xmlns:a16="http://schemas.microsoft.com/office/drawing/2014/main" id="{D811E309-F62F-42A9-A128-D44BE8B2F511}"/>
+                <a16:creationId xmlns:a16="http://schemas.microsoft.com/office/drawing/2014/main" id="{3310ABD3-6C85-4604-9602-802B02E1FD6F}"/>
               </a:ext>
             </a:extLst>
           </p:cNvPr>
@@ -7994,7 +8184,7 @@
           <p:cNvPr id="23" name="">
             <a:extLst xmlns:a="http://schemas.openxmlformats.org/drawingml/2006/main">
               <a:ext uri="{FF2B5EF4-FFF2-40B4-BE49-F238E27FC236}">
-                <a16:creationId xmlns:a16="http://schemas.microsoft.com/office/drawing/2014/main" id="{669BFBD4-4E3E-467C-8BAB-FFC22BDE3F6B}"/>
+                <a16:creationId xmlns:a16="http://schemas.microsoft.com/office/drawing/2014/main" id="{76E79EE3-EE50-46B7-A1FA-725504CD9C69}"/>
               </a:ext>
             </a:extLst>
           </p:cNvPr>
@@ -8056,7 +8246,7 @@
           <p:cNvPr id="24" name="">
             <a:extLst xmlns:a="http://schemas.openxmlformats.org/drawingml/2006/main">
               <a:ext uri="{FF2B5EF4-FFF2-40B4-BE49-F238E27FC236}">
-                <a16:creationId xmlns:a16="http://schemas.microsoft.com/office/drawing/2014/main" id="{2FB31C0B-E57E-4101-814A-1A821C27B575}"/>
+                <a16:creationId xmlns:a16="http://schemas.microsoft.com/office/drawing/2014/main" id="{228D96F7-8445-4C9C-AE12-EA494644F648}"/>
               </a:ext>
             </a:extLst>
           </p:cNvPr>
@@ -8118,7 +8308,7 @@
           <p:cNvPr id="25" name="">
             <a:extLst xmlns:a="http://schemas.openxmlformats.org/drawingml/2006/main">
               <a:ext uri="{FF2B5EF4-FFF2-40B4-BE49-F238E27FC236}">
-                <a16:creationId xmlns:a16="http://schemas.microsoft.com/office/drawing/2014/main" id="{77E612A6-A3FE-4493-8C00-82E2BEECA6B1}"/>
+                <a16:creationId xmlns:a16="http://schemas.microsoft.com/office/drawing/2014/main" id="{CF4AE61E-2CDB-423E-A2AE-F1085B4EAA5D}"/>
               </a:ext>
             </a:extLst>
           </p:cNvPr>
@@ -8159,7 +8349,7 @@
           <p:cNvPr id="26" name="">
             <a:extLst xmlns:a="http://schemas.openxmlformats.org/drawingml/2006/main">
               <a:ext uri="{FF2B5EF4-FFF2-40B4-BE49-F238E27FC236}">
-                <a16:creationId xmlns:a16="http://schemas.microsoft.com/office/drawing/2014/main" id="{30A9CD59-C246-4900-8F53-155E1F2BF14F}"/>
+                <a16:creationId xmlns:a16="http://schemas.microsoft.com/office/drawing/2014/main" id="{F4F04328-07A2-4F59-B017-89562F1D5748}"/>
               </a:ext>
             </a:extLst>
           </p:cNvPr>
@@ -8221,7 +8411,7 @@
           <p:cNvPr id="27" name="">
             <a:extLst xmlns:a="http://schemas.openxmlformats.org/drawingml/2006/main">
               <a:ext uri="{FF2B5EF4-FFF2-40B4-BE49-F238E27FC236}">
-                <a16:creationId xmlns:a16="http://schemas.microsoft.com/office/drawing/2014/main" id="{C1A943AA-6C5E-4AF6-9156-1806A2417BE5}"/>
+                <a16:creationId xmlns:a16="http://schemas.microsoft.com/office/drawing/2014/main" id="{A77DAB0F-E9E7-4519-B577-0852E1D0298A}"/>
               </a:ext>
             </a:extLst>
           </p:cNvPr>
@@ -8283,7 +8473,7 @@
           <p:cNvPr id="28" name="">
             <a:extLst xmlns:a="http://schemas.openxmlformats.org/drawingml/2006/main">
               <a:ext uri="{FF2B5EF4-FFF2-40B4-BE49-F238E27FC236}">
-                <a16:creationId xmlns:a16="http://schemas.microsoft.com/office/drawing/2014/main" id="{A1192C3A-A869-43F5-A867-D6B0E72534C5}"/>
+                <a16:creationId xmlns:a16="http://schemas.microsoft.com/office/drawing/2014/main" id="{29F89570-BB4C-4DB2-A4B6-0E56BB105606}"/>
               </a:ext>
             </a:extLst>
           </p:cNvPr>
@@ -8314,7 +8504,7 @@
           <p:cNvPr id="29" name="">
             <a:extLst xmlns:a="http://schemas.openxmlformats.org/drawingml/2006/main">
               <a:ext uri="{FF2B5EF4-FFF2-40B4-BE49-F238E27FC236}">
-                <a16:creationId xmlns:a16="http://schemas.microsoft.com/office/drawing/2014/main" id="{2D0AEF4F-433E-4DC1-AAB4-D4BDEF245882}"/>
+                <a16:creationId xmlns:a16="http://schemas.microsoft.com/office/drawing/2014/main" id="{29B7CEB9-83F5-4CC2-8DC6-52B0CEBACB2D}"/>
               </a:ext>
             </a:extLst>
           </p:cNvPr>
@@ -8376,7 +8566,7 @@
           <p:cNvPr id="30" name="">
             <a:extLst xmlns:a="http://schemas.openxmlformats.org/drawingml/2006/main">
               <a:ext uri="{FF2B5EF4-FFF2-40B4-BE49-F238E27FC236}">
-                <a16:creationId xmlns:a16="http://schemas.microsoft.com/office/drawing/2014/main" id="{1F09A0B3-D5E7-4322-B669-190773D5D784}"/>
+                <a16:creationId xmlns:a16="http://schemas.microsoft.com/office/drawing/2014/main" id="{EAE6F754-E9BA-4E80-9A9D-0DC3195A76FC}"/>
               </a:ext>
             </a:extLst>
           </p:cNvPr>
@@ -8436,7 +8626,7 @@
     </p:spTree>
     <p:extLst>
       <p:ext uri="{BB962C8B-B14F-4D97-AF65-F5344CB8AC3E}">
-        <p14:creationId xmlns:p14="http://schemas.microsoft.com/office/powerpoint/2010/main" val="1341162003"/>
+        <p14:creationId xmlns:p14="http://schemas.microsoft.com/office/powerpoint/2010/main" val="228714172"/>
       </p:ext>
     </p:extLst>
   </p:cSld>
@@ -8467,7 +8657,7 @@
           <p:cNvPr id="1" name="">
             <a:extLst xmlns:a="http://schemas.openxmlformats.org/drawingml/2006/main">
               <a:ext uri="{FF2B5EF4-FFF2-40B4-BE49-F238E27FC236}">
-                <a16:creationId xmlns:a16="http://schemas.microsoft.com/office/drawing/2014/main" id="{E2FAB3AC-B5B5-4838-8663-8DB7A9AC7285}"/>
+                <a16:creationId xmlns:a16="http://schemas.microsoft.com/office/drawing/2014/main" id="{90CD42DF-C00B-4D98-8129-47A9CAE4FDC6}"/>
               </a:ext>
             </a:extLst>
           </p:cNvPr>
@@ -8529,7 +8719,7 @@
           <p:cNvPr id="2" name="">
             <a:extLst xmlns:a="http://schemas.openxmlformats.org/drawingml/2006/main">
               <a:ext uri="{FF2B5EF4-FFF2-40B4-BE49-F238E27FC236}">
-                <a16:creationId xmlns:a16="http://schemas.microsoft.com/office/drawing/2014/main" id="{B6CBA241-2C49-4A0B-A004-3B6C9BDB3BC4}"/>
+                <a16:creationId xmlns:a16="http://schemas.microsoft.com/office/drawing/2014/main" id="{59935B0C-88E9-4018-8A19-50AE1C3FFE4A}"/>
               </a:ext>
             </a:extLst>
           </p:cNvPr>
@@ -8591,7 +8781,7 @@
           <p:cNvPr id="3" name="">
             <a:extLst xmlns:a="http://schemas.openxmlformats.org/drawingml/2006/main">
               <a:ext uri="{FF2B5EF4-FFF2-40B4-BE49-F238E27FC236}">
-                <a16:creationId xmlns:a16="http://schemas.microsoft.com/office/drawing/2014/main" id="{D23FFF58-FB9F-4566-945C-335F42AB63FC}"/>
+                <a16:creationId xmlns:a16="http://schemas.microsoft.com/office/drawing/2014/main" id="{27598A4E-37DE-4F72-9E0A-7AB126B35B0C}"/>
               </a:ext>
             </a:extLst>
           </p:cNvPr>
@@ -8632,7 +8822,7 @@
           <p:cNvPr id="4" name="">
             <a:extLst xmlns:a="http://schemas.openxmlformats.org/drawingml/2006/main">
               <a:ext uri="{FF2B5EF4-FFF2-40B4-BE49-F238E27FC236}">
-                <a16:creationId xmlns:a16="http://schemas.microsoft.com/office/drawing/2014/main" id="{06F54A36-7C57-4D9C-A8D8-50087F049232}"/>
+                <a16:creationId xmlns:a16="http://schemas.microsoft.com/office/drawing/2014/main" id="{3A16E13F-C6AF-4007-833C-E278C39ED415}"/>
               </a:ext>
             </a:extLst>
           </p:cNvPr>
@@ -8663,7 +8853,7 @@
           <p:cNvPr id="5" name="">
             <a:extLst xmlns:a="http://schemas.openxmlformats.org/drawingml/2006/main">
               <a:ext uri="{FF2B5EF4-FFF2-40B4-BE49-F238E27FC236}">
-                <a16:creationId xmlns:a16="http://schemas.microsoft.com/office/drawing/2014/main" id="{91E6B11C-D679-4189-B114-F77215EB51DB}"/>
+                <a16:creationId xmlns:a16="http://schemas.microsoft.com/office/drawing/2014/main" id="{E7A37914-9CB6-49C1-9033-0A1F56CB06E8}"/>
               </a:ext>
             </a:extLst>
           </p:cNvPr>
@@ -8696,7 +8886,7 @@
           <p:cNvPr id="6" name="">
             <a:extLst xmlns:a="http://schemas.openxmlformats.org/drawingml/2006/main">
               <a:ext uri="{FF2B5EF4-FFF2-40B4-BE49-F238E27FC236}">
-                <a16:creationId xmlns:a16="http://schemas.microsoft.com/office/drawing/2014/main" id="{4B4E0497-5912-4C88-AC08-5D63D2D90281}"/>
+                <a16:creationId xmlns:a16="http://schemas.microsoft.com/office/drawing/2014/main" id="{860E8776-1E4B-4E77-B031-973AA170B04F}"/>
               </a:ext>
             </a:extLst>
           </p:cNvPr>
@@ -8729,7 +8919,7 @@
           <p:cNvPr id="7" name="">
             <a:extLst xmlns:a="http://schemas.openxmlformats.org/drawingml/2006/main">
               <a:ext uri="{FF2B5EF4-FFF2-40B4-BE49-F238E27FC236}">
-                <a16:creationId xmlns:a16="http://schemas.microsoft.com/office/drawing/2014/main" id="{BF83C549-85DA-42B0-90B4-5C3E9C67A4B4}"/>
+                <a16:creationId xmlns:a16="http://schemas.microsoft.com/office/drawing/2014/main" id="{DBA2EFA0-5633-4E9A-876F-8465905BA0E7}"/>
               </a:ext>
             </a:extLst>
           </p:cNvPr>
@@ -8762,7 +8952,7 @@
           <p:cNvPr id="8" name="">
             <a:extLst xmlns:a="http://schemas.openxmlformats.org/drawingml/2006/main">
               <a:ext uri="{FF2B5EF4-FFF2-40B4-BE49-F238E27FC236}">
-                <a16:creationId xmlns:a16="http://schemas.microsoft.com/office/drawing/2014/main" id="{DA65CA51-C669-42CD-882F-EB257FF0957E}"/>
+                <a16:creationId xmlns:a16="http://schemas.microsoft.com/office/drawing/2014/main" id="{D4ACC3B9-86DE-4A97-AF22-37C222919775}"/>
               </a:ext>
             </a:extLst>
           </p:cNvPr>
@@ -8795,7 +8985,7 @@
           <p:cNvPr id="9" name="">
             <a:extLst xmlns:a="http://schemas.openxmlformats.org/drawingml/2006/main">
               <a:ext uri="{FF2B5EF4-FFF2-40B4-BE49-F238E27FC236}">
-                <a16:creationId xmlns:a16="http://schemas.microsoft.com/office/drawing/2014/main" id="{A5E481AE-9E0C-4453-9F27-C352E6C33398}"/>
+                <a16:creationId xmlns:a16="http://schemas.microsoft.com/office/drawing/2014/main" id="{796F3288-266C-49B1-A7EC-16E6C01FDC56}"/>
               </a:ext>
             </a:extLst>
           </p:cNvPr>
@@ -8828,7 +9018,7 @@
           <p:cNvPr id="10" name="">
             <a:extLst xmlns:a="http://schemas.openxmlformats.org/drawingml/2006/main">
               <a:ext uri="{FF2B5EF4-FFF2-40B4-BE49-F238E27FC236}">
-                <a16:creationId xmlns:a16="http://schemas.microsoft.com/office/drawing/2014/main" id="{D8FB0756-AFD4-437D-B027-5070B22F78CE}"/>
+                <a16:creationId xmlns:a16="http://schemas.microsoft.com/office/drawing/2014/main" id="{9FE61F66-90A6-4625-A0D8-68C649330813}"/>
               </a:ext>
             </a:extLst>
           </p:cNvPr>
@@ -8869,7 +9059,7 @@
           <p:cNvPr id="11" name="">
             <a:extLst xmlns:a="http://schemas.openxmlformats.org/drawingml/2006/main">
               <a:ext uri="{FF2B5EF4-FFF2-40B4-BE49-F238E27FC236}">
-                <a16:creationId xmlns:a16="http://schemas.microsoft.com/office/drawing/2014/main" id="{9ACEA2A5-731A-4D89-99C2-722541CB7F33}"/>
+                <a16:creationId xmlns:a16="http://schemas.microsoft.com/office/drawing/2014/main" id="{30E78EB3-A098-4CB8-9535-C1190A728154}"/>
               </a:ext>
             </a:extLst>
           </p:cNvPr>
@@ -8931,7 +9121,7 @@
           <p:cNvPr id="12" name="">
             <a:extLst xmlns:a="http://schemas.openxmlformats.org/drawingml/2006/main">
               <a:ext uri="{FF2B5EF4-FFF2-40B4-BE49-F238E27FC236}">
-                <a16:creationId xmlns:a16="http://schemas.microsoft.com/office/drawing/2014/main" id="{1036485E-66FD-4346-B0E9-151CEB724E0E}"/>
+                <a16:creationId xmlns:a16="http://schemas.microsoft.com/office/drawing/2014/main" id="{63ABC86A-6E5A-4828-84B9-40BED58A2031}"/>
               </a:ext>
             </a:extLst>
           </p:cNvPr>
@@ -8972,7 +9162,7 @@
           <p:cNvPr id="13" name="">
             <a:extLst xmlns:a="http://schemas.openxmlformats.org/drawingml/2006/main">
               <a:ext uri="{FF2B5EF4-FFF2-40B4-BE49-F238E27FC236}">
-                <a16:creationId xmlns:a16="http://schemas.microsoft.com/office/drawing/2014/main" id="{6D521708-ABCC-41F4-8C8B-FA721DEA6A92}"/>
+                <a16:creationId xmlns:a16="http://schemas.microsoft.com/office/drawing/2014/main" id="{55864781-7294-40E9-B7F0-F92AA077338A}"/>
               </a:ext>
             </a:extLst>
           </p:cNvPr>
@@ -9034,7 +9224,7 @@
           <p:cNvPr id="14" name="">
             <a:extLst xmlns:a="http://schemas.openxmlformats.org/drawingml/2006/main">
               <a:ext uri="{FF2B5EF4-FFF2-40B4-BE49-F238E27FC236}">
-                <a16:creationId xmlns:a16="http://schemas.microsoft.com/office/drawing/2014/main" id="{3F2D083C-9271-4E72-A43C-26E8681B22BD}"/>
+                <a16:creationId xmlns:a16="http://schemas.microsoft.com/office/drawing/2014/main" id="{5703C26D-7BEC-4AAA-875B-C1407FCA6BA5}"/>
               </a:ext>
             </a:extLst>
           </p:cNvPr>
@@ -9075,7 +9265,7 @@
           <p:cNvPr id="15" name="">
             <a:extLst xmlns:a="http://schemas.openxmlformats.org/drawingml/2006/main">
               <a:ext uri="{FF2B5EF4-FFF2-40B4-BE49-F238E27FC236}">
-                <a16:creationId xmlns:a16="http://schemas.microsoft.com/office/drawing/2014/main" id="{EA1AFFDE-2224-46D6-9ED7-D7BA0F0557A9}"/>
+                <a16:creationId xmlns:a16="http://schemas.microsoft.com/office/drawing/2014/main" id="{4933637F-9D2A-4AFB-BB80-9E2FFBD391B8}"/>
               </a:ext>
             </a:extLst>
           </p:cNvPr>
@@ -9137,7 +9327,7 @@
           <p:cNvPr id="16" name="">
             <a:extLst xmlns:a="http://schemas.openxmlformats.org/drawingml/2006/main">
               <a:ext uri="{FF2B5EF4-FFF2-40B4-BE49-F238E27FC236}">
-                <a16:creationId xmlns:a16="http://schemas.microsoft.com/office/drawing/2014/main" id="{DCA70B82-1742-4B2E-9293-6C889917D1E7}"/>
+                <a16:creationId xmlns:a16="http://schemas.microsoft.com/office/drawing/2014/main" id="{13E6F225-292F-49DE-B516-290E7C9E8155}"/>
               </a:ext>
             </a:extLst>
           </p:cNvPr>
@@ -9178,7 +9368,7 @@
           <p:cNvPr id="17" name="">
             <a:extLst xmlns:a="http://schemas.openxmlformats.org/drawingml/2006/main">
               <a:ext uri="{FF2B5EF4-FFF2-40B4-BE49-F238E27FC236}">
-                <a16:creationId xmlns:a16="http://schemas.microsoft.com/office/drawing/2014/main" id="{319C819D-1072-4856-AEB9-C8431E04E372}"/>
+                <a16:creationId xmlns:a16="http://schemas.microsoft.com/office/drawing/2014/main" id="{3998DB33-DAD9-43A8-829D-8DF7F0A9A6DB}"/>
               </a:ext>
             </a:extLst>
           </p:cNvPr>
@@ -9240,7 +9430,7 @@
           <p:cNvPr id="18" name="">
             <a:extLst xmlns:a="http://schemas.openxmlformats.org/drawingml/2006/main">
               <a:ext uri="{FF2B5EF4-FFF2-40B4-BE49-F238E27FC236}">
-                <a16:creationId xmlns:a16="http://schemas.microsoft.com/office/drawing/2014/main" id="{FC8668B2-BBC6-4E6D-B7E4-0E29781E6F34}"/>
+                <a16:creationId xmlns:a16="http://schemas.microsoft.com/office/drawing/2014/main" id="{EBED8118-39E0-463D-8026-1BA19A071633}"/>
               </a:ext>
             </a:extLst>
           </p:cNvPr>
@@ -9281,7 +9471,7 @@
           <p:cNvPr id="19" name="">
             <a:extLst xmlns:a="http://schemas.openxmlformats.org/drawingml/2006/main">
               <a:ext uri="{FF2B5EF4-FFF2-40B4-BE49-F238E27FC236}">
-                <a16:creationId xmlns:a16="http://schemas.microsoft.com/office/drawing/2014/main" id="{E429EEFD-A096-4CAF-B6DD-1B686A3714A0}"/>
+                <a16:creationId xmlns:a16="http://schemas.microsoft.com/office/drawing/2014/main" id="{F7CB5AC7-D141-4228-9FB5-3CF6E7EB6C16}"/>
               </a:ext>
             </a:extLst>
           </p:cNvPr>
@@ -9343,7 +9533,7 @@
           <p:cNvPr id="20" name="">
             <a:extLst xmlns:a="http://schemas.openxmlformats.org/drawingml/2006/main">
               <a:ext uri="{FF2B5EF4-FFF2-40B4-BE49-F238E27FC236}">
-                <a16:creationId xmlns:a16="http://schemas.microsoft.com/office/drawing/2014/main" id="{DAF0A1F1-CC89-4E6B-BEB9-696EEFEC32EE}"/>
+                <a16:creationId xmlns:a16="http://schemas.microsoft.com/office/drawing/2014/main" id="{2A475249-E588-45AF-B1CE-4478D4E1AEC1}"/>
               </a:ext>
             </a:extLst>
           </p:cNvPr>
@@ -9384,7 +9574,7 @@
           <p:cNvPr id="21" name="">
             <a:extLst xmlns:a="http://schemas.openxmlformats.org/drawingml/2006/main">
               <a:ext uri="{FF2B5EF4-FFF2-40B4-BE49-F238E27FC236}">
-                <a16:creationId xmlns:a16="http://schemas.microsoft.com/office/drawing/2014/main" id="{2477CDF0-52D7-47A9-9A05-DEACD4B5292E}"/>
+                <a16:creationId xmlns:a16="http://schemas.microsoft.com/office/drawing/2014/main" id="{7C1EB1BE-81CA-4BA1-93BF-24A57889B514}"/>
               </a:ext>
             </a:extLst>
           </p:cNvPr>
@@ -9446,7 +9636,7 @@
           <p:cNvPr id="22" name="">
             <a:extLst xmlns:a="http://schemas.openxmlformats.org/drawingml/2006/main">
               <a:ext uri="{FF2B5EF4-FFF2-40B4-BE49-F238E27FC236}">
-                <a16:creationId xmlns:a16="http://schemas.microsoft.com/office/drawing/2014/main" id="{3A870616-060B-420D-BCFE-2DA2C1C034D2}"/>
+                <a16:creationId xmlns:a16="http://schemas.microsoft.com/office/drawing/2014/main" id="{C71BB4EC-72D8-4A9F-BEE5-1A83D16CAABF}"/>
               </a:ext>
             </a:extLst>
           </p:cNvPr>
@@ -9487,7 +9677,7 @@
           <p:cNvPr id="23" name="">
             <a:extLst xmlns:a="http://schemas.openxmlformats.org/drawingml/2006/main">
               <a:ext uri="{FF2B5EF4-FFF2-40B4-BE49-F238E27FC236}">
-                <a16:creationId xmlns:a16="http://schemas.microsoft.com/office/drawing/2014/main" id="{D6005E81-CF9A-4B93-BFAA-C095E60FE243}"/>
+                <a16:creationId xmlns:a16="http://schemas.microsoft.com/office/drawing/2014/main" id="{582122A0-C749-4D2C-A5BB-20CBEF3FDBA2}"/>
               </a:ext>
             </a:extLst>
           </p:cNvPr>
@@ -9549,7 +9739,7 @@
           <p:cNvPr id="24" name="">
             <a:extLst xmlns:a="http://schemas.openxmlformats.org/drawingml/2006/main">
               <a:ext uri="{FF2B5EF4-FFF2-40B4-BE49-F238E27FC236}">
-                <a16:creationId xmlns:a16="http://schemas.microsoft.com/office/drawing/2014/main" id="{9C2515CF-2264-4835-82E2-0675A1709FA2}"/>
+                <a16:creationId xmlns:a16="http://schemas.microsoft.com/office/drawing/2014/main" id="{862D8759-E249-43E0-9B4E-F00DA7E4465B}"/>
               </a:ext>
             </a:extLst>
           </p:cNvPr>
@@ -9611,7 +9801,7 @@
           <p:cNvPr id="25" name="">
             <a:extLst xmlns:a="http://schemas.openxmlformats.org/drawingml/2006/main">
               <a:ext uri="{FF2B5EF4-FFF2-40B4-BE49-F238E27FC236}">
-                <a16:creationId xmlns:a16="http://schemas.microsoft.com/office/drawing/2014/main" id="{A84D3ED4-49C4-4216-AEA1-831ED66F24E8}"/>
+                <a16:creationId xmlns:a16="http://schemas.microsoft.com/office/drawing/2014/main" id="{D006734A-AF6A-4D25-9768-B25D49EBE930}"/>
               </a:ext>
             </a:extLst>
           </p:cNvPr>
@@ -9652,7 +9842,7 @@
           <p:cNvPr id="26" name="">
             <a:extLst xmlns:a="http://schemas.openxmlformats.org/drawingml/2006/main">
               <a:ext uri="{FF2B5EF4-FFF2-40B4-BE49-F238E27FC236}">
-                <a16:creationId xmlns:a16="http://schemas.microsoft.com/office/drawing/2014/main" id="{C1B3197F-2296-460C-8571-A6D2AD0A3984}"/>
+                <a16:creationId xmlns:a16="http://schemas.microsoft.com/office/drawing/2014/main" id="{016EB5A2-B3B1-4B7C-8F6D-9E1F3025FEC1}"/>
               </a:ext>
             </a:extLst>
           </p:cNvPr>
@@ -9714,7 +9904,7 @@
           <p:cNvPr id="27" name="">
             <a:extLst xmlns:a="http://schemas.openxmlformats.org/drawingml/2006/main">
               <a:ext uri="{FF2B5EF4-FFF2-40B4-BE49-F238E27FC236}">
-                <a16:creationId xmlns:a16="http://schemas.microsoft.com/office/drawing/2014/main" id="{91BA68E8-4378-4A4A-898D-569D62891627}"/>
+                <a16:creationId xmlns:a16="http://schemas.microsoft.com/office/drawing/2014/main" id="{C9121779-0966-4D5F-8B55-F728FD1037CC}"/>
               </a:ext>
             </a:extLst>
           </p:cNvPr>
@@ -9776,7 +9966,7 @@
           <p:cNvPr id="28" name="">
             <a:extLst xmlns:a="http://schemas.openxmlformats.org/drawingml/2006/main">
               <a:ext uri="{FF2B5EF4-FFF2-40B4-BE49-F238E27FC236}">
-                <a16:creationId xmlns:a16="http://schemas.microsoft.com/office/drawing/2014/main" id="{38E20DA5-1762-4416-8D9B-09A6BC246532}"/>
+                <a16:creationId xmlns:a16="http://schemas.microsoft.com/office/drawing/2014/main" id="{46380993-D88A-4E81-958D-E0657FEA9FB1}"/>
               </a:ext>
             </a:extLst>
           </p:cNvPr>
@@ -9817,7 +10007,7 @@
           <p:cNvPr id="29" name="">
             <a:extLst xmlns:a="http://schemas.openxmlformats.org/drawingml/2006/main">
               <a:ext uri="{FF2B5EF4-FFF2-40B4-BE49-F238E27FC236}">
-                <a16:creationId xmlns:a16="http://schemas.microsoft.com/office/drawing/2014/main" id="{CD335001-1E33-4DA7-A1F7-5D10F152EFEE}"/>
+                <a16:creationId xmlns:a16="http://schemas.microsoft.com/office/drawing/2014/main" id="{C7416B2D-C121-4682-A8F1-B1E4A883FB9D}"/>
               </a:ext>
             </a:extLst>
           </p:cNvPr>
@@ -9879,7 +10069,7 @@
           <p:cNvPr id="30" name="">
             <a:extLst xmlns:a="http://schemas.openxmlformats.org/drawingml/2006/main">
               <a:ext uri="{FF2B5EF4-FFF2-40B4-BE49-F238E27FC236}">
-                <a16:creationId xmlns:a16="http://schemas.microsoft.com/office/drawing/2014/main" id="{8E4D3478-75DA-4E77-9CC2-2D75884B436B}"/>
+                <a16:creationId xmlns:a16="http://schemas.microsoft.com/office/drawing/2014/main" id="{8D8A970E-4610-4B2F-8DFC-D480BC58ADFE}"/>
               </a:ext>
             </a:extLst>
           </p:cNvPr>
@@ -9941,7 +10131,7 @@
           <p:cNvPr id="31" name="">
             <a:extLst xmlns:a="http://schemas.openxmlformats.org/drawingml/2006/main">
               <a:ext uri="{FF2B5EF4-FFF2-40B4-BE49-F238E27FC236}">
-                <a16:creationId xmlns:a16="http://schemas.microsoft.com/office/drawing/2014/main" id="{A80D91A8-59EE-4F76-A966-C7826193F44C}"/>
+                <a16:creationId xmlns:a16="http://schemas.microsoft.com/office/drawing/2014/main" id="{BAFCCAA1-A8A7-4C00-A712-8CDBCE7DE907}"/>
               </a:ext>
             </a:extLst>
           </p:cNvPr>
@@ -9982,7 +10172,7 @@
           <p:cNvPr id="32" name="">
             <a:extLst xmlns:a="http://schemas.openxmlformats.org/drawingml/2006/main">
               <a:ext uri="{FF2B5EF4-FFF2-40B4-BE49-F238E27FC236}">
-                <a16:creationId xmlns:a16="http://schemas.microsoft.com/office/drawing/2014/main" id="{4EBDF698-1DE7-45B4-AD14-EF80D4EDDF31}"/>
+                <a16:creationId xmlns:a16="http://schemas.microsoft.com/office/drawing/2014/main" id="{9AF436FD-AD38-43E1-9DD4-F87FF20290EC}"/>
               </a:ext>
             </a:extLst>
           </p:cNvPr>
@@ -10044,7 +10234,7 @@
           <p:cNvPr id="33" name="">
             <a:extLst xmlns:a="http://schemas.openxmlformats.org/drawingml/2006/main">
               <a:ext uri="{FF2B5EF4-FFF2-40B4-BE49-F238E27FC236}">
-                <a16:creationId xmlns:a16="http://schemas.microsoft.com/office/drawing/2014/main" id="{68911A76-61BF-41E9-A442-A8CA3D183455}"/>
+                <a16:creationId xmlns:a16="http://schemas.microsoft.com/office/drawing/2014/main" id="{4F18E8C2-336C-4E28-AD3F-2D2EB53DAFCF}"/>
               </a:ext>
             </a:extLst>
           </p:cNvPr>
@@ -10106,7 +10296,7 @@
           <p:cNvPr id="34" name="">
             <a:extLst xmlns:a="http://schemas.openxmlformats.org/drawingml/2006/main">
               <a:ext uri="{FF2B5EF4-FFF2-40B4-BE49-F238E27FC236}">
-                <a16:creationId xmlns:a16="http://schemas.microsoft.com/office/drawing/2014/main" id="{616517F8-A319-401E-8834-11CAA1F2078F}"/>
+                <a16:creationId xmlns:a16="http://schemas.microsoft.com/office/drawing/2014/main" id="{E9997A77-4AE8-4741-84BF-0A2731BC1D9B}"/>
               </a:ext>
             </a:extLst>
           </p:cNvPr>
@@ -10168,7 +10358,7 @@
           <p:cNvPr id="35" name="">
             <a:extLst xmlns:a="http://schemas.openxmlformats.org/drawingml/2006/main">
               <a:ext uri="{FF2B5EF4-FFF2-40B4-BE49-F238E27FC236}">
-                <a16:creationId xmlns:a16="http://schemas.microsoft.com/office/drawing/2014/main" id="{6213335D-6814-4B53-8C24-8238C1482DB3}"/>
+                <a16:creationId xmlns:a16="http://schemas.microsoft.com/office/drawing/2014/main" id="{2A364D0E-8D8C-4879-9F7C-9AE167920B67}"/>
               </a:ext>
             </a:extLst>
           </p:cNvPr>
@@ -10199,7 +10389,7 @@
           <p:cNvPr id="36" name="">
             <a:extLst xmlns:a="http://schemas.openxmlformats.org/drawingml/2006/main">
               <a:ext uri="{FF2B5EF4-FFF2-40B4-BE49-F238E27FC236}">
-                <a16:creationId xmlns:a16="http://schemas.microsoft.com/office/drawing/2014/main" id="{9961DA6A-9BBF-4DB7-89A1-8035BA099C75}"/>
+                <a16:creationId xmlns:a16="http://schemas.microsoft.com/office/drawing/2014/main" id="{20F92890-455A-481D-A924-EAF5C9E282AF}"/>
               </a:ext>
             </a:extLst>
           </p:cNvPr>
@@ -10261,7 +10451,7 @@
           <p:cNvPr id="37" name="">
             <a:extLst xmlns:a="http://schemas.openxmlformats.org/drawingml/2006/main">
               <a:ext uri="{FF2B5EF4-FFF2-40B4-BE49-F238E27FC236}">
-                <a16:creationId xmlns:a16="http://schemas.microsoft.com/office/drawing/2014/main" id="{4764D428-FB69-487D-9AD8-0FB64DA3C5C5}"/>
+                <a16:creationId xmlns:a16="http://schemas.microsoft.com/office/drawing/2014/main" id="{BB20D406-D3CB-4FB7-8C8D-01BA125F0666}"/>
               </a:ext>
             </a:extLst>
           </p:cNvPr>
@@ -10321,7 +10511,7 @@
     </p:spTree>
     <p:extLst>
       <p:ext uri="{BB962C8B-B14F-4D97-AF65-F5344CB8AC3E}">
-        <p14:creationId xmlns:p14="http://schemas.microsoft.com/office/powerpoint/2010/main" val="761370062"/>
+        <p14:creationId xmlns:p14="http://schemas.microsoft.com/office/powerpoint/2010/main" val="626052905"/>
       </p:ext>
     </p:extLst>
   </p:cSld>
@@ -10352,7 +10542,7 @@
           <p:cNvPr id="1" name="">
             <a:extLst xmlns:a="http://schemas.openxmlformats.org/drawingml/2006/main">
               <a:ext uri="{FF2B5EF4-FFF2-40B4-BE49-F238E27FC236}">
-                <a16:creationId xmlns:a16="http://schemas.microsoft.com/office/drawing/2014/main" id="{BAE35184-43D5-473A-A31A-E2C0966550A8}"/>
+                <a16:creationId xmlns:a16="http://schemas.microsoft.com/office/drawing/2014/main" id="{834841EE-2021-4DAD-9F70-58166213A610}"/>
               </a:ext>
             </a:extLst>
           </p:cNvPr>
@@ -10414,7 +10604,7 @@
           <p:cNvPr id="2" name="">
             <a:extLst xmlns:a="http://schemas.openxmlformats.org/drawingml/2006/main">
               <a:ext uri="{FF2B5EF4-FFF2-40B4-BE49-F238E27FC236}">
-                <a16:creationId xmlns:a16="http://schemas.microsoft.com/office/drawing/2014/main" id="{7B332E23-43BD-4553-B54D-EE327ED2A808}"/>
+                <a16:creationId xmlns:a16="http://schemas.microsoft.com/office/drawing/2014/main" id="{B415182C-0E4D-46DF-B416-AAE2751FDB92}"/>
               </a:ext>
             </a:extLst>
           </p:cNvPr>
@@ -10476,7 +10666,7 @@
           <p:cNvPr id="3" name="">
             <a:extLst xmlns:a="http://schemas.openxmlformats.org/drawingml/2006/main">
               <a:ext uri="{FF2B5EF4-FFF2-40B4-BE49-F238E27FC236}">
-                <a16:creationId xmlns:a16="http://schemas.microsoft.com/office/drawing/2014/main" id="{0262A5EA-1448-403A-835D-F09095758681}"/>
+                <a16:creationId xmlns:a16="http://schemas.microsoft.com/office/drawing/2014/main" id="{FC910C3F-9620-4795-BE90-72E21797E657}"/>
               </a:ext>
             </a:extLst>
           </p:cNvPr>
@@ -10517,7 +10707,7 @@
           <p:cNvPr id="4" name="">
             <a:extLst xmlns:a="http://schemas.openxmlformats.org/drawingml/2006/main">
               <a:ext uri="{FF2B5EF4-FFF2-40B4-BE49-F238E27FC236}">
-                <a16:creationId xmlns:a16="http://schemas.microsoft.com/office/drawing/2014/main" id="{E893042B-ED6D-4EC2-AA72-26D81608C768}"/>
+                <a16:creationId xmlns:a16="http://schemas.microsoft.com/office/drawing/2014/main" id="{22CE4D43-EF9B-43F9-ACB8-671BCBEB9AEE}"/>
               </a:ext>
             </a:extLst>
           </p:cNvPr>
@@ -10579,7 +10769,7 @@
           <p:cNvPr id="5" name="">
             <a:extLst xmlns:a="http://schemas.openxmlformats.org/drawingml/2006/main">
               <a:ext uri="{FF2B5EF4-FFF2-40B4-BE49-F238E27FC236}">
-                <a16:creationId xmlns:a16="http://schemas.microsoft.com/office/drawing/2014/main" id="{ADF0413D-A1C2-4280-8FDD-C59757BC4F49}"/>
+                <a16:creationId xmlns:a16="http://schemas.microsoft.com/office/drawing/2014/main" id="{5883B2A1-5330-4D07-B370-A806A027B6DD}"/>
               </a:ext>
             </a:extLst>
           </p:cNvPr>
@@ -10726,7 +10916,7 @@
           <p:nvPr/>
         </p:nvPicPr>
         <p:blipFill>
-          <a:blip xmlns:r="http://schemas.openxmlformats.org/officeDocument/2006/relationships" xmlns:a="http://schemas.openxmlformats.org/drawingml/2006/main" r:embed="R68f56184acf14ace"/>
+          <a:blip xmlns:r="http://schemas.openxmlformats.org/officeDocument/2006/relationships" xmlns:a="http://schemas.openxmlformats.org/drawingml/2006/main" r:embed="Rb45bde7883b8447c"/>
           <a:stretch xmlns:a="http://schemas.openxmlformats.org/drawingml/2006/main"/>
         </p:blipFill>
         <p:spPr>
@@ -10750,7 +10940,7 @@
           <p:nvPr/>
         </p:nvPicPr>
         <p:blipFill>
-          <a:blip xmlns:r="http://schemas.openxmlformats.org/officeDocument/2006/relationships" xmlns:a="http://schemas.openxmlformats.org/drawingml/2006/main" r:embed="Rb824ae5233734358"/>
+          <a:blip xmlns:r="http://schemas.openxmlformats.org/officeDocument/2006/relationships" xmlns:a="http://schemas.openxmlformats.org/drawingml/2006/main" r:embed="R93c87c94d4c24781"/>
           <a:stretch xmlns:a="http://schemas.openxmlformats.org/drawingml/2006/main"/>
         </p:blipFill>
         <p:spPr>
@@ -10774,7 +10964,7 @@
           <p:nvPr/>
         </p:nvPicPr>
         <p:blipFill>
-          <a:blip xmlns:r="http://schemas.openxmlformats.org/officeDocument/2006/relationships" xmlns:a="http://schemas.openxmlformats.org/drawingml/2006/main" r:embed="Rc7df66ba016f43f6"/>
+          <a:blip xmlns:r="http://schemas.openxmlformats.org/officeDocument/2006/relationships" xmlns:a="http://schemas.openxmlformats.org/drawingml/2006/main" r:embed="R2769d61c22314377"/>
           <a:stretch xmlns:a="http://schemas.openxmlformats.org/drawingml/2006/main"/>
         </p:blipFill>
         <p:spPr>
@@ -10794,7 +10984,7 @@
           <p:cNvPr id="9" name="">
             <a:extLst xmlns:a="http://schemas.openxmlformats.org/drawingml/2006/main">
               <a:ext uri="{FF2B5EF4-FFF2-40B4-BE49-F238E27FC236}">
-                <a16:creationId xmlns:a16="http://schemas.microsoft.com/office/drawing/2014/main" id="{F2C25DBD-85C8-4BD9-B372-62D8D7234429}"/>
+                <a16:creationId xmlns:a16="http://schemas.microsoft.com/office/drawing/2014/main" id="{D5E44A93-694D-4F81-AAA7-342EC8A20346}"/>
               </a:ext>
             </a:extLst>
           </p:cNvPr>
@@ -10856,7 +11046,7 @@
           <p:cNvPr id="10" name="">
             <a:extLst xmlns:a="http://schemas.openxmlformats.org/drawingml/2006/main">
               <a:ext uri="{FF2B5EF4-FFF2-40B4-BE49-F238E27FC236}">
-                <a16:creationId xmlns:a16="http://schemas.microsoft.com/office/drawing/2014/main" id="{4AC0A96A-51D9-47B3-B9C8-68196E84F3B1}"/>
+                <a16:creationId xmlns:a16="http://schemas.microsoft.com/office/drawing/2014/main" id="{2D6A40D2-7177-4F63-A040-1C64B27F51BA}"/>
               </a:ext>
             </a:extLst>
           </p:cNvPr>
@@ -10887,7 +11077,7 @@
           <p:cNvPr id="11" name="">
             <a:extLst xmlns:a="http://schemas.openxmlformats.org/drawingml/2006/main">
               <a:ext uri="{FF2B5EF4-FFF2-40B4-BE49-F238E27FC236}">
-                <a16:creationId xmlns:a16="http://schemas.microsoft.com/office/drawing/2014/main" id="{7EA5F05C-1C1B-45A0-B99E-343E337038FF}"/>
+                <a16:creationId xmlns:a16="http://schemas.microsoft.com/office/drawing/2014/main" id="{AEFFC5C3-8DEF-4F86-959C-7BBB58B6F5CE}"/>
               </a:ext>
             </a:extLst>
           </p:cNvPr>
@@ -10949,7 +11139,7 @@
           <p:cNvPr id="12" name="">
             <a:extLst xmlns:a="http://schemas.openxmlformats.org/drawingml/2006/main">
               <a:ext uri="{FF2B5EF4-FFF2-40B4-BE49-F238E27FC236}">
-                <a16:creationId xmlns:a16="http://schemas.microsoft.com/office/drawing/2014/main" id="{8AE2A76B-490A-4484-9E99-647D10F9AD6A}"/>
+                <a16:creationId xmlns:a16="http://schemas.microsoft.com/office/drawing/2014/main" id="{40E04215-5674-4EB6-9AAF-A76A4DF28EB3}"/>
               </a:ext>
             </a:extLst>
           </p:cNvPr>
@@ -11009,7 +11199,7 @@
     </p:spTree>
     <p:extLst>
       <p:ext uri="{BB962C8B-B14F-4D97-AF65-F5344CB8AC3E}">
-        <p14:creationId xmlns:p14="http://schemas.microsoft.com/office/powerpoint/2010/main" val="242691289"/>
+        <p14:creationId xmlns:p14="http://schemas.microsoft.com/office/powerpoint/2010/main" val="260488014"/>
       </p:ext>
     </p:extLst>
   </p:cSld>
@@ -11040,7 +11230,7 @@
           <p:cNvPr id="1" name="">
             <a:extLst xmlns:a="http://schemas.openxmlformats.org/drawingml/2006/main">
               <a:ext uri="{FF2B5EF4-FFF2-40B4-BE49-F238E27FC236}">
-                <a16:creationId xmlns:a16="http://schemas.microsoft.com/office/drawing/2014/main" id="{F0F2B147-011F-4FAC-A652-386381C3417E}"/>
+                <a16:creationId xmlns:a16="http://schemas.microsoft.com/office/drawing/2014/main" id="{2448ADDA-5FA8-4A46-BD42-9D66E5EBE8B3}"/>
               </a:ext>
             </a:extLst>
           </p:cNvPr>
@@ -11102,7 +11292,7 @@
           <p:cNvPr id="2" name="">
             <a:extLst xmlns:a="http://schemas.openxmlformats.org/drawingml/2006/main">
               <a:ext uri="{FF2B5EF4-FFF2-40B4-BE49-F238E27FC236}">
-                <a16:creationId xmlns:a16="http://schemas.microsoft.com/office/drawing/2014/main" id="{5702995F-832F-4FB0-B650-8DF8300DD5CB}"/>
+                <a16:creationId xmlns:a16="http://schemas.microsoft.com/office/drawing/2014/main" id="{EBACD628-0BC0-4BEF-AAAE-F2370A20157D}"/>
               </a:ext>
             </a:extLst>
           </p:cNvPr>
@@ -11164,7 +11354,7 @@
           <p:cNvPr id="3" name="">
             <a:extLst xmlns:a="http://schemas.openxmlformats.org/drawingml/2006/main">
               <a:ext uri="{FF2B5EF4-FFF2-40B4-BE49-F238E27FC236}">
-                <a16:creationId xmlns:a16="http://schemas.microsoft.com/office/drawing/2014/main" id="{D761C3F2-9C1C-411D-B3D7-7C2C4DBBCFEF}"/>
+                <a16:creationId xmlns:a16="http://schemas.microsoft.com/office/drawing/2014/main" id="{9310A119-954C-4715-98C1-F186743914C4}"/>
               </a:ext>
             </a:extLst>
           </p:cNvPr>
@@ -11205,7 +11395,7 @@
           <p:cNvPr id="4" name="">
             <a:extLst xmlns:a="http://schemas.openxmlformats.org/drawingml/2006/main">
               <a:ext uri="{FF2B5EF4-FFF2-40B4-BE49-F238E27FC236}">
-                <a16:creationId xmlns:a16="http://schemas.microsoft.com/office/drawing/2014/main" id="{F6A12E20-734F-439F-A7CA-95DF6E9BC811}"/>
+                <a16:creationId xmlns:a16="http://schemas.microsoft.com/office/drawing/2014/main" id="{A2F4DBED-4337-44DE-B54C-AD93027348A0}"/>
               </a:ext>
             </a:extLst>
           </p:cNvPr>
@@ -11267,7 +11457,7 @@
           <p:cNvPr id="5" name="">
             <a:extLst xmlns:a="http://schemas.openxmlformats.org/drawingml/2006/main">
               <a:ext uri="{FF2B5EF4-FFF2-40B4-BE49-F238E27FC236}">
-                <a16:creationId xmlns:a16="http://schemas.microsoft.com/office/drawing/2014/main" id="{EE3BE32E-E26C-4081-AA68-F1A675B4FD6B}"/>
+                <a16:creationId xmlns:a16="http://schemas.microsoft.com/office/drawing/2014/main" id="{B5054433-1093-44ED-8C18-C0E13E4D7D60}"/>
               </a:ext>
             </a:extLst>
           </p:cNvPr>
@@ -11356,7 +11546,7 @@
           <p:cNvPr id="6" name="">
             <a:extLst xmlns:a="http://schemas.openxmlformats.org/drawingml/2006/main">
               <a:ext uri="{FF2B5EF4-FFF2-40B4-BE49-F238E27FC236}">
-                <a16:creationId xmlns:a16="http://schemas.microsoft.com/office/drawing/2014/main" id="{57A609E9-11C8-4F41-A081-7B439C25D008}"/>
+                <a16:creationId xmlns:a16="http://schemas.microsoft.com/office/drawing/2014/main" id="{C2A88AB0-D092-4D8E-B407-424DD7E66B6D}"/>
               </a:ext>
             </a:extLst>
           </p:cNvPr>
@@ -11397,7 +11587,7 @@
           <p:cNvPr id="7" name="">
             <a:extLst xmlns:a="http://schemas.openxmlformats.org/drawingml/2006/main">
               <a:ext uri="{FF2B5EF4-FFF2-40B4-BE49-F238E27FC236}">
-                <a16:creationId xmlns:a16="http://schemas.microsoft.com/office/drawing/2014/main" id="{D189C558-023F-4532-88CB-538D39404927}"/>
+                <a16:creationId xmlns:a16="http://schemas.microsoft.com/office/drawing/2014/main" id="{89DC3BBD-003A-44C0-8A4A-3DD596A3E4AC}"/>
               </a:ext>
             </a:extLst>
           </p:cNvPr>
@@ -11459,7 +11649,7 @@
           <p:cNvPr id="8" name="">
             <a:extLst xmlns:a="http://schemas.openxmlformats.org/drawingml/2006/main">
               <a:ext uri="{FF2B5EF4-FFF2-40B4-BE49-F238E27FC236}">
-                <a16:creationId xmlns:a16="http://schemas.microsoft.com/office/drawing/2014/main" id="{245BD8D3-5685-4131-BA16-72241DDE8D4E}"/>
+                <a16:creationId xmlns:a16="http://schemas.microsoft.com/office/drawing/2014/main" id="{8E12075B-2207-458F-9FF7-13AF36487696}"/>
               </a:ext>
             </a:extLst>
           </p:cNvPr>
@@ -11548,7 +11738,7 @@
           <p:cNvPr id="9" name="">
             <a:extLst xmlns:a="http://schemas.openxmlformats.org/drawingml/2006/main">
               <a:ext uri="{FF2B5EF4-FFF2-40B4-BE49-F238E27FC236}">
-                <a16:creationId xmlns:a16="http://schemas.microsoft.com/office/drawing/2014/main" id="{F03F1267-EAFF-42B5-A4A7-DEF116EBDF3E}"/>
+                <a16:creationId xmlns:a16="http://schemas.microsoft.com/office/drawing/2014/main" id="{412D19F5-119F-42BF-8051-92464847EF15}"/>
               </a:ext>
             </a:extLst>
           </p:cNvPr>
@@ -11589,7 +11779,7 @@
           <p:cNvPr id="10" name="">
             <a:extLst xmlns:a="http://schemas.openxmlformats.org/drawingml/2006/main">
               <a:ext uri="{FF2B5EF4-FFF2-40B4-BE49-F238E27FC236}">
-                <a16:creationId xmlns:a16="http://schemas.microsoft.com/office/drawing/2014/main" id="{657E6E57-B097-4BDC-B29E-8D520C1CC80A}"/>
+                <a16:creationId xmlns:a16="http://schemas.microsoft.com/office/drawing/2014/main" id="{B3247BBA-6147-4B3D-824C-FDB5DA41F848}"/>
               </a:ext>
             </a:extLst>
           </p:cNvPr>
@@ -11651,7 +11841,7 @@
           <p:cNvPr id="11" name="">
             <a:extLst xmlns:a="http://schemas.openxmlformats.org/drawingml/2006/main">
               <a:ext uri="{FF2B5EF4-FFF2-40B4-BE49-F238E27FC236}">
-                <a16:creationId xmlns:a16="http://schemas.microsoft.com/office/drawing/2014/main" id="{9CD5451F-235D-4338-8727-495BC1839CBC}"/>
+                <a16:creationId xmlns:a16="http://schemas.microsoft.com/office/drawing/2014/main" id="{276FE41A-B0B9-42BA-83C5-E951F0C8A20F}"/>
               </a:ext>
             </a:extLst>
           </p:cNvPr>
@@ -11740,7 +11930,7 @@
           <p:cNvPr id="12" name="">
             <a:extLst xmlns:a="http://schemas.openxmlformats.org/drawingml/2006/main">
               <a:ext uri="{FF2B5EF4-FFF2-40B4-BE49-F238E27FC236}">
-                <a16:creationId xmlns:a16="http://schemas.microsoft.com/office/drawing/2014/main" id="{98E98822-BD65-4CEC-8935-FCC05CF4BB9C}"/>
+                <a16:creationId xmlns:a16="http://schemas.microsoft.com/office/drawing/2014/main" id="{8DE4F65D-7AB3-403E-9139-E01B68EF1EA0}"/>
               </a:ext>
             </a:extLst>
           </p:cNvPr>
@@ -11781,7 +11971,7 @@
           <p:cNvPr id="13" name="">
             <a:extLst xmlns:a="http://schemas.openxmlformats.org/drawingml/2006/main">
               <a:ext uri="{FF2B5EF4-FFF2-40B4-BE49-F238E27FC236}">
-                <a16:creationId xmlns:a16="http://schemas.microsoft.com/office/drawing/2014/main" id="{33A683FD-0A45-415D-BB83-4A7D2708346E}"/>
+                <a16:creationId xmlns:a16="http://schemas.microsoft.com/office/drawing/2014/main" id="{AB04D329-334B-446B-B64E-B7F85F47D995}"/>
               </a:ext>
             </a:extLst>
           </p:cNvPr>
@@ -11843,7 +12033,7 @@
           <p:cNvPr id="14" name="">
             <a:extLst xmlns:a="http://schemas.openxmlformats.org/drawingml/2006/main">
               <a:ext uri="{FF2B5EF4-FFF2-40B4-BE49-F238E27FC236}">
-                <a16:creationId xmlns:a16="http://schemas.microsoft.com/office/drawing/2014/main" id="{4A5441AA-E318-43D7-8C7E-CB4470A4A2CC}"/>
+                <a16:creationId xmlns:a16="http://schemas.microsoft.com/office/drawing/2014/main" id="{FC2F8D91-2C9C-4D05-A0C2-881AE19BF13C}"/>
               </a:ext>
             </a:extLst>
           </p:cNvPr>
@@ -11932,7 +12122,7 @@
           <p:cNvPr id="15" name="">
             <a:extLst xmlns:a="http://schemas.openxmlformats.org/drawingml/2006/main">
               <a:ext uri="{FF2B5EF4-FFF2-40B4-BE49-F238E27FC236}">
-                <a16:creationId xmlns:a16="http://schemas.microsoft.com/office/drawing/2014/main" id="{BBCB5226-A807-4B34-8A73-6B5DBD2AD3A4}"/>
+                <a16:creationId xmlns:a16="http://schemas.microsoft.com/office/drawing/2014/main" id="{8C6A50DC-E057-4672-BC32-D9A2926000DD}"/>
               </a:ext>
             </a:extLst>
           </p:cNvPr>
@@ -11973,7 +12163,7 @@
           <p:cNvPr id="16" name="">
             <a:extLst xmlns:a="http://schemas.openxmlformats.org/drawingml/2006/main">
               <a:ext uri="{FF2B5EF4-FFF2-40B4-BE49-F238E27FC236}">
-                <a16:creationId xmlns:a16="http://schemas.microsoft.com/office/drawing/2014/main" id="{5B0DEE84-32A5-48F9-9BB4-2D64CFA149CC}"/>
+                <a16:creationId xmlns:a16="http://schemas.microsoft.com/office/drawing/2014/main" id="{EE0C92A1-4FE6-4D2D-A3A1-0F20DADFC4A0}"/>
               </a:ext>
             </a:extLst>
           </p:cNvPr>
@@ -12035,7 +12225,7 @@
           <p:cNvPr id="17" name="">
             <a:extLst xmlns:a="http://schemas.openxmlformats.org/drawingml/2006/main">
               <a:ext uri="{FF2B5EF4-FFF2-40B4-BE49-F238E27FC236}">
-                <a16:creationId xmlns:a16="http://schemas.microsoft.com/office/drawing/2014/main" id="{4836C473-53EE-4D37-9CE1-BEE99A3779CE}"/>
+                <a16:creationId xmlns:a16="http://schemas.microsoft.com/office/drawing/2014/main" id="{A69D8CB7-CB11-4B2D-BCF4-3775888BD960}"/>
               </a:ext>
             </a:extLst>
           </p:cNvPr>
@@ -12097,7 +12287,7 @@
           <p:cNvPr id="18" name="">
             <a:extLst xmlns:a="http://schemas.openxmlformats.org/drawingml/2006/main">
               <a:ext uri="{FF2B5EF4-FFF2-40B4-BE49-F238E27FC236}">
-                <a16:creationId xmlns:a16="http://schemas.microsoft.com/office/drawing/2014/main" id="{44779C49-9765-4DB6-9B73-7A24E2530CAB}"/>
+                <a16:creationId xmlns:a16="http://schemas.microsoft.com/office/drawing/2014/main" id="{B065E73B-EA2C-44F1-AC89-D8E265567D85}"/>
               </a:ext>
             </a:extLst>
           </p:cNvPr>
@@ -12159,7 +12349,7 @@
           <p:cNvPr id="19" name="">
             <a:extLst xmlns:a="http://schemas.openxmlformats.org/drawingml/2006/main">
               <a:ext uri="{FF2B5EF4-FFF2-40B4-BE49-F238E27FC236}">
-                <a16:creationId xmlns:a16="http://schemas.microsoft.com/office/drawing/2014/main" id="{46C3FE8A-E3F3-4298-8C85-238FE4CC8B8C}"/>
+                <a16:creationId xmlns:a16="http://schemas.microsoft.com/office/drawing/2014/main" id="{BE36C039-CBFE-4ACF-B67F-360178C377D7}"/>
               </a:ext>
             </a:extLst>
           </p:cNvPr>
@@ -12190,7 +12380,7 @@
           <p:cNvPr id="20" name="">
             <a:extLst xmlns:a="http://schemas.openxmlformats.org/drawingml/2006/main">
               <a:ext uri="{FF2B5EF4-FFF2-40B4-BE49-F238E27FC236}">
-                <a16:creationId xmlns:a16="http://schemas.microsoft.com/office/drawing/2014/main" id="{2F001E33-8B25-4D16-8822-9BCD0EC9DB3C}"/>
+                <a16:creationId xmlns:a16="http://schemas.microsoft.com/office/drawing/2014/main" id="{F225BC5A-210D-473C-8902-495654A23BB4}"/>
               </a:ext>
             </a:extLst>
           </p:cNvPr>
@@ -12252,7 +12442,7 @@
           <p:cNvPr id="21" name="">
             <a:extLst xmlns:a="http://schemas.openxmlformats.org/drawingml/2006/main">
               <a:ext uri="{FF2B5EF4-FFF2-40B4-BE49-F238E27FC236}">
-                <a16:creationId xmlns:a16="http://schemas.microsoft.com/office/drawing/2014/main" id="{4EF924A6-AD04-4459-8BFC-3E3921A615DF}"/>
+                <a16:creationId xmlns:a16="http://schemas.microsoft.com/office/drawing/2014/main" id="{C8E937ED-6C21-4D8E-B282-BF66BD530CE8}"/>
               </a:ext>
             </a:extLst>
           </p:cNvPr>
@@ -12312,7 +12502,7 @@
     </p:spTree>
     <p:extLst>
       <p:ext uri="{BB962C8B-B14F-4D97-AF65-F5344CB8AC3E}">
-        <p14:creationId xmlns:p14="http://schemas.microsoft.com/office/powerpoint/2010/main" val="1001886256"/>
+        <p14:creationId xmlns:p14="http://schemas.microsoft.com/office/powerpoint/2010/main" val="921803575"/>
       </p:ext>
     </p:extLst>
   </p:cSld>
@@ -12347,7 +12537,7 @@
           <p:nvPr/>
         </p:nvPicPr>
         <p:blipFill>
-          <a:blip xmlns:r="http://schemas.openxmlformats.org/officeDocument/2006/relationships" xmlns:a="http://schemas.openxmlformats.org/drawingml/2006/main" r:embed="Reb507f4dced3415f"/>
+          <a:blip xmlns:r="http://schemas.openxmlformats.org/officeDocument/2006/relationships" xmlns:a="http://schemas.openxmlformats.org/drawingml/2006/main" r:embed="Rc90a325e27fc4268"/>
           <a:stretch xmlns:a="http://schemas.openxmlformats.org/drawingml/2006/main"/>
         </p:blipFill>
         <p:spPr>
@@ -12367,7 +12557,7 @@
           <p:cNvPr id="2" name="">
             <a:extLst xmlns:a="http://schemas.openxmlformats.org/drawingml/2006/main">
               <a:ext uri="{FF2B5EF4-FFF2-40B4-BE49-F238E27FC236}">
-                <a16:creationId xmlns:a16="http://schemas.microsoft.com/office/drawing/2014/main" id="{579F63E5-594F-4AC8-BE92-9829FD8B210A}"/>
+                <a16:creationId xmlns:a16="http://schemas.microsoft.com/office/drawing/2014/main" id="{31611E8E-E184-47E8-8295-5D7D3D5BF1AB}"/>
               </a:ext>
             </a:extLst>
           </p:cNvPr>
@@ -12429,7 +12619,7 @@
           <p:cNvPr id="3" name="">
             <a:extLst xmlns:a="http://schemas.openxmlformats.org/drawingml/2006/main">
               <a:ext uri="{FF2B5EF4-FFF2-40B4-BE49-F238E27FC236}">
-                <a16:creationId xmlns:a16="http://schemas.microsoft.com/office/drawing/2014/main" id="{48BEE57B-199A-4E6B-ABEC-6B341DC4CCAE}"/>
+                <a16:creationId xmlns:a16="http://schemas.microsoft.com/office/drawing/2014/main" id="{01B5DBCF-3456-4AA9-81D6-E75680ACFEE1}"/>
               </a:ext>
             </a:extLst>
           </p:cNvPr>
@@ -12462,7 +12652,7 @@
           <p:cNvPr id="4" name="">
             <a:extLst xmlns:a="http://schemas.openxmlformats.org/drawingml/2006/main">
               <a:ext uri="{FF2B5EF4-FFF2-40B4-BE49-F238E27FC236}">
-                <a16:creationId xmlns:a16="http://schemas.microsoft.com/office/drawing/2014/main" id="{DC0576EC-2F1D-4235-B29E-A98327F6D4ED}"/>
+                <a16:creationId xmlns:a16="http://schemas.microsoft.com/office/drawing/2014/main" id="{DA8960E7-F626-4865-ACFE-D3A8817341E9}"/>
               </a:ext>
             </a:extLst>
           </p:cNvPr>
@@ -12524,7 +12714,7 @@
           <p:cNvPr id="5" name="">
             <a:extLst xmlns:a="http://schemas.openxmlformats.org/drawingml/2006/main">
               <a:ext uri="{FF2B5EF4-FFF2-40B4-BE49-F238E27FC236}">
-                <a16:creationId xmlns:a16="http://schemas.microsoft.com/office/drawing/2014/main" id="{6D86A03E-C440-4BDC-9C9F-83CEB78A0EA0}"/>
+                <a16:creationId xmlns:a16="http://schemas.microsoft.com/office/drawing/2014/main" id="{8A8203ED-7A28-4D4A-BBBF-E0D52AD406B7}"/>
               </a:ext>
             </a:extLst>
           </p:cNvPr>
@@ -12557,7 +12747,7 @@
           <p:cNvPr id="6" name="">
             <a:extLst xmlns:a="http://schemas.openxmlformats.org/drawingml/2006/main">
               <a:ext uri="{FF2B5EF4-FFF2-40B4-BE49-F238E27FC236}">
-                <a16:creationId xmlns:a16="http://schemas.microsoft.com/office/drawing/2014/main" id="{8DB64742-BFEE-418E-AD1A-8B8FAFAB9223}"/>
+                <a16:creationId xmlns:a16="http://schemas.microsoft.com/office/drawing/2014/main" id="{C98E7596-E502-4431-AEDF-94002E79CEAF}"/>
               </a:ext>
             </a:extLst>
           </p:cNvPr>
@@ -12619,7 +12809,7 @@
           <p:cNvPr id="7" name="">
             <a:extLst xmlns:a="http://schemas.openxmlformats.org/drawingml/2006/main">
               <a:ext uri="{FF2B5EF4-FFF2-40B4-BE49-F238E27FC236}">
-                <a16:creationId xmlns:a16="http://schemas.microsoft.com/office/drawing/2014/main" id="{B525BB86-796B-4D06-AA26-4A3FE11F71A3}"/>
+                <a16:creationId xmlns:a16="http://schemas.microsoft.com/office/drawing/2014/main" id="{1CA36293-CFDD-4FEC-AA9D-63D35F49E18E}"/>
               </a:ext>
             </a:extLst>
           </p:cNvPr>
@@ -12652,7 +12842,7 @@
           <p:cNvPr id="8" name="">
             <a:extLst xmlns:a="http://schemas.openxmlformats.org/drawingml/2006/main">
               <a:ext uri="{FF2B5EF4-FFF2-40B4-BE49-F238E27FC236}">
-                <a16:creationId xmlns:a16="http://schemas.microsoft.com/office/drawing/2014/main" id="{AA0140FF-BE41-4899-B8B0-5D8A58B6538B}"/>
+                <a16:creationId xmlns:a16="http://schemas.microsoft.com/office/drawing/2014/main" id="{588A2C78-4ECD-4D35-A84D-CC3601C645F6}"/>
               </a:ext>
             </a:extLst>
           </p:cNvPr>
@@ -12714,7 +12904,7 @@
           <p:cNvPr id="9" name="">
             <a:extLst xmlns:a="http://schemas.openxmlformats.org/drawingml/2006/main">
               <a:ext uri="{FF2B5EF4-FFF2-40B4-BE49-F238E27FC236}">
-                <a16:creationId xmlns:a16="http://schemas.microsoft.com/office/drawing/2014/main" id="{C05AC955-ECAF-4565-AF0F-841EBFAB81E1}"/>
+                <a16:creationId xmlns:a16="http://schemas.microsoft.com/office/drawing/2014/main" id="{76D8CC75-17A5-4333-B715-F44FCF2BC2C8}"/>
               </a:ext>
             </a:extLst>
           </p:cNvPr>
@@ -12755,7 +12945,7 @@
           <p:cNvPr id="10" name="">
             <a:extLst xmlns:a="http://schemas.openxmlformats.org/drawingml/2006/main">
               <a:ext uri="{FF2B5EF4-FFF2-40B4-BE49-F238E27FC236}">
-                <a16:creationId xmlns:a16="http://schemas.microsoft.com/office/drawing/2014/main" id="{2F118616-F0F6-4132-B6BA-38A0C63B6105}"/>
+                <a16:creationId xmlns:a16="http://schemas.microsoft.com/office/drawing/2014/main" id="{FF13D2A1-4538-4B2C-8924-E29846497037}"/>
               </a:ext>
             </a:extLst>
           </p:cNvPr>
@@ -12817,7 +13007,7 @@
           <p:cNvPr id="11" name="">
             <a:extLst xmlns:a="http://schemas.openxmlformats.org/drawingml/2006/main">
               <a:ext uri="{FF2B5EF4-FFF2-40B4-BE49-F238E27FC236}">
-                <a16:creationId xmlns:a16="http://schemas.microsoft.com/office/drawing/2014/main" id="{6B82A7B7-AF7C-4DE4-82E2-E381FD85371C}"/>
+                <a16:creationId xmlns:a16="http://schemas.microsoft.com/office/drawing/2014/main" id="{440736AC-C611-42F1-8BB5-985123D96136}"/>
               </a:ext>
             </a:extLst>
           </p:cNvPr>
@@ -12879,7 +13069,7 @@
           <p:cNvPr id="12" name="">
             <a:extLst xmlns:a="http://schemas.openxmlformats.org/drawingml/2006/main">
               <a:ext uri="{FF2B5EF4-FFF2-40B4-BE49-F238E27FC236}">
-                <a16:creationId xmlns:a16="http://schemas.microsoft.com/office/drawing/2014/main" id="{8221FB98-85C4-4D62-87EA-2910233DADE5}"/>
+                <a16:creationId xmlns:a16="http://schemas.microsoft.com/office/drawing/2014/main" id="{311B5350-DC52-4AB3-9563-F6033ACC677A}"/>
               </a:ext>
             </a:extLst>
           </p:cNvPr>
@@ -12968,7 +13158,7 @@
           <p:cNvPr id="13" name="">
             <a:extLst xmlns:a="http://schemas.openxmlformats.org/drawingml/2006/main">
               <a:ext uri="{FF2B5EF4-FFF2-40B4-BE49-F238E27FC236}">
-                <a16:creationId xmlns:a16="http://schemas.microsoft.com/office/drawing/2014/main" id="{FBD117CA-909B-46AC-B85D-1EE2ED5A2569}"/>
+                <a16:creationId xmlns:a16="http://schemas.microsoft.com/office/drawing/2014/main" id="{340321AB-7B72-40B9-8E90-E1D213C09C98}"/>
               </a:ext>
             </a:extLst>
           </p:cNvPr>
@@ -12999,7 +13189,7 @@
           <p:cNvPr id="14" name="">
             <a:extLst xmlns:a="http://schemas.openxmlformats.org/drawingml/2006/main">
               <a:ext uri="{FF2B5EF4-FFF2-40B4-BE49-F238E27FC236}">
-                <a16:creationId xmlns:a16="http://schemas.microsoft.com/office/drawing/2014/main" id="{6DD19ACB-C79E-4CB1-9F71-DD44A178B6AC}"/>
+                <a16:creationId xmlns:a16="http://schemas.microsoft.com/office/drawing/2014/main" id="{3343B681-C890-4AFC-B5E1-503CE573D906}"/>
               </a:ext>
             </a:extLst>
           </p:cNvPr>
@@ -13039,7 +13229,7 @@
           <p:cNvPr id="15" name="">
             <a:extLst xmlns:a="http://schemas.openxmlformats.org/drawingml/2006/main">
               <a:ext uri="{FF2B5EF4-FFF2-40B4-BE49-F238E27FC236}">
-                <a16:creationId xmlns:a16="http://schemas.microsoft.com/office/drawing/2014/main" id="{D6A04BAA-B45F-4BFD-9F9C-FA855BCCCEC2}"/>
+                <a16:creationId xmlns:a16="http://schemas.microsoft.com/office/drawing/2014/main" id="{61A29565-EBB3-448B-B16D-92B09C8D0055}"/>
               </a:ext>
             </a:extLst>
           </p:cNvPr>
@@ -13099,7 +13289,7 @@
     </p:spTree>
     <p:extLst>
       <p:ext uri="{BB962C8B-B14F-4D97-AF65-F5344CB8AC3E}">
-        <p14:creationId xmlns:p14="http://schemas.microsoft.com/office/powerpoint/2010/main" val="711322695"/>
+        <p14:creationId xmlns:p14="http://schemas.microsoft.com/office/powerpoint/2010/main" val="1396602094"/>
       </p:ext>
     </p:extLst>
   </p:cSld>
@@ -13130,7 +13320,7 @@
           <p:cNvPr id="1" name="">
             <a:extLst xmlns:a="http://schemas.openxmlformats.org/drawingml/2006/main">
               <a:ext uri="{FF2B5EF4-FFF2-40B4-BE49-F238E27FC236}">
-                <a16:creationId xmlns:a16="http://schemas.microsoft.com/office/drawing/2014/main" id="{4A1F6C01-68A2-4CB2-B469-A61866BCACCD}"/>
+                <a16:creationId xmlns:a16="http://schemas.microsoft.com/office/drawing/2014/main" id="{03142839-BF81-4612-AA25-23CB8951EF0E}"/>
               </a:ext>
             </a:extLst>
           </p:cNvPr>
@@ -13192,7 +13382,7 @@
           <p:cNvPr id="2" name="">
             <a:extLst xmlns:a="http://schemas.openxmlformats.org/drawingml/2006/main">
               <a:ext uri="{FF2B5EF4-FFF2-40B4-BE49-F238E27FC236}">
-                <a16:creationId xmlns:a16="http://schemas.microsoft.com/office/drawing/2014/main" id="{3A7EB267-59CE-4B4F-A89A-5302119E4439}"/>
+                <a16:creationId xmlns:a16="http://schemas.microsoft.com/office/drawing/2014/main" id="{2AA51113-E470-45EF-8230-942CD03B1E13}"/>
               </a:ext>
             </a:extLst>
           </p:cNvPr>
@@ -13254,7 +13444,7 @@
           <p:cNvPr id="3" name="">
             <a:extLst xmlns:a="http://schemas.openxmlformats.org/drawingml/2006/main">
               <a:ext uri="{FF2B5EF4-FFF2-40B4-BE49-F238E27FC236}">
-                <a16:creationId xmlns:a16="http://schemas.microsoft.com/office/drawing/2014/main" id="{BDFD134A-F9D3-4C9F-8085-31CDF3925A5E}"/>
+                <a16:creationId xmlns:a16="http://schemas.microsoft.com/office/drawing/2014/main" id="{9695F89B-5925-4A73-9D9C-A9DFA6908778}"/>
               </a:ext>
             </a:extLst>
           </p:cNvPr>
@@ -13316,7 +13506,7 @@
           <p:cNvPr id="4" name="">
             <a:extLst xmlns:a="http://schemas.openxmlformats.org/drawingml/2006/main">
               <a:ext uri="{FF2B5EF4-FFF2-40B4-BE49-F238E27FC236}">
-                <a16:creationId xmlns:a16="http://schemas.microsoft.com/office/drawing/2014/main" id="{BAFE3F75-4F63-4B8A-AD67-1D22D4A98FC8}"/>
+                <a16:creationId xmlns:a16="http://schemas.microsoft.com/office/drawing/2014/main" id="{61C9C8E3-733A-4E3E-A2F1-50D36C7735D6}"/>
               </a:ext>
             </a:extLst>
           </p:cNvPr>
@@ -13357,7 +13547,7 @@
           <p:cNvPr id="5" name="">
             <a:extLst xmlns:a="http://schemas.openxmlformats.org/drawingml/2006/main">
               <a:ext uri="{FF2B5EF4-FFF2-40B4-BE49-F238E27FC236}">
-                <a16:creationId xmlns:a16="http://schemas.microsoft.com/office/drawing/2014/main" id="{5017FCFF-81F0-4692-B4B1-FB8FDC38718E}"/>
+                <a16:creationId xmlns:a16="http://schemas.microsoft.com/office/drawing/2014/main" id="{43197CDA-1409-44CB-8BF1-DEB0B4A570F6}"/>
               </a:ext>
             </a:extLst>
           </p:cNvPr>
@@ -13419,7 +13609,7 @@
           <p:cNvPr id="6" name="">
             <a:extLst xmlns:a="http://schemas.openxmlformats.org/drawingml/2006/main">
               <a:ext uri="{FF2B5EF4-FFF2-40B4-BE49-F238E27FC236}">
-                <a16:creationId xmlns:a16="http://schemas.microsoft.com/office/drawing/2014/main" id="{A759DC16-8134-4E0D-9EE9-6E765EB59FE0}"/>
+                <a16:creationId xmlns:a16="http://schemas.microsoft.com/office/drawing/2014/main" id="{572CEBBA-1344-4E2C-A087-060D11F86403}"/>
               </a:ext>
             </a:extLst>
           </p:cNvPr>
@@ -13508,7 +13698,7 @@
           <p:cNvPr id="7" name="">
             <a:extLst xmlns:a="http://schemas.openxmlformats.org/drawingml/2006/main">
               <a:ext uri="{FF2B5EF4-FFF2-40B4-BE49-F238E27FC236}">
-                <a16:creationId xmlns:a16="http://schemas.microsoft.com/office/drawing/2014/main" id="{583D756D-EEB2-4733-A2C7-9A83B6FE07F0}"/>
+                <a16:creationId xmlns:a16="http://schemas.microsoft.com/office/drawing/2014/main" id="{7F03BE59-6076-4037-A6DE-152DC9D45E48}"/>
               </a:ext>
             </a:extLst>
           </p:cNvPr>
@@ -13549,7 +13739,7 @@
           <p:cNvPr id="8" name="">
             <a:extLst xmlns:a="http://schemas.openxmlformats.org/drawingml/2006/main">
               <a:ext uri="{FF2B5EF4-FFF2-40B4-BE49-F238E27FC236}">
-                <a16:creationId xmlns:a16="http://schemas.microsoft.com/office/drawing/2014/main" id="{EE1653C4-7CC1-455C-9240-07AE3161D025}"/>
+                <a16:creationId xmlns:a16="http://schemas.microsoft.com/office/drawing/2014/main" id="{29385790-0270-4AF1-A3E5-25015F8D27C2}"/>
               </a:ext>
             </a:extLst>
           </p:cNvPr>
@@ -13611,7 +13801,7 @@
           <p:cNvPr id="9" name="">
             <a:extLst xmlns:a="http://schemas.openxmlformats.org/drawingml/2006/main">
               <a:ext uri="{FF2B5EF4-FFF2-40B4-BE49-F238E27FC236}">
-                <a16:creationId xmlns:a16="http://schemas.microsoft.com/office/drawing/2014/main" id="{4CBFB984-C740-4E27-A2B7-85D56B77A581}"/>
+                <a16:creationId xmlns:a16="http://schemas.microsoft.com/office/drawing/2014/main" id="{6DC8A37B-0587-41D5-BFF3-D130C7601FFA}"/>
               </a:ext>
             </a:extLst>
           </p:cNvPr>
@@ -13700,7 +13890,7 @@
           <p:cNvPr id="10" name="">
             <a:extLst xmlns:a="http://schemas.openxmlformats.org/drawingml/2006/main">
               <a:ext uri="{FF2B5EF4-FFF2-40B4-BE49-F238E27FC236}">
-                <a16:creationId xmlns:a16="http://schemas.microsoft.com/office/drawing/2014/main" id="{95A98A53-05C9-4D50-A3AF-7B0ACD81D451}"/>
+                <a16:creationId xmlns:a16="http://schemas.microsoft.com/office/drawing/2014/main" id="{79EDA982-4D1A-4DB2-BB42-727ED0352A34}"/>
               </a:ext>
             </a:extLst>
           </p:cNvPr>
@@ -13741,7 +13931,7 @@
           <p:cNvPr id="11" name="">
             <a:extLst xmlns:a="http://schemas.openxmlformats.org/drawingml/2006/main">
               <a:ext uri="{FF2B5EF4-FFF2-40B4-BE49-F238E27FC236}">
-                <a16:creationId xmlns:a16="http://schemas.microsoft.com/office/drawing/2014/main" id="{D69395C2-DFEC-47FD-8F68-4EEB52A65F3A}"/>
+                <a16:creationId xmlns:a16="http://schemas.microsoft.com/office/drawing/2014/main" id="{223FED4A-1848-4C17-AD33-9514B0EC3175}"/>
               </a:ext>
             </a:extLst>
           </p:cNvPr>
@@ -13803,7 +13993,7 @@
           <p:cNvPr id="12" name="">
             <a:extLst xmlns:a="http://schemas.openxmlformats.org/drawingml/2006/main">
               <a:ext uri="{FF2B5EF4-FFF2-40B4-BE49-F238E27FC236}">
-                <a16:creationId xmlns:a16="http://schemas.microsoft.com/office/drawing/2014/main" id="{50369A63-4A39-4E47-9AA4-864A319752D2}"/>
+                <a16:creationId xmlns:a16="http://schemas.microsoft.com/office/drawing/2014/main" id="{900E0A5E-AE0E-465F-9736-EC6FA16390A5}"/>
               </a:ext>
             </a:extLst>
           </p:cNvPr>
@@ -13892,7 +14082,7 @@
           <p:cNvPr id="13" name="">
             <a:extLst xmlns:a="http://schemas.openxmlformats.org/drawingml/2006/main">
               <a:ext uri="{FF2B5EF4-FFF2-40B4-BE49-F238E27FC236}">
-                <a16:creationId xmlns:a16="http://schemas.microsoft.com/office/drawing/2014/main" id="{30EC67E9-96DE-4FDD-8245-220BA76303C6}"/>
+                <a16:creationId xmlns:a16="http://schemas.microsoft.com/office/drawing/2014/main" id="{DC0A1DAA-7939-48B4-9A7E-C818866D56A5}"/>
               </a:ext>
             </a:extLst>
           </p:cNvPr>
@@ -13925,7 +14115,7 @@
           <p:cNvPr id="14" name="">
             <a:extLst xmlns:a="http://schemas.openxmlformats.org/drawingml/2006/main">
               <a:ext uri="{FF2B5EF4-FFF2-40B4-BE49-F238E27FC236}">
-                <a16:creationId xmlns:a16="http://schemas.microsoft.com/office/drawing/2014/main" id="{3414701E-F492-4164-AA62-9A7DE5C5B5CB}"/>
+                <a16:creationId xmlns:a16="http://schemas.microsoft.com/office/drawing/2014/main" id="{C69C52FB-8AA7-4720-86C5-CD78911BD079}"/>
               </a:ext>
             </a:extLst>
           </p:cNvPr>
@@ -13958,7 +14148,7 @@
           <p:cNvPr id="15" name="">
             <a:extLst xmlns:a="http://schemas.openxmlformats.org/drawingml/2006/main">
               <a:ext uri="{FF2B5EF4-FFF2-40B4-BE49-F238E27FC236}">
-                <a16:creationId xmlns:a16="http://schemas.microsoft.com/office/drawing/2014/main" id="{62917F3D-430A-4CC7-9C40-9D60D55DD73A}"/>
+                <a16:creationId xmlns:a16="http://schemas.microsoft.com/office/drawing/2014/main" id="{709FF346-502C-4266-BCE2-E420A2D138DC}"/>
               </a:ext>
             </a:extLst>
           </p:cNvPr>
@@ -13993,7 +14183,7 @@
           <p:cNvPr id="16" name="">
             <a:extLst xmlns:a="http://schemas.openxmlformats.org/drawingml/2006/main">
               <a:ext uri="{FF2B5EF4-FFF2-40B4-BE49-F238E27FC236}">
-                <a16:creationId xmlns:a16="http://schemas.microsoft.com/office/drawing/2014/main" id="{0CCE9D81-A252-4CB1-B171-4353D88BC01A}"/>
+                <a16:creationId xmlns:a16="http://schemas.microsoft.com/office/drawing/2014/main" id="{EA10DA42-2F11-473F-A14B-3ADF756EDB2A}"/>
               </a:ext>
             </a:extLst>
           </p:cNvPr>
@@ -14026,7 +14216,7 @@
           <p:cNvPr id="17" name="">
             <a:extLst xmlns:a="http://schemas.openxmlformats.org/drawingml/2006/main">
               <a:ext uri="{FF2B5EF4-FFF2-40B4-BE49-F238E27FC236}">
-                <a16:creationId xmlns:a16="http://schemas.microsoft.com/office/drawing/2014/main" id="{80E8D8CD-4AFD-4768-BDFB-42259CD31A49}"/>
+                <a16:creationId xmlns:a16="http://schemas.microsoft.com/office/drawing/2014/main" id="{B8E1B989-D23A-44BE-9B07-EE835B6F5941}"/>
               </a:ext>
             </a:extLst>
           </p:cNvPr>
@@ -14059,7 +14249,7 @@
           <p:cNvPr id="18" name="">
             <a:extLst xmlns:a="http://schemas.openxmlformats.org/drawingml/2006/main">
               <a:ext uri="{FF2B5EF4-FFF2-40B4-BE49-F238E27FC236}">
-                <a16:creationId xmlns:a16="http://schemas.microsoft.com/office/drawing/2014/main" id="{68BD11C6-D865-4C9D-AD39-D914FBE876B7}"/>
+                <a16:creationId xmlns:a16="http://schemas.microsoft.com/office/drawing/2014/main" id="{0F286D62-1D38-4C3E-958D-B2887EFCB6AB}"/>
               </a:ext>
             </a:extLst>
           </p:cNvPr>
@@ -14092,7 +14282,7 @@
           <p:cNvPr id="19" name="">
             <a:extLst xmlns:a="http://schemas.openxmlformats.org/drawingml/2006/main">
               <a:ext uri="{FF2B5EF4-FFF2-40B4-BE49-F238E27FC236}">
-                <a16:creationId xmlns:a16="http://schemas.microsoft.com/office/drawing/2014/main" id="{3C933321-DAB4-49C1-A500-F48A232FC669}"/>
+                <a16:creationId xmlns:a16="http://schemas.microsoft.com/office/drawing/2014/main" id="{14034F81-55FC-4685-AC47-5B9FF5E96BA1}"/>
               </a:ext>
             </a:extLst>
           </p:cNvPr>
@@ -14125,7 +14315,7 @@
           <p:cNvPr id="20" name="">
             <a:extLst xmlns:a="http://schemas.openxmlformats.org/drawingml/2006/main">
               <a:ext uri="{FF2B5EF4-FFF2-40B4-BE49-F238E27FC236}">
-                <a16:creationId xmlns:a16="http://schemas.microsoft.com/office/drawing/2014/main" id="{2D4FB59A-17A7-4477-B12F-A02ABC6ED089}"/>
+                <a16:creationId xmlns:a16="http://schemas.microsoft.com/office/drawing/2014/main" id="{0F532701-D713-4BD4-92BB-924BBE8D17C2}"/>
               </a:ext>
             </a:extLst>
           </p:cNvPr>
@@ -14158,7 +14348,7 @@
           <p:cNvPr id="21" name="">
             <a:extLst xmlns:a="http://schemas.openxmlformats.org/drawingml/2006/main">
               <a:ext uri="{FF2B5EF4-FFF2-40B4-BE49-F238E27FC236}">
-                <a16:creationId xmlns:a16="http://schemas.microsoft.com/office/drawing/2014/main" id="{BDA21A1D-4841-4D48-9CBF-0D068EEFB44F}"/>
+                <a16:creationId xmlns:a16="http://schemas.microsoft.com/office/drawing/2014/main" id="{6B215495-8672-4506-B8E0-9FFCC414110C}"/>
               </a:ext>
             </a:extLst>
           </p:cNvPr>
@@ -14191,7 +14381,7 @@
           <p:cNvPr id="22" name="">
             <a:extLst xmlns:a="http://schemas.openxmlformats.org/drawingml/2006/main">
               <a:ext uri="{FF2B5EF4-FFF2-40B4-BE49-F238E27FC236}">
-                <a16:creationId xmlns:a16="http://schemas.microsoft.com/office/drawing/2014/main" id="{63257F17-4D2B-4834-BC04-28948543EB32}"/>
+                <a16:creationId xmlns:a16="http://schemas.microsoft.com/office/drawing/2014/main" id="{DA40ECC9-6CE2-4282-9E0F-D7106884DE40}"/>
               </a:ext>
             </a:extLst>
           </p:cNvPr>
@@ -14224,7 +14414,7 @@
           <p:cNvPr id="23" name="">
             <a:extLst xmlns:a="http://schemas.openxmlformats.org/drawingml/2006/main">
               <a:ext uri="{FF2B5EF4-FFF2-40B4-BE49-F238E27FC236}">
-                <a16:creationId xmlns:a16="http://schemas.microsoft.com/office/drawing/2014/main" id="{CB64AEE4-09B3-4461-9ADA-A51B33C91E35}"/>
+                <a16:creationId xmlns:a16="http://schemas.microsoft.com/office/drawing/2014/main" id="{994A083C-55E4-42C7-922C-81B88A2FE845}"/>
               </a:ext>
             </a:extLst>
           </p:cNvPr>
@@ -14257,7 +14447,7 @@
           <p:cNvPr id="24" name="">
             <a:extLst xmlns:a="http://schemas.openxmlformats.org/drawingml/2006/main">
               <a:ext uri="{FF2B5EF4-FFF2-40B4-BE49-F238E27FC236}">
-                <a16:creationId xmlns:a16="http://schemas.microsoft.com/office/drawing/2014/main" id="{A12DC1F1-AC52-4842-92FF-E9C18F19BEC4}"/>
+                <a16:creationId xmlns:a16="http://schemas.microsoft.com/office/drawing/2014/main" id="{D7C2CBB0-0F00-414C-936F-772F32A7F477}"/>
               </a:ext>
             </a:extLst>
           </p:cNvPr>
@@ -14290,7 +14480,7 @@
           <p:cNvPr id="25" name="">
             <a:extLst xmlns:a="http://schemas.openxmlformats.org/drawingml/2006/main">
               <a:ext uri="{FF2B5EF4-FFF2-40B4-BE49-F238E27FC236}">
-                <a16:creationId xmlns:a16="http://schemas.microsoft.com/office/drawing/2014/main" id="{099A572B-AF84-4D53-B97B-F4954D048A9A}"/>
+                <a16:creationId xmlns:a16="http://schemas.microsoft.com/office/drawing/2014/main" id="{D96BCF72-F14B-4484-A10E-F023317A30BC}"/>
               </a:ext>
             </a:extLst>
           </p:cNvPr>
@@ -14323,7 +14513,7 @@
           <p:cNvPr id="26" name="">
             <a:extLst xmlns:a="http://schemas.openxmlformats.org/drawingml/2006/main">
               <a:ext uri="{FF2B5EF4-FFF2-40B4-BE49-F238E27FC236}">
-                <a16:creationId xmlns:a16="http://schemas.microsoft.com/office/drawing/2014/main" id="{B9E68029-6600-4E83-92AA-F63D0B8BFF53}"/>
+                <a16:creationId xmlns:a16="http://schemas.microsoft.com/office/drawing/2014/main" id="{F06A4536-447A-4225-BB69-8FF6907E8ED5}"/>
               </a:ext>
             </a:extLst>
           </p:cNvPr>
@@ -14356,7 +14546,7 @@
           <p:cNvPr id="27" name="">
             <a:extLst xmlns:a="http://schemas.openxmlformats.org/drawingml/2006/main">
               <a:ext uri="{FF2B5EF4-FFF2-40B4-BE49-F238E27FC236}">
-                <a16:creationId xmlns:a16="http://schemas.microsoft.com/office/drawing/2014/main" id="{FE229989-5407-4BA5-BC04-58B944416447}"/>
+                <a16:creationId xmlns:a16="http://schemas.microsoft.com/office/drawing/2014/main" id="{F42E0A78-6F60-4EAD-9397-81E5D31FF79A}"/>
               </a:ext>
             </a:extLst>
           </p:cNvPr>
@@ -14389,7 +14579,7 @@
           <p:cNvPr id="28" name="">
             <a:extLst xmlns:a="http://schemas.openxmlformats.org/drawingml/2006/main">
               <a:ext uri="{FF2B5EF4-FFF2-40B4-BE49-F238E27FC236}">
-                <a16:creationId xmlns:a16="http://schemas.microsoft.com/office/drawing/2014/main" id="{E35726ED-1ACB-4D36-8169-F91CF88740D9}"/>
+                <a16:creationId xmlns:a16="http://schemas.microsoft.com/office/drawing/2014/main" id="{73C509E5-CD6C-4984-93DE-87AB83FD723C}"/>
               </a:ext>
             </a:extLst>
           </p:cNvPr>
@@ -14422,7 +14612,7 @@
           <p:cNvPr id="29" name="">
             <a:extLst xmlns:a="http://schemas.openxmlformats.org/drawingml/2006/main">
               <a:ext uri="{FF2B5EF4-FFF2-40B4-BE49-F238E27FC236}">
-                <a16:creationId xmlns:a16="http://schemas.microsoft.com/office/drawing/2014/main" id="{4225AF51-AFE0-4453-8E9A-8EE5D9885C03}"/>
+                <a16:creationId xmlns:a16="http://schemas.microsoft.com/office/drawing/2014/main" id="{8208208A-FC35-4F6D-A260-E80D3BAA0856}"/>
               </a:ext>
             </a:extLst>
           </p:cNvPr>
@@ -14455,7 +14645,7 @@
           <p:cNvPr id="30" name="">
             <a:extLst xmlns:a="http://schemas.openxmlformats.org/drawingml/2006/main">
               <a:ext uri="{FF2B5EF4-FFF2-40B4-BE49-F238E27FC236}">
-                <a16:creationId xmlns:a16="http://schemas.microsoft.com/office/drawing/2014/main" id="{5C169A04-AD3B-411A-B884-DBA9F33EA70F}"/>
+                <a16:creationId xmlns:a16="http://schemas.microsoft.com/office/drawing/2014/main" id="{0E3E924F-CC67-40C3-BAF2-0319873F8996}"/>
               </a:ext>
             </a:extLst>
           </p:cNvPr>
@@ -14488,7 +14678,7 @@
           <p:cNvPr id="31" name="">
             <a:extLst xmlns:a="http://schemas.openxmlformats.org/drawingml/2006/main">
               <a:ext uri="{FF2B5EF4-FFF2-40B4-BE49-F238E27FC236}">
-                <a16:creationId xmlns:a16="http://schemas.microsoft.com/office/drawing/2014/main" id="{8C4759A3-AF07-48EA-9C5B-110B02AC246A}"/>
+                <a16:creationId xmlns:a16="http://schemas.microsoft.com/office/drawing/2014/main" id="{1B66C5BC-2E19-4EA7-8077-E51CF7FEE6A0}"/>
               </a:ext>
             </a:extLst>
           </p:cNvPr>
@@ -14521,7 +14711,7 @@
           <p:cNvPr id="32" name="">
             <a:extLst xmlns:a="http://schemas.openxmlformats.org/drawingml/2006/main">
               <a:ext uri="{FF2B5EF4-FFF2-40B4-BE49-F238E27FC236}">
-                <a16:creationId xmlns:a16="http://schemas.microsoft.com/office/drawing/2014/main" id="{D0BCEAE0-19CF-4657-A8F5-9DBE15E96C9F}"/>
+                <a16:creationId xmlns:a16="http://schemas.microsoft.com/office/drawing/2014/main" id="{839A335C-0529-45ED-876B-8049DBD01B7F}"/>
               </a:ext>
             </a:extLst>
           </p:cNvPr>
@@ -14554,7 +14744,7 @@
           <p:cNvPr id="33" name="">
             <a:extLst xmlns:a="http://schemas.openxmlformats.org/drawingml/2006/main">
               <a:ext uri="{FF2B5EF4-FFF2-40B4-BE49-F238E27FC236}">
-                <a16:creationId xmlns:a16="http://schemas.microsoft.com/office/drawing/2014/main" id="{F40E1C43-708E-4D35-9BA9-7268A19A3A2E}"/>
+                <a16:creationId xmlns:a16="http://schemas.microsoft.com/office/drawing/2014/main" id="{95954713-4C31-4A40-8A33-80B0869FE237}"/>
               </a:ext>
             </a:extLst>
           </p:cNvPr>
@@ -14587,7 +14777,7 @@
           <p:cNvPr id="34" name="">
             <a:extLst xmlns:a="http://schemas.openxmlformats.org/drawingml/2006/main">
               <a:ext uri="{FF2B5EF4-FFF2-40B4-BE49-F238E27FC236}">
-                <a16:creationId xmlns:a16="http://schemas.microsoft.com/office/drawing/2014/main" id="{80BEC16E-1C90-45A8-AEAC-990642BC8580}"/>
+                <a16:creationId xmlns:a16="http://schemas.microsoft.com/office/drawing/2014/main" id="{ACAC2097-349E-428F-A315-88BF47C6C27D}"/>
               </a:ext>
             </a:extLst>
           </p:cNvPr>
@@ -14620,7 +14810,7 @@
           <p:cNvPr id="35" name="">
             <a:extLst xmlns:a="http://schemas.openxmlformats.org/drawingml/2006/main">
               <a:ext uri="{FF2B5EF4-FFF2-40B4-BE49-F238E27FC236}">
-                <a16:creationId xmlns:a16="http://schemas.microsoft.com/office/drawing/2014/main" id="{F0950BC7-E7C1-4185-AC88-83E50F973FF5}"/>
+                <a16:creationId xmlns:a16="http://schemas.microsoft.com/office/drawing/2014/main" id="{4B1D77D5-E798-4B83-8868-1440D0ED3925}"/>
               </a:ext>
             </a:extLst>
           </p:cNvPr>
@@ -14653,7 +14843,7 @@
           <p:cNvPr id="36" name="">
             <a:extLst xmlns:a="http://schemas.openxmlformats.org/drawingml/2006/main">
               <a:ext uri="{FF2B5EF4-FFF2-40B4-BE49-F238E27FC236}">
-                <a16:creationId xmlns:a16="http://schemas.microsoft.com/office/drawing/2014/main" id="{F4F49293-FC3A-4E29-A05C-DBF908A0581C}"/>
+                <a16:creationId xmlns:a16="http://schemas.microsoft.com/office/drawing/2014/main" id="{018D8EE8-3FED-4DFF-A96A-9193F8A9EC53}"/>
               </a:ext>
             </a:extLst>
           </p:cNvPr>
@@ -14686,7 +14876,7 @@
           <p:cNvPr id="37" name="">
             <a:extLst xmlns:a="http://schemas.openxmlformats.org/drawingml/2006/main">
               <a:ext uri="{FF2B5EF4-FFF2-40B4-BE49-F238E27FC236}">
-                <a16:creationId xmlns:a16="http://schemas.microsoft.com/office/drawing/2014/main" id="{29577338-E004-4BD6-B086-CD699B7896D6}"/>
+                <a16:creationId xmlns:a16="http://schemas.microsoft.com/office/drawing/2014/main" id="{8FA48448-6CFD-42CD-B9B8-4DDE9044AFB9}"/>
               </a:ext>
             </a:extLst>
           </p:cNvPr>
@@ -14719,7 +14909,7 @@
           <p:cNvPr id="38" name="">
             <a:extLst xmlns:a="http://schemas.openxmlformats.org/drawingml/2006/main">
               <a:ext uri="{FF2B5EF4-FFF2-40B4-BE49-F238E27FC236}">
-                <a16:creationId xmlns:a16="http://schemas.microsoft.com/office/drawing/2014/main" id="{2A499490-2ADE-4574-8451-37C4C6D6EA2D}"/>
+                <a16:creationId xmlns:a16="http://schemas.microsoft.com/office/drawing/2014/main" id="{57D34C6C-EA82-43E9-AA88-D035875F5F80}"/>
               </a:ext>
             </a:extLst>
           </p:cNvPr>
@@ -14752,7 +14942,7 @@
           <p:cNvPr id="39" name="">
             <a:extLst xmlns:a="http://schemas.openxmlformats.org/drawingml/2006/main">
               <a:ext uri="{FF2B5EF4-FFF2-40B4-BE49-F238E27FC236}">
-                <a16:creationId xmlns:a16="http://schemas.microsoft.com/office/drawing/2014/main" id="{4661B027-2BB6-4A59-A699-DFD7198E05A2}"/>
+                <a16:creationId xmlns:a16="http://schemas.microsoft.com/office/drawing/2014/main" id="{696F6D0F-3E8E-42A8-9BDC-A926241B74E5}"/>
               </a:ext>
             </a:extLst>
           </p:cNvPr>
@@ -14785,7 +14975,7 @@
           <p:cNvPr id="40" name="">
             <a:extLst xmlns:a="http://schemas.openxmlformats.org/drawingml/2006/main">
               <a:ext uri="{FF2B5EF4-FFF2-40B4-BE49-F238E27FC236}">
-                <a16:creationId xmlns:a16="http://schemas.microsoft.com/office/drawing/2014/main" id="{E367D13B-B336-4472-AA88-C54998865EC9}"/>
+                <a16:creationId xmlns:a16="http://schemas.microsoft.com/office/drawing/2014/main" id="{E1B27006-E93E-4C5A-9E65-6A3F0AF6D9FB}"/>
               </a:ext>
             </a:extLst>
           </p:cNvPr>
@@ -14818,7 +15008,7 @@
           <p:cNvPr id="41" name="">
             <a:extLst xmlns:a="http://schemas.openxmlformats.org/drawingml/2006/main">
               <a:ext uri="{FF2B5EF4-FFF2-40B4-BE49-F238E27FC236}">
-                <a16:creationId xmlns:a16="http://schemas.microsoft.com/office/drawing/2014/main" id="{7A7C5277-A8EC-448D-B716-6C59A137F73D}"/>
+                <a16:creationId xmlns:a16="http://schemas.microsoft.com/office/drawing/2014/main" id="{697514F6-6BAF-4DF4-8D24-5E8C760ABFD7}"/>
               </a:ext>
             </a:extLst>
           </p:cNvPr>
@@ -14851,7 +15041,7 @@
           <p:cNvPr id="42" name="">
             <a:extLst xmlns:a="http://schemas.openxmlformats.org/drawingml/2006/main">
               <a:ext uri="{FF2B5EF4-FFF2-40B4-BE49-F238E27FC236}">
-                <a16:creationId xmlns:a16="http://schemas.microsoft.com/office/drawing/2014/main" id="{1128C46A-7BC6-41EB-82AE-F845BA12673B}"/>
+                <a16:creationId xmlns:a16="http://schemas.microsoft.com/office/drawing/2014/main" id="{92ECB94A-5D64-49F0-B367-DB793C17C589}"/>
               </a:ext>
             </a:extLst>
           </p:cNvPr>
@@ -14884,7 +15074,7 @@
           <p:cNvPr id="43" name="">
             <a:extLst xmlns:a="http://schemas.openxmlformats.org/drawingml/2006/main">
               <a:ext uri="{FF2B5EF4-FFF2-40B4-BE49-F238E27FC236}">
-                <a16:creationId xmlns:a16="http://schemas.microsoft.com/office/drawing/2014/main" id="{FDE56E27-F495-4F5E-B51A-F26C2F2DCBDE}"/>
+                <a16:creationId xmlns:a16="http://schemas.microsoft.com/office/drawing/2014/main" id="{C5B882C0-B4F9-4969-815D-BF7C01BA76C4}"/>
               </a:ext>
             </a:extLst>
           </p:cNvPr>
@@ -14917,7 +15107,7 @@
           <p:cNvPr id="44" name="">
             <a:extLst xmlns:a="http://schemas.openxmlformats.org/drawingml/2006/main">
               <a:ext uri="{FF2B5EF4-FFF2-40B4-BE49-F238E27FC236}">
-                <a16:creationId xmlns:a16="http://schemas.microsoft.com/office/drawing/2014/main" id="{0F82599E-6D14-436C-A9B5-1B979ABB1D3D}"/>
+                <a16:creationId xmlns:a16="http://schemas.microsoft.com/office/drawing/2014/main" id="{DEAB03E3-C89F-4C1F-BD71-F734E137A1B7}"/>
               </a:ext>
             </a:extLst>
           </p:cNvPr>
@@ -14950,7 +15140,7 @@
           <p:cNvPr id="45" name="">
             <a:extLst xmlns:a="http://schemas.openxmlformats.org/drawingml/2006/main">
               <a:ext uri="{FF2B5EF4-FFF2-40B4-BE49-F238E27FC236}">
-                <a16:creationId xmlns:a16="http://schemas.microsoft.com/office/drawing/2014/main" id="{24803303-907B-40CB-8732-69E9DEEF26A0}"/>
+                <a16:creationId xmlns:a16="http://schemas.microsoft.com/office/drawing/2014/main" id="{0D48B0B7-0EA0-4772-B47A-08A86CEBA75E}"/>
               </a:ext>
             </a:extLst>
           </p:cNvPr>
@@ -14983,7 +15173,7 @@
           <p:cNvPr id="46" name="">
             <a:extLst xmlns:a="http://schemas.openxmlformats.org/drawingml/2006/main">
               <a:ext uri="{FF2B5EF4-FFF2-40B4-BE49-F238E27FC236}">
-                <a16:creationId xmlns:a16="http://schemas.microsoft.com/office/drawing/2014/main" id="{55D6D15F-355F-4A16-8DE9-DD8524BD5EE6}"/>
+                <a16:creationId xmlns:a16="http://schemas.microsoft.com/office/drawing/2014/main" id="{ACE4A714-80EE-4430-BF13-3FCD52250D03}"/>
               </a:ext>
             </a:extLst>
           </p:cNvPr>
@@ -15016,7 +15206,7 @@
           <p:cNvPr id="47" name="">
             <a:extLst xmlns:a="http://schemas.openxmlformats.org/drawingml/2006/main">
               <a:ext uri="{FF2B5EF4-FFF2-40B4-BE49-F238E27FC236}">
-                <a16:creationId xmlns:a16="http://schemas.microsoft.com/office/drawing/2014/main" id="{06B5F676-DE5E-4CF8-BB53-CD6B4FBE4E9B}"/>
+                <a16:creationId xmlns:a16="http://schemas.microsoft.com/office/drawing/2014/main" id="{182089A5-974A-4220-BE6B-A2B7BF3ACAE1}"/>
               </a:ext>
             </a:extLst>
           </p:cNvPr>
@@ -15049,7 +15239,7 @@
           <p:cNvPr id="48" name="">
             <a:extLst xmlns:a="http://schemas.openxmlformats.org/drawingml/2006/main">
               <a:ext uri="{FF2B5EF4-FFF2-40B4-BE49-F238E27FC236}">
-                <a16:creationId xmlns:a16="http://schemas.microsoft.com/office/drawing/2014/main" id="{2593154D-A7F7-4DDC-9DBA-F41313C6D248}"/>
+                <a16:creationId xmlns:a16="http://schemas.microsoft.com/office/drawing/2014/main" id="{3E0E6A19-9A0E-4F07-97B9-4A710BAEE1C4}"/>
               </a:ext>
             </a:extLst>
           </p:cNvPr>
@@ -15082,7 +15272,7 @@
           <p:cNvPr id="49" name="">
             <a:extLst xmlns:a="http://schemas.openxmlformats.org/drawingml/2006/main">
               <a:ext uri="{FF2B5EF4-FFF2-40B4-BE49-F238E27FC236}">
-                <a16:creationId xmlns:a16="http://schemas.microsoft.com/office/drawing/2014/main" id="{5729320B-C28B-4798-9443-19826D710317}"/>
+                <a16:creationId xmlns:a16="http://schemas.microsoft.com/office/drawing/2014/main" id="{55F53DBE-8F33-415E-937A-CAA2EEF7F186}"/>
               </a:ext>
             </a:extLst>
           </p:cNvPr>
@@ -15115,7 +15305,7 @@
           <p:cNvPr id="50" name="">
             <a:extLst xmlns:a="http://schemas.openxmlformats.org/drawingml/2006/main">
               <a:ext uri="{FF2B5EF4-FFF2-40B4-BE49-F238E27FC236}">
-                <a16:creationId xmlns:a16="http://schemas.microsoft.com/office/drawing/2014/main" id="{04CD4D90-E366-42B4-80A8-EAB4B2BB1B51}"/>
+                <a16:creationId xmlns:a16="http://schemas.microsoft.com/office/drawing/2014/main" id="{9D39CEE7-3160-4369-A0CF-D6A9A1790076}"/>
               </a:ext>
             </a:extLst>
           </p:cNvPr>
@@ -15148,7 +15338,7 @@
           <p:cNvPr id="51" name="">
             <a:extLst xmlns:a="http://schemas.openxmlformats.org/drawingml/2006/main">
               <a:ext uri="{FF2B5EF4-FFF2-40B4-BE49-F238E27FC236}">
-                <a16:creationId xmlns:a16="http://schemas.microsoft.com/office/drawing/2014/main" id="{9B32260E-2C73-402F-A038-712993ED7766}"/>
+                <a16:creationId xmlns:a16="http://schemas.microsoft.com/office/drawing/2014/main" id="{EA98DB5A-4828-436D-804A-61D58493625F}"/>
               </a:ext>
             </a:extLst>
           </p:cNvPr>
@@ -15181,7 +15371,7 @@
           <p:cNvPr id="52" name="">
             <a:extLst xmlns:a="http://schemas.openxmlformats.org/drawingml/2006/main">
               <a:ext uri="{FF2B5EF4-FFF2-40B4-BE49-F238E27FC236}">
-                <a16:creationId xmlns:a16="http://schemas.microsoft.com/office/drawing/2014/main" id="{E02B37DB-A9D6-4447-AB12-83F50B8D84A4}"/>
+                <a16:creationId xmlns:a16="http://schemas.microsoft.com/office/drawing/2014/main" id="{F0170143-1B52-405C-A8E8-C6CB2D8D6FB5}"/>
               </a:ext>
             </a:extLst>
           </p:cNvPr>
@@ -15214,7 +15404,7 @@
           <p:cNvPr id="53" name="">
             <a:extLst xmlns:a="http://schemas.openxmlformats.org/drawingml/2006/main">
               <a:ext uri="{FF2B5EF4-FFF2-40B4-BE49-F238E27FC236}">
-                <a16:creationId xmlns:a16="http://schemas.microsoft.com/office/drawing/2014/main" id="{B1626DDB-BEE6-4E1D-9424-DE188D88941C}"/>
+                <a16:creationId xmlns:a16="http://schemas.microsoft.com/office/drawing/2014/main" id="{BC92B229-33DA-4C97-B42C-6A77AF04EEFB}"/>
               </a:ext>
             </a:extLst>
           </p:cNvPr>
@@ -15247,7 +15437,7 @@
           <p:cNvPr id="54" name="">
             <a:extLst xmlns:a="http://schemas.openxmlformats.org/drawingml/2006/main">
               <a:ext uri="{FF2B5EF4-FFF2-40B4-BE49-F238E27FC236}">
-                <a16:creationId xmlns:a16="http://schemas.microsoft.com/office/drawing/2014/main" id="{955DF4DB-44CD-4191-8602-B7D2231867B9}"/>
+                <a16:creationId xmlns:a16="http://schemas.microsoft.com/office/drawing/2014/main" id="{E8DFB681-03CB-4101-A4FA-B2857C57C3B6}"/>
               </a:ext>
             </a:extLst>
           </p:cNvPr>
@@ -15280,7 +15470,7 @@
           <p:cNvPr id="55" name="">
             <a:extLst xmlns:a="http://schemas.openxmlformats.org/drawingml/2006/main">
               <a:ext uri="{FF2B5EF4-FFF2-40B4-BE49-F238E27FC236}">
-                <a16:creationId xmlns:a16="http://schemas.microsoft.com/office/drawing/2014/main" id="{F4B718E8-403E-4DC5-AF73-ED45CB1EE80D}"/>
+                <a16:creationId xmlns:a16="http://schemas.microsoft.com/office/drawing/2014/main" id="{745733C2-F8CF-4380-8ED4-BE0DB0B4D3AB}"/>
               </a:ext>
             </a:extLst>
           </p:cNvPr>
@@ -15313,7 +15503,7 @@
           <p:cNvPr id="56" name="">
             <a:extLst xmlns:a="http://schemas.openxmlformats.org/drawingml/2006/main">
               <a:ext uri="{FF2B5EF4-FFF2-40B4-BE49-F238E27FC236}">
-                <a16:creationId xmlns:a16="http://schemas.microsoft.com/office/drawing/2014/main" id="{65777A47-5095-4FB1-84A1-41EBBFDAA74E}"/>
+                <a16:creationId xmlns:a16="http://schemas.microsoft.com/office/drawing/2014/main" id="{AF29CBD4-1C0B-413C-95A7-9C8BA5126D2A}"/>
               </a:ext>
             </a:extLst>
           </p:cNvPr>
@@ -15346,7 +15536,7 @@
           <p:cNvPr id="57" name="">
             <a:extLst xmlns:a="http://schemas.openxmlformats.org/drawingml/2006/main">
               <a:ext uri="{FF2B5EF4-FFF2-40B4-BE49-F238E27FC236}">
-                <a16:creationId xmlns:a16="http://schemas.microsoft.com/office/drawing/2014/main" id="{8E209512-F55C-4546-BAEB-9C5FBBFBF5BE}"/>
+                <a16:creationId xmlns:a16="http://schemas.microsoft.com/office/drawing/2014/main" id="{F078E4F5-399E-4906-8382-383DE17606B6}"/>
               </a:ext>
             </a:extLst>
           </p:cNvPr>
@@ -15379,7 +15569,7 @@
           <p:cNvPr id="58" name="">
             <a:extLst xmlns:a="http://schemas.openxmlformats.org/drawingml/2006/main">
               <a:ext uri="{FF2B5EF4-FFF2-40B4-BE49-F238E27FC236}">
-                <a16:creationId xmlns:a16="http://schemas.microsoft.com/office/drawing/2014/main" id="{2D82DF4F-45DB-4632-8D20-823395ED07EC}"/>
+                <a16:creationId xmlns:a16="http://schemas.microsoft.com/office/drawing/2014/main" id="{D6063B8F-FC88-404E-BED5-75AF4BC59B5A}"/>
               </a:ext>
             </a:extLst>
           </p:cNvPr>
@@ -15412,7 +15602,7 @@
           <p:cNvPr id="59" name="">
             <a:extLst xmlns:a="http://schemas.openxmlformats.org/drawingml/2006/main">
               <a:ext uri="{FF2B5EF4-FFF2-40B4-BE49-F238E27FC236}">
-                <a16:creationId xmlns:a16="http://schemas.microsoft.com/office/drawing/2014/main" id="{3490B0EA-4EEC-4D74-86B4-CFB59BEDEBA7}"/>
+                <a16:creationId xmlns:a16="http://schemas.microsoft.com/office/drawing/2014/main" id="{7418DBD3-0679-46E8-AAFD-3A942E44783B}"/>
               </a:ext>
             </a:extLst>
           </p:cNvPr>
@@ -15445,7 +15635,7 @@
           <p:cNvPr id="60" name="">
             <a:extLst xmlns:a="http://schemas.openxmlformats.org/drawingml/2006/main">
               <a:ext uri="{FF2B5EF4-FFF2-40B4-BE49-F238E27FC236}">
-                <a16:creationId xmlns:a16="http://schemas.microsoft.com/office/drawing/2014/main" id="{26ADC1F4-600F-4C0F-B86E-B42AE357D76C}"/>
+                <a16:creationId xmlns:a16="http://schemas.microsoft.com/office/drawing/2014/main" id="{88ACBE04-9E6A-418E-BB9F-A0BDFD45754A}"/>
               </a:ext>
             </a:extLst>
           </p:cNvPr>
@@ -15478,7 +15668,7 @@
           <p:cNvPr id="61" name="">
             <a:extLst xmlns:a="http://schemas.openxmlformats.org/drawingml/2006/main">
               <a:ext uri="{FF2B5EF4-FFF2-40B4-BE49-F238E27FC236}">
-                <a16:creationId xmlns:a16="http://schemas.microsoft.com/office/drawing/2014/main" id="{531A0491-E95F-45A9-A799-FCBCAFED2FAD}"/>
+                <a16:creationId xmlns:a16="http://schemas.microsoft.com/office/drawing/2014/main" id="{C1AE7E7E-ECA8-47F1-BD25-AD0409762680}"/>
               </a:ext>
             </a:extLst>
           </p:cNvPr>
@@ -15511,7 +15701,7 @@
           <p:cNvPr id="62" name="">
             <a:extLst xmlns:a="http://schemas.openxmlformats.org/drawingml/2006/main">
               <a:ext uri="{FF2B5EF4-FFF2-40B4-BE49-F238E27FC236}">
-                <a16:creationId xmlns:a16="http://schemas.microsoft.com/office/drawing/2014/main" id="{00DCD2AF-9C5C-4486-8834-FF9324068679}"/>
+                <a16:creationId xmlns:a16="http://schemas.microsoft.com/office/drawing/2014/main" id="{1B249473-EAE3-4FA6-B2C9-B72C7BE3F320}"/>
               </a:ext>
             </a:extLst>
           </p:cNvPr>
@@ -15544,7 +15734,7 @@
           <p:cNvPr id="63" name="">
             <a:extLst xmlns:a="http://schemas.openxmlformats.org/drawingml/2006/main">
               <a:ext uri="{FF2B5EF4-FFF2-40B4-BE49-F238E27FC236}">
-                <a16:creationId xmlns:a16="http://schemas.microsoft.com/office/drawing/2014/main" id="{0A32A706-C276-4CC1-97DC-755344E9827A}"/>
+                <a16:creationId xmlns:a16="http://schemas.microsoft.com/office/drawing/2014/main" id="{BC88BEDB-14D1-46EC-93AA-22C4DEB06574}"/>
               </a:ext>
             </a:extLst>
           </p:cNvPr>
@@ -15577,7 +15767,7 @@
           <p:cNvPr id="64" name="">
             <a:extLst xmlns:a="http://schemas.openxmlformats.org/drawingml/2006/main">
               <a:ext uri="{FF2B5EF4-FFF2-40B4-BE49-F238E27FC236}">
-                <a16:creationId xmlns:a16="http://schemas.microsoft.com/office/drawing/2014/main" id="{74E33EB2-A2A4-4AA7-95A1-920DEE29CCC2}"/>
+                <a16:creationId xmlns:a16="http://schemas.microsoft.com/office/drawing/2014/main" id="{7AC05F80-CCCF-4F80-8014-753ABFFCEFCA}"/>
               </a:ext>
             </a:extLst>
           </p:cNvPr>
@@ -15610,7 +15800,7 @@
           <p:cNvPr id="65" name="">
             <a:extLst xmlns:a="http://schemas.openxmlformats.org/drawingml/2006/main">
               <a:ext uri="{FF2B5EF4-FFF2-40B4-BE49-F238E27FC236}">
-                <a16:creationId xmlns:a16="http://schemas.microsoft.com/office/drawing/2014/main" id="{DC9CF618-AEA6-4DFC-A270-13D6D4A76E0F}"/>
+                <a16:creationId xmlns:a16="http://schemas.microsoft.com/office/drawing/2014/main" id="{B1C820C0-D361-49B0-BE8C-8E394B52478C}"/>
               </a:ext>
             </a:extLst>
           </p:cNvPr>
@@ -15643,7 +15833,7 @@
           <p:cNvPr id="66" name="">
             <a:extLst xmlns:a="http://schemas.openxmlformats.org/drawingml/2006/main">
               <a:ext uri="{FF2B5EF4-FFF2-40B4-BE49-F238E27FC236}">
-                <a16:creationId xmlns:a16="http://schemas.microsoft.com/office/drawing/2014/main" id="{FCE8D57B-6B16-43D4-B95F-B115C47EDF63}"/>
+                <a16:creationId xmlns:a16="http://schemas.microsoft.com/office/drawing/2014/main" id="{ACFAA6F1-DFB3-4E5C-A6D0-2A6DCB32D002}"/>
               </a:ext>
             </a:extLst>
           </p:cNvPr>
@@ -15676,7 +15866,7 @@
           <p:cNvPr id="67" name="">
             <a:extLst xmlns:a="http://schemas.openxmlformats.org/drawingml/2006/main">
               <a:ext uri="{FF2B5EF4-FFF2-40B4-BE49-F238E27FC236}">
-                <a16:creationId xmlns:a16="http://schemas.microsoft.com/office/drawing/2014/main" id="{AA8D1BA1-C08B-4A65-94D6-8FD7719C4CBA}"/>
+                <a16:creationId xmlns:a16="http://schemas.microsoft.com/office/drawing/2014/main" id="{9FD5A5CA-1074-4481-8F4A-5BCC08BC6878}"/>
               </a:ext>
             </a:extLst>
           </p:cNvPr>
@@ -15709,7 +15899,7 @@
           <p:cNvPr id="68" name="">
             <a:extLst xmlns:a="http://schemas.openxmlformats.org/drawingml/2006/main">
               <a:ext uri="{FF2B5EF4-FFF2-40B4-BE49-F238E27FC236}">
-                <a16:creationId xmlns:a16="http://schemas.microsoft.com/office/drawing/2014/main" id="{D0C92761-A365-4E36-B0D7-DF1F4CD15826}"/>
+                <a16:creationId xmlns:a16="http://schemas.microsoft.com/office/drawing/2014/main" id="{5CECFFB1-D92D-4307-8229-EFE9CCB325CC}"/>
               </a:ext>
             </a:extLst>
           </p:cNvPr>
@@ -15742,7 +15932,7 @@
           <p:cNvPr id="69" name="">
             <a:extLst xmlns:a="http://schemas.openxmlformats.org/drawingml/2006/main">
               <a:ext uri="{FF2B5EF4-FFF2-40B4-BE49-F238E27FC236}">
-                <a16:creationId xmlns:a16="http://schemas.microsoft.com/office/drawing/2014/main" id="{CF4DD4BE-2C79-4215-93E2-73EBBCEFBDDB}"/>
+                <a16:creationId xmlns:a16="http://schemas.microsoft.com/office/drawing/2014/main" id="{ED19D188-99AA-401D-96C3-6CBE809FCCB4}"/>
               </a:ext>
             </a:extLst>
           </p:cNvPr>
@@ -15775,7 +15965,7 @@
           <p:cNvPr id="70" name="">
             <a:extLst xmlns:a="http://schemas.openxmlformats.org/drawingml/2006/main">
               <a:ext uri="{FF2B5EF4-FFF2-40B4-BE49-F238E27FC236}">
-                <a16:creationId xmlns:a16="http://schemas.microsoft.com/office/drawing/2014/main" id="{C6106830-84D8-4140-9E02-D4DBD14CB8A6}"/>
+                <a16:creationId xmlns:a16="http://schemas.microsoft.com/office/drawing/2014/main" id="{413EEC9E-5C15-43C7-BAA2-EB76231BBD12}"/>
               </a:ext>
             </a:extLst>
           </p:cNvPr>
@@ -15808,7 +15998,7 @@
           <p:cNvPr id="71" name="">
             <a:extLst xmlns:a="http://schemas.openxmlformats.org/drawingml/2006/main">
               <a:ext uri="{FF2B5EF4-FFF2-40B4-BE49-F238E27FC236}">
-                <a16:creationId xmlns:a16="http://schemas.microsoft.com/office/drawing/2014/main" id="{78DFAE24-F22C-4F6F-BBF0-E64DFD234AC4}"/>
+                <a16:creationId xmlns:a16="http://schemas.microsoft.com/office/drawing/2014/main" id="{6DDE665F-E772-4411-91CF-F9DA19442573}"/>
               </a:ext>
             </a:extLst>
           </p:cNvPr>
@@ -15841,7 +16031,7 @@
           <p:cNvPr id="72" name="">
             <a:extLst xmlns:a="http://schemas.openxmlformats.org/drawingml/2006/main">
               <a:ext uri="{FF2B5EF4-FFF2-40B4-BE49-F238E27FC236}">
-                <a16:creationId xmlns:a16="http://schemas.microsoft.com/office/drawing/2014/main" id="{770CEE1A-C049-4D08-88F4-FBFFF02C128E}"/>
+                <a16:creationId xmlns:a16="http://schemas.microsoft.com/office/drawing/2014/main" id="{6D2C5333-75A3-4FA4-8611-68AABF1F56D6}"/>
               </a:ext>
             </a:extLst>
           </p:cNvPr>
@@ -15874,7 +16064,7 @@
           <p:cNvPr id="73" name="">
             <a:extLst xmlns:a="http://schemas.openxmlformats.org/drawingml/2006/main">
               <a:ext uri="{FF2B5EF4-FFF2-40B4-BE49-F238E27FC236}">
-                <a16:creationId xmlns:a16="http://schemas.microsoft.com/office/drawing/2014/main" id="{B8C28071-0212-458C-8F04-8CA367A6D1C2}"/>
+                <a16:creationId xmlns:a16="http://schemas.microsoft.com/office/drawing/2014/main" id="{8FE13564-7789-4CB5-9409-706755EF476D}"/>
               </a:ext>
             </a:extLst>
           </p:cNvPr>
@@ -15907,7 +16097,7 @@
           <p:cNvPr id="74" name="">
             <a:extLst xmlns:a="http://schemas.openxmlformats.org/drawingml/2006/main">
               <a:ext uri="{FF2B5EF4-FFF2-40B4-BE49-F238E27FC236}">
-                <a16:creationId xmlns:a16="http://schemas.microsoft.com/office/drawing/2014/main" id="{EBF82483-6D28-4E74-B785-8FD8D849EF45}"/>
+                <a16:creationId xmlns:a16="http://schemas.microsoft.com/office/drawing/2014/main" id="{58C36A4A-7B1F-40A5-971F-4969793F2B3D}"/>
               </a:ext>
             </a:extLst>
           </p:cNvPr>
@@ -15940,7 +16130,7 @@
           <p:cNvPr id="75" name="">
             <a:extLst xmlns:a="http://schemas.openxmlformats.org/drawingml/2006/main">
               <a:ext uri="{FF2B5EF4-FFF2-40B4-BE49-F238E27FC236}">
-                <a16:creationId xmlns:a16="http://schemas.microsoft.com/office/drawing/2014/main" id="{683F14C3-4FFE-419D-A7F0-4A0DD84DC198}"/>
+                <a16:creationId xmlns:a16="http://schemas.microsoft.com/office/drawing/2014/main" id="{247C8F2C-94DE-41FC-BEE6-1D5624291276}"/>
               </a:ext>
             </a:extLst>
           </p:cNvPr>
@@ -15973,7 +16163,7 @@
           <p:cNvPr id="76" name="">
             <a:extLst xmlns:a="http://schemas.openxmlformats.org/drawingml/2006/main">
               <a:ext uri="{FF2B5EF4-FFF2-40B4-BE49-F238E27FC236}">
-                <a16:creationId xmlns:a16="http://schemas.microsoft.com/office/drawing/2014/main" id="{79E0E107-D978-448C-BC02-D4A2B08C5127}"/>
+                <a16:creationId xmlns:a16="http://schemas.microsoft.com/office/drawing/2014/main" id="{623097CF-0A4B-4271-A855-0236AD59B049}"/>
               </a:ext>
             </a:extLst>
           </p:cNvPr>
@@ -16006,7 +16196,7 @@
           <p:cNvPr id="77" name="">
             <a:extLst xmlns:a="http://schemas.openxmlformats.org/drawingml/2006/main">
               <a:ext uri="{FF2B5EF4-FFF2-40B4-BE49-F238E27FC236}">
-                <a16:creationId xmlns:a16="http://schemas.microsoft.com/office/drawing/2014/main" id="{926E932C-67EB-4F0A-85F6-32BDB01064C1}"/>
+                <a16:creationId xmlns:a16="http://schemas.microsoft.com/office/drawing/2014/main" id="{0896FC70-7B9D-4102-8A78-0015D0FE5293}"/>
               </a:ext>
             </a:extLst>
           </p:cNvPr>
@@ -16039,7 +16229,7 @@
           <p:cNvPr id="78" name="">
             <a:extLst xmlns:a="http://schemas.openxmlformats.org/drawingml/2006/main">
               <a:ext uri="{FF2B5EF4-FFF2-40B4-BE49-F238E27FC236}">
-                <a16:creationId xmlns:a16="http://schemas.microsoft.com/office/drawing/2014/main" id="{80EF55C1-2EF2-4A18-88A6-DECBCA184E52}"/>
+                <a16:creationId xmlns:a16="http://schemas.microsoft.com/office/drawing/2014/main" id="{B052D831-18DA-4337-97F5-E60AE2EC13AD}"/>
               </a:ext>
             </a:extLst>
           </p:cNvPr>
@@ -16072,7 +16262,7 @@
           <p:cNvPr id="79" name="">
             <a:extLst xmlns:a="http://schemas.openxmlformats.org/drawingml/2006/main">
               <a:ext uri="{FF2B5EF4-FFF2-40B4-BE49-F238E27FC236}">
-                <a16:creationId xmlns:a16="http://schemas.microsoft.com/office/drawing/2014/main" id="{6C5CFA9D-6181-49FE-9EDC-435E47024626}"/>
+                <a16:creationId xmlns:a16="http://schemas.microsoft.com/office/drawing/2014/main" id="{1BE14C5A-5985-4A9C-9AEF-C6B22A637D05}"/>
               </a:ext>
             </a:extLst>
           </p:cNvPr>
@@ -16105,7 +16295,7 @@
           <p:cNvPr id="80" name="">
             <a:extLst xmlns:a="http://schemas.openxmlformats.org/drawingml/2006/main">
               <a:ext uri="{FF2B5EF4-FFF2-40B4-BE49-F238E27FC236}">
-                <a16:creationId xmlns:a16="http://schemas.microsoft.com/office/drawing/2014/main" id="{DCF8B54C-E497-4179-A07B-BB1D6D41775A}"/>
+                <a16:creationId xmlns:a16="http://schemas.microsoft.com/office/drawing/2014/main" id="{07DB2A61-0EB7-4001-B535-F3E4F17732BD}"/>
               </a:ext>
             </a:extLst>
           </p:cNvPr>
@@ -16138,7 +16328,7 @@
           <p:cNvPr id="81" name="">
             <a:extLst xmlns:a="http://schemas.openxmlformats.org/drawingml/2006/main">
               <a:ext uri="{FF2B5EF4-FFF2-40B4-BE49-F238E27FC236}">
-                <a16:creationId xmlns:a16="http://schemas.microsoft.com/office/drawing/2014/main" id="{8DF5FBBE-032B-41E3-8B4F-2479FBEABC34}"/>
+                <a16:creationId xmlns:a16="http://schemas.microsoft.com/office/drawing/2014/main" id="{839864E1-11E5-41FF-982F-47C20F4B2367}"/>
               </a:ext>
             </a:extLst>
           </p:cNvPr>
@@ -16171,7 +16361,7 @@
           <p:cNvPr id="82" name="">
             <a:extLst xmlns:a="http://schemas.openxmlformats.org/drawingml/2006/main">
               <a:ext uri="{FF2B5EF4-FFF2-40B4-BE49-F238E27FC236}">
-                <a16:creationId xmlns:a16="http://schemas.microsoft.com/office/drawing/2014/main" id="{30F634E8-9A1D-4766-83F9-D4186E29582A}"/>
+                <a16:creationId xmlns:a16="http://schemas.microsoft.com/office/drawing/2014/main" id="{602627D4-33BE-4DA8-BE41-1EE94E3939F5}"/>
               </a:ext>
             </a:extLst>
           </p:cNvPr>
@@ -16204,7 +16394,7 @@
           <p:cNvPr id="83" name="">
             <a:extLst xmlns:a="http://schemas.openxmlformats.org/drawingml/2006/main">
               <a:ext uri="{FF2B5EF4-FFF2-40B4-BE49-F238E27FC236}">
-                <a16:creationId xmlns:a16="http://schemas.microsoft.com/office/drawing/2014/main" id="{5EBCAC72-BA61-4F28-BA02-C9C1893593B6}"/>
+                <a16:creationId xmlns:a16="http://schemas.microsoft.com/office/drawing/2014/main" id="{D0F536F6-D923-483F-AEDC-05BD3E99C508}"/>
               </a:ext>
             </a:extLst>
           </p:cNvPr>
@@ -16237,7 +16427,7 @@
           <p:cNvPr id="84" name="">
             <a:extLst xmlns:a="http://schemas.openxmlformats.org/drawingml/2006/main">
               <a:ext uri="{FF2B5EF4-FFF2-40B4-BE49-F238E27FC236}">
-                <a16:creationId xmlns:a16="http://schemas.microsoft.com/office/drawing/2014/main" id="{0E3976B0-A71E-4DEE-86DB-633ACAF98638}"/>
+                <a16:creationId xmlns:a16="http://schemas.microsoft.com/office/drawing/2014/main" id="{25DA6D27-A398-4455-BB1A-B09A126D9E76}"/>
               </a:ext>
             </a:extLst>
           </p:cNvPr>
@@ -16270,7 +16460,7 @@
           <p:cNvPr id="85" name="">
             <a:extLst xmlns:a="http://schemas.openxmlformats.org/drawingml/2006/main">
               <a:ext uri="{FF2B5EF4-FFF2-40B4-BE49-F238E27FC236}">
-                <a16:creationId xmlns:a16="http://schemas.microsoft.com/office/drawing/2014/main" id="{C6771EEC-AAA6-46AD-897E-61F378C6ECDF}"/>
+                <a16:creationId xmlns:a16="http://schemas.microsoft.com/office/drawing/2014/main" id="{592AB334-2A5C-4BD8-87FF-5F1DCAE4AD43}"/>
               </a:ext>
             </a:extLst>
           </p:cNvPr>
@@ -16303,7 +16493,7 @@
           <p:cNvPr id="86" name="">
             <a:extLst xmlns:a="http://schemas.openxmlformats.org/drawingml/2006/main">
               <a:ext uri="{FF2B5EF4-FFF2-40B4-BE49-F238E27FC236}">
-                <a16:creationId xmlns:a16="http://schemas.microsoft.com/office/drawing/2014/main" id="{8CA068F9-B1FD-48EA-8ECC-B27689B5B7D0}"/>
+                <a16:creationId xmlns:a16="http://schemas.microsoft.com/office/drawing/2014/main" id="{8251BC0B-BDA9-4521-8378-8CEE470FC974}"/>
               </a:ext>
             </a:extLst>
           </p:cNvPr>
@@ -16336,7 +16526,7 @@
           <p:cNvPr id="87" name="">
             <a:extLst xmlns:a="http://schemas.openxmlformats.org/drawingml/2006/main">
               <a:ext uri="{FF2B5EF4-FFF2-40B4-BE49-F238E27FC236}">
-                <a16:creationId xmlns:a16="http://schemas.microsoft.com/office/drawing/2014/main" id="{9738F4BA-9F3B-4673-9D14-8AF91E3254F2}"/>
+                <a16:creationId xmlns:a16="http://schemas.microsoft.com/office/drawing/2014/main" id="{9AFD40CC-1A2F-4F38-A54B-DE2EF85A5B9B}"/>
               </a:ext>
             </a:extLst>
           </p:cNvPr>
@@ -16369,7 +16559,7 @@
           <p:cNvPr id="88" name="">
             <a:extLst xmlns:a="http://schemas.openxmlformats.org/drawingml/2006/main">
               <a:ext uri="{FF2B5EF4-FFF2-40B4-BE49-F238E27FC236}">
-                <a16:creationId xmlns:a16="http://schemas.microsoft.com/office/drawing/2014/main" id="{FBB8A765-CE18-4D20-9799-0D248168E98A}"/>
+                <a16:creationId xmlns:a16="http://schemas.microsoft.com/office/drawing/2014/main" id="{5365D9D0-7BBF-4310-9021-52B8D60BC37C}"/>
               </a:ext>
             </a:extLst>
           </p:cNvPr>
@@ -16402,7 +16592,7 @@
           <p:cNvPr id="89" name="">
             <a:extLst xmlns:a="http://schemas.openxmlformats.org/drawingml/2006/main">
               <a:ext uri="{FF2B5EF4-FFF2-40B4-BE49-F238E27FC236}">
-                <a16:creationId xmlns:a16="http://schemas.microsoft.com/office/drawing/2014/main" id="{18AD9990-FFE5-4CD7-B72F-D1B769D6E419}"/>
+                <a16:creationId xmlns:a16="http://schemas.microsoft.com/office/drawing/2014/main" id="{8E1C61FA-026F-4EC7-BE08-B3573729D87C}"/>
               </a:ext>
             </a:extLst>
           </p:cNvPr>
@@ -16435,7 +16625,7 @@
           <p:cNvPr id="90" name="">
             <a:extLst xmlns:a="http://schemas.openxmlformats.org/drawingml/2006/main">
               <a:ext uri="{FF2B5EF4-FFF2-40B4-BE49-F238E27FC236}">
-                <a16:creationId xmlns:a16="http://schemas.microsoft.com/office/drawing/2014/main" id="{355F0843-E307-4053-A2E8-84B8530804DE}"/>
+                <a16:creationId xmlns:a16="http://schemas.microsoft.com/office/drawing/2014/main" id="{DA47FA01-4FA9-4CEA-823A-A25F60C7FC17}"/>
               </a:ext>
             </a:extLst>
           </p:cNvPr>
@@ -16468,7 +16658,7 @@
           <p:cNvPr id="91" name="">
             <a:extLst xmlns:a="http://schemas.openxmlformats.org/drawingml/2006/main">
               <a:ext uri="{FF2B5EF4-FFF2-40B4-BE49-F238E27FC236}">
-                <a16:creationId xmlns:a16="http://schemas.microsoft.com/office/drawing/2014/main" id="{65594F95-33BD-43EB-8708-EC75EDF2FA5B}"/>
+                <a16:creationId xmlns:a16="http://schemas.microsoft.com/office/drawing/2014/main" id="{FAF70BAC-2845-4BA9-BE0B-A89799B49503}"/>
               </a:ext>
             </a:extLst>
           </p:cNvPr>
@@ -16501,7 +16691,7 @@
           <p:cNvPr id="92" name="">
             <a:extLst xmlns:a="http://schemas.openxmlformats.org/drawingml/2006/main">
               <a:ext uri="{FF2B5EF4-FFF2-40B4-BE49-F238E27FC236}">
-                <a16:creationId xmlns:a16="http://schemas.microsoft.com/office/drawing/2014/main" id="{A9589ED4-BDAA-4092-9072-AF21BB16EC60}"/>
+                <a16:creationId xmlns:a16="http://schemas.microsoft.com/office/drawing/2014/main" id="{0E718C6B-747C-4C2C-A42A-50EADF4296C0}"/>
               </a:ext>
             </a:extLst>
           </p:cNvPr>
@@ -16534,7 +16724,7 @@
           <p:cNvPr id="93" name="">
             <a:extLst xmlns:a="http://schemas.openxmlformats.org/drawingml/2006/main">
               <a:ext uri="{FF2B5EF4-FFF2-40B4-BE49-F238E27FC236}">
-                <a16:creationId xmlns:a16="http://schemas.microsoft.com/office/drawing/2014/main" id="{1EAEE65D-FC18-4773-821F-08FB05E5B4E0}"/>
+                <a16:creationId xmlns:a16="http://schemas.microsoft.com/office/drawing/2014/main" id="{2AB2F833-F8B4-4E9C-A139-0BCADEB871F3}"/>
               </a:ext>
             </a:extLst>
           </p:cNvPr>
@@ -16567,7 +16757,7 @@
           <p:cNvPr id="94" name="">
             <a:extLst xmlns:a="http://schemas.openxmlformats.org/drawingml/2006/main">
               <a:ext uri="{FF2B5EF4-FFF2-40B4-BE49-F238E27FC236}">
-                <a16:creationId xmlns:a16="http://schemas.microsoft.com/office/drawing/2014/main" id="{D5885E38-D9E8-4103-8F17-3A0C47AE408F}"/>
+                <a16:creationId xmlns:a16="http://schemas.microsoft.com/office/drawing/2014/main" id="{2B0F165F-0C3B-4ECD-A049-13FCF519AB58}"/>
               </a:ext>
             </a:extLst>
           </p:cNvPr>
@@ -16600,7 +16790,7 @@
           <p:cNvPr id="95" name="">
             <a:extLst xmlns:a="http://schemas.openxmlformats.org/drawingml/2006/main">
               <a:ext uri="{FF2B5EF4-FFF2-40B4-BE49-F238E27FC236}">
-                <a16:creationId xmlns:a16="http://schemas.microsoft.com/office/drawing/2014/main" id="{9915A51C-6718-4EC8-A7E8-041945135BB9}"/>
+                <a16:creationId xmlns:a16="http://schemas.microsoft.com/office/drawing/2014/main" id="{BA52AE0F-D9DB-469C-A667-C623D0BF74A9}"/>
               </a:ext>
             </a:extLst>
           </p:cNvPr>
@@ -16633,7 +16823,7 @@
           <p:cNvPr id="96" name="">
             <a:extLst xmlns:a="http://schemas.openxmlformats.org/drawingml/2006/main">
               <a:ext uri="{FF2B5EF4-FFF2-40B4-BE49-F238E27FC236}">
-                <a16:creationId xmlns:a16="http://schemas.microsoft.com/office/drawing/2014/main" id="{5F02D5FD-CAA8-488D-8464-989F7BD672AB}"/>
+                <a16:creationId xmlns:a16="http://schemas.microsoft.com/office/drawing/2014/main" id="{DD288864-3F9E-4B68-9A45-250AA8407A2C}"/>
               </a:ext>
             </a:extLst>
           </p:cNvPr>
@@ -16666,7 +16856,7 @@
           <p:cNvPr id="97" name="">
             <a:extLst xmlns:a="http://schemas.openxmlformats.org/drawingml/2006/main">
               <a:ext uri="{FF2B5EF4-FFF2-40B4-BE49-F238E27FC236}">
-                <a16:creationId xmlns:a16="http://schemas.microsoft.com/office/drawing/2014/main" id="{DB668728-A191-4659-8BE5-92773FF811AF}"/>
+                <a16:creationId xmlns:a16="http://schemas.microsoft.com/office/drawing/2014/main" id="{8871349B-05E2-45A1-8AFE-5EED637ED0FE}"/>
               </a:ext>
             </a:extLst>
           </p:cNvPr>
@@ -16699,7 +16889,7 @@
           <p:cNvPr id="98" name="">
             <a:extLst xmlns:a="http://schemas.openxmlformats.org/drawingml/2006/main">
               <a:ext uri="{FF2B5EF4-FFF2-40B4-BE49-F238E27FC236}">
-                <a16:creationId xmlns:a16="http://schemas.microsoft.com/office/drawing/2014/main" id="{279B884F-21BA-4A86-9D78-6379BA365019}"/>
+                <a16:creationId xmlns:a16="http://schemas.microsoft.com/office/drawing/2014/main" id="{6100B647-AE51-4442-8817-B3E678677622}"/>
               </a:ext>
             </a:extLst>
           </p:cNvPr>
@@ -16732,7 +16922,7 @@
           <p:cNvPr id="99" name="">
             <a:extLst xmlns:a="http://schemas.openxmlformats.org/drawingml/2006/main">
               <a:ext uri="{FF2B5EF4-FFF2-40B4-BE49-F238E27FC236}">
-                <a16:creationId xmlns:a16="http://schemas.microsoft.com/office/drawing/2014/main" id="{757500F9-841C-4C26-9197-C985C8754DD6}"/>
+                <a16:creationId xmlns:a16="http://schemas.microsoft.com/office/drawing/2014/main" id="{7BE9561C-A817-4CA4-B0A0-DA3A951E3852}"/>
               </a:ext>
             </a:extLst>
           </p:cNvPr>
@@ -16765,7 +16955,7 @@
           <p:cNvPr id="100" name="">
             <a:extLst xmlns:a="http://schemas.openxmlformats.org/drawingml/2006/main">
               <a:ext uri="{FF2B5EF4-FFF2-40B4-BE49-F238E27FC236}">
-                <a16:creationId xmlns:a16="http://schemas.microsoft.com/office/drawing/2014/main" id="{B6767955-C7CA-41BA-B8CC-CE10A07AAF25}"/>
+                <a16:creationId xmlns:a16="http://schemas.microsoft.com/office/drawing/2014/main" id="{882B6183-3D27-4CE9-A0BD-91BF3439BC85}"/>
               </a:ext>
             </a:extLst>
           </p:cNvPr>
@@ -16798,7 +16988,7 @@
           <p:cNvPr id="101" name="">
             <a:extLst xmlns:a="http://schemas.openxmlformats.org/drawingml/2006/main">
               <a:ext uri="{FF2B5EF4-FFF2-40B4-BE49-F238E27FC236}">
-                <a16:creationId xmlns:a16="http://schemas.microsoft.com/office/drawing/2014/main" id="{765AC4DB-E0FA-416D-8B4E-29B1F04F9B85}"/>
+                <a16:creationId xmlns:a16="http://schemas.microsoft.com/office/drawing/2014/main" id="{4FC52CFE-52A1-48EF-8748-DF0D0B065B90}"/>
               </a:ext>
             </a:extLst>
           </p:cNvPr>
@@ -16831,7 +17021,7 @@
           <p:cNvPr id="102" name="">
             <a:extLst xmlns:a="http://schemas.openxmlformats.org/drawingml/2006/main">
               <a:ext uri="{FF2B5EF4-FFF2-40B4-BE49-F238E27FC236}">
-                <a16:creationId xmlns:a16="http://schemas.microsoft.com/office/drawing/2014/main" id="{F08815F8-88E9-4E96-89F9-EEDEF84E9B88}"/>
+                <a16:creationId xmlns:a16="http://schemas.microsoft.com/office/drawing/2014/main" id="{55301AFD-1FC1-4AEB-ADEA-D7DD2361FF3B}"/>
               </a:ext>
             </a:extLst>
           </p:cNvPr>
@@ -16864,7 +17054,7 @@
           <p:cNvPr id="103" name="">
             <a:extLst xmlns:a="http://schemas.openxmlformats.org/drawingml/2006/main">
               <a:ext uri="{FF2B5EF4-FFF2-40B4-BE49-F238E27FC236}">
-                <a16:creationId xmlns:a16="http://schemas.microsoft.com/office/drawing/2014/main" id="{3BCC94F2-4EA8-41CB-888E-1EF845392DC7}"/>
+                <a16:creationId xmlns:a16="http://schemas.microsoft.com/office/drawing/2014/main" id="{98994E21-354D-43CA-A548-252CACA20786}"/>
               </a:ext>
             </a:extLst>
           </p:cNvPr>
@@ -16897,7 +17087,7 @@
           <p:cNvPr id="104" name="">
             <a:extLst xmlns:a="http://schemas.openxmlformats.org/drawingml/2006/main">
               <a:ext uri="{FF2B5EF4-FFF2-40B4-BE49-F238E27FC236}">
-                <a16:creationId xmlns:a16="http://schemas.microsoft.com/office/drawing/2014/main" id="{D5D4DBD8-1FE3-44B3-BEA6-2C105C3F4D96}"/>
+                <a16:creationId xmlns:a16="http://schemas.microsoft.com/office/drawing/2014/main" id="{94948189-506D-496F-B844-3D81EA7D3686}"/>
               </a:ext>
             </a:extLst>
           </p:cNvPr>
@@ -16930,7 +17120,7 @@
           <p:cNvPr id="105" name="">
             <a:extLst xmlns:a="http://schemas.openxmlformats.org/drawingml/2006/main">
               <a:ext uri="{FF2B5EF4-FFF2-40B4-BE49-F238E27FC236}">
-                <a16:creationId xmlns:a16="http://schemas.microsoft.com/office/drawing/2014/main" id="{934B5DD5-0538-4F0E-83C0-6F4CC83918FF}"/>
+                <a16:creationId xmlns:a16="http://schemas.microsoft.com/office/drawing/2014/main" id="{01702576-BC08-4415-A08B-95C300DB8AFF}"/>
               </a:ext>
             </a:extLst>
           </p:cNvPr>
@@ -16963,7 +17153,7 @@
           <p:cNvPr id="106" name="">
             <a:extLst xmlns:a="http://schemas.openxmlformats.org/drawingml/2006/main">
               <a:ext uri="{FF2B5EF4-FFF2-40B4-BE49-F238E27FC236}">
-                <a16:creationId xmlns:a16="http://schemas.microsoft.com/office/drawing/2014/main" id="{5A72CFBF-5A33-4999-8F3B-ACDE2C53682D}"/>
+                <a16:creationId xmlns:a16="http://schemas.microsoft.com/office/drawing/2014/main" id="{E225493D-62BC-426E-864F-C042A2DC8223}"/>
               </a:ext>
             </a:extLst>
           </p:cNvPr>
@@ -16998,7 +17188,7 @@
           <p:cNvPr id="107" name="">
             <a:extLst xmlns:a="http://schemas.openxmlformats.org/drawingml/2006/main">
               <a:ext uri="{FF2B5EF4-FFF2-40B4-BE49-F238E27FC236}">
-                <a16:creationId xmlns:a16="http://schemas.microsoft.com/office/drawing/2014/main" id="{D9E8A752-8860-4D3B-892B-48DFCDFF7C77}"/>
+                <a16:creationId xmlns:a16="http://schemas.microsoft.com/office/drawing/2014/main" id="{32A0AD48-1AC5-43D7-903B-26381B4CF791}"/>
               </a:ext>
             </a:extLst>
           </p:cNvPr>
@@ -17031,7 +17221,7 @@
           <p:cNvPr id="108" name="">
             <a:extLst xmlns:a="http://schemas.openxmlformats.org/drawingml/2006/main">
               <a:ext uri="{FF2B5EF4-FFF2-40B4-BE49-F238E27FC236}">
-                <a16:creationId xmlns:a16="http://schemas.microsoft.com/office/drawing/2014/main" id="{7FF123D9-C3EF-4FB7-B323-9FD47D91F5AD}"/>
+                <a16:creationId xmlns:a16="http://schemas.microsoft.com/office/drawing/2014/main" id="{E2E61EDB-7CB4-485B-8278-C147DFAC0D73}"/>
               </a:ext>
             </a:extLst>
           </p:cNvPr>
@@ -17064,7 +17254,7 @@
           <p:cNvPr id="109" name="">
             <a:extLst xmlns:a="http://schemas.openxmlformats.org/drawingml/2006/main">
               <a:ext uri="{FF2B5EF4-FFF2-40B4-BE49-F238E27FC236}">
-                <a16:creationId xmlns:a16="http://schemas.microsoft.com/office/drawing/2014/main" id="{B9EEB42B-308F-41F4-B405-E06C3405EE4F}"/>
+                <a16:creationId xmlns:a16="http://schemas.microsoft.com/office/drawing/2014/main" id="{E29B0CAE-27A5-4637-8729-C330FE923211}"/>
               </a:ext>
             </a:extLst>
           </p:cNvPr>
@@ -17097,7 +17287,7 @@
           <p:cNvPr id="110" name="">
             <a:extLst xmlns:a="http://schemas.openxmlformats.org/drawingml/2006/main">
               <a:ext uri="{FF2B5EF4-FFF2-40B4-BE49-F238E27FC236}">
-                <a16:creationId xmlns:a16="http://schemas.microsoft.com/office/drawing/2014/main" id="{B1FCD92E-A73A-49F1-8889-9FA7316943A2}"/>
+                <a16:creationId xmlns:a16="http://schemas.microsoft.com/office/drawing/2014/main" id="{BF144CA0-D51C-4572-B78E-D5AD839B42F7}"/>
               </a:ext>
             </a:extLst>
           </p:cNvPr>
@@ -17130,7 +17320,7 @@
           <p:cNvPr id="111" name="">
             <a:extLst xmlns:a="http://schemas.openxmlformats.org/drawingml/2006/main">
               <a:ext uri="{FF2B5EF4-FFF2-40B4-BE49-F238E27FC236}">
-                <a16:creationId xmlns:a16="http://schemas.microsoft.com/office/drawing/2014/main" id="{DAD71E44-E63A-4030-A6D4-9CC9C83B981D}"/>
+                <a16:creationId xmlns:a16="http://schemas.microsoft.com/office/drawing/2014/main" id="{57A52820-4489-4F86-AC8D-5BB50BFFBEF1}"/>
               </a:ext>
             </a:extLst>
           </p:cNvPr>
@@ -17163,7 +17353,7 @@
           <p:cNvPr id="112" name="">
             <a:extLst xmlns:a="http://schemas.openxmlformats.org/drawingml/2006/main">
               <a:ext uri="{FF2B5EF4-FFF2-40B4-BE49-F238E27FC236}">
-                <a16:creationId xmlns:a16="http://schemas.microsoft.com/office/drawing/2014/main" id="{03996820-847B-4FE1-9535-81339BB09FFC}"/>
+                <a16:creationId xmlns:a16="http://schemas.microsoft.com/office/drawing/2014/main" id="{447F331D-FE64-496F-B539-FDA4757518E7}"/>
               </a:ext>
             </a:extLst>
           </p:cNvPr>
@@ -17196,7 +17386,7 @@
           <p:cNvPr id="113" name="">
             <a:extLst xmlns:a="http://schemas.openxmlformats.org/drawingml/2006/main">
               <a:ext uri="{FF2B5EF4-FFF2-40B4-BE49-F238E27FC236}">
-                <a16:creationId xmlns:a16="http://schemas.microsoft.com/office/drawing/2014/main" id="{6022D395-BE17-4BB7-9FAE-2AF435D1B8DF}"/>
+                <a16:creationId xmlns:a16="http://schemas.microsoft.com/office/drawing/2014/main" id="{F0CA1363-8D80-4A14-8B11-B60B46BC9C4D}"/>
               </a:ext>
             </a:extLst>
           </p:cNvPr>
@@ -17229,7 +17419,7 @@
           <p:cNvPr id="114" name="">
             <a:extLst xmlns:a="http://schemas.openxmlformats.org/drawingml/2006/main">
               <a:ext uri="{FF2B5EF4-FFF2-40B4-BE49-F238E27FC236}">
-                <a16:creationId xmlns:a16="http://schemas.microsoft.com/office/drawing/2014/main" id="{D4F3D46D-BB59-4CD8-A0A7-E492416C108B}"/>
+                <a16:creationId xmlns:a16="http://schemas.microsoft.com/office/drawing/2014/main" id="{72EC6246-25ED-4D27-A68C-71632F5B30D8}"/>
               </a:ext>
             </a:extLst>
           </p:cNvPr>
@@ -17262,7 +17452,7 @@
           <p:cNvPr id="115" name="">
             <a:extLst xmlns:a="http://schemas.openxmlformats.org/drawingml/2006/main">
               <a:ext uri="{FF2B5EF4-FFF2-40B4-BE49-F238E27FC236}">
-                <a16:creationId xmlns:a16="http://schemas.microsoft.com/office/drawing/2014/main" id="{335C5469-57EE-40A0-8A16-659A2C822DC4}"/>
+                <a16:creationId xmlns:a16="http://schemas.microsoft.com/office/drawing/2014/main" id="{5985F500-56D9-47F6-B9CD-26B32A594CB5}"/>
               </a:ext>
             </a:extLst>
           </p:cNvPr>
@@ -17295,7 +17485,7 @@
           <p:cNvPr id="116" name="">
             <a:extLst xmlns:a="http://schemas.openxmlformats.org/drawingml/2006/main">
               <a:ext uri="{FF2B5EF4-FFF2-40B4-BE49-F238E27FC236}">
-                <a16:creationId xmlns:a16="http://schemas.microsoft.com/office/drawing/2014/main" id="{6ED1BCD9-8553-4FAE-A2C9-30D951F85CDF}"/>
+                <a16:creationId xmlns:a16="http://schemas.microsoft.com/office/drawing/2014/main" id="{E6A5FE9C-74C3-4BA5-BD1D-04C120EE9869}"/>
               </a:ext>
             </a:extLst>
           </p:cNvPr>
@@ -17328,7 +17518,7 @@
           <p:cNvPr id="117" name="">
             <a:extLst xmlns:a="http://schemas.openxmlformats.org/drawingml/2006/main">
               <a:ext uri="{FF2B5EF4-FFF2-40B4-BE49-F238E27FC236}">
-                <a16:creationId xmlns:a16="http://schemas.microsoft.com/office/drawing/2014/main" id="{43D75BBD-57D8-4B8D-9BE8-C16C82386010}"/>
+                <a16:creationId xmlns:a16="http://schemas.microsoft.com/office/drawing/2014/main" id="{4038A516-0268-44A7-9D1E-489280203B7C}"/>
               </a:ext>
             </a:extLst>
           </p:cNvPr>
@@ -17361,7 +17551,7 @@
           <p:cNvPr id="118" name="">
             <a:extLst xmlns:a="http://schemas.openxmlformats.org/drawingml/2006/main">
               <a:ext uri="{FF2B5EF4-FFF2-40B4-BE49-F238E27FC236}">
-                <a16:creationId xmlns:a16="http://schemas.microsoft.com/office/drawing/2014/main" id="{E83CB858-7265-4DCF-A886-602079A1E1FA}"/>
+                <a16:creationId xmlns:a16="http://schemas.microsoft.com/office/drawing/2014/main" id="{558C6B19-49ED-42CA-B140-4F13EBCE0EF4}"/>
               </a:ext>
             </a:extLst>
           </p:cNvPr>
@@ -17394,7 +17584,7 @@
           <p:cNvPr id="119" name="">
             <a:extLst xmlns:a="http://schemas.openxmlformats.org/drawingml/2006/main">
               <a:ext uri="{FF2B5EF4-FFF2-40B4-BE49-F238E27FC236}">
-                <a16:creationId xmlns:a16="http://schemas.microsoft.com/office/drawing/2014/main" id="{994D7393-AC02-48FA-9CE4-E74BB1BFC917}"/>
+                <a16:creationId xmlns:a16="http://schemas.microsoft.com/office/drawing/2014/main" id="{A52353D8-D68D-4425-A9E2-DAB50CF2CD54}"/>
               </a:ext>
             </a:extLst>
           </p:cNvPr>
@@ -17427,7 +17617,7 @@
           <p:cNvPr id="120" name="">
             <a:extLst xmlns:a="http://schemas.openxmlformats.org/drawingml/2006/main">
               <a:ext uri="{FF2B5EF4-FFF2-40B4-BE49-F238E27FC236}">
-                <a16:creationId xmlns:a16="http://schemas.microsoft.com/office/drawing/2014/main" id="{E5A4A5D6-FF0A-4C26-B5A6-B242D2C5FC78}"/>
+                <a16:creationId xmlns:a16="http://schemas.microsoft.com/office/drawing/2014/main" id="{B2315D99-3FDD-4733-9216-56910B0D4A43}"/>
               </a:ext>
             </a:extLst>
           </p:cNvPr>
@@ -17460,7 +17650,7 @@
           <p:cNvPr id="121" name="">
             <a:extLst xmlns:a="http://schemas.openxmlformats.org/drawingml/2006/main">
               <a:ext uri="{FF2B5EF4-FFF2-40B4-BE49-F238E27FC236}">
-                <a16:creationId xmlns:a16="http://schemas.microsoft.com/office/drawing/2014/main" id="{D6E90D15-1B7B-4702-B060-B2C337E53404}"/>
+                <a16:creationId xmlns:a16="http://schemas.microsoft.com/office/drawing/2014/main" id="{2DCAD666-A0E4-44DD-A4B4-E62E0C1D8457}"/>
               </a:ext>
             </a:extLst>
           </p:cNvPr>
@@ -17493,7 +17683,7 @@
           <p:cNvPr id="122" name="">
             <a:extLst xmlns:a="http://schemas.openxmlformats.org/drawingml/2006/main">
               <a:ext uri="{FF2B5EF4-FFF2-40B4-BE49-F238E27FC236}">
-                <a16:creationId xmlns:a16="http://schemas.microsoft.com/office/drawing/2014/main" id="{19B7B827-A820-4AF6-B106-B3569842A7DD}"/>
+                <a16:creationId xmlns:a16="http://schemas.microsoft.com/office/drawing/2014/main" id="{6519A3F2-6F4C-4F9A-BA1E-2C3EB34A045C}"/>
               </a:ext>
             </a:extLst>
           </p:cNvPr>
@@ -17526,7 +17716,7 @@
           <p:cNvPr id="123" name="">
             <a:extLst xmlns:a="http://schemas.openxmlformats.org/drawingml/2006/main">
               <a:ext uri="{FF2B5EF4-FFF2-40B4-BE49-F238E27FC236}">
-                <a16:creationId xmlns:a16="http://schemas.microsoft.com/office/drawing/2014/main" id="{1138B243-7988-4E87-8872-B17BBDD072AE}"/>
+                <a16:creationId xmlns:a16="http://schemas.microsoft.com/office/drawing/2014/main" id="{D24DA83A-7E69-4642-A469-0B812C1D4F41}"/>
               </a:ext>
             </a:extLst>
           </p:cNvPr>
@@ -17559,7 +17749,7 @@
           <p:cNvPr id="124" name="">
             <a:extLst xmlns:a="http://schemas.openxmlformats.org/drawingml/2006/main">
               <a:ext uri="{FF2B5EF4-FFF2-40B4-BE49-F238E27FC236}">
-                <a16:creationId xmlns:a16="http://schemas.microsoft.com/office/drawing/2014/main" id="{B4192CF0-06E2-44D6-8CC5-01EB70A6935A}"/>
+                <a16:creationId xmlns:a16="http://schemas.microsoft.com/office/drawing/2014/main" id="{FBA8D3DF-7191-47ED-A3B3-DBA2EF7A8047}"/>
               </a:ext>
             </a:extLst>
           </p:cNvPr>
@@ -17592,7 +17782,7 @@
           <p:cNvPr id="125" name="">
             <a:extLst xmlns:a="http://schemas.openxmlformats.org/drawingml/2006/main">
               <a:ext uri="{FF2B5EF4-FFF2-40B4-BE49-F238E27FC236}">
-                <a16:creationId xmlns:a16="http://schemas.microsoft.com/office/drawing/2014/main" id="{F2B6E78C-07AE-4C60-9783-67BEADB6240D}"/>
+                <a16:creationId xmlns:a16="http://schemas.microsoft.com/office/drawing/2014/main" id="{B7D0629E-DEA6-4127-99D9-BE4E6C27BA34}"/>
               </a:ext>
             </a:extLst>
           </p:cNvPr>
@@ -17625,7 +17815,7 @@
           <p:cNvPr id="126" name="">
             <a:extLst xmlns:a="http://schemas.openxmlformats.org/drawingml/2006/main">
               <a:ext uri="{FF2B5EF4-FFF2-40B4-BE49-F238E27FC236}">
-                <a16:creationId xmlns:a16="http://schemas.microsoft.com/office/drawing/2014/main" id="{44FDD4D8-D19B-4E67-A7D2-16A993BCFA2B}"/>
+                <a16:creationId xmlns:a16="http://schemas.microsoft.com/office/drawing/2014/main" id="{EA636583-55F4-4AAA-84A5-72AB304B9986}"/>
               </a:ext>
             </a:extLst>
           </p:cNvPr>
@@ -17658,7 +17848,7 @@
           <p:cNvPr id="127" name="">
             <a:extLst xmlns:a="http://schemas.openxmlformats.org/drawingml/2006/main">
               <a:ext uri="{FF2B5EF4-FFF2-40B4-BE49-F238E27FC236}">
-                <a16:creationId xmlns:a16="http://schemas.microsoft.com/office/drawing/2014/main" id="{756CED44-1940-4546-A9B8-063AFF2E7101}"/>
+                <a16:creationId xmlns:a16="http://schemas.microsoft.com/office/drawing/2014/main" id="{FC0F8018-B43C-4823-8F20-67F6F1C2B1B3}"/>
               </a:ext>
             </a:extLst>
           </p:cNvPr>
@@ -17691,7 +17881,7 @@
           <p:cNvPr id="128" name="">
             <a:extLst xmlns:a="http://schemas.openxmlformats.org/drawingml/2006/main">
               <a:ext uri="{FF2B5EF4-FFF2-40B4-BE49-F238E27FC236}">
-                <a16:creationId xmlns:a16="http://schemas.microsoft.com/office/drawing/2014/main" id="{794E3029-78A2-43B3-85EE-7DD99E7064D9}"/>
+                <a16:creationId xmlns:a16="http://schemas.microsoft.com/office/drawing/2014/main" id="{36B04E4F-3B88-4221-A487-0E947A8933A5}"/>
               </a:ext>
             </a:extLst>
           </p:cNvPr>
@@ -17724,7 +17914,7 @@
           <p:cNvPr id="129" name="">
             <a:extLst xmlns:a="http://schemas.openxmlformats.org/drawingml/2006/main">
               <a:ext uri="{FF2B5EF4-FFF2-40B4-BE49-F238E27FC236}">
-                <a16:creationId xmlns:a16="http://schemas.microsoft.com/office/drawing/2014/main" id="{1816CFB6-74BE-45F2-8015-F735897D920A}"/>
+                <a16:creationId xmlns:a16="http://schemas.microsoft.com/office/drawing/2014/main" id="{A67EB651-4330-4DB0-BBFD-51A677D4984D}"/>
               </a:ext>
             </a:extLst>
           </p:cNvPr>
@@ -17757,7 +17947,7 @@
           <p:cNvPr id="130" name="">
             <a:extLst xmlns:a="http://schemas.openxmlformats.org/drawingml/2006/main">
               <a:ext uri="{FF2B5EF4-FFF2-40B4-BE49-F238E27FC236}">
-                <a16:creationId xmlns:a16="http://schemas.microsoft.com/office/drawing/2014/main" id="{1FD291A9-5C7C-4CE4-96B4-60E60955C1D1}"/>
+                <a16:creationId xmlns:a16="http://schemas.microsoft.com/office/drawing/2014/main" id="{F4C61E87-E7FA-4B7D-B7E5-68381BCAEBE9}"/>
               </a:ext>
             </a:extLst>
           </p:cNvPr>
@@ -17790,7 +17980,7 @@
           <p:cNvPr id="131" name="">
             <a:extLst xmlns:a="http://schemas.openxmlformats.org/drawingml/2006/main">
               <a:ext uri="{FF2B5EF4-FFF2-40B4-BE49-F238E27FC236}">
-                <a16:creationId xmlns:a16="http://schemas.microsoft.com/office/drawing/2014/main" id="{000E72EF-CC76-451E-A0D5-19E038BC572E}"/>
+                <a16:creationId xmlns:a16="http://schemas.microsoft.com/office/drawing/2014/main" id="{E3E97C75-BCDA-46DD-9CD8-1FB63630CF0E}"/>
               </a:ext>
             </a:extLst>
           </p:cNvPr>
@@ -17823,7 +18013,7 @@
           <p:cNvPr id="132" name="">
             <a:extLst xmlns:a="http://schemas.openxmlformats.org/drawingml/2006/main">
               <a:ext uri="{FF2B5EF4-FFF2-40B4-BE49-F238E27FC236}">
-                <a16:creationId xmlns:a16="http://schemas.microsoft.com/office/drawing/2014/main" id="{FA0436D0-F4EE-429A-AC3F-AA3E91EAB0D1}"/>
+                <a16:creationId xmlns:a16="http://schemas.microsoft.com/office/drawing/2014/main" id="{DE7DD834-7FA4-482C-B1E9-1EC1F843A650}"/>
               </a:ext>
             </a:extLst>
           </p:cNvPr>
@@ -17856,7 +18046,7 @@
           <p:cNvPr id="133" name="">
             <a:extLst xmlns:a="http://schemas.openxmlformats.org/drawingml/2006/main">
               <a:ext uri="{FF2B5EF4-FFF2-40B4-BE49-F238E27FC236}">
-                <a16:creationId xmlns:a16="http://schemas.microsoft.com/office/drawing/2014/main" id="{B7B75C12-6DF4-4FA9-898F-4905A6015ABE}"/>
+                <a16:creationId xmlns:a16="http://schemas.microsoft.com/office/drawing/2014/main" id="{1D92F932-CC80-4DBA-813E-6B4FE32984EC}"/>
               </a:ext>
             </a:extLst>
           </p:cNvPr>
@@ -17889,7 +18079,7 @@
           <p:cNvPr id="134" name="">
             <a:extLst xmlns:a="http://schemas.openxmlformats.org/drawingml/2006/main">
               <a:ext uri="{FF2B5EF4-FFF2-40B4-BE49-F238E27FC236}">
-                <a16:creationId xmlns:a16="http://schemas.microsoft.com/office/drawing/2014/main" id="{FA02AA77-123C-45CC-8F71-AC5E08F3077D}"/>
+                <a16:creationId xmlns:a16="http://schemas.microsoft.com/office/drawing/2014/main" id="{162520D6-D812-4BEF-A140-3F1F8102CBDE}"/>
               </a:ext>
             </a:extLst>
           </p:cNvPr>
@@ -17922,7 +18112,7 @@
           <p:cNvPr id="135" name="">
             <a:extLst xmlns:a="http://schemas.openxmlformats.org/drawingml/2006/main">
               <a:ext uri="{FF2B5EF4-FFF2-40B4-BE49-F238E27FC236}">
-                <a16:creationId xmlns:a16="http://schemas.microsoft.com/office/drawing/2014/main" id="{F0B0F728-D5C7-40C6-B86D-1E617F00FAAE}"/>
+                <a16:creationId xmlns:a16="http://schemas.microsoft.com/office/drawing/2014/main" id="{EA297056-24B0-454D-B4CB-510C11C3F008}"/>
               </a:ext>
             </a:extLst>
           </p:cNvPr>
@@ -17955,7 +18145,7 @@
           <p:cNvPr id="136" name="">
             <a:extLst xmlns:a="http://schemas.openxmlformats.org/drawingml/2006/main">
               <a:ext uri="{FF2B5EF4-FFF2-40B4-BE49-F238E27FC236}">
-                <a16:creationId xmlns:a16="http://schemas.microsoft.com/office/drawing/2014/main" id="{BFB9EC70-FF8E-43F8-9797-7F0BD40F956E}"/>
+                <a16:creationId xmlns:a16="http://schemas.microsoft.com/office/drawing/2014/main" id="{A57FDC30-4595-4F60-A4B8-96AC54A60129}"/>
               </a:ext>
             </a:extLst>
           </p:cNvPr>
@@ -17988,7 +18178,7 @@
           <p:cNvPr id="137" name="">
             <a:extLst xmlns:a="http://schemas.openxmlformats.org/drawingml/2006/main">
               <a:ext uri="{FF2B5EF4-FFF2-40B4-BE49-F238E27FC236}">
-                <a16:creationId xmlns:a16="http://schemas.microsoft.com/office/drawing/2014/main" id="{E0C6931B-20F4-4F43-A498-12E18C805391}"/>
+                <a16:creationId xmlns:a16="http://schemas.microsoft.com/office/drawing/2014/main" id="{DE9E7F47-EE1D-4309-9B00-0AD823C8E98C}"/>
               </a:ext>
             </a:extLst>
           </p:cNvPr>
@@ -18021,7 +18211,7 @@
           <p:cNvPr id="138" name="">
             <a:extLst xmlns:a="http://schemas.openxmlformats.org/drawingml/2006/main">
               <a:ext uri="{FF2B5EF4-FFF2-40B4-BE49-F238E27FC236}">
-                <a16:creationId xmlns:a16="http://schemas.microsoft.com/office/drawing/2014/main" id="{17E060E7-953B-4203-8F80-A29EA46D0B68}"/>
+                <a16:creationId xmlns:a16="http://schemas.microsoft.com/office/drawing/2014/main" id="{005B2CFE-F592-4F61-AEBD-300E666271EB}"/>
               </a:ext>
             </a:extLst>
           </p:cNvPr>
@@ -18054,7 +18244,7 @@
           <p:cNvPr id="139" name="">
             <a:extLst xmlns:a="http://schemas.openxmlformats.org/drawingml/2006/main">
               <a:ext uri="{FF2B5EF4-FFF2-40B4-BE49-F238E27FC236}">
-                <a16:creationId xmlns:a16="http://schemas.microsoft.com/office/drawing/2014/main" id="{9C402754-2343-4D1F-92A4-9A447407B61A}"/>
+                <a16:creationId xmlns:a16="http://schemas.microsoft.com/office/drawing/2014/main" id="{B6278F94-316B-4298-8B26-04930E6C1FBE}"/>
               </a:ext>
             </a:extLst>
           </p:cNvPr>
@@ -18087,7 +18277,7 @@
           <p:cNvPr id="140" name="">
             <a:extLst xmlns:a="http://schemas.openxmlformats.org/drawingml/2006/main">
               <a:ext uri="{FF2B5EF4-FFF2-40B4-BE49-F238E27FC236}">
-                <a16:creationId xmlns:a16="http://schemas.microsoft.com/office/drawing/2014/main" id="{1034E3CC-BD83-4B3F-9C46-9CA11855EF39}"/>
+                <a16:creationId xmlns:a16="http://schemas.microsoft.com/office/drawing/2014/main" id="{DA570D87-2F93-48C3-8ACA-123C6F151086}"/>
               </a:ext>
             </a:extLst>
           </p:cNvPr>
@@ -18120,7 +18310,7 @@
           <p:cNvPr id="141" name="">
             <a:extLst xmlns:a="http://schemas.openxmlformats.org/drawingml/2006/main">
               <a:ext uri="{FF2B5EF4-FFF2-40B4-BE49-F238E27FC236}">
-                <a16:creationId xmlns:a16="http://schemas.microsoft.com/office/drawing/2014/main" id="{A88BA22D-5906-4D7E-9102-703564DADEB7}"/>
+                <a16:creationId xmlns:a16="http://schemas.microsoft.com/office/drawing/2014/main" id="{4CF69112-23BD-4D58-A74E-72496379BD13}"/>
               </a:ext>
             </a:extLst>
           </p:cNvPr>
@@ -18153,7 +18343,7 @@
           <p:cNvPr id="142" name="">
             <a:extLst xmlns:a="http://schemas.openxmlformats.org/drawingml/2006/main">
               <a:ext uri="{FF2B5EF4-FFF2-40B4-BE49-F238E27FC236}">
-                <a16:creationId xmlns:a16="http://schemas.microsoft.com/office/drawing/2014/main" id="{8FC82422-279C-4E32-9C27-1E3EEA2D7063}"/>
+                <a16:creationId xmlns:a16="http://schemas.microsoft.com/office/drawing/2014/main" id="{55F94DF8-D609-46FC-9F7E-B4FE5A2814BC}"/>
               </a:ext>
             </a:extLst>
           </p:cNvPr>
@@ -18186,7 +18376,7 @@
           <p:cNvPr id="143" name="">
             <a:extLst xmlns:a="http://schemas.openxmlformats.org/drawingml/2006/main">
               <a:ext uri="{FF2B5EF4-FFF2-40B4-BE49-F238E27FC236}">
-                <a16:creationId xmlns:a16="http://schemas.microsoft.com/office/drawing/2014/main" id="{F3AA94CA-FDA7-4109-B915-E275A18521DE}"/>
+                <a16:creationId xmlns:a16="http://schemas.microsoft.com/office/drawing/2014/main" id="{35DE1C73-521E-4AAF-81A4-33523EBF2A06}"/>
               </a:ext>
             </a:extLst>
           </p:cNvPr>
@@ -18219,7 +18409,7 @@
           <p:cNvPr id="144" name="">
             <a:extLst xmlns:a="http://schemas.openxmlformats.org/drawingml/2006/main">
               <a:ext uri="{FF2B5EF4-FFF2-40B4-BE49-F238E27FC236}">
-                <a16:creationId xmlns:a16="http://schemas.microsoft.com/office/drawing/2014/main" id="{EA2CDA02-7973-4310-B215-D040980FE5CF}"/>
+                <a16:creationId xmlns:a16="http://schemas.microsoft.com/office/drawing/2014/main" id="{A863FF99-737B-402E-8472-3DAEC177B58C}"/>
               </a:ext>
             </a:extLst>
           </p:cNvPr>
@@ -18252,7 +18442,7 @@
           <p:cNvPr id="145" name="">
             <a:extLst xmlns:a="http://schemas.openxmlformats.org/drawingml/2006/main">
               <a:ext uri="{FF2B5EF4-FFF2-40B4-BE49-F238E27FC236}">
-                <a16:creationId xmlns:a16="http://schemas.microsoft.com/office/drawing/2014/main" id="{CB7FE9D7-CEAB-4896-8C2F-2BE86CC62CEF}"/>
+                <a16:creationId xmlns:a16="http://schemas.microsoft.com/office/drawing/2014/main" id="{2C53A5FF-87B4-4F9D-A5B6-618E54C01583}"/>
               </a:ext>
             </a:extLst>
           </p:cNvPr>
@@ -18285,7 +18475,7 @@
           <p:cNvPr id="146" name="">
             <a:extLst xmlns:a="http://schemas.openxmlformats.org/drawingml/2006/main">
               <a:ext uri="{FF2B5EF4-FFF2-40B4-BE49-F238E27FC236}">
-                <a16:creationId xmlns:a16="http://schemas.microsoft.com/office/drawing/2014/main" id="{C0786F91-4F4F-4E15-9573-C25BD1D75B20}"/>
+                <a16:creationId xmlns:a16="http://schemas.microsoft.com/office/drawing/2014/main" id="{A807D645-71FC-4AF7-B1CE-1657E5E8A213}"/>
               </a:ext>
             </a:extLst>
           </p:cNvPr>
@@ -18318,7 +18508,7 @@
           <p:cNvPr id="147" name="">
             <a:extLst xmlns:a="http://schemas.openxmlformats.org/drawingml/2006/main">
               <a:ext uri="{FF2B5EF4-FFF2-40B4-BE49-F238E27FC236}">
-                <a16:creationId xmlns:a16="http://schemas.microsoft.com/office/drawing/2014/main" id="{9175A5C3-55DF-4811-A4BE-70B027CBC372}"/>
+                <a16:creationId xmlns:a16="http://schemas.microsoft.com/office/drawing/2014/main" id="{461E898C-A4F4-45BB-B957-BA5DF494B8B3}"/>
               </a:ext>
             </a:extLst>
           </p:cNvPr>
@@ -18351,7 +18541,7 @@
           <p:cNvPr id="148" name="">
             <a:extLst xmlns:a="http://schemas.openxmlformats.org/drawingml/2006/main">
               <a:ext uri="{FF2B5EF4-FFF2-40B4-BE49-F238E27FC236}">
-                <a16:creationId xmlns:a16="http://schemas.microsoft.com/office/drawing/2014/main" id="{07D29E6A-4510-4018-9904-7ACF5805AF04}"/>
+                <a16:creationId xmlns:a16="http://schemas.microsoft.com/office/drawing/2014/main" id="{F4D01F01-5077-457A-9446-BB686B9F8E9B}"/>
               </a:ext>
             </a:extLst>
           </p:cNvPr>
@@ -18384,7 +18574,7 @@
           <p:cNvPr id="149" name="">
             <a:extLst xmlns:a="http://schemas.openxmlformats.org/drawingml/2006/main">
               <a:ext uri="{FF2B5EF4-FFF2-40B4-BE49-F238E27FC236}">
-                <a16:creationId xmlns:a16="http://schemas.microsoft.com/office/drawing/2014/main" id="{95548BB4-AA4F-44F8-BBF4-A5F11D133BFB}"/>
+                <a16:creationId xmlns:a16="http://schemas.microsoft.com/office/drawing/2014/main" id="{21AF69FF-0653-40C2-89C7-9738E520E0B4}"/>
               </a:ext>
             </a:extLst>
           </p:cNvPr>
@@ -18417,7 +18607,7 @@
           <p:cNvPr id="150" name="">
             <a:extLst xmlns:a="http://schemas.openxmlformats.org/drawingml/2006/main">
               <a:ext uri="{FF2B5EF4-FFF2-40B4-BE49-F238E27FC236}">
-                <a16:creationId xmlns:a16="http://schemas.microsoft.com/office/drawing/2014/main" id="{E1812236-29EA-4E09-8BC7-F4B6F01E4AC9}"/>
+                <a16:creationId xmlns:a16="http://schemas.microsoft.com/office/drawing/2014/main" id="{C9AF536E-19BE-40B5-9919-907495CA6193}"/>
               </a:ext>
             </a:extLst>
           </p:cNvPr>
@@ -18450,7 +18640,7 @@
           <p:cNvPr id="151" name="">
             <a:extLst xmlns:a="http://schemas.openxmlformats.org/drawingml/2006/main">
               <a:ext uri="{FF2B5EF4-FFF2-40B4-BE49-F238E27FC236}">
-                <a16:creationId xmlns:a16="http://schemas.microsoft.com/office/drawing/2014/main" id="{301C65DD-538B-4ECB-92C4-B30EED61B591}"/>
+                <a16:creationId xmlns:a16="http://schemas.microsoft.com/office/drawing/2014/main" id="{40AFADC0-F80E-40EB-A302-FB79CAE1C24B}"/>
               </a:ext>
             </a:extLst>
           </p:cNvPr>
@@ -18483,7 +18673,7 @@
           <p:cNvPr id="152" name="">
             <a:extLst xmlns:a="http://schemas.openxmlformats.org/drawingml/2006/main">
               <a:ext uri="{FF2B5EF4-FFF2-40B4-BE49-F238E27FC236}">
-                <a16:creationId xmlns:a16="http://schemas.microsoft.com/office/drawing/2014/main" id="{7683D970-0025-4C18-8845-45655170E0D7}"/>
+                <a16:creationId xmlns:a16="http://schemas.microsoft.com/office/drawing/2014/main" id="{551E8A16-4079-4984-8C64-CEA5627C638C}"/>
               </a:ext>
             </a:extLst>
           </p:cNvPr>
@@ -18516,7 +18706,7 @@
           <p:cNvPr id="153" name="">
             <a:extLst xmlns:a="http://schemas.openxmlformats.org/drawingml/2006/main">
               <a:ext uri="{FF2B5EF4-FFF2-40B4-BE49-F238E27FC236}">
-                <a16:creationId xmlns:a16="http://schemas.microsoft.com/office/drawing/2014/main" id="{8E0E739F-1671-47AC-8EE3-3FB2721B94AD}"/>
+                <a16:creationId xmlns:a16="http://schemas.microsoft.com/office/drawing/2014/main" id="{D31E1F60-DDEE-4B95-AA10-DDF4A51927AC}"/>
               </a:ext>
             </a:extLst>
           </p:cNvPr>
@@ -18549,7 +18739,7 @@
           <p:cNvPr id="154" name="">
             <a:extLst xmlns:a="http://schemas.openxmlformats.org/drawingml/2006/main">
               <a:ext uri="{FF2B5EF4-FFF2-40B4-BE49-F238E27FC236}">
-                <a16:creationId xmlns:a16="http://schemas.microsoft.com/office/drawing/2014/main" id="{3C08A3C2-67E6-45E1-A6C4-0DEEEAE9B150}"/>
+                <a16:creationId xmlns:a16="http://schemas.microsoft.com/office/drawing/2014/main" id="{3EBB57D6-D017-4571-A592-B9FE5B5EE14F}"/>
               </a:ext>
             </a:extLst>
           </p:cNvPr>
@@ -18582,7 +18772,7 @@
           <p:cNvPr id="155" name="">
             <a:extLst xmlns:a="http://schemas.openxmlformats.org/drawingml/2006/main">
               <a:ext uri="{FF2B5EF4-FFF2-40B4-BE49-F238E27FC236}">
-                <a16:creationId xmlns:a16="http://schemas.microsoft.com/office/drawing/2014/main" id="{6BBDE409-B49C-41CA-AB60-F9E69C93086D}"/>
+                <a16:creationId xmlns:a16="http://schemas.microsoft.com/office/drawing/2014/main" id="{C9252E86-E8A8-44D8-99B0-E927A33CACDC}"/>
               </a:ext>
             </a:extLst>
           </p:cNvPr>
@@ -18615,7 +18805,7 @@
           <p:cNvPr id="156" name="">
             <a:extLst xmlns:a="http://schemas.openxmlformats.org/drawingml/2006/main">
               <a:ext uri="{FF2B5EF4-FFF2-40B4-BE49-F238E27FC236}">
-                <a16:creationId xmlns:a16="http://schemas.microsoft.com/office/drawing/2014/main" id="{6BFB7D4E-CE4A-41BD-8572-800A26FAAD97}"/>
+                <a16:creationId xmlns:a16="http://schemas.microsoft.com/office/drawing/2014/main" id="{A17449E5-CDC2-4FAA-9653-2A9CA258923C}"/>
               </a:ext>
             </a:extLst>
           </p:cNvPr>
@@ -18648,7 +18838,7 @@
           <p:cNvPr id="157" name="">
             <a:extLst xmlns:a="http://schemas.openxmlformats.org/drawingml/2006/main">
               <a:ext uri="{FF2B5EF4-FFF2-40B4-BE49-F238E27FC236}">
-                <a16:creationId xmlns:a16="http://schemas.microsoft.com/office/drawing/2014/main" id="{DAE2DF93-BF6E-4C05-A0E1-0550BA90EAD5}"/>
+                <a16:creationId xmlns:a16="http://schemas.microsoft.com/office/drawing/2014/main" id="{15A0547C-56BC-4D82-AD00-BD31958AA0F0}"/>
               </a:ext>
             </a:extLst>
           </p:cNvPr>
@@ -18681,7 +18871,7 @@
           <p:cNvPr id="158" name="">
             <a:extLst xmlns:a="http://schemas.openxmlformats.org/drawingml/2006/main">
               <a:ext uri="{FF2B5EF4-FFF2-40B4-BE49-F238E27FC236}">
-                <a16:creationId xmlns:a16="http://schemas.microsoft.com/office/drawing/2014/main" id="{73FB5086-C3AC-43DF-85EA-7FAF7FB85732}"/>
+                <a16:creationId xmlns:a16="http://schemas.microsoft.com/office/drawing/2014/main" id="{5239C0E6-B1B1-44AF-BC2E-C2E4A9588A04}"/>
               </a:ext>
             </a:extLst>
           </p:cNvPr>
@@ -18714,7 +18904,7 @@
           <p:cNvPr id="159" name="">
             <a:extLst xmlns:a="http://schemas.openxmlformats.org/drawingml/2006/main">
               <a:ext uri="{FF2B5EF4-FFF2-40B4-BE49-F238E27FC236}">
-                <a16:creationId xmlns:a16="http://schemas.microsoft.com/office/drawing/2014/main" id="{80B3DBBB-29A9-4BCD-AEFB-E33B4A2FCEA6}"/>
+                <a16:creationId xmlns:a16="http://schemas.microsoft.com/office/drawing/2014/main" id="{759A6438-2398-45B9-A6DE-76786837321F}"/>
               </a:ext>
             </a:extLst>
           </p:cNvPr>
@@ -18747,7 +18937,7 @@
           <p:cNvPr id="160" name="">
             <a:extLst xmlns:a="http://schemas.openxmlformats.org/drawingml/2006/main">
               <a:ext uri="{FF2B5EF4-FFF2-40B4-BE49-F238E27FC236}">
-                <a16:creationId xmlns:a16="http://schemas.microsoft.com/office/drawing/2014/main" id="{0C8AA718-4F02-48A6-8B15-EDDAAE68CA47}"/>
+                <a16:creationId xmlns:a16="http://schemas.microsoft.com/office/drawing/2014/main" id="{EFACD712-C4EE-4036-87A9-BDB92C624B95}"/>
               </a:ext>
             </a:extLst>
           </p:cNvPr>
@@ -18780,7 +18970,7 @@
           <p:cNvPr id="161" name="">
             <a:extLst xmlns:a="http://schemas.openxmlformats.org/drawingml/2006/main">
               <a:ext uri="{FF2B5EF4-FFF2-40B4-BE49-F238E27FC236}">
-                <a16:creationId xmlns:a16="http://schemas.microsoft.com/office/drawing/2014/main" id="{298F7676-5D88-4C8B-815F-1AEE7910AA71}"/>
+                <a16:creationId xmlns:a16="http://schemas.microsoft.com/office/drawing/2014/main" id="{6658A4FF-F531-4E9F-B2C3-02BFC3C61CE9}"/>
               </a:ext>
             </a:extLst>
           </p:cNvPr>
@@ -18813,7 +19003,7 @@
           <p:cNvPr id="162" name="">
             <a:extLst xmlns:a="http://schemas.openxmlformats.org/drawingml/2006/main">
               <a:ext uri="{FF2B5EF4-FFF2-40B4-BE49-F238E27FC236}">
-                <a16:creationId xmlns:a16="http://schemas.microsoft.com/office/drawing/2014/main" id="{14B6C983-07F6-45F7-AC53-F07FC6BD85D3}"/>
+                <a16:creationId xmlns:a16="http://schemas.microsoft.com/office/drawing/2014/main" id="{64599E4B-7881-4FB6-B31B-7F2E49AEC783}"/>
               </a:ext>
             </a:extLst>
           </p:cNvPr>
@@ -18846,7 +19036,7 @@
           <p:cNvPr id="163" name="">
             <a:extLst xmlns:a="http://schemas.openxmlformats.org/drawingml/2006/main">
               <a:ext uri="{FF2B5EF4-FFF2-40B4-BE49-F238E27FC236}">
-                <a16:creationId xmlns:a16="http://schemas.microsoft.com/office/drawing/2014/main" id="{77A583C7-4D73-4174-BCFF-A63872B75AEF}"/>
+                <a16:creationId xmlns:a16="http://schemas.microsoft.com/office/drawing/2014/main" id="{37417D94-7F62-430B-8465-3C24BE67472A}"/>
               </a:ext>
             </a:extLst>
           </p:cNvPr>
@@ -18879,7 +19069,7 @@
           <p:cNvPr id="164" name="">
             <a:extLst xmlns:a="http://schemas.openxmlformats.org/drawingml/2006/main">
               <a:ext uri="{FF2B5EF4-FFF2-40B4-BE49-F238E27FC236}">
-                <a16:creationId xmlns:a16="http://schemas.microsoft.com/office/drawing/2014/main" id="{209543E8-2CF9-4FFD-8BE5-583359FDA491}"/>
+                <a16:creationId xmlns:a16="http://schemas.microsoft.com/office/drawing/2014/main" id="{892230A1-247F-4477-BC45-D41C87C73193}"/>
               </a:ext>
             </a:extLst>
           </p:cNvPr>
@@ -18912,7 +19102,7 @@
           <p:cNvPr id="165" name="">
             <a:extLst xmlns:a="http://schemas.openxmlformats.org/drawingml/2006/main">
               <a:ext uri="{FF2B5EF4-FFF2-40B4-BE49-F238E27FC236}">
-                <a16:creationId xmlns:a16="http://schemas.microsoft.com/office/drawing/2014/main" id="{FC38DF1B-EF5F-4B47-9B97-C633AF6821F5}"/>
+                <a16:creationId xmlns:a16="http://schemas.microsoft.com/office/drawing/2014/main" id="{9404196D-4BCA-4A1D-8E44-A17F80739424}"/>
               </a:ext>
             </a:extLst>
           </p:cNvPr>
@@ -18945,7 +19135,7 @@
           <p:cNvPr id="166" name="">
             <a:extLst xmlns:a="http://schemas.openxmlformats.org/drawingml/2006/main">
               <a:ext uri="{FF2B5EF4-FFF2-40B4-BE49-F238E27FC236}">
-                <a16:creationId xmlns:a16="http://schemas.microsoft.com/office/drawing/2014/main" id="{24390A56-7369-4915-A14E-4F307C6C9CB9}"/>
+                <a16:creationId xmlns:a16="http://schemas.microsoft.com/office/drawing/2014/main" id="{200CEF1B-D9AF-43B8-9B81-481C6DB9C267}"/>
               </a:ext>
             </a:extLst>
           </p:cNvPr>
@@ -18978,7 +19168,7 @@
           <p:cNvPr id="167" name="">
             <a:extLst xmlns:a="http://schemas.openxmlformats.org/drawingml/2006/main">
               <a:ext uri="{FF2B5EF4-FFF2-40B4-BE49-F238E27FC236}">
-                <a16:creationId xmlns:a16="http://schemas.microsoft.com/office/drawing/2014/main" id="{CC17AAEC-3C28-4871-80F1-19EC7CF03D14}"/>
+                <a16:creationId xmlns:a16="http://schemas.microsoft.com/office/drawing/2014/main" id="{7D3CB45B-A7A1-4A71-B651-BD9BEAC0B827}"/>
               </a:ext>
             </a:extLst>
           </p:cNvPr>
@@ -19011,7 +19201,7 @@
           <p:cNvPr id="168" name="">
             <a:extLst xmlns:a="http://schemas.openxmlformats.org/drawingml/2006/main">
               <a:ext uri="{FF2B5EF4-FFF2-40B4-BE49-F238E27FC236}">
-                <a16:creationId xmlns:a16="http://schemas.microsoft.com/office/drawing/2014/main" id="{FD393C52-E55B-4B05-9306-B07EC069836D}"/>
+                <a16:creationId xmlns:a16="http://schemas.microsoft.com/office/drawing/2014/main" id="{EA79B8BA-FFD4-4592-B0CF-8CFF3F1C7827}"/>
               </a:ext>
             </a:extLst>
           </p:cNvPr>
@@ -19044,7 +19234,7 @@
           <p:cNvPr id="169" name="">
             <a:extLst xmlns:a="http://schemas.openxmlformats.org/drawingml/2006/main">
               <a:ext uri="{FF2B5EF4-FFF2-40B4-BE49-F238E27FC236}">
-                <a16:creationId xmlns:a16="http://schemas.microsoft.com/office/drawing/2014/main" id="{A9879721-BFF8-402D-8356-A6F76294CC01}"/>
+                <a16:creationId xmlns:a16="http://schemas.microsoft.com/office/drawing/2014/main" id="{4A41E6DD-0A1F-4840-93BC-E35AE9B5F326}"/>
               </a:ext>
             </a:extLst>
           </p:cNvPr>
@@ -19077,7 +19267,7 @@
           <p:cNvPr id="170" name="">
             <a:extLst xmlns:a="http://schemas.openxmlformats.org/drawingml/2006/main">
               <a:ext uri="{FF2B5EF4-FFF2-40B4-BE49-F238E27FC236}">
-                <a16:creationId xmlns:a16="http://schemas.microsoft.com/office/drawing/2014/main" id="{DBCA65AE-08A2-4607-B8D8-7A6018CB8A19}"/>
+                <a16:creationId xmlns:a16="http://schemas.microsoft.com/office/drawing/2014/main" id="{E4DE369B-217C-49F0-92B5-1F0A9C14F824}"/>
               </a:ext>
             </a:extLst>
           </p:cNvPr>
@@ -19110,7 +19300,7 @@
           <p:cNvPr id="171" name="">
             <a:extLst xmlns:a="http://schemas.openxmlformats.org/drawingml/2006/main">
               <a:ext uri="{FF2B5EF4-FFF2-40B4-BE49-F238E27FC236}">
-                <a16:creationId xmlns:a16="http://schemas.microsoft.com/office/drawing/2014/main" id="{2269143A-B160-423F-9B65-A94E2878FB4C}"/>
+                <a16:creationId xmlns:a16="http://schemas.microsoft.com/office/drawing/2014/main" id="{4CB622A1-76B7-42ED-87A8-6BACA2FB1313}"/>
               </a:ext>
             </a:extLst>
           </p:cNvPr>
@@ -19143,7 +19333,7 @@
           <p:cNvPr id="172" name="">
             <a:extLst xmlns:a="http://schemas.openxmlformats.org/drawingml/2006/main">
               <a:ext uri="{FF2B5EF4-FFF2-40B4-BE49-F238E27FC236}">
-                <a16:creationId xmlns:a16="http://schemas.microsoft.com/office/drawing/2014/main" id="{EB278C77-9ECF-4E4D-9BD1-76C8D1D5446F}"/>
+                <a16:creationId xmlns:a16="http://schemas.microsoft.com/office/drawing/2014/main" id="{BF6229CF-965F-4538-8EE7-C94CF36CC4E0}"/>
               </a:ext>
             </a:extLst>
           </p:cNvPr>
@@ -19176,7 +19366,7 @@
           <p:cNvPr id="173" name="">
             <a:extLst xmlns:a="http://schemas.openxmlformats.org/drawingml/2006/main">
               <a:ext uri="{FF2B5EF4-FFF2-40B4-BE49-F238E27FC236}">
-                <a16:creationId xmlns:a16="http://schemas.microsoft.com/office/drawing/2014/main" id="{5B7E81A3-66C6-4855-AA6E-90814B3458FF}"/>
+                <a16:creationId xmlns:a16="http://schemas.microsoft.com/office/drawing/2014/main" id="{EBF64624-CAA1-414B-8EB1-8B2039B8C8E0}"/>
               </a:ext>
             </a:extLst>
           </p:cNvPr>
@@ -19209,7 +19399,7 @@
           <p:cNvPr id="174" name="">
             <a:extLst xmlns:a="http://schemas.openxmlformats.org/drawingml/2006/main">
               <a:ext uri="{FF2B5EF4-FFF2-40B4-BE49-F238E27FC236}">
-                <a16:creationId xmlns:a16="http://schemas.microsoft.com/office/drawing/2014/main" id="{A8971365-E302-421C-8A8D-0152B94503B0}"/>
+                <a16:creationId xmlns:a16="http://schemas.microsoft.com/office/drawing/2014/main" id="{809576DF-FA2F-4F62-A1EA-FF9AA6B8D7F9}"/>
               </a:ext>
             </a:extLst>
           </p:cNvPr>
@@ -19242,7 +19432,7 @@
           <p:cNvPr id="175" name="">
             <a:extLst xmlns:a="http://schemas.openxmlformats.org/drawingml/2006/main">
               <a:ext uri="{FF2B5EF4-FFF2-40B4-BE49-F238E27FC236}">
-                <a16:creationId xmlns:a16="http://schemas.microsoft.com/office/drawing/2014/main" id="{DCF9E018-F364-46A3-98E9-CE40B878A794}"/>
+                <a16:creationId xmlns:a16="http://schemas.microsoft.com/office/drawing/2014/main" id="{4F4A021B-1BE2-4858-A6C9-260767FE15FE}"/>
               </a:ext>
             </a:extLst>
           </p:cNvPr>
@@ -19275,7 +19465,7 @@
           <p:cNvPr id="176" name="">
             <a:extLst xmlns:a="http://schemas.openxmlformats.org/drawingml/2006/main">
               <a:ext uri="{FF2B5EF4-FFF2-40B4-BE49-F238E27FC236}">
-                <a16:creationId xmlns:a16="http://schemas.microsoft.com/office/drawing/2014/main" id="{E301E789-23C8-436B-B677-1BEA59737945}"/>
+                <a16:creationId xmlns:a16="http://schemas.microsoft.com/office/drawing/2014/main" id="{453357D7-B9F9-4164-87F5-8A452727E65E}"/>
               </a:ext>
             </a:extLst>
           </p:cNvPr>
@@ -19308,7 +19498,7 @@
           <p:cNvPr id="177" name="">
             <a:extLst xmlns:a="http://schemas.openxmlformats.org/drawingml/2006/main">
               <a:ext uri="{FF2B5EF4-FFF2-40B4-BE49-F238E27FC236}">
-                <a16:creationId xmlns:a16="http://schemas.microsoft.com/office/drawing/2014/main" id="{7124ED2C-FDF4-4519-9DA2-7A999F54870F}"/>
+                <a16:creationId xmlns:a16="http://schemas.microsoft.com/office/drawing/2014/main" id="{821A3FC1-DAA1-4CC0-AFFA-A328FDEAD8C4}"/>
               </a:ext>
             </a:extLst>
           </p:cNvPr>
@@ -19341,7 +19531,7 @@
           <p:cNvPr id="178" name="">
             <a:extLst xmlns:a="http://schemas.openxmlformats.org/drawingml/2006/main">
               <a:ext uri="{FF2B5EF4-FFF2-40B4-BE49-F238E27FC236}">
-                <a16:creationId xmlns:a16="http://schemas.microsoft.com/office/drawing/2014/main" id="{6C158257-55B7-4CDC-88C2-B96B831FA0D1}"/>
+                <a16:creationId xmlns:a16="http://schemas.microsoft.com/office/drawing/2014/main" id="{F1F36F4F-87A1-4BC5-A447-545356963AF8}"/>
               </a:ext>
             </a:extLst>
           </p:cNvPr>
@@ -19374,7 +19564,7 @@
           <p:cNvPr id="179" name="">
             <a:extLst xmlns:a="http://schemas.openxmlformats.org/drawingml/2006/main">
               <a:ext uri="{FF2B5EF4-FFF2-40B4-BE49-F238E27FC236}">
-                <a16:creationId xmlns:a16="http://schemas.microsoft.com/office/drawing/2014/main" id="{45372DCE-5D4E-4750-B007-B1AA807735D8}"/>
+                <a16:creationId xmlns:a16="http://schemas.microsoft.com/office/drawing/2014/main" id="{4F2BDB9C-D10B-4D4D-B96B-7AA5C863213F}"/>
               </a:ext>
             </a:extLst>
           </p:cNvPr>
@@ -19407,7 +19597,7 @@
           <p:cNvPr id="180" name="">
             <a:extLst xmlns:a="http://schemas.openxmlformats.org/drawingml/2006/main">
               <a:ext uri="{FF2B5EF4-FFF2-40B4-BE49-F238E27FC236}">
-                <a16:creationId xmlns:a16="http://schemas.microsoft.com/office/drawing/2014/main" id="{DB41863C-38C2-4BA8-B30B-FB56E35D9123}"/>
+                <a16:creationId xmlns:a16="http://schemas.microsoft.com/office/drawing/2014/main" id="{8BCD9AC8-871E-4538-8AC3-515F678F7D39}"/>
               </a:ext>
             </a:extLst>
           </p:cNvPr>
@@ -19440,7 +19630,7 @@
           <p:cNvPr id="181" name="">
             <a:extLst xmlns:a="http://schemas.openxmlformats.org/drawingml/2006/main">
               <a:ext uri="{FF2B5EF4-FFF2-40B4-BE49-F238E27FC236}">
-                <a16:creationId xmlns:a16="http://schemas.microsoft.com/office/drawing/2014/main" id="{4980F92F-2932-46F0-A7E0-00BCE74BFA65}"/>
+                <a16:creationId xmlns:a16="http://schemas.microsoft.com/office/drawing/2014/main" id="{AF9090DF-CF2D-490E-85C4-DBDE471F0001}"/>
               </a:ext>
             </a:extLst>
           </p:cNvPr>
@@ -19473,7 +19663,7 @@
           <p:cNvPr id="182" name="">
             <a:extLst xmlns:a="http://schemas.openxmlformats.org/drawingml/2006/main">
               <a:ext uri="{FF2B5EF4-FFF2-40B4-BE49-F238E27FC236}">
-                <a16:creationId xmlns:a16="http://schemas.microsoft.com/office/drawing/2014/main" id="{5BDFD94D-83DE-4B56-8E74-3C7A99C001AA}"/>
+                <a16:creationId xmlns:a16="http://schemas.microsoft.com/office/drawing/2014/main" id="{1DCE585F-2D06-4BAC-84AD-D6E1FFE442E2}"/>
               </a:ext>
             </a:extLst>
           </p:cNvPr>
@@ -19506,7 +19696,7 @@
           <p:cNvPr id="183" name="">
             <a:extLst xmlns:a="http://schemas.openxmlformats.org/drawingml/2006/main">
               <a:ext uri="{FF2B5EF4-FFF2-40B4-BE49-F238E27FC236}">
-                <a16:creationId xmlns:a16="http://schemas.microsoft.com/office/drawing/2014/main" id="{01EFFA20-A47D-4959-84D3-0FF5B7EF7C36}"/>
+                <a16:creationId xmlns:a16="http://schemas.microsoft.com/office/drawing/2014/main" id="{8CAA27EE-8886-48E8-B0C4-94CEF504E392}"/>
               </a:ext>
             </a:extLst>
           </p:cNvPr>
@@ -19539,7 +19729,7 @@
           <p:cNvPr id="184" name="">
             <a:extLst xmlns:a="http://schemas.openxmlformats.org/drawingml/2006/main">
               <a:ext uri="{FF2B5EF4-FFF2-40B4-BE49-F238E27FC236}">
-                <a16:creationId xmlns:a16="http://schemas.microsoft.com/office/drawing/2014/main" id="{EE16895A-C160-4717-A571-00DEF872F24C}"/>
+                <a16:creationId xmlns:a16="http://schemas.microsoft.com/office/drawing/2014/main" id="{71BD6A34-1233-4E41-9CB1-4B384F895939}"/>
               </a:ext>
             </a:extLst>
           </p:cNvPr>
@@ -19572,7 +19762,7 @@
           <p:cNvPr id="185" name="">
             <a:extLst xmlns:a="http://schemas.openxmlformats.org/drawingml/2006/main">
               <a:ext uri="{FF2B5EF4-FFF2-40B4-BE49-F238E27FC236}">
-                <a16:creationId xmlns:a16="http://schemas.microsoft.com/office/drawing/2014/main" id="{B7783B22-3FEC-43D8-9ACD-8C2F05281A66}"/>
+                <a16:creationId xmlns:a16="http://schemas.microsoft.com/office/drawing/2014/main" id="{0E6F6D86-1DAB-43E1-AA74-825BE4EF9351}"/>
               </a:ext>
             </a:extLst>
           </p:cNvPr>
@@ -19605,7 +19795,7 @@
           <p:cNvPr id="186" name="">
             <a:extLst xmlns:a="http://schemas.openxmlformats.org/drawingml/2006/main">
               <a:ext uri="{FF2B5EF4-FFF2-40B4-BE49-F238E27FC236}">
-                <a16:creationId xmlns:a16="http://schemas.microsoft.com/office/drawing/2014/main" id="{330A0ADB-0134-4CF2-85BA-9E33C5E6F675}"/>
+                <a16:creationId xmlns:a16="http://schemas.microsoft.com/office/drawing/2014/main" id="{BDD57ABD-E2DB-46D5-8C85-FC6AC9B6FD0C}"/>
               </a:ext>
             </a:extLst>
           </p:cNvPr>
@@ -19638,7 +19828,7 @@
           <p:cNvPr id="187" name="">
             <a:extLst xmlns:a="http://schemas.openxmlformats.org/drawingml/2006/main">
               <a:ext uri="{FF2B5EF4-FFF2-40B4-BE49-F238E27FC236}">
-                <a16:creationId xmlns:a16="http://schemas.microsoft.com/office/drawing/2014/main" id="{9D8DDF15-E31A-472B-98F8-F31DA4D747C8}"/>
+                <a16:creationId xmlns:a16="http://schemas.microsoft.com/office/drawing/2014/main" id="{7E9C4510-3798-40E1-AAE4-88B3657392C3}"/>
               </a:ext>
             </a:extLst>
           </p:cNvPr>
@@ -19671,7 +19861,7 @@
           <p:cNvPr id="188" name="">
             <a:extLst xmlns:a="http://schemas.openxmlformats.org/drawingml/2006/main">
               <a:ext uri="{FF2B5EF4-FFF2-40B4-BE49-F238E27FC236}">
-                <a16:creationId xmlns:a16="http://schemas.microsoft.com/office/drawing/2014/main" id="{66DB8D1A-E9EE-42FD-88A4-2B1388CDBF93}"/>
+                <a16:creationId xmlns:a16="http://schemas.microsoft.com/office/drawing/2014/main" id="{D7B3CC85-E8E7-44CC-97FF-ECBEE1B49337}"/>
               </a:ext>
             </a:extLst>
           </p:cNvPr>
@@ -19704,7 +19894,7 @@
           <p:cNvPr id="189" name="">
             <a:extLst xmlns:a="http://schemas.openxmlformats.org/drawingml/2006/main">
               <a:ext uri="{FF2B5EF4-FFF2-40B4-BE49-F238E27FC236}">
-                <a16:creationId xmlns:a16="http://schemas.microsoft.com/office/drawing/2014/main" id="{D6E1F375-2CD6-4777-9919-F739185897FA}"/>
+                <a16:creationId xmlns:a16="http://schemas.microsoft.com/office/drawing/2014/main" id="{51EE4331-6BD7-486F-9FD5-08EDBFCCCF85}"/>
               </a:ext>
             </a:extLst>
           </p:cNvPr>
@@ -19737,7 +19927,7 @@
           <p:cNvPr id="190" name="">
             <a:extLst xmlns:a="http://schemas.openxmlformats.org/drawingml/2006/main">
               <a:ext uri="{FF2B5EF4-FFF2-40B4-BE49-F238E27FC236}">
-                <a16:creationId xmlns:a16="http://schemas.microsoft.com/office/drawing/2014/main" id="{29688C39-FFF3-4431-8C44-221E64CB26A1}"/>
+                <a16:creationId xmlns:a16="http://schemas.microsoft.com/office/drawing/2014/main" id="{4AC4244E-56D7-40EB-B62A-93313C7D89FC}"/>
               </a:ext>
             </a:extLst>
           </p:cNvPr>
@@ -19770,7 +19960,7 @@
           <p:cNvPr id="191" name="">
             <a:extLst xmlns:a="http://schemas.openxmlformats.org/drawingml/2006/main">
               <a:ext uri="{FF2B5EF4-FFF2-40B4-BE49-F238E27FC236}">
-                <a16:creationId xmlns:a16="http://schemas.microsoft.com/office/drawing/2014/main" id="{88EAB81F-C86D-4293-A13F-3A127FC3FE1D}"/>
+                <a16:creationId xmlns:a16="http://schemas.microsoft.com/office/drawing/2014/main" id="{4322FED2-AB4D-48BD-A999-59CAFBD3D66F}"/>
               </a:ext>
             </a:extLst>
           </p:cNvPr>
@@ -19803,7 +19993,7 @@
           <p:cNvPr id="192" name="">
             <a:extLst xmlns:a="http://schemas.openxmlformats.org/drawingml/2006/main">
               <a:ext uri="{FF2B5EF4-FFF2-40B4-BE49-F238E27FC236}">
-                <a16:creationId xmlns:a16="http://schemas.microsoft.com/office/drawing/2014/main" id="{DDB01121-68E2-46DD-BCC8-60C2CC54EF5E}"/>
+                <a16:creationId xmlns:a16="http://schemas.microsoft.com/office/drawing/2014/main" id="{D0528208-254F-493F-AF2A-B55C92FAA04F}"/>
               </a:ext>
             </a:extLst>
           </p:cNvPr>
@@ -19836,7 +20026,7 @@
           <p:cNvPr id="193" name="">
             <a:extLst xmlns:a="http://schemas.openxmlformats.org/drawingml/2006/main">
               <a:ext uri="{FF2B5EF4-FFF2-40B4-BE49-F238E27FC236}">
-                <a16:creationId xmlns:a16="http://schemas.microsoft.com/office/drawing/2014/main" id="{AEBB429B-ED37-47F2-9CA0-ADCB1558455A}"/>
+                <a16:creationId xmlns:a16="http://schemas.microsoft.com/office/drawing/2014/main" id="{BAA9F408-7A68-4DF7-AD41-8D470B09BDB0}"/>
               </a:ext>
             </a:extLst>
           </p:cNvPr>
@@ -19869,7 +20059,7 @@
           <p:cNvPr id="194" name="">
             <a:extLst xmlns:a="http://schemas.openxmlformats.org/drawingml/2006/main">
               <a:ext uri="{FF2B5EF4-FFF2-40B4-BE49-F238E27FC236}">
-                <a16:creationId xmlns:a16="http://schemas.microsoft.com/office/drawing/2014/main" id="{AEBFCE9F-EFDA-4516-ADCA-66E6EE9D19EB}"/>
+                <a16:creationId xmlns:a16="http://schemas.microsoft.com/office/drawing/2014/main" id="{50858E25-40D0-4786-8D87-3F3A7EE4B760}"/>
               </a:ext>
             </a:extLst>
           </p:cNvPr>
@@ -19902,7 +20092,7 @@
           <p:cNvPr id="195" name="">
             <a:extLst xmlns:a="http://schemas.openxmlformats.org/drawingml/2006/main">
               <a:ext uri="{FF2B5EF4-FFF2-40B4-BE49-F238E27FC236}">
-                <a16:creationId xmlns:a16="http://schemas.microsoft.com/office/drawing/2014/main" id="{47D4E953-B5F4-41F8-A52C-214A3EEDDF6A}"/>
+                <a16:creationId xmlns:a16="http://schemas.microsoft.com/office/drawing/2014/main" id="{3D53B207-8F29-4BB5-A655-17361EB43EED}"/>
               </a:ext>
             </a:extLst>
           </p:cNvPr>
@@ -19935,7 +20125,7 @@
           <p:cNvPr id="196" name="">
             <a:extLst xmlns:a="http://schemas.openxmlformats.org/drawingml/2006/main">
               <a:ext uri="{FF2B5EF4-FFF2-40B4-BE49-F238E27FC236}">
-                <a16:creationId xmlns:a16="http://schemas.microsoft.com/office/drawing/2014/main" id="{57113E07-142F-4A12-B935-2435A44A0898}"/>
+                <a16:creationId xmlns:a16="http://schemas.microsoft.com/office/drawing/2014/main" id="{C4122506-9476-45E5-93F7-8B8EB7238CF8}"/>
               </a:ext>
             </a:extLst>
           </p:cNvPr>
@@ -19968,7 +20158,7 @@
           <p:cNvPr id="197" name="">
             <a:extLst xmlns:a="http://schemas.openxmlformats.org/drawingml/2006/main">
               <a:ext uri="{FF2B5EF4-FFF2-40B4-BE49-F238E27FC236}">
-                <a16:creationId xmlns:a16="http://schemas.microsoft.com/office/drawing/2014/main" id="{B43450AC-A54A-4358-8E60-7F5133E8AD49}"/>
+                <a16:creationId xmlns:a16="http://schemas.microsoft.com/office/drawing/2014/main" id="{AABC513C-7F3D-4986-80E1-773BA43639BE}"/>
               </a:ext>
             </a:extLst>
           </p:cNvPr>
@@ -20003,7 +20193,7 @@
           <p:cNvPr id="198" name="">
             <a:extLst xmlns:a="http://schemas.openxmlformats.org/drawingml/2006/main">
               <a:ext uri="{FF2B5EF4-FFF2-40B4-BE49-F238E27FC236}">
-                <a16:creationId xmlns:a16="http://schemas.microsoft.com/office/drawing/2014/main" id="{51077075-35A3-4194-BF09-A66F16B5D0B8}"/>
+                <a16:creationId xmlns:a16="http://schemas.microsoft.com/office/drawing/2014/main" id="{E7DED159-9AE9-493A-A84A-0F8DD1302B80}"/>
               </a:ext>
             </a:extLst>
           </p:cNvPr>
@@ -20036,7 +20226,7 @@
           <p:cNvPr id="199" name="">
             <a:extLst xmlns:a="http://schemas.openxmlformats.org/drawingml/2006/main">
               <a:ext uri="{FF2B5EF4-FFF2-40B4-BE49-F238E27FC236}">
-                <a16:creationId xmlns:a16="http://schemas.microsoft.com/office/drawing/2014/main" id="{7AF74809-DAA8-426A-B1BC-DD76439DCD34}"/>
+                <a16:creationId xmlns:a16="http://schemas.microsoft.com/office/drawing/2014/main" id="{7899984E-3309-4655-81CE-B962EBEFCB4C}"/>
               </a:ext>
             </a:extLst>
           </p:cNvPr>
@@ -20069,7 +20259,7 @@
           <p:cNvPr id="200" name="">
             <a:extLst xmlns:a="http://schemas.openxmlformats.org/drawingml/2006/main">
               <a:ext uri="{FF2B5EF4-FFF2-40B4-BE49-F238E27FC236}">
-                <a16:creationId xmlns:a16="http://schemas.microsoft.com/office/drawing/2014/main" id="{5C176674-F328-4F3D-9CBD-E89BE77F03E8}"/>
+                <a16:creationId xmlns:a16="http://schemas.microsoft.com/office/drawing/2014/main" id="{8B9535A0-453A-4AFB-A7D4-148DC0AF2063}"/>
               </a:ext>
             </a:extLst>
           </p:cNvPr>
@@ -20102,7 +20292,7 @@
           <p:cNvPr id="201" name="">
             <a:extLst xmlns:a="http://schemas.openxmlformats.org/drawingml/2006/main">
               <a:ext uri="{FF2B5EF4-FFF2-40B4-BE49-F238E27FC236}">
-                <a16:creationId xmlns:a16="http://schemas.microsoft.com/office/drawing/2014/main" id="{0C616B69-4E25-4687-A5CA-94CA171DB189}"/>
+                <a16:creationId xmlns:a16="http://schemas.microsoft.com/office/drawing/2014/main" id="{BB01E52C-B010-4AA6-8E70-334373E24F3C}"/>
               </a:ext>
             </a:extLst>
           </p:cNvPr>
@@ -20135,7 +20325,7 @@
           <p:cNvPr id="202" name="">
             <a:extLst xmlns:a="http://schemas.openxmlformats.org/drawingml/2006/main">
               <a:ext uri="{FF2B5EF4-FFF2-40B4-BE49-F238E27FC236}">
-                <a16:creationId xmlns:a16="http://schemas.microsoft.com/office/drawing/2014/main" id="{3C778410-A04D-457C-B0A9-3A6C5E960692}"/>
+                <a16:creationId xmlns:a16="http://schemas.microsoft.com/office/drawing/2014/main" id="{7709133C-8530-409B-ADE2-849D007BFF1D}"/>
               </a:ext>
             </a:extLst>
           </p:cNvPr>
@@ -20168,7 +20358,7 @@
           <p:cNvPr id="203" name="">
             <a:extLst xmlns:a="http://schemas.openxmlformats.org/drawingml/2006/main">
               <a:ext uri="{FF2B5EF4-FFF2-40B4-BE49-F238E27FC236}">
-                <a16:creationId xmlns:a16="http://schemas.microsoft.com/office/drawing/2014/main" id="{CE36ECB0-6B0B-488F-9897-7B527EAC5B84}"/>
+                <a16:creationId xmlns:a16="http://schemas.microsoft.com/office/drawing/2014/main" id="{DA5B1843-7671-4D37-98B5-9EFED9AC6304}"/>
               </a:ext>
             </a:extLst>
           </p:cNvPr>
@@ -20201,7 +20391,7 @@
           <p:cNvPr id="204" name="">
             <a:extLst xmlns:a="http://schemas.openxmlformats.org/drawingml/2006/main">
               <a:ext uri="{FF2B5EF4-FFF2-40B4-BE49-F238E27FC236}">
-                <a16:creationId xmlns:a16="http://schemas.microsoft.com/office/drawing/2014/main" id="{CB71B175-9598-4C6C-A975-916362238B84}"/>
+                <a16:creationId xmlns:a16="http://schemas.microsoft.com/office/drawing/2014/main" id="{72A6B266-9537-4215-8C19-F424E7665EFB}"/>
               </a:ext>
             </a:extLst>
           </p:cNvPr>
@@ -20234,7 +20424,7 @@
           <p:cNvPr id="205" name="">
             <a:extLst xmlns:a="http://schemas.openxmlformats.org/drawingml/2006/main">
               <a:ext uri="{FF2B5EF4-FFF2-40B4-BE49-F238E27FC236}">
-                <a16:creationId xmlns:a16="http://schemas.microsoft.com/office/drawing/2014/main" id="{4C3B7B34-3D16-444E-B2E3-661D255862DE}"/>
+                <a16:creationId xmlns:a16="http://schemas.microsoft.com/office/drawing/2014/main" id="{AF5127C3-811C-4DC1-88BC-C5671DB1FD67}"/>
               </a:ext>
             </a:extLst>
           </p:cNvPr>
@@ -20267,7 +20457,7 @@
           <p:cNvPr id="206" name="">
             <a:extLst xmlns:a="http://schemas.openxmlformats.org/drawingml/2006/main">
               <a:ext uri="{FF2B5EF4-FFF2-40B4-BE49-F238E27FC236}">
-                <a16:creationId xmlns:a16="http://schemas.microsoft.com/office/drawing/2014/main" id="{1A3F1E8A-1FFF-40D2-A5C0-8CB824777DFC}"/>
+                <a16:creationId xmlns:a16="http://schemas.microsoft.com/office/drawing/2014/main" id="{631708C3-A813-4235-9502-35691FF10C4F}"/>
               </a:ext>
             </a:extLst>
           </p:cNvPr>
@@ -20300,7 +20490,7 @@
           <p:cNvPr id="207" name="">
             <a:extLst xmlns:a="http://schemas.openxmlformats.org/drawingml/2006/main">
               <a:ext uri="{FF2B5EF4-FFF2-40B4-BE49-F238E27FC236}">
-                <a16:creationId xmlns:a16="http://schemas.microsoft.com/office/drawing/2014/main" id="{65149B3A-8BAC-42A9-A415-41CDE775134A}"/>
+                <a16:creationId xmlns:a16="http://schemas.microsoft.com/office/drawing/2014/main" id="{88467B2D-1010-414B-8D00-287C97CC7C25}"/>
               </a:ext>
             </a:extLst>
           </p:cNvPr>
@@ -20333,7 +20523,7 @@
           <p:cNvPr id="208" name="">
             <a:extLst xmlns:a="http://schemas.openxmlformats.org/drawingml/2006/main">
               <a:ext uri="{FF2B5EF4-FFF2-40B4-BE49-F238E27FC236}">
-                <a16:creationId xmlns:a16="http://schemas.microsoft.com/office/drawing/2014/main" id="{0A0587DD-A15F-4DFC-9F2A-5C8FC3963CEB}"/>
+                <a16:creationId xmlns:a16="http://schemas.microsoft.com/office/drawing/2014/main" id="{EFB44848-9A84-457A-BC1B-139CF2227A2F}"/>
               </a:ext>
             </a:extLst>
           </p:cNvPr>
@@ -20366,7 +20556,7 @@
           <p:cNvPr id="209" name="">
             <a:extLst xmlns:a="http://schemas.openxmlformats.org/drawingml/2006/main">
               <a:ext uri="{FF2B5EF4-FFF2-40B4-BE49-F238E27FC236}">
-                <a16:creationId xmlns:a16="http://schemas.microsoft.com/office/drawing/2014/main" id="{AF5851CF-D594-4248-B9D4-B7E9F746747F}"/>
+                <a16:creationId xmlns:a16="http://schemas.microsoft.com/office/drawing/2014/main" id="{4EFCDE62-0C10-4D50-AC73-EE955897FCE3}"/>
               </a:ext>
             </a:extLst>
           </p:cNvPr>
@@ -20399,7 +20589,7 @@
           <p:cNvPr id="210" name="">
             <a:extLst xmlns:a="http://schemas.openxmlformats.org/drawingml/2006/main">
               <a:ext uri="{FF2B5EF4-FFF2-40B4-BE49-F238E27FC236}">
-                <a16:creationId xmlns:a16="http://schemas.microsoft.com/office/drawing/2014/main" id="{E0424A22-FAAF-4AC0-88B7-2E1D81881B03}"/>
+                <a16:creationId xmlns:a16="http://schemas.microsoft.com/office/drawing/2014/main" id="{18BD13E3-AF19-4850-BF96-E68245423047}"/>
               </a:ext>
             </a:extLst>
           </p:cNvPr>
@@ -20432,7 +20622,7 @@
           <p:cNvPr id="211" name="">
             <a:extLst xmlns:a="http://schemas.openxmlformats.org/drawingml/2006/main">
               <a:ext uri="{FF2B5EF4-FFF2-40B4-BE49-F238E27FC236}">
-                <a16:creationId xmlns:a16="http://schemas.microsoft.com/office/drawing/2014/main" id="{DE3B0BF4-1E59-4C71-B477-E6E88086C1F9}"/>
+                <a16:creationId xmlns:a16="http://schemas.microsoft.com/office/drawing/2014/main" id="{7DE90D3B-AD87-4C94-BB6E-364A26D9EAD4}"/>
               </a:ext>
             </a:extLst>
           </p:cNvPr>
@@ -20465,7 +20655,7 @@
           <p:cNvPr id="212" name="">
             <a:extLst xmlns:a="http://schemas.openxmlformats.org/drawingml/2006/main">
               <a:ext uri="{FF2B5EF4-FFF2-40B4-BE49-F238E27FC236}">
-                <a16:creationId xmlns:a16="http://schemas.microsoft.com/office/drawing/2014/main" id="{1D936BC0-223C-4096-AD06-8D7B899B9173}"/>
+                <a16:creationId xmlns:a16="http://schemas.microsoft.com/office/drawing/2014/main" id="{9D7E77B6-8D90-448C-B511-24029B63C039}"/>
               </a:ext>
             </a:extLst>
           </p:cNvPr>
@@ -20498,7 +20688,7 @@
           <p:cNvPr id="213" name="">
             <a:extLst xmlns:a="http://schemas.openxmlformats.org/drawingml/2006/main">
               <a:ext uri="{FF2B5EF4-FFF2-40B4-BE49-F238E27FC236}">
-                <a16:creationId xmlns:a16="http://schemas.microsoft.com/office/drawing/2014/main" id="{2F9CCB9F-133A-4D18-BAE6-98BB57DB0FEA}"/>
+                <a16:creationId xmlns:a16="http://schemas.microsoft.com/office/drawing/2014/main" id="{D865FF6F-8DDD-462D-8DB5-1F95C1D3DD20}"/>
               </a:ext>
             </a:extLst>
           </p:cNvPr>
@@ -20531,7 +20721,7 @@
           <p:cNvPr id="214" name="">
             <a:extLst xmlns:a="http://schemas.openxmlformats.org/drawingml/2006/main">
               <a:ext uri="{FF2B5EF4-FFF2-40B4-BE49-F238E27FC236}">
-                <a16:creationId xmlns:a16="http://schemas.microsoft.com/office/drawing/2014/main" id="{486653F7-84EE-44E9-B081-737E6B223DB0}"/>
+                <a16:creationId xmlns:a16="http://schemas.microsoft.com/office/drawing/2014/main" id="{6F8D70DA-75D9-48B3-B474-0AA6654A16DA}"/>
               </a:ext>
             </a:extLst>
           </p:cNvPr>
@@ -20564,7 +20754,7 @@
           <p:cNvPr id="215" name="">
             <a:extLst xmlns:a="http://schemas.openxmlformats.org/drawingml/2006/main">
               <a:ext uri="{FF2B5EF4-FFF2-40B4-BE49-F238E27FC236}">
-                <a16:creationId xmlns:a16="http://schemas.microsoft.com/office/drawing/2014/main" id="{851A238A-0700-4CC3-8C50-103686EE56F4}"/>
+                <a16:creationId xmlns:a16="http://schemas.microsoft.com/office/drawing/2014/main" id="{BD4908F3-A83B-45E0-A068-9B66579F88B7}"/>
               </a:ext>
             </a:extLst>
           </p:cNvPr>
@@ -20597,7 +20787,7 @@
           <p:cNvPr id="216" name="">
             <a:extLst xmlns:a="http://schemas.openxmlformats.org/drawingml/2006/main">
               <a:ext uri="{FF2B5EF4-FFF2-40B4-BE49-F238E27FC236}">
-                <a16:creationId xmlns:a16="http://schemas.microsoft.com/office/drawing/2014/main" id="{5F3EC92D-F4AF-465F-9705-F81D9249892F}"/>
+                <a16:creationId xmlns:a16="http://schemas.microsoft.com/office/drawing/2014/main" id="{229CF5B8-AE85-40D3-A7AB-6236C4928B5B}"/>
               </a:ext>
             </a:extLst>
           </p:cNvPr>
@@ -20630,7 +20820,7 @@
           <p:cNvPr id="217" name="">
             <a:extLst xmlns:a="http://schemas.openxmlformats.org/drawingml/2006/main">
               <a:ext uri="{FF2B5EF4-FFF2-40B4-BE49-F238E27FC236}">
-                <a16:creationId xmlns:a16="http://schemas.microsoft.com/office/drawing/2014/main" id="{A68FE41A-938B-4329-B5E0-33857B640E1E}"/>
+                <a16:creationId xmlns:a16="http://schemas.microsoft.com/office/drawing/2014/main" id="{9897D85C-E7EB-4264-8003-90A82A66E262}"/>
               </a:ext>
             </a:extLst>
           </p:cNvPr>
@@ -20663,7 +20853,7 @@
           <p:cNvPr id="218" name="">
             <a:extLst xmlns:a="http://schemas.openxmlformats.org/drawingml/2006/main">
               <a:ext uri="{FF2B5EF4-FFF2-40B4-BE49-F238E27FC236}">
-                <a16:creationId xmlns:a16="http://schemas.microsoft.com/office/drawing/2014/main" id="{2CC63A73-E76D-4FDE-9AC3-6729BC46F915}"/>
+                <a16:creationId xmlns:a16="http://schemas.microsoft.com/office/drawing/2014/main" id="{5B392013-6DE6-4454-AAB4-E822C5045C4D}"/>
               </a:ext>
             </a:extLst>
           </p:cNvPr>
@@ -20696,7 +20886,7 @@
           <p:cNvPr id="219" name="">
             <a:extLst xmlns:a="http://schemas.openxmlformats.org/drawingml/2006/main">
               <a:ext uri="{FF2B5EF4-FFF2-40B4-BE49-F238E27FC236}">
-                <a16:creationId xmlns:a16="http://schemas.microsoft.com/office/drawing/2014/main" id="{FC9F474D-E7EA-4B76-AA63-0936D0AE63F5}"/>
+                <a16:creationId xmlns:a16="http://schemas.microsoft.com/office/drawing/2014/main" id="{DEABE820-AA29-400F-98A7-01F83D7AFCE6}"/>
               </a:ext>
             </a:extLst>
           </p:cNvPr>
@@ -20729,7 +20919,7 @@
           <p:cNvPr id="220" name="">
             <a:extLst xmlns:a="http://schemas.openxmlformats.org/drawingml/2006/main">
               <a:ext uri="{FF2B5EF4-FFF2-40B4-BE49-F238E27FC236}">
-                <a16:creationId xmlns:a16="http://schemas.microsoft.com/office/drawing/2014/main" id="{64551486-2520-443B-A5D3-05B96F0C0016}"/>
+                <a16:creationId xmlns:a16="http://schemas.microsoft.com/office/drawing/2014/main" id="{B95DA19E-61E0-4C69-AD8C-6BA0AFF8E9FE}"/>
               </a:ext>
             </a:extLst>
           </p:cNvPr>
@@ -20762,7 +20952,7 @@
           <p:cNvPr id="221" name="">
             <a:extLst xmlns:a="http://schemas.openxmlformats.org/drawingml/2006/main">
               <a:ext uri="{FF2B5EF4-FFF2-40B4-BE49-F238E27FC236}">
-                <a16:creationId xmlns:a16="http://schemas.microsoft.com/office/drawing/2014/main" id="{74C5AAC9-2231-4BEE-AFCA-DC1C2DCC144E}"/>
+                <a16:creationId xmlns:a16="http://schemas.microsoft.com/office/drawing/2014/main" id="{4C92A3E5-809A-4D99-B4A5-255F42C3F3D7}"/>
               </a:ext>
             </a:extLst>
           </p:cNvPr>
@@ -20795,7 +20985,7 @@
           <p:cNvPr id="222" name="">
             <a:extLst xmlns:a="http://schemas.openxmlformats.org/drawingml/2006/main">
               <a:ext uri="{FF2B5EF4-FFF2-40B4-BE49-F238E27FC236}">
-                <a16:creationId xmlns:a16="http://schemas.microsoft.com/office/drawing/2014/main" id="{2DA1A670-9699-4803-9B37-78189C9EC0C4}"/>
+                <a16:creationId xmlns:a16="http://schemas.microsoft.com/office/drawing/2014/main" id="{25B6B707-DEC6-4C7A-8850-089A4DCDAC5B}"/>
               </a:ext>
             </a:extLst>
           </p:cNvPr>
@@ -20828,7 +21018,7 @@
           <p:cNvPr id="223" name="">
             <a:extLst xmlns:a="http://schemas.openxmlformats.org/drawingml/2006/main">
               <a:ext uri="{FF2B5EF4-FFF2-40B4-BE49-F238E27FC236}">
-                <a16:creationId xmlns:a16="http://schemas.microsoft.com/office/drawing/2014/main" id="{53FA3654-F61B-43CE-9F13-513C29817CBC}"/>
+                <a16:creationId xmlns:a16="http://schemas.microsoft.com/office/drawing/2014/main" id="{427DD803-1F8D-420F-846C-7FA716358A1A}"/>
               </a:ext>
             </a:extLst>
           </p:cNvPr>
@@ -20861,7 +21051,7 @@
           <p:cNvPr id="224" name="">
             <a:extLst xmlns:a="http://schemas.openxmlformats.org/drawingml/2006/main">
               <a:ext uri="{FF2B5EF4-FFF2-40B4-BE49-F238E27FC236}">
-                <a16:creationId xmlns:a16="http://schemas.microsoft.com/office/drawing/2014/main" id="{4FA802F2-7596-4AB8-9014-A1E901D9EAB6}"/>
+                <a16:creationId xmlns:a16="http://schemas.microsoft.com/office/drawing/2014/main" id="{1756102A-4CEF-445D-B2AD-CA45A49B39A2}"/>
               </a:ext>
             </a:extLst>
           </p:cNvPr>
@@ -20894,7 +21084,7 @@
           <p:cNvPr id="225" name="">
             <a:extLst xmlns:a="http://schemas.openxmlformats.org/drawingml/2006/main">
               <a:ext uri="{FF2B5EF4-FFF2-40B4-BE49-F238E27FC236}">
-                <a16:creationId xmlns:a16="http://schemas.microsoft.com/office/drawing/2014/main" id="{A561E870-F393-4C19-A349-019EDAB0A8FC}"/>
+                <a16:creationId xmlns:a16="http://schemas.microsoft.com/office/drawing/2014/main" id="{E9472113-8F87-4069-B043-57A83DA92BAE}"/>
               </a:ext>
             </a:extLst>
           </p:cNvPr>
@@ -20927,7 +21117,7 @@
           <p:cNvPr id="226" name="">
             <a:extLst xmlns:a="http://schemas.openxmlformats.org/drawingml/2006/main">
               <a:ext uri="{FF2B5EF4-FFF2-40B4-BE49-F238E27FC236}">
-                <a16:creationId xmlns:a16="http://schemas.microsoft.com/office/drawing/2014/main" id="{D38C867B-81F1-4B9F-9BE0-D1FB9DF23CE4}"/>
+                <a16:creationId xmlns:a16="http://schemas.microsoft.com/office/drawing/2014/main" id="{AAEDA236-E56F-4F23-AD5E-F06731663BEC}"/>
               </a:ext>
             </a:extLst>
           </p:cNvPr>
@@ -20960,7 +21150,7 @@
           <p:cNvPr id="227" name="">
             <a:extLst xmlns:a="http://schemas.openxmlformats.org/drawingml/2006/main">
               <a:ext uri="{FF2B5EF4-FFF2-40B4-BE49-F238E27FC236}">
-                <a16:creationId xmlns:a16="http://schemas.microsoft.com/office/drawing/2014/main" id="{EB53FB2C-3FF2-45D1-BC42-929552405F24}"/>
+                <a16:creationId xmlns:a16="http://schemas.microsoft.com/office/drawing/2014/main" id="{48144540-AA6D-4F21-AB14-09C6E4A03D04}"/>
               </a:ext>
             </a:extLst>
           </p:cNvPr>
@@ -20993,7 +21183,7 @@
           <p:cNvPr id="228" name="">
             <a:extLst xmlns:a="http://schemas.openxmlformats.org/drawingml/2006/main">
               <a:ext uri="{FF2B5EF4-FFF2-40B4-BE49-F238E27FC236}">
-                <a16:creationId xmlns:a16="http://schemas.microsoft.com/office/drawing/2014/main" id="{C2F1A16E-16DD-4650-B5D3-215095564C75}"/>
+                <a16:creationId xmlns:a16="http://schemas.microsoft.com/office/drawing/2014/main" id="{BE6E9C8C-040B-498D-9EE1-DDD094A8BD6F}"/>
               </a:ext>
             </a:extLst>
           </p:cNvPr>
@@ -21026,7 +21216,7 @@
           <p:cNvPr id="229" name="">
             <a:extLst xmlns:a="http://schemas.openxmlformats.org/drawingml/2006/main">
               <a:ext uri="{FF2B5EF4-FFF2-40B4-BE49-F238E27FC236}">
-                <a16:creationId xmlns:a16="http://schemas.microsoft.com/office/drawing/2014/main" id="{0DB00CCB-A9B2-4089-B49C-410FC2FA0BEF}"/>
+                <a16:creationId xmlns:a16="http://schemas.microsoft.com/office/drawing/2014/main" id="{BEDF8C80-6471-4D9C-9CEE-DFECD7C7ECC9}"/>
               </a:ext>
             </a:extLst>
           </p:cNvPr>
@@ -21059,7 +21249,7 @@
           <p:cNvPr id="230" name="">
             <a:extLst xmlns:a="http://schemas.openxmlformats.org/drawingml/2006/main">
               <a:ext uri="{FF2B5EF4-FFF2-40B4-BE49-F238E27FC236}">
-                <a16:creationId xmlns:a16="http://schemas.microsoft.com/office/drawing/2014/main" id="{F8B89A79-BF23-4014-9B5A-B6AB82F74DE8}"/>
+                <a16:creationId xmlns:a16="http://schemas.microsoft.com/office/drawing/2014/main" id="{14CF1B67-EC8D-4226-882E-A9B5B92BBE52}"/>
               </a:ext>
             </a:extLst>
           </p:cNvPr>
@@ -21092,7 +21282,7 @@
           <p:cNvPr id="231" name="">
             <a:extLst xmlns:a="http://schemas.openxmlformats.org/drawingml/2006/main">
               <a:ext uri="{FF2B5EF4-FFF2-40B4-BE49-F238E27FC236}">
-                <a16:creationId xmlns:a16="http://schemas.microsoft.com/office/drawing/2014/main" id="{0E448543-664A-4ECA-ACFD-7410F8C72E16}"/>
+                <a16:creationId xmlns:a16="http://schemas.microsoft.com/office/drawing/2014/main" id="{58C0BF80-99F8-4EC1-A08F-9602F2F42AE1}"/>
               </a:ext>
             </a:extLst>
           </p:cNvPr>
@@ -21125,7 +21315,7 @@
           <p:cNvPr id="232" name="">
             <a:extLst xmlns:a="http://schemas.openxmlformats.org/drawingml/2006/main">
               <a:ext uri="{FF2B5EF4-FFF2-40B4-BE49-F238E27FC236}">
-                <a16:creationId xmlns:a16="http://schemas.microsoft.com/office/drawing/2014/main" id="{D29136B2-65B5-4FDA-B28C-482E5796BD86}"/>
+                <a16:creationId xmlns:a16="http://schemas.microsoft.com/office/drawing/2014/main" id="{26F98D53-0963-4C2F-8E4A-DE8C6906C1C0}"/>
               </a:ext>
             </a:extLst>
           </p:cNvPr>
@@ -21158,7 +21348,7 @@
           <p:cNvPr id="233" name="">
             <a:extLst xmlns:a="http://schemas.openxmlformats.org/drawingml/2006/main">
               <a:ext uri="{FF2B5EF4-FFF2-40B4-BE49-F238E27FC236}">
-                <a16:creationId xmlns:a16="http://schemas.microsoft.com/office/drawing/2014/main" id="{1D0C1B7B-4599-483C-A677-496FF4669981}"/>
+                <a16:creationId xmlns:a16="http://schemas.microsoft.com/office/drawing/2014/main" id="{6C5F1629-9BC4-4679-B968-3851E49AB591}"/>
               </a:ext>
             </a:extLst>
           </p:cNvPr>
@@ -21191,7 +21381,7 @@
           <p:cNvPr id="234" name="">
             <a:extLst xmlns:a="http://schemas.openxmlformats.org/drawingml/2006/main">
               <a:ext uri="{FF2B5EF4-FFF2-40B4-BE49-F238E27FC236}">
-                <a16:creationId xmlns:a16="http://schemas.microsoft.com/office/drawing/2014/main" id="{8ADD04B0-C01E-4780-878B-6F7E10683C49}"/>
+                <a16:creationId xmlns:a16="http://schemas.microsoft.com/office/drawing/2014/main" id="{14F3E435-1403-43A5-A02C-E9FD30CA005F}"/>
               </a:ext>
             </a:extLst>
           </p:cNvPr>
@@ -21224,7 +21414,7 @@
           <p:cNvPr id="235" name="">
             <a:extLst xmlns:a="http://schemas.openxmlformats.org/drawingml/2006/main">
               <a:ext uri="{FF2B5EF4-FFF2-40B4-BE49-F238E27FC236}">
-                <a16:creationId xmlns:a16="http://schemas.microsoft.com/office/drawing/2014/main" id="{3601637D-8209-42E8-9D93-952760F7F7FD}"/>
+                <a16:creationId xmlns:a16="http://schemas.microsoft.com/office/drawing/2014/main" id="{6C00E579-7ABB-44DB-8F34-86E5A311964C}"/>
               </a:ext>
             </a:extLst>
           </p:cNvPr>
@@ -21257,7 +21447,7 @@
           <p:cNvPr id="236" name="">
             <a:extLst xmlns:a="http://schemas.openxmlformats.org/drawingml/2006/main">
               <a:ext uri="{FF2B5EF4-FFF2-40B4-BE49-F238E27FC236}">
-                <a16:creationId xmlns:a16="http://schemas.microsoft.com/office/drawing/2014/main" id="{750D2FDC-B906-4533-A809-1680773F88AF}"/>
+                <a16:creationId xmlns:a16="http://schemas.microsoft.com/office/drawing/2014/main" id="{0FD21425-9462-4B7D-8ED8-0D805F4C713E}"/>
               </a:ext>
             </a:extLst>
           </p:cNvPr>
@@ -21290,7 +21480,7 @@
           <p:cNvPr id="237" name="">
             <a:extLst xmlns:a="http://schemas.openxmlformats.org/drawingml/2006/main">
               <a:ext uri="{FF2B5EF4-FFF2-40B4-BE49-F238E27FC236}">
-                <a16:creationId xmlns:a16="http://schemas.microsoft.com/office/drawing/2014/main" id="{0E23597C-F310-4779-9919-D1AD0A2551E7}"/>
+                <a16:creationId xmlns:a16="http://schemas.microsoft.com/office/drawing/2014/main" id="{73F1522A-2FD0-4917-8953-2BD76E50523F}"/>
               </a:ext>
             </a:extLst>
           </p:cNvPr>
@@ -21323,7 +21513,7 @@
           <p:cNvPr id="238" name="">
             <a:extLst xmlns:a="http://schemas.openxmlformats.org/drawingml/2006/main">
               <a:ext uri="{FF2B5EF4-FFF2-40B4-BE49-F238E27FC236}">
-                <a16:creationId xmlns:a16="http://schemas.microsoft.com/office/drawing/2014/main" id="{09D63776-EA1F-456E-9FDB-8CCEF4C2A9AC}"/>
+                <a16:creationId xmlns:a16="http://schemas.microsoft.com/office/drawing/2014/main" id="{DA3EDC32-D25A-4E22-A877-3E2D7131D50D}"/>
               </a:ext>
             </a:extLst>
           </p:cNvPr>
@@ -21356,7 +21546,7 @@
           <p:cNvPr id="239" name="">
             <a:extLst xmlns:a="http://schemas.openxmlformats.org/drawingml/2006/main">
               <a:ext uri="{FF2B5EF4-FFF2-40B4-BE49-F238E27FC236}">
-                <a16:creationId xmlns:a16="http://schemas.microsoft.com/office/drawing/2014/main" id="{166CCBC7-497B-4FC8-BC47-481D049BB41C}"/>
+                <a16:creationId xmlns:a16="http://schemas.microsoft.com/office/drawing/2014/main" id="{60CB5423-8BF0-4475-BB79-4DAD8FC05C1E}"/>
               </a:ext>
             </a:extLst>
           </p:cNvPr>
@@ -21389,7 +21579,7 @@
           <p:cNvPr id="240" name="">
             <a:extLst xmlns:a="http://schemas.openxmlformats.org/drawingml/2006/main">
               <a:ext uri="{FF2B5EF4-FFF2-40B4-BE49-F238E27FC236}">
-                <a16:creationId xmlns:a16="http://schemas.microsoft.com/office/drawing/2014/main" id="{A64E7B0B-B526-441E-B830-CA95A40E5D1E}"/>
+                <a16:creationId xmlns:a16="http://schemas.microsoft.com/office/drawing/2014/main" id="{EDAA5566-4B1E-4E49-AEB4-CCF66818BCD1}"/>
               </a:ext>
             </a:extLst>
           </p:cNvPr>
@@ -21422,7 +21612,7 @@
           <p:cNvPr id="241" name="">
             <a:extLst xmlns:a="http://schemas.openxmlformats.org/drawingml/2006/main">
               <a:ext uri="{FF2B5EF4-FFF2-40B4-BE49-F238E27FC236}">
-                <a16:creationId xmlns:a16="http://schemas.microsoft.com/office/drawing/2014/main" id="{089C69A9-482F-44B7-B63B-73B3B5DD7063}"/>
+                <a16:creationId xmlns:a16="http://schemas.microsoft.com/office/drawing/2014/main" id="{7E227BB3-B19E-4870-9162-4B73E5FBC3CC}"/>
               </a:ext>
             </a:extLst>
           </p:cNvPr>
@@ -21455,7 +21645,7 @@
           <p:cNvPr id="242" name="">
             <a:extLst xmlns:a="http://schemas.openxmlformats.org/drawingml/2006/main">
               <a:ext uri="{FF2B5EF4-FFF2-40B4-BE49-F238E27FC236}">
-                <a16:creationId xmlns:a16="http://schemas.microsoft.com/office/drawing/2014/main" id="{33437616-FD33-4DDF-B5DD-D89218C39FA7}"/>
+                <a16:creationId xmlns:a16="http://schemas.microsoft.com/office/drawing/2014/main" id="{8699B788-C6C2-4D94-A588-BAE3A26ACC17}"/>
               </a:ext>
             </a:extLst>
           </p:cNvPr>
@@ -21488,7 +21678,7 @@
           <p:cNvPr id="243" name="">
             <a:extLst xmlns:a="http://schemas.openxmlformats.org/drawingml/2006/main">
               <a:ext uri="{FF2B5EF4-FFF2-40B4-BE49-F238E27FC236}">
-                <a16:creationId xmlns:a16="http://schemas.microsoft.com/office/drawing/2014/main" id="{16C746AD-9F3A-4116-B9CF-529B706C1917}"/>
+                <a16:creationId xmlns:a16="http://schemas.microsoft.com/office/drawing/2014/main" id="{18EF8F66-CEDB-4F82-AE96-529E0F21F61D}"/>
               </a:ext>
             </a:extLst>
           </p:cNvPr>
@@ -21521,7 +21711,7 @@
           <p:cNvPr id="244" name="">
             <a:extLst xmlns:a="http://schemas.openxmlformats.org/drawingml/2006/main">
               <a:ext uri="{FF2B5EF4-FFF2-40B4-BE49-F238E27FC236}">
-                <a16:creationId xmlns:a16="http://schemas.microsoft.com/office/drawing/2014/main" id="{174DEDD2-448A-4D5F-8B5B-635FBCD71680}"/>
+                <a16:creationId xmlns:a16="http://schemas.microsoft.com/office/drawing/2014/main" id="{50D5ABDF-6774-4ED8-BFD5-16D01B1BF92B}"/>
               </a:ext>
             </a:extLst>
           </p:cNvPr>
@@ -21554,7 +21744,7 @@
           <p:cNvPr id="245" name="">
             <a:extLst xmlns:a="http://schemas.openxmlformats.org/drawingml/2006/main">
               <a:ext uri="{FF2B5EF4-FFF2-40B4-BE49-F238E27FC236}">
-                <a16:creationId xmlns:a16="http://schemas.microsoft.com/office/drawing/2014/main" id="{6C778099-C263-4A30-906D-D15B61FE7F28}"/>
+                <a16:creationId xmlns:a16="http://schemas.microsoft.com/office/drawing/2014/main" id="{CA3B231F-C5C9-425F-AF9D-4F451808D94A}"/>
               </a:ext>
             </a:extLst>
           </p:cNvPr>
@@ -21587,7 +21777,7 @@
           <p:cNvPr id="246" name="">
             <a:extLst xmlns:a="http://schemas.openxmlformats.org/drawingml/2006/main">
               <a:ext uri="{FF2B5EF4-FFF2-40B4-BE49-F238E27FC236}">
-                <a16:creationId xmlns:a16="http://schemas.microsoft.com/office/drawing/2014/main" id="{5EE86D8A-D50E-4DEE-A3B8-E1C498B236DE}"/>
+                <a16:creationId xmlns:a16="http://schemas.microsoft.com/office/drawing/2014/main" id="{CD80E074-953C-493E-9282-F6A908A389F0}"/>
               </a:ext>
             </a:extLst>
           </p:cNvPr>
@@ -21620,7 +21810,7 @@
           <p:cNvPr id="247" name="">
             <a:extLst xmlns:a="http://schemas.openxmlformats.org/drawingml/2006/main">
               <a:ext uri="{FF2B5EF4-FFF2-40B4-BE49-F238E27FC236}">
-                <a16:creationId xmlns:a16="http://schemas.microsoft.com/office/drawing/2014/main" id="{A8F272F9-EBDF-4BAC-8F07-7F23D01FE38F}"/>
+                <a16:creationId xmlns:a16="http://schemas.microsoft.com/office/drawing/2014/main" id="{4E3315EF-819B-43EB-8A02-1CFF19EFBBC8}"/>
               </a:ext>
             </a:extLst>
           </p:cNvPr>
@@ -21653,7 +21843,7 @@
           <p:cNvPr id="248" name="">
             <a:extLst xmlns:a="http://schemas.openxmlformats.org/drawingml/2006/main">
               <a:ext uri="{FF2B5EF4-FFF2-40B4-BE49-F238E27FC236}">
-                <a16:creationId xmlns:a16="http://schemas.microsoft.com/office/drawing/2014/main" id="{B07755A1-3657-4A55-B91B-777193FB896A}"/>
+                <a16:creationId xmlns:a16="http://schemas.microsoft.com/office/drawing/2014/main" id="{B8D43D8A-CFD4-46F4-92F7-270F16363B7C}"/>
               </a:ext>
             </a:extLst>
           </p:cNvPr>
@@ -21686,7 +21876,7 @@
           <p:cNvPr id="249" name="">
             <a:extLst xmlns:a="http://schemas.openxmlformats.org/drawingml/2006/main">
               <a:ext uri="{FF2B5EF4-FFF2-40B4-BE49-F238E27FC236}">
-                <a16:creationId xmlns:a16="http://schemas.microsoft.com/office/drawing/2014/main" id="{4E84E880-4A5A-4772-892D-53B185F53766}"/>
+                <a16:creationId xmlns:a16="http://schemas.microsoft.com/office/drawing/2014/main" id="{14AD7382-86B4-47C0-BBAF-FDE12B7E5F07}"/>
               </a:ext>
             </a:extLst>
           </p:cNvPr>
@@ -21719,7 +21909,7 @@
           <p:cNvPr id="250" name="">
             <a:extLst xmlns:a="http://schemas.openxmlformats.org/drawingml/2006/main">
               <a:ext uri="{FF2B5EF4-FFF2-40B4-BE49-F238E27FC236}">
-                <a16:creationId xmlns:a16="http://schemas.microsoft.com/office/drawing/2014/main" id="{81A00170-C2DA-4C0D-AD7F-6BFFECCF05C2}"/>
+                <a16:creationId xmlns:a16="http://schemas.microsoft.com/office/drawing/2014/main" id="{8E9AB3AA-6EC5-432D-99E2-73ADEEF603AE}"/>
               </a:ext>
             </a:extLst>
           </p:cNvPr>
@@ -21752,7 +21942,7 @@
           <p:cNvPr id="251" name="">
             <a:extLst xmlns:a="http://schemas.openxmlformats.org/drawingml/2006/main">
               <a:ext uri="{FF2B5EF4-FFF2-40B4-BE49-F238E27FC236}">
-                <a16:creationId xmlns:a16="http://schemas.microsoft.com/office/drawing/2014/main" id="{E6789912-6D36-43B6-BB3F-A6425FAE3719}"/>
+                <a16:creationId xmlns:a16="http://schemas.microsoft.com/office/drawing/2014/main" id="{299E4FB2-8E21-450F-8A6E-48741CA18785}"/>
               </a:ext>
             </a:extLst>
           </p:cNvPr>
@@ -21785,7 +21975,7 @@
           <p:cNvPr id="252" name="">
             <a:extLst xmlns:a="http://schemas.openxmlformats.org/drawingml/2006/main">
               <a:ext uri="{FF2B5EF4-FFF2-40B4-BE49-F238E27FC236}">
-                <a16:creationId xmlns:a16="http://schemas.microsoft.com/office/drawing/2014/main" id="{D0C56E20-75AF-4E1E-941D-3FC2F7511EE4}"/>
+                <a16:creationId xmlns:a16="http://schemas.microsoft.com/office/drawing/2014/main" id="{0B6AC15E-72CA-4E85-B3B6-A4B762D89A4F}"/>
               </a:ext>
             </a:extLst>
           </p:cNvPr>
@@ -21818,7 +22008,7 @@
           <p:cNvPr id="253" name="">
             <a:extLst xmlns:a="http://schemas.openxmlformats.org/drawingml/2006/main">
               <a:ext uri="{FF2B5EF4-FFF2-40B4-BE49-F238E27FC236}">
-                <a16:creationId xmlns:a16="http://schemas.microsoft.com/office/drawing/2014/main" id="{BC2C4AD8-3178-4D83-905D-4A4E4D4A20BF}"/>
+                <a16:creationId xmlns:a16="http://schemas.microsoft.com/office/drawing/2014/main" id="{0210FFFA-4821-4332-B51F-38C59A34BBA8}"/>
               </a:ext>
             </a:extLst>
           </p:cNvPr>
@@ -21851,7 +22041,7 @@
           <p:cNvPr id="254" name="">
             <a:extLst xmlns:a="http://schemas.openxmlformats.org/drawingml/2006/main">
               <a:ext uri="{FF2B5EF4-FFF2-40B4-BE49-F238E27FC236}">
-                <a16:creationId xmlns:a16="http://schemas.microsoft.com/office/drawing/2014/main" id="{D4FC998E-78CE-4909-B93E-F7244F98B88C}"/>
+                <a16:creationId xmlns:a16="http://schemas.microsoft.com/office/drawing/2014/main" id="{E328C89A-7EAB-4C1E-85DA-712E52F9ABBA}"/>
               </a:ext>
             </a:extLst>
           </p:cNvPr>
@@ -21884,7 +22074,7 @@
           <p:cNvPr id="255" name="">
             <a:extLst xmlns:a="http://schemas.openxmlformats.org/drawingml/2006/main">
               <a:ext uri="{FF2B5EF4-FFF2-40B4-BE49-F238E27FC236}">
-                <a16:creationId xmlns:a16="http://schemas.microsoft.com/office/drawing/2014/main" id="{A1A8DA74-4ACE-4C80-8BF1-931C378E5B76}"/>
+                <a16:creationId xmlns:a16="http://schemas.microsoft.com/office/drawing/2014/main" id="{F21643FD-FF38-4FB5-ABD8-64180271512C}"/>
               </a:ext>
             </a:extLst>
           </p:cNvPr>
@@ -21917,7 +22107,7 @@
           <p:cNvPr id="256" name="">
             <a:extLst xmlns:a="http://schemas.openxmlformats.org/drawingml/2006/main">
               <a:ext uri="{FF2B5EF4-FFF2-40B4-BE49-F238E27FC236}">
-                <a16:creationId xmlns:a16="http://schemas.microsoft.com/office/drawing/2014/main" id="{5B147FD5-0A67-45D7-A5A4-B4C3441D59E2}"/>
+                <a16:creationId xmlns:a16="http://schemas.microsoft.com/office/drawing/2014/main" id="{97DAD4DD-81A0-4D1E-96CD-CAEFF68CF45B}"/>
               </a:ext>
             </a:extLst>
           </p:cNvPr>
@@ -21950,7 +22140,7 @@
           <p:cNvPr id="257" name="">
             <a:extLst xmlns:a="http://schemas.openxmlformats.org/drawingml/2006/main">
               <a:ext uri="{FF2B5EF4-FFF2-40B4-BE49-F238E27FC236}">
-                <a16:creationId xmlns:a16="http://schemas.microsoft.com/office/drawing/2014/main" id="{C7E5275C-439E-4471-8D79-3F8FB32C5B3F}"/>
+                <a16:creationId xmlns:a16="http://schemas.microsoft.com/office/drawing/2014/main" id="{167AE0A4-BA1E-4BB3-81B9-DB7BBF253530}"/>
               </a:ext>
             </a:extLst>
           </p:cNvPr>
@@ -21983,7 +22173,7 @@
           <p:cNvPr id="258" name="">
             <a:extLst xmlns:a="http://schemas.openxmlformats.org/drawingml/2006/main">
               <a:ext uri="{FF2B5EF4-FFF2-40B4-BE49-F238E27FC236}">
-                <a16:creationId xmlns:a16="http://schemas.microsoft.com/office/drawing/2014/main" id="{4789EEA2-E435-4016-99E0-4C2CA46185B5}"/>
+                <a16:creationId xmlns:a16="http://schemas.microsoft.com/office/drawing/2014/main" id="{FC48D077-CB8C-4DAC-BE3C-C378AE2371E6}"/>
               </a:ext>
             </a:extLst>
           </p:cNvPr>
@@ -22016,7 +22206,7 @@
           <p:cNvPr id="259" name="">
             <a:extLst xmlns:a="http://schemas.openxmlformats.org/drawingml/2006/main">
               <a:ext uri="{FF2B5EF4-FFF2-40B4-BE49-F238E27FC236}">
-                <a16:creationId xmlns:a16="http://schemas.microsoft.com/office/drawing/2014/main" id="{7A092013-043A-47E4-AAAB-8EA0C9C78637}"/>
+                <a16:creationId xmlns:a16="http://schemas.microsoft.com/office/drawing/2014/main" id="{F95AF42D-7EFE-46BA-9871-2BC473B1DDC8}"/>
               </a:ext>
             </a:extLst>
           </p:cNvPr>
@@ -22049,7 +22239,7 @@
           <p:cNvPr id="260" name="">
             <a:extLst xmlns:a="http://schemas.openxmlformats.org/drawingml/2006/main">
               <a:ext uri="{FF2B5EF4-FFF2-40B4-BE49-F238E27FC236}">
-                <a16:creationId xmlns:a16="http://schemas.microsoft.com/office/drawing/2014/main" id="{D1C437C3-858A-453A-8977-DA388EE9D482}"/>
+                <a16:creationId xmlns:a16="http://schemas.microsoft.com/office/drawing/2014/main" id="{673068B9-A448-4174-84F1-5EB6EB88ABA6}"/>
               </a:ext>
             </a:extLst>
           </p:cNvPr>
@@ -22082,7 +22272,7 @@
           <p:cNvPr id="261" name="">
             <a:extLst xmlns:a="http://schemas.openxmlformats.org/drawingml/2006/main">
               <a:ext uri="{FF2B5EF4-FFF2-40B4-BE49-F238E27FC236}">
-                <a16:creationId xmlns:a16="http://schemas.microsoft.com/office/drawing/2014/main" id="{493C49FA-FA36-4731-AE48-3D214DE446FE}"/>
+                <a16:creationId xmlns:a16="http://schemas.microsoft.com/office/drawing/2014/main" id="{04F91D1E-D195-429B-8BE8-BCC10EB17859}"/>
               </a:ext>
             </a:extLst>
           </p:cNvPr>
@@ -22115,7 +22305,7 @@
           <p:cNvPr id="262" name="">
             <a:extLst xmlns:a="http://schemas.openxmlformats.org/drawingml/2006/main">
               <a:ext uri="{FF2B5EF4-FFF2-40B4-BE49-F238E27FC236}">
-                <a16:creationId xmlns:a16="http://schemas.microsoft.com/office/drawing/2014/main" id="{D80C07B7-2404-47B5-95C1-42B270F44420}"/>
+                <a16:creationId xmlns:a16="http://schemas.microsoft.com/office/drawing/2014/main" id="{A556E3C7-4DE5-4ACF-AD9E-6011E0B1808A}"/>
               </a:ext>
             </a:extLst>
           </p:cNvPr>
@@ -22148,7 +22338,7 @@
           <p:cNvPr id="263" name="">
             <a:extLst xmlns:a="http://schemas.openxmlformats.org/drawingml/2006/main">
               <a:ext uri="{FF2B5EF4-FFF2-40B4-BE49-F238E27FC236}">
-                <a16:creationId xmlns:a16="http://schemas.microsoft.com/office/drawing/2014/main" id="{D58578D4-B433-411F-B60D-5F3F15D1AE58}"/>
+                <a16:creationId xmlns:a16="http://schemas.microsoft.com/office/drawing/2014/main" id="{FBAD0D5C-6698-494F-A243-EEBA54036477}"/>
               </a:ext>
             </a:extLst>
           </p:cNvPr>
@@ -22181,7 +22371,7 @@
           <p:cNvPr id="264" name="">
             <a:extLst xmlns:a="http://schemas.openxmlformats.org/drawingml/2006/main">
               <a:ext uri="{FF2B5EF4-FFF2-40B4-BE49-F238E27FC236}">
-                <a16:creationId xmlns:a16="http://schemas.microsoft.com/office/drawing/2014/main" id="{2C02DBCD-1FA2-473E-85AF-07DA551E241A}"/>
+                <a16:creationId xmlns:a16="http://schemas.microsoft.com/office/drawing/2014/main" id="{83F7406D-3B61-415D-95CA-2601136CB506}"/>
               </a:ext>
             </a:extLst>
           </p:cNvPr>
@@ -22214,7 +22404,7 @@
           <p:cNvPr id="265" name="">
             <a:extLst xmlns:a="http://schemas.openxmlformats.org/drawingml/2006/main">
               <a:ext uri="{FF2B5EF4-FFF2-40B4-BE49-F238E27FC236}">
-                <a16:creationId xmlns:a16="http://schemas.microsoft.com/office/drawing/2014/main" id="{39D46B4B-95A6-45C6-A863-654EE946004C}"/>
+                <a16:creationId xmlns:a16="http://schemas.microsoft.com/office/drawing/2014/main" id="{E51418DE-1987-4B37-BAF2-74C888D33679}"/>
               </a:ext>
             </a:extLst>
           </p:cNvPr>
@@ -22247,7 +22437,7 @@
           <p:cNvPr id="266" name="">
             <a:extLst xmlns:a="http://schemas.openxmlformats.org/drawingml/2006/main">
               <a:ext uri="{FF2B5EF4-FFF2-40B4-BE49-F238E27FC236}">
-                <a16:creationId xmlns:a16="http://schemas.microsoft.com/office/drawing/2014/main" id="{97111E63-0EAA-43D9-8209-787A49DB2B0A}"/>
+                <a16:creationId xmlns:a16="http://schemas.microsoft.com/office/drawing/2014/main" id="{D7CE1317-8BC4-45EB-86EF-AFB1931ACB64}"/>
               </a:ext>
             </a:extLst>
           </p:cNvPr>
@@ -22280,7 +22470,7 @@
           <p:cNvPr id="267" name="">
             <a:extLst xmlns:a="http://schemas.openxmlformats.org/drawingml/2006/main">
               <a:ext uri="{FF2B5EF4-FFF2-40B4-BE49-F238E27FC236}">
-                <a16:creationId xmlns:a16="http://schemas.microsoft.com/office/drawing/2014/main" id="{2E125BA4-43D9-44DA-BC46-563A3359EDEE}"/>
+                <a16:creationId xmlns:a16="http://schemas.microsoft.com/office/drawing/2014/main" id="{D5D56701-4486-40BE-BEB9-1BD4CA816D13}"/>
               </a:ext>
             </a:extLst>
           </p:cNvPr>
@@ -22313,7 +22503,7 @@
           <p:cNvPr id="268" name="">
             <a:extLst xmlns:a="http://schemas.openxmlformats.org/drawingml/2006/main">
               <a:ext uri="{FF2B5EF4-FFF2-40B4-BE49-F238E27FC236}">
-                <a16:creationId xmlns:a16="http://schemas.microsoft.com/office/drawing/2014/main" id="{4499F1E2-F3A6-4445-9FD1-5C201402B6DE}"/>
+                <a16:creationId xmlns:a16="http://schemas.microsoft.com/office/drawing/2014/main" id="{FECC605B-59FE-4795-9CDF-B9591D6000E6}"/>
               </a:ext>
             </a:extLst>
           </p:cNvPr>
@@ -22346,7 +22536,7 @@
           <p:cNvPr id="269" name="">
             <a:extLst xmlns:a="http://schemas.openxmlformats.org/drawingml/2006/main">
               <a:ext uri="{FF2B5EF4-FFF2-40B4-BE49-F238E27FC236}">
-                <a16:creationId xmlns:a16="http://schemas.microsoft.com/office/drawing/2014/main" id="{0D84B9CB-E717-4880-AD7D-7A4C4D8CD858}"/>
+                <a16:creationId xmlns:a16="http://schemas.microsoft.com/office/drawing/2014/main" id="{5482DEFE-D6FF-4375-8301-58263C649C8E}"/>
               </a:ext>
             </a:extLst>
           </p:cNvPr>
@@ -22379,7 +22569,7 @@
           <p:cNvPr id="270" name="">
             <a:extLst xmlns:a="http://schemas.openxmlformats.org/drawingml/2006/main">
               <a:ext uri="{FF2B5EF4-FFF2-40B4-BE49-F238E27FC236}">
-                <a16:creationId xmlns:a16="http://schemas.microsoft.com/office/drawing/2014/main" id="{71498661-8D5D-46E3-B5BB-74103E6F0BBA}"/>
+                <a16:creationId xmlns:a16="http://schemas.microsoft.com/office/drawing/2014/main" id="{F5C33B2F-04EE-47DE-9CE0-07D439D17B1B}"/>
               </a:ext>
             </a:extLst>
           </p:cNvPr>
@@ -22412,7 +22602,7 @@
           <p:cNvPr id="271" name="">
             <a:extLst xmlns:a="http://schemas.openxmlformats.org/drawingml/2006/main">
               <a:ext uri="{FF2B5EF4-FFF2-40B4-BE49-F238E27FC236}">
-                <a16:creationId xmlns:a16="http://schemas.microsoft.com/office/drawing/2014/main" id="{7B94DED7-7A0C-4E04-88BC-1D83F0FE27C8}"/>
+                <a16:creationId xmlns:a16="http://schemas.microsoft.com/office/drawing/2014/main" id="{F9BCB22A-1040-402D-B0F1-C599BC8C0672}"/>
               </a:ext>
             </a:extLst>
           </p:cNvPr>
@@ -22445,7 +22635,7 @@
           <p:cNvPr id="272" name="">
             <a:extLst xmlns:a="http://schemas.openxmlformats.org/drawingml/2006/main">
               <a:ext uri="{FF2B5EF4-FFF2-40B4-BE49-F238E27FC236}">
-                <a16:creationId xmlns:a16="http://schemas.microsoft.com/office/drawing/2014/main" id="{3835466D-4452-4580-8FD4-1D5EC9650661}"/>
+                <a16:creationId xmlns:a16="http://schemas.microsoft.com/office/drawing/2014/main" id="{9C0E8C7B-52F6-489C-8884-4178D07FFF07}"/>
               </a:ext>
             </a:extLst>
           </p:cNvPr>
@@ -22478,7 +22668,7 @@
           <p:cNvPr id="273" name="">
             <a:extLst xmlns:a="http://schemas.openxmlformats.org/drawingml/2006/main">
               <a:ext uri="{FF2B5EF4-FFF2-40B4-BE49-F238E27FC236}">
-                <a16:creationId xmlns:a16="http://schemas.microsoft.com/office/drawing/2014/main" id="{4A425CD1-1DC6-4AF0-96E5-F15BE052334C}"/>
+                <a16:creationId xmlns:a16="http://schemas.microsoft.com/office/drawing/2014/main" id="{521A6CEE-D01A-478D-9071-DAC8E65094F0}"/>
               </a:ext>
             </a:extLst>
           </p:cNvPr>
@@ -22511,7 +22701,7 @@
           <p:cNvPr id="274" name="">
             <a:extLst xmlns:a="http://schemas.openxmlformats.org/drawingml/2006/main">
               <a:ext uri="{FF2B5EF4-FFF2-40B4-BE49-F238E27FC236}">
-                <a16:creationId xmlns:a16="http://schemas.microsoft.com/office/drawing/2014/main" id="{18E3B68C-5839-49E2-B5F4-189261B0D964}"/>
+                <a16:creationId xmlns:a16="http://schemas.microsoft.com/office/drawing/2014/main" id="{F194989A-4DD3-4378-9F5F-F5821441121A}"/>
               </a:ext>
             </a:extLst>
           </p:cNvPr>
@@ -22544,7 +22734,7 @@
           <p:cNvPr id="275" name="">
             <a:extLst xmlns:a="http://schemas.openxmlformats.org/drawingml/2006/main">
               <a:ext uri="{FF2B5EF4-FFF2-40B4-BE49-F238E27FC236}">
-                <a16:creationId xmlns:a16="http://schemas.microsoft.com/office/drawing/2014/main" id="{257828AF-C18F-4B2F-87AE-4FA1B50CBFD1}"/>
+                <a16:creationId xmlns:a16="http://schemas.microsoft.com/office/drawing/2014/main" id="{2783CF1B-651C-4783-9A43-8259380D2AF8}"/>
               </a:ext>
             </a:extLst>
           </p:cNvPr>
@@ -22577,7 +22767,7 @@
           <p:cNvPr id="276" name="">
             <a:extLst xmlns:a="http://schemas.openxmlformats.org/drawingml/2006/main">
               <a:ext uri="{FF2B5EF4-FFF2-40B4-BE49-F238E27FC236}">
-                <a16:creationId xmlns:a16="http://schemas.microsoft.com/office/drawing/2014/main" id="{FE7350F8-53B5-4471-B577-44EE566BD026}"/>
+                <a16:creationId xmlns:a16="http://schemas.microsoft.com/office/drawing/2014/main" id="{B6F414B7-5C26-4B30-B196-509DA309520C}"/>
               </a:ext>
             </a:extLst>
           </p:cNvPr>
@@ -22610,7 +22800,7 @@
           <p:cNvPr id="277" name="">
             <a:extLst xmlns:a="http://schemas.openxmlformats.org/drawingml/2006/main">
               <a:ext uri="{FF2B5EF4-FFF2-40B4-BE49-F238E27FC236}">
-                <a16:creationId xmlns:a16="http://schemas.microsoft.com/office/drawing/2014/main" id="{9B751E1B-DC1E-487C-B49F-5AE79AD98E68}"/>
+                <a16:creationId xmlns:a16="http://schemas.microsoft.com/office/drawing/2014/main" id="{81711A04-B251-48A9-8002-CC976BCFC979}"/>
               </a:ext>
             </a:extLst>
           </p:cNvPr>
@@ -22643,7 +22833,7 @@
           <p:cNvPr id="278" name="">
             <a:extLst xmlns:a="http://schemas.openxmlformats.org/drawingml/2006/main">
               <a:ext uri="{FF2B5EF4-FFF2-40B4-BE49-F238E27FC236}">
-                <a16:creationId xmlns:a16="http://schemas.microsoft.com/office/drawing/2014/main" id="{74AC2D83-523F-4FBC-A988-AC9358F840DD}"/>
+                <a16:creationId xmlns:a16="http://schemas.microsoft.com/office/drawing/2014/main" id="{89E03D1A-801D-47F9-9702-F292ED4462FF}"/>
               </a:ext>
             </a:extLst>
           </p:cNvPr>
@@ -22676,7 +22866,7 @@
           <p:cNvPr id="279" name="">
             <a:extLst xmlns:a="http://schemas.openxmlformats.org/drawingml/2006/main">
               <a:ext uri="{FF2B5EF4-FFF2-40B4-BE49-F238E27FC236}">
-                <a16:creationId xmlns:a16="http://schemas.microsoft.com/office/drawing/2014/main" id="{36C543F5-A6D2-4F13-9E73-23BC593EA54A}"/>
+                <a16:creationId xmlns:a16="http://schemas.microsoft.com/office/drawing/2014/main" id="{4D87F67D-AFFA-4B82-A5B9-6C3F75F712DE}"/>
               </a:ext>
             </a:extLst>
           </p:cNvPr>
@@ -22709,7 +22899,7 @@
           <p:cNvPr id="280" name="">
             <a:extLst xmlns:a="http://schemas.openxmlformats.org/drawingml/2006/main">
               <a:ext uri="{FF2B5EF4-FFF2-40B4-BE49-F238E27FC236}">
-                <a16:creationId xmlns:a16="http://schemas.microsoft.com/office/drawing/2014/main" id="{8B3758AD-5F21-43CF-B70E-1E5894897D7C}"/>
+                <a16:creationId xmlns:a16="http://schemas.microsoft.com/office/drawing/2014/main" id="{E24BBF31-6972-4DA7-B3C2-AB6EAFAF60FB}"/>
               </a:ext>
             </a:extLst>
           </p:cNvPr>
@@ -22742,7 +22932,7 @@
           <p:cNvPr id="281" name="">
             <a:extLst xmlns:a="http://schemas.openxmlformats.org/drawingml/2006/main">
               <a:ext uri="{FF2B5EF4-FFF2-40B4-BE49-F238E27FC236}">
-                <a16:creationId xmlns:a16="http://schemas.microsoft.com/office/drawing/2014/main" id="{88481DD1-E3F8-4841-B9E2-1B1276433478}"/>
+                <a16:creationId xmlns:a16="http://schemas.microsoft.com/office/drawing/2014/main" id="{EA381D22-537D-454F-B90F-35C5AC50294D}"/>
               </a:ext>
             </a:extLst>
           </p:cNvPr>
@@ -22775,7 +22965,7 @@
           <p:cNvPr id="282" name="">
             <a:extLst xmlns:a="http://schemas.openxmlformats.org/drawingml/2006/main">
               <a:ext uri="{FF2B5EF4-FFF2-40B4-BE49-F238E27FC236}">
-                <a16:creationId xmlns:a16="http://schemas.microsoft.com/office/drawing/2014/main" id="{ED8FFE91-1D06-4997-83CF-30C83E9D6EF8}"/>
+                <a16:creationId xmlns:a16="http://schemas.microsoft.com/office/drawing/2014/main" id="{39CE12C6-10F2-4716-9A7E-A57D94B74207}"/>
               </a:ext>
             </a:extLst>
           </p:cNvPr>
@@ -22808,7 +22998,7 @@
           <p:cNvPr id="283" name="">
             <a:extLst xmlns:a="http://schemas.openxmlformats.org/drawingml/2006/main">
               <a:ext uri="{FF2B5EF4-FFF2-40B4-BE49-F238E27FC236}">
-                <a16:creationId xmlns:a16="http://schemas.microsoft.com/office/drawing/2014/main" id="{56A4A624-FA58-4187-86C6-86C9186F9898}"/>
+                <a16:creationId xmlns:a16="http://schemas.microsoft.com/office/drawing/2014/main" id="{A02F3DE9-2207-4C4E-8793-90C3551488CC}"/>
               </a:ext>
             </a:extLst>
           </p:cNvPr>
@@ -22841,7 +23031,7 @@
           <p:cNvPr id="284" name="">
             <a:extLst xmlns:a="http://schemas.openxmlformats.org/drawingml/2006/main">
               <a:ext uri="{FF2B5EF4-FFF2-40B4-BE49-F238E27FC236}">
-                <a16:creationId xmlns:a16="http://schemas.microsoft.com/office/drawing/2014/main" id="{C78BF0F1-EBA7-4844-B38D-BB366FB61CE0}"/>
+                <a16:creationId xmlns:a16="http://schemas.microsoft.com/office/drawing/2014/main" id="{1A18F618-104E-4D25-A455-06FA24D4E4C0}"/>
               </a:ext>
             </a:extLst>
           </p:cNvPr>
@@ -22874,7 +23064,7 @@
           <p:cNvPr id="285" name="">
             <a:extLst xmlns:a="http://schemas.openxmlformats.org/drawingml/2006/main">
               <a:ext uri="{FF2B5EF4-FFF2-40B4-BE49-F238E27FC236}">
-                <a16:creationId xmlns:a16="http://schemas.microsoft.com/office/drawing/2014/main" id="{305C7B04-01F4-45B9-BD9E-2AB64E7F32CA}"/>
+                <a16:creationId xmlns:a16="http://schemas.microsoft.com/office/drawing/2014/main" id="{9AA5984E-AF78-4517-B590-6E0DEE77951B}"/>
               </a:ext>
             </a:extLst>
           </p:cNvPr>
@@ -22907,7 +23097,7 @@
           <p:cNvPr id="286" name="">
             <a:extLst xmlns:a="http://schemas.openxmlformats.org/drawingml/2006/main">
               <a:ext uri="{FF2B5EF4-FFF2-40B4-BE49-F238E27FC236}">
-                <a16:creationId xmlns:a16="http://schemas.microsoft.com/office/drawing/2014/main" id="{4AD49358-C91D-45F2-8E7B-E7816352A16D}"/>
+                <a16:creationId xmlns:a16="http://schemas.microsoft.com/office/drawing/2014/main" id="{0DC541D0-D920-4A8E-8795-66BF612DFE71}"/>
               </a:ext>
             </a:extLst>
           </p:cNvPr>
@@ -22940,7 +23130,7 @@
           <p:cNvPr id="287" name="">
             <a:extLst xmlns:a="http://schemas.openxmlformats.org/drawingml/2006/main">
               <a:ext uri="{FF2B5EF4-FFF2-40B4-BE49-F238E27FC236}">
-                <a16:creationId xmlns:a16="http://schemas.microsoft.com/office/drawing/2014/main" id="{7D2B1435-B8AA-4E60-ACAC-50DF4F8C788F}"/>
+                <a16:creationId xmlns:a16="http://schemas.microsoft.com/office/drawing/2014/main" id="{38F83F04-00A6-49D8-9E4B-A3674C55FB26}"/>
               </a:ext>
             </a:extLst>
           </p:cNvPr>
@@ -22973,7 +23163,7 @@
           <p:cNvPr id="288" name="">
             <a:extLst xmlns:a="http://schemas.openxmlformats.org/drawingml/2006/main">
               <a:ext uri="{FF2B5EF4-FFF2-40B4-BE49-F238E27FC236}">
-                <a16:creationId xmlns:a16="http://schemas.microsoft.com/office/drawing/2014/main" id="{B9E3F9BC-482B-4A96-A2D1-65271486F969}"/>
+                <a16:creationId xmlns:a16="http://schemas.microsoft.com/office/drawing/2014/main" id="{DEB46772-7304-4133-8A80-9F1BE69A1717}"/>
               </a:ext>
             </a:extLst>
           </p:cNvPr>
@@ -23004,7 +23194,7 @@
           <p:cNvPr id="289" name="">
             <a:extLst xmlns:a="http://schemas.openxmlformats.org/drawingml/2006/main">
               <a:ext uri="{FF2B5EF4-FFF2-40B4-BE49-F238E27FC236}">
-                <a16:creationId xmlns:a16="http://schemas.microsoft.com/office/drawing/2014/main" id="{A8963EE3-4BCC-4378-9F43-F680734B83A7}"/>
+                <a16:creationId xmlns:a16="http://schemas.microsoft.com/office/drawing/2014/main" id="{EC08F6DA-2E4F-406C-95A3-E958F7EBD09A}"/>
               </a:ext>
             </a:extLst>
           </p:cNvPr>
@@ -23066,7 +23256,7 @@
           <p:cNvPr id="290" name="">
             <a:extLst xmlns:a="http://schemas.openxmlformats.org/drawingml/2006/main">
               <a:ext uri="{FF2B5EF4-FFF2-40B4-BE49-F238E27FC236}">
-                <a16:creationId xmlns:a16="http://schemas.microsoft.com/office/drawing/2014/main" id="{A1DE65DC-9459-498A-8DF7-600098BA1B10}"/>
+                <a16:creationId xmlns:a16="http://schemas.microsoft.com/office/drawing/2014/main" id="{E0D7B69C-017B-4746-B1F1-A7AD3E777B5F}"/>
               </a:ext>
             </a:extLst>
           </p:cNvPr>
@@ -23097,7 +23287,7 @@
           <p:cNvPr id="291" name="">
             <a:extLst xmlns:a="http://schemas.openxmlformats.org/drawingml/2006/main">
               <a:ext uri="{FF2B5EF4-FFF2-40B4-BE49-F238E27FC236}">
-                <a16:creationId xmlns:a16="http://schemas.microsoft.com/office/drawing/2014/main" id="{61D7EEC9-A741-495B-A80E-3D86C2111A26}"/>
+                <a16:creationId xmlns:a16="http://schemas.microsoft.com/office/drawing/2014/main" id="{D29344E7-9D12-4487-B7B6-BE627D3FFFF9}"/>
               </a:ext>
             </a:extLst>
           </p:cNvPr>
@@ -23159,7 +23349,7 @@
           <p:cNvPr id="292" name="">
             <a:extLst xmlns:a="http://schemas.openxmlformats.org/drawingml/2006/main">
               <a:ext uri="{FF2B5EF4-FFF2-40B4-BE49-F238E27FC236}">
-                <a16:creationId xmlns:a16="http://schemas.microsoft.com/office/drawing/2014/main" id="{5D5B545D-1BEC-48CF-BE1A-080FC59A319E}"/>
+                <a16:creationId xmlns:a16="http://schemas.microsoft.com/office/drawing/2014/main" id="{1B2C69FF-1311-4B12-8B26-DAB05D0F50E5}"/>
               </a:ext>
             </a:extLst>
           </p:cNvPr>
@@ -23219,7 +23409,7 @@
     </p:spTree>
     <p:extLst>
       <p:ext uri="{BB962C8B-B14F-4D97-AF65-F5344CB8AC3E}">
-        <p14:creationId xmlns:p14="http://schemas.microsoft.com/office/powerpoint/2010/main" val="1937088829"/>
+        <p14:creationId xmlns:p14="http://schemas.microsoft.com/office/powerpoint/2010/main" val="1402240326"/>
       </p:ext>
     </p:extLst>
   </p:cSld>
@@ -23250,7 +23440,7 @@
           <p:cNvPr id="1" name="">
             <a:extLst xmlns:a="http://schemas.openxmlformats.org/drawingml/2006/main">
               <a:ext uri="{FF2B5EF4-FFF2-40B4-BE49-F238E27FC236}">
-                <a16:creationId xmlns:a16="http://schemas.microsoft.com/office/drawing/2014/main" id="{64EF4B45-042A-4628-BF27-B97286623EE1}"/>
+                <a16:creationId xmlns:a16="http://schemas.microsoft.com/office/drawing/2014/main" id="{DA3727B5-C91D-45CD-A3F7-EA3E23F361AC}"/>
               </a:ext>
             </a:extLst>
           </p:cNvPr>
@@ -23312,7 +23502,7 @@
           <p:cNvPr id="2" name="">
             <a:extLst xmlns:a="http://schemas.openxmlformats.org/drawingml/2006/main">
               <a:ext uri="{FF2B5EF4-FFF2-40B4-BE49-F238E27FC236}">
-                <a16:creationId xmlns:a16="http://schemas.microsoft.com/office/drawing/2014/main" id="{9C98F30D-8184-4674-BEEF-46DC5BCABD5F}"/>
+                <a16:creationId xmlns:a16="http://schemas.microsoft.com/office/drawing/2014/main" id="{C7323023-A58F-4CB8-B220-96E9161B081C}"/>
               </a:ext>
             </a:extLst>
           </p:cNvPr>
@@ -23374,7 +23564,7 @@
           <p:cNvPr id="3" name="">
             <a:extLst xmlns:a="http://schemas.openxmlformats.org/drawingml/2006/main">
               <a:ext uri="{FF2B5EF4-FFF2-40B4-BE49-F238E27FC236}">
-                <a16:creationId xmlns:a16="http://schemas.microsoft.com/office/drawing/2014/main" id="{80D76DF5-BA88-42DB-A811-83352FCFCA67}"/>
+                <a16:creationId xmlns:a16="http://schemas.microsoft.com/office/drawing/2014/main" id="{7C771EEE-B324-4537-8589-DB479CEFFB43}"/>
               </a:ext>
             </a:extLst>
           </p:cNvPr>
@@ -23436,7 +23626,7 @@
           <p:cNvPr id="4" name="">
             <a:extLst xmlns:a="http://schemas.openxmlformats.org/drawingml/2006/main">
               <a:ext uri="{FF2B5EF4-FFF2-40B4-BE49-F238E27FC236}">
-                <a16:creationId xmlns:a16="http://schemas.microsoft.com/office/drawing/2014/main" id="{70952441-70D9-4C20-97BE-D03ED20433D9}"/>
+                <a16:creationId xmlns:a16="http://schemas.microsoft.com/office/drawing/2014/main" id="{2B6AEC0A-0320-4233-8A74-5594D9087768}"/>
               </a:ext>
             </a:extLst>
           </p:cNvPr>
@@ -23471,7 +23661,7 @@
           <p:cNvPr id="5" name="">
             <a:extLst xmlns:a="http://schemas.openxmlformats.org/drawingml/2006/main">
               <a:ext uri="{FF2B5EF4-FFF2-40B4-BE49-F238E27FC236}">
-                <a16:creationId xmlns:a16="http://schemas.microsoft.com/office/drawing/2014/main" id="{50D323B9-8D98-417E-98CB-7BDA68E5196C}"/>
+                <a16:creationId xmlns:a16="http://schemas.microsoft.com/office/drawing/2014/main" id="{DF282157-6629-4DC9-8EAF-2766B0C904F7}"/>
               </a:ext>
             </a:extLst>
           </p:cNvPr>
@@ -23504,7 +23694,7 @@
           <p:cNvPr id="6" name="">
             <a:extLst xmlns:a="http://schemas.openxmlformats.org/drawingml/2006/main">
               <a:ext uri="{FF2B5EF4-FFF2-40B4-BE49-F238E27FC236}">
-                <a16:creationId xmlns:a16="http://schemas.microsoft.com/office/drawing/2014/main" id="{E29E16F4-480D-4436-8081-521012636A9C}"/>
+                <a16:creationId xmlns:a16="http://schemas.microsoft.com/office/drawing/2014/main" id="{CF8549BA-5AC9-4548-BB86-939019EFC156}"/>
               </a:ext>
             </a:extLst>
           </p:cNvPr>
@@ -23537,7 +23727,7 @@
           <p:cNvPr id="7" name="">
             <a:extLst xmlns:a="http://schemas.openxmlformats.org/drawingml/2006/main">
               <a:ext uri="{FF2B5EF4-FFF2-40B4-BE49-F238E27FC236}">
-                <a16:creationId xmlns:a16="http://schemas.microsoft.com/office/drawing/2014/main" id="{277C520A-220F-4A75-960D-F97F091D4C68}"/>
+                <a16:creationId xmlns:a16="http://schemas.microsoft.com/office/drawing/2014/main" id="{44008EEF-05F3-4B97-B0EB-057B0ABC1F06}"/>
               </a:ext>
             </a:extLst>
           </p:cNvPr>
@@ -23570,7 +23760,7 @@
           <p:cNvPr id="8" name="">
             <a:extLst xmlns:a="http://schemas.openxmlformats.org/drawingml/2006/main">
               <a:ext uri="{FF2B5EF4-FFF2-40B4-BE49-F238E27FC236}">
-                <a16:creationId xmlns:a16="http://schemas.microsoft.com/office/drawing/2014/main" id="{9BCE3F67-3F0E-4A4D-93F3-214F16960252}"/>
+                <a16:creationId xmlns:a16="http://schemas.microsoft.com/office/drawing/2014/main" id="{8B542769-4175-463A-A647-AD6212C9B70E}"/>
               </a:ext>
             </a:extLst>
           </p:cNvPr>
@@ -23603,7 +23793,7 @@
           <p:cNvPr id="9" name="">
             <a:extLst xmlns:a="http://schemas.openxmlformats.org/drawingml/2006/main">
               <a:ext uri="{FF2B5EF4-FFF2-40B4-BE49-F238E27FC236}">
-                <a16:creationId xmlns:a16="http://schemas.microsoft.com/office/drawing/2014/main" id="{6AEAA939-257B-4054-964A-4E22D52A5BA9}"/>
+                <a16:creationId xmlns:a16="http://schemas.microsoft.com/office/drawing/2014/main" id="{F6DB4CB9-3183-4944-BEF8-568EE4156308}"/>
               </a:ext>
             </a:extLst>
           </p:cNvPr>
@@ -23636,7 +23826,7 @@
           <p:cNvPr id="10" name="">
             <a:extLst xmlns:a="http://schemas.openxmlformats.org/drawingml/2006/main">
               <a:ext uri="{FF2B5EF4-FFF2-40B4-BE49-F238E27FC236}">
-                <a16:creationId xmlns:a16="http://schemas.microsoft.com/office/drawing/2014/main" id="{5B86EFAB-F604-49E8-AAEC-4479BCD2501F}"/>
+                <a16:creationId xmlns:a16="http://schemas.microsoft.com/office/drawing/2014/main" id="{088B1545-523D-4C93-89E4-03CF27E6B00F}"/>
               </a:ext>
             </a:extLst>
           </p:cNvPr>
@@ -23669,7 +23859,7 @@
           <p:cNvPr id="11" name="">
             <a:extLst xmlns:a="http://schemas.openxmlformats.org/drawingml/2006/main">
               <a:ext uri="{FF2B5EF4-FFF2-40B4-BE49-F238E27FC236}">
-                <a16:creationId xmlns:a16="http://schemas.microsoft.com/office/drawing/2014/main" id="{02D05FA5-485D-40DC-A9FC-F33F048FEC54}"/>
+                <a16:creationId xmlns:a16="http://schemas.microsoft.com/office/drawing/2014/main" id="{6AABE9F2-5F17-4BAC-B19D-FD08E2201650}"/>
               </a:ext>
             </a:extLst>
           </p:cNvPr>
@@ -23702,7 +23892,7 @@
           <p:cNvPr id="12" name="">
             <a:extLst xmlns:a="http://schemas.openxmlformats.org/drawingml/2006/main">
               <a:ext uri="{FF2B5EF4-FFF2-40B4-BE49-F238E27FC236}">
-                <a16:creationId xmlns:a16="http://schemas.microsoft.com/office/drawing/2014/main" id="{2D1C38E3-20D6-4C51-9FD0-45E88885774E}"/>
+                <a16:creationId xmlns:a16="http://schemas.microsoft.com/office/drawing/2014/main" id="{0182FFE1-F8A6-4345-926B-DFF35157FEA7}"/>
               </a:ext>
             </a:extLst>
           </p:cNvPr>
@@ -23735,7 +23925,7 @@
           <p:cNvPr id="13" name="">
             <a:extLst xmlns:a="http://schemas.openxmlformats.org/drawingml/2006/main">
               <a:ext uri="{FF2B5EF4-FFF2-40B4-BE49-F238E27FC236}">
-                <a16:creationId xmlns:a16="http://schemas.microsoft.com/office/drawing/2014/main" id="{5FC54ED5-8901-4993-AB1D-E48FC93A0F1B}"/>
+                <a16:creationId xmlns:a16="http://schemas.microsoft.com/office/drawing/2014/main" id="{4DD4E459-B1DE-4545-B2A5-60DD67FBF83C}"/>
               </a:ext>
             </a:extLst>
           </p:cNvPr>
@@ -23768,7 +23958,7 @@
           <p:cNvPr id="14" name="">
             <a:extLst xmlns:a="http://schemas.openxmlformats.org/drawingml/2006/main">
               <a:ext uri="{FF2B5EF4-FFF2-40B4-BE49-F238E27FC236}">
-                <a16:creationId xmlns:a16="http://schemas.microsoft.com/office/drawing/2014/main" id="{F64DF750-C265-41EB-B6BE-1C02F23F5373}"/>
+                <a16:creationId xmlns:a16="http://schemas.microsoft.com/office/drawing/2014/main" id="{9D70A49A-CD81-45AD-8059-DA09BC48FBE0}"/>
               </a:ext>
             </a:extLst>
           </p:cNvPr>
@@ -23801,7 +23991,7 @@
           <p:cNvPr id="15" name="">
             <a:extLst xmlns:a="http://schemas.openxmlformats.org/drawingml/2006/main">
               <a:ext uri="{FF2B5EF4-FFF2-40B4-BE49-F238E27FC236}">
-                <a16:creationId xmlns:a16="http://schemas.microsoft.com/office/drawing/2014/main" id="{14F6FCDD-9561-4E06-A7E4-220A79299610}"/>
+                <a16:creationId xmlns:a16="http://schemas.microsoft.com/office/drawing/2014/main" id="{6A236AB3-E423-407B-8904-1C51BD3B8008}"/>
               </a:ext>
             </a:extLst>
           </p:cNvPr>
@@ -23834,7 +24024,7 @@
           <p:cNvPr id="16" name="">
             <a:extLst xmlns:a="http://schemas.openxmlformats.org/drawingml/2006/main">
               <a:ext uri="{FF2B5EF4-FFF2-40B4-BE49-F238E27FC236}">
-                <a16:creationId xmlns:a16="http://schemas.microsoft.com/office/drawing/2014/main" id="{830AFBAD-9CE8-4865-8911-4EC07FDA85FF}"/>
+                <a16:creationId xmlns:a16="http://schemas.microsoft.com/office/drawing/2014/main" id="{92FEF448-F13B-4191-8820-2AB766E311B1}"/>
               </a:ext>
             </a:extLst>
           </p:cNvPr>
@@ -23867,7 +24057,7 @@
           <p:cNvPr id="17" name="">
             <a:extLst xmlns:a="http://schemas.openxmlformats.org/drawingml/2006/main">
               <a:ext uri="{FF2B5EF4-FFF2-40B4-BE49-F238E27FC236}">
-                <a16:creationId xmlns:a16="http://schemas.microsoft.com/office/drawing/2014/main" id="{EB492996-5CC1-4290-8709-8CFB493B1C35}"/>
+                <a16:creationId xmlns:a16="http://schemas.microsoft.com/office/drawing/2014/main" id="{046B150A-1F62-404A-A30F-3B8546EB3963}"/>
               </a:ext>
             </a:extLst>
           </p:cNvPr>
@@ -23900,7 +24090,7 @@
           <p:cNvPr id="18" name="">
             <a:extLst xmlns:a="http://schemas.openxmlformats.org/drawingml/2006/main">
               <a:ext uri="{FF2B5EF4-FFF2-40B4-BE49-F238E27FC236}">
-                <a16:creationId xmlns:a16="http://schemas.microsoft.com/office/drawing/2014/main" id="{0A3FD0D6-F538-4EC9-A7DD-91E66086C458}"/>
+                <a16:creationId xmlns:a16="http://schemas.microsoft.com/office/drawing/2014/main" id="{68CE6DED-8F6A-4EAC-BA4A-6DDF4257524D}"/>
               </a:ext>
             </a:extLst>
           </p:cNvPr>
@@ -23933,7 +24123,7 @@
           <p:cNvPr id="19" name="">
             <a:extLst xmlns:a="http://schemas.openxmlformats.org/drawingml/2006/main">
               <a:ext uri="{FF2B5EF4-FFF2-40B4-BE49-F238E27FC236}">
-                <a16:creationId xmlns:a16="http://schemas.microsoft.com/office/drawing/2014/main" id="{8712BCF2-A4A2-4F2D-9672-F0FA47C1876F}"/>
+                <a16:creationId xmlns:a16="http://schemas.microsoft.com/office/drawing/2014/main" id="{CC13F0C7-0FC7-41C4-9D1A-96715C812978}"/>
               </a:ext>
             </a:extLst>
           </p:cNvPr>
@@ -23966,7 +24156,7 @@
           <p:cNvPr id="20" name="">
             <a:extLst xmlns:a="http://schemas.openxmlformats.org/drawingml/2006/main">
               <a:ext uri="{FF2B5EF4-FFF2-40B4-BE49-F238E27FC236}">
-                <a16:creationId xmlns:a16="http://schemas.microsoft.com/office/drawing/2014/main" id="{164710ED-34FD-4464-9D73-0354E82BE56B}"/>
+                <a16:creationId xmlns:a16="http://schemas.microsoft.com/office/drawing/2014/main" id="{9603767F-94C1-4C47-913B-912E9C3DD9D0}"/>
               </a:ext>
             </a:extLst>
           </p:cNvPr>
@@ -23999,7 +24189,7 @@
           <p:cNvPr id="21" name="">
             <a:extLst xmlns:a="http://schemas.openxmlformats.org/drawingml/2006/main">
               <a:ext uri="{FF2B5EF4-FFF2-40B4-BE49-F238E27FC236}">
-                <a16:creationId xmlns:a16="http://schemas.microsoft.com/office/drawing/2014/main" id="{E45A0484-A456-401F-8E79-A0B8C72DAE08}"/>
+                <a16:creationId xmlns:a16="http://schemas.microsoft.com/office/drawing/2014/main" id="{594E499F-76F8-4B34-A99F-77F905D59E0E}"/>
               </a:ext>
             </a:extLst>
           </p:cNvPr>
@@ -24032,7 +24222,7 @@
           <p:cNvPr id="22" name="">
             <a:extLst xmlns:a="http://schemas.openxmlformats.org/drawingml/2006/main">
               <a:ext uri="{FF2B5EF4-FFF2-40B4-BE49-F238E27FC236}">
-                <a16:creationId xmlns:a16="http://schemas.microsoft.com/office/drawing/2014/main" id="{D92C3F87-BDF7-4068-9228-07B3B50BF9DB}"/>
+                <a16:creationId xmlns:a16="http://schemas.microsoft.com/office/drawing/2014/main" id="{CC79A53A-5078-4F41-A5BE-5400ABA82B60}"/>
               </a:ext>
             </a:extLst>
           </p:cNvPr>
@@ -24065,7 +24255,7 @@
           <p:cNvPr id="23" name="">
             <a:extLst xmlns:a="http://schemas.openxmlformats.org/drawingml/2006/main">
               <a:ext uri="{FF2B5EF4-FFF2-40B4-BE49-F238E27FC236}">
-                <a16:creationId xmlns:a16="http://schemas.microsoft.com/office/drawing/2014/main" id="{24C37A52-4840-453E-AA0C-997287963BD0}"/>
+                <a16:creationId xmlns:a16="http://schemas.microsoft.com/office/drawing/2014/main" id="{09A53E54-6527-49FF-9877-1FC1500E5835}"/>
               </a:ext>
             </a:extLst>
           </p:cNvPr>
@@ -24098,7 +24288,7 @@
           <p:cNvPr id="24" name="">
             <a:extLst xmlns:a="http://schemas.openxmlformats.org/drawingml/2006/main">
               <a:ext uri="{FF2B5EF4-FFF2-40B4-BE49-F238E27FC236}">
-                <a16:creationId xmlns:a16="http://schemas.microsoft.com/office/drawing/2014/main" id="{F9DE9335-60A3-4A1F-BB78-23964155D7D4}"/>
+                <a16:creationId xmlns:a16="http://schemas.microsoft.com/office/drawing/2014/main" id="{570465AF-9414-4D22-A56C-8BDABBD04AA9}"/>
               </a:ext>
             </a:extLst>
           </p:cNvPr>
@@ -24131,7 +24321,7 @@
           <p:cNvPr id="25" name="">
             <a:extLst xmlns:a="http://schemas.openxmlformats.org/drawingml/2006/main">
               <a:ext uri="{FF2B5EF4-FFF2-40B4-BE49-F238E27FC236}">
-                <a16:creationId xmlns:a16="http://schemas.microsoft.com/office/drawing/2014/main" id="{09134226-2429-4746-BB65-0740A4E6A665}"/>
+                <a16:creationId xmlns:a16="http://schemas.microsoft.com/office/drawing/2014/main" id="{F264C58F-FAC7-4C37-9203-C46415441204}"/>
               </a:ext>
             </a:extLst>
           </p:cNvPr>
@@ -24164,7 +24354,7 @@
           <p:cNvPr id="26" name="">
             <a:extLst xmlns:a="http://schemas.openxmlformats.org/drawingml/2006/main">
               <a:ext uri="{FF2B5EF4-FFF2-40B4-BE49-F238E27FC236}">
-                <a16:creationId xmlns:a16="http://schemas.microsoft.com/office/drawing/2014/main" id="{2D2E939D-8534-4917-BE1A-9FDF43E9D64B}"/>
+                <a16:creationId xmlns:a16="http://schemas.microsoft.com/office/drawing/2014/main" id="{9EF027E1-5942-4B25-9938-BFE3076AE79F}"/>
               </a:ext>
             </a:extLst>
           </p:cNvPr>
@@ -24197,7 +24387,7 @@
           <p:cNvPr id="27" name="">
             <a:extLst xmlns:a="http://schemas.openxmlformats.org/drawingml/2006/main">
               <a:ext uri="{FF2B5EF4-FFF2-40B4-BE49-F238E27FC236}">
-                <a16:creationId xmlns:a16="http://schemas.microsoft.com/office/drawing/2014/main" id="{F3DFAAA0-1EAB-46E6-ACD2-C5BE78DDB797}"/>
+                <a16:creationId xmlns:a16="http://schemas.microsoft.com/office/drawing/2014/main" id="{874F47ED-84CA-4B70-A9D4-245180931C5C}"/>
               </a:ext>
             </a:extLst>
           </p:cNvPr>
@@ -24230,7 +24420,7 @@
           <p:cNvPr id="28" name="">
             <a:extLst xmlns:a="http://schemas.openxmlformats.org/drawingml/2006/main">
               <a:ext uri="{FF2B5EF4-FFF2-40B4-BE49-F238E27FC236}">
-                <a16:creationId xmlns:a16="http://schemas.microsoft.com/office/drawing/2014/main" id="{DB4A10B6-548C-454A-9165-CB5A5C36A7F0}"/>
+                <a16:creationId xmlns:a16="http://schemas.microsoft.com/office/drawing/2014/main" id="{E492460C-4DB2-494A-AD92-0EF36F87E722}"/>
               </a:ext>
             </a:extLst>
           </p:cNvPr>
@@ -24263,7 +24453,7 @@
           <p:cNvPr id="29" name="">
             <a:extLst xmlns:a="http://schemas.openxmlformats.org/drawingml/2006/main">
               <a:ext uri="{FF2B5EF4-FFF2-40B4-BE49-F238E27FC236}">
-                <a16:creationId xmlns:a16="http://schemas.microsoft.com/office/drawing/2014/main" id="{5424F211-2226-4B21-99F9-926477C066AD}"/>
+                <a16:creationId xmlns:a16="http://schemas.microsoft.com/office/drawing/2014/main" id="{B4FE92D4-AF34-4379-ADE4-828A8FF4FE62}"/>
               </a:ext>
             </a:extLst>
           </p:cNvPr>
@@ -24296,7 +24486,7 @@
           <p:cNvPr id="30" name="">
             <a:extLst xmlns:a="http://schemas.openxmlformats.org/drawingml/2006/main">
               <a:ext uri="{FF2B5EF4-FFF2-40B4-BE49-F238E27FC236}">
-                <a16:creationId xmlns:a16="http://schemas.microsoft.com/office/drawing/2014/main" id="{E40D051C-C0AF-4C24-AEA3-45EC396B9DB1}"/>
+                <a16:creationId xmlns:a16="http://schemas.microsoft.com/office/drawing/2014/main" id="{629CD971-A845-4E40-8150-D8CE870235AB}"/>
               </a:ext>
             </a:extLst>
           </p:cNvPr>
@@ -24329,7 +24519,7 @@
           <p:cNvPr id="31" name="">
             <a:extLst xmlns:a="http://schemas.openxmlformats.org/drawingml/2006/main">
               <a:ext uri="{FF2B5EF4-FFF2-40B4-BE49-F238E27FC236}">
-                <a16:creationId xmlns:a16="http://schemas.microsoft.com/office/drawing/2014/main" id="{2052877C-E23D-42F5-B641-E23C977B23FF}"/>
+                <a16:creationId xmlns:a16="http://schemas.microsoft.com/office/drawing/2014/main" id="{D85C8DEC-232F-442C-B0E3-EEA1DC30B22D}"/>
               </a:ext>
             </a:extLst>
           </p:cNvPr>
@@ -24362,7 +24552,7 @@
           <p:cNvPr id="32" name="">
             <a:extLst xmlns:a="http://schemas.openxmlformats.org/drawingml/2006/main">
               <a:ext uri="{FF2B5EF4-FFF2-40B4-BE49-F238E27FC236}">
-                <a16:creationId xmlns:a16="http://schemas.microsoft.com/office/drawing/2014/main" id="{A7C7CB7E-3191-4099-9141-A83BC938E350}"/>
+                <a16:creationId xmlns:a16="http://schemas.microsoft.com/office/drawing/2014/main" id="{D84F77E5-2703-4FB6-B2C6-D7570EB68ECF}"/>
               </a:ext>
             </a:extLst>
           </p:cNvPr>
@@ -24395,7 +24585,7 @@
           <p:cNvPr id="33" name="">
             <a:extLst xmlns:a="http://schemas.openxmlformats.org/drawingml/2006/main">
               <a:ext uri="{FF2B5EF4-FFF2-40B4-BE49-F238E27FC236}">
-                <a16:creationId xmlns:a16="http://schemas.microsoft.com/office/drawing/2014/main" id="{E7692B59-13F8-4C6B-B103-FF40217993A7}"/>
+                <a16:creationId xmlns:a16="http://schemas.microsoft.com/office/drawing/2014/main" id="{A7DCBB21-4DA7-44BB-9C0C-5306488771D6}"/>
               </a:ext>
             </a:extLst>
           </p:cNvPr>
@@ -24428,7 +24618,7 @@
           <p:cNvPr id="34" name="">
             <a:extLst xmlns:a="http://schemas.openxmlformats.org/drawingml/2006/main">
               <a:ext uri="{FF2B5EF4-FFF2-40B4-BE49-F238E27FC236}">
-                <a16:creationId xmlns:a16="http://schemas.microsoft.com/office/drawing/2014/main" id="{F96B4CD0-C481-4F8F-A4E2-4025E27A3937}"/>
+                <a16:creationId xmlns:a16="http://schemas.microsoft.com/office/drawing/2014/main" id="{2A8765B3-5FF5-41C5-8656-9732A010A308}"/>
               </a:ext>
             </a:extLst>
           </p:cNvPr>
@@ -24461,7 +24651,7 @@
           <p:cNvPr id="35" name="">
             <a:extLst xmlns:a="http://schemas.openxmlformats.org/drawingml/2006/main">
               <a:ext uri="{FF2B5EF4-FFF2-40B4-BE49-F238E27FC236}">
-                <a16:creationId xmlns:a16="http://schemas.microsoft.com/office/drawing/2014/main" id="{B45E025A-16BD-47FA-BE96-DE4CC2C54438}"/>
+                <a16:creationId xmlns:a16="http://schemas.microsoft.com/office/drawing/2014/main" id="{CBCC16CD-CF51-4292-A5C5-953CBB8443C3}"/>
               </a:ext>
             </a:extLst>
           </p:cNvPr>
@@ -24494,7 +24684,7 @@
           <p:cNvPr id="36" name="">
             <a:extLst xmlns:a="http://schemas.openxmlformats.org/drawingml/2006/main">
               <a:ext uri="{FF2B5EF4-FFF2-40B4-BE49-F238E27FC236}">
-                <a16:creationId xmlns:a16="http://schemas.microsoft.com/office/drawing/2014/main" id="{01562955-23DD-48F7-9B0C-6B805C15C35E}"/>
+                <a16:creationId xmlns:a16="http://schemas.microsoft.com/office/drawing/2014/main" id="{191800A0-AC61-4B2E-8BB2-9147BB9E1CBE}"/>
               </a:ext>
             </a:extLst>
           </p:cNvPr>
@@ -24527,7 +24717,7 @@
           <p:cNvPr id="37" name="">
             <a:extLst xmlns:a="http://schemas.openxmlformats.org/drawingml/2006/main">
               <a:ext uri="{FF2B5EF4-FFF2-40B4-BE49-F238E27FC236}">
-                <a16:creationId xmlns:a16="http://schemas.microsoft.com/office/drawing/2014/main" id="{A23130B3-BC49-4C93-B053-79068E40DEB3}"/>
+                <a16:creationId xmlns:a16="http://schemas.microsoft.com/office/drawing/2014/main" id="{EA01DA31-ECE9-4632-884E-370B5D4B7163}"/>
               </a:ext>
             </a:extLst>
           </p:cNvPr>
@@ -24560,7 +24750,7 @@
           <p:cNvPr id="38" name="">
             <a:extLst xmlns:a="http://schemas.openxmlformats.org/drawingml/2006/main">
               <a:ext uri="{FF2B5EF4-FFF2-40B4-BE49-F238E27FC236}">
-                <a16:creationId xmlns:a16="http://schemas.microsoft.com/office/drawing/2014/main" id="{7A914041-713F-4409-9798-9F1D16213DF3}"/>
+                <a16:creationId xmlns:a16="http://schemas.microsoft.com/office/drawing/2014/main" id="{C4894BA7-739C-4966-82F4-4BBB37250161}"/>
               </a:ext>
             </a:extLst>
           </p:cNvPr>
@@ -24593,7 +24783,7 @@
           <p:cNvPr id="39" name="">
             <a:extLst xmlns:a="http://schemas.openxmlformats.org/drawingml/2006/main">
               <a:ext uri="{FF2B5EF4-FFF2-40B4-BE49-F238E27FC236}">
-                <a16:creationId xmlns:a16="http://schemas.microsoft.com/office/drawing/2014/main" id="{410224A5-6538-460F-B217-48207AEC8046}"/>
+                <a16:creationId xmlns:a16="http://schemas.microsoft.com/office/drawing/2014/main" id="{87403EFE-818C-478F-9AC3-5FDC6C4F936A}"/>
               </a:ext>
             </a:extLst>
           </p:cNvPr>
@@ -24626,7 +24816,7 @@
           <p:cNvPr id="40" name="">
             <a:extLst xmlns:a="http://schemas.openxmlformats.org/drawingml/2006/main">
               <a:ext uri="{FF2B5EF4-FFF2-40B4-BE49-F238E27FC236}">
-                <a16:creationId xmlns:a16="http://schemas.microsoft.com/office/drawing/2014/main" id="{35293093-B6F0-488B-886B-163101D84E61}"/>
+                <a16:creationId xmlns:a16="http://schemas.microsoft.com/office/drawing/2014/main" id="{26028166-31D4-4B8C-BC34-16B015A08409}"/>
               </a:ext>
             </a:extLst>
           </p:cNvPr>
@@ -24659,7 +24849,7 @@
           <p:cNvPr id="41" name="">
             <a:extLst xmlns:a="http://schemas.openxmlformats.org/drawingml/2006/main">
               <a:ext uri="{FF2B5EF4-FFF2-40B4-BE49-F238E27FC236}">
-                <a16:creationId xmlns:a16="http://schemas.microsoft.com/office/drawing/2014/main" id="{5FC11DD6-1E89-431E-A54A-D29BAA606CCE}"/>
+                <a16:creationId xmlns:a16="http://schemas.microsoft.com/office/drawing/2014/main" id="{EB6609E5-DE7A-47D2-B8E1-B0CCF058CB26}"/>
               </a:ext>
             </a:extLst>
           </p:cNvPr>
@@ -24692,7 +24882,7 @@
           <p:cNvPr id="42" name="">
             <a:extLst xmlns:a="http://schemas.openxmlformats.org/drawingml/2006/main">
               <a:ext uri="{FF2B5EF4-FFF2-40B4-BE49-F238E27FC236}">
-                <a16:creationId xmlns:a16="http://schemas.microsoft.com/office/drawing/2014/main" id="{5E4224E0-50F8-4781-97FA-528F02289CD8}"/>
+                <a16:creationId xmlns:a16="http://schemas.microsoft.com/office/drawing/2014/main" id="{E3D04A73-9EBD-4A12-8534-FF6D3F254F32}"/>
               </a:ext>
             </a:extLst>
           </p:cNvPr>
@@ -24725,7 +24915,7 @@
           <p:cNvPr id="43" name="">
             <a:extLst xmlns:a="http://schemas.openxmlformats.org/drawingml/2006/main">
               <a:ext uri="{FF2B5EF4-FFF2-40B4-BE49-F238E27FC236}">
-                <a16:creationId xmlns:a16="http://schemas.microsoft.com/office/drawing/2014/main" id="{AE3F8787-B4C4-4A2D-B838-7D0065DDD1BC}"/>
+                <a16:creationId xmlns:a16="http://schemas.microsoft.com/office/drawing/2014/main" id="{D628C8BC-9582-42D5-80DC-2471F6AA29B3}"/>
               </a:ext>
             </a:extLst>
           </p:cNvPr>
@@ -24758,7 +24948,7 @@
           <p:cNvPr id="44" name="">
             <a:extLst xmlns:a="http://schemas.openxmlformats.org/drawingml/2006/main">
               <a:ext uri="{FF2B5EF4-FFF2-40B4-BE49-F238E27FC236}">
-                <a16:creationId xmlns:a16="http://schemas.microsoft.com/office/drawing/2014/main" id="{6E6C2CE2-B0C8-4911-B773-F515B087D26F}"/>
+                <a16:creationId xmlns:a16="http://schemas.microsoft.com/office/drawing/2014/main" id="{C3E64145-FF48-4F2C-8254-B98103592448}"/>
               </a:ext>
             </a:extLst>
           </p:cNvPr>
@@ -24791,7 +24981,7 @@
           <p:cNvPr id="45" name="">
             <a:extLst xmlns:a="http://schemas.openxmlformats.org/drawingml/2006/main">
               <a:ext uri="{FF2B5EF4-FFF2-40B4-BE49-F238E27FC236}">
-                <a16:creationId xmlns:a16="http://schemas.microsoft.com/office/drawing/2014/main" id="{89C555CD-406E-49F4-8258-DBA4D5646B4F}"/>
+                <a16:creationId xmlns:a16="http://schemas.microsoft.com/office/drawing/2014/main" id="{73A7031D-F887-45C1-A95A-2E91D21B73EF}"/>
               </a:ext>
             </a:extLst>
           </p:cNvPr>
@@ -24824,7 +25014,7 @@
           <p:cNvPr id="46" name="">
             <a:extLst xmlns:a="http://schemas.openxmlformats.org/drawingml/2006/main">
               <a:ext uri="{FF2B5EF4-FFF2-40B4-BE49-F238E27FC236}">
-                <a16:creationId xmlns:a16="http://schemas.microsoft.com/office/drawing/2014/main" id="{DBDBA7DB-6454-4E04-A6CA-9A7766AE9F7D}"/>
+                <a16:creationId xmlns:a16="http://schemas.microsoft.com/office/drawing/2014/main" id="{85DAC82B-626F-444A-AF89-2669F32AF83F}"/>
               </a:ext>
             </a:extLst>
           </p:cNvPr>
@@ -24857,7 +25047,7 @@
           <p:cNvPr id="47" name="">
             <a:extLst xmlns:a="http://schemas.openxmlformats.org/drawingml/2006/main">
               <a:ext uri="{FF2B5EF4-FFF2-40B4-BE49-F238E27FC236}">
-                <a16:creationId xmlns:a16="http://schemas.microsoft.com/office/drawing/2014/main" id="{3E51D86E-EBD3-489B-80DF-AC7032A28F01}"/>
+                <a16:creationId xmlns:a16="http://schemas.microsoft.com/office/drawing/2014/main" id="{F7C20DCD-911D-4B6E-9E98-1F74CD3B90DB}"/>
               </a:ext>
             </a:extLst>
           </p:cNvPr>
@@ -24890,7 +25080,7 @@
           <p:cNvPr id="48" name="">
             <a:extLst xmlns:a="http://schemas.openxmlformats.org/drawingml/2006/main">
               <a:ext uri="{FF2B5EF4-FFF2-40B4-BE49-F238E27FC236}">
-                <a16:creationId xmlns:a16="http://schemas.microsoft.com/office/drawing/2014/main" id="{86A6EE6A-C123-47A0-9D70-3B23DE049551}"/>
+                <a16:creationId xmlns:a16="http://schemas.microsoft.com/office/drawing/2014/main" id="{A5B82643-B5BF-4807-889C-A5E6590E99E7}"/>
               </a:ext>
             </a:extLst>
           </p:cNvPr>
@@ -24923,7 +25113,7 @@
           <p:cNvPr id="49" name="">
             <a:extLst xmlns:a="http://schemas.openxmlformats.org/drawingml/2006/main">
               <a:ext uri="{FF2B5EF4-FFF2-40B4-BE49-F238E27FC236}">
-                <a16:creationId xmlns:a16="http://schemas.microsoft.com/office/drawing/2014/main" id="{16D2F902-397A-451A-BBA2-A5E72EA19C7A}"/>
+                <a16:creationId xmlns:a16="http://schemas.microsoft.com/office/drawing/2014/main" id="{9C69FC9A-5E47-4BBE-A680-F902CFB7EC71}"/>
               </a:ext>
             </a:extLst>
           </p:cNvPr>
@@ -24956,7 +25146,7 @@
           <p:cNvPr id="50" name="">
             <a:extLst xmlns:a="http://schemas.openxmlformats.org/drawingml/2006/main">
               <a:ext uri="{FF2B5EF4-FFF2-40B4-BE49-F238E27FC236}">
-                <a16:creationId xmlns:a16="http://schemas.microsoft.com/office/drawing/2014/main" id="{2B8905B6-D809-4690-A938-B1F354254754}"/>
+                <a16:creationId xmlns:a16="http://schemas.microsoft.com/office/drawing/2014/main" id="{512CE29F-3E20-42D8-BD3E-632748DA5438}"/>
               </a:ext>
             </a:extLst>
           </p:cNvPr>
@@ -24989,7 +25179,7 @@
           <p:cNvPr id="51" name="">
             <a:extLst xmlns:a="http://schemas.openxmlformats.org/drawingml/2006/main">
               <a:ext uri="{FF2B5EF4-FFF2-40B4-BE49-F238E27FC236}">
-                <a16:creationId xmlns:a16="http://schemas.microsoft.com/office/drawing/2014/main" id="{C5611A77-E0FB-485B-A0CC-D59C2EE07D6F}"/>
+                <a16:creationId xmlns:a16="http://schemas.microsoft.com/office/drawing/2014/main" id="{D21BB160-74AA-4827-911F-1C149EF800C0}"/>
               </a:ext>
             </a:extLst>
           </p:cNvPr>
@@ -25022,7 +25212,7 @@
           <p:cNvPr id="52" name="">
             <a:extLst xmlns:a="http://schemas.openxmlformats.org/drawingml/2006/main">
               <a:ext uri="{FF2B5EF4-FFF2-40B4-BE49-F238E27FC236}">
-                <a16:creationId xmlns:a16="http://schemas.microsoft.com/office/drawing/2014/main" id="{EB0E0D59-FA98-4D85-8AE0-C9ABE9A62085}"/>
+                <a16:creationId xmlns:a16="http://schemas.microsoft.com/office/drawing/2014/main" id="{34267709-6602-4F97-979C-BC66DD965F85}"/>
               </a:ext>
             </a:extLst>
           </p:cNvPr>
@@ -25055,7 +25245,7 @@
           <p:cNvPr id="53" name="">
             <a:extLst xmlns:a="http://schemas.openxmlformats.org/drawingml/2006/main">
               <a:ext uri="{FF2B5EF4-FFF2-40B4-BE49-F238E27FC236}">
-                <a16:creationId xmlns:a16="http://schemas.microsoft.com/office/drawing/2014/main" id="{7E0422AC-C834-4ECC-8EA8-F4EE7A6DACC2}"/>
+                <a16:creationId xmlns:a16="http://schemas.microsoft.com/office/drawing/2014/main" id="{78575AA0-A835-40BE-A7DE-9E5FEB04E7FF}"/>
               </a:ext>
             </a:extLst>
           </p:cNvPr>
@@ -25088,7 +25278,7 @@
           <p:cNvPr id="54" name="">
             <a:extLst xmlns:a="http://schemas.openxmlformats.org/drawingml/2006/main">
               <a:ext uri="{FF2B5EF4-FFF2-40B4-BE49-F238E27FC236}">
-                <a16:creationId xmlns:a16="http://schemas.microsoft.com/office/drawing/2014/main" id="{9B9648F2-AD16-4142-A775-7B99103763E0}"/>
+                <a16:creationId xmlns:a16="http://schemas.microsoft.com/office/drawing/2014/main" id="{0FF54264-1948-4CB1-BB46-5E1D9965F4BE}"/>
               </a:ext>
             </a:extLst>
           </p:cNvPr>
@@ -25121,7 +25311,7 @@
           <p:cNvPr id="55" name="">
             <a:extLst xmlns:a="http://schemas.openxmlformats.org/drawingml/2006/main">
               <a:ext uri="{FF2B5EF4-FFF2-40B4-BE49-F238E27FC236}">
-                <a16:creationId xmlns:a16="http://schemas.microsoft.com/office/drawing/2014/main" id="{1DD3F624-7F02-426B-9D16-D48278E74562}"/>
+                <a16:creationId xmlns:a16="http://schemas.microsoft.com/office/drawing/2014/main" id="{E9C8B42D-932B-4A47-830B-8E607E0648BA}"/>
               </a:ext>
             </a:extLst>
           </p:cNvPr>
@@ -25154,7 +25344,7 @@
           <p:cNvPr id="56" name="">
             <a:extLst xmlns:a="http://schemas.openxmlformats.org/drawingml/2006/main">
               <a:ext uri="{FF2B5EF4-FFF2-40B4-BE49-F238E27FC236}">
-                <a16:creationId xmlns:a16="http://schemas.microsoft.com/office/drawing/2014/main" id="{6F70CA91-7B58-4D23-BEFC-A37DCD0974CE}"/>
+                <a16:creationId xmlns:a16="http://schemas.microsoft.com/office/drawing/2014/main" id="{11E723B8-EC90-4DA5-8BAB-6EF74BD273C8}"/>
               </a:ext>
             </a:extLst>
           </p:cNvPr>
@@ -25187,7 +25377,7 @@
           <p:cNvPr id="57" name="">
             <a:extLst xmlns:a="http://schemas.openxmlformats.org/drawingml/2006/main">
               <a:ext uri="{FF2B5EF4-FFF2-40B4-BE49-F238E27FC236}">
-                <a16:creationId xmlns:a16="http://schemas.microsoft.com/office/drawing/2014/main" id="{A189EE4B-E1DC-4C2B-93C9-61F7BE30130F}"/>
+                <a16:creationId xmlns:a16="http://schemas.microsoft.com/office/drawing/2014/main" id="{13F0930B-D066-4D5A-860D-A8BD1A47D78B}"/>
               </a:ext>
             </a:extLst>
           </p:cNvPr>
@@ -25220,7 +25410,7 @@
           <p:cNvPr id="58" name="">
             <a:extLst xmlns:a="http://schemas.openxmlformats.org/drawingml/2006/main">
               <a:ext uri="{FF2B5EF4-FFF2-40B4-BE49-F238E27FC236}">
-                <a16:creationId xmlns:a16="http://schemas.microsoft.com/office/drawing/2014/main" id="{3189ED74-943D-4838-8F38-E8F7B16B42E4}"/>
+                <a16:creationId xmlns:a16="http://schemas.microsoft.com/office/drawing/2014/main" id="{75CA63C2-8DA3-4137-9534-F1770CC71B77}"/>
               </a:ext>
             </a:extLst>
           </p:cNvPr>
@@ -25253,7 +25443,7 @@
           <p:cNvPr id="59" name="">
             <a:extLst xmlns:a="http://schemas.openxmlformats.org/drawingml/2006/main">
               <a:ext uri="{FF2B5EF4-FFF2-40B4-BE49-F238E27FC236}">
-                <a16:creationId xmlns:a16="http://schemas.microsoft.com/office/drawing/2014/main" id="{8F426040-4648-43EC-89FD-24CAE0685675}"/>
+                <a16:creationId xmlns:a16="http://schemas.microsoft.com/office/drawing/2014/main" id="{401EF9F2-47EA-42CB-A5F7-70E0711C2E0F}"/>
               </a:ext>
             </a:extLst>
           </p:cNvPr>
@@ -25286,7 +25476,7 @@
           <p:cNvPr id="60" name="">
             <a:extLst xmlns:a="http://schemas.openxmlformats.org/drawingml/2006/main">
               <a:ext uri="{FF2B5EF4-FFF2-40B4-BE49-F238E27FC236}">
-                <a16:creationId xmlns:a16="http://schemas.microsoft.com/office/drawing/2014/main" id="{5B303968-118C-4D7E-B69F-E13AD25E5244}"/>
+                <a16:creationId xmlns:a16="http://schemas.microsoft.com/office/drawing/2014/main" id="{88518B22-4ECF-45B3-A56A-B8488D420A92}"/>
               </a:ext>
             </a:extLst>
           </p:cNvPr>
@@ -25319,7 +25509,7 @@
           <p:cNvPr id="61" name="">
             <a:extLst xmlns:a="http://schemas.openxmlformats.org/drawingml/2006/main">
               <a:ext uri="{FF2B5EF4-FFF2-40B4-BE49-F238E27FC236}">
-                <a16:creationId xmlns:a16="http://schemas.microsoft.com/office/drawing/2014/main" id="{053D53EE-3EDF-4488-92B0-D53460E9A218}"/>
+                <a16:creationId xmlns:a16="http://schemas.microsoft.com/office/drawing/2014/main" id="{403D46F2-BAEB-4584-B21E-597AF7BEE0E3}"/>
               </a:ext>
             </a:extLst>
           </p:cNvPr>
@@ -25352,7 +25542,7 @@
           <p:cNvPr id="62" name="">
             <a:extLst xmlns:a="http://schemas.openxmlformats.org/drawingml/2006/main">
               <a:ext uri="{FF2B5EF4-FFF2-40B4-BE49-F238E27FC236}">
-                <a16:creationId xmlns:a16="http://schemas.microsoft.com/office/drawing/2014/main" id="{19D50C11-6107-44A3-8326-E58A3CBFDC27}"/>
+                <a16:creationId xmlns:a16="http://schemas.microsoft.com/office/drawing/2014/main" id="{AEF26D22-D845-4F8C-BB2A-4E0B4DE2F144}"/>
               </a:ext>
             </a:extLst>
           </p:cNvPr>
@@ -25385,7 +25575,7 @@
           <p:cNvPr id="63" name="">
             <a:extLst xmlns:a="http://schemas.openxmlformats.org/drawingml/2006/main">
               <a:ext uri="{FF2B5EF4-FFF2-40B4-BE49-F238E27FC236}">
-                <a16:creationId xmlns:a16="http://schemas.microsoft.com/office/drawing/2014/main" id="{9D14165A-9F28-488B-8FB6-20F925FCE3A9}"/>
+                <a16:creationId xmlns:a16="http://schemas.microsoft.com/office/drawing/2014/main" id="{48ECAE4E-F813-4A15-B9A9-A416BAEB2AD9}"/>
               </a:ext>
             </a:extLst>
           </p:cNvPr>
@@ -25418,7 +25608,7 @@
           <p:cNvPr id="64" name="">
             <a:extLst xmlns:a="http://schemas.openxmlformats.org/drawingml/2006/main">
               <a:ext uri="{FF2B5EF4-FFF2-40B4-BE49-F238E27FC236}">
-                <a16:creationId xmlns:a16="http://schemas.microsoft.com/office/drawing/2014/main" id="{E5E3D57B-A1E0-47C7-8D72-5C4D659CCDD8}"/>
+                <a16:creationId xmlns:a16="http://schemas.microsoft.com/office/drawing/2014/main" id="{80C76B79-D237-42CC-AE26-29FB989C7859}"/>
               </a:ext>
             </a:extLst>
           </p:cNvPr>
@@ -25451,7 +25641,7 @@
           <p:cNvPr id="65" name="">
             <a:extLst xmlns:a="http://schemas.openxmlformats.org/drawingml/2006/main">
               <a:ext uri="{FF2B5EF4-FFF2-40B4-BE49-F238E27FC236}">
-                <a16:creationId xmlns:a16="http://schemas.microsoft.com/office/drawing/2014/main" id="{BAB4BA0E-887C-4BAA-813B-25FDE8645643}"/>
+                <a16:creationId xmlns:a16="http://schemas.microsoft.com/office/drawing/2014/main" id="{2CE9063F-5600-4007-9737-226D1896344B}"/>
               </a:ext>
             </a:extLst>
           </p:cNvPr>
@@ -25484,7 +25674,7 @@
           <p:cNvPr id="66" name="">
             <a:extLst xmlns:a="http://schemas.openxmlformats.org/drawingml/2006/main">
               <a:ext uri="{FF2B5EF4-FFF2-40B4-BE49-F238E27FC236}">
-                <a16:creationId xmlns:a16="http://schemas.microsoft.com/office/drawing/2014/main" id="{6E6EDC2F-2156-476F-AFEB-EE8D9108186D}"/>
+                <a16:creationId xmlns:a16="http://schemas.microsoft.com/office/drawing/2014/main" id="{E4830478-8A27-4DF7-9A91-548CB09A24BE}"/>
               </a:ext>
             </a:extLst>
           </p:cNvPr>
@@ -25517,7 +25707,7 @@
           <p:cNvPr id="67" name="">
             <a:extLst xmlns:a="http://schemas.openxmlformats.org/drawingml/2006/main">
               <a:ext uri="{FF2B5EF4-FFF2-40B4-BE49-F238E27FC236}">
-                <a16:creationId xmlns:a16="http://schemas.microsoft.com/office/drawing/2014/main" id="{52CC3C75-E041-454B-9F12-A90A39D61FF5}"/>
+                <a16:creationId xmlns:a16="http://schemas.microsoft.com/office/drawing/2014/main" id="{57901095-BC82-46A8-8015-3D3940FD6CE7}"/>
               </a:ext>
             </a:extLst>
           </p:cNvPr>
@@ -25550,7 +25740,7 @@
           <p:cNvPr id="68" name="">
             <a:extLst xmlns:a="http://schemas.openxmlformats.org/drawingml/2006/main">
               <a:ext uri="{FF2B5EF4-FFF2-40B4-BE49-F238E27FC236}">
-                <a16:creationId xmlns:a16="http://schemas.microsoft.com/office/drawing/2014/main" id="{2B4A26F8-A2ED-460F-8F1A-92D243FB5783}"/>
+                <a16:creationId xmlns:a16="http://schemas.microsoft.com/office/drawing/2014/main" id="{834A24ED-4C38-4F5B-96FD-5FC80A41A567}"/>
               </a:ext>
             </a:extLst>
           </p:cNvPr>
@@ -25612,7 +25802,7 @@
           <p:cNvPr id="69" name="">
             <a:extLst xmlns:a="http://schemas.openxmlformats.org/drawingml/2006/main">
               <a:ext uri="{FF2B5EF4-FFF2-40B4-BE49-F238E27FC236}">
-                <a16:creationId xmlns:a16="http://schemas.microsoft.com/office/drawing/2014/main" id="{4BA5F0D6-44D4-4409-B200-430691F2DC65}"/>
+                <a16:creationId xmlns:a16="http://schemas.microsoft.com/office/drawing/2014/main" id="{1E38535F-A73B-4F98-AB2B-5063D1248E10}"/>
               </a:ext>
             </a:extLst>
           </p:cNvPr>
@@ -25674,7 +25864,7 @@
           <p:cNvPr id="70" name="">
             <a:extLst xmlns:a="http://schemas.openxmlformats.org/drawingml/2006/main">
               <a:ext uri="{FF2B5EF4-FFF2-40B4-BE49-F238E27FC236}">
-                <a16:creationId xmlns:a16="http://schemas.microsoft.com/office/drawing/2014/main" id="{D470DAF4-9474-4D5D-BFA2-5ECA5F4E16BC}"/>
+                <a16:creationId xmlns:a16="http://schemas.microsoft.com/office/drawing/2014/main" id="{94A77464-E81D-4CF1-93ED-AE9176F703AF}"/>
               </a:ext>
             </a:extLst>
           </p:cNvPr>
@@ -25736,7 +25926,7 @@
           <p:cNvPr id="71" name="">
             <a:extLst xmlns:a="http://schemas.openxmlformats.org/drawingml/2006/main">
               <a:ext uri="{FF2B5EF4-FFF2-40B4-BE49-F238E27FC236}">
-                <a16:creationId xmlns:a16="http://schemas.microsoft.com/office/drawing/2014/main" id="{C21AD03A-6020-404F-A578-EFE2F44621D6}"/>
+                <a16:creationId xmlns:a16="http://schemas.microsoft.com/office/drawing/2014/main" id="{31C51087-A882-4FB6-8FF8-AE0733AB19F0}"/>
               </a:ext>
             </a:extLst>
           </p:cNvPr>
@@ -25777,7 +25967,7 @@
           <p:cNvPr id="72" name="">
             <a:extLst xmlns:a="http://schemas.openxmlformats.org/drawingml/2006/main">
               <a:ext uri="{FF2B5EF4-FFF2-40B4-BE49-F238E27FC236}">
-                <a16:creationId xmlns:a16="http://schemas.microsoft.com/office/drawing/2014/main" id="{A65A9D23-B38E-4E37-BB81-B6D4E91634F8}"/>
+                <a16:creationId xmlns:a16="http://schemas.microsoft.com/office/drawing/2014/main" id="{0AD8FE35-ABB4-45CF-BB85-641285156A23}"/>
               </a:ext>
             </a:extLst>
           </p:cNvPr>
@@ -25839,7 +26029,7 @@
           <p:cNvPr id="73" name="">
             <a:extLst xmlns:a="http://schemas.openxmlformats.org/drawingml/2006/main">
               <a:ext uri="{FF2B5EF4-FFF2-40B4-BE49-F238E27FC236}">
-                <a16:creationId xmlns:a16="http://schemas.microsoft.com/office/drawing/2014/main" id="{4A3AEFFA-9C76-4FEA-B750-75C443178F25}"/>
+                <a16:creationId xmlns:a16="http://schemas.microsoft.com/office/drawing/2014/main" id="{EB8566B7-8173-49E1-A5BF-EE9D2CF63DC9}"/>
               </a:ext>
             </a:extLst>
           </p:cNvPr>
@@ -25928,7 +26118,7 @@
           <p:cNvPr id="74" name="">
             <a:extLst xmlns:a="http://schemas.openxmlformats.org/drawingml/2006/main">
               <a:ext uri="{FF2B5EF4-FFF2-40B4-BE49-F238E27FC236}">
-                <a16:creationId xmlns:a16="http://schemas.microsoft.com/office/drawing/2014/main" id="{56C0FDC3-21CD-4265-B7DE-6F98441F198A}"/>
+                <a16:creationId xmlns:a16="http://schemas.microsoft.com/office/drawing/2014/main" id="{B5B1273E-B1F9-4FC9-B2D3-225E3124F336}"/>
               </a:ext>
             </a:extLst>
           </p:cNvPr>
@@ -25969,7 +26159,7 @@
           <p:cNvPr id="75" name="">
             <a:extLst xmlns:a="http://schemas.openxmlformats.org/drawingml/2006/main">
               <a:ext uri="{FF2B5EF4-FFF2-40B4-BE49-F238E27FC236}">
-                <a16:creationId xmlns:a16="http://schemas.microsoft.com/office/drawing/2014/main" id="{FC9BD9F4-8915-492A-9231-F2FF7FC0A537}"/>
+                <a16:creationId xmlns:a16="http://schemas.microsoft.com/office/drawing/2014/main" id="{A8EF8A0D-DF81-44FE-A17E-A386B9651201}"/>
               </a:ext>
             </a:extLst>
           </p:cNvPr>
@@ -26031,7 +26221,7 @@
           <p:cNvPr id="76" name="">
             <a:extLst xmlns:a="http://schemas.openxmlformats.org/drawingml/2006/main">
               <a:ext uri="{FF2B5EF4-FFF2-40B4-BE49-F238E27FC236}">
-                <a16:creationId xmlns:a16="http://schemas.microsoft.com/office/drawing/2014/main" id="{CA61C740-9337-4E68-879E-BD8592D43B93}"/>
+                <a16:creationId xmlns:a16="http://schemas.microsoft.com/office/drawing/2014/main" id="{87153B06-E431-4CB0-B1B4-025D4EB4C98D}"/>
               </a:ext>
             </a:extLst>
           </p:cNvPr>
@@ -26120,7 +26310,7 @@
           <p:cNvPr id="77" name="">
             <a:extLst xmlns:a="http://schemas.openxmlformats.org/drawingml/2006/main">
               <a:ext uri="{FF2B5EF4-FFF2-40B4-BE49-F238E27FC236}">
-                <a16:creationId xmlns:a16="http://schemas.microsoft.com/office/drawing/2014/main" id="{670CD677-976F-4EEF-A84D-9C29BFCFFDB6}"/>
+                <a16:creationId xmlns:a16="http://schemas.microsoft.com/office/drawing/2014/main" id="{EC50F06E-6201-4270-8445-721E64F279D6}"/>
               </a:ext>
             </a:extLst>
           </p:cNvPr>
@@ -26161,7 +26351,7 @@
           <p:cNvPr id="78" name="">
             <a:extLst xmlns:a="http://schemas.openxmlformats.org/drawingml/2006/main">
               <a:ext uri="{FF2B5EF4-FFF2-40B4-BE49-F238E27FC236}">
-                <a16:creationId xmlns:a16="http://schemas.microsoft.com/office/drawing/2014/main" id="{A412B2AB-C8BF-4FA8-9C22-A55C2F4F07E6}"/>
+                <a16:creationId xmlns:a16="http://schemas.microsoft.com/office/drawing/2014/main" id="{CCEA6D50-1D5A-4E67-975D-1CCE1C5CB3E1}"/>
               </a:ext>
             </a:extLst>
           </p:cNvPr>
@@ -26223,7 +26413,7 @@
           <p:cNvPr id="79" name="">
             <a:extLst xmlns:a="http://schemas.openxmlformats.org/drawingml/2006/main">
               <a:ext uri="{FF2B5EF4-FFF2-40B4-BE49-F238E27FC236}">
-                <a16:creationId xmlns:a16="http://schemas.microsoft.com/office/drawing/2014/main" id="{6812B504-C594-434A-A0B3-B1B286BC3655}"/>
+                <a16:creationId xmlns:a16="http://schemas.microsoft.com/office/drawing/2014/main" id="{D8A14846-CFEF-4B49-A05E-2748A0D31C54}"/>
               </a:ext>
             </a:extLst>
           </p:cNvPr>
@@ -26312,7 +26502,7 @@
           <p:cNvPr id="80" name="">
             <a:extLst xmlns:a="http://schemas.openxmlformats.org/drawingml/2006/main">
               <a:ext uri="{FF2B5EF4-FFF2-40B4-BE49-F238E27FC236}">
-                <a16:creationId xmlns:a16="http://schemas.microsoft.com/office/drawing/2014/main" id="{C044CA8D-33EC-44EE-9A23-89D01D94334F}"/>
+                <a16:creationId xmlns:a16="http://schemas.microsoft.com/office/drawing/2014/main" id="{F0781AA9-F513-4259-9B2C-022AA30BAB5F}"/>
               </a:ext>
             </a:extLst>
           </p:cNvPr>
@@ -26353,7 +26543,7 @@
           <p:cNvPr id="81" name="">
             <a:extLst xmlns:a="http://schemas.openxmlformats.org/drawingml/2006/main">
               <a:ext uri="{FF2B5EF4-FFF2-40B4-BE49-F238E27FC236}">
-                <a16:creationId xmlns:a16="http://schemas.microsoft.com/office/drawing/2014/main" id="{D5755011-682B-4A41-8DDC-5A9E0AED2076}"/>
+                <a16:creationId xmlns:a16="http://schemas.microsoft.com/office/drawing/2014/main" id="{852797F6-AE6B-427A-A9B1-B67DF5672362}"/>
               </a:ext>
             </a:extLst>
           </p:cNvPr>
@@ -26415,7 +26605,7 @@
           <p:cNvPr id="82" name="">
             <a:extLst xmlns:a="http://schemas.openxmlformats.org/drawingml/2006/main">
               <a:ext uri="{FF2B5EF4-FFF2-40B4-BE49-F238E27FC236}">
-                <a16:creationId xmlns:a16="http://schemas.microsoft.com/office/drawing/2014/main" id="{8B64A78C-1AFA-489B-B5C2-FE7564562D6F}"/>
+                <a16:creationId xmlns:a16="http://schemas.microsoft.com/office/drawing/2014/main" id="{2708507D-B8E7-492D-9763-8611451B1603}"/>
               </a:ext>
             </a:extLst>
           </p:cNvPr>
@@ -26504,7 +26694,7 @@
           <p:cNvPr id="83" name="">
             <a:extLst xmlns:a="http://schemas.openxmlformats.org/drawingml/2006/main">
               <a:ext uri="{FF2B5EF4-FFF2-40B4-BE49-F238E27FC236}">
-                <a16:creationId xmlns:a16="http://schemas.microsoft.com/office/drawing/2014/main" id="{8B088990-F126-4CC5-A77E-E047437DE626}"/>
+                <a16:creationId xmlns:a16="http://schemas.microsoft.com/office/drawing/2014/main" id="{D77E7989-9378-44D8-B7C2-DC7BC47E9C8E}"/>
               </a:ext>
             </a:extLst>
           </p:cNvPr>
@@ -26637,7 +26827,7 @@
           <p:cNvPr id="88" name="">
             <a:extLst xmlns:a="http://schemas.openxmlformats.org/drawingml/2006/main">
               <a:ext uri="{FF2B5EF4-FFF2-40B4-BE49-F238E27FC236}">
-                <a16:creationId xmlns:a16="http://schemas.microsoft.com/office/drawing/2014/main" id="{25B3382C-95F5-4A4B-891C-B4B98C038504}"/>
+                <a16:creationId xmlns:a16="http://schemas.microsoft.com/office/drawing/2014/main" id="{5EE32E5C-5653-41DB-8CBA-BD4FE684827C}"/>
               </a:ext>
             </a:extLst>
           </p:cNvPr>
@@ -26699,7 +26889,7 @@
           <p:cNvPr id="89" name="">
             <a:extLst xmlns:a="http://schemas.openxmlformats.org/drawingml/2006/main">
               <a:ext uri="{FF2B5EF4-FFF2-40B4-BE49-F238E27FC236}">
-                <a16:creationId xmlns:a16="http://schemas.microsoft.com/office/drawing/2014/main" id="{2D0DF3F7-D328-4CB0-A595-CE0F6EAB3F66}"/>
+                <a16:creationId xmlns:a16="http://schemas.microsoft.com/office/drawing/2014/main" id="{32FB9792-8961-4BF7-8278-14940FD9BAFF}"/>
               </a:ext>
             </a:extLst>
           </p:cNvPr>
@@ -26730,7 +26920,7 @@
           <p:cNvPr id="90" name="">
             <a:extLst xmlns:a="http://schemas.openxmlformats.org/drawingml/2006/main">
               <a:ext uri="{FF2B5EF4-FFF2-40B4-BE49-F238E27FC236}">
-                <a16:creationId xmlns:a16="http://schemas.microsoft.com/office/drawing/2014/main" id="{DC883525-A169-4AEF-877E-ADCAD70ABE2D}"/>
+                <a16:creationId xmlns:a16="http://schemas.microsoft.com/office/drawing/2014/main" id="{DDB461CD-735A-4680-AE2C-855C9345A393}"/>
               </a:ext>
             </a:extLst>
           </p:cNvPr>
@@ -26792,7 +26982,7 @@
           <p:cNvPr id="91" name="">
             <a:extLst xmlns:a="http://schemas.openxmlformats.org/drawingml/2006/main">
               <a:ext uri="{FF2B5EF4-FFF2-40B4-BE49-F238E27FC236}">
-                <a16:creationId xmlns:a16="http://schemas.microsoft.com/office/drawing/2014/main" id="{FA176565-6F76-4BA1-9B39-1F7D506D094D}"/>
+                <a16:creationId xmlns:a16="http://schemas.microsoft.com/office/drawing/2014/main" id="{E5856A6D-3734-4664-B203-E1F455A42009}"/>
               </a:ext>
             </a:extLst>
           </p:cNvPr>
@@ -26852,7 +27042,7 @@
     </p:spTree>
     <p:extLst>
       <p:ext uri="{BB962C8B-B14F-4D97-AF65-F5344CB8AC3E}">
-        <p14:creationId xmlns:p14="http://schemas.microsoft.com/office/powerpoint/2010/main" val="1523460370"/>
+        <p14:creationId xmlns:p14="http://schemas.microsoft.com/office/powerpoint/2010/main" val="190507514"/>
       </p:ext>
     </p:extLst>
   </p:cSld>
@@ -26883,7 +27073,7 @@
           <p:cNvPr id="1" name="">
             <a:extLst xmlns:a="http://schemas.openxmlformats.org/drawingml/2006/main">
               <a:ext uri="{FF2B5EF4-FFF2-40B4-BE49-F238E27FC236}">
-                <a16:creationId xmlns:a16="http://schemas.microsoft.com/office/drawing/2014/main" id="{E0BA79D8-C0C8-414D-9B46-2C1AC483FC6D}"/>
+                <a16:creationId xmlns:a16="http://schemas.microsoft.com/office/drawing/2014/main" id="{01F4C42F-BF46-4076-8DB8-DB3FE93B9738}"/>
               </a:ext>
             </a:extLst>
           </p:cNvPr>
@@ -26945,7 +27135,7 @@
           <p:cNvPr id="2" name="">
             <a:extLst xmlns:a="http://schemas.openxmlformats.org/drawingml/2006/main">
               <a:ext uri="{FF2B5EF4-FFF2-40B4-BE49-F238E27FC236}">
-                <a16:creationId xmlns:a16="http://schemas.microsoft.com/office/drawing/2014/main" id="{2CF23FB8-15B0-4E22-965D-5737CC5D38D0}"/>
+                <a16:creationId xmlns:a16="http://schemas.microsoft.com/office/drawing/2014/main" id="{6EB60883-E392-483E-834B-8A64C683E822}"/>
               </a:ext>
             </a:extLst>
           </p:cNvPr>
@@ -27007,7 +27197,7 @@
           <p:cNvPr id="3" name="">
             <a:extLst xmlns:a="http://schemas.openxmlformats.org/drawingml/2006/main">
               <a:ext uri="{FF2B5EF4-FFF2-40B4-BE49-F238E27FC236}">
-                <a16:creationId xmlns:a16="http://schemas.microsoft.com/office/drawing/2014/main" id="{BE21D276-9924-48CB-8D09-0468AA3F28A8}"/>
+                <a16:creationId xmlns:a16="http://schemas.microsoft.com/office/drawing/2014/main" id="{D9F64B9F-5B6C-4C3E-8EE5-77EA270194BB}"/>
               </a:ext>
             </a:extLst>
           </p:cNvPr>
@@ -27069,7 +27259,7 @@
           <p:cNvPr id="4" name="">
             <a:extLst xmlns:a="http://schemas.openxmlformats.org/drawingml/2006/main">
               <a:ext uri="{FF2B5EF4-FFF2-40B4-BE49-F238E27FC236}">
-                <a16:creationId xmlns:a16="http://schemas.microsoft.com/office/drawing/2014/main" id="{D36A28FA-40DE-45AA-A4B9-304957356720}"/>
+                <a16:creationId xmlns:a16="http://schemas.microsoft.com/office/drawing/2014/main" id="{0CAADDD7-648F-46B4-8BEE-C6E98B859F8D}"/>
               </a:ext>
             </a:extLst>
           </p:cNvPr>
@@ -27131,7 +27321,7 @@
           <p:cNvPr id="5" name="">
             <a:extLst xmlns:a="http://schemas.openxmlformats.org/drawingml/2006/main">
               <a:ext uri="{FF2B5EF4-FFF2-40B4-BE49-F238E27FC236}">
-                <a16:creationId xmlns:a16="http://schemas.microsoft.com/office/drawing/2014/main" id="{13E541C1-74F9-4A88-97EF-A59F67E36B59}"/>
+                <a16:creationId xmlns:a16="http://schemas.microsoft.com/office/drawing/2014/main" id="{C04E9AB1-987F-41DD-8905-B5BC09E9E39D}"/>
               </a:ext>
             </a:extLst>
           </p:cNvPr>
@@ -27193,7 +27383,7 @@
           <p:cNvPr id="6" name="">
             <a:extLst xmlns:a="http://schemas.openxmlformats.org/drawingml/2006/main">
               <a:ext uri="{FF2B5EF4-FFF2-40B4-BE49-F238E27FC236}">
-                <a16:creationId xmlns:a16="http://schemas.microsoft.com/office/drawing/2014/main" id="{E38979EA-5C0A-4B1A-BE09-D68B9F2DABCD}"/>
+                <a16:creationId xmlns:a16="http://schemas.microsoft.com/office/drawing/2014/main" id="{25AF0288-7FD4-4544-9E50-310F31DB8C77}"/>
               </a:ext>
             </a:extLst>
           </p:cNvPr>
@@ -27255,7 +27445,7 @@
           <p:cNvPr id="7" name="">
             <a:extLst xmlns:a="http://schemas.openxmlformats.org/drawingml/2006/main">
               <a:ext uri="{FF2B5EF4-FFF2-40B4-BE49-F238E27FC236}">
-                <a16:creationId xmlns:a16="http://schemas.microsoft.com/office/drawing/2014/main" id="{8ABBBF47-04A5-43BB-95A5-2517EDD2AD0A}"/>
+                <a16:creationId xmlns:a16="http://schemas.microsoft.com/office/drawing/2014/main" id="{1A8EAB34-DAF3-4031-8394-550E5717592B}"/>
               </a:ext>
             </a:extLst>
           </p:cNvPr>
@@ -27317,7 +27507,7 @@
           <p:cNvPr id="8" name="">
             <a:extLst xmlns:a="http://schemas.openxmlformats.org/drawingml/2006/main">
               <a:ext uri="{FF2B5EF4-FFF2-40B4-BE49-F238E27FC236}">
-                <a16:creationId xmlns:a16="http://schemas.microsoft.com/office/drawing/2014/main" id="{FE804268-1065-40F9-A159-2F899E40ADC4}"/>
+                <a16:creationId xmlns:a16="http://schemas.microsoft.com/office/drawing/2014/main" id="{A55D4FAD-CD80-4D63-94FD-3818512C6638}"/>
               </a:ext>
             </a:extLst>
           </p:cNvPr>
@@ -27379,7 +27569,7 @@
           <p:cNvPr id="9" name="">
             <a:extLst xmlns:a="http://schemas.openxmlformats.org/drawingml/2006/main">
               <a:ext uri="{FF2B5EF4-FFF2-40B4-BE49-F238E27FC236}">
-                <a16:creationId xmlns:a16="http://schemas.microsoft.com/office/drawing/2014/main" id="{A2733D47-71C3-40E2-B76B-26D1D2666E19}"/>
+                <a16:creationId xmlns:a16="http://schemas.microsoft.com/office/drawing/2014/main" id="{8E41A06C-2AB3-491F-8326-19BB646921D7}"/>
               </a:ext>
             </a:extLst>
           </p:cNvPr>
@@ -27441,7 +27631,7 @@
           <p:cNvPr id="10" name="">
             <a:extLst xmlns:a="http://schemas.openxmlformats.org/drawingml/2006/main">
               <a:ext uri="{FF2B5EF4-FFF2-40B4-BE49-F238E27FC236}">
-                <a16:creationId xmlns:a16="http://schemas.microsoft.com/office/drawing/2014/main" id="{310401DB-07EA-4CBD-BD2E-2597A157FAF8}"/>
+                <a16:creationId xmlns:a16="http://schemas.microsoft.com/office/drawing/2014/main" id="{D8596242-6F65-4EA9-A0A7-8D3B1C137BED}"/>
               </a:ext>
             </a:extLst>
           </p:cNvPr>
@@ -27503,7 +27693,7 @@
           <p:cNvPr id="11" name="">
             <a:extLst xmlns:a="http://schemas.openxmlformats.org/drawingml/2006/main">
               <a:ext uri="{FF2B5EF4-FFF2-40B4-BE49-F238E27FC236}">
-                <a16:creationId xmlns:a16="http://schemas.microsoft.com/office/drawing/2014/main" id="{1AE844D7-80D2-421A-8911-6D8C92E747D8}"/>
+                <a16:creationId xmlns:a16="http://schemas.microsoft.com/office/drawing/2014/main" id="{B51942F8-C637-4773-B94E-0E3801BB14A3}"/>
               </a:ext>
             </a:extLst>
           </p:cNvPr>
@@ -27565,7 +27755,7 @@
           <p:cNvPr id="12" name="">
             <a:extLst xmlns:a="http://schemas.openxmlformats.org/drawingml/2006/main">
               <a:ext uri="{FF2B5EF4-FFF2-40B4-BE49-F238E27FC236}">
-                <a16:creationId xmlns:a16="http://schemas.microsoft.com/office/drawing/2014/main" id="{460219BA-99FF-4DC4-8290-CA39CB3C1B71}"/>
+                <a16:creationId xmlns:a16="http://schemas.microsoft.com/office/drawing/2014/main" id="{F3B35499-0AD4-4BB3-9DF2-1A495C4D23A8}"/>
               </a:ext>
             </a:extLst>
           </p:cNvPr>
@@ -27627,7 +27817,7 @@
           <p:cNvPr id="13" name="">
             <a:extLst xmlns:a="http://schemas.openxmlformats.org/drawingml/2006/main">
               <a:ext uri="{FF2B5EF4-FFF2-40B4-BE49-F238E27FC236}">
-                <a16:creationId xmlns:a16="http://schemas.microsoft.com/office/drawing/2014/main" id="{2EA85D64-D772-4212-AB8E-B25F9ADB7947}"/>
+                <a16:creationId xmlns:a16="http://schemas.microsoft.com/office/drawing/2014/main" id="{83260D8E-D79B-4844-9092-2D42246F45C5}"/>
               </a:ext>
             </a:extLst>
           </p:cNvPr>
@@ -27689,7 +27879,7 @@
           <p:cNvPr id="14" name="">
             <a:extLst xmlns:a="http://schemas.openxmlformats.org/drawingml/2006/main">
               <a:ext uri="{FF2B5EF4-FFF2-40B4-BE49-F238E27FC236}">
-                <a16:creationId xmlns:a16="http://schemas.microsoft.com/office/drawing/2014/main" id="{B241766B-9334-4BAE-AB48-44F04D6DADF3}"/>
+                <a16:creationId xmlns:a16="http://schemas.microsoft.com/office/drawing/2014/main" id="{7487EC2D-6C5D-4B77-9B4F-0E6B3D2B6268}"/>
               </a:ext>
             </a:extLst>
           </p:cNvPr>
@@ -27751,7 +27941,7 @@
           <p:cNvPr id="15" name="">
             <a:extLst xmlns:a="http://schemas.openxmlformats.org/drawingml/2006/main">
               <a:ext uri="{FF2B5EF4-FFF2-40B4-BE49-F238E27FC236}">
-                <a16:creationId xmlns:a16="http://schemas.microsoft.com/office/drawing/2014/main" id="{D68E6D3A-8AC2-4F00-8B0F-103EA31788CA}"/>
+                <a16:creationId xmlns:a16="http://schemas.microsoft.com/office/drawing/2014/main" id="{DA17AB9A-5E31-4D3C-AD2C-063F993CB405}"/>
               </a:ext>
             </a:extLst>
           </p:cNvPr>
@@ -27813,7 +28003,7 @@
           <p:cNvPr id="16" name="">
             <a:extLst xmlns:a="http://schemas.openxmlformats.org/drawingml/2006/main">
               <a:ext uri="{FF2B5EF4-FFF2-40B4-BE49-F238E27FC236}">
-                <a16:creationId xmlns:a16="http://schemas.microsoft.com/office/drawing/2014/main" id="{D3B422AC-11AF-4ECC-8E60-2D715C8967A2}"/>
+                <a16:creationId xmlns:a16="http://schemas.microsoft.com/office/drawing/2014/main" id="{585C8471-1F6A-4A42-94A4-9714D6316C59}"/>
               </a:ext>
             </a:extLst>
           </p:cNvPr>
@@ -27875,7 +28065,7 @@
           <p:cNvPr id="17" name="">
             <a:extLst xmlns:a="http://schemas.openxmlformats.org/drawingml/2006/main">
               <a:ext uri="{FF2B5EF4-FFF2-40B4-BE49-F238E27FC236}">
-                <a16:creationId xmlns:a16="http://schemas.microsoft.com/office/drawing/2014/main" id="{6C454ABF-2EE5-4352-8888-71818CCAF62F}"/>
+                <a16:creationId xmlns:a16="http://schemas.microsoft.com/office/drawing/2014/main" id="{C833A6D7-C446-4B6F-82A4-7E31B00E0CEB}"/>
               </a:ext>
             </a:extLst>
           </p:cNvPr>
@@ -27937,7 +28127,7 @@
           <p:cNvPr id="18" name="">
             <a:extLst xmlns:a="http://schemas.openxmlformats.org/drawingml/2006/main">
               <a:ext uri="{FF2B5EF4-FFF2-40B4-BE49-F238E27FC236}">
-                <a16:creationId xmlns:a16="http://schemas.microsoft.com/office/drawing/2014/main" id="{899BDDA5-1E84-43E8-8A03-C947A05C7163}"/>
+                <a16:creationId xmlns:a16="http://schemas.microsoft.com/office/drawing/2014/main" id="{61261406-5BB1-4A1C-8148-A37B23590E05}"/>
               </a:ext>
             </a:extLst>
           </p:cNvPr>
@@ -27999,7 +28189,7 @@
           <p:cNvPr id="19" name="">
             <a:extLst xmlns:a="http://schemas.openxmlformats.org/drawingml/2006/main">
               <a:ext uri="{FF2B5EF4-FFF2-40B4-BE49-F238E27FC236}">
-                <a16:creationId xmlns:a16="http://schemas.microsoft.com/office/drawing/2014/main" id="{0AD41B34-28B0-4DB8-BF0A-E97A5C4DB8F9}"/>
+                <a16:creationId xmlns:a16="http://schemas.microsoft.com/office/drawing/2014/main" id="{D850C2AC-C000-4A83-B491-DC12FF7562D5}"/>
               </a:ext>
             </a:extLst>
           </p:cNvPr>
@@ -28040,7 +28230,7 @@
           <p:cNvPr id="20" name="">
             <a:extLst xmlns:a="http://schemas.openxmlformats.org/drawingml/2006/main">
               <a:ext uri="{FF2B5EF4-FFF2-40B4-BE49-F238E27FC236}">
-                <a16:creationId xmlns:a16="http://schemas.microsoft.com/office/drawing/2014/main" id="{6523FED4-5641-4938-B966-1CBE9F2B5C03}"/>
+                <a16:creationId xmlns:a16="http://schemas.microsoft.com/office/drawing/2014/main" id="{3ED84973-1EC2-479D-B052-FBFB3A27F365}"/>
               </a:ext>
             </a:extLst>
           </p:cNvPr>
@@ -28102,7 +28292,7 @@
           <p:cNvPr id="21" name="">
             <a:extLst xmlns:a="http://schemas.openxmlformats.org/drawingml/2006/main">
               <a:ext uri="{FF2B5EF4-FFF2-40B4-BE49-F238E27FC236}">
-                <a16:creationId xmlns:a16="http://schemas.microsoft.com/office/drawing/2014/main" id="{B4500DA0-28BC-4A99-95D7-0F85A0C98082}"/>
+                <a16:creationId xmlns:a16="http://schemas.microsoft.com/office/drawing/2014/main" id="{D2CE8E1C-020F-479A-8E93-F79BD32AEC58}"/>
               </a:ext>
             </a:extLst>
           </p:cNvPr>
@@ -28164,7 +28354,7 @@
           <p:cNvPr id="22" name="">
             <a:extLst xmlns:a="http://schemas.openxmlformats.org/drawingml/2006/main">
               <a:ext uri="{FF2B5EF4-FFF2-40B4-BE49-F238E27FC236}">
-                <a16:creationId xmlns:a16="http://schemas.microsoft.com/office/drawing/2014/main" id="{54145C43-6EB4-403A-84A6-5CE0D7CCD129}"/>
+                <a16:creationId xmlns:a16="http://schemas.microsoft.com/office/drawing/2014/main" id="{F8DC6046-9865-48A9-9694-BE22E9A6B055}"/>
               </a:ext>
             </a:extLst>
           </p:cNvPr>
@@ -28205,7 +28395,7 @@
           <p:cNvPr id="23" name="">
             <a:extLst xmlns:a="http://schemas.openxmlformats.org/drawingml/2006/main">
               <a:ext uri="{FF2B5EF4-FFF2-40B4-BE49-F238E27FC236}">
-                <a16:creationId xmlns:a16="http://schemas.microsoft.com/office/drawing/2014/main" id="{19825077-BE16-4D4B-836F-8AE59BC145B1}"/>
+                <a16:creationId xmlns:a16="http://schemas.microsoft.com/office/drawing/2014/main" id="{D5EC9A3E-04C9-4122-874D-2F496A7A7B40}"/>
               </a:ext>
             </a:extLst>
           </p:cNvPr>
@@ -28267,7 +28457,7 @@
           <p:cNvPr id="24" name="">
             <a:extLst xmlns:a="http://schemas.openxmlformats.org/drawingml/2006/main">
               <a:ext uri="{FF2B5EF4-FFF2-40B4-BE49-F238E27FC236}">
-                <a16:creationId xmlns:a16="http://schemas.microsoft.com/office/drawing/2014/main" id="{CF30035C-FC23-4AAA-8571-201932747005}"/>
+                <a16:creationId xmlns:a16="http://schemas.microsoft.com/office/drawing/2014/main" id="{B2C7EEBE-EE1D-489D-B2DF-B0BD8FBEE33B}"/>
               </a:ext>
             </a:extLst>
           </p:cNvPr>
@@ -28329,7 +28519,7 @@
           <p:cNvPr id="25" name="">
             <a:extLst xmlns:a="http://schemas.openxmlformats.org/drawingml/2006/main">
               <a:ext uri="{FF2B5EF4-FFF2-40B4-BE49-F238E27FC236}">
-                <a16:creationId xmlns:a16="http://schemas.microsoft.com/office/drawing/2014/main" id="{F36C13E5-7FE5-45C9-B397-1B3B31A11579}"/>
+                <a16:creationId xmlns:a16="http://schemas.microsoft.com/office/drawing/2014/main" id="{E21133F6-A924-48AA-A4D5-4853310BF069}"/>
               </a:ext>
             </a:extLst>
           </p:cNvPr>
@@ -28360,7 +28550,7 @@
           <p:cNvPr id="26" name="">
             <a:extLst xmlns:a="http://schemas.openxmlformats.org/drawingml/2006/main">
               <a:ext uri="{FF2B5EF4-FFF2-40B4-BE49-F238E27FC236}">
-                <a16:creationId xmlns:a16="http://schemas.microsoft.com/office/drawing/2014/main" id="{6C6EFCF2-D17C-48A0-AE6F-EB1CCCD2C852}"/>
+                <a16:creationId xmlns:a16="http://schemas.microsoft.com/office/drawing/2014/main" id="{7F848CC6-461E-4D3B-AE63-671981247C76}"/>
               </a:ext>
             </a:extLst>
           </p:cNvPr>
@@ -28422,7 +28612,7 @@
           <p:cNvPr id="27" name="">
             <a:extLst xmlns:a="http://schemas.openxmlformats.org/drawingml/2006/main">
               <a:ext uri="{FF2B5EF4-FFF2-40B4-BE49-F238E27FC236}">
-                <a16:creationId xmlns:a16="http://schemas.microsoft.com/office/drawing/2014/main" id="{A8379C40-DD35-470F-B4A8-33D3A54BCA16}"/>
+                <a16:creationId xmlns:a16="http://schemas.microsoft.com/office/drawing/2014/main" id="{77F618B5-51BE-4E88-B260-2D924F89CD95}"/>
               </a:ext>
             </a:extLst>
           </p:cNvPr>
@@ -28482,7 +28672,7 @@
     </p:spTree>
     <p:extLst>
       <p:ext uri="{BB962C8B-B14F-4D97-AF65-F5344CB8AC3E}">
-        <p14:creationId xmlns:p14="http://schemas.microsoft.com/office/powerpoint/2010/main" val="1739575451"/>
+        <p14:creationId xmlns:p14="http://schemas.microsoft.com/office/powerpoint/2010/main" val="374478493"/>
       </p:ext>
     </p:extLst>
   </p:cSld>
@@ -28513,7 +28703,7 @@
           <p:cNvPr id="1" name="">
             <a:extLst xmlns:a="http://schemas.openxmlformats.org/drawingml/2006/main">
               <a:ext uri="{FF2B5EF4-FFF2-40B4-BE49-F238E27FC236}">
-                <a16:creationId xmlns:a16="http://schemas.microsoft.com/office/drawing/2014/main" id="{25CE2DB1-DD1C-4887-A53C-55E4EFBD355B}"/>
+                <a16:creationId xmlns:a16="http://schemas.microsoft.com/office/drawing/2014/main" id="{AAF59FB5-1E37-4660-BF6A-55A7A2DBFCC6}"/>
               </a:ext>
             </a:extLst>
           </p:cNvPr>
@@ -28575,7 +28765,7 @@
           <p:cNvPr id="2" name="">
             <a:extLst xmlns:a="http://schemas.openxmlformats.org/drawingml/2006/main">
               <a:ext uri="{FF2B5EF4-FFF2-40B4-BE49-F238E27FC236}">
-                <a16:creationId xmlns:a16="http://schemas.microsoft.com/office/drawing/2014/main" id="{41776907-9A96-4484-A013-FFD4188F0212}"/>
+                <a16:creationId xmlns:a16="http://schemas.microsoft.com/office/drawing/2014/main" id="{52DC5EF1-1CC8-4C07-9D1D-23FEAE8C5680}"/>
               </a:ext>
             </a:extLst>
           </p:cNvPr>
@@ -28637,7 +28827,7 @@
           <p:cNvPr id="3" name="">
             <a:extLst xmlns:a="http://schemas.openxmlformats.org/drawingml/2006/main">
               <a:ext uri="{FF2B5EF4-FFF2-40B4-BE49-F238E27FC236}">
-                <a16:creationId xmlns:a16="http://schemas.microsoft.com/office/drawing/2014/main" id="{9560D876-A8D1-4559-B2C4-8F367924D401}"/>
+                <a16:creationId xmlns:a16="http://schemas.microsoft.com/office/drawing/2014/main" id="{2106FF5F-EED3-4428-9F8C-9B05D5852821}"/>
               </a:ext>
             </a:extLst>
           </p:cNvPr>
@@ -28678,7 +28868,7 @@
           <p:cNvPr id="4" name="">
             <a:extLst xmlns:a="http://schemas.openxmlformats.org/drawingml/2006/main">
               <a:ext uri="{FF2B5EF4-FFF2-40B4-BE49-F238E27FC236}">
-                <a16:creationId xmlns:a16="http://schemas.microsoft.com/office/drawing/2014/main" id="{58ED081F-B6BC-486B-BCFB-C7F1DD41D0B1}"/>
+                <a16:creationId xmlns:a16="http://schemas.microsoft.com/office/drawing/2014/main" id="{6FEC8C10-053A-4BFA-9C7C-8D7590D90FD3}"/>
               </a:ext>
             </a:extLst>
           </p:cNvPr>
@@ -28709,7 +28899,7 @@
           <p:cNvPr id="5" name="">
             <a:extLst xmlns:a="http://schemas.openxmlformats.org/drawingml/2006/main">
               <a:ext uri="{FF2B5EF4-FFF2-40B4-BE49-F238E27FC236}">
-                <a16:creationId xmlns:a16="http://schemas.microsoft.com/office/drawing/2014/main" id="{39939D3B-3081-4036-8748-E576213E003B}"/>
+                <a16:creationId xmlns:a16="http://schemas.microsoft.com/office/drawing/2014/main" id="{74064427-B7F5-4B99-9564-7A0201BA574D}"/>
               </a:ext>
             </a:extLst>
           </p:cNvPr>
@@ -28742,7 +28932,7 @@
           <p:cNvPr id="6" name="">
             <a:extLst xmlns:a="http://schemas.openxmlformats.org/drawingml/2006/main">
               <a:ext uri="{FF2B5EF4-FFF2-40B4-BE49-F238E27FC236}">
-                <a16:creationId xmlns:a16="http://schemas.microsoft.com/office/drawing/2014/main" id="{F8212144-B83F-4A44-87AF-5FAC4CF58B1D}"/>
+                <a16:creationId xmlns:a16="http://schemas.microsoft.com/office/drawing/2014/main" id="{28BA2CF3-2C84-42F4-B39A-D78072155779}"/>
               </a:ext>
             </a:extLst>
           </p:cNvPr>
@@ -28775,7 +28965,7 @@
           <p:cNvPr id="7" name="">
             <a:extLst xmlns:a="http://schemas.openxmlformats.org/drawingml/2006/main">
               <a:ext uri="{FF2B5EF4-FFF2-40B4-BE49-F238E27FC236}">
-                <a16:creationId xmlns:a16="http://schemas.microsoft.com/office/drawing/2014/main" id="{0AFBDBA0-EAC5-4FEE-8356-C8119F347CB3}"/>
+                <a16:creationId xmlns:a16="http://schemas.microsoft.com/office/drawing/2014/main" id="{6BBB215E-878D-449F-870B-55289BF5B7C0}"/>
               </a:ext>
             </a:extLst>
           </p:cNvPr>
@@ -28808,7 +28998,7 @@
           <p:cNvPr id="8" name="">
             <a:extLst xmlns:a="http://schemas.openxmlformats.org/drawingml/2006/main">
               <a:ext uri="{FF2B5EF4-FFF2-40B4-BE49-F238E27FC236}">
-                <a16:creationId xmlns:a16="http://schemas.microsoft.com/office/drawing/2014/main" id="{7AABEB04-996D-4F09-BC27-A4D0D0E1CD5D}"/>
+                <a16:creationId xmlns:a16="http://schemas.microsoft.com/office/drawing/2014/main" id="{0B68B5F6-3251-4F3E-BB33-AFF9ED3DB635}"/>
               </a:ext>
             </a:extLst>
           </p:cNvPr>
@@ -28841,7 +29031,7 @@
           <p:cNvPr id="9" name="">
             <a:extLst xmlns:a="http://schemas.openxmlformats.org/drawingml/2006/main">
               <a:ext uri="{FF2B5EF4-FFF2-40B4-BE49-F238E27FC236}">
-                <a16:creationId xmlns:a16="http://schemas.microsoft.com/office/drawing/2014/main" id="{F7F2970F-7E37-4D76-82A5-2099FC6FEE5B}"/>
+                <a16:creationId xmlns:a16="http://schemas.microsoft.com/office/drawing/2014/main" id="{73588E31-5522-46BC-A19F-C57E6A087C59}"/>
               </a:ext>
             </a:extLst>
           </p:cNvPr>
@@ -28874,7 +29064,7 @@
           <p:cNvPr id="10" name="">
             <a:extLst xmlns:a="http://schemas.openxmlformats.org/drawingml/2006/main">
               <a:ext uri="{FF2B5EF4-FFF2-40B4-BE49-F238E27FC236}">
-                <a16:creationId xmlns:a16="http://schemas.microsoft.com/office/drawing/2014/main" id="{3BB00E28-4B84-480B-98B3-C5089DC47888}"/>
+                <a16:creationId xmlns:a16="http://schemas.microsoft.com/office/drawing/2014/main" id="{E481727B-D656-41AA-B14D-95A272204AEF}"/>
               </a:ext>
             </a:extLst>
           </p:cNvPr>
@@ -28907,7 +29097,7 @@
           <p:cNvPr id="11" name="">
             <a:extLst xmlns:a="http://schemas.openxmlformats.org/drawingml/2006/main">
               <a:ext uri="{FF2B5EF4-FFF2-40B4-BE49-F238E27FC236}">
-                <a16:creationId xmlns:a16="http://schemas.microsoft.com/office/drawing/2014/main" id="{5642E17D-DCE7-4287-A3A5-172D95821B90}"/>
+                <a16:creationId xmlns:a16="http://schemas.microsoft.com/office/drawing/2014/main" id="{1B39E753-FD7F-4761-9EC5-24B2FAAFC4B6}"/>
               </a:ext>
             </a:extLst>
           </p:cNvPr>
@@ -28940,7 +29130,7 @@
           <p:cNvPr id="12" name="">
             <a:extLst xmlns:a="http://schemas.openxmlformats.org/drawingml/2006/main">
               <a:ext uri="{FF2B5EF4-FFF2-40B4-BE49-F238E27FC236}">
-                <a16:creationId xmlns:a16="http://schemas.microsoft.com/office/drawing/2014/main" id="{1E0D3C6D-C4EC-4215-8ED9-E2E537318B44}"/>
+                <a16:creationId xmlns:a16="http://schemas.microsoft.com/office/drawing/2014/main" id="{C9B4D407-F7CD-4342-A853-09EB28E93B29}"/>
               </a:ext>
             </a:extLst>
           </p:cNvPr>
@@ -28981,7 +29171,7 @@
           <p:cNvPr id="13" name="">
             <a:extLst xmlns:a="http://schemas.openxmlformats.org/drawingml/2006/main">
               <a:ext uri="{FF2B5EF4-FFF2-40B4-BE49-F238E27FC236}">
-                <a16:creationId xmlns:a16="http://schemas.microsoft.com/office/drawing/2014/main" id="{4FBFB534-8202-441B-AC9B-0BE194379640}"/>
+                <a16:creationId xmlns:a16="http://schemas.microsoft.com/office/drawing/2014/main" id="{86765EA6-03A6-407F-90F6-5A9F78E6EFB6}"/>
               </a:ext>
             </a:extLst>
           </p:cNvPr>
@@ -29070,7 +29260,7 @@
           <p:cNvPr id="14" name="">
             <a:extLst xmlns:a="http://schemas.openxmlformats.org/drawingml/2006/main">
               <a:ext uri="{FF2B5EF4-FFF2-40B4-BE49-F238E27FC236}">
-                <a16:creationId xmlns:a16="http://schemas.microsoft.com/office/drawing/2014/main" id="{B74F9380-66C7-4106-BBCF-4F7AE9521BF9}"/>
+                <a16:creationId xmlns:a16="http://schemas.microsoft.com/office/drawing/2014/main" id="{698843C1-96B1-4219-BCC8-40EAAEB238AA}"/>
               </a:ext>
             </a:extLst>
           </p:cNvPr>
@@ -29111,7 +29301,7 @@
           <p:cNvPr id="15" name="">
             <a:extLst xmlns:a="http://schemas.openxmlformats.org/drawingml/2006/main">
               <a:ext uri="{FF2B5EF4-FFF2-40B4-BE49-F238E27FC236}">
-                <a16:creationId xmlns:a16="http://schemas.microsoft.com/office/drawing/2014/main" id="{322907B9-6E21-4027-9B34-930462384B54}"/>
+                <a16:creationId xmlns:a16="http://schemas.microsoft.com/office/drawing/2014/main" id="{BBB5BBB9-96F2-4768-9ABB-112B7DB1722E}"/>
               </a:ext>
             </a:extLst>
           </p:cNvPr>
@@ -29200,7 +29390,7 @@
           <p:cNvPr id="16" name="">
             <a:extLst xmlns:a="http://schemas.openxmlformats.org/drawingml/2006/main">
               <a:ext uri="{FF2B5EF4-FFF2-40B4-BE49-F238E27FC236}">
-                <a16:creationId xmlns:a16="http://schemas.microsoft.com/office/drawing/2014/main" id="{C4469A69-3413-4547-BDA1-5E60B3BEF946}"/>
+                <a16:creationId xmlns:a16="http://schemas.microsoft.com/office/drawing/2014/main" id="{AC05B771-E31E-4D1E-80E8-0CB435E8AA4C}"/>
               </a:ext>
             </a:extLst>
           </p:cNvPr>
@@ -29241,7 +29431,7 @@
           <p:cNvPr id="17" name="">
             <a:extLst xmlns:a="http://schemas.openxmlformats.org/drawingml/2006/main">
               <a:ext uri="{FF2B5EF4-FFF2-40B4-BE49-F238E27FC236}">
-                <a16:creationId xmlns:a16="http://schemas.microsoft.com/office/drawing/2014/main" id="{E35C5C39-0CF7-423C-A55A-43CECD2B8C82}"/>
+                <a16:creationId xmlns:a16="http://schemas.microsoft.com/office/drawing/2014/main" id="{D50A7E47-7386-4AFC-90D6-FA0699C59C8F}"/>
               </a:ext>
             </a:extLst>
           </p:cNvPr>
@@ -29330,7 +29520,7 @@
           <p:cNvPr id="18" name="">
             <a:extLst xmlns:a="http://schemas.openxmlformats.org/drawingml/2006/main">
               <a:ext uri="{FF2B5EF4-FFF2-40B4-BE49-F238E27FC236}">
-                <a16:creationId xmlns:a16="http://schemas.microsoft.com/office/drawing/2014/main" id="{479FC204-7D8B-4E95-B88F-F29D8843FB84}"/>
+                <a16:creationId xmlns:a16="http://schemas.microsoft.com/office/drawing/2014/main" id="{5C568A19-F70A-4168-A33A-2AF93EC50E3B}"/>
               </a:ext>
             </a:extLst>
           </p:cNvPr>
@@ -29371,7 +29561,7 @@
           <p:cNvPr id="19" name="">
             <a:extLst xmlns:a="http://schemas.openxmlformats.org/drawingml/2006/main">
               <a:ext uri="{FF2B5EF4-FFF2-40B4-BE49-F238E27FC236}">
-                <a16:creationId xmlns:a16="http://schemas.microsoft.com/office/drawing/2014/main" id="{267A4C81-B6E6-408D-AAAB-2A59DBD58601}"/>
+                <a16:creationId xmlns:a16="http://schemas.microsoft.com/office/drawing/2014/main" id="{8646CA59-15CC-468A-ADCB-A2421030F69B}"/>
               </a:ext>
             </a:extLst>
           </p:cNvPr>
@@ -29460,7 +29650,7 @@
           <p:cNvPr id="20" name="">
             <a:extLst xmlns:a="http://schemas.openxmlformats.org/drawingml/2006/main">
               <a:ext uri="{FF2B5EF4-FFF2-40B4-BE49-F238E27FC236}">
-                <a16:creationId xmlns:a16="http://schemas.microsoft.com/office/drawing/2014/main" id="{578581A9-B47E-400C-B6C4-6441EEF58596}"/>
+                <a16:creationId xmlns:a16="http://schemas.microsoft.com/office/drawing/2014/main" id="{BD95CC0F-952D-45DD-A73C-482B12F36ED8}"/>
               </a:ext>
             </a:extLst>
           </p:cNvPr>
@@ -29501,7 +29691,7 @@
           <p:cNvPr id="21" name="">
             <a:extLst xmlns:a="http://schemas.openxmlformats.org/drawingml/2006/main">
               <a:ext uri="{FF2B5EF4-FFF2-40B4-BE49-F238E27FC236}">
-                <a16:creationId xmlns:a16="http://schemas.microsoft.com/office/drawing/2014/main" id="{04E03F2B-DEE8-47FB-9F8E-DA2D2C861A4E}"/>
+                <a16:creationId xmlns:a16="http://schemas.microsoft.com/office/drawing/2014/main" id="{0FC52E0B-C851-4B88-BDD4-B54B16456A53}"/>
               </a:ext>
             </a:extLst>
           </p:cNvPr>
@@ -29563,7 +29753,7 @@
           <p:cNvPr id="22" name="">
             <a:extLst xmlns:a="http://schemas.openxmlformats.org/drawingml/2006/main">
               <a:ext uri="{FF2B5EF4-FFF2-40B4-BE49-F238E27FC236}">
-                <a16:creationId xmlns:a16="http://schemas.microsoft.com/office/drawing/2014/main" id="{E0711A76-8EFC-4164-9822-4B6F534E48AC}"/>
+                <a16:creationId xmlns:a16="http://schemas.microsoft.com/office/drawing/2014/main" id="{DF9D4BE0-698C-4901-B6FF-3A5A51797150}"/>
               </a:ext>
             </a:extLst>
           </p:cNvPr>
@@ -29604,7 +29794,7 @@
           <p:cNvPr id="23" name="">
             <a:extLst xmlns:a="http://schemas.openxmlformats.org/drawingml/2006/main">
               <a:ext uri="{FF2B5EF4-FFF2-40B4-BE49-F238E27FC236}">
-                <a16:creationId xmlns:a16="http://schemas.microsoft.com/office/drawing/2014/main" id="{027A65C6-0B3C-42EC-84B5-1B1F5F0A6733}"/>
+                <a16:creationId xmlns:a16="http://schemas.microsoft.com/office/drawing/2014/main" id="{ACF28C9C-BA8D-4117-8C93-09FA3B4E01CD}"/>
               </a:ext>
             </a:extLst>
           </p:cNvPr>
@@ -29666,7 +29856,7 @@
           <p:cNvPr id="24" name="">
             <a:extLst xmlns:a="http://schemas.openxmlformats.org/drawingml/2006/main">
               <a:ext uri="{FF2B5EF4-FFF2-40B4-BE49-F238E27FC236}">
-                <a16:creationId xmlns:a16="http://schemas.microsoft.com/office/drawing/2014/main" id="{B5C24761-FC66-42CC-BDCB-4CF98F7B80C9}"/>
+                <a16:creationId xmlns:a16="http://schemas.microsoft.com/office/drawing/2014/main" id="{66E993D2-ADC0-4F3C-AC25-34340AB6FCC5}"/>
               </a:ext>
             </a:extLst>
           </p:cNvPr>
@@ -29707,7 +29897,7 @@
           <p:cNvPr id="25" name="">
             <a:extLst xmlns:a="http://schemas.openxmlformats.org/drawingml/2006/main">
               <a:ext uri="{FF2B5EF4-FFF2-40B4-BE49-F238E27FC236}">
-                <a16:creationId xmlns:a16="http://schemas.microsoft.com/office/drawing/2014/main" id="{8767E870-CC4B-443F-B097-979E4D7BE96C}"/>
+                <a16:creationId xmlns:a16="http://schemas.microsoft.com/office/drawing/2014/main" id="{16C79D40-BE64-4074-9780-DB1D408A4A1C}"/>
               </a:ext>
             </a:extLst>
           </p:cNvPr>
@@ -29796,7 +29986,7 @@
           <p:cNvPr id="26" name="">
             <a:extLst xmlns:a="http://schemas.openxmlformats.org/drawingml/2006/main">
               <a:ext uri="{FF2B5EF4-FFF2-40B4-BE49-F238E27FC236}">
-                <a16:creationId xmlns:a16="http://schemas.microsoft.com/office/drawing/2014/main" id="{53A74203-B703-49EE-8583-D5F05C604CDD}"/>
+                <a16:creationId xmlns:a16="http://schemas.microsoft.com/office/drawing/2014/main" id="{B64FABE0-4803-4BB5-B966-97B18209818B}"/>
               </a:ext>
             </a:extLst>
           </p:cNvPr>
@@ -29837,7 +30027,7 @@
           <p:cNvPr id="27" name="">
             <a:extLst xmlns:a="http://schemas.openxmlformats.org/drawingml/2006/main">
               <a:ext uri="{FF2B5EF4-FFF2-40B4-BE49-F238E27FC236}">
-                <a16:creationId xmlns:a16="http://schemas.microsoft.com/office/drawing/2014/main" id="{6D97DFCA-E10B-4EBD-BFCD-D4C4362805E9}"/>
+                <a16:creationId xmlns:a16="http://schemas.microsoft.com/office/drawing/2014/main" id="{8B92D1E3-2448-4366-AE5F-938D6874E940}"/>
               </a:ext>
             </a:extLst>
           </p:cNvPr>
@@ -29926,7 +30116,7 @@
           <p:cNvPr id="28" name="">
             <a:extLst xmlns:a="http://schemas.openxmlformats.org/drawingml/2006/main">
               <a:ext uri="{FF2B5EF4-FFF2-40B4-BE49-F238E27FC236}">
-                <a16:creationId xmlns:a16="http://schemas.microsoft.com/office/drawing/2014/main" id="{7CA442C7-27AF-4019-8565-895BB8BE2641}"/>
+                <a16:creationId xmlns:a16="http://schemas.microsoft.com/office/drawing/2014/main" id="{C42EF577-4319-4EB4-9FF6-8EE900C19FD3}"/>
               </a:ext>
             </a:extLst>
           </p:cNvPr>
@@ -29959,7 +30149,7 @@
           <p:cNvPr id="29" name="">
             <a:extLst xmlns:a="http://schemas.openxmlformats.org/drawingml/2006/main">
               <a:ext uri="{FF2B5EF4-FFF2-40B4-BE49-F238E27FC236}">
-                <a16:creationId xmlns:a16="http://schemas.microsoft.com/office/drawing/2014/main" id="{71E78E9E-FE62-4835-951C-E2914EF5BFE2}"/>
+                <a16:creationId xmlns:a16="http://schemas.microsoft.com/office/drawing/2014/main" id="{1AEDDAC2-270A-49F4-9689-BAEFAA5AC2FE}"/>
               </a:ext>
             </a:extLst>
           </p:cNvPr>
@@ -30021,7 +30211,7 @@
           <p:cNvPr id="30" name="">
             <a:extLst xmlns:a="http://schemas.openxmlformats.org/drawingml/2006/main">
               <a:ext uri="{FF2B5EF4-FFF2-40B4-BE49-F238E27FC236}">
-                <a16:creationId xmlns:a16="http://schemas.microsoft.com/office/drawing/2014/main" id="{91048171-EBBF-42FD-9380-1BFC298E3246}"/>
+                <a16:creationId xmlns:a16="http://schemas.microsoft.com/office/drawing/2014/main" id="{B81ED964-AF3E-4029-B62D-D7389E5EADA8}"/>
               </a:ext>
             </a:extLst>
           </p:cNvPr>
@@ -30054,7 +30244,7 @@
           <p:cNvPr id="31" name="">
             <a:extLst xmlns:a="http://schemas.openxmlformats.org/drawingml/2006/main">
               <a:ext uri="{FF2B5EF4-FFF2-40B4-BE49-F238E27FC236}">
-                <a16:creationId xmlns:a16="http://schemas.microsoft.com/office/drawing/2014/main" id="{3D144B1B-B169-40C1-8551-E69F9DB68A3E}"/>
+                <a16:creationId xmlns:a16="http://schemas.microsoft.com/office/drawing/2014/main" id="{A9783702-3895-4F7B-B951-31886442B773}"/>
               </a:ext>
             </a:extLst>
           </p:cNvPr>
@@ -30116,7 +30306,7 @@
           <p:cNvPr id="32" name="">
             <a:extLst xmlns:a="http://schemas.openxmlformats.org/drawingml/2006/main">
               <a:ext uri="{FF2B5EF4-FFF2-40B4-BE49-F238E27FC236}">
-                <a16:creationId xmlns:a16="http://schemas.microsoft.com/office/drawing/2014/main" id="{15DB8845-8DFD-47A3-A542-B6FBEDCB08A6}"/>
+                <a16:creationId xmlns:a16="http://schemas.microsoft.com/office/drawing/2014/main" id="{AF9E0680-8D55-4504-9450-BB8C6B13EE0A}"/>
               </a:ext>
             </a:extLst>
           </p:cNvPr>
@@ -30149,7 +30339,7 @@
           <p:cNvPr id="33" name="">
             <a:extLst xmlns:a="http://schemas.openxmlformats.org/drawingml/2006/main">
               <a:ext uri="{FF2B5EF4-FFF2-40B4-BE49-F238E27FC236}">
-                <a16:creationId xmlns:a16="http://schemas.microsoft.com/office/drawing/2014/main" id="{C49835BF-0EC2-4D9B-969F-B6BB70A3829B}"/>
+                <a16:creationId xmlns:a16="http://schemas.microsoft.com/office/drawing/2014/main" id="{702572F9-C5C2-404F-AAD3-6E2287D470DB}"/>
               </a:ext>
             </a:extLst>
           </p:cNvPr>
@@ -30211,7 +30401,7 @@
           <p:cNvPr id="34" name="">
             <a:extLst xmlns:a="http://schemas.openxmlformats.org/drawingml/2006/main">
               <a:ext uri="{FF2B5EF4-FFF2-40B4-BE49-F238E27FC236}">
-                <a16:creationId xmlns:a16="http://schemas.microsoft.com/office/drawing/2014/main" id="{F0992114-3756-4015-B432-2A7C6CC3A856}"/>
+                <a16:creationId xmlns:a16="http://schemas.microsoft.com/office/drawing/2014/main" id="{CB359EF3-9A97-46FF-B6B9-6EABA4C51BF7}"/>
               </a:ext>
             </a:extLst>
           </p:cNvPr>
@@ -30273,7 +30463,7 @@
           <p:cNvPr id="35" name="">
             <a:extLst xmlns:a="http://schemas.openxmlformats.org/drawingml/2006/main">
               <a:ext uri="{FF2B5EF4-FFF2-40B4-BE49-F238E27FC236}">
-                <a16:creationId xmlns:a16="http://schemas.microsoft.com/office/drawing/2014/main" id="{246B2A58-27E1-433A-9829-53F1353C968A}"/>
+                <a16:creationId xmlns:a16="http://schemas.microsoft.com/office/drawing/2014/main" id="{6061AF45-0C9B-450C-8357-9B7F7C49CC1B}"/>
               </a:ext>
             </a:extLst>
           </p:cNvPr>
@@ -30304,7 +30494,7 @@
           <p:cNvPr id="36" name="">
             <a:extLst xmlns:a="http://schemas.openxmlformats.org/drawingml/2006/main">
               <a:ext uri="{FF2B5EF4-FFF2-40B4-BE49-F238E27FC236}">
-                <a16:creationId xmlns:a16="http://schemas.microsoft.com/office/drawing/2014/main" id="{551E30BF-2CCB-414A-AE63-B1681B2ADD7F}"/>
+                <a16:creationId xmlns:a16="http://schemas.microsoft.com/office/drawing/2014/main" id="{8BED2295-4A1F-46E8-B670-4E9F5251E20E}"/>
               </a:ext>
             </a:extLst>
           </p:cNvPr>
@@ -30366,7 +30556,7 @@
           <p:cNvPr id="37" name="">
             <a:extLst xmlns:a="http://schemas.openxmlformats.org/drawingml/2006/main">
               <a:ext uri="{FF2B5EF4-FFF2-40B4-BE49-F238E27FC236}">
-                <a16:creationId xmlns:a16="http://schemas.microsoft.com/office/drawing/2014/main" id="{176C3EEC-43A4-4162-9CE9-F749CF7ECEEE}"/>
+                <a16:creationId xmlns:a16="http://schemas.microsoft.com/office/drawing/2014/main" id="{DA7E6D7A-D6E6-405E-9F05-E2CBF008AE72}"/>
               </a:ext>
             </a:extLst>
           </p:cNvPr>
@@ -30426,7 +30616,7 @@
     </p:spTree>
     <p:extLst>
       <p:ext uri="{BB962C8B-B14F-4D97-AF65-F5344CB8AC3E}">
-        <p14:creationId xmlns:p14="http://schemas.microsoft.com/office/powerpoint/2010/main" val="769679392"/>
+        <p14:creationId xmlns:p14="http://schemas.microsoft.com/office/powerpoint/2010/main" val="1051741254"/>
       </p:ext>
     </p:extLst>
   </p:cSld>
@@ -30457,7 +30647,7 @@
           <p:cNvPr id="1" name="">
             <a:extLst xmlns:a="http://schemas.openxmlformats.org/drawingml/2006/main">
               <a:ext uri="{FF2B5EF4-FFF2-40B4-BE49-F238E27FC236}">
-                <a16:creationId xmlns:a16="http://schemas.microsoft.com/office/drawing/2014/main" id="{C518276B-A772-44F4-922D-1C23C66C53E4}"/>
+                <a16:creationId xmlns:a16="http://schemas.microsoft.com/office/drawing/2014/main" id="{767E3E87-7BF9-48B1-AB48-9AF8AFBAC66A}"/>
               </a:ext>
             </a:extLst>
           </p:cNvPr>
@@ -30519,7 +30709,7 @@
           <p:cNvPr id="2" name="">
             <a:extLst xmlns:a="http://schemas.openxmlformats.org/drawingml/2006/main">
               <a:ext uri="{FF2B5EF4-FFF2-40B4-BE49-F238E27FC236}">
-                <a16:creationId xmlns:a16="http://schemas.microsoft.com/office/drawing/2014/main" id="{3C99F368-8363-4020-8041-F6548A32E20B}"/>
+                <a16:creationId xmlns:a16="http://schemas.microsoft.com/office/drawing/2014/main" id="{A1DCEE9D-2DB4-44BA-B047-F65369F32DDE}"/>
               </a:ext>
             </a:extLst>
           </p:cNvPr>
@@ -30585,7 +30775,7 @@
           <p:nvPr/>
         </p:nvPicPr>
         <p:blipFill>
-          <a:blip xmlns:r="http://schemas.openxmlformats.org/officeDocument/2006/relationships" xmlns:a="http://schemas.openxmlformats.org/drawingml/2006/main" r:embed="Rcd4620daae174afa"/>
+          <a:blip xmlns:r="http://schemas.openxmlformats.org/officeDocument/2006/relationships" xmlns:a="http://schemas.openxmlformats.org/drawingml/2006/main" r:embed="R8730c03d03424183"/>
           <a:stretch xmlns:a="http://schemas.openxmlformats.org/drawingml/2006/main"/>
         </p:blipFill>
         <p:spPr>
@@ -30605,7 +30795,7 @@
           <p:cNvPr id="4" name="">
             <a:extLst xmlns:a="http://schemas.openxmlformats.org/drawingml/2006/main">
               <a:ext uri="{FF2B5EF4-FFF2-40B4-BE49-F238E27FC236}">
-                <a16:creationId xmlns:a16="http://schemas.microsoft.com/office/drawing/2014/main" id="{CC79D06F-15C6-4097-97E5-2B7B51C0B97C}"/>
+                <a16:creationId xmlns:a16="http://schemas.microsoft.com/office/drawing/2014/main" id="{67164145-C050-424D-A847-33D5CD2C8257}"/>
               </a:ext>
             </a:extLst>
           </p:cNvPr>
@@ -30646,7 +30836,7 @@
           <p:cNvPr id="5" name="">
             <a:extLst xmlns:a="http://schemas.openxmlformats.org/drawingml/2006/main">
               <a:ext uri="{FF2B5EF4-FFF2-40B4-BE49-F238E27FC236}">
-                <a16:creationId xmlns:a16="http://schemas.microsoft.com/office/drawing/2014/main" id="{F2D12979-92E3-4C2E-B217-0A12A71A29C8}"/>
+                <a16:creationId xmlns:a16="http://schemas.microsoft.com/office/drawing/2014/main" id="{E8CE3F45-5A06-46B2-A41E-18DDC50CFFD4}"/>
               </a:ext>
             </a:extLst>
           </p:cNvPr>
@@ -30708,7 +30898,7 @@
           <p:cNvPr id="6" name="">
             <a:extLst xmlns:a="http://schemas.openxmlformats.org/drawingml/2006/main">
               <a:ext uri="{FF2B5EF4-FFF2-40B4-BE49-F238E27FC236}">
-                <a16:creationId xmlns:a16="http://schemas.microsoft.com/office/drawing/2014/main" id="{CFA62C90-8740-4FE0-8EC1-42BBC98D0D22}"/>
+                <a16:creationId xmlns:a16="http://schemas.microsoft.com/office/drawing/2014/main" id="{50F4A270-EB0B-466F-B881-EC327515D23D}"/>
               </a:ext>
             </a:extLst>
           </p:cNvPr>
@@ -30878,7 +31068,7 @@
           <p:cNvPr id="7" name="">
             <a:extLst xmlns:a="http://schemas.openxmlformats.org/drawingml/2006/main">
               <a:ext uri="{FF2B5EF4-FFF2-40B4-BE49-F238E27FC236}">
-                <a16:creationId xmlns:a16="http://schemas.microsoft.com/office/drawing/2014/main" id="{0817C482-1E06-4D2F-9174-3BA2D141A891}"/>
+                <a16:creationId xmlns:a16="http://schemas.microsoft.com/office/drawing/2014/main" id="{7DA2C476-1A0F-4CDB-91E2-86DDBD2059A9}"/>
               </a:ext>
             </a:extLst>
           </p:cNvPr>
@@ -30919,7 +31109,7 @@
           <p:cNvPr id="8" name="">
             <a:extLst xmlns:a="http://schemas.openxmlformats.org/drawingml/2006/main">
               <a:ext uri="{FF2B5EF4-FFF2-40B4-BE49-F238E27FC236}">
-                <a16:creationId xmlns:a16="http://schemas.microsoft.com/office/drawing/2014/main" id="{ECDF5F35-E878-4775-A8BF-22E9E2AF2A3A}"/>
+                <a16:creationId xmlns:a16="http://schemas.microsoft.com/office/drawing/2014/main" id="{C33E20BE-D936-4953-8599-DB89A7703134}"/>
               </a:ext>
             </a:extLst>
           </p:cNvPr>
@@ -30981,7 +31171,7 @@
           <p:cNvPr id="9" name="">
             <a:extLst xmlns:a="http://schemas.openxmlformats.org/drawingml/2006/main">
               <a:ext uri="{FF2B5EF4-FFF2-40B4-BE49-F238E27FC236}">
-                <a16:creationId xmlns:a16="http://schemas.microsoft.com/office/drawing/2014/main" id="{B41FC300-B350-4A21-85A1-716BAADA4569}"/>
+                <a16:creationId xmlns:a16="http://schemas.microsoft.com/office/drawing/2014/main" id="{9F315896-D8A8-4F55-B47C-078C39D84280}"/>
               </a:ext>
             </a:extLst>
           </p:cNvPr>
@@ -31070,7 +31260,7 @@
           <p:cNvPr id="10" name="">
             <a:extLst xmlns:a="http://schemas.openxmlformats.org/drawingml/2006/main">
               <a:ext uri="{FF2B5EF4-FFF2-40B4-BE49-F238E27FC236}">
-                <a16:creationId xmlns:a16="http://schemas.microsoft.com/office/drawing/2014/main" id="{34D3B9DD-9E15-4391-BDF9-143022952B83}"/>
+                <a16:creationId xmlns:a16="http://schemas.microsoft.com/office/drawing/2014/main" id="{9EC57A89-24FE-41A3-855F-BC3B3BF97606}"/>
               </a:ext>
             </a:extLst>
           </p:cNvPr>
@@ -31132,7 +31322,7 @@
           <p:cNvPr id="11" name="">
             <a:extLst xmlns:a="http://schemas.openxmlformats.org/drawingml/2006/main">
               <a:ext uri="{FF2B5EF4-FFF2-40B4-BE49-F238E27FC236}">
-                <a16:creationId xmlns:a16="http://schemas.microsoft.com/office/drawing/2014/main" id="{A8695180-F33D-4B4E-95AC-26A1624FA8CD}"/>
+                <a16:creationId xmlns:a16="http://schemas.microsoft.com/office/drawing/2014/main" id="{9E483B00-209F-4ED8-A2F8-C8F2E67A683D}"/>
               </a:ext>
             </a:extLst>
           </p:cNvPr>
@@ -31163,7 +31353,7 @@
           <p:cNvPr id="12" name="">
             <a:extLst xmlns:a="http://schemas.openxmlformats.org/drawingml/2006/main">
               <a:ext uri="{FF2B5EF4-FFF2-40B4-BE49-F238E27FC236}">
-                <a16:creationId xmlns:a16="http://schemas.microsoft.com/office/drawing/2014/main" id="{B9304ABA-2496-4FDE-B864-2431E4827B71}"/>
+                <a16:creationId xmlns:a16="http://schemas.microsoft.com/office/drawing/2014/main" id="{A14DBB69-33A4-47E9-B64C-E8AFADCD98B5}"/>
               </a:ext>
             </a:extLst>
           </p:cNvPr>
@@ -31225,7 +31415,7 @@
           <p:cNvPr id="13" name="">
             <a:extLst xmlns:a="http://schemas.openxmlformats.org/drawingml/2006/main">
               <a:ext uri="{FF2B5EF4-FFF2-40B4-BE49-F238E27FC236}">
-                <a16:creationId xmlns:a16="http://schemas.microsoft.com/office/drawing/2014/main" id="{0A49F719-FAD3-426A-8B99-35683ECD4497}"/>
+                <a16:creationId xmlns:a16="http://schemas.microsoft.com/office/drawing/2014/main" id="{271B05FA-8B43-4585-AD42-46A49415F2DF}"/>
               </a:ext>
             </a:extLst>
           </p:cNvPr>
@@ -31285,7 +31475,7 @@
     </p:spTree>
     <p:extLst>
       <p:ext uri="{BB962C8B-B14F-4D97-AF65-F5344CB8AC3E}">
-        <p14:creationId xmlns:p14="http://schemas.microsoft.com/office/powerpoint/2010/main" val="224286350"/>
+        <p14:creationId xmlns:p14="http://schemas.microsoft.com/office/powerpoint/2010/main" val="1421958647"/>
       </p:ext>
     </p:extLst>
   </p:cSld>
@@ -31316,7 +31506,7 @@
           <p:cNvPr id="1" name="">
             <a:extLst xmlns:a="http://schemas.openxmlformats.org/drawingml/2006/main">
               <a:ext uri="{FF2B5EF4-FFF2-40B4-BE49-F238E27FC236}">
-                <a16:creationId xmlns:a16="http://schemas.microsoft.com/office/drawing/2014/main" id="{A2823EC8-7A28-4C8C-BA5C-11131FDD1FB3}"/>
+                <a16:creationId xmlns:a16="http://schemas.microsoft.com/office/drawing/2014/main" id="{AE3C7F14-FD54-499E-AD13-98D29C0E62F7}"/>
               </a:ext>
             </a:extLst>
           </p:cNvPr>
@@ -31378,7 +31568,7 @@
           <p:cNvPr id="2" name="">
             <a:extLst xmlns:a="http://schemas.openxmlformats.org/drawingml/2006/main">
               <a:ext uri="{FF2B5EF4-FFF2-40B4-BE49-F238E27FC236}">
-                <a16:creationId xmlns:a16="http://schemas.microsoft.com/office/drawing/2014/main" id="{B6075172-070A-4F4C-95C3-6FB384617190}"/>
+                <a16:creationId xmlns:a16="http://schemas.microsoft.com/office/drawing/2014/main" id="{F3F02D1E-785C-43DF-9312-9F4BBFA2000C}"/>
               </a:ext>
             </a:extLst>
           </p:cNvPr>
@@ -31444,7 +31634,7 @@
           <p:nvPr/>
         </p:nvPicPr>
         <p:blipFill>
-          <a:blip xmlns:r="http://schemas.openxmlformats.org/officeDocument/2006/relationships" xmlns:a="http://schemas.openxmlformats.org/drawingml/2006/main" r:embed="R06d3d573b3bf4a26"/>
+          <a:blip xmlns:r="http://schemas.openxmlformats.org/officeDocument/2006/relationships" xmlns:a="http://schemas.openxmlformats.org/drawingml/2006/main" r:embed="Rbe3c2dfe73744fcc"/>
           <a:stretch xmlns:a="http://schemas.openxmlformats.org/drawingml/2006/main"/>
         </p:blipFill>
         <p:spPr>
@@ -31468,7 +31658,7 @@
           <p:nvPr/>
         </p:nvPicPr>
         <p:blipFill>
-          <a:blip xmlns:r="http://schemas.openxmlformats.org/officeDocument/2006/relationships" xmlns:a="http://schemas.openxmlformats.org/drawingml/2006/main" r:embed="R5870e9b2bfe848d8"/>
+          <a:blip xmlns:r="http://schemas.openxmlformats.org/officeDocument/2006/relationships" xmlns:a="http://schemas.openxmlformats.org/drawingml/2006/main" r:embed="R1cfbe9b3cc77485a"/>
           <a:stretch xmlns:a="http://schemas.openxmlformats.org/drawingml/2006/main"/>
         </p:blipFill>
         <p:spPr>
@@ -31492,7 +31682,7 @@
           <p:nvPr/>
         </p:nvPicPr>
         <p:blipFill>
-          <a:blip xmlns:r="http://schemas.openxmlformats.org/officeDocument/2006/relationships" xmlns:a="http://schemas.openxmlformats.org/drawingml/2006/main" r:embed="R2453b9ba36994115"/>
+          <a:blip xmlns:r="http://schemas.openxmlformats.org/officeDocument/2006/relationships" xmlns:a="http://schemas.openxmlformats.org/drawingml/2006/main" r:embed="Ra0f3490347de46f0"/>
           <a:stretch xmlns:a="http://schemas.openxmlformats.org/drawingml/2006/main"/>
         </p:blipFill>
         <p:spPr>
@@ -31512,7 +31702,7 @@
           <p:cNvPr id="6" name="">
             <a:extLst xmlns:a="http://schemas.openxmlformats.org/drawingml/2006/main">
               <a:ext uri="{FF2B5EF4-FFF2-40B4-BE49-F238E27FC236}">
-                <a16:creationId xmlns:a16="http://schemas.microsoft.com/office/drawing/2014/main" id="{EA7F2B42-BFFE-4697-B56B-825C19FC1429}"/>
+                <a16:creationId xmlns:a16="http://schemas.microsoft.com/office/drawing/2014/main" id="{5B7B9BC8-D95A-4A93-8243-12AF3324E6C8}"/>
               </a:ext>
             </a:extLst>
           </p:cNvPr>
@@ -31553,7 +31743,7 @@
           <p:cNvPr id="7" name="">
             <a:extLst xmlns:a="http://schemas.openxmlformats.org/drawingml/2006/main">
               <a:ext uri="{FF2B5EF4-FFF2-40B4-BE49-F238E27FC236}">
-                <a16:creationId xmlns:a16="http://schemas.microsoft.com/office/drawing/2014/main" id="{4B9A8FC5-DEA2-4E62-B368-815742089E91}"/>
+                <a16:creationId xmlns:a16="http://schemas.microsoft.com/office/drawing/2014/main" id="{B6E5CCB2-9D1D-4C77-BE14-4302604B13A9}"/>
               </a:ext>
             </a:extLst>
           </p:cNvPr>
@@ -31615,7 +31805,7 @@
           <p:cNvPr id="8" name="">
             <a:extLst xmlns:a="http://schemas.openxmlformats.org/drawingml/2006/main">
               <a:ext uri="{FF2B5EF4-FFF2-40B4-BE49-F238E27FC236}">
-                <a16:creationId xmlns:a16="http://schemas.microsoft.com/office/drawing/2014/main" id="{A748BCC7-2A83-4BCC-9713-4081DA7F25EE}"/>
+                <a16:creationId xmlns:a16="http://schemas.microsoft.com/office/drawing/2014/main" id="{CBD477DC-9513-4F5A-B0BD-3B0C16210DE2}"/>
               </a:ext>
             </a:extLst>
           </p:cNvPr>
@@ -31677,7 +31867,7 @@
           <p:cNvPr id="9" name="">
             <a:extLst xmlns:a="http://schemas.openxmlformats.org/drawingml/2006/main">
               <a:ext uri="{FF2B5EF4-FFF2-40B4-BE49-F238E27FC236}">
-                <a16:creationId xmlns:a16="http://schemas.microsoft.com/office/drawing/2014/main" id="{5A4DF5C9-66BE-49D0-B38E-CBF571BCAD1A}"/>
+                <a16:creationId xmlns:a16="http://schemas.microsoft.com/office/drawing/2014/main" id="{39EBD326-65FD-4958-9E59-6D40BCEA0ACB}"/>
               </a:ext>
             </a:extLst>
           </p:cNvPr>
@@ -31718,7 +31908,7 @@
           <p:cNvPr id="10" name="">
             <a:extLst xmlns:a="http://schemas.openxmlformats.org/drawingml/2006/main">
               <a:ext uri="{FF2B5EF4-FFF2-40B4-BE49-F238E27FC236}">
-                <a16:creationId xmlns:a16="http://schemas.microsoft.com/office/drawing/2014/main" id="{01310DD4-5918-4395-8E4B-E7AF67A2664A}"/>
+                <a16:creationId xmlns:a16="http://schemas.microsoft.com/office/drawing/2014/main" id="{AECD43F7-63FC-4EC5-B794-AD87A02F7947}"/>
               </a:ext>
             </a:extLst>
           </p:cNvPr>
@@ -31780,7 +31970,7 @@
           <p:cNvPr id="11" name="">
             <a:extLst xmlns:a="http://schemas.openxmlformats.org/drawingml/2006/main">
               <a:ext uri="{FF2B5EF4-FFF2-40B4-BE49-F238E27FC236}">
-                <a16:creationId xmlns:a16="http://schemas.microsoft.com/office/drawing/2014/main" id="{9728D438-2C4B-4617-8798-F60AB4673FB1}"/>
+                <a16:creationId xmlns:a16="http://schemas.microsoft.com/office/drawing/2014/main" id="{3185AA8E-750D-4172-B2B3-7D14A9FD169A}"/>
               </a:ext>
             </a:extLst>
           </p:cNvPr>
@@ -31842,7 +32032,7 @@
           <p:cNvPr id="12" name="">
             <a:extLst xmlns:a="http://schemas.openxmlformats.org/drawingml/2006/main">
               <a:ext uri="{FF2B5EF4-FFF2-40B4-BE49-F238E27FC236}">
-                <a16:creationId xmlns:a16="http://schemas.microsoft.com/office/drawing/2014/main" id="{921FA0AB-67F0-488A-B623-CA4DAA66D53D}"/>
+                <a16:creationId xmlns:a16="http://schemas.microsoft.com/office/drawing/2014/main" id="{77EC689F-A6B7-4805-A57D-881B28943F83}"/>
               </a:ext>
             </a:extLst>
           </p:cNvPr>
@@ -31883,7 +32073,7 @@
           <p:cNvPr id="13" name="">
             <a:extLst xmlns:a="http://schemas.openxmlformats.org/drawingml/2006/main">
               <a:ext uri="{FF2B5EF4-FFF2-40B4-BE49-F238E27FC236}">
-                <a16:creationId xmlns:a16="http://schemas.microsoft.com/office/drawing/2014/main" id="{2F9F2F9E-3D83-4BBD-822E-FB92329CBFBA}"/>
+                <a16:creationId xmlns:a16="http://schemas.microsoft.com/office/drawing/2014/main" id="{DE1A26A6-4E9C-4998-BB13-C12971DA8D8B}"/>
               </a:ext>
             </a:extLst>
           </p:cNvPr>
@@ -31945,7 +32135,7 @@
           <p:cNvPr id="14" name="">
             <a:extLst xmlns:a="http://schemas.openxmlformats.org/drawingml/2006/main">
               <a:ext uri="{FF2B5EF4-FFF2-40B4-BE49-F238E27FC236}">
-                <a16:creationId xmlns:a16="http://schemas.microsoft.com/office/drawing/2014/main" id="{9C9B62C5-AD8A-4FDF-A7AF-57F66D9E1205}"/>
+                <a16:creationId xmlns:a16="http://schemas.microsoft.com/office/drawing/2014/main" id="{8CF5A0AC-8E22-4C3B-A159-73C2E7DCB1A6}"/>
               </a:ext>
             </a:extLst>
           </p:cNvPr>
@@ -32007,7 +32197,7 @@
           <p:cNvPr id="15" name="">
             <a:extLst xmlns:a="http://schemas.openxmlformats.org/drawingml/2006/main">
               <a:ext uri="{FF2B5EF4-FFF2-40B4-BE49-F238E27FC236}">
-                <a16:creationId xmlns:a16="http://schemas.microsoft.com/office/drawing/2014/main" id="{EC0C892E-99DD-408D-97F9-02C4D1FFEF10}"/>
+                <a16:creationId xmlns:a16="http://schemas.microsoft.com/office/drawing/2014/main" id="{FAAD8E7E-4D52-46E4-AD33-67D60F02DB4A}"/>
               </a:ext>
             </a:extLst>
           </p:cNvPr>
@@ -32069,7 +32259,7 @@
           <p:cNvPr id="16" name="">
             <a:extLst xmlns:a="http://schemas.openxmlformats.org/drawingml/2006/main">
               <a:ext uri="{FF2B5EF4-FFF2-40B4-BE49-F238E27FC236}">
-                <a16:creationId xmlns:a16="http://schemas.microsoft.com/office/drawing/2014/main" id="{763EDABB-5E51-4B53-9046-9177B1DC4E68}"/>
+                <a16:creationId xmlns:a16="http://schemas.microsoft.com/office/drawing/2014/main" id="{88DC8DE6-F232-4EA4-A958-510FC119A20D}"/>
               </a:ext>
             </a:extLst>
           </p:cNvPr>
@@ -32100,7 +32290,7 @@
           <p:cNvPr id="17" name="">
             <a:extLst xmlns:a="http://schemas.openxmlformats.org/drawingml/2006/main">
               <a:ext uri="{FF2B5EF4-FFF2-40B4-BE49-F238E27FC236}">
-                <a16:creationId xmlns:a16="http://schemas.microsoft.com/office/drawing/2014/main" id="{52228069-81EC-404A-82ED-7A63A421C633}"/>
+                <a16:creationId xmlns:a16="http://schemas.microsoft.com/office/drawing/2014/main" id="{A75C93F3-C63C-4F0D-B188-BE2FBEC6E376}"/>
               </a:ext>
             </a:extLst>
           </p:cNvPr>
@@ -32162,7 +32352,7 @@
           <p:cNvPr id="18" name="">
             <a:extLst xmlns:a="http://schemas.openxmlformats.org/drawingml/2006/main">
               <a:ext uri="{FF2B5EF4-FFF2-40B4-BE49-F238E27FC236}">
-                <a16:creationId xmlns:a16="http://schemas.microsoft.com/office/drawing/2014/main" id="{6AD494E9-CC72-41C3-B4BC-EC34F3C73DF3}"/>
+                <a16:creationId xmlns:a16="http://schemas.microsoft.com/office/drawing/2014/main" id="{581C45B9-64C8-4C8A-801C-13B5E11C61D9}"/>
               </a:ext>
             </a:extLst>
           </p:cNvPr>
@@ -32222,7 +32412,7 @@
     </p:spTree>
     <p:extLst>
       <p:ext uri="{BB962C8B-B14F-4D97-AF65-F5344CB8AC3E}">
-        <p14:creationId xmlns:p14="http://schemas.microsoft.com/office/powerpoint/2010/main" val="1361147106"/>
+        <p14:creationId xmlns:p14="http://schemas.microsoft.com/office/powerpoint/2010/main" val="1358800244"/>
       </p:ext>
     </p:extLst>
   </p:cSld>
@@ -32253,7 +32443,7 @@
           <p:cNvPr id="1" name="">
             <a:extLst xmlns:a="http://schemas.openxmlformats.org/drawingml/2006/main">
               <a:ext uri="{FF2B5EF4-FFF2-40B4-BE49-F238E27FC236}">
-                <a16:creationId xmlns:a16="http://schemas.microsoft.com/office/drawing/2014/main" id="{1F5829D5-1230-4B19-906C-346B813909A2}"/>
+                <a16:creationId xmlns:a16="http://schemas.microsoft.com/office/drawing/2014/main" id="{7069ADFB-E709-4C31-A7FD-C252088B7B3E}"/>
               </a:ext>
             </a:extLst>
           </p:cNvPr>
@@ -32315,7 +32505,7 @@
           <p:cNvPr id="2" name="">
             <a:extLst xmlns:a="http://schemas.openxmlformats.org/drawingml/2006/main">
               <a:ext uri="{FF2B5EF4-FFF2-40B4-BE49-F238E27FC236}">
-                <a16:creationId xmlns:a16="http://schemas.microsoft.com/office/drawing/2014/main" id="{38F71F45-594F-47CF-AB72-05989E944D19}"/>
+                <a16:creationId xmlns:a16="http://schemas.microsoft.com/office/drawing/2014/main" id="{43893F95-5D81-4E10-846B-EC3D6A2B2C93}"/>
               </a:ext>
             </a:extLst>
           </p:cNvPr>
@@ -32377,7 +32567,7 @@
           <p:cNvPr id="3" name="">
             <a:extLst xmlns:a="http://schemas.openxmlformats.org/drawingml/2006/main">
               <a:ext uri="{FF2B5EF4-FFF2-40B4-BE49-F238E27FC236}">
-                <a16:creationId xmlns:a16="http://schemas.microsoft.com/office/drawing/2014/main" id="{514CEE19-7D4D-42DC-8876-7901C96224B4}"/>
+                <a16:creationId xmlns:a16="http://schemas.microsoft.com/office/drawing/2014/main" id="{374000FB-7D5C-494E-B439-A5853C2963C9}"/>
               </a:ext>
             </a:extLst>
           </p:cNvPr>
@@ -32418,7 +32608,7 @@
           <p:cNvPr id="4" name="">
             <a:extLst xmlns:a="http://schemas.openxmlformats.org/drawingml/2006/main">
               <a:ext uri="{FF2B5EF4-FFF2-40B4-BE49-F238E27FC236}">
-                <a16:creationId xmlns:a16="http://schemas.microsoft.com/office/drawing/2014/main" id="{0E6A6D34-2ECF-488E-AB8B-2D29A54C7F83}"/>
+                <a16:creationId xmlns:a16="http://schemas.microsoft.com/office/drawing/2014/main" id="{15D1CCE7-05FF-40C3-973E-A50FF99335D3}"/>
               </a:ext>
             </a:extLst>
           </p:cNvPr>
@@ -32449,7 +32639,7 @@
           <p:cNvPr id="5" name="">
             <a:extLst xmlns:a="http://schemas.openxmlformats.org/drawingml/2006/main">
               <a:ext uri="{FF2B5EF4-FFF2-40B4-BE49-F238E27FC236}">
-                <a16:creationId xmlns:a16="http://schemas.microsoft.com/office/drawing/2014/main" id="{3642067F-8F23-4A96-B993-430B8E7574F3}"/>
+                <a16:creationId xmlns:a16="http://schemas.microsoft.com/office/drawing/2014/main" id="{87380BC0-F38E-47AB-9A26-CF03A7441614}"/>
               </a:ext>
             </a:extLst>
           </p:cNvPr>
@@ -32482,7 +32672,7 @@
           <p:cNvPr id="6" name="">
             <a:extLst xmlns:a="http://schemas.openxmlformats.org/drawingml/2006/main">
               <a:ext uri="{FF2B5EF4-FFF2-40B4-BE49-F238E27FC236}">
-                <a16:creationId xmlns:a16="http://schemas.microsoft.com/office/drawing/2014/main" id="{7E1B02E6-2A28-46C4-82E8-D0E9B8B8B2B3}"/>
+                <a16:creationId xmlns:a16="http://schemas.microsoft.com/office/drawing/2014/main" id="{0736B5BB-26FA-4DA7-A1B7-44FA179F977E}"/>
               </a:ext>
             </a:extLst>
           </p:cNvPr>
@@ -32515,7 +32705,7 @@
           <p:cNvPr id="7" name="">
             <a:extLst xmlns:a="http://schemas.openxmlformats.org/drawingml/2006/main">
               <a:ext uri="{FF2B5EF4-FFF2-40B4-BE49-F238E27FC236}">
-                <a16:creationId xmlns:a16="http://schemas.microsoft.com/office/drawing/2014/main" id="{AA18517C-A207-4D12-A748-DD5423C5AC5A}"/>
+                <a16:creationId xmlns:a16="http://schemas.microsoft.com/office/drawing/2014/main" id="{F9494598-D0AE-46A3-AED3-777ADAAD34CB}"/>
               </a:ext>
             </a:extLst>
           </p:cNvPr>
@@ -32548,7 +32738,7 @@
           <p:cNvPr id="8" name="">
             <a:extLst xmlns:a="http://schemas.openxmlformats.org/drawingml/2006/main">
               <a:ext uri="{FF2B5EF4-FFF2-40B4-BE49-F238E27FC236}">
-                <a16:creationId xmlns:a16="http://schemas.microsoft.com/office/drawing/2014/main" id="{5A26BF47-8479-4E3B-AB75-6D6FD13730B3}"/>
+                <a16:creationId xmlns:a16="http://schemas.microsoft.com/office/drawing/2014/main" id="{F22AF9DB-481F-4767-9274-589BA013F052}"/>
               </a:ext>
             </a:extLst>
           </p:cNvPr>
@@ -32581,7 +32771,7 @@
           <p:cNvPr id="9" name="">
             <a:extLst xmlns:a="http://schemas.openxmlformats.org/drawingml/2006/main">
               <a:ext uri="{FF2B5EF4-FFF2-40B4-BE49-F238E27FC236}">
-                <a16:creationId xmlns:a16="http://schemas.microsoft.com/office/drawing/2014/main" id="{7DE6371C-3837-46CE-B5CD-3DFA0CBE0902}"/>
+                <a16:creationId xmlns:a16="http://schemas.microsoft.com/office/drawing/2014/main" id="{EFC96392-E364-4A88-9816-4C4B2290FA63}"/>
               </a:ext>
             </a:extLst>
           </p:cNvPr>
@@ -32622,7 +32812,7 @@
           <p:cNvPr id="10" name="">
             <a:extLst xmlns:a="http://schemas.openxmlformats.org/drawingml/2006/main">
               <a:ext uri="{FF2B5EF4-FFF2-40B4-BE49-F238E27FC236}">
-                <a16:creationId xmlns:a16="http://schemas.microsoft.com/office/drawing/2014/main" id="{B000B7A1-B74C-45FD-99CD-6EF3AB8FF336}"/>
+                <a16:creationId xmlns:a16="http://schemas.microsoft.com/office/drawing/2014/main" id="{54DCD322-5CBF-4B73-9C1E-F201414DC4D4}"/>
               </a:ext>
             </a:extLst>
           </p:cNvPr>
@@ -32684,7 +32874,7 @@
           <p:cNvPr id="11" name="">
             <a:extLst xmlns:a="http://schemas.openxmlformats.org/drawingml/2006/main">
               <a:ext uri="{FF2B5EF4-FFF2-40B4-BE49-F238E27FC236}">
-                <a16:creationId xmlns:a16="http://schemas.microsoft.com/office/drawing/2014/main" id="{EA201560-64FD-4EE1-B0FC-CE53FEBD4471}"/>
+                <a16:creationId xmlns:a16="http://schemas.microsoft.com/office/drawing/2014/main" id="{D88DAA23-610B-4954-B30D-E995222C0B3F}"/>
               </a:ext>
             </a:extLst>
           </p:cNvPr>
@@ -32746,7 +32936,7 @@
           <p:cNvPr id="12" name="">
             <a:extLst xmlns:a="http://schemas.openxmlformats.org/drawingml/2006/main">
               <a:ext uri="{FF2B5EF4-FFF2-40B4-BE49-F238E27FC236}">
-                <a16:creationId xmlns:a16="http://schemas.microsoft.com/office/drawing/2014/main" id="{8F9BDEF0-11E9-4A0B-9AE5-62B03C463518}"/>
+                <a16:creationId xmlns:a16="http://schemas.microsoft.com/office/drawing/2014/main" id="{DEE580CE-E2A2-430B-B25C-C8BF4FA7FBE5}"/>
               </a:ext>
             </a:extLst>
           </p:cNvPr>
@@ -32787,7 +32977,7 @@
           <p:cNvPr id="13" name="">
             <a:extLst xmlns:a="http://schemas.openxmlformats.org/drawingml/2006/main">
               <a:ext uri="{FF2B5EF4-FFF2-40B4-BE49-F238E27FC236}">
-                <a16:creationId xmlns:a16="http://schemas.microsoft.com/office/drawing/2014/main" id="{E750E8AD-5FF5-49F4-A060-26175F27B9AF}"/>
+                <a16:creationId xmlns:a16="http://schemas.microsoft.com/office/drawing/2014/main" id="{8A002842-58F8-4E1C-85E0-D22893BEE0C0}"/>
               </a:ext>
             </a:extLst>
           </p:cNvPr>
@@ -32849,7 +33039,7 @@
           <p:cNvPr id="14" name="">
             <a:extLst xmlns:a="http://schemas.openxmlformats.org/drawingml/2006/main">
               <a:ext uri="{FF2B5EF4-FFF2-40B4-BE49-F238E27FC236}">
-                <a16:creationId xmlns:a16="http://schemas.microsoft.com/office/drawing/2014/main" id="{27D16F3F-B58A-454F-AABD-3752E687C4BA}"/>
+                <a16:creationId xmlns:a16="http://schemas.microsoft.com/office/drawing/2014/main" id="{5D8561E6-B356-432D-B79E-62B57E50CF2A}"/>
               </a:ext>
             </a:extLst>
           </p:cNvPr>
@@ -32911,7 +33101,7 @@
           <p:cNvPr id="15" name="">
             <a:extLst xmlns:a="http://schemas.openxmlformats.org/drawingml/2006/main">
               <a:ext uri="{FF2B5EF4-FFF2-40B4-BE49-F238E27FC236}">
-                <a16:creationId xmlns:a16="http://schemas.microsoft.com/office/drawing/2014/main" id="{BF23641A-12D7-47B4-B0E8-40E78398D362}"/>
+                <a16:creationId xmlns:a16="http://schemas.microsoft.com/office/drawing/2014/main" id="{7071A669-8364-42EB-98E1-0CFDAE5D35F1}"/>
               </a:ext>
             </a:extLst>
           </p:cNvPr>
@@ -32952,7 +33142,7 @@
           <p:cNvPr id="16" name="">
             <a:extLst xmlns:a="http://schemas.openxmlformats.org/drawingml/2006/main">
               <a:ext uri="{FF2B5EF4-FFF2-40B4-BE49-F238E27FC236}">
-                <a16:creationId xmlns:a16="http://schemas.microsoft.com/office/drawing/2014/main" id="{C877AEB4-23F1-40CE-97B5-F4AA25C2F5EB}"/>
+                <a16:creationId xmlns:a16="http://schemas.microsoft.com/office/drawing/2014/main" id="{0C22FEF1-DA45-46C0-89A0-DCE92FC5EDF2}"/>
               </a:ext>
             </a:extLst>
           </p:cNvPr>
@@ -33014,7 +33204,7 @@
           <p:cNvPr id="17" name="">
             <a:extLst xmlns:a="http://schemas.openxmlformats.org/drawingml/2006/main">
               <a:ext uri="{FF2B5EF4-FFF2-40B4-BE49-F238E27FC236}">
-                <a16:creationId xmlns:a16="http://schemas.microsoft.com/office/drawing/2014/main" id="{ECCBD8B0-FADD-4C4A-9F27-CAF2129394ED}"/>
+                <a16:creationId xmlns:a16="http://schemas.microsoft.com/office/drawing/2014/main" id="{39E92B01-9528-497D-9346-92C829F97DA9}"/>
               </a:ext>
             </a:extLst>
           </p:cNvPr>
@@ -33076,7 +33266,7 @@
           <p:cNvPr id="18" name="">
             <a:extLst xmlns:a="http://schemas.openxmlformats.org/drawingml/2006/main">
               <a:ext uri="{FF2B5EF4-FFF2-40B4-BE49-F238E27FC236}">
-                <a16:creationId xmlns:a16="http://schemas.microsoft.com/office/drawing/2014/main" id="{E2AB1027-159B-4E5B-9C40-AB5D1D1B0B96}"/>
+                <a16:creationId xmlns:a16="http://schemas.microsoft.com/office/drawing/2014/main" id="{F048D4DC-CEE0-403E-AA5E-2D21DC384718}"/>
               </a:ext>
             </a:extLst>
           </p:cNvPr>
@@ -33117,7 +33307,7 @@
           <p:cNvPr id="19" name="">
             <a:extLst xmlns:a="http://schemas.openxmlformats.org/drawingml/2006/main">
               <a:ext uri="{FF2B5EF4-FFF2-40B4-BE49-F238E27FC236}">
-                <a16:creationId xmlns:a16="http://schemas.microsoft.com/office/drawing/2014/main" id="{78D11731-C3D3-4ECB-B323-140A06B6C36C}"/>
+                <a16:creationId xmlns:a16="http://schemas.microsoft.com/office/drawing/2014/main" id="{82887E3E-6768-4221-B34E-B3192F4A141E}"/>
               </a:ext>
             </a:extLst>
           </p:cNvPr>
@@ -33179,7 +33369,7 @@
           <p:cNvPr id="20" name="">
             <a:extLst xmlns:a="http://schemas.openxmlformats.org/drawingml/2006/main">
               <a:ext uri="{FF2B5EF4-FFF2-40B4-BE49-F238E27FC236}">
-                <a16:creationId xmlns:a16="http://schemas.microsoft.com/office/drawing/2014/main" id="{3DF52163-95D9-4ABB-AA13-0C8DE6E42962}"/>
+                <a16:creationId xmlns:a16="http://schemas.microsoft.com/office/drawing/2014/main" id="{5015230F-EA67-4B48-A094-898E755B390A}"/>
               </a:ext>
             </a:extLst>
           </p:cNvPr>
@@ -33241,7 +33431,7 @@
           <p:cNvPr id="21" name="">
             <a:extLst xmlns:a="http://schemas.openxmlformats.org/drawingml/2006/main">
               <a:ext uri="{FF2B5EF4-FFF2-40B4-BE49-F238E27FC236}">
-                <a16:creationId xmlns:a16="http://schemas.microsoft.com/office/drawing/2014/main" id="{34A17ABC-571D-4A55-A199-CBD8F1CDBBA6}"/>
+                <a16:creationId xmlns:a16="http://schemas.microsoft.com/office/drawing/2014/main" id="{BBD927FF-C048-4AA1-9FAB-44E43AAAB856}"/>
               </a:ext>
             </a:extLst>
           </p:cNvPr>
@@ -33282,7 +33472,7 @@
           <p:cNvPr id="22" name="">
             <a:extLst xmlns:a="http://schemas.openxmlformats.org/drawingml/2006/main">
               <a:ext uri="{FF2B5EF4-FFF2-40B4-BE49-F238E27FC236}">
-                <a16:creationId xmlns:a16="http://schemas.microsoft.com/office/drawing/2014/main" id="{A361D9A0-9FE1-4744-9967-0D012C34F99A}"/>
+                <a16:creationId xmlns:a16="http://schemas.microsoft.com/office/drawing/2014/main" id="{1FBFD563-804D-4377-86BA-C1772CF28310}"/>
               </a:ext>
             </a:extLst>
           </p:cNvPr>
@@ -33344,7 +33534,7 @@
           <p:cNvPr id="23" name="">
             <a:extLst xmlns:a="http://schemas.openxmlformats.org/drawingml/2006/main">
               <a:ext uri="{FF2B5EF4-FFF2-40B4-BE49-F238E27FC236}">
-                <a16:creationId xmlns:a16="http://schemas.microsoft.com/office/drawing/2014/main" id="{BD9DBD76-DC04-4625-A489-67989EBE1C8A}"/>
+                <a16:creationId xmlns:a16="http://schemas.microsoft.com/office/drawing/2014/main" id="{586A024D-9B99-4FA8-ACEB-0D2E6876DA26}"/>
               </a:ext>
             </a:extLst>
           </p:cNvPr>
@@ -33406,7 +33596,7 @@
           <p:cNvPr id="24" name="">
             <a:extLst xmlns:a="http://schemas.openxmlformats.org/drawingml/2006/main">
               <a:ext uri="{FF2B5EF4-FFF2-40B4-BE49-F238E27FC236}">
-                <a16:creationId xmlns:a16="http://schemas.microsoft.com/office/drawing/2014/main" id="{F60DD086-0DA1-45DB-B90F-EF60434C185C}"/>
+                <a16:creationId xmlns:a16="http://schemas.microsoft.com/office/drawing/2014/main" id="{15046E0A-EA3F-4261-87D7-7DF0868960B5}"/>
               </a:ext>
             </a:extLst>
           </p:cNvPr>
@@ -33439,7 +33629,7 @@
           <p:cNvPr id="25" name="">
             <a:extLst xmlns:a="http://schemas.openxmlformats.org/drawingml/2006/main">
               <a:ext uri="{FF2B5EF4-FFF2-40B4-BE49-F238E27FC236}">
-                <a16:creationId xmlns:a16="http://schemas.microsoft.com/office/drawing/2014/main" id="{4CC88F73-6DD3-4274-9A5E-7E632163964E}"/>
+                <a16:creationId xmlns:a16="http://schemas.microsoft.com/office/drawing/2014/main" id="{06417490-2FF7-46B9-856C-4840C1CFA7D0}"/>
               </a:ext>
             </a:extLst>
           </p:cNvPr>
@@ -33501,7 +33691,7 @@
           <p:cNvPr id="26" name="">
             <a:extLst xmlns:a="http://schemas.openxmlformats.org/drawingml/2006/main">
               <a:ext uri="{FF2B5EF4-FFF2-40B4-BE49-F238E27FC236}">
-                <a16:creationId xmlns:a16="http://schemas.microsoft.com/office/drawing/2014/main" id="{C3F975E5-14BA-4927-972E-DFB4F8D1B4C8}"/>
+                <a16:creationId xmlns:a16="http://schemas.microsoft.com/office/drawing/2014/main" id="{6E86BE15-4303-4BCD-A26A-ED9019994C82}"/>
               </a:ext>
             </a:extLst>
           </p:cNvPr>
@@ -33534,7 +33724,7 @@
           <p:cNvPr id="27" name="">
             <a:extLst xmlns:a="http://schemas.openxmlformats.org/drawingml/2006/main">
               <a:ext uri="{FF2B5EF4-FFF2-40B4-BE49-F238E27FC236}">
-                <a16:creationId xmlns:a16="http://schemas.microsoft.com/office/drawing/2014/main" id="{C7D93227-49F5-497A-A62B-960B0E132AD2}"/>
+                <a16:creationId xmlns:a16="http://schemas.microsoft.com/office/drawing/2014/main" id="{03DE6D58-9349-4CDE-B29B-B7DF6251B674}"/>
               </a:ext>
             </a:extLst>
           </p:cNvPr>
@@ -33596,7 +33786,7 @@
           <p:cNvPr id="28" name="">
             <a:extLst xmlns:a="http://schemas.openxmlformats.org/drawingml/2006/main">
               <a:ext uri="{FF2B5EF4-FFF2-40B4-BE49-F238E27FC236}">
-                <a16:creationId xmlns:a16="http://schemas.microsoft.com/office/drawing/2014/main" id="{0CC31249-451B-4F79-8621-6F5928CC41D7}"/>
+                <a16:creationId xmlns:a16="http://schemas.microsoft.com/office/drawing/2014/main" id="{30B29C63-32BD-4440-9CA9-BCCBE136D4B4}"/>
               </a:ext>
             </a:extLst>
           </p:cNvPr>
@@ -33629,7 +33819,7 @@
           <p:cNvPr id="29" name="">
             <a:extLst xmlns:a="http://schemas.openxmlformats.org/drawingml/2006/main">
               <a:ext uri="{FF2B5EF4-FFF2-40B4-BE49-F238E27FC236}">
-                <a16:creationId xmlns:a16="http://schemas.microsoft.com/office/drawing/2014/main" id="{ADF0A29A-D941-40C6-9760-C8A299A0F8DF}"/>
+                <a16:creationId xmlns:a16="http://schemas.microsoft.com/office/drawing/2014/main" id="{CA53845F-C7DA-455F-AA85-643B17F4F92E}"/>
               </a:ext>
             </a:extLst>
           </p:cNvPr>
@@ -33691,7 +33881,7 @@
           <p:cNvPr id="30" name="">
             <a:extLst xmlns:a="http://schemas.openxmlformats.org/drawingml/2006/main">
               <a:ext uri="{FF2B5EF4-FFF2-40B4-BE49-F238E27FC236}">
-                <a16:creationId xmlns:a16="http://schemas.microsoft.com/office/drawing/2014/main" id="{5A72B50E-8769-4843-83D0-9A2462AA7706}"/>
+                <a16:creationId xmlns:a16="http://schemas.microsoft.com/office/drawing/2014/main" id="{5DD830F4-D931-4449-B7CD-56F3C71622DC}"/>
               </a:ext>
             </a:extLst>
           </p:cNvPr>
@@ -33724,7 +33914,7 @@
           <p:cNvPr id="31" name="">
             <a:extLst xmlns:a="http://schemas.openxmlformats.org/drawingml/2006/main">
               <a:ext uri="{FF2B5EF4-FFF2-40B4-BE49-F238E27FC236}">
-                <a16:creationId xmlns:a16="http://schemas.microsoft.com/office/drawing/2014/main" id="{663964B8-2C10-4661-8CA4-16AF1280A96C}"/>
+                <a16:creationId xmlns:a16="http://schemas.microsoft.com/office/drawing/2014/main" id="{86C6F5E5-2026-4FAD-A876-EFAA122CE987}"/>
               </a:ext>
             </a:extLst>
           </p:cNvPr>
@@ -33786,7 +33976,7 @@
           <p:cNvPr id="32" name="">
             <a:extLst xmlns:a="http://schemas.openxmlformats.org/drawingml/2006/main">
               <a:ext uri="{FF2B5EF4-FFF2-40B4-BE49-F238E27FC236}">
-                <a16:creationId xmlns:a16="http://schemas.microsoft.com/office/drawing/2014/main" id="{F4F26132-C360-46F7-83A1-E7EF5E21D834}"/>
+                <a16:creationId xmlns:a16="http://schemas.microsoft.com/office/drawing/2014/main" id="{8E644793-68BF-4F61-9946-35C7C575D222}"/>
               </a:ext>
             </a:extLst>
           </p:cNvPr>
@@ -33827,7 +34017,7 @@
           <p:cNvPr id="33" name="">
             <a:extLst xmlns:a="http://schemas.openxmlformats.org/drawingml/2006/main">
               <a:ext uri="{FF2B5EF4-FFF2-40B4-BE49-F238E27FC236}">
-                <a16:creationId xmlns:a16="http://schemas.microsoft.com/office/drawing/2014/main" id="{8BF6DA11-6C57-472C-84E8-75549F3FE80C}"/>
+                <a16:creationId xmlns:a16="http://schemas.microsoft.com/office/drawing/2014/main" id="{F63229E8-77AE-4C7F-B2B8-3D1CBEB3836A}"/>
               </a:ext>
             </a:extLst>
           </p:cNvPr>
@@ -33889,7 +34079,7 @@
           <p:cNvPr id="34" name="">
             <a:extLst xmlns:a="http://schemas.openxmlformats.org/drawingml/2006/main">
               <a:ext uri="{FF2B5EF4-FFF2-40B4-BE49-F238E27FC236}">
-                <a16:creationId xmlns:a16="http://schemas.microsoft.com/office/drawing/2014/main" id="{A5232D0E-A386-4842-8930-4E61ADCC165A}"/>
+                <a16:creationId xmlns:a16="http://schemas.microsoft.com/office/drawing/2014/main" id="{10943A46-917E-43E4-A829-F3C8FFE37706}"/>
               </a:ext>
             </a:extLst>
           </p:cNvPr>
@@ -33951,7 +34141,7 @@
           <p:cNvPr id="35" name="">
             <a:extLst xmlns:a="http://schemas.openxmlformats.org/drawingml/2006/main">
               <a:ext uri="{FF2B5EF4-FFF2-40B4-BE49-F238E27FC236}">
-                <a16:creationId xmlns:a16="http://schemas.microsoft.com/office/drawing/2014/main" id="{08639CA3-404F-48E6-B371-F6F8B62C0B91}"/>
+                <a16:creationId xmlns:a16="http://schemas.microsoft.com/office/drawing/2014/main" id="{F1A53B05-572D-4BE2-AC47-47F9A88F06A3}"/>
               </a:ext>
             </a:extLst>
           </p:cNvPr>
@@ -33982,7 +34172,7 @@
           <p:cNvPr id="36" name="">
             <a:extLst xmlns:a="http://schemas.openxmlformats.org/drawingml/2006/main">
               <a:ext uri="{FF2B5EF4-FFF2-40B4-BE49-F238E27FC236}">
-                <a16:creationId xmlns:a16="http://schemas.microsoft.com/office/drawing/2014/main" id="{15CB2F48-22EA-4794-9B2A-2DAE1D601501}"/>
+                <a16:creationId xmlns:a16="http://schemas.microsoft.com/office/drawing/2014/main" id="{A5B16911-4EFA-48F6-866F-8DA78ADA6FA7}"/>
               </a:ext>
             </a:extLst>
           </p:cNvPr>
@@ -34044,7 +34234,7 @@
           <p:cNvPr id="37" name="">
             <a:extLst xmlns:a="http://schemas.openxmlformats.org/drawingml/2006/main">
               <a:ext uri="{FF2B5EF4-FFF2-40B4-BE49-F238E27FC236}">
-                <a16:creationId xmlns:a16="http://schemas.microsoft.com/office/drawing/2014/main" id="{C9455034-60E0-4290-B092-2F392BA25D18}"/>
+                <a16:creationId xmlns:a16="http://schemas.microsoft.com/office/drawing/2014/main" id="{0A47A58E-7034-4462-8F08-B93CA5711196}"/>
               </a:ext>
             </a:extLst>
           </p:cNvPr>
@@ -34104,7 +34294,7 @@
     </p:spTree>
     <p:extLst>
       <p:ext uri="{BB962C8B-B14F-4D97-AF65-F5344CB8AC3E}">
-        <p14:creationId xmlns:p14="http://schemas.microsoft.com/office/powerpoint/2010/main" val="1824440928"/>
+        <p14:creationId xmlns:p14="http://schemas.microsoft.com/office/powerpoint/2010/main" val="784768341"/>
       </p:ext>
     </p:extLst>
   </p:cSld>
@@ -34135,7 +34325,7 @@
           <p:cNvPr id="1" name="">
             <a:extLst xmlns:a="http://schemas.openxmlformats.org/drawingml/2006/main">
               <a:ext uri="{FF2B5EF4-FFF2-40B4-BE49-F238E27FC236}">
-                <a16:creationId xmlns:a16="http://schemas.microsoft.com/office/drawing/2014/main" id="{86E4BA97-4B50-4FB0-93B7-07EEA38EBD51}"/>
+                <a16:creationId xmlns:a16="http://schemas.microsoft.com/office/drawing/2014/main" id="{42C89AAB-77AB-4050-9880-C07C7D1D1EBA}"/>
               </a:ext>
             </a:extLst>
           </p:cNvPr>
@@ -34197,7 +34387,7 @@
           <p:cNvPr id="2" name="">
             <a:extLst xmlns:a="http://schemas.openxmlformats.org/drawingml/2006/main">
               <a:ext uri="{FF2B5EF4-FFF2-40B4-BE49-F238E27FC236}">
-                <a16:creationId xmlns:a16="http://schemas.microsoft.com/office/drawing/2014/main" id="{A442B0A9-E4B6-4BB5-8475-BE0146A80FB6}"/>
+                <a16:creationId xmlns:a16="http://schemas.microsoft.com/office/drawing/2014/main" id="{11030803-2855-4B2A-AECE-62C444604C1D}"/>
               </a:ext>
             </a:extLst>
           </p:cNvPr>
@@ -34259,7 +34449,7 @@
           <p:cNvPr id="3" name="">
             <a:extLst xmlns:a="http://schemas.openxmlformats.org/drawingml/2006/main">
               <a:ext uri="{FF2B5EF4-FFF2-40B4-BE49-F238E27FC236}">
-                <a16:creationId xmlns:a16="http://schemas.microsoft.com/office/drawing/2014/main" id="{D445A261-EA4F-45A7-A3D2-B944DA7576D6}"/>
+                <a16:creationId xmlns:a16="http://schemas.microsoft.com/office/drawing/2014/main" id="{71DE7EFF-3B0A-4E5F-9C36-508AE70E36C0}"/>
               </a:ext>
             </a:extLst>
           </p:cNvPr>
@@ -34300,7 +34490,7 @@
           <p:cNvPr id="4" name="">
             <a:extLst xmlns:a="http://schemas.openxmlformats.org/drawingml/2006/main">
               <a:ext uri="{FF2B5EF4-FFF2-40B4-BE49-F238E27FC236}">
-                <a16:creationId xmlns:a16="http://schemas.microsoft.com/office/drawing/2014/main" id="{84C0191B-C7CB-44C5-BAD2-B673E2A48C36}"/>
+                <a16:creationId xmlns:a16="http://schemas.microsoft.com/office/drawing/2014/main" id="{6F62CE2B-05D6-4AD2-85C9-E5B1BEDB9E0D}"/>
               </a:ext>
             </a:extLst>
           </p:cNvPr>
@@ -34362,7 +34552,7 @@
           <p:cNvPr id="5" name="">
             <a:extLst xmlns:a="http://schemas.openxmlformats.org/drawingml/2006/main">
               <a:ext uri="{FF2B5EF4-FFF2-40B4-BE49-F238E27FC236}">
-                <a16:creationId xmlns:a16="http://schemas.microsoft.com/office/drawing/2014/main" id="{554C4F3B-1B7C-487E-97B3-EBC17801624E}"/>
+                <a16:creationId xmlns:a16="http://schemas.microsoft.com/office/drawing/2014/main" id="{36D0AF41-468D-4A89-8643-EC1B8E6363ED}"/>
               </a:ext>
             </a:extLst>
           </p:cNvPr>
@@ -34505,7 +34695,7 @@
           <p:cNvPr id="6" name="">
             <a:extLst xmlns:a="http://schemas.openxmlformats.org/drawingml/2006/main">
               <a:ext uri="{FF2B5EF4-FFF2-40B4-BE49-F238E27FC236}">
-                <a16:creationId xmlns:a16="http://schemas.microsoft.com/office/drawing/2014/main" id="{4D48BD42-E13E-4026-B2CC-8A800A8A2E86}"/>
+                <a16:creationId xmlns:a16="http://schemas.microsoft.com/office/drawing/2014/main" id="{5216145C-A8D1-496E-B49F-89AE39FCEE7B}"/>
               </a:ext>
             </a:extLst>
           </p:cNvPr>
@@ -34546,7 +34736,7 @@
           <p:cNvPr id="7" name="">
             <a:extLst xmlns:a="http://schemas.openxmlformats.org/drawingml/2006/main">
               <a:ext uri="{FF2B5EF4-FFF2-40B4-BE49-F238E27FC236}">
-                <a16:creationId xmlns:a16="http://schemas.microsoft.com/office/drawing/2014/main" id="{BC76BE0B-1653-4AB6-B464-2ECD5B855C2A}"/>
+                <a16:creationId xmlns:a16="http://schemas.microsoft.com/office/drawing/2014/main" id="{5DE0BB9C-6125-4DDF-A205-8D6084B58849}"/>
               </a:ext>
             </a:extLst>
           </p:cNvPr>
@@ -34608,7 +34798,7 @@
           <p:cNvPr id="8" name="">
             <a:extLst xmlns:a="http://schemas.openxmlformats.org/drawingml/2006/main">
               <a:ext uri="{FF2B5EF4-FFF2-40B4-BE49-F238E27FC236}">
-                <a16:creationId xmlns:a16="http://schemas.microsoft.com/office/drawing/2014/main" id="{7FE49F16-A174-43B6-8BC6-A83A98DE8DB4}"/>
+                <a16:creationId xmlns:a16="http://schemas.microsoft.com/office/drawing/2014/main" id="{EA0FAF43-1072-4FDB-AB73-4C00100B3C31}"/>
               </a:ext>
             </a:extLst>
           </p:cNvPr>
@@ -34778,7 +34968,7 @@
           <p:cNvPr id="9" name="">
             <a:extLst xmlns:a="http://schemas.openxmlformats.org/drawingml/2006/main">
               <a:ext uri="{FF2B5EF4-FFF2-40B4-BE49-F238E27FC236}">
-                <a16:creationId xmlns:a16="http://schemas.microsoft.com/office/drawing/2014/main" id="{4BC74C0E-2870-4B2F-8A0B-53F65E52E418}"/>
+                <a16:creationId xmlns:a16="http://schemas.microsoft.com/office/drawing/2014/main" id="{57029FB0-46D4-4946-86D0-1D18809A2F6A}"/>
               </a:ext>
             </a:extLst>
           </p:cNvPr>
@@ -34811,7 +35001,7 @@
           <p:cNvPr id="10" name="">
             <a:extLst xmlns:a="http://schemas.openxmlformats.org/drawingml/2006/main">
               <a:ext uri="{FF2B5EF4-FFF2-40B4-BE49-F238E27FC236}">
-                <a16:creationId xmlns:a16="http://schemas.microsoft.com/office/drawing/2014/main" id="{28B8F8A8-0646-43F6-97C7-D929026A65DA}"/>
+                <a16:creationId xmlns:a16="http://schemas.microsoft.com/office/drawing/2014/main" id="{E0952265-3A2E-4585-B4EC-36B80AD6614F}"/>
               </a:ext>
             </a:extLst>
           </p:cNvPr>
@@ -34873,7 +35063,7 @@
           <p:cNvPr id="11" name="">
             <a:extLst xmlns:a="http://schemas.openxmlformats.org/drawingml/2006/main">
               <a:ext uri="{FF2B5EF4-FFF2-40B4-BE49-F238E27FC236}">
-                <a16:creationId xmlns:a16="http://schemas.microsoft.com/office/drawing/2014/main" id="{CDC4701E-1DA7-495D-A5DB-BBD90270D3E1}"/>
+                <a16:creationId xmlns:a16="http://schemas.microsoft.com/office/drawing/2014/main" id="{EBC938DC-5713-4864-AF33-BBACEAB17C2F}"/>
               </a:ext>
             </a:extLst>
           </p:cNvPr>
@@ -34904,7 +35094,7 @@
           <p:cNvPr id="12" name="">
             <a:extLst xmlns:a="http://schemas.openxmlformats.org/drawingml/2006/main">
               <a:ext uri="{FF2B5EF4-FFF2-40B4-BE49-F238E27FC236}">
-                <a16:creationId xmlns:a16="http://schemas.microsoft.com/office/drawing/2014/main" id="{5634EDA6-369E-4FE3-A284-462F372E241A}"/>
+                <a16:creationId xmlns:a16="http://schemas.microsoft.com/office/drawing/2014/main" id="{8111EF02-21CB-40DD-B1F2-ED8F62DC31A9}"/>
               </a:ext>
             </a:extLst>
           </p:cNvPr>
@@ -34966,7 +35156,7 @@
           <p:cNvPr id="13" name="">
             <a:extLst xmlns:a="http://schemas.openxmlformats.org/drawingml/2006/main">
               <a:ext uri="{FF2B5EF4-FFF2-40B4-BE49-F238E27FC236}">
-                <a16:creationId xmlns:a16="http://schemas.microsoft.com/office/drawing/2014/main" id="{F415BB2A-687A-4874-90FD-BC79108DACB8}"/>
+                <a16:creationId xmlns:a16="http://schemas.microsoft.com/office/drawing/2014/main" id="{7DF752A6-EB59-4695-AE3F-9DFD55079EB2}"/>
               </a:ext>
             </a:extLst>
           </p:cNvPr>
@@ -35026,7 +35216,7 @@
     </p:spTree>
     <p:extLst>
       <p:ext uri="{BB962C8B-B14F-4D97-AF65-F5344CB8AC3E}">
-        <p14:creationId xmlns:p14="http://schemas.microsoft.com/office/powerpoint/2010/main" val="1677048252"/>
+        <p14:creationId xmlns:p14="http://schemas.microsoft.com/office/powerpoint/2010/main" val="1900511006"/>
       </p:ext>
     </p:extLst>
   </p:cSld>

--- a/reports/SpatialScope_Agent_Presentation.pptx
+++ b/reports/SpatialScope_Agent_Presentation.pptx
@@ -2,28 +2,28 @@
 <file path=ppt/presentation.xml><?xml version="1.0" encoding="utf-8"?>
 <p:presentation xmlns:p="http://schemas.openxmlformats.org/presentationml/2006/main">
   <p:sldMasterIdLst>
-    <p:sldMasterId xmlns:r="http://schemas.openxmlformats.org/officeDocument/2006/relationships" id="2147483648" r:id="R1efe5f0347db4c32"/>
+    <p:sldMasterId xmlns:r="http://schemas.openxmlformats.org/officeDocument/2006/relationships" id="2147483648" r:id="R63222e2112b74bfb"/>
   </p:sldMasterIdLst>
   <p:notesMasterIdLst>
-    <p:notesMasterId xmlns:r="http://schemas.openxmlformats.org/officeDocument/2006/relationships" r:id="R0e49b5fd4ad04e3d"/>
+    <p:notesMasterId xmlns:r="http://schemas.openxmlformats.org/officeDocument/2006/relationships" r:id="Rd336bb2088ba4dd3"/>
   </p:notesMasterIdLst>
   <p:sldIdLst>
-    <p:sldId xmlns:r="http://schemas.openxmlformats.org/officeDocument/2006/relationships" id="256" r:id="Rfa6982ecc0ca43a1"/>
-    <p:sldId xmlns:r="http://schemas.openxmlformats.org/officeDocument/2006/relationships" id="257" r:id="R92e7d544b09c4a29"/>
-    <p:sldId xmlns:r="http://schemas.openxmlformats.org/officeDocument/2006/relationships" id="258" r:id="R966ff8f4cc3f406e"/>
-    <p:sldId xmlns:r="http://schemas.openxmlformats.org/officeDocument/2006/relationships" id="259" r:id="Rd03c43674a564951"/>
-    <p:sldId xmlns:r="http://schemas.openxmlformats.org/officeDocument/2006/relationships" id="260" r:id="R4312a5ce54c64c54"/>
-    <p:sldId xmlns:r="http://schemas.openxmlformats.org/officeDocument/2006/relationships" id="261" r:id="Rd8f00cad614d4efc"/>
-    <p:sldId xmlns:r="http://schemas.openxmlformats.org/officeDocument/2006/relationships" id="262" r:id="Rb9553d5e0d8d4775"/>
-    <p:sldId xmlns:r="http://schemas.openxmlformats.org/officeDocument/2006/relationships" id="263" r:id="Ra404a04f72bf414d"/>
-    <p:sldId xmlns:r="http://schemas.openxmlformats.org/officeDocument/2006/relationships" id="264" r:id="R231d2789576e41a9"/>
-    <p:sldId xmlns:r="http://schemas.openxmlformats.org/officeDocument/2006/relationships" id="265" r:id="R4690c523e7e44803"/>
-    <p:sldId xmlns:r="http://schemas.openxmlformats.org/officeDocument/2006/relationships" id="266" r:id="R8c8db3b7e24d4184"/>
-    <p:sldId xmlns:r="http://schemas.openxmlformats.org/officeDocument/2006/relationships" id="267" r:id="R5af44bc564e24b78"/>
-    <p:sldId xmlns:r="http://schemas.openxmlformats.org/officeDocument/2006/relationships" id="268" r:id="R37d11e632ca74f3f"/>
-    <p:sldId xmlns:r="http://schemas.openxmlformats.org/officeDocument/2006/relationships" id="269" r:id="Rb715e0134bef465b"/>
-    <p:sldId xmlns:r="http://schemas.openxmlformats.org/officeDocument/2006/relationships" id="270" r:id="R3b39c55c65344b8d"/>
-    <p:sldId xmlns:r="http://schemas.openxmlformats.org/officeDocument/2006/relationships" id="271" r:id="R8017a2ce3351497c"/>
+    <p:sldId xmlns:r="http://schemas.openxmlformats.org/officeDocument/2006/relationships" id="256" r:id="Rc18003aced6a4353"/>
+    <p:sldId xmlns:r="http://schemas.openxmlformats.org/officeDocument/2006/relationships" id="257" r:id="R70515fec168b4d6f"/>
+    <p:sldId xmlns:r="http://schemas.openxmlformats.org/officeDocument/2006/relationships" id="258" r:id="R2452753c51db4627"/>
+    <p:sldId xmlns:r="http://schemas.openxmlformats.org/officeDocument/2006/relationships" id="259" r:id="R41848a6e34524ea8"/>
+    <p:sldId xmlns:r="http://schemas.openxmlformats.org/officeDocument/2006/relationships" id="260" r:id="Rc15f87b6964140f5"/>
+    <p:sldId xmlns:r="http://schemas.openxmlformats.org/officeDocument/2006/relationships" id="261" r:id="R4ba7278e32fe4c96"/>
+    <p:sldId xmlns:r="http://schemas.openxmlformats.org/officeDocument/2006/relationships" id="262" r:id="Rb4a90d3278774566"/>
+    <p:sldId xmlns:r="http://schemas.openxmlformats.org/officeDocument/2006/relationships" id="263" r:id="Re8e4259c907e4442"/>
+    <p:sldId xmlns:r="http://schemas.openxmlformats.org/officeDocument/2006/relationships" id="264" r:id="R2ff34cf7e1e84200"/>
+    <p:sldId xmlns:r="http://schemas.openxmlformats.org/officeDocument/2006/relationships" id="265" r:id="R4923cf01a7f84fde"/>
+    <p:sldId xmlns:r="http://schemas.openxmlformats.org/officeDocument/2006/relationships" id="266" r:id="Rdfd226aa0b064e2f"/>
+    <p:sldId xmlns:r="http://schemas.openxmlformats.org/officeDocument/2006/relationships" id="267" r:id="R76724a97fc984c63"/>
+    <p:sldId xmlns:r="http://schemas.openxmlformats.org/officeDocument/2006/relationships" id="268" r:id="R038b97cc1aaa4aa3"/>
+    <p:sldId xmlns:r="http://schemas.openxmlformats.org/officeDocument/2006/relationships" id="269" r:id="Ra1a4e1edd84a44d7"/>
+    <p:sldId xmlns:r="http://schemas.openxmlformats.org/officeDocument/2006/relationships" id="270" r:id="R96452d73796246c6"/>
+    <p:sldId xmlns:r="http://schemas.openxmlformats.org/officeDocument/2006/relationships" id="271" r:id="Rde9d113dbcf24f00"/>
   </p:sldIdLst>
   <p:sldSz cx="12192000" cy="6858000"/>
   <p:notesSz cx="6858000" cy="9144000"/>
@@ -1860,7 +1860,7 @@
   </p:cSld>
   <p:clrMap bg1="lt1" tx1="dk1" bg2="lt2" tx2="dk2" accent1="accent1" accent2="accent2" accent3="accent3" accent4="accent4" accent5="accent5" accent6="accent6" hlink="hlink" folHlink="folHlink"/>
   <p:sldLayoutIdLst>
-    <p:sldLayoutId xmlns:r="http://schemas.openxmlformats.org/officeDocument/2006/relationships" id="2147483649" r:id="R60365f60931447b0"/>
+    <p:sldLayoutId xmlns:r="http://schemas.openxmlformats.org/officeDocument/2006/relationships" id="2147483649" r:id="R72215cc291ae41b8"/>
   </p:sldLayoutIdLst>
   <p:txStyles>
     <p:titleStyle>
@@ -2411,7 +2411,7 @@
           <p:cNvPr id="1" name="">
             <a:extLst xmlns:a="http://schemas.openxmlformats.org/drawingml/2006/main">
               <a:ext uri="{FF2B5EF4-FFF2-40B4-BE49-F238E27FC236}">
-                <a16:creationId xmlns:a16="http://schemas.microsoft.com/office/drawing/2014/main" id="{8F371086-F746-4677-B230-CD0569F59A4B}"/>
+                <a16:creationId xmlns:a16="http://schemas.microsoft.com/office/drawing/2014/main" id="{AED45CC2-BA33-4CD2-BB96-5DC7CBBAB2EB}"/>
               </a:ext>
             </a:extLst>
           </p:cNvPr>
@@ -2444,7 +2444,7 @@
           <p:cNvPr id="2" name="">
             <a:extLst xmlns:a="http://schemas.openxmlformats.org/drawingml/2006/main">
               <a:ext uri="{FF2B5EF4-FFF2-40B4-BE49-F238E27FC236}">
-                <a16:creationId xmlns:a16="http://schemas.microsoft.com/office/drawing/2014/main" id="{D6642C2F-E2A8-43D8-928E-E7180980394B}"/>
+                <a16:creationId xmlns:a16="http://schemas.microsoft.com/office/drawing/2014/main" id="{8EAA9157-EC5E-4731-A675-DD04E90F1B95}"/>
               </a:ext>
             </a:extLst>
           </p:cNvPr>
@@ -2481,7 +2481,7 @@
           <p:nvPr/>
         </p:nvPicPr>
         <p:blipFill>
-          <a:blip xmlns:r="http://schemas.openxmlformats.org/officeDocument/2006/relationships" xmlns:a="http://schemas.openxmlformats.org/drawingml/2006/main" r:embed="R94fd91fe1295495b"/>
+          <a:blip xmlns:r="http://schemas.openxmlformats.org/officeDocument/2006/relationships" xmlns:a="http://schemas.openxmlformats.org/drawingml/2006/main" r:embed="R5911c689ef324efa"/>
           <a:stretch xmlns:a="http://schemas.openxmlformats.org/drawingml/2006/main"/>
         </p:blipFill>
         <p:spPr>
@@ -2501,7 +2501,7 @@
           <p:cNvPr id="4" name="">
             <a:extLst xmlns:a="http://schemas.openxmlformats.org/drawingml/2006/main">
               <a:ext uri="{FF2B5EF4-FFF2-40B4-BE49-F238E27FC236}">
-                <a16:creationId xmlns:a16="http://schemas.microsoft.com/office/drawing/2014/main" id="{6A8B39C3-F7EB-49AB-9FF7-AB476ED257BC}"/>
+                <a16:creationId xmlns:a16="http://schemas.microsoft.com/office/drawing/2014/main" id="{71E1FD50-C1EF-4E71-9D59-46311738AE01}"/>
               </a:ext>
             </a:extLst>
           </p:cNvPr>
@@ -2563,7 +2563,7 @@
           <p:cNvPr id="5" name="">
             <a:extLst xmlns:a="http://schemas.openxmlformats.org/drawingml/2006/main">
               <a:ext uri="{FF2B5EF4-FFF2-40B4-BE49-F238E27FC236}">
-                <a16:creationId xmlns:a16="http://schemas.microsoft.com/office/drawing/2014/main" id="{F0A6FE38-2F05-4AD2-AA1E-4A5477550988}"/>
+                <a16:creationId xmlns:a16="http://schemas.microsoft.com/office/drawing/2014/main" id="{117CCBFC-7202-4F5A-8DF7-38384AB56610}"/>
               </a:ext>
             </a:extLst>
           </p:cNvPr>
@@ -2625,7 +2625,7 @@
           <p:cNvPr id="6" name="">
             <a:extLst xmlns:a="http://schemas.openxmlformats.org/drawingml/2006/main">
               <a:ext uri="{FF2B5EF4-FFF2-40B4-BE49-F238E27FC236}">
-                <a16:creationId xmlns:a16="http://schemas.microsoft.com/office/drawing/2014/main" id="{E140EB5A-6353-4FFC-B3F2-788630E30927}"/>
+                <a16:creationId xmlns:a16="http://schemas.microsoft.com/office/drawing/2014/main" id="{ADBC6A65-9BDF-43AA-BFD0-81D1D810B4BE}"/>
               </a:ext>
             </a:extLst>
           </p:cNvPr>
@@ -2691,7 +2691,7 @@
           <p:nvPr/>
         </p:nvPicPr>
         <p:blipFill>
-          <a:blip xmlns:r="http://schemas.openxmlformats.org/officeDocument/2006/relationships" xmlns:a="http://schemas.openxmlformats.org/drawingml/2006/main" r:embed="Ree57d82d3bcd41d8"/>
+          <a:blip xmlns:r="http://schemas.openxmlformats.org/officeDocument/2006/relationships" xmlns:a="http://schemas.openxmlformats.org/drawingml/2006/main" r:embed="Rffc4392112724738"/>
           <a:srcRect xmlns:a="http://schemas.openxmlformats.org/drawingml/2006/main" l="0" t="10358" r="0" b="10358"/>
           <a:stretch xmlns:a="http://schemas.openxmlformats.org/drawingml/2006/main">
             <a:fillRect l="0" t="0" r="0" b="0"/>
@@ -2714,7 +2714,7 @@
           <p:cNvPr id="8" name="">
             <a:extLst xmlns:a="http://schemas.openxmlformats.org/drawingml/2006/main">
               <a:ext uri="{FF2B5EF4-FFF2-40B4-BE49-F238E27FC236}">
-                <a16:creationId xmlns:a16="http://schemas.microsoft.com/office/drawing/2014/main" id="{F88CCC36-CB78-4536-999E-3AC9623FE6E9}"/>
+                <a16:creationId xmlns:a16="http://schemas.microsoft.com/office/drawing/2014/main" id="{55823933-9A98-4280-B00C-C9E6A21FE125}"/>
               </a:ext>
             </a:extLst>
           </p:cNvPr>
@@ -2755,7 +2755,7 @@
           <p:cNvPr id="9" name="">
             <a:extLst xmlns:a="http://schemas.openxmlformats.org/drawingml/2006/main">
               <a:ext uri="{FF2B5EF4-FFF2-40B4-BE49-F238E27FC236}">
-                <a16:creationId xmlns:a16="http://schemas.microsoft.com/office/drawing/2014/main" id="{1E5ABDB5-B93F-4B29-A162-6D6EE690C3FF}"/>
+                <a16:creationId xmlns:a16="http://schemas.microsoft.com/office/drawing/2014/main" id="{5DC68937-8395-4CF1-BDAB-44088CBE691C}"/>
               </a:ext>
             </a:extLst>
           </p:cNvPr>
@@ -2817,7 +2817,7 @@
           <p:cNvPr id="10" name="">
             <a:extLst xmlns:a="http://schemas.openxmlformats.org/drawingml/2006/main">
               <a:ext uri="{FF2B5EF4-FFF2-40B4-BE49-F238E27FC236}">
-                <a16:creationId xmlns:a16="http://schemas.microsoft.com/office/drawing/2014/main" id="{B960B6F1-08B2-4C50-BFFD-58964C0F2D02}"/>
+                <a16:creationId xmlns:a16="http://schemas.microsoft.com/office/drawing/2014/main" id="{69FFA922-4936-4F7C-9EF2-25D508C70F65}"/>
               </a:ext>
             </a:extLst>
           </p:cNvPr>
@@ -2879,7 +2879,7 @@
           <p:cNvPr id="11" name="">
             <a:extLst xmlns:a="http://schemas.openxmlformats.org/drawingml/2006/main">
               <a:ext uri="{FF2B5EF4-FFF2-40B4-BE49-F238E27FC236}">
-                <a16:creationId xmlns:a16="http://schemas.microsoft.com/office/drawing/2014/main" id="{B6FB1C23-D3FC-47A2-9549-241D87A08AE4}"/>
+                <a16:creationId xmlns:a16="http://schemas.microsoft.com/office/drawing/2014/main" id="{690263BA-8C0E-452D-8DAA-A374DB72FF9D}"/>
               </a:ext>
             </a:extLst>
           </p:cNvPr>
@@ -2943,7 +2943,7 @@
           <p:cNvPr id="12" name="">
             <a:extLst xmlns:a="http://schemas.openxmlformats.org/drawingml/2006/main">
               <a:ext uri="{FF2B5EF4-FFF2-40B4-BE49-F238E27FC236}">
-                <a16:creationId xmlns:a16="http://schemas.microsoft.com/office/drawing/2014/main" id="{18FC6E77-1031-41DE-8B76-958C937742A1}"/>
+                <a16:creationId xmlns:a16="http://schemas.microsoft.com/office/drawing/2014/main" id="{51491B8D-F08A-488A-9BA3-F378D43D0D83}"/>
               </a:ext>
             </a:extLst>
           </p:cNvPr>
@@ -3007,7 +3007,7 @@
           <p:cNvPr id="13" name="">
             <a:extLst xmlns:a="http://schemas.openxmlformats.org/drawingml/2006/main">
               <a:ext uri="{FF2B5EF4-FFF2-40B4-BE49-F238E27FC236}">
-                <a16:creationId xmlns:a16="http://schemas.microsoft.com/office/drawing/2014/main" id="{27894755-E80F-418A-AAED-52F4B9114ABF}"/>
+                <a16:creationId xmlns:a16="http://schemas.microsoft.com/office/drawing/2014/main" id="{4F6BFAC1-4316-4A46-BF79-117289B639C2}"/>
               </a:ext>
             </a:extLst>
           </p:cNvPr>
@@ -3071,7 +3071,7 @@
           <p:cNvPr id="14" name="">
             <a:extLst xmlns:a="http://schemas.openxmlformats.org/drawingml/2006/main">
               <a:ext uri="{FF2B5EF4-FFF2-40B4-BE49-F238E27FC236}">
-                <a16:creationId xmlns:a16="http://schemas.microsoft.com/office/drawing/2014/main" id="{5F430A9A-1C71-43AA-9AD9-40270E596188}"/>
+                <a16:creationId xmlns:a16="http://schemas.microsoft.com/office/drawing/2014/main" id="{031BF34E-3C6D-4B5B-A4C5-BCCE5CFEF344}"/>
               </a:ext>
             </a:extLst>
           </p:cNvPr>
@@ -3187,7 +3187,7 @@
           <p:cNvPr id="15" name="">
             <a:extLst xmlns:a="http://schemas.openxmlformats.org/drawingml/2006/main">
               <a:ext uri="{FF2B5EF4-FFF2-40B4-BE49-F238E27FC236}">
-                <a16:creationId xmlns:a16="http://schemas.microsoft.com/office/drawing/2014/main" id="{E7D28DB4-400C-46FC-8C14-2307AF03791B}"/>
+                <a16:creationId xmlns:a16="http://schemas.microsoft.com/office/drawing/2014/main" id="{BCBD8D2F-24CB-4522-A37F-4F7D660875E4}"/>
               </a:ext>
             </a:extLst>
           </p:cNvPr>
@@ -3218,7 +3218,7 @@
           <p:cNvPr id="16" name="">
             <a:extLst xmlns:a="http://schemas.openxmlformats.org/drawingml/2006/main">
               <a:ext uri="{FF2B5EF4-FFF2-40B4-BE49-F238E27FC236}">
-                <a16:creationId xmlns:a16="http://schemas.microsoft.com/office/drawing/2014/main" id="{98A3AC5F-E633-496B-A12C-8C6A5C0B358E}"/>
+                <a16:creationId xmlns:a16="http://schemas.microsoft.com/office/drawing/2014/main" id="{26166457-EA9B-4F55-AB41-73E87F90233C}"/>
               </a:ext>
             </a:extLst>
           </p:cNvPr>
@@ -3258,7 +3258,7 @@
           <p:cNvPr id="17" name="">
             <a:extLst xmlns:a="http://schemas.openxmlformats.org/drawingml/2006/main">
               <a:ext uri="{FF2B5EF4-FFF2-40B4-BE49-F238E27FC236}">
-                <a16:creationId xmlns:a16="http://schemas.microsoft.com/office/drawing/2014/main" id="{ADB06AEB-7410-4B43-BB4C-DC3DBB14C14B}"/>
+                <a16:creationId xmlns:a16="http://schemas.microsoft.com/office/drawing/2014/main" id="{B282904A-1996-424F-A3A4-8B2C3BCFF491}"/>
               </a:ext>
             </a:extLst>
           </p:cNvPr>
@@ -3318,7 +3318,7 @@
     </p:spTree>
     <p:extLst>
       <p:ext uri="{BB962C8B-B14F-4D97-AF65-F5344CB8AC3E}">
-        <p14:creationId xmlns:p14="http://schemas.microsoft.com/office/powerpoint/2010/main" val="632555270"/>
+        <p14:creationId xmlns:p14="http://schemas.microsoft.com/office/powerpoint/2010/main" val="1670975585"/>
       </p:ext>
     </p:extLst>
   </p:cSld>
@@ -3349,7 +3349,7 @@
           <p:cNvPr id="1" name="">
             <a:extLst xmlns:a="http://schemas.openxmlformats.org/drawingml/2006/main">
               <a:ext uri="{FF2B5EF4-FFF2-40B4-BE49-F238E27FC236}">
-                <a16:creationId xmlns:a16="http://schemas.microsoft.com/office/drawing/2014/main" id="{0BB73943-DC0A-4EBA-9A21-BF3006A4070F}"/>
+                <a16:creationId xmlns:a16="http://schemas.microsoft.com/office/drawing/2014/main" id="{26CAC00B-1211-4001-91B1-09C53BD17AF5}"/>
               </a:ext>
             </a:extLst>
           </p:cNvPr>
@@ -3411,7 +3411,7 @@
           <p:cNvPr id="2" name="">
             <a:extLst xmlns:a="http://schemas.openxmlformats.org/drawingml/2006/main">
               <a:ext uri="{FF2B5EF4-FFF2-40B4-BE49-F238E27FC236}">
-                <a16:creationId xmlns:a16="http://schemas.microsoft.com/office/drawing/2014/main" id="{011DEA5D-CA60-4DF4-8870-E01E658DDD4D}"/>
+                <a16:creationId xmlns:a16="http://schemas.microsoft.com/office/drawing/2014/main" id="{00149507-ED47-41FB-A47B-47085A089D32}"/>
               </a:ext>
             </a:extLst>
           </p:cNvPr>
@@ -3473,7 +3473,7 @@
           <p:cNvPr id="3" name="">
             <a:extLst xmlns:a="http://schemas.openxmlformats.org/drawingml/2006/main">
               <a:ext uri="{FF2B5EF4-FFF2-40B4-BE49-F238E27FC236}">
-                <a16:creationId xmlns:a16="http://schemas.microsoft.com/office/drawing/2014/main" id="{8219CD94-6CDC-41CE-A492-2BA9CDEF5717}"/>
+                <a16:creationId xmlns:a16="http://schemas.microsoft.com/office/drawing/2014/main" id="{04CABFB7-3BA3-42DB-9269-F0DF592D3DBB}"/>
               </a:ext>
             </a:extLst>
           </p:cNvPr>
@@ -3514,7 +3514,7 @@
           <p:cNvPr id="4" name="">
             <a:extLst xmlns:a="http://schemas.openxmlformats.org/drawingml/2006/main">
               <a:ext uri="{FF2B5EF4-FFF2-40B4-BE49-F238E27FC236}">
-                <a16:creationId xmlns:a16="http://schemas.microsoft.com/office/drawing/2014/main" id="{E492D50D-AAE2-4314-A234-6E07E45B18AC}"/>
+                <a16:creationId xmlns:a16="http://schemas.microsoft.com/office/drawing/2014/main" id="{11347B8B-C22F-4A3B-A3D0-C016EDDC59A8}"/>
               </a:ext>
             </a:extLst>
           </p:cNvPr>
@@ -3576,7 +3576,7 @@
           <p:cNvPr id="5" name="">
             <a:extLst xmlns:a="http://schemas.openxmlformats.org/drawingml/2006/main">
               <a:ext uri="{FF2B5EF4-FFF2-40B4-BE49-F238E27FC236}">
-                <a16:creationId xmlns:a16="http://schemas.microsoft.com/office/drawing/2014/main" id="{E5132AF9-A111-4FBA-A0AE-0CD44E4F630F}"/>
+                <a16:creationId xmlns:a16="http://schemas.microsoft.com/office/drawing/2014/main" id="{8A904041-9E22-49BF-A529-D0F242CA6EF1}"/>
               </a:ext>
             </a:extLst>
           </p:cNvPr>
@@ -3638,7 +3638,7 @@
           <p:cNvPr id="6" name="">
             <a:extLst xmlns:a="http://schemas.openxmlformats.org/drawingml/2006/main">
               <a:ext uri="{FF2B5EF4-FFF2-40B4-BE49-F238E27FC236}">
-                <a16:creationId xmlns:a16="http://schemas.microsoft.com/office/drawing/2014/main" id="{8E53D7A7-EDB5-45B3-A69F-EE7DA03AA095}"/>
+                <a16:creationId xmlns:a16="http://schemas.microsoft.com/office/drawing/2014/main" id="{0B68AC2D-A05A-4A22-8C31-CDBCE167AF4F}"/>
               </a:ext>
             </a:extLst>
           </p:cNvPr>
@@ -3679,7 +3679,7 @@
           <p:cNvPr id="7" name="">
             <a:extLst xmlns:a="http://schemas.openxmlformats.org/drawingml/2006/main">
               <a:ext uri="{FF2B5EF4-FFF2-40B4-BE49-F238E27FC236}">
-                <a16:creationId xmlns:a16="http://schemas.microsoft.com/office/drawing/2014/main" id="{59896352-F745-4DD7-A8F5-3F6C3CBF566D}"/>
+                <a16:creationId xmlns:a16="http://schemas.microsoft.com/office/drawing/2014/main" id="{DC99BA6C-E4AB-44FD-8C44-4654880CA9D0}"/>
               </a:ext>
             </a:extLst>
           </p:cNvPr>
@@ -3741,7 +3741,7 @@
           <p:cNvPr id="8" name="">
             <a:extLst xmlns:a="http://schemas.openxmlformats.org/drawingml/2006/main">
               <a:ext uri="{FF2B5EF4-FFF2-40B4-BE49-F238E27FC236}">
-                <a16:creationId xmlns:a16="http://schemas.microsoft.com/office/drawing/2014/main" id="{9B5DFAEB-4B8B-48E2-B4F3-51722D3EC0BA}"/>
+                <a16:creationId xmlns:a16="http://schemas.microsoft.com/office/drawing/2014/main" id="{79FF8CBB-0F69-4F1A-9628-B0F9F946BEEF}"/>
               </a:ext>
             </a:extLst>
           </p:cNvPr>
@@ -3803,7 +3803,7 @@
           <p:cNvPr id="9" name="">
             <a:extLst xmlns:a="http://schemas.openxmlformats.org/drawingml/2006/main">
               <a:ext uri="{FF2B5EF4-FFF2-40B4-BE49-F238E27FC236}">
-                <a16:creationId xmlns:a16="http://schemas.microsoft.com/office/drawing/2014/main" id="{3A15A578-B8DE-4319-ACE8-F21C7DC1006D}"/>
+                <a16:creationId xmlns:a16="http://schemas.microsoft.com/office/drawing/2014/main" id="{D1FC776A-FCB2-4C0B-A795-A3084481ECBF}"/>
               </a:ext>
             </a:extLst>
           </p:cNvPr>
@@ -3836,7 +3836,7 @@
           <p:cNvPr id="10" name="">
             <a:extLst xmlns:a="http://schemas.openxmlformats.org/drawingml/2006/main">
               <a:ext uri="{FF2B5EF4-FFF2-40B4-BE49-F238E27FC236}">
-                <a16:creationId xmlns:a16="http://schemas.microsoft.com/office/drawing/2014/main" id="{71C55578-FED8-4CD3-8EB7-F67746EFB198}"/>
+                <a16:creationId xmlns:a16="http://schemas.microsoft.com/office/drawing/2014/main" id="{25D2D821-5305-4D36-9A04-03A7DFEE51C2}"/>
               </a:ext>
             </a:extLst>
           </p:cNvPr>
@@ -3869,7 +3869,7 @@
           <p:cNvPr id="11" name="">
             <a:extLst xmlns:a="http://schemas.openxmlformats.org/drawingml/2006/main">
               <a:ext uri="{FF2B5EF4-FFF2-40B4-BE49-F238E27FC236}">
-                <a16:creationId xmlns:a16="http://schemas.microsoft.com/office/drawing/2014/main" id="{809BD50E-0DEA-47AB-846A-835C0B8CD66A}"/>
+                <a16:creationId xmlns:a16="http://schemas.microsoft.com/office/drawing/2014/main" id="{B1B781FC-41D4-4C53-BC07-FA867FE63EF0}"/>
               </a:ext>
             </a:extLst>
           </p:cNvPr>
@@ -3931,7 +3931,7 @@
           <p:cNvPr id="12" name="">
             <a:extLst xmlns:a="http://schemas.openxmlformats.org/drawingml/2006/main">
               <a:ext uri="{FF2B5EF4-FFF2-40B4-BE49-F238E27FC236}">
-                <a16:creationId xmlns:a16="http://schemas.microsoft.com/office/drawing/2014/main" id="{3494CB4D-9688-44A3-91D3-3F6EEE39C15E}"/>
+                <a16:creationId xmlns:a16="http://schemas.microsoft.com/office/drawing/2014/main" id="{53265572-6C84-4995-80B3-87F7B05FD8E6}"/>
               </a:ext>
             </a:extLst>
           </p:cNvPr>
@@ -3972,7 +3972,7 @@
           <p:cNvPr id="13" name="">
             <a:extLst xmlns:a="http://schemas.openxmlformats.org/drawingml/2006/main">
               <a:ext uri="{FF2B5EF4-FFF2-40B4-BE49-F238E27FC236}">
-                <a16:creationId xmlns:a16="http://schemas.microsoft.com/office/drawing/2014/main" id="{8422FCBC-9949-468A-9140-DDF3F1C01609}"/>
+                <a16:creationId xmlns:a16="http://schemas.microsoft.com/office/drawing/2014/main" id="{7368065D-D7C7-41D2-BB12-E1052739936D}"/>
               </a:ext>
             </a:extLst>
           </p:cNvPr>
@@ -4003,7 +4003,7 @@
           <p:cNvPr id="14" name="">
             <a:extLst xmlns:a="http://schemas.openxmlformats.org/drawingml/2006/main">
               <a:ext uri="{FF2B5EF4-FFF2-40B4-BE49-F238E27FC236}">
-                <a16:creationId xmlns:a16="http://schemas.microsoft.com/office/drawing/2014/main" id="{A526BDAE-72CE-4B1F-955B-15AC74F37632}"/>
+                <a16:creationId xmlns:a16="http://schemas.microsoft.com/office/drawing/2014/main" id="{22679C7E-CDC4-4DAC-A2CC-9ACD5FEFAC82}"/>
               </a:ext>
             </a:extLst>
           </p:cNvPr>
@@ -4036,7 +4036,7 @@
           <p:cNvPr id="15" name="">
             <a:extLst xmlns:a="http://schemas.openxmlformats.org/drawingml/2006/main">
               <a:ext uri="{FF2B5EF4-FFF2-40B4-BE49-F238E27FC236}">
-                <a16:creationId xmlns:a16="http://schemas.microsoft.com/office/drawing/2014/main" id="{98B2BC29-43E1-4AC6-902C-AB6C2FB3A031}"/>
+                <a16:creationId xmlns:a16="http://schemas.microsoft.com/office/drawing/2014/main" id="{CCB304CF-FF67-473C-B0BA-7E2BC68179DB}"/>
               </a:ext>
             </a:extLst>
           </p:cNvPr>
@@ -4069,7 +4069,7 @@
           <p:cNvPr id="16" name="">
             <a:extLst xmlns:a="http://schemas.openxmlformats.org/drawingml/2006/main">
               <a:ext uri="{FF2B5EF4-FFF2-40B4-BE49-F238E27FC236}">
-                <a16:creationId xmlns:a16="http://schemas.microsoft.com/office/drawing/2014/main" id="{C5620ABC-1DF9-4240-B779-96B82D187E9E}"/>
+                <a16:creationId xmlns:a16="http://schemas.microsoft.com/office/drawing/2014/main" id="{1DC1C08F-CD67-4BAE-B2E0-BFEA24F77212}"/>
               </a:ext>
             </a:extLst>
           </p:cNvPr>
@@ -4102,7 +4102,7 @@
           <p:cNvPr id="17" name="">
             <a:extLst xmlns:a="http://schemas.openxmlformats.org/drawingml/2006/main">
               <a:ext uri="{FF2B5EF4-FFF2-40B4-BE49-F238E27FC236}">
-                <a16:creationId xmlns:a16="http://schemas.microsoft.com/office/drawing/2014/main" id="{152B6F33-2EB4-4DD5-BE7B-6260D7B599DA}"/>
+                <a16:creationId xmlns:a16="http://schemas.microsoft.com/office/drawing/2014/main" id="{17081418-C601-4AE5-B159-7CE1F3B8C38D}"/>
               </a:ext>
             </a:extLst>
           </p:cNvPr>
@@ -4135,7 +4135,7 @@
           <p:cNvPr id="18" name="">
             <a:extLst xmlns:a="http://schemas.openxmlformats.org/drawingml/2006/main">
               <a:ext uri="{FF2B5EF4-FFF2-40B4-BE49-F238E27FC236}">
-                <a16:creationId xmlns:a16="http://schemas.microsoft.com/office/drawing/2014/main" id="{7AD9F27D-F08C-45D7-AD62-14ECDD3E4A10}"/>
+                <a16:creationId xmlns:a16="http://schemas.microsoft.com/office/drawing/2014/main" id="{411E0B70-4B24-446E-AB79-0C23CEBC61FA}"/>
               </a:ext>
             </a:extLst>
           </p:cNvPr>
@@ -4168,7 +4168,7 @@
           <p:cNvPr id="19" name="">
             <a:extLst xmlns:a="http://schemas.openxmlformats.org/drawingml/2006/main">
               <a:ext uri="{FF2B5EF4-FFF2-40B4-BE49-F238E27FC236}">
-                <a16:creationId xmlns:a16="http://schemas.microsoft.com/office/drawing/2014/main" id="{4A18C7E9-4084-4DE7-B7F5-B58EDBEC58BA}"/>
+                <a16:creationId xmlns:a16="http://schemas.microsoft.com/office/drawing/2014/main" id="{BA3CF167-F248-4C54-B29D-DB87107F1134}"/>
               </a:ext>
             </a:extLst>
           </p:cNvPr>
@@ -4209,7 +4209,7 @@
           <p:cNvPr id="20" name="">
             <a:extLst xmlns:a="http://schemas.openxmlformats.org/drawingml/2006/main">
               <a:ext uri="{FF2B5EF4-FFF2-40B4-BE49-F238E27FC236}">
-                <a16:creationId xmlns:a16="http://schemas.microsoft.com/office/drawing/2014/main" id="{E41546D5-BDF5-4297-B237-47DC08E7CF6B}"/>
+                <a16:creationId xmlns:a16="http://schemas.microsoft.com/office/drawing/2014/main" id="{97EAC94C-3B91-4E51-9998-553520BBE480}"/>
               </a:ext>
             </a:extLst>
           </p:cNvPr>
@@ -4271,7 +4271,7 @@
           <p:cNvPr id="21" name="">
             <a:extLst xmlns:a="http://schemas.openxmlformats.org/drawingml/2006/main">
               <a:ext uri="{FF2B5EF4-FFF2-40B4-BE49-F238E27FC236}">
-                <a16:creationId xmlns:a16="http://schemas.microsoft.com/office/drawing/2014/main" id="{A5BC8C36-8E78-490B-804E-917279831C93}"/>
+                <a16:creationId xmlns:a16="http://schemas.microsoft.com/office/drawing/2014/main" id="{8F94F8CC-290E-4636-97DA-15BC086863BD}"/>
               </a:ext>
             </a:extLst>
           </p:cNvPr>
@@ -4312,7 +4312,7 @@
           <p:cNvPr id="22" name="">
             <a:extLst xmlns:a="http://schemas.openxmlformats.org/drawingml/2006/main">
               <a:ext uri="{FF2B5EF4-FFF2-40B4-BE49-F238E27FC236}">
-                <a16:creationId xmlns:a16="http://schemas.microsoft.com/office/drawing/2014/main" id="{46CC50AF-0C8F-4A00-823E-37BE69F7B55E}"/>
+                <a16:creationId xmlns:a16="http://schemas.microsoft.com/office/drawing/2014/main" id="{27F41A69-9A66-42A3-B2E3-4D5E9F3243B0}"/>
               </a:ext>
             </a:extLst>
           </p:cNvPr>
@@ -4374,7 +4374,7 @@
           <p:cNvPr id="23" name="">
             <a:extLst xmlns:a="http://schemas.openxmlformats.org/drawingml/2006/main">
               <a:ext uri="{FF2B5EF4-FFF2-40B4-BE49-F238E27FC236}">
-                <a16:creationId xmlns:a16="http://schemas.microsoft.com/office/drawing/2014/main" id="{2A4562FB-E06B-4847-9BAD-F5E9B7AF5123}"/>
+                <a16:creationId xmlns:a16="http://schemas.microsoft.com/office/drawing/2014/main" id="{162AE048-6C5A-4FAE-914A-D95D77F6F94E}"/>
               </a:ext>
             </a:extLst>
           </p:cNvPr>
@@ -4415,7 +4415,7 @@
           <p:cNvPr id="24" name="">
             <a:extLst xmlns:a="http://schemas.openxmlformats.org/drawingml/2006/main">
               <a:ext uri="{FF2B5EF4-FFF2-40B4-BE49-F238E27FC236}">
-                <a16:creationId xmlns:a16="http://schemas.microsoft.com/office/drawing/2014/main" id="{D2E738EE-516C-4CC8-89BA-8472D40118EE}"/>
+                <a16:creationId xmlns:a16="http://schemas.microsoft.com/office/drawing/2014/main" id="{88F97EC1-12B7-46CF-B36E-4E44CFCAC1B6}"/>
               </a:ext>
             </a:extLst>
           </p:cNvPr>
@@ -4477,7 +4477,7 @@
           <p:cNvPr id="25" name="">
             <a:extLst xmlns:a="http://schemas.openxmlformats.org/drawingml/2006/main">
               <a:ext uri="{FF2B5EF4-FFF2-40B4-BE49-F238E27FC236}">
-                <a16:creationId xmlns:a16="http://schemas.microsoft.com/office/drawing/2014/main" id="{9D5813D5-9BBB-4BDC-A62F-7592F750EA8B}"/>
+                <a16:creationId xmlns:a16="http://schemas.microsoft.com/office/drawing/2014/main" id="{009FD88C-BD59-4981-B30D-DD38DE36F9D6}"/>
               </a:ext>
             </a:extLst>
           </p:cNvPr>
@@ -4518,7 +4518,7 @@
           <p:cNvPr id="26" name="">
             <a:extLst xmlns:a="http://schemas.openxmlformats.org/drawingml/2006/main">
               <a:ext uri="{FF2B5EF4-FFF2-40B4-BE49-F238E27FC236}">
-                <a16:creationId xmlns:a16="http://schemas.microsoft.com/office/drawing/2014/main" id="{B5710F6C-9D7F-4AFE-8CBF-8711837E1492}"/>
+                <a16:creationId xmlns:a16="http://schemas.microsoft.com/office/drawing/2014/main" id="{5667AFAB-F9BC-4F39-8D1F-1BA009866E47}"/>
               </a:ext>
             </a:extLst>
           </p:cNvPr>
@@ -4580,7 +4580,7 @@
           <p:cNvPr id="27" name="">
             <a:extLst xmlns:a="http://schemas.openxmlformats.org/drawingml/2006/main">
               <a:ext uri="{FF2B5EF4-FFF2-40B4-BE49-F238E27FC236}">
-                <a16:creationId xmlns:a16="http://schemas.microsoft.com/office/drawing/2014/main" id="{05BC9642-A2F9-456C-866B-DF56C9A49AE1}"/>
+                <a16:creationId xmlns:a16="http://schemas.microsoft.com/office/drawing/2014/main" id="{A148FB2C-F6FA-40CD-A9DE-F6C0C0139BAF}"/>
               </a:ext>
             </a:extLst>
           </p:cNvPr>
@@ -4621,7 +4621,7 @@
           <p:cNvPr id="28" name="">
             <a:extLst xmlns:a="http://schemas.openxmlformats.org/drawingml/2006/main">
               <a:ext uri="{FF2B5EF4-FFF2-40B4-BE49-F238E27FC236}">
-                <a16:creationId xmlns:a16="http://schemas.microsoft.com/office/drawing/2014/main" id="{3D156E01-D489-41D1-B397-0020D258592D}"/>
+                <a16:creationId xmlns:a16="http://schemas.microsoft.com/office/drawing/2014/main" id="{31F72A1A-699A-418C-8534-C61E70205DA1}"/>
               </a:ext>
             </a:extLst>
           </p:cNvPr>
@@ -4683,7 +4683,7 @@
           <p:cNvPr id="29" name="">
             <a:extLst xmlns:a="http://schemas.openxmlformats.org/drawingml/2006/main">
               <a:ext uri="{FF2B5EF4-FFF2-40B4-BE49-F238E27FC236}">
-                <a16:creationId xmlns:a16="http://schemas.microsoft.com/office/drawing/2014/main" id="{3867131A-8E47-42F0-B24F-269B6E94C0FE}"/>
+                <a16:creationId xmlns:a16="http://schemas.microsoft.com/office/drawing/2014/main" id="{9674D271-E524-4313-A195-C80A7236AD67}"/>
               </a:ext>
             </a:extLst>
           </p:cNvPr>
@@ -4724,7 +4724,7 @@
           <p:cNvPr id="30" name="">
             <a:extLst xmlns:a="http://schemas.openxmlformats.org/drawingml/2006/main">
               <a:ext uri="{FF2B5EF4-FFF2-40B4-BE49-F238E27FC236}">
-                <a16:creationId xmlns:a16="http://schemas.microsoft.com/office/drawing/2014/main" id="{7328A851-689C-44DF-9839-B8497C41B9F1}"/>
+                <a16:creationId xmlns:a16="http://schemas.microsoft.com/office/drawing/2014/main" id="{A66EEFD0-6364-41D2-AD10-A5D6489A357F}"/>
               </a:ext>
             </a:extLst>
           </p:cNvPr>
@@ -4786,7 +4786,7 @@
           <p:cNvPr id="31" name="">
             <a:extLst xmlns:a="http://schemas.openxmlformats.org/drawingml/2006/main">
               <a:ext uri="{FF2B5EF4-FFF2-40B4-BE49-F238E27FC236}">
-                <a16:creationId xmlns:a16="http://schemas.microsoft.com/office/drawing/2014/main" id="{A4157825-9BA9-4EA4-B715-F9D94A7F9C23}"/>
+                <a16:creationId xmlns:a16="http://schemas.microsoft.com/office/drawing/2014/main" id="{443D65A9-A3CA-4801-9686-C029FD912822}"/>
               </a:ext>
             </a:extLst>
           </p:cNvPr>
@@ -4827,7 +4827,7 @@
           <p:cNvPr id="32" name="">
             <a:extLst xmlns:a="http://schemas.openxmlformats.org/drawingml/2006/main">
               <a:ext uri="{FF2B5EF4-FFF2-40B4-BE49-F238E27FC236}">
-                <a16:creationId xmlns:a16="http://schemas.microsoft.com/office/drawing/2014/main" id="{1CC5F722-914D-40C0-AB55-7C531FA32085}"/>
+                <a16:creationId xmlns:a16="http://schemas.microsoft.com/office/drawing/2014/main" id="{971639A9-69DD-423E-924E-C58352A9BFB2}"/>
               </a:ext>
             </a:extLst>
           </p:cNvPr>
@@ -4889,7 +4889,7 @@
           <p:cNvPr id="33" name="">
             <a:extLst xmlns:a="http://schemas.openxmlformats.org/drawingml/2006/main">
               <a:ext uri="{FF2B5EF4-FFF2-40B4-BE49-F238E27FC236}">
-                <a16:creationId xmlns:a16="http://schemas.microsoft.com/office/drawing/2014/main" id="{52E7F699-67E9-447B-8758-ECCE14C24B4B}"/>
+                <a16:creationId xmlns:a16="http://schemas.microsoft.com/office/drawing/2014/main" id="{FBFB9F83-33DC-4F78-960E-FF55857C581B}"/>
               </a:ext>
             </a:extLst>
           </p:cNvPr>
@@ -4951,7 +4951,7 @@
           <p:cNvPr id="34" name="">
             <a:extLst xmlns:a="http://schemas.openxmlformats.org/drawingml/2006/main">
               <a:ext uri="{FF2B5EF4-FFF2-40B4-BE49-F238E27FC236}">
-                <a16:creationId xmlns:a16="http://schemas.microsoft.com/office/drawing/2014/main" id="{02FFCF78-5AE6-463E-A77C-B22A20D72FC8}"/>
+                <a16:creationId xmlns:a16="http://schemas.microsoft.com/office/drawing/2014/main" id="{977749D0-1F0E-406A-9FC6-1A21E1081807}"/>
               </a:ext>
             </a:extLst>
           </p:cNvPr>
@@ -4992,7 +4992,7 @@
           <p:cNvPr id="35" name="">
             <a:extLst xmlns:a="http://schemas.openxmlformats.org/drawingml/2006/main">
               <a:ext uri="{FF2B5EF4-FFF2-40B4-BE49-F238E27FC236}">
-                <a16:creationId xmlns:a16="http://schemas.microsoft.com/office/drawing/2014/main" id="{E2B8DEC6-601A-4094-9B9B-8D06C6A22D11}"/>
+                <a16:creationId xmlns:a16="http://schemas.microsoft.com/office/drawing/2014/main" id="{C0C68C45-7843-474C-958B-88ADCAE5A5A0}"/>
               </a:ext>
             </a:extLst>
           </p:cNvPr>
@@ -5054,7 +5054,7 @@
           <p:cNvPr id="36" name="">
             <a:extLst xmlns:a="http://schemas.openxmlformats.org/drawingml/2006/main">
               <a:ext uri="{FF2B5EF4-FFF2-40B4-BE49-F238E27FC236}">
-                <a16:creationId xmlns:a16="http://schemas.microsoft.com/office/drawing/2014/main" id="{97F00469-D1D4-4C9C-8894-B15DFD9A5AFB}"/>
+                <a16:creationId xmlns:a16="http://schemas.microsoft.com/office/drawing/2014/main" id="{D2B4011D-04C0-4EA1-BB0D-59F5926D5DEB}"/>
               </a:ext>
             </a:extLst>
           </p:cNvPr>
@@ -5116,7 +5116,7 @@
           <p:cNvPr id="37" name="">
             <a:extLst xmlns:a="http://schemas.openxmlformats.org/drawingml/2006/main">
               <a:ext uri="{FF2B5EF4-FFF2-40B4-BE49-F238E27FC236}">
-                <a16:creationId xmlns:a16="http://schemas.microsoft.com/office/drawing/2014/main" id="{37C4EFD5-9A77-4145-9DCB-DE84BFAB4F10}"/>
+                <a16:creationId xmlns:a16="http://schemas.microsoft.com/office/drawing/2014/main" id="{BEFA658B-02F4-4D35-B24F-DF3B66D57814}"/>
               </a:ext>
             </a:extLst>
           </p:cNvPr>
@@ -5178,7 +5178,7 @@
           <p:cNvPr id="38" name="">
             <a:extLst xmlns:a="http://schemas.openxmlformats.org/drawingml/2006/main">
               <a:ext uri="{FF2B5EF4-FFF2-40B4-BE49-F238E27FC236}">
-                <a16:creationId xmlns:a16="http://schemas.microsoft.com/office/drawing/2014/main" id="{93DB1F37-7490-4C12-8F65-72A2ED6B5423}"/>
+                <a16:creationId xmlns:a16="http://schemas.microsoft.com/office/drawing/2014/main" id="{F6D02F9F-FD18-4844-BFE3-25EA4F26803E}"/>
               </a:ext>
             </a:extLst>
           </p:cNvPr>
@@ -5209,7 +5209,7 @@
           <p:cNvPr id="39" name="">
             <a:extLst xmlns:a="http://schemas.openxmlformats.org/drawingml/2006/main">
               <a:ext uri="{FF2B5EF4-FFF2-40B4-BE49-F238E27FC236}">
-                <a16:creationId xmlns:a16="http://schemas.microsoft.com/office/drawing/2014/main" id="{F57A7301-BA8D-44B0-A1A5-B136A87EDD3B}"/>
+                <a16:creationId xmlns:a16="http://schemas.microsoft.com/office/drawing/2014/main" id="{3CE584BB-71B8-40B1-9828-1CE9E8E2857A}"/>
               </a:ext>
             </a:extLst>
           </p:cNvPr>
@@ -5271,7 +5271,7 @@
           <p:cNvPr id="40" name="">
             <a:extLst xmlns:a="http://schemas.openxmlformats.org/drawingml/2006/main">
               <a:ext uri="{FF2B5EF4-FFF2-40B4-BE49-F238E27FC236}">
-                <a16:creationId xmlns:a16="http://schemas.microsoft.com/office/drawing/2014/main" id="{F2A3BAA4-6CCF-4F79-A346-8ACC4F1C174B}"/>
+                <a16:creationId xmlns:a16="http://schemas.microsoft.com/office/drawing/2014/main" id="{D809BFF4-591C-46D1-909B-F2EA310C2A16}"/>
               </a:ext>
             </a:extLst>
           </p:cNvPr>
@@ -5331,7 +5331,7 @@
     </p:spTree>
     <p:extLst>
       <p:ext uri="{BB962C8B-B14F-4D97-AF65-F5344CB8AC3E}">
-        <p14:creationId xmlns:p14="http://schemas.microsoft.com/office/powerpoint/2010/main" val="1873926239"/>
+        <p14:creationId xmlns:p14="http://schemas.microsoft.com/office/powerpoint/2010/main" val="1615982306"/>
       </p:ext>
     </p:extLst>
   </p:cSld>
@@ -5362,7 +5362,7 @@
           <p:cNvPr id="1" name="">
             <a:extLst xmlns:a="http://schemas.openxmlformats.org/drawingml/2006/main">
               <a:ext uri="{FF2B5EF4-FFF2-40B4-BE49-F238E27FC236}">
-                <a16:creationId xmlns:a16="http://schemas.microsoft.com/office/drawing/2014/main" id="{9E0F6FDB-1697-4B65-B7E2-D920E70B2A24}"/>
+                <a16:creationId xmlns:a16="http://schemas.microsoft.com/office/drawing/2014/main" id="{B2C89875-2401-419B-AECB-CF655020B946}"/>
               </a:ext>
             </a:extLst>
           </p:cNvPr>
@@ -5424,7 +5424,7 @@
           <p:cNvPr id="2" name="">
             <a:extLst xmlns:a="http://schemas.openxmlformats.org/drawingml/2006/main">
               <a:ext uri="{FF2B5EF4-FFF2-40B4-BE49-F238E27FC236}">
-                <a16:creationId xmlns:a16="http://schemas.microsoft.com/office/drawing/2014/main" id="{4B661297-4EED-43A7-B4ED-3CD3371DB95D}"/>
+                <a16:creationId xmlns:a16="http://schemas.microsoft.com/office/drawing/2014/main" id="{B4FF65CE-2262-4451-B91C-B182F5205BF1}"/>
               </a:ext>
             </a:extLst>
           </p:cNvPr>
@@ -5486,7 +5486,7 @@
           <p:cNvPr id="3" name="">
             <a:extLst xmlns:a="http://schemas.openxmlformats.org/drawingml/2006/main">
               <a:ext uri="{FF2B5EF4-FFF2-40B4-BE49-F238E27FC236}">
-                <a16:creationId xmlns:a16="http://schemas.microsoft.com/office/drawing/2014/main" id="{A5AEBE53-6A5A-4432-A223-B4B8BDBF6DA1}"/>
+                <a16:creationId xmlns:a16="http://schemas.microsoft.com/office/drawing/2014/main" id="{8A23C3BD-4128-4B9A-8895-CB2B8DA4C868}"/>
               </a:ext>
             </a:extLst>
           </p:cNvPr>
@@ -5548,7 +5548,7 @@
           <p:cNvPr id="4" name="">
             <a:extLst xmlns:a="http://schemas.openxmlformats.org/drawingml/2006/main">
               <a:ext uri="{FF2B5EF4-FFF2-40B4-BE49-F238E27FC236}">
-                <a16:creationId xmlns:a16="http://schemas.microsoft.com/office/drawing/2014/main" id="{4D03A86E-89C9-41FC-B480-F76133454B44}"/>
+                <a16:creationId xmlns:a16="http://schemas.microsoft.com/office/drawing/2014/main" id="{B8855A0B-3965-46A2-92F1-E9971FC17490}"/>
               </a:ext>
             </a:extLst>
           </p:cNvPr>
@@ -5610,7 +5610,7 @@
           <p:cNvPr id="5" name="">
             <a:extLst xmlns:a="http://schemas.openxmlformats.org/drawingml/2006/main">
               <a:ext uri="{FF2B5EF4-FFF2-40B4-BE49-F238E27FC236}">
-                <a16:creationId xmlns:a16="http://schemas.microsoft.com/office/drawing/2014/main" id="{75377235-7F6C-47EB-8F62-BA354E3E2819}"/>
+                <a16:creationId xmlns:a16="http://schemas.microsoft.com/office/drawing/2014/main" id="{E4C87FD7-3540-4EFD-9498-99A469FD1C3E}"/>
               </a:ext>
             </a:extLst>
           </p:cNvPr>
@@ -5674,7 +5674,7 @@
           <p:cNvPr id="6" name="">
             <a:extLst xmlns:a="http://schemas.openxmlformats.org/drawingml/2006/main">
               <a:ext uri="{FF2B5EF4-FFF2-40B4-BE49-F238E27FC236}">
-                <a16:creationId xmlns:a16="http://schemas.microsoft.com/office/drawing/2014/main" id="{0301FCD8-DF94-4D61-B13D-D1EA7F6491D0}"/>
+                <a16:creationId xmlns:a16="http://schemas.microsoft.com/office/drawing/2014/main" id="{5C3BAEA5-9C8E-4BCB-B44C-E989A4C228BD}"/>
               </a:ext>
             </a:extLst>
           </p:cNvPr>
@@ -5764,7 +5764,7 @@
           <p:cNvPr id="8" name="">
             <a:extLst xmlns:a="http://schemas.openxmlformats.org/drawingml/2006/main">
               <a:ext uri="{FF2B5EF4-FFF2-40B4-BE49-F238E27FC236}">
-                <a16:creationId xmlns:a16="http://schemas.microsoft.com/office/drawing/2014/main" id="{ED8833CD-2ECC-4A2C-A367-95724DE2CA43}"/>
+                <a16:creationId xmlns:a16="http://schemas.microsoft.com/office/drawing/2014/main" id="{829125B5-DF8C-47A6-9D1B-5F6DD82E9F1C}"/>
               </a:ext>
             </a:extLst>
           </p:cNvPr>
@@ -5828,7 +5828,7 @@
           <p:cNvPr id="9" name="">
             <a:extLst xmlns:a="http://schemas.openxmlformats.org/drawingml/2006/main">
               <a:ext uri="{FF2B5EF4-FFF2-40B4-BE49-F238E27FC236}">
-                <a16:creationId xmlns:a16="http://schemas.microsoft.com/office/drawing/2014/main" id="{70595384-BEC9-4F93-B0BB-CAF18DFCF43D}"/>
+                <a16:creationId xmlns:a16="http://schemas.microsoft.com/office/drawing/2014/main" id="{FDBB2FC9-57EF-4812-8EFB-A0FD7E1FD843}"/>
               </a:ext>
             </a:extLst>
           </p:cNvPr>
@@ -5918,7 +5918,7 @@
           <p:cNvPr id="11" name="">
             <a:extLst xmlns:a="http://schemas.openxmlformats.org/drawingml/2006/main">
               <a:ext uri="{FF2B5EF4-FFF2-40B4-BE49-F238E27FC236}">
-                <a16:creationId xmlns:a16="http://schemas.microsoft.com/office/drawing/2014/main" id="{2A8F1C4D-9429-4B98-A5EC-9619DE574CC5}"/>
+                <a16:creationId xmlns:a16="http://schemas.microsoft.com/office/drawing/2014/main" id="{81D713A8-1D26-497B-9FB8-ABC00B7CA7A1}"/>
               </a:ext>
             </a:extLst>
           </p:cNvPr>
@@ -5982,7 +5982,7 @@
           <p:cNvPr id="12" name="">
             <a:extLst xmlns:a="http://schemas.openxmlformats.org/drawingml/2006/main">
               <a:ext uri="{FF2B5EF4-FFF2-40B4-BE49-F238E27FC236}">
-                <a16:creationId xmlns:a16="http://schemas.microsoft.com/office/drawing/2014/main" id="{17CEBB33-8361-4EB9-A457-3730A0154919}"/>
+                <a16:creationId xmlns:a16="http://schemas.microsoft.com/office/drawing/2014/main" id="{C6AEB154-7126-4D61-97AA-EA45EED9651A}"/>
               </a:ext>
             </a:extLst>
           </p:cNvPr>
@@ -6072,7 +6072,7 @@
           <p:cNvPr id="14" name="">
             <a:extLst xmlns:a="http://schemas.openxmlformats.org/drawingml/2006/main">
               <a:ext uri="{FF2B5EF4-FFF2-40B4-BE49-F238E27FC236}">
-                <a16:creationId xmlns:a16="http://schemas.microsoft.com/office/drawing/2014/main" id="{939103AE-AB6F-4967-80F4-22EE396FCEC9}"/>
+                <a16:creationId xmlns:a16="http://schemas.microsoft.com/office/drawing/2014/main" id="{937BB4D0-20B1-469B-B07F-8B328E094D19}"/>
               </a:ext>
             </a:extLst>
           </p:cNvPr>
@@ -6136,7 +6136,7 @@
           <p:cNvPr id="15" name="">
             <a:extLst xmlns:a="http://schemas.openxmlformats.org/drawingml/2006/main">
               <a:ext uri="{FF2B5EF4-FFF2-40B4-BE49-F238E27FC236}">
-                <a16:creationId xmlns:a16="http://schemas.microsoft.com/office/drawing/2014/main" id="{CB4F82B8-DFF0-4AA9-8399-D2602DA33AE3}"/>
+                <a16:creationId xmlns:a16="http://schemas.microsoft.com/office/drawing/2014/main" id="{ED4F336F-258B-4188-B30E-6DEEAB73D1D4}"/>
               </a:ext>
             </a:extLst>
           </p:cNvPr>
@@ -6226,7 +6226,7 @@
           <p:cNvPr id="17" name="">
             <a:extLst xmlns:a="http://schemas.openxmlformats.org/drawingml/2006/main">
               <a:ext uri="{FF2B5EF4-FFF2-40B4-BE49-F238E27FC236}">
-                <a16:creationId xmlns:a16="http://schemas.microsoft.com/office/drawing/2014/main" id="{FFB4FB0A-062D-49D7-AE80-B09F23170715}"/>
+                <a16:creationId xmlns:a16="http://schemas.microsoft.com/office/drawing/2014/main" id="{C7983A74-FA48-4397-BE59-61284854E91A}"/>
               </a:ext>
             </a:extLst>
           </p:cNvPr>
@@ -6290,7 +6290,7 @@
           <p:cNvPr id="18" name="">
             <a:extLst xmlns:a="http://schemas.openxmlformats.org/drawingml/2006/main">
               <a:ext uri="{FF2B5EF4-FFF2-40B4-BE49-F238E27FC236}">
-                <a16:creationId xmlns:a16="http://schemas.microsoft.com/office/drawing/2014/main" id="{FE00575C-5D74-4064-B5C8-4C9C2CDC6259}"/>
+                <a16:creationId xmlns:a16="http://schemas.microsoft.com/office/drawing/2014/main" id="{BC2EBF7A-BB99-4530-8F74-0529D7773A29}"/>
               </a:ext>
             </a:extLst>
           </p:cNvPr>
@@ -6380,7 +6380,7 @@
           <p:cNvPr id="20" name="">
             <a:extLst xmlns:a="http://schemas.openxmlformats.org/drawingml/2006/main">
               <a:ext uri="{FF2B5EF4-FFF2-40B4-BE49-F238E27FC236}">
-                <a16:creationId xmlns:a16="http://schemas.microsoft.com/office/drawing/2014/main" id="{5D8AFC55-5AB3-45BB-B7F4-5B6230C51B30}"/>
+                <a16:creationId xmlns:a16="http://schemas.microsoft.com/office/drawing/2014/main" id="{76830124-1A2D-4A81-9D16-D2675773FE13}"/>
               </a:ext>
             </a:extLst>
           </p:cNvPr>
@@ -6444,7 +6444,7 @@
           <p:cNvPr id="21" name="">
             <a:extLst xmlns:a="http://schemas.openxmlformats.org/drawingml/2006/main">
               <a:ext uri="{FF2B5EF4-FFF2-40B4-BE49-F238E27FC236}">
-                <a16:creationId xmlns:a16="http://schemas.microsoft.com/office/drawing/2014/main" id="{4C0AA6D7-FA93-48BE-9BE6-EB8B77F9B45A}"/>
+                <a16:creationId xmlns:a16="http://schemas.microsoft.com/office/drawing/2014/main" id="{3B235BFF-2AC3-4A0F-9B4D-C51E17F377B2}"/>
               </a:ext>
             </a:extLst>
           </p:cNvPr>
@@ -6534,7 +6534,7 @@
           <p:cNvPr id="23" name="">
             <a:extLst xmlns:a="http://schemas.openxmlformats.org/drawingml/2006/main">
               <a:ext uri="{FF2B5EF4-FFF2-40B4-BE49-F238E27FC236}">
-                <a16:creationId xmlns:a16="http://schemas.microsoft.com/office/drawing/2014/main" id="{312BC214-217F-4DF2-953C-3D416FF8EF3D}"/>
+                <a16:creationId xmlns:a16="http://schemas.microsoft.com/office/drawing/2014/main" id="{BF96CAF1-C211-44F7-8592-26DEFFE402AC}"/>
               </a:ext>
             </a:extLst>
           </p:cNvPr>
@@ -6598,7 +6598,7 @@
           <p:cNvPr id="24" name="">
             <a:extLst xmlns:a="http://schemas.openxmlformats.org/drawingml/2006/main">
               <a:ext uri="{FF2B5EF4-FFF2-40B4-BE49-F238E27FC236}">
-                <a16:creationId xmlns:a16="http://schemas.microsoft.com/office/drawing/2014/main" id="{440FB90D-B92C-46EC-BFAE-40F6AB616F5C}"/>
+                <a16:creationId xmlns:a16="http://schemas.microsoft.com/office/drawing/2014/main" id="{E7AE1305-78F7-45D1-87F7-1862EA77892D}"/>
               </a:ext>
             </a:extLst>
           </p:cNvPr>
@@ -6688,7 +6688,7 @@
           <p:cNvPr id="26" name="">
             <a:extLst xmlns:a="http://schemas.openxmlformats.org/drawingml/2006/main">
               <a:ext uri="{FF2B5EF4-FFF2-40B4-BE49-F238E27FC236}">
-                <a16:creationId xmlns:a16="http://schemas.microsoft.com/office/drawing/2014/main" id="{2A38D68E-0F07-42BA-A3DB-CF284F43EBA1}"/>
+                <a16:creationId xmlns:a16="http://schemas.microsoft.com/office/drawing/2014/main" id="{43C809F4-8F38-4D77-9B19-891283678ED3}"/>
               </a:ext>
             </a:extLst>
           </p:cNvPr>
@@ -6752,7 +6752,7 @@
           <p:cNvPr id="27" name="">
             <a:extLst xmlns:a="http://schemas.openxmlformats.org/drawingml/2006/main">
               <a:ext uri="{FF2B5EF4-FFF2-40B4-BE49-F238E27FC236}">
-                <a16:creationId xmlns:a16="http://schemas.microsoft.com/office/drawing/2014/main" id="{19519764-B142-474B-BCE3-0CCE1F95B122}"/>
+                <a16:creationId xmlns:a16="http://schemas.microsoft.com/office/drawing/2014/main" id="{42DEF867-1290-4C67-9E42-587C8F9992EF}"/>
               </a:ext>
             </a:extLst>
           </p:cNvPr>
@@ -6842,7 +6842,7 @@
           <p:cNvPr id="29" name="">
             <a:extLst xmlns:a="http://schemas.openxmlformats.org/drawingml/2006/main">
               <a:ext uri="{FF2B5EF4-FFF2-40B4-BE49-F238E27FC236}">
-                <a16:creationId xmlns:a16="http://schemas.microsoft.com/office/drawing/2014/main" id="{4C7EA511-8386-4A73-A76A-65AA6B62EFB8}"/>
+                <a16:creationId xmlns:a16="http://schemas.microsoft.com/office/drawing/2014/main" id="{0ECD7BA9-AA9C-440F-B96E-BB367C4EE658}"/>
               </a:ext>
             </a:extLst>
           </p:cNvPr>
@@ -6873,7 +6873,7 @@
           <p:cNvPr id="30" name="">
             <a:extLst xmlns:a="http://schemas.openxmlformats.org/drawingml/2006/main">
               <a:ext uri="{FF2B5EF4-FFF2-40B4-BE49-F238E27FC236}">
-                <a16:creationId xmlns:a16="http://schemas.microsoft.com/office/drawing/2014/main" id="{E4C83CAB-EE78-46E7-BEEA-20317B082C86}"/>
+                <a16:creationId xmlns:a16="http://schemas.microsoft.com/office/drawing/2014/main" id="{BCB2D0F7-AC9B-4B66-9588-8D3F46EACE23}"/>
               </a:ext>
             </a:extLst>
           </p:cNvPr>
@@ -6935,7 +6935,7 @@
           <p:cNvPr id="31" name="">
             <a:extLst xmlns:a="http://schemas.openxmlformats.org/drawingml/2006/main">
               <a:ext uri="{FF2B5EF4-FFF2-40B4-BE49-F238E27FC236}">
-                <a16:creationId xmlns:a16="http://schemas.microsoft.com/office/drawing/2014/main" id="{1139F854-1132-4244-ACD6-2EE38B85CA17}"/>
+                <a16:creationId xmlns:a16="http://schemas.microsoft.com/office/drawing/2014/main" id="{E181B009-99F0-404B-A40E-A0834BBCE3A6}"/>
               </a:ext>
             </a:extLst>
           </p:cNvPr>
@@ -6995,7 +6995,7 @@
     </p:spTree>
     <p:extLst>
       <p:ext uri="{BB962C8B-B14F-4D97-AF65-F5344CB8AC3E}">
-        <p14:creationId xmlns:p14="http://schemas.microsoft.com/office/powerpoint/2010/main" val="1007335749"/>
+        <p14:creationId xmlns:p14="http://schemas.microsoft.com/office/powerpoint/2010/main" val="1863433874"/>
       </p:ext>
     </p:extLst>
   </p:cSld>
@@ -7026,7 +7026,7 @@
           <p:cNvPr id="1" name="">
             <a:extLst xmlns:a="http://schemas.openxmlformats.org/drawingml/2006/main">
               <a:ext uri="{FF2B5EF4-FFF2-40B4-BE49-F238E27FC236}">
-                <a16:creationId xmlns:a16="http://schemas.microsoft.com/office/drawing/2014/main" id="{2EB1F713-1CD6-4CB8-A979-0A938F1C48F1}"/>
+                <a16:creationId xmlns:a16="http://schemas.microsoft.com/office/drawing/2014/main" id="{975A69DA-BAC0-4D89-B807-BEAC0D9359B2}"/>
               </a:ext>
             </a:extLst>
           </p:cNvPr>
@@ -7088,7 +7088,7 @@
           <p:cNvPr id="2" name="">
             <a:extLst xmlns:a="http://schemas.openxmlformats.org/drawingml/2006/main">
               <a:ext uri="{FF2B5EF4-FFF2-40B4-BE49-F238E27FC236}">
-                <a16:creationId xmlns:a16="http://schemas.microsoft.com/office/drawing/2014/main" id="{C3205469-748A-41DB-8D25-7C92EA78D817}"/>
+                <a16:creationId xmlns:a16="http://schemas.microsoft.com/office/drawing/2014/main" id="{F1BAA476-D2BA-4B93-B41F-AFDEFE7332E9}"/>
               </a:ext>
             </a:extLst>
           </p:cNvPr>
@@ -7154,7 +7154,7 @@
           <p:nvPr/>
         </p:nvPicPr>
         <p:blipFill>
-          <a:blip xmlns:r="http://schemas.openxmlformats.org/officeDocument/2006/relationships" xmlns:a="http://schemas.openxmlformats.org/drawingml/2006/main" r:embed="R0027d5379f3a43af"/>
+          <a:blip xmlns:r="http://schemas.openxmlformats.org/officeDocument/2006/relationships" xmlns:a="http://schemas.openxmlformats.org/drawingml/2006/main" r:embed="R99707a8c62444ee6"/>
           <a:srcRect xmlns:a="http://schemas.openxmlformats.org/drawingml/2006/main" l="0" t="17360" r="0" b="17360"/>
           <a:stretch xmlns:a="http://schemas.openxmlformats.org/drawingml/2006/main">
             <a:fillRect l="0" t="0" r="0" b="0"/>
@@ -7181,7 +7181,7 @@
           <p:nvPr/>
         </p:nvPicPr>
         <p:blipFill>
-          <a:blip xmlns:r="http://schemas.openxmlformats.org/officeDocument/2006/relationships" xmlns:a="http://schemas.openxmlformats.org/drawingml/2006/main" r:embed="Rc67bd51c41c6433b"/>
+          <a:blip xmlns:r="http://schemas.openxmlformats.org/officeDocument/2006/relationships" xmlns:a="http://schemas.openxmlformats.org/drawingml/2006/main" r:embed="Rd0a78d8ea48c427c"/>
           <a:srcRect xmlns:a="http://schemas.openxmlformats.org/drawingml/2006/main" l="0" t="17360" r="0" b="17360"/>
           <a:stretch xmlns:a="http://schemas.openxmlformats.org/drawingml/2006/main">
             <a:fillRect l="0" t="0" r="0" b="0"/>
@@ -7204,7 +7204,7 @@
           <p:cNvPr id="5" name="">
             <a:extLst xmlns:a="http://schemas.openxmlformats.org/drawingml/2006/main">
               <a:ext uri="{FF2B5EF4-FFF2-40B4-BE49-F238E27FC236}">
-                <a16:creationId xmlns:a16="http://schemas.microsoft.com/office/drawing/2014/main" id="{83AA686D-A858-40A9-B42B-CC0D036DAFEF}"/>
+                <a16:creationId xmlns:a16="http://schemas.microsoft.com/office/drawing/2014/main" id="{34FF639D-5EB2-4E8C-A35F-C5C2C9F7410F}"/>
               </a:ext>
             </a:extLst>
           </p:cNvPr>
@@ -7245,7 +7245,7 @@
           <p:cNvPr id="6" name="">
             <a:extLst xmlns:a="http://schemas.openxmlformats.org/drawingml/2006/main">
               <a:ext uri="{FF2B5EF4-FFF2-40B4-BE49-F238E27FC236}">
-                <a16:creationId xmlns:a16="http://schemas.microsoft.com/office/drawing/2014/main" id="{0C7ECD8C-8DD7-46D0-8860-896585111DB3}"/>
+                <a16:creationId xmlns:a16="http://schemas.microsoft.com/office/drawing/2014/main" id="{13345C11-062E-43E6-A0B9-E568E0669081}"/>
               </a:ext>
             </a:extLst>
           </p:cNvPr>
@@ -7276,7 +7276,7 @@
           <p:cNvPr id="7" name="">
             <a:extLst xmlns:a="http://schemas.openxmlformats.org/drawingml/2006/main">
               <a:ext uri="{FF2B5EF4-FFF2-40B4-BE49-F238E27FC236}">
-                <a16:creationId xmlns:a16="http://schemas.microsoft.com/office/drawing/2014/main" id="{06D3E6DD-D738-4461-BE5D-42428A527711}"/>
+                <a16:creationId xmlns:a16="http://schemas.microsoft.com/office/drawing/2014/main" id="{8577DBE6-06E0-41EE-8395-483D28098002}"/>
               </a:ext>
             </a:extLst>
           </p:cNvPr>
@@ -7309,7 +7309,7 @@
           <p:cNvPr id="8" name="">
             <a:extLst xmlns:a="http://schemas.openxmlformats.org/drawingml/2006/main">
               <a:ext uri="{FF2B5EF4-FFF2-40B4-BE49-F238E27FC236}">
-                <a16:creationId xmlns:a16="http://schemas.microsoft.com/office/drawing/2014/main" id="{9A9CA13E-B070-40AA-8122-0011E0EEDC96}"/>
+                <a16:creationId xmlns:a16="http://schemas.microsoft.com/office/drawing/2014/main" id="{EB785DB1-3DC9-469C-B46A-26452C90CC2C}"/>
               </a:ext>
             </a:extLst>
           </p:cNvPr>
@@ -7342,7 +7342,7 @@
           <p:cNvPr id="9" name="">
             <a:extLst xmlns:a="http://schemas.openxmlformats.org/drawingml/2006/main">
               <a:ext uri="{FF2B5EF4-FFF2-40B4-BE49-F238E27FC236}">
-                <a16:creationId xmlns:a16="http://schemas.microsoft.com/office/drawing/2014/main" id="{2F03886F-0CCA-4CEE-A0A4-73B3F8C7B321}"/>
+                <a16:creationId xmlns:a16="http://schemas.microsoft.com/office/drawing/2014/main" id="{BCBB6539-2556-4DD8-8FD6-7CC59E0F26FE}"/>
               </a:ext>
             </a:extLst>
           </p:cNvPr>
@@ -7375,7 +7375,7 @@
           <p:cNvPr id="10" name="">
             <a:extLst xmlns:a="http://schemas.openxmlformats.org/drawingml/2006/main">
               <a:ext uri="{FF2B5EF4-FFF2-40B4-BE49-F238E27FC236}">
-                <a16:creationId xmlns:a16="http://schemas.microsoft.com/office/drawing/2014/main" id="{8F700BA6-420B-4089-9835-1F0B2BC5F347}"/>
+                <a16:creationId xmlns:a16="http://schemas.microsoft.com/office/drawing/2014/main" id="{F597B5BA-C55E-48BC-A221-9A4530B2F9B2}"/>
               </a:ext>
             </a:extLst>
           </p:cNvPr>
@@ -7416,7 +7416,7 @@
           <p:cNvPr id="11" name="">
             <a:extLst xmlns:a="http://schemas.openxmlformats.org/drawingml/2006/main">
               <a:ext uri="{FF2B5EF4-FFF2-40B4-BE49-F238E27FC236}">
-                <a16:creationId xmlns:a16="http://schemas.microsoft.com/office/drawing/2014/main" id="{3807BE94-8618-4C21-9D60-5FEDC4FEF40E}"/>
+                <a16:creationId xmlns:a16="http://schemas.microsoft.com/office/drawing/2014/main" id="{9F5A30F9-AC3A-44E2-A387-746B53F5D228}"/>
               </a:ext>
             </a:extLst>
           </p:cNvPr>
@@ -7478,7 +7478,7 @@
           <p:cNvPr id="12" name="">
             <a:extLst xmlns:a="http://schemas.openxmlformats.org/drawingml/2006/main">
               <a:ext uri="{FF2B5EF4-FFF2-40B4-BE49-F238E27FC236}">
-                <a16:creationId xmlns:a16="http://schemas.microsoft.com/office/drawing/2014/main" id="{E0A53639-EB68-4659-98B1-85772A258EF6}"/>
+                <a16:creationId xmlns:a16="http://schemas.microsoft.com/office/drawing/2014/main" id="{901AD426-0213-49A8-9096-5DA26C40813E}"/>
               </a:ext>
             </a:extLst>
           </p:cNvPr>
@@ -7567,7 +7567,7 @@
           <p:cNvPr id="13" name="">
             <a:extLst xmlns:a="http://schemas.openxmlformats.org/drawingml/2006/main">
               <a:ext uri="{FF2B5EF4-FFF2-40B4-BE49-F238E27FC236}">
-                <a16:creationId xmlns:a16="http://schemas.microsoft.com/office/drawing/2014/main" id="{EC4532D2-EDC3-4B30-AA39-D7962CE53F8E}"/>
+                <a16:creationId xmlns:a16="http://schemas.microsoft.com/office/drawing/2014/main" id="{D65F571C-72CE-4010-A510-0B1F8B0F7E3F}"/>
               </a:ext>
             </a:extLst>
           </p:cNvPr>
@@ -7608,7 +7608,7 @@
           <p:cNvPr id="14" name="">
             <a:extLst xmlns:a="http://schemas.openxmlformats.org/drawingml/2006/main">
               <a:ext uri="{FF2B5EF4-FFF2-40B4-BE49-F238E27FC236}">
-                <a16:creationId xmlns:a16="http://schemas.microsoft.com/office/drawing/2014/main" id="{8F76A38D-93FE-4D86-9E35-794B4D64413B}"/>
+                <a16:creationId xmlns:a16="http://schemas.microsoft.com/office/drawing/2014/main" id="{607ACD34-5977-4B3E-9DA6-3F5AE21F6EA3}"/>
               </a:ext>
             </a:extLst>
           </p:cNvPr>
@@ -7670,7 +7670,7 @@
           <p:cNvPr id="15" name="">
             <a:extLst xmlns:a="http://schemas.openxmlformats.org/drawingml/2006/main">
               <a:ext uri="{FF2B5EF4-FFF2-40B4-BE49-F238E27FC236}">
-                <a16:creationId xmlns:a16="http://schemas.microsoft.com/office/drawing/2014/main" id="{5797437E-617A-4BEA-A81F-C52C1A7F0E3F}"/>
+                <a16:creationId xmlns:a16="http://schemas.microsoft.com/office/drawing/2014/main" id="{73ED4930-EE6E-4A14-8F67-8E29319C67A4}"/>
               </a:ext>
             </a:extLst>
           </p:cNvPr>
@@ -7759,7 +7759,7 @@
           <p:cNvPr id="16" name="">
             <a:extLst xmlns:a="http://schemas.openxmlformats.org/drawingml/2006/main">
               <a:ext uri="{FF2B5EF4-FFF2-40B4-BE49-F238E27FC236}">
-                <a16:creationId xmlns:a16="http://schemas.microsoft.com/office/drawing/2014/main" id="{21483251-0887-42E0-9451-BABAC4AC7A85}"/>
+                <a16:creationId xmlns:a16="http://schemas.microsoft.com/office/drawing/2014/main" id="{9E1CAC66-386C-4A37-B7DC-CCFB9E640644}"/>
               </a:ext>
             </a:extLst>
           </p:cNvPr>
@@ -7800,7 +7800,7 @@
           <p:cNvPr id="17" name="">
             <a:extLst xmlns:a="http://schemas.openxmlformats.org/drawingml/2006/main">
               <a:ext uri="{FF2B5EF4-FFF2-40B4-BE49-F238E27FC236}">
-                <a16:creationId xmlns:a16="http://schemas.microsoft.com/office/drawing/2014/main" id="{46689209-B321-4199-B9C9-883F3796D4CD}"/>
+                <a16:creationId xmlns:a16="http://schemas.microsoft.com/office/drawing/2014/main" id="{EEAB33D4-7723-45A1-895F-62A4CCAEF948}"/>
               </a:ext>
             </a:extLst>
           </p:cNvPr>
@@ -7862,7 +7862,7 @@
           <p:cNvPr id="18" name="">
             <a:extLst xmlns:a="http://schemas.openxmlformats.org/drawingml/2006/main">
               <a:ext uri="{FF2B5EF4-FFF2-40B4-BE49-F238E27FC236}">
-                <a16:creationId xmlns:a16="http://schemas.microsoft.com/office/drawing/2014/main" id="{0F119D0E-5C09-4104-88E1-1FB613665123}"/>
+                <a16:creationId xmlns:a16="http://schemas.microsoft.com/office/drawing/2014/main" id="{14AC1B50-5700-4E23-943C-74E0FEDA316C}"/>
               </a:ext>
             </a:extLst>
           </p:cNvPr>
@@ -7951,7 +7951,7 @@
           <p:cNvPr id="19" name="">
             <a:extLst xmlns:a="http://schemas.openxmlformats.org/drawingml/2006/main">
               <a:ext uri="{FF2B5EF4-FFF2-40B4-BE49-F238E27FC236}">
-                <a16:creationId xmlns:a16="http://schemas.microsoft.com/office/drawing/2014/main" id="{60D4C72F-942A-48CC-AFAE-CAEA2F49FD89}"/>
+                <a16:creationId xmlns:a16="http://schemas.microsoft.com/office/drawing/2014/main" id="{9396AB7D-B57D-45EF-98AD-1095C48C7251}"/>
               </a:ext>
             </a:extLst>
           </p:cNvPr>
@@ -7992,7 +7992,7 @@
           <p:cNvPr id="20" name="">
             <a:extLst xmlns:a="http://schemas.openxmlformats.org/drawingml/2006/main">
               <a:ext uri="{FF2B5EF4-FFF2-40B4-BE49-F238E27FC236}">
-                <a16:creationId xmlns:a16="http://schemas.microsoft.com/office/drawing/2014/main" id="{F75256E7-29DD-4D05-8D75-261DF4CD2F8B}"/>
+                <a16:creationId xmlns:a16="http://schemas.microsoft.com/office/drawing/2014/main" id="{A895D745-AFB5-4D33-9749-023AA4DF701A}"/>
               </a:ext>
             </a:extLst>
           </p:cNvPr>
@@ -8054,7 +8054,7 @@
           <p:cNvPr id="21" name="">
             <a:extLst xmlns:a="http://schemas.openxmlformats.org/drawingml/2006/main">
               <a:ext uri="{FF2B5EF4-FFF2-40B4-BE49-F238E27FC236}">
-                <a16:creationId xmlns:a16="http://schemas.microsoft.com/office/drawing/2014/main" id="{8DEAC70C-5FC9-4ABC-84C5-FFA5F2AA8C1A}"/>
+                <a16:creationId xmlns:a16="http://schemas.microsoft.com/office/drawing/2014/main" id="{03404E69-3DF3-4657-A344-116870D0EAFF}"/>
               </a:ext>
             </a:extLst>
           </p:cNvPr>
@@ -8143,7 +8143,7 @@
           <p:cNvPr id="22" name="">
             <a:extLst xmlns:a="http://schemas.openxmlformats.org/drawingml/2006/main">
               <a:ext uri="{FF2B5EF4-FFF2-40B4-BE49-F238E27FC236}">
-                <a16:creationId xmlns:a16="http://schemas.microsoft.com/office/drawing/2014/main" id="{3310ABD3-6C85-4604-9602-802B02E1FD6F}"/>
+                <a16:creationId xmlns:a16="http://schemas.microsoft.com/office/drawing/2014/main" id="{C64DCE55-5CA1-42F2-91B6-8A1E02AED4F0}"/>
               </a:ext>
             </a:extLst>
           </p:cNvPr>
@@ -8184,7 +8184,7 @@
           <p:cNvPr id="23" name="">
             <a:extLst xmlns:a="http://schemas.openxmlformats.org/drawingml/2006/main">
               <a:ext uri="{FF2B5EF4-FFF2-40B4-BE49-F238E27FC236}">
-                <a16:creationId xmlns:a16="http://schemas.microsoft.com/office/drawing/2014/main" id="{76E79EE3-EE50-46B7-A1FA-725504CD9C69}"/>
+                <a16:creationId xmlns:a16="http://schemas.microsoft.com/office/drawing/2014/main" id="{0B432C68-8A20-433F-93F3-B4BE2A6E0E29}"/>
               </a:ext>
             </a:extLst>
           </p:cNvPr>
@@ -8246,7 +8246,7 @@
           <p:cNvPr id="24" name="">
             <a:extLst xmlns:a="http://schemas.openxmlformats.org/drawingml/2006/main">
               <a:ext uri="{FF2B5EF4-FFF2-40B4-BE49-F238E27FC236}">
-                <a16:creationId xmlns:a16="http://schemas.microsoft.com/office/drawing/2014/main" id="{228D96F7-8445-4C9C-AE12-EA494644F648}"/>
+                <a16:creationId xmlns:a16="http://schemas.microsoft.com/office/drawing/2014/main" id="{CA00705C-FB47-40AF-A394-F4532E4FDE83}"/>
               </a:ext>
             </a:extLst>
           </p:cNvPr>
@@ -8308,7 +8308,7 @@
           <p:cNvPr id="25" name="">
             <a:extLst xmlns:a="http://schemas.openxmlformats.org/drawingml/2006/main">
               <a:ext uri="{FF2B5EF4-FFF2-40B4-BE49-F238E27FC236}">
-                <a16:creationId xmlns:a16="http://schemas.microsoft.com/office/drawing/2014/main" id="{CF4AE61E-2CDB-423E-A2AE-F1085B4EAA5D}"/>
+                <a16:creationId xmlns:a16="http://schemas.microsoft.com/office/drawing/2014/main" id="{7676EA12-45D8-498C-8E65-95DC15F342F8}"/>
               </a:ext>
             </a:extLst>
           </p:cNvPr>
@@ -8349,7 +8349,7 @@
           <p:cNvPr id="26" name="">
             <a:extLst xmlns:a="http://schemas.openxmlformats.org/drawingml/2006/main">
               <a:ext uri="{FF2B5EF4-FFF2-40B4-BE49-F238E27FC236}">
-                <a16:creationId xmlns:a16="http://schemas.microsoft.com/office/drawing/2014/main" id="{F4F04328-07A2-4F59-B017-89562F1D5748}"/>
+                <a16:creationId xmlns:a16="http://schemas.microsoft.com/office/drawing/2014/main" id="{C6645B17-EFB8-4C72-AE98-D4C9855B0CEB}"/>
               </a:ext>
             </a:extLst>
           </p:cNvPr>
@@ -8411,7 +8411,7 @@
           <p:cNvPr id="27" name="">
             <a:extLst xmlns:a="http://schemas.openxmlformats.org/drawingml/2006/main">
               <a:ext uri="{FF2B5EF4-FFF2-40B4-BE49-F238E27FC236}">
-                <a16:creationId xmlns:a16="http://schemas.microsoft.com/office/drawing/2014/main" id="{A77DAB0F-E9E7-4519-B577-0852E1D0298A}"/>
+                <a16:creationId xmlns:a16="http://schemas.microsoft.com/office/drawing/2014/main" id="{D64AAC88-D7AC-4E7F-87E3-DF3F5A18E455}"/>
               </a:ext>
             </a:extLst>
           </p:cNvPr>
@@ -8473,7 +8473,7 @@
           <p:cNvPr id="28" name="">
             <a:extLst xmlns:a="http://schemas.openxmlformats.org/drawingml/2006/main">
               <a:ext uri="{FF2B5EF4-FFF2-40B4-BE49-F238E27FC236}">
-                <a16:creationId xmlns:a16="http://schemas.microsoft.com/office/drawing/2014/main" id="{29F89570-BB4C-4DB2-A4B6-0E56BB105606}"/>
+                <a16:creationId xmlns:a16="http://schemas.microsoft.com/office/drawing/2014/main" id="{62230A9C-DB97-4338-B472-508F16BC1125}"/>
               </a:ext>
             </a:extLst>
           </p:cNvPr>
@@ -8504,7 +8504,7 @@
           <p:cNvPr id="29" name="">
             <a:extLst xmlns:a="http://schemas.openxmlformats.org/drawingml/2006/main">
               <a:ext uri="{FF2B5EF4-FFF2-40B4-BE49-F238E27FC236}">
-                <a16:creationId xmlns:a16="http://schemas.microsoft.com/office/drawing/2014/main" id="{29B7CEB9-83F5-4CC2-8DC6-52B0CEBACB2D}"/>
+                <a16:creationId xmlns:a16="http://schemas.microsoft.com/office/drawing/2014/main" id="{5F6A3BFB-6403-42A8-9977-D9A84F06D8B3}"/>
               </a:ext>
             </a:extLst>
           </p:cNvPr>
@@ -8566,7 +8566,7 @@
           <p:cNvPr id="30" name="">
             <a:extLst xmlns:a="http://schemas.openxmlformats.org/drawingml/2006/main">
               <a:ext uri="{FF2B5EF4-FFF2-40B4-BE49-F238E27FC236}">
-                <a16:creationId xmlns:a16="http://schemas.microsoft.com/office/drawing/2014/main" id="{EAE6F754-E9BA-4E80-9A9D-0DC3195A76FC}"/>
+                <a16:creationId xmlns:a16="http://schemas.microsoft.com/office/drawing/2014/main" id="{C66FD6FC-F345-4E10-A08B-5A1665639365}"/>
               </a:ext>
             </a:extLst>
           </p:cNvPr>
@@ -8626,7 +8626,7 @@
     </p:spTree>
     <p:extLst>
       <p:ext uri="{BB962C8B-B14F-4D97-AF65-F5344CB8AC3E}">
-        <p14:creationId xmlns:p14="http://schemas.microsoft.com/office/powerpoint/2010/main" val="228714172"/>
+        <p14:creationId xmlns:p14="http://schemas.microsoft.com/office/powerpoint/2010/main" val="1511745962"/>
       </p:ext>
     </p:extLst>
   </p:cSld>
@@ -8657,7 +8657,7 @@
           <p:cNvPr id="1" name="">
             <a:extLst xmlns:a="http://schemas.openxmlformats.org/drawingml/2006/main">
               <a:ext uri="{FF2B5EF4-FFF2-40B4-BE49-F238E27FC236}">
-                <a16:creationId xmlns:a16="http://schemas.microsoft.com/office/drawing/2014/main" id="{90CD42DF-C00B-4D98-8129-47A9CAE4FDC6}"/>
+                <a16:creationId xmlns:a16="http://schemas.microsoft.com/office/drawing/2014/main" id="{6D7BA14C-D2FF-43A1-AE4B-7D0EACA12C41}"/>
               </a:ext>
             </a:extLst>
           </p:cNvPr>
@@ -8719,7 +8719,7 @@
           <p:cNvPr id="2" name="">
             <a:extLst xmlns:a="http://schemas.openxmlformats.org/drawingml/2006/main">
               <a:ext uri="{FF2B5EF4-FFF2-40B4-BE49-F238E27FC236}">
-                <a16:creationId xmlns:a16="http://schemas.microsoft.com/office/drawing/2014/main" id="{59935B0C-88E9-4018-8A19-50AE1C3FFE4A}"/>
+                <a16:creationId xmlns:a16="http://schemas.microsoft.com/office/drawing/2014/main" id="{663386DD-9487-42E3-B615-E6CB90CD6A99}"/>
               </a:ext>
             </a:extLst>
           </p:cNvPr>
@@ -8781,7 +8781,7 @@
           <p:cNvPr id="3" name="">
             <a:extLst xmlns:a="http://schemas.openxmlformats.org/drawingml/2006/main">
               <a:ext uri="{FF2B5EF4-FFF2-40B4-BE49-F238E27FC236}">
-                <a16:creationId xmlns:a16="http://schemas.microsoft.com/office/drawing/2014/main" id="{27598A4E-37DE-4F72-9E0A-7AB126B35B0C}"/>
+                <a16:creationId xmlns:a16="http://schemas.microsoft.com/office/drawing/2014/main" id="{5F2C4AF3-7B67-43EF-9598-87091CB1D8C3}"/>
               </a:ext>
             </a:extLst>
           </p:cNvPr>
@@ -8822,7 +8822,7 @@
           <p:cNvPr id="4" name="">
             <a:extLst xmlns:a="http://schemas.openxmlformats.org/drawingml/2006/main">
               <a:ext uri="{FF2B5EF4-FFF2-40B4-BE49-F238E27FC236}">
-                <a16:creationId xmlns:a16="http://schemas.microsoft.com/office/drawing/2014/main" id="{3A16E13F-C6AF-4007-833C-E278C39ED415}"/>
+                <a16:creationId xmlns:a16="http://schemas.microsoft.com/office/drawing/2014/main" id="{2908A0F5-BD49-400C-9E2D-F6541AC7A69E}"/>
               </a:ext>
             </a:extLst>
           </p:cNvPr>
@@ -8853,7 +8853,7 @@
           <p:cNvPr id="5" name="">
             <a:extLst xmlns:a="http://schemas.openxmlformats.org/drawingml/2006/main">
               <a:ext uri="{FF2B5EF4-FFF2-40B4-BE49-F238E27FC236}">
-                <a16:creationId xmlns:a16="http://schemas.microsoft.com/office/drawing/2014/main" id="{E7A37914-9CB6-49C1-9033-0A1F56CB06E8}"/>
+                <a16:creationId xmlns:a16="http://schemas.microsoft.com/office/drawing/2014/main" id="{C983B3F8-2346-4C04-B3DD-E27A55736372}"/>
               </a:ext>
             </a:extLst>
           </p:cNvPr>
@@ -8886,7 +8886,7 @@
           <p:cNvPr id="6" name="">
             <a:extLst xmlns:a="http://schemas.openxmlformats.org/drawingml/2006/main">
               <a:ext uri="{FF2B5EF4-FFF2-40B4-BE49-F238E27FC236}">
-                <a16:creationId xmlns:a16="http://schemas.microsoft.com/office/drawing/2014/main" id="{860E8776-1E4B-4E77-B031-973AA170B04F}"/>
+                <a16:creationId xmlns:a16="http://schemas.microsoft.com/office/drawing/2014/main" id="{FB363AE6-0C43-4FF9-84A7-AD4953FB589E}"/>
               </a:ext>
             </a:extLst>
           </p:cNvPr>
@@ -8919,7 +8919,7 @@
           <p:cNvPr id="7" name="">
             <a:extLst xmlns:a="http://schemas.openxmlformats.org/drawingml/2006/main">
               <a:ext uri="{FF2B5EF4-FFF2-40B4-BE49-F238E27FC236}">
-                <a16:creationId xmlns:a16="http://schemas.microsoft.com/office/drawing/2014/main" id="{DBA2EFA0-5633-4E9A-876F-8465905BA0E7}"/>
+                <a16:creationId xmlns:a16="http://schemas.microsoft.com/office/drawing/2014/main" id="{E6A10E36-BFDA-41CF-8D45-C10BC4E1F7C7}"/>
               </a:ext>
             </a:extLst>
           </p:cNvPr>
@@ -8952,7 +8952,7 @@
           <p:cNvPr id="8" name="">
             <a:extLst xmlns:a="http://schemas.openxmlformats.org/drawingml/2006/main">
               <a:ext uri="{FF2B5EF4-FFF2-40B4-BE49-F238E27FC236}">
-                <a16:creationId xmlns:a16="http://schemas.microsoft.com/office/drawing/2014/main" id="{D4ACC3B9-86DE-4A97-AF22-37C222919775}"/>
+                <a16:creationId xmlns:a16="http://schemas.microsoft.com/office/drawing/2014/main" id="{A8095AF0-437E-44CB-9BE3-DFEBADF1B0ED}"/>
               </a:ext>
             </a:extLst>
           </p:cNvPr>
@@ -8985,7 +8985,7 @@
           <p:cNvPr id="9" name="">
             <a:extLst xmlns:a="http://schemas.openxmlformats.org/drawingml/2006/main">
               <a:ext uri="{FF2B5EF4-FFF2-40B4-BE49-F238E27FC236}">
-                <a16:creationId xmlns:a16="http://schemas.microsoft.com/office/drawing/2014/main" id="{796F3288-266C-49B1-A7EC-16E6C01FDC56}"/>
+                <a16:creationId xmlns:a16="http://schemas.microsoft.com/office/drawing/2014/main" id="{21EAFAA4-54C4-4C25-8A25-3DF860CF6512}"/>
               </a:ext>
             </a:extLst>
           </p:cNvPr>
@@ -9018,7 +9018,7 @@
           <p:cNvPr id="10" name="">
             <a:extLst xmlns:a="http://schemas.openxmlformats.org/drawingml/2006/main">
               <a:ext uri="{FF2B5EF4-FFF2-40B4-BE49-F238E27FC236}">
-                <a16:creationId xmlns:a16="http://schemas.microsoft.com/office/drawing/2014/main" id="{9FE61F66-90A6-4625-A0D8-68C649330813}"/>
+                <a16:creationId xmlns:a16="http://schemas.microsoft.com/office/drawing/2014/main" id="{52437707-76C5-4F19-B7A2-A8A98F9C7ABF}"/>
               </a:ext>
             </a:extLst>
           </p:cNvPr>
@@ -9059,7 +9059,7 @@
           <p:cNvPr id="11" name="">
             <a:extLst xmlns:a="http://schemas.openxmlformats.org/drawingml/2006/main">
               <a:ext uri="{FF2B5EF4-FFF2-40B4-BE49-F238E27FC236}">
-                <a16:creationId xmlns:a16="http://schemas.microsoft.com/office/drawing/2014/main" id="{30E78EB3-A098-4CB8-9535-C1190A728154}"/>
+                <a16:creationId xmlns:a16="http://schemas.microsoft.com/office/drawing/2014/main" id="{35313B27-B1FC-4692-8C14-052BFBC06D75}"/>
               </a:ext>
             </a:extLst>
           </p:cNvPr>
@@ -9121,7 +9121,7 @@
           <p:cNvPr id="12" name="">
             <a:extLst xmlns:a="http://schemas.openxmlformats.org/drawingml/2006/main">
               <a:ext uri="{FF2B5EF4-FFF2-40B4-BE49-F238E27FC236}">
-                <a16:creationId xmlns:a16="http://schemas.microsoft.com/office/drawing/2014/main" id="{63ABC86A-6E5A-4828-84B9-40BED58A2031}"/>
+                <a16:creationId xmlns:a16="http://schemas.microsoft.com/office/drawing/2014/main" id="{44240C01-0D46-412C-ABE6-94C873CD51FD}"/>
               </a:ext>
             </a:extLst>
           </p:cNvPr>
@@ -9162,7 +9162,7 @@
           <p:cNvPr id="13" name="">
             <a:extLst xmlns:a="http://schemas.openxmlformats.org/drawingml/2006/main">
               <a:ext uri="{FF2B5EF4-FFF2-40B4-BE49-F238E27FC236}">
-                <a16:creationId xmlns:a16="http://schemas.microsoft.com/office/drawing/2014/main" id="{55864781-7294-40E9-B7F0-F92AA077338A}"/>
+                <a16:creationId xmlns:a16="http://schemas.microsoft.com/office/drawing/2014/main" id="{0D42DFAA-E8FE-4F1D-9313-E4A5AFD4582B}"/>
               </a:ext>
             </a:extLst>
           </p:cNvPr>
@@ -9224,7 +9224,7 @@
           <p:cNvPr id="14" name="">
             <a:extLst xmlns:a="http://schemas.openxmlformats.org/drawingml/2006/main">
               <a:ext uri="{FF2B5EF4-FFF2-40B4-BE49-F238E27FC236}">
-                <a16:creationId xmlns:a16="http://schemas.microsoft.com/office/drawing/2014/main" id="{5703C26D-7BEC-4AAA-875B-C1407FCA6BA5}"/>
+                <a16:creationId xmlns:a16="http://schemas.microsoft.com/office/drawing/2014/main" id="{CFE5AAA5-45E8-4851-B9B1-286BAA5AC0BA}"/>
               </a:ext>
             </a:extLst>
           </p:cNvPr>
@@ -9265,7 +9265,7 @@
           <p:cNvPr id="15" name="">
             <a:extLst xmlns:a="http://schemas.openxmlformats.org/drawingml/2006/main">
               <a:ext uri="{FF2B5EF4-FFF2-40B4-BE49-F238E27FC236}">
-                <a16:creationId xmlns:a16="http://schemas.microsoft.com/office/drawing/2014/main" id="{4933637F-9D2A-4AFB-BB80-9E2FFBD391B8}"/>
+                <a16:creationId xmlns:a16="http://schemas.microsoft.com/office/drawing/2014/main" id="{79E557CF-7841-44F2-B713-C38573461F7E}"/>
               </a:ext>
             </a:extLst>
           </p:cNvPr>
@@ -9327,7 +9327,7 @@
           <p:cNvPr id="16" name="">
             <a:extLst xmlns:a="http://schemas.openxmlformats.org/drawingml/2006/main">
               <a:ext uri="{FF2B5EF4-FFF2-40B4-BE49-F238E27FC236}">
-                <a16:creationId xmlns:a16="http://schemas.microsoft.com/office/drawing/2014/main" id="{13E6F225-292F-49DE-B516-290E7C9E8155}"/>
+                <a16:creationId xmlns:a16="http://schemas.microsoft.com/office/drawing/2014/main" id="{A8DB10FC-CEA8-4242-AF5E-90611727292E}"/>
               </a:ext>
             </a:extLst>
           </p:cNvPr>
@@ -9368,7 +9368,7 @@
           <p:cNvPr id="17" name="">
             <a:extLst xmlns:a="http://schemas.openxmlformats.org/drawingml/2006/main">
               <a:ext uri="{FF2B5EF4-FFF2-40B4-BE49-F238E27FC236}">
-                <a16:creationId xmlns:a16="http://schemas.microsoft.com/office/drawing/2014/main" id="{3998DB33-DAD9-43A8-829D-8DF7F0A9A6DB}"/>
+                <a16:creationId xmlns:a16="http://schemas.microsoft.com/office/drawing/2014/main" id="{224448B1-19BA-4737-A2B7-6711AC7549CC}"/>
               </a:ext>
             </a:extLst>
           </p:cNvPr>
@@ -9430,7 +9430,7 @@
           <p:cNvPr id="18" name="">
             <a:extLst xmlns:a="http://schemas.openxmlformats.org/drawingml/2006/main">
               <a:ext uri="{FF2B5EF4-FFF2-40B4-BE49-F238E27FC236}">
-                <a16:creationId xmlns:a16="http://schemas.microsoft.com/office/drawing/2014/main" id="{EBED8118-39E0-463D-8026-1BA19A071633}"/>
+                <a16:creationId xmlns:a16="http://schemas.microsoft.com/office/drawing/2014/main" id="{AA09140D-8A8B-42CC-8B25-0F0FFF36037B}"/>
               </a:ext>
             </a:extLst>
           </p:cNvPr>
@@ -9471,7 +9471,7 @@
           <p:cNvPr id="19" name="">
             <a:extLst xmlns:a="http://schemas.openxmlformats.org/drawingml/2006/main">
               <a:ext uri="{FF2B5EF4-FFF2-40B4-BE49-F238E27FC236}">
-                <a16:creationId xmlns:a16="http://schemas.microsoft.com/office/drawing/2014/main" id="{F7CB5AC7-D141-4228-9FB5-3CF6E7EB6C16}"/>
+                <a16:creationId xmlns:a16="http://schemas.microsoft.com/office/drawing/2014/main" id="{5E3DF081-F114-4F48-ACA5-DF58BDC57151}"/>
               </a:ext>
             </a:extLst>
           </p:cNvPr>
@@ -9533,7 +9533,7 @@
           <p:cNvPr id="20" name="">
             <a:extLst xmlns:a="http://schemas.openxmlformats.org/drawingml/2006/main">
               <a:ext uri="{FF2B5EF4-FFF2-40B4-BE49-F238E27FC236}">
-                <a16:creationId xmlns:a16="http://schemas.microsoft.com/office/drawing/2014/main" id="{2A475249-E588-45AF-B1CE-4478D4E1AEC1}"/>
+                <a16:creationId xmlns:a16="http://schemas.microsoft.com/office/drawing/2014/main" id="{8BDEE61E-A08F-4051-90A5-7E68C48DE8F5}"/>
               </a:ext>
             </a:extLst>
           </p:cNvPr>
@@ -9574,7 +9574,7 @@
           <p:cNvPr id="21" name="">
             <a:extLst xmlns:a="http://schemas.openxmlformats.org/drawingml/2006/main">
               <a:ext uri="{FF2B5EF4-FFF2-40B4-BE49-F238E27FC236}">
-                <a16:creationId xmlns:a16="http://schemas.microsoft.com/office/drawing/2014/main" id="{7C1EB1BE-81CA-4BA1-93BF-24A57889B514}"/>
+                <a16:creationId xmlns:a16="http://schemas.microsoft.com/office/drawing/2014/main" id="{70A2B665-A29B-4AA3-9CB0-E85F4BEA7C02}"/>
               </a:ext>
             </a:extLst>
           </p:cNvPr>
@@ -9636,7 +9636,7 @@
           <p:cNvPr id="22" name="">
             <a:extLst xmlns:a="http://schemas.openxmlformats.org/drawingml/2006/main">
               <a:ext uri="{FF2B5EF4-FFF2-40B4-BE49-F238E27FC236}">
-                <a16:creationId xmlns:a16="http://schemas.microsoft.com/office/drawing/2014/main" id="{C71BB4EC-72D8-4A9F-BEE5-1A83D16CAABF}"/>
+                <a16:creationId xmlns:a16="http://schemas.microsoft.com/office/drawing/2014/main" id="{5C375D90-93EF-4402-8E7C-769544717E99}"/>
               </a:ext>
             </a:extLst>
           </p:cNvPr>
@@ -9677,7 +9677,7 @@
           <p:cNvPr id="23" name="">
             <a:extLst xmlns:a="http://schemas.openxmlformats.org/drawingml/2006/main">
               <a:ext uri="{FF2B5EF4-FFF2-40B4-BE49-F238E27FC236}">
-                <a16:creationId xmlns:a16="http://schemas.microsoft.com/office/drawing/2014/main" id="{582122A0-C749-4D2C-A5BB-20CBEF3FDBA2}"/>
+                <a16:creationId xmlns:a16="http://schemas.microsoft.com/office/drawing/2014/main" id="{D3ABA610-3039-467C-863E-1B76FCF77D53}"/>
               </a:ext>
             </a:extLst>
           </p:cNvPr>
@@ -9739,7 +9739,7 @@
           <p:cNvPr id="24" name="">
             <a:extLst xmlns:a="http://schemas.openxmlformats.org/drawingml/2006/main">
               <a:ext uri="{FF2B5EF4-FFF2-40B4-BE49-F238E27FC236}">
-                <a16:creationId xmlns:a16="http://schemas.microsoft.com/office/drawing/2014/main" id="{862D8759-E249-43E0-9B4E-F00DA7E4465B}"/>
+                <a16:creationId xmlns:a16="http://schemas.microsoft.com/office/drawing/2014/main" id="{1C205FAB-70FE-4353-9E7B-5B70D23DD506}"/>
               </a:ext>
             </a:extLst>
           </p:cNvPr>
@@ -9801,7 +9801,7 @@
           <p:cNvPr id="25" name="">
             <a:extLst xmlns:a="http://schemas.openxmlformats.org/drawingml/2006/main">
               <a:ext uri="{FF2B5EF4-FFF2-40B4-BE49-F238E27FC236}">
-                <a16:creationId xmlns:a16="http://schemas.microsoft.com/office/drawing/2014/main" id="{D006734A-AF6A-4D25-9768-B25D49EBE930}"/>
+                <a16:creationId xmlns:a16="http://schemas.microsoft.com/office/drawing/2014/main" id="{913B6C43-3271-4A39-8325-7E7407EBB3B8}"/>
               </a:ext>
             </a:extLst>
           </p:cNvPr>
@@ -9842,7 +9842,7 @@
           <p:cNvPr id="26" name="">
             <a:extLst xmlns:a="http://schemas.openxmlformats.org/drawingml/2006/main">
               <a:ext uri="{FF2B5EF4-FFF2-40B4-BE49-F238E27FC236}">
-                <a16:creationId xmlns:a16="http://schemas.microsoft.com/office/drawing/2014/main" id="{016EB5A2-B3B1-4B7C-8F6D-9E1F3025FEC1}"/>
+                <a16:creationId xmlns:a16="http://schemas.microsoft.com/office/drawing/2014/main" id="{3EED86A1-B8A5-46CA-AF26-5EF20209112D}"/>
               </a:ext>
             </a:extLst>
           </p:cNvPr>
@@ -9904,7 +9904,7 @@
           <p:cNvPr id="27" name="">
             <a:extLst xmlns:a="http://schemas.openxmlformats.org/drawingml/2006/main">
               <a:ext uri="{FF2B5EF4-FFF2-40B4-BE49-F238E27FC236}">
-                <a16:creationId xmlns:a16="http://schemas.microsoft.com/office/drawing/2014/main" id="{C9121779-0966-4D5F-8B55-F728FD1037CC}"/>
+                <a16:creationId xmlns:a16="http://schemas.microsoft.com/office/drawing/2014/main" id="{78AD4BE0-2EB0-43BF-973A-8709D8FD2310}"/>
               </a:ext>
             </a:extLst>
           </p:cNvPr>
@@ -9966,7 +9966,7 @@
           <p:cNvPr id="28" name="">
             <a:extLst xmlns:a="http://schemas.openxmlformats.org/drawingml/2006/main">
               <a:ext uri="{FF2B5EF4-FFF2-40B4-BE49-F238E27FC236}">
-                <a16:creationId xmlns:a16="http://schemas.microsoft.com/office/drawing/2014/main" id="{46380993-D88A-4E81-958D-E0657FEA9FB1}"/>
+                <a16:creationId xmlns:a16="http://schemas.microsoft.com/office/drawing/2014/main" id="{354966A0-EFD5-44D1-B1AF-64BFB1DA4BFC}"/>
               </a:ext>
             </a:extLst>
           </p:cNvPr>
@@ -10007,7 +10007,7 @@
           <p:cNvPr id="29" name="">
             <a:extLst xmlns:a="http://schemas.openxmlformats.org/drawingml/2006/main">
               <a:ext uri="{FF2B5EF4-FFF2-40B4-BE49-F238E27FC236}">
-                <a16:creationId xmlns:a16="http://schemas.microsoft.com/office/drawing/2014/main" id="{C7416B2D-C121-4682-A8F1-B1E4A883FB9D}"/>
+                <a16:creationId xmlns:a16="http://schemas.microsoft.com/office/drawing/2014/main" id="{A15DCA64-4105-4C99-82D9-CBF18B93CEDA}"/>
               </a:ext>
             </a:extLst>
           </p:cNvPr>
@@ -10069,7 +10069,7 @@
           <p:cNvPr id="30" name="">
             <a:extLst xmlns:a="http://schemas.openxmlformats.org/drawingml/2006/main">
               <a:ext uri="{FF2B5EF4-FFF2-40B4-BE49-F238E27FC236}">
-                <a16:creationId xmlns:a16="http://schemas.microsoft.com/office/drawing/2014/main" id="{8D8A970E-4610-4B2F-8DFC-D480BC58ADFE}"/>
+                <a16:creationId xmlns:a16="http://schemas.microsoft.com/office/drawing/2014/main" id="{690C5F87-EA95-4F7E-B1DE-EFFE76551C06}"/>
               </a:ext>
             </a:extLst>
           </p:cNvPr>
@@ -10131,7 +10131,7 @@
           <p:cNvPr id="31" name="">
             <a:extLst xmlns:a="http://schemas.openxmlformats.org/drawingml/2006/main">
               <a:ext uri="{FF2B5EF4-FFF2-40B4-BE49-F238E27FC236}">
-                <a16:creationId xmlns:a16="http://schemas.microsoft.com/office/drawing/2014/main" id="{BAFCCAA1-A8A7-4C00-A712-8CDBCE7DE907}"/>
+                <a16:creationId xmlns:a16="http://schemas.microsoft.com/office/drawing/2014/main" id="{D586AFAF-450E-4ED3-A66C-C87828283637}"/>
               </a:ext>
             </a:extLst>
           </p:cNvPr>
@@ -10172,7 +10172,7 @@
           <p:cNvPr id="32" name="">
             <a:extLst xmlns:a="http://schemas.openxmlformats.org/drawingml/2006/main">
               <a:ext uri="{FF2B5EF4-FFF2-40B4-BE49-F238E27FC236}">
-                <a16:creationId xmlns:a16="http://schemas.microsoft.com/office/drawing/2014/main" id="{9AF436FD-AD38-43E1-9DD4-F87FF20290EC}"/>
+                <a16:creationId xmlns:a16="http://schemas.microsoft.com/office/drawing/2014/main" id="{E7CBBA64-D58A-4D65-A13E-CFF0D5411C0C}"/>
               </a:ext>
             </a:extLst>
           </p:cNvPr>
@@ -10234,7 +10234,7 @@
           <p:cNvPr id="33" name="">
             <a:extLst xmlns:a="http://schemas.openxmlformats.org/drawingml/2006/main">
               <a:ext uri="{FF2B5EF4-FFF2-40B4-BE49-F238E27FC236}">
-                <a16:creationId xmlns:a16="http://schemas.microsoft.com/office/drawing/2014/main" id="{4F18E8C2-336C-4E28-AD3F-2D2EB53DAFCF}"/>
+                <a16:creationId xmlns:a16="http://schemas.microsoft.com/office/drawing/2014/main" id="{526F1E13-D597-4BEA-86D0-FE5DE7418691}"/>
               </a:ext>
             </a:extLst>
           </p:cNvPr>
@@ -10296,7 +10296,7 @@
           <p:cNvPr id="34" name="">
             <a:extLst xmlns:a="http://schemas.openxmlformats.org/drawingml/2006/main">
               <a:ext uri="{FF2B5EF4-FFF2-40B4-BE49-F238E27FC236}">
-                <a16:creationId xmlns:a16="http://schemas.microsoft.com/office/drawing/2014/main" id="{E9997A77-4AE8-4741-84BF-0A2731BC1D9B}"/>
+                <a16:creationId xmlns:a16="http://schemas.microsoft.com/office/drawing/2014/main" id="{C20CF28A-E19B-497B-BD5A-1B97DDAE9280}"/>
               </a:ext>
             </a:extLst>
           </p:cNvPr>
@@ -10358,7 +10358,7 @@
           <p:cNvPr id="35" name="">
             <a:extLst xmlns:a="http://schemas.openxmlformats.org/drawingml/2006/main">
               <a:ext uri="{FF2B5EF4-FFF2-40B4-BE49-F238E27FC236}">
-                <a16:creationId xmlns:a16="http://schemas.microsoft.com/office/drawing/2014/main" id="{2A364D0E-8D8C-4879-9F7C-9AE167920B67}"/>
+                <a16:creationId xmlns:a16="http://schemas.microsoft.com/office/drawing/2014/main" id="{20E8CA01-43AD-48AD-88F8-02A729331955}"/>
               </a:ext>
             </a:extLst>
           </p:cNvPr>
@@ -10389,7 +10389,7 @@
           <p:cNvPr id="36" name="">
             <a:extLst xmlns:a="http://schemas.openxmlformats.org/drawingml/2006/main">
               <a:ext uri="{FF2B5EF4-FFF2-40B4-BE49-F238E27FC236}">
-                <a16:creationId xmlns:a16="http://schemas.microsoft.com/office/drawing/2014/main" id="{20F92890-455A-481D-A924-EAF5C9E282AF}"/>
+                <a16:creationId xmlns:a16="http://schemas.microsoft.com/office/drawing/2014/main" id="{9D942492-F6C1-4FBC-B7A0-5443BBD344EE}"/>
               </a:ext>
             </a:extLst>
           </p:cNvPr>
@@ -10451,7 +10451,7 @@
           <p:cNvPr id="37" name="">
             <a:extLst xmlns:a="http://schemas.openxmlformats.org/drawingml/2006/main">
               <a:ext uri="{FF2B5EF4-FFF2-40B4-BE49-F238E27FC236}">
-                <a16:creationId xmlns:a16="http://schemas.microsoft.com/office/drawing/2014/main" id="{BB20D406-D3CB-4FB7-8C8D-01BA125F0666}"/>
+                <a16:creationId xmlns:a16="http://schemas.microsoft.com/office/drawing/2014/main" id="{C10B0269-42A6-4853-AF03-0CA156C739CF}"/>
               </a:ext>
             </a:extLst>
           </p:cNvPr>
@@ -10511,7 +10511,7 @@
     </p:spTree>
     <p:extLst>
       <p:ext uri="{BB962C8B-B14F-4D97-AF65-F5344CB8AC3E}">
-        <p14:creationId xmlns:p14="http://schemas.microsoft.com/office/powerpoint/2010/main" val="626052905"/>
+        <p14:creationId xmlns:p14="http://schemas.microsoft.com/office/powerpoint/2010/main" val="1562726351"/>
       </p:ext>
     </p:extLst>
   </p:cSld>
@@ -10542,7 +10542,7 @@
           <p:cNvPr id="1" name="">
             <a:extLst xmlns:a="http://schemas.openxmlformats.org/drawingml/2006/main">
               <a:ext uri="{FF2B5EF4-FFF2-40B4-BE49-F238E27FC236}">
-                <a16:creationId xmlns:a16="http://schemas.microsoft.com/office/drawing/2014/main" id="{834841EE-2021-4DAD-9F70-58166213A610}"/>
+                <a16:creationId xmlns:a16="http://schemas.microsoft.com/office/drawing/2014/main" id="{EABC0170-F86A-4D71-8C4E-9DDEB616EB8C}"/>
               </a:ext>
             </a:extLst>
           </p:cNvPr>
@@ -10604,7 +10604,7 @@
           <p:cNvPr id="2" name="">
             <a:extLst xmlns:a="http://schemas.openxmlformats.org/drawingml/2006/main">
               <a:ext uri="{FF2B5EF4-FFF2-40B4-BE49-F238E27FC236}">
-                <a16:creationId xmlns:a16="http://schemas.microsoft.com/office/drawing/2014/main" id="{B415182C-0E4D-46DF-B416-AAE2751FDB92}"/>
+                <a16:creationId xmlns:a16="http://schemas.microsoft.com/office/drawing/2014/main" id="{196A3E13-3DA9-4CDA-A5E9-E586D928DABE}"/>
               </a:ext>
             </a:extLst>
           </p:cNvPr>
@@ -10666,7 +10666,7 @@
           <p:cNvPr id="3" name="">
             <a:extLst xmlns:a="http://schemas.openxmlformats.org/drawingml/2006/main">
               <a:ext uri="{FF2B5EF4-FFF2-40B4-BE49-F238E27FC236}">
-                <a16:creationId xmlns:a16="http://schemas.microsoft.com/office/drawing/2014/main" id="{FC910C3F-9620-4795-BE90-72E21797E657}"/>
+                <a16:creationId xmlns:a16="http://schemas.microsoft.com/office/drawing/2014/main" id="{D83787D5-CB9A-433B-A113-80345E5D04BA}"/>
               </a:ext>
             </a:extLst>
           </p:cNvPr>
@@ -10707,7 +10707,7 @@
           <p:cNvPr id="4" name="">
             <a:extLst xmlns:a="http://schemas.openxmlformats.org/drawingml/2006/main">
               <a:ext uri="{FF2B5EF4-FFF2-40B4-BE49-F238E27FC236}">
-                <a16:creationId xmlns:a16="http://schemas.microsoft.com/office/drawing/2014/main" id="{22CE4D43-EF9B-43F9-ACB8-671BCBEB9AEE}"/>
+                <a16:creationId xmlns:a16="http://schemas.microsoft.com/office/drawing/2014/main" id="{970BCABE-0986-4E9F-9AE1-F2B476BD9906}"/>
               </a:ext>
             </a:extLst>
           </p:cNvPr>
@@ -10769,7 +10769,7 @@
           <p:cNvPr id="5" name="">
             <a:extLst xmlns:a="http://schemas.openxmlformats.org/drawingml/2006/main">
               <a:ext uri="{FF2B5EF4-FFF2-40B4-BE49-F238E27FC236}">
-                <a16:creationId xmlns:a16="http://schemas.microsoft.com/office/drawing/2014/main" id="{5883B2A1-5330-4D07-B370-A806A027B6DD}"/>
+                <a16:creationId xmlns:a16="http://schemas.microsoft.com/office/drawing/2014/main" id="{E0D30BF8-71B3-42E8-A443-55FD366C2BAE}"/>
               </a:ext>
             </a:extLst>
           </p:cNvPr>
@@ -10916,7 +10916,7 @@
           <p:nvPr/>
         </p:nvPicPr>
         <p:blipFill>
-          <a:blip xmlns:r="http://schemas.openxmlformats.org/officeDocument/2006/relationships" xmlns:a="http://schemas.openxmlformats.org/drawingml/2006/main" r:embed="Rb45bde7883b8447c"/>
+          <a:blip xmlns:r="http://schemas.openxmlformats.org/officeDocument/2006/relationships" xmlns:a="http://schemas.openxmlformats.org/drawingml/2006/main" r:embed="Rb383447b315a4a49"/>
           <a:stretch xmlns:a="http://schemas.openxmlformats.org/drawingml/2006/main"/>
         </p:blipFill>
         <p:spPr>
@@ -10940,7 +10940,7 @@
           <p:nvPr/>
         </p:nvPicPr>
         <p:blipFill>
-          <a:blip xmlns:r="http://schemas.openxmlformats.org/officeDocument/2006/relationships" xmlns:a="http://schemas.openxmlformats.org/drawingml/2006/main" r:embed="R93c87c94d4c24781"/>
+          <a:blip xmlns:r="http://schemas.openxmlformats.org/officeDocument/2006/relationships" xmlns:a="http://schemas.openxmlformats.org/drawingml/2006/main" r:embed="R14cd6f5f63cb47b9"/>
           <a:stretch xmlns:a="http://schemas.openxmlformats.org/drawingml/2006/main"/>
         </p:blipFill>
         <p:spPr>
@@ -10964,7 +10964,7 @@
           <p:nvPr/>
         </p:nvPicPr>
         <p:blipFill>
-          <a:blip xmlns:r="http://schemas.openxmlformats.org/officeDocument/2006/relationships" xmlns:a="http://schemas.openxmlformats.org/drawingml/2006/main" r:embed="R2769d61c22314377"/>
+          <a:blip xmlns:r="http://schemas.openxmlformats.org/officeDocument/2006/relationships" xmlns:a="http://schemas.openxmlformats.org/drawingml/2006/main" r:embed="R7d1a0315ec49446a"/>
           <a:stretch xmlns:a="http://schemas.openxmlformats.org/drawingml/2006/main"/>
         </p:blipFill>
         <p:spPr>
@@ -10984,7 +10984,7 @@
           <p:cNvPr id="9" name="">
             <a:extLst xmlns:a="http://schemas.openxmlformats.org/drawingml/2006/main">
               <a:ext uri="{FF2B5EF4-FFF2-40B4-BE49-F238E27FC236}">
-                <a16:creationId xmlns:a16="http://schemas.microsoft.com/office/drawing/2014/main" id="{D5E44A93-694D-4F81-AAA7-342EC8A20346}"/>
+                <a16:creationId xmlns:a16="http://schemas.microsoft.com/office/drawing/2014/main" id="{6B80F217-C291-455D-945A-FC7C668C4649}"/>
               </a:ext>
             </a:extLst>
           </p:cNvPr>
@@ -11046,7 +11046,7 @@
           <p:cNvPr id="10" name="">
             <a:extLst xmlns:a="http://schemas.openxmlformats.org/drawingml/2006/main">
               <a:ext uri="{FF2B5EF4-FFF2-40B4-BE49-F238E27FC236}">
-                <a16:creationId xmlns:a16="http://schemas.microsoft.com/office/drawing/2014/main" id="{2D6A40D2-7177-4F63-A040-1C64B27F51BA}"/>
+                <a16:creationId xmlns:a16="http://schemas.microsoft.com/office/drawing/2014/main" id="{04D7FE8A-919F-4F67-8E56-D49023B944A0}"/>
               </a:ext>
             </a:extLst>
           </p:cNvPr>
@@ -11077,7 +11077,7 @@
           <p:cNvPr id="11" name="">
             <a:extLst xmlns:a="http://schemas.openxmlformats.org/drawingml/2006/main">
               <a:ext uri="{FF2B5EF4-FFF2-40B4-BE49-F238E27FC236}">
-                <a16:creationId xmlns:a16="http://schemas.microsoft.com/office/drawing/2014/main" id="{AEFFC5C3-8DEF-4F86-959C-7BBB58B6F5CE}"/>
+                <a16:creationId xmlns:a16="http://schemas.microsoft.com/office/drawing/2014/main" id="{6ABE88E0-098F-4F3F-8DD4-1492AFC292EE}"/>
               </a:ext>
             </a:extLst>
           </p:cNvPr>
@@ -11139,7 +11139,7 @@
           <p:cNvPr id="12" name="">
             <a:extLst xmlns:a="http://schemas.openxmlformats.org/drawingml/2006/main">
               <a:ext uri="{FF2B5EF4-FFF2-40B4-BE49-F238E27FC236}">
-                <a16:creationId xmlns:a16="http://schemas.microsoft.com/office/drawing/2014/main" id="{40E04215-5674-4EB6-9AAF-A76A4DF28EB3}"/>
+                <a16:creationId xmlns:a16="http://schemas.microsoft.com/office/drawing/2014/main" id="{1EE57992-2202-49DE-94A1-9F4BD33E9203}"/>
               </a:ext>
             </a:extLst>
           </p:cNvPr>
@@ -11199,7 +11199,7 @@
     </p:spTree>
     <p:extLst>
       <p:ext uri="{BB962C8B-B14F-4D97-AF65-F5344CB8AC3E}">
-        <p14:creationId xmlns:p14="http://schemas.microsoft.com/office/powerpoint/2010/main" val="260488014"/>
+        <p14:creationId xmlns:p14="http://schemas.microsoft.com/office/powerpoint/2010/main" val="1490332863"/>
       </p:ext>
     </p:extLst>
   </p:cSld>
@@ -11230,7 +11230,7 @@
           <p:cNvPr id="1" name="">
             <a:extLst xmlns:a="http://schemas.openxmlformats.org/drawingml/2006/main">
               <a:ext uri="{FF2B5EF4-FFF2-40B4-BE49-F238E27FC236}">
-                <a16:creationId xmlns:a16="http://schemas.microsoft.com/office/drawing/2014/main" id="{2448ADDA-5FA8-4A46-BD42-9D66E5EBE8B3}"/>
+                <a16:creationId xmlns:a16="http://schemas.microsoft.com/office/drawing/2014/main" id="{F08CDAF8-8E38-4D7F-96E6-F673D4259727}"/>
               </a:ext>
             </a:extLst>
           </p:cNvPr>
@@ -11292,7 +11292,7 @@
           <p:cNvPr id="2" name="">
             <a:extLst xmlns:a="http://schemas.openxmlformats.org/drawingml/2006/main">
               <a:ext uri="{FF2B5EF4-FFF2-40B4-BE49-F238E27FC236}">
-                <a16:creationId xmlns:a16="http://schemas.microsoft.com/office/drawing/2014/main" id="{EBACD628-0BC0-4BEF-AAAE-F2370A20157D}"/>
+                <a16:creationId xmlns:a16="http://schemas.microsoft.com/office/drawing/2014/main" id="{BF8685D2-BFB7-4D4C-B334-1787B177A528}"/>
               </a:ext>
             </a:extLst>
           </p:cNvPr>
@@ -11354,7 +11354,7 @@
           <p:cNvPr id="3" name="">
             <a:extLst xmlns:a="http://schemas.openxmlformats.org/drawingml/2006/main">
               <a:ext uri="{FF2B5EF4-FFF2-40B4-BE49-F238E27FC236}">
-                <a16:creationId xmlns:a16="http://schemas.microsoft.com/office/drawing/2014/main" id="{9310A119-954C-4715-98C1-F186743914C4}"/>
+                <a16:creationId xmlns:a16="http://schemas.microsoft.com/office/drawing/2014/main" id="{816CF460-0C5D-41C2-B427-5231798E33EE}"/>
               </a:ext>
             </a:extLst>
           </p:cNvPr>
@@ -11395,7 +11395,7 @@
           <p:cNvPr id="4" name="">
             <a:extLst xmlns:a="http://schemas.openxmlformats.org/drawingml/2006/main">
               <a:ext uri="{FF2B5EF4-FFF2-40B4-BE49-F238E27FC236}">
-                <a16:creationId xmlns:a16="http://schemas.microsoft.com/office/drawing/2014/main" id="{A2F4DBED-4337-44DE-B54C-AD93027348A0}"/>
+                <a16:creationId xmlns:a16="http://schemas.microsoft.com/office/drawing/2014/main" id="{2C6DB7D3-B959-4592-B562-E53DE718C99E}"/>
               </a:ext>
             </a:extLst>
           </p:cNvPr>
@@ -11457,7 +11457,7 @@
           <p:cNvPr id="5" name="">
             <a:extLst xmlns:a="http://schemas.openxmlformats.org/drawingml/2006/main">
               <a:ext uri="{FF2B5EF4-FFF2-40B4-BE49-F238E27FC236}">
-                <a16:creationId xmlns:a16="http://schemas.microsoft.com/office/drawing/2014/main" id="{B5054433-1093-44ED-8C18-C0E13E4D7D60}"/>
+                <a16:creationId xmlns:a16="http://schemas.microsoft.com/office/drawing/2014/main" id="{FDB3678F-D970-4A5E-BF95-1AE46058DAE3}"/>
               </a:ext>
             </a:extLst>
           </p:cNvPr>
@@ -11546,7 +11546,7 @@
           <p:cNvPr id="6" name="">
             <a:extLst xmlns:a="http://schemas.openxmlformats.org/drawingml/2006/main">
               <a:ext uri="{FF2B5EF4-FFF2-40B4-BE49-F238E27FC236}">
-                <a16:creationId xmlns:a16="http://schemas.microsoft.com/office/drawing/2014/main" id="{C2A88AB0-D092-4D8E-B407-424DD7E66B6D}"/>
+                <a16:creationId xmlns:a16="http://schemas.microsoft.com/office/drawing/2014/main" id="{EB2E0C5E-AA34-4D6B-99F3-D46F57911347}"/>
               </a:ext>
             </a:extLst>
           </p:cNvPr>
@@ -11587,7 +11587,7 @@
           <p:cNvPr id="7" name="">
             <a:extLst xmlns:a="http://schemas.openxmlformats.org/drawingml/2006/main">
               <a:ext uri="{FF2B5EF4-FFF2-40B4-BE49-F238E27FC236}">
-                <a16:creationId xmlns:a16="http://schemas.microsoft.com/office/drawing/2014/main" id="{89DC3BBD-003A-44C0-8A4A-3DD596A3E4AC}"/>
+                <a16:creationId xmlns:a16="http://schemas.microsoft.com/office/drawing/2014/main" id="{7F60CFFD-66A1-4446-BA56-09AE35BF78FF}"/>
               </a:ext>
             </a:extLst>
           </p:cNvPr>
@@ -11649,7 +11649,7 @@
           <p:cNvPr id="8" name="">
             <a:extLst xmlns:a="http://schemas.openxmlformats.org/drawingml/2006/main">
               <a:ext uri="{FF2B5EF4-FFF2-40B4-BE49-F238E27FC236}">
-                <a16:creationId xmlns:a16="http://schemas.microsoft.com/office/drawing/2014/main" id="{8E12075B-2207-458F-9FF7-13AF36487696}"/>
+                <a16:creationId xmlns:a16="http://schemas.microsoft.com/office/drawing/2014/main" id="{DA064A20-DCD8-47A0-8781-86C4962F4433}"/>
               </a:ext>
             </a:extLst>
           </p:cNvPr>
@@ -11738,7 +11738,7 @@
           <p:cNvPr id="9" name="">
             <a:extLst xmlns:a="http://schemas.openxmlformats.org/drawingml/2006/main">
               <a:ext uri="{FF2B5EF4-FFF2-40B4-BE49-F238E27FC236}">
-                <a16:creationId xmlns:a16="http://schemas.microsoft.com/office/drawing/2014/main" id="{412D19F5-119F-42BF-8051-92464847EF15}"/>
+                <a16:creationId xmlns:a16="http://schemas.microsoft.com/office/drawing/2014/main" id="{8A33CA5E-C05A-4616-8B0E-70377B776681}"/>
               </a:ext>
             </a:extLst>
           </p:cNvPr>
@@ -11779,7 +11779,7 @@
           <p:cNvPr id="10" name="">
             <a:extLst xmlns:a="http://schemas.openxmlformats.org/drawingml/2006/main">
               <a:ext uri="{FF2B5EF4-FFF2-40B4-BE49-F238E27FC236}">
-                <a16:creationId xmlns:a16="http://schemas.microsoft.com/office/drawing/2014/main" id="{B3247BBA-6147-4B3D-824C-FDB5DA41F848}"/>
+                <a16:creationId xmlns:a16="http://schemas.microsoft.com/office/drawing/2014/main" id="{A3A5FF67-2D70-4231-B727-B3EF56274D8C}"/>
               </a:ext>
             </a:extLst>
           </p:cNvPr>
@@ -11841,7 +11841,7 @@
           <p:cNvPr id="11" name="">
             <a:extLst xmlns:a="http://schemas.openxmlformats.org/drawingml/2006/main">
               <a:ext uri="{FF2B5EF4-FFF2-40B4-BE49-F238E27FC236}">
-                <a16:creationId xmlns:a16="http://schemas.microsoft.com/office/drawing/2014/main" id="{276FE41A-B0B9-42BA-83C5-E951F0C8A20F}"/>
+                <a16:creationId xmlns:a16="http://schemas.microsoft.com/office/drawing/2014/main" id="{69068732-9E68-48C6-832E-79FCEA528FEA}"/>
               </a:ext>
             </a:extLst>
           </p:cNvPr>
@@ -11930,7 +11930,7 @@
           <p:cNvPr id="12" name="">
             <a:extLst xmlns:a="http://schemas.openxmlformats.org/drawingml/2006/main">
               <a:ext uri="{FF2B5EF4-FFF2-40B4-BE49-F238E27FC236}">
-                <a16:creationId xmlns:a16="http://schemas.microsoft.com/office/drawing/2014/main" id="{8DE4F65D-7AB3-403E-9139-E01B68EF1EA0}"/>
+                <a16:creationId xmlns:a16="http://schemas.microsoft.com/office/drawing/2014/main" id="{EB1869C9-116E-4A46-9AD8-CB8758530EFB}"/>
               </a:ext>
             </a:extLst>
           </p:cNvPr>
@@ -11971,7 +11971,7 @@
           <p:cNvPr id="13" name="">
             <a:extLst xmlns:a="http://schemas.openxmlformats.org/drawingml/2006/main">
               <a:ext uri="{FF2B5EF4-FFF2-40B4-BE49-F238E27FC236}">
-                <a16:creationId xmlns:a16="http://schemas.microsoft.com/office/drawing/2014/main" id="{AB04D329-334B-446B-B64E-B7F85F47D995}"/>
+                <a16:creationId xmlns:a16="http://schemas.microsoft.com/office/drawing/2014/main" id="{457B3A12-0199-4A1F-BEF5-90D4BAE3B627}"/>
               </a:ext>
             </a:extLst>
           </p:cNvPr>
@@ -12033,7 +12033,7 @@
           <p:cNvPr id="14" name="">
             <a:extLst xmlns:a="http://schemas.openxmlformats.org/drawingml/2006/main">
               <a:ext uri="{FF2B5EF4-FFF2-40B4-BE49-F238E27FC236}">
-                <a16:creationId xmlns:a16="http://schemas.microsoft.com/office/drawing/2014/main" id="{FC2F8D91-2C9C-4D05-A0C2-881AE19BF13C}"/>
+                <a16:creationId xmlns:a16="http://schemas.microsoft.com/office/drawing/2014/main" id="{C6983A64-83CE-4761-A82D-A716522DF8F8}"/>
               </a:ext>
             </a:extLst>
           </p:cNvPr>
@@ -12122,7 +12122,7 @@
           <p:cNvPr id="15" name="">
             <a:extLst xmlns:a="http://schemas.openxmlformats.org/drawingml/2006/main">
               <a:ext uri="{FF2B5EF4-FFF2-40B4-BE49-F238E27FC236}">
-                <a16:creationId xmlns:a16="http://schemas.microsoft.com/office/drawing/2014/main" id="{8C6A50DC-E057-4672-BC32-D9A2926000DD}"/>
+                <a16:creationId xmlns:a16="http://schemas.microsoft.com/office/drawing/2014/main" id="{7323AF01-E362-4975-A34D-6611B68E9448}"/>
               </a:ext>
             </a:extLst>
           </p:cNvPr>
@@ -12163,7 +12163,7 @@
           <p:cNvPr id="16" name="">
             <a:extLst xmlns:a="http://schemas.openxmlformats.org/drawingml/2006/main">
               <a:ext uri="{FF2B5EF4-FFF2-40B4-BE49-F238E27FC236}">
-                <a16:creationId xmlns:a16="http://schemas.microsoft.com/office/drawing/2014/main" id="{EE0C92A1-4FE6-4D2D-A3A1-0F20DADFC4A0}"/>
+                <a16:creationId xmlns:a16="http://schemas.microsoft.com/office/drawing/2014/main" id="{02497BAF-B503-4A4A-B317-3F1BA1742508}"/>
               </a:ext>
             </a:extLst>
           </p:cNvPr>
@@ -12225,7 +12225,7 @@
           <p:cNvPr id="17" name="">
             <a:extLst xmlns:a="http://schemas.openxmlformats.org/drawingml/2006/main">
               <a:ext uri="{FF2B5EF4-FFF2-40B4-BE49-F238E27FC236}">
-                <a16:creationId xmlns:a16="http://schemas.microsoft.com/office/drawing/2014/main" id="{A69D8CB7-CB11-4B2D-BCF4-3775888BD960}"/>
+                <a16:creationId xmlns:a16="http://schemas.microsoft.com/office/drawing/2014/main" id="{A6950681-F741-4590-8C10-032060209B9B}"/>
               </a:ext>
             </a:extLst>
           </p:cNvPr>
@@ -12287,7 +12287,7 @@
           <p:cNvPr id="18" name="">
             <a:extLst xmlns:a="http://schemas.openxmlformats.org/drawingml/2006/main">
               <a:ext uri="{FF2B5EF4-FFF2-40B4-BE49-F238E27FC236}">
-                <a16:creationId xmlns:a16="http://schemas.microsoft.com/office/drawing/2014/main" id="{B065E73B-EA2C-44F1-AC89-D8E265567D85}"/>
+                <a16:creationId xmlns:a16="http://schemas.microsoft.com/office/drawing/2014/main" id="{15EC04DA-8359-4232-9261-FEFAFB180947}"/>
               </a:ext>
             </a:extLst>
           </p:cNvPr>
@@ -12349,7 +12349,7 @@
           <p:cNvPr id="19" name="">
             <a:extLst xmlns:a="http://schemas.openxmlformats.org/drawingml/2006/main">
               <a:ext uri="{FF2B5EF4-FFF2-40B4-BE49-F238E27FC236}">
-                <a16:creationId xmlns:a16="http://schemas.microsoft.com/office/drawing/2014/main" id="{BE36C039-CBFE-4ACF-B67F-360178C377D7}"/>
+                <a16:creationId xmlns:a16="http://schemas.microsoft.com/office/drawing/2014/main" id="{EE0B62C5-4F00-45AF-95B3-82DC3263421A}"/>
               </a:ext>
             </a:extLst>
           </p:cNvPr>
@@ -12380,7 +12380,7 @@
           <p:cNvPr id="20" name="">
             <a:extLst xmlns:a="http://schemas.openxmlformats.org/drawingml/2006/main">
               <a:ext uri="{FF2B5EF4-FFF2-40B4-BE49-F238E27FC236}">
-                <a16:creationId xmlns:a16="http://schemas.microsoft.com/office/drawing/2014/main" id="{F225BC5A-210D-473C-8902-495654A23BB4}"/>
+                <a16:creationId xmlns:a16="http://schemas.microsoft.com/office/drawing/2014/main" id="{C6F06862-5C1E-476E-95FA-FFD3C30EAB67}"/>
               </a:ext>
             </a:extLst>
           </p:cNvPr>
@@ -12442,7 +12442,7 @@
           <p:cNvPr id="21" name="">
             <a:extLst xmlns:a="http://schemas.openxmlformats.org/drawingml/2006/main">
               <a:ext uri="{FF2B5EF4-FFF2-40B4-BE49-F238E27FC236}">
-                <a16:creationId xmlns:a16="http://schemas.microsoft.com/office/drawing/2014/main" id="{C8E937ED-6C21-4D8E-B282-BF66BD530CE8}"/>
+                <a16:creationId xmlns:a16="http://schemas.microsoft.com/office/drawing/2014/main" id="{E4E82212-FB1C-4722-874F-6526F237FB57}"/>
               </a:ext>
             </a:extLst>
           </p:cNvPr>
@@ -12502,7 +12502,7 @@
     </p:spTree>
     <p:extLst>
       <p:ext uri="{BB962C8B-B14F-4D97-AF65-F5344CB8AC3E}">
-        <p14:creationId xmlns:p14="http://schemas.microsoft.com/office/powerpoint/2010/main" val="921803575"/>
+        <p14:creationId xmlns:p14="http://schemas.microsoft.com/office/powerpoint/2010/main" val="1022058353"/>
       </p:ext>
     </p:extLst>
   </p:cSld>
@@ -12537,7 +12537,7 @@
           <p:nvPr/>
         </p:nvPicPr>
         <p:blipFill>
-          <a:blip xmlns:r="http://schemas.openxmlformats.org/officeDocument/2006/relationships" xmlns:a="http://schemas.openxmlformats.org/drawingml/2006/main" r:embed="Rc90a325e27fc4268"/>
+          <a:blip xmlns:r="http://schemas.openxmlformats.org/officeDocument/2006/relationships" xmlns:a="http://schemas.openxmlformats.org/drawingml/2006/main" r:embed="R78ad7b07f8ca4521"/>
           <a:stretch xmlns:a="http://schemas.openxmlformats.org/drawingml/2006/main"/>
         </p:blipFill>
         <p:spPr>
@@ -12557,7 +12557,7 @@
           <p:cNvPr id="2" name="">
             <a:extLst xmlns:a="http://schemas.openxmlformats.org/drawingml/2006/main">
               <a:ext uri="{FF2B5EF4-FFF2-40B4-BE49-F238E27FC236}">
-                <a16:creationId xmlns:a16="http://schemas.microsoft.com/office/drawing/2014/main" id="{31611E8E-E184-47E8-8295-5D7D3D5BF1AB}"/>
+                <a16:creationId xmlns:a16="http://schemas.microsoft.com/office/drawing/2014/main" id="{2C773532-6C0B-4836-A8D1-B2B06AB9DD2B}"/>
               </a:ext>
             </a:extLst>
           </p:cNvPr>
@@ -12619,7 +12619,7 @@
           <p:cNvPr id="3" name="">
             <a:extLst xmlns:a="http://schemas.openxmlformats.org/drawingml/2006/main">
               <a:ext uri="{FF2B5EF4-FFF2-40B4-BE49-F238E27FC236}">
-                <a16:creationId xmlns:a16="http://schemas.microsoft.com/office/drawing/2014/main" id="{01B5DBCF-3456-4AA9-81D6-E75680ACFEE1}"/>
+                <a16:creationId xmlns:a16="http://schemas.microsoft.com/office/drawing/2014/main" id="{25316BD9-E699-4596-9C60-CD692E41CC2B}"/>
               </a:ext>
             </a:extLst>
           </p:cNvPr>
@@ -12652,7 +12652,7 @@
           <p:cNvPr id="4" name="">
             <a:extLst xmlns:a="http://schemas.openxmlformats.org/drawingml/2006/main">
               <a:ext uri="{FF2B5EF4-FFF2-40B4-BE49-F238E27FC236}">
-                <a16:creationId xmlns:a16="http://schemas.microsoft.com/office/drawing/2014/main" id="{DA8960E7-F626-4865-ACFE-D3A8817341E9}"/>
+                <a16:creationId xmlns:a16="http://schemas.microsoft.com/office/drawing/2014/main" id="{D123BBE8-355A-43BC-924D-594E00F1AC8D}"/>
               </a:ext>
             </a:extLst>
           </p:cNvPr>
@@ -12714,7 +12714,7 @@
           <p:cNvPr id="5" name="">
             <a:extLst xmlns:a="http://schemas.openxmlformats.org/drawingml/2006/main">
               <a:ext uri="{FF2B5EF4-FFF2-40B4-BE49-F238E27FC236}">
-                <a16:creationId xmlns:a16="http://schemas.microsoft.com/office/drawing/2014/main" id="{8A8203ED-7A28-4D4A-BBBF-E0D52AD406B7}"/>
+                <a16:creationId xmlns:a16="http://schemas.microsoft.com/office/drawing/2014/main" id="{EBE40194-CD9C-4973-8797-668B2259B0A1}"/>
               </a:ext>
             </a:extLst>
           </p:cNvPr>
@@ -12747,7 +12747,7 @@
           <p:cNvPr id="6" name="">
             <a:extLst xmlns:a="http://schemas.openxmlformats.org/drawingml/2006/main">
               <a:ext uri="{FF2B5EF4-FFF2-40B4-BE49-F238E27FC236}">
-                <a16:creationId xmlns:a16="http://schemas.microsoft.com/office/drawing/2014/main" id="{C98E7596-E502-4431-AEDF-94002E79CEAF}"/>
+                <a16:creationId xmlns:a16="http://schemas.microsoft.com/office/drawing/2014/main" id="{42BE6CCE-36E9-4A69-8A4D-68EE0D855424}"/>
               </a:ext>
             </a:extLst>
           </p:cNvPr>
@@ -12809,7 +12809,7 @@
           <p:cNvPr id="7" name="">
             <a:extLst xmlns:a="http://schemas.openxmlformats.org/drawingml/2006/main">
               <a:ext uri="{FF2B5EF4-FFF2-40B4-BE49-F238E27FC236}">
-                <a16:creationId xmlns:a16="http://schemas.microsoft.com/office/drawing/2014/main" id="{1CA36293-CFDD-4FEC-AA9D-63D35F49E18E}"/>
+                <a16:creationId xmlns:a16="http://schemas.microsoft.com/office/drawing/2014/main" id="{BD270609-4F38-4FC3-B0CF-030D52EBBCA2}"/>
               </a:ext>
             </a:extLst>
           </p:cNvPr>
@@ -12842,7 +12842,7 @@
           <p:cNvPr id="8" name="">
             <a:extLst xmlns:a="http://schemas.openxmlformats.org/drawingml/2006/main">
               <a:ext uri="{FF2B5EF4-FFF2-40B4-BE49-F238E27FC236}">
-                <a16:creationId xmlns:a16="http://schemas.microsoft.com/office/drawing/2014/main" id="{588A2C78-4ECD-4D35-A84D-CC3601C645F6}"/>
+                <a16:creationId xmlns:a16="http://schemas.microsoft.com/office/drawing/2014/main" id="{828BA1F3-203A-4540-9754-50B3D41BACA4}"/>
               </a:ext>
             </a:extLst>
           </p:cNvPr>
@@ -12904,7 +12904,7 @@
           <p:cNvPr id="9" name="">
             <a:extLst xmlns:a="http://schemas.openxmlformats.org/drawingml/2006/main">
               <a:ext uri="{FF2B5EF4-FFF2-40B4-BE49-F238E27FC236}">
-                <a16:creationId xmlns:a16="http://schemas.microsoft.com/office/drawing/2014/main" id="{76D8CC75-17A5-4333-B715-F44FCF2BC2C8}"/>
+                <a16:creationId xmlns:a16="http://schemas.microsoft.com/office/drawing/2014/main" id="{0FDF17CC-5153-4F43-900B-5AB0AF822D16}"/>
               </a:ext>
             </a:extLst>
           </p:cNvPr>
@@ -12945,7 +12945,7 @@
           <p:cNvPr id="10" name="">
             <a:extLst xmlns:a="http://schemas.openxmlformats.org/drawingml/2006/main">
               <a:ext uri="{FF2B5EF4-FFF2-40B4-BE49-F238E27FC236}">
-                <a16:creationId xmlns:a16="http://schemas.microsoft.com/office/drawing/2014/main" id="{FF13D2A1-4538-4B2C-8924-E29846497037}"/>
+                <a16:creationId xmlns:a16="http://schemas.microsoft.com/office/drawing/2014/main" id="{BFC0B967-2510-428E-B6C1-20B890E92E10}"/>
               </a:ext>
             </a:extLst>
           </p:cNvPr>
@@ -13007,7 +13007,7 @@
           <p:cNvPr id="11" name="">
             <a:extLst xmlns:a="http://schemas.openxmlformats.org/drawingml/2006/main">
               <a:ext uri="{FF2B5EF4-FFF2-40B4-BE49-F238E27FC236}">
-                <a16:creationId xmlns:a16="http://schemas.microsoft.com/office/drawing/2014/main" id="{440736AC-C611-42F1-8BB5-985123D96136}"/>
+                <a16:creationId xmlns:a16="http://schemas.microsoft.com/office/drawing/2014/main" id="{B8110032-072E-430E-8D06-73A0F9EBE349}"/>
               </a:ext>
             </a:extLst>
           </p:cNvPr>
@@ -13069,7 +13069,7 @@
           <p:cNvPr id="12" name="">
             <a:extLst xmlns:a="http://schemas.openxmlformats.org/drawingml/2006/main">
               <a:ext uri="{FF2B5EF4-FFF2-40B4-BE49-F238E27FC236}">
-                <a16:creationId xmlns:a16="http://schemas.microsoft.com/office/drawing/2014/main" id="{311B5350-DC52-4AB3-9563-F6033ACC677A}"/>
+                <a16:creationId xmlns:a16="http://schemas.microsoft.com/office/drawing/2014/main" id="{53E4229B-F189-4BD7-8416-0A51708926EE}"/>
               </a:ext>
             </a:extLst>
           </p:cNvPr>
@@ -13158,7 +13158,7 @@
           <p:cNvPr id="13" name="">
             <a:extLst xmlns:a="http://schemas.openxmlformats.org/drawingml/2006/main">
               <a:ext uri="{FF2B5EF4-FFF2-40B4-BE49-F238E27FC236}">
-                <a16:creationId xmlns:a16="http://schemas.microsoft.com/office/drawing/2014/main" id="{340321AB-7B72-40B9-8E90-E1D213C09C98}"/>
+                <a16:creationId xmlns:a16="http://schemas.microsoft.com/office/drawing/2014/main" id="{A339472D-D407-43D5-B8CD-A0F7BDFEB54E}"/>
               </a:ext>
             </a:extLst>
           </p:cNvPr>
@@ -13189,7 +13189,7 @@
           <p:cNvPr id="14" name="">
             <a:extLst xmlns:a="http://schemas.openxmlformats.org/drawingml/2006/main">
               <a:ext uri="{FF2B5EF4-FFF2-40B4-BE49-F238E27FC236}">
-                <a16:creationId xmlns:a16="http://schemas.microsoft.com/office/drawing/2014/main" id="{3343B681-C890-4AFC-B5E1-503CE573D906}"/>
+                <a16:creationId xmlns:a16="http://schemas.microsoft.com/office/drawing/2014/main" id="{32252ECB-05A0-47DE-9D7A-5DBE4EFF9D52}"/>
               </a:ext>
             </a:extLst>
           </p:cNvPr>
@@ -13229,7 +13229,7 @@
           <p:cNvPr id="15" name="">
             <a:extLst xmlns:a="http://schemas.openxmlformats.org/drawingml/2006/main">
               <a:ext uri="{FF2B5EF4-FFF2-40B4-BE49-F238E27FC236}">
-                <a16:creationId xmlns:a16="http://schemas.microsoft.com/office/drawing/2014/main" id="{61A29565-EBB3-448B-B16D-92B09C8D0055}"/>
+                <a16:creationId xmlns:a16="http://schemas.microsoft.com/office/drawing/2014/main" id="{DEEE7197-B8F7-4971-A929-35B151DD7957}"/>
               </a:ext>
             </a:extLst>
           </p:cNvPr>
@@ -13289,7 +13289,7 @@
     </p:spTree>
     <p:extLst>
       <p:ext uri="{BB962C8B-B14F-4D97-AF65-F5344CB8AC3E}">
-        <p14:creationId xmlns:p14="http://schemas.microsoft.com/office/powerpoint/2010/main" val="1396602094"/>
+        <p14:creationId xmlns:p14="http://schemas.microsoft.com/office/powerpoint/2010/main" val="1226431441"/>
       </p:ext>
     </p:extLst>
   </p:cSld>
@@ -13320,7 +13320,7 @@
           <p:cNvPr id="1" name="">
             <a:extLst xmlns:a="http://schemas.openxmlformats.org/drawingml/2006/main">
               <a:ext uri="{FF2B5EF4-FFF2-40B4-BE49-F238E27FC236}">
-                <a16:creationId xmlns:a16="http://schemas.microsoft.com/office/drawing/2014/main" id="{03142839-BF81-4612-AA25-23CB8951EF0E}"/>
+                <a16:creationId xmlns:a16="http://schemas.microsoft.com/office/drawing/2014/main" id="{FE11043A-BAF6-4A44-9E61-A0D41227E2E9}"/>
               </a:ext>
             </a:extLst>
           </p:cNvPr>
@@ -13382,7 +13382,7 @@
           <p:cNvPr id="2" name="">
             <a:extLst xmlns:a="http://schemas.openxmlformats.org/drawingml/2006/main">
               <a:ext uri="{FF2B5EF4-FFF2-40B4-BE49-F238E27FC236}">
-                <a16:creationId xmlns:a16="http://schemas.microsoft.com/office/drawing/2014/main" id="{2AA51113-E470-45EF-8230-942CD03B1E13}"/>
+                <a16:creationId xmlns:a16="http://schemas.microsoft.com/office/drawing/2014/main" id="{D5AECADA-99E1-4E71-A634-172C38A39FAD}"/>
               </a:ext>
             </a:extLst>
           </p:cNvPr>
@@ -13444,7 +13444,7 @@
           <p:cNvPr id="3" name="">
             <a:extLst xmlns:a="http://schemas.openxmlformats.org/drawingml/2006/main">
               <a:ext uri="{FF2B5EF4-FFF2-40B4-BE49-F238E27FC236}">
-                <a16:creationId xmlns:a16="http://schemas.microsoft.com/office/drawing/2014/main" id="{9695F89B-5925-4A73-9D9C-A9DFA6908778}"/>
+                <a16:creationId xmlns:a16="http://schemas.microsoft.com/office/drawing/2014/main" id="{1E698E25-EE82-41E6-A830-AD0F8796DCB9}"/>
               </a:ext>
             </a:extLst>
           </p:cNvPr>
@@ -13506,7 +13506,7 @@
           <p:cNvPr id="4" name="">
             <a:extLst xmlns:a="http://schemas.openxmlformats.org/drawingml/2006/main">
               <a:ext uri="{FF2B5EF4-FFF2-40B4-BE49-F238E27FC236}">
-                <a16:creationId xmlns:a16="http://schemas.microsoft.com/office/drawing/2014/main" id="{61C9C8E3-733A-4E3E-A2F1-50D36C7735D6}"/>
+                <a16:creationId xmlns:a16="http://schemas.microsoft.com/office/drawing/2014/main" id="{D754BC3A-6D59-4701-9D93-D4BE53E5C376}"/>
               </a:ext>
             </a:extLst>
           </p:cNvPr>
@@ -13547,7 +13547,7 @@
           <p:cNvPr id="5" name="">
             <a:extLst xmlns:a="http://schemas.openxmlformats.org/drawingml/2006/main">
               <a:ext uri="{FF2B5EF4-FFF2-40B4-BE49-F238E27FC236}">
-                <a16:creationId xmlns:a16="http://schemas.microsoft.com/office/drawing/2014/main" id="{43197CDA-1409-44CB-8BF1-DEB0B4A570F6}"/>
+                <a16:creationId xmlns:a16="http://schemas.microsoft.com/office/drawing/2014/main" id="{350E0C19-8473-40AE-8213-710C411322EA}"/>
               </a:ext>
             </a:extLst>
           </p:cNvPr>
@@ -13609,7 +13609,7 @@
           <p:cNvPr id="6" name="">
             <a:extLst xmlns:a="http://schemas.openxmlformats.org/drawingml/2006/main">
               <a:ext uri="{FF2B5EF4-FFF2-40B4-BE49-F238E27FC236}">
-                <a16:creationId xmlns:a16="http://schemas.microsoft.com/office/drawing/2014/main" id="{572CEBBA-1344-4E2C-A087-060D11F86403}"/>
+                <a16:creationId xmlns:a16="http://schemas.microsoft.com/office/drawing/2014/main" id="{D63BC2F0-534F-45E8-810D-C31CC0A9E10D}"/>
               </a:ext>
             </a:extLst>
           </p:cNvPr>
@@ -13698,7 +13698,7 @@
           <p:cNvPr id="7" name="">
             <a:extLst xmlns:a="http://schemas.openxmlformats.org/drawingml/2006/main">
               <a:ext uri="{FF2B5EF4-FFF2-40B4-BE49-F238E27FC236}">
-                <a16:creationId xmlns:a16="http://schemas.microsoft.com/office/drawing/2014/main" id="{7F03BE59-6076-4037-A6DE-152DC9D45E48}"/>
+                <a16:creationId xmlns:a16="http://schemas.microsoft.com/office/drawing/2014/main" id="{ECEB8877-4FDB-4BC4-B55D-4B5EE4EF4ADC}"/>
               </a:ext>
             </a:extLst>
           </p:cNvPr>
@@ -13739,7 +13739,7 @@
           <p:cNvPr id="8" name="">
             <a:extLst xmlns:a="http://schemas.openxmlformats.org/drawingml/2006/main">
               <a:ext uri="{FF2B5EF4-FFF2-40B4-BE49-F238E27FC236}">
-                <a16:creationId xmlns:a16="http://schemas.microsoft.com/office/drawing/2014/main" id="{29385790-0270-4AF1-A3E5-25015F8D27C2}"/>
+                <a16:creationId xmlns:a16="http://schemas.microsoft.com/office/drawing/2014/main" id="{A4938BF5-E349-4CBC-B18B-24BFE865C64D}"/>
               </a:ext>
             </a:extLst>
           </p:cNvPr>
@@ -13801,7 +13801,7 @@
           <p:cNvPr id="9" name="">
             <a:extLst xmlns:a="http://schemas.openxmlformats.org/drawingml/2006/main">
               <a:ext uri="{FF2B5EF4-FFF2-40B4-BE49-F238E27FC236}">
-                <a16:creationId xmlns:a16="http://schemas.microsoft.com/office/drawing/2014/main" id="{6DC8A37B-0587-41D5-BFF3-D130C7601FFA}"/>
+                <a16:creationId xmlns:a16="http://schemas.microsoft.com/office/drawing/2014/main" id="{8ADC9D9B-3221-446C-BC26-55FC1AB7E784}"/>
               </a:ext>
             </a:extLst>
           </p:cNvPr>
@@ -13890,7 +13890,7 @@
           <p:cNvPr id="10" name="">
             <a:extLst xmlns:a="http://schemas.openxmlformats.org/drawingml/2006/main">
               <a:ext uri="{FF2B5EF4-FFF2-40B4-BE49-F238E27FC236}">
-                <a16:creationId xmlns:a16="http://schemas.microsoft.com/office/drawing/2014/main" id="{79EDA982-4D1A-4DB2-BB42-727ED0352A34}"/>
+                <a16:creationId xmlns:a16="http://schemas.microsoft.com/office/drawing/2014/main" id="{7B73C64E-B5C5-4468-9355-6D4056287519}"/>
               </a:ext>
             </a:extLst>
           </p:cNvPr>
@@ -13931,7 +13931,7 @@
           <p:cNvPr id="11" name="">
             <a:extLst xmlns:a="http://schemas.openxmlformats.org/drawingml/2006/main">
               <a:ext uri="{FF2B5EF4-FFF2-40B4-BE49-F238E27FC236}">
-                <a16:creationId xmlns:a16="http://schemas.microsoft.com/office/drawing/2014/main" id="{223FED4A-1848-4C17-AD33-9514B0EC3175}"/>
+                <a16:creationId xmlns:a16="http://schemas.microsoft.com/office/drawing/2014/main" id="{F2A70476-2CF4-4C31-B8E8-C424737AB8D8}"/>
               </a:ext>
             </a:extLst>
           </p:cNvPr>
@@ -13993,7 +13993,7 @@
           <p:cNvPr id="12" name="">
             <a:extLst xmlns:a="http://schemas.openxmlformats.org/drawingml/2006/main">
               <a:ext uri="{FF2B5EF4-FFF2-40B4-BE49-F238E27FC236}">
-                <a16:creationId xmlns:a16="http://schemas.microsoft.com/office/drawing/2014/main" id="{900E0A5E-AE0E-465F-9736-EC6FA16390A5}"/>
+                <a16:creationId xmlns:a16="http://schemas.microsoft.com/office/drawing/2014/main" id="{12D5B6B9-FC68-4EF5-996F-45FB71FA2309}"/>
               </a:ext>
             </a:extLst>
           </p:cNvPr>
@@ -14082,7 +14082,7 @@
           <p:cNvPr id="13" name="">
             <a:extLst xmlns:a="http://schemas.openxmlformats.org/drawingml/2006/main">
               <a:ext uri="{FF2B5EF4-FFF2-40B4-BE49-F238E27FC236}">
-                <a16:creationId xmlns:a16="http://schemas.microsoft.com/office/drawing/2014/main" id="{DC0A1DAA-7939-48B4-9A7E-C818866D56A5}"/>
+                <a16:creationId xmlns:a16="http://schemas.microsoft.com/office/drawing/2014/main" id="{A9B98127-37BB-41E6-A498-2D4A2D96B525}"/>
               </a:ext>
             </a:extLst>
           </p:cNvPr>
@@ -14115,7 +14115,7 @@
           <p:cNvPr id="14" name="">
             <a:extLst xmlns:a="http://schemas.openxmlformats.org/drawingml/2006/main">
               <a:ext uri="{FF2B5EF4-FFF2-40B4-BE49-F238E27FC236}">
-                <a16:creationId xmlns:a16="http://schemas.microsoft.com/office/drawing/2014/main" id="{C69C52FB-8AA7-4720-86C5-CD78911BD079}"/>
+                <a16:creationId xmlns:a16="http://schemas.microsoft.com/office/drawing/2014/main" id="{F9D3FAD4-6849-427D-BC2F-5E4E49BE8A44}"/>
               </a:ext>
             </a:extLst>
           </p:cNvPr>
@@ -14148,7 +14148,7 @@
           <p:cNvPr id="15" name="">
             <a:extLst xmlns:a="http://schemas.openxmlformats.org/drawingml/2006/main">
               <a:ext uri="{FF2B5EF4-FFF2-40B4-BE49-F238E27FC236}">
-                <a16:creationId xmlns:a16="http://schemas.microsoft.com/office/drawing/2014/main" id="{709FF346-502C-4266-BCE2-E420A2D138DC}"/>
+                <a16:creationId xmlns:a16="http://schemas.microsoft.com/office/drawing/2014/main" id="{CA44E1B4-637A-418D-BF25-A8AF86616410}"/>
               </a:ext>
             </a:extLst>
           </p:cNvPr>
@@ -14183,7 +14183,7 @@
           <p:cNvPr id="16" name="">
             <a:extLst xmlns:a="http://schemas.openxmlformats.org/drawingml/2006/main">
               <a:ext uri="{FF2B5EF4-FFF2-40B4-BE49-F238E27FC236}">
-                <a16:creationId xmlns:a16="http://schemas.microsoft.com/office/drawing/2014/main" id="{EA10DA42-2F11-473F-A14B-3ADF756EDB2A}"/>
+                <a16:creationId xmlns:a16="http://schemas.microsoft.com/office/drawing/2014/main" id="{04B8489C-44B5-4FC1-84F0-158E19A72DF2}"/>
               </a:ext>
             </a:extLst>
           </p:cNvPr>
@@ -14216,7 +14216,7 @@
           <p:cNvPr id="17" name="">
             <a:extLst xmlns:a="http://schemas.openxmlformats.org/drawingml/2006/main">
               <a:ext uri="{FF2B5EF4-FFF2-40B4-BE49-F238E27FC236}">
-                <a16:creationId xmlns:a16="http://schemas.microsoft.com/office/drawing/2014/main" id="{B8E1B989-D23A-44BE-9B07-EE835B6F5941}"/>
+                <a16:creationId xmlns:a16="http://schemas.microsoft.com/office/drawing/2014/main" id="{259D3FEE-31B0-4B40-85EC-F7F5DD53A135}"/>
               </a:ext>
             </a:extLst>
           </p:cNvPr>
@@ -14249,7 +14249,7 @@
           <p:cNvPr id="18" name="">
             <a:extLst xmlns:a="http://schemas.openxmlformats.org/drawingml/2006/main">
               <a:ext uri="{FF2B5EF4-FFF2-40B4-BE49-F238E27FC236}">
-                <a16:creationId xmlns:a16="http://schemas.microsoft.com/office/drawing/2014/main" id="{0F286D62-1D38-4C3E-958D-B2887EFCB6AB}"/>
+                <a16:creationId xmlns:a16="http://schemas.microsoft.com/office/drawing/2014/main" id="{0D3F1F96-387B-46D9-9E88-3D884B8317C6}"/>
               </a:ext>
             </a:extLst>
           </p:cNvPr>
@@ -14282,7 +14282,7 @@
           <p:cNvPr id="19" name="">
             <a:extLst xmlns:a="http://schemas.openxmlformats.org/drawingml/2006/main">
               <a:ext uri="{FF2B5EF4-FFF2-40B4-BE49-F238E27FC236}">
-                <a16:creationId xmlns:a16="http://schemas.microsoft.com/office/drawing/2014/main" id="{14034F81-55FC-4685-AC47-5B9FF5E96BA1}"/>
+                <a16:creationId xmlns:a16="http://schemas.microsoft.com/office/drawing/2014/main" id="{68958120-DE1C-4CCB-B9A8-7A4390DE052C}"/>
               </a:ext>
             </a:extLst>
           </p:cNvPr>
@@ -14315,7 +14315,7 @@
           <p:cNvPr id="20" name="">
             <a:extLst xmlns:a="http://schemas.openxmlformats.org/drawingml/2006/main">
               <a:ext uri="{FF2B5EF4-FFF2-40B4-BE49-F238E27FC236}">
-                <a16:creationId xmlns:a16="http://schemas.microsoft.com/office/drawing/2014/main" id="{0F532701-D713-4BD4-92BB-924BBE8D17C2}"/>
+                <a16:creationId xmlns:a16="http://schemas.microsoft.com/office/drawing/2014/main" id="{CAB23F87-104B-4A2E-8CC0-240464065FFC}"/>
               </a:ext>
             </a:extLst>
           </p:cNvPr>
@@ -14348,7 +14348,7 @@
           <p:cNvPr id="21" name="">
             <a:extLst xmlns:a="http://schemas.openxmlformats.org/drawingml/2006/main">
               <a:ext uri="{FF2B5EF4-FFF2-40B4-BE49-F238E27FC236}">
-                <a16:creationId xmlns:a16="http://schemas.microsoft.com/office/drawing/2014/main" id="{6B215495-8672-4506-B8E0-9FFCC414110C}"/>
+                <a16:creationId xmlns:a16="http://schemas.microsoft.com/office/drawing/2014/main" id="{8BCA1B93-4D5D-4C0B-97E0-96A57CF19BBE}"/>
               </a:ext>
             </a:extLst>
           </p:cNvPr>
@@ -14381,7 +14381,7 @@
           <p:cNvPr id="22" name="">
             <a:extLst xmlns:a="http://schemas.openxmlformats.org/drawingml/2006/main">
               <a:ext uri="{FF2B5EF4-FFF2-40B4-BE49-F238E27FC236}">
-                <a16:creationId xmlns:a16="http://schemas.microsoft.com/office/drawing/2014/main" id="{DA40ECC9-6CE2-4282-9E0F-D7106884DE40}"/>
+                <a16:creationId xmlns:a16="http://schemas.microsoft.com/office/drawing/2014/main" id="{4C84F1E4-6418-4FE0-ADDE-2DF239F319F7}"/>
               </a:ext>
             </a:extLst>
           </p:cNvPr>
@@ -14414,7 +14414,7 @@
           <p:cNvPr id="23" name="">
             <a:extLst xmlns:a="http://schemas.openxmlformats.org/drawingml/2006/main">
               <a:ext uri="{FF2B5EF4-FFF2-40B4-BE49-F238E27FC236}">
-                <a16:creationId xmlns:a16="http://schemas.microsoft.com/office/drawing/2014/main" id="{994A083C-55E4-42C7-922C-81B88A2FE845}"/>
+                <a16:creationId xmlns:a16="http://schemas.microsoft.com/office/drawing/2014/main" id="{F62002B2-218C-4785-8040-F7E36D49BCFC}"/>
               </a:ext>
             </a:extLst>
           </p:cNvPr>
@@ -14447,7 +14447,7 @@
           <p:cNvPr id="24" name="">
             <a:extLst xmlns:a="http://schemas.openxmlformats.org/drawingml/2006/main">
               <a:ext uri="{FF2B5EF4-FFF2-40B4-BE49-F238E27FC236}">
-                <a16:creationId xmlns:a16="http://schemas.microsoft.com/office/drawing/2014/main" id="{D7C2CBB0-0F00-414C-936F-772F32A7F477}"/>
+                <a16:creationId xmlns:a16="http://schemas.microsoft.com/office/drawing/2014/main" id="{41CA392E-5646-4F0D-8981-0EF5AC0B92EE}"/>
               </a:ext>
             </a:extLst>
           </p:cNvPr>
@@ -14480,7 +14480,7 @@
           <p:cNvPr id="25" name="">
             <a:extLst xmlns:a="http://schemas.openxmlformats.org/drawingml/2006/main">
               <a:ext uri="{FF2B5EF4-FFF2-40B4-BE49-F238E27FC236}">
-                <a16:creationId xmlns:a16="http://schemas.microsoft.com/office/drawing/2014/main" id="{D96BCF72-F14B-4484-A10E-F023317A30BC}"/>
+                <a16:creationId xmlns:a16="http://schemas.microsoft.com/office/drawing/2014/main" id="{796A21B4-1021-45C9-ABA1-FADEE2358EC9}"/>
               </a:ext>
             </a:extLst>
           </p:cNvPr>
@@ -14513,7 +14513,7 @@
           <p:cNvPr id="26" name="">
             <a:extLst xmlns:a="http://schemas.openxmlformats.org/drawingml/2006/main">
               <a:ext uri="{FF2B5EF4-FFF2-40B4-BE49-F238E27FC236}">
-                <a16:creationId xmlns:a16="http://schemas.microsoft.com/office/drawing/2014/main" id="{F06A4536-447A-4225-BB69-8FF6907E8ED5}"/>
+                <a16:creationId xmlns:a16="http://schemas.microsoft.com/office/drawing/2014/main" id="{261692CE-BC8B-4ECF-85A7-0C099D429F81}"/>
               </a:ext>
             </a:extLst>
           </p:cNvPr>
@@ -14546,7 +14546,7 @@
           <p:cNvPr id="27" name="">
             <a:extLst xmlns:a="http://schemas.openxmlformats.org/drawingml/2006/main">
               <a:ext uri="{FF2B5EF4-FFF2-40B4-BE49-F238E27FC236}">
-                <a16:creationId xmlns:a16="http://schemas.microsoft.com/office/drawing/2014/main" id="{F42E0A78-6F60-4EAD-9397-81E5D31FF79A}"/>
+                <a16:creationId xmlns:a16="http://schemas.microsoft.com/office/drawing/2014/main" id="{C4AA6B91-F2B0-4100-B4DD-23B5EAF9810A}"/>
               </a:ext>
             </a:extLst>
           </p:cNvPr>
@@ -14579,7 +14579,7 @@
           <p:cNvPr id="28" name="">
             <a:extLst xmlns:a="http://schemas.openxmlformats.org/drawingml/2006/main">
               <a:ext uri="{FF2B5EF4-FFF2-40B4-BE49-F238E27FC236}">
-                <a16:creationId xmlns:a16="http://schemas.microsoft.com/office/drawing/2014/main" id="{73C509E5-CD6C-4984-93DE-87AB83FD723C}"/>
+                <a16:creationId xmlns:a16="http://schemas.microsoft.com/office/drawing/2014/main" id="{7A991285-E64B-4D7C-BDB8-10966B984200}"/>
               </a:ext>
             </a:extLst>
           </p:cNvPr>
@@ -14612,7 +14612,7 @@
           <p:cNvPr id="29" name="">
             <a:extLst xmlns:a="http://schemas.openxmlformats.org/drawingml/2006/main">
               <a:ext uri="{FF2B5EF4-FFF2-40B4-BE49-F238E27FC236}">
-                <a16:creationId xmlns:a16="http://schemas.microsoft.com/office/drawing/2014/main" id="{8208208A-FC35-4F6D-A260-E80D3BAA0856}"/>
+                <a16:creationId xmlns:a16="http://schemas.microsoft.com/office/drawing/2014/main" id="{B79EE63E-5554-4618-80E0-C00D11F1EC69}"/>
               </a:ext>
             </a:extLst>
           </p:cNvPr>
@@ -14645,7 +14645,7 @@
           <p:cNvPr id="30" name="">
             <a:extLst xmlns:a="http://schemas.openxmlformats.org/drawingml/2006/main">
               <a:ext uri="{FF2B5EF4-FFF2-40B4-BE49-F238E27FC236}">
-                <a16:creationId xmlns:a16="http://schemas.microsoft.com/office/drawing/2014/main" id="{0E3E924F-CC67-40C3-BAF2-0319873F8996}"/>
+                <a16:creationId xmlns:a16="http://schemas.microsoft.com/office/drawing/2014/main" id="{4EB29DA2-2F71-4FA7-A25D-8B9B626FC759}"/>
               </a:ext>
             </a:extLst>
           </p:cNvPr>
@@ -14678,7 +14678,7 @@
           <p:cNvPr id="31" name="">
             <a:extLst xmlns:a="http://schemas.openxmlformats.org/drawingml/2006/main">
               <a:ext uri="{FF2B5EF4-FFF2-40B4-BE49-F238E27FC236}">
-                <a16:creationId xmlns:a16="http://schemas.microsoft.com/office/drawing/2014/main" id="{1B66C5BC-2E19-4EA7-8077-E51CF7FEE6A0}"/>
+                <a16:creationId xmlns:a16="http://schemas.microsoft.com/office/drawing/2014/main" id="{412FF7F8-80F1-48E4-BAB9-3D21D0B82568}"/>
               </a:ext>
             </a:extLst>
           </p:cNvPr>
@@ -14711,7 +14711,7 @@
           <p:cNvPr id="32" name="">
             <a:extLst xmlns:a="http://schemas.openxmlformats.org/drawingml/2006/main">
               <a:ext uri="{FF2B5EF4-FFF2-40B4-BE49-F238E27FC236}">
-                <a16:creationId xmlns:a16="http://schemas.microsoft.com/office/drawing/2014/main" id="{839A335C-0529-45ED-876B-8049DBD01B7F}"/>
+                <a16:creationId xmlns:a16="http://schemas.microsoft.com/office/drawing/2014/main" id="{CDAB6D70-88E4-45B9-8F0C-885C7492306B}"/>
               </a:ext>
             </a:extLst>
           </p:cNvPr>
@@ -14744,7 +14744,7 @@
           <p:cNvPr id="33" name="">
             <a:extLst xmlns:a="http://schemas.openxmlformats.org/drawingml/2006/main">
               <a:ext uri="{FF2B5EF4-FFF2-40B4-BE49-F238E27FC236}">
-                <a16:creationId xmlns:a16="http://schemas.microsoft.com/office/drawing/2014/main" id="{95954713-4C31-4A40-8A33-80B0869FE237}"/>
+                <a16:creationId xmlns:a16="http://schemas.microsoft.com/office/drawing/2014/main" id="{B8F13A19-951B-407E-ACDE-AFACF49266B4}"/>
               </a:ext>
             </a:extLst>
           </p:cNvPr>
@@ -14777,7 +14777,7 @@
           <p:cNvPr id="34" name="">
             <a:extLst xmlns:a="http://schemas.openxmlformats.org/drawingml/2006/main">
               <a:ext uri="{FF2B5EF4-FFF2-40B4-BE49-F238E27FC236}">
-                <a16:creationId xmlns:a16="http://schemas.microsoft.com/office/drawing/2014/main" id="{ACAC2097-349E-428F-A315-88BF47C6C27D}"/>
+                <a16:creationId xmlns:a16="http://schemas.microsoft.com/office/drawing/2014/main" id="{57888C87-4C7B-4157-BFCC-B7C292286CBA}"/>
               </a:ext>
             </a:extLst>
           </p:cNvPr>
@@ -14810,7 +14810,7 @@
           <p:cNvPr id="35" name="">
             <a:extLst xmlns:a="http://schemas.openxmlformats.org/drawingml/2006/main">
               <a:ext uri="{FF2B5EF4-FFF2-40B4-BE49-F238E27FC236}">
-                <a16:creationId xmlns:a16="http://schemas.microsoft.com/office/drawing/2014/main" id="{4B1D77D5-E798-4B83-8868-1440D0ED3925}"/>
+                <a16:creationId xmlns:a16="http://schemas.microsoft.com/office/drawing/2014/main" id="{8A00B6D3-DE7C-4FC7-929C-A270FB3D7DB4}"/>
               </a:ext>
             </a:extLst>
           </p:cNvPr>
@@ -14843,7 +14843,7 @@
           <p:cNvPr id="36" name="">
             <a:extLst xmlns:a="http://schemas.openxmlformats.org/drawingml/2006/main">
               <a:ext uri="{FF2B5EF4-FFF2-40B4-BE49-F238E27FC236}">
-                <a16:creationId xmlns:a16="http://schemas.microsoft.com/office/drawing/2014/main" id="{018D8EE8-3FED-4DFF-A96A-9193F8A9EC53}"/>
+                <a16:creationId xmlns:a16="http://schemas.microsoft.com/office/drawing/2014/main" id="{43F38270-B27F-46AB-A131-6DC7064D5B56}"/>
               </a:ext>
             </a:extLst>
           </p:cNvPr>
@@ -14876,7 +14876,7 @@
           <p:cNvPr id="37" name="">
             <a:extLst xmlns:a="http://schemas.openxmlformats.org/drawingml/2006/main">
               <a:ext uri="{FF2B5EF4-FFF2-40B4-BE49-F238E27FC236}">
-                <a16:creationId xmlns:a16="http://schemas.microsoft.com/office/drawing/2014/main" id="{8FA48448-6CFD-42CD-B9B8-4DDE9044AFB9}"/>
+                <a16:creationId xmlns:a16="http://schemas.microsoft.com/office/drawing/2014/main" id="{39FEC17E-5416-4F16-8E3E-96A2A01BDBD6}"/>
               </a:ext>
             </a:extLst>
           </p:cNvPr>
@@ -14909,7 +14909,7 @@
           <p:cNvPr id="38" name="">
             <a:extLst xmlns:a="http://schemas.openxmlformats.org/drawingml/2006/main">
               <a:ext uri="{FF2B5EF4-FFF2-40B4-BE49-F238E27FC236}">
-                <a16:creationId xmlns:a16="http://schemas.microsoft.com/office/drawing/2014/main" id="{57D34C6C-EA82-43E9-AA88-D035875F5F80}"/>
+                <a16:creationId xmlns:a16="http://schemas.microsoft.com/office/drawing/2014/main" id="{6B4C91F1-E99D-435D-A17F-95227EDC0BFB}"/>
               </a:ext>
             </a:extLst>
           </p:cNvPr>
@@ -14942,7 +14942,7 @@
           <p:cNvPr id="39" name="">
             <a:extLst xmlns:a="http://schemas.openxmlformats.org/drawingml/2006/main">
               <a:ext uri="{FF2B5EF4-FFF2-40B4-BE49-F238E27FC236}">
-                <a16:creationId xmlns:a16="http://schemas.microsoft.com/office/drawing/2014/main" id="{696F6D0F-3E8E-42A8-9BDC-A926241B74E5}"/>
+                <a16:creationId xmlns:a16="http://schemas.microsoft.com/office/drawing/2014/main" id="{852CAF5C-84BA-4DA3-9175-4C903757AF31}"/>
               </a:ext>
             </a:extLst>
           </p:cNvPr>
@@ -14975,7 +14975,7 @@
           <p:cNvPr id="40" name="">
             <a:extLst xmlns:a="http://schemas.openxmlformats.org/drawingml/2006/main">
               <a:ext uri="{FF2B5EF4-FFF2-40B4-BE49-F238E27FC236}">
-                <a16:creationId xmlns:a16="http://schemas.microsoft.com/office/drawing/2014/main" id="{E1B27006-E93E-4C5A-9E65-6A3F0AF6D9FB}"/>
+                <a16:creationId xmlns:a16="http://schemas.microsoft.com/office/drawing/2014/main" id="{5E7003AF-AD8E-449B-B992-3C5C43989512}"/>
               </a:ext>
             </a:extLst>
           </p:cNvPr>
@@ -15008,7 +15008,7 @@
           <p:cNvPr id="41" name="">
             <a:extLst xmlns:a="http://schemas.openxmlformats.org/drawingml/2006/main">
               <a:ext uri="{FF2B5EF4-FFF2-40B4-BE49-F238E27FC236}">
-                <a16:creationId xmlns:a16="http://schemas.microsoft.com/office/drawing/2014/main" id="{697514F6-6BAF-4DF4-8D24-5E8C760ABFD7}"/>
+                <a16:creationId xmlns:a16="http://schemas.microsoft.com/office/drawing/2014/main" id="{103E5600-8269-4E02-975A-E64868884D11}"/>
               </a:ext>
             </a:extLst>
           </p:cNvPr>
@@ -15041,7 +15041,7 @@
           <p:cNvPr id="42" name="">
             <a:extLst xmlns:a="http://schemas.openxmlformats.org/drawingml/2006/main">
               <a:ext uri="{FF2B5EF4-FFF2-40B4-BE49-F238E27FC236}">
-                <a16:creationId xmlns:a16="http://schemas.microsoft.com/office/drawing/2014/main" id="{92ECB94A-5D64-49F0-B367-DB793C17C589}"/>
+                <a16:creationId xmlns:a16="http://schemas.microsoft.com/office/drawing/2014/main" id="{E01715E9-07D2-4D8E-A530-FCC33B80C33A}"/>
               </a:ext>
             </a:extLst>
           </p:cNvPr>
@@ -15074,7 +15074,7 @@
           <p:cNvPr id="43" name="">
             <a:extLst xmlns:a="http://schemas.openxmlformats.org/drawingml/2006/main">
               <a:ext uri="{FF2B5EF4-FFF2-40B4-BE49-F238E27FC236}">
-                <a16:creationId xmlns:a16="http://schemas.microsoft.com/office/drawing/2014/main" id="{C5B882C0-B4F9-4969-815D-BF7C01BA76C4}"/>
+                <a16:creationId xmlns:a16="http://schemas.microsoft.com/office/drawing/2014/main" id="{4D5F1C1C-6B4C-41A3-8076-BCCB26FF7F15}"/>
               </a:ext>
             </a:extLst>
           </p:cNvPr>
@@ -15107,7 +15107,7 @@
           <p:cNvPr id="44" name="">
             <a:extLst xmlns:a="http://schemas.openxmlformats.org/drawingml/2006/main">
               <a:ext uri="{FF2B5EF4-FFF2-40B4-BE49-F238E27FC236}">
-                <a16:creationId xmlns:a16="http://schemas.microsoft.com/office/drawing/2014/main" id="{DEAB03E3-C89F-4C1F-BD71-F734E137A1B7}"/>
+                <a16:creationId xmlns:a16="http://schemas.microsoft.com/office/drawing/2014/main" id="{FDD2742B-22A6-4683-88A8-4B7E0DC76635}"/>
               </a:ext>
             </a:extLst>
           </p:cNvPr>
@@ -15140,7 +15140,7 @@
           <p:cNvPr id="45" name="">
             <a:extLst xmlns:a="http://schemas.openxmlformats.org/drawingml/2006/main">
               <a:ext uri="{FF2B5EF4-FFF2-40B4-BE49-F238E27FC236}">
-                <a16:creationId xmlns:a16="http://schemas.microsoft.com/office/drawing/2014/main" id="{0D48B0B7-0EA0-4772-B47A-08A86CEBA75E}"/>
+                <a16:creationId xmlns:a16="http://schemas.microsoft.com/office/drawing/2014/main" id="{96933433-19F1-4FB9-A37B-F612B8FF3601}"/>
               </a:ext>
             </a:extLst>
           </p:cNvPr>
@@ -15173,7 +15173,7 @@
           <p:cNvPr id="46" name="">
             <a:extLst xmlns:a="http://schemas.openxmlformats.org/drawingml/2006/main">
               <a:ext uri="{FF2B5EF4-FFF2-40B4-BE49-F238E27FC236}">
-                <a16:creationId xmlns:a16="http://schemas.microsoft.com/office/drawing/2014/main" id="{ACE4A714-80EE-4430-BF13-3FCD52250D03}"/>
+                <a16:creationId xmlns:a16="http://schemas.microsoft.com/office/drawing/2014/main" id="{4797427F-D56E-41BD-B2A6-14E4E6C7427E}"/>
               </a:ext>
             </a:extLst>
           </p:cNvPr>
@@ -15206,7 +15206,7 @@
           <p:cNvPr id="47" name="">
             <a:extLst xmlns:a="http://schemas.openxmlformats.org/drawingml/2006/main">
               <a:ext uri="{FF2B5EF4-FFF2-40B4-BE49-F238E27FC236}">
-                <a16:creationId xmlns:a16="http://schemas.microsoft.com/office/drawing/2014/main" id="{182089A5-974A-4220-BE6B-A2B7BF3ACAE1}"/>
+                <a16:creationId xmlns:a16="http://schemas.microsoft.com/office/drawing/2014/main" id="{6013C560-9FE9-479A-9A89-14B24E3A29A7}"/>
               </a:ext>
             </a:extLst>
           </p:cNvPr>
@@ -15239,7 +15239,7 @@
           <p:cNvPr id="48" name="">
             <a:extLst xmlns:a="http://schemas.openxmlformats.org/drawingml/2006/main">
               <a:ext uri="{FF2B5EF4-FFF2-40B4-BE49-F238E27FC236}">
-                <a16:creationId xmlns:a16="http://schemas.microsoft.com/office/drawing/2014/main" id="{3E0E6A19-9A0E-4F07-97B9-4A710BAEE1C4}"/>
+                <a16:creationId xmlns:a16="http://schemas.microsoft.com/office/drawing/2014/main" id="{4E48A706-4366-4DCF-8988-FECAF7D10354}"/>
               </a:ext>
             </a:extLst>
           </p:cNvPr>
@@ -15272,7 +15272,7 @@
           <p:cNvPr id="49" name="">
             <a:extLst xmlns:a="http://schemas.openxmlformats.org/drawingml/2006/main">
               <a:ext uri="{FF2B5EF4-FFF2-40B4-BE49-F238E27FC236}">
-                <a16:creationId xmlns:a16="http://schemas.microsoft.com/office/drawing/2014/main" id="{55F53DBE-8F33-415E-937A-CAA2EEF7F186}"/>
+                <a16:creationId xmlns:a16="http://schemas.microsoft.com/office/drawing/2014/main" id="{B573123D-A789-481F-A4E3-222E12147FBD}"/>
               </a:ext>
             </a:extLst>
           </p:cNvPr>
@@ -15305,7 +15305,7 @@
           <p:cNvPr id="50" name="">
             <a:extLst xmlns:a="http://schemas.openxmlformats.org/drawingml/2006/main">
               <a:ext uri="{FF2B5EF4-FFF2-40B4-BE49-F238E27FC236}">
-                <a16:creationId xmlns:a16="http://schemas.microsoft.com/office/drawing/2014/main" id="{9D39CEE7-3160-4369-A0CF-D6A9A1790076}"/>
+                <a16:creationId xmlns:a16="http://schemas.microsoft.com/office/drawing/2014/main" id="{293BE7B1-47C4-4C0F-BB91-454836F3B2C5}"/>
               </a:ext>
             </a:extLst>
           </p:cNvPr>
@@ -15338,7 +15338,7 @@
           <p:cNvPr id="51" name="">
             <a:extLst xmlns:a="http://schemas.openxmlformats.org/drawingml/2006/main">
               <a:ext uri="{FF2B5EF4-FFF2-40B4-BE49-F238E27FC236}">
-                <a16:creationId xmlns:a16="http://schemas.microsoft.com/office/drawing/2014/main" id="{EA98DB5A-4828-436D-804A-61D58493625F}"/>
+                <a16:creationId xmlns:a16="http://schemas.microsoft.com/office/drawing/2014/main" id="{D4E7C226-DD92-432E-AAE1-83100F9E51FA}"/>
               </a:ext>
             </a:extLst>
           </p:cNvPr>
@@ -15371,7 +15371,7 @@
           <p:cNvPr id="52" name="">
             <a:extLst xmlns:a="http://schemas.openxmlformats.org/drawingml/2006/main">
               <a:ext uri="{FF2B5EF4-FFF2-40B4-BE49-F238E27FC236}">
-                <a16:creationId xmlns:a16="http://schemas.microsoft.com/office/drawing/2014/main" id="{F0170143-1B52-405C-A8E8-C6CB2D8D6FB5}"/>
+                <a16:creationId xmlns:a16="http://schemas.microsoft.com/office/drawing/2014/main" id="{B42E1707-EE01-4112-8E7B-EC383E008411}"/>
               </a:ext>
             </a:extLst>
           </p:cNvPr>
@@ -15404,7 +15404,7 @@
           <p:cNvPr id="53" name="">
             <a:extLst xmlns:a="http://schemas.openxmlformats.org/drawingml/2006/main">
               <a:ext uri="{FF2B5EF4-FFF2-40B4-BE49-F238E27FC236}">
-                <a16:creationId xmlns:a16="http://schemas.microsoft.com/office/drawing/2014/main" id="{BC92B229-33DA-4C97-B42C-6A77AF04EEFB}"/>
+                <a16:creationId xmlns:a16="http://schemas.microsoft.com/office/drawing/2014/main" id="{EE561097-D052-4D77-A894-966C3786BA0A}"/>
               </a:ext>
             </a:extLst>
           </p:cNvPr>
@@ -15437,7 +15437,7 @@
           <p:cNvPr id="54" name="">
             <a:extLst xmlns:a="http://schemas.openxmlformats.org/drawingml/2006/main">
               <a:ext uri="{FF2B5EF4-FFF2-40B4-BE49-F238E27FC236}">
-                <a16:creationId xmlns:a16="http://schemas.microsoft.com/office/drawing/2014/main" id="{E8DFB681-03CB-4101-A4FA-B2857C57C3B6}"/>
+                <a16:creationId xmlns:a16="http://schemas.microsoft.com/office/drawing/2014/main" id="{3315FC7A-B6A6-43A8-A5DE-D4B5DC4004A6}"/>
               </a:ext>
             </a:extLst>
           </p:cNvPr>
@@ -15470,7 +15470,7 @@
           <p:cNvPr id="55" name="">
             <a:extLst xmlns:a="http://schemas.openxmlformats.org/drawingml/2006/main">
               <a:ext uri="{FF2B5EF4-FFF2-40B4-BE49-F238E27FC236}">
-                <a16:creationId xmlns:a16="http://schemas.microsoft.com/office/drawing/2014/main" id="{745733C2-F8CF-4380-8ED4-BE0DB0B4D3AB}"/>
+                <a16:creationId xmlns:a16="http://schemas.microsoft.com/office/drawing/2014/main" id="{1E45C640-BE39-43C1-B608-5EE90600EDC9}"/>
               </a:ext>
             </a:extLst>
           </p:cNvPr>
@@ -15503,7 +15503,7 @@
           <p:cNvPr id="56" name="">
             <a:extLst xmlns:a="http://schemas.openxmlformats.org/drawingml/2006/main">
               <a:ext uri="{FF2B5EF4-FFF2-40B4-BE49-F238E27FC236}">
-                <a16:creationId xmlns:a16="http://schemas.microsoft.com/office/drawing/2014/main" id="{AF29CBD4-1C0B-413C-95A7-9C8BA5126D2A}"/>
+                <a16:creationId xmlns:a16="http://schemas.microsoft.com/office/drawing/2014/main" id="{D9647612-307F-4AF6-95CE-9597F09B8B66}"/>
               </a:ext>
             </a:extLst>
           </p:cNvPr>
@@ -15536,7 +15536,7 @@
           <p:cNvPr id="57" name="">
             <a:extLst xmlns:a="http://schemas.openxmlformats.org/drawingml/2006/main">
               <a:ext uri="{FF2B5EF4-FFF2-40B4-BE49-F238E27FC236}">
-                <a16:creationId xmlns:a16="http://schemas.microsoft.com/office/drawing/2014/main" id="{F078E4F5-399E-4906-8382-383DE17606B6}"/>
+                <a16:creationId xmlns:a16="http://schemas.microsoft.com/office/drawing/2014/main" id="{B0CE8FAD-A526-4F8E-8367-8937D09CA0DC}"/>
               </a:ext>
             </a:extLst>
           </p:cNvPr>
@@ -15569,7 +15569,7 @@
           <p:cNvPr id="58" name="">
             <a:extLst xmlns:a="http://schemas.openxmlformats.org/drawingml/2006/main">
               <a:ext uri="{FF2B5EF4-FFF2-40B4-BE49-F238E27FC236}">
-                <a16:creationId xmlns:a16="http://schemas.microsoft.com/office/drawing/2014/main" id="{D6063B8F-FC88-404E-BED5-75AF4BC59B5A}"/>
+                <a16:creationId xmlns:a16="http://schemas.microsoft.com/office/drawing/2014/main" id="{278BF55B-0EE0-4AFE-911D-A3AF59B8B511}"/>
               </a:ext>
             </a:extLst>
           </p:cNvPr>
@@ -15602,7 +15602,7 @@
           <p:cNvPr id="59" name="">
             <a:extLst xmlns:a="http://schemas.openxmlformats.org/drawingml/2006/main">
               <a:ext uri="{FF2B5EF4-FFF2-40B4-BE49-F238E27FC236}">
-                <a16:creationId xmlns:a16="http://schemas.microsoft.com/office/drawing/2014/main" id="{7418DBD3-0679-46E8-AAFD-3A942E44783B}"/>
+                <a16:creationId xmlns:a16="http://schemas.microsoft.com/office/drawing/2014/main" id="{552B20D3-9482-463D-8E3D-350788DC1FCD}"/>
               </a:ext>
             </a:extLst>
           </p:cNvPr>
@@ -15635,7 +15635,7 @@
           <p:cNvPr id="60" name="">
             <a:extLst xmlns:a="http://schemas.openxmlformats.org/drawingml/2006/main">
               <a:ext uri="{FF2B5EF4-FFF2-40B4-BE49-F238E27FC236}">
-                <a16:creationId xmlns:a16="http://schemas.microsoft.com/office/drawing/2014/main" id="{88ACBE04-9E6A-418E-BB9F-A0BDFD45754A}"/>
+                <a16:creationId xmlns:a16="http://schemas.microsoft.com/office/drawing/2014/main" id="{EF313A28-4AA2-4179-AC13-2C1A499894C8}"/>
               </a:ext>
             </a:extLst>
           </p:cNvPr>
@@ -15668,7 +15668,7 @@
           <p:cNvPr id="61" name="">
             <a:extLst xmlns:a="http://schemas.openxmlformats.org/drawingml/2006/main">
               <a:ext uri="{FF2B5EF4-FFF2-40B4-BE49-F238E27FC236}">
-                <a16:creationId xmlns:a16="http://schemas.microsoft.com/office/drawing/2014/main" id="{C1AE7E7E-ECA8-47F1-BD25-AD0409762680}"/>
+                <a16:creationId xmlns:a16="http://schemas.microsoft.com/office/drawing/2014/main" id="{909DA65D-9FDD-4D6A-9201-0FCDB4D99C9E}"/>
               </a:ext>
             </a:extLst>
           </p:cNvPr>
@@ -15701,7 +15701,7 @@
           <p:cNvPr id="62" name="">
             <a:extLst xmlns:a="http://schemas.openxmlformats.org/drawingml/2006/main">
               <a:ext uri="{FF2B5EF4-FFF2-40B4-BE49-F238E27FC236}">
-                <a16:creationId xmlns:a16="http://schemas.microsoft.com/office/drawing/2014/main" id="{1B249473-EAE3-4FA6-B2C9-B72C7BE3F320}"/>
+                <a16:creationId xmlns:a16="http://schemas.microsoft.com/office/drawing/2014/main" id="{9A653A35-F270-46DE-9205-5C6773B4213E}"/>
               </a:ext>
             </a:extLst>
           </p:cNvPr>
@@ -15734,7 +15734,7 @@
           <p:cNvPr id="63" name="">
             <a:extLst xmlns:a="http://schemas.openxmlformats.org/drawingml/2006/main">
               <a:ext uri="{FF2B5EF4-FFF2-40B4-BE49-F238E27FC236}">
-                <a16:creationId xmlns:a16="http://schemas.microsoft.com/office/drawing/2014/main" id="{BC88BEDB-14D1-46EC-93AA-22C4DEB06574}"/>
+                <a16:creationId xmlns:a16="http://schemas.microsoft.com/office/drawing/2014/main" id="{C48369A8-254C-44F8-BB36-76640BC23E44}"/>
               </a:ext>
             </a:extLst>
           </p:cNvPr>
@@ -15767,7 +15767,7 @@
           <p:cNvPr id="64" name="">
             <a:extLst xmlns:a="http://schemas.openxmlformats.org/drawingml/2006/main">
               <a:ext uri="{FF2B5EF4-FFF2-40B4-BE49-F238E27FC236}">
-                <a16:creationId xmlns:a16="http://schemas.microsoft.com/office/drawing/2014/main" id="{7AC05F80-CCCF-4F80-8014-753ABFFCEFCA}"/>
+                <a16:creationId xmlns:a16="http://schemas.microsoft.com/office/drawing/2014/main" id="{8DBE7E2E-2A05-4E05-969E-996DC2E5704C}"/>
               </a:ext>
             </a:extLst>
           </p:cNvPr>
@@ -15800,7 +15800,7 @@
           <p:cNvPr id="65" name="">
             <a:extLst xmlns:a="http://schemas.openxmlformats.org/drawingml/2006/main">
               <a:ext uri="{FF2B5EF4-FFF2-40B4-BE49-F238E27FC236}">
-                <a16:creationId xmlns:a16="http://schemas.microsoft.com/office/drawing/2014/main" id="{B1C820C0-D361-49B0-BE8C-8E394B52478C}"/>
+                <a16:creationId xmlns:a16="http://schemas.microsoft.com/office/drawing/2014/main" id="{374CD5B3-DA09-43E4-9FCA-5DA90976A709}"/>
               </a:ext>
             </a:extLst>
           </p:cNvPr>
@@ -15833,7 +15833,7 @@
           <p:cNvPr id="66" name="">
             <a:extLst xmlns:a="http://schemas.openxmlformats.org/drawingml/2006/main">
               <a:ext uri="{FF2B5EF4-FFF2-40B4-BE49-F238E27FC236}">
-                <a16:creationId xmlns:a16="http://schemas.microsoft.com/office/drawing/2014/main" id="{ACFAA6F1-DFB3-4E5C-A6D0-2A6DCB32D002}"/>
+                <a16:creationId xmlns:a16="http://schemas.microsoft.com/office/drawing/2014/main" id="{DF45BE7D-7C53-4763-88A5-73CB117411BC}"/>
               </a:ext>
             </a:extLst>
           </p:cNvPr>
@@ -15866,7 +15866,7 @@
           <p:cNvPr id="67" name="">
             <a:extLst xmlns:a="http://schemas.openxmlformats.org/drawingml/2006/main">
               <a:ext uri="{FF2B5EF4-FFF2-40B4-BE49-F238E27FC236}">
-                <a16:creationId xmlns:a16="http://schemas.microsoft.com/office/drawing/2014/main" id="{9FD5A5CA-1074-4481-8F4A-5BCC08BC6878}"/>
+                <a16:creationId xmlns:a16="http://schemas.microsoft.com/office/drawing/2014/main" id="{52CFB6FA-2BAD-4B21-BF90-8F63563D50DD}"/>
               </a:ext>
             </a:extLst>
           </p:cNvPr>
@@ -15899,7 +15899,7 @@
           <p:cNvPr id="68" name="">
             <a:extLst xmlns:a="http://schemas.openxmlformats.org/drawingml/2006/main">
               <a:ext uri="{FF2B5EF4-FFF2-40B4-BE49-F238E27FC236}">
-                <a16:creationId xmlns:a16="http://schemas.microsoft.com/office/drawing/2014/main" id="{5CECFFB1-D92D-4307-8229-EFE9CCB325CC}"/>
+                <a16:creationId xmlns:a16="http://schemas.microsoft.com/office/drawing/2014/main" id="{1F4943A0-6B0A-40E2-B0CB-ADB77540BC96}"/>
               </a:ext>
             </a:extLst>
           </p:cNvPr>
@@ -15932,7 +15932,7 @@
           <p:cNvPr id="69" name="">
             <a:extLst xmlns:a="http://schemas.openxmlformats.org/drawingml/2006/main">
               <a:ext uri="{FF2B5EF4-FFF2-40B4-BE49-F238E27FC236}">
-                <a16:creationId xmlns:a16="http://schemas.microsoft.com/office/drawing/2014/main" id="{ED19D188-99AA-401D-96C3-6CBE809FCCB4}"/>
+                <a16:creationId xmlns:a16="http://schemas.microsoft.com/office/drawing/2014/main" id="{EA8BCB97-4D7D-46D6-9F6E-426C9D8D8F7D}"/>
               </a:ext>
             </a:extLst>
           </p:cNvPr>
@@ -15965,7 +15965,7 @@
           <p:cNvPr id="70" name="">
             <a:extLst xmlns:a="http://schemas.openxmlformats.org/drawingml/2006/main">
               <a:ext uri="{FF2B5EF4-FFF2-40B4-BE49-F238E27FC236}">
-                <a16:creationId xmlns:a16="http://schemas.microsoft.com/office/drawing/2014/main" id="{413EEC9E-5C15-43C7-BAA2-EB76231BBD12}"/>
+                <a16:creationId xmlns:a16="http://schemas.microsoft.com/office/drawing/2014/main" id="{7688AA2B-39ED-4BD3-991B-599901CD1FA8}"/>
               </a:ext>
             </a:extLst>
           </p:cNvPr>
@@ -15998,7 +15998,7 @@
           <p:cNvPr id="71" name="">
             <a:extLst xmlns:a="http://schemas.openxmlformats.org/drawingml/2006/main">
               <a:ext uri="{FF2B5EF4-FFF2-40B4-BE49-F238E27FC236}">
-                <a16:creationId xmlns:a16="http://schemas.microsoft.com/office/drawing/2014/main" id="{6DDE665F-E772-4411-91CF-F9DA19442573}"/>
+                <a16:creationId xmlns:a16="http://schemas.microsoft.com/office/drawing/2014/main" id="{8C9D84CB-3C1B-4A81-B556-0B8D7784D2EA}"/>
               </a:ext>
             </a:extLst>
           </p:cNvPr>
@@ -16031,7 +16031,7 @@
           <p:cNvPr id="72" name="">
             <a:extLst xmlns:a="http://schemas.openxmlformats.org/drawingml/2006/main">
               <a:ext uri="{FF2B5EF4-FFF2-40B4-BE49-F238E27FC236}">
-                <a16:creationId xmlns:a16="http://schemas.microsoft.com/office/drawing/2014/main" id="{6D2C5333-75A3-4FA4-8611-68AABF1F56D6}"/>
+                <a16:creationId xmlns:a16="http://schemas.microsoft.com/office/drawing/2014/main" id="{C3DE4D51-8C57-4721-B758-AF02DA7D4B34}"/>
               </a:ext>
             </a:extLst>
           </p:cNvPr>
@@ -16064,7 +16064,7 @@
           <p:cNvPr id="73" name="">
             <a:extLst xmlns:a="http://schemas.openxmlformats.org/drawingml/2006/main">
               <a:ext uri="{FF2B5EF4-FFF2-40B4-BE49-F238E27FC236}">
-                <a16:creationId xmlns:a16="http://schemas.microsoft.com/office/drawing/2014/main" id="{8FE13564-7789-4CB5-9409-706755EF476D}"/>
+                <a16:creationId xmlns:a16="http://schemas.microsoft.com/office/drawing/2014/main" id="{D003F349-62BE-49EA-A173-4EF711FB60B6}"/>
               </a:ext>
             </a:extLst>
           </p:cNvPr>
@@ -16097,7 +16097,7 @@
           <p:cNvPr id="74" name="">
             <a:extLst xmlns:a="http://schemas.openxmlformats.org/drawingml/2006/main">
               <a:ext uri="{FF2B5EF4-FFF2-40B4-BE49-F238E27FC236}">
-                <a16:creationId xmlns:a16="http://schemas.microsoft.com/office/drawing/2014/main" id="{58C36A4A-7B1F-40A5-971F-4969793F2B3D}"/>
+                <a16:creationId xmlns:a16="http://schemas.microsoft.com/office/drawing/2014/main" id="{20E2A447-D3D1-4C62-A13B-36389CB556DD}"/>
               </a:ext>
             </a:extLst>
           </p:cNvPr>
@@ -16130,7 +16130,7 @@
           <p:cNvPr id="75" name="">
             <a:extLst xmlns:a="http://schemas.openxmlformats.org/drawingml/2006/main">
               <a:ext uri="{FF2B5EF4-FFF2-40B4-BE49-F238E27FC236}">
-                <a16:creationId xmlns:a16="http://schemas.microsoft.com/office/drawing/2014/main" id="{247C8F2C-94DE-41FC-BEE6-1D5624291276}"/>
+                <a16:creationId xmlns:a16="http://schemas.microsoft.com/office/drawing/2014/main" id="{3C36FD14-C0AE-43EC-A37E-DC4F0ADFCADF}"/>
               </a:ext>
             </a:extLst>
           </p:cNvPr>
@@ -16163,7 +16163,7 @@
           <p:cNvPr id="76" name="">
             <a:extLst xmlns:a="http://schemas.openxmlformats.org/drawingml/2006/main">
               <a:ext uri="{FF2B5EF4-FFF2-40B4-BE49-F238E27FC236}">
-                <a16:creationId xmlns:a16="http://schemas.microsoft.com/office/drawing/2014/main" id="{623097CF-0A4B-4271-A855-0236AD59B049}"/>
+                <a16:creationId xmlns:a16="http://schemas.microsoft.com/office/drawing/2014/main" id="{C66AA61E-E60C-4D8A-AA23-9E7506624E6E}"/>
               </a:ext>
             </a:extLst>
           </p:cNvPr>
@@ -16196,7 +16196,7 @@
           <p:cNvPr id="77" name="">
             <a:extLst xmlns:a="http://schemas.openxmlformats.org/drawingml/2006/main">
               <a:ext uri="{FF2B5EF4-FFF2-40B4-BE49-F238E27FC236}">
-                <a16:creationId xmlns:a16="http://schemas.microsoft.com/office/drawing/2014/main" id="{0896FC70-7B9D-4102-8A78-0015D0FE5293}"/>
+                <a16:creationId xmlns:a16="http://schemas.microsoft.com/office/drawing/2014/main" id="{5C2D8112-8D18-4052-BBE2-C2A7173E12FA}"/>
               </a:ext>
             </a:extLst>
           </p:cNvPr>
@@ -16229,7 +16229,7 @@
           <p:cNvPr id="78" name="">
             <a:extLst xmlns:a="http://schemas.openxmlformats.org/drawingml/2006/main">
               <a:ext uri="{FF2B5EF4-FFF2-40B4-BE49-F238E27FC236}">
-                <a16:creationId xmlns:a16="http://schemas.microsoft.com/office/drawing/2014/main" id="{B052D831-18DA-4337-97F5-E60AE2EC13AD}"/>
+                <a16:creationId xmlns:a16="http://schemas.microsoft.com/office/drawing/2014/main" id="{B2D541D7-5EB7-4D04-9809-A330E357D63D}"/>
               </a:ext>
             </a:extLst>
           </p:cNvPr>
@@ -16262,7 +16262,7 @@
           <p:cNvPr id="79" name="">
             <a:extLst xmlns:a="http://schemas.openxmlformats.org/drawingml/2006/main">
               <a:ext uri="{FF2B5EF4-FFF2-40B4-BE49-F238E27FC236}">
-                <a16:creationId xmlns:a16="http://schemas.microsoft.com/office/drawing/2014/main" id="{1BE14C5A-5985-4A9C-9AEF-C6B22A637D05}"/>
+                <a16:creationId xmlns:a16="http://schemas.microsoft.com/office/drawing/2014/main" id="{F8B52FF5-CD8B-4CB7-A0C1-1533A0CCA06E}"/>
               </a:ext>
             </a:extLst>
           </p:cNvPr>
@@ -16295,7 +16295,7 @@
           <p:cNvPr id="80" name="">
             <a:extLst xmlns:a="http://schemas.openxmlformats.org/drawingml/2006/main">
               <a:ext uri="{FF2B5EF4-FFF2-40B4-BE49-F238E27FC236}">
-                <a16:creationId xmlns:a16="http://schemas.microsoft.com/office/drawing/2014/main" id="{07DB2A61-0EB7-4001-B535-F3E4F17732BD}"/>
+                <a16:creationId xmlns:a16="http://schemas.microsoft.com/office/drawing/2014/main" id="{7C10BB0A-A75C-4C03-AE0E-2EB63C0E6537}"/>
               </a:ext>
             </a:extLst>
           </p:cNvPr>
@@ -16328,7 +16328,7 @@
           <p:cNvPr id="81" name="">
             <a:extLst xmlns:a="http://schemas.openxmlformats.org/drawingml/2006/main">
               <a:ext uri="{FF2B5EF4-FFF2-40B4-BE49-F238E27FC236}">
-                <a16:creationId xmlns:a16="http://schemas.microsoft.com/office/drawing/2014/main" id="{839864E1-11E5-41FF-982F-47C20F4B2367}"/>
+                <a16:creationId xmlns:a16="http://schemas.microsoft.com/office/drawing/2014/main" id="{1F4CD069-EFB1-49F8-8C29-F4C1EF3D9B5C}"/>
               </a:ext>
             </a:extLst>
           </p:cNvPr>
@@ -16361,7 +16361,7 @@
           <p:cNvPr id="82" name="">
             <a:extLst xmlns:a="http://schemas.openxmlformats.org/drawingml/2006/main">
               <a:ext uri="{FF2B5EF4-FFF2-40B4-BE49-F238E27FC236}">
-                <a16:creationId xmlns:a16="http://schemas.microsoft.com/office/drawing/2014/main" id="{602627D4-33BE-4DA8-BE41-1EE94E3939F5}"/>
+                <a16:creationId xmlns:a16="http://schemas.microsoft.com/office/drawing/2014/main" id="{CCEB12BE-C9D3-4790-8028-C4027900AB6B}"/>
               </a:ext>
             </a:extLst>
           </p:cNvPr>
@@ -16394,7 +16394,7 @@
           <p:cNvPr id="83" name="">
             <a:extLst xmlns:a="http://schemas.openxmlformats.org/drawingml/2006/main">
               <a:ext uri="{FF2B5EF4-FFF2-40B4-BE49-F238E27FC236}">
-                <a16:creationId xmlns:a16="http://schemas.microsoft.com/office/drawing/2014/main" id="{D0F536F6-D923-483F-AEDC-05BD3E99C508}"/>
+                <a16:creationId xmlns:a16="http://schemas.microsoft.com/office/drawing/2014/main" id="{8A5F984C-1230-47D1-A855-352DCDD62490}"/>
               </a:ext>
             </a:extLst>
           </p:cNvPr>
@@ -16427,7 +16427,7 @@
           <p:cNvPr id="84" name="">
             <a:extLst xmlns:a="http://schemas.openxmlformats.org/drawingml/2006/main">
               <a:ext uri="{FF2B5EF4-FFF2-40B4-BE49-F238E27FC236}">
-                <a16:creationId xmlns:a16="http://schemas.microsoft.com/office/drawing/2014/main" id="{25DA6D27-A398-4455-BB1A-B09A126D9E76}"/>
+                <a16:creationId xmlns:a16="http://schemas.microsoft.com/office/drawing/2014/main" id="{A737490C-B8F1-43AA-90E4-68B5F94ED5E2}"/>
               </a:ext>
             </a:extLst>
           </p:cNvPr>
@@ -16460,7 +16460,7 @@
           <p:cNvPr id="85" name="">
             <a:extLst xmlns:a="http://schemas.openxmlformats.org/drawingml/2006/main">
               <a:ext uri="{FF2B5EF4-FFF2-40B4-BE49-F238E27FC236}">
-                <a16:creationId xmlns:a16="http://schemas.microsoft.com/office/drawing/2014/main" id="{592AB334-2A5C-4BD8-87FF-5F1DCAE4AD43}"/>
+                <a16:creationId xmlns:a16="http://schemas.microsoft.com/office/drawing/2014/main" id="{D6D09ED3-3F01-4E36-B58C-C11F1CA4B95B}"/>
               </a:ext>
             </a:extLst>
           </p:cNvPr>
@@ -16493,7 +16493,7 @@
           <p:cNvPr id="86" name="">
             <a:extLst xmlns:a="http://schemas.openxmlformats.org/drawingml/2006/main">
               <a:ext uri="{FF2B5EF4-FFF2-40B4-BE49-F238E27FC236}">
-                <a16:creationId xmlns:a16="http://schemas.microsoft.com/office/drawing/2014/main" id="{8251BC0B-BDA9-4521-8378-8CEE470FC974}"/>
+                <a16:creationId xmlns:a16="http://schemas.microsoft.com/office/drawing/2014/main" id="{2F09F414-A287-4CFF-BC6C-2E0A6C8288B6}"/>
               </a:ext>
             </a:extLst>
           </p:cNvPr>
@@ -16526,7 +16526,7 @@
           <p:cNvPr id="87" name="">
             <a:extLst xmlns:a="http://schemas.openxmlformats.org/drawingml/2006/main">
               <a:ext uri="{FF2B5EF4-FFF2-40B4-BE49-F238E27FC236}">
-                <a16:creationId xmlns:a16="http://schemas.microsoft.com/office/drawing/2014/main" id="{9AFD40CC-1A2F-4F38-A54B-DE2EF85A5B9B}"/>
+                <a16:creationId xmlns:a16="http://schemas.microsoft.com/office/drawing/2014/main" id="{6FDEAA48-A4C5-41C3-8407-D1BFFE23403E}"/>
               </a:ext>
             </a:extLst>
           </p:cNvPr>
@@ -16559,7 +16559,7 @@
           <p:cNvPr id="88" name="">
             <a:extLst xmlns:a="http://schemas.openxmlformats.org/drawingml/2006/main">
               <a:ext uri="{FF2B5EF4-FFF2-40B4-BE49-F238E27FC236}">
-                <a16:creationId xmlns:a16="http://schemas.microsoft.com/office/drawing/2014/main" id="{5365D9D0-7BBF-4310-9021-52B8D60BC37C}"/>
+                <a16:creationId xmlns:a16="http://schemas.microsoft.com/office/drawing/2014/main" id="{F2FACA01-063C-4CA4-933B-F286B0F8286A}"/>
               </a:ext>
             </a:extLst>
           </p:cNvPr>
@@ -16592,7 +16592,7 @@
           <p:cNvPr id="89" name="">
             <a:extLst xmlns:a="http://schemas.openxmlformats.org/drawingml/2006/main">
               <a:ext uri="{FF2B5EF4-FFF2-40B4-BE49-F238E27FC236}">
-                <a16:creationId xmlns:a16="http://schemas.microsoft.com/office/drawing/2014/main" id="{8E1C61FA-026F-4EC7-BE08-B3573729D87C}"/>
+                <a16:creationId xmlns:a16="http://schemas.microsoft.com/office/drawing/2014/main" id="{ED86B757-9241-4863-8915-0993753632B4}"/>
               </a:ext>
             </a:extLst>
           </p:cNvPr>
@@ -16625,7 +16625,7 @@
           <p:cNvPr id="90" name="">
             <a:extLst xmlns:a="http://schemas.openxmlformats.org/drawingml/2006/main">
               <a:ext uri="{FF2B5EF4-FFF2-40B4-BE49-F238E27FC236}">
-                <a16:creationId xmlns:a16="http://schemas.microsoft.com/office/drawing/2014/main" id="{DA47FA01-4FA9-4CEA-823A-A25F60C7FC17}"/>
+                <a16:creationId xmlns:a16="http://schemas.microsoft.com/office/drawing/2014/main" id="{0B5F9CDD-4243-4E56-B8DB-70F42BC25298}"/>
               </a:ext>
             </a:extLst>
           </p:cNvPr>
@@ -16658,7 +16658,7 @@
           <p:cNvPr id="91" name="">
             <a:extLst xmlns:a="http://schemas.openxmlformats.org/drawingml/2006/main">
               <a:ext uri="{FF2B5EF4-FFF2-40B4-BE49-F238E27FC236}">
-                <a16:creationId xmlns:a16="http://schemas.microsoft.com/office/drawing/2014/main" id="{FAF70BAC-2845-4BA9-BE0B-A89799B49503}"/>
+                <a16:creationId xmlns:a16="http://schemas.microsoft.com/office/drawing/2014/main" id="{2BC6EF5E-AEA1-45B5-BEE0-BE8B0109C0E2}"/>
               </a:ext>
             </a:extLst>
           </p:cNvPr>
@@ -16691,7 +16691,7 @@
           <p:cNvPr id="92" name="">
             <a:extLst xmlns:a="http://schemas.openxmlformats.org/drawingml/2006/main">
               <a:ext uri="{FF2B5EF4-FFF2-40B4-BE49-F238E27FC236}">
-                <a16:creationId xmlns:a16="http://schemas.microsoft.com/office/drawing/2014/main" id="{0E718C6B-747C-4C2C-A42A-50EADF4296C0}"/>
+                <a16:creationId xmlns:a16="http://schemas.microsoft.com/office/drawing/2014/main" id="{98132B85-1E6F-42B2-8132-1F2C35AF9DBD}"/>
               </a:ext>
             </a:extLst>
           </p:cNvPr>
@@ -16724,7 +16724,7 @@
           <p:cNvPr id="93" name="">
             <a:extLst xmlns:a="http://schemas.openxmlformats.org/drawingml/2006/main">
               <a:ext uri="{FF2B5EF4-FFF2-40B4-BE49-F238E27FC236}">
-                <a16:creationId xmlns:a16="http://schemas.microsoft.com/office/drawing/2014/main" id="{2AB2F833-F8B4-4E9C-A139-0BCADEB871F3}"/>
+                <a16:creationId xmlns:a16="http://schemas.microsoft.com/office/drawing/2014/main" id="{CD15EBDF-CDFF-43A7-AAD2-B48AFE97F7ED}"/>
               </a:ext>
             </a:extLst>
           </p:cNvPr>
@@ -16757,7 +16757,7 @@
           <p:cNvPr id="94" name="">
             <a:extLst xmlns:a="http://schemas.openxmlformats.org/drawingml/2006/main">
               <a:ext uri="{FF2B5EF4-FFF2-40B4-BE49-F238E27FC236}">
-                <a16:creationId xmlns:a16="http://schemas.microsoft.com/office/drawing/2014/main" id="{2B0F165F-0C3B-4ECD-A049-13FCF519AB58}"/>
+                <a16:creationId xmlns:a16="http://schemas.microsoft.com/office/drawing/2014/main" id="{765AF22C-6A71-4A82-893C-AAE5E2D5E66B}"/>
               </a:ext>
             </a:extLst>
           </p:cNvPr>
@@ -16790,7 +16790,7 @@
           <p:cNvPr id="95" name="">
             <a:extLst xmlns:a="http://schemas.openxmlformats.org/drawingml/2006/main">
               <a:ext uri="{FF2B5EF4-FFF2-40B4-BE49-F238E27FC236}">
-                <a16:creationId xmlns:a16="http://schemas.microsoft.com/office/drawing/2014/main" id="{BA52AE0F-D9DB-469C-A667-C623D0BF74A9}"/>
+                <a16:creationId xmlns:a16="http://schemas.microsoft.com/office/drawing/2014/main" id="{9A9B72DA-82B9-4C21-A547-D169EAB8CAB4}"/>
               </a:ext>
             </a:extLst>
           </p:cNvPr>
@@ -16823,7 +16823,7 @@
           <p:cNvPr id="96" name="">
             <a:extLst xmlns:a="http://schemas.openxmlformats.org/drawingml/2006/main">
               <a:ext uri="{FF2B5EF4-FFF2-40B4-BE49-F238E27FC236}">
-                <a16:creationId xmlns:a16="http://schemas.microsoft.com/office/drawing/2014/main" id="{DD288864-3F9E-4B68-9A45-250AA8407A2C}"/>
+                <a16:creationId xmlns:a16="http://schemas.microsoft.com/office/drawing/2014/main" id="{BEF67CEA-88E3-4916-91BD-18DE2EAA9F22}"/>
               </a:ext>
             </a:extLst>
           </p:cNvPr>
@@ -16856,7 +16856,7 @@
           <p:cNvPr id="97" name="">
             <a:extLst xmlns:a="http://schemas.openxmlformats.org/drawingml/2006/main">
               <a:ext uri="{FF2B5EF4-FFF2-40B4-BE49-F238E27FC236}">
-                <a16:creationId xmlns:a16="http://schemas.microsoft.com/office/drawing/2014/main" id="{8871349B-05E2-45A1-8AFE-5EED637ED0FE}"/>
+                <a16:creationId xmlns:a16="http://schemas.microsoft.com/office/drawing/2014/main" id="{2F36D38C-DC01-46EB-8973-80C6E8DE6ACE}"/>
               </a:ext>
             </a:extLst>
           </p:cNvPr>
@@ -16889,7 +16889,7 @@
           <p:cNvPr id="98" name="">
             <a:extLst xmlns:a="http://schemas.openxmlformats.org/drawingml/2006/main">
               <a:ext uri="{FF2B5EF4-FFF2-40B4-BE49-F238E27FC236}">
-                <a16:creationId xmlns:a16="http://schemas.microsoft.com/office/drawing/2014/main" id="{6100B647-AE51-4442-8817-B3E678677622}"/>
+                <a16:creationId xmlns:a16="http://schemas.microsoft.com/office/drawing/2014/main" id="{7442268E-A91F-4131-8932-575FFEDA872D}"/>
               </a:ext>
             </a:extLst>
           </p:cNvPr>
@@ -16922,7 +16922,7 @@
           <p:cNvPr id="99" name="">
             <a:extLst xmlns:a="http://schemas.openxmlformats.org/drawingml/2006/main">
               <a:ext uri="{FF2B5EF4-FFF2-40B4-BE49-F238E27FC236}">
-                <a16:creationId xmlns:a16="http://schemas.microsoft.com/office/drawing/2014/main" id="{7BE9561C-A817-4CA4-B0A0-DA3A951E3852}"/>
+                <a16:creationId xmlns:a16="http://schemas.microsoft.com/office/drawing/2014/main" id="{400AE230-F1B5-4281-A37E-0F08DCBEC29A}"/>
               </a:ext>
             </a:extLst>
           </p:cNvPr>
@@ -16955,7 +16955,7 @@
           <p:cNvPr id="100" name="">
             <a:extLst xmlns:a="http://schemas.openxmlformats.org/drawingml/2006/main">
               <a:ext uri="{FF2B5EF4-FFF2-40B4-BE49-F238E27FC236}">
-                <a16:creationId xmlns:a16="http://schemas.microsoft.com/office/drawing/2014/main" id="{882B6183-3D27-4CE9-A0BD-91BF3439BC85}"/>
+                <a16:creationId xmlns:a16="http://schemas.microsoft.com/office/drawing/2014/main" id="{38C17B46-4C4B-4E1F-BDD6-6311F84B8FF1}"/>
               </a:ext>
             </a:extLst>
           </p:cNvPr>
@@ -16988,7 +16988,7 @@
           <p:cNvPr id="101" name="">
             <a:extLst xmlns:a="http://schemas.openxmlformats.org/drawingml/2006/main">
               <a:ext uri="{FF2B5EF4-FFF2-40B4-BE49-F238E27FC236}">
-                <a16:creationId xmlns:a16="http://schemas.microsoft.com/office/drawing/2014/main" id="{4FC52CFE-52A1-48EF-8748-DF0D0B065B90}"/>
+                <a16:creationId xmlns:a16="http://schemas.microsoft.com/office/drawing/2014/main" id="{1520396F-D090-4CAB-BD1A-3ADDB45F8151}"/>
               </a:ext>
             </a:extLst>
           </p:cNvPr>
@@ -17021,7 +17021,7 @@
           <p:cNvPr id="102" name="">
             <a:extLst xmlns:a="http://schemas.openxmlformats.org/drawingml/2006/main">
               <a:ext uri="{FF2B5EF4-FFF2-40B4-BE49-F238E27FC236}">
-                <a16:creationId xmlns:a16="http://schemas.microsoft.com/office/drawing/2014/main" id="{55301AFD-1FC1-4AEB-ADEA-D7DD2361FF3B}"/>
+                <a16:creationId xmlns:a16="http://schemas.microsoft.com/office/drawing/2014/main" id="{23C7A03F-C63C-4998-AC09-AD2E74C4888F}"/>
               </a:ext>
             </a:extLst>
           </p:cNvPr>
@@ -17054,7 +17054,7 @@
           <p:cNvPr id="103" name="">
             <a:extLst xmlns:a="http://schemas.openxmlformats.org/drawingml/2006/main">
               <a:ext uri="{FF2B5EF4-FFF2-40B4-BE49-F238E27FC236}">
-                <a16:creationId xmlns:a16="http://schemas.microsoft.com/office/drawing/2014/main" id="{98994E21-354D-43CA-A548-252CACA20786}"/>
+                <a16:creationId xmlns:a16="http://schemas.microsoft.com/office/drawing/2014/main" id="{FAC511E9-7CE3-4930-A2B3-423DEE195CCB}"/>
               </a:ext>
             </a:extLst>
           </p:cNvPr>
@@ -17087,7 +17087,7 @@
           <p:cNvPr id="104" name="">
             <a:extLst xmlns:a="http://schemas.openxmlformats.org/drawingml/2006/main">
               <a:ext uri="{FF2B5EF4-FFF2-40B4-BE49-F238E27FC236}">
-                <a16:creationId xmlns:a16="http://schemas.microsoft.com/office/drawing/2014/main" id="{94948189-506D-496F-B844-3D81EA7D3686}"/>
+                <a16:creationId xmlns:a16="http://schemas.microsoft.com/office/drawing/2014/main" id="{5FAF5B9A-0846-48E5-B7B8-BB5EED668554}"/>
               </a:ext>
             </a:extLst>
           </p:cNvPr>
@@ -17120,7 +17120,7 @@
           <p:cNvPr id="105" name="">
             <a:extLst xmlns:a="http://schemas.openxmlformats.org/drawingml/2006/main">
               <a:ext uri="{FF2B5EF4-FFF2-40B4-BE49-F238E27FC236}">
-                <a16:creationId xmlns:a16="http://schemas.microsoft.com/office/drawing/2014/main" id="{01702576-BC08-4415-A08B-95C300DB8AFF}"/>
+                <a16:creationId xmlns:a16="http://schemas.microsoft.com/office/drawing/2014/main" id="{34B9DE94-98B3-47ED-9462-AA97A11F67B9}"/>
               </a:ext>
             </a:extLst>
           </p:cNvPr>
@@ -17153,7 +17153,7 @@
           <p:cNvPr id="106" name="">
             <a:extLst xmlns:a="http://schemas.openxmlformats.org/drawingml/2006/main">
               <a:ext uri="{FF2B5EF4-FFF2-40B4-BE49-F238E27FC236}">
-                <a16:creationId xmlns:a16="http://schemas.microsoft.com/office/drawing/2014/main" id="{E225493D-62BC-426E-864F-C042A2DC8223}"/>
+                <a16:creationId xmlns:a16="http://schemas.microsoft.com/office/drawing/2014/main" id="{25E26FE2-CFB8-474D-9019-24FE295A2DE6}"/>
               </a:ext>
             </a:extLst>
           </p:cNvPr>
@@ -17188,7 +17188,7 @@
           <p:cNvPr id="107" name="">
             <a:extLst xmlns:a="http://schemas.openxmlformats.org/drawingml/2006/main">
               <a:ext uri="{FF2B5EF4-FFF2-40B4-BE49-F238E27FC236}">
-                <a16:creationId xmlns:a16="http://schemas.microsoft.com/office/drawing/2014/main" id="{32A0AD48-1AC5-43D7-903B-26381B4CF791}"/>
+                <a16:creationId xmlns:a16="http://schemas.microsoft.com/office/drawing/2014/main" id="{2F71432A-3F10-4E45-B7B1-38D2DB4BC481}"/>
               </a:ext>
             </a:extLst>
           </p:cNvPr>
@@ -17221,7 +17221,7 @@
           <p:cNvPr id="108" name="">
             <a:extLst xmlns:a="http://schemas.openxmlformats.org/drawingml/2006/main">
               <a:ext uri="{FF2B5EF4-FFF2-40B4-BE49-F238E27FC236}">
-                <a16:creationId xmlns:a16="http://schemas.microsoft.com/office/drawing/2014/main" id="{E2E61EDB-7CB4-485B-8278-C147DFAC0D73}"/>
+                <a16:creationId xmlns:a16="http://schemas.microsoft.com/office/drawing/2014/main" id="{EE8A5E30-FE74-4EB1-8F6C-B29E900DA277}"/>
               </a:ext>
             </a:extLst>
           </p:cNvPr>
@@ -17254,7 +17254,7 @@
           <p:cNvPr id="109" name="">
             <a:extLst xmlns:a="http://schemas.openxmlformats.org/drawingml/2006/main">
               <a:ext uri="{FF2B5EF4-FFF2-40B4-BE49-F238E27FC236}">
-                <a16:creationId xmlns:a16="http://schemas.microsoft.com/office/drawing/2014/main" id="{E29B0CAE-27A5-4637-8729-C330FE923211}"/>
+                <a16:creationId xmlns:a16="http://schemas.microsoft.com/office/drawing/2014/main" id="{4DE8C3D4-2365-46C0-BCEF-7EF363059BDA}"/>
               </a:ext>
             </a:extLst>
           </p:cNvPr>
@@ -17287,7 +17287,7 @@
           <p:cNvPr id="110" name="">
             <a:extLst xmlns:a="http://schemas.openxmlformats.org/drawingml/2006/main">
               <a:ext uri="{FF2B5EF4-FFF2-40B4-BE49-F238E27FC236}">
-                <a16:creationId xmlns:a16="http://schemas.microsoft.com/office/drawing/2014/main" id="{BF144CA0-D51C-4572-B78E-D5AD839B42F7}"/>
+                <a16:creationId xmlns:a16="http://schemas.microsoft.com/office/drawing/2014/main" id="{DDF9DBC1-2894-4722-A001-2F576DED207B}"/>
               </a:ext>
             </a:extLst>
           </p:cNvPr>
@@ -17320,7 +17320,7 @@
           <p:cNvPr id="111" name="">
             <a:extLst xmlns:a="http://schemas.openxmlformats.org/drawingml/2006/main">
               <a:ext uri="{FF2B5EF4-FFF2-40B4-BE49-F238E27FC236}">
-                <a16:creationId xmlns:a16="http://schemas.microsoft.com/office/drawing/2014/main" id="{57A52820-4489-4F86-AC8D-5BB50BFFBEF1}"/>
+                <a16:creationId xmlns:a16="http://schemas.microsoft.com/office/drawing/2014/main" id="{529F1AA2-13D8-4956-890B-457EC3D69815}"/>
               </a:ext>
             </a:extLst>
           </p:cNvPr>
@@ -17353,7 +17353,7 @@
           <p:cNvPr id="112" name="">
             <a:extLst xmlns:a="http://schemas.openxmlformats.org/drawingml/2006/main">
               <a:ext uri="{FF2B5EF4-FFF2-40B4-BE49-F238E27FC236}">
-                <a16:creationId xmlns:a16="http://schemas.microsoft.com/office/drawing/2014/main" id="{447F331D-FE64-496F-B539-FDA4757518E7}"/>
+                <a16:creationId xmlns:a16="http://schemas.microsoft.com/office/drawing/2014/main" id="{0DBF9E26-570B-475C-B744-6D5FC645F5F1}"/>
               </a:ext>
             </a:extLst>
           </p:cNvPr>
@@ -17386,7 +17386,7 @@
           <p:cNvPr id="113" name="">
             <a:extLst xmlns:a="http://schemas.openxmlformats.org/drawingml/2006/main">
               <a:ext uri="{FF2B5EF4-FFF2-40B4-BE49-F238E27FC236}">
-                <a16:creationId xmlns:a16="http://schemas.microsoft.com/office/drawing/2014/main" id="{F0CA1363-8D80-4A14-8B11-B60B46BC9C4D}"/>
+                <a16:creationId xmlns:a16="http://schemas.microsoft.com/office/drawing/2014/main" id="{00CAF906-B1EB-4DD6-A7CD-DD531BC92A19}"/>
               </a:ext>
             </a:extLst>
           </p:cNvPr>
@@ -17419,7 +17419,7 @@
           <p:cNvPr id="114" name="">
             <a:extLst xmlns:a="http://schemas.openxmlformats.org/drawingml/2006/main">
               <a:ext uri="{FF2B5EF4-FFF2-40B4-BE49-F238E27FC236}">
-                <a16:creationId xmlns:a16="http://schemas.microsoft.com/office/drawing/2014/main" id="{72EC6246-25ED-4D27-A68C-71632F5B30D8}"/>
+                <a16:creationId xmlns:a16="http://schemas.microsoft.com/office/drawing/2014/main" id="{F78B43C5-116F-4F8D-944A-9455DE7933D6}"/>
               </a:ext>
             </a:extLst>
           </p:cNvPr>
@@ -17452,7 +17452,7 @@
           <p:cNvPr id="115" name="">
             <a:extLst xmlns:a="http://schemas.openxmlformats.org/drawingml/2006/main">
               <a:ext uri="{FF2B5EF4-FFF2-40B4-BE49-F238E27FC236}">
-                <a16:creationId xmlns:a16="http://schemas.microsoft.com/office/drawing/2014/main" id="{5985F500-56D9-47F6-B9CD-26B32A594CB5}"/>
+                <a16:creationId xmlns:a16="http://schemas.microsoft.com/office/drawing/2014/main" id="{0035B925-9DAD-4DB0-A586-4B6762BA228D}"/>
               </a:ext>
             </a:extLst>
           </p:cNvPr>
@@ -17485,7 +17485,7 @@
           <p:cNvPr id="116" name="">
             <a:extLst xmlns:a="http://schemas.openxmlformats.org/drawingml/2006/main">
               <a:ext uri="{FF2B5EF4-FFF2-40B4-BE49-F238E27FC236}">
-                <a16:creationId xmlns:a16="http://schemas.microsoft.com/office/drawing/2014/main" id="{E6A5FE9C-74C3-4BA5-BD1D-04C120EE9869}"/>
+                <a16:creationId xmlns:a16="http://schemas.microsoft.com/office/drawing/2014/main" id="{3589177A-31C1-4E70-8C79-382DAF383088}"/>
               </a:ext>
             </a:extLst>
           </p:cNvPr>
@@ -17518,7 +17518,7 @@
           <p:cNvPr id="117" name="">
             <a:extLst xmlns:a="http://schemas.openxmlformats.org/drawingml/2006/main">
               <a:ext uri="{FF2B5EF4-FFF2-40B4-BE49-F238E27FC236}">
-                <a16:creationId xmlns:a16="http://schemas.microsoft.com/office/drawing/2014/main" id="{4038A516-0268-44A7-9D1E-489280203B7C}"/>
+                <a16:creationId xmlns:a16="http://schemas.microsoft.com/office/drawing/2014/main" id="{21099C4A-B39E-4FC3-9C4A-6F440E328203}"/>
               </a:ext>
             </a:extLst>
           </p:cNvPr>
@@ -17551,7 +17551,7 @@
           <p:cNvPr id="118" name="">
             <a:extLst xmlns:a="http://schemas.openxmlformats.org/drawingml/2006/main">
               <a:ext uri="{FF2B5EF4-FFF2-40B4-BE49-F238E27FC236}">
-                <a16:creationId xmlns:a16="http://schemas.microsoft.com/office/drawing/2014/main" id="{558C6B19-49ED-42CA-B140-4F13EBCE0EF4}"/>
+                <a16:creationId xmlns:a16="http://schemas.microsoft.com/office/drawing/2014/main" id="{A38BB667-38BC-44D7-A887-958E53F099FD}"/>
               </a:ext>
             </a:extLst>
           </p:cNvPr>
@@ -17584,7 +17584,7 @@
           <p:cNvPr id="119" name="">
             <a:extLst xmlns:a="http://schemas.openxmlformats.org/drawingml/2006/main">
               <a:ext uri="{FF2B5EF4-FFF2-40B4-BE49-F238E27FC236}">
-                <a16:creationId xmlns:a16="http://schemas.microsoft.com/office/drawing/2014/main" id="{A52353D8-D68D-4425-A9E2-DAB50CF2CD54}"/>
+                <a16:creationId xmlns:a16="http://schemas.microsoft.com/office/drawing/2014/main" id="{D86AFB5E-CF34-4697-8BB6-711721814EFA}"/>
               </a:ext>
             </a:extLst>
           </p:cNvPr>
@@ -17617,7 +17617,7 @@
           <p:cNvPr id="120" name="">
             <a:extLst xmlns:a="http://schemas.openxmlformats.org/drawingml/2006/main">
               <a:ext uri="{FF2B5EF4-FFF2-40B4-BE49-F238E27FC236}">
-                <a16:creationId xmlns:a16="http://schemas.microsoft.com/office/drawing/2014/main" id="{B2315D99-3FDD-4733-9216-56910B0D4A43}"/>
+                <a16:creationId xmlns:a16="http://schemas.microsoft.com/office/drawing/2014/main" id="{E9CD93AF-FEB5-439A-AFC3-453BBDBB81A7}"/>
               </a:ext>
             </a:extLst>
           </p:cNvPr>
@@ -17650,7 +17650,7 @@
           <p:cNvPr id="121" name="">
             <a:extLst xmlns:a="http://schemas.openxmlformats.org/drawingml/2006/main">
               <a:ext uri="{FF2B5EF4-FFF2-40B4-BE49-F238E27FC236}">
-                <a16:creationId xmlns:a16="http://schemas.microsoft.com/office/drawing/2014/main" id="{2DCAD666-A0E4-44DD-A4B4-E62E0C1D8457}"/>
+                <a16:creationId xmlns:a16="http://schemas.microsoft.com/office/drawing/2014/main" id="{551AC92E-0A4B-414A-A640-3BE276C7ABA8}"/>
               </a:ext>
             </a:extLst>
           </p:cNvPr>
@@ -17683,7 +17683,7 @@
           <p:cNvPr id="122" name="">
             <a:extLst xmlns:a="http://schemas.openxmlformats.org/drawingml/2006/main">
               <a:ext uri="{FF2B5EF4-FFF2-40B4-BE49-F238E27FC236}">
-                <a16:creationId xmlns:a16="http://schemas.microsoft.com/office/drawing/2014/main" id="{6519A3F2-6F4C-4F9A-BA1E-2C3EB34A045C}"/>
+                <a16:creationId xmlns:a16="http://schemas.microsoft.com/office/drawing/2014/main" id="{2FC4E615-F1D8-4EF0-BFE6-87FFC74ED4EB}"/>
               </a:ext>
             </a:extLst>
           </p:cNvPr>
@@ -17716,7 +17716,7 @@
           <p:cNvPr id="123" name="">
             <a:extLst xmlns:a="http://schemas.openxmlformats.org/drawingml/2006/main">
               <a:ext uri="{FF2B5EF4-FFF2-40B4-BE49-F238E27FC236}">
-                <a16:creationId xmlns:a16="http://schemas.microsoft.com/office/drawing/2014/main" id="{D24DA83A-7E69-4642-A469-0B812C1D4F41}"/>
+                <a16:creationId xmlns:a16="http://schemas.microsoft.com/office/drawing/2014/main" id="{BE6E4F54-7B9E-45B8-B435-435BEAD305A4}"/>
               </a:ext>
             </a:extLst>
           </p:cNvPr>
@@ -17749,7 +17749,7 @@
           <p:cNvPr id="124" name="">
             <a:extLst xmlns:a="http://schemas.openxmlformats.org/drawingml/2006/main">
               <a:ext uri="{FF2B5EF4-FFF2-40B4-BE49-F238E27FC236}">
-                <a16:creationId xmlns:a16="http://schemas.microsoft.com/office/drawing/2014/main" id="{FBA8D3DF-7191-47ED-A3B3-DBA2EF7A8047}"/>
+                <a16:creationId xmlns:a16="http://schemas.microsoft.com/office/drawing/2014/main" id="{F86CD193-A94B-4E54-B899-414D0A929617}"/>
               </a:ext>
             </a:extLst>
           </p:cNvPr>
@@ -17782,7 +17782,7 @@
           <p:cNvPr id="125" name="">
             <a:extLst xmlns:a="http://schemas.openxmlformats.org/drawingml/2006/main">
               <a:ext uri="{FF2B5EF4-FFF2-40B4-BE49-F238E27FC236}">
-                <a16:creationId xmlns:a16="http://schemas.microsoft.com/office/drawing/2014/main" id="{B7D0629E-DEA6-4127-99D9-BE4E6C27BA34}"/>
+                <a16:creationId xmlns:a16="http://schemas.microsoft.com/office/drawing/2014/main" id="{B71654C6-84A2-4FEB-9302-92044278AFA8}"/>
               </a:ext>
             </a:extLst>
           </p:cNvPr>
@@ -17815,7 +17815,7 @@
           <p:cNvPr id="126" name="">
             <a:extLst xmlns:a="http://schemas.openxmlformats.org/drawingml/2006/main">
               <a:ext uri="{FF2B5EF4-FFF2-40B4-BE49-F238E27FC236}">
-                <a16:creationId xmlns:a16="http://schemas.microsoft.com/office/drawing/2014/main" id="{EA636583-55F4-4AAA-84A5-72AB304B9986}"/>
+                <a16:creationId xmlns:a16="http://schemas.microsoft.com/office/drawing/2014/main" id="{9F0151AF-62F7-426F-AD79-3E0993EB4C7F}"/>
               </a:ext>
             </a:extLst>
           </p:cNvPr>
@@ -17848,7 +17848,7 @@
           <p:cNvPr id="127" name="">
             <a:extLst xmlns:a="http://schemas.openxmlformats.org/drawingml/2006/main">
               <a:ext uri="{FF2B5EF4-FFF2-40B4-BE49-F238E27FC236}">
-                <a16:creationId xmlns:a16="http://schemas.microsoft.com/office/drawing/2014/main" id="{FC0F8018-B43C-4823-8F20-67F6F1C2B1B3}"/>
+                <a16:creationId xmlns:a16="http://schemas.microsoft.com/office/drawing/2014/main" id="{8B941E40-873C-408F-BBDF-721D8020F69A}"/>
               </a:ext>
             </a:extLst>
           </p:cNvPr>
@@ -17881,7 +17881,7 @@
           <p:cNvPr id="128" name="">
             <a:extLst xmlns:a="http://schemas.openxmlformats.org/drawingml/2006/main">
               <a:ext uri="{FF2B5EF4-FFF2-40B4-BE49-F238E27FC236}">
-                <a16:creationId xmlns:a16="http://schemas.microsoft.com/office/drawing/2014/main" id="{36B04E4F-3B88-4221-A487-0E947A8933A5}"/>
+                <a16:creationId xmlns:a16="http://schemas.microsoft.com/office/drawing/2014/main" id="{CB038E41-8FA4-438B-98A2-CEE216AAB83C}"/>
               </a:ext>
             </a:extLst>
           </p:cNvPr>
@@ -17914,7 +17914,7 @@
           <p:cNvPr id="129" name="">
             <a:extLst xmlns:a="http://schemas.openxmlformats.org/drawingml/2006/main">
               <a:ext uri="{FF2B5EF4-FFF2-40B4-BE49-F238E27FC236}">
-                <a16:creationId xmlns:a16="http://schemas.microsoft.com/office/drawing/2014/main" id="{A67EB651-4330-4DB0-BBFD-51A677D4984D}"/>
+                <a16:creationId xmlns:a16="http://schemas.microsoft.com/office/drawing/2014/main" id="{263E5CEE-2594-4FC5-AE41-F65D8D60595F}"/>
               </a:ext>
             </a:extLst>
           </p:cNvPr>
@@ -17947,7 +17947,7 @@
           <p:cNvPr id="130" name="">
             <a:extLst xmlns:a="http://schemas.openxmlformats.org/drawingml/2006/main">
               <a:ext uri="{FF2B5EF4-FFF2-40B4-BE49-F238E27FC236}">
-                <a16:creationId xmlns:a16="http://schemas.microsoft.com/office/drawing/2014/main" id="{F4C61E87-E7FA-4B7D-B7E5-68381BCAEBE9}"/>
+                <a16:creationId xmlns:a16="http://schemas.microsoft.com/office/drawing/2014/main" id="{0ABC4D51-1E3E-4CC0-A1B0-A6D2C61D7404}"/>
               </a:ext>
             </a:extLst>
           </p:cNvPr>
@@ -17980,7 +17980,7 @@
           <p:cNvPr id="131" name="">
             <a:extLst xmlns:a="http://schemas.openxmlformats.org/drawingml/2006/main">
               <a:ext uri="{FF2B5EF4-FFF2-40B4-BE49-F238E27FC236}">
-                <a16:creationId xmlns:a16="http://schemas.microsoft.com/office/drawing/2014/main" id="{E3E97C75-BCDA-46DD-9CD8-1FB63630CF0E}"/>
+                <a16:creationId xmlns:a16="http://schemas.microsoft.com/office/drawing/2014/main" id="{23F70656-9274-4B8C-9D5D-238ABBEF720F}"/>
               </a:ext>
             </a:extLst>
           </p:cNvPr>
@@ -18013,7 +18013,7 @@
           <p:cNvPr id="132" name="">
             <a:extLst xmlns:a="http://schemas.openxmlformats.org/drawingml/2006/main">
               <a:ext uri="{FF2B5EF4-FFF2-40B4-BE49-F238E27FC236}">
-                <a16:creationId xmlns:a16="http://schemas.microsoft.com/office/drawing/2014/main" id="{DE7DD834-7FA4-482C-B1E9-1EC1F843A650}"/>
+                <a16:creationId xmlns:a16="http://schemas.microsoft.com/office/drawing/2014/main" id="{266AB0FD-40D6-45A6-AAD6-CFFA030041A3}"/>
               </a:ext>
             </a:extLst>
           </p:cNvPr>
@@ -18046,7 +18046,7 @@
           <p:cNvPr id="133" name="">
             <a:extLst xmlns:a="http://schemas.openxmlformats.org/drawingml/2006/main">
               <a:ext uri="{FF2B5EF4-FFF2-40B4-BE49-F238E27FC236}">
-                <a16:creationId xmlns:a16="http://schemas.microsoft.com/office/drawing/2014/main" id="{1D92F932-CC80-4DBA-813E-6B4FE32984EC}"/>
+                <a16:creationId xmlns:a16="http://schemas.microsoft.com/office/drawing/2014/main" id="{6122002C-3882-4406-A682-9D8ABBE103C4}"/>
               </a:ext>
             </a:extLst>
           </p:cNvPr>
@@ -18079,7 +18079,7 @@
           <p:cNvPr id="134" name="">
             <a:extLst xmlns:a="http://schemas.openxmlformats.org/drawingml/2006/main">
               <a:ext uri="{FF2B5EF4-FFF2-40B4-BE49-F238E27FC236}">
-                <a16:creationId xmlns:a16="http://schemas.microsoft.com/office/drawing/2014/main" id="{162520D6-D812-4BEF-A140-3F1F8102CBDE}"/>
+                <a16:creationId xmlns:a16="http://schemas.microsoft.com/office/drawing/2014/main" id="{F58363AF-5A0A-4D2E-8ED6-933935AD723F}"/>
               </a:ext>
             </a:extLst>
           </p:cNvPr>
@@ -18112,7 +18112,7 @@
           <p:cNvPr id="135" name="">
             <a:extLst xmlns:a="http://schemas.openxmlformats.org/drawingml/2006/main">
               <a:ext uri="{FF2B5EF4-FFF2-40B4-BE49-F238E27FC236}">
-                <a16:creationId xmlns:a16="http://schemas.microsoft.com/office/drawing/2014/main" id="{EA297056-24B0-454D-B4CB-510C11C3F008}"/>
+                <a16:creationId xmlns:a16="http://schemas.microsoft.com/office/drawing/2014/main" id="{AE4016E8-B51A-439E-8F0B-565EDA63DC14}"/>
               </a:ext>
             </a:extLst>
           </p:cNvPr>
@@ -18145,7 +18145,7 @@
           <p:cNvPr id="136" name="">
             <a:extLst xmlns:a="http://schemas.openxmlformats.org/drawingml/2006/main">
               <a:ext uri="{FF2B5EF4-FFF2-40B4-BE49-F238E27FC236}">
-                <a16:creationId xmlns:a16="http://schemas.microsoft.com/office/drawing/2014/main" id="{A57FDC30-4595-4F60-A4B8-96AC54A60129}"/>
+                <a16:creationId xmlns:a16="http://schemas.microsoft.com/office/drawing/2014/main" id="{38D3817A-46A2-4E2C-B497-73F9673F3DC1}"/>
               </a:ext>
             </a:extLst>
           </p:cNvPr>
@@ -18178,7 +18178,7 @@
           <p:cNvPr id="137" name="">
             <a:extLst xmlns:a="http://schemas.openxmlformats.org/drawingml/2006/main">
               <a:ext uri="{FF2B5EF4-FFF2-40B4-BE49-F238E27FC236}">
-                <a16:creationId xmlns:a16="http://schemas.microsoft.com/office/drawing/2014/main" id="{DE9E7F47-EE1D-4309-9B00-0AD823C8E98C}"/>
+                <a16:creationId xmlns:a16="http://schemas.microsoft.com/office/drawing/2014/main" id="{91A8AFEE-05C1-4485-9353-7B9095D52052}"/>
               </a:ext>
             </a:extLst>
           </p:cNvPr>
@@ -18211,7 +18211,7 @@
           <p:cNvPr id="138" name="">
             <a:extLst xmlns:a="http://schemas.openxmlformats.org/drawingml/2006/main">
               <a:ext uri="{FF2B5EF4-FFF2-40B4-BE49-F238E27FC236}">
-                <a16:creationId xmlns:a16="http://schemas.microsoft.com/office/drawing/2014/main" id="{005B2CFE-F592-4F61-AEBD-300E666271EB}"/>
+                <a16:creationId xmlns:a16="http://schemas.microsoft.com/office/drawing/2014/main" id="{F24FE9C3-E58C-419A-B49B-2274B1CF882E}"/>
               </a:ext>
             </a:extLst>
           </p:cNvPr>
@@ -18244,7 +18244,7 @@
           <p:cNvPr id="139" name="">
             <a:extLst xmlns:a="http://schemas.openxmlformats.org/drawingml/2006/main">
               <a:ext uri="{FF2B5EF4-FFF2-40B4-BE49-F238E27FC236}">
-                <a16:creationId xmlns:a16="http://schemas.microsoft.com/office/drawing/2014/main" id="{B6278F94-316B-4298-8B26-04930E6C1FBE}"/>
+                <a16:creationId xmlns:a16="http://schemas.microsoft.com/office/drawing/2014/main" id="{DA7DEFD4-92DB-4646-BF9A-604B43E50BDF}"/>
               </a:ext>
             </a:extLst>
           </p:cNvPr>
@@ -18277,7 +18277,7 @@
           <p:cNvPr id="140" name="">
             <a:extLst xmlns:a="http://schemas.openxmlformats.org/drawingml/2006/main">
               <a:ext uri="{FF2B5EF4-FFF2-40B4-BE49-F238E27FC236}">
-                <a16:creationId xmlns:a16="http://schemas.microsoft.com/office/drawing/2014/main" id="{DA570D87-2F93-48C3-8ACA-123C6F151086}"/>
+                <a16:creationId xmlns:a16="http://schemas.microsoft.com/office/drawing/2014/main" id="{FACFC94F-877D-4950-9DDE-4662D4F89FE0}"/>
               </a:ext>
             </a:extLst>
           </p:cNvPr>
@@ -18310,7 +18310,7 @@
           <p:cNvPr id="141" name="">
             <a:extLst xmlns:a="http://schemas.openxmlformats.org/drawingml/2006/main">
               <a:ext uri="{FF2B5EF4-FFF2-40B4-BE49-F238E27FC236}">
-                <a16:creationId xmlns:a16="http://schemas.microsoft.com/office/drawing/2014/main" id="{4CF69112-23BD-4D58-A74E-72496379BD13}"/>
+                <a16:creationId xmlns:a16="http://schemas.microsoft.com/office/drawing/2014/main" id="{61BF2E32-9159-4C58-9C6F-5A8D2E541C7F}"/>
               </a:ext>
             </a:extLst>
           </p:cNvPr>
@@ -18343,7 +18343,7 @@
           <p:cNvPr id="142" name="">
             <a:extLst xmlns:a="http://schemas.openxmlformats.org/drawingml/2006/main">
               <a:ext uri="{FF2B5EF4-FFF2-40B4-BE49-F238E27FC236}">
-                <a16:creationId xmlns:a16="http://schemas.microsoft.com/office/drawing/2014/main" id="{55F94DF8-D609-46FC-9F7E-B4FE5A2814BC}"/>
+                <a16:creationId xmlns:a16="http://schemas.microsoft.com/office/drawing/2014/main" id="{9B087682-2FCA-4942-9481-8870A583D62A}"/>
               </a:ext>
             </a:extLst>
           </p:cNvPr>
@@ -18376,7 +18376,7 @@
           <p:cNvPr id="143" name="">
             <a:extLst xmlns:a="http://schemas.openxmlformats.org/drawingml/2006/main">
               <a:ext uri="{FF2B5EF4-FFF2-40B4-BE49-F238E27FC236}">
-                <a16:creationId xmlns:a16="http://schemas.microsoft.com/office/drawing/2014/main" id="{35DE1C73-521E-4AAF-81A4-33523EBF2A06}"/>
+                <a16:creationId xmlns:a16="http://schemas.microsoft.com/office/drawing/2014/main" id="{D66CCDFD-EC2B-4C36-9FE6-796AB8118A30}"/>
               </a:ext>
             </a:extLst>
           </p:cNvPr>
@@ -18409,7 +18409,7 @@
           <p:cNvPr id="144" name="">
             <a:extLst xmlns:a="http://schemas.openxmlformats.org/drawingml/2006/main">
               <a:ext uri="{FF2B5EF4-FFF2-40B4-BE49-F238E27FC236}">
-                <a16:creationId xmlns:a16="http://schemas.microsoft.com/office/drawing/2014/main" id="{A863FF99-737B-402E-8472-3DAEC177B58C}"/>
+                <a16:creationId xmlns:a16="http://schemas.microsoft.com/office/drawing/2014/main" id="{E9F845F7-2C59-47C2-B81D-492A714E4670}"/>
               </a:ext>
             </a:extLst>
           </p:cNvPr>
@@ -18442,7 +18442,7 @@
           <p:cNvPr id="145" name="">
             <a:extLst xmlns:a="http://schemas.openxmlformats.org/drawingml/2006/main">
               <a:ext uri="{FF2B5EF4-FFF2-40B4-BE49-F238E27FC236}">
-                <a16:creationId xmlns:a16="http://schemas.microsoft.com/office/drawing/2014/main" id="{2C53A5FF-87B4-4F9D-A5B6-618E54C01583}"/>
+                <a16:creationId xmlns:a16="http://schemas.microsoft.com/office/drawing/2014/main" id="{ACEA92EB-3E13-4FDF-8455-0619B5DE9097}"/>
               </a:ext>
             </a:extLst>
           </p:cNvPr>
@@ -18475,7 +18475,7 @@
           <p:cNvPr id="146" name="">
             <a:extLst xmlns:a="http://schemas.openxmlformats.org/drawingml/2006/main">
               <a:ext uri="{FF2B5EF4-FFF2-40B4-BE49-F238E27FC236}">
-                <a16:creationId xmlns:a16="http://schemas.microsoft.com/office/drawing/2014/main" id="{A807D645-71FC-4AF7-B1CE-1657E5E8A213}"/>
+                <a16:creationId xmlns:a16="http://schemas.microsoft.com/office/drawing/2014/main" id="{90CAEA03-A409-4994-B3E2-A1C3B3D0B964}"/>
               </a:ext>
             </a:extLst>
           </p:cNvPr>
@@ -18508,7 +18508,7 @@
           <p:cNvPr id="147" name="">
             <a:extLst xmlns:a="http://schemas.openxmlformats.org/drawingml/2006/main">
               <a:ext uri="{FF2B5EF4-FFF2-40B4-BE49-F238E27FC236}">
-                <a16:creationId xmlns:a16="http://schemas.microsoft.com/office/drawing/2014/main" id="{461E898C-A4F4-45BB-B957-BA5DF494B8B3}"/>
+                <a16:creationId xmlns:a16="http://schemas.microsoft.com/office/drawing/2014/main" id="{65652DD5-F894-4243-A264-CA6866085137}"/>
               </a:ext>
             </a:extLst>
           </p:cNvPr>
@@ -18541,7 +18541,7 @@
           <p:cNvPr id="148" name="">
             <a:extLst xmlns:a="http://schemas.openxmlformats.org/drawingml/2006/main">
               <a:ext uri="{FF2B5EF4-FFF2-40B4-BE49-F238E27FC236}">
-                <a16:creationId xmlns:a16="http://schemas.microsoft.com/office/drawing/2014/main" id="{F4D01F01-5077-457A-9446-BB686B9F8E9B}"/>
+                <a16:creationId xmlns:a16="http://schemas.microsoft.com/office/drawing/2014/main" id="{9ABC1C81-C393-44A3-86A2-86B112886FD7}"/>
               </a:ext>
             </a:extLst>
           </p:cNvPr>
@@ -18574,7 +18574,7 @@
           <p:cNvPr id="149" name="">
             <a:extLst xmlns:a="http://schemas.openxmlformats.org/drawingml/2006/main">
               <a:ext uri="{FF2B5EF4-FFF2-40B4-BE49-F238E27FC236}">
-                <a16:creationId xmlns:a16="http://schemas.microsoft.com/office/drawing/2014/main" id="{21AF69FF-0653-40C2-89C7-9738E520E0B4}"/>
+                <a16:creationId xmlns:a16="http://schemas.microsoft.com/office/drawing/2014/main" id="{03CF159A-6907-42A0-A6FE-F6FFBFA994C0}"/>
               </a:ext>
             </a:extLst>
           </p:cNvPr>
@@ -18607,7 +18607,7 @@
           <p:cNvPr id="150" name="">
             <a:extLst xmlns:a="http://schemas.openxmlformats.org/drawingml/2006/main">
               <a:ext uri="{FF2B5EF4-FFF2-40B4-BE49-F238E27FC236}">
-                <a16:creationId xmlns:a16="http://schemas.microsoft.com/office/drawing/2014/main" id="{C9AF536E-19BE-40B5-9919-907495CA6193}"/>
+                <a16:creationId xmlns:a16="http://schemas.microsoft.com/office/drawing/2014/main" id="{38F15794-4A7F-4E33-9976-4137CD9D6993}"/>
               </a:ext>
             </a:extLst>
           </p:cNvPr>
@@ -18640,7 +18640,7 @@
           <p:cNvPr id="151" name="">
             <a:extLst xmlns:a="http://schemas.openxmlformats.org/drawingml/2006/main">
               <a:ext uri="{FF2B5EF4-FFF2-40B4-BE49-F238E27FC236}">
-                <a16:creationId xmlns:a16="http://schemas.microsoft.com/office/drawing/2014/main" id="{40AFADC0-F80E-40EB-A302-FB79CAE1C24B}"/>
+                <a16:creationId xmlns:a16="http://schemas.microsoft.com/office/drawing/2014/main" id="{F4F26FC5-3B13-4A2B-A228-13F730933E57}"/>
               </a:ext>
             </a:extLst>
           </p:cNvPr>
@@ -18673,7 +18673,7 @@
           <p:cNvPr id="152" name="">
             <a:extLst xmlns:a="http://schemas.openxmlformats.org/drawingml/2006/main">
               <a:ext uri="{FF2B5EF4-FFF2-40B4-BE49-F238E27FC236}">
-                <a16:creationId xmlns:a16="http://schemas.microsoft.com/office/drawing/2014/main" id="{551E8A16-4079-4984-8C64-CEA5627C638C}"/>
+                <a16:creationId xmlns:a16="http://schemas.microsoft.com/office/drawing/2014/main" id="{9369A71C-5698-4454-8C04-AFD0F521B780}"/>
               </a:ext>
             </a:extLst>
           </p:cNvPr>
@@ -18706,7 +18706,7 @@
           <p:cNvPr id="153" name="">
             <a:extLst xmlns:a="http://schemas.openxmlformats.org/drawingml/2006/main">
               <a:ext uri="{FF2B5EF4-FFF2-40B4-BE49-F238E27FC236}">
-                <a16:creationId xmlns:a16="http://schemas.microsoft.com/office/drawing/2014/main" id="{D31E1F60-DDEE-4B95-AA10-DDF4A51927AC}"/>
+                <a16:creationId xmlns:a16="http://schemas.microsoft.com/office/drawing/2014/main" id="{2510DEFF-871F-48C9-BAC3-F42E1073E371}"/>
               </a:ext>
             </a:extLst>
           </p:cNvPr>
@@ -18739,7 +18739,7 @@
           <p:cNvPr id="154" name="">
             <a:extLst xmlns:a="http://schemas.openxmlformats.org/drawingml/2006/main">
               <a:ext uri="{FF2B5EF4-FFF2-40B4-BE49-F238E27FC236}">
-                <a16:creationId xmlns:a16="http://schemas.microsoft.com/office/drawing/2014/main" id="{3EBB57D6-D017-4571-A592-B9FE5B5EE14F}"/>
+                <a16:creationId xmlns:a16="http://schemas.microsoft.com/office/drawing/2014/main" id="{07FC6889-8E21-4F68-A9E0-3AB7451E2175}"/>
               </a:ext>
             </a:extLst>
           </p:cNvPr>
@@ -18772,7 +18772,7 @@
           <p:cNvPr id="155" name="">
             <a:extLst xmlns:a="http://schemas.openxmlformats.org/drawingml/2006/main">
               <a:ext uri="{FF2B5EF4-FFF2-40B4-BE49-F238E27FC236}">
-                <a16:creationId xmlns:a16="http://schemas.microsoft.com/office/drawing/2014/main" id="{C9252E86-E8A8-44D8-99B0-E927A33CACDC}"/>
+                <a16:creationId xmlns:a16="http://schemas.microsoft.com/office/drawing/2014/main" id="{06A04BFE-022E-4B38-87E4-1A05D4C79397}"/>
               </a:ext>
             </a:extLst>
           </p:cNvPr>
@@ -18805,7 +18805,7 @@
           <p:cNvPr id="156" name="">
             <a:extLst xmlns:a="http://schemas.openxmlformats.org/drawingml/2006/main">
               <a:ext uri="{FF2B5EF4-FFF2-40B4-BE49-F238E27FC236}">
-                <a16:creationId xmlns:a16="http://schemas.microsoft.com/office/drawing/2014/main" id="{A17449E5-CDC2-4FAA-9653-2A9CA258923C}"/>
+                <a16:creationId xmlns:a16="http://schemas.microsoft.com/office/drawing/2014/main" id="{B063C59C-EC93-4872-BC62-3805351490E6}"/>
               </a:ext>
             </a:extLst>
           </p:cNvPr>
@@ -18838,7 +18838,7 @@
           <p:cNvPr id="157" name="">
             <a:extLst xmlns:a="http://schemas.openxmlformats.org/drawingml/2006/main">
               <a:ext uri="{FF2B5EF4-FFF2-40B4-BE49-F238E27FC236}">
-                <a16:creationId xmlns:a16="http://schemas.microsoft.com/office/drawing/2014/main" id="{15A0547C-56BC-4D82-AD00-BD31958AA0F0}"/>
+                <a16:creationId xmlns:a16="http://schemas.microsoft.com/office/drawing/2014/main" id="{B31BD1E9-4C1F-4B70-A39C-488C1FC664EC}"/>
               </a:ext>
             </a:extLst>
           </p:cNvPr>
@@ -18871,7 +18871,7 @@
           <p:cNvPr id="158" name="">
             <a:extLst xmlns:a="http://schemas.openxmlformats.org/drawingml/2006/main">
               <a:ext uri="{FF2B5EF4-FFF2-40B4-BE49-F238E27FC236}">
-                <a16:creationId xmlns:a16="http://schemas.microsoft.com/office/drawing/2014/main" id="{5239C0E6-B1B1-44AF-BC2E-C2E4A9588A04}"/>
+                <a16:creationId xmlns:a16="http://schemas.microsoft.com/office/drawing/2014/main" id="{2BF9CF43-61D9-48A2-A515-A83D49B4DD71}"/>
               </a:ext>
             </a:extLst>
           </p:cNvPr>
@@ -18904,7 +18904,7 @@
           <p:cNvPr id="159" name="">
             <a:extLst xmlns:a="http://schemas.openxmlformats.org/drawingml/2006/main">
               <a:ext uri="{FF2B5EF4-FFF2-40B4-BE49-F238E27FC236}">
-                <a16:creationId xmlns:a16="http://schemas.microsoft.com/office/drawing/2014/main" id="{759A6438-2398-45B9-A6DE-76786837321F}"/>
+                <a16:creationId xmlns:a16="http://schemas.microsoft.com/office/drawing/2014/main" id="{BE4BDC02-7551-41FB-80B3-B92C9E06216F}"/>
               </a:ext>
             </a:extLst>
           </p:cNvPr>
@@ -18937,7 +18937,7 @@
           <p:cNvPr id="160" name="">
             <a:extLst xmlns:a="http://schemas.openxmlformats.org/drawingml/2006/main">
               <a:ext uri="{FF2B5EF4-FFF2-40B4-BE49-F238E27FC236}">
-                <a16:creationId xmlns:a16="http://schemas.microsoft.com/office/drawing/2014/main" id="{EFACD712-C4EE-4036-87A9-BDB92C624B95}"/>
+                <a16:creationId xmlns:a16="http://schemas.microsoft.com/office/drawing/2014/main" id="{8C77EB3A-CEF8-454C-A6AD-5343A8A48E57}"/>
               </a:ext>
             </a:extLst>
           </p:cNvPr>
@@ -18970,7 +18970,7 @@
           <p:cNvPr id="161" name="">
             <a:extLst xmlns:a="http://schemas.openxmlformats.org/drawingml/2006/main">
               <a:ext uri="{FF2B5EF4-FFF2-40B4-BE49-F238E27FC236}">
-                <a16:creationId xmlns:a16="http://schemas.microsoft.com/office/drawing/2014/main" id="{6658A4FF-F531-4E9F-B2C3-02BFC3C61CE9}"/>
+                <a16:creationId xmlns:a16="http://schemas.microsoft.com/office/drawing/2014/main" id="{519DCD8D-3B1D-41ED-9B84-261BD333FB8B}"/>
               </a:ext>
             </a:extLst>
           </p:cNvPr>
@@ -19003,7 +19003,7 @@
           <p:cNvPr id="162" name="">
             <a:extLst xmlns:a="http://schemas.openxmlformats.org/drawingml/2006/main">
               <a:ext uri="{FF2B5EF4-FFF2-40B4-BE49-F238E27FC236}">
-                <a16:creationId xmlns:a16="http://schemas.microsoft.com/office/drawing/2014/main" id="{64599E4B-7881-4FB6-B31B-7F2E49AEC783}"/>
+                <a16:creationId xmlns:a16="http://schemas.microsoft.com/office/drawing/2014/main" id="{CE4DD5EE-0D8F-4320-9CC9-5806CCC40D09}"/>
               </a:ext>
             </a:extLst>
           </p:cNvPr>
@@ -19036,7 +19036,7 @@
           <p:cNvPr id="163" name="">
             <a:extLst xmlns:a="http://schemas.openxmlformats.org/drawingml/2006/main">
               <a:ext uri="{FF2B5EF4-FFF2-40B4-BE49-F238E27FC236}">
-                <a16:creationId xmlns:a16="http://schemas.microsoft.com/office/drawing/2014/main" id="{37417D94-7F62-430B-8465-3C24BE67472A}"/>
+                <a16:creationId xmlns:a16="http://schemas.microsoft.com/office/drawing/2014/main" id="{A82F904E-3FB9-435E-8547-6F7337BB33CF}"/>
               </a:ext>
             </a:extLst>
           </p:cNvPr>
@@ -19069,7 +19069,7 @@
           <p:cNvPr id="164" name="">
             <a:extLst xmlns:a="http://schemas.openxmlformats.org/drawingml/2006/main">
               <a:ext uri="{FF2B5EF4-FFF2-40B4-BE49-F238E27FC236}">
-                <a16:creationId xmlns:a16="http://schemas.microsoft.com/office/drawing/2014/main" id="{892230A1-247F-4477-BC45-D41C87C73193}"/>
+                <a16:creationId xmlns:a16="http://schemas.microsoft.com/office/drawing/2014/main" id="{6DC77616-0B52-411E-BDEA-6F3CFF9AD1C8}"/>
               </a:ext>
             </a:extLst>
           </p:cNvPr>
@@ -19102,7 +19102,7 @@
           <p:cNvPr id="165" name="">
             <a:extLst xmlns:a="http://schemas.openxmlformats.org/drawingml/2006/main">
               <a:ext uri="{FF2B5EF4-FFF2-40B4-BE49-F238E27FC236}">
-                <a16:creationId xmlns:a16="http://schemas.microsoft.com/office/drawing/2014/main" id="{9404196D-4BCA-4A1D-8E44-A17F80739424}"/>
+                <a16:creationId xmlns:a16="http://schemas.microsoft.com/office/drawing/2014/main" id="{484B7B77-76A9-42D6-B663-D0688945431B}"/>
               </a:ext>
             </a:extLst>
           </p:cNvPr>
@@ -19135,7 +19135,7 @@
           <p:cNvPr id="166" name="">
             <a:extLst xmlns:a="http://schemas.openxmlformats.org/drawingml/2006/main">
               <a:ext uri="{FF2B5EF4-FFF2-40B4-BE49-F238E27FC236}">
-                <a16:creationId xmlns:a16="http://schemas.microsoft.com/office/drawing/2014/main" id="{200CEF1B-D9AF-43B8-9B81-481C6DB9C267}"/>
+                <a16:creationId xmlns:a16="http://schemas.microsoft.com/office/drawing/2014/main" id="{3E5A47DC-EEEA-4442-A956-D3BBD585A3F9}"/>
               </a:ext>
             </a:extLst>
           </p:cNvPr>
@@ -19168,7 +19168,7 @@
           <p:cNvPr id="167" name="">
             <a:extLst xmlns:a="http://schemas.openxmlformats.org/drawingml/2006/main">
               <a:ext uri="{FF2B5EF4-FFF2-40B4-BE49-F238E27FC236}">
-                <a16:creationId xmlns:a16="http://schemas.microsoft.com/office/drawing/2014/main" id="{7D3CB45B-A7A1-4A71-B651-BD9BEAC0B827}"/>
+                <a16:creationId xmlns:a16="http://schemas.microsoft.com/office/drawing/2014/main" id="{C8185B70-8DAA-4D25-8E3A-7D580319E56B}"/>
               </a:ext>
             </a:extLst>
           </p:cNvPr>
@@ -19201,7 +19201,7 @@
           <p:cNvPr id="168" name="">
             <a:extLst xmlns:a="http://schemas.openxmlformats.org/drawingml/2006/main">
               <a:ext uri="{FF2B5EF4-FFF2-40B4-BE49-F238E27FC236}">
-                <a16:creationId xmlns:a16="http://schemas.microsoft.com/office/drawing/2014/main" id="{EA79B8BA-FFD4-4592-B0CF-8CFF3F1C7827}"/>
+                <a16:creationId xmlns:a16="http://schemas.microsoft.com/office/drawing/2014/main" id="{B162686E-47AE-4613-B752-19D8B33DE07E}"/>
               </a:ext>
             </a:extLst>
           </p:cNvPr>
@@ -19234,7 +19234,7 @@
           <p:cNvPr id="169" name="">
             <a:extLst xmlns:a="http://schemas.openxmlformats.org/drawingml/2006/main">
               <a:ext uri="{FF2B5EF4-FFF2-40B4-BE49-F238E27FC236}">
-                <a16:creationId xmlns:a16="http://schemas.microsoft.com/office/drawing/2014/main" id="{4A41E6DD-0A1F-4840-93BC-E35AE9B5F326}"/>
+                <a16:creationId xmlns:a16="http://schemas.microsoft.com/office/drawing/2014/main" id="{6112AB6E-CCD8-4838-8E84-3E36947F6107}"/>
               </a:ext>
             </a:extLst>
           </p:cNvPr>
@@ -19267,7 +19267,7 @@
           <p:cNvPr id="170" name="">
             <a:extLst xmlns:a="http://schemas.openxmlformats.org/drawingml/2006/main">
               <a:ext uri="{FF2B5EF4-FFF2-40B4-BE49-F238E27FC236}">
-                <a16:creationId xmlns:a16="http://schemas.microsoft.com/office/drawing/2014/main" id="{E4DE369B-217C-49F0-92B5-1F0A9C14F824}"/>
+                <a16:creationId xmlns:a16="http://schemas.microsoft.com/office/drawing/2014/main" id="{884D771B-E661-446A-8C5C-BFA7047B4CBE}"/>
               </a:ext>
             </a:extLst>
           </p:cNvPr>
@@ -19300,7 +19300,7 @@
           <p:cNvPr id="171" name="">
             <a:extLst xmlns:a="http://schemas.openxmlformats.org/drawingml/2006/main">
               <a:ext uri="{FF2B5EF4-FFF2-40B4-BE49-F238E27FC236}">
-                <a16:creationId xmlns:a16="http://schemas.microsoft.com/office/drawing/2014/main" id="{4CB622A1-76B7-42ED-87A8-6BACA2FB1313}"/>
+                <a16:creationId xmlns:a16="http://schemas.microsoft.com/office/drawing/2014/main" id="{07A2E637-972E-40F2-B126-2EF3DC251253}"/>
               </a:ext>
             </a:extLst>
           </p:cNvPr>
@@ -19333,7 +19333,7 @@
           <p:cNvPr id="172" name="">
             <a:extLst xmlns:a="http://schemas.openxmlformats.org/drawingml/2006/main">
               <a:ext uri="{FF2B5EF4-FFF2-40B4-BE49-F238E27FC236}">
-                <a16:creationId xmlns:a16="http://schemas.microsoft.com/office/drawing/2014/main" id="{BF6229CF-965F-4538-8EE7-C94CF36CC4E0}"/>
+                <a16:creationId xmlns:a16="http://schemas.microsoft.com/office/drawing/2014/main" id="{1923172D-6523-491B-B3B2-B2AC034B192C}"/>
               </a:ext>
             </a:extLst>
           </p:cNvPr>
@@ -19366,7 +19366,7 @@
           <p:cNvPr id="173" name="">
             <a:extLst xmlns:a="http://schemas.openxmlformats.org/drawingml/2006/main">
               <a:ext uri="{FF2B5EF4-FFF2-40B4-BE49-F238E27FC236}">
-                <a16:creationId xmlns:a16="http://schemas.microsoft.com/office/drawing/2014/main" id="{EBF64624-CAA1-414B-8EB1-8B2039B8C8E0}"/>
+                <a16:creationId xmlns:a16="http://schemas.microsoft.com/office/drawing/2014/main" id="{8B5E221F-19E9-4B41-82B2-43466B44E2B1}"/>
               </a:ext>
             </a:extLst>
           </p:cNvPr>
@@ -19399,7 +19399,7 @@
           <p:cNvPr id="174" name="">
             <a:extLst xmlns:a="http://schemas.openxmlformats.org/drawingml/2006/main">
               <a:ext uri="{FF2B5EF4-FFF2-40B4-BE49-F238E27FC236}">
-                <a16:creationId xmlns:a16="http://schemas.microsoft.com/office/drawing/2014/main" id="{809576DF-FA2F-4F62-A1EA-FF9AA6B8D7F9}"/>
+                <a16:creationId xmlns:a16="http://schemas.microsoft.com/office/drawing/2014/main" id="{216B67D0-B332-49AC-BEA9-E2128661BEB5}"/>
               </a:ext>
             </a:extLst>
           </p:cNvPr>
@@ -19432,7 +19432,7 @@
           <p:cNvPr id="175" name="">
             <a:extLst xmlns:a="http://schemas.openxmlformats.org/drawingml/2006/main">
               <a:ext uri="{FF2B5EF4-FFF2-40B4-BE49-F238E27FC236}">
-                <a16:creationId xmlns:a16="http://schemas.microsoft.com/office/drawing/2014/main" id="{4F4A021B-1BE2-4858-A6C9-260767FE15FE}"/>
+                <a16:creationId xmlns:a16="http://schemas.microsoft.com/office/drawing/2014/main" id="{5DF2D8D9-DB19-4EED-B264-74538D7D0766}"/>
               </a:ext>
             </a:extLst>
           </p:cNvPr>
@@ -19465,7 +19465,7 @@
           <p:cNvPr id="176" name="">
             <a:extLst xmlns:a="http://schemas.openxmlformats.org/drawingml/2006/main">
               <a:ext uri="{FF2B5EF4-FFF2-40B4-BE49-F238E27FC236}">
-                <a16:creationId xmlns:a16="http://schemas.microsoft.com/office/drawing/2014/main" id="{453357D7-B9F9-4164-87F5-8A452727E65E}"/>
+                <a16:creationId xmlns:a16="http://schemas.microsoft.com/office/drawing/2014/main" id="{4B8BD37B-5D2B-4952-AFAE-09DE1BF3EA8E}"/>
               </a:ext>
             </a:extLst>
           </p:cNvPr>
@@ -19498,7 +19498,7 @@
           <p:cNvPr id="177" name="">
             <a:extLst xmlns:a="http://schemas.openxmlformats.org/drawingml/2006/main">
               <a:ext uri="{FF2B5EF4-FFF2-40B4-BE49-F238E27FC236}">
-                <a16:creationId xmlns:a16="http://schemas.microsoft.com/office/drawing/2014/main" id="{821A3FC1-DAA1-4CC0-AFFA-A328FDEAD8C4}"/>
+                <a16:creationId xmlns:a16="http://schemas.microsoft.com/office/drawing/2014/main" id="{F1CC1AC8-E3B9-4672-BF77-B22508907A03}"/>
               </a:ext>
             </a:extLst>
           </p:cNvPr>
@@ -19531,7 +19531,7 @@
           <p:cNvPr id="178" name="">
             <a:extLst xmlns:a="http://schemas.openxmlformats.org/drawingml/2006/main">
               <a:ext uri="{FF2B5EF4-FFF2-40B4-BE49-F238E27FC236}">
-                <a16:creationId xmlns:a16="http://schemas.microsoft.com/office/drawing/2014/main" id="{F1F36F4F-87A1-4BC5-A447-545356963AF8}"/>
+                <a16:creationId xmlns:a16="http://schemas.microsoft.com/office/drawing/2014/main" id="{8B3A69BF-BD5F-4DCA-BD30-741D9EE99B5E}"/>
               </a:ext>
             </a:extLst>
           </p:cNvPr>
@@ -19564,7 +19564,7 @@
           <p:cNvPr id="179" name="">
             <a:extLst xmlns:a="http://schemas.openxmlformats.org/drawingml/2006/main">
               <a:ext uri="{FF2B5EF4-FFF2-40B4-BE49-F238E27FC236}">
-                <a16:creationId xmlns:a16="http://schemas.microsoft.com/office/drawing/2014/main" id="{4F2BDB9C-D10B-4D4D-B96B-7AA5C863213F}"/>
+                <a16:creationId xmlns:a16="http://schemas.microsoft.com/office/drawing/2014/main" id="{922D3F24-E048-4B45-9642-665AA7F2FDB8}"/>
               </a:ext>
             </a:extLst>
           </p:cNvPr>
@@ -19597,7 +19597,7 @@
           <p:cNvPr id="180" name="">
             <a:extLst xmlns:a="http://schemas.openxmlformats.org/drawingml/2006/main">
               <a:ext uri="{FF2B5EF4-FFF2-40B4-BE49-F238E27FC236}">
-                <a16:creationId xmlns:a16="http://schemas.microsoft.com/office/drawing/2014/main" id="{8BCD9AC8-871E-4538-8AC3-515F678F7D39}"/>
+                <a16:creationId xmlns:a16="http://schemas.microsoft.com/office/drawing/2014/main" id="{C1D18C91-19C7-4C9C-A9BB-87CF7CEC627F}"/>
               </a:ext>
             </a:extLst>
           </p:cNvPr>
@@ -19630,7 +19630,7 @@
           <p:cNvPr id="181" name="">
             <a:extLst xmlns:a="http://schemas.openxmlformats.org/drawingml/2006/main">
               <a:ext uri="{FF2B5EF4-FFF2-40B4-BE49-F238E27FC236}">
-                <a16:creationId xmlns:a16="http://schemas.microsoft.com/office/drawing/2014/main" id="{AF9090DF-CF2D-490E-85C4-DBDE471F0001}"/>
+                <a16:creationId xmlns:a16="http://schemas.microsoft.com/office/drawing/2014/main" id="{71087FD2-79AE-4FBA-9A4F-02AC012E1CEF}"/>
               </a:ext>
             </a:extLst>
           </p:cNvPr>
@@ -19663,7 +19663,7 @@
           <p:cNvPr id="182" name="">
             <a:extLst xmlns:a="http://schemas.openxmlformats.org/drawingml/2006/main">
               <a:ext uri="{FF2B5EF4-FFF2-40B4-BE49-F238E27FC236}">
-                <a16:creationId xmlns:a16="http://schemas.microsoft.com/office/drawing/2014/main" id="{1DCE585F-2D06-4BAC-84AD-D6E1FFE442E2}"/>
+                <a16:creationId xmlns:a16="http://schemas.microsoft.com/office/drawing/2014/main" id="{09E4686A-F9AB-4C8D-AABE-E1F2A0C2ADE2}"/>
               </a:ext>
             </a:extLst>
           </p:cNvPr>
@@ -19696,7 +19696,7 @@
           <p:cNvPr id="183" name="">
             <a:extLst xmlns:a="http://schemas.openxmlformats.org/drawingml/2006/main">
               <a:ext uri="{FF2B5EF4-FFF2-40B4-BE49-F238E27FC236}">
-                <a16:creationId xmlns:a16="http://schemas.microsoft.com/office/drawing/2014/main" id="{8CAA27EE-8886-48E8-B0C4-94CEF504E392}"/>
+                <a16:creationId xmlns:a16="http://schemas.microsoft.com/office/drawing/2014/main" id="{5F10E299-4741-44E8-80B8-8B270194A5EE}"/>
               </a:ext>
             </a:extLst>
           </p:cNvPr>
@@ -19729,7 +19729,7 @@
           <p:cNvPr id="184" name="">
             <a:extLst xmlns:a="http://schemas.openxmlformats.org/drawingml/2006/main">
               <a:ext uri="{FF2B5EF4-FFF2-40B4-BE49-F238E27FC236}">
-                <a16:creationId xmlns:a16="http://schemas.microsoft.com/office/drawing/2014/main" id="{71BD6A34-1233-4E41-9CB1-4B384F895939}"/>
+                <a16:creationId xmlns:a16="http://schemas.microsoft.com/office/drawing/2014/main" id="{71245BAB-B486-409A-812F-BD11A6B73C3D}"/>
               </a:ext>
             </a:extLst>
           </p:cNvPr>
@@ -19762,7 +19762,7 @@
           <p:cNvPr id="185" name="">
             <a:extLst xmlns:a="http://schemas.openxmlformats.org/drawingml/2006/main">
               <a:ext uri="{FF2B5EF4-FFF2-40B4-BE49-F238E27FC236}">
-                <a16:creationId xmlns:a16="http://schemas.microsoft.com/office/drawing/2014/main" id="{0E6F6D86-1DAB-43E1-AA74-825BE4EF9351}"/>
+                <a16:creationId xmlns:a16="http://schemas.microsoft.com/office/drawing/2014/main" id="{62DE8B04-F0CD-4E27-9492-E9CBF6858C7D}"/>
               </a:ext>
             </a:extLst>
           </p:cNvPr>
@@ -19795,7 +19795,7 @@
           <p:cNvPr id="186" name="">
             <a:extLst xmlns:a="http://schemas.openxmlformats.org/drawingml/2006/main">
               <a:ext uri="{FF2B5EF4-FFF2-40B4-BE49-F238E27FC236}">
-                <a16:creationId xmlns:a16="http://schemas.microsoft.com/office/drawing/2014/main" id="{BDD57ABD-E2DB-46D5-8C85-FC6AC9B6FD0C}"/>
+                <a16:creationId xmlns:a16="http://schemas.microsoft.com/office/drawing/2014/main" id="{6028D2E8-7F47-40FE-BCB6-623AB25B1727}"/>
               </a:ext>
             </a:extLst>
           </p:cNvPr>
@@ -19828,7 +19828,7 @@
           <p:cNvPr id="187" name="">
             <a:extLst xmlns:a="http://schemas.openxmlformats.org/drawingml/2006/main">
               <a:ext uri="{FF2B5EF4-FFF2-40B4-BE49-F238E27FC236}">
-                <a16:creationId xmlns:a16="http://schemas.microsoft.com/office/drawing/2014/main" id="{7E9C4510-3798-40E1-AAE4-88B3657392C3}"/>
+                <a16:creationId xmlns:a16="http://schemas.microsoft.com/office/drawing/2014/main" id="{851C54AA-0B21-4EEA-905B-33D4AE6755C0}"/>
               </a:ext>
             </a:extLst>
           </p:cNvPr>
@@ -19861,7 +19861,7 @@
           <p:cNvPr id="188" name="">
             <a:extLst xmlns:a="http://schemas.openxmlformats.org/drawingml/2006/main">
               <a:ext uri="{FF2B5EF4-FFF2-40B4-BE49-F238E27FC236}">
-                <a16:creationId xmlns:a16="http://schemas.microsoft.com/office/drawing/2014/main" id="{D7B3CC85-E8E7-44CC-97FF-ECBEE1B49337}"/>
+                <a16:creationId xmlns:a16="http://schemas.microsoft.com/office/drawing/2014/main" id="{5F5196E1-0943-4907-9760-22DE0AC176C7}"/>
               </a:ext>
             </a:extLst>
           </p:cNvPr>
@@ -19894,7 +19894,7 @@
           <p:cNvPr id="189" name="">
             <a:extLst xmlns:a="http://schemas.openxmlformats.org/drawingml/2006/main">
               <a:ext uri="{FF2B5EF4-FFF2-40B4-BE49-F238E27FC236}">
-                <a16:creationId xmlns:a16="http://schemas.microsoft.com/office/drawing/2014/main" id="{51EE4331-6BD7-486F-9FD5-08EDBFCCCF85}"/>
+                <a16:creationId xmlns:a16="http://schemas.microsoft.com/office/drawing/2014/main" id="{4F7F40FE-FC2C-4703-9D7F-51F535FBC522}"/>
               </a:ext>
             </a:extLst>
           </p:cNvPr>
@@ -19927,7 +19927,7 @@
           <p:cNvPr id="190" name="">
             <a:extLst xmlns:a="http://schemas.openxmlformats.org/drawingml/2006/main">
               <a:ext uri="{FF2B5EF4-FFF2-40B4-BE49-F238E27FC236}">
-                <a16:creationId xmlns:a16="http://schemas.microsoft.com/office/drawing/2014/main" id="{4AC4244E-56D7-40EB-B62A-93313C7D89FC}"/>
+                <a16:creationId xmlns:a16="http://schemas.microsoft.com/office/drawing/2014/main" id="{DA1D7D5E-E118-48A6-8EE2-0029D5BF8304}"/>
               </a:ext>
             </a:extLst>
           </p:cNvPr>
@@ -19960,7 +19960,7 @@
           <p:cNvPr id="191" name="">
             <a:extLst xmlns:a="http://schemas.openxmlformats.org/drawingml/2006/main">
               <a:ext uri="{FF2B5EF4-FFF2-40B4-BE49-F238E27FC236}">
-                <a16:creationId xmlns:a16="http://schemas.microsoft.com/office/drawing/2014/main" id="{4322FED2-AB4D-48BD-A999-59CAFBD3D66F}"/>
+                <a16:creationId xmlns:a16="http://schemas.microsoft.com/office/drawing/2014/main" id="{48CE3BAC-DF3C-4241-84F6-7930D2881B8F}"/>
               </a:ext>
             </a:extLst>
           </p:cNvPr>
@@ -19993,7 +19993,7 @@
           <p:cNvPr id="192" name="">
             <a:extLst xmlns:a="http://schemas.openxmlformats.org/drawingml/2006/main">
               <a:ext uri="{FF2B5EF4-FFF2-40B4-BE49-F238E27FC236}">
-                <a16:creationId xmlns:a16="http://schemas.microsoft.com/office/drawing/2014/main" id="{D0528208-254F-493F-AF2A-B55C92FAA04F}"/>
+                <a16:creationId xmlns:a16="http://schemas.microsoft.com/office/drawing/2014/main" id="{1975108D-DF9C-41C9-9026-AE731F665F8A}"/>
               </a:ext>
             </a:extLst>
           </p:cNvPr>
@@ -20026,7 +20026,7 @@
           <p:cNvPr id="193" name="">
             <a:extLst xmlns:a="http://schemas.openxmlformats.org/drawingml/2006/main">
               <a:ext uri="{FF2B5EF4-FFF2-40B4-BE49-F238E27FC236}">
-                <a16:creationId xmlns:a16="http://schemas.microsoft.com/office/drawing/2014/main" id="{BAA9F408-7A68-4DF7-AD41-8D470B09BDB0}"/>
+                <a16:creationId xmlns:a16="http://schemas.microsoft.com/office/drawing/2014/main" id="{C8B48E21-C3E9-4E59-AC2E-E302BBF8773F}"/>
               </a:ext>
             </a:extLst>
           </p:cNvPr>
@@ -20059,7 +20059,7 @@
           <p:cNvPr id="194" name="">
             <a:extLst xmlns:a="http://schemas.openxmlformats.org/drawingml/2006/main">
               <a:ext uri="{FF2B5EF4-FFF2-40B4-BE49-F238E27FC236}">
-                <a16:creationId xmlns:a16="http://schemas.microsoft.com/office/drawing/2014/main" id="{50858E25-40D0-4786-8D87-3F3A7EE4B760}"/>
+                <a16:creationId xmlns:a16="http://schemas.microsoft.com/office/drawing/2014/main" id="{E2AFC701-13A8-45F1-B17C-B8E9C607D5E6}"/>
               </a:ext>
             </a:extLst>
           </p:cNvPr>
@@ -20092,7 +20092,7 @@
           <p:cNvPr id="195" name="">
             <a:extLst xmlns:a="http://schemas.openxmlformats.org/drawingml/2006/main">
               <a:ext uri="{FF2B5EF4-FFF2-40B4-BE49-F238E27FC236}">
-                <a16:creationId xmlns:a16="http://schemas.microsoft.com/office/drawing/2014/main" id="{3D53B207-8F29-4BB5-A655-17361EB43EED}"/>
+                <a16:creationId xmlns:a16="http://schemas.microsoft.com/office/drawing/2014/main" id="{6EAF77E0-55A8-4B79-A50C-DFFB9EDDF168}"/>
               </a:ext>
             </a:extLst>
           </p:cNvPr>
@@ -20125,7 +20125,7 @@
           <p:cNvPr id="196" name="">
             <a:extLst xmlns:a="http://schemas.openxmlformats.org/drawingml/2006/main">
               <a:ext uri="{FF2B5EF4-FFF2-40B4-BE49-F238E27FC236}">
-                <a16:creationId xmlns:a16="http://schemas.microsoft.com/office/drawing/2014/main" id="{C4122506-9476-45E5-93F7-8B8EB7238CF8}"/>
+                <a16:creationId xmlns:a16="http://schemas.microsoft.com/office/drawing/2014/main" id="{D5331775-D8E4-49C9-85E2-9FBFBBE26B7C}"/>
               </a:ext>
             </a:extLst>
           </p:cNvPr>
@@ -20158,7 +20158,7 @@
           <p:cNvPr id="197" name="">
             <a:extLst xmlns:a="http://schemas.openxmlformats.org/drawingml/2006/main">
               <a:ext uri="{FF2B5EF4-FFF2-40B4-BE49-F238E27FC236}">
-                <a16:creationId xmlns:a16="http://schemas.microsoft.com/office/drawing/2014/main" id="{AABC513C-7F3D-4986-80E1-773BA43639BE}"/>
+                <a16:creationId xmlns:a16="http://schemas.microsoft.com/office/drawing/2014/main" id="{A05F0232-F7B5-4F4F-8CC8-C748230FF87C}"/>
               </a:ext>
             </a:extLst>
           </p:cNvPr>
@@ -20193,7 +20193,7 @@
           <p:cNvPr id="198" name="">
             <a:extLst xmlns:a="http://schemas.openxmlformats.org/drawingml/2006/main">
               <a:ext uri="{FF2B5EF4-FFF2-40B4-BE49-F238E27FC236}">
-                <a16:creationId xmlns:a16="http://schemas.microsoft.com/office/drawing/2014/main" id="{E7DED159-9AE9-493A-A84A-0F8DD1302B80}"/>
+                <a16:creationId xmlns:a16="http://schemas.microsoft.com/office/drawing/2014/main" id="{D591B423-BA7A-4C70-9763-36A2439C5205}"/>
               </a:ext>
             </a:extLst>
           </p:cNvPr>
@@ -20226,7 +20226,7 @@
           <p:cNvPr id="199" name="">
             <a:extLst xmlns:a="http://schemas.openxmlformats.org/drawingml/2006/main">
               <a:ext uri="{FF2B5EF4-FFF2-40B4-BE49-F238E27FC236}">
-                <a16:creationId xmlns:a16="http://schemas.microsoft.com/office/drawing/2014/main" id="{7899984E-3309-4655-81CE-B962EBEFCB4C}"/>
+                <a16:creationId xmlns:a16="http://schemas.microsoft.com/office/drawing/2014/main" id="{7EA134F1-8E52-4E07-B22A-6615989C3EB5}"/>
               </a:ext>
             </a:extLst>
           </p:cNvPr>
@@ -20259,7 +20259,7 @@
           <p:cNvPr id="200" name="">
             <a:extLst xmlns:a="http://schemas.openxmlformats.org/drawingml/2006/main">
               <a:ext uri="{FF2B5EF4-FFF2-40B4-BE49-F238E27FC236}">
-                <a16:creationId xmlns:a16="http://schemas.microsoft.com/office/drawing/2014/main" id="{8B9535A0-453A-4AFB-A7D4-148DC0AF2063}"/>
+                <a16:creationId xmlns:a16="http://schemas.microsoft.com/office/drawing/2014/main" id="{F0B45FDA-2F20-48B7-A0DE-12B7EFEA9A7A}"/>
               </a:ext>
             </a:extLst>
           </p:cNvPr>
@@ -20292,7 +20292,7 @@
           <p:cNvPr id="201" name="">
             <a:extLst xmlns:a="http://schemas.openxmlformats.org/drawingml/2006/main">
               <a:ext uri="{FF2B5EF4-FFF2-40B4-BE49-F238E27FC236}">
-                <a16:creationId xmlns:a16="http://schemas.microsoft.com/office/drawing/2014/main" id="{BB01E52C-B010-4AA6-8E70-334373E24F3C}"/>
+                <a16:creationId xmlns:a16="http://schemas.microsoft.com/office/drawing/2014/main" id="{951E1ED7-977F-4219-8F97-DBFFEEB0230D}"/>
               </a:ext>
             </a:extLst>
           </p:cNvPr>
@@ -20325,7 +20325,7 @@
           <p:cNvPr id="202" name="">
             <a:extLst xmlns:a="http://schemas.openxmlformats.org/drawingml/2006/main">
               <a:ext uri="{FF2B5EF4-FFF2-40B4-BE49-F238E27FC236}">
-                <a16:creationId xmlns:a16="http://schemas.microsoft.com/office/drawing/2014/main" id="{7709133C-8530-409B-ADE2-849D007BFF1D}"/>
+                <a16:creationId xmlns:a16="http://schemas.microsoft.com/office/drawing/2014/main" id="{C144704A-9F3E-46D8-BD00-16DAFD3279CE}"/>
               </a:ext>
             </a:extLst>
           </p:cNvPr>
@@ -20358,7 +20358,7 @@
           <p:cNvPr id="203" name="">
             <a:extLst xmlns:a="http://schemas.openxmlformats.org/drawingml/2006/main">
               <a:ext uri="{FF2B5EF4-FFF2-40B4-BE49-F238E27FC236}">
-                <a16:creationId xmlns:a16="http://schemas.microsoft.com/office/drawing/2014/main" id="{DA5B1843-7671-4D37-98B5-9EFED9AC6304}"/>
+                <a16:creationId xmlns:a16="http://schemas.microsoft.com/office/drawing/2014/main" id="{FC0DEA00-3203-414F-B84E-949096C46418}"/>
               </a:ext>
             </a:extLst>
           </p:cNvPr>
@@ -20391,7 +20391,7 @@
           <p:cNvPr id="204" name="">
             <a:extLst xmlns:a="http://schemas.openxmlformats.org/drawingml/2006/main">
               <a:ext uri="{FF2B5EF4-FFF2-40B4-BE49-F238E27FC236}">
-                <a16:creationId xmlns:a16="http://schemas.microsoft.com/office/drawing/2014/main" id="{72A6B266-9537-4215-8C19-F424E7665EFB}"/>
+                <a16:creationId xmlns:a16="http://schemas.microsoft.com/office/drawing/2014/main" id="{EA00545A-37F6-4806-A740-83E2EA6B150C}"/>
               </a:ext>
             </a:extLst>
           </p:cNvPr>
@@ -20424,7 +20424,7 @@
           <p:cNvPr id="205" name="">
             <a:extLst xmlns:a="http://schemas.openxmlformats.org/drawingml/2006/main">
               <a:ext uri="{FF2B5EF4-FFF2-40B4-BE49-F238E27FC236}">
-                <a16:creationId xmlns:a16="http://schemas.microsoft.com/office/drawing/2014/main" id="{AF5127C3-811C-4DC1-88BC-C5671DB1FD67}"/>
+                <a16:creationId xmlns:a16="http://schemas.microsoft.com/office/drawing/2014/main" id="{62DA44E2-3CC6-415B-8B1D-EDE05939D609}"/>
               </a:ext>
             </a:extLst>
           </p:cNvPr>
@@ -20457,7 +20457,7 @@
           <p:cNvPr id="206" name="">
             <a:extLst xmlns:a="http://schemas.openxmlformats.org/drawingml/2006/main">
               <a:ext uri="{FF2B5EF4-FFF2-40B4-BE49-F238E27FC236}">
-                <a16:creationId xmlns:a16="http://schemas.microsoft.com/office/drawing/2014/main" id="{631708C3-A813-4235-9502-35691FF10C4F}"/>
+                <a16:creationId xmlns:a16="http://schemas.microsoft.com/office/drawing/2014/main" id="{0AC3A14D-F174-4F04-B9F8-EA9583F7BEEC}"/>
               </a:ext>
             </a:extLst>
           </p:cNvPr>
@@ -20490,7 +20490,7 @@
           <p:cNvPr id="207" name="">
             <a:extLst xmlns:a="http://schemas.openxmlformats.org/drawingml/2006/main">
               <a:ext uri="{FF2B5EF4-FFF2-40B4-BE49-F238E27FC236}">
-                <a16:creationId xmlns:a16="http://schemas.microsoft.com/office/drawing/2014/main" id="{88467B2D-1010-414B-8D00-287C97CC7C25}"/>
+                <a16:creationId xmlns:a16="http://schemas.microsoft.com/office/drawing/2014/main" id="{3B37F1A4-BBDB-4BC6-8F94-EC4DBFC9E9F2}"/>
               </a:ext>
             </a:extLst>
           </p:cNvPr>
@@ -20523,7 +20523,7 @@
           <p:cNvPr id="208" name="">
             <a:extLst xmlns:a="http://schemas.openxmlformats.org/drawingml/2006/main">
               <a:ext uri="{FF2B5EF4-FFF2-40B4-BE49-F238E27FC236}">
-                <a16:creationId xmlns:a16="http://schemas.microsoft.com/office/drawing/2014/main" id="{EFB44848-9A84-457A-BC1B-139CF2227A2F}"/>
+                <a16:creationId xmlns:a16="http://schemas.microsoft.com/office/drawing/2014/main" id="{C467DFC9-8B16-4A0B-9BFB-9F4385F9A8FF}"/>
               </a:ext>
             </a:extLst>
           </p:cNvPr>
@@ -20556,7 +20556,7 @@
           <p:cNvPr id="209" name="">
             <a:extLst xmlns:a="http://schemas.openxmlformats.org/drawingml/2006/main">
               <a:ext uri="{FF2B5EF4-FFF2-40B4-BE49-F238E27FC236}">
-                <a16:creationId xmlns:a16="http://schemas.microsoft.com/office/drawing/2014/main" id="{4EFCDE62-0C10-4D50-AC73-EE955897FCE3}"/>
+                <a16:creationId xmlns:a16="http://schemas.microsoft.com/office/drawing/2014/main" id="{76AFC3DD-2FDB-4B26-BAB4-00D1DB1B5751}"/>
               </a:ext>
             </a:extLst>
           </p:cNvPr>
@@ -20589,7 +20589,7 @@
           <p:cNvPr id="210" name="">
             <a:extLst xmlns:a="http://schemas.openxmlformats.org/drawingml/2006/main">
               <a:ext uri="{FF2B5EF4-FFF2-40B4-BE49-F238E27FC236}">
-                <a16:creationId xmlns:a16="http://schemas.microsoft.com/office/drawing/2014/main" id="{18BD13E3-AF19-4850-BF96-E68245423047}"/>
+                <a16:creationId xmlns:a16="http://schemas.microsoft.com/office/drawing/2014/main" id="{107AAF44-1726-4FA6-ACA9-68AA0E271F5F}"/>
               </a:ext>
             </a:extLst>
           </p:cNvPr>
@@ -20622,7 +20622,7 @@
           <p:cNvPr id="211" name="">
             <a:extLst xmlns:a="http://schemas.openxmlformats.org/drawingml/2006/main">
               <a:ext uri="{FF2B5EF4-FFF2-40B4-BE49-F238E27FC236}">
-                <a16:creationId xmlns:a16="http://schemas.microsoft.com/office/drawing/2014/main" id="{7DE90D3B-AD87-4C94-BB6E-364A26D9EAD4}"/>
+                <a16:creationId xmlns:a16="http://schemas.microsoft.com/office/drawing/2014/main" id="{DB4EA20B-2AB1-43B3-84F4-630CF13C77DE}"/>
               </a:ext>
             </a:extLst>
           </p:cNvPr>
@@ -20655,7 +20655,7 @@
           <p:cNvPr id="212" name="">
             <a:extLst xmlns:a="http://schemas.openxmlformats.org/drawingml/2006/main">
               <a:ext uri="{FF2B5EF4-FFF2-40B4-BE49-F238E27FC236}">
-                <a16:creationId xmlns:a16="http://schemas.microsoft.com/office/drawing/2014/main" id="{9D7E77B6-8D90-448C-B511-24029B63C039}"/>
+                <a16:creationId xmlns:a16="http://schemas.microsoft.com/office/drawing/2014/main" id="{73D5FFE0-E570-4878-824C-A8F01E0153C3}"/>
               </a:ext>
             </a:extLst>
           </p:cNvPr>
@@ -20688,7 +20688,7 @@
           <p:cNvPr id="213" name="">
             <a:extLst xmlns:a="http://schemas.openxmlformats.org/drawingml/2006/main">
               <a:ext uri="{FF2B5EF4-FFF2-40B4-BE49-F238E27FC236}">
-                <a16:creationId xmlns:a16="http://schemas.microsoft.com/office/drawing/2014/main" id="{D865FF6F-8DDD-462D-8DB5-1F95C1D3DD20}"/>
+                <a16:creationId xmlns:a16="http://schemas.microsoft.com/office/drawing/2014/main" id="{F1227FC6-5F25-48B6-AC8D-7AD165160B6A}"/>
               </a:ext>
             </a:extLst>
           </p:cNvPr>
@@ -20721,7 +20721,7 @@
           <p:cNvPr id="214" name="">
             <a:extLst xmlns:a="http://schemas.openxmlformats.org/drawingml/2006/main">
               <a:ext uri="{FF2B5EF4-FFF2-40B4-BE49-F238E27FC236}">
-                <a16:creationId xmlns:a16="http://schemas.microsoft.com/office/drawing/2014/main" id="{6F8D70DA-75D9-48B3-B474-0AA6654A16DA}"/>
+                <a16:creationId xmlns:a16="http://schemas.microsoft.com/office/drawing/2014/main" id="{66151686-7661-4850-A4C0-E7ABEF2B199E}"/>
               </a:ext>
             </a:extLst>
           </p:cNvPr>
@@ -20754,7 +20754,7 @@
           <p:cNvPr id="215" name="">
             <a:extLst xmlns:a="http://schemas.openxmlformats.org/drawingml/2006/main">
               <a:ext uri="{FF2B5EF4-FFF2-40B4-BE49-F238E27FC236}">
-                <a16:creationId xmlns:a16="http://schemas.microsoft.com/office/drawing/2014/main" id="{BD4908F3-A83B-45E0-A068-9B66579F88B7}"/>
+                <a16:creationId xmlns:a16="http://schemas.microsoft.com/office/drawing/2014/main" id="{2D3C028C-A636-49A5-AEEC-DBD10BEB1274}"/>
               </a:ext>
             </a:extLst>
           </p:cNvPr>
@@ -20787,7 +20787,7 @@
           <p:cNvPr id="216" name="">
             <a:extLst xmlns:a="http://schemas.openxmlformats.org/drawingml/2006/main">
               <a:ext uri="{FF2B5EF4-FFF2-40B4-BE49-F238E27FC236}">
-                <a16:creationId xmlns:a16="http://schemas.microsoft.com/office/drawing/2014/main" id="{229CF5B8-AE85-40D3-A7AB-6236C4928B5B}"/>
+                <a16:creationId xmlns:a16="http://schemas.microsoft.com/office/drawing/2014/main" id="{B2B1C06A-75ED-4178-8087-12EA9737D402}"/>
               </a:ext>
             </a:extLst>
           </p:cNvPr>
@@ -20820,7 +20820,7 @@
           <p:cNvPr id="217" name="">
             <a:extLst xmlns:a="http://schemas.openxmlformats.org/drawingml/2006/main">
               <a:ext uri="{FF2B5EF4-FFF2-40B4-BE49-F238E27FC236}">
-                <a16:creationId xmlns:a16="http://schemas.microsoft.com/office/drawing/2014/main" id="{9897D85C-E7EB-4264-8003-90A82A66E262}"/>
+                <a16:creationId xmlns:a16="http://schemas.microsoft.com/office/drawing/2014/main" id="{2EBB2AEA-05B1-4E9B-A898-C90F77361067}"/>
               </a:ext>
             </a:extLst>
           </p:cNvPr>
@@ -20853,7 +20853,7 @@
           <p:cNvPr id="218" name="">
             <a:extLst xmlns:a="http://schemas.openxmlformats.org/drawingml/2006/main">
               <a:ext uri="{FF2B5EF4-FFF2-40B4-BE49-F238E27FC236}">
-                <a16:creationId xmlns:a16="http://schemas.microsoft.com/office/drawing/2014/main" id="{5B392013-6DE6-4454-AAB4-E822C5045C4D}"/>
+                <a16:creationId xmlns:a16="http://schemas.microsoft.com/office/drawing/2014/main" id="{96CBD079-91A5-40A1-A8DA-5D776E64CF9B}"/>
               </a:ext>
             </a:extLst>
           </p:cNvPr>
@@ -20886,7 +20886,7 @@
           <p:cNvPr id="219" name="">
             <a:extLst xmlns:a="http://schemas.openxmlformats.org/drawingml/2006/main">
               <a:ext uri="{FF2B5EF4-FFF2-40B4-BE49-F238E27FC236}">
-                <a16:creationId xmlns:a16="http://schemas.microsoft.com/office/drawing/2014/main" id="{DEABE820-AA29-400F-98A7-01F83D7AFCE6}"/>
+                <a16:creationId xmlns:a16="http://schemas.microsoft.com/office/drawing/2014/main" id="{865CC788-F27E-46BD-83D8-3262270F23D7}"/>
               </a:ext>
             </a:extLst>
           </p:cNvPr>
@@ -20919,7 +20919,7 @@
           <p:cNvPr id="220" name="">
             <a:extLst xmlns:a="http://schemas.openxmlformats.org/drawingml/2006/main">
               <a:ext uri="{FF2B5EF4-FFF2-40B4-BE49-F238E27FC236}">
-                <a16:creationId xmlns:a16="http://schemas.microsoft.com/office/drawing/2014/main" id="{B95DA19E-61E0-4C69-AD8C-6BA0AFF8E9FE}"/>
+                <a16:creationId xmlns:a16="http://schemas.microsoft.com/office/drawing/2014/main" id="{53EC8323-85A6-47D5-895E-0265593FE83F}"/>
               </a:ext>
             </a:extLst>
           </p:cNvPr>
@@ -20952,7 +20952,7 @@
           <p:cNvPr id="221" name="">
             <a:extLst xmlns:a="http://schemas.openxmlformats.org/drawingml/2006/main">
               <a:ext uri="{FF2B5EF4-FFF2-40B4-BE49-F238E27FC236}">
-                <a16:creationId xmlns:a16="http://schemas.microsoft.com/office/drawing/2014/main" id="{4C92A3E5-809A-4D99-B4A5-255F42C3F3D7}"/>
+                <a16:creationId xmlns:a16="http://schemas.microsoft.com/office/drawing/2014/main" id="{FDE25F9F-7819-4BF9-97BD-CCA7280E766B}"/>
               </a:ext>
             </a:extLst>
           </p:cNvPr>
@@ -20985,7 +20985,7 @@
           <p:cNvPr id="222" name="">
             <a:extLst xmlns:a="http://schemas.openxmlformats.org/drawingml/2006/main">
               <a:ext uri="{FF2B5EF4-FFF2-40B4-BE49-F238E27FC236}">
-                <a16:creationId xmlns:a16="http://schemas.microsoft.com/office/drawing/2014/main" id="{25B6B707-DEC6-4C7A-8850-089A4DCDAC5B}"/>
+                <a16:creationId xmlns:a16="http://schemas.microsoft.com/office/drawing/2014/main" id="{8F651180-52E3-4782-B1B3-D2F23D2F388F}"/>
               </a:ext>
             </a:extLst>
           </p:cNvPr>
@@ -21018,7 +21018,7 @@
           <p:cNvPr id="223" name="">
             <a:extLst xmlns:a="http://schemas.openxmlformats.org/drawingml/2006/main">
               <a:ext uri="{FF2B5EF4-FFF2-40B4-BE49-F238E27FC236}">
-                <a16:creationId xmlns:a16="http://schemas.microsoft.com/office/drawing/2014/main" id="{427DD803-1F8D-420F-846C-7FA716358A1A}"/>
+                <a16:creationId xmlns:a16="http://schemas.microsoft.com/office/drawing/2014/main" id="{28437B80-9CAB-4376-8F3B-3DDA9195F86E}"/>
               </a:ext>
             </a:extLst>
           </p:cNvPr>
@@ -21051,7 +21051,7 @@
           <p:cNvPr id="224" name="">
             <a:extLst xmlns:a="http://schemas.openxmlformats.org/drawingml/2006/main">
               <a:ext uri="{FF2B5EF4-FFF2-40B4-BE49-F238E27FC236}">
-                <a16:creationId xmlns:a16="http://schemas.microsoft.com/office/drawing/2014/main" id="{1756102A-4CEF-445D-B2AD-CA45A49B39A2}"/>
+                <a16:creationId xmlns:a16="http://schemas.microsoft.com/office/drawing/2014/main" id="{A7CC2F07-4FFF-4A3C-A844-33E2605C9AB1}"/>
               </a:ext>
             </a:extLst>
           </p:cNvPr>
@@ -21084,7 +21084,7 @@
           <p:cNvPr id="225" name="">
             <a:extLst xmlns:a="http://schemas.openxmlformats.org/drawingml/2006/main">
               <a:ext uri="{FF2B5EF4-FFF2-40B4-BE49-F238E27FC236}">
-                <a16:creationId xmlns:a16="http://schemas.microsoft.com/office/drawing/2014/main" id="{E9472113-8F87-4069-B043-57A83DA92BAE}"/>
+                <a16:creationId xmlns:a16="http://schemas.microsoft.com/office/drawing/2014/main" id="{995494CC-A368-495F-96D9-D13BFA62F3C7}"/>
               </a:ext>
             </a:extLst>
           </p:cNvPr>
@@ -21117,7 +21117,7 @@
           <p:cNvPr id="226" name="">
             <a:extLst xmlns:a="http://schemas.openxmlformats.org/drawingml/2006/main">
               <a:ext uri="{FF2B5EF4-FFF2-40B4-BE49-F238E27FC236}">
-                <a16:creationId xmlns:a16="http://schemas.microsoft.com/office/drawing/2014/main" id="{AAEDA236-E56F-4F23-AD5E-F06731663BEC}"/>
+                <a16:creationId xmlns:a16="http://schemas.microsoft.com/office/drawing/2014/main" id="{4B035448-A973-4011-B952-031F71063AEC}"/>
               </a:ext>
             </a:extLst>
           </p:cNvPr>
@@ -21150,7 +21150,7 @@
           <p:cNvPr id="227" name="">
             <a:extLst xmlns:a="http://schemas.openxmlformats.org/drawingml/2006/main">
               <a:ext uri="{FF2B5EF4-FFF2-40B4-BE49-F238E27FC236}">
-                <a16:creationId xmlns:a16="http://schemas.microsoft.com/office/drawing/2014/main" id="{48144540-AA6D-4F21-AB14-09C6E4A03D04}"/>
+                <a16:creationId xmlns:a16="http://schemas.microsoft.com/office/drawing/2014/main" id="{150DC27D-8AF5-48F1-8B74-729A346935F0}"/>
               </a:ext>
             </a:extLst>
           </p:cNvPr>
@@ -21183,7 +21183,7 @@
           <p:cNvPr id="228" name="">
             <a:extLst xmlns:a="http://schemas.openxmlformats.org/drawingml/2006/main">
               <a:ext uri="{FF2B5EF4-FFF2-40B4-BE49-F238E27FC236}">
-                <a16:creationId xmlns:a16="http://schemas.microsoft.com/office/drawing/2014/main" id="{BE6E9C8C-040B-498D-9EE1-DDD094A8BD6F}"/>
+                <a16:creationId xmlns:a16="http://schemas.microsoft.com/office/drawing/2014/main" id="{F27582C3-AC58-4576-885E-36EE3AF410F8}"/>
               </a:ext>
             </a:extLst>
           </p:cNvPr>
@@ -21216,7 +21216,7 @@
           <p:cNvPr id="229" name="">
             <a:extLst xmlns:a="http://schemas.openxmlformats.org/drawingml/2006/main">
               <a:ext uri="{FF2B5EF4-FFF2-40B4-BE49-F238E27FC236}">
-                <a16:creationId xmlns:a16="http://schemas.microsoft.com/office/drawing/2014/main" id="{BEDF8C80-6471-4D9C-9CEE-DFECD7C7ECC9}"/>
+                <a16:creationId xmlns:a16="http://schemas.microsoft.com/office/drawing/2014/main" id="{39D89494-3D5B-4534-8562-07A9A014C101}"/>
               </a:ext>
             </a:extLst>
           </p:cNvPr>
@@ -21249,7 +21249,7 @@
           <p:cNvPr id="230" name="">
             <a:extLst xmlns:a="http://schemas.openxmlformats.org/drawingml/2006/main">
               <a:ext uri="{FF2B5EF4-FFF2-40B4-BE49-F238E27FC236}">
-                <a16:creationId xmlns:a16="http://schemas.microsoft.com/office/drawing/2014/main" id="{14CF1B67-EC8D-4226-882E-A9B5B92BBE52}"/>
+                <a16:creationId xmlns:a16="http://schemas.microsoft.com/office/drawing/2014/main" id="{70417EEA-C02A-4E56-B51A-B04ECAC5950A}"/>
               </a:ext>
             </a:extLst>
           </p:cNvPr>
@@ -21282,7 +21282,7 @@
           <p:cNvPr id="231" name="">
             <a:extLst xmlns:a="http://schemas.openxmlformats.org/drawingml/2006/main">
               <a:ext uri="{FF2B5EF4-FFF2-40B4-BE49-F238E27FC236}">
-                <a16:creationId xmlns:a16="http://schemas.microsoft.com/office/drawing/2014/main" id="{58C0BF80-99F8-4EC1-A08F-9602F2F42AE1}"/>
+                <a16:creationId xmlns:a16="http://schemas.microsoft.com/office/drawing/2014/main" id="{691A44C8-E619-4483-ADAA-6229CE591432}"/>
               </a:ext>
             </a:extLst>
           </p:cNvPr>
@@ -21315,7 +21315,7 @@
           <p:cNvPr id="232" name="">
             <a:extLst xmlns:a="http://schemas.openxmlformats.org/drawingml/2006/main">
               <a:ext uri="{FF2B5EF4-FFF2-40B4-BE49-F238E27FC236}">
-                <a16:creationId xmlns:a16="http://schemas.microsoft.com/office/drawing/2014/main" id="{26F98D53-0963-4C2F-8E4A-DE8C6906C1C0}"/>
+                <a16:creationId xmlns:a16="http://schemas.microsoft.com/office/drawing/2014/main" id="{922EE936-2591-4EAE-AC00-5431B50AB4D1}"/>
               </a:ext>
             </a:extLst>
           </p:cNvPr>
@@ -21348,7 +21348,7 @@
           <p:cNvPr id="233" name="">
             <a:extLst xmlns:a="http://schemas.openxmlformats.org/drawingml/2006/main">
               <a:ext uri="{FF2B5EF4-FFF2-40B4-BE49-F238E27FC236}">
-                <a16:creationId xmlns:a16="http://schemas.microsoft.com/office/drawing/2014/main" id="{6C5F1629-9BC4-4679-B968-3851E49AB591}"/>
+                <a16:creationId xmlns:a16="http://schemas.microsoft.com/office/drawing/2014/main" id="{241ED04A-3ECE-49ED-AD3F-1DF5DFE86295}"/>
               </a:ext>
             </a:extLst>
           </p:cNvPr>
@@ -21381,7 +21381,7 @@
           <p:cNvPr id="234" name="">
             <a:extLst xmlns:a="http://schemas.openxmlformats.org/drawingml/2006/main">
               <a:ext uri="{FF2B5EF4-FFF2-40B4-BE49-F238E27FC236}">
-                <a16:creationId xmlns:a16="http://schemas.microsoft.com/office/drawing/2014/main" id="{14F3E435-1403-43A5-A02C-E9FD30CA005F}"/>
+                <a16:creationId xmlns:a16="http://schemas.microsoft.com/office/drawing/2014/main" id="{F1BA5219-2B28-4F12-8896-BEBBE03AF7EE}"/>
               </a:ext>
             </a:extLst>
           </p:cNvPr>
@@ -21414,7 +21414,7 @@
           <p:cNvPr id="235" name="">
             <a:extLst xmlns:a="http://schemas.openxmlformats.org/drawingml/2006/main">
               <a:ext uri="{FF2B5EF4-FFF2-40B4-BE49-F238E27FC236}">
-                <a16:creationId xmlns:a16="http://schemas.microsoft.com/office/drawing/2014/main" id="{6C00E579-7ABB-44DB-8F34-86E5A311964C}"/>
+                <a16:creationId xmlns:a16="http://schemas.microsoft.com/office/drawing/2014/main" id="{71D705DD-144C-4F80-9653-E4C2F92BB5F4}"/>
               </a:ext>
             </a:extLst>
           </p:cNvPr>
@@ -21447,7 +21447,7 @@
           <p:cNvPr id="236" name="">
             <a:extLst xmlns:a="http://schemas.openxmlformats.org/drawingml/2006/main">
               <a:ext uri="{FF2B5EF4-FFF2-40B4-BE49-F238E27FC236}">
-                <a16:creationId xmlns:a16="http://schemas.microsoft.com/office/drawing/2014/main" id="{0FD21425-9462-4B7D-8ED8-0D805F4C713E}"/>
+                <a16:creationId xmlns:a16="http://schemas.microsoft.com/office/drawing/2014/main" id="{C19B8CD3-FF40-4CCC-80A9-8A172AB90D4C}"/>
               </a:ext>
             </a:extLst>
           </p:cNvPr>
@@ -21480,7 +21480,7 @@
           <p:cNvPr id="237" name="">
             <a:extLst xmlns:a="http://schemas.openxmlformats.org/drawingml/2006/main">
               <a:ext uri="{FF2B5EF4-FFF2-40B4-BE49-F238E27FC236}">
-                <a16:creationId xmlns:a16="http://schemas.microsoft.com/office/drawing/2014/main" id="{73F1522A-2FD0-4917-8953-2BD76E50523F}"/>
+                <a16:creationId xmlns:a16="http://schemas.microsoft.com/office/drawing/2014/main" id="{976B4871-AF72-4956-A1B9-D41171C1AAB2}"/>
               </a:ext>
             </a:extLst>
           </p:cNvPr>
@@ -21513,7 +21513,7 @@
           <p:cNvPr id="238" name="">
             <a:extLst xmlns:a="http://schemas.openxmlformats.org/drawingml/2006/main">
               <a:ext uri="{FF2B5EF4-FFF2-40B4-BE49-F238E27FC236}">
-                <a16:creationId xmlns:a16="http://schemas.microsoft.com/office/drawing/2014/main" id="{DA3EDC32-D25A-4E22-A877-3E2D7131D50D}"/>
+                <a16:creationId xmlns:a16="http://schemas.microsoft.com/office/drawing/2014/main" id="{85EBEABE-D5EE-435E-B097-9BB6ADE8B6BA}"/>
               </a:ext>
             </a:extLst>
           </p:cNvPr>
@@ -21546,7 +21546,7 @@
           <p:cNvPr id="239" name="">
             <a:extLst xmlns:a="http://schemas.openxmlformats.org/drawingml/2006/main">
               <a:ext uri="{FF2B5EF4-FFF2-40B4-BE49-F238E27FC236}">
-                <a16:creationId xmlns:a16="http://schemas.microsoft.com/office/drawing/2014/main" id="{60CB5423-8BF0-4475-BB79-4DAD8FC05C1E}"/>
+                <a16:creationId xmlns:a16="http://schemas.microsoft.com/office/drawing/2014/main" id="{2B171102-93D2-4441-951C-59AD73E7B2BA}"/>
               </a:ext>
             </a:extLst>
           </p:cNvPr>
@@ -21579,7 +21579,7 @@
           <p:cNvPr id="240" name="">
             <a:extLst xmlns:a="http://schemas.openxmlformats.org/drawingml/2006/main">
               <a:ext uri="{FF2B5EF4-FFF2-40B4-BE49-F238E27FC236}">
-                <a16:creationId xmlns:a16="http://schemas.microsoft.com/office/drawing/2014/main" id="{EDAA5566-4B1E-4E49-AEB4-CCF66818BCD1}"/>
+                <a16:creationId xmlns:a16="http://schemas.microsoft.com/office/drawing/2014/main" id="{84111305-8527-4DAF-88DC-97CB87E65407}"/>
               </a:ext>
             </a:extLst>
           </p:cNvPr>
@@ -21612,7 +21612,7 @@
           <p:cNvPr id="241" name="">
             <a:extLst xmlns:a="http://schemas.openxmlformats.org/drawingml/2006/main">
               <a:ext uri="{FF2B5EF4-FFF2-40B4-BE49-F238E27FC236}">
-                <a16:creationId xmlns:a16="http://schemas.microsoft.com/office/drawing/2014/main" id="{7E227BB3-B19E-4870-9162-4B73E5FBC3CC}"/>
+                <a16:creationId xmlns:a16="http://schemas.microsoft.com/office/drawing/2014/main" id="{F69E3641-7A89-461C-B783-76C0081D6B22}"/>
               </a:ext>
             </a:extLst>
           </p:cNvPr>
@@ -21645,7 +21645,7 @@
           <p:cNvPr id="242" name="">
             <a:extLst xmlns:a="http://schemas.openxmlformats.org/drawingml/2006/main">
               <a:ext uri="{FF2B5EF4-FFF2-40B4-BE49-F238E27FC236}">
-                <a16:creationId xmlns:a16="http://schemas.microsoft.com/office/drawing/2014/main" id="{8699B788-C6C2-4D94-A588-BAE3A26ACC17}"/>
+                <a16:creationId xmlns:a16="http://schemas.microsoft.com/office/drawing/2014/main" id="{5D5B39DF-2550-407C-877C-789882DE3EEE}"/>
               </a:ext>
             </a:extLst>
           </p:cNvPr>
@@ -21678,7 +21678,7 @@
           <p:cNvPr id="243" name="">
             <a:extLst xmlns:a="http://schemas.openxmlformats.org/drawingml/2006/main">
               <a:ext uri="{FF2B5EF4-FFF2-40B4-BE49-F238E27FC236}">
-                <a16:creationId xmlns:a16="http://schemas.microsoft.com/office/drawing/2014/main" id="{18EF8F66-CEDB-4F82-AE96-529E0F21F61D}"/>
+                <a16:creationId xmlns:a16="http://schemas.microsoft.com/office/drawing/2014/main" id="{0090E8E4-31E3-4777-8E18-4E6A8EAF9675}"/>
               </a:ext>
             </a:extLst>
           </p:cNvPr>
@@ -21711,7 +21711,7 @@
           <p:cNvPr id="244" name="">
             <a:extLst xmlns:a="http://schemas.openxmlformats.org/drawingml/2006/main">
               <a:ext uri="{FF2B5EF4-FFF2-40B4-BE49-F238E27FC236}">
-                <a16:creationId xmlns:a16="http://schemas.microsoft.com/office/drawing/2014/main" id="{50D5ABDF-6774-4ED8-BFD5-16D01B1BF92B}"/>
+                <a16:creationId xmlns:a16="http://schemas.microsoft.com/office/drawing/2014/main" id="{1D2F30DD-66E6-48A8-97DD-5645098CC9D4}"/>
               </a:ext>
             </a:extLst>
           </p:cNvPr>
@@ -21744,7 +21744,7 @@
           <p:cNvPr id="245" name="">
             <a:extLst xmlns:a="http://schemas.openxmlformats.org/drawingml/2006/main">
               <a:ext uri="{FF2B5EF4-FFF2-40B4-BE49-F238E27FC236}">
-                <a16:creationId xmlns:a16="http://schemas.microsoft.com/office/drawing/2014/main" id="{CA3B231F-C5C9-425F-AF9D-4F451808D94A}"/>
+                <a16:creationId xmlns:a16="http://schemas.microsoft.com/office/drawing/2014/main" id="{55855E13-C619-43E5-96CD-6F187E535317}"/>
               </a:ext>
             </a:extLst>
           </p:cNvPr>
@@ -21777,7 +21777,7 @@
           <p:cNvPr id="246" name="">
             <a:extLst xmlns:a="http://schemas.openxmlformats.org/drawingml/2006/main">
               <a:ext uri="{FF2B5EF4-FFF2-40B4-BE49-F238E27FC236}">
-                <a16:creationId xmlns:a16="http://schemas.microsoft.com/office/drawing/2014/main" id="{CD80E074-953C-493E-9282-F6A908A389F0}"/>
+                <a16:creationId xmlns:a16="http://schemas.microsoft.com/office/drawing/2014/main" id="{6E8A8C7B-0237-4F36-9696-B39EFC6EAF3B}"/>
               </a:ext>
             </a:extLst>
           </p:cNvPr>
@@ -21810,7 +21810,7 @@
           <p:cNvPr id="247" name="">
             <a:extLst xmlns:a="http://schemas.openxmlformats.org/drawingml/2006/main">
               <a:ext uri="{FF2B5EF4-FFF2-40B4-BE49-F238E27FC236}">
-                <a16:creationId xmlns:a16="http://schemas.microsoft.com/office/drawing/2014/main" id="{4E3315EF-819B-43EB-8A02-1CFF19EFBBC8}"/>
+                <a16:creationId xmlns:a16="http://schemas.microsoft.com/office/drawing/2014/main" id="{93F8C4DC-6641-4B14-8389-B02834D79A87}"/>
               </a:ext>
             </a:extLst>
           </p:cNvPr>
@@ -21843,7 +21843,7 @@
           <p:cNvPr id="248" name="">
             <a:extLst xmlns:a="http://schemas.openxmlformats.org/drawingml/2006/main">
               <a:ext uri="{FF2B5EF4-FFF2-40B4-BE49-F238E27FC236}">
-                <a16:creationId xmlns:a16="http://schemas.microsoft.com/office/drawing/2014/main" id="{B8D43D8A-CFD4-46F4-92F7-270F16363B7C}"/>
+                <a16:creationId xmlns:a16="http://schemas.microsoft.com/office/drawing/2014/main" id="{4EC72F43-19CA-4D72-844B-7F8434D79CF7}"/>
               </a:ext>
             </a:extLst>
           </p:cNvPr>
@@ -21876,7 +21876,7 @@
           <p:cNvPr id="249" name="">
             <a:extLst xmlns:a="http://schemas.openxmlformats.org/drawingml/2006/main">
               <a:ext uri="{FF2B5EF4-FFF2-40B4-BE49-F238E27FC236}">
-                <a16:creationId xmlns:a16="http://schemas.microsoft.com/office/drawing/2014/main" id="{14AD7382-86B4-47C0-BBAF-FDE12B7E5F07}"/>
+                <a16:creationId xmlns:a16="http://schemas.microsoft.com/office/drawing/2014/main" id="{01B91F8E-E9E9-4F99-BA81-AF52E32DA034}"/>
               </a:ext>
             </a:extLst>
           </p:cNvPr>
@@ -21909,7 +21909,7 @@
           <p:cNvPr id="250" name="">
             <a:extLst xmlns:a="http://schemas.openxmlformats.org/drawingml/2006/main">
               <a:ext uri="{FF2B5EF4-FFF2-40B4-BE49-F238E27FC236}">
-                <a16:creationId xmlns:a16="http://schemas.microsoft.com/office/drawing/2014/main" id="{8E9AB3AA-6EC5-432D-99E2-73ADEEF603AE}"/>
+                <a16:creationId xmlns:a16="http://schemas.microsoft.com/office/drawing/2014/main" id="{D25DFC64-1401-4030-8E0F-9EC1B7513B5F}"/>
               </a:ext>
             </a:extLst>
           </p:cNvPr>
@@ -21942,7 +21942,7 @@
           <p:cNvPr id="251" name="">
             <a:extLst xmlns:a="http://schemas.openxmlformats.org/drawingml/2006/main">
               <a:ext uri="{FF2B5EF4-FFF2-40B4-BE49-F238E27FC236}">
-                <a16:creationId xmlns:a16="http://schemas.microsoft.com/office/drawing/2014/main" id="{299E4FB2-8E21-450F-8A6E-48741CA18785}"/>
+                <a16:creationId xmlns:a16="http://schemas.microsoft.com/office/drawing/2014/main" id="{E884AD46-455F-4B23-BBCE-FAC613248DAE}"/>
               </a:ext>
             </a:extLst>
           </p:cNvPr>
@@ -21975,7 +21975,7 @@
           <p:cNvPr id="252" name="">
             <a:extLst xmlns:a="http://schemas.openxmlformats.org/drawingml/2006/main">
               <a:ext uri="{FF2B5EF4-FFF2-40B4-BE49-F238E27FC236}">
-                <a16:creationId xmlns:a16="http://schemas.microsoft.com/office/drawing/2014/main" id="{0B6AC15E-72CA-4E85-B3B6-A4B762D89A4F}"/>
+                <a16:creationId xmlns:a16="http://schemas.microsoft.com/office/drawing/2014/main" id="{1CDD52D2-8D20-4CC4-BC97-93E0F12F62CA}"/>
               </a:ext>
             </a:extLst>
           </p:cNvPr>
@@ -22008,7 +22008,7 @@
           <p:cNvPr id="253" name="">
             <a:extLst xmlns:a="http://schemas.openxmlformats.org/drawingml/2006/main">
               <a:ext uri="{FF2B5EF4-FFF2-40B4-BE49-F238E27FC236}">
-                <a16:creationId xmlns:a16="http://schemas.microsoft.com/office/drawing/2014/main" id="{0210FFFA-4821-4332-B51F-38C59A34BBA8}"/>
+                <a16:creationId xmlns:a16="http://schemas.microsoft.com/office/drawing/2014/main" id="{221373E7-783A-42F5-A6F6-9D9747DADFC6}"/>
               </a:ext>
             </a:extLst>
           </p:cNvPr>
@@ -22041,7 +22041,7 @@
           <p:cNvPr id="254" name="">
             <a:extLst xmlns:a="http://schemas.openxmlformats.org/drawingml/2006/main">
               <a:ext uri="{FF2B5EF4-FFF2-40B4-BE49-F238E27FC236}">
-                <a16:creationId xmlns:a16="http://schemas.microsoft.com/office/drawing/2014/main" id="{E328C89A-7EAB-4C1E-85DA-712E52F9ABBA}"/>
+                <a16:creationId xmlns:a16="http://schemas.microsoft.com/office/drawing/2014/main" id="{502DD8B4-D7B8-460D-8A23-8526E88A7E05}"/>
               </a:ext>
             </a:extLst>
           </p:cNvPr>
@@ -22074,7 +22074,7 @@
           <p:cNvPr id="255" name="">
             <a:extLst xmlns:a="http://schemas.openxmlformats.org/drawingml/2006/main">
               <a:ext uri="{FF2B5EF4-FFF2-40B4-BE49-F238E27FC236}">
-                <a16:creationId xmlns:a16="http://schemas.microsoft.com/office/drawing/2014/main" id="{F21643FD-FF38-4FB5-ABD8-64180271512C}"/>
+                <a16:creationId xmlns:a16="http://schemas.microsoft.com/office/drawing/2014/main" id="{4D8938E7-AFCF-466E-8558-8D94781A1574}"/>
               </a:ext>
             </a:extLst>
           </p:cNvPr>
@@ -22107,7 +22107,7 @@
           <p:cNvPr id="256" name="">
             <a:extLst xmlns:a="http://schemas.openxmlformats.org/drawingml/2006/main">
               <a:ext uri="{FF2B5EF4-FFF2-40B4-BE49-F238E27FC236}">
-                <a16:creationId xmlns:a16="http://schemas.microsoft.com/office/drawing/2014/main" id="{97DAD4DD-81A0-4D1E-96CD-CAEFF68CF45B}"/>
+                <a16:creationId xmlns:a16="http://schemas.microsoft.com/office/drawing/2014/main" id="{F80665F3-39E5-4287-92ED-6072DBD8C0E4}"/>
               </a:ext>
             </a:extLst>
           </p:cNvPr>
@@ -22140,7 +22140,7 @@
           <p:cNvPr id="257" name="">
             <a:extLst xmlns:a="http://schemas.openxmlformats.org/drawingml/2006/main">
               <a:ext uri="{FF2B5EF4-FFF2-40B4-BE49-F238E27FC236}">
-                <a16:creationId xmlns:a16="http://schemas.microsoft.com/office/drawing/2014/main" id="{167AE0A4-BA1E-4BB3-81B9-DB7BBF253530}"/>
+                <a16:creationId xmlns:a16="http://schemas.microsoft.com/office/drawing/2014/main" id="{0010BBB0-5B7B-4F35-90E5-FFE465F45D5F}"/>
               </a:ext>
             </a:extLst>
           </p:cNvPr>
@@ -22173,7 +22173,7 @@
           <p:cNvPr id="258" name="">
             <a:extLst xmlns:a="http://schemas.openxmlformats.org/drawingml/2006/main">
               <a:ext uri="{FF2B5EF4-FFF2-40B4-BE49-F238E27FC236}">
-                <a16:creationId xmlns:a16="http://schemas.microsoft.com/office/drawing/2014/main" id="{FC48D077-CB8C-4DAC-BE3C-C378AE2371E6}"/>
+                <a16:creationId xmlns:a16="http://schemas.microsoft.com/office/drawing/2014/main" id="{DC39C226-0AED-47F6-BD2A-6C52E47468C3}"/>
               </a:ext>
             </a:extLst>
           </p:cNvPr>
@@ -22206,7 +22206,7 @@
           <p:cNvPr id="259" name="">
             <a:extLst xmlns:a="http://schemas.openxmlformats.org/drawingml/2006/main">
               <a:ext uri="{FF2B5EF4-FFF2-40B4-BE49-F238E27FC236}">
-                <a16:creationId xmlns:a16="http://schemas.microsoft.com/office/drawing/2014/main" id="{F95AF42D-7EFE-46BA-9871-2BC473B1DDC8}"/>
+                <a16:creationId xmlns:a16="http://schemas.microsoft.com/office/drawing/2014/main" id="{83CC9709-25CA-4253-8CD0-DFF725A91532}"/>
               </a:ext>
             </a:extLst>
           </p:cNvPr>
@@ -22239,7 +22239,7 @@
           <p:cNvPr id="260" name="">
             <a:extLst xmlns:a="http://schemas.openxmlformats.org/drawingml/2006/main">
               <a:ext uri="{FF2B5EF4-FFF2-40B4-BE49-F238E27FC236}">
-                <a16:creationId xmlns:a16="http://schemas.microsoft.com/office/drawing/2014/main" id="{673068B9-A448-4174-84F1-5EB6EB88ABA6}"/>
+                <a16:creationId xmlns:a16="http://schemas.microsoft.com/office/drawing/2014/main" id="{AB051F47-E40B-4395-8B59-27492891D347}"/>
               </a:ext>
             </a:extLst>
           </p:cNvPr>
@@ -22272,7 +22272,7 @@
           <p:cNvPr id="261" name="">
             <a:extLst xmlns:a="http://schemas.openxmlformats.org/drawingml/2006/main">
               <a:ext uri="{FF2B5EF4-FFF2-40B4-BE49-F238E27FC236}">
-                <a16:creationId xmlns:a16="http://schemas.microsoft.com/office/drawing/2014/main" id="{04F91D1E-D195-429B-8BE8-BCC10EB17859}"/>
+                <a16:creationId xmlns:a16="http://schemas.microsoft.com/office/drawing/2014/main" id="{5694B08C-93E5-4D6C-A156-B9FE9F7F038E}"/>
               </a:ext>
             </a:extLst>
           </p:cNvPr>
@@ -22305,7 +22305,7 @@
           <p:cNvPr id="262" name="">
             <a:extLst xmlns:a="http://schemas.openxmlformats.org/drawingml/2006/main">
               <a:ext uri="{FF2B5EF4-FFF2-40B4-BE49-F238E27FC236}">
-                <a16:creationId xmlns:a16="http://schemas.microsoft.com/office/drawing/2014/main" id="{A556E3C7-4DE5-4ACF-AD9E-6011E0B1808A}"/>
+                <a16:creationId xmlns:a16="http://schemas.microsoft.com/office/drawing/2014/main" id="{24F404D1-FF5B-4977-9D81-DD64F762EA73}"/>
               </a:ext>
             </a:extLst>
           </p:cNvPr>
@@ -22338,7 +22338,7 @@
           <p:cNvPr id="263" name="">
             <a:extLst xmlns:a="http://schemas.openxmlformats.org/drawingml/2006/main">
               <a:ext uri="{FF2B5EF4-FFF2-40B4-BE49-F238E27FC236}">
-                <a16:creationId xmlns:a16="http://schemas.microsoft.com/office/drawing/2014/main" id="{FBAD0D5C-6698-494F-A243-EEBA54036477}"/>
+                <a16:creationId xmlns:a16="http://schemas.microsoft.com/office/drawing/2014/main" id="{7C3D2C13-A0DD-481A-8F3C-CED0A6171485}"/>
               </a:ext>
             </a:extLst>
           </p:cNvPr>
@@ -22371,7 +22371,7 @@
           <p:cNvPr id="264" name="">
             <a:extLst xmlns:a="http://schemas.openxmlformats.org/drawingml/2006/main">
               <a:ext uri="{FF2B5EF4-FFF2-40B4-BE49-F238E27FC236}">
-                <a16:creationId xmlns:a16="http://schemas.microsoft.com/office/drawing/2014/main" id="{83F7406D-3B61-415D-95CA-2601136CB506}"/>
+                <a16:creationId xmlns:a16="http://schemas.microsoft.com/office/drawing/2014/main" id="{A077E0FE-BE2F-4EC2-ABA7-6F84793F3CB6}"/>
               </a:ext>
             </a:extLst>
           </p:cNvPr>
@@ -22404,7 +22404,7 @@
           <p:cNvPr id="265" name="">
             <a:extLst xmlns:a="http://schemas.openxmlformats.org/drawingml/2006/main">
               <a:ext uri="{FF2B5EF4-FFF2-40B4-BE49-F238E27FC236}">
-                <a16:creationId xmlns:a16="http://schemas.microsoft.com/office/drawing/2014/main" id="{E51418DE-1987-4B37-BAF2-74C888D33679}"/>
+                <a16:creationId xmlns:a16="http://schemas.microsoft.com/office/drawing/2014/main" id="{1E7C0CB5-5E33-4F55-B8DD-C6CA2229A1EF}"/>
               </a:ext>
             </a:extLst>
           </p:cNvPr>
@@ -22437,7 +22437,7 @@
           <p:cNvPr id="266" name="">
             <a:extLst xmlns:a="http://schemas.openxmlformats.org/drawingml/2006/main">
               <a:ext uri="{FF2B5EF4-FFF2-40B4-BE49-F238E27FC236}">
-                <a16:creationId xmlns:a16="http://schemas.microsoft.com/office/drawing/2014/main" id="{D7CE1317-8BC4-45EB-86EF-AFB1931ACB64}"/>
+                <a16:creationId xmlns:a16="http://schemas.microsoft.com/office/drawing/2014/main" id="{785D9FF5-C5E5-4D43-A2E3-45939BB5C695}"/>
               </a:ext>
             </a:extLst>
           </p:cNvPr>
@@ -22470,7 +22470,7 @@
           <p:cNvPr id="267" name="">
             <a:extLst xmlns:a="http://schemas.openxmlformats.org/drawingml/2006/main">
               <a:ext uri="{FF2B5EF4-FFF2-40B4-BE49-F238E27FC236}">
-                <a16:creationId xmlns:a16="http://schemas.microsoft.com/office/drawing/2014/main" id="{D5D56701-4486-40BE-BEB9-1BD4CA816D13}"/>
+                <a16:creationId xmlns:a16="http://schemas.microsoft.com/office/drawing/2014/main" id="{BECF4957-DC04-4717-8116-4D38464815DB}"/>
               </a:ext>
             </a:extLst>
           </p:cNvPr>
@@ -22503,7 +22503,7 @@
           <p:cNvPr id="268" name="">
             <a:extLst xmlns:a="http://schemas.openxmlformats.org/drawingml/2006/main">
               <a:ext uri="{FF2B5EF4-FFF2-40B4-BE49-F238E27FC236}">
-                <a16:creationId xmlns:a16="http://schemas.microsoft.com/office/drawing/2014/main" id="{FECC605B-59FE-4795-9CDF-B9591D6000E6}"/>
+                <a16:creationId xmlns:a16="http://schemas.microsoft.com/office/drawing/2014/main" id="{A30C4AF0-2A2F-4151-A7B8-557E8AFF93A3}"/>
               </a:ext>
             </a:extLst>
           </p:cNvPr>
@@ -22536,7 +22536,7 @@
           <p:cNvPr id="269" name="">
             <a:extLst xmlns:a="http://schemas.openxmlformats.org/drawingml/2006/main">
               <a:ext uri="{FF2B5EF4-FFF2-40B4-BE49-F238E27FC236}">
-                <a16:creationId xmlns:a16="http://schemas.microsoft.com/office/drawing/2014/main" id="{5482DEFE-D6FF-4375-8301-58263C649C8E}"/>
+                <a16:creationId xmlns:a16="http://schemas.microsoft.com/office/drawing/2014/main" id="{D63E9E40-C669-489C-B484-0BCEE848E34C}"/>
               </a:ext>
             </a:extLst>
           </p:cNvPr>
@@ -22569,7 +22569,7 @@
           <p:cNvPr id="270" name="">
             <a:extLst xmlns:a="http://schemas.openxmlformats.org/drawingml/2006/main">
               <a:ext uri="{FF2B5EF4-FFF2-40B4-BE49-F238E27FC236}">
-                <a16:creationId xmlns:a16="http://schemas.microsoft.com/office/drawing/2014/main" id="{F5C33B2F-04EE-47DE-9CE0-07D439D17B1B}"/>
+                <a16:creationId xmlns:a16="http://schemas.microsoft.com/office/drawing/2014/main" id="{C76703BC-39F6-4125-B0C3-F280D94A9DF2}"/>
               </a:ext>
             </a:extLst>
           </p:cNvPr>
@@ -22602,7 +22602,7 @@
           <p:cNvPr id="271" name="">
             <a:extLst xmlns:a="http://schemas.openxmlformats.org/drawingml/2006/main">
               <a:ext uri="{FF2B5EF4-FFF2-40B4-BE49-F238E27FC236}">
-                <a16:creationId xmlns:a16="http://schemas.microsoft.com/office/drawing/2014/main" id="{F9BCB22A-1040-402D-B0F1-C599BC8C0672}"/>
+                <a16:creationId xmlns:a16="http://schemas.microsoft.com/office/drawing/2014/main" id="{4119CC61-E912-4855-AFE1-05725A746929}"/>
               </a:ext>
             </a:extLst>
           </p:cNvPr>
@@ -22635,7 +22635,7 @@
           <p:cNvPr id="272" name="">
             <a:extLst xmlns:a="http://schemas.openxmlformats.org/drawingml/2006/main">
               <a:ext uri="{FF2B5EF4-FFF2-40B4-BE49-F238E27FC236}">
-                <a16:creationId xmlns:a16="http://schemas.microsoft.com/office/drawing/2014/main" id="{9C0E8C7B-52F6-489C-8884-4178D07FFF07}"/>
+                <a16:creationId xmlns:a16="http://schemas.microsoft.com/office/drawing/2014/main" id="{C2B94297-E55E-4484-B668-238469A28ECD}"/>
               </a:ext>
             </a:extLst>
           </p:cNvPr>
@@ -22668,7 +22668,7 @@
           <p:cNvPr id="273" name="">
             <a:extLst xmlns:a="http://schemas.openxmlformats.org/drawingml/2006/main">
               <a:ext uri="{FF2B5EF4-FFF2-40B4-BE49-F238E27FC236}">
-                <a16:creationId xmlns:a16="http://schemas.microsoft.com/office/drawing/2014/main" id="{521A6CEE-D01A-478D-9071-DAC8E65094F0}"/>
+                <a16:creationId xmlns:a16="http://schemas.microsoft.com/office/drawing/2014/main" id="{7F01E6D0-1CCD-4603-B37A-1FDAE4BB07C5}"/>
               </a:ext>
             </a:extLst>
           </p:cNvPr>
@@ -22701,7 +22701,7 @@
           <p:cNvPr id="274" name="">
             <a:extLst xmlns:a="http://schemas.openxmlformats.org/drawingml/2006/main">
               <a:ext uri="{FF2B5EF4-FFF2-40B4-BE49-F238E27FC236}">
-                <a16:creationId xmlns:a16="http://schemas.microsoft.com/office/drawing/2014/main" id="{F194989A-4DD3-4378-9F5F-F5821441121A}"/>
+                <a16:creationId xmlns:a16="http://schemas.microsoft.com/office/drawing/2014/main" id="{6CF6915A-5C41-48DA-891F-687D09275F18}"/>
               </a:ext>
             </a:extLst>
           </p:cNvPr>
@@ -22734,7 +22734,7 @@
           <p:cNvPr id="275" name="">
             <a:extLst xmlns:a="http://schemas.openxmlformats.org/drawingml/2006/main">
               <a:ext uri="{FF2B5EF4-FFF2-40B4-BE49-F238E27FC236}">
-                <a16:creationId xmlns:a16="http://schemas.microsoft.com/office/drawing/2014/main" id="{2783CF1B-651C-4783-9A43-8259380D2AF8}"/>
+                <a16:creationId xmlns:a16="http://schemas.microsoft.com/office/drawing/2014/main" id="{B827B48F-35A9-4CB0-8265-61B078923BE9}"/>
               </a:ext>
             </a:extLst>
           </p:cNvPr>
@@ -22767,7 +22767,7 @@
           <p:cNvPr id="276" name="">
             <a:extLst xmlns:a="http://schemas.openxmlformats.org/drawingml/2006/main">
               <a:ext uri="{FF2B5EF4-FFF2-40B4-BE49-F238E27FC236}">
-                <a16:creationId xmlns:a16="http://schemas.microsoft.com/office/drawing/2014/main" id="{B6F414B7-5C26-4B30-B196-509DA309520C}"/>
+                <a16:creationId xmlns:a16="http://schemas.microsoft.com/office/drawing/2014/main" id="{0BB9AEBC-2CBA-48A0-8734-460995CF21DE}"/>
               </a:ext>
             </a:extLst>
           </p:cNvPr>
@@ -22800,7 +22800,7 @@
           <p:cNvPr id="277" name="">
             <a:extLst xmlns:a="http://schemas.openxmlformats.org/drawingml/2006/main">
               <a:ext uri="{FF2B5EF4-FFF2-40B4-BE49-F238E27FC236}">
-                <a16:creationId xmlns:a16="http://schemas.microsoft.com/office/drawing/2014/main" id="{81711A04-B251-48A9-8002-CC976BCFC979}"/>
+                <a16:creationId xmlns:a16="http://schemas.microsoft.com/office/drawing/2014/main" id="{7A7CF1DE-E0F1-4A82-BC89-FFF249A4E577}"/>
               </a:ext>
             </a:extLst>
           </p:cNvPr>
@@ -22833,7 +22833,7 @@
           <p:cNvPr id="278" name="">
             <a:extLst xmlns:a="http://schemas.openxmlformats.org/drawingml/2006/main">
               <a:ext uri="{FF2B5EF4-FFF2-40B4-BE49-F238E27FC236}">
-                <a16:creationId xmlns:a16="http://schemas.microsoft.com/office/drawing/2014/main" id="{89E03D1A-801D-47F9-9702-F292ED4462FF}"/>
+                <a16:creationId xmlns:a16="http://schemas.microsoft.com/office/drawing/2014/main" id="{65BA76D7-F776-45B1-8FFC-BCEFC566092B}"/>
               </a:ext>
             </a:extLst>
           </p:cNvPr>
@@ -22866,7 +22866,7 @@
           <p:cNvPr id="279" name="">
             <a:extLst xmlns:a="http://schemas.openxmlformats.org/drawingml/2006/main">
               <a:ext uri="{FF2B5EF4-FFF2-40B4-BE49-F238E27FC236}">
-                <a16:creationId xmlns:a16="http://schemas.microsoft.com/office/drawing/2014/main" id="{4D87F67D-AFFA-4B82-A5B9-6C3F75F712DE}"/>
+                <a16:creationId xmlns:a16="http://schemas.microsoft.com/office/drawing/2014/main" id="{AB6FC6BB-1894-46D3-94EE-2B7F7FE27ACD}"/>
               </a:ext>
             </a:extLst>
           </p:cNvPr>
@@ -22899,7 +22899,7 @@
           <p:cNvPr id="280" name="">
             <a:extLst xmlns:a="http://schemas.openxmlformats.org/drawingml/2006/main">
               <a:ext uri="{FF2B5EF4-FFF2-40B4-BE49-F238E27FC236}">
-                <a16:creationId xmlns:a16="http://schemas.microsoft.com/office/drawing/2014/main" id="{E24BBF31-6972-4DA7-B3C2-AB6EAFAF60FB}"/>
+                <a16:creationId xmlns:a16="http://schemas.microsoft.com/office/drawing/2014/main" id="{BF702E95-CCDF-4A54-B423-D2003837B255}"/>
               </a:ext>
             </a:extLst>
           </p:cNvPr>
@@ -22932,7 +22932,7 @@
           <p:cNvPr id="281" name="">
             <a:extLst xmlns:a="http://schemas.openxmlformats.org/drawingml/2006/main">
               <a:ext uri="{FF2B5EF4-FFF2-40B4-BE49-F238E27FC236}">
-                <a16:creationId xmlns:a16="http://schemas.microsoft.com/office/drawing/2014/main" id="{EA381D22-537D-454F-B90F-35C5AC50294D}"/>
+                <a16:creationId xmlns:a16="http://schemas.microsoft.com/office/drawing/2014/main" id="{7FD76F84-675C-4FB3-BA00-CF32D1AFA64C}"/>
               </a:ext>
             </a:extLst>
           </p:cNvPr>
@@ -22965,7 +22965,7 @@
           <p:cNvPr id="282" name="">
             <a:extLst xmlns:a="http://schemas.openxmlformats.org/drawingml/2006/main">
               <a:ext uri="{FF2B5EF4-FFF2-40B4-BE49-F238E27FC236}">
-                <a16:creationId xmlns:a16="http://schemas.microsoft.com/office/drawing/2014/main" id="{39CE12C6-10F2-4716-9A7E-A57D94B74207}"/>
+                <a16:creationId xmlns:a16="http://schemas.microsoft.com/office/drawing/2014/main" id="{80258FC0-AAA4-47A8-A9EC-8D3461B2A05C}"/>
               </a:ext>
             </a:extLst>
           </p:cNvPr>
@@ -22998,7 +22998,7 @@
           <p:cNvPr id="283" name="">
             <a:extLst xmlns:a="http://schemas.openxmlformats.org/drawingml/2006/main">
               <a:ext uri="{FF2B5EF4-FFF2-40B4-BE49-F238E27FC236}">
-                <a16:creationId xmlns:a16="http://schemas.microsoft.com/office/drawing/2014/main" id="{A02F3DE9-2207-4C4E-8793-90C3551488CC}"/>
+                <a16:creationId xmlns:a16="http://schemas.microsoft.com/office/drawing/2014/main" id="{9A54020D-B489-4F6F-8A06-C5C219319E0F}"/>
               </a:ext>
             </a:extLst>
           </p:cNvPr>
@@ -23031,7 +23031,7 @@
           <p:cNvPr id="284" name="">
             <a:extLst xmlns:a="http://schemas.openxmlformats.org/drawingml/2006/main">
               <a:ext uri="{FF2B5EF4-FFF2-40B4-BE49-F238E27FC236}">
-                <a16:creationId xmlns:a16="http://schemas.microsoft.com/office/drawing/2014/main" id="{1A18F618-104E-4D25-A455-06FA24D4E4C0}"/>
+                <a16:creationId xmlns:a16="http://schemas.microsoft.com/office/drawing/2014/main" id="{B76A3ADD-C7E8-4006-AB07-3B16E351B5EC}"/>
               </a:ext>
             </a:extLst>
           </p:cNvPr>
@@ -23064,7 +23064,7 @@
           <p:cNvPr id="285" name="">
             <a:extLst xmlns:a="http://schemas.openxmlformats.org/drawingml/2006/main">
               <a:ext uri="{FF2B5EF4-FFF2-40B4-BE49-F238E27FC236}">
-                <a16:creationId xmlns:a16="http://schemas.microsoft.com/office/drawing/2014/main" id="{9AA5984E-AF78-4517-B590-6E0DEE77951B}"/>
+                <a16:creationId xmlns:a16="http://schemas.microsoft.com/office/drawing/2014/main" id="{BF053818-7363-46C1-8621-E02CA2A89D77}"/>
               </a:ext>
             </a:extLst>
           </p:cNvPr>
@@ -23097,7 +23097,7 @@
           <p:cNvPr id="286" name="">
             <a:extLst xmlns:a="http://schemas.openxmlformats.org/drawingml/2006/main">
               <a:ext uri="{FF2B5EF4-FFF2-40B4-BE49-F238E27FC236}">
-                <a16:creationId xmlns:a16="http://schemas.microsoft.com/office/drawing/2014/main" id="{0DC541D0-D920-4A8E-8795-66BF612DFE71}"/>
+                <a16:creationId xmlns:a16="http://schemas.microsoft.com/office/drawing/2014/main" id="{1FEBA3FD-70C4-4580-BEC3-47273EDFF4F6}"/>
               </a:ext>
             </a:extLst>
           </p:cNvPr>
@@ -23130,7 +23130,7 @@
           <p:cNvPr id="287" name="">
             <a:extLst xmlns:a="http://schemas.openxmlformats.org/drawingml/2006/main">
               <a:ext uri="{FF2B5EF4-FFF2-40B4-BE49-F238E27FC236}">
-                <a16:creationId xmlns:a16="http://schemas.microsoft.com/office/drawing/2014/main" id="{38F83F04-00A6-49D8-9E4B-A3674C55FB26}"/>
+                <a16:creationId xmlns:a16="http://schemas.microsoft.com/office/drawing/2014/main" id="{656722D0-148C-4660-8CD6-EFF681A63BFD}"/>
               </a:ext>
             </a:extLst>
           </p:cNvPr>
@@ -23163,7 +23163,7 @@
           <p:cNvPr id="288" name="">
             <a:extLst xmlns:a="http://schemas.openxmlformats.org/drawingml/2006/main">
               <a:ext uri="{FF2B5EF4-FFF2-40B4-BE49-F238E27FC236}">
-                <a16:creationId xmlns:a16="http://schemas.microsoft.com/office/drawing/2014/main" id="{DEB46772-7304-4133-8A80-9F1BE69A1717}"/>
+                <a16:creationId xmlns:a16="http://schemas.microsoft.com/office/drawing/2014/main" id="{B656840C-17F4-43D5-9E80-886079D47590}"/>
               </a:ext>
             </a:extLst>
           </p:cNvPr>
@@ -23194,7 +23194,7 @@
           <p:cNvPr id="289" name="">
             <a:extLst xmlns:a="http://schemas.openxmlformats.org/drawingml/2006/main">
               <a:ext uri="{FF2B5EF4-FFF2-40B4-BE49-F238E27FC236}">
-                <a16:creationId xmlns:a16="http://schemas.microsoft.com/office/drawing/2014/main" id="{EC08F6DA-2E4F-406C-95A3-E958F7EBD09A}"/>
+                <a16:creationId xmlns:a16="http://schemas.microsoft.com/office/drawing/2014/main" id="{EB52F085-FED9-4BFD-B0D8-5B7A5F04DFBF}"/>
               </a:ext>
             </a:extLst>
           </p:cNvPr>
@@ -23256,7 +23256,7 @@
           <p:cNvPr id="290" name="">
             <a:extLst xmlns:a="http://schemas.openxmlformats.org/drawingml/2006/main">
               <a:ext uri="{FF2B5EF4-FFF2-40B4-BE49-F238E27FC236}">
-                <a16:creationId xmlns:a16="http://schemas.microsoft.com/office/drawing/2014/main" id="{E0D7B69C-017B-4746-B1F1-A7AD3E777B5F}"/>
+                <a16:creationId xmlns:a16="http://schemas.microsoft.com/office/drawing/2014/main" id="{C2E95C43-5385-437F-92EE-B95E328205B2}"/>
               </a:ext>
             </a:extLst>
           </p:cNvPr>
@@ -23287,7 +23287,7 @@
           <p:cNvPr id="291" name="">
             <a:extLst xmlns:a="http://schemas.openxmlformats.org/drawingml/2006/main">
               <a:ext uri="{FF2B5EF4-FFF2-40B4-BE49-F238E27FC236}">
-                <a16:creationId xmlns:a16="http://schemas.microsoft.com/office/drawing/2014/main" id="{D29344E7-9D12-4487-B7B6-BE627D3FFFF9}"/>
+                <a16:creationId xmlns:a16="http://schemas.microsoft.com/office/drawing/2014/main" id="{AEE9D076-BA0A-4C96-A695-0556361C9488}"/>
               </a:ext>
             </a:extLst>
           </p:cNvPr>
@@ -23349,7 +23349,7 @@
           <p:cNvPr id="292" name="">
             <a:extLst xmlns:a="http://schemas.openxmlformats.org/drawingml/2006/main">
               <a:ext uri="{FF2B5EF4-FFF2-40B4-BE49-F238E27FC236}">
-                <a16:creationId xmlns:a16="http://schemas.microsoft.com/office/drawing/2014/main" id="{1B2C69FF-1311-4B12-8B26-DAB05D0F50E5}"/>
+                <a16:creationId xmlns:a16="http://schemas.microsoft.com/office/drawing/2014/main" id="{D5AFEA98-D210-46E9-B2E9-9C57D7D16A37}"/>
               </a:ext>
             </a:extLst>
           </p:cNvPr>
@@ -23409,7 +23409,7 @@
     </p:spTree>
     <p:extLst>
       <p:ext uri="{BB962C8B-B14F-4D97-AF65-F5344CB8AC3E}">
-        <p14:creationId xmlns:p14="http://schemas.microsoft.com/office/powerpoint/2010/main" val="1402240326"/>
+        <p14:creationId xmlns:p14="http://schemas.microsoft.com/office/powerpoint/2010/main" val="1147391561"/>
       </p:ext>
     </p:extLst>
   </p:cSld>
@@ -23440,7 +23440,7 @@
           <p:cNvPr id="1" name="">
             <a:extLst xmlns:a="http://schemas.openxmlformats.org/drawingml/2006/main">
               <a:ext uri="{FF2B5EF4-FFF2-40B4-BE49-F238E27FC236}">
-                <a16:creationId xmlns:a16="http://schemas.microsoft.com/office/drawing/2014/main" id="{DA3727B5-C91D-45CD-A3F7-EA3E23F361AC}"/>
+                <a16:creationId xmlns:a16="http://schemas.microsoft.com/office/drawing/2014/main" id="{7150335B-F931-4075-87FF-457197EB5FD8}"/>
               </a:ext>
             </a:extLst>
           </p:cNvPr>
@@ -23502,7 +23502,7 @@
           <p:cNvPr id="2" name="">
             <a:extLst xmlns:a="http://schemas.openxmlformats.org/drawingml/2006/main">
               <a:ext uri="{FF2B5EF4-FFF2-40B4-BE49-F238E27FC236}">
-                <a16:creationId xmlns:a16="http://schemas.microsoft.com/office/drawing/2014/main" id="{C7323023-A58F-4CB8-B220-96E9161B081C}"/>
+                <a16:creationId xmlns:a16="http://schemas.microsoft.com/office/drawing/2014/main" id="{3FBE50ED-4872-45A1-A217-A831B4796F7E}"/>
               </a:ext>
             </a:extLst>
           </p:cNvPr>
@@ -23564,7 +23564,7 @@
           <p:cNvPr id="3" name="">
             <a:extLst xmlns:a="http://schemas.openxmlformats.org/drawingml/2006/main">
               <a:ext uri="{FF2B5EF4-FFF2-40B4-BE49-F238E27FC236}">
-                <a16:creationId xmlns:a16="http://schemas.microsoft.com/office/drawing/2014/main" id="{7C771EEE-B324-4537-8589-DB479CEFFB43}"/>
+                <a16:creationId xmlns:a16="http://schemas.microsoft.com/office/drawing/2014/main" id="{E0D06E0C-69CF-4DB4-8A0A-538F1A47315B}"/>
               </a:ext>
             </a:extLst>
           </p:cNvPr>
@@ -23626,23 +23626,23 @@
           <p:cNvPr id="4" name="">
             <a:extLst xmlns:a="http://schemas.openxmlformats.org/drawingml/2006/main">
               <a:ext uri="{FF2B5EF4-FFF2-40B4-BE49-F238E27FC236}">
-                <a16:creationId xmlns:a16="http://schemas.microsoft.com/office/drawing/2014/main" id="{2B6AEC0A-0320-4233-8A74-5594D9087768}"/>
-              </a:ext>
-            </a:extLst>
-          </p:cNvPr>
-          <p:cNvSpPr>
-            <a:spLocks xmlns:a="http://schemas.openxmlformats.org/drawingml/2006/main" noGrp="1"/>
-          </p:cNvSpPr>
-          <p:nvPr/>
-        </p:nvSpPr>
-        <p:spPr>
-          <a:xfrm xmlns:a="http://schemas.openxmlformats.org/drawingml/2006/main">
-            <a:off x="4191000" y="2000250"/>
-            <a:ext cx="3524250" cy="2381250"/>
+                <a16:creationId xmlns:a16="http://schemas.microsoft.com/office/drawing/2014/main" id="{A163DB0F-A87E-44E0-9479-A910AC08CE02}"/>
+              </a:ext>
+            </a:extLst>
+          </p:cNvPr>
+          <p:cNvSpPr>
+            <a:spLocks xmlns:a="http://schemas.openxmlformats.org/drawingml/2006/main" noGrp="1"/>
+          </p:cNvSpPr>
+          <p:nvPr/>
+        </p:nvSpPr>
+        <p:spPr>
+          <a:xfrm xmlns:a="http://schemas.openxmlformats.org/drawingml/2006/main">
+            <a:off x="4286250" y="2076450"/>
+            <a:ext cx="3429000" cy="2266950"/>
           </a:xfrm>
           <a:prstGeom xmlns:a="http://schemas.openxmlformats.org/drawingml/2006/main" prst="roundRect">
             <a:avLst>
-              <a:gd name="adj" fmla="val 4800"/>
+              <a:gd name="adj" fmla="val 5042"/>
             </a:avLst>
           </a:prstGeom>
           <a:solidFill xmlns:a="http://schemas.openxmlformats.org/drawingml/2006/main">
@@ -23661,19 +23661,19 @@
           <p:cNvPr id="5" name="">
             <a:extLst xmlns:a="http://schemas.openxmlformats.org/drawingml/2006/main">
               <a:ext uri="{FF2B5EF4-FFF2-40B4-BE49-F238E27FC236}">
-                <a16:creationId xmlns:a16="http://schemas.microsoft.com/office/drawing/2014/main" id="{DF282157-6629-4DC9-8EAF-2766B0C904F7}"/>
-              </a:ext>
-            </a:extLst>
-          </p:cNvPr>
-          <p:cNvSpPr>
-            <a:spLocks xmlns:a="http://schemas.openxmlformats.org/drawingml/2006/main" noGrp="1"/>
-          </p:cNvSpPr>
-          <p:nvPr/>
-        </p:nvSpPr>
-        <p:spPr>
-          <a:xfrm xmlns:a="http://schemas.openxmlformats.org/drawingml/2006/main">
-            <a:off x="4514850" y="2400300"/>
-            <a:ext cx="317500" cy="225879"/>
+                <a16:creationId xmlns:a16="http://schemas.microsoft.com/office/drawing/2014/main" id="{34F8E4A8-6AB7-4EAD-8D83-5ECB1555761A}"/>
+              </a:ext>
+            </a:extLst>
+          </p:cNvPr>
+          <p:cNvSpPr>
+            <a:spLocks xmlns:a="http://schemas.openxmlformats.org/drawingml/2006/main" noGrp="1"/>
+          </p:cNvSpPr>
+          <p:nvPr/>
+        </p:nvSpPr>
+        <p:spPr>
+          <a:xfrm xmlns:a="http://schemas.openxmlformats.org/drawingml/2006/main">
+            <a:off x="4610100" y="2476500"/>
+            <a:ext cx="306917" cy="209550"/>
           </a:xfrm>
           <a:prstGeom xmlns:a="http://schemas.openxmlformats.org/drawingml/2006/main" prst="rect">
             <a:avLst/>
@@ -23694,19 +23694,19 @@
           <p:cNvPr id="6" name="">
             <a:extLst xmlns:a="http://schemas.openxmlformats.org/drawingml/2006/main">
               <a:ext uri="{FF2B5EF4-FFF2-40B4-BE49-F238E27FC236}">
-                <a16:creationId xmlns:a16="http://schemas.microsoft.com/office/drawing/2014/main" id="{CF8549BA-5AC9-4548-BB86-939019EFC156}"/>
-              </a:ext>
-            </a:extLst>
-          </p:cNvPr>
-          <p:cNvSpPr>
-            <a:spLocks xmlns:a="http://schemas.openxmlformats.org/drawingml/2006/main" noGrp="1"/>
-          </p:cNvSpPr>
-          <p:nvPr/>
-        </p:nvSpPr>
-        <p:spPr>
-          <a:xfrm xmlns:a="http://schemas.openxmlformats.org/drawingml/2006/main">
-            <a:off x="4851400" y="2400300"/>
-            <a:ext cx="317500" cy="225879"/>
+                <a16:creationId xmlns:a16="http://schemas.microsoft.com/office/drawing/2014/main" id="{6C0910C8-1BAC-463D-B631-801D1C744B36}"/>
+              </a:ext>
+            </a:extLst>
+          </p:cNvPr>
+          <p:cNvSpPr>
+            <a:spLocks xmlns:a="http://schemas.openxmlformats.org/drawingml/2006/main" noGrp="1"/>
+          </p:cNvSpPr>
+          <p:nvPr/>
+        </p:nvSpPr>
+        <p:spPr>
+          <a:xfrm xmlns:a="http://schemas.openxmlformats.org/drawingml/2006/main">
+            <a:off x="4936067" y="2476500"/>
+            <a:ext cx="306917" cy="209550"/>
           </a:xfrm>
           <a:prstGeom xmlns:a="http://schemas.openxmlformats.org/drawingml/2006/main" prst="rect">
             <a:avLst/>
@@ -23727,19 +23727,19 @@
           <p:cNvPr id="7" name="">
             <a:extLst xmlns:a="http://schemas.openxmlformats.org/drawingml/2006/main">
               <a:ext uri="{FF2B5EF4-FFF2-40B4-BE49-F238E27FC236}">
-                <a16:creationId xmlns:a16="http://schemas.microsoft.com/office/drawing/2014/main" id="{44008EEF-05F3-4B97-B0EB-057B0ABC1F06}"/>
-              </a:ext>
-            </a:extLst>
-          </p:cNvPr>
-          <p:cNvSpPr>
-            <a:spLocks xmlns:a="http://schemas.openxmlformats.org/drawingml/2006/main" noGrp="1"/>
-          </p:cNvSpPr>
-          <p:nvPr/>
-        </p:nvSpPr>
-        <p:spPr>
-          <a:xfrm xmlns:a="http://schemas.openxmlformats.org/drawingml/2006/main">
-            <a:off x="5187950" y="2400300"/>
-            <a:ext cx="317500" cy="225879"/>
+                <a16:creationId xmlns:a16="http://schemas.microsoft.com/office/drawing/2014/main" id="{0A974232-7F67-4623-8F0B-013880F4D05E}"/>
+              </a:ext>
+            </a:extLst>
+          </p:cNvPr>
+          <p:cNvSpPr>
+            <a:spLocks xmlns:a="http://schemas.openxmlformats.org/drawingml/2006/main" noGrp="1"/>
+          </p:cNvSpPr>
+          <p:nvPr/>
+        </p:nvSpPr>
+        <p:spPr>
+          <a:xfrm xmlns:a="http://schemas.openxmlformats.org/drawingml/2006/main">
+            <a:off x="5262033" y="2476500"/>
+            <a:ext cx="306917" cy="209550"/>
           </a:xfrm>
           <a:prstGeom xmlns:a="http://schemas.openxmlformats.org/drawingml/2006/main" prst="rect">
             <a:avLst/>
@@ -23760,19 +23760,19 @@
           <p:cNvPr id="8" name="">
             <a:extLst xmlns:a="http://schemas.openxmlformats.org/drawingml/2006/main">
               <a:ext uri="{FF2B5EF4-FFF2-40B4-BE49-F238E27FC236}">
-                <a16:creationId xmlns:a16="http://schemas.microsoft.com/office/drawing/2014/main" id="{8B542769-4175-463A-A647-AD6212C9B70E}"/>
-              </a:ext>
-            </a:extLst>
-          </p:cNvPr>
-          <p:cNvSpPr>
-            <a:spLocks xmlns:a="http://schemas.openxmlformats.org/drawingml/2006/main" noGrp="1"/>
-          </p:cNvSpPr>
-          <p:nvPr/>
-        </p:nvSpPr>
-        <p:spPr>
-          <a:xfrm xmlns:a="http://schemas.openxmlformats.org/drawingml/2006/main">
-            <a:off x="5524500" y="2400300"/>
-            <a:ext cx="317500" cy="225879"/>
+                <a16:creationId xmlns:a16="http://schemas.microsoft.com/office/drawing/2014/main" id="{83BCDCB4-0A35-4E81-842A-A1271176802D}"/>
+              </a:ext>
+            </a:extLst>
+          </p:cNvPr>
+          <p:cNvSpPr>
+            <a:spLocks xmlns:a="http://schemas.openxmlformats.org/drawingml/2006/main" noGrp="1"/>
+          </p:cNvSpPr>
+          <p:nvPr/>
+        </p:nvSpPr>
+        <p:spPr>
+          <a:xfrm xmlns:a="http://schemas.openxmlformats.org/drawingml/2006/main">
+            <a:off x="5588000" y="2476500"/>
+            <a:ext cx="306917" cy="209550"/>
           </a:xfrm>
           <a:prstGeom xmlns:a="http://schemas.openxmlformats.org/drawingml/2006/main" prst="rect">
             <a:avLst/>
@@ -23793,19 +23793,19 @@
           <p:cNvPr id="9" name="">
             <a:extLst xmlns:a="http://schemas.openxmlformats.org/drawingml/2006/main">
               <a:ext uri="{FF2B5EF4-FFF2-40B4-BE49-F238E27FC236}">
-                <a16:creationId xmlns:a16="http://schemas.microsoft.com/office/drawing/2014/main" id="{F6DB4CB9-3183-4944-BEF8-568EE4156308}"/>
-              </a:ext>
-            </a:extLst>
-          </p:cNvPr>
-          <p:cNvSpPr>
-            <a:spLocks xmlns:a="http://schemas.openxmlformats.org/drawingml/2006/main" noGrp="1"/>
-          </p:cNvSpPr>
-          <p:nvPr/>
-        </p:nvSpPr>
-        <p:spPr>
-          <a:xfrm xmlns:a="http://schemas.openxmlformats.org/drawingml/2006/main">
-            <a:off x="5861050" y="2400300"/>
-            <a:ext cx="317500" cy="225879"/>
+                <a16:creationId xmlns:a16="http://schemas.microsoft.com/office/drawing/2014/main" id="{12040701-AA7B-4719-A212-190839CE7939}"/>
+              </a:ext>
+            </a:extLst>
+          </p:cNvPr>
+          <p:cNvSpPr>
+            <a:spLocks xmlns:a="http://schemas.openxmlformats.org/drawingml/2006/main" noGrp="1"/>
+          </p:cNvSpPr>
+          <p:nvPr/>
+        </p:nvSpPr>
+        <p:spPr>
+          <a:xfrm xmlns:a="http://schemas.openxmlformats.org/drawingml/2006/main">
+            <a:off x="5913967" y="2476500"/>
+            <a:ext cx="306917" cy="209550"/>
           </a:xfrm>
           <a:prstGeom xmlns:a="http://schemas.openxmlformats.org/drawingml/2006/main" prst="rect">
             <a:avLst/>
@@ -23826,19 +23826,19 @@
           <p:cNvPr id="10" name="">
             <a:extLst xmlns:a="http://schemas.openxmlformats.org/drawingml/2006/main">
               <a:ext uri="{FF2B5EF4-FFF2-40B4-BE49-F238E27FC236}">
-                <a16:creationId xmlns:a16="http://schemas.microsoft.com/office/drawing/2014/main" id="{088B1545-523D-4C93-89E4-03CF27E6B00F}"/>
-              </a:ext>
-            </a:extLst>
-          </p:cNvPr>
-          <p:cNvSpPr>
-            <a:spLocks xmlns:a="http://schemas.openxmlformats.org/drawingml/2006/main" noGrp="1"/>
-          </p:cNvSpPr>
-          <p:nvPr/>
-        </p:nvSpPr>
-        <p:spPr>
-          <a:xfrm xmlns:a="http://schemas.openxmlformats.org/drawingml/2006/main">
-            <a:off x="6197600" y="2400300"/>
-            <a:ext cx="317500" cy="225879"/>
+                <a16:creationId xmlns:a16="http://schemas.microsoft.com/office/drawing/2014/main" id="{FB7587C6-ABB3-4523-8879-EBC651A349C5}"/>
+              </a:ext>
+            </a:extLst>
+          </p:cNvPr>
+          <p:cNvSpPr>
+            <a:spLocks xmlns:a="http://schemas.openxmlformats.org/drawingml/2006/main" noGrp="1"/>
+          </p:cNvSpPr>
+          <p:nvPr/>
+        </p:nvSpPr>
+        <p:spPr>
+          <a:xfrm xmlns:a="http://schemas.openxmlformats.org/drawingml/2006/main">
+            <a:off x="6239933" y="2476500"/>
+            <a:ext cx="306917" cy="209550"/>
           </a:xfrm>
           <a:prstGeom xmlns:a="http://schemas.openxmlformats.org/drawingml/2006/main" prst="rect">
             <a:avLst/>
@@ -23859,19 +23859,19 @@
           <p:cNvPr id="11" name="">
             <a:extLst xmlns:a="http://schemas.openxmlformats.org/drawingml/2006/main">
               <a:ext uri="{FF2B5EF4-FFF2-40B4-BE49-F238E27FC236}">
-                <a16:creationId xmlns:a16="http://schemas.microsoft.com/office/drawing/2014/main" id="{6AABE9F2-5F17-4BAC-B19D-FD08E2201650}"/>
-              </a:ext>
-            </a:extLst>
-          </p:cNvPr>
-          <p:cNvSpPr>
-            <a:spLocks xmlns:a="http://schemas.openxmlformats.org/drawingml/2006/main" noGrp="1"/>
-          </p:cNvSpPr>
-          <p:nvPr/>
-        </p:nvSpPr>
-        <p:spPr>
-          <a:xfrm xmlns:a="http://schemas.openxmlformats.org/drawingml/2006/main">
-            <a:off x="6534150" y="2400300"/>
-            <a:ext cx="317500" cy="225879"/>
+                <a16:creationId xmlns:a16="http://schemas.microsoft.com/office/drawing/2014/main" id="{E9481E44-7383-49A9-8BF8-24B4D934D69D}"/>
+              </a:ext>
+            </a:extLst>
+          </p:cNvPr>
+          <p:cNvSpPr>
+            <a:spLocks xmlns:a="http://schemas.openxmlformats.org/drawingml/2006/main" noGrp="1"/>
+          </p:cNvSpPr>
+          <p:nvPr/>
+        </p:nvSpPr>
+        <p:spPr>
+          <a:xfrm xmlns:a="http://schemas.openxmlformats.org/drawingml/2006/main">
+            <a:off x="6565900" y="2476500"/>
+            <a:ext cx="306917" cy="209550"/>
           </a:xfrm>
           <a:prstGeom xmlns:a="http://schemas.openxmlformats.org/drawingml/2006/main" prst="rect">
             <a:avLst/>
@@ -23892,19 +23892,19 @@
           <p:cNvPr id="12" name="">
             <a:extLst xmlns:a="http://schemas.openxmlformats.org/drawingml/2006/main">
               <a:ext uri="{FF2B5EF4-FFF2-40B4-BE49-F238E27FC236}">
-                <a16:creationId xmlns:a16="http://schemas.microsoft.com/office/drawing/2014/main" id="{0182FFE1-F8A6-4345-926B-DFF35157FEA7}"/>
-              </a:ext>
-            </a:extLst>
-          </p:cNvPr>
-          <p:cNvSpPr>
-            <a:spLocks xmlns:a="http://schemas.openxmlformats.org/drawingml/2006/main" noGrp="1"/>
-          </p:cNvSpPr>
-          <p:nvPr/>
-        </p:nvSpPr>
-        <p:spPr>
-          <a:xfrm xmlns:a="http://schemas.openxmlformats.org/drawingml/2006/main">
-            <a:off x="6870700" y="2400300"/>
-            <a:ext cx="317500" cy="225879"/>
+                <a16:creationId xmlns:a16="http://schemas.microsoft.com/office/drawing/2014/main" id="{D92DF3C2-011C-4654-8095-1442D946E361}"/>
+              </a:ext>
+            </a:extLst>
+          </p:cNvPr>
+          <p:cNvSpPr>
+            <a:spLocks xmlns:a="http://schemas.openxmlformats.org/drawingml/2006/main" noGrp="1"/>
+          </p:cNvSpPr>
+          <p:nvPr/>
+        </p:nvSpPr>
+        <p:spPr>
+          <a:xfrm xmlns:a="http://schemas.openxmlformats.org/drawingml/2006/main">
+            <a:off x="6891867" y="2476500"/>
+            <a:ext cx="306917" cy="209550"/>
           </a:xfrm>
           <a:prstGeom xmlns:a="http://schemas.openxmlformats.org/drawingml/2006/main" prst="rect">
             <a:avLst/>
@@ -23925,19 +23925,19 @@
           <p:cNvPr id="13" name="">
             <a:extLst xmlns:a="http://schemas.openxmlformats.org/drawingml/2006/main">
               <a:ext uri="{FF2B5EF4-FFF2-40B4-BE49-F238E27FC236}">
-                <a16:creationId xmlns:a16="http://schemas.microsoft.com/office/drawing/2014/main" id="{4DD4E459-B1DE-4545-B2A5-60DD67FBF83C}"/>
-              </a:ext>
-            </a:extLst>
-          </p:cNvPr>
-          <p:cNvSpPr>
-            <a:spLocks xmlns:a="http://schemas.openxmlformats.org/drawingml/2006/main" noGrp="1"/>
-          </p:cNvSpPr>
-          <p:nvPr/>
-        </p:nvSpPr>
-        <p:spPr>
-          <a:xfrm xmlns:a="http://schemas.openxmlformats.org/drawingml/2006/main">
-            <a:off x="7207250" y="2400300"/>
-            <a:ext cx="317500" cy="225879"/>
+                <a16:creationId xmlns:a16="http://schemas.microsoft.com/office/drawing/2014/main" id="{D53E50B3-F43B-43AB-999D-6EDD73238BA4}"/>
+              </a:ext>
+            </a:extLst>
+          </p:cNvPr>
+          <p:cNvSpPr>
+            <a:spLocks xmlns:a="http://schemas.openxmlformats.org/drawingml/2006/main" noGrp="1"/>
+          </p:cNvSpPr>
+          <p:nvPr/>
+        </p:nvSpPr>
+        <p:spPr>
+          <a:xfrm xmlns:a="http://schemas.openxmlformats.org/drawingml/2006/main">
+            <a:off x="7217833" y="2476500"/>
+            <a:ext cx="306917" cy="209550"/>
           </a:xfrm>
           <a:prstGeom xmlns:a="http://schemas.openxmlformats.org/drawingml/2006/main" prst="rect">
             <a:avLst/>
@@ -23958,19 +23958,19 @@
           <p:cNvPr id="14" name="">
             <a:extLst xmlns:a="http://schemas.openxmlformats.org/drawingml/2006/main">
               <a:ext uri="{FF2B5EF4-FFF2-40B4-BE49-F238E27FC236}">
-                <a16:creationId xmlns:a16="http://schemas.microsoft.com/office/drawing/2014/main" id="{9D70A49A-CD81-45AD-8059-DA09BC48FBE0}"/>
-              </a:ext>
-            </a:extLst>
-          </p:cNvPr>
-          <p:cNvSpPr>
-            <a:spLocks xmlns:a="http://schemas.openxmlformats.org/drawingml/2006/main" noGrp="1"/>
-          </p:cNvSpPr>
-          <p:nvPr/>
-        </p:nvSpPr>
-        <p:spPr>
-          <a:xfrm xmlns:a="http://schemas.openxmlformats.org/drawingml/2006/main">
-            <a:off x="4514850" y="2645229"/>
-            <a:ext cx="317500" cy="225879"/>
+                <a16:creationId xmlns:a16="http://schemas.microsoft.com/office/drawing/2014/main" id="{AC84A609-6B60-44B0-B582-C0C0693C0FBE}"/>
+              </a:ext>
+            </a:extLst>
+          </p:cNvPr>
+          <p:cNvSpPr>
+            <a:spLocks xmlns:a="http://schemas.openxmlformats.org/drawingml/2006/main" noGrp="1"/>
+          </p:cNvSpPr>
+          <p:nvPr/>
+        </p:nvSpPr>
+        <p:spPr>
+          <a:xfrm xmlns:a="http://schemas.openxmlformats.org/drawingml/2006/main">
+            <a:off x="4610100" y="2705100"/>
+            <a:ext cx="306917" cy="209550"/>
           </a:xfrm>
           <a:prstGeom xmlns:a="http://schemas.openxmlformats.org/drawingml/2006/main" prst="rect">
             <a:avLst/>
@@ -23991,19 +23991,19 @@
           <p:cNvPr id="15" name="">
             <a:extLst xmlns:a="http://schemas.openxmlformats.org/drawingml/2006/main">
               <a:ext uri="{FF2B5EF4-FFF2-40B4-BE49-F238E27FC236}">
-                <a16:creationId xmlns:a16="http://schemas.microsoft.com/office/drawing/2014/main" id="{6A236AB3-E423-407B-8904-1C51BD3B8008}"/>
-              </a:ext>
-            </a:extLst>
-          </p:cNvPr>
-          <p:cNvSpPr>
-            <a:spLocks xmlns:a="http://schemas.openxmlformats.org/drawingml/2006/main" noGrp="1"/>
-          </p:cNvSpPr>
-          <p:nvPr/>
-        </p:nvSpPr>
-        <p:spPr>
-          <a:xfrm xmlns:a="http://schemas.openxmlformats.org/drawingml/2006/main">
-            <a:off x="4851400" y="2645229"/>
-            <a:ext cx="317500" cy="225879"/>
+                <a16:creationId xmlns:a16="http://schemas.microsoft.com/office/drawing/2014/main" id="{45599844-C6D2-4ED5-BD18-6356F989BB70}"/>
+              </a:ext>
+            </a:extLst>
+          </p:cNvPr>
+          <p:cNvSpPr>
+            <a:spLocks xmlns:a="http://schemas.openxmlformats.org/drawingml/2006/main" noGrp="1"/>
+          </p:cNvSpPr>
+          <p:nvPr/>
+        </p:nvSpPr>
+        <p:spPr>
+          <a:xfrm xmlns:a="http://schemas.openxmlformats.org/drawingml/2006/main">
+            <a:off x="4936067" y="2705100"/>
+            <a:ext cx="306917" cy="209550"/>
           </a:xfrm>
           <a:prstGeom xmlns:a="http://schemas.openxmlformats.org/drawingml/2006/main" prst="rect">
             <a:avLst/>
@@ -24024,19 +24024,19 @@
           <p:cNvPr id="16" name="">
             <a:extLst xmlns:a="http://schemas.openxmlformats.org/drawingml/2006/main">
               <a:ext uri="{FF2B5EF4-FFF2-40B4-BE49-F238E27FC236}">
-                <a16:creationId xmlns:a16="http://schemas.microsoft.com/office/drawing/2014/main" id="{92FEF448-F13B-4191-8820-2AB766E311B1}"/>
-              </a:ext>
-            </a:extLst>
-          </p:cNvPr>
-          <p:cNvSpPr>
-            <a:spLocks xmlns:a="http://schemas.openxmlformats.org/drawingml/2006/main" noGrp="1"/>
-          </p:cNvSpPr>
-          <p:nvPr/>
-        </p:nvSpPr>
-        <p:spPr>
-          <a:xfrm xmlns:a="http://schemas.openxmlformats.org/drawingml/2006/main">
-            <a:off x="5187950" y="2645229"/>
-            <a:ext cx="317500" cy="225879"/>
+                <a16:creationId xmlns:a16="http://schemas.microsoft.com/office/drawing/2014/main" id="{E68C8727-1031-454B-A5FA-4246A66E7718}"/>
+              </a:ext>
+            </a:extLst>
+          </p:cNvPr>
+          <p:cNvSpPr>
+            <a:spLocks xmlns:a="http://schemas.openxmlformats.org/drawingml/2006/main" noGrp="1"/>
+          </p:cNvSpPr>
+          <p:nvPr/>
+        </p:nvSpPr>
+        <p:spPr>
+          <a:xfrm xmlns:a="http://schemas.openxmlformats.org/drawingml/2006/main">
+            <a:off x="5262033" y="2705100"/>
+            <a:ext cx="306917" cy="209550"/>
           </a:xfrm>
           <a:prstGeom xmlns:a="http://schemas.openxmlformats.org/drawingml/2006/main" prst="rect">
             <a:avLst/>
@@ -24057,19 +24057,19 @@
           <p:cNvPr id="17" name="">
             <a:extLst xmlns:a="http://schemas.openxmlformats.org/drawingml/2006/main">
               <a:ext uri="{FF2B5EF4-FFF2-40B4-BE49-F238E27FC236}">
-                <a16:creationId xmlns:a16="http://schemas.microsoft.com/office/drawing/2014/main" id="{046B150A-1F62-404A-A30F-3B8546EB3963}"/>
-              </a:ext>
-            </a:extLst>
-          </p:cNvPr>
-          <p:cNvSpPr>
-            <a:spLocks xmlns:a="http://schemas.openxmlformats.org/drawingml/2006/main" noGrp="1"/>
-          </p:cNvSpPr>
-          <p:nvPr/>
-        </p:nvSpPr>
-        <p:spPr>
-          <a:xfrm xmlns:a="http://schemas.openxmlformats.org/drawingml/2006/main">
-            <a:off x="5524500" y="2645229"/>
-            <a:ext cx="317500" cy="225879"/>
+                <a16:creationId xmlns:a16="http://schemas.microsoft.com/office/drawing/2014/main" id="{77251037-9105-4E2A-B926-AB0110C92611}"/>
+              </a:ext>
+            </a:extLst>
+          </p:cNvPr>
+          <p:cNvSpPr>
+            <a:spLocks xmlns:a="http://schemas.openxmlformats.org/drawingml/2006/main" noGrp="1"/>
+          </p:cNvSpPr>
+          <p:nvPr/>
+        </p:nvSpPr>
+        <p:spPr>
+          <a:xfrm xmlns:a="http://schemas.openxmlformats.org/drawingml/2006/main">
+            <a:off x="5588000" y="2705100"/>
+            <a:ext cx="306917" cy="209550"/>
           </a:xfrm>
           <a:prstGeom xmlns:a="http://schemas.openxmlformats.org/drawingml/2006/main" prst="rect">
             <a:avLst/>
@@ -24090,19 +24090,19 @@
           <p:cNvPr id="18" name="">
             <a:extLst xmlns:a="http://schemas.openxmlformats.org/drawingml/2006/main">
               <a:ext uri="{FF2B5EF4-FFF2-40B4-BE49-F238E27FC236}">
-                <a16:creationId xmlns:a16="http://schemas.microsoft.com/office/drawing/2014/main" id="{68CE6DED-8F6A-4EAC-BA4A-6DDF4257524D}"/>
-              </a:ext>
-            </a:extLst>
-          </p:cNvPr>
-          <p:cNvSpPr>
-            <a:spLocks xmlns:a="http://schemas.openxmlformats.org/drawingml/2006/main" noGrp="1"/>
-          </p:cNvSpPr>
-          <p:nvPr/>
-        </p:nvSpPr>
-        <p:spPr>
-          <a:xfrm xmlns:a="http://schemas.openxmlformats.org/drawingml/2006/main">
-            <a:off x="5861050" y="2645229"/>
-            <a:ext cx="317500" cy="225879"/>
+                <a16:creationId xmlns:a16="http://schemas.microsoft.com/office/drawing/2014/main" id="{F524AAF9-0B6B-4671-9FD3-430220A3E1CD}"/>
+              </a:ext>
+            </a:extLst>
+          </p:cNvPr>
+          <p:cNvSpPr>
+            <a:spLocks xmlns:a="http://schemas.openxmlformats.org/drawingml/2006/main" noGrp="1"/>
+          </p:cNvSpPr>
+          <p:nvPr/>
+        </p:nvSpPr>
+        <p:spPr>
+          <a:xfrm xmlns:a="http://schemas.openxmlformats.org/drawingml/2006/main">
+            <a:off x="5913967" y="2705100"/>
+            <a:ext cx="306917" cy="209550"/>
           </a:xfrm>
           <a:prstGeom xmlns:a="http://schemas.openxmlformats.org/drawingml/2006/main" prst="rect">
             <a:avLst/>
@@ -24123,19 +24123,19 @@
           <p:cNvPr id="19" name="">
             <a:extLst xmlns:a="http://schemas.openxmlformats.org/drawingml/2006/main">
               <a:ext uri="{FF2B5EF4-FFF2-40B4-BE49-F238E27FC236}">
-                <a16:creationId xmlns:a16="http://schemas.microsoft.com/office/drawing/2014/main" id="{CC13F0C7-0FC7-41C4-9D1A-96715C812978}"/>
-              </a:ext>
-            </a:extLst>
-          </p:cNvPr>
-          <p:cNvSpPr>
-            <a:spLocks xmlns:a="http://schemas.openxmlformats.org/drawingml/2006/main" noGrp="1"/>
-          </p:cNvSpPr>
-          <p:nvPr/>
-        </p:nvSpPr>
-        <p:spPr>
-          <a:xfrm xmlns:a="http://schemas.openxmlformats.org/drawingml/2006/main">
-            <a:off x="6197600" y="2645229"/>
-            <a:ext cx="317500" cy="225879"/>
+                <a16:creationId xmlns:a16="http://schemas.microsoft.com/office/drawing/2014/main" id="{22D44D94-6112-41A7-96A3-3D8523F5EDF7}"/>
+              </a:ext>
+            </a:extLst>
+          </p:cNvPr>
+          <p:cNvSpPr>
+            <a:spLocks xmlns:a="http://schemas.openxmlformats.org/drawingml/2006/main" noGrp="1"/>
+          </p:cNvSpPr>
+          <p:nvPr/>
+        </p:nvSpPr>
+        <p:spPr>
+          <a:xfrm xmlns:a="http://schemas.openxmlformats.org/drawingml/2006/main">
+            <a:off x="6239933" y="2705100"/>
+            <a:ext cx="306917" cy="209550"/>
           </a:xfrm>
           <a:prstGeom xmlns:a="http://schemas.openxmlformats.org/drawingml/2006/main" prst="rect">
             <a:avLst/>
@@ -24156,19 +24156,19 @@
           <p:cNvPr id="20" name="">
             <a:extLst xmlns:a="http://schemas.openxmlformats.org/drawingml/2006/main">
               <a:ext uri="{FF2B5EF4-FFF2-40B4-BE49-F238E27FC236}">
-                <a16:creationId xmlns:a16="http://schemas.microsoft.com/office/drawing/2014/main" id="{9603767F-94C1-4C47-913B-912E9C3DD9D0}"/>
-              </a:ext>
-            </a:extLst>
-          </p:cNvPr>
-          <p:cNvSpPr>
-            <a:spLocks xmlns:a="http://schemas.openxmlformats.org/drawingml/2006/main" noGrp="1"/>
-          </p:cNvSpPr>
-          <p:nvPr/>
-        </p:nvSpPr>
-        <p:spPr>
-          <a:xfrm xmlns:a="http://schemas.openxmlformats.org/drawingml/2006/main">
-            <a:off x="6534150" y="2645229"/>
-            <a:ext cx="317500" cy="225879"/>
+                <a16:creationId xmlns:a16="http://schemas.microsoft.com/office/drawing/2014/main" id="{01AA0A76-DE59-4EC6-BECA-AA7C2151AEA7}"/>
+              </a:ext>
+            </a:extLst>
+          </p:cNvPr>
+          <p:cNvSpPr>
+            <a:spLocks xmlns:a="http://schemas.openxmlformats.org/drawingml/2006/main" noGrp="1"/>
+          </p:cNvSpPr>
+          <p:nvPr/>
+        </p:nvSpPr>
+        <p:spPr>
+          <a:xfrm xmlns:a="http://schemas.openxmlformats.org/drawingml/2006/main">
+            <a:off x="6565900" y="2705100"/>
+            <a:ext cx="306917" cy="209550"/>
           </a:xfrm>
           <a:prstGeom xmlns:a="http://schemas.openxmlformats.org/drawingml/2006/main" prst="rect">
             <a:avLst/>
@@ -24189,19 +24189,19 @@
           <p:cNvPr id="21" name="">
             <a:extLst xmlns:a="http://schemas.openxmlformats.org/drawingml/2006/main">
               <a:ext uri="{FF2B5EF4-FFF2-40B4-BE49-F238E27FC236}">
-                <a16:creationId xmlns:a16="http://schemas.microsoft.com/office/drawing/2014/main" id="{594E499F-76F8-4B34-A99F-77F905D59E0E}"/>
-              </a:ext>
-            </a:extLst>
-          </p:cNvPr>
-          <p:cNvSpPr>
-            <a:spLocks xmlns:a="http://schemas.openxmlformats.org/drawingml/2006/main" noGrp="1"/>
-          </p:cNvSpPr>
-          <p:nvPr/>
-        </p:nvSpPr>
-        <p:spPr>
-          <a:xfrm xmlns:a="http://schemas.openxmlformats.org/drawingml/2006/main">
-            <a:off x="6870700" y="2645229"/>
-            <a:ext cx="317500" cy="225879"/>
+                <a16:creationId xmlns:a16="http://schemas.microsoft.com/office/drawing/2014/main" id="{AF3EBFFB-0227-46DB-8E3A-2D04094885D0}"/>
+              </a:ext>
+            </a:extLst>
+          </p:cNvPr>
+          <p:cNvSpPr>
+            <a:spLocks xmlns:a="http://schemas.openxmlformats.org/drawingml/2006/main" noGrp="1"/>
+          </p:cNvSpPr>
+          <p:nvPr/>
+        </p:nvSpPr>
+        <p:spPr>
+          <a:xfrm xmlns:a="http://schemas.openxmlformats.org/drawingml/2006/main">
+            <a:off x="6891867" y="2705100"/>
+            <a:ext cx="306917" cy="209550"/>
           </a:xfrm>
           <a:prstGeom xmlns:a="http://schemas.openxmlformats.org/drawingml/2006/main" prst="rect">
             <a:avLst/>
@@ -24222,19 +24222,19 @@
           <p:cNvPr id="22" name="">
             <a:extLst xmlns:a="http://schemas.openxmlformats.org/drawingml/2006/main">
               <a:ext uri="{FF2B5EF4-FFF2-40B4-BE49-F238E27FC236}">
-                <a16:creationId xmlns:a16="http://schemas.microsoft.com/office/drawing/2014/main" id="{CC79A53A-5078-4F41-A5BE-5400ABA82B60}"/>
-              </a:ext>
-            </a:extLst>
-          </p:cNvPr>
-          <p:cNvSpPr>
-            <a:spLocks xmlns:a="http://schemas.openxmlformats.org/drawingml/2006/main" noGrp="1"/>
-          </p:cNvSpPr>
-          <p:nvPr/>
-        </p:nvSpPr>
-        <p:spPr>
-          <a:xfrm xmlns:a="http://schemas.openxmlformats.org/drawingml/2006/main">
-            <a:off x="7207250" y="2645229"/>
-            <a:ext cx="317500" cy="225879"/>
+                <a16:creationId xmlns:a16="http://schemas.microsoft.com/office/drawing/2014/main" id="{9930685D-A6F4-4121-BAFC-66368EF02C6B}"/>
+              </a:ext>
+            </a:extLst>
+          </p:cNvPr>
+          <p:cNvSpPr>
+            <a:spLocks xmlns:a="http://schemas.openxmlformats.org/drawingml/2006/main" noGrp="1"/>
+          </p:cNvSpPr>
+          <p:nvPr/>
+        </p:nvSpPr>
+        <p:spPr>
+          <a:xfrm xmlns:a="http://schemas.openxmlformats.org/drawingml/2006/main">
+            <a:off x="7217833" y="2705100"/>
+            <a:ext cx="306917" cy="209550"/>
           </a:xfrm>
           <a:prstGeom xmlns:a="http://schemas.openxmlformats.org/drawingml/2006/main" prst="rect">
             <a:avLst/>
@@ -24255,19 +24255,19 @@
           <p:cNvPr id="23" name="">
             <a:extLst xmlns:a="http://schemas.openxmlformats.org/drawingml/2006/main">
               <a:ext uri="{FF2B5EF4-FFF2-40B4-BE49-F238E27FC236}">
-                <a16:creationId xmlns:a16="http://schemas.microsoft.com/office/drawing/2014/main" id="{09A53E54-6527-49FF-9877-1FC1500E5835}"/>
-              </a:ext>
-            </a:extLst>
-          </p:cNvPr>
-          <p:cNvSpPr>
-            <a:spLocks xmlns:a="http://schemas.openxmlformats.org/drawingml/2006/main" noGrp="1"/>
-          </p:cNvSpPr>
-          <p:nvPr/>
-        </p:nvSpPr>
-        <p:spPr>
-          <a:xfrm xmlns:a="http://schemas.openxmlformats.org/drawingml/2006/main">
-            <a:off x="4514850" y="2890157"/>
-            <a:ext cx="317500" cy="225879"/>
+                <a16:creationId xmlns:a16="http://schemas.microsoft.com/office/drawing/2014/main" id="{5C175573-C492-4E7A-9175-A20DF41E60B7}"/>
+              </a:ext>
+            </a:extLst>
+          </p:cNvPr>
+          <p:cNvSpPr>
+            <a:spLocks xmlns:a="http://schemas.openxmlformats.org/drawingml/2006/main" noGrp="1"/>
+          </p:cNvSpPr>
+          <p:nvPr/>
+        </p:nvSpPr>
+        <p:spPr>
+          <a:xfrm xmlns:a="http://schemas.openxmlformats.org/drawingml/2006/main">
+            <a:off x="4610100" y="2933700"/>
+            <a:ext cx="306917" cy="209550"/>
           </a:xfrm>
           <a:prstGeom xmlns:a="http://schemas.openxmlformats.org/drawingml/2006/main" prst="rect">
             <a:avLst/>
@@ -24288,19 +24288,19 @@
           <p:cNvPr id="24" name="">
             <a:extLst xmlns:a="http://schemas.openxmlformats.org/drawingml/2006/main">
               <a:ext uri="{FF2B5EF4-FFF2-40B4-BE49-F238E27FC236}">
-                <a16:creationId xmlns:a16="http://schemas.microsoft.com/office/drawing/2014/main" id="{570465AF-9414-4D22-A56C-8BDABBD04AA9}"/>
-              </a:ext>
-            </a:extLst>
-          </p:cNvPr>
-          <p:cNvSpPr>
-            <a:spLocks xmlns:a="http://schemas.openxmlformats.org/drawingml/2006/main" noGrp="1"/>
-          </p:cNvSpPr>
-          <p:nvPr/>
-        </p:nvSpPr>
-        <p:spPr>
-          <a:xfrm xmlns:a="http://schemas.openxmlformats.org/drawingml/2006/main">
-            <a:off x="4851400" y="2890157"/>
-            <a:ext cx="317500" cy="225879"/>
+                <a16:creationId xmlns:a16="http://schemas.microsoft.com/office/drawing/2014/main" id="{EEC70DEA-D4A6-46FB-AA7D-79C4B4E42657}"/>
+              </a:ext>
+            </a:extLst>
+          </p:cNvPr>
+          <p:cNvSpPr>
+            <a:spLocks xmlns:a="http://schemas.openxmlformats.org/drawingml/2006/main" noGrp="1"/>
+          </p:cNvSpPr>
+          <p:nvPr/>
+        </p:nvSpPr>
+        <p:spPr>
+          <a:xfrm xmlns:a="http://schemas.openxmlformats.org/drawingml/2006/main">
+            <a:off x="4936067" y="2933700"/>
+            <a:ext cx="306917" cy="209550"/>
           </a:xfrm>
           <a:prstGeom xmlns:a="http://schemas.openxmlformats.org/drawingml/2006/main" prst="rect">
             <a:avLst/>
@@ -24321,19 +24321,19 @@
           <p:cNvPr id="25" name="">
             <a:extLst xmlns:a="http://schemas.openxmlformats.org/drawingml/2006/main">
               <a:ext uri="{FF2B5EF4-FFF2-40B4-BE49-F238E27FC236}">
-                <a16:creationId xmlns:a16="http://schemas.microsoft.com/office/drawing/2014/main" id="{F264C58F-FAC7-4C37-9203-C46415441204}"/>
-              </a:ext>
-            </a:extLst>
-          </p:cNvPr>
-          <p:cNvSpPr>
-            <a:spLocks xmlns:a="http://schemas.openxmlformats.org/drawingml/2006/main" noGrp="1"/>
-          </p:cNvSpPr>
-          <p:nvPr/>
-        </p:nvSpPr>
-        <p:spPr>
-          <a:xfrm xmlns:a="http://schemas.openxmlformats.org/drawingml/2006/main">
-            <a:off x="5187950" y="2890157"/>
-            <a:ext cx="317500" cy="225879"/>
+                <a16:creationId xmlns:a16="http://schemas.microsoft.com/office/drawing/2014/main" id="{64F5D202-01E4-4195-BBA5-62B9E24AD709}"/>
+              </a:ext>
+            </a:extLst>
+          </p:cNvPr>
+          <p:cNvSpPr>
+            <a:spLocks xmlns:a="http://schemas.openxmlformats.org/drawingml/2006/main" noGrp="1"/>
+          </p:cNvSpPr>
+          <p:nvPr/>
+        </p:nvSpPr>
+        <p:spPr>
+          <a:xfrm xmlns:a="http://schemas.openxmlformats.org/drawingml/2006/main">
+            <a:off x="5262033" y="2933700"/>
+            <a:ext cx="306917" cy="209550"/>
           </a:xfrm>
           <a:prstGeom xmlns:a="http://schemas.openxmlformats.org/drawingml/2006/main" prst="rect">
             <a:avLst/>
@@ -24354,19 +24354,19 @@
           <p:cNvPr id="26" name="">
             <a:extLst xmlns:a="http://schemas.openxmlformats.org/drawingml/2006/main">
               <a:ext uri="{FF2B5EF4-FFF2-40B4-BE49-F238E27FC236}">
-                <a16:creationId xmlns:a16="http://schemas.microsoft.com/office/drawing/2014/main" id="{9EF027E1-5942-4B25-9938-BFE3076AE79F}"/>
-              </a:ext>
-            </a:extLst>
-          </p:cNvPr>
-          <p:cNvSpPr>
-            <a:spLocks xmlns:a="http://schemas.openxmlformats.org/drawingml/2006/main" noGrp="1"/>
-          </p:cNvSpPr>
-          <p:nvPr/>
-        </p:nvSpPr>
-        <p:spPr>
-          <a:xfrm xmlns:a="http://schemas.openxmlformats.org/drawingml/2006/main">
-            <a:off x="5524500" y="2890157"/>
-            <a:ext cx="317500" cy="225879"/>
+                <a16:creationId xmlns:a16="http://schemas.microsoft.com/office/drawing/2014/main" id="{ECA3E21C-85C0-4F17-87B0-29A7EA357E0B}"/>
+              </a:ext>
+            </a:extLst>
+          </p:cNvPr>
+          <p:cNvSpPr>
+            <a:spLocks xmlns:a="http://schemas.openxmlformats.org/drawingml/2006/main" noGrp="1"/>
+          </p:cNvSpPr>
+          <p:nvPr/>
+        </p:nvSpPr>
+        <p:spPr>
+          <a:xfrm xmlns:a="http://schemas.openxmlformats.org/drawingml/2006/main">
+            <a:off x="5588000" y="2933700"/>
+            <a:ext cx="306917" cy="209550"/>
           </a:xfrm>
           <a:prstGeom xmlns:a="http://schemas.openxmlformats.org/drawingml/2006/main" prst="rect">
             <a:avLst/>
@@ -24387,19 +24387,19 @@
           <p:cNvPr id="27" name="">
             <a:extLst xmlns:a="http://schemas.openxmlformats.org/drawingml/2006/main">
               <a:ext uri="{FF2B5EF4-FFF2-40B4-BE49-F238E27FC236}">
-                <a16:creationId xmlns:a16="http://schemas.microsoft.com/office/drawing/2014/main" id="{874F47ED-84CA-4B70-A9D4-245180931C5C}"/>
-              </a:ext>
-            </a:extLst>
-          </p:cNvPr>
-          <p:cNvSpPr>
-            <a:spLocks xmlns:a="http://schemas.openxmlformats.org/drawingml/2006/main" noGrp="1"/>
-          </p:cNvSpPr>
-          <p:nvPr/>
-        </p:nvSpPr>
-        <p:spPr>
-          <a:xfrm xmlns:a="http://schemas.openxmlformats.org/drawingml/2006/main">
-            <a:off x="5861050" y="2890157"/>
-            <a:ext cx="317500" cy="225879"/>
+                <a16:creationId xmlns:a16="http://schemas.microsoft.com/office/drawing/2014/main" id="{A224AC0A-E82E-417D-9C64-EE463C73EDE1}"/>
+              </a:ext>
+            </a:extLst>
+          </p:cNvPr>
+          <p:cNvSpPr>
+            <a:spLocks xmlns:a="http://schemas.openxmlformats.org/drawingml/2006/main" noGrp="1"/>
+          </p:cNvSpPr>
+          <p:nvPr/>
+        </p:nvSpPr>
+        <p:spPr>
+          <a:xfrm xmlns:a="http://schemas.openxmlformats.org/drawingml/2006/main">
+            <a:off x="5913967" y="2933700"/>
+            <a:ext cx="306917" cy="209550"/>
           </a:xfrm>
           <a:prstGeom xmlns:a="http://schemas.openxmlformats.org/drawingml/2006/main" prst="rect">
             <a:avLst/>
@@ -24420,19 +24420,19 @@
           <p:cNvPr id="28" name="">
             <a:extLst xmlns:a="http://schemas.openxmlformats.org/drawingml/2006/main">
               <a:ext uri="{FF2B5EF4-FFF2-40B4-BE49-F238E27FC236}">
-                <a16:creationId xmlns:a16="http://schemas.microsoft.com/office/drawing/2014/main" id="{E492460C-4DB2-494A-AD92-0EF36F87E722}"/>
-              </a:ext>
-            </a:extLst>
-          </p:cNvPr>
-          <p:cNvSpPr>
-            <a:spLocks xmlns:a="http://schemas.openxmlformats.org/drawingml/2006/main" noGrp="1"/>
-          </p:cNvSpPr>
-          <p:nvPr/>
-        </p:nvSpPr>
-        <p:spPr>
-          <a:xfrm xmlns:a="http://schemas.openxmlformats.org/drawingml/2006/main">
-            <a:off x="6197600" y="2890157"/>
-            <a:ext cx="317500" cy="225879"/>
+                <a16:creationId xmlns:a16="http://schemas.microsoft.com/office/drawing/2014/main" id="{7DEA824A-8134-4F43-8C45-8FA50EF614A0}"/>
+              </a:ext>
+            </a:extLst>
+          </p:cNvPr>
+          <p:cNvSpPr>
+            <a:spLocks xmlns:a="http://schemas.openxmlformats.org/drawingml/2006/main" noGrp="1"/>
+          </p:cNvSpPr>
+          <p:nvPr/>
+        </p:nvSpPr>
+        <p:spPr>
+          <a:xfrm xmlns:a="http://schemas.openxmlformats.org/drawingml/2006/main">
+            <a:off x="6239933" y="2933700"/>
+            <a:ext cx="306917" cy="209550"/>
           </a:xfrm>
           <a:prstGeom xmlns:a="http://schemas.openxmlformats.org/drawingml/2006/main" prst="rect">
             <a:avLst/>
@@ -24453,19 +24453,19 @@
           <p:cNvPr id="29" name="">
             <a:extLst xmlns:a="http://schemas.openxmlformats.org/drawingml/2006/main">
               <a:ext uri="{FF2B5EF4-FFF2-40B4-BE49-F238E27FC236}">
-                <a16:creationId xmlns:a16="http://schemas.microsoft.com/office/drawing/2014/main" id="{B4FE92D4-AF34-4379-ADE4-828A8FF4FE62}"/>
-              </a:ext>
-            </a:extLst>
-          </p:cNvPr>
-          <p:cNvSpPr>
-            <a:spLocks xmlns:a="http://schemas.openxmlformats.org/drawingml/2006/main" noGrp="1"/>
-          </p:cNvSpPr>
-          <p:nvPr/>
-        </p:nvSpPr>
-        <p:spPr>
-          <a:xfrm xmlns:a="http://schemas.openxmlformats.org/drawingml/2006/main">
-            <a:off x="6534150" y="2890157"/>
-            <a:ext cx="317500" cy="225879"/>
+                <a16:creationId xmlns:a16="http://schemas.microsoft.com/office/drawing/2014/main" id="{966A3440-F1A0-4896-B299-B496AB364D13}"/>
+              </a:ext>
+            </a:extLst>
+          </p:cNvPr>
+          <p:cNvSpPr>
+            <a:spLocks xmlns:a="http://schemas.openxmlformats.org/drawingml/2006/main" noGrp="1"/>
+          </p:cNvSpPr>
+          <p:nvPr/>
+        </p:nvSpPr>
+        <p:spPr>
+          <a:xfrm xmlns:a="http://schemas.openxmlformats.org/drawingml/2006/main">
+            <a:off x="6565900" y="2933700"/>
+            <a:ext cx="306917" cy="209550"/>
           </a:xfrm>
           <a:prstGeom xmlns:a="http://schemas.openxmlformats.org/drawingml/2006/main" prst="rect">
             <a:avLst/>
@@ -24486,19 +24486,19 @@
           <p:cNvPr id="30" name="">
             <a:extLst xmlns:a="http://schemas.openxmlformats.org/drawingml/2006/main">
               <a:ext uri="{FF2B5EF4-FFF2-40B4-BE49-F238E27FC236}">
-                <a16:creationId xmlns:a16="http://schemas.microsoft.com/office/drawing/2014/main" id="{629CD971-A845-4E40-8150-D8CE870235AB}"/>
-              </a:ext>
-            </a:extLst>
-          </p:cNvPr>
-          <p:cNvSpPr>
-            <a:spLocks xmlns:a="http://schemas.openxmlformats.org/drawingml/2006/main" noGrp="1"/>
-          </p:cNvSpPr>
-          <p:nvPr/>
-        </p:nvSpPr>
-        <p:spPr>
-          <a:xfrm xmlns:a="http://schemas.openxmlformats.org/drawingml/2006/main">
-            <a:off x="6870700" y="2890157"/>
-            <a:ext cx="317500" cy="225879"/>
+                <a16:creationId xmlns:a16="http://schemas.microsoft.com/office/drawing/2014/main" id="{947E070E-AE49-4CE9-8370-778538C9D1E9}"/>
+              </a:ext>
+            </a:extLst>
+          </p:cNvPr>
+          <p:cNvSpPr>
+            <a:spLocks xmlns:a="http://schemas.openxmlformats.org/drawingml/2006/main" noGrp="1"/>
+          </p:cNvSpPr>
+          <p:nvPr/>
+        </p:nvSpPr>
+        <p:spPr>
+          <a:xfrm xmlns:a="http://schemas.openxmlformats.org/drawingml/2006/main">
+            <a:off x="6891867" y="2933700"/>
+            <a:ext cx="306917" cy="209550"/>
           </a:xfrm>
           <a:prstGeom xmlns:a="http://schemas.openxmlformats.org/drawingml/2006/main" prst="rect">
             <a:avLst/>
@@ -24519,19 +24519,19 @@
           <p:cNvPr id="31" name="">
             <a:extLst xmlns:a="http://schemas.openxmlformats.org/drawingml/2006/main">
               <a:ext uri="{FF2B5EF4-FFF2-40B4-BE49-F238E27FC236}">
-                <a16:creationId xmlns:a16="http://schemas.microsoft.com/office/drawing/2014/main" id="{D85C8DEC-232F-442C-B0E3-EEA1DC30B22D}"/>
-              </a:ext>
-            </a:extLst>
-          </p:cNvPr>
-          <p:cNvSpPr>
-            <a:spLocks xmlns:a="http://schemas.openxmlformats.org/drawingml/2006/main" noGrp="1"/>
-          </p:cNvSpPr>
-          <p:nvPr/>
-        </p:nvSpPr>
-        <p:spPr>
-          <a:xfrm xmlns:a="http://schemas.openxmlformats.org/drawingml/2006/main">
-            <a:off x="7207250" y="2890157"/>
-            <a:ext cx="317500" cy="225879"/>
+                <a16:creationId xmlns:a16="http://schemas.microsoft.com/office/drawing/2014/main" id="{A861F895-1AAB-453A-990E-BCA4EAA684E3}"/>
+              </a:ext>
+            </a:extLst>
+          </p:cNvPr>
+          <p:cNvSpPr>
+            <a:spLocks xmlns:a="http://schemas.openxmlformats.org/drawingml/2006/main" noGrp="1"/>
+          </p:cNvSpPr>
+          <p:nvPr/>
+        </p:nvSpPr>
+        <p:spPr>
+          <a:xfrm xmlns:a="http://schemas.openxmlformats.org/drawingml/2006/main">
+            <a:off x="7217833" y="2933700"/>
+            <a:ext cx="306917" cy="209550"/>
           </a:xfrm>
           <a:prstGeom xmlns:a="http://schemas.openxmlformats.org/drawingml/2006/main" prst="rect">
             <a:avLst/>
@@ -24552,19 +24552,19 @@
           <p:cNvPr id="32" name="">
             <a:extLst xmlns:a="http://schemas.openxmlformats.org/drawingml/2006/main">
               <a:ext uri="{FF2B5EF4-FFF2-40B4-BE49-F238E27FC236}">
-                <a16:creationId xmlns:a16="http://schemas.microsoft.com/office/drawing/2014/main" id="{D84F77E5-2703-4FB6-B2C6-D7570EB68ECF}"/>
-              </a:ext>
-            </a:extLst>
-          </p:cNvPr>
-          <p:cNvSpPr>
-            <a:spLocks xmlns:a="http://schemas.openxmlformats.org/drawingml/2006/main" noGrp="1"/>
-          </p:cNvSpPr>
-          <p:nvPr/>
-        </p:nvSpPr>
-        <p:spPr>
-          <a:xfrm xmlns:a="http://schemas.openxmlformats.org/drawingml/2006/main">
-            <a:off x="4514850" y="3135086"/>
-            <a:ext cx="317500" cy="225879"/>
+                <a16:creationId xmlns:a16="http://schemas.microsoft.com/office/drawing/2014/main" id="{158EA794-0E21-4C63-8431-77CAA3B95822}"/>
+              </a:ext>
+            </a:extLst>
+          </p:cNvPr>
+          <p:cNvSpPr>
+            <a:spLocks xmlns:a="http://schemas.openxmlformats.org/drawingml/2006/main" noGrp="1"/>
+          </p:cNvSpPr>
+          <p:nvPr/>
+        </p:nvSpPr>
+        <p:spPr>
+          <a:xfrm xmlns:a="http://schemas.openxmlformats.org/drawingml/2006/main">
+            <a:off x="4610100" y="3162300"/>
+            <a:ext cx="306917" cy="209550"/>
           </a:xfrm>
           <a:prstGeom xmlns:a="http://schemas.openxmlformats.org/drawingml/2006/main" prst="rect">
             <a:avLst/>
@@ -24585,19 +24585,19 @@
           <p:cNvPr id="33" name="">
             <a:extLst xmlns:a="http://schemas.openxmlformats.org/drawingml/2006/main">
               <a:ext uri="{FF2B5EF4-FFF2-40B4-BE49-F238E27FC236}">
-                <a16:creationId xmlns:a16="http://schemas.microsoft.com/office/drawing/2014/main" id="{A7DCBB21-4DA7-44BB-9C0C-5306488771D6}"/>
-              </a:ext>
-            </a:extLst>
-          </p:cNvPr>
-          <p:cNvSpPr>
-            <a:spLocks xmlns:a="http://schemas.openxmlformats.org/drawingml/2006/main" noGrp="1"/>
-          </p:cNvSpPr>
-          <p:nvPr/>
-        </p:nvSpPr>
-        <p:spPr>
-          <a:xfrm xmlns:a="http://schemas.openxmlformats.org/drawingml/2006/main">
-            <a:off x="4851400" y="3135086"/>
-            <a:ext cx="317500" cy="225879"/>
+                <a16:creationId xmlns:a16="http://schemas.microsoft.com/office/drawing/2014/main" id="{ADC5D1D8-0CC0-4836-A115-47741975ED8A}"/>
+              </a:ext>
+            </a:extLst>
+          </p:cNvPr>
+          <p:cNvSpPr>
+            <a:spLocks xmlns:a="http://schemas.openxmlformats.org/drawingml/2006/main" noGrp="1"/>
+          </p:cNvSpPr>
+          <p:nvPr/>
+        </p:nvSpPr>
+        <p:spPr>
+          <a:xfrm xmlns:a="http://schemas.openxmlformats.org/drawingml/2006/main">
+            <a:off x="4936067" y="3162300"/>
+            <a:ext cx="306917" cy="209550"/>
           </a:xfrm>
           <a:prstGeom xmlns:a="http://schemas.openxmlformats.org/drawingml/2006/main" prst="rect">
             <a:avLst/>
@@ -24618,19 +24618,19 @@
           <p:cNvPr id="34" name="">
             <a:extLst xmlns:a="http://schemas.openxmlformats.org/drawingml/2006/main">
               <a:ext uri="{FF2B5EF4-FFF2-40B4-BE49-F238E27FC236}">
-                <a16:creationId xmlns:a16="http://schemas.microsoft.com/office/drawing/2014/main" id="{2A8765B3-5FF5-41C5-8656-9732A010A308}"/>
-              </a:ext>
-            </a:extLst>
-          </p:cNvPr>
-          <p:cNvSpPr>
-            <a:spLocks xmlns:a="http://schemas.openxmlformats.org/drawingml/2006/main" noGrp="1"/>
-          </p:cNvSpPr>
-          <p:nvPr/>
-        </p:nvSpPr>
-        <p:spPr>
-          <a:xfrm xmlns:a="http://schemas.openxmlformats.org/drawingml/2006/main">
-            <a:off x="5187950" y="3135086"/>
-            <a:ext cx="317500" cy="225879"/>
+                <a16:creationId xmlns:a16="http://schemas.microsoft.com/office/drawing/2014/main" id="{6FCE1761-7C44-4808-9AAF-69C4A17261C8}"/>
+              </a:ext>
+            </a:extLst>
+          </p:cNvPr>
+          <p:cNvSpPr>
+            <a:spLocks xmlns:a="http://schemas.openxmlformats.org/drawingml/2006/main" noGrp="1"/>
+          </p:cNvSpPr>
+          <p:nvPr/>
+        </p:nvSpPr>
+        <p:spPr>
+          <a:xfrm xmlns:a="http://schemas.openxmlformats.org/drawingml/2006/main">
+            <a:off x="5262033" y="3162300"/>
+            <a:ext cx="306917" cy="209550"/>
           </a:xfrm>
           <a:prstGeom xmlns:a="http://schemas.openxmlformats.org/drawingml/2006/main" prst="rect">
             <a:avLst/>
@@ -24651,19 +24651,19 @@
           <p:cNvPr id="35" name="">
             <a:extLst xmlns:a="http://schemas.openxmlformats.org/drawingml/2006/main">
               <a:ext uri="{FF2B5EF4-FFF2-40B4-BE49-F238E27FC236}">
-                <a16:creationId xmlns:a16="http://schemas.microsoft.com/office/drawing/2014/main" id="{CBCC16CD-CF51-4292-A5C5-953CBB8443C3}"/>
-              </a:ext>
-            </a:extLst>
-          </p:cNvPr>
-          <p:cNvSpPr>
-            <a:spLocks xmlns:a="http://schemas.openxmlformats.org/drawingml/2006/main" noGrp="1"/>
-          </p:cNvSpPr>
-          <p:nvPr/>
-        </p:nvSpPr>
-        <p:spPr>
-          <a:xfrm xmlns:a="http://schemas.openxmlformats.org/drawingml/2006/main">
-            <a:off x="5524500" y="3135086"/>
-            <a:ext cx="317500" cy="225879"/>
+                <a16:creationId xmlns:a16="http://schemas.microsoft.com/office/drawing/2014/main" id="{4D08F565-9F98-46A7-A2D6-1CD0A92AB2EF}"/>
+              </a:ext>
+            </a:extLst>
+          </p:cNvPr>
+          <p:cNvSpPr>
+            <a:spLocks xmlns:a="http://schemas.openxmlformats.org/drawingml/2006/main" noGrp="1"/>
+          </p:cNvSpPr>
+          <p:nvPr/>
+        </p:nvSpPr>
+        <p:spPr>
+          <a:xfrm xmlns:a="http://schemas.openxmlformats.org/drawingml/2006/main">
+            <a:off x="5588000" y="3162300"/>
+            <a:ext cx="306917" cy="209550"/>
           </a:xfrm>
           <a:prstGeom xmlns:a="http://schemas.openxmlformats.org/drawingml/2006/main" prst="rect">
             <a:avLst/>
@@ -24684,19 +24684,19 @@
           <p:cNvPr id="36" name="">
             <a:extLst xmlns:a="http://schemas.openxmlformats.org/drawingml/2006/main">
               <a:ext uri="{FF2B5EF4-FFF2-40B4-BE49-F238E27FC236}">
-                <a16:creationId xmlns:a16="http://schemas.microsoft.com/office/drawing/2014/main" id="{191800A0-AC61-4B2E-8BB2-9147BB9E1CBE}"/>
-              </a:ext>
-            </a:extLst>
-          </p:cNvPr>
-          <p:cNvSpPr>
-            <a:spLocks xmlns:a="http://schemas.openxmlformats.org/drawingml/2006/main" noGrp="1"/>
-          </p:cNvSpPr>
-          <p:nvPr/>
-        </p:nvSpPr>
-        <p:spPr>
-          <a:xfrm xmlns:a="http://schemas.openxmlformats.org/drawingml/2006/main">
-            <a:off x="5861050" y="3135086"/>
-            <a:ext cx="317500" cy="225879"/>
+                <a16:creationId xmlns:a16="http://schemas.microsoft.com/office/drawing/2014/main" id="{B5854769-1E41-4B98-8DFE-A988604BE726}"/>
+              </a:ext>
+            </a:extLst>
+          </p:cNvPr>
+          <p:cNvSpPr>
+            <a:spLocks xmlns:a="http://schemas.openxmlformats.org/drawingml/2006/main" noGrp="1"/>
+          </p:cNvSpPr>
+          <p:nvPr/>
+        </p:nvSpPr>
+        <p:spPr>
+          <a:xfrm xmlns:a="http://schemas.openxmlformats.org/drawingml/2006/main">
+            <a:off x="5913967" y="3162300"/>
+            <a:ext cx="306917" cy="209550"/>
           </a:xfrm>
           <a:prstGeom xmlns:a="http://schemas.openxmlformats.org/drawingml/2006/main" prst="rect">
             <a:avLst/>
@@ -24717,19 +24717,19 @@
           <p:cNvPr id="37" name="">
             <a:extLst xmlns:a="http://schemas.openxmlformats.org/drawingml/2006/main">
               <a:ext uri="{FF2B5EF4-FFF2-40B4-BE49-F238E27FC236}">
-                <a16:creationId xmlns:a16="http://schemas.microsoft.com/office/drawing/2014/main" id="{EA01DA31-ECE9-4632-884E-370B5D4B7163}"/>
-              </a:ext>
-            </a:extLst>
-          </p:cNvPr>
-          <p:cNvSpPr>
-            <a:spLocks xmlns:a="http://schemas.openxmlformats.org/drawingml/2006/main" noGrp="1"/>
-          </p:cNvSpPr>
-          <p:nvPr/>
-        </p:nvSpPr>
-        <p:spPr>
-          <a:xfrm xmlns:a="http://schemas.openxmlformats.org/drawingml/2006/main">
-            <a:off x="6197600" y="3135086"/>
-            <a:ext cx="317500" cy="225879"/>
+                <a16:creationId xmlns:a16="http://schemas.microsoft.com/office/drawing/2014/main" id="{B49566BC-2EC9-475C-BFBE-E804AC41E28B}"/>
+              </a:ext>
+            </a:extLst>
+          </p:cNvPr>
+          <p:cNvSpPr>
+            <a:spLocks xmlns:a="http://schemas.openxmlformats.org/drawingml/2006/main" noGrp="1"/>
+          </p:cNvSpPr>
+          <p:nvPr/>
+        </p:nvSpPr>
+        <p:spPr>
+          <a:xfrm xmlns:a="http://schemas.openxmlformats.org/drawingml/2006/main">
+            <a:off x="6239933" y="3162300"/>
+            <a:ext cx="306917" cy="209550"/>
           </a:xfrm>
           <a:prstGeom xmlns:a="http://schemas.openxmlformats.org/drawingml/2006/main" prst="rect">
             <a:avLst/>
@@ -24750,19 +24750,19 @@
           <p:cNvPr id="38" name="">
             <a:extLst xmlns:a="http://schemas.openxmlformats.org/drawingml/2006/main">
               <a:ext uri="{FF2B5EF4-FFF2-40B4-BE49-F238E27FC236}">
-                <a16:creationId xmlns:a16="http://schemas.microsoft.com/office/drawing/2014/main" id="{C4894BA7-739C-4966-82F4-4BBB37250161}"/>
-              </a:ext>
-            </a:extLst>
-          </p:cNvPr>
-          <p:cNvSpPr>
-            <a:spLocks xmlns:a="http://schemas.openxmlformats.org/drawingml/2006/main" noGrp="1"/>
-          </p:cNvSpPr>
-          <p:nvPr/>
-        </p:nvSpPr>
-        <p:spPr>
-          <a:xfrm xmlns:a="http://schemas.openxmlformats.org/drawingml/2006/main">
-            <a:off x="6534150" y="3135086"/>
-            <a:ext cx="317500" cy="225879"/>
+                <a16:creationId xmlns:a16="http://schemas.microsoft.com/office/drawing/2014/main" id="{17EDCE28-EF12-4069-92DC-129D806C5D96}"/>
+              </a:ext>
+            </a:extLst>
+          </p:cNvPr>
+          <p:cNvSpPr>
+            <a:spLocks xmlns:a="http://schemas.openxmlformats.org/drawingml/2006/main" noGrp="1"/>
+          </p:cNvSpPr>
+          <p:nvPr/>
+        </p:nvSpPr>
+        <p:spPr>
+          <a:xfrm xmlns:a="http://schemas.openxmlformats.org/drawingml/2006/main">
+            <a:off x="6565900" y="3162300"/>
+            <a:ext cx="306917" cy="209550"/>
           </a:xfrm>
           <a:prstGeom xmlns:a="http://schemas.openxmlformats.org/drawingml/2006/main" prst="rect">
             <a:avLst/>
@@ -24783,19 +24783,19 @@
           <p:cNvPr id="39" name="">
             <a:extLst xmlns:a="http://schemas.openxmlformats.org/drawingml/2006/main">
               <a:ext uri="{FF2B5EF4-FFF2-40B4-BE49-F238E27FC236}">
-                <a16:creationId xmlns:a16="http://schemas.microsoft.com/office/drawing/2014/main" id="{87403EFE-818C-478F-9AC3-5FDC6C4F936A}"/>
-              </a:ext>
-            </a:extLst>
-          </p:cNvPr>
-          <p:cNvSpPr>
-            <a:spLocks xmlns:a="http://schemas.openxmlformats.org/drawingml/2006/main" noGrp="1"/>
-          </p:cNvSpPr>
-          <p:nvPr/>
-        </p:nvSpPr>
-        <p:spPr>
-          <a:xfrm xmlns:a="http://schemas.openxmlformats.org/drawingml/2006/main">
-            <a:off x="6870700" y="3135086"/>
-            <a:ext cx="317500" cy="225879"/>
+                <a16:creationId xmlns:a16="http://schemas.microsoft.com/office/drawing/2014/main" id="{817BF4EA-3D43-4F97-8B14-A615507C3029}"/>
+              </a:ext>
+            </a:extLst>
+          </p:cNvPr>
+          <p:cNvSpPr>
+            <a:spLocks xmlns:a="http://schemas.openxmlformats.org/drawingml/2006/main" noGrp="1"/>
+          </p:cNvSpPr>
+          <p:nvPr/>
+        </p:nvSpPr>
+        <p:spPr>
+          <a:xfrm xmlns:a="http://schemas.openxmlformats.org/drawingml/2006/main">
+            <a:off x="6891867" y="3162300"/>
+            <a:ext cx="306917" cy="209550"/>
           </a:xfrm>
           <a:prstGeom xmlns:a="http://schemas.openxmlformats.org/drawingml/2006/main" prst="rect">
             <a:avLst/>
@@ -24816,19 +24816,19 @@
           <p:cNvPr id="40" name="">
             <a:extLst xmlns:a="http://schemas.openxmlformats.org/drawingml/2006/main">
               <a:ext uri="{FF2B5EF4-FFF2-40B4-BE49-F238E27FC236}">
-                <a16:creationId xmlns:a16="http://schemas.microsoft.com/office/drawing/2014/main" id="{26028166-31D4-4B8C-BC34-16B015A08409}"/>
-              </a:ext>
-            </a:extLst>
-          </p:cNvPr>
-          <p:cNvSpPr>
-            <a:spLocks xmlns:a="http://schemas.openxmlformats.org/drawingml/2006/main" noGrp="1"/>
-          </p:cNvSpPr>
-          <p:nvPr/>
-        </p:nvSpPr>
-        <p:spPr>
-          <a:xfrm xmlns:a="http://schemas.openxmlformats.org/drawingml/2006/main">
-            <a:off x="7207250" y="3135086"/>
-            <a:ext cx="317500" cy="225879"/>
+                <a16:creationId xmlns:a16="http://schemas.microsoft.com/office/drawing/2014/main" id="{68DC73FF-A282-4671-8086-1D7955465043}"/>
+              </a:ext>
+            </a:extLst>
+          </p:cNvPr>
+          <p:cNvSpPr>
+            <a:spLocks xmlns:a="http://schemas.openxmlformats.org/drawingml/2006/main" noGrp="1"/>
+          </p:cNvSpPr>
+          <p:nvPr/>
+        </p:nvSpPr>
+        <p:spPr>
+          <a:xfrm xmlns:a="http://schemas.openxmlformats.org/drawingml/2006/main">
+            <a:off x="7217833" y="3162300"/>
+            <a:ext cx="306917" cy="209550"/>
           </a:xfrm>
           <a:prstGeom xmlns:a="http://schemas.openxmlformats.org/drawingml/2006/main" prst="rect">
             <a:avLst/>
@@ -24849,19 +24849,19 @@
           <p:cNvPr id="41" name="">
             <a:extLst xmlns:a="http://schemas.openxmlformats.org/drawingml/2006/main">
               <a:ext uri="{FF2B5EF4-FFF2-40B4-BE49-F238E27FC236}">
-                <a16:creationId xmlns:a16="http://schemas.microsoft.com/office/drawing/2014/main" id="{EB6609E5-DE7A-47D2-B8E1-B0CCF058CB26}"/>
-              </a:ext>
-            </a:extLst>
-          </p:cNvPr>
-          <p:cNvSpPr>
-            <a:spLocks xmlns:a="http://schemas.openxmlformats.org/drawingml/2006/main" noGrp="1"/>
-          </p:cNvSpPr>
-          <p:nvPr/>
-        </p:nvSpPr>
-        <p:spPr>
-          <a:xfrm xmlns:a="http://schemas.openxmlformats.org/drawingml/2006/main">
-            <a:off x="4514850" y="3380014"/>
-            <a:ext cx="317500" cy="225879"/>
+                <a16:creationId xmlns:a16="http://schemas.microsoft.com/office/drawing/2014/main" id="{9246CDF2-A0A7-4EDC-8CA6-0F10E9089EA6}"/>
+              </a:ext>
+            </a:extLst>
+          </p:cNvPr>
+          <p:cNvSpPr>
+            <a:spLocks xmlns:a="http://schemas.openxmlformats.org/drawingml/2006/main" noGrp="1"/>
+          </p:cNvSpPr>
+          <p:nvPr/>
+        </p:nvSpPr>
+        <p:spPr>
+          <a:xfrm xmlns:a="http://schemas.openxmlformats.org/drawingml/2006/main">
+            <a:off x="4610100" y="3390900"/>
+            <a:ext cx="306917" cy="209550"/>
           </a:xfrm>
           <a:prstGeom xmlns:a="http://schemas.openxmlformats.org/drawingml/2006/main" prst="rect">
             <a:avLst/>
@@ -24882,19 +24882,19 @@
           <p:cNvPr id="42" name="">
             <a:extLst xmlns:a="http://schemas.openxmlformats.org/drawingml/2006/main">
               <a:ext uri="{FF2B5EF4-FFF2-40B4-BE49-F238E27FC236}">
-                <a16:creationId xmlns:a16="http://schemas.microsoft.com/office/drawing/2014/main" id="{E3D04A73-9EBD-4A12-8534-FF6D3F254F32}"/>
-              </a:ext>
-            </a:extLst>
-          </p:cNvPr>
-          <p:cNvSpPr>
-            <a:spLocks xmlns:a="http://schemas.openxmlformats.org/drawingml/2006/main" noGrp="1"/>
-          </p:cNvSpPr>
-          <p:nvPr/>
-        </p:nvSpPr>
-        <p:spPr>
-          <a:xfrm xmlns:a="http://schemas.openxmlformats.org/drawingml/2006/main">
-            <a:off x="4851400" y="3380014"/>
-            <a:ext cx="317500" cy="225879"/>
+                <a16:creationId xmlns:a16="http://schemas.microsoft.com/office/drawing/2014/main" id="{D2A21913-BA00-42ED-B996-80A56C7EC718}"/>
+              </a:ext>
+            </a:extLst>
+          </p:cNvPr>
+          <p:cNvSpPr>
+            <a:spLocks xmlns:a="http://schemas.openxmlformats.org/drawingml/2006/main" noGrp="1"/>
+          </p:cNvSpPr>
+          <p:nvPr/>
+        </p:nvSpPr>
+        <p:spPr>
+          <a:xfrm xmlns:a="http://schemas.openxmlformats.org/drawingml/2006/main">
+            <a:off x="4936067" y="3390900"/>
+            <a:ext cx="306917" cy="209550"/>
           </a:xfrm>
           <a:prstGeom xmlns:a="http://schemas.openxmlformats.org/drawingml/2006/main" prst="rect">
             <a:avLst/>
@@ -24915,19 +24915,19 @@
           <p:cNvPr id="43" name="">
             <a:extLst xmlns:a="http://schemas.openxmlformats.org/drawingml/2006/main">
               <a:ext uri="{FF2B5EF4-FFF2-40B4-BE49-F238E27FC236}">
-                <a16:creationId xmlns:a16="http://schemas.microsoft.com/office/drawing/2014/main" id="{D628C8BC-9582-42D5-80DC-2471F6AA29B3}"/>
-              </a:ext>
-            </a:extLst>
-          </p:cNvPr>
-          <p:cNvSpPr>
-            <a:spLocks xmlns:a="http://schemas.openxmlformats.org/drawingml/2006/main" noGrp="1"/>
-          </p:cNvSpPr>
-          <p:nvPr/>
-        </p:nvSpPr>
-        <p:spPr>
-          <a:xfrm xmlns:a="http://schemas.openxmlformats.org/drawingml/2006/main">
-            <a:off x="5187950" y="3380014"/>
-            <a:ext cx="317500" cy="225879"/>
+                <a16:creationId xmlns:a16="http://schemas.microsoft.com/office/drawing/2014/main" id="{229B1461-25A0-47A4-BBC8-CCE4C2D8FF5B}"/>
+              </a:ext>
+            </a:extLst>
+          </p:cNvPr>
+          <p:cNvSpPr>
+            <a:spLocks xmlns:a="http://schemas.openxmlformats.org/drawingml/2006/main" noGrp="1"/>
+          </p:cNvSpPr>
+          <p:nvPr/>
+        </p:nvSpPr>
+        <p:spPr>
+          <a:xfrm xmlns:a="http://schemas.openxmlformats.org/drawingml/2006/main">
+            <a:off x="5262033" y="3390900"/>
+            <a:ext cx="306917" cy="209550"/>
           </a:xfrm>
           <a:prstGeom xmlns:a="http://schemas.openxmlformats.org/drawingml/2006/main" prst="rect">
             <a:avLst/>
@@ -24948,19 +24948,19 @@
           <p:cNvPr id="44" name="">
             <a:extLst xmlns:a="http://schemas.openxmlformats.org/drawingml/2006/main">
               <a:ext uri="{FF2B5EF4-FFF2-40B4-BE49-F238E27FC236}">
-                <a16:creationId xmlns:a16="http://schemas.microsoft.com/office/drawing/2014/main" id="{C3E64145-FF48-4F2C-8254-B98103592448}"/>
-              </a:ext>
-            </a:extLst>
-          </p:cNvPr>
-          <p:cNvSpPr>
-            <a:spLocks xmlns:a="http://schemas.openxmlformats.org/drawingml/2006/main" noGrp="1"/>
-          </p:cNvSpPr>
-          <p:nvPr/>
-        </p:nvSpPr>
-        <p:spPr>
-          <a:xfrm xmlns:a="http://schemas.openxmlformats.org/drawingml/2006/main">
-            <a:off x="5524500" y="3380014"/>
-            <a:ext cx="317500" cy="225879"/>
+                <a16:creationId xmlns:a16="http://schemas.microsoft.com/office/drawing/2014/main" id="{D9ECA9ED-D65B-4620-9C09-413F4033C27F}"/>
+              </a:ext>
+            </a:extLst>
+          </p:cNvPr>
+          <p:cNvSpPr>
+            <a:spLocks xmlns:a="http://schemas.openxmlformats.org/drawingml/2006/main" noGrp="1"/>
+          </p:cNvSpPr>
+          <p:nvPr/>
+        </p:nvSpPr>
+        <p:spPr>
+          <a:xfrm xmlns:a="http://schemas.openxmlformats.org/drawingml/2006/main">
+            <a:off x="5588000" y="3390900"/>
+            <a:ext cx="306917" cy="209550"/>
           </a:xfrm>
           <a:prstGeom xmlns:a="http://schemas.openxmlformats.org/drawingml/2006/main" prst="rect">
             <a:avLst/>
@@ -24981,19 +24981,19 @@
           <p:cNvPr id="45" name="">
             <a:extLst xmlns:a="http://schemas.openxmlformats.org/drawingml/2006/main">
               <a:ext uri="{FF2B5EF4-FFF2-40B4-BE49-F238E27FC236}">
-                <a16:creationId xmlns:a16="http://schemas.microsoft.com/office/drawing/2014/main" id="{73A7031D-F887-45C1-A95A-2E91D21B73EF}"/>
-              </a:ext>
-            </a:extLst>
-          </p:cNvPr>
-          <p:cNvSpPr>
-            <a:spLocks xmlns:a="http://schemas.openxmlformats.org/drawingml/2006/main" noGrp="1"/>
-          </p:cNvSpPr>
-          <p:nvPr/>
-        </p:nvSpPr>
-        <p:spPr>
-          <a:xfrm xmlns:a="http://schemas.openxmlformats.org/drawingml/2006/main">
-            <a:off x="5861050" y="3380014"/>
-            <a:ext cx="317500" cy="225879"/>
+                <a16:creationId xmlns:a16="http://schemas.microsoft.com/office/drawing/2014/main" id="{C3F42E8B-C16B-4CD0-BE04-F8F883839EB0}"/>
+              </a:ext>
+            </a:extLst>
+          </p:cNvPr>
+          <p:cNvSpPr>
+            <a:spLocks xmlns:a="http://schemas.openxmlformats.org/drawingml/2006/main" noGrp="1"/>
+          </p:cNvSpPr>
+          <p:nvPr/>
+        </p:nvSpPr>
+        <p:spPr>
+          <a:xfrm xmlns:a="http://schemas.openxmlformats.org/drawingml/2006/main">
+            <a:off x="5913967" y="3390900"/>
+            <a:ext cx="306917" cy="209550"/>
           </a:xfrm>
           <a:prstGeom xmlns:a="http://schemas.openxmlformats.org/drawingml/2006/main" prst="rect">
             <a:avLst/>
@@ -25014,19 +25014,19 @@
           <p:cNvPr id="46" name="">
             <a:extLst xmlns:a="http://schemas.openxmlformats.org/drawingml/2006/main">
               <a:ext uri="{FF2B5EF4-FFF2-40B4-BE49-F238E27FC236}">
-                <a16:creationId xmlns:a16="http://schemas.microsoft.com/office/drawing/2014/main" id="{85DAC82B-626F-444A-AF89-2669F32AF83F}"/>
-              </a:ext>
-            </a:extLst>
-          </p:cNvPr>
-          <p:cNvSpPr>
-            <a:spLocks xmlns:a="http://schemas.openxmlformats.org/drawingml/2006/main" noGrp="1"/>
-          </p:cNvSpPr>
-          <p:nvPr/>
-        </p:nvSpPr>
-        <p:spPr>
-          <a:xfrm xmlns:a="http://schemas.openxmlformats.org/drawingml/2006/main">
-            <a:off x="6197600" y="3380014"/>
-            <a:ext cx="317500" cy="225879"/>
+                <a16:creationId xmlns:a16="http://schemas.microsoft.com/office/drawing/2014/main" id="{6AA7F80B-932E-4E67-AE1A-C648844C5375}"/>
+              </a:ext>
+            </a:extLst>
+          </p:cNvPr>
+          <p:cNvSpPr>
+            <a:spLocks xmlns:a="http://schemas.openxmlformats.org/drawingml/2006/main" noGrp="1"/>
+          </p:cNvSpPr>
+          <p:nvPr/>
+        </p:nvSpPr>
+        <p:spPr>
+          <a:xfrm xmlns:a="http://schemas.openxmlformats.org/drawingml/2006/main">
+            <a:off x="6239933" y="3390900"/>
+            <a:ext cx="306917" cy="209550"/>
           </a:xfrm>
           <a:prstGeom xmlns:a="http://schemas.openxmlformats.org/drawingml/2006/main" prst="rect">
             <a:avLst/>
@@ -25047,19 +25047,19 @@
           <p:cNvPr id="47" name="">
             <a:extLst xmlns:a="http://schemas.openxmlformats.org/drawingml/2006/main">
               <a:ext uri="{FF2B5EF4-FFF2-40B4-BE49-F238E27FC236}">
-                <a16:creationId xmlns:a16="http://schemas.microsoft.com/office/drawing/2014/main" id="{F7C20DCD-911D-4B6E-9E98-1F74CD3B90DB}"/>
-              </a:ext>
-            </a:extLst>
-          </p:cNvPr>
-          <p:cNvSpPr>
-            <a:spLocks xmlns:a="http://schemas.openxmlformats.org/drawingml/2006/main" noGrp="1"/>
-          </p:cNvSpPr>
-          <p:nvPr/>
-        </p:nvSpPr>
-        <p:spPr>
-          <a:xfrm xmlns:a="http://schemas.openxmlformats.org/drawingml/2006/main">
-            <a:off x="6534150" y="3380014"/>
-            <a:ext cx="317500" cy="225879"/>
+                <a16:creationId xmlns:a16="http://schemas.microsoft.com/office/drawing/2014/main" id="{FFEF4D22-7B60-4E7C-88AB-E5460C5B6269}"/>
+              </a:ext>
+            </a:extLst>
+          </p:cNvPr>
+          <p:cNvSpPr>
+            <a:spLocks xmlns:a="http://schemas.openxmlformats.org/drawingml/2006/main" noGrp="1"/>
+          </p:cNvSpPr>
+          <p:nvPr/>
+        </p:nvSpPr>
+        <p:spPr>
+          <a:xfrm xmlns:a="http://schemas.openxmlformats.org/drawingml/2006/main">
+            <a:off x="6565900" y="3390900"/>
+            <a:ext cx="306917" cy="209550"/>
           </a:xfrm>
           <a:prstGeom xmlns:a="http://schemas.openxmlformats.org/drawingml/2006/main" prst="rect">
             <a:avLst/>
@@ -25080,19 +25080,19 @@
           <p:cNvPr id="48" name="">
             <a:extLst xmlns:a="http://schemas.openxmlformats.org/drawingml/2006/main">
               <a:ext uri="{FF2B5EF4-FFF2-40B4-BE49-F238E27FC236}">
-                <a16:creationId xmlns:a16="http://schemas.microsoft.com/office/drawing/2014/main" id="{A5B82643-B5BF-4807-889C-A5E6590E99E7}"/>
-              </a:ext>
-            </a:extLst>
-          </p:cNvPr>
-          <p:cNvSpPr>
-            <a:spLocks xmlns:a="http://schemas.openxmlformats.org/drawingml/2006/main" noGrp="1"/>
-          </p:cNvSpPr>
-          <p:nvPr/>
-        </p:nvSpPr>
-        <p:spPr>
-          <a:xfrm xmlns:a="http://schemas.openxmlformats.org/drawingml/2006/main">
-            <a:off x="6870700" y="3380014"/>
-            <a:ext cx="317500" cy="225879"/>
+                <a16:creationId xmlns:a16="http://schemas.microsoft.com/office/drawing/2014/main" id="{47C9660E-E794-4E57-9F87-500D1C4ABD5F}"/>
+              </a:ext>
+            </a:extLst>
+          </p:cNvPr>
+          <p:cNvSpPr>
+            <a:spLocks xmlns:a="http://schemas.openxmlformats.org/drawingml/2006/main" noGrp="1"/>
+          </p:cNvSpPr>
+          <p:nvPr/>
+        </p:nvSpPr>
+        <p:spPr>
+          <a:xfrm xmlns:a="http://schemas.openxmlformats.org/drawingml/2006/main">
+            <a:off x="6891867" y="3390900"/>
+            <a:ext cx="306917" cy="209550"/>
           </a:xfrm>
           <a:prstGeom xmlns:a="http://schemas.openxmlformats.org/drawingml/2006/main" prst="rect">
             <a:avLst/>
@@ -25113,19 +25113,19 @@
           <p:cNvPr id="49" name="">
             <a:extLst xmlns:a="http://schemas.openxmlformats.org/drawingml/2006/main">
               <a:ext uri="{FF2B5EF4-FFF2-40B4-BE49-F238E27FC236}">
-                <a16:creationId xmlns:a16="http://schemas.microsoft.com/office/drawing/2014/main" id="{9C69FC9A-5E47-4BBE-A680-F902CFB7EC71}"/>
-              </a:ext>
-            </a:extLst>
-          </p:cNvPr>
-          <p:cNvSpPr>
-            <a:spLocks xmlns:a="http://schemas.openxmlformats.org/drawingml/2006/main" noGrp="1"/>
-          </p:cNvSpPr>
-          <p:nvPr/>
-        </p:nvSpPr>
-        <p:spPr>
-          <a:xfrm xmlns:a="http://schemas.openxmlformats.org/drawingml/2006/main">
-            <a:off x="7207250" y="3380014"/>
-            <a:ext cx="317500" cy="225879"/>
+                <a16:creationId xmlns:a16="http://schemas.microsoft.com/office/drawing/2014/main" id="{60785103-E974-44F0-B99E-3915166747B0}"/>
+              </a:ext>
+            </a:extLst>
+          </p:cNvPr>
+          <p:cNvSpPr>
+            <a:spLocks xmlns:a="http://schemas.openxmlformats.org/drawingml/2006/main" noGrp="1"/>
+          </p:cNvSpPr>
+          <p:nvPr/>
+        </p:nvSpPr>
+        <p:spPr>
+          <a:xfrm xmlns:a="http://schemas.openxmlformats.org/drawingml/2006/main">
+            <a:off x="7217833" y="3390900"/>
+            <a:ext cx="306917" cy="209550"/>
           </a:xfrm>
           <a:prstGeom xmlns:a="http://schemas.openxmlformats.org/drawingml/2006/main" prst="rect">
             <a:avLst/>
@@ -25146,19 +25146,19 @@
           <p:cNvPr id="50" name="">
             <a:extLst xmlns:a="http://schemas.openxmlformats.org/drawingml/2006/main">
               <a:ext uri="{FF2B5EF4-FFF2-40B4-BE49-F238E27FC236}">
-                <a16:creationId xmlns:a16="http://schemas.microsoft.com/office/drawing/2014/main" id="{512CE29F-3E20-42D8-BD3E-632748DA5438}"/>
-              </a:ext>
-            </a:extLst>
-          </p:cNvPr>
-          <p:cNvSpPr>
-            <a:spLocks xmlns:a="http://schemas.openxmlformats.org/drawingml/2006/main" noGrp="1"/>
-          </p:cNvSpPr>
-          <p:nvPr/>
-        </p:nvSpPr>
-        <p:spPr>
-          <a:xfrm xmlns:a="http://schemas.openxmlformats.org/drawingml/2006/main">
-            <a:off x="4514850" y="3624943"/>
-            <a:ext cx="317500" cy="225879"/>
+                <a16:creationId xmlns:a16="http://schemas.microsoft.com/office/drawing/2014/main" id="{33E12772-9E53-4B1B-926C-779E5185797C}"/>
+              </a:ext>
+            </a:extLst>
+          </p:cNvPr>
+          <p:cNvSpPr>
+            <a:spLocks xmlns:a="http://schemas.openxmlformats.org/drawingml/2006/main" noGrp="1"/>
+          </p:cNvSpPr>
+          <p:nvPr/>
+        </p:nvSpPr>
+        <p:spPr>
+          <a:xfrm xmlns:a="http://schemas.openxmlformats.org/drawingml/2006/main">
+            <a:off x="4610100" y="3619500"/>
+            <a:ext cx="306917" cy="209550"/>
           </a:xfrm>
           <a:prstGeom xmlns:a="http://schemas.openxmlformats.org/drawingml/2006/main" prst="rect">
             <a:avLst/>
@@ -25179,19 +25179,19 @@
           <p:cNvPr id="51" name="">
             <a:extLst xmlns:a="http://schemas.openxmlformats.org/drawingml/2006/main">
               <a:ext uri="{FF2B5EF4-FFF2-40B4-BE49-F238E27FC236}">
-                <a16:creationId xmlns:a16="http://schemas.microsoft.com/office/drawing/2014/main" id="{D21BB160-74AA-4827-911F-1C149EF800C0}"/>
-              </a:ext>
-            </a:extLst>
-          </p:cNvPr>
-          <p:cNvSpPr>
-            <a:spLocks xmlns:a="http://schemas.openxmlformats.org/drawingml/2006/main" noGrp="1"/>
-          </p:cNvSpPr>
-          <p:nvPr/>
-        </p:nvSpPr>
-        <p:spPr>
-          <a:xfrm xmlns:a="http://schemas.openxmlformats.org/drawingml/2006/main">
-            <a:off x="4851400" y="3624943"/>
-            <a:ext cx="317500" cy="225879"/>
+                <a16:creationId xmlns:a16="http://schemas.microsoft.com/office/drawing/2014/main" id="{9F60927D-7860-4DBF-ADDE-E03389221E58}"/>
+              </a:ext>
+            </a:extLst>
+          </p:cNvPr>
+          <p:cNvSpPr>
+            <a:spLocks xmlns:a="http://schemas.openxmlformats.org/drawingml/2006/main" noGrp="1"/>
+          </p:cNvSpPr>
+          <p:nvPr/>
+        </p:nvSpPr>
+        <p:spPr>
+          <a:xfrm xmlns:a="http://schemas.openxmlformats.org/drawingml/2006/main">
+            <a:off x="4936067" y="3619500"/>
+            <a:ext cx="306917" cy="209550"/>
           </a:xfrm>
           <a:prstGeom xmlns:a="http://schemas.openxmlformats.org/drawingml/2006/main" prst="rect">
             <a:avLst/>
@@ -25212,19 +25212,19 @@
           <p:cNvPr id="52" name="">
             <a:extLst xmlns:a="http://schemas.openxmlformats.org/drawingml/2006/main">
               <a:ext uri="{FF2B5EF4-FFF2-40B4-BE49-F238E27FC236}">
-                <a16:creationId xmlns:a16="http://schemas.microsoft.com/office/drawing/2014/main" id="{34267709-6602-4F97-979C-BC66DD965F85}"/>
-              </a:ext>
-            </a:extLst>
-          </p:cNvPr>
-          <p:cNvSpPr>
-            <a:spLocks xmlns:a="http://schemas.openxmlformats.org/drawingml/2006/main" noGrp="1"/>
-          </p:cNvSpPr>
-          <p:nvPr/>
-        </p:nvSpPr>
-        <p:spPr>
-          <a:xfrm xmlns:a="http://schemas.openxmlformats.org/drawingml/2006/main">
-            <a:off x="5187950" y="3624943"/>
-            <a:ext cx="317500" cy="225879"/>
+                <a16:creationId xmlns:a16="http://schemas.microsoft.com/office/drawing/2014/main" id="{ECEFA362-0C76-4ED7-836D-7E0FD5C74DC2}"/>
+              </a:ext>
+            </a:extLst>
+          </p:cNvPr>
+          <p:cNvSpPr>
+            <a:spLocks xmlns:a="http://schemas.openxmlformats.org/drawingml/2006/main" noGrp="1"/>
+          </p:cNvSpPr>
+          <p:nvPr/>
+        </p:nvSpPr>
+        <p:spPr>
+          <a:xfrm xmlns:a="http://schemas.openxmlformats.org/drawingml/2006/main">
+            <a:off x="5262033" y="3619500"/>
+            <a:ext cx="306917" cy="209550"/>
           </a:xfrm>
           <a:prstGeom xmlns:a="http://schemas.openxmlformats.org/drawingml/2006/main" prst="rect">
             <a:avLst/>
@@ -25245,19 +25245,19 @@
           <p:cNvPr id="53" name="">
             <a:extLst xmlns:a="http://schemas.openxmlformats.org/drawingml/2006/main">
               <a:ext uri="{FF2B5EF4-FFF2-40B4-BE49-F238E27FC236}">
-                <a16:creationId xmlns:a16="http://schemas.microsoft.com/office/drawing/2014/main" id="{78575AA0-A835-40BE-A7DE-9E5FEB04E7FF}"/>
-              </a:ext>
-            </a:extLst>
-          </p:cNvPr>
-          <p:cNvSpPr>
-            <a:spLocks xmlns:a="http://schemas.openxmlformats.org/drawingml/2006/main" noGrp="1"/>
-          </p:cNvSpPr>
-          <p:nvPr/>
-        </p:nvSpPr>
-        <p:spPr>
-          <a:xfrm xmlns:a="http://schemas.openxmlformats.org/drawingml/2006/main">
-            <a:off x="5524500" y="3624943"/>
-            <a:ext cx="317500" cy="225879"/>
+                <a16:creationId xmlns:a16="http://schemas.microsoft.com/office/drawing/2014/main" id="{6A9AA837-AB99-4B22-AFCD-04F4CE9A74B7}"/>
+              </a:ext>
+            </a:extLst>
+          </p:cNvPr>
+          <p:cNvSpPr>
+            <a:spLocks xmlns:a="http://schemas.openxmlformats.org/drawingml/2006/main" noGrp="1"/>
+          </p:cNvSpPr>
+          <p:nvPr/>
+        </p:nvSpPr>
+        <p:spPr>
+          <a:xfrm xmlns:a="http://schemas.openxmlformats.org/drawingml/2006/main">
+            <a:off x="5588000" y="3619500"/>
+            <a:ext cx="306917" cy="209550"/>
           </a:xfrm>
           <a:prstGeom xmlns:a="http://schemas.openxmlformats.org/drawingml/2006/main" prst="rect">
             <a:avLst/>
@@ -25278,19 +25278,19 @@
           <p:cNvPr id="54" name="">
             <a:extLst xmlns:a="http://schemas.openxmlformats.org/drawingml/2006/main">
               <a:ext uri="{FF2B5EF4-FFF2-40B4-BE49-F238E27FC236}">
-                <a16:creationId xmlns:a16="http://schemas.microsoft.com/office/drawing/2014/main" id="{0FF54264-1948-4CB1-BB46-5E1D9965F4BE}"/>
-              </a:ext>
-            </a:extLst>
-          </p:cNvPr>
-          <p:cNvSpPr>
-            <a:spLocks xmlns:a="http://schemas.openxmlformats.org/drawingml/2006/main" noGrp="1"/>
-          </p:cNvSpPr>
-          <p:nvPr/>
-        </p:nvSpPr>
-        <p:spPr>
-          <a:xfrm xmlns:a="http://schemas.openxmlformats.org/drawingml/2006/main">
-            <a:off x="5861050" y="3624943"/>
-            <a:ext cx="317500" cy="225879"/>
+                <a16:creationId xmlns:a16="http://schemas.microsoft.com/office/drawing/2014/main" id="{C44F81F7-E1F6-4060-92EA-8BE0BDA99501}"/>
+              </a:ext>
+            </a:extLst>
+          </p:cNvPr>
+          <p:cNvSpPr>
+            <a:spLocks xmlns:a="http://schemas.openxmlformats.org/drawingml/2006/main" noGrp="1"/>
+          </p:cNvSpPr>
+          <p:nvPr/>
+        </p:nvSpPr>
+        <p:spPr>
+          <a:xfrm xmlns:a="http://schemas.openxmlformats.org/drawingml/2006/main">
+            <a:off x="5913967" y="3619500"/>
+            <a:ext cx="306917" cy="209550"/>
           </a:xfrm>
           <a:prstGeom xmlns:a="http://schemas.openxmlformats.org/drawingml/2006/main" prst="rect">
             <a:avLst/>
@@ -25311,19 +25311,19 @@
           <p:cNvPr id="55" name="">
             <a:extLst xmlns:a="http://schemas.openxmlformats.org/drawingml/2006/main">
               <a:ext uri="{FF2B5EF4-FFF2-40B4-BE49-F238E27FC236}">
-                <a16:creationId xmlns:a16="http://schemas.microsoft.com/office/drawing/2014/main" id="{E9C8B42D-932B-4A47-830B-8E607E0648BA}"/>
-              </a:ext>
-            </a:extLst>
-          </p:cNvPr>
-          <p:cNvSpPr>
-            <a:spLocks xmlns:a="http://schemas.openxmlformats.org/drawingml/2006/main" noGrp="1"/>
-          </p:cNvSpPr>
-          <p:nvPr/>
-        </p:nvSpPr>
-        <p:spPr>
-          <a:xfrm xmlns:a="http://schemas.openxmlformats.org/drawingml/2006/main">
-            <a:off x="6197600" y="3624943"/>
-            <a:ext cx="317500" cy="225879"/>
+                <a16:creationId xmlns:a16="http://schemas.microsoft.com/office/drawing/2014/main" id="{E808B68D-C1C2-42D6-A5C4-759CDC73477A}"/>
+              </a:ext>
+            </a:extLst>
+          </p:cNvPr>
+          <p:cNvSpPr>
+            <a:spLocks xmlns:a="http://schemas.openxmlformats.org/drawingml/2006/main" noGrp="1"/>
+          </p:cNvSpPr>
+          <p:nvPr/>
+        </p:nvSpPr>
+        <p:spPr>
+          <a:xfrm xmlns:a="http://schemas.openxmlformats.org/drawingml/2006/main">
+            <a:off x="6239933" y="3619500"/>
+            <a:ext cx="306917" cy="209550"/>
           </a:xfrm>
           <a:prstGeom xmlns:a="http://schemas.openxmlformats.org/drawingml/2006/main" prst="rect">
             <a:avLst/>
@@ -25344,19 +25344,19 @@
           <p:cNvPr id="56" name="">
             <a:extLst xmlns:a="http://schemas.openxmlformats.org/drawingml/2006/main">
               <a:ext uri="{FF2B5EF4-FFF2-40B4-BE49-F238E27FC236}">
-                <a16:creationId xmlns:a16="http://schemas.microsoft.com/office/drawing/2014/main" id="{11E723B8-EC90-4DA5-8BAB-6EF74BD273C8}"/>
-              </a:ext>
-            </a:extLst>
-          </p:cNvPr>
-          <p:cNvSpPr>
-            <a:spLocks xmlns:a="http://schemas.openxmlformats.org/drawingml/2006/main" noGrp="1"/>
-          </p:cNvSpPr>
-          <p:nvPr/>
-        </p:nvSpPr>
-        <p:spPr>
-          <a:xfrm xmlns:a="http://schemas.openxmlformats.org/drawingml/2006/main">
-            <a:off x="6534150" y="3624943"/>
-            <a:ext cx="317500" cy="225879"/>
+                <a16:creationId xmlns:a16="http://schemas.microsoft.com/office/drawing/2014/main" id="{463625E3-8BE3-4984-A53F-9A86CE1F86E5}"/>
+              </a:ext>
+            </a:extLst>
+          </p:cNvPr>
+          <p:cNvSpPr>
+            <a:spLocks xmlns:a="http://schemas.openxmlformats.org/drawingml/2006/main" noGrp="1"/>
+          </p:cNvSpPr>
+          <p:nvPr/>
+        </p:nvSpPr>
+        <p:spPr>
+          <a:xfrm xmlns:a="http://schemas.openxmlformats.org/drawingml/2006/main">
+            <a:off x="6565900" y="3619500"/>
+            <a:ext cx="306917" cy="209550"/>
           </a:xfrm>
           <a:prstGeom xmlns:a="http://schemas.openxmlformats.org/drawingml/2006/main" prst="rect">
             <a:avLst/>
@@ -25377,19 +25377,19 @@
           <p:cNvPr id="57" name="">
             <a:extLst xmlns:a="http://schemas.openxmlformats.org/drawingml/2006/main">
               <a:ext uri="{FF2B5EF4-FFF2-40B4-BE49-F238E27FC236}">
-                <a16:creationId xmlns:a16="http://schemas.microsoft.com/office/drawing/2014/main" id="{13F0930B-D066-4D5A-860D-A8BD1A47D78B}"/>
-              </a:ext>
-            </a:extLst>
-          </p:cNvPr>
-          <p:cNvSpPr>
-            <a:spLocks xmlns:a="http://schemas.openxmlformats.org/drawingml/2006/main" noGrp="1"/>
-          </p:cNvSpPr>
-          <p:nvPr/>
-        </p:nvSpPr>
-        <p:spPr>
-          <a:xfrm xmlns:a="http://schemas.openxmlformats.org/drawingml/2006/main">
-            <a:off x="6870700" y="3624943"/>
-            <a:ext cx="317500" cy="225879"/>
+                <a16:creationId xmlns:a16="http://schemas.microsoft.com/office/drawing/2014/main" id="{76B252DB-3235-49B4-A551-2F975E27E6D8}"/>
+              </a:ext>
+            </a:extLst>
+          </p:cNvPr>
+          <p:cNvSpPr>
+            <a:spLocks xmlns:a="http://schemas.openxmlformats.org/drawingml/2006/main" noGrp="1"/>
+          </p:cNvSpPr>
+          <p:nvPr/>
+        </p:nvSpPr>
+        <p:spPr>
+          <a:xfrm xmlns:a="http://schemas.openxmlformats.org/drawingml/2006/main">
+            <a:off x="6891867" y="3619500"/>
+            <a:ext cx="306917" cy="209550"/>
           </a:xfrm>
           <a:prstGeom xmlns:a="http://schemas.openxmlformats.org/drawingml/2006/main" prst="rect">
             <a:avLst/>
@@ -25410,19 +25410,19 @@
           <p:cNvPr id="58" name="">
             <a:extLst xmlns:a="http://schemas.openxmlformats.org/drawingml/2006/main">
               <a:ext uri="{FF2B5EF4-FFF2-40B4-BE49-F238E27FC236}">
-                <a16:creationId xmlns:a16="http://schemas.microsoft.com/office/drawing/2014/main" id="{75CA63C2-8DA3-4137-9534-F1770CC71B77}"/>
-              </a:ext>
-            </a:extLst>
-          </p:cNvPr>
-          <p:cNvSpPr>
-            <a:spLocks xmlns:a="http://schemas.openxmlformats.org/drawingml/2006/main" noGrp="1"/>
-          </p:cNvSpPr>
-          <p:nvPr/>
-        </p:nvSpPr>
-        <p:spPr>
-          <a:xfrm xmlns:a="http://schemas.openxmlformats.org/drawingml/2006/main">
-            <a:off x="7207250" y="3624943"/>
-            <a:ext cx="317500" cy="225879"/>
+                <a16:creationId xmlns:a16="http://schemas.microsoft.com/office/drawing/2014/main" id="{6291DD41-EC0A-4D5C-B8CC-CD3473AF8669}"/>
+              </a:ext>
+            </a:extLst>
+          </p:cNvPr>
+          <p:cNvSpPr>
+            <a:spLocks xmlns:a="http://schemas.openxmlformats.org/drawingml/2006/main" noGrp="1"/>
+          </p:cNvSpPr>
+          <p:nvPr/>
+        </p:nvSpPr>
+        <p:spPr>
+          <a:xfrm xmlns:a="http://schemas.openxmlformats.org/drawingml/2006/main">
+            <a:off x="7217833" y="3619500"/>
+            <a:ext cx="306917" cy="209550"/>
           </a:xfrm>
           <a:prstGeom xmlns:a="http://schemas.openxmlformats.org/drawingml/2006/main" prst="rect">
             <a:avLst/>
@@ -25443,19 +25443,19 @@
           <p:cNvPr id="59" name="">
             <a:extLst xmlns:a="http://schemas.openxmlformats.org/drawingml/2006/main">
               <a:ext uri="{FF2B5EF4-FFF2-40B4-BE49-F238E27FC236}">
-                <a16:creationId xmlns:a16="http://schemas.microsoft.com/office/drawing/2014/main" id="{401EF9F2-47EA-42CB-A5F7-70E0711C2E0F}"/>
-              </a:ext>
-            </a:extLst>
-          </p:cNvPr>
-          <p:cNvSpPr>
-            <a:spLocks xmlns:a="http://schemas.openxmlformats.org/drawingml/2006/main" noGrp="1"/>
-          </p:cNvSpPr>
-          <p:nvPr/>
-        </p:nvSpPr>
-        <p:spPr>
-          <a:xfrm xmlns:a="http://schemas.openxmlformats.org/drawingml/2006/main">
-            <a:off x="4514850" y="3869871"/>
-            <a:ext cx="317500" cy="225879"/>
+                <a16:creationId xmlns:a16="http://schemas.microsoft.com/office/drawing/2014/main" id="{CE72E01B-D96E-45FA-970E-2B432341F48B}"/>
+              </a:ext>
+            </a:extLst>
+          </p:cNvPr>
+          <p:cNvSpPr>
+            <a:spLocks xmlns:a="http://schemas.openxmlformats.org/drawingml/2006/main" noGrp="1"/>
+          </p:cNvSpPr>
+          <p:nvPr/>
+        </p:nvSpPr>
+        <p:spPr>
+          <a:xfrm xmlns:a="http://schemas.openxmlformats.org/drawingml/2006/main">
+            <a:off x="4610100" y="3848100"/>
+            <a:ext cx="306917" cy="209550"/>
           </a:xfrm>
           <a:prstGeom xmlns:a="http://schemas.openxmlformats.org/drawingml/2006/main" prst="rect">
             <a:avLst/>
@@ -25476,19 +25476,19 @@
           <p:cNvPr id="60" name="">
             <a:extLst xmlns:a="http://schemas.openxmlformats.org/drawingml/2006/main">
               <a:ext uri="{FF2B5EF4-FFF2-40B4-BE49-F238E27FC236}">
-                <a16:creationId xmlns:a16="http://schemas.microsoft.com/office/drawing/2014/main" id="{88518B22-4ECF-45B3-A56A-B8488D420A92}"/>
-              </a:ext>
-            </a:extLst>
-          </p:cNvPr>
-          <p:cNvSpPr>
-            <a:spLocks xmlns:a="http://schemas.openxmlformats.org/drawingml/2006/main" noGrp="1"/>
-          </p:cNvSpPr>
-          <p:nvPr/>
-        </p:nvSpPr>
-        <p:spPr>
-          <a:xfrm xmlns:a="http://schemas.openxmlformats.org/drawingml/2006/main">
-            <a:off x="4851400" y="3869871"/>
-            <a:ext cx="317500" cy="225879"/>
+                <a16:creationId xmlns:a16="http://schemas.microsoft.com/office/drawing/2014/main" id="{B84A2043-C19B-49A3-AA6B-0DBFCA820705}"/>
+              </a:ext>
+            </a:extLst>
+          </p:cNvPr>
+          <p:cNvSpPr>
+            <a:spLocks xmlns:a="http://schemas.openxmlformats.org/drawingml/2006/main" noGrp="1"/>
+          </p:cNvSpPr>
+          <p:nvPr/>
+        </p:nvSpPr>
+        <p:spPr>
+          <a:xfrm xmlns:a="http://schemas.openxmlformats.org/drawingml/2006/main">
+            <a:off x="4936067" y="3848100"/>
+            <a:ext cx="306917" cy="209550"/>
           </a:xfrm>
           <a:prstGeom xmlns:a="http://schemas.openxmlformats.org/drawingml/2006/main" prst="rect">
             <a:avLst/>
@@ -25509,19 +25509,19 @@
           <p:cNvPr id="61" name="">
             <a:extLst xmlns:a="http://schemas.openxmlformats.org/drawingml/2006/main">
               <a:ext uri="{FF2B5EF4-FFF2-40B4-BE49-F238E27FC236}">
-                <a16:creationId xmlns:a16="http://schemas.microsoft.com/office/drawing/2014/main" id="{403D46F2-BAEB-4584-B21E-597AF7BEE0E3}"/>
-              </a:ext>
-            </a:extLst>
-          </p:cNvPr>
-          <p:cNvSpPr>
-            <a:spLocks xmlns:a="http://schemas.openxmlformats.org/drawingml/2006/main" noGrp="1"/>
-          </p:cNvSpPr>
-          <p:nvPr/>
-        </p:nvSpPr>
-        <p:spPr>
-          <a:xfrm xmlns:a="http://schemas.openxmlformats.org/drawingml/2006/main">
-            <a:off x="5187950" y="3869871"/>
-            <a:ext cx="317500" cy="225879"/>
+                <a16:creationId xmlns:a16="http://schemas.microsoft.com/office/drawing/2014/main" id="{CC32806B-7C20-41C3-84F0-8E05E0283AC7}"/>
+              </a:ext>
+            </a:extLst>
+          </p:cNvPr>
+          <p:cNvSpPr>
+            <a:spLocks xmlns:a="http://schemas.openxmlformats.org/drawingml/2006/main" noGrp="1"/>
+          </p:cNvSpPr>
+          <p:nvPr/>
+        </p:nvSpPr>
+        <p:spPr>
+          <a:xfrm xmlns:a="http://schemas.openxmlformats.org/drawingml/2006/main">
+            <a:off x="5262033" y="3848100"/>
+            <a:ext cx="306917" cy="209550"/>
           </a:xfrm>
           <a:prstGeom xmlns:a="http://schemas.openxmlformats.org/drawingml/2006/main" prst="rect">
             <a:avLst/>
@@ -25542,19 +25542,19 @@
           <p:cNvPr id="62" name="">
             <a:extLst xmlns:a="http://schemas.openxmlformats.org/drawingml/2006/main">
               <a:ext uri="{FF2B5EF4-FFF2-40B4-BE49-F238E27FC236}">
-                <a16:creationId xmlns:a16="http://schemas.microsoft.com/office/drawing/2014/main" id="{AEF26D22-D845-4F8C-BB2A-4E0B4DE2F144}"/>
-              </a:ext>
-            </a:extLst>
-          </p:cNvPr>
-          <p:cNvSpPr>
-            <a:spLocks xmlns:a="http://schemas.openxmlformats.org/drawingml/2006/main" noGrp="1"/>
-          </p:cNvSpPr>
-          <p:nvPr/>
-        </p:nvSpPr>
-        <p:spPr>
-          <a:xfrm xmlns:a="http://schemas.openxmlformats.org/drawingml/2006/main">
-            <a:off x="5524500" y="3869871"/>
-            <a:ext cx="317500" cy="225879"/>
+                <a16:creationId xmlns:a16="http://schemas.microsoft.com/office/drawing/2014/main" id="{A68F5608-5B46-4582-8E66-5C27E394AB33}"/>
+              </a:ext>
+            </a:extLst>
+          </p:cNvPr>
+          <p:cNvSpPr>
+            <a:spLocks xmlns:a="http://schemas.openxmlformats.org/drawingml/2006/main" noGrp="1"/>
+          </p:cNvSpPr>
+          <p:nvPr/>
+        </p:nvSpPr>
+        <p:spPr>
+          <a:xfrm xmlns:a="http://schemas.openxmlformats.org/drawingml/2006/main">
+            <a:off x="5588000" y="3848100"/>
+            <a:ext cx="306917" cy="209550"/>
           </a:xfrm>
           <a:prstGeom xmlns:a="http://schemas.openxmlformats.org/drawingml/2006/main" prst="rect">
             <a:avLst/>
@@ -25575,19 +25575,19 @@
           <p:cNvPr id="63" name="">
             <a:extLst xmlns:a="http://schemas.openxmlformats.org/drawingml/2006/main">
               <a:ext uri="{FF2B5EF4-FFF2-40B4-BE49-F238E27FC236}">
-                <a16:creationId xmlns:a16="http://schemas.microsoft.com/office/drawing/2014/main" id="{48ECAE4E-F813-4A15-B9A9-A416BAEB2AD9}"/>
-              </a:ext>
-            </a:extLst>
-          </p:cNvPr>
-          <p:cNvSpPr>
-            <a:spLocks xmlns:a="http://schemas.openxmlformats.org/drawingml/2006/main" noGrp="1"/>
-          </p:cNvSpPr>
-          <p:nvPr/>
-        </p:nvSpPr>
-        <p:spPr>
-          <a:xfrm xmlns:a="http://schemas.openxmlformats.org/drawingml/2006/main">
-            <a:off x="5861050" y="3869871"/>
-            <a:ext cx="317500" cy="225879"/>
+                <a16:creationId xmlns:a16="http://schemas.microsoft.com/office/drawing/2014/main" id="{F62352C3-E98D-46FD-8169-B400CA64FE3A}"/>
+              </a:ext>
+            </a:extLst>
+          </p:cNvPr>
+          <p:cNvSpPr>
+            <a:spLocks xmlns:a="http://schemas.openxmlformats.org/drawingml/2006/main" noGrp="1"/>
+          </p:cNvSpPr>
+          <p:nvPr/>
+        </p:nvSpPr>
+        <p:spPr>
+          <a:xfrm xmlns:a="http://schemas.openxmlformats.org/drawingml/2006/main">
+            <a:off x="5913967" y="3848100"/>
+            <a:ext cx="306917" cy="209550"/>
           </a:xfrm>
           <a:prstGeom xmlns:a="http://schemas.openxmlformats.org/drawingml/2006/main" prst="rect">
             <a:avLst/>
@@ -25608,19 +25608,19 @@
           <p:cNvPr id="64" name="">
             <a:extLst xmlns:a="http://schemas.openxmlformats.org/drawingml/2006/main">
               <a:ext uri="{FF2B5EF4-FFF2-40B4-BE49-F238E27FC236}">
-                <a16:creationId xmlns:a16="http://schemas.microsoft.com/office/drawing/2014/main" id="{80C76B79-D237-42CC-AE26-29FB989C7859}"/>
-              </a:ext>
-            </a:extLst>
-          </p:cNvPr>
-          <p:cNvSpPr>
-            <a:spLocks xmlns:a="http://schemas.openxmlformats.org/drawingml/2006/main" noGrp="1"/>
-          </p:cNvSpPr>
-          <p:nvPr/>
-        </p:nvSpPr>
-        <p:spPr>
-          <a:xfrm xmlns:a="http://schemas.openxmlformats.org/drawingml/2006/main">
-            <a:off x="6197600" y="3869871"/>
-            <a:ext cx="317500" cy="225879"/>
+                <a16:creationId xmlns:a16="http://schemas.microsoft.com/office/drawing/2014/main" id="{37EA14A8-D7A7-4A41-862C-4A29A554D313}"/>
+              </a:ext>
+            </a:extLst>
+          </p:cNvPr>
+          <p:cNvSpPr>
+            <a:spLocks xmlns:a="http://schemas.openxmlformats.org/drawingml/2006/main" noGrp="1"/>
+          </p:cNvSpPr>
+          <p:nvPr/>
+        </p:nvSpPr>
+        <p:spPr>
+          <a:xfrm xmlns:a="http://schemas.openxmlformats.org/drawingml/2006/main">
+            <a:off x="6239933" y="3848100"/>
+            <a:ext cx="306917" cy="209550"/>
           </a:xfrm>
           <a:prstGeom xmlns:a="http://schemas.openxmlformats.org/drawingml/2006/main" prst="rect">
             <a:avLst/>
@@ -25641,19 +25641,19 @@
           <p:cNvPr id="65" name="">
             <a:extLst xmlns:a="http://schemas.openxmlformats.org/drawingml/2006/main">
               <a:ext uri="{FF2B5EF4-FFF2-40B4-BE49-F238E27FC236}">
-                <a16:creationId xmlns:a16="http://schemas.microsoft.com/office/drawing/2014/main" id="{2CE9063F-5600-4007-9737-226D1896344B}"/>
-              </a:ext>
-            </a:extLst>
-          </p:cNvPr>
-          <p:cNvSpPr>
-            <a:spLocks xmlns:a="http://schemas.openxmlformats.org/drawingml/2006/main" noGrp="1"/>
-          </p:cNvSpPr>
-          <p:nvPr/>
-        </p:nvSpPr>
-        <p:spPr>
-          <a:xfrm xmlns:a="http://schemas.openxmlformats.org/drawingml/2006/main">
-            <a:off x="6534150" y="3869871"/>
-            <a:ext cx="317500" cy="225879"/>
+                <a16:creationId xmlns:a16="http://schemas.microsoft.com/office/drawing/2014/main" id="{FF95D763-1860-449C-8396-7854A79E55E0}"/>
+              </a:ext>
+            </a:extLst>
+          </p:cNvPr>
+          <p:cNvSpPr>
+            <a:spLocks xmlns:a="http://schemas.openxmlformats.org/drawingml/2006/main" noGrp="1"/>
+          </p:cNvSpPr>
+          <p:nvPr/>
+        </p:nvSpPr>
+        <p:spPr>
+          <a:xfrm xmlns:a="http://schemas.openxmlformats.org/drawingml/2006/main">
+            <a:off x="6565900" y="3848100"/>
+            <a:ext cx="306917" cy="209550"/>
           </a:xfrm>
           <a:prstGeom xmlns:a="http://schemas.openxmlformats.org/drawingml/2006/main" prst="rect">
             <a:avLst/>
@@ -25674,19 +25674,19 @@
           <p:cNvPr id="66" name="">
             <a:extLst xmlns:a="http://schemas.openxmlformats.org/drawingml/2006/main">
               <a:ext uri="{FF2B5EF4-FFF2-40B4-BE49-F238E27FC236}">
-                <a16:creationId xmlns:a16="http://schemas.microsoft.com/office/drawing/2014/main" id="{E4830478-8A27-4DF7-9A91-548CB09A24BE}"/>
-              </a:ext>
-            </a:extLst>
-          </p:cNvPr>
-          <p:cNvSpPr>
-            <a:spLocks xmlns:a="http://schemas.openxmlformats.org/drawingml/2006/main" noGrp="1"/>
-          </p:cNvSpPr>
-          <p:nvPr/>
-        </p:nvSpPr>
-        <p:spPr>
-          <a:xfrm xmlns:a="http://schemas.openxmlformats.org/drawingml/2006/main">
-            <a:off x="6870700" y="3869871"/>
-            <a:ext cx="317500" cy="225879"/>
+                <a16:creationId xmlns:a16="http://schemas.microsoft.com/office/drawing/2014/main" id="{470ED7AC-BAEA-4149-B987-422BA08B9AB6}"/>
+              </a:ext>
+            </a:extLst>
+          </p:cNvPr>
+          <p:cNvSpPr>
+            <a:spLocks xmlns:a="http://schemas.openxmlformats.org/drawingml/2006/main" noGrp="1"/>
+          </p:cNvSpPr>
+          <p:nvPr/>
+        </p:nvSpPr>
+        <p:spPr>
+          <a:xfrm xmlns:a="http://schemas.openxmlformats.org/drawingml/2006/main">
+            <a:off x="6891867" y="3848100"/>
+            <a:ext cx="306917" cy="209550"/>
           </a:xfrm>
           <a:prstGeom xmlns:a="http://schemas.openxmlformats.org/drawingml/2006/main" prst="rect">
             <a:avLst/>
@@ -25707,19 +25707,19 @@
           <p:cNvPr id="67" name="">
             <a:extLst xmlns:a="http://schemas.openxmlformats.org/drawingml/2006/main">
               <a:ext uri="{FF2B5EF4-FFF2-40B4-BE49-F238E27FC236}">
-                <a16:creationId xmlns:a16="http://schemas.microsoft.com/office/drawing/2014/main" id="{57901095-BC82-46A8-8015-3D3940FD6CE7}"/>
-              </a:ext>
-            </a:extLst>
-          </p:cNvPr>
-          <p:cNvSpPr>
-            <a:spLocks xmlns:a="http://schemas.openxmlformats.org/drawingml/2006/main" noGrp="1"/>
-          </p:cNvSpPr>
-          <p:nvPr/>
-        </p:nvSpPr>
-        <p:spPr>
-          <a:xfrm xmlns:a="http://schemas.openxmlformats.org/drawingml/2006/main">
-            <a:off x="7207250" y="3869871"/>
-            <a:ext cx="317500" cy="225879"/>
+                <a16:creationId xmlns:a16="http://schemas.microsoft.com/office/drawing/2014/main" id="{BE17BA5D-C137-4D42-BF64-67851A0E6128}"/>
+              </a:ext>
+            </a:extLst>
+          </p:cNvPr>
+          <p:cNvSpPr>
+            <a:spLocks xmlns:a="http://schemas.openxmlformats.org/drawingml/2006/main" noGrp="1"/>
+          </p:cNvSpPr>
+          <p:nvPr/>
+        </p:nvSpPr>
+        <p:spPr>
+          <a:xfrm xmlns:a="http://schemas.openxmlformats.org/drawingml/2006/main">
+            <a:off x="7217833" y="3848100"/>
+            <a:ext cx="306917" cy="209550"/>
           </a:xfrm>
           <a:prstGeom xmlns:a="http://schemas.openxmlformats.org/drawingml/2006/main" prst="rect">
             <a:avLst/>
@@ -25740,18 +25740,18 @@
           <p:cNvPr id="68" name="">
             <a:extLst xmlns:a="http://schemas.openxmlformats.org/drawingml/2006/main">
               <a:ext uri="{FF2B5EF4-FFF2-40B4-BE49-F238E27FC236}">
-                <a16:creationId xmlns:a16="http://schemas.microsoft.com/office/drawing/2014/main" id="{834A24ED-4C38-4F5B-96FD-5FC80A41A567}"/>
-              </a:ext>
-            </a:extLst>
-          </p:cNvPr>
-          <p:cNvSpPr>
-            <a:spLocks xmlns:a="http://schemas.openxmlformats.org/drawingml/2006/main" noGrp="1"/>
-          </p:cNvSpPr>
-          <p:nvPr/>
-        </p:nvSpPr>
-        <p:spPr>
-          <a:xfrm xmlns:a="http://schemas.openxmlformats.org/drawingml/2006/main">
-            <a:off x="5962650" y="2095500"/>
+                <a16:creationId xmlns:a16="http://schemas.microsoft.com/office/drawing/2014/main" id="{FE1CB2A8-825C-46C1-8FC7-122BC63528C4}"/>
+              </a:ext>
+            </a:extLst>
+          </p:cNvPr>
+          <p:cNvSpPr>
+            <a:spLocks xmlns:a="http://schemas.openxmlformats.org/drawingml/2006/main" noGrp="1"/>
+          </p:cNvSpPr>
+          <p:nvPr/>
+        </p:nvSpPr>
+        <p:spPr>
+          <a:xfrm xmlns:a="http://schemas.openxmlformats.org/drawingml/2006/main">
+            <a:off x="6076950" y="2171700"/>
             <a:ext cx="857250" cy="190500"/>
           </a:xfrm>
           <a:prstGeom xmlns:a="http://schemas.openxmlformats.org/drawingml/2006/main" prst="rect">
@@ -25774,7 +25774,7 @@
                 <a:spcPct val="108000"/>
               </a:lnSpc>
               <a:buNone/>
-              <a:defRPr sz="1013" b="0" i="0">
+              <a:defRPr sz="1050" b="0" i="0">
                 <a:solidFill>
                   <a:srgbClr val="475569"/>
                 </a:solidFill>
@@ -25784,7 +25784,7 @@
               </a:defRPr>
             </a:pPr>
             <a:r>
-              <a:rPr sz="1013" b="0" i="0">
+              <a:rPr sz="1050" b="0" i="0">
                 <a:solidFill>
                   <a:srgbClr val="475569"/>
                 </a:solidFill>
@@ -25802,19 +25802,19 @@
           <p:cNvPr id="69" name="">
             <a:extLst xmlns:a="http://schemas.openxmlformats.org/drawingml/2006/main">
               <a:ext uri="{FF2B5EF4-FFF2-40B4-BE49-F238E27FC236}">
-                <a16:creationId xmlns:a16="http://schemas.microsoft.com/office/drawing/2014/main" id="{1E38535F-A73B-4F98-AB2B-5063D1248E10}"/>
-              </a:ext>
-            </a:extLst>
-          </p:cNvPr>
-          <p:cNvSpPr>
-            <a:spLocks xmlns:a="http://schemas.openxmlformats.org/drawingml/2006/main" noGrp="1"/>
-          </p:cNvSpPr>
-          <p:nvPr/>
-        </p:nvSpPr>
-        <p:spPr>
-          <a:xfrm xmlns:a="http://schemas.openxmlformats.org/drawingml/2006/main">
-            <a:off x="4267200" y="2838450"/>
-            <a:ext cx="876300" cy="190500"/>
+                <a16:creationId xmlns:a16="http://schemas.microsoft.com/office/drawing/2014/main" id="{6FFC5110-4A07-47FD-83C2-A899E6DB4699}"/>
+              </a:ext>
+            </a:extLst>
+          </p:cNvPr>
+          <p:cNvSpPr>
+            <a:spLocks xmlns:a="http://schemas.openxmlformats.org/drawingml/2006/main" noGrp="1"/>
+          </p:cNvSpPr>
+          <p:nvPr/>
+        </p:nvSpPr>
+        <p:spPr>
+          <a:xfrm xmlns:a="http://schemas.openxmlformats.org/drawingml/2006/main">
+            <a:off x="4991100" y="1790700"/>
+            <a:ext cx="2038350" cy="228600"/>
           </a:xfrm>
           <a:prstGeom xmlns:a="http://schemas.openxmlformats.org/drawingml/2006/main" prst="rect">
             <a:avLst/>
@@ -25831,14 +25831,14 @@
           </a:bodyPr>
           <a:lstStyle xmlns:a="http://schemas.openxmlformats.org/drawingml/2006/main"/>
           <a:p xmlns:a="http://schemas.openxmlformats.org/drawingml/2006/main">
-            <a:pPr algn="l">
+            <a:pPr algn="ctr">
               <a:lnSpc>
                 <a:spcPct val="108000"/>
               </a:lnSpc>
               <a:buNone/>
-              <a:defRPr sz="1013" b="0" i="0">
-                <a:solidFill>
-                  <a:srgbClr val="475569"/>
+              <a:defRPr sz="1350" b="1" i="0">
+                <a:solidFill>
+                  <a:srgbClr val="0F766E"/>
                 </a:solidFill>
                 <a:latin typeface="PingFang SC"/>
                 <a:ea typeface="PingFang SC"/>
@@ -25846,15 +25846,15 @@
               </a:defRPr>
             </a:pPr>
             <a:r>
-              <a:rPr sz="1013" b="0" i="0">
-                <a:solidFill>
-                  <a:srgbClr val="475569"/>
+              <a:rPr sz="1350" b="1" i="0">
+                <a:solidFill>
+                  <a:srgbClr val="0F766E"/>
                 </a:solidFill>
                 <a:latin typeface="PingFang SC"/>
                 <a:ea typeface="PingFang SC"/>
                 <a:cs typeface="PingFang SC"/>
               </a:rPr>
-              <a:t>spots / cells</a:t>
+              <a:t>Expression matrix X</a:t>
             </a:r>
           </a:p>
         </p:txBody>
@@ -25864,18 +25864,18 @@
           <p:cNvPr id="70" name="">
             <a:extLst xmlns:a="http://schemas.openxmlformats.org/drawingml/2006/main">
               <a:ext uri="{FF2B5EF4-FFF2-40B4-BE49-F238E27FC236}">
-                <a16:creationId xmlns:a16="http://schemas.microsoft.com/office/drawing/2014/main" id="{94A77464-E81D-4CF1-93ED-AE9176F703AF}"/>
-              </a:ext>
-            </a:extLst>
-          </p:cNvPr>
-          <p:cNvSpPr>
-            <a:spLocks xmlns:a="http://schemas.openxmlformats.org/drawingml/2006/main" noGrp="1"/>
-          </p:cNvSpPr>
-          <p:nvPr/>
-        </p:nvSpPr>
-        <p:spPr>
-          <a:xfrm xmlns:a="http://schemas.openxmlformats.org/drawingml/2006/main">
-            <a:off x="4857750" y="4457700"/>
+                <a16:creationId xmlns:a16="http://schemas.microsoft.com/office/drawing/2014/main" id="{C5249BFF-05CE-41EA-A913-78079298F9D4}"/>
+              </a:ext>
+            </a:extLst>
+          </p:cNvPr>
+          <p:cNvSpPr>
+            <a:spLocks xmlns:a="http://schemas.openxmlformats.org/drawingml/2006/main" noGrp="1"/>
+          </p:cNvSpPr>
+          <p:nvPr/>
+        </p:nvSpPr>
+        <p:spPr>
+          <a:xfrm xmlns:a="http://schemas.openxmlformats.org/drawingml/2006/main">
+            <a:off x="4895850" y="4438650"/>
             <a:ext cx="2286000" cy="228600"/>
           </a:xfrm>
           <a:prstGeom xmlns:a="http://schemas.openxmlformats.org/drawingml/2006/main" prst="rect">
@@ -25916,7 +25916,7 @@
                 <a:ea typeface="PingFang SC"/>
                 <a:cs typeface="PingFang SC"/>
               </a:rPr>
-              <a:t>X: spots/cells × genes</a:t>
+              <a:t>spots / cells × genes</a:t>
             </a:r>
           </a:p>
         </p:txBody>
@@ -25926,18 +25926,18 @@
           <p:cNvPr id="71" name="">
             <a:extLst xmlns:a="http://schemas.openxmlformats.org/drawingml/2006/main">
               <a:ext uri="{FF2B5EF4-FFF2-40B4-BE49-F238E27FC236}">
-                <a16:creationId xmlns:a16="http://schemas.microsoft.com/office/drawing/2014/main" id="{31C51087-A882-4FB6-8FF8-AE0733AB19F0}"/>
-              </a:ext>
-            </a:extLst>
-          </p:cNvPr>
-          <p:cNvSpPr>
-            <a:spLocks xmlns:a="http://schemas.openxmlformats.org/drawingml/2006/main" noGrp="1"/>
-          </p:cNvSpPr>
-          <p:nvPr/>
-        </p:nvSpPr>
-        <p:spPr>
-          <a:xfrm xmlns:a="http://schemas.openxmlformats.org/drawingml/2006/main">
-            <a:off x="876300" y="2038350"/>
+                <a16:creationId xmlns:a16="http://schemas.microsoft.com/office/drawing/2014/main" id="{6AA3CE90-24EB-4B93-AF7D-7659D3FCF9AB}"/>
+              </a:ext>
+            </a:extLst>
+          </p:cNvPr>
+          <p:cNvSpPr>
+            <a:spLocks xmlns:a="http://schemas.openxmlformats.org/drawingml/2006/main" noGrp="1"/>
+          </p:cNvSpPr>
+          <p:nvPr/>
+        </p:nvSpPr>
+        <p:spPr>
+          <a:xfrm xmlns:a="http://schemas.openxmlformats.org/drawingml/2006/main">
+            <a:off x="876300" y="2076450"/>
             <a:ext cx="2381250" cy="1123950"/>
           </a:xfrm>
           <a:prstGeom xmlns:a="http://schemas.openxmlformats.org/drawingml/2006/main" prst="roundRect">
@@ -25967,18 +25967,18 @@
           <p:cNvPr id="72" name="">
             <a:extLst xmlns:a="http://schemas.openxmlformats.org/drawingml/2006/main">
               <a:ext uri="{FF2B5EF4-FFF2-40B4-BE49-F238E27FC236}">
-                <a16:creationId xmlns:a16="http://schemas.microsoft.com/office/drawing/2014/main" id="{0AD8FE35-ABB4-45CF-BB85-641285156A23}"/>
-              </a:ext>
-            </a:extLst>
-          </p:cNvPr>
-          <p:cNvSpPr>
-            <a:spLocks xmlns:a="http://schemas.openxmlformats.org/drawingml/2006/main" noGrp="1"/>
-          </p:cNvSpPr>
-          <p:nvPr/>
-        </p:nvSpPr>
-        <p:spPr>
-          <a:xfrm xmlns:a="http://schemas.openxmlformats.org/drawingml/2006/main">
-            <a:off x="1028700" y="2133600"/>
+                <a16:creationId xmlns:a16="http://schemas.microsoft.com/office/drawing/2014/main" id="{EDDD809D-43F1-4237-B851-B63F8A1E21B0}"/>
+              </a:ext>
+            </a:extLst>
+          </p:cNvPr>
+          <p:cNvSpPr>
+            <a:spLocks xmlns:a="http://schemas.openxmlformats.org/drawingml/2006/main" noGrp="1"/>
+          </p:cNvSpPr>
+          <p:nvPr/>
+        </p:nvSpPr>
+        <p:spPr>
+          <a:xfrm xmlns:a="http://schemas.openxmlformats.org/drawingml/2006/main">
+            <a:off x="1028700" y="2171700"/>
             <a:ext cx="2076450" cy="247650"/>
           </a:xfrm>
           <a:prstGeom xmlns:a="http://schemas.openxmlformats.org/drawingml/2006/main" prst="rect">
@@ -26029,18 +26029,18 @@
           <p:cNvPr id="73" name="">
             <a:extLst xmlns:a="http://schemas.openxmlformats.org/drawingml/2006/main">
               <a:ext uri="{FF2B5EF4-FFF2-40B4-BE49-F238E27FC236}">
-                <a16:creationId xmlns:a16="http://schemas.microsoft.com/office/drawing/2014/main" id="{EB8566B7-8173-49E1-A5BF-EE9D2CF63DC9}"/>
-              </a:ext>
-            </a:extLst>
-          </p:cNvPr>
-          <p:cNvSpPr>
-            <a:spLocks xmlns:a="http://schemas.openxmlformats.org/drawingml/2006/main" noGrp="1"/>
-          </p:cNvSpPr>
-          <p:nvPr/>
-        </p:nvSpPr>
-        <p:spPr>
-          <a:xfrm xmlns:a="http://schemas.openxmlformats.org/drawingml/2006/main">
-            <a:off x="1028700" y="2419350"/>
+                <a16:creationId xmlns:a16="http://schemas.microsoft.com/office/drawing/2014/main" id="{D2195230-4975-4A22-8D3D-6A407C8AEEFD}"/>
+              </a:ext>
+            </a:extLst>
+          </p:cNvPr>
+          <p:cNvSpPr>
+            <a:spLocks xmlns:a="http://schemas.openxmlformats.org/drawingml/2006/main" noGrp="1"/>
+          </p:cNvSpPr>
+          <p:nvPr/>
+        </p:nvSpPr>
+        <p:spPr>
+          <a:xfrm xmlns:a="http://schemas.openxmlformats.org/drawingml/2006/main">
+            <a:off x="1028700" y="2457450"/>
             <a:ext cx="2076450" cy="628650"/>
           </a:xfrm>
           <a:prstGeom xmlns:a="http://schemas.openxmlformats.org/drawingml/2006/main" prst="rect">
@@ -26118,18 +26118,18 @@
           <p:cNvPr id="74" name="">
             <a:extLst xmlns:a="http://schemas.openxmlformats.org/drawingml/2006/main">
               <a:ext uri="{FF2B5EF4-FFF2-40B4-BE49-F238E27FC236}">
-                <a16:creationId xmlns:a16="http://schemas.microsoft.com/office/drawing/2014/main" id="{B5B1273E-B1F9-4FC9-B2D3-225E3124F336}"/>
-              </a:ext>
-            </a:extLst>
-          </p:cNvPr>
-          <p:cNvSpPr>
-            <a:spLocks xmlns:a="http://schemas.openxmlformats.org/drawingml/2006/main" noGrp="1"/>
-          </p:cNvSpPr>
-          <p:nvPr/>
-        </p:nvSpPr>
-        <p:spPr>
-          <a:xfrm xmlns:a="http://schemas.openxmlformats.org/drawingml/2006/main">
-            <a:off x="876300" y="3543300"/>
+                <a16:creationId xmlns:a16="http://schemas.microsoft.com/office/drawing/2014/main" id="{BCF16CD0-A8DA-4164-A050-BCC113B8A48A}"/>
+              </a:ext>
+            </a:extLst>
+          </p:cNvPr>
+          <p:cNvSpPr>
+            <a:spLocks xmlns:a="http://schemas.openxmlformats.org/drawingml/2006/main" noGrp="1"/>
+          </p:cNvSpPr>
+          <p:nvPr/>
+        </p:nvSpPr>
+        <p:spPr>
+          <a:xfrm xmlns:a="http://schemas.openxmlformats.org/drawingml/2006/main">
+            <a:off x="876300" y="3562350"/>
             <a:ext cx="2381250" cy="1123950"/>
           </a:xfrm>
           <a:prstGeom xmlns:a="http://schemas.openxmlformats.org/drawingml/2006/main" prst="roundRect">
@@ -26159,18 +26159,18 @@
           <p:cNvPr id="75" name="">
             <a:extLst xmlns:a="http://schemas.openxmlformats.org/drawingml/2006/main">
               <a:ext uri="{FF2B5EF4-FFF2-40B4-BE49-F238E27FC236}">
-                <a16:creationId xmlns:a16="http://schemas.microsoft.com/office/drawing/2014/main" id="{A8EF8A0D-DF81-44FE-A17E-A386B9651201}"/>
-              </a:ext>
-            </a:extLst>
-          </p:cNvPr>
-          <p:cNvSpPr>
-            <a:spLocks xmlns:a="http://schemas.openxmlformats.org/drawingml/2006/main" noGrp="1"/>
-          </p:cNvSpPr>
-          <p:nvPr/>
-        </p:nvSpPr>
-        <p:spPr>
-          <a:xfrm xmlns:a="http://schemas.openxmlformats.org/drawingml/2006/main">
-            <a:off x="1028700" y="3638550"/>
+                <a16:creationId xmlns:a16="http://schemas.microsoft.com/office/drawing/2014/main" id="{CF5F48FE-5F83-4E5F-B393-04CAE6DE7B69}"/>
+              </a:ext>
+            </a:extLst>
+          </p:cNvPr>
+          <p:cNvSpPr>
+            <a:spLocks xmlns:a="http://schemas.openxmlformats.org/drawingml/2006/main" noGrp="1"/>
+          </p:cNvSpPr>
+          <p:nvPr/>
+        </p:nvSpPr>
+        <p:spPr>
+          <a:xfrm xmlns:a="http://schemas.openxmlformats.org/drawingml/2006/main">
+            <a:off x="1028700" y="3657600"/>
             <a:ext cx="2076450" cy="247650"/>
           </a:xfrm>
           <a:prstGeom xmlns:a="http://schemas.openxmlformats.org/drawingml/2006/main" prst="rect">
@@ -26221,18 +26221,18 @@
           <p:cNvPr id="76" name="">
             <a:extLst xmlns:a="http://schemas.openxmlformats.org/drawingml/2006/main">
               <a:ext uri="{FF2B5EF4-FFF2-40B4-BE49-F238E27FC236}">
-                <a16:creationId xmlns:a16="http://schemas.microsoft.com/office/drawing/2014/main" id="{87153B06-E431-4CB0-B1B4-025D4EB4C98D}"/>
-              </a:ext>
-            </a:extLst>
-          </p:cNvPr>
-          <p:cNvSpPr>
-            <a:spLocks xmlns:a="http://schemas.openxmlformats.org/drawingml/2006/main" noGrp="1"/>
-          </p:cNvSpPr>
-          <p:nvPr/>
-        </p:nvSpPr>
-        <p:spPr>
-          <a:xfrm xmlns:a="http://schemas.openxmlformats.org/drawingml/2006/main">
-            <a:off x="1028700" y="3924300"/>
+                <a16:creationId xmlns:a16="http://schemas.microsoft.com/office/drawing/2014/main" id="{CBC01C75-CDC6-40E3-8E09-1EFD521BC45D}"/>
+              </a:ext>
+            </a:extLst>
+          </p:cNvPr>
+          <p:cNvSpPr>
+            <a:spLocks xmlns:a="http://schemas.openxmlformats.org/drawingml/2006/main" noGrp="1"/>
+          </p:cNvSpPr>
+          <p:nvPr/>
+        </p:nvSpPr>
+        <p:spPr>
+          <a:xfrm xmlns:a="http://schemas.openxmlformats.org/drawingml/2006/main">
+            <a:off x="1028700" y="3943350"/>
             <a:ext cx="2076450" cy="628650"/>
           </a:xfrm>
           <a:prstGeom xmlns:a="http://schemas.openxmlformats.org/drawingml/2006/main" prst="rect">
@@ -26310,18 +26310,18 @@
           <p:cNvPr id="77" name="">
             <a:extLst xmlns:a="http://schemas.openxmlformats.org/drawingml/2006/main">
               <a:ext uri="{FF2B5EF4-FFF2-40B4-BE49-F238E27FC236}">
-                <a16:creationId xmlns:a16="http://schemas.microsoft.com/office/drawing/2014/main" id="{EC50F06E-6201-4270-8445-721E64F279D6}"/>
-              </a:ext>
-            </a:extLst>
-          </p:cNvPr>
-          <p:cNvSpPr>
-            <a:spLocks xmlns:a="http://schemas.openxmlformats.org/drawingml/2006/main" noGrp="1"/>
-          </p:cNvSpPr>
-          <p:nvPr/>
-        </p:nvSpPr>
-        <p:spPr>
-          <a:xfrm xmlns:a="http://schemas.openxmlformats.org/drawingml/2006/main">
-            <a:off x="8572500" y="2038350"/>
+                <a16:creationId xmlns:a16="http://schemas.microsoft.com/office/drawing/2014/main" id="{0E20455B-5DFF-493A-A261-7867CF2D90AC}"/>
+              </a:ext>
+            </a:extLst>
+          </p:cNvPr>
+          <p:cNvSpPr>
+            <a:spLocks xmlns:a="http://schemas.openxmlformats.org/drawingml/2006/main" noGrp="1"/>
+          </p:cNvSpPr>
+          <p:nvPr/>
+        </p:nvSpPr>
+        <p:spPr>
+          <a:xfrm xmlns:a="http://schemas.openxmlformats.org/drawingml/2006/main">
+            <a:off x="8743950" y="2076450"/>
             <a:ext cx="2571750" cy="1123950"/>
           </a:xfrm>
           <a:prstGeom xmlns:a="http://schemas.openxmlformats.org/drawingml/2006/main" prst="roundRect">
@@ -26351,18 +26351,18 @@
           <p:cNvPr id="78" name="">
             <a:extLst xmlns:a="http://schemas.openxmlformats.org/drawingml/2006/main">
               <a:ext uri="{FF2B5EF4-FFF2-40B4-BE49-F238E27FC236}">
-                <a16:creationId xmlns:a16="http://schemas.microsoft.com/office/drawing/2014/main" id="{CCEA6D50-1D5A-4E67-975D-1CCE1C5CB3E1}"/>
-              </a:ext>
-            </a:extLst>
-          </p:cNvPr>
-          <p:cNvSpPr>
-            <a:spLocks xmlns:a="http://schemas.openxmlformats.org/drawingml/2006/main" noGrp="1"/>
-          </p:cNvSpPr>
-          <p:nvPr/>
-        </p:nvSpPr>
-        <p:spPr>
-          <a:xfrm xmlns:a="http://schemas.openxmlformats.org/drawingml/2006/main">
-            <a:off x="8724900" y="2133600"/>
+                <a16:creationId xmlns:a16="http://schemas.microsoft.com/office/drawing/2014/main" id="{9DE1E6E2-2AB8-4EF3-8492-966A579F9F6B}"/>
+              </a:ext>
+            </a:extLst>
+          </p:cNvPr>
+          <p:cNvSpPr>
+            <a:spLocks xmlns:a="http://schemas.openxmlformats.org/drawingml/2006/main" noGrp="1"/>
+          </p:cNvSpPr>
+          <p:nvPr/>
+        </p:nvSpPr>
+        <p:spPr>
+          <a:xfrm xmlns:a="http://schemas.openxmlformats.org/drawingml/2006/main">
+            <a:off x="8896350" y="2171700"/>
             <a:ext cx="2266950" cy="247650"/>
           </a:xfrm>
           <a:prstGeom xmlns:a="http://schemas.openxmlformats.org/drawingml/2006/main" prst="rect">
@@ -26413,18 +26413,18 @@
           <p:cNvPr id="79" name="">
             <a:extLst xmlns:a="http://schemas.openxmlformats.org/drawingml/2006/main">
               <a:ext uri="{FF2B5EF4-FFF2-40B4-BE49-F238E27FC236}">
-                <a16:creationId xmlns:a16="http://schemas.microsoft.com/office/drawing/2014/main" id="{D8A14846-CFEF-4B49-A05E-2748A0D31C54}"/>
-              </a:ext>
-            </a:extLst>
-          </p:cNvPr>
-          <p:cNvSpPr>
-            <a:spLocks xmlns:a="http://schemas.openxmlformats.org/drawingml/2006/main" noGrp="1"/>
-          </p:cNvSpPr>
-          <p:nvPr/>
-        </p:nvSpPr>
-        <p:spPr>
-          <a:xfrm xmlns:a="http://schemas.openxmlformats.org/drawingml/2006/main">
-            <a:off x="8724900" y="2419350"/>
+                <a16:creationId xmlns:a16="http://schemas.microsoft.com/office/drawing/2014/main" id="{CAF99C60-8813-419C-BED4-0FB0B8205429}"/>
+              </a:ext>
+            </a:extLst>
+          </p:cNvPr>
+          <p:cNvSpPr>
+            <a:spLocks xmlns:a="http://schemas.openxmlformats.org/drawingml/2006/main" noGrp="1"/>
+          </p:cNvSpPr>
+          <p:nvPr/>
+        </p:nvSpPr>
+        <p:spPr>
+          <a:xfrm xmlns:a="http://schemas.openxmlformats.org/drawingml/2006/main">
+            <a:off x="8896350" y="2457450"/>
             <a:ext cx="2266950" cy="628650"/>
           </a:xfrm>
           <a:prstGeom xmlns:a="http://schemas.openxmlformats.org/drawingml/2006/main" prst="rect">
@@ -26502,18 +26502,18 @@
           <p:cNvPr id="80" name="">
             <a:extLst xmlns:a="http://schemas.openxmlformats.org/drawingml/2006/main">
               <a:ext uri="{FF2B5EF4-FFF2-40B4-BE49-F238E27FC236}">
-                <a16:creationId xmlns:a16="http://schemas.microsoft.com/office/drawing/2014/main" id="{F0781AA9-F513-4259-9B2C-022AA30BAB5F}"/>
-              </a:ext>
-            </a:extLst>
-          </p:cNvPr>
-          <p:cNvSpPr>
-            <a:spLocks xmlns:a="http://schemas.openxmlformats.org/drawingml/2006/main" noGrp="1"/>
-          </p:cNvSpPr>
-          <p:nvPr/>
-        </p:nvSpPr>
-        <p:spPr>
-          <a:xfrm xmlns:a="http://schemas.openxmlformats.org/drawingml/2006/main">
-            <a:off x="8572500" y="3543300"/>
+                <a16:creationId xmlns:a16="http://schemas.microsoft.com/office/drawing/2014/main" id="{E662D53C-0303-43E0-815A-0913A8369EB9}"/>
+              </a:ext>
+            </a:extLst>
+          </p:cNvPr>
+          <p:cNvSpPr>
+            <a:spLocks xmlns:a="http://schemas.openxmlformats.org/drawingml/2006/main" noGrp="1"/>
+          </p:cNvSpPr>
+          <p:nvPr/>
+        </p:nvSpPr>
+        <p:spPr>
+          <a:xfrm xmlns:a="http://schemas.openxmlformats.org/drawingml/2006/main">
+            <a:off x="8743950" y="3562350"/>
             <a:ext cx="2571750" cy="1123950"/>
           </a:xfrm>
           <a:prstGeom xmlns:a="http://schemas.openxmlformats.org/drawingml/2006/main" prst="roundRect">
@@ -26543,18 +26543,18 @@
           <p:cNvPr id="81" name="">
             <a:extLst xmlns:a="http://schemas.openxmlformats.org/drawingml/2006/main">
               <a:ext uri="{FF2B5EF4-FFF2-40B4-BE49-F238E27FC236}">
-                <a16:creationId xmlns:a16="http://schemas.microsoft.com/office/drawing/2014/main" id="{852797F6-AE6B-427A-A9B1-B67DF5672362}"/>
-              </a:ext>
-            </a:extLst>
-          </p:cNvPr>
-          <p:cNvSpPr>
-            <a:spLocks xmlns:a="http://schemas.openxmlformats.org/drawingml/2006/main" noGrp="1"/>
-          </p:cNvSpPr>
-          <p:nvPr/>
-        </p:nvSpPr>
-        <p:spPr>
-          <a:xfrm xmlns:a="http://schemas.openxmlformats.org/drawingml/2006/main">
-            <a:off x="8724900" y="3638550"/>
+                <a16:creationId xmlns:a16="http://schemas.microsoft.com/office/drawing/2014/main" id="{E57CCEE8-EA7A-4809-BA9D-F23151F248DC}"/>
+              </a:ext>
+            </a:extLst>
+          </p:cNvPr>
+          <p:cNvSpPr>
+            <a:spLocks xmlns:a="http://schemas.openxmlformats.org/drawingml/2006/main" noGrp="1"/>
+          </p:cNvSpPr>
+          <p:nvPr/>
+        </p:nvSpPr>
+        <p:spPr>
+          <a:xfrm xmlns:a="http://schemas.openxmlformats.org/drawingml/2006/main">
+            <a:off x="8896350" y="3657600"/>
             <a:ext cx="2266950" cy="247650"/>
           </a:xfrm>
           <a:prstGeom xmlns:a="http://schemas.openxmlformats.org/drawingml/2006/main" prst="rect">
@@ -26605,18 +26605,18 @@
           <p:cNvPr id="82" name="">
             <a:extLst xmlns:a="http://schemas.openxmlformats.org/drawingml/2006/main">
               <a:ext uri="{FF2B5EF4-FFF2-40B4-BE49-F238E27FC236}">
-                <a16:creationId xmlns:a16="http://schemas.microsoft.com/office/drawing/2014/main" id="{2708507D-B8E7-492D-9763-8611451B1603}"/>
-              </a:ext>
-            </a:extLst>
-          </p:cNvPr>
-          <p:cNvSpPr>
-            <a:spLocks xmlns:a="http://schemas.openxmlformats.org/drawingml/2006/main" noGrp="1"/>
-          </p:cNvSpPr>
-          <p:nvPr/>
-        </p:nvSpPr>
-        <p:spPr>
-          <a:xfrm xmlns:a="http://schemas.openxmlformats.org/drawingml/2006/main">
-            <a:off x="8724900" y="3924300"/>
+                <a16:creationId xmlns:a16="http://schemas.microsoft.com/office/drawing/2014/main" id="{C2A646A5-450E-46DC-8A30-51B34220112A}"/>
+              </a:ext>
+            </a:extLst>
+          </p:cNvPr>
+          <p:cNvSpPr>
+            <a:spLocks xmlns:a="http://schemas.openxmlformats.org/drawingml/2006/main" noGrp="1"/>
+          </p:cNvSpPr>
+          <p:nvPr/>
+        </p:nvSpPr>
+        <p:spPr>
+          <a:xfrm xmlns:a="http://schemas.openxmlformats.org/drawingml/2006/main">
+            <a:off x="8896350" y="3943350"/>
             <a:ext cx="2266950" cy="628650"/>
           </a:xfrm>
           <a:prstGeom xmlns:a="http://schemas.openxmlformats.org/drawingml/2006/main" prst="rect">
@@ -26694,140 +26694,139 @@
           <p:cNvPr id="83" name="">
             <a:extLst xmlns:a="http://schemas.openxmlformats.org/drawingml/2006/main">
               <a:ext uri="{FF2B5EF4-FFF2-40B4-BE49-F238E27FC236}">
-                <a16:creationId xmlns:a16="http://schemas.microsoft.com/office/drawing/2014/main" id="{D77E7989-9378-44D8-B7C2-DC7BC47E9C8E}"/>
-              </a:ext>
-            </a:extLst>
-          </p:cNvPr>
-          <p:cNvSpPr>
-            <a:spLocks xmlns:a="http://schemas.openxmlformats.org/drawingml/2006/main" noGrp="1"/>
-          </p:cNvSpPr>
-          <p:nvPr/>
-        </p:nvSpPr>
-        <p:spPr>
-          <a:xfrm xmlns:a="http://schemas.openxmlformats.org/drawingml/2006/main">
-            <a:off x="5334000" y="3200400"/>
-            <a:ext cx="9525" cy="9525"/>
-          </a:xfrm>
-          <a:prstGeom xmlns:a="http://schemas.openxmlformats.org/drawingml/2006/main" prst="rect">
-            <a:avLst/>
-          </a:prstGeom>
-          <a:noFill xmlns:a="http://schemas.openxmlformats.org/drawingml/2006/main"/>
-          <a:ln xmlns:a="http://schemas.openxmlformats.org/drawingml/2006/main" w="0">
-            <a:noFill/>
-            <a:prstDash val="solid"/>
-          </a:ln>
-        </p:spPr>
-      </p:sp>
-      <p:cxnSp>
-        <p:nvCxnSpPr>
-          <p:cNvPr id="175" name=""/>
-          <p:cNvCxnSpPr>
-            <a:stCxn xmlns:a="http://schemas.openxmlformats.org/drawingml/2006/main" id="71" idx="3"/>
-            <a:endCxn xmlns:a="http://schemas.openxmlformats.org/drawingml/2006/main" id="83" idx="1"/>
-          </p:cNvCxnSpPr>
-          <p:nvPr/>
-        </p:nvCxnSpPr>
-        <p:spPr>
-          <a:xfrm xmlns:a="http://schemas.openxmlformats.org/drawingml/2006/main">
-            <a:off x="3257550" y="2600325"/>
-            <a:ext cx="2076450" cy="604838"/>
-          </a:xfrm>
-          <a:prstGeom xmlns:a="http://schemas.openxmlformats.org/drawingml/2006/main" prst="straightConnector1">
-            <a:avLst/>
-          </a:prstGeom>
-          <a:ln xmlns:a="http://schemas.openxmlformats.org/drawingml/2006/main" w="19050">
-            <a:solidFill>
-              <a:srgbClr val="475569"/>
-            </a:solidFill>
-            <a:prstDash val="dash"/>
-            <a:tailEnd type="arrow" w="med" len="med"/>
-          </a:ln>
-        </p:spPr>
-      </p:cxnSp>
-      <p:cxnSp>
-        <p:nvCxnSpPr>
-          <p:cNvPr id="176" name=""/>
-          <p:cNvCxnSpPr>
-            <a:stCxn xmlns:a="http://schemas.openxmlformats.org/drawingml/2006/main" id="74" idx="3"/>
-            <a:endCxn xmlns:a="http://schemas.openxmlformats.org/drawingml/2006/main" id="83" idx="1"/>
-          </p:cNvCxnSpPr>
-          <p:nvPr/>
-        </p:nvCxnSpPr>
-        <p:spPr>
-          <a:xfrm xmlns:a="http://schemas.openxmlformats.org/drawingml/2006/main" flipV="1">
-            <a:off x="3257550" y="3205163"/>
-            <a:ext cx="2076450" cy="900113"/>
-          </a:xfrm>
-          <a:prstGeom xmlns:a="http://schemas.openxmlformats.org/drawingml/2006/main" prst="straightConnector1">
-            <a:avLst/>
-          </a:prstGeom>
-          <a:ln xmlns:a="http://schemas.openxmlformats.org/drawingml/2006/main" w="19050">
-            <a:solidFill>
-              <a:srgbClr val="475569"/>
-            </a:solidFill>
-            <a:prstDash val="dash"/>
-            <a:tailEnd type="arrow" w="med" len="med"/>
-          </a:ln>
-        </p:spPr>
-      </p:cxnSp>
-      <p:cxnSp>
-        <p:nvCxnSpPr>
-          <p:cNvPr id="177" name=""/>
-          <p:cNvCxnSpPr>
-            <a:stCxn xmlns:a="http://schemas.openxmlformats.org/drawingml/2006/main" id="83" idx="3"/>
-            <a:endCxn xmlns:a="http://schemas.openxmlformats.org/drawingml/2006/main" id="77" idx="1"/>
-          </p:cNvCxnSpPr>
-          <p:nvPr/>
-        </p:nvCxnSpPr>
-        <p:spPr>
-          <a:xfrm xmlns:a="http://schemas.openxmlformats.org/drawingml/2006/main" flipV="1">
-            <a:off x="5343525" y="2600325"/>
-            <a:ext cx="3228975" cy="604838"/>
-          </a:xfrm>
-          <a:prstGeom xmlns:a="http://schemas.openxmlformats.org/drawingml/2006/main" prst="straightConnector1">
-            <a:avLst/>
-          </a:prstGeom>
-          <a:ln xmlns:a="http://schemas.openxmlformats.org/drawingml/2006/main" w="19050">
-            <a:solidFill>
-              <a:srgbClr val="475569"/>
-            </a:solidFill>
-            <a:prstDash val="dash"/>
-            <a:tailEnd type="arrow" w="med" len="med"/>
-          </a:ln>
-        </p:spPr>
-      </p:cxnSp>
-      <p:cxnSp>
-        <p:nvCxnSpPr>
-          <p:cNvPr id="178" name=""/>
-          <p:cNvCxnSpPr>
-            <a:stCxn xmlns:a="http://schemas.openxmlformats.org/drawingml/2006/main" id="83" idx="3"/>
-            <a:endCxn xmlns:a="http://schemas.openxmlformats.org/drawingml/2006/main" id="80" idx="1"/>
-          </p:cNvCxnSpPr>
-          <p:nvPr/>
-        </p:nvCxnSpPr>
-        <p:spPr>
-          <a:xfrm xmlns:a="http://schemas.openxmlformats.org/drawingml/2006/main">
-            <a:off x="5343525" y="3205163"/>
-            <a:ext cx="3228975" cy="900113"/>
-          </a:xfrm>
-          <a:prstGeom xmlns:a="http://schemas.openxmlformats.org/drawingml/2006/main" prst="straightConnector1">
-            <a:avLst/>
-          </a:prstGeom>
-          <a:ln xmlns:a="http://schemas.openxmlformats.org/drawingml/2006/main" w="19050">
-            <a:solidFill>
-              <a:srgbClr val="475569"/>
-            </a:solidFill>
-            <a:prstDash val="dash"/>
-            <a:tailEnd type="arrow" w="med" len="med"/>
-          </a:ln>
-        </p:spPr>
-      </p:cxnSp>
-      <p:sp>
-        <p:nvSpPr>
-          <p:cNvPr id="88" name="">
-            <a:extLst xmlns:a="http://schemas.openxmlformats.org/drawingml/2006/main">
-              <a:ext uri="{FF2B5EF4-FFF2-40B4-BE49-F238E27FC236}">
-                <a16:creationId xmlns:a16="http://schemas.microsoft.com/office/drawing/2014/main" id="{5EE32E5C-5653-41DB-8CBA-BD4FE684827C}"/>
+                <a16:creationId xmlns:a16="http://schemas.microsoft.com/office/drawing/2014/main" id="{B030A18B-6FA1-46D3-A227-7D1AB4D239AF}"/>
+              </a:ext>
+            </a:extLst>
+          </p:cNvPr>
+          <p:cNvSpPr>
+            <a:spLocks xmlns:a="http://schemas.openxmlformats.org/drawingml/2006/main" noGrp="1"/>
+          </p:cNvSpPr>
+          <p:nvPr/>
+        </p:nvSpPr>
+        <p:spPr>
+          <a:xfrm xmlns:a="http://schemas.openxmlformats.org/drawingml/2006/main">
+            <a:off x="3448050" y="2552700"/>
+            <a:ext cx="628650" cy="171450"/>
+          </a:xfrm>
+          <a:prstGeom xmlns:a="http://schemas.openxmlformats.org/drawingml/2006/main" prst="rightArrow">
+            <a:avLst/>
+          </a:prstGeom>
+          <a:solidFill xmlns:a="http://schemas.openxmlformats.org/drawingml/2006/main">
+            <a:srgbClr val="B7791F"/>
+          </a:solidFill>
+          <a:ln xmlns:a="http://schemas.openxmlformats.org/drawingml/2006/main" w="0">
+            <a:solidFill>
+              <a:srgbClr val="B7791F"/>
+            </a:solidFill>
+            <a:prstDash val="solid"/>
+          </a:ln>
+        </p:spPr>
+      </p:sp>
+      <p:sp>
+        <p:nvSpPr>
+          <p:cNvPr id="84" name="">
+            <a:extLst xmlns:a="http://schemas.openxmlformats.org/drawingml/2006/main">
+              <a:ext uri="{FF2B5EF4-FFF2-40B4-BE49-F238E27FC236}">
+                <a16:creationId xmlns:a16="http://schemas.microsoft.com/office/drawing/2014/main" id="{8F4E7413-0284-4F4E-9733-FEEBFFDF6D07}"/>
+              </a:ext>
+            </a:extLst>
+          </p:cNvPr>
+          <p:cNvSpPr>
+            <a:spLocks xmlns:a="http://schemas.openxmlformats.org/drawingml/2006/main" noGrp="1"/>
+          </p:cNvSpPr>
+          <p:nvPr/>
+        </p:nvSpPr>
+        <p:spPr>
+          <a:xfrm xmlns:a="http://schemas.openxmlformats.org/drawingml/2006/main">
+            <a:off x="3448050" y="4038600"/>
+            <a:ext cx="628650" cy="171450"/>
+          </a:xfrm>
+          <a:prstGeom xmlns:a="http://schemas.openxmlformats.org/drawingml/2006/main" prst="rightArrow">
+            <a:avLst/>
+          </a:prstGeom>
+          <a:solidFill xmlns:a="http://schemas.openxmlformats.org/drawingml/2006/main">
+            <a:srgbClr val="B7791F"/>
+          </a:solidFill>
+          <a:ln xmlns:a="http://schemas.openxmlformats.org/drawingml/2006/main" w="0">
+            <a:solidFill>
+              <a:srgbClr val="B7791F"/>
+            </a:solidFill>
+            <a:prstDash val="solid"/>
+          </a:ln>
+        </p:spPr>
+      </p:sp>
+      <p:sp>
+        <p:nvSpPr>
+          <p:cNvPr id="85" name="">
+            <a:extLst xmlns:a="http://schemas.openxmlformats.org/drawingml/2006/main">
+              <a:ext uri="{FF2B5EF4-FFF2-40B4-BE49-F238E27FC236}">
+                <a16:creationId xmlns:a16="http://schemas.microsoft.com/office/drawing/2014/main" id="{8BEE4B6D-962D-43EB-A98D-00B86C66C740}"/>
+              </a:ext>
+            </a:extLst>
+          </p:cNvPr>
+          <p:cNvSpPr>
+            <a:spLocks xmlns:a="http://schemas.openxmlformats.org/drawingml/2006/main" noGrp="1"/>
+          </p:cNvSpPr>
+          <p:nvPr/>
+        </p:nvSpPr>
+        <p:spPr>
+          <a:xfrm xmlns:a="http://schemas.openxmlformats.org/drawingml/2006/main">
+            <a:off x="7924800" y="2552700"/>
+            <a:ext cx="609600" cy="171450"/>
+          </a:xfrm>
+          <a:prstGeom xmlns:a="http://schemas.openxmlformats.org/drawingml/2006/main" prst="rightArrow">
+            <a:avLst/>
+          </a:prstGeom>
+          <a:solidFill xmlns:a="http://schemas.openxmlformats.org/drawingml/2006/main">
+            <a:srgbClr val="B7791F"/>
+          </a:solidFill>
+          <a:ln xmlns:a="http://schemas.openxmlformats.org/drawingml/2006/main" w="0">
+            <a:solidFill>
+              <a:srgbClr val="B7791F"/>
+            </a:solidFill>
+            <a:prstDash val="solid"/>
+          </a:ln>
+        </p:spPr>
+      </p:sp>
+      <p:sp>
+        <p:nvSpPr>
+          <p:cNvPr id="86" name="">
+            <a:extLst xmlns:a="http://schemas.openxmlformats.org/drawingml/2006/main">
+              <a:ext uri="{FF2B5EF4-FFF2-40B4-BE49-F238E27FC236}">
+                <a16:creationId xmlns:a16="http://schemas.microsoft.com/office/drawing/2014/main" id="{977A9CA1-2BE6-4284-B4BE-671DC036E44E}"/>
+              </a:ext>
+            </a:extLst>
+          </p:cNvPr>
+          <p:cNvSpPr>
+            <a:spLocks xmlns:a="http://schemas.openxmlformats.org/drawingml/2006/main" noGrp="1"/>
+          </p:cNvSpPr>
+          <p:nvPr/>
+        </p:nvSpPr>
+        <p:spPr>
+          <a:xfrm xmlns:a="http://schemas.openxmlformats.org/drawingml/2006/main">
+            <a:off x="7924800" y="4038600"/>
+            <a:ext cx="609600" cy="171450"/>
+          </a:xfrm>
+          <a:prstGeom xmlns:a="http://schemas.openxmlformats.org/drawingml/2006/main" prst="rightArrow">
+            <a:avLst/>
+          </a:prstGeom>
+          <a:solidFill xmlns:a="http://schemas.openxmlformats.org/drawingml/2006/main">
+            <a:srgbClr val="B7791F"/>
+          </a:solidFill>
+          <a:ln xmlns:a="http://schemas.openxmlformats.org/drawingml/2006/main" w="0">
+            <a:solidFill>
+              <a:srgbClr val="B7791F"/>
+            </a:solidFill>
+            <a:prstDash val="solid"/>
+          </a:ln>
+        </p:spPr>
+      </p:sp>
+      <p:sp>
+        <p:nvSpPr>
+          <p:cNvPr id="87" name="">
+            <a:extLst xmlns:a="http://schemas.openxmlformats.org/drawingml/2006/main">
+              <a:ext uri="{FF2B5EF4-FFF2-40B4-BE49-F238E27FC236}">
+                <a16:creationId xmlns:a16="http://schemas.microsoft.com/office/drawing/2014/main" id="{8046273D-5157-4F54-B204-B6EC21384F94}"/>
               </a:ext>
             </a:extLst>
           </p:cNvPr>
@@ -26886,10 +26885,10 @@
       </p:sp>
       <p:sp>
         <p:nvSpPr>
-          <p:cNvPr id="89" name="">
-            <a:extLst xmlns:a="http://schemas.openxmlformats.org/drawingml/2006/main">
-              <a:ext uri="{FF2B5EF4-FFF2-40B4-BE49-F238E27FC236}">
-                <a16:creationId xmlns:a16="http://schemas.microsoft.com/office/drawing/2014/main" id="{32FB9792-8961-4BF7-8278-14940FD9BAFF}"/>
+          <p:cNvPr id="88" name="">
+            <a:extLst xmlns:a="http://schemas.openxmlformats.org/drawingml/2006/main">
+              <a:ext uri="{FF2B5EF4-FFF2-40B4-BE49-F238E27FC236}">
+                <a16:creationId xmlns:a16="http://schemas.microsoft.com/office/drawing/2014/main" id="{5735B513-8B90-4B08-B3FA-E1CC14532028}"/>
               </a:ext>
             </a:extLst>
           </p:cNvPr>
@@ -26917,10 +26916,10 @@
       </p:sp>
       <p:sp>
         <p:nvSpPr>
-          <p:cNvPr id="90" name="">
-            <a:extLst xmlns:a="http://schemas.openxmlformats.org/drawingml/2006/main">
-              <a:ext uri="{FF2B5EF4-FFF2-40B4-BE49-F238E27FC236}">
-                <a16:creationId xmlns:a16="http://schemas.microsoft.com/office/drawing/2014/main" id="{DDB461CD-735A-4680-AE2C-855C9345A393}"/>
+          <p:cNvPr id="89" name="">
+            <a:extLst xmlns:a="http://schemas.openxmlformats.org/drawingml/2006/main">
+              <a:ext uri="{FF2B5EF4-FFF2-40B4-BE49-F238E27FC236}">
+                <a16:creationId xmlns:a16="http://schemas.microsoft.com/office/drawing/2014/main" id="{7DA0BB23-CF5D-41A9-9B5D-DA2ADD5CC1D0}"/>
               </a:ext>
             </a:extLst>
           </p:cNvPr>
@@ -26979,10 +26978,10 @@
       </p:sp>
       <p:sp>
         <p:nvSpPr>
-          <p:cNvPr id="91" name="">
-            <a:extLst xmlns:a="http://schemas.openxmlformats.org/drawingml/2006/main">
-              <a:ext uri="{FF2B5EF4-FFF2-40B4-BE49-F238E27FC236}">
-                <a16:creationId xmlns:a16="http://schemas.microsoft.com/office/drawing/2014/main" id="{E5856A6D-3734-4664-B203-E1F455A42009}"/>
+          <p:cNvPr id="90" name="">
+            <a:extLst xmlns:a="http://schemas.openxmlformats.org/drawingml/2006/main">
+              <a:ext uri="{FF2B5EF4-FFF2-40B4-BE49-F238E27FC236}">
+                <a16:creationId xmlns:a16="http://schemas.microsoft.com/office/drawing/2014/main" id="{353ADAD7-0D31-43BA-B0DD-433E4F342394}"/>
               </a:ext>
             </a:extLst>
           </p:cNvPr>
@@ -27042,7 +27041,7 @@
     </p:spTree>
     <p:extLst>
       <p:ext uri="{BB962C8B-B14F-4D97-AF65-F5344CB8AC3E}">
-        <p14:creationId xmlns:p14="http://schemas.microsoft.com/office/powerpoint/2010/main" val="190507514"/>
+        <p14:creationId xmlns:p14="http://schemas.microsoft.com/office/powerpoint/2010/main" val="2128684721"/>
       </p:ext>
     </p:extLst>
   </p:cSld>
@@ -27073,7 +27072,7 @@
           <p:cNvPr id="1" name="">
             <a:extLst xmlns:a="http://schemas.openxmlformats.org/drawingml/2006/main">
               <a:ext uri="{FF2B5EF4-FFF2-40B4-BE49-F238E27FC236}">
-                <a16:creationId xmlns:a16="http://schemas.microsoft.com/office/drawing/2014/main" id="{01F4C42F-BF46-4076-8DB8-DB3FE93B9738}"/>
+                <a16:creationId xmlns:a16="http://schemas.microsoft.com/office/drawing/2014/main" id="{E92CE371-4014-4E75-8591-70C8AFCC1EC8}"/>
               </a:ext>
             </a:extLst>
           </p:cNvPr>
@@ -27135,7 +27134,7 @@
           <p:cNvPr id="2" name="">
             <a:extLst xmlns:a="http://schemas.openxmlformats.org/drawingml/2006/main">
               <a:ext uri="{FF2B5EF4-FFF2-40B4-BE49-F238E27FC236}">
-                <a16:creationId xmlns:a16="http://schemas.microsoft.com/office/drawing/2014/main" id="{6EB60883-E392-483E-834B-8A64C683E822}"/>
+                <a16:creationId xmlns:a16="http://schemas.microsoft.com/office/drawing/2014/main" id="{9B6B3D95-5726-4CAC-B99B-F258EBEE2AB1}"/>
               </a:ext>
             </a:extLst>
           </p:cNvPr>
@@ -27197,7 +27196,7 @@
           <p:cNvPr id="3" name="">
             <a:extLst xmlns:a="http://schemas.openxmlformats.org/drawingml/2006/main">
               <a:ext uri="{FF2B5EF4-FFF2-40B4-BE49-F238E27FC236}">
-                <a16:creationId xmlns:a16="http://schemas.microsoft.com/office/drawing/2014/main" id="{D9F64B9F-5B6C-4C3E-8EE5-77EA270194BB}"/>
+                <a16:creationId xmlns:a16="http://schemas.microsoft.com/office/drawing/2014/main" id="{2023EE4A-54BD-49C2-B811-3EB1A1B7AC7C}"/>
               </a:ext>
             </a:extLst>
           </p:cNvPr>
@@ -27259,7 +27258,7 @@
           <p:cNvPr id="4" name="">
             <a:extLst xmlns:a="http://schemas.openxmlformats.org/drawingml/2006/main">
               <a:ext uri="{FF2B5EF4-FFF2-40B4-BE49-F238E27FC236}">
-                <a16:creationId xmlns:a16="http://schemas.microsoft.com/office/drawing/2014/main" id="{0CAADDD7-648F-46B4-8BEE-C6E98B859F8D}"/>
+                <a16:creationId xmlns:a16="http://schemas.microsoft.com/office/drawing/2014/main" id="{4FB9CC9D-9674-414C-9D90-7A3213C9D8ED}"/>
               </a:ext>
             </a:extLst>
           </p:cNvPr>
@@ -27321,7 +27320,7 @@
           <p:cNvPr id="5" name="">
             <a:extLst xmlns:a="http://schemas.openxmlformats.org/drawingml/2006/main">
               <a:ext uri="{FF2B5EF4-FFF2-40B4-BE49-F238E27FC236}">
-                <a16:creationId xmlns:a16="http://schemas.microsoft.com/office/drawing/2014/main" id="{C04E9AB1-987F-41DD-8905-B5BC09E9E39D}"/>
+                <a16:creationId xmlns:a16="http://schemas.microsoft.com/office/drawing/2014/main" id="{F4BC5B69-8470-4B57-8E4D-4B253D29F2AB}"/>
               </a:ext>
             </a:extLst>
           </p:cNvPr>
@@ -27383,7 +27382,7 @@
           <p:cNvPr id="6" name="">
             <a:extLst xmlns:a="http://schemas.openxmlformats.org/drawingml/2006/main">
               <a:ext uri="{FF2B5EF4-FFF2-40B4-BE49-F238E27FC236}">
-                <a16:creationId xmlns:a16="http://schemas.microsoft.com/office/drawing/2014/main" id="{25AF0288-7FD4-4544-9E50-310F31DB8C77}"/>
+                <a16:creationId xmlns:a16="http://schemas.microsoft.com/office/drawing/2014/main" id="{50EC407E-B533-4D0C-8716-E0B830EDA921}"/>
               </a:ext>
             </a:extLst>
           </p:cNvPr>
@@ -27445,7 +27444,7 @@
           <p:cNvPr id="7" name="">
             <a:extLst xmlns:a="http://schemas.openxmlformats.org/drawingml/2006/main">
               <a:ext uri="{FF2B5EF4-FFF2-40B4-BE49-F238E27FC236}">
-                <a16:creationId xmlns:a16="http://schemas.microsoft.com/office/drawing/2014/main" id="{1A8EAB34-DAF3-4031-8394-550E5717592B}"/>
+                <a16:creationId xmlns:a16="http://schemas.microsoft.com/office/drawing/2014/main" id="{D0EAAD72-2E74-42A2-B943-BEC180D3775A}"/>
               </a:ext>
             </a:extLst>
           </p:cNvPr>
@@ -27507,7 +27506,7 @@
           <p:cNvPr id="8" name="">
             <a:extLst xmlns:a="http://schemas.openxmlformats.org/drawingml/2006/main">
               <a:ext uri="{FF2B5EF4-FFF2-40B4-BE49-F238E27FC236}">
-                <a16:creationId xmlns:a16="http://schemas.microsoft.com/office/drawing/2014/main" id="{A55D4FAD-CD80-4D63-94FD-3818512C6638}"/>
+                <a16:creationId xmlns:a16="http://schemas.microsoft.com/office/drawing/2014/main" id="{50FB0710-765A-4D21-AC95-D700B8E01A29}"/>
               </a:ext>
             </a:extLst>
           </p:cNvPr>
@@ -27569,7 +27568,7 @@
           <p:cNvPr id="9" name="">
             <a:extLst xmlns:a="http://schemas.openxmlformats.org/drawingml/2006/main">
               <a:ext uri="{FF2B5EF4-FFF2-40B4-BE49-F238E27FC236}">
-                <a16:creationId xmlns:a16="http://schemas.microsoft.com/office/drawing/2014/main" id="{8E41A06C-2AB3-491F-8326-19BB646921D7}"/>
+                <a16:creationId xmlns:a16="http://schemas.microsoft.com/office/drawing/2014/main" id="{8F3B1483-748F-40A1-B6A5-38D6F00C3243}"/>
               </a:ext>
             </a:extLst>
           </p:cNvPr>
@@ -27631,7 +27630,7 @@
           <p:cNvPr id="10" name="">
             <a:extLst xmlns:a="http://schemas.openxmlformats.org/drawingml/2006/main">
               <a:ext uri="{FF2B5EF4-FFF2-40B4-BE49-F238E27FC236}">
-                <a16:creationId xmlns:a16="http://schemas.microsoft.com/office/drawing/2014/main" id="{D8596242-6F65-4EA9-A0A7-8D3B1C137BED}"/>
+                <a16:creationId xmlns:a16="http://schemas.microsoft.com/office/drawing/2014/main" id="{CDDC9302-4B49-42DB-BCB1-05B94CDFBE80}"/>
               </a:ext>
             </a:extLst>
           </p:cNvPr>
@@ -27693,7 +27692,7 @@
           <p:cNvPr id="11" name="">
             <a:extLst xmlns:a="http://schemas.openxmlformats.org/drawingml/2006/main">
               <a:ext uri="{FF2B5EF4-FFF2-40B4-BE49-F238E27FC236}">
-                <a16:creationId xmlns:a16="http://schemas.microsoft.com/office/drawing/2014/main" id="{B51942F8-C637-4773-B94E-0E3801BB14A3}"/>
+                <a16:creationId xmlns:a16="http://schemas.microsoft.com/office/drawing/2014/main" id="{F5E62F51-02F6-4BC5-84A5-7BBE6990E075}"/>
               </a:ext>
             </a:extLst>
           </p:cNvPr>
@@ -27755,7 +27754,7 @@
           <p:cNvPr id="12" name="">
             <a:extLst xmlns:a="http://schemas.openxmlformats.org/drawingml/2006/main">
               <a:ext uri="{FF2B5EF4-FFF2-40B4-BE49-F238E27FC236}">
-                <a16:creationId xmlns:a16="http://schemas.microsoft.com/office/drawing/2014/main" id="{F3B35499-0AD4-4BB3-9DF2-1A495C4D23A8}"/>
+                <a16:creationId xmlns:a16="http://schemas.microsoft.com/office/drawing/2014/main" id="{04533C5B-7170-4C94-8FB0-99E9D1B6CF78}"/>
               </a:ext>
             </a:extLst>
           </p:cNvPr>
@@ -27817,7 +27816,7 @@
           <p:cNvPr id="13" name="">
             <a:extLst xmlns:a="http://schemas.openxmlformats.org/drawingml/2006/main">
               <a:ext uri="{FF2B5EF4-FFF2-40B4-BE49-F238E27FC236}">
-                <a16:creationId xmlns:a16="http://schemas.microsoft.com/office/drawing/2014/main" id="{83260D8E-D79B-4844-9092-2D42246F45C5}"/>
+                <a16:creationId xmlns:a16="http://schemas.microsoft.com/office/drawing/2014/main" id="{2B55BE09-BA31-41A1-9749-D074D828DE77}"/>
               </a:ext>
             </a:extLst>
           </p:cNvPr>
@@ -27879,7 +27878,7 @@
           <p:cNvPr id="14" name="">
             <a:extLst xmlns:a="http://schemas.openxmlformats.org/drawingml/2006/main">
               <a:ext uri="{FF2B5EF4-FFF2-40B4-BE49-F238E27FC236}">
-                <a16:creationId xmlns:a16="http://schemas.microsoft.com/office/drawing/2014/main" id="{7487EC2D-6C5D-4B77-9B4F-0E6B3D2B6268}"/>
+                <a16:creationId xmlns:a16="http://schemas.microsoft.com/office/drawing/2014/main" id="{7C331CDD-3428-4E3C-8A9B-ADA2EDF40B37}"/>
               </a:ext>
             </a:extLst>
           </p:cNvPr>
@@ -27941,7 +27940,7 @@
           <p:cNvPr id="15" name="">
             <a:extLst xmlns:a="http://schemas.openxmlformats.org/drawingml/2006/main">
               <a:ext uri="{FF2B5EF4-FFF2-40B4-BE49-F238E27FC236}">
-                <a16:creationId xmlns:a16="http://schemas.microsoft.com/office/drawing/2014/main" id="{DA17AB9A-5E31-4D3C-AD2C-063F993CB405}"/>
+                <a16:creationId xmlns:a16="http://schemas.microsoft.com/office/drawing/2014/main" id="{4BAD76F4-C719-47BB-B1EF-E1CD7E4FA7BC}"/>
               </a:ext>
             </a:extLst>
           </p:cNvPr>
@@ -28003,7 +28002,7 @@
           <p:cNvPr id="16" name="">
             <a:extLst xmlns:a="http://schemas.openxmlformats.org/drawingml/2006/main">
               <a:ext uri="{FF2B5EF4-FFF2-40B4-BE49-F238E27FC236}">
-                <a16:creationId xmlns:a16="http://schemas.microsoft.com/office/drawing/2014/main" id="{585C8471-1F6A-4A42-94A4-9714D6316C59}"/>
+                <a16:creationId xmlns:a16="http://schemas.microsoft.com/office/drawing/2014/main" id="{AF41DAD3-7873-4ED6-AB3B-7792DF5F1FBB}"/>
               </a:ext>
             </a:extLst>
           </p:cNvPr>
@@ -28065,7 +28064,7 @@
           <p:cNvPr id="17" name="">
             <a:extLst xmlns:a="http://schemas.openxmlformats.org/drawingml/2006/main">
               <a:ext uri="{FF2B5EF4-FFF2-40B4-BE49-F238E27FC236}">
-                <a16:creationId xmlns:a16="http://schemas.microsoft.com/office/drawing/2014/main" id="{C833A6D7-C446-4B6F-82A4-7E31B00E0CEB}"/>
+                <a16:creationId xmlns:a16="http://schemas.microsoft.com/office/drawing/2014/main" id="{D5573F53-4DEB-485A-8DE6-8AAAB18CF00F}"/>
               </a:ext>
             </a:extLst>
           </p:cNvPr>
@@ -28127,7 +28126,7 @@
           <p:cNvPr id="18" name="">
             <a:extLst xmlns:a="http://schemas.openxmlformats.org/drawingml/2006/main">
               <a:ext uri="{FF2B5EF4-FFF2-40B4-BE49-F238E27FC236}">
-                <a16:creationId xmlns:a16="http://schemas.microsoft.com/office/drawing/2014/main" id="{61261406-5BB1-4A1C-8148-A37B23590E05}"/>
+                <a16:creationId xmlns:a16="http://schemas.microsoft.com/office/drawing/2014/main" id="{63A757FB-DB91-483A-A889-896C278F38E3}"/>
               </a:ext>
             </a:extLst>
           </p:cNvPr>
@@ -28189,7 +28188,7 @@
           <p:cNvPr id="19" name="">
             <a:extLst xmlns:a="http://schemas.openxmlformats.org/drawingml/2006/main">
               <a:ext uri="{FF2B5EF4-FFF2-40B4-BE49-F238E27FC236}">
-                <a16:creationId xmlns:a16="http://schemas.microsoft.com/office/drawing/2014/main" id="{D850C2AC-C000-4A83-B491-DC12FF7562D5}"/>
+                <a16:creationId xmlns:a16="http://schemas.microsoft.com/office/drawing/2014/main" id="{D9FA8806-CFBD-4FC0-B0F9-B2F8E1B35CA9}"/>
               </a:ext>
             </a:extLst>
           </p:cNvPr>
@@ -28230,7 +28229,7 @@
           <p:cNvPr id="20" name="">
             <a:extLst xmlns:a="http://schemas.openxmlformats.org/drawingml/2006/main">
               <a:ext uri="{FF2B5EF4-FFF2-40B4-BE49-F238E27FC236}">
-                <a16:creationId xmlns:a16="http://schemas.microsoft.com/office/drawing/2014/main" id="{3ED84973-1EC2-479D-B052-FBFB3A27F365}"/>
+                <a16:creationId xmlns:a16="http://schemas.microsoft.com/office/drawing/2014/main" id="{20FAD7AD-D7BE-4CB8-94F4-088A684C0069}"/>
               </a:ext>
             </a:extLst>
           </p:cNvPr>
@@ -28292,7 +28291,7 @@
           <p:cNvPr id="21" name="">
             <a:extLst xmlns:a="http://schemas.openxmlformats.org/drawingml/2006/main">
               <a:ext uri="{FF2B5EF4-FFF2-40B4-BE49-F238E27FC236}">
-                <a16:creationId xmlns:a16="http://schemas.microsoft.com/office/drawing/2014/main" id="{D2CE8E1C-020F-479A-8E93-F79BD32AEC58}"/>
+                <a16:creationId xmlns:a16="http://schemas.microsoft.com/office/drawing/2014/main" id="{33F62F28-8C97-41F4-98CB-0237E1CB632A}"/>
               </a:ext>
             </a:extLst>
           </p:cNvPr>
@@ -28354,7 +28353,7 @@
           <p:cNvPr id="22" name="">
             <a:extLst xmlns:a="http://schemas.openxmlformats.org/drawingml/2006/main">
               <a:ext uri="{FF2B5EF4-FFF2-40B4-BE49-F238E27FC236}">
-                <a16:creationId xmlns:a16="http://schemas.microsoft.com/office/drawing/2014/main" id="{F8DC6046-9865-48A9-9694-BE22E9A6B055}"/>
+                <a16:creationId xmlns:a16="http://schemas.microsoft.com/office/drawing/2014/main" id="{33FE68E1-F107-40D5-B498-BE543CA50C47}"/>
               </a:ext>
             </a:extLst>
           </p:cNvPr>
@@ -28395,7 +28394,7 @@
           <p:cNvPr id="23" name="">
             <a:extLst xmlns:a="http://schemas.openxmlformats.org/drawingml/2006/main">
               <a:ext uri="{FF2B5EF4-FFF2-40B4-BE49-F238E27FC236}">
-                <a16:creationId xmlns:a16="http://schemas.microsoft.com/office/drawing/2014/main" id="{D5EC9A3E-04C9-4122-874D-2F496A7A7B40}"/>
+                <a16:creationId xmlns:a16="http://schemas.microsoft.com/office/drawing/2014/main" id="{73DE0CB3-14D7-4A51-9450-9E1677115163}"/>
               </a:ext>
             </a:extLst>
           </p:cNvPr>
@@ -28457,7 +28456,7 @@
           <p:cNvPr id="24" name="">
             <a:extLst xmlns:a="http://schemas.openxmlformats.org/drawingml/2006/main">
               <a:ext uri="{FF2B5EF4-FFF2-40B4-BE49-F238E27FC236}">
-                <a16:creationId xmlns:a16="http://schemas.microsoft.com/office/drawing/2014/main" id="{B2C7EEBE-EE1D-489D-B2DF-B0BD8FBEE33B}"/>
+                <a16:creationId xmlns:a16="http://schemas.microsoft.com/office/drawing/2014/main" id="{D4A33023-386D-4FDB-99D0-64D5B8516B61}"/>
               </a:ext>
             </a:extLst>
           </p:cNvPr>
@@ -28519,7 +28518,7 @@
           <p:cNvPr id="25" name="">
             <a:extLst xmlns:a="http://schemas.openxmlformats.org/drawingml/2006/main">
               <a:ext uri="{FF2B5EF4-FFF2-40B4-BE49-F238E27FC236}">
-                <a16:creationId xmlns:a16="http://schemas.microsoft.com/office/drawing/2014/main" id="{E21133F6-A924-48AA-A4D5-4853310BF069}"/>
+                <a16:creationId xmlns:a16="http://schemas.microsoft.com/office/drawing/2014/main" id="{1B381DBB-5B16-4531-A29E-E150C49FD288}"/>
               </a:ext>
             </a:extLst>
           </p:cNvPr>
@@ -28550,7 +28549,7 @@
           <p:cNvPr id="26" name="">
             <a:extLst xmlns:a="http://schemas.openxmlformats.org/drawingml/2006/main">
               <a:ext uri="{FF2B5EF4-FFF2-40B4-BE49-F238E27FC236}">
-                <a16:creationId xmlns:a16="http://schemas.microsoft.com/office/drawing/2014/main" id="{7F848CC6-461E-4D3B-AE63-671981247C76}"/>
+                <a16:creationId xmlns:a16="http://schemas.microsoft.com/office/drawing/2014/main" id="{97146EFA-B60C-4C78-919C-3EA15E856C63}"/>
               </a:ext>
             </a:extLst>
           </p:cNvPr>
@@ -28612,7 +28611,7 @@
           <p:cNvPr id="27" name="">
             <a:extLst xmlns:a="http://schemas.openxmlformats.org/drawingml/2006/main">
               <a:ext uri="{FF2B5EF4-FFF2-40B4-BE49-F238E27FC236}">
-                <a16:creationId xmlns:a16="http://schemas.microsoft.com/office/drawing/2014/main" id="{77F618B5-51BE-4E88-B260-2D924F89CD95}"/>
+                <a16:creationId xmlns:a16="http://schemas.microsoft.com/office/drawing/2014/main" id="{10B65F2A-FFD8-4C59-A8B5-ABA654F1A8D5}"/>
               </a:ext>
             </a:extLst>
           </p:cNvPr>
@@ -28672,7 +28671,7 @@
     </p:spTree>
     <p:extLst>
       <p:ext uri="{BB962C8B-B14F-4D97-AF65-F5344CB8AC3E}">
-        <p14:creationId xmlns:p14="http://schemas.microsoft.com/office/powerpoint/2010/main" val="374478493"/>
+        <p14:creationId xmlns:p14="http://schemas.microsoft.com/office/powerpoint/2010/main" val="248198504"/>
       </p:ext>
     </p:extLst>
   </p:cSld>
@@ -28703,7 +28702,7 @@
           <p:cNvPr id="1" name="">
             <a:extLst xmlns:a="http://schemas.openxmlformats.org/drawingml/2006/main">
               <a:ext uri="{FF2B5EF4-FFF2-40B4-BE49-F238E27FC236}">
-                <a16:creationId xmlns:a16="http://schemas.microsoft.com/office/drawing/2014/main" id="{AAF59FB5-1E37-4660-BF6A-55A7A2DBFCC6}"/>
+                <a16:creationId xmlns:a16="http://schemas.microsoft.com/office/drawing/2014/main" id="{E1D317A9-EB7A-402C-BD7E-EB8CFC161AE3}"/>
               </a:ext>
             </a:extLst>
           </p:cNvPr>
@@ -28765,7 +28764,7 @@
           <p:cNvPr id="2" name="">
             <a:extLst xmlns:a="http://schemas.openxmlformats.org/drawingml/2006/main">
               <a:ext uri="{FF2B5EF4-FFF2-40B4-BE49-F238E27FC236}">
-                <a16:creationId xmlns:a16="http://schemas.microsoft.com/office/drawing/2014/main" id="{52DC5EF1-1CC8-4C07-9D1D-23FEAE8C5680}"/>
+                <a16:creationId xmlns:a16="http://schemas.microsoft.com/office/drawing/2014/main" id="{453D9D3A-BE23-474D-A51E-71DDCEA9AF46}"/>
               </a:ext>
             </a:extLst>
           </p:cNvPr>
@@ -28827,7 +28826,7 @@
           <p:cNvPr id="3" name="">
             <a:extLst xmlns:a="http://schemas.openxmlformats.org/drawingml/2006/main">
               <a:ext uri="{FF2B5EF4-FFF2-40B4-BE49-F238E27FC236}">
-                <a16:creationId xmlns:a16="http://schemas.microsoft.com/office/drawing/2014/main" id="{2106FF5F-EED3-4428-9F8C-9B05D5852821}"/>
+                <a16:creationId xmlns:a16="http://schemas.microsoft.com/office/drawing/2014/main" id="{45F18298-2790-4DCE-8FAD-2C8C19ACC399}"/>
               </a:ext>
             </a:extLst>
           </p:cNvPr>
@@ -28868,7 +28867,7 @@
           <p:cNvPr id="4" name="">
             <a:extLst xmlns:a="http://schemas.openxmlformats.org/drawingml/2006/main">
               <a:ext uri="{FF2B5EF4-FFF2-40B4-BE49-F238E27FC236}">
-                <a16:creationId xmlns:a16="http://schemas.microsoft.com/office/drawing/2014/main" id="{6FEC8C10-053A-4BFA-9C7C-8D7590D90FD3}"/>
+                <a16:creationId xmlns:a16="http://schemas.microsoft.com/office/drawing/2014/main" id="{25483E3C-D7B0-4919-B1BD-4B951EA8ADF5}"/>
               </a:ext>
             </a:extLst>
           </p:cNvPr>
@@ -28899,7 +28898,7 @@
           <p:cNvPr id="5" name="">
             <a:extLst xmlns:a="http://schemas.openxmlformats.org/drawingml/2006/main">
               <a:ext uri="{FF2B5EF4-FFF2-40B4-BE49-F238E27FC236}">
-                <a16:creationId xmlns:a16="http://schemas.microsoft.com/office/drawing/2014/main" id="{74064427-B7F5-4B99-9564-7A0201BA574D}"/>
+                <a16:creationId xmlns:a16="http://schemas.microsoft.com/office/drawing/2014/main" id="{E4670058-ED56-40E6-9E74-1F6839CB555F}"/>
               </a:ext>
             </a:extLst>
           </p:cNvPr>
@@ -28932,7 +28931,7 @@
           <p:cNvPr id="6" name="">
             <a:extLst xmlns:a="http://schemas.openxmlformats.org/drawingml/2006/main">
               <a:ext uri="{FF2B5EF4-FFF2-40B4-BE49-F238E27FC236}">
-                <a16:creationId xmlns:a16="http://schemas.microsoft.com/office/drawing/2014/main" id="{28BA2CF3-2C84-42F4-B39A-D78072155779}"/>
+                <a16:creationId xmlns:a16="http://schemas.microsoft.com/office/drawing/2014/main" id="{7DEEB7DE-087B-4E49-9AE8-A4F36F013962}"/>
               </a:ext>
             </a:extLst>
           </p:cNvPr>
@@ -28965,7 +28964,7 @@
           <p:cNvPr id="7" name="">
             <a:extLst xmlns:a="http://schemas.openxmlformats.org/drawingml/2006/main">
               <a:ext uri="{FF2B5EF4-FFF2-40B4-BE49-F238E27FC236}">
-                <a16:creationId xmlns:a16="http://schemas.microsoft.com/office/drawing/2014/main" id="{6BBB215E-878D-449F-870B-55289BF5B7C0}"/>
+                <a16:creationId xmlns:a16="http://schemas.microsoft.com/office/drawing/2014/main" id="{192919AD-CB08-41D1-8935-D8F11BAA7420}"/>
               </a:ext>
             </a:extLst>
           </p:cNvPr>
@@ -28998,7 +28997,7 @@
           <p:cNvPr id="8" name="">
             <a:extLst xmlns:a="http://schemas.openxmlformats.org/drawingml/2006/main">
               <a:ext uri="{FF2B5EF4-FFF2-40B4-BE49-F238E27FC236}">
-                <a16:creationId xmlns:a16="http://schemas.microsoft.com/office/drawing/2014/main" id="{0B68B5F6-3251-4F3E-BB33-AFF9ED3DB635}"/>
+                <a16:creationId xmlns:a16="http://schemas.microsoft.com/office/drawing/2014/main" id="{B9A394EC-C42B-4274-90B8-1B02BCCE0CB6}"/>
               </a:ext>
             </a:extLst>
           </p:cNvPr>
@@ -29031,7 +29030,7 @@
           <p:cNvPr id="9" name="">
             <a:extLst xmlns:a="http://schemas.openxmlformats.org/drawingml/2006/main">
               <a:ext uri="{FF2B5EF4-FFF2-40B4-BE49-F238E27FC236}">
-                <a16:creationId xmlns:a16="http://schemas.microsoft.com/office/drawing/2014/main" id="{73588E31-5522-46BC-A19F-C57E6A087C59}"/>
+                <a16:creationId xmlns:a16="http://schemas.microsoft.com/office/drawing/2014/main" id="{A0EC31D7-29C2-43A0-B8C0-29556E2ECB81}"/>
               </a:ext>
             </a:extLst>
           </p:cNvPr>
@@ -29064,7 +29063,7 @@
           <p:cNvPr id="10" name="">
             <a:extLst xmlns:a="http://schemas.openxmlformats.org/drawingml/2006/main">
               <a:ext uri="{FF2B5EF4-FFF2-40B4-BE49-F238E27FC236}">
-                <a16:creationId xmlns:a16="http://schemas.microsoft.com/office/drawing/2014/main" id="{E481727B-D656-41AA-B14D-95A272204AEF}"/>
+                <a16:creationId xmlns:a16="http://schemas.microsoft.com/office/drawing/2014/main" id="{71C9260F-C66B-41D4-B070-70EC16EF429F}"/>
               </a:ext>
             </a:extLst>
           </p:cNvPr>
@@ -29097,7 +29096,7 @@
           <p:cNvPr id="11" name="">
             <a:extLst xmlns:a="http://schemas.openxmlformats.org/drawingml/2006/main">
               <a:ext uri="{FF2B5EF4-FFF2-40B4-BE49-F238E27FC236}">
-                <a16:creationId xmlns:a16="http://schemas.microsoft.com/office/drawing/2014/main" id="{1B39E753-FD7F-4761-9EC5-24B2FAAFC4B6}"/>
+                <a16:creationId xmlns:a16="http://schemas.microsoft.com/office/drawing/2014/main" id="{75D805A8-4B80-46F8-AECC-A09EF713B147}"/>
               </a:ext>
             </a:extLst>
           </p:cNvPr>
@@ -29130,7 +29129,7 @@
           <p:cNvPr id="12" name="">
             <a:extLst xmlns:a="http://schemas.openxmlformats.org/drawingml/2006/main">
               <a:ext uri="{FF2B5EF4-FFF2-40B4-BE49-F238E27FC236}">
-                <a16:creationId xmlns:a16="http://schemas.microsoft.com/office/drawing/2014/main" id="{C9B4D407-F7CD-4342-A853-09EB28E93B29}"/>
+                <a16:creationId xmlns:a16="http://schemas.microsoft.com/office/drawing/2014/main" id="{D46B37DE-84AD-4F36-A140-C5836C52EC74}"/>
               </a:ext>
             </a:extLst>
           </p:cNvPr>
@@ -29171,7 +29170,7 @@
           <p:cNvPr id="13" name="">
             <a:extLst xmlns:a="http://schemas.openxmlformats.org/drawingml/2006/main">
               <a:ext uri="{FF2B5EF4-FFF2-40B4-BE49-F238E27FC236}">
-                <a16:creationId xmlns:a16="http://schemas.microsoft.com/office/drawing/2014/main" id="{86765EA6-03A6-407F-90F6-5A9F78E6EFB6}"/>
+                <a16:creationId xmlns:a16="http://schemas.microsoft.com/office/drawing/2014/main" id="{BB1814D8-D01E-4536-889C-B3BAD7432A07}"/>
               </a:ext>
             </a:extLst>
           </p:cNvPr>
@@ -29260,7 +29259,7 @@
           <p:cNvPr id="14" name="">
             <a:extLst xmlns:a="http://schemas.openxmlformats.org/drawingml/2006/main">
               <a:ext uri="{FF2B5EF4-FFF2-40B4-BE49-F238E27FC236}">
-                <a16:creationId xmlns:a16="http://schemas.microsoft.com/office/drawing/2014/main" id="{698843C1-96B1-4219-BCC8-40EAAEB238AA}"/>
+                <a16:creationId xmlns:a16="http://schemas.microsoft.com/office/drawing/2014/main" id="{FD0DBE6C-344D-4DCE-9831-CCE202546DC5}"/>
               </a:ext>
             </a:extLst>
           </p:cNvPr>
@@ -29301,7 +29300,7 @@
           <p:cNvPr id="15" name="">
             <a:extLst xmlns:a="http://schemas.openxmlformats.org/drawingml/2006/main">
               <a:ext uri="{FF2B5EF4-FFF2-40B4-BE49-F238E27FC236}">
-                <a16:creationId xmlns:a16="http://schemas.microsoft.com/office/drawing/2014/main" id="{BBB5BBB9-96F2-4768-9ABB-112B7DB1722E}"/>
+                <a16:creationId xmlns:a16="http://schemas.microsoft.com/office/drawing/2014/main" id="{6035BD8B-566C-4CB0-B008-9BD3616F36D1}"/>
               </a:ext>
             </a:extLst>
           </p:cNvPr>
@@ -29390,7 +29389,7 @@
           <p:cNvPr id="16" name="">
             <a:extLst xmlns:a="http://schemas.openxmlformats.org/drawingml/2006/main">
               <a:ext uri="{FF2B5EF4-FFF2-40B4-BE49-F238E27FC236}">
-                <a16:creationId xmlns:a16="http://schemas.microsoft.com/office/drawing/2014/main" id="{AC05B771-E31E-4D1E-80E8-0CB435E8AA4C}"/>
+                <a16:creationId xmlns:a16="http://schemas.microsoft.com/office/drawing/2014/main" id="{E671B54A-8D52-4BEA-8DEA-4262EF2D2D6D}"/>
               </a:ext>
             </a:extLst>
           </p:cNvPr>
@@ -29431,7 +29430,7 @@
           <p:cNvPr id="17" name="">
             <a:extLst xmlns:a="http://schemas.openxmlformats.org/drawingml/2006/main">
               <a:ext uri="{FF2B5EF4-FFF2-40B4-BE49-F238E27FC236}">
-                <a16:creationId xmlns:a16="http://schemas.microsoft.com/office/drawing/2014/main" id="{D50A7E47-7386-4AFC-90D6-FA0699C59C8F}"/>
+                <a16:creationId xmlns:a16="http://schemas.microsoft.com/office/drawing/2014/main" id="{AE797577-C20B-49EA-8710-06687BE75F48}"/>
               </a:ext>
             </a:extLst>
           </p:cNvPr>
@@ -29520,7 +29519,7 @@
           <p:cNvPr id="18" name="">
             <a:extLst xmlns:a="http://schemas.openxmlformats.org/drawingml/2006/main">
               <a:ext uri="{FF2B5EF4-FFF2-40B4-BE49-F238E27FC236}">
-                <a16:creationId xmlns:a16="http://schemas.microsoft.com/office/drawing/2014/main" id="{5C568A19-F70A-4168-A33A-2AF93EC50E3B}"/>
+                <a16:creationId xmlns:a16="http://schemas.microsoft.com/office/drawing/2014/main" id="{07373BAE-6BC6-496A-BFBC-1DA26CDA3368}"/>
               </a:ext>
             </a:extLst>
           </p:cNvPr>
@@ -29561,7 +29560,7 @@
           <p:cNvPr id="19" name="">
             <a:extLst xmlns:a="http://schemas.openxmlformats.org/drawingml/2006/main">
               <a:ext uri="{FF2B5EF4-FFF2-40B4-BE49-F238E27FC236}">
-                <a16:creationId xmlns:a16="http://schemas.microsoft.com/office/drawing/2014/main" id="{8646CA59-15CC-468A-ADCB-A2421030F69B}"/>
+                <a16:creationId xmlns:a16="http://schemas.microsoft.com/office/drawing/2014/main" id="{6B666724-6F11-4382-B148-C247CEA7067F}"/>
               </a:ext>
             </a:extLst>
           </p:cNvPr>
@@ -29650,7 +29649,7 @@
           <p:cNvPr id="20" name="">
             <a:extLst xmlns:a="http://schemas.openxmlformats.org/drawingml/2006/main">
               <a:ext uri="{FF2B5EF4-FFF2-40B4-BE49-F238E27FC236}">
-                <a16:creationId xmlns:a16="http://schemas.microsoft.com/office/drawing/2014/main" id="{BD95CC0F-952D-45DD-A73C-482B12F36ED8}"/>
+                <a16:creationId xmlns:a16="http://schemas.microsoft.com/office/drawing/2014/main" id="{C826F2C1-8DD8-49C5-A264-49596EEB5DFF}"/>
               </a:ext>
             </a:extLst>
           </p:cNvPr>
@@ -29691,7 +29690,7 @@
           <p:cNvPr id="21" name="">
             <a:extLst xmlns:a="http://schemas.openxmlformats.org/drawingml/2006/main">
               <a:ext uri="{FF2B5EF4-FFF2-40B4-BE49-F238E27FC236}">
-                <a16:creationId xmlns:a16="http://schemas.microsoft.com/office/drawing/2014/main" id="{0FC52E0B-C851-4B88-BDD4-B54B16456A53}"/>
+                <a16:creationId xmlns:a16="http://schemas.microsoft.com/office/drawing/2014/main" id="{993F36DF-161B-4BA7-AD98-1E4001889483}"/>
               </a:ext>
             </a:extLst>
           </p:cNvPr>
@@ -29753,7 +29752,7 @@
           <p:cNvPr id="22" name="">
             <a:extLst xmlns:a="http://schemas.openxmlformats.org/drawingml/2006/main">
               <a:ext uri="{FF2B5EF4-FFF2-40B4-BE49-F238E27FC236}">
-                <a16:creationId xmlns:a16="http://schemas.microsoft.com/office/drawing/2014/main" id="{DF9D4BE0-698C-4901-B6FF-3A5A51797150}"/>
+                <a16:creationId xmlns:a16="http://schemas.microsoft.com/office/drawing/2014/main" id="{3AD3003F-4ED6-43C6-833E-7688201CB638}"/>
               </a:ext>
             </a:extLst>
           </p:cNvPr>
@@ -29794,7 +29793,7 @@
           <p:cNvPr id="23" name="">
             <a:extLst xmlns:a="http://schemas.openxmlformats.org/drawingml/2006/main">
               <a:ext uri="{FF2B5EF4-FFF2-40B4-BE49-F238E27FC236}">
-                <a16:creationId xmlns:a16="http://schemas.microsoft.com/office/drawing/2014/main" id="{ACF28C9C-BA8D-4117-8C93-09FA3B4E01CD}"/>
+                <a16:creationId xmlns:a16="http://schemas.microsoft.com/office/drawing/2014/main" id="{2AFB66C9-919F-4302-927F-10EE4CE1E349}"/>
               </a:ext>
             </a:extLst>
           </p:cNvPr>
@@ -29856,7 +29855,7 @@
           <p:cNvPr id="24" name="">
             <a:extLst xmlns:a="http://schemas.openxmlformats.org/drawingml/2006/main">
               <a:ext uri="{FF2B5EF4-FFF2-40B4-BE49-F238E27FC236}">
-                <a16:creationId xmlns:a16="http://schemas.microsoft.com/office/drawing/2014/main" id="{66E993D2-ADC0-4F3C-AC25-34340AB6FCC5}"/>
+                <a16:creationId xmlns:a16="http://schemas.microsoft.com/office/drawing/2014/main" id="{6E7727D0-4D36-45A7-8993-53B427EED92B}"/>
               </a:ext>
             </a:extLst>
           </p:cNvPr>
@@ -29897,7 +29896,7 @@
           <p:cNvPr id="25" name="">
             <a:extLst xmlns:a="http://schemas.openxmlformats.org/drawingml/2006/main">
               <a:ext uri="{FF2B5EF4-FFF2-40B4-BE49-F238E27FC236}">
-                <a16:creationId xmlns:a16="http://schemas.microsoft.com/office/drawing/2014/main" id="{16C79D40-BE64-4074-9780-DB1D408A4A1C}"/>
+                <a16:creationId xmlns:a16="http://schemas.microsoft.com/office/drawing/2014/main" id="{F8AFAED5-76DB-48D5-B269-5EF0430869F9}"/>
               </a:ext>
             </a:extLst>
           </p:cNvPr>
@@ -29986,7 +29985,7 @@
           <p:cNvPr id="26" name="">
             <a:extLst xmlns:a="http://schemas.openxmlformats.org/drawingml/2006/main">
               <a:ext uri="{FF2B5EF4-FFF2-40B4-BE49-F238E27FC236}">
-                <a16:creationId xmlns:a16="http://schemas.microsoft.com/office/drawing/2014/main" id="{B64FABE0-4803-4BB5-B966-97B18209818B}"/>
+                <a16:creationId xmlns:a16="http://schemas.microsoft.com/office/drawing/2014/main" id="{36BAEF2A-AE36-4400-9CAD-28EEE18A924C}"/>
               </a:ext>
             </a:extLst>
           </p:cNvPr>
@@ -30027,7 +30026,7 @@
           <p:cNvPr id="27" name="">
             <a:extLst xmlns:a="http://schemas.openxmlformats.org/drawingml/2006/main">
               <a:ext uri="{FF2B5EF4-FFF2-40B4-BE49-F238E27FC236}">
-                <a16:creationId xmlns:a16="http://schemas.microsoft.com/office/drawing/2014/main" id="{8B92D1E3-2448-4366-AE5F-938D6874E940}"/>
+                <a16:creationId xmlns:a16="http://schemas.microsoft.com/office/drawing/2014/main" id="{A2569806-A2E5-486B-8015-9823F829E146}"/>
               </a:ext>
             </a:extLst>
           </p:cNvPr>
@@ -30116,7 +30115,7 @@
           <p:cNvPr id="28" name="">
             <a:extLst xmlns:a="http://schemas.openxmlformats.org/drawingml/2006/main">
               <a:ext uri="{FF2B5EF4-FFF2-40B4-BE49-F238E27FC236}">
-                <a16:creationId xmlns:a16="http://schemas.microsoft.com/office/drawing/2014/main" id="{C42EF577-4319-4EB4-9FF6-8EE900C19FD3}"/>
+                <a16:creationId xmlns:a16="http://schemas.microsoft.com/office/drawing/2014/main" id="{BD8B8018-11CC-4C3E-B13D-D408139E6F34}"/>
               </a:ext>
             </a:extLst>
           </p:cNvPr>
@@ -30149,7 +30148,7 @@
           <p:cNvPr id="29" name="">
             <a:extLst xmlns:a="http://schemas.openxmlformats.org/drawingml/2006/main">
               <a:ext uri="{FF2B5EF4-FFF2-40B4-BE49-F238E27FC236}">
-                <a16:creationId xmlns:a16="http://schemas.microsoft.com/office/drawing/2014/main" id="{1AEDDAC2-270A-49F4-9689-BAEFAA5AC2FE}"/>
+                <a16:creationId xmlns:a16="http://schemas.microsoft.com/office/drawing/2014/main" id="{3D6736E6-3BE8-44EB-9DF4-4BA3456FF57A}"/>
               </a:ext>
             </a:extLst>
           </p:cNvPr>
@@ -30211,7 +30210,7 @@
           <p:cNvPr id="30" name="">
             <a:extLst xmlns:a="http://schemas.openxmlformats.org/drawingml/2006/main">
               <a:ext uri="{FF2B5EF4-FFF2-40B4-BE49-F238E27FC236}">
-                <a16:creationId xmlns:a16="http://schemas.microsoft.com/office/drawing/2014/main" id="{B81ED964-AF3E-4029-B62D-D7389E5EADA8}"/>
+                <a16:creationId xmlns:a16="http://schemas.microsoft.com/office/drawing/2014/main" id="{5B81DF02-FBC0-4859-8E38-4EE1DE3069E4}"/>
               </a:ext>
             </a:extLst>
           </p:cNvPr>
@@ -30244,7 +30243,7 @@
           <p:cNvPr id="31" name="">
             <a:extLst xmlns:a="http://schemas.openxmlformats.org/drawingml/2006/main">
               <a:ext uri="{FF2B5EF4-FFF2-40B4-BE49-F238E27FC236}">
-                <a16:creationId xmlns:a16="http://schemas.microsoft.com/office/drawing/2014/main" id="{A9783702-3895-4F7B-B951-31886442B773}"/>
+                <a16:creationId xmlns:a16="http://schemas.microsoft.com/office/drawing/2014/main" id="{5C822F0B-453F-4F86-B383-1185354817BF}"/>
               </a:ext>
             </a:extLst>
           </p:cNvPr>
@@ -30306,7 +30305,7 @@
           <p:cNvPr id="32" name="">
             <a:extLst xmlns:a="http://schemas.openxmlformats.org/drawingml/2006/main">
               <a:ext uri="{FF2B5EF4-FFF2-40B4-BE49-F238E27FC236}">
-                <a16:creationId xmlns:a16="http://schemas.microsoft.com/office/drawing/2014/main" id="{AF9E0680-8D55-4504-9450-BB8C6B13EE0A}"/>
+                <a16:creationId xmlns:a16="http://schemas.microsoft.com/office/drawing/2014/main" id="{AD11D13F-0BFA-446A-95FE-0B53B194D16D}"/>
               </a:ext>
             </a:extLst>
           </p:cNvPr>
@@ -30339,7 +30338,7 @@
           <p:cNvPr id="33" name="">
             <a:extLst xmlns:a="http://schemas.openxmlformats.org/drawingml/2006/main">
               <a:ext uri="{FF2B5EF4-FFF2-40B4-BE49-F238E27FC236}">
-                <a16:creationId xmlns:a16="http://schemas.microsoft.com/office/drawing/2014/main" id="{702572F9-C5C2-404F-AAD3-6E2287D470DB}"/>
+                <a16:creationId xmlns:a16="http://schemas.microsoft.com/office/drawing/2014/main" id="{5DCB3F0A-E41C-4E67-9FAA-2E7267473BC7}"/>
               </a:ext>
             </a:extLst>
           </p:cNvPr>
@@ -30401,7 +30400,7 @@
           <p:cNvPr id="34" name="">
             <a:extLst xmlns:a="http://schemas.openxmlformats.org/drawingml/2006/main">
               <a:ext uri="{FF2B5EF4-FFF2-40B4-BE49-F238E27FC236}">
-                <a16:creationId xmlns:a16="http://schemas.microsoft.com/office/drawing/2014/main" id="{CB359EF3-9A97-46FF-B6B9-6EABA4C51BF7}"/>
+                <a16:creationId xmlns:a16="http://schemas.microsoft.com/office/drawing/2014/main" id="{C0DB8657-CB3D-4C33-8E61-84C7D3F75B87}"/>
               </a:ext>
             </a:extLst>
           </p:cNvPr>
@@ -30463,7 +30462,7 @@
           <p:cNvPr id="35" name="">
             <a:extLst xmlns:a="http://schemas.openxmlformats.org/drawingml/2006/main">
               <a:ext uri="{FF2B5EF4-FFF2-40B4-BE49-F238E27FC236}">
-                <a16:creationId xmlns:a16="http://schemas.microsoft.com/office/drawing/2014/main" id="{6061AF45-0C9B-450C-8357-9B7F7C49CC1B}"/>
+                <a16:creationId xmlns:a16="http://schemas.microsoft.com/office/drawing/2014/main" id="{5EE3DD17-596C-48E3-A69D-D6FEE01A0834}"/>
               </a:ext>
             </a:extLst>
           </p:cNvPr>
@@ -30494,7 +30493,7 @@
           <p:cNvPr id="36" name="">
             <a:extLst xmlns:a="http://schemas.openxmlformats.org/drawingml/2006/main">
               <a:ext uri="{FF2B5EF4-FFF2-40B4-BE49-F238E27FC236}">
-                <a16:creationId xmlns:a16="http://schemas.microsoft.com/office/drawing/2014/main" id="{8BED2295-4A1F-46E8-B670-4E9F5251E20E}"/>
+                <a16:creationId xmlns:a16="http://schemas.microsoft.com/office/drawing/2014/main" id="{A0106203-CF12-4C5D-9C5B-9251D48B2C2A}"/>
               </a:ext>
             </a:extLst>
           </p:cNvPr>
@@ -30556,7 +30555,7 @@
           <p:cNvPr id="37" name="">
             <a:extLst xmlns:a="http://schemas.openxmlformats.org/drawingml/2006/main">
               <a:ext uri="{FF2B5EF4-FFF2-40B4-BE49-F238E27FC236}">
-                <a16:creationId xmlns:a16="http://schemas.microsoft.com/office/drawing/2014/main" id="{DA7E6D7A-D6E6-405E-9F05-E2CBF008AE72}"/>
+                <a16:creationId xmlns:a16="http://schemas.microsoft.com/office/drawing/2014/main" id="{BA256596-8F66-4D0E-B502-2A115AC2486D}"/>
               </a:ext>
             </a:extLst>
           </p:cNvPr>
@@ -30616,7 +30615,7 @@
     </p:spTree>
     <p:extLst>
       <p:ext uri="{BB962C8B-B14F-4D97-AF65-F5344CB8AC3E}">
-        <p14:creationId xmlns:p14="http://schemas.microsoft.com/office/powerpoint/2010/main" val="1051741254"/>
+        <p14:creationId xmlns:p14="http://schemas.microsoft.com/office/powerpoint/2010/main" val="482563545"/>
       </p:ext>
     </p:extLst>
   </p:cSld>
@@ -30647,7 +30646,7 @@
           <p:cNvPr id="1" name="">
             <a:extLst xmlns:a="http://schemas.openxmlformats.org/drawingml/2006/main">
               <a:ext uri="{FF2B5EF4-FFF2-40B4-BE49-F238E27FC236}">
-                <a16:creationId xmlns:a16="http://schemas.microsoft.com/office/drawing/2014/main" id="{767E3E87-7BF9-48B1-AB48-9AF8AFBAC66A}"/>
+                <a16:creationId xmlns:a16="http://schemas.microsoft.com/office/drawing/2014/main" id="{5DEFC078-FDA4-485B-A234-258C800A12E3}"/>
               </a:ext>
             </a:extLst>
           </p:cNvPr>
@@ -30709,7 +30708,7 @@
           <p:cNvPr id="2" name="">
             <a:extLst xmlns:a="http://schemas.openxmlformats.org/drawingml/2006/main">
               <a:ext uri="{FF2B5EF4-FFF2-40B4-BE49-F238E27FC236}">
-                <a16:creationId xmlns:a16="http://schemas.microsoft.com/office/drawing/2014/main" id="{A1DCEE9D-2DB4-44BA-B047-F65369F32DDE}"/>
+                <a16:creationId xmlns:a16="http://schemas.microsoft.com/office/drawing/2014/main" id="{13E27909-6705-48C5-B541-1DBFD1747ADA}"/>
               </a:ext>
             </a:extLst>
           </p:cNvPr>
@@ -30775,7 +30774,7 @@
           <p:nvPr/>
         </p:nvPicPr>
         <p:blipFill>
-          <a:blip xmlns:r="http://schemas.openxmlformats.org/officeDocument/2006/relationships" xmlns:a="http://schemas.openxmlformats.org/drawingml/2006/main" r:embed="R8730c03d03424183"/>
+          <a:blip xmlns:r="http://schemas.openxmlformats.org/officeDocument/2006/relationships" xmlns:a="http://schemas.openxmlformats.org/drawingml/2006/main" r:embed="Rabd1b0771aa94eab"/>
           <a:stretch xmlns:a="http://schemas.openxmlformats.org/drawingml/2006/main"/>
         </p:blipFill>
         <p:spPr>
@@ -30795,7 +30794,7 @@
           <p:cNvPr id="4" name="">
             <a:extLst xmlns:a="http://schemas.openxmlformats.org/drawingml/2006/main">
               <a:ext uri="{FF2B5EF4-FFF2-40B4-BE49-F238E27FC236}">
-                <a16:creationId xmlns:a16="http://schemas.microsoft.com/office/drawing/2014/main" id="{67164145-C050-424D-A847-33D5CD2C8257}"/>
+                <a16:creationId xmlns:a16="http://schemas.microsoft.com/office/drawing/2014/main" id="{B1C6C323-7820-4D48-9340-C7C95F9574B5}"/>
               </a:ext>
             </a:extLst>
           </p:cNvPr>
@@ -30836,7 +30835,7 @@
           <p:cNvPr id="5" name="">
             <a:extLst xmlns:a="http://schemas.openxmlformats.org/drawingml/2006/main">
               <a:ext uri="{FF2B5EF4-FFF2-40B4-BE49-F238E27FC236}">
-                <a16:creationId xmlns:a16="http://schemas.microsoft.com/office/drawing/2014/main" id="{E8CE3F45-5A06-46B2-A41E-18DDC50CFFD4}"/>
+                <a16:creationId xmlns:a16="http://schemas.microsoft.com/office/drawing/2014/main" id="{9EE98BF2-8612-4BB6-BC9D-17A6F6FDC96C}"/>
               </a:ext>
             </a:extLst>
           </p:cNvPr>
@@ -30898,7 +30897,7 @@
           <p:cNvPr id="6" name="">
             <a:extLst xmlns:a="http://schemas.openxmlformats.org/drawingml/2006/main">
               <a:ext uri="{FF2B5EF4-FFF2-40B4-BE49-F238E27FC236}">
-                <a16:creationId xmlns:a16="http://schemas.microsoft.com/office/drawing/2014/main" id="{50F4A270-EB0B-466F-B881-EC327515D23D}"/>
+                <a16:creationId xmlns:a16="http://schemas.microsoft.com/office/drawing/2014/main" id="{6514D460-F7CB-49FB-B24A-B30D2859DD90}"/>
               </a:ext>
             </a:extLst>
           </p:cNvPr>
@@ -31068,7 +31067,7 @@
           <p:cNvPr id="7" name="">
             <a:extLst xmlns:a="http://schemas.openxmlformats.org/drawingml/2006/main">
               <a:ext uri="{FF2B5EF4-FFF2-40B4-BE49-F238E27FC236}">
-                <a16:creationId xmlns:a16="http://schemas.microsoft.com/office/drawing/2014/main" id="{7DA2C476-1A0F-4CDB-91E2-86DDBD2059A9}"/>
+                <a16:creationId xmlns:a16="http://schemas.microsoft.com/office/drawing/2014/main" id="{6FB585D9-21BC-494D-8D0D-5A8690329C1B}"/>
               </a:ext>
             </a:extLst>
           </p:cNvPr>
@@ -31109,7 +31108,7 @@
           <p:cNvPr id="8" name="">
             <a:extLst xmlns:a="http://schemas.openxmlformats.org/drawingml/2006/main">
               <a:ext uri="{FF2B5EF4-FFF2-40B4-BE49-F238E27FC236}">
-                <a16:creationId xmlns:a16="http://schemas.microsoft.com/office/drawing/2014/main" id="{C33E20BE-D936-4953-8599-DB89A7703134}"/>
+                <a16:creationId xmlns:a16="http://schemas.microsoft.com/office/drawing/2014/main" id="{EE215306-459E-429C-9FA2-4E6873184F54}"/>
               </a:ext>
             </a:extLst>
           </p:cNvPr>
@@ -31171,7 +31170,7 @@
           <p:cNvPr id="9" name="">
             <a:extLst xmlns:a="http://schemas.openxmlformats.org/drawingml/2006/main">
               <a:ext uri="{FF2B5EF4-FFF2-40B4-BE49-F238E27FC236}">
-                <a16:creationId xmlns:a16="http://schemas.microsoft.com/office/drawing/2014/main" id="{9F315896-D8A8-4F55-B47C-078C39D84280}"/>
+                <a16:creationId xmlns:a16="http://schemas.microsoft.com/office/drawing/2014/main" id="{D54C1482-95CF-4E9F-9B9F-9C78518AFD5B}"/>
               </a:ext>
             </a:extLst>
           </p:cNvPr>
@@ -31260,7 +31259,7 @@
           <p:cNvPr id="10" name="">
             <a:extLst xmlns:a="http://schemas.openxmlformats.org/drawingml/2006/main">
               <a:ext uri="{FF2B5EF4-FFF2-40B4-BE49-F238E27FC236}">
-                <a16:creationId xmlns:a16="http://schemas.microsoft.com/office/drawing/2014/main" id="{9EC57A89-24FE-41A3-855F-BC3B3BF97606}"/>
+                <a16:creationId xmlns:a16="http://schemas.microsoft.com/office/drawing/2014/main" id="{A00CF7B8-3AC1-45D6-884D-BEFA46545EB3}"/>
               </a:ext>
             </a:extLst>
           </p:cNvPr>
@@ -31322,7 +31321,7 @@
           <p:cNvPr id="11" name="">
             <a:extLst xmlns:a="http://schemas.openxmlformats.org/drawingml/2006/main">
               <a:ext uri="{FF2B5EF4-FFF2-40B4-BE49-F238E27FC236}">
-                <a16:creationId xmlns:a16="http://schemas.microsoft.com/office/drawing/2014/main" id="{9E483B00-209F-4ED8-A2F8-C8F2E67A683D}"/>
+                <a16:creationId xmlns:a16="http://schemas.microsoft.com/office/drawing/2014/main" id="{79306689-DB13-4AD8-ACEA-F0868C04D2E8}"/>
               </a:ext>
             </a:extLst>
           </p:cNvPr>
@@ -31353,7 +31352,7 @@
           <p:cNvPr id="12" name="">
             <a:extLst xmlns:a="http://schemas.openxmlformats.org/drawingml/2006/main">
               <a:ext uri="{FF2B5EF4-FFF2-40B4-BE49-F238E27FC236}">
-                <a16:creationId xmlns:a16="http://schemas.microsoft.com/office/drawing/2014/main" id="{A14DBB69-33A4-47E9-B64C-E8AFADCD98B5}"/>
+                <a16:creationId xmlns:a16="http://schemas.microsoft.com/office/drawing/2014/main" id="{B9B03EAC-782B-417D-891A-4A53CEF68B33}"/>
               </a:ext>
             </a:extLst>
           </p:cNvPr>
@@ -31415,7 +31414,7 @@
           <p:cNvPr id="13" name="">
             <a:extLst xmlns:a="http://schemas.openxmlformats.org/drawingml/2006/main">
               <a:ext uri="{FF2B5EF4-FFF2-40B4-BE49-F238E27FC236}">
-                <a16:creationId xmlns:a16="http://schemas.microsoft.com/office/drawing/2014/main" id="{271B05FA-8B43-4585-AD42-46A49415F2DF}"/>
+                <a16:creationId xmlns:a16="http://schemas.microsoft.com/office/drawing/2014/main" id="{4ABFE3E9-14C2-418A-B16F-5FE6D9A74583}"/>
               </a:ext>
             </a:extLst>
           </p:cNvPr>
@@ -31475,7 +31474,7 @@
     </p:spTree>
     <p:extLst>
       <p:ext uri="{BB962C8B-B14F-4D97-AF65-F5344CB8AC3E}">
-        <p14:creationId xmlns:p14="http://schemas.microsoft.com/office/powerpoint/2010/main" val="1421958647"/>
+        <p14:creationId xmlns:p14="http://schemas.microsoft.com/office/powerpoint/2010/main" val="839332159"/>
       </p:ext>
     </p:extLst>
   </p:cSld>
@@ -31506,7 +31505,7 @@
           <p:cNvPr id="1" name="">
             <a:extLst xmlns:a="http://schemas.openxmlformats.org/drawingml/2006/main">
               <a:ext uri="{FF2B5EF4-FFF2-40B4-BE49-F238E27FC236}">
-                <a16:creationId xmlns:a16="http://schemas.microsoft.com/office/drawing/2014/main" id="{AE3C7F14-FD54-499E-AD13-98D29C0E62F7}"/>
+                <a16:creationId xmlns:a16="http://schemas.microsoft.com/office/drawing/2014/main" id="{216B16D9-2748-4722-AD63-139AB32A51C2}"/>
               </a:ext>
             </a:extLst>
           </p:cNvPr>
@@ -31568,7 +31567,7 @@
           <p:cNvPr id="2" name="">
             <a:extLst xmlns:a="http://schemas.openxmlformats.org/drawingml/2006/main">
               <a:ext uri="{FF2B5EF4-FFF2-40B4-BE49-F238E27FC236}">
-                <a16:creationId xmlns:a16="http://schemas.microsoft.com/office/drawing/2014/main" id="{F3F02D1E-785C-43DF-9312-9F4BBFA2000C}"/>
+                <a16:creationId xmlns:a16="http://schemas.microsoft.com/office/drawing/2014/main" id="{7CF270CD-791E-41AF-9297-535FFAD6DCB8}"/>
               </a:ext>
             </a:extLst>
           </p:cNvPr>
@@ -31634,7 +31633,7 @@
           <p:nvPr/>
         </p:nvPicPr>
         <p:blipFill>
-          <a:blip xmlns:r="http://schemas.openxmlformats.org/officeDocument/2006/relationships" xmlns:a="http://schemas.openxmlformats.org/drawingml/2006/main" r:embed="Rbe3c2dfe73744fcc"/>
+          <a:blip xmlns:r="http://schemas.openxmlformats.org/officeDocument/2006/relationships" xmlns:a="http://schemas.openxmlformats.org/drawingml/2006/main" r:embed="R67935831f2134662"/>
           <a:stretch xmlns:a="http://schemas.openxmlformats.org/drawingml/2006/main"/>
         </p:blipFill>
         <p:spPr>
@@ -31658,7 +31657,7 @@
           <p:nvPr/>
         </p:nvPicPr>
         <p:blipFill>
-          <a:blip xmlns:r="http://schemas.openxmlformats.org/officeDocument/2006/relationships" xmlns:a="http://schemas.openxmlformats.org/drawingml/2006/main" r:embed="R1cfbe9b3cc77485a"/>
+          <a:blip xmlns:r="http://schemas.openxmlformats.org/officeDocument/2006/relationships" xmlns:a="http://schemas.openxmlformats.org/drawingml/2006/main" r:embed="Rc7156383ede94c4e"/>
           <a:stretch xmlns:a="http://schemas.openxmlformats.org/drawingml/2006/main"/>
         </p:blipFill>
         <p:spPr>
@@ -31682,7 +31681,7 @@
           <p:nvPr/>
         </p:nvPicPr>
         <p:blipFill>
-          <a:blip xmlns:r="http://schemas.openxmlformats.org/officeDocument/2006/relationships" xmlns:a="http://schemas.openxmlformats.org/drawingml/2006/main" r:embed="Ra0f3490347de46f0"/>
+          <a:blip xmlns:r="http://schemas.openxmlformats.org/officeDocument/2006/relationships" xmlns:a="http://schemas.openxmlformats.org/drawingml/2006/main" r:embed="Rce9abd914f7f47d8"/>
           <a:stretch xmlns:a="http://schemas.openxmlformats.org/drawingml/2006/main"/>
         </p:blipFill>
         <p:spPr>
@@ -31702,7 +31701,7 @@
           <p:cNvPr id="6" name="">
             <a:extLst xmlns:a="http://schemas.openxmlformats.org/drawingml/2006/main">
               <a:ext uri="{FF2B5EF4-FFF2-40B4-BE49-F238E27FC236}">
-                <a16:creationId xmlns:a16="http://schemas.microsoft.com/office/drawing/2014/main" id="{5B7B9BC8-D95A-4A93-8243-12AF3324E6C8}"/>
+                <a16:creationId xmlns:a16="http://schemas.microsoft.com/office/drawing/2014/main" id="{FA296D18-C652-4503-A6BC-6A3613BCA3EC}"/>
               </a:ext>
             </a:extLst>
           </p:cNvPr>
@@ -31743,7 +31742,7 @@
           <p:cNvPr id="7" name="">
             <a:extLst xmlns:a="http://schemas.openxmlformats.org/drawingml/2006/main">
               <a:ext uri="{FF2B5EF4-FFF2-40B4-BE49-F238E27FC236}">
-                <a16:creationId xmlns:a16="http://schemas.microsoft.com/office/drawing/2014/main" id="{B6E5CCB2-9D1D-4C77-BE14-4302604B13A9}"/>
+                <a16:creationId xmlns:a16="http://schemas.microsoft.com/office/drawing/2014/main" id="{629C82FF-8FF2-4863-B8B5-8BA50CC20E9C}"/>
               </a:ext>
             </a:extLst>
           </p:cNvPr>
@@ -31805,7 +31804,7 @@
           <p:cNvPr id="8" name="">
             <a:extLst xmlns:a="http://schemas.openxmlformats.org/drawingml/2006/main">
               <a:ext uri="{FF2B5EF4-FFF2-40B4-BE49-F238E27FC236}">
-                <a16:creationId xmlns:a16="http://schemas.microsoft.com/office/drawing/2014/main" id="{CBD477DC-9513-4F5A-B0BD-3B0C16210DE2}"/>
+                <a16:creationId xmlns:a16="http://schemas.microsoft.com/office/drawing/2014/main" id="{F9060A7E-91A4-4314-9485-90347E35BFD8}"/>
               </a:ext>
             </a:extLst>
           </p:cNvPr>
@@ -31867,7 +31866,7 @@
           <p:cNvPr id="9" name="">
             <a:extLst xmlns:a="http://schemas.openxmlformats.org/drawingml/2006/main">
               <a:ext uri="{FF2B5EF4-FFF2-40B4-BE49-F238E27FC236}">
-                <a16:creationId xmlns:a16="http://schemas.microsoft.com/office/drawing/2014/main" id="{39EBD326-65FD-4958-9E59-6D40BCEA0ACB}"/>
+                <a16:creationId xmlns:a16="http://schemas.microsoft.com/office/drawing/2014/main" id="{56A37D96-3071-4AE1-B4C0-D404F1E432CA}"/>
               </a:ext>
             </a:extLst>
           </p:cNvPr>
@@ -31908,7 +31907,7 @@
           <p:cNvPr id="10" name="">
             <a:extLst xmlns:a="http://schemas.openxmlformats.org/drawingml/2006/main">
               <a:ext uri="{FF2B5EF4-FFF2-40B4-BE49-F238E27FC236}">
-                <a16:creationId xmlns:a16="http://schemas.microsoft.com/office/drawing/2014/main" id="{AECD43F7-63FC-4EC5-B794-AD87A02F7947}"/>
+                <a16:creationId xmlns:a16="http://schemas.microsoft.com/office/drawing/2014/main" id="{215E84A1-DC29-4918-864C-39CF7BAB2D16}"/>
               </a:ext>
             </a:extLst>
           </p:cNvPr>
@@ -31970,7 +31969,7 @@
           <p:cNvPr id="11" name="">
             <a:extLst xmlns:a="http://schemas.openxmlformats.org/drawingml/2006/main">
               <a:ext uri="{FF2B5EF4-FFF2-40B4-BE49-F238E27FC236}">
-                <a16:creationId xmlns:a16="http://schemas.microsoft.com/office/drawing/2014/main" id="{3185AA8E-750D-4172-B2B3-7D14A9FD169A}"/>
+                <a16:creationId xmlns:a16="http://schemas.microsoft.com/office/drawing/2014/main" id="{0D957E4D-9DF8-4330-8FC5-23850FFAFEC3}"/>
               </a:ext>
             </a:extLst>
           </p:cNvPr>
@@ -32032,7 +32031,7 @@
           <p:cNvPr id="12" name="">
             <a:extLst xmlns:a="http://schemas.openxmlformats.org/drawingml/2006/main">
               <a:ext uri="{FF2B5EF4-FFF2-40B4-BE49-F238E27FC236}">
-                <a16:creationId xmlns:a16="http://schemas.microsoft.com/office/drawing/2014/main" id="{77EC689F-A6B7-4805-A57D-881B28943F83}"/>
+                <a16:creationId xmlns:a16="http://schemas.microsoft.com/office/drawing/2014/main" id="{C7B7FC53-F050-4113-874D-FCED168FEFC5}"/>
               </a:ext>
             </a:extLst>
           </p:cNvPr>
@@ -32073,7 +32072,7 @@
           <p:cNvPr id="13" name="">
             <a:extLst xmlns:a="http://schemas.openxmlformats.org/drawingml/2006/main">
               <a:ext uri="{FF2B5EF4-FFF2-40B4-BE49-F238E27FC236}">
-                <a16:creationId xmlns:a16="http://schemas.microsoft.com/office/drawing/2014/main" id="{DE1A26A6-4E9C-4998-BB13-C12971DA8D8B}"/>
+                <a16:creationId xmlns:a16="http://schemas.microsoft.com/office/drawing/2014/main" id="{7E54F142-F7A4-4BA6-AF3E-F4345F5CAC8E}"/>
               </a:ext>
             </a:extLst>
           </p:cNvPr>
@@ -32135,7 +32134,7 @@
           <p:cNvPr id="14" name="">
             <a:extLst xmlns:a="http://schemas.openxmlformats.org/drawingml/2006/main">
               <a:ext uri="{FF2B5EF4-FFF2-40B4-BE49-F238E27FC236}">
-                <a16:creationId xmlns:a16="http://schemas.microsoft.com/office/drawing/2014/main" id="{8CF5A0AC-8E22-4C3B-A159-73C2E7DCB1A6}"/>
+                <a16:creationId xmlns:a16="http://schemas.microsoft.com/office/drawing/2014/main" id="{F8F38CDB-C302-4A12-81EE-A96626907077}"/>
               </a:ext>
             </a:extLst>
           </p:cNvPr>
@@ -32197,7 +32196,7 @@
           <p:cNvPr id="15" name="">
             <a:extLst xmlns:a="http://schemas.openxmlformats.org/drawingml/2006/main">
               <a:ext uri="{FF2B5EF4-FFF2-40B4-BE49-F238E27FC236}">
-                <a16:creationId xmlns:a16="http://schemas.microsoft.com/office/drawing/2014/main" id="{FAAD8E7E-4D52-46E4-AD33-67D60F02DB4A}"/>
+                <a16:creationId xmlns:a16="http://schemas.microsoft.com/office/drawing/2014/main" id="{76D57DFA-91CD-4095-9476-2EFE8559A640}"/>
               </a:ext>
             </a:extLst>
           </p:cNvPr>
@@ -32259,7 +32258,7 @@
           <p:cNvPr id="16" name="">
             <a:extLst xmlns:a="http://schemas.openxmlformats.org/drawingml/2006/main">
               <a:ext uri="{FF2B5EF4-FFF2-40B4-BE49-F238E27FC236}">
-                <a16:creationId xmlns:a16="http://schemas.microsoft.com/office/drawing/2014/main" id="{88DC8DE6-F232-4EA4-A958-510FC119A20D}"/>
+                <a16:creationId xmlns:a16="http://schemas.microsoft.com/office/drawing/2014/main" id="{1D5E2C96-9F7A-4203-A25E-4D5BC73CDE64}"/>
               </a:ext>
             </a:extLst>
           </p:cNvPr>
@@ -32290,7 +32289,7 @@
           <p:cNvPr id="17" name="">
             <a:extLst xmlns:a="http://schemas.openxmlformats.org/drawingml/2006/main">
               <a:ext uri="{FF2B5EF4-FFF2-40B4-BE49-F238E27FC236}">
-                <a16:creationId xmlns:a16="http://schemas.microsoft.com/office/drawing/2014/main" id="{A75C93F3-C63C-4F0D-B188-BE2FBEC6E376}"/>
+                <a16:creationId xmlns:a16="http://schemas.microsoft.com/office/drawing/2014/main" id="{9F624A9A-5DE4-430D-B1E9-E998C22614F4}"/>
               </a:ext>
             </a:extLst>
           </p:cNvPr>
@@ -32352,7 +32351,7 @@
           <p:cNvPr id="18" name="">
             <a:extLst xmlns:a="http://schemas.openxmlformats.org/drawingml/2006/main">
               <a:ext uri="{FF2B5EF4-FFF2-40B4-BE49-F238E27FC236}">
-                <a16:creationId xmlns:a16="http://schemas.microsoft.com/office/drawing/2014/main" id="{581C45B9-64C8-4C8A-801C-13B5E11C61D9}"/>
+                <a16:creationId xmlns:a16="http://schemas.microsoft.com/office/drawing/2014/main" id="{B3981C45-5EE5-4D8F-90A8-441F047B713D}"/>
               </a:ext>
             </a:extLst>
           </p:cNvPr>
@@ -32412,7 +32411,7 @@
     </p:spTree>
     <p:extLst>
       <p:ext uri="{BB962C8B-B14F-4D97-AF65-F5344CB8AC3E}">
-        <p14:creationId xmlns:p14="http://schemas.microsoft.com/office/powerpoint/2010/main" val="1358800244"/>
+        <p14:creationId xmlns:p14="http://schemas.microsoft.com/office/powerpoint/2010/main" val="1547030245"/>
       </p:ext>
     </p:extLst>
   </p:cSld>
@@ -32443,7 +32442,7 @@
           <p:cNvPr id="1" name="">
             <a:extLst xmlns:a="http://schemas.openxmlformats.org/drawingml/2006/main">
               <a:ext uri="{FF2B5EF4-FFF2-40B4-BE49-F238E27FC236}">
-                <a16:creationId xmlns:a16="http://schemas.microsoft.com/office/drawing/2014/main" id="{7069ADFB-E709-4C31-A7FD-C252088B7B3E}"/>
+                <a16:creationId xmlns:a16="http://schemas.microsoft.com/office/drawing/2014/main" id="{4047658C-C0A7-4538-8928-6635A155F0C2}"/>
               </a:ext>
             </a:extLst>
           </p:cNvPr>
@@ -32505,7 +32504,7 @@
           <p:cNvPr id="2" name="">
             <a:extLst xmlns:a="http://schemas.openxmlformats.org/drawingml/2006/main">
               <a:ext uri="{FF2B5EF4-FFF2-40B4-BE49-F238E27FC236}">
-                <a16:creationId xmlns:a16="http://schemas.microsoft.com/office/drawing/2014/main" id="{43893F95-5D81-4E10-846B-EC3D6A2B2C93}"/>
+                <a16:creationId xmlns:a16="http://schemas.microsoft.com/office/drawing/2014/main" id="{5276B101-2949-46EA-B415-F39D37B69C6A}"/>
               </a:ext>
             </a:extLst>
           </p:cNvPr>
@@ -32567,7 +32566,7 @@
           <p:cNvPr id="3" name="">
             <a:extLst xmlns:a="http://schemas.openxmlformats.org/drawingml/2006/main">
               <a:ext uri="{FF2B5EF4-FFF2-40B4-BE49-F238E27FC236}">
-                <a16:creationId xmlns:a16="http://schemas.microsoft.com/office/drawing/2014/main" id="{374000FB-7D5C-494E-B439-A5853C2963C9}"/>
+                <a16:creationId xmlns:a16="http://schemas.microsoft.com/office/drawing/2014/main" id="{06122022-622F-43D5-A3C9-C770D19F6330}"/>
               </a:ext>
             </a:extLst>
           </p:cNvPr>
@@ -32608,7 +32607,7 @@
           <p:cNvPr id="4" name="">
             <a:extLst xmlns:a="http://schemas.openxmlformats.org/drawingml/2006/main">
               <a:ext uri="{FF2B5EF4-FFF2-40B4-BE49-F238E27FC236}">
-                <a16:creationId xmlns:a16="http://schemas.microsoft.com/office/drawing/2014/main" id="{15D1CCE7-05FF-40C3-973E-A50FF99335D3}"/>
+                <a16:creationId xmlns:a16="http://schemas.microsoft.com/office/drawing/2014/main" id="{AD3A4F70-391C-4B84-8A1D-6D4DB4350AC0}"/>
               </a:ext>
             </a:extLst>
           </p:cNvPr>
@@ -32639,7 +32638,7 @@
           <p:cNvPr id="5" name="">
             <a:extLst xmlns:a="http://schemas.openxmlformats.org/drawingml/2006/main">
               <a:ext uri="{FF2B5EF4-FFF2-40B4-BE49-F238E27FC236}">
-                <a16:creationId xmlns:a16="http://schemas.microsoft.com/office/drawing/2014/main" id="{87380BC0-F38E-47AB-9A26-CF03A7441614}"/>
+                <a16:creationId xmlns:a16="http://schemas.microsoft.com/office/drawing/2014/main" id="{323E46A8-776F-45F2-AA14-9D3F4E372095}"/>
               </a:ext>
             </a:extLst>
           </p:cNvPr>
@@ -32672,7 +32671,7 @@
           <p:cNvPr id="6" name="">
             <a:extLst xmlns:a="http://schemas.openxmlformats.org/drawingml/2006/main">
               <a:ext uri="{FF2B5EF4-FFF2-40B4-BE49-F238E27FC236}">
-                <a16:creationId xmlns:a16="http://schemas.microsoft.com/office/drawing/2014/main" id="{0736B5BB-26FA-4DA7-A1B7-44FA179F977E}"/>
+                <a16:creationId xmlns:a16="http://schemas.microsoft.com/office/drawing/2014/main" id="{5EDC86FA-083C-480C-BD46-DDCC60E2FA23}"/>
               </a:ext>
             </a:extLst>
           </p:cNvPr>
@@ -32705,7 +32704,7 @@
           <p:cNvPr id="7" name="">
             <a:extLst xmlns:a="http://schemas.openxmlformats.org/drawingml/2006/main">
               <a:ext uri="{FF2B5EF4-FFF2-40B4-BE49-F238E27FC236}">
-                <a16:creationId xmlns:a16="http://schemas.microsoft.com/office/drawing/2014/main" id="{F9494598-D0AE-46A3-AED3-777ADAAD34CB}"/>
+                <a16:creationId xmlns:a16="http://schemas.microsoft.com/office/drawing/2014/main" id="{7A066C88-2A1F-4AFC-A162-9185A31195F3}"/>
               </a:ext>
             </a:extLst>
           </p:cNvPr>
@@ -32738,7 +32737,7 @@
           <p:cNvPr id="8" name="">
             <a:extLst xmlns:a="http://schemas.openxmlformats.org/drawingml/2006/main">
               <a:ext uri="{FF2B5EF4-FFF2-40B4-BE49-F238E27FC236}">
-                <a16:creationId xmlns:a16="http://schemas.microsoft.com/office/drawing/2014/main" id="{F22AF9DB-481F-4767-9274-589BA013F052}"/>
+                <a16:creationId xmlns:a16="http://schemas.microsoft.com/office/drawing/2014/main" id="{6F5F6588-BE47-460E-92C8-D01F6E160F0F}"/>
               </a:ext>
             </a:extLst>
           </p:cNvPr>
@@ -32771,7 +32770,7 @@
           <p:cNvPr id="9" name="">
             <a:extLst xmlns:a="http://schemas.openxmlformats.org/drawingml/2006/main">
               <a:ext uri="{FF2B5EF4-FFF2-40B4-BE49-F238E27FC236}">
-                <a16:creationId xmlns:a16="http://schemas.microsoft.com/office/drawing/2014/main" id="{EFC96392-E364-4A88-9816-4C4B2290FA63}"/>
+                <a16:creationId xmlns:a16="http://schemas.microsoft.com/office/drawing/2014/main" id="{277FAC8E-688E-47F8-A2F6-95F80A090FD8}"/>
               </a:ext>
             </a:extLst>
           </p:cNvPr>
@@ -32812,7 +32811,7 @@
           <p:cNvPr id="10" name="">
             <a:extLst xmlns:a="http://schemas.openxmlformats.org/drawingml/2006/main">
               <a:ext uri="{FF2B5EF4-FFF2-40B4-BE49-F238E27FC236}">
-                <a16:creationId xmlns:a16="http://schemas.microsoft.com/office/drawing/2014/main" id="{54DCD322-5CBF-4B73-9C1E-F201414DC4D4}"/>
+                <a16:creationId xmlns:a16="http://schemas.microsoft.com/office/drawing/2014/main" id="{14BA534C-A17A-4201-A037-A4468BAB2FF7}"/>
               </a:ext>
             </a:extLst>
           </p:cNvPr>
@@ -32874,7 +32873,7 @@
           <p:cNvPr id="11" name="">
             <a:extLst xmlns:a="http://schemas.openxmlformats.org/drawingml/2006/main">
               <a:ext uri="{FF2B5EF4-FFF2-40B4-BE49-F238E27FC236}">
-                <a16:creationId xmlns:a16="http://schemas.microsoft.com/office/drawing/2014/main" id="{D88DAA23-610B-4954-B30D-E995222C0B3F}"/>
+                <a16:creationId xmlns:a16="http://schemas.microsoft.com/office/drawing/2014/main" id="{E8A2B672-4E1C-4840-A676-D98ABD843D0D}"/>
               </a:ext>
             </a:extLst>
           </p:cNvPr>
@@ -32936,7 +32935,7 @@
           <p:cNvPr id="12" name="">
             <a:extLst xmlns:a="http://schemas.openxmlformats.org/drawingml/2006/main">
               <a:ext uri="{FF2B5EF4-FFF2-40B4-BE49-F238E27FC236}">
-                <a16:creationId xmlns:a16="http://schemas.microsoft.com/office/drawing/2014/main" id="{DEE580CE-E2A2-430B-B25C-C8BF4FA7FBE5}"/>
+                <a16:creationId xmlns:a16="http://schemas.microsoft.com/office/drawing/2014/main" id="{F6BDA07B-25AA-4EDD-A0B2-1ADF22D07E89}"/>
               </a:ext>
             </a:extLst>
           </p:cNvPr>
@@ -32977,7 +32976,7 @@
           <p:cNvPr id="13" name="">
             <a:extLst xmlns:a="http://schemas.openxmlformats.org/drawingml/2006/main">
               <a:ext uri="{FF2B5EF4-FFF2-40B4-BE49-F238E27FC236}">
-                <a16:creationId xmlns:a16="http://schemas.microsoft.com/office/drawing/2014/main" id="{8A002842-58F8-4E1C-85E0-D22893BEE0C0}"/>
+                <a16:creationId xmlns:a16="http://schemas.microsoft.com/office/drawing/2014/main" id="{EFF5FA5B-E1AE-4EA5-BD45-703FEEA19A57}"/>
               </a:ext>
             </a:extLst>
           </p:cNvPr>
@@ -33039,7 +33038,7 @@
           <p:cNvPr id="14" name="">
             <a:extLst xmlns:a="http://schemas.openxmlformats.org/drawingml/2006/main">
               <a:ext uri="{FF2B5EF4-FFF2-40B4-BE49-F238E27FC236}">
-                <a16:creationId xmlns:a16="http://schemas.microsoft.com/office/drawing/2014/main" id="{5D8561E6-B356-432D-B79E-62B57E50CF2A}"/>
+                <a16:creationId xmlns:a16="http://schemas.microsoft.com/office/drawing/2014/main" id="{BAC70D0F-5982-4FCC-810F-C414913F4D47}"/>
               </a:ext>
             </a:extLst>
           </p:cNvPr>
@@ -33101,7 +33100,7 @@
           <p:cNvPr id="15" name="">
             <a:extLst xmlns:a="http://schemas.openxmlformats.org/drawingml/2006/main">
               <a:ext uri="{FF2B5EF4-FFF2-40B4-BE49-F238E27FC236}">
-                <a16:creationId xmlns:a16="http://schemas.microsoft.com/office/drawing/2014/main" id="{7071A669-8364-42EB-98E1-0CFDAE5D35F1}"/>
+                <a16:creationId xmlns:a16="http://schemas.microsoft.com/office/drawing/2014/main" id="{0039C077-02AB-4661-914E-F7118D4301A8}"/>
               </a:ext>
             </a:extLst>
           </p:cNvPr>
@@ -33142,7 +33141,7 @@
           <p:cNvPr id="16" name="">
             <a:extLst xmlns:a="http://schemas.openxmlformats.org/drawingml/2006/main">
               <a:ext uri="{FF2B5EF4-FFF2-40B4-BE49-F238E27FC236}">
-                <a16:creationId xmlns:a16="http://schemas.microsoft.com/office/drawing/2014/main" id="{0C22FEF1-DA45-46C0-89A0-DCE92FC5EDF2}"/>
+                <a16:creationId xmlns:a16="http://schemas.microsoft.com/office/drawing/2014/main" id="{727E59DE-DCD3-4708-A42F-92D781ACADD5}"/>
               </a:ext>
             </a:extLst>
           </p:cNvPr>
@@ -33204,7 +33203,7 @@
           <p:cNvPr id="17" name="">
             <a:extLst xmlns:a="http://schemas.openxmlformats.org/drawingml/2006/main">
               <a:ext uri="{FF2B5EF4-FFF2-40B4-BE49-F238E27FC236}">
-                <a16:creationId xmlns:a16="http://schemas.microsoft.com/office/drawing/2014/main" id="{39E92B01-9528-497D-9346-92C829F97DA9}"/>
+                <a16:creationId xmlns:a16="http://schemas.microsoft.com/office/drawing/2014/main" id="{441F7A64-23A9-46B6-82DD-F16133DBD577}"/>
               </a:ext>
             </a:extLst>
           </p:cNvPr>
@@ -33266,7 +33265,7 @@
           <p:cNvPr id="18" name="">
             <a:extLst xmlns:a="http://schemas.openxmlformats.org/drawingml/2006/main">
               <a:ext uri="{FF2B5EF4-FFF2-40B4-BE49-F238E27FC236}">
-                <a16:creationId xmlns:a16="http://schemas.microsoft.com/office/drawing/2014/main" id="{F048D4DC-CEE0-403E-AA5E-2D21DC384718}"/>
+                <a16:creationId xmlns:a16="http://schemas.microsoft.com/office/drawing/2014/main" id="{B65729E6-0BD8-4E5E-904A-7D33887774EA}"/>
               </a:ext>
             </a:extLst>
           </p:cNvPr>
@@ -33307,7 +33306,7 @@
           <p:cNvPr id="19" name="">
             <a:extLst xmlns:a="http://schemas.openxmlformats.org/drawingml/2006/main">
               <a:ext uri="{FF2B5EF4-FFF2-40B4-BE49-F238E27FC236}">
-                <a16:creationId xmlns:a16="http://schemas.microsoft.com/office/drawing/2014/main" id="{82887E3E-6768-4221-B34E-B3192F4A141E}"/>
+                <a16:creationId xmlns:a16="http://schemas.microsoft.com/office/drawing/2014/main" id="{C31B168B-B24C-418F-AA91-FDFCBE7E64CB}"/>
               </a:ext>
             </a:extLst>
           </p:cNvPr>
@@ -33369,7 +33368,7 @@
           <p:cNvPr id="20" name="">
             <a:extLst xmlns:a="http://schemas.openxmlformats.org/drawingml/2006/main">
               <a:ext uri="{FF2B5EF4-FFF2-40B4-BE49-F238E27FC236}">
-                <a16:creationId xmlns:a16="http://schemas.microsoft.com/office/drawing/2014/main" id="{5015230F-EA67-4B48-A094-898E755B390A}"/>
+                <a16:creationId xmlns:a16="http://schemas.microsoft.com/office/drawing/2014/main" id="{BCC2909E-FA8A-4F3A-9D6E-8D173DB7CABB}"/>
               </a:ext>
             </a:extLst>
           </p:cNvPr>
@@ -33431,7 +33430,7 @@
           <p:cNvPr id="21" name="">
             <a:extLst xmlns:a="http://schemas.openxmlformats.org/drawingml/2006/main">
               <a:ext uri="{FF2B5EF4-FFF2-40B4-BE49-F238E27FC236}">
-                <a16:creationId xmlns:a16="http://schemas.microsoft.com/office/drawing/2014/main" id="{BBD927FF-C048-4AA1-9FAB-44E43AAAB856}"/>
+                <a16:creationId xmlns:a16="http://schemas.microsoft.com/office/drawing/2014/main" id="{4A45E620-777A-4ED7-9089-B426A454A8C2}"/>
               </a:ext>
             </a:extLst>
           </p:cNvPr>
@@ -33472,7 +33471,7 @@
           <p:cNvPr id="22" name="">
             <a:extLst xmlns:a="http://schemas.openxmlformats.org/drawingml/2006/main">
               <a:ext uri="{FF2B5EF4-FFF2-40B4-BE49-F238E27FC236}">
-                <a16:creationId xmlns:a16="http://schemas.microsoft.com/office/drawing/2014/main" id="{1FBFD563-804D-4377-86BA-C1772CF28310}"/>
+                <a16:creationId xmlns:a16="http://schemas.microsoft.com/office/drawing/2014/main" id="{E1FCD8E4-F6E9-4EE6-A345-6466D0C86A00}"/>
               </a:ext>
             </a:extLst>
           </p:cNvPr>
@@ -33534,7 +33533,7 @@
           <p:cNvPr id="23" name="">
             <a:extLst xmlns:a="http://schemas.openxmlformats.org/drawingml/2006/main">
               <a:ext uri="{FF2B5EF4-FFF2-40B4-BE49-F238E27FC236}">
-                <a16:creationId xmlns:a16="http://schemas.microsoft.com/office/drawing/2014/main" id="{586A024D-9B99-4FA8-ACEB-0D2E6876DA26}"/>
+                <a16:creationId xmlns:a16="http://schemas.microsoft.com/office/drawing/2014/main" id="{D992EC14-0C55-474E-A971-431470ABF382}"/>
               </a:ext>
             </a:extLst>
           </p:cNvPr>
@@ -33596,7 +33595,7 @@
           <p:cNvPr id="24" name="">
             <a:extLst xmlns:a="http://schemas.openxmlformats.org/drawingml/2006/main">
               <a:ext uri="{FF2B5EF4-FFF2-40B4-BE49-F238E27FC236}">
-                <a16:creationId xmlns:a16="http://schemas.microsoft.com/office/drawing/2014/main" id="{15046E0A-EA3F-4261-87D7-7DF0868960B5}"/>
+                <a16:creationId xmlns:a16="http://schemas.microsoft.com/office/drawing/2014/main" id="{F48139B7-88D3-4F7D-9CBC-96873DD4AAE1}"/>
               </a:ext>
             </a:extLst>
           </p:cNvPr>
@@ -33629,7 +33628,7 @@
           <p:cNvPr id="25" name="">
             <a:extLst xmlns:a="http://schemas.openxmlformats.org/drawingml/2006/main">
               <a:ext uri="{FF2B5EF4-FFF2-40B4-BE49-F238E27FC236}">
-                <a16:creationId xmlns:a16="http://schemas.microsoft.com/office/drawing/2014/main" id="{06417490-2FF7-46B9-856C-4840C1CFA7D0}"/>
+                <a16:creationId xmlns:a16="http://schemas.microsoft.com/office/drawing/2014/main" id="{E5BF5EA4-72DB-423A-8ADB-59B21490CE2C}"/>
               </a:ext>
             </a:extLst>
           </p:cNvPr>
@@ -33691,7 +33690,7 @@
           <p:cNvPr id="26" name="">
             <a:extLst xmlns:a="http://schemas.openxmlformats.org/drawingml/2006/main">
               <a:ext uri="{FF2B5EF4-FFF2-40B4-BE49-F238E27FC236}">
-                <a16:creationId xmlns:a16="http://schemas.microsoft.com/office/drawing/2014/main" id="{6E86BE15-4303-4BCD-A26A-ED9019994C82}"/>
+                <a16:creationId xmlns:a16="http://schemas.microsoft.com/office/drawing/2014/main" id="{F6F3E267-FB82-4BE3-8F49-F1FB91CC9281}"/>
               </a:ext>
             </a:extLst>
           </p:cNvPr>
@@ -33724,7 +33723,7 @@
           <p:cNvPr id="27" name="">
             <a:extLst xmlns:a="http://schemas.openxmlformats.org/drawingml/2006/main">
               <a:ext uri="{FF2B5EF4-FFF2-40B4-BE49-F238E27FC236}">
-                <a16:creationId xmlns:a16="http://schemas.microsoft.com/office/drawing/2014/main" id="{03DE6D58-9349-4CDE-B29B-B7DF6251B674}"/>
+                <a16:creationId xmlns:a16="http://schemas.microsoft.com/office/drawing/2014/main" id="{D7BFB736-AB50-4F45-9E94-0CE422522EE3}"/>
               </a:ext>
             </a:extLst>
           </p:cNvPr>
@@ -33786,7 +33785,7 @@
           <p:cNvPr id="28" name="">
             <a:extLst xmlns:a="http://schemas.openxmlformats.org/drawingml/2006/main">
               <a:ext uri="{FF2B5EF4-FFF2-40B4-BE49-F238E27FC236}">
-                <a16:creationId xmlns:a16="http://schemas.microsoft.com/office/drawing/2014/main" id="{30B29C63-32BD-4440-9CA9-BCCBE136D4B4}"/>
+                <a16:creationId xmlns:a16="http://schemas.microsoft.com/office/drawing/2014/main" id="{BD60CFF8-7AC1-48AB-B286-7EB004CF9D8F}"/>
               </a:ext>
             </a:extLst>
           </p:cNvPr>
@@ -33819,7 +33818,7 @@
           <p:cNvPr id="29" name="">
             <a:extLst xmlns:a="http://schemas.openxmlformats.org/drawingml/2006/main">
               <a:ext uri="{FF2B5EF4-FFF2-40B4-BE49-F238E27FC236}">
-                <a16:creationId xmlns:a16="http://schemas.microsoft.com/office/drawing/2014/main" id="{CA53845F-C7DA-455F-AA85-643B17F4F92E}"/>
+                <a16:creationId xmlns:a16="http://schemas.microsoft.com/office/drawing/2014/main" id="{28485CD3-4070-4A2D-BA20-411B7935DFE2}"/>
               </a:ext>
             </a:extLst>
           </p:cNvPr>
@@ -33881,7 +33880,7 @@
           <p:cNvPr id="30" name="">
             <a:extLst xmlns:a="http://schemas.openxmlformats.org/drawingml/2006/main">
               <a:ext uri="{FF2B5EF4-FFF2-40B4-BE49-F238E27FC236}">
-                <a16:creationId xmlns:a16="http://schemas.microsoft.com/office/drawing/2014/main" id="{5DD830F4-D931-4449-B7CD-56F3C71622DC}"/>
+                <a16:creationId xmlns:a16="http://schemas.microsoft.com/office/drawing/2014/main" id="{A225C99C-2BDB-4E00-8959-C2970EC0CE79}"/>
               </a:ext>
             </a:extLst>
           </p:cNvPr>
@@ -33914,7 +33913,7 @@
           <p:cNvPr id="31" name="">
             <a:extLst xmlns:a="http://schemas.openxmlformats.org/drawingml/2006/main">
               <a:ext uri="{FF2B5EF4-FFF2-40B4-BE49-F238E27FC236}">
-                <a16:creationId xmlns:a16="http://schemas.microsoft.com/office/drawing/2014/main" id="{86C6F5E5-2026-4FAD-A876-EFAA122CE987}"/>
+                <a16:creationId xmlns:a16="http://schemas.microsoft.com/office/drawing/2014/main" id="{AFAE90E9-5D4B-4B6F-BB5A-A4E381A51E6A}"/>
               </a:ext>
             </a:extLst>
           </p:cNvPr>
@@ -33976,7 +33975,7 @@
           <p:cNvPr id="32" name="">
             <a:extLst xmlns:a="http://schemas.openxmlformats.org/drawingml/2006/main">
               <a:ext uri="{FF2B5EF4-FFF2-40B4-BE49-F238E27FC236}">
-                <a16:creationId xmlns:a16="http://schemas.microsoft.com/office/drawing/2014/main" id="{8E644793-68BF-4F61-9946-35C7C575D222}"/>
+                <a16:creationId xmlns:a16="http://schemas.microsoft.com/office/drawing/2014/main" id="{EBECF6E0-2F66-41DB-A6F2-3C5392BC6AF5}"/>
               </a:ext>
             </a:extLst>
           </p:cNvPr>
@@ -34017,7 +34016,7 @@
           <p:cNvPr id="33" name="">
             <a:extLst xmlns:a="http://schemas.openxmlformats.org/drawingml/2006/main">
               <a:ext uri="{FF2B5EF4-FFF2-40B4-BE49-F238E27FC236}">
-                <a16:creationId xmlns:a16="http://schemas.microsoft.com/office/drawing/2014/main" id="{F63229E8-77AE-4C7F-B2B8-3D1CBEB3836A}"/>
+                <a16:creationId xmlns:a16="http://schemas.microsoft.com/office/drawing/2014/main" id="{EAD30C9A-22A5-44F1-A576-132C3FFC1C5F}"/>
               </a:ext>
             </a:extLst>
           </p:cNvPr>
@@ -34079,7 +34078,7 @@
           <p:cNvPr id="34" name="">
             <a:extLst xmlns:a="http://schemas.openxmlformats.org/drawingml/2006/main">
               <a:ext uri="{FF2B5EF4-FFF2-40B4-BE49-F238E27FC236}">
-                <a16:creationId xmlns:a16="http://schemas.microsoft.com/office/drawing/2014/main" id="{10943A46-917E-43E4-A829-F3C8FFE37706}"/>
+                <a16:creationId xmlns:a16="http://schemas.microsoft.com/office/drawing/2014/main" id="{39829C0E-2FA6-4EFD-9258-75F37250C034}"/>
               </a:ext>
             </a:extLst>
           </p:cNvPr>
@@ -34141,7 +34140,7 @@
           <p:cNvPr id="35" name="">
             <a:extLst xmlns:a="http://schemas.openxmlformats.org/drawingml/2006/main">
               <a:ext uri="{FF2B5EF4-FFF2-40B4-BE49-F238E27FC236}">
-                <a16:creationId xmlns:a16="http://schemas.microsoft.com/office/drawing/2014/main" id="{F1A53B05-572D-4BE2-AC47-47F9A88F06A3}"/>
+                <a16:creationId xmlns:a16="http://schemas.microsoft.com/office/drawing/2014/main" id="{8E3158FC-F85F-4DE3-A5A7-C5888624E31B}"/>
               </a:ext>
             </a:extLst>
           </p:cNvPr>
@@ -34172,7 +34171,7 @@
           <p:cNvPr id="36" name="">
             <a:extLst xmlns:a="http://schemas.openxmlformats.org/drawingml/2006/main">
               <a:ext uri="{FF2B5EF4-FFF2-40B4-BE49-F238E27FC236}">
-                <a16:creationId xmlns:a16="http://schemas.microsoft.com/office/drawing/2014/main" id="{A5B16911-4EFA-48F6-866F-8DA78ADA6FA7}"/>
+                <a16:creationId xmlns:a16="http://schemas.microsoft.com/office/drawing/2014/main" id="{2BAF05A3-A12D-40DC-90D9-7B67FDF10BCC}"/>
               </a:ext>
             </a:extLst>
           </p:cNvPr>
@@ -34234,7 +34233,7 @@
           <p:cNvPr id="37" name="">
             <a:extLst xmlns:a="http://schemas.openxmlformats.org/drawingml/2006/main">
               <a:ext uri="{FF2B5EF4-FFF2-40B4-BE49-F238E27FC236}">
-                <a16:creationId xmlns:a16="http://schemas.microsoft.com/office/drawing/2014/main" id="{0A47A58E-7034-4462-8F08-B93CA5711196}"/>
+                <a16:creationId xmlns:a16="http://schemas.microsoft.com/office/drawing/2014/main" id="{F403E375-E9DF-49E4-A98A-F203CCD45F96}"/>
               </a:ext>
             </a:extLst>
           </p:cNvPr>
@@ -34294,7 +34293,7 @@
     </p:spTree>
     <p:extLst>
       <p:ext uri="{BB962C8B-B14F-4D97-AF65-F5344CB8AC3E}">
-        <p14:creationId xmlns:p14="http://schemas.microsoft.com/office/powerpoint/2010/main" val="784768341"/>
+        <p14:creationId xmlns:p14="http://schemas.microsoft.com/office/powerpoint/2010/main" val="1465736818"/>
       </p:ext>
     </p:extLst>
   </p:cSld>
@@ -34325,7 +34324,7 @@
           <p:cNvPr id="1" name="">
             <a:extLst xmlns:a="http://schemas.openxmlformats.org/drawingml/2006/main">
               <a:ext uri="{FF2B5EF4-FFF2-40B4-BE49-F238E27FC236}">
-                <a16:creationId xmlns:a16="http://schemas.microsoft.com/office/drawing/2014/main" id="{42C89AAB-77AB-4050-9880-C07C7D1D1EBA}"/>
+                <a16:creationId xmlns:a16="http://schemas.microsoft.com/office/drawing/2014/main" id="{FF37AC4A-1630-4096-906D-B6F98263979B}"/>
               </a:ext>
             </a:extLst>
           </p:cNvPr>
@@ -34387,7 +34386,7 @@
           <p:cNvPr id="2" name="">
             <a:extLst xmlns:a="http://schemas.openxmlformats.org/drawingml/2006/main">
               <a:ext uri="{FF2B5EF4-FFF2-40B4-BE49-F238E27FC236}">
-                <a16:creationId xmlns:a16="http://schemas.microsoft.com/office/drawing/2014/main" id="{11030803-2855-4B2A-AECE-62C444604C1D}"/>
+                <a16:creationId xmlns:a16="http://schemas.microsoft.com/office/drawing/2014/main" id="{1A53230E-E236-444E-9B74-4FC925BA7E67}"/>
               </a:ext>
             </a:extLst>
           </p:cNvPr>
@@ -34449,7 +34448,7 @@
           <p:cNvPr id="3" name="">
             <a:extLst xmlns:a="http://schemas.openxmlformats.org/drawingml/2006/main">
               <a:ext uri="{FF2B5EF4-FFF2-40B4-BE49-F238E27FC236}">
-                <a16:creationId xmlns:a16="http://schemas.microsoft.com/office/drawing/2014/main" id="{71DE7EFF-3B0A-4E5F-9C36-508AE70E36C0}"/>
+                <a16:creationId xmlns:a16="http://schemas.microsoft.com/office/drawing/2014/main" id="{FE4AB798-1D19-48EA-9EAC-678E007ECA78}"/>
               </a:ext>
             </a:extLst>
           </p:cNvPr>
@@ -34490,7 +34489,7 @@
           <p:cNvPr id="4" name="">
             <a:extLst xmlns:a="http://schemas.openxmlformats.org/drawingml/2006/main">
               <a:ext uri="{FF2B5EF4-FFF2-40B4-BE49-F238E27FC236}">
-                <a16:creationId xmlns:a16="http://schemas.microsoft.com/office/drawing/2014/main" id="{6F62CE2B-05D6-4AD2-85C9-E5B1BEDB9E0D}"/>
+                <a16:creationId xmlns:a16="http://schemas.microsoft.com/office/drawing/2014/main" id="{49D7A8CB-EDA1-45A2-B672-BF87CF10958B}"/>
               </a:ext>
             </a:extLst>
           </p:cNvPr>
@@ -34552,7 +34551,7 @@
           <p:cNvPr id="5" name="">
             <a:extLst xmlns:a="http://schemas.openxmlformats.org/drawingml/2006/main">
               <a:ext uri="{FF2B5EF4-FFF2-40B4-BE49-F238E27FC236}">
-                <a16:creationId xmlns:a16="http://schemas.microsoft.com/office/drawing/2014/main" id="{36D0AF41-468D-4A89-8643-EC1B8E6363ED}"/>
+                <a16:creationId xmlns:a16="http://schemas.microsoft.com/office/drawing/2014/main" id="{0D1C4031-B0A8-4CE6-88BC-F102BD68891A}"/>
               </a:ext>
             </a:extLst>
           </p:cNvPr>
@@ -34695,7 +34694,7 @@
           <p:cNvPr id="6" name="">
             <a:extLst xmlns:a="http://schemas.openxmlformats.org/drawingml/2006/main">
               <a:ext uri="{FF2B5EF4-FFF2-40B4-BE49-F238E27FC236}">
-                <a16:creationId xmlns:a16="http://schemas.microsoft.com/office/drawing/2014/main" id="{5216145C-A8D1-496E-B49F-89AE39FCEE7B}"/>
+                <a16:creationId xmlns:a16="http://schemas.microsoft.com/office/drawing/2014/main" id="{C1FEA075-05EB-4EAA-A1B9-297850DE68CC}"/>
               </a:ext>
             </a:extLst>
           </p:cNvPr>
@@ -34736,7 +34735,7 @@
           <p:cNvPr id="7" name="">
             <a:extLst xmlns:a="http://schemas.openxmlformats.org/drawingml/2006/main">
               <a:ext uri="{FF2B5EF4-FFF2-40B4-BE49-F238E27FC236}">
-                <a16:creationId xmlns:a16="http://schemas.microsoft.com/office/drawing/2014/main" id="{5DE0BB9C-6125-4DDF-A205-8D6084B58849}"/>
+                <a16:creationId xmlns:a16="http://schemas.microsoft.com/office/drawing/2014/main" id="{DAD35A68-B096-44AC-89B9-5A1610D7B566}"/>
               </a:ext>
             </a:extLst>
           </p:cNvPr>
@@ -34798,7 +34797,7 @@
           <p:cNvPr id="8" name="">
             <a:extLst xmlns:a="http://schemas.openxmlformats.org/drawingml/2006/main">
               <a:ext uri="{FF2B5EF4-FFF2-40B4-BE49-F238E27FC236}">
-                <a16:creationId xmlns:a16="http://schemas.microsoft.com/office/drawing/2014/main" id="{EA0FAF43-1072-4FDB-AB73-4C00100B3C31}"/>
+                <a16:creationId xmlns:a16="http://schemas.microsoft.com/office/drawing/2014/main" id="{FC87FF3F-EE9D-4998-9DB9-8609AAE37495}"/>
               </a:ext>
             </a:extLst>
           </p:cNvPr>
@@ -34968,7 +34967,7 @@
           <p:cNvPr id="9" name="">
             <a:extLst xmlns:a="http://schemas.openxmlformats.org/drawingml/2006/main">
               <a:ext uri="{FF2B5EF4-FFF2-40B4-BE49-F238E27FC236}">
-                <a16:creationId xmlns:a16="http://schemas.microsoft.com/office/drawing/2014/main" id="{57029FB0-46D4-4946-86D0-1D18809A2F6A}"/>
+                <a16:creationId xmlns:a16="http://schemas.microsoft.com/office/drawing/2014/main" id="{A0820EA8-56A0-43BA-B18C-C6B1D2079DAE}"/>
               </a:ext>
             </a:extLst>
           </p:cNvPr>
@@ -35001,7 +35000,7 @@
           <p:cNvPr id="10" name="">
             <a:extLst xmlns:a="http://schemas.openxmlformats.org/drawingml/2006/main">
               <a:ext uri="{FF2B5EF4-FFF2-40B4-BE49-F238E27FC236}">
-                <a16:creationId xmlns:a16="http://schemas.microsoft.com/office/drawing/2014/main" id="{E0952265-3A2E-4585-B4EC-36B80AD6614F}"/>
+                <a16:creationId xmlns:a16="http://schemas.microsoft.com/office/drawing/2014/main" id="{D8D99201-ABBA-4A38-B611-C28990D3D14D}"/>
               </a:ext>
             </a:extLst>
           </p:cNvPr>
@@ -35063,7 +35062,7 @@
           <p:cNvPr id="11" name="">
             <a:extLst xmlns:a="http://schemas.openxmlformats.org/drawingml/2006/main">
               <a:ext uri="{FF2B5EF4-FFF2-40B4-BE49-F238E27FC236}">
-                <a16:creationId xmlns:a16="http://schemas.microsoft.com/office/drawing/2014/main" id="{EBC938DC-5713-4864-AF33-BBACEAB17C2F}"/>
+                <a16:creationId xmlns:a16="http://schemas.microsoft.com/office/drawing/2014/main" id="{19A75929-AE55-4239-8EA3-697808275A45}"/>
               </a:ext>
             </a:extLst>
           </p:cNvPr>
@@ -35094,7 +35093,7 @@
           <p:cNvPr id="12" name="">
             <a:extLst xmlns:a="http://schemas.openxmlformats.org/drawingml/2006/main">
               <a:ext uri="{FF2B5EF4-FFF2-40B4-BE49-F238E27FC236}">
-                <a16:creationId xmlns:a16="http://schemas.microsoft.com/office/drawing/2014/main" id="{8111EF02-21CB-40DD-B1F2-ED8F62DC31A9}"/>
+                <a16:creationId xmlns:a16="http://schemas.microsoft.com/office/drawing/2014/main" id="{20FAD6B1-3079-4281-8993-BB1105E87672}"/>
               </a:ext>
             </a:extLst>
           </p:cNvPr>
@@ -35156,7 +35155,7 @@
           <p:cNvPr id="13" name="">
             <a:extLst xmlns:a="http://schemas.openxmlformats.org/drawingml/2006/main">
               <a:ext uri="{FF2B5EF4-FFF2-40B4-BE49-F238E27FC236}">
-                <a16:creationId xmlns:a16="http://schemas.microsoft.com/office/drawing/2014/main" id="{7DF752A6-EB59-4695-AE3F-9DFD55079EB2}"/>
+                <a16:creationId xmlns:a16="http://schemas.microsoft.com/office/drawing/2014/main" id="{9AE04C7A-42CF-4751-AF0B-FC391E19DD05}"/>
               </a:ext>
             </a:extLst>
           </p:cNvPr>
@@ -35216,7 +35215,7 @@
     </p:spTree>
     <p:extLst>
       <p:ext uri="{BB962C8B-B14F-4D97-AF65-F5344CB8AC3E}">
-        <p14:creationId xmlns:p14="http://schemas.microsoft.com/office/powerpoint/2010/main" val="1900511006"/>
+        <p14:creationId xmlns:p14="http://schemas.microsoft.com/office/powerpoint/2010/main" val="1187559578"/>
       </p:ext>
     </p:extLst>
   </p:cSld>

--- a/reports/SpatialScope_Agent_Presentation.pptx
+++ b/reports/SpatialScope_Agent_Presentation.pptx
@@ -2,28 +2,29 @@
 <file path=ppt/presentation.xml><?xml version="1.0" encoding="utf-8"?>
 <p:presentation xmlns:p="http://schemas.openxmlformats.org/presentationml/2006/main">
   <p:sldMasterIdLst>
-    <p:sldMasterId xmlns:r="http://schemas.openxmlformats.org/officeDocument/2006/relationships" id="2147483648" r:id="R63222e2112b74bfb"/>
+    <p:sldMasterId xmlns:r="http://schemas.openxmlformats.org/officeDocument/2006/relationships" id="2147483648" r:id="Re4ad2b4681694137"/>
   </p:sldMasterIdLst>
   <p:notesMasterIdLst>
-    <p:notesMasterId xmlns:r="http://schemas.openxmlformats.org/officeDocument/2006/relationships" r:id="Rd336bb2088ba4dd3"/>
+    <p:notesMasterId xmlns:r="http://schemas.openxmlformats.org/officeDocument/2006/relationships" r:id="Rbc2448d429a34edc"/>
   </p:notesMasterIdLst>
   <p:sldIdLst>
-    <p:sldId xmlns:r="http://schemas.openxmlformats.org/officeDocument/2006/relationships" id="256" r:id="Rc18003aced6a4353"/>
-    <p:sldId xmlns:r="http://schemas.openxmlformats.org/officeDocument/2006/relationships" id="257" r:id="R70515fec168b4d6f"/>
-    <p:sldId xmlns:r="http://schemas.openxmlformats.org/officeDocument/2006/relationships" id="258" r:id="R2452753c51db4627"/>
-    <p:sldId xmlns:r="http://schemas.openxmlformats.org/officeDocument/2006/relationships" id="259" r:id="R41848a6e34524ea8"/>
-    <p:sldId xmlns:r="http://schemas.openxmlformats.org/officeDocument/2006/relationships" id="260" r:id="Rc15f87b6964140f5"/>
-    <p:sldId xmlns:r="http://schemas.openxmlformats.org/officeDocument/2006/relationships" id="261" r:id="R4ba7278e32fe4c96"/>
-    <p:sldId xmlns:r="http://schemas.openxmlformats.org/officeDocument/2006/relationships" id="262" r:id="Rb4a90d3278774566"/>
-    <p:sldId xmlns:r="http://schemas.openxmlformats.org/officeDocument/2006/relationships" id="263" r:id="Re8e4259c907e4442"/>
-    <p:sldId xmlns:r="http://schemas.openxmlformats.org/officeDocument/2006/relationships" id="264" r:id="R2ff34cf7e1e84200"/>
-    <p:sldId xmlns:r="http://schemas.openxmlformats.org/officeDocument/2006/relationships" id="265" r:id="R4923cf01a7f84fde"/>
-    <p:sldId xmlns:r="http://schemas.openxmlformats.org/officeDocument/2006/relationships" id="266" r:id="Rdfd226aa0b064e2f"/>
-    <p:sldId xmlns:r="http://schemas.openxmlformats.org/officeDocument/2006/relationships" id="267" r:id="R76724a97fc984c63"/>
-    <p:sldId xmlns:r="http://schemas.openxmlformats.org/officeDocument/2006/relationships" id="268" r:id="R038b97cc1aaa4aa3"/>
-    <p:sldId xmlns:r="http://schemas.openxmlformats.org/officeDocument/2006/relationships" id="269" r:id="Ra1a4e1edd84a44d7"/>
-    <p:sldId xmlns:r="http://schemas.openxmlformats.org/officeDocument/2006/relationships" id="270" r:id="R96452d73796246c6"/>
-    <p:sldId xmlns:r="http://schemas.openxmlformats.org/officeDocument/2006/relationships" id="271" r:id="Rde9d113dbcf24f00"/>
+    <p:sldId xmlns:r="http://schemas.openxmlformats.org/officeDocument/2006/relationships" id="256" r:id="Rcdeca84b5720436d"/>
+    <p:sldId xmlns:r="http://schemas.openxmlformats.org/officeDocument/2006/relationships" id="257" r:id="R28c1b823b007410d"/>
+    <p:sldId xmlns:r="http://schemas.openxmlformats.org/officeDocument/2006/relationships" id="258" r:id="R812b6ac2edb44cb4"/>
+    <p:sldId xmlns:r="http://schemas.openxmlformats.org/officeDocument/2006/relationships" id="259" r:id="Re0e8d660b57b4ac3"/>
+    <p:sldId xmlns:r="http://schemas.openxmlformats.org/officeDocument/2006/relationships" id="260" r:id="Re56bd8a5b0c04105"/>
+    <p:sldId xmlns:r="http://schemas.openxmlformats.org/officeDocument/2006/relationships" id="261" r:id="R52946f1bdcc64747"/>
+    <p:sldId xmlns:r="http://schemas.openxmlformats.org/officeDocument/2006/relationships" id="262" r:id="Rca3c435ebe814530"/>
+    <p:sldId xmlns:r="http://schemas.openxmlformats.org/officeDocument/2006/relationships" id="263" r:id="R02f18b55c16342db"/>
+    <p:sldId xmlns:r="http://schemas.openxmlformats.org/officeDocument/2006/relationships" id="264" r:id="Raef0f1cc6cc54ce1"/>
+    <p:sldId xmlns:r="http://schemas.openxmlformats.org/officeDocument/2006/relationships" id="265" r:id="R94355af0c66c4a47"/>
+    <p:sldId xmlns:r="http://schemas.openxmlformats.org/officeDocument/2006/relationships" id="266" r:id="Rb5b0eaec034b4fa3"/>
+    <p:sldId xmlns:r="http://schemas.openxmlformats.org/officeDocument/2006/relationships" id="267" r:id="R2177448b66354878"/>
+    <p:sldId xmlns:r="http://schemas.openxmlformats.org/officeDocument/2006/relationships" id="268" r:id="Refcd5c90cd074c41"/>
+    <p:sldId xmlns:r="http://schemas.openxmlformats.org/officeDocument/2006/relationships" id="269" r:id="R060d170c2ae44e37"/>
+    <p:sldId xmlns:r="http://schemas.openxmlformats.org/officeDocument/2006/relationships" id="270" r:id="R7e13d774c5ae4f44"/>
+    <p:sldId xmlns:r="http://schemas.openxmlformats.org/officeDocument/2006/relationships" id="271" r:id="R48a4849e96064510"/>
+    <p:sldId xmlns:r="http://schemas.openxmlformats.org/officeDocument/2006/relationships" id="272" r:id="R88763f969bb746da"/>
   </p:sldIdLst>
   <p:sldSz cx="12192000" cy="6858000"/>
   <p:notesSz cx="6858000" cy="9144000"/>
@@ -982,17 +983,47 @@
           <a:lstStyle xmlns:a="http://schemas.openxmlformats.org/drawingml/2006/main"/>
           <a:p xmlns:a="http://schemas.openxmlformats.org/drawingml/2006/main">
             <a:r>
-              <a:t>讲稿：刚才演示的是一个稳定的小型胚胎 demo。为了说明系统不只是 toy example，我也用公开真实数据 GSE278603 E7.5 mouse embryo 做了验证。这个样本包含 8190 spots 和 16364 genes，源文件中的 X_spatial 被标准化为 spatial，quick run 得到 7 个 Leiden clusters，0 warnings，0 errors。</a:t>
+              <a:t>讲稿：这一页说明真实数据验证。前面网站演示用的是小型 demo，因为在线部署要稳定；但我没有只停留在 toy data。我下载了公开数据 GSE278603 中 E7.5 mouse embryo Stereo-seq 的一个样本。这个样本有 8190 个 spots 和 16364 个 genes，数据规模和字段复杂度都比 demo 更接近真实科研数据。</a:t>
             </a:r>
           </a:p>
           <a:p xmlns:a="http://schemas.openxmlformats.org/drawingml/2006/main">
             <a:r>
-              <a:t>操作：此页回到 PPT，不再操作网站。指左侧数据卡，再看右侧真实 spatial Leiden、UMAP Leiden 和 gene panel。</a:t>
+              <a:t/>
             </a:r>
           </a:p>
           <a:p xmlns:a="http://schemas.openxmlformats.org/drawingml/2006/main">
             <a:r>
-              <a:t>过渡：真实数据验证说明系统有一定泛化能力。接下来说明它在科研场景中可以如何使用，以及边界在哪里。</a:t>
+              <a:t>讲图顺序：先指左侧数据卡。第一行是数据规模；第二行说明原数据里空间坐标叫 obsm["X_spatial"]，Agent 会把它标准化成常用的 obsm["spatial"]；第三行说明 quick run 仍然包含 QC、UMAP、Leiden 聚类和 gene panel；最后一行说明这次运行得到 7 个 clusters，并且没有 warnings 和 errors。</a:t>
+            </a:r>
+          </a:p>
+          <a:p xmlns:a="http://schemas.openxmlformats.org/drawingml/2006/main">
+            <a:r>
+              <a:t/>
+            </a:r>
+          </a:p>
+          <a:p xmlns:a="http://schemas.openxmlformats.org/drawingml/2006/main">
+            <a:r>
+              <a:t>然后指右侧三类图。Spatial Leiden 是把聚类结果放回真实组织坐标；UMAP Leiden 是看表达状态是否能分开；gene panel 是看 Sox17、T、Mesp1、Pou5f1 这些发育相关基因是否有空间表达倾向。</a:t>
+            </a:r>
+          </a:p>
+          <a:p xmlns:a="http://schemas.openxmlformats.org/drawingml/2006/main">
+            <a:r>
+              <a:t/>
+            </a:r>
+          </a:p>
+          <a:p xmlns:a="http://schemas.openxmlformats.org/drawingml/2006/main">
+            <a:r>
+              <a:t>重要边界：这里的目的不是给出完整生物学结论，而是证明系统可以处理真实 AnnData、真实坐标字段和真实表达层。完整生物学解释还需要更系统的 marker、组织学背景和专家注释。</a:t>
+            </a:r>
+          </a:p>
+          <a:p xmlns:a="http://schemas.openxmlformats.org/drawingml/2006/main">
+            <a:r>
+              <a:t/>
+            </a:r>
+          </a:p>
+          <a:p xmlns:a="http://schemas.openxmlformats.org/drawingml/2006/main">
+            <a:r>
+              <a:t>过渡：下一页我解释 Leiden、UMAP 和 Spatial 这几张图具体应该怎么读。</a:t>
             </a:r>
           </a:p>
         </p:txBody>
@@ -1062,17 +1093,57 @@
           <a:lstStyle xmlns:a="http://schemas.openxmlformats.org/drawingml/2006/main"/>
           <a:p xmlns:a="http://schemas.openxmlformats.org/drawingml/2006/main">
             <a:r>
-              <a:t>讲稿：SpatialScope 可以作为 exploratory analysis workspace。发育生物学里可以比较不同胚胎阶段的空间区域；肿瘤微环境里可以探索 tumor、immune、stromal regions；病理切片探索中可以整合组织结构、空间表达和 cluster；教学中可以帮助学生从自然语言问题进入可复现分析。</a:t>
+              <a:t>讲稿：这一页是为了把真实数据图讲清楚。Leiden 是一种图聚类算法，可以简单理解为：先根据基因表达相似性把 spots 连接成邻居图，再把连接更紧密的 spots 分到同一个 cluster。它回答的是“哪些 spot 的整体表达模式相似”。</a:t>
             </a:r>
           </a:p>
           <a:p xmlns:a="http://schemas.openxmlformats.org/drawingml/2006/main">
             <a:r>
-              <a:t>操作：此页留在 PPT。讲四个场景时不要承诺过度，最后一定强调黄色边界：不能替代专家注释，不能把 marker ranking 当作机制证明，大数据需要更强计算后端。</a:t>
+              <a:t/>
             </a:r>
           </a:p>
           <a:p xmlns:a="http://schemas.openxmlformats.org/drawingml/2006/main">
             <a:r>
-              <a:t>过渡：最后总结项目的核心贡献和交付。</a:t>
+              <a:t>这里一定要强调：Leiden cluster 不等于细胞类型。颜色 0 到 6 只是算法给出的分组编号，不是说 cluster 0 就一定是什么细胞。要把 cluster 解释成细胞类型，还需要 marker genes、参考文献和专家判断。</a:t>
+            </a:r>
+          </a:p>
+          <a:p xmlns:a="http://schemas.openxmlformats.org/drawingml/2006/main">
+            <a:r>
+              <a:t/>
+            </a:r>
+          </a:p>
+          <a:p xmlns:a="http://schemas.openxmlformats.org/drawingml/2006/main">
+            <a:r>
+              <a:t>UMAP 图不是组织地图，而是表达状态地图。两个点在 UMAP 上接近，表示它们的整体基因表达相似；离得远，表示表达差异更大。这个真实数据的 UMAP 分成几个比较清楚的区域，说明表达状态确实有结构。</a:t>
+            </a:r>
+          </a:p>
+          <a:p xmlns:a="http://schemas.openxmlformats.org/drawingml/2006/main">
+            <a:r>
+              <a:t/>
+            </a:r>
+          </a:p>
+          <a:p xmlns:a="http://schemas.openxmlformats.org/drawingml/2006/main">
+            <a:r>
+              <a:t>Spatial 图是真实组织坐标。把 Leiden cluster 放回 Spatial 后，会发现颜色没有像 UMAP 那样分成特别干净的大块，而是有不少混合。这不是失败，反而是真实数据常见的情况：组织里不同状态可能交错，空间分辨率、发育阶段和技术噪声都会让结构更复杂。</a:t>
+            </a:r>
+          </a:p>
+          <a:p xmlns:a="http://schemas.openxmlformats.org/drawingml/2006/main">
+            <a:r>
+              <a:t/>
+            </a:r>
+          </a:p>
+          <a:p xmlns:a="http://schemas.openxmlformats.org/drawingml/2006/main">
+            <a:r>
+              <a:t>Gene panel 用来找生物学线索。比如 T 和 Mesp1 是中胚层/早期发育相关基因，如果它们在某些空间区域更高，就可以作为后续解释的线索。但这里仍然要谨慎：单个基因的空间表达不能直接证明机制，只能作为 evidence。</a:t>
+            </a:r>
+          </a:p>
+          <a:p xmlns:a="http://schemas.openxmlformats.org/drawingml/2006/main">
+            <a:r>
+              <a:t/>
+            </a:r>
+          </a:p>
+          <a:p xmlns:a="http://schemas.openxmlformats.org/drawingml/2006/main">
+            <a:r>
+              <a:t>一句话总结：UMAP 看表达状态是否分开，Spatial 看这些状态在组织哪里，Gene panel 用发育基因帮助解释这些区域。</a:t>
             </a:r>
           </a:p>
         </p:txBody>
@@ -1142,12 +1213,112 @@
           <a:lstStyle xmlns:a="http://schemas.openxmlformats.org/drawingml/2006/main"/>
           <a:p xmlns:a="http://schemas.openxmlformats.org/drawingml/2006/main">
             <a:r>
+              <a:t>讲稿：在理解真实数据图之后，再回到真实科研场景。SpatialScope 可以作为 exploratory analysis workspace。发育生物学里可以比较不同胚胎阶段的空间区域，并查看 Sox17、T、Mesp1 等基因；肿瘤微环境里可以探索 tumor、immune、stromal regions；病理切片探索中可以整合组织结构、空间表达和 cluster；教学中可以帮助学生从自然语言问题进入可复现分析。</a:t>
+            </a:r>
+          </a:p>
+          <a:p xmlns:a="http://schemas.openxmlformats.org/drawingml/2006/main">
+            <a:r>
+              <a:t/>
+            </a:r>
+          </a:p>
+          <a:p xmlns:a="http://schemas.openxmlformats.org/drawingml/2006/main">
+            <a:r>
+              <a:t>操作：此页留在 PPT。讲四个场景时不要承诺过度，最后一定强调黄色边界：不能替代专家注释，不能把 marker ranking 当作机制证明，大数据需要更强计算后端。</a:t>
+            </a:r>
+          </a:p>
+          <a:p xmlns:a="http://schemas.openxmlformats.org/drawingml/2006/main">
+            <a:r>
+              <a:t/>
+            </a:r>
+          </a:p>
+          <a:p xmlns:a="http://schemas.openxmlformats.org/drawingml/2006/main">
+            <a:r>
+              <a:t>过渡：最后总结项目的核心贡献和交付。</a:t>
+            </a:r>
+          </a:p>
+        </p:txBody>
+      </p:sp>
+      <p:sp>
+        <p:nvSpPr>
+          <p:cNvPr id="4" name="Slide Number Placeholder 3"/>
+          <p:cNvSpPr>
+            <a:spLocks xmlns:a="http://schemas.openxmlformats.org/drawingml/2006/main" noGrp="1"/>
+          </p:cNvSpPr>
+          <p:nvPr>
+            <p:ph type="sldNum" idx="5"/>
+          </p:nvPr>
+        </p:nvSpPr>
+        <p:spPr/>
+        <p:txBody>
+          <a:bodyPr xmlns:a="http://schemas.openxmlformats.org/drawingml/2006/main"/>
+          <a:lstStyle xmlns:a="http://schemas.openxmlformats.org/drawingml/2006/main"/>
+          <a:p xmlns:a="http://schemas.openxmlformats.org/drawingml/2006/main"/>
+        </p:txBody>
+      </p:sp>
+    </p:spTree>
+  </p:cSld>
+  <p:clrMapOvr>
+    <a:masterClrMapping xmlns:a="http://schemas.openxmlformats.org/drawingml/2006/main"/>
+  </p:clrMapOvr>
+</p:notes>
+</file>
+
+<file path=ppt/notesSlides/notesSlide17.xml><?xml version="1.0" encoding="utf-8"?>
+<p:notes xmlns:p="http://schemas.openxmlformats.org/presentationml/2006/main">
+  <p:cSld>
+    <p:spTree>
+      <p:nvGrpSpPr>
+        <p:cNvPr id="1" name=""/>
+        <p:cNvGrpSpPr/>
+        <p:nvPr/>
+      </p:nvGrpSpPr>
+      <p:grpSpPr>
+        <a:xfrm xmlns:a="http://schemas.openxmlformats.org/drawingml/2006/main"/>
+      </p:grpSpPr>
+      <p:sp>
+        <p:nvSpPr>
+          <p:cNvPr id="2" name="Slide Image Placeholder 1"/>
+          <p:cNvSpPr>
+            <a:spLocks xmlns:a="http://schemas.openxmlformats.org/drawingml/2006/main" noGrp="1"/>
+          </p:cNvSpPr>
+          <p:nvPr>
+            <p:ph type="sldImg" idx="0"/>
+          </p:nvPr>
+        </p:nvSpPr>
+        <p:spPr/>
+      </p:sp>
+      <p:sp>
+        <p:nvSpPr>
+          <p:cNvPr id="3" name="Notes Placeholder 2"/>
+          <p:cNvSpPr>
+            <a:spLocks xmlns:a="http://schemas.openxmlformats.org/drawingml/2006/main" noGrp="1"/>
+          </p:cNvSpPr>
+          <p:nvPr>
+            <p:ph type="body" idx="1"/>
+          </p:nvPr>
+        </p:nvSpPr>
+        <p:spPr/>
+        <p:txBody>
+          <a:bodyPr xmlns:a="http://schemas.openxmlformats.org/drawingml/2006/main"/>
+          <a:lstStyle xmlns:a="http://schemas.openxmlformats.org/drawingml/2006/main"/>
+          <a:p xmlns:a="http://schemas.openxmlformats.org/drawingml/2006/main">
+            <a:r>
               <a:t>讲稿：最后总结三点。第一，理解空间转录组数据结构和标准分析流程是项目基础。第二，SpatialScope 用 LangGraph 把流程组织成计划、执行、校验、修复和报告。第三，LLM 被限制在 evidence pack 内，用于解释和问答，而不是替代数值分析。</a:t>
             </a:r>
           </a:p>
           <a:p xmlns:a="http://schemas.openxmlformats.org/drawingml/2006/main">
             <a:r>
+              <a:t/>
+            </a:r>
+          </a:p>
+          <a:p xmlns:a="http://schemas.openxmlformats.org/drawingml/2006/main">
+            <a:r>
               <a:t>操作：此页留在 PPT。指向交付与验证卡片：GitHub repo、Streamlit app、GitHub Pages、final PDF report、99 passed。</a:t>
+            </a:r>
+          </a:p>
+          <a:p xmlns:a="http://schemas.openxmlformats.org/drawingml/2006/main">
+            <a:r>
+              <a:t/>
             </a:r>
           </a:p>
           <a:p xmlns:a="http://schemas.openxmlformats.org/drawingml/2006/main">
@@ -1860,7 +2031,7 @@
   </p:cSld>
   <p:clrMap bg1="lt1" tx1="dk1" bg2="lt2" tx2="dk2" accent1="accent1" accent2="accent2" accent3="accent3" accent4="accent4" accent5="accent5" accent6="accent6" hlink="hlink" folHlink="folHlink"/>
   <p:sldLayoutIdLst>
-    <p:sldLayoutId xmlns:r="http://schemas.openxmlformats.org/officeDocument/2006/relationships" id="2147483649" r:id="R72215cc291ae41b8"/>
+    <p:sldLayoutId xmlns:r="http://schemas.openxmlformats.org/officeDocument/2006/relationships" id="2147483649" r:id="R7b42a05a4c2c4c72"/>
   </p:sldLayoutIdLst>
   <p:txStyles>
     <p:titleStyle>
@@ -2474,14 +2645,14 @@
       </p:sp>
       <p:pic>
         <p:nvPicPr>
-          <p:cNvPr id="20" name=""/>
+          <p:cNvPr id="22" name=""/>
           <p:cNvPicPr>
             <a:picLocks xmlns:a="http://schemas.openxmlformats.org/drawingml/2006/main" noChangeAspect="1"/>
           </p:cNvPicPr>
           <p:nvPr/>
         </p:nvPicPr>
         <p:blipFill>
-          <a:blip xmlns:r="http://schemas.openxmlformats.org/officeDocument/2006/relationships" xmlns:a="http://schemas.openxmlformats.org/drawingml/2006/main" r:embed="R5911c689ef324efa"/>
+          <a:blip xmlns:r="http://schemas.openxmlformats.org/officeDocument/2006/relationships" xmlns:a="http://schemas.openxmlformats.org/drawingml/2006/main" r:embed="Rfa2947ec9ce3440b"/>
           <a:stretch xmlns:a="http://schemas.openxmlformats.org/drawingml/2006/main"/>
         </p:blipFill>
         <p:spPr>
@@ -2490,9 +2661,7 @@
             <a:ext cx="781050" cy="781050"/>
           </a:xfrm>
           <a:prstGeom xmlns:a="http://schemas.openxmlformats.org/drawingml/2006/main" prst="roundRect">
-            <a:avLst>
-              <a:gd name="adj" fmla="val 9756"/>
-            </a:avLst>
+            <a:avLst/>
           </a:prstGeom>
         </p:spPr>
       </p:pic>
@@ -2684,14 +2853,14 @@
       </p:sp>
       <p:pic>
         <p:nvPicPr>
-          <p:cNvPr id="24" name=""/>
+          <p:cNvPr id="26" name=""/>
           <p:cNvPicPr>
             <a:picLocks xmlns:a="http://schemas.openxmlformats.org/drawingml/2006/main" noChangeAspect="1"/>
           </p:cNvPicPr>
           <p:nvPr/>
         </p:nvPicPr>
         <p:blipFill>
-          <a:blip xmlns:r="http://schemas.openxmlformats.org/officeDocument/2006/relationships" xmlns:a="http://schemas.openxmlformats.org/drawingml/2006/main" r:embed="Rffc4392112724738"/>
+          <a:blip xmlns:r="http://schemas.openxmlformats.org/officeDocument/2006/relationships" xmlns:a="http://schemas.openxmlformats.org/drawingml/2006/main" r:embed="R383c861c02554c86"/>
           <a:srcRect xmlns:a="http://schemas.openxmlformats.org/drawingml/2006/main" l="0" t="10358" r="0" b="10358"/>
           <a:stretch xmlns:a="http://schemas.openxmlformats.org/drawingml/2006/main">
             <a:fillRect l="0" t="0" r="0" b="0"/>
@@ -2703,9 +2872,7 @@
             <a:ext cx="6381750" cy="3162300"/>
           </a:xfrm>
           <a:prstGeom xmlns:a="http://schemas.openxmlformats.org/drawingml/2006/main" prst="roundRect">
-            <a:avLst>
-              <a:gd name="adj" fmla="val 3614"/>
-            </a:avLst>
+            <a:avLst/>
           </a:prstGeom>
         </p:spPr>
       </p:pic>
@@ -2915,6 +3082,7 @@
           <a:lstStyle xmlns:a="http://schemas.openxmlformats.org/drawingml/2006/main"/>
           <a:p xmlns:a="http://schemas.openxmlformats.org/drawingml/2006/main">
             <a:pPr algn="ctr">
+              <a:buNone/>
               <a:defRPr sz="1013" b="1">
                 <a:solidFill>
                   <a:srgbClr val="0F766E"/>
@@ -2979,6 +3147,7 @@
           <a:lstStyle xmlns:a="http://schemas.openxmlformats.org/drawingml/2006/main"/>
           <a:p xmlns:a="http://schemas.openxmlformats.org/drawingml/2006/main">
             <a:pPr algn="ctr">
+              <a:buNone/>
               <a:defRPr sz="1013" b="1">
                 <a:solidFill>
                   <a:srgbClr val="0F766E"/>
@@ -3043,6 +3212,7 @@
           <a:lstStyle xmlns:a="http://schemas.openxmlformats.org/drawingml/2006/main"/>
           <a:p xmlns:a="http://schemas.openxmlformats.org/drawingml/2006/main">
             <a:pPr algn="ctr">
+              <a:buNone/>
               <a:defRPr sz="1013" b="1">
                 <a:solidFill>
                   <a:srgbClr val="0F766E"/>
@@ -5646,6 +5816,7 @@
           <a:lstStyle xmlns:a="http://schemas.openxmlformats.org/drawingml/2006/main"/>
           <a:p xmlns:a="http://schemas.openxmlformats.org/drawingml/2006/main">
             <a:pPr algn="ctr">
+              <a:buNone/>
               <a:defRPr sz="1425">
                 <a:solidFill>
                   <a:srgbClr val="17212B"/>
@@ -5710,6 +5881,7 @@
           <a:lstStyle xmlns:a="http://schemas.openxmlformats.org/drawingml/2006/main"/>
           <a:p xmlns:a="http://schemas.openxmlformats.org/drawingml/2006/main">
             <a:pPr algn="ctr">
+              <a:buNone/>
               <a:defRPr sz="1388" b="1">
                 <a:solidFill>
                   <a:srgbClr val="0B4F49"/>
@@ -5735,7 +5907,7 @@
       </p:sp>
       <p:cxnSp>
         <p:nvCxnSpPr>
-          <p:cNvPr id="38" name=""/>
+          <p:cNvPr id="66" name=""/>
           <p:cNvCxnSpPr>
             <a:stCxn xmlns:a="http://schemas.openxmlformats.org/drawingml/2006/main" id="5" idx="3"/>
             <a:endCxn xmlns:a="http://schemas.openxmlformats.org/drawingml/2006/main" id="6" idx="1"/>
@@ -5800,6 +5972,7 @@
           <a:lstStyle xmlns:a="http://schemas.openxmlformats.org/drawingml/2006/main"/>
           <a:p xmlns:a="http://schemas.openxmlformats.org/drawingml/2006/main">
             <a:pPr algn="ctr">
+              <a:buNone/>
               <a:defRPr sz="1425">
                 <a:solidFill>
                   <a:srgbClr val="17212B"/>
@@ -5864,6 +6037,7 @@
           <a:lstStyle xmlns:a="http://schemas.openxmlformats.org/drawingml/2006/main"/>
           <a:p xmlns:a="http://schemas.openxmlformats.org/drawingml/2006/main">
             <a:pPr algn="ctr">
+              <a:buNone/>
               <a:defRPr sz="1388" b="1">
                 <a:solidFill>
                   <a:srgbClr val="0B4F49"/>
@@ -5889,7 +6063,7 @@
       </p:sp>
       <p:cxnSp>
         <p:nvCxnSpPr>
-          <p:cNvPr id="41" name=""/>
+          <p:cNvPr id="69" name=""/>
           <p:cNvCxnSpPr>
             <a:stCxn xmlns:a="http://schemas.openxmlformats.org/drawingml/2006/main" id="8" idx="3"/>
             <a:endCxn xmlns:a="http://schemas.openxmlformats.org/drawingml/2006/main" id="9" idx="1"/>
@@ -5954,6 +6128,7 @@
           <a:lstStyle xmlns:a="http://schemas.openxmlformats.org/drawingml/2006/main"/>
           <a:p xmlns:a="http://schemas.openxmlformats.org/drawingml/2006/main">
             <a:pPr algn="ctr">
+              <a:buNone/>
               <a:defRPr sz="1425">
                 <a:solidFill>
                   <a:srgbClr val="17212B"/>
@@ -6018,6 +6193,7 @@
           <a:lstStyle xmlns:a="http://schemas.openxmlformats.org/drawingml/2006/main"/>
           <a:p xmlns:a="http://schemas.openxmlformats.org/drawingml/2006/main">
             <a:pPr algn="ctr">
+              <a:buNone/>
               <a:defRPr sz="1388" b="1">
                 <a:solidFill>
                   <a:srgbClr val="0B4F49"/>
@@ -6043,7 +6219,7 @@
       </p:sp>
       <p:cxnSp>
         <p:nvCxnSpPr>
-          <p:cNvPr id="44" name=""/>
+          <p:cNvPr id="72" name=""/>
           <p:cNvCxnSpPr>
             <a:stCxn xmlns:a="http://schemas.openxmlformats.org/drawingml/2006/main" id="11" idx="3"/>
             <a:endCxn xmlns:a="http://schemas.openxmlformats.org/drawingml/2006/main" id="12" idx="1"/>
@@ -6108,6 +6284,7 @@
           <a:lstStyle xmlns:a="http://schemas.openxmlformats.org/drawingml/2006/main"/>
           <a:p xmlns:a="http://schemas.openxmlformats.org/drawingml/2006/main">
             <a:pPr algn="ctr">
+              <a:buNone/>
               <a:defRPr sz="1425">
                 <a:solidFill>
                   <a:srgbClr val="17212B"/>
@@ -6172,6 +6349,7 @@
           <a:lstStyle xmlns:a="http://schemas.openxmlformats.org/drawingml/2006/main"/>
           <a:p xmlns:a="http://schemas.openxmlformats.org/drawingml/2006/main">
             <a:pPr algn="ctr">
+              <a:buNone/>
               <a:defRPr sz="1388" b="1">
                 <a:solidFill>
                   <a:srgbClr val="0B4F49"/>
@@ -6197,7 +6375,7 @@
       </p:sp>
       <p:cxnSp>
         <p:nvCxnSpPr>
-          <p:cNvPr id="47" name=""/>
+          <p:cNvPr id="75" name=""/>
           <p:cNvCxnSpPr>
             <a:stCxn xmlns:a="http://schemas.openxmlformats.org/drawingml/2006/main" id="14" idx="3"/>
             <a:endCxn xmlns:a="http://schemas.openxmlformats.org/drawingml/2006/main" id="15" idx="1"/>
@@ -6262,6 +6440,7 @@
           <a:lstStyle xmlns:a="http://schemas.openxmlformats.org/drawingml/2006/main"/>
           <a:p xmlns:a="http://schemas.openxmlformats.org/drawingml/2006/main">
             <a:pPr algn="ctr">
+              <a:buNone/>
               <a:defRPr sz="1425">
                 <a:solidFill>
                   <a:srgbClr val="17212B"/>
@@ -6326,6 +6505,7 @@
           <a:lstStyle xmlns:a="http://schemas.openxmlformats.org/drawingml/2006/main"/>
           <a:p xmlns:a="http://schemas.openxmlformats.org/drawingml/2006/main">
             <a:pPr algn="ctr">
+              <a:buNone/>
               <a:defRPr sz="1388" b="1">
                 <a:solidFill>
                   <a:srgbClr val="0B4F49"/>
@@ -6351,7 +6531,7 @@
       </p:sp>
       <p:cxnSp>
         <p:nvCxnSpPr>
-          <p:cNvPr id="50" name=""/>
+          <p:cNvPr id="78" name=""/>
           <p:cNvCxnSpPr>
             <a:stCxn xmlns:a="http://schemas.openxmlformats.org/drawingml/2006/main" id="17" idx="3"/>
             <a:endCxn xmlns:a="http://schemas.openxmlformats.org/drawingml/2006/main" id="18" idx="1"/>
@@ -6416,6 +6596,7 @@
           <a:lstStyle xmlns:a="http://schemas.openxmlformats.org/drawingml/2006/main"/>
           <a:p xmlns:a="http://schemas.openxmlformats.org/drawingml/2006/main">
             <a:pPr algn="ctr">
+              <a:buNone/>
               <a:defRPr sz="1425">
                 <a:solidFill>
                   <a:srgbClr val="17212B"/>
@@ -6480,6 +6661,7 @@
           <a:lstStyle xmlns:a="http://schemas.openxmlformats.org/drawingml/2006/main"/>
           <a:p xmlns:a="http://schemas.openxmlformats.org/drawingml/2006/main">
             <a:pPr algn="ctr">
+              <a:buNone/>
               <a:defRPr sz="1388" b="1">
                 <a:solidFill>
                   <a:srgbClr val="0B4F49"/>
@@ -6505,7 +6687,7 @@
       </p:sp>
       <p:cxnSp>
         <p:nvCxnSpPr>
-          <p:cNvPr id="53" name=""/>
+          <p:cNvPr id="81" name=""/>
           <p:cNvCxnSpPr>
             <a:stCxn xmlns:a="http://schemas.openxmlformats.org/drawingml/2006/main" id="20" idx="3"/>
             <a:endCxn xmlns:a="http://schemas.openxmlformats.org/drawingml/2006/main" id="21" idx="1"/>
@@ -6570,6 +6752,7 @@
           <a:lstStyle xmlns:a="http://schemas.openxmlformats.org/drawingml/2006/main"/>
           <a:p xmlns:a="http://schemas.openxmlformats.org/drawingml/2006/main">
             <a:pPr algn="ctr">
+              <a:buNone/>
               <a:defRPr sz="1425">
                 <a:solidFill>
                   <a:srgbClr val="17212B"/>
@@ -6634,6 +6817,7 @@
           <a:lstStyle xmlns:a="http://schemas.openxmlformats.org/drawingml/2006/main"/>
           <a:p xmlns:a="http://schemas.openxmlformats.org/drawingml/2006/main">
             <a:pPr algn="ctr">
+              <a:buNone/>
               <a:defRPr sz="1388" b="1">
                 <a:solidFill>
                   <a:srgbClr val="0B4F49"/>
@@ -6659,7 +6843,7 @@
       </p:sp>
       <p:cxnSp>
         <p:nvCxnSpPr>
-          <p:cNvPr id="56" name=""/>
+          <p:cNvPr id="84" name=""/>
           <p:cNvCxnSpPr>
             <a:stCxn xmlns:a="http://schemas.openxmlformats.org/drawingml/2006/main" id="23" idx="3"/>
             <a:endCxn xmlns:a="http://schemas.openxmlformats.org/drawingml/2006/main" id="24" idx="1"/>
@@ -6724,6 +6908,7 @@
           <a:lstStyle xmlns:a="http://schemas.openxmlformats.org/drawingml/2006/main"/>
           <a:p xmlns:a="http://schemas.openxmlformats.org/drawingml/2006/main">
             <a:pPr algn="ctr">
+              <a:buNone/>
               <a:defRPr sz="1425">
                 <a:solidFill>
                   <a:srgbClr val="17212B"/>
@@ -6788,6 +6973,7 @@
           <a:lstStyle xmlns:a="http://schemas.openxmlformats.org/drawingml/2006/main"/>
           <a:p xmlns:a="http://schemas.openxmlformats.org/drawingml/2006/main">
             <a:pPr algn="ctr">
+              <a:buNone/>
               <a:defRPr sz="1388" b="1">
                 <a:solidFill>
                   <a:srgbClr val="0B4F49"/>
@@ -6813,7 +6999,7 @@
       </p:sp>
       <p:cxnSp>
         <p:nvCxnSpPr>
-          <p:cNvPr id="59" name=""/>
+          <p:cNvPr id="87" name=""/>
           <p:cNvCxnSpPr>
             <a:stCxn xmlns:a="http://schemas.openxmlformats.org/drawingml/2006/main" id="26" idx="3"/>
             <a:endCxn xmlns:a="http://schemas.openxmlformats.org/drawingml/2006/main" id="27" idx="1"/>
@@ -7147,14 +7333,14 @@
       </p:sp>
       <p:pic>
         <p:nvPicPr>
-          <p:cNvPr id="33" name=""/>
+          <p:cNvPr id="35" name=""/>
           <p:cNvPicPr>
             <a:picLocks xmlns:a="http://schemas.openxmlformats.org/drawingml/2006/main" noChangeAspect="1"/>
           </p:cNvPicPr>
           <p:nvPr/>
         </p:nvPicPr>
         <p:blipFill>
-          <a:blip xmlns:r="http://schemas.openxmlformats.org/officeDocument/2006/relationships" xmlns:a="http://schemas.openxmlformats.org/drawingml/2006/main" r:embed="R99707a8c62444ee6"/>
+          <a:blip xmlns:r="http://schemas.openxmlformats.org/officeDocument/2006/relationships" xmlns:a="http://schemas.openxmlformats.org/drawingml/2006/main" r:embed="R7a63601b11db47b8"/>
           <a:srcRect xmlns:a="http://schemas.openxmlformats.org/drawingml/2006/main" l="0" t="17360" r="0" b="17360"/>
           <a:stretch xmlns:a="http://schemas.openxmlformats.org/drawingml/2006/main">
             <a:fillRect l="0" t="0" r="0" b="0"/>
@@ -7166,22 +7352,20 @@
             <a:ext cx="4762500" cy="1943100"/>
           </a:xfrm>
           <a:prstGeom xmlns:a="http://schemas.openxmlformats.org/drawingml/2006/main" prst="roundRect">
-            <a:avLst>
-              <a:gd name="adj" fmla="val 5882"/>
-            </a:avLst>
+            <a:avLst/>
           </a:prstGeom>
         </p:spPr>
       </p:pic>
       <p:pic>
         <p:nvPicPr>
-          <p:cNvPr id="34" name=""/>
+          <p:cNvPr id="36" name=""/>
           <p:cNvPicPr>
             <a:picLocks xmlns:a="http://schemas.openxmlformats.org/drawingml/2006/main" noChangeAspect="1"/>
           </p:cNvPicPr>
           <p:nvPr/>
         </p:nvPicPr>
         <p:blipFill>
-          <a:blip xmlns:r="http://schemas.openxmlformats.org/officeDocument/2006/relationships" xmlns:a="http://schemas.openxmlformats.org/drawingml/2006/main" r:embed="Rd0a78d8ea48c427c"/>
+          <a:blip xmlns:r="http://schemas.openxmlformats.org/officeDocument/2006/relationships" xmlns:a="http://schemas.openxmlformats.org/drawingml/2006/main" r:embed="R24b1bb5068044729"/>
           <a:srcRect xmlns:a="http://schemas.openxmlformats.org/drawingml/2006/main" l="0" t="17360" r="0" b="17360"/>
           <a:stretch xmlns:a="http://schemas.openxmlformats.org/drawingml/2006/main">
             <a:fillRect l="0" t="0" r="0" b="0"/>
@@ -7193,9 +7377,7 @@
             <a:ext cx="4762500" cy="1943100"/>
           </a:xfrm>
           <a:prstGeom xmlns:a="http://schemas.openxmlformats.org/drawingml/2006/main" prst="roundRect">
-            <a:avLst>
-              <a:gd name="adj" fmla="val 5882"/>
-            </a:avLst>
+            <a:avLst/>
           </a:prstGeom>
         </p:spPr>
       </p:pic>
@@ -7450,6 +7632,7 @@
           <a:lstStyle xmlns:a="http://schemas.openxmlformats.org/drawingml/2006/main"/>
           <a:p xmlns:a="http://schemas.openxmlformats.org/drawingml/2006/main">
             <a:pPr algn="ctr">
+              <a:buNone/>
               <a:defRPr sz="938" b="1">
                 <a:solidFill>
                   <a:srgbClr val="FFFFFF"/>
@@ -7642,6 +7825,7 @@
           <a:lstStyle xmlns:a="http://schemas.openxmlformats.org/drawingml/2006/main"/>
           <a:p xmlns:a="http://schemas.openxmlformats.org/drawingml/2006/main">
             <a:pPr algn="ctr">
+              <a:buNone/>
               <a:defRPr sz="938" b="1">
                 <a:solidFill>
                   <a:srgbClr val="FFFFFF"/>
@@ -7834,6 +8018,7 @@
           <a:lstStyle xmlns:a="http://schemas.openxmlformats.org/drawingml/2006/main"/>
           <a:p xmlns:a="http://schemas.openxmlformats.org/drawingml/2006/main">
             <a:pPr algn="ctr">
+              <a:buNone/>
               <a:defRPr sz="938" b="1">
                 <a:solidFill>
                   <a:srgbClr val="FFFFFF"/>
@@ -8026,6 +8211,7 @@
           <a:lstStyle xmlns:a="http://schemas.openxmlformats.org/drawingml/2006/main"/>
           <a:p xmlns:a="http://schemas.openxmlformats.org/drawingml/2006/main">
             <a:pPr algn="ctr">
+              <a:buNone/>
               <a:defRPr sz="938" b="1">
                 <a:solidFill>
                   <a:srgbClr val="FFFFFF"/>
@@ -10821,33 +11007,6 @@
                 <a:ea typeface="PingFang SC"/>
                 <a:cs typeface="PingFang SC"/>
               </a:rPr>
-              <a:t>GSM9046244 ... stereo_rep2.h5ad</a:t>
-            </a:r>
-          </a:p>
-          <a:p xmlns:a="http://schemas.openxmlformats.org/drawingml/2006/main">
-            <a:pPr algn="l">
-              <a:lnSpc>
-                <a:spcPct val="108000"/>
-              </a:lnSpc>
-              <a:buNone/>
-              <a:defRPr sz="1425" b="0" i="0">
-                <a:solidFill>
-                  <a:srgbClr val="475569"/>
-                </a:solidFill>
-                <a:latin typeface="PingFang SC"/>
-                <a:ea typeface="PingFang SC"/>
-                <a:cs typeface="PingFang SC"/>
-              </a:defRPr>
-            </a:pPr>
-            <a:r>
-              <a:rPr sz="1425" b="0" i="0">
-                <a:solidFill>
-                  <a:srgbClr val="475569"/>
-                </a:solidFill>
-                <a:latin typeface="PingFang SC"/>
-                <a:ea typeface="PingFang SC"/>
-                <a:cs typeface="PingFang SC"/>
-              </a:rPr>
               <a:t>8190 spots · 16364 genes</a:t>
             </a:r>
           </a:p>
@@ -10875,7 +11034,7 @@
                 <a:ea typeface="PingFang SC"/>
                 <a:cs typeface="PingFang SC"/>
               </a:rPr>
-              <a:t>X_spatial -&gt; spatial</a:t>
+              <a:t>obsm["X_spatial"] -&gt; obsm["spatial"]</a:t>
             </a:r>
           </a:p>
           <a:p xmlns:a="http://schemas.openxmlformats.org/drawingml/2006/main">
@@ -10902,21 +11061,48 @@
                 <a:ea typeface="PingFang SC"/>
                 <a:cs typeface="PingFang SC"/>
               </a:rPr>
-              <a:t>7 Leiden clusters · 0 warnings · 0 errors</a:t>
+              <a:t>Quick run: QC + UMAP + Leiden + gene panel</a:t>
+            </a:r>
+          </a:p>
+          <a:p xmlns:a="http://schemas.openxmlformats.org/drawingml/2006/main">
+            <a:pPr algn="l">
+              <a:lnSpc>
+                <a:spcPct val="108000"/>
+              </a:lnSpc>
+              <a:buNone/>
+              <a:defRPr sz="1425" b="0" i="0">
+                <a:solidFill>
+                  <a:srgbClr val="475569"/>
+                </a:solidFill>
+                <a:latin typeface="PingFang SC"/>
+                <a:ea typeface="PingFang SC"/>
+                <a:cs typeface="PingFang SC"/>
+              </a:defRPr>
+            </a:pPr>
+            <a:r>
+              <a:rPr sz="1425" b="0" i="0">
+                <a:solidFill>
+                  <a:srgbClr val="475569"/>
+                </a:solidFill>
+                <a:latin typeface="PingFang SC"/>
+                <a:ea typeface="PingFang SC"/>
+                <a:cs typeface="PingFang SC"/>
+              </a:rPr>
+              <a:t>7 clusters · 0 warnings · 0 errors</a:t>
             </a:r>
           </a:p>
         </p:txBody>
       </p:sp>
       <p:pic>
         <p:nvPicPr>
-          <p:cNvPr id="18" name=""/>
+          <p:cNvPr id="21" name=""/>
           <p:cNvPicPr>
             <a:picLocks xmlns:a="http://schemas.openxmlformats.org/drawingml/2006/main" noChangeAspect="1"/>
           </p:cNvPicPr>
           <p:nvPr/>
         </p:nvPicPr>
         <p:blipFill>
-          <a:blip xmlns:r="http://schemas.openxmlformats.org/officeDocument/2006/relationships" xmlns:a="http://schemas.openxmlformats.org/drawingml/2006/main" r:embed="Rb383447b315a4a49"/>
+          <a:blip xmlns:r="http://schemas.openxmlformats.org/officeDocument/2006/relationships" xmlns:a="http://schemas.openxmlformats.org/drawingml/2006/main" r:embed="Rab085b1d504e412c"/>
           <a:stretch xmlns:a="http://schemas.openxmlformats.org/drawingml/2006/main"/>
         </p:blipFill>
         <p:spPr>
@@ -10925,22 +11111,20 @@
             <a:ext cx="2741490" cy="2190750"/>
           </a:xfrm>
           <a:prstGeom xmlns:a="http://schemas.openxmlformats.org/drawingml/2006/main" prst="roundRect">
-            <a:avLst>
-              <a:gd name="adj" fmla="val 5217"/>
-            </a:avLst>
+            <a:avLst/>
           </a:prstGeom>
         </p:spPr>
       </p:pic>
       <p:pic>
         <p:nvPicPr>
-          <p:cNvPr id="19" name=""/>
+          <p:cNvPr id="22" name=""/>
           <p:cNvPicPr>
             <a:picLocks xmlns:a="http://schemas.openxmlformats.org/drawingml/2006/main" noChangeAspect="1"/>
           </p:cNvPicPr>
           <p:nvPr/>
         </p:nvPicPr>
         <p:blipFill>
-          <a:blip xmlns:r="http://schemas.openxmlformats.org/officeDocument/2006/relationships" xmlns:a="http://schemas.openxmlformats.org/drawingml/2006/main" r:embed="R14cd6f5f63cb47b9"/>
+          <a:blip xmlns:r="http://schemas.openxmlformats.org/officeDocument/2006/relationships" xmlns:a="http://schemas.openxmlformats.org/drawingml/2006/main" r:embed="R2e9461f257fe4bc7"/>
           <a:stretch xmlns:a="http://schemas.openxmlformats.org/drawingml/2006/main"/>
         </p:blipFill>
         <p:spPr>
@@ -10949,22 +11133,20 @@
             <a:ext cx="2952750" cy="1822284"/>
           </a:xfrm>
           <a:prstGeom xmlns:a="http://schemas.openxmlformats.org/drawingml/2006/main" prst="roundRect">
-            <a:avLst>
-              <a:gd name="adj" fmla="val 5217"/>
-            </a:avLst>
+            <a:avLst/>
           </a:prstGeom>
         </p:spPr>
       </p:pic>
       <p:pic>
         <p:nvPicPr>
-          <p:cNvPr id="20" name=""/>
+          <p:cNvPr id="23" name=""/>
           <p:cNvPicPr>
             <a:picLocks xmlns:a="http://schemas.openxmlformats.org/drawingml/2006/main" noChangeAspect="1"/>
           </p:cNvPicPr>
           <p:nvPr/>
         </p:nvPicPr>
         <p:blipFill>
-          <a:blip xmlns:r="http://schemas.openxmlformats.org/officeDocument/2006/relationships" xmlns:a="http://schemas.openxmlformats.org/drawingml/2006/main" r:embed="R7d1a0315ec49446a"/>
+          <a:blip xmlns:r="http://schemas.openxmlformats.org/officeDocument/2006/relationships" xmlns:a="http://schemas.openxmlformats.org/drawingml/2006/main" r:embed="R3e29ffbd25634e5c"/>
           <a:stretch xmlns:a="http://schemas.openxmlformats.org/drawingml/2006/main"/>
         </p:blipFill>
         <p:spPr>
@@ -10973,9 +11155,7 @@
             <a:ext cx="2506922" cy="1657350"/>
           </a:xfrm>
           <a:prstGeom xmlns:a="http://schemas.openxmlformats.org/drawingml/2006/main" prst="roundRect">
-            <a:avLst>
-              <a:gd name="adj" fmla="val 6897"/>
-            </a:avLst>
+            <a:avLst/>
           </a:prstGeom>
         </p:spPr>
       </p:pic>
@@ -11009,7 +11189,7 @@
         </p:spPr>
         <p:txBody>
           <a:bodyPr xmlns:a="http://schemas.openxmlformats.org/drawingml/2006/main" lIns="0" tIns="0" rIns="0" bIns="0" anchor="t">
-            <a:normAutofit fontScale="90633"/>
+            <a:normAutofit fontScale="80702"/>
           </a:bodyPr>
           <a:lstStyle xmlns:a="http://schemas.openxmlformats.org/drawingml/2006/main"/>
           <a:p xmlns:a="http://schemas.openxmlformats.org/drawingml/2006/main">
@@ -11036,7 +11216,7 @@
                 <a:ea typeface="PingFang SC"/>
                 <a:cs typeface="PingFang SC"/>
               </a:rPr>
-              <a:t>真实数据验证证明系统能处理真实 AnnData、真实坐标字段和更复杂的表达层状态。</a:t>
+              <a:t>这页不是声称发现新机制，而是验证系统能处理真实 AnnData、真实空间坐标和真实表达层状态。</a:t>
             </a:r>
           </a:p>
         </p:txBody>
@@ -11230,7 +11410,7 @@
           <p:cNvPr id="1" name="">
             <a:extLst xmlns:a="http://schemas.openxmlformats.org/drawingml/2006/main">
               <a:ext uri="{FF2B5EF4-FFF2-40B4-BE49-F238E27FC236}">
-                <a16:creationId xmlns:a16="http://schemas.microsoft.com/office/drawing/2014/main" id="{F08CDAF8-8E38-4D7F-96E6-F673D4259727}"/>
+                <a16:creationId xmlns:a16="http://schemas.microsoft.com/office/drawing/2014/main" id="{EABC0170-F86A-4D71-8C4E-9DDEB616EB8C}"/>
               </a:ext>
             </a:extLst>
           </p:cNvPr>
@@ -11282,7 +11462,7 @@
                 <a:ea typeface="PingFang SC"/>
                 <a:cs typeface="PingFang SC"/>
               </a:rPr>
-              <a:t>RESEARCH USE CASES</a:t>
+              <a:t>READING GUIDE</a:t>
             </a:r>
           </a:p>
         </p:txBody>
@@ -11292,7 +11472,7 @@
           <p:cNvPr id="2" name="">
             <a:extLst xmlns:a="http://schemas.openxmlformats.org/drawingml/2006/main">
               <a:ext uri="{FF2B5EF4-FFF2-40B4-BE49-F238E27FC236}">
-                <a16:creationId xmlns:a16="http://schemas.microsoft.com/office/drawing/2014/main" id="{BF8685D2-BFB7-4D4C-B334-1787B177A528}"/>
+                <a16:creationId xmlns:a16="http://schemas.microsoft.com/office/drawing/2014/main" id="{196A3E13-3DA9-4CDA-A5E9-E586D928DABE}"/>
               </a:ext>
             </a:extLst>
           </p:cNvPr>
@@ -11344,7 +11524,7 @@
                 <a:ea typeface="PingFang SC"/>
                 <a:cs typeface="PingFang SC"/>
               </a:rPr>
-              <a:t>面向真实科研场景的应用</a:t>
+              <a:t>如何读真实数据图</a:t>
             </a:r>
           </a:p>
         </p:txBody>
@@ -11354,27 +11534,27 @@
           <p:cNvPr id="3" name="">
             <a:extLst xmlns:a="http://schemas.openxmlformats.org/drawingml/2006/main">
               <a:ext uri="{FF2B5EF4-FFF2-40B4-BE49-F238E27FC236}">
-                <a16:creationId xmlns:a16="http://schemas.microsoft.com/office/drawing/2014/main" id="{816CF460-0C5D-41C2-B427-5231798E33EE}"/>
-              </a:ext>
-            </a:extLst>
-          </p:cNvPr>
-          <p:cNvSpPr>
-            <a:spLocks xmlns:a="http://schemas.openxmlformats.org/drawingml/2006/main" noGrp="1"/>
-          </p:cNvSpPr>
-          <p:nvPr/>
-        </p:nvSpPr>
-        <p:spPr>
-          <a:xfrm xmlns:a="http://schemas.openxmlformats.org/drawingml/2006/main">
-            <a:off x="819150" y="1581150"/>
-            <a:ext cx="2476500" cy="1390650"/>
+                <a16:creationId xmlns:a16="http://schemas.microsoft.com/office/drawing/2014/main" id="{D83787D5-CB9A-433B-A113-80345E5D04BA}"/>
+              </a:ext>
+            </a:extLst>
+          </p:cNvPr>
+          <p:cNvSpPr>
+            <a:spLocks xmlns:a="http://schemas.openxmlformats.org/drawingml/2006/main" noGrp="1"/>
+          </p:cNvSpPr>
+          <p:nvPr/>
+        </p:nvSpPr>
+        <p:spPr>
+          <a:xfrm xmlns:a="http://schemas.openxmlformats.org/drawingml/2006/main">
+            <a:off x="704850" y="1524000"/>
+            <a:ext cx="3619500" cy="2000250"/>
           </a:xfrm>
           <a:prstGeom xmlns:a="http://schemas.openxmlformats.org/drawingml/2006/main" prst="roundRect">
             <a:avLst>
-              <a:gd name="adj" fmla="val 8219"/>
+              <a:gd name="adj" fmla="val 5714"/>
             </a:avLst>
           </a:prstGeom>
           <a:solidFill xmlns:a="http://schemas.openxmlformats.org/drawingml/2006/main">
-            <a:srgbClr val="E9F5F2"/>
+            <a:srgbClr val="F6FAF8"/>
           </a:solidFill>
           <a:ln xmlns:a="http://schemas.openxmlformats.org/drawingml/2006/main" w="9525">
             <a:solidFill>
@@ -11395,19 +11575,19 @@
           <p:cNvPr id="4" name="">
             <a:extLst xmlns:a="http://schemas.openxmlformats.org/drawingml/2006/main">
               <a:ext uri="{FF2B5EF4-FFF2-40B4-BE49-F238E27FC236}">
-                <a16:creationId xmlns:a16="http://schemas.microsoft.com/office/drawing/2014/main" id="{2C6DB7D3-B959-4592-B562-E53DE718C99E}"/>
-              </a:ext>
-            </a:extLst>
-          </p:cNvPr>
-          <p:cNvSpPr>
-            <a:spLocks xmlns:a="http://schemas.openxmlformats.org/drawingml/2006/main" noGrp="1"/>
-          </p:cNvSpPr>
-          <p:nvPr/>
-        </p:nvSpPr>
-        <p:spPr>
-          <a:xfrm xmlns:a="http://schemas.openxmlformats.org/drawingml/2006/main">
-            <a:off x="1009650" y="1752600"/>
-            <a:ext cx="2095500" cy="285750"/>
+                <a16:creationId xmlns:a16="http://schemas.microsoft.com/office/drawing/2014/main" id="{970BCABE-0986-4E9F-9AE1-F2B476BD9906}"/>
+              </a:ext>
+            </a:extLst>
+          </p:cNvPr>
+          <p:cNvSpPr>
+            <a:spLocks xmlns:a="http://schemas.openxmlformats.org/drawingml/2006/main" noGrp="1"/>
+          </p:cNvSpPr>
+          <p:nvPr/>
+        </p:nvSpPr>
+        <p:spPr>
+          <a:xfrm xmlns:a="http://schemas.openxmlformats.org/drawingml/2006/main">
+            <a:off x="895350" y="1695450"/>
+            <a:ext cx="3238500" cy="285750"/>
           </a:xfrm>
           <a:prstGeom xmlns:a="http://schemas.openxmlformats.org/drawingml/2006/main" prst="rect">
             <a:avLst/>
@@ -11447,6 +11627,688 @@
                 <a:ea typeface="PingFang SC"/>
                 <a:cs typeface="PingFang SC"/>
               </a:rPr>
+              <a:t>Leiden 是什么？</a:t>
+            </a:r>
+          </a:p>
+        </p:txBody>
+      </p:sp>
+      <p:sp>
+        <p:nvSpPr>
+          <p:cNvPr id="5" name="">
+            <a:extLst xmlns:a="http://schemas.openxmlformats.org/drawingml/2006/main">
+              <a:ext uri="{FF2B5EF4-FFF2-40B4-BE49-F238E27FC236}">
+                <a16:creationId xmlns:a16="http://schemas.microsoft.com/office/drawing/2014/main" id="{E0D30BF8-71B3-42E8-A443-55FD366C2BAE}"/>
+              </a:ext>
+            </a:extLst>
+          </p:cNvPr>
+          <p:cNvSpPr>
+            <a:spLocks xmlns:a="http://schemas.openxmlformats.org/drawingml/2006/main" noGrp="1"/>
+          </p:cNvSpPr>
+          <p:nvPr/>
+        </p:nvSpPr>
+        <p:spPr>
+          <a:xfrm xmlns:a="http://schemas.openxmlformats.org/drawingml/2006/main">
+            <a:off x="895350" y="2076450"/>
+            <a:ext cx="3238500" cy="1333500"/>
+          </a:xfrm>
+          <a:prstGeom xmlns:a="http://schemas.openxmlformats.org/drawingml/2006/main" prst="rect">
+            <a:avLst/>
+          </a:prstGeom>
+          <a:noFill xmlns:a="http://schemas.openxmlformats.org/drawingml/2006/main"/>
+          <a:ln xmlns:a="http://schemas.openxmlformats.org/drawingml/2006/main" w="0">
+            <a:noFill/>
+            <a:prstDash val="solid"/>
+          </a:ln>
+        </p:spPr>
+        <p:txBody>
+          <a:bodyPr xmlns:a="http://schemas.openxmlformats.org/drawingml/2006/main" lIns="0" tIns="0" rIns="0" bIns="0" anchor="t">
+            <a:normAutofit fontScale="100000"/>
+          </a:bodyPr>
+          <a:lstStyle xmlns:a="http://schemas.openxmlformats.org/drawingml/2006/main"/>
+          <a:p xmlns:a="http://schemas.openxmlformats.org/drawingml/2006/main">
+            <a:pPr algn="l">
+              <a:lnSpc>
+                <a:spcPct val="108000"/>
+              </a:lnSpc>
+              <a:buNone/>
+              <a:defRPr sz="1425" b="0" i="0">
+                <a:solidFill>
+                  <a:srgbClr val="475569"/>
+                </a:solidFill>
+                <a:latin typeface="PingFang SC"/>
+                <a:ea typeface="PingFang SC"/>
+                <a:cs typeface="PingFang SC"/>
+              </a:defRPr>
+            </a:pPr>
+            <a:r>
+              <a:rPr sz="1425" b="0" i="0">
+                <a:solidFill>
+                  <a:srgbClr val="475569"/>
+                </a:solidFill>
+                <a:latin typeface="PingFang SC"/>
+                <a:ea typeface="PingFang SC"/>
+                <a:cs typeface="PingFang SC"/>
+              </a:rPr>
+              <a:t>Leiden clustering：把表达谱相似的 spots 分到同一组</a:t>
+            </a:r>
+          </a:p>
+          <a:p xmlns:a="http://schemas.openxmlformats.org/drawingml/2006/main">
+            <a:pPr algn="l">
+              <a:lnSpc>
+                <a:spcPct val="108000"/>
+              </a:lnSpc>
+              <a:buNone/>
+              <a:defRPr sz="1425" b="0" i="0">
+                <a:solidFill>
+                  <a:srgbClr val="475569"/>
+                </a:solidFill>
+                <a:latin typeface="PingFang SC"/>
+                <a:ea typeface="PingFang SC"/>
+                <a:cs typeface="PingFang SC"/>
+              </a:defRPr>
+            </a:pPr>
+            <a:r>
+              <a:rPr sz="1425" b="0" i="0">
+                <a:solidFill>
+                  <a:srgbClr val="475569"/>
+                </a:solidFill>
+                <a:latin typeface="PingFang SC"/>
+                <a:ea typeface="PingFang SC"/>
+                <a:cs typeface="PingFang SC"/>
+              </a:rPr>
+              <a:t>颜色只是 cluster ID，不等于细胞类型</a:t>
+            </a:r>
+          </a:p>
+          <a:p xmlns:a="http://schemas.openxmlformats.org/drawingml/2006/main">
+            <a:pPr algn="l">
+              <a:lnSpc>
+                <a:spcPct val="108000"/>
+              </a:lnSpc>
+              <a:buNone/>
+              <a:defRPr sz="1425" b="0" i="0">
+                <a:solidFill>
+                  <a:srgbClr val="475569"/>
+                </a:solidFill>
+                <a:latin typeface="PingFang SC"/>
+                <a:ea typeface="PingFang SC"/>
+                <a:cs typeface="PingFang SC"/>
+              </a:defRPr>
+            </a:pPr>
+            <a:r>
+              <a:rPr sz="1425" b="0" i="0">
+                <a:solidFill>
+                  <a:srgbClr val="475569"/>
+                </a:solidFill>
+                <a:latin typeface="PingFang SC"/>
+                <a:ea typeface="PingFang SC"/>
+                <a:cs typeface="PingFang SC"/>
+              </a:rPr>
+              <a:t>UMAP 分得清：表达状态可分</a:t>
+            </a:r>
+          </a:p>
+          <a:p xmlns:a="http://schemas.openxmlformats.org/drawingml/2006/main">
+            <a:pPr algn="l">
+              <a:lnSpc>
+                <a:spcPct val="108000"/>
+              </a:lnSpc>
+              <a:buNone/>
+              <a:defRPr sz="1425" b="0" i="0">
+                <a:solidFill>
+                  <a:srgbClr val="475569"/>
+                </a:solidFill>
+                <a:latin typeface="PingFang SC"/>
+                <a:ea typeface="PingFang SC"/>
+                <a:cs typeface="PingFang SC"/>
+              </a:defRPr>
+            </a:pPr>
+            <a:r>
+              <a:rPr sz="1425" b="0" i="0">
+                <a:solidFill>
+                  <a:srgbClr val="475569"/>
+                </a:solidFill>
+                <a:latin typeface="PingFang SC"/>
+                <a:ea typeface="PingFang SC"/>
+                <a:cs typeface="PingFang SC"/>
+              </a:rPr>
+              <a:t>Spatial 混在一起：真实组织结构更复杂</a:t>
+            </a:r>
+          </a:p>
+        </p:txBody>
+      </p:sp>
+      <p:pic>
+        <p:nvPicPr>
+          <p:cNvPr id="21" name=""/>
+          <p:cNvPicPr>
+            <a:picLocks xmlns:a="http://schemas.openxmlformats.org/drawingml/2006/main" noChangeAspect="1"/>
+          </p:cNvPicPr>
+          <p:nvPr/>
+        </p:nvPicPr>
+        <p:blipFill>
+          <a:blip xmlns:r="http://schemas.openxmlformats.org/officeDocument/2006/relationships" xmlns:a="http://schemas.openxmlformats.org/drawingml/2006/main" r:embed="Rd0be40847c164fb4"/>
+          <a:stretch xmlns:a="http://schemas.openxmlformats.org/drawingml/2006/main"/>
+        </p:blipFill>
+        <p:spPr>
+          <a:xfrm xmlns:a="http://schemas.openxmlformats.org/drawingml/2006/main">
+            <a:off x="4762500" y="1428750"/>
+            <a:ext cx="2714625" cy="2047875"/>
+          </a:xfrm>
+          <a:prstGeom xmlns:a="http://schemas.openxmlformats.org/drawingml/2006/main" prst="roundRect">
+            <a:avLst/>
+          </a:prstGeom>
+        </p:spPr>
+      </p:pic>
+      <p:pic>
+        <p:nvPicPr>
+          <p:cNvPr id="22" name=""/>
+          <p:cNvPicPr>
+            <a:picLocks xmlns:a="http://schemas.openxmlformats.org/drawingml/2006/main" noChangeAspect="1"/>
+          </p:cNvPicPr>
+          <p:nvPr/>
+        </p:nvPicPr>
+        <p:blipFill>
+          <a:blip xmlns:r="http://schemas.openxmlformats.org/officeDocument/2006/relationships" xmlns:a="http://schemas.openxmlformats.org/drawingml/2006/main" r:embed="Rbf6d077675be4cb5"/>
+          <a:stretch xmlns:a="http://schemas.openxmlformats.org/drawingml/2006/main"/>
+        </p:blipFill>
+        <p:spPr>
+          <a:xfrm xmlns:a="http://schemas.openxmlformats.org/drawingml/2006/main">
+            <a:off x="7829550" y="1381125"/>
+            <a:ext cx="3238500" cy="2143125"/>
+          </a:xfrm>
+          <a:prstGeom xmlns:a="http://schemas.openxmlformats.org/drawingml/2006/main" prst="roundRect">
+            <a:avLst/>
+          </a:prstGeom>
+        </p:spPr>
+      </p:pic>
+      <p:pic>
+        <p:nvPicPr>
+          <p:cNvPr id="23" name=""/>
+          <p:cNvPicPr>
+            <a:picLocks xmlns:a="http://schemas.openxmlformats.org/drawingml/2006/main" noChangeAspect="1"/>
+          </p:cNvPicPr>
+          <p:nvPr/>
+        </p:nvPicPr>
+        <p:blipFill>
+          <a:blip xmlns:r="http://schemas.openxmlformats.org/officeDocument/2006/relationships" xmlns:a="http://schemas.openxmlformats.org/drawingml/2006/main" r:embed="R0a8592c124a849b3"/>
+          <a:stretch xmlns:a="http://schemas.openxmlformats.org/drawingml/2006/main"/>
+        </p:blipFill>
+        <p:spPr>
+          <a:xfrm xmlns:a="http://schemas.openxmlformats.org/drawingml/2006/main">
+            <a:off x="5715000" y="3905250"/>
+            <a:ext cx="5095875" cy="1762125"/>
+          </a:xfrm>
+          <a:prstGeom xmlns:a="http://schemas.openxmlformats.org/drawingml/2006/main" prst="roundRect">
+            <a:avLst/>
+          </a:prstGeom>
+        </p:spPr>
+      </p:pic>
+      <p:sp>
+        <p:nvSpPr>
+          <p:cNvPr id="9" name="">
+            <a:extLst xmlns:a="http://schemas.openxmlformats.org/drawingml/2006/main">
+              <a:ext uri="{FF2B5EF4-FFF2-40B4-BE49-F238E27FC236}">
+                <a16:creationId xmlns:a16="http://schemas.microsoft.com/office/drawing/2014/main" id="{6B80F217-C291-455D-945A-FC7C668C4649}"/>
+              </a:ext>
+            </a:extLst>
+          </p:cNvPr>
+          <p:cNvSpPr>
+            <a:spLocks xmlns:a="http://schemas.openxmlformats.org/drawingml/2006/main" noGrp="1"/>
+          </p:cNvSpPr>
+          <p:nvPr/>
+        </p:nvSpPr>
+        <p:spPr>
+          <a:xfrm xmlns:a="http://schemas.openxmlformats.org/drawingml/2006/main">
+            <a:off x="914400" y="4953000"/>
+            <a:ext cx="3238500" cy="704850"/>
+          </a:xfrm>
+          <a:prstGeom xmlns:a="http://schemas.openxmlformats.org/drawingml/2006/main" prst="rect">
+            <a:avLst/>
+          </a:prstGeom>
+          <a:noFill xmlns:a="http://schemas.openxmlformats.org/drawingml/2006/main"/>
+          <a:ln xmlns:a="http://schemas.openxmlformats.org/drawingml/2006/main" w="0">
+            <a:noFill/>
+            <a:prstDash val="solid"/>
+          </a:ln>
+        </p:spPr>
+        <p:txBody>
+          <a:bodyPr xmlns:a="http://schemas.openxmlformats.org/drawingml/2006/main" lIns="0" tIns="0" rIns="0" bIns="0" anchor="t">
+            <a:normAutofit fontScale="78440"/>
+          </a:bodyPr>
+          <a:lstStyle xmlns:a="http://schemas.openxmlformats.org/drawingml/2006/main"/>
+          <a:p xmlns:a="http://schemas.openxmlformats.org/drawingml/2006/main">
+            <a:pPr algn="l">
+              <a:lnSpc>
+                <a:spcPct val="108000"/>
+              </a:lnSpc>
+              <a:buNone/>
+              <a:defRPr sz="1575" b="1" i="0">
+                <a:solidFill>
+                  <a:srgbClr val="17212B"/>
+                </a:solidFill>
+                <a:latin typeface="PingFang SC"/>
+                <a:ea typeface="PingFang SC"/>
+                <a:cs typeface="PingFang SC"/>
+              </a:defRPr>
+            </a:pPr>
+            <a:r>
+              <a:rPr sz="1575" b="1" i="0">
+                <a:solidFill>
+                  <a:srgbClr val="17212B"/>
+                </a:solidFill>
+                <a:latin typeface="PingFang SC"/>
+                <a:ea typeface="PingFang SC"/>
+                <a:cs typeface="PingFang SC"/>
+              </a:rPr>
+              <a:t>读图顺序：先看 UMAP 聚类是否分开，再回到 Spatial 看组织位置，最后用 T、Mesp1 等基因图寻找可解释的发育区域。</a:t>
+            </a:r>
+          </a:p>
+        </p:txBody>
+      </p:sp>
+      <p:sp>
+        <p:nvSpPr>
+          <p:cNvPr id="10" name="">
+            <a:extLst xmlns:a="http://schemas.openxmlformats.org/drawingml/2006/main">
+              <a:ext uri="{FF2B5EF4-FFF2-40B4-BE49-F238E27FC236}">
+                <a16:creationId xmlns:a16="http://schemas.microsoft.com/office/drawing/2014/main" id="{04D7FE8A-919F-4F67-8E56-D49023B944A0}"/>
+              </a:ext>
+            </a:extLst>
+          </p:cNvPr>
+          <p:cNvSpPr>
+            <a:spLocks xmlns:a="http://schemas.openxmlformats.org/drawingml/2006/main" noGrp="1"/>
+          </p:cNvSpPr>
+          <p:nvPr/>
+        </p:nvSpPr>
+        <p:spPr>
+          <a:xfrm xmlns:a="http://schemas.openxmlformats.org/drawingml/2006/main">
+            <a:off x="609600" y="6438900"/>
+            <a:ext cx="10972800" cy="0"/>
+          </a:xfrm>
+          <a:prstGeom xmlns:a="http://schemas.openxmlformats.org/drawingml/2006/main" prst="line">
+            <a:avLst/>
+          </a:prstGeom>
+          <a:noFill xmlns:a="http://schemas.openxmlformats.org/drawingml/2006/main"/>
+          <a:ln xmlns:a="http://schemas.openxmlformats.org/drawingml/2006/main" w="9525">
+            <a:solidFill>
+              <a:srgbClr val="D7E4E0"/>
+            </a:solidFill>
+            <a:prstDash val="solid"/>
+          </a:ln>
+        </p:spPr>
+      </p:sp>
+      <p:sp>
+        <p:nvSpPr>
+          <p:cNvPr id="11" name="">
+            <a:extLst xmlns:a="http://schemas.openxmlformats.org/drawingml/2006/main">
+              <a:ext uri="{FF2B5EF4-FFF2-40B4-BE49-F238E27FC236}">
+                <a16:creationId xmlns:a16="http://schemas.microsoft.com/office/drawing/2014/main" id="{6ABE88E0-098F-4F3F-8DD4-1492AFC292EE}"/>
+              </a:ext>
+            </a:extLst>
+          </p:cNvPr>
+          <p:cNvSpPr>
+            <a:spLocks xmlns:a="http://schemas.openxmlformats.org/drawingml/2006/main" noGrp="1"/>
+          </p:cNvSpPr>
+          <p:nvPr/>
+        </p:nvSpPr>
+        <p:spPr>
+          <a:xfrm xmlns:a="http://schemas.openxmlformats.org/drawingml/2006/main">
+            <a:off x="609600" y="6515100"/>
+            <a:ext cx="8572500" cy="190500"/>
+          </a:xfrm>
+          <a:prstGeom xmlns:a="http://schemas.openxmlformats.org/drawingml/2006/main" prst="rect">
+            <a:avLst/>
+          </a:prstGeom>
+          <a:noFill xmlns:a="http://schemas.openxmlformats.org/drawingml/2006/main"/>
+          <a:ln xmlns:a="http://schemas.openxmlformats.org/drawingml/2006/main" w="0">
+            <a:noFill/>
+            <a:prstDash val="solid"/>
+          </a:ln>
+        </p:spPr>
+        <p:txBody>
+          <a:bodyPr xmlns:a="http://schemas.openxmlformats.org/drawingml/2006/main" lIns="0" tIns="0" rIns="0" bIns="0" anchor="t">
+            <a:normAutofit fontScale="100000"/>
+          </a:bodyPr>
+          <a:lstStyle xmlns:a="http://schemas.openxmlformats.org/drawingml/2006/main"/>
+          <a:p xmlns:a="http://schemas.openxmlformats.org/drawingml/2006/main">
+            <a:pPr algn="l">
+              <a:lnSpc>
+                <a:spcPct val="108000"/>
+              </a:lnSpc>
+              <a:buNone/>
+              <a:defRPr sz="863" b="0" i="0">
+                <a:solidFill>
+                  <a:srgbClr val="475569"/>
+                </a:solidFill>
+                <a:latin typeface="PingFang SC"/>
+                <a:ea typeface="PingFang SC"/>
+                <a:cs typeface="PingFang SC"/>
+              </a:defRPr>
+            </a:pPr>
+            <a:r>
+              <a:rPr sz="863" b="0" i="0">
+                <a:solidFill>
+                  <a:srgbClr val="475569"/>
+                </a:solidFill>
+                <a:latin typeface="PingFang SC"/>
+                <a:ea typeface="PingFang SC"/>
+                <a:cs typeface="PingFang SC"/>
+              </a:rPr>
+              <a:t>Interpretation guide for the real GSE278603 quick run.</a:t>
+            </a:r>
+          </a:p>
+        </p:txBody>
+      </p:sp>
+      <p:sp>
+        <p:nvSpPr>
+          <p:cNvPr id="12" name="">
+            <a:extLst xmlns:a="http://schemas.openxmlformats.org/drawingml/2006/main">
+              <a:ext uri="{FF2B5EF4-FFF2-40B4-BE49-F238E27FC236}">
+                <a16:creationId xmlns:a16="http://schemas.microsoft.com/office/drawing/2014/main" id="{1EE57992-2202-49DE-94A1-9F4BD33E9203}"/>
+              </a:ext>
+            </a:extLst>
+          </p:cNvPr>
+          <p:cNvSpPr>
+            <a:spLocks xmlns:a="http://schemas.openxmlformats.org/drawingml/2006/main" noGrp="1"/>
+          </p:cNvSpPr>
+          <p:nvPr/>
+        </p:nvSpPr>
+        <p:spPr>
+          <a:xfrm xmlns:a="http://schemas.openxmlformats.org/drawingml/2006/main">
+            <a:off x="11125200" y="6515100"/>
+            <a:ext cx="457200" cy="190500"/>
+          </a:xfrm>
+          <a:prstGeom xmlns:a="http://schemas.openxmlformats.org/drawingml/2006/main" prst="rect">
+            <a:avLst/>
+          </a:prstGeom>
+          <a:noFill xmlns:a="http://schemas.openxmlformats.org/drawingml/2006/main"/>
+          <a:ln xmlns:a="http://schemas.openxmlformats.org/drawingml/2006/main" w="0">
+            <a:noFill/>
+            <a:prstDash val="solid"/>
+          </a:ln>
+        </p:spPr>
+        <p:txBody>
+          <a:bodyPr xmlns:a="http://schemas.openxmlformats.org/drawingml/2006/main" lIns="0" tIns="0" rIns="0" bIns="0" anchor="t">
+            <a:normAutofit fontScale="100000"/>
+          </a:bodyPr>
+          <a:lstStyle xmlns:a="http://schemas.openxmlformats.org/drawingml/2006/main"/>
+          <a:p xmlns:a="http://schemas.openxmlformats.org/drawingml/2006/main">
+            <a:pPr algn="r">
+              <a:lnSpc>
+                <a:spcPct val="108000"/>
+              </a:lnSpc>
+              <a:buNone/>
+              <a:defRPr sz="1013" b="1" i="0">
+                <a:solidFill>
+                  <a:srgbClr val="0F766E"/>
+                </a:solidFill>
+                <a:latin typeface="PingFang SC"/>
+                <a:ea typeface="PingFang SC"/>
+                <a:cs typeface="PingFang SC"/>
+              </a:defRPr>
+            </a:pPr>
+            <a:r>
+              <a:rPr sz="1013" b="1" i="0">
+                <a:solidFill>
+                  <a:srgbClr val="0F766E"/>
+                </a:solidFill>
+                <a:latin typeface="PingFang SC"/>
+                <a:ea typeface="PingFang SC"/>
+                <a:cs typeface="PingFang SC"/>
+              </a:rPr>
+              <a:t>15</a:t>
+            </a:r>
+          </a:p>
+        </p:txBody>
+      </p:sp>
+    </p:spTree>
+    <p:extLst>
+      <p:ext uri="{BB962C8B-B14F-4D97-AF65-F5344CB8AC3E}">
+        <p14:creationId xmlns:p14="http://schemas.microsoft.com/office/powerpoint/2010/main" val="1490332863"/>
+      </p:ext>
+    </p:extLst>
+  </p:cSld>
+</p:sld>
+</file>
+
+<file path=ppt/slides/slide16.xml><?xml version="1.0" encoding="utf-8"?>
+<p:sld xmlns:p="http://schemas.openxmlformats.org/presentationml/2006/main">
+  <p:cSld>
+    <p:bg>
+      <p:bgPr>
+        <a:solidFill xmlns:a="http://schemas.openxmlformats.org/drawingml/2006/main">
+          <a:srgbClr val="FFFFFF"/>
+        </a:solidFill>
+      </p:bgPr>
+    </p:bg>
+    <p:spTree>
+      <p:nvGrpSpPr>
+        <p:cNvPr id="1" name=""/>
+        <p:cNvGrpSpPr/>
+        <p:nvPr/>
+      </p:nvGrpSpPr>
+      <p:grpSpPr>
+        <a:xfrm xmlns:a="http://schemas.openxmlformats.org/drawingml/2006/main"/>
+      </p:grpSpPr>
+      <p:sp>
+        <p:nvSpPr>
+          <p:cNvPr id="1" name="">
+            <a:extLst xmlns:a="http://schemas.openxmlformats.org/drawingml/2006/main">
+              <a:ext uri="{FF2B5EF4-FFF2-40B4-BE49-F238E27FC236}">
+                <a16:creationId xmlns:a16="http://schemas.microsoft.com/office/drawing/2014/main" id="{F08CDAF8-8E38-4D7F-96E6-F673D4259727}"/>
+              </a:ext>
+            </a:extLst>
+          </p:cNvPr>
+          <p:cNvSpPr>
+            <a:spLocks xmlns:a="http://schemas.openxmlformats.org/drawingml/2006/main" noGrp="1"/>
+          </p:cNvSpPr>
+          <p:nvPr/>
+        </p:nvSpPr>
+        <p:spPr>
+          <a:xfrm xmlns:a="http://schemas.openxmlformats.org/drawingml/2006/main">
+            <a:off x="609600" y="304800"/>
+            <a:ext cx="4953000" cy="209550"/>
+          </a:xfrm>
+          <a:prstGeom xmlns:a="http://schemas.openxmlformats.org/drawingml/2006/main" prst="rect">
+            <a:avLst/>
+          </a:prstGeom>
+          <a:noFill xmlns:a="http://schemas.openxmlformats.org/drawingml/2006/main"/>
+          <a:ln xmlns:a="http://schemas.openxmlformats.org/drawingml/2006/main" w="0">
+            <a:noFill/>
+            <a:prstDash val="solid"/>
+          </a:ln>
+        </p:spPr>
+        <p:txBody>
+          <a:bodyPr xmlns:a="http://schemas.openxmlformats.org/drawingml/2006/main" lIns="0" tIns="0" rIns="0" bIns="0" anchor="t">
+            <a:normAutofit fontScale="100000"/>
+          </a:bodyPr>
+          <a:lstStyle xmlns:a="http://schemas.openxmlformats.org/drawingml/2006/main"/>
+          <a:p xmlns:a="http://schemas.openxmlformats.org/drawingml/2006/main">
+            <a:pPr algn="l">
+              <a:lnSpc>
+                <a:spcPct val="108000"/>
+              </a:lnSpc>
+              <a:buNone/>
+              <a:defRPr sz="1013" b="1" i="0">
+                <a:solidFill>
+                  <a:srgbClr val="0F766E"/>
+                </a:solidFill>
+                <a:latin typeface="PingFang SC"/>
+                <a:ea typeface="PingFang SC"/>
+                <a:cs typeface="PingFang SC"/>
+              </a:defRPr>
+            </a:pPr>
+            <a:r>
+              <a:rPr sz="1013" b="1" i="0">
+                <a:solidFill>
+                  <a:srgbClr val="0F766E"/>
+                </a:solidFill>
+                <a:latin typeface="PingFang SC"/>
+                <a:ea typeface="PingFang SC"/>
+                <a:cs typeface="PingFang SC"/>
+              </a:rPr>
+              <a:t>RESEARCH USE CASES</a:t>
+            </a:r>
+          </a:p>
+        </p:txBody>
+      </p:sp>
+      <p:sp>
+        <p:nvSpPr>
+          <p:cNvPr id="2" name="">
+            <a:extLst xmlns:a="http://schemas.openxmlformats.org/drawingml/2006/main">
+              <a:ext uri="{FF2B5EF4-FFF2-40B4-BE49-F238E27FC236}">
+                <a16:creationId xmlns:a16="http://schemas.microsoft.com/office/drawing/2014/main" id="{BF8685D2-BFB7-4D4C-B334-1787B177A528}"/>
+              </a:ext>
+            </a:extLst>
+          </p:cNvPr>
+          <p:cNvSpPr>
+            <a:spLocks xmlns:a="http://schemas.openxmlformats.org/drawingml/2006/main" noGrp="1"/>
+          </p:cNvSpPr>
+          <p:nvPr/>
+        </p:nvSpPr>
+        <p:spPr>
+          <a:xfrm xmlns:a="http://schemas.openxmlformats.org/drawingml/2006/main">
+            <a:off x="609600" y="552450"/>
+            <a:ext cx="9334500" cy="552450"/>
+          </a:xfrm>
+          <a:prstGeom xmlns:a="http://schemas.openxmlformats.org/drawingml/2006/main" prst="rect">
+            <a:avLst/>
+          </a:prstGeom>
+          <a:noFill xmlns:a="http://schemas.openxmlformats.org/drawingml/2006/main"/>
+          <a:ln xmlns:a="http://schemas.openxmlformats.org/drawingml/2006/main" w="0">
+            <a:noFill/>
+            <a:prstDash val="solid"/>
+          </a:ln>
+        </p:spPr>
+        <p:txBody>
+          <a:bodyPr xmlns:a="http://schemas.openxmlformats.org/drawingml/2006/main" lIns="0" tIns="0" rIns="0" bIns="0" anchor="t">
+            <a:normAutofit fontScale="100000"/>
+          </a:bodyPr>
+          <a:lstStyle xmlns:a="http://schemas.openxmlformats.org/drawingml/2006/main"/>
+          <a:p xmlns:a="http://schemas.openxmlformats.org/drawingml/2006/main">
+            <a:pPr algn="l">
+              <a:lnSpc>
+                <a:spcPct val="108000"/>
+              </a:lnSpc>
+              <a:buNone/>
+              <a:defRPr sz="3000" b="1" i="0">
+                <a:solidFill>
+                  <a:srgbClr val="17212B"/>
+                </a:solidFill>
+                <a:latin typeface="PingFang SC"/>
+                <a:ea typeface="PingFang SC"/>
+                <a:cs typeface="PingFang SC"/>
+              </a:defRPr>
+            </a:pPr>
+            <a:r>
+              <a:rPr sz="3000" b="1" i="0">
+                <a:solidFill>
+                  <a:srgbClr val="17212B"/>
+                </a:solidFill>
+                <a:latin typeface="PingFang SC"/>
+                <a:ea typeface="PingFang SC"/>
+                <a:cs typeface="PingFang SC"/>
+              </a:rPr>
+              <a:t>面向真实科研场景的应用</a:t>
+            </a:r>
+          </a:p>
+        </p:txBody>
+      </p:sp>
+      <p:sp>
+        <p:nvSpPr>
+          <p:cNvPr id="3" name="">
+            <a:extLst xmlns:a="http://schemas.openxmlformats.org/drawingml/2006/main">
+              <a:ext uri="{FF2B5EF4-FFF2-40B4-BE49-F238E27FC236}">
+                <a16:creationId xmlns:a16="http://schemas.microsoft.com/office/drawing/2014/main" id="{816CF460-0C5D-41C2-B427-5231798E33EE}"/>
+              </a:ext>
+            </a:extLst>
+          </p:cNvPr>
+          <p:cNvSpPr>
+            <a:spLocks xmlns:a="http://schemas.openxmlformats.org/drawingml/2006/main" noGrp="1"/>
+          </p:cNvSpPr>
+          <p:nvPr/>
+        </p:nvSpPr>
+        <p:spPr>
+          <a:xfrm xmlns:a="http://schemas.openxmlformats.org/drawingml/2006/main">
+            <a:off x="819150" y="1581150"/>
+            <a:ext cx="2476500" cy="1390650"/>
+          </a:xfrm>
+          <a:prstGeom xmlns:a="http://schemas.openxmlformats.org/drawingml/2006/main" prst="roundRect">
+            <a:avLst>
+              <a:gd name="adj" fmla="val 8219"/>
+            </a:avLst>
+          </a:prstGeom>
+          <a:solidFill xmlns:a="http://schemas.openxmlformats.org/drawingml/2006/main">
+            <a:srgbClr val="E9F5F2"/>
+          </a:solidFill>
+          <a:ln xmlns:a="http://schemas.openxmlformats.org/drawingml/2006/main" w="9525">
+            <a:solidFill>
+              <a:srgbClr val="D7E4E0"/>
+            </a:solidFill>
+            <a:prstDash val="solid"/>
+          </a:ln>
+        </p:spPr>
+        <p:style>
+          <a:lnRef xmlns:a="http://schemas.openxmlformats.org/drawingml/2006/main" idx="0"/>
+          <a:fillRef xmlns:a="http://schemas.openxmlformats.org/drawingml/2006/main" idx="0"/>
+          <a:effectRef xmlns:a="http://schemas.openxmlformats.org/drawingml/2006/main" idx="4"/>
+          <a:fontRef xmlns:a="http://schemas.openxmlformats.org/drawingml/2006/main" idx="major"/>
+        </p:style>
+      </p:sp>
+      <p:sp>
+        <p:nvSpPr>
+          <p:cNvPr id="4" name="">
+            <a:extLst xmlns:a="http://schemas.openxmlformats.org/drawingml/2006/main">
+              <a:ext uri="{FF2B5EF4-FFF2-40B4-BE49-F238E27FC236}">
+                <a16:creationId xmlns:a16="http://schemas.microsoft.com/office/drawing/2014/main" id="{2C6DB7D3-B959-4592-B562-E53DE718C99E}"/>
+              </a:ext>
+            </a:extLst>
+          </p:cNvPr>
+          <p:cNvSpPr>
+            <a:spLocks xmlns:a="http://schemas.openxmlformats.org/drawingml/2006/main" noGrp="1"/>
+          </p:cNvSpPr>
+          <p:nvPr/>
+        </p:nvSpPr>
+        <p:spPr>
+          <a:xfrm xmlns:a="http://schemas.openxmlformats.org/drawingml/2006/main">
+            <a:off x="1009650" y="1752600"/>
+            <a:ext cx="2095500" cy="285750"/>
+          </a:xfrm>
+          <a:prstGeom xmlns:a="http://schemas.openxmlformats.org/drawingml/2006/main" prst="rect">
+            <a:avLst/>
+          </a:prstGeom>
+          <a:noFill xmlns:a="http://schemas.openxmlformats.org/drawingml/2006/main"/>
+          <a:ln xmlns:a="http://schemas.openxmlformats.org/drawingml/2006/main" w="0">
+            <a:noFill/>
+            <a:prstDash val="solid"/>
+          </a:ln>
+        </p:spPr>
+        <p:txBody>
+          <a:bodyPr xmlns:a="http://schemas.openxmlformats.org/drawingml/2006/main" lIns="0" tIns="0" rIns="0" bIns="0" anchor="t">
+            <a:normAutofit fontScale="100000"/>
+          </a:bodyPr>
+          <a:lstStyle xmlns:a="http://schemas.openxmlformats.org/drawingml/2006/main"/>
+          <a:p xmlns:a="http://schemas.openxmlformats.org/drawingml/2006/main">
+            <a:pPr algn="l">
+              <a:lnSpc>
+                <a:spcPct val="108000"/>
+              </a:lnSpc>
+              <a:buNone/>
+              <a:defRPr sz="1575" b="1" i="0">
+                <a:solidFill>
+                  <a:srgbClr val="0F766E"/>
+                </a:solidFill>
+                <a:latin typeface="PingFang SC"/>
+                <a:ea typeface="PingFang SC"/>
+                <a:cs typeface="PingFang SC"/>
+              </a:defRPr>
+            </a:pPr>
+            <a:r>
+              <a:rPr sz="1575" b="1" i="0">
+                <a:solidFill>
+                  <a:srgbClr val="0F766E"/>
+                </a:solidFill>
+                <a:latin typeface="PingFang SC"/>
+                <a:ea typeface="PingFang SC"/>
+                <a:cs typeface="PingFang SC"/>
+              </a:rPr>
               <a:t>发育生物学</a:t>
             </a:r>
           </a:p>
@@ -12494,7 +13356,7 @@
                 <a:ea typeface="PingFang SC"/>
                 <a:cs typeface="PingFang SC"/>
               </a:rPr>
-              <a:t>15</a:t>
+              <a:t>16</a:t>
             </a:r>
           </a:p>
         </p:txBody>
@@ -12509,7 +13371,7 @@
 </p:sld>
 </file>
 
-<file path=ppt/slides/slide16.xml><?xml version="1.0" encoding="utf-8"?>
+<file path=ppt/slides/slide17.xml><?xml version="1.0" encoding="utf-8"?>
 <p:sld xmlns:p="http://schemas.openxmlformats.org/presentationml/2006/main">
   <p:cSld>
     <p:bg>
@@ -12530,14 +13392,14 @@
       </p:grpSpPr>
       <p:pic>
         <p:nvPicPr>
-          <p:cNvPr id="16" name=""/>
+          <p:cNvPr id="17" name=""/>
           <p:cNvPicPr>
             <a:picLocks xmlns:a="http://schemas.openxmlformats.org/drawingml/2006/main" noChangeAspect="1"/>
           </p:cNvPicPr>
           <p:nvPr/>
         </p:nvPicPr>
         <p:blipFill>
-          <a:blip xmlns:r="http://schemas.openxmlformats.org/officeDocument/2006/relationships" xmlns:a="http://schemas.openxmlformats.org/drawingml/2006/main" r:embed="R78ad7b07f8ca4521"/>
+          <a:blip xmlns:r="http://schemas.openxmlformats.org/officeDocument/2006/relationships" xmlns:a="http://schemas.openxmlformats.org/drawingml/2006/main" r:embed="R7c611a598e7c4227"/>
           <a:stretch xmlns:a="http://schemas.openxmlformats.org/drawingml/2006/main"/>
         </p:blipFill>
         <p:spPr>
@@ -12546,9 +13408,7 @@
             <a:ext cx="666750" cy="666750"/>
           </a:xfrm>
           <a:prstGeom xmlns:a="http://schemas.openxmlformats.org/drawingml/2006/main" prst="roundRect">
-            <a:avLst>
-              <a:gd name="adj" fmla="val 11429"/>
-            </a:avLst>
+            <a:avLst/>
           </a:prstGeom>
         </p:spPr>
       </p:pic>
@@ -13281,7 +14141,7 @@
                 <a:ea typeface="PingFang SC"/>
                 <a:cs typeface="PingFang SC"/>
               </a:rPr>
-              <a:t>16</a:t>
+              <a:t>17</a:t>
             </a:r>
           </a:p>
         </p:txBody>
@@ -27230,6 +28090,7 @@
           <a:lstStyle xmlns:a="http://schemas.openxmlformats.org/drawingml/2006/main"/>
           <a:p xmlns:a="http://schemas.openxmlformats.org/drawingml/2006/main">
             <a:pPr algn="ctr">
+              <a:buNone/>
               <a:defRPr sz="1500" b="1">
                 <a:solidFill>
                   <a:srgbClr val="FFFFFF"/>
@@ -27292,6 +28153,7 @@
           <a:lstStyle xmlns:a="http://schemas.openxmlformats.org/drawingml/2006/main"/>
           <a:p xmlns:a="http://schemas.openxmlformats.org/drawingml/2006/main">
             <a:pPr algn="ctr">
+              <a:buNone/>
               <a:defRPr sz="1500" b="1">
                 <a:solidFill>
                   <a:srgbClr val="FFFFFF"/>
@@ -27354,6 +28216,7 @@
           <a:lstStyle xmlns:a="http://schemas.openxmlformats.org/drawingml/2006/main"/>
           <a:p xmlns:a="http://schemas.openxmlformats.org/drawingml/2006/main">
             <a:pPr algn="ctr">
+              <a:buNone/>
               <a:defRPr sz="1500" b="1">
                 <a:solidFill>
                   <a:srgbClr val="FFFFFF"/>
@@ -27416,6 +28279,7 @@
           <a:lstStyle xmlns:a="http://schemas.openxmlformats.org/drawingml/2006/main"/>
           <a:p xmlns:a="http://schemas.openxmlformats.org/drawingml/2006/main">
             <a:pPr algn="ctr">
+              <a:buNone/>
               <a:defRPr sz="1500" b="1">
                 <a:solidFill>
                   <a:srgbClr val="FFFFFF"/>
@@ -27478,6 +28342,7 @@
           <a:lstStyle xmlns:a="http://schemas.openxmlformats.org/drawingml/2006/main"/>
           <a:p xmlns:a="http://schemas.openxmlformats.org/drawingml/2006/main">
             <a:pPr algn="ctr">
+              <a:buNone/>
               <a:defRPr sz="1575" b="1">
                 <a:solidFill>
                   <a:srgbClr val="0B4F49"/>
@@ -27540,6 +28405,7 @@
           <a:lstStyle xmlns:a="http://schemas.openxmlformats.org/drawingml/2006/main"/>
           <a:p xmlns:a="http://schemas.openxmlformats.org/drawingml/2006/main">
             <a:pPr algn="ctr">
+              <a:buNone/>
               <a:defRPr sz="1463" b="0">
                 <a:solidFill>
                   <a:srgbClr val="17212B"/>
@@ -27602,6 +28468,7 @@
           <a:lstStyle xmlns:a="http://schemas.openxmlformats.org/drawingml/2006/main"/>
           <a:p xmlns:a="http://schemas.openxmlformats.org/drawingml/2006/main">
             <a:pPr algn="ctr">
+              <a:buNone/>
               <a:defRPr sz="1463" b="0">
                 <a:solidFill>
                   <a:srgbClr val="17212B"/>
@@ -27664,6 +28531,7 @@
           <a:lstStyle xmlns:a="http://schemas.openxmlformats.org/drawingml/2006/main"/>
           <a:p xmlns:a="http://schemas.openxmlformats.org/drawingml/2006/main">
             <a:pPr algn="ctr">
+              <a:buNone/>
               <a:defRPr sz="1463" b="0">
                 <a:solidFill>
                   <a:srgbClr val="17212B"/>
@@ -27726,6 +28594,7 @@
           <a:lstStyle xmlns:a="http://schemas.openxmlformats.org/drawingml/2006/main"/>
           <a:p xmlns:a="http://schemas.openxmlformats.org/drawingml/2006/main">
             <a:pPr algn="ctr">
+              <a:buNone/>
               <a:defRPr sz="1575" b="1">
                 <a:solidFill>
                   <a:srgbClr val="0B4F49"/>
@@ -27788,6 +28657,7 @@
           <a:lstStyle xmlns:a="http://schemas.openxmlformats.org/drawingml/2006/main"/>
           <a:p xmlns:a="http://schemas.openxmlformats.org/drawingml/2006/main">
             <a:pPr algn="ctr">
+              <a:buNone/>
               <a:defRPr sz="1463" b="0">
                 <a:solidFill>
                   <a:srgbClr val="17212B"/>
@@ -27850,6 +28720,7 @@
           <a:lstStyle xmlns:a="http://schemas.openxmlformats.org/drawingml/2006/main"/>
           <a:p xmlns:a="http://schemas.openxmlformats.org/drawingml/2006/main">
             <a:pPr algn="ctr">
+              <a:buNone/>
               <a:defRPr sz="1463" b="0">
                 <a:solidFill>
                   <a:srgbClr val="17212B"/>
@@ -27912,6 +28783,7 @@
           <a:lstStyle xmlns:a="http://schemas.openxmlformats.org/drawingml/2006/main"/>
           <a:p xmlns:a="http://schemas.openxmlformats.org/drawingml/2006/main">
             <a:pPr algn="ctr">
+              <a:buNone/>
               <a:defRPr sz="1463" b="0">
                 <a:solidFill>
                   <a:srgbClr val="17212B"/>
@@ -27974,6 +28846,7 @@
           <a:lstStyle xmlns:a="http://schemas.openxmlformats.org/drawingml/2006/main"/>
           <a:p xmlns:a="http://schemas.openxmlformats.org/drawingml/2006/main">
             <a:pPr algn="ctr">
+              <a:buNone/>
               <a:defRPr sz="1575" b="1">
                 <a:solidFill>
                   <a:srgbClr val="0B4F49"/>
@@ -28036,6 +28909,7 @@
           <a:lstStyle xmlns:a="http://schemas.openxmlformats.org/drawingml/2006/main"/>
           <a:p xmlns:a="http://schemas.openxmlformats.org/drawingml/2006/main">
             <a:pPr algn="ctr">
+              <a:buNone/>
               <a:defRPr sz="1463" b="0">
                 <a:solidFill>
                   <a:srgbClr val="17212B"/>
@@ -28098,6 +28972,7 @@
           <a:lstStyle xmlns:a="http://schemas.openxmlformats.org/drawingml/2006/main"/>
           <a:p xmlns:a="http://schemas.openxmlformats.org/drawingml/2006/main">
             <a:pPr algn="ctr">
+              <a:buNone/>
               <a:defRPr sz="1463" b="0">
                 <a:solidFill>
                   <a:srgbClr val="17212B"/>
@@ -28160,6 +29035,7 @@
           <a:lstStyle xmlns:a="http://schemas.openxmlformats.org/drawingml/2006/main"/>
           <a:p xmlns:a="http://schemas.openxmlformats.org/drawingml/2006/main">
             <a:pPr algn="ctr">
+              <a:buNone/>
               <a:defRPr sz="1463" b="0">
                 <a:solidFill>
                   <a:srgbClr val="17212B"/>
@@ -30767,14 +31643,14 @@
       </p:sp>
       <p:pic>
         <p:nvPicPr>
-          <p:cNvPr id="16" name=""/>
+          <p:cNvPr id="17" name=""/>
           <p:cNvPicPr>
             <a:picLocks xmlns:a="http://schemas.openxmlformats.org/drawingml/2006/main" noChangeAspect="1"/>
           </p:cNvPicPr>
           <p:nvPr/>
         </p:nvPicPr>
         <p:blipFill>
-          <a:blip xmlns:r="http://schemas.openxmlformats.org/officeDocument/2006/relationships" xmlns:a="http://schemas.openxmlformats.org/drawingml/2006/main" r:embed="Rabd1b0771aa94eab"/>
+          <a:blip xmlns:r="http://schemas.openxmlformats.org/officeDocument/2006/relationships" xmlns:a="http://schemas.openxmlformats.org/drawingml/2006/main" r:embed="Rb619f5382c524270"/>
           <a:stretch xmlns:a="http://schemas.openxmlformats.org/drawingml/2006/main"/>
         </p:blipFill>
         <p:spPr>
@@ -30783,9 +31659,7 @@
             <a:ext cx="4514850" cy="1509998"/>
           </a:xfrm>
           <a:prstGeom xmlns:a="http://schemas.openxmlformats.org/drawingml/2006/main" prst="roundRect">
-            <a:avLst>
-              <a:gd name="adj" fmla="val 3871"/>
-            </a:avLst>
+            <a:avLst/>
           </a:prstGeom>
         </p:spPr>
       </p:pic>
@@ -31626,14 +32500,14 @@
       </p:sp>
       <p:pic>
         <p:nvPicPr>
-          <p:cNvPr id="21" name=""/>
+          <p:cNvPr id="24" name=""/>
           <p:cNvPicPr>
             <a:picLocks xmlns:a="http://schemas.openxmlformats.org/drawingml/2006/main" noChangeAspect="1"/>
           </p:cNvPicPr>
           <p:nvPr/>
         </p:nvPicPr>
         <p:blipFill>
-          <a:blip xmlns:r="http://schemas.openxmlformats.org/officeDocument/2006/relationships" xmlns:a="http://schemas.openxmlformats.org/drawingml/2006/main" r:embed="R67935831f2134662"/>
+          <a:blip xmlns:r="http://schemas.openxmlformats.org/officeDocument/2006/relationships" xmlns:a="http://schemas.openxmlformats.org/drawingml/2006/main" r:embed="Rc1f1c9e3dec94c47"/>
           <a:stretch xmlns:a="http://schemas.openxmlformats.org/drawingml/2006/main"/>
         </p:blipFill>
         <p:spPr>
@@ -31642,22 +32516,20 @@
             <a:ext cx="3143250" cy="1944174"/>
           </a:xfrm>
           <a:prstGeom xmlns:a="http://schemas.openxmlformats.org/drawingml/2006/main" prst="roundRect">
-            <a:avLst>
-              <a:gd name="adj" fmla="val 4800"/>
-            </a:avLst>
+            <a:avLst/>
           </a:prstGeom>
         </p:spPr>
       </p:pic>
       <p:pic>
         <p:nvPicPr>
-          <p:cNvPr id="22" name=""/>
+          <p:cNvPr id="25" name=""/>
           <p:cNvPicPr>
             <a:picLocks xmlns:a="http://schemas.openxmlformats.org/drawingml/2006/main" noChangeAspect="1"/>
           </p:cNvPicPr>
           <p:nvPr/>
         </p:nvPicPr>
         <p:blipFill>
-          <a:blip xmlns:r="http://schemas.openxmlformats.org/officeDocument/2006/relationships" xmlns:a="http://schemas.openxmlformats.org/drawingml/2006/main" r:embed="Rc7156383ede94c4e"/>
+          <a:blip xmlns:r="http://schemas.openxmlformats.org/officeDocument/2006/relationships" xmlns:a="http://schemas.openxmlformats.org/drawingml/2006/main" r:embed="Rf246755a37cd439e"/>
           <a:stretch xmlns:a="http://schemas.openxmlformats.org/drawingml/2006/main"/>
         </p:blipFill>
         <p:spPr>
@@ -31666,22 +32538,20 @@
             <a:ext cx="3143250" cy="1794810"/>
           </a:xfrm>
           <a:prstGeom xmlns:a="http://schemas.openxmlformats.org/drawingml/2006/main" prst="roundRect">
-            <a:avLst>
-              <a:gd name="adj" fmla="val 4800"/>
-            </a:avLst>
+            <a:avLst/>
           </a:prstGeom>
         </p:spPr>
       </p:pic>
       <p:pic>
         <p:nvPicPr>
-          <p:cNvPr id="23" name=""/>
+          <p:cNvPr id="26" name=""/>
           <p:cNvPicPr>
             <a:picLocks xmlns:a="http://schemas.openxmlformats.org/drawingml/2006/main" noChangeAspect="1"/>
           </p:cNvPicPr>
           <p:nvPr/>
         </p:nvPicPr>
         <p:blipFill>
-          <a:blip xmlns:r="http://schemas.openxmlformats.org/officeDocument/2006/relationships" xmlns:a="http://schemas.openxmlformats.org/drawingml/2006/main" r:embed="Rce9abd914f7f47d8"/>
+          <a:blip xmlns:r="http://schemas.openxmlformats.org/officeDocument/2006/relationships" xmlns:a="http://schemas.openxmlformats.org/drawingml/2006/main" r:embed="R548cc2614cfe4219"/>
           <a:stretch xmlns:a="http://schemas.openxmlformats.org/drawingml/2006/main"/>
         </p:blipFill>
         <p:spPr>
@@ -31690,9 +32560,7 @@
             <a:ext cx="3143250" cy="2078032"/>
           </a:xfrm>
           <a:prstGeom xmlns:a="http://schemas.openxmlformats.org/drawingml/2006/main" prst="roundRect">
-            <a:avLst>
-              <a:gd name="adj" fmla="val 4800"/>
-            </a:avLst>
+            <a:avLst/>
           </a:prstGeom>
         </p:spPr>
       </p:pic>
@@ -32845,6 +33713,7 @@
           <a:lstStyle xmlns:a="http://schemas.openxmlformats.org/drawingml/2006/main"/>
           <a:p xmlns:a="http://schemas.openxmlformats.org/drawingml/2006/main">
             <a:pPr algn="ctr">
+              <a:buNone/>
               <a:defRPr sz="938" b="1">
                 <a:solidFill>
                   <a:srgbClr val="FFFFFF"/>
@@ -33010,6 +33879,7 @@
           <a:lstStyle xmlns:a="http://schemas.openxmlformats.org/drawingml/2006/main"/>
           <a:p xmlns:a="http://schemas.openxmlformats.org/drawingml/2006/main">
             <a:pPr algn="ctr">
+              <a:buNone/>
               <a:defRPr sz="938" b="1">
                 <a:solidFill>
                   <a:srgbClr val="FFFFFF"/>
@@ -33175,6 +34045,7 @@
           <a:lstStyle xmlns:a="http://schemas.openxmlformats.org/drawingml/2006/main"/>
           <a:p xmlns:a="http://schemas.openxmlformats.org/drawingml/2006/main">
             <a:pPr algn="ctr">
+              <a:buNone/>
               <a:defRPr sz="938" b="1">
                 <a:solidFill>
                   <a:srgbClr val="FFFFFF"/>
@@ -33340,6 +34211,7 @@
           <a:lstStyle xmlns:a="http://schemas.openxmlformats.org/drawingml/2006/main"/>
           <a:p xmlns:a="http://schemas.openxmlformats.org/drawingml/2006/main">
             <a:pPr algn="ctr">
+              <a:buNone/>
               <a:defRPr sz="938" b="1">
                 <a:solidFill>
                   <a:srgbClr val="FFFFFF"/>
@@ -33505,6 +34377,7 @@
           <a:lstStyle xmlns:a="http://schemas.openxmlformats.org/drawingml/2006/main"/>
           <a:p xmlns:a="http://schemas.openxmlformats.org/drawingml/2006/main">
             <a:pPr algn="ctr">
+              <a:buNone/>
               <a:defRPr sz="938" b="1">
                 <a:solidFill>
                   <a:srgbClr val="FFFFFF"/>

--- a/reports/SpatialScope_Agent_Presentation.pptx
+++ b/reports/SpatialScope_Agent_Presentation.pptx
@@ -2,29 +2,28 @@
 <file path=ppt/presentation.xml><?xml version="1.0" encoding="utf-8"?>
 <p:presentation xmlns:p="http://schemas.openxmlformats.org/presentationml/2006/main">
   <p:sldMasterIdLst>
-    <p:sldMasterId xmlns:r="http://schemas.openxmlformats.org/officeDocument/2006/relationships" id="2147483648" r:id="Re4ad2b4681694137"/>
+    <p:sldMasterId xmlns:r="http://schemas.openxmlformats.org/officeDocument/2006/relationships" id="2147483648" r:id="R5bb8db4d8151479b"/>
   </p:sldMasterIdLst>
   <p:notesMasterIdLst>
-    <p:notesMasterId xmlns:r="http://schemas.openxmlformats.org/officeDocument/2006/relationships" r:id="Rbc2448d429a34edc"/>
+    <p:notesMasterId xmlns:r="http://schemas.openxmlformats.org/officeDocument/2006/relationships" r:id="R6da5f6d4c73e4e16"/>
   </p:notesMasterIdLst>
   <p:sldIdLst>
-    <p:sldId xmlns:r="http://schemas.openxmlformats.org/officeDocument/2006/relationships" id="256" r:id="Rcdeca84b5720436d"/>
-    <p:sldId xmlns:r="http://schemas.openxmlformats.org/officeDocument/2006/relationships" id="257" r:id="R28c1b823b007410d"/>
-    <p:sldId xmlns:r="http://schemas.openxmlformats.org/officeDocument/2006/relationships" id="258" r:id="R812b6ac2edb44cb4"/>
-    <p:sldId xmlns:r="http://schemas.openxmlformats.org/officeDocument/2006/relationships" id="259" r:id="Re0e8d660b57b4ac3"/>
-    <p:sldId xmlns:r="http://schemas.openxmlformats.org/officeDocument/2006/relationships" id="260" r:id="Re56bd8a5b0c04105"/>
-    <p:sldId xmlns:r="http://schemas.openxmlformats.org/officeDocument/2006/relationships" id="261" r:id="R52946f1bdcc64747"/>
-    <p:sldId xmlns:r="http://schemas.openxmlformats.org/officeDocument/2006/relationships" id="262" r:id="Rca3c435ebe814530"/>
-    <p:sldId xmlns:r="http://schemas.openxmlformats.org/officeDocument/2006/relationships" id="263" r:id="R02f18b55c16342db"/>
-    <p:sldId xmlns:r="http://schemas.openxmlformats.org/officeDocument/2006/relationships" id="264" r:id="Raef0f1cc6cc54ce1"/>
-    <p:sldId xmlns:r="http://schemas.openxmlformats.org/officeDocument/2006/relationships" id="265" r:id="R94355af0c66c4a47"/>
-    <p:sldId xmlns:r="http://schemas.openxmlformats.org/officeDocument/2006/relationships" id="266" r:id="Rb5b0eaec034b4fa3"/>
-    <p:sldId xmlns:r="http://schemas.openxmlformats.org/officeDocument/2006/relationships" id="267" r:id="R2177448b66354878"/>
-    <p:sldId xmlns:r="http://schemas.openxmlformats.org/officeDocument/2006/relationships" id="268" r:id="Refcd5c90cd074c41"/>
-    <p:sldId xmlns:r="http://schemas.openxmlformats.org/officeDocument/2006/relationships" id="269" r:id="R060d170c2ae44e37"/>
-    <p:sldId xmlns:r="http://schemas.openxmlformats.org/officeDocument/2006/relationships" id="270" r:id="R7e13d774c5ae4f44"/>
-    <p:sldId xmlns:r="http://schemas.openxmlformats.org/officeDocument/2006/relationships" id="271" r:id="R48a4849e96064510"/>
-    <p:sldId xmlns:r="http://schemas.openxmlformats.org/officeDocument/2006/relationships" id="272" r:id="R88763f969bb746da"/>
+    <p:sldId xmlns:r="http://schemas.openxmlformats.org/officeDocument/2006/relationships" id="256" r:id="R59a7aa19e5874be2"/>
+    <p:sldId xmlns:r="http://schemas.openxmlformats.org/officeDocument/2006/relationships" id="257" r:id="R6ca8893ca1234547"/>
+    <p:sldId xmlns:r="http://schemas.openxmlformats.org/officeDocument/2006/relationships" id="258" r:id="Re0887018bb5e41d9"/>
+    <p:sldId xmlns:r="http://schemas.openxmlformats.org/officeDocument/2006/relationships" id="259" r:id="R3097437c90294386"/>
+    <p:sldId xmlns:r="http://schemas.openxmlformats.org/officeDocument/2006/relationships" id="260" r:id="R449d6de7b6504dd7"/>
+    <p:sldId xmlns:r="http://schemas.openxmlformats.org/officeDocument/2006/relationships" id="261" r:id="Re9c9bffb40994b3a"/>
+    <p:sldId xmlns:r="http://schemas.openxmlformats.org/officeDocument/2006/relationships" id="262" r:id="Re0d963fc4efc4c78"/>
+    <p:sldId xmlns:r="http://schemas.openxmlformats.org/officeDocument/2006/relationships" id="263" r:id="R916cbaeb62484ac5"/>
+    <p:sldId xmlns:r="http://schemas.openxmlformats.org/officeDocument/2006/relationships" id="264" r:id="R03c38d5d44354f24"/>
+    <p:sldId xmlns:r="http://schemas.openxmlformats.org/officeDocument/2006/relationships" id="265" r:id="Rad20951c931a4bb8"/>
+    <p:sldId xmlns:r="http://schemas.openxmlformats.org/officeDocument/2006/relationships" id="266" r:id="Ra4404fb9df0343a9"/>
+    <p:sldId xmlns:r="http://schemas.openxmlformats.org/officeDocument/2006/relationships" id="267" r:id="Rf3c1d67b91204280"/>
+    <p:sldId xmlns:r="http://schemas.openxmlformats.org/officeDocument/2006/relationships" id="268" r:id="Rf79ff2fb32d04c24"/>
+    <p:sldId xmlns:r="http://schemas.openxmlformats.org/officeDocument/2006/relationships" id="269" r:id="R5cf9b85c93f142c2"/>
+    <p:sldId xmlns:r="http://schemas.openxmlformats.org/officeDocument/2006/relationships" id="270" r:id="R4d601c3d946041bb"/>
+    <p:sldId xmlns:r="http://schemas.openxmlformats.org/officeDocument/2006/relationships" id="271" r:id="R34341111d24a47dc"/>
   </p:sldIdLst>
   <p:sldSz cx="12192000" cy="6858000"/>
   <p:notesSz cx="6858000" cy="9144000"/>
@@ -983,7 +982,7 @@
           <a:lstStyle xmlns:a="http://schemas.openxmlformats.org/drawingml/2006/main"/>
           <a:p xmlns:a="http://schemas.openxmlformats.org/drawingml/2006/main">
             <a:r>
-              <a:t>讲稿：这一页说明真实数据验证。前面网站演示用的是小型 demo，因为在线部署要稳定；但我没有只停留在 toy data。我下载了公开数据 GSE278603 中 E7.5 mouse embryo Stereo-seq 的一个样本。这个样本有 8190 个 spots 和 16364 个 genes，数据规模和字段复杂度都比 demo 更接近真实科研数据。</a:t>
+              <a:t>讲稿：这一页讲真实数据验证，不展开算法细节。前面网站演示用的是小型 demo，因为在线部署要稳定；但为了证明系统不只依赖 toy data，我又用公开真实数据 GSE278603 的 E7.5 mouse embryo Stereo-seq 样本做了本地验证。</a:t>
             </a:r>
           </a:p>
           <a:p xmlns:a="http://schemas.openxmlformats.org/drawingml/2006/main">
@@ -993,7 +992,7 @@
           </a:p>
           <a:p xmlns:a="http://schemas.openxmlformats.org/drawingml/2006/main">
             <a:r>
-              <a:t>讲图顺序：先指左侧数据卡。第一行是数据规模；第二行说明原数据里空间坐标叫 obsm["X_spatial"]，Agent 会把它标准化成常用的 obsm["spatial"]；第三行说明 quick run 仍然包含 QC、UMAP、Leiden 聚类和 gene panel；最后一行说明这次运行得到 7 个 clusters，并且没有 warnings 和 errors。</a:t>
+              <a:t>先看左侧数据卡。这个样本有 8190 个 spots 和 16364 个 genes，是真实的空间转录组 AnnData。原始文件里的空间坐标字段叫 X_spatial，系统可以把它标准化为常用的 spatial 字段，然后继续执行分析。</a:t>
             </a:r>
           </a:p>
           <a:p xmlns:a="http://schemas.openxmlformats.org/drawingml/2006/main">
@@ -1003,7 +1002,7 @@
           </a:p>
           <a:p xmlns:a="http://schemas.openxmlformats.org/drawingml/2006/main">
             <a:r>
-              <a:t>然后指右侧三类图。Spatial Leiden 是把聚类结果放回真实组织坐标；UMAP Leiden 是看表达状态是否能分开；gene panel 是看 Sox17、T、Mesp1、Pou5f1 这些发育相关基因是否有空间表达倾向。</a:t>
+              <a:t>再看右侧三类输出。左上是空间聚类图，把分析得到的分组放回真实组织坐标；右上是 UMAP 图，用来观察表达状态是否能形成结构；下面是基因表达面板，用 Sox17、T、Mesp1、Pou5f1 这些发育相关基因查看空间表达趋势。</a:t>
             </a:r>
           </a:p>
           <a:p xmlns:a="http://schemas.openxmlformats.org/drawingml/2006/main">
@@ -1013,7 +1012,7 @@
           </a:p>
           <a:p xmlns:a="http://schemas.openxmlformats.org/drawingml/2006/main">
             <a:r>
-              <a:t>重要边界：这里的目的不是给出完整生物学结论，而是证明系统可以处理真实 AnnData、真实坐标字段和真实表达层。完整生物学解释还需要更系统的 marker、组织学背景和专家注释。</a:t>
+              <a:t>这里我想强调的不是“发现了一个新的胚胎发育机制”，而是验证系统的工程和科研可用性：真实数据能读入，真实坐标能识别，标准流程能跑完，图表和报告能生成，而且 quick run 没有 warnings 和 errors。</a:t>
             </a:r>
           </a:p>
           <a:p xmlns:a="http://schemas.openxmlformats.org/drawingml/2006/main">
@@ -1023,7 +1022,17 @@
           </a:p>
           <a:p xmlns:a="http://schemas.openxmlformats.org/drawingml/2006/main">
             <a:r>
-              <a:t>过渡：下一页我解释 Leiden、UMAP 和 Spatial 这几张图具体应该怎么读。</a:t>
+              <a:t>边界也要说清楚：这只是 smoke validation。要做正式生物学结论，还需要更完整的参数调优、marker gene 证据、组织学背景和专家注释。</a:t>
+            </a:r>
+          </a:p>
+          <a:p xmlns:a="http://schemas.openxmlformats.org/drawingml/2006/main">
+            <a:r>
+              <a:t/>
+            </a:r>
+          </a:p>
+          <a:p xmlns:a="http://schemas.openxmlformats.org/drawingml/2006/main">
+            <a:r>
+              <a:t>过渡：真实数据验证说明系统有一定泛化能力。接下来说明它在真实科研场景中可以怎么用，以及它的边界在哪里。</a:t>
             </a:r>
           </a:p>
         </p:txBody>
@@ -1093,127 +1102,7 @@
           <a:lstStyle xmlns:a="http://schemas.openxmlformats.org/drawingml/2006/main"/>
           <a:p xmlns:a="http://schemas.openxmlformats.org/drawingml/2006/main">
             <a:r>
-              <a:t>讲稿：这一页是为了把真实数据图讲清楚。Leiden 是一种图聚类算法，可以简单理解为：先根据基因表达相似性把 spots 连接成邻居图，再把连接更紧密的 spots 分到同一个 cluster。它回答的是“哪些 spot 的整体表达模式相似”。</a:t>
-            </a:r>
-          </a:p>
-          <a:p xmlns:a="http://schemas.openxmlformats.org/drawingml/2006/main">
-            <a:r>
-              <a:t/>
-            </a:r>
-          </a:p>
-          <a:p xmlns:a="http://schemas.openxmlformats.org/drawingml/2006/main">
-            <a:r>
-              <a:t>这里一定要强调：Leiden cluster 不等于细胞类型。颜色 0 到 6 只是算法给出的分组编号，不是说 cluster 0 就一定是什么细胞。要把 cluster 解释成细胞类型，还需要 marker genes、参考文献和专家判断。</a:t>
-            </a:r>
-          </a:p>
-          <a:p xmlns:a="http://schemas.openxmlformats.org/drawingml/2006/main">
-            <a:r>
-              <a:t/>
-            </a:r>
-          </a:p>
-          <a:p xmlns:a="http://schemas.openxmlformats.org/drawingml/2006/main">
-            <a:r>
-              <a:t>UMAP 图不是组织地图，而是表达状态地图。两个点在 UMAP 上接近，表示它们的整体基因表达相似；离得远，表示表达差异更大。这个真实数据的 UMAP 分成几个比较清楚的区域，说明表达状态确实有结构。</a:t>
-            </a:r>
-          </a:p>
-          <a:p xmlns:a="http://schemas.openxmlformats.org/drawingml/2006/main">
-            <a:r>
-              <a:t/>
-            </a:r>
-          </a:p>
-          <a:p xmlns:a="http://schemas.openxmlformats.org/drawingml/2006/main">
-            <a:r>
-              <a:t>Spatial 图是真实组织坐标。把 Leiden cluster 放回 Spatial 后，会发现颜色没有像 UMAP 那样分成特别干净的大块，而是有不少混合。这不是失败，反而是真实数据常见的情况：组织里不同状态可能交错，空间分辨率、发育阶段和技术噪声都会让结构更复杂。</a:t>
-            </a:r>
-          </a:p>
-          <a:p xmlns:a="http://schemas.openxmlformats.org/drawingml/2006/main">
-            <a:r>
-              <a:t/>
-            </a:r>
-          </a:p>
-          <a:p xmlns:a="http://schemas.openxmlformats.org/drawingml/2006/main">
-            <a:r>
-              <a:t>Gene panel 用来找生物学线索。比如 T 和 Mesp1 是中胚层/早期发育相关基因，如果它们在某些空间区域更高，就可以作为后续解释的线索。但这里仍然要谨慎：单个基因的空间表达不能直接证明机制，只能作为 evidence。</a:t>
-            </a:r>
-          </a:p>
-          <a:p xmlns:a="http://schemas.openxmlformats.org/drawingml/2006/main">
-            <a:r>
-              <a:t/>
-            </a:r>
-          </a:p>
-          <a:p xmlns:a="http://schemas.openxmlformats.org/drawingml/2006/main">
-            <a:r>
-              <a:t>一句话总结：UMAP 看表达状态是否分开，Spatial 看这些状态在组织哪里，Gene panel 用发育基因帮助解释这些区域。</a:t>
-            </a:r>
-          </a:p>
-        </p:txBody>
-      </p:sp>
-      <p:sp>
-        <p:nvSpPr>
-          <p:cNvPr id="4" name="Slide Number Placeholder 3"/>
-          <p:cNvSpPr>
-            <a:spLocks xmlns:a="http://schemas.openxmlformats.org/drawingml/2006/main" noGrp="1"/>
-          </p:cNvSpPr>
-          <p:nvPr>
-            <p:ph type="sldNum" idx="5"/>
-          </p:nvPr>
-        </p:nvSpPr>
-        <p:spPr/>
-        <p:txBody>
-          <a:bodyPr xmlns:a="http://schemas.openxmlformats.org/drawingml/2006/main"/>
-          <a:lstStyle xmlns:a="http://schemas.openxmlformats.org/drawingml/2006/main"/>
-          <a:p xmlns:a="http://schemas.openxmlformats.org/drawingml/2006/main"/>
-        </p:txBody>
-      </p:sp>
-    </p:spTree>
-  </p:cSld>
-  <p:clrMapOvr>
-    <a:masterClrMapping xmlns:a="http://schemas.openxmlformats.org/drawingml/2006/main"/>
-  </p:clrMapOvr>
-</p:notes>
-</file>
-
-<file path=ppt/notesSlides/notesSlide16.xml><?xml version="1.0" encoding="utf-8"?>
-<p:notes xmlns:p="http://schemas.openxmlformats.org/presentationml/2006/main">
-  <p:cSld>
-    <p:spTree>
-      <p:nvGrpSpPr>
-        <p:cNvPr id="1" name=""/>
-        <p:cNvGrpSpPr/>
-        <p:nvPr/>
-      </p:nvGrpSpPr>
-      <p:grpSpPr>
-        <a:xfrm xmlns:a="http://schemas.openxmlformats.org/drawingml/2006/main"/>
-      </p:grpSpPr>
-      <p:sp>
-        <p:nvSpPr>
-          <p:cNvPr id="2" name="Slide Image Placeholder 1"/>
-          <p:cNvSpPr>
-            <a:spLocks xmlns:a="http://schemas.openxmlformats.org/drawingml/2006/main" noGrp="1"/>
-          </p:cNvSpPr>
-          <p:nvPr>
-            <p:ph type="sldImg" idx="0"/>
-          </p:nvPr>
-        </p:nvSpPr>
-        <p:spPr/>
-      </p:sp>
-      <p:sp>
-        <p:nvSpPr>
-          <p:cNvPr id="3" name="Notes Placeholder 2"/>
-          <p:cNvSpPr>
-            <a:spLocks xmlns:a="http://schemas.openxmlformats.org/drawingml/2006/main" noGrp="1"/>
-          </p:cNvSpPr>
-          <p:nvPr>
-            <p:ph type="body" idx="1"/>
-          </p:nvPr>
-        </p:nvSpPr>
-        <p:spPr/>
-        <p:txBody>
-          <a:bodyPr xmlns:a="http://schemas.openxmlformats.org/drawingml/2006/main"/>
-          <a:lstStyle xmlns:a="http://schemas.openxmlformats.org/drawingml/2006/main"/>
-          <a:p xmlns:a="http://schemas.openxmlformats.org/drawingml/2006/main">
-            <a:r>
-              <a:t>讲稿：在理解真实数据图之后，再回到真实科研场景。SpatialScope 可以作为 exploratory analysis workspace。发育生物学里可以比较不同胚胎阶段的空间区域，并查看 Sox17、T、Mesp1 等基因；肿瘤微环境里可以探索 tumor、immune、stromal regions；病理切片探索中可以整合组织结构、空间表达和 cluster；教学中可以帮助学生从自然语言问题进入可复现分析。</a:t>
+              <a:t>讲稿：真实数据验证之后，再回到真实科研场景。SpatialScope 可以作为 exploratory analysis workspace。发育生物学里可以比较不同胚胎阶段的空间区域，并查看 Sox17、T、Mesp1 等基因；肿瘤微环境里可以探索 tumor、immune、stromal regions；病理切片探索中可以整合组织结构、空间表达和 cluster；教学中可以帮助学生从自然语言问题进入可复现分析。</a:t>
             </a:r>
           </a:p>
           <a:p xmlns:a="http://schemas.openxmlformats.org/drawingml/2006/main">
@@ -1263,7 +1152,7 @@
 </p:notes>
 </file>
 
-<file path=ppt/notesSlides/notesSlide17.xml><?xml version="1.0" encoding="utf-8"?>
+<file path=ppt/notesSlides/notesSlide16.xml><?xml version="1.0" encoding="utf-8"?>
 <p:notes xmlns:p="http://schemas.openxmlformats.org/presentationml/2006/main">
   <p:cSld>
     <p:spTree>
@@ -2031,7 +1920,7 @@
   </p:cSld>
   <p:clrMap bg1="lt1" tx1="dk1" bg2="lt2" tx2="dk2" accent1="accent1" accent2="accent2" accent3="accent3" accent4="accent4" accent5="accent5" accent6="accent6" hlink="hlink" folHlink="folHlink"/>
   <p:sldLayoutIdLst>
-    <p:sldLayoutId xmlns:r="http://schemas.openxmlformats.org/officeDocument/2006/relationships" id="2147483649" r:id="R7b42a05a4c2c4c72"/>
+    <p:sldLayoutId xmlns:r="http://schemas.openxmlformats.org/officeDocument/2006/relationships" id="2147483649" r:id="R5113e0da4466459c"/>
   </p:sldLayoutIdLst>
   <p:txStyles>
     <p:titleStyle>
@@ -2652,7 +2541,7 @@
           <p:nvPr/>
         </p:nvPicPr>
         <p:blipFill>
-          <a:blip xmlns:r="http://schemas.openxmlformats.org/officeDocument/2006/relationships" xmlns:a="http://schemas.openxmlformats.org/drawingml/2006/main" r:embed="Rfa2947ec9ce3440b"/>
+          <a:blip xmlns:r="http://schemas.openxmlformats.org/officeDocument/2006/relationships" xmlns:a="http://schemas.openxmlformats.org/drawingml/2006/main" r:embed="R5062443b37b94b83"/>
           <a:stretch xmlns:a="http://schemas.openxmlformats.org/drawingml/2006/main"/>
         </p:blipFill>
         <p:spPr>
@@ -2860,7 +2749,7 @@
           <p:nvPr/>
         </p:nvPicPr>
         <p:blipFill>
-          <a:blip xmlns:r="http://schemas.openxmlformats.org/officeDocument/2006/relationships" xmlns:a="http://schemas.openxmlformats.org/drawingml/2006/main" r:embed="R383c861c02554c86"/>
+          <a:blip xmlns:r="http://schemas.openxmlformats.org/officeDocument/2006/relationships" xmlns:a="http://schemas.openxmlformats.org/drawingml/2006/main" r:embed="Rba7f4712a1bd46d3"/>
           <a:srcRect xmlns:a="http://schemas.openxmlformats.org/drawingml/2006/main" l="0" t="10358" r="0" b="10358"/>
           <a:stretch xmlns:a="http://schemas.openxmlformats.org/drawingml/2006/main">
             <a:fillRect l="0" t="0" r="0" b="0"/>
@@ -5907,7 +5796,7 @@
       </p:sp>
       <p:cxnSp>
         <p:nvCxnSpPr>
-          <p:cNvPr id="66" name=""/>
+          <p:cNvPr id="94" name=""/>
           <p:cNvCxnSpPr>
             <a:stCxn xmlns:a="http://schemas.openxmlformats.org/drawingml/2006/main" id="5" idx="3"/>
             <a:endCxn xmlns:a="http://schemas.openxmlformats.org/drawingml/2006/main" id="6" idx="1"/>
@@ -6063,7 +5952,7 @@
       </p:sp>
       <p:cxnSp>
         <p:nvCxnSpPr>
-          <p:cNvPr id="69" name=""/>
+          <p:cNvPr id="97" name=""/>
           <p:cNvCxnSpPr>
             <a:stCxn xmlns:a="http://schemas.openxmlformats.org/drawingml/2006/main" id="8" idx="3"/>
             <a:endCxn xmlns:a="http://schemas.openxmlformats.org/drawingml/2006/main" id="9" idx="1"/>
@@ -6219,7 +6108,7 @@
       </p:sp>
       <p:cxnSp>
         <p:nvCxnSpPr>
-          <p:cNvPr id="72" name=""/>
+          <p:cNvPr id="100" name=""/>
           <p:cNvCxnSpPr>
             <a:stCxn xmlns:a="http://schemas.openxmlformats.org/drawingml/2006/main" id="11" idx="3"/>
             <a:endCxn xmlns:a="http://schemas.openxmlformats.org/drawingml/2006/main" id="12" idx="1"/>
@@ -6375,7 +6264,7 @@
       </p:sp>
       <p:cxnSp>
         <p:nvCxnSpPr>
-          <p:cNvPr id="75" name=""/>
+          <p:cNvPr id="103" name=""/>
           <p:cNvCxnSpPr>
             <a:stCxn xmlns:a="http://schemas.openxmlformats.org/drawingml/2006/main" id="14" idx="3"/>
             <a:endCxn xmlns:a="http://schemas.openxmlformats.org/drawingml/2006/main" id="15" idx="1"/>
@@ -6531,7 +6420,7 @@
       </p:sp>
       <p:cxnSp>
         <p:nvCxnSpPr>
-          <p:cNvPr id="78" name=""/>
+          <p:cNvPr id="106" name=""/>
           <p:cNvCxnSpPr>
             <a:stCxn xmlns:a="http://schemas.openxmlformats.org/drawingml/2006/main" id="17" idx="3"/>
             <a:endCxn xmlns:a="http://schemas.openxmlformats.org/drawingml/2006/main" id="18" idx="1"/>
@@ -6687,7 +6576,7 @@
       </p:sp>
       <p:cxnSp>
         <p:nvCxnSpPr>
-          <p:cNvPr id="81" name=""/>
+          <p:cNvPr id="109" name=""/>
           <p:cNvCxnSpPr>
             <a:stCxn xmlns:a="http://schemas.openxmlformats.org/drawingml/2006/main" id="20" idx="3"/>
             <a:endCxn xmlns:a="http://schemas.openxmlformats.org/drawingml/2006/main" id="21" idx="1"/>
@@ -6843,7 +6732,7 @@
       </p:sp>
       <p:cxnSp>
         <p:nvCxnSpPr>
-          <p:cNvPr id="84" name=""/>
+          <p:cNvPr id="112" name=""/>
           <p:cNvCxnSpPr>
             <a:stCxn xmlns:a="http://schemas.openxmlformats.org/drawingml/2006/main" id="23" idx="3"/>
             <a:endCxn xmlns:a="http://schemas.openxmlformats.org/drawingml/2006/main" id="24" idx="1"/>
@@ -6999,7 +6888,7 @@
       </p:sp>
       <p:cxnSp>
         <p:nvCxnSpPr>
-          <p:cNvPr id="87" name=""/>
+          <p:cNvPr id="115" name=""/>
           <p:cNvCxnSpPr>
             <a:stCxn xmlns:a="http://schemas.openxmlformats.org/drawingml/2006/main" id="26" idx="3"/>
             <a:endCxn xmlns:a="http://schemas.openxmlformats.org/drawingml/2006/main" id="27" idx="1"/>
@@ -7340,7 +7229,7 @@
           <p:nvPr/>
         </p:nvPicPr>
         <p:blipFill>
-          <a:blip xmlns:r="http://schemas.openxmlformats.org/officeDocument/2006/relationships" xmlns:a="http://schemas.openxmlformats.org/drawingml/2006/main" r:embed="R7a63601b11db47b8"/>
+          <a:blip xmlns:r="http://schemas.openxmlformats.org/officeDocument/2006/relationships" xmlns:a="http://schemas.openxmlformats.org/drawingml/2006/main" r:embed="R8190f9b06e9b4d60"/>
           <a:srcRect xmlns:a="http://schemas.openxmlformats.org/drawingml/2006/main" l="0" t="17360" r="0" b="17360"/>
           <a:stretch xmlns:a="http://schemas.openxmlformats.org/drawingml/2006/main">
             <a:fillRect l="0" t="0" r="0" b="0"/>
@@ -7365,7 +7254,7 @@
           <p:nvPr/>
         </p:nvPicPr>
         <p:blipFill>
-          <a:blip xmlns:r="http://schemas.openxmlformats.org/officeDocument/2006/relationships" xmlns:a="http://schemas.openxmlformats.org/drawingml/2006/main" r:embed="R24b1bb5068044729"/>
+          <a:blip xmlns:r="http://schemas.openxmlformats.org/officeDocument/2006/relationships" xmlns:a="http://schemas.openxmlformats.org/drawingml/2006/main" r:embed="R90f66e01d02f454c"/>
           <a:srcRect xmlns:a="http://schemas.openxmlformats.org/drawingml/2006/main" l="0" t="17360" r="0" b="17360"/>
           <a:stretch xmlns:a="http://schemas.openxmlformats.org/drawingml/2006/main">
             <a:fillRect l="0" t="0" r="0" b="0"/>
@@ -11034,7 +10923,7 @@
                 <a:ea typeface="PingFang SC"/>
                 <a:cs typeface="PingFang SC"/>
               </a:rPr>
-              <a:t>obsm["X_spatial"] -&gt; obsm["spatial"]</a:t>
+              <a:t>真实空间坐标：X_spatial -&gt; spatial</a:t>
             </a:r>
           </a:p>
           <a:p xmlns:a="http://schemas.openxmlformats.org/drawingml/2006/main">
@@ -11061,7 +10950,7 @@
                 <a:ea typeface="PingFang SC"/>
                 <a:cs typeface="PingFang SC"/>
               </a:rPr>
-              <a:t>Quick run: QC + UMAP + Leiden + gene panel</a:t>
+              <a:t>输出：空间聚类 · UMAP · 基因表达面板</a:t>
             </a:r>
           </a:p>
           <a:p xmlns:a="http://schemas.openxmlformats.org/drawingml/2006/main">
@@ -11088,7 +10977,7 @@
                 <a:ea typeface="PingFang SC"/>
                 <a:cs typeface="PingFang SC"/>
               </a:rPr>
-              <a:t>7 clusters · 0 warnings · 0 errors</a:t>
+              <a:t>Quick run: 0 warnings · 0 errors</a:t>
             </a:r>
           </a:p>
         </p:txBody>
@@ -11102,7 +10991,7 @@
           <p:nvPr/>
         </p:nvPicPr>
         <p:blipFill>
-          <a:blip xmlns:r="http://schemas.openxmlformats.org/officeDocument/2006/relationships" xmlns:a="http://schemas.openxmlformats.org/drawingml/2006/main" r:embed="Rab085b1d504e412c"/>
+          <a:blip xmlns:r="http://schemas.openxmlformats.org/officeDocument/2006/relationships" xmlns:a="http://schemas.openxmlformats.org/drawingml/2006/main" r:embed="R30de565b46854558"/>
           <a:stretch xmlns:a="http://schemas.openxmlformats.org/drawingml/2006/main"/>
         </p:blipFill>
         <p:spPr>
@@ -11124,7 +11013,7 @@
           <p:nvPr/>
         </p:nvPicPr>
         <p:blipFill>
-          <a:blip xmlns:r="http://schemas.openxmlformats.org/officeDocument/2006/relationships" xmlns:a="http://schemas.openxmlformats.org/drawingml/2006/main" r:embed="R2e9461f257fe4bc7"/>
+          <a:blip xmlns:r="http://schemas.openxmlformats.org/officeDocument/2006/relationships" xmlns:a="http://schemas.openxmlformats.org/drawingml/2006/main" r:embed="Ra24cfae5f0a04615"/>
           <a:stretch xmlns:a="http://schemas.openxmlformats.org/drawingml/2006/main"/>
         </p:blipFill>
         <p:spPr>
@@ -11146,7 +11035,7 @@
           <p:nvPr/>
         </p:nvPicPr>
         <p:blipFill>
-          <a:blip xmlns:r="http://schemas.openxmlformats.org/officeDocument/2006/relationships" xmlns:a="http://schemas.openxmlformats.org/drawingml/2006/main" r:embed="R3e29ffbd25634e5c"/>
+          <a:blip xmlns:r="http://schemas.openxmlformats.org/officeDocument/2006/relationships" xmlns:a="http://schemas.openxmlformats.org/drawingml/2006/main" r:embed="R28848bdbc0cd4e8b"/>
           <a:stretch xmlns:a="http://schemas.openxmlformats.org/drawingml/2006/main"/>
         </p:blipFill>
         <p:spPr>
@@ -11189,7 +11078,7 @@
         </p:spPr>
         <p:txBody>
           <a:bodyPr xmlns:a="http://schemas.openxmlformats.org/drawingml/2006/main" lIns="0" tIns="0" rIns="0" bIns="0" anchor="t">
-            <a:normAutofit fontScale="80702"/>
+            <a:normAutofit fontScale="76702"/>
           </a:bodyPr>
           <a:lstStyle xmlns:a="http://schemas.openxmlformats.org/drawingml/2006/main"/>
           <a:p xmlns:a="http://schemas.openxmlformats.org/drawingml/2006/main">
@@ -11216,7 +11105,7 @@
                 <a:ea typeface="PingFang SC"/>
                 <a:cs typeface="PingFang SC"/>
               </a:rPr>
-              <a:t>这页不是声称发现新机制，而是验证系统能处理真实 AnnData、真实空间坐标和真实表达层状态。</a:t>
+              <a:t>验证重点：系统能从真实 AnnData 读取空间坐标，完成标准分析流程，并生成可复核图表；不把 quick run 过度解释为机制发现。</a:t>
             </a:r>
           </a:p>
         </p:txBody>
@@ -11410,7 +11299,7 @@
           <p:cNvPr id="1" name="">
             <a:extLst xmlns:a="http://schemas.openxmlformats.org/drawingml/2006/main">
               <a:ext uri="{FF2B5EF4-FFF2-40B4-BE49-F238E27FC236}">
-                <a16:creationId xmlns:a16="http://schemas.microsoft.com/office/drawing/2014/main" id="{EABC0170-F86A-4D71-8C4E-9DDEB616EB8C}"/>
+                <a16:creationId xmlns:a16="http://schemas.microsoft.com/office/drawing/2014/main" id="{F08CDAF8-8E38-4D7F-96E6-F673D4259727}"/>
               </a:ext>
             </a:extLst>
           </p:cNvPr>
@@ -11462,7 +11351,7 @@
                 <a:ea typeface="PingFang SC"/>
                 <a:cs typeface="PingFang SC"/>
               </a:rPr>
-              <a:t>READING GUIDE</a:t>
+              <a:t>RESEARCH USE CASES</a:t>
             </a:r>
           </a:p>
         </p:txBody>
@@ -11472,7 +11361,7 @@
           <p:cNvPr id="2" name="">
             <a:extLst xmlns:a="http://schemas.openxmlformats.org/drawingml/2006/main">
               <a:ext uri="{FF2B5EF4-FFF2-40B4-BE49-F238E27FC236}">
-                <a16:creationId xmlns:a16="http://schemas.microsoft.com/office/drawing/2014/main" id="{196A3E13-3DA9-4CDA-A5E9-E586D928DABE}"/>
+                <a16:creationId xmlns:a16="http://schemas.microsoft.com/office/drawing/2014/main" id="{BF8685D2-BFB7-4D4C-B334-1787B177A528}"/>
               </a:ext>
             </a:extLst>
           </p:cNvPr>
@@ -11524,7 +11413,7 @@
                 <a:ea typeface="PingFang SC"/>
                 <a:cs typeface="PingFang SC"/>
               </a:rPr>
-              <a:t>如何读真实数据图</a:t>
+              <a:t>面向真实科研场景的应用</a:t>
             </a:r>
           </a:p>
         </p:txBody>
@@ -11534,27 +11423,27 @@
           <p:cNvPr id="3" name="">
             <a:extLst xmlns:a="http://schemas.openxmlformats.org/drawingml/2006/main">
               <a:ext uri="{FF2B5EF4-FFF2-40B4-BE49-F238E27FC236}">
-                <a16:creationId xmlns:a16="http://schemas.microsoft.com/office/drawing/2014/main" id="{D83787D5-CB9A-433B-A113-80345E5D04BA}"/>
-              </a:ext>
-            </a:extLst>
-          </p:cNvPr>
-          <p:cNvSpPr>
-            <a:spLocks xmlns:a="http://schemas.openxmlformats.org/drawingml/2006/main" noGrp="1"/>
-          </p:cNvSpPr>
-          <p:nvPr/>
-        </p:nvSpPr>
-        <p:spPr>
-          <a:xfrm xmlns:a="http://schemas.openxmlformats.org/drawingml/2006/main">
-            <a:off x="704850" y="1524000"/>
-            <a:ext cx="3619500" cy="2000250"/>
+                <a16:creationId xmlns:a16="http://schemas.microsoft.com/office/drawing/2014/main" id="{816CF460-0C5D-41C2-B427-5231798E33EE}"/>
+              </a:ext>
+            </a:extLst>
+          </p:cNvPr>
+          <p:cNvSpPr>
+            <a:spLocks xmlns:a="http://schemas.openxmlformats.org/drawingml/2006/main" noGrp="1"/>
+          </p:cNvSpPr>
+          <p:nvPr/>
+        </p:nvSpPr>
+        <p:spPr>
+          <a:xfrm xmlns:a="http://schemas.openxmlformats.org/drawingml/2006/main">
+            <a:off x="819150" y="1581150"/>
+            <a:ext cx="2476500" cy="1390650"/>
           </a:xfrm>
           <a:prstGeom xmlns:a="http://schemas.openxmlformats.org/drawingml/2006/main" prst="roundRect">
             <a:avLst>
-              <a:gd name="adj" fmla="val 5714"/>
+              <a:gd name="adj" fmla="val 8219"/>
             </a:avLst>
           </a:prstGeom>
           <a:solidFill xmlns:a="http://schemas.openxmlformats.org/drawingml/2006/main">
-            <a:srgbClr val="F6FAF8"/>
+            <a:srgbClr val="E9F5F2"/>
           </a:solidFill>
           <a:ln xmlns:a="http://schemas.openxmlformats.org/drawingml/2006/main" w="9525">
             <a:solidFill>
@@ -11575,19 +11464,19 @@
           <p:cNvPr id="4" name="">
             <a:extLst xmlns:a="http://schemas.openxmlformats.org/drawingml/2006/main">
               <a:ext uri="{FF2B5EF4-FFF2-40B4-BE49-F238E27FC236}">
-                <a16:creationId xmlns:a16="http://schemas.microsoft.com/office/drawing/2014/main" id="{970BCABE-0986-4E9F-9AE1-F2B476BD9906}"/>
-              </a:ext>
-            </a:extLst>
-          </p:cNvPr>
-          <p:cNvSpPr>
-            <a:spLocks xmlns:a="http://schemas.openxmlformats.org/drawingml/2006/main" noGrp="1"/>
-          </p:cNvSpPr>
-          <p:nvPr/>
-        </p:nvSpPr>
-        <p:spPr>
-          <a:xfrm xmlns:a="http://schemas.openxmlformats.org/drawingml/2006/main">
-            <a:off x="895350" y="1695450"/>
-            <a:ext cx="3238500" cy="285750"/>
+                <a16:creationId xmlns:a16="http://schemas.microsoft.com/office/drawing/2014/main" id="{2C6DB7D3-B959-4592-B562-E53DE718C99E}"/>
+              </a:ext>
+            </a:extLst>
+          </p:cNvPr>
+          <p:cNvSpPr>
+            <a:spLocks xmlns:a="http://schemas.openxmlformats.org/drawingml/2006/main" noGrp="1"/>
+          </p:cNvSpPr>
+          <p:nvPr/>
+        </p:nvSpPr>
+        <p:spPr>
+          <a:xfrm xmlns:a="http://schemas.openxmlformats.org/drawingml/2006/main">
+            <a:off x="1009650" y="1752600"/>
+            <a:ext cx="2095500" cy="285750"/>
           </a:xfrm>
           <a:prstGeom xmlns:a="http://schemas.openxmlformats.org/drawingml/2006/main" prst="rect">
             <a:avLst/>
@@ -11627,7 +11516,7 @@
                 <a:ea typeface="PingFang SC"/>
                 <a:cs typeface="PingFang SC"/>
               </a:rPr>
-              <a:t>Leiden 是什么？</a:t>
+              <a:t>发育生物学</a:t>
             </a:r>
           </a:p>
         </p:txBody>
@@ -11637,19 +11526,19 @@
           <p:cNvPr id="5" name="">
             <a:extLst xmlns:a="http://schemas.openxmlformats.org/drawingml/2006/main">
               <a:ext uri="{FF2B5EF4-FFF2-40B4-BE49-F238E27FC236}">
-                <a16:creationId xmlns:a16="http://schemas.microsoft.com/office/drawing/2014/main" id="{E0D30BF8-71B3-42E8-A443-55FD366C2BAE}"/>
-              </a:ext>
-            </a:extLst>
-          </p:cNvPr>
-          <p:cNvSpPr>
-            <a:spLocks xmlns:a="http://schemas.openxmlformats.org/drawingml/2006/main" noGrp="1"/>
-          </p:cNvSpPr>
-          <p:nvPr/>
-        </p:nvSpPr>
-        <p:spPr>
-          <a:xfrm xmlns:a="http://schemas.openxmlformats.org/drawingml/2006/main">
-            <a:off x="895350" y="2076450"/>
-            <a:ext cx="3238500" cy="1333500"/>
+                <a16:creationId xmlns:a16="http://schemas.microsoft.com/office/drawing/2014/main" id="{FDB3678F-D970-4A5E-BF95-1AE46058DAE3}"/>
+              </a:ext>
+            </a:extLst>
+          </p:cNvPr>
+          <p:cNvSpPr>
+            <a:spLocks xmlns:a="http://schemas.openxmlformats.org/drawingml/2006/main" noGrp="1"/>
+          </p:cNvSpPr>
+          <p:nvPr/>
+        </p:nvSpPr>
+        <p:spPr>
+          <a:xfrm xmlns:a="http://schemas.openxmlformats.org/drawingml/2006/main">
+            <a:off x="1009650" y="2133600"/>
+            <a:ext cx="2095500" cy="723900"/>
           </a:xfrm>
           <a:prstGeom xmlns:a="http://schemas.openxmlformats.org/drawingml/2006/main" prst="rect">
             <a:avLst/>
@@ -11671,7 +11560,7 @@
                 <a:spcPct val="108000"/>
               </a:lnSpc>
               <a:buNone/>
-              <a:defRPr sz="1425" b="0" i="0">
+              <a:defRPr sz="1275" b="0" i="0">
                 <a:solidFill>
                   <a:srgbClr val="475569"/>
                 </a:solidFill>
@@ -11681,7 +11570,7 @@
               </a:defRPr>
             </a:pPr>
             <a:r>
-              <a:rPr sz="1425" b="0" i="0">
+              <a:rPr sz="1275" b="0" i="0">
                 <a:solidFill>
                   <a:srgbClr val="475569"/>
                 </a:solidFill>
@@ -11689,7 +11578,7 @@
                 <a:ea typeface="PingFang SC"/>
                 <a:cs typeface="PingFang SC"/>
               </a:rPr>
-              <a:t>Leiden clustering：把表达谱相似的 spots 分到同一组</a:t>
+              <a:t>比较胚胎阶段空间区域</a:t>
             </a:r>
           </a:p>
           <a:p xmlns:a="http://schemas.openxmlformats.org/drawingml/2006/main">
@@ -11698,7 +11587,7 @@
                 <a:spcPct val="108000"/>
               </a:lnSpc>
               <a:buNone/>
-              <a:defRPr sz="1425" b="0" i="0">
+              <a:defRPr sz="1275" b="0" i="0">
                 <a:solidFill>
                   <a:srgbClr val="475569"/>
                 </a:solidFill>
@@ -11708,7 +11597,7 @@
               </a:defRPr>
             </a:pPr>
             <a:r>
-              <a:rPr sz="1425" b="0" i="0">
+              <a:rPr sz="1275" b="0" i="0">
                 <a:solidFill>
                   <a:srgbClr val="475569"/>
                 </a:solidFill>
@@ -11716,149 +11605,70 @@
                 <a:ea typeface="PingFang SC"/>
                 <a:cs typeface="PingFang SC"/>
               </a:rPr>
-              <a:t>颜色只是 cluster ID，不等于细胞类型</a:t>
-            </a:r>
-          </a:p>
-          <a:p xmlns:a="http://schemas.openxmlformats.org/drawingml/2006/main">
-            <a:pPr algn="l">
-              <a:lnSpc>
-                <a:spcPct val="108000"/>
-              </a:lnSpc>
-              <a:buNone/>
-              <a:defRPr sz="1425" b="0" i="0">
-                <a:solidFill>
-                  <a:srgbClr val="475569"/>
-                </a:solidFill>
-                <a:latin typeface="PingFang SC"/>
-                <a:ea typeface="PingFang SC"/>
-                <a:cs typeface="PingFang SC"/>
-              </a:defRPr>
-            </a:pPr>
-            <a:r>
-              <a:rPr sz="1425" b="0" i="0">
-                <a:solidFill>
-                  <a:srgbClr val="475569"/>
-                </a:solidFill>
-                <a:latin typeface="PingFang SC"/>
-                <a:ea typeface="PingFang SC"/>
-                <a:cs typeface="PingFang SC"/>
-              </a:rPr>
-              <a:t>UMAP 分得清：表达状态可分</a:t>
-            </a:r>
-          </a:p>
-          <a:p xmlns:a="http://schemas.openxmlformats.org/drawingml/2006/main">
-            <a:pPr algn="l">
-              <a:lnSpc>
-                <a:spcPct val="108000"/>
-              </a:lnSpc>
-              <a:buNone/>
-              <a:defRPr sz="1425" b="0" i="0">
-                <a:solidFill>
-                  <a:srgbClr val="475569"/>
-                </a:solidFill>
-                <a:latin typeface="PingFang SC"/>
-                <a:ea typeface="PingFang SC"/>
-                <a:cs typeface="PingFang SC"/>
-              </a:defRPr>
-            </a:pPr>
-            <a:r>
-              <a:rPr sz="1425" b="0" i="0">
-                <a:solidFill>
-                  <a:srgbClr val="475569"/>
-                </a:solidFill>
-                <a:latin typeface="PingFang SC"/>
-                <a:ea typeface="PingFang SC"/>
-                <a:cs typeface="PingFang SC"/>
-              </a:rPr>
-              <a:t>Spatial 混在一起：真实组织结构更复杂</a:t>
+              <a:t>查看 Sox17、T、Mesp1 等基因</a:t>
             </a:r>
           </a:p>
         </p:txBody>
       </p:sp>
-      <p:pic>
-        <p:nvPicPr>
-          <p:cNvPr id="21" name=""/>
-          <p:cNvPicPr>
-            <a:picLocks xmlns:a="http://schemas.openxmlformats.org/drawingml/2006/main" noChangeAspect="1"/>
-          </p:cNvPicPr>
-          <p:nvPr/>
-        </p:nvPicPr>
-        <p:blipFill>
-          <a:blip xmlns:r="http://schemas.openxmlformats.org/officeDocument/2006/relationships" xmlns:a="http://schemas.openxmlformats.org/drawingml/2006/main" r:embed="Rd0be40847c164fb4"/>
-          <a:stretch xmlns:a="http://schemas.openxmlformats.org/drawingml/2006/main"/>
-        </p:blipFill>
-        <p:spPr>
-          <a:xfrm xmlns:a="http://schemas.openxmlformats.org/drawingml/2006/main">
-            <a:off x="4762500" y="1428750"/>
-            <a:ext cx="2714625" cy="2047875"/>
+      <p:sp>
+        <p:nvSpPr>
+          <p:cNvPr id="6" name="">
+            <a:extLst xmlns:a="http://schemas.openxmlformats.org/drawingml/2006/main">
+              <a:ext uri="{FF2B5EF4-FFF2-40B4-BE49-F238E27FC236}">
+                <a16:creationId xmlns:a16="http://schemas.microsoft.com/office/drawing/2014/main" id="{EB2E0C5E-AA34-4D6B-99F3-D46F57911347}"/>
+              </a:ext>
+            </a:extLst>
+          </p:cNvPr>
+          <p:cNvSpPr>
+            <a:spLocks xmlns:a="http://schemas.openxmlformats.org/drawingml/2006/main" noGrp="1"/>
+          </p:cNvSpPr>
+          <p:nvPr/>
+        </p:nvSpPr>
+        <p:spPr>
+          <a:xfrm xmlns:a="http://schemas.openxmlformats.org/drawingml/2006/main">
+            <a:off x="3581400" y="1581150"/>
+            <a:ext cx="2476500" cy="1390650"/>
           </a:xfrm>
           <a:prstGeom xmlns:a="http://schemas.openxmlformats.org/drawingml/2006/main" prst="roundRect">
-            <a:avLst/>
-          </a:prstGeom>
-        </p:spPr>
-      </p:pic>
-      <p:pic>
-        <p:nvPicPr>
-          <p:cNvPr id="22" name=""/>
-          <p:cNvPicPr>
-            <a:picLocks xmlns:a="http://schemas.openxmlformats.org/drawingml/2006/main" noChangeAspect="1"/>
-          </p:cNvP